--- a/PICKPICK_프로젝트현황.pptx
+++ b/PICKPICK_프로젝트현황.pptx
@@ -2073,7 +2073,7 @@
                   <a:srgbClr val="C4B5FD"/>
                 </a:solidFill>
               </a:rPr>
-              <a:t>2026년 4월 13일  |  Phase 1~3 완성 · FCM 푸시 · 관리자 5탭 · 미착수 0개</a:t>
+              <a:t>2026년 4월 13일  |  Firebase 완성 · 지도/주소 수정 · 카카오 키 확인 중</a:t>
             </a:r>
             <a:endParaRPr lang="en-US" sz="1400" dirty="0"/>
           </a:p>
@@ -2288,8 +2288,8 @@
         </p:nvSpPr>
         <p:spPr>
           <a:xfrm>
-            <a:off x="320040" y="960120"/>
-            <a:ext cx="3840480" cy="2423160"/>
+            <a:off x="228600" y="960120"/>
+            <a:ext cx="3749040" cy="2423160"/>
           </a:xfrm>
           <a:prstGeom prst="roundRect">
             <a:avLst>
@@ -2315,8 +2315,8 @@
         </p:nvSpPr>
         <p:spPr>
           <a:xfrm>
-            <a:off x="457200" y="1069848"/>
-            <a:ext cx="3566160" cy="384048"/>
+            <a:off x="338328" y="1069848"/>
+            <a:ext cx="3529584" cy="384048"/>
           </a:xfrm>
           <a:prstGeom prst="roundRect">
             <a:avLst>
@@ -2342,8 +2342,8 @@
         </p:nvSpPr>
         <p:spPr>
           <a:xfrm>
-            <a:off x="457200" y="1069848"/>
-            <a:ext cx="3566160" cy="384048"/>
+            <a:off x="338328" y="1069848"/>
+            <a:ext cx="3529584" cy="384048"/>
           </a:xfrm>
           <a:prstGeom prst="rect">
             <a:avLst/>
@@ -2378,31 +2378,31 @@
         </p:nvSpPr>
         <p:spPr>
           <a:xfrm>
-            <a:off x="521208" y="1554480"/>
-            <a:ext cx="3438144" cy="338328"/>
-          </a:xfrm>
-          <a:prstGeom prst="rect">
-            <a:avLst/>
-          </a:prstGeom>
-          <a:noFill/>
-          <a:ln/>
-        </p:spPr>
-        <p:txBody>
-          <a:bodyPr wrap="square" rtlCol="0" anchor="ctr"/>
-          <a:lstStyle/>
-          <a:p>
-            <a:pPr indent="0" marL="0">
-              <a:buNone/>
-            </a:pPr>
-            <a:r>
-              <a:rPr lang="en-US" sz="1050" dirty="0">
+            <a:off x="393192" y="1554480"/>
+            <a:ext cx="3401568" cy="338328"/>
+          </a:xfrm>
+          <a:prstGeom prst="rect">
+            <a:avLst/>
+          </a:prstGeom>
+          <a:noFill/>
+          <a:ln/>
+        </p:spPr>
+        <p:txBody>
+          <a:bodyPr wrap="square" rtlCol="0" anchor="ctr"/>
+          <a:lstStyle/>
+          <a:p>
+            <a:pPr indent="0" marL="0">
+              <a:buNone/>
+            </a:pPr>
+            <a:r>
+              <a:rPr lang="en-US" sz="1000" dirty="0">
                 <a:solidFill>
                   <a:srgbClr val="1F1235"/>
                 </a:solidFill>
               </a:rPr>
               <a:t>✓  이메일 로그인/회원가입 + 지갑 자동생성</a:t>
             </a:r>
-            <a:endParaRPr lang="en-US" sz="1050" dirty="0"/>
+            <a:endParaRPr lang="en-US" sz="1000" dirty="0"/>
           </a:p>
         </p:txBody>
       </p:sp>
@@ -2414,31 +2414,31 @@
         </p:nvSpPr>
         <p:spPr>
           <a:xfrm>
-            <a:off x="521208" y="1911096"/>
-            <a:ext cx="3438144" cy="338328"/>
-          </a:xfrm>
-          <a:prstGeom prst="rect">
-            <a:avLst/>
-          </a:prstGeom>
-          <a:noFill/>
-          <a:ln/>
-        </p:spPr>
-        <p:txBody>
-          <a:bodyPr wrap="square" rtlCol="0" anchor="ctr"/>
-          <a:lstStyle/>
-          <a:p>
-            <a:pPr indent="0" marL="0">
-              <a:buNone/>
-            </a:pPr>
-            <a:r>
-              <a:rPr lang="en-US" sz="1050" dirty="0">
+            <a:off x="393192" y="1901952"/>
+            <a:ext cx="3401568" cy="338328"/>
+          </a:xfrm>
+          <a:prstGeom prst="rect">
+            <a:avLst/>
+          </a:prstGeom>
+          <a:noFill/>
+          <a:ln/>
+        </p:spPr>
+        <p:txBody>
+          <a:bodyPr wrap="square" rtlCol="0" anchor="ctr"/>
+          <a:lstStyle/>
+          <a:p>
+            <a:pPr indent="0" marL="0">
+              <a:buNone/>
+            </a:pPr>
+            <a:r>
+              <a:rPr lang="en-US" sz="1000" dirty="0">
                 <a:solidFill>
                   <a:srgbClr val="1F1235"/>
                 </a:solidFill>
               </a:rPr>
               <a:t>✓  카카오 소셜 로그인 + OAuth 콜백</a:t>
             </a:r>
-            <a:endParaRPr lang="en-US" sz="1050" dirty="0"/>
+            <a:endParaRPr lang="en-US" sz="1000" dirty="0"/>
           </a:p>
         </p:txBody>
       </p:sp>
@@ -2450,31 +2450,31 @@
         </p:nvSpPr>
         <p:spPr>
           <a:xfrm>
-            <a:off x="521208" y="2267712"/>
-            <a:ext cx="3438144" cy="338328"/>
-          </a:xfrm>
-          <a:prstGeom prst="rect">
-            <a:avLst/>
-          </a:prstGeom>
-          <a:noFill/>
-          <a:ln/>
-        </p:spPr>
-        <p:txBody>
-          <a:bodyPr wrap="square" rtlCol="0" anchor="ctr"/>
-          <a:lstStyle/>
-          <a:p>
-            <a:pPr indent="0" marL="0">
-              <a:buNone/>
-            </a:pPr>
-            <a:r>
-              <a:rPr lang="en-US" sz="1050" dirty="0">
+            <a:off x="393192" y="2249424"/>
+            <a:ext cx="3401568" cy="338328"/>
+          </a:xfrm>
+          <a:prstGeom prst="rect">
+            <a:avLst/>
+          </a:prstGeom>
+          <a:noFill/>
+          <a:ln/>
+        </p:spPr>
+        <p:txBody>
+          <a:bodyPr wrap="square" rtlCol="0" anchor="ctr"/>
+          <a:lstStyle/>
+          <a:p>
+            <a:pPr indent="0" marL="0">
+              <a:buNone/>
+            </a:pPr>
+            <a:r>
+              <a:rPr lang="en-US" sz="1000" dirty="0">
                 <a:solidFill>
                   <a:srgbClr val="1F1235"/>
                 </a:solidFill>
               </a:rPr>
               <a:t>✓  RBAC 미들웨어 (user/owner/rider/admin)</a:t>
             </a:r>
-            <a:endParaRPr lang="en-US" sz="1050" dirty="0"/>
+            <a:endParaRPr lang="en-US" sz="1000" dirty="0"/>
           </a:p>
         </p:txBody>
       </p:sp>
@@ -2486,31 +2486,31 @@
         </p:nvSpPr>
         <p:spPr>
           <a:xfrm>
-            <a:off x="521208" y="2624328"/>
-            <a:ext cx="3438144" cy="338328"/>
-          </a:xfrm>
-          <a:prstGeom prst="rect">
-            <a:avLst/>
-          </a:prstGeom>
-          <a:noFill/>
-          <a:ln/>
-        </p:spPr>
-        <p:txBody>
-          <a:bodyPr wrap="square" rtlCol="0" anchor="ctr"/>
-          <a:lstStyle/>
-          <a:p>
-            <a:pPr indent="0" marL="0">
-              <a:buNone/>
-            </a:pPr>
-            <a:r>
-              <a:rPr lang="en-US" sz="1050" dirty="0">
+            <a:off x="393192" y="2596896"/>
+            <a:ext cx="3401568" cy="338328"/>
+          </a:xfrm>
+          <a:prstGeom prst="rect">
+            <a:avLst/>
+          </a:prstGeom>
+          <a:noFill/>
+          <a:ln/>
+        </p:spPr>
+        <p:txBody>
+          <a:bodyPr wrap="square" rtlCol="0" anchor="ctr"/>
+          <a:lstStyle/>
+          <a:p>
+            <a:pPr indent="0" marL="0">
+              <a:buNone/>
+            </a:pPr>
+            <a:r>
+              <a:rPr lang="en-US" sz="1000" dirty="0">
                 <a:solidFill>
                   <a:srgbClr val="1F1235"/>
                 </a:solidFill>
               </a:rPr>
               <a:t>✓  비밀번호 찾기·재설정 + 검색 히스토리</a:t>
             </a:r>
-            <a:endParaRPr lang="en-US" sz="1050" dirty="0"/>
+            <a:endParaRPr lang="en-US" sz="1000" dirty="0"/>
           </a:p>
         </p:txBody>
       </p:sp>
@@ -2522,31 +2522,31 @@
         </p:nvSpPr>
         <p:spPr>
           <a:xfrm>
-            <a:off x="521208" y="2980944"/>
-            <a:ext cx="3438144" cy="338328"/>
-          </a:xfrm>
-          <a:prstGeom prst="rect">
-            <a:avLst/>
-          </a:prstGeom>
-          <a:noFill/>
-          <a:ln/>
-        </p:spPr>
-        <p:txBody>
-          <a:bodyPr wrap="square" rtlCol="0" anchor="ctr"/>
-          <a:lstStyle/>
-          <a:p>
-            <a:pPr indent="0" marL="0">
-              <a:buNone/>
-            </a:pPr>
-            <a:r>
-              <a:rPr lang="en-US" sz="1050" dirty="0">
+            <a:off x="393192" y="2944368"/>
+            <a:ext cx="3401568" cy="338328"/>
+          </a:xfrm>
+          <a:prstGeom prst="rect">
+            <a:avLst/>
+          </a:prstGeom>
+          <a:noFill/>
+          <a:ln/>
+        </p:spPr>
+        <p:txBody>
+          <a:bodyPr wrap="square" rtlCol="0" anchor="ctr"/>
+          <a:lstStyle/>
+          <a:p>
+            <a:pPr indent="0" marL="0">
+              <a:buNone/>
+            </a:pPr>
+            <a:r>
+              <a:rPr lang="en-US" sz="1000" dirty="0">
                 <a:solidFill>
                   <a:srgbClr val="1F1235"/>
                 </a:solidFill>
               </a:rPr>
               <a:t>✓  프로필 수정 + 다중 배달 주소 + 레퍼럴</a:t>
             </a:r>
-            <a:endParaRPr lang="en-US" sz="1050" dirty="0"/>
+            <a:endParaRPr lang="en-US" sz="1000" dirty="0"/>
           </a:p>
         </p:txBody>
       </p:sp>
@@ -2558,8 +2558,8 @@
         </p:nvSpPr>
         <p:spPr>
           <a:xfrm>
-            <a:off x="4389120" y="960120"/>
-            <a:ext cx="3840480" cy="2423160"/>
+            <a:off x="4160520" y="960120"/>
+            <a:ext cx="3749040" cy="2423160"/>
           </a:xfrm>
           <a:prstGeom prst="roundRect">
             <a:avLst>
@@ -2585,8 +2585,8 @@
         </p:nvSpPr>
         <p:spPr>
           <a:xfrm>
-            <a:off x="4526280" y="1069848"/>
-            <a:ext cx="3566160" cy="384048"/>
+            <a:off x="4270248" y="1069848"/>
+            <a:ext cx="3529584" cy="384048"/>
           </a:xfrm>
           <a:prstGeom prst="roundRect">
             <a:avLst>
@@ -2612,8 +2612,8 @@
         </p:nvSpPr>
         <p:spPr>
           <a:xfrm>
-            <a:off x="4526280" y="1069848"/>
-            <a:ext cx="3566160" cy="384048"/>
+            <a:off x="4270248" y="1069848"/>
+            <a:ext cx="3529584" cy="384048"/>
           </a:xfrm>
           <a:prstGeom prst="rect">
             <a:avLst/>
@@ -2648,31 +2648,31 @@
         </p:nvSpPr>
         <p:spPr>
           <a:xfrm>
-            <a:off x="4590288" y="1554480"/>
-            <a:ext cx="3438144" cy="338328"/>
-          </a:xfrm>
-          <a:prstGeom prst="rect">
-            <a:avLst/>
-          </a:prstGeom>
-          <a:noFill/>
-          <a:ln/>
-        </p:spPr>
-        <p:txBody>
-          <a:bodyPr wrap="square" rtlCol="0" anchor="ctr"/>
-          <a:lstStyle/>
-          <a:p>
-            <a:pPr indent="0" marL="0">
-              <a:buNone/>
-            </a:pPr>
-            <a:r>
-              <a:rPr lang="en-US" sz="1050" dirty="0">
+            <a:off x="4325112" y="1554480"/>
+            <a:ext cx="3401568" cy="338328"/>
+          </a:xfrm>
+          <a:prstGeom prst="rect">
+            <a:avLst/>
+          </a:prstGeom>
+          <a:noFill/>
+          <a:ln/>
+        </p:spPr>
+        <p:txBody>
+          <a:bodyPr wrap="square" rtlCol="0" anchor="ctr"/>
+          <a:lstStyle/>
+          <a:p>
+            <a:pPr indent="0" marL="0">
+              <a:buNone/>
+            </a:pPr>
+            <a:r>
+              <a:rPr lang="en-US" sz="1000" dirty="0">
                 <a:solidFill>
                   <a:srgbClr val="1F1235"/>
                 </a:solidFill>
               </a:rPr>
               <a:t>✓  홈: 카테고리·검색(GIN)·인기가게·광고</a:t>
             </a:r>
-            <a:endParaRPr lang="en-US" sz="1050" dirty="0"/>
+            <a:endParaRPr lang="en-US" sz="1000" dirty="0"/>
           </a:p>
         </p:txBody>
       </p:sp>
@@ -2684,31 +2684,31 @@
         </p:nvSpPr>
         <p:spPr>
           <a:xfrm>
-            <a:off x="4590288" y="1911096"/>
-            <a:ext cx="3438144" cy="338328"/>
-          </a:xfrm>
-          <a:prstGeom prst="rect">
-            <a:avLst/>
-          </a:prstGeom>
-          <a:noFill/>
-          <a:ln/>
-        </p:spPr>
-        <p:txBody>
-          <a:bodyPr wrap="square" rtlCol="0" anchor="ctr"/>
-          <a:lstStyle/>
-          <a:p>
-            <a:pPr indent="0" marL="0">
-              <a:buNone/>
-            </a:pPr>
-            <a:r>
-              <a:rPr lang="en-US" sz="1050" dirty="0">
+            <a:off x="4325112" y="1901952"/>
+            <a:ext cx="3401568" cy="338328"/>
+          </a:xfrm>
+          <a:prstGeom prst="rect">
+            <a:avLst/>
+          </a:prstGeom>
+          <a:noFill/>
+          <a:ln/>
+        </p:spPr>
+        <p:txBody>
+          <a:bodyPr wrap="square" rtlCol="0" anchor="ctr"/>
+          <a:lstStyle/>
+          <a:p>
+            <a:pPr indent="0" marL="0">
+              <a:buNone/>
+            </a:pPr>
+            <a:r>
+              <a:rPr lang="en-US" sz="1000" dirty="0">
                 <a:solidFill>
                   <a:srgbClr val="1F1235"/>
                 </a:solidFill>
               </a:rPr>
               <a:t>✓  지갑: 실잔액 + 충전 + PICK 보내기</a:t>
             </a:r>
-            <a:endParaRPr lang="en-US" sz="1050" dirty="0"/>
+            <a:endParaRPr lang="en-US" sz="1000" dirty="0"/>
           </a:p>
         </p:txBody>
       </p:sp>
@@ -2720,31 +2720,31 @@
         </p:nvSpPr>
         <p:spPr>
           <a:xfrm>
-            <a:off x="4590288" y="2267712"/>
-            <a:ext cx="3438144" cy="338328"/>
-          </a:xfrm>
-          <a:prstGeom prst="rect">
-            <a:avLst/>
-          </a:prstGeom>
-          <a:noFill/>
-          <a:ln/>
-        </p:spPr>
-        <p:txBody>
-          <a:bodyPr wrap="square" rtlCol="0" anchor="ctr"/>
-          <a:lstStyle/>
-          <a:p>
-            <a:pPr indent="0" marL="0">
-              <a:buNone/>
-            </a:pPr>
-            <a:r>
-              <a:rPr lang="en-US" sz="1050" dirty="0">
+            <a:off x="4325112" y="2249424"/>
+            <a:ext cx="3401568" cy="338328"/>
+          </a:xfrm>
+          <a:prstGeom prst="rect">
+            <a:avLst/>
+          </a:prstGeom>
+          <a:noFill/>
+          <a:ln/>
+        </p:spPr>
+        <p:txBody>
+          <a:bodyPr wrap="square" rtlCol="0" anchor="ctr"/>
+          <a:lstStyle/>
+          <a:p>
+            <a:pPr indent="0" marL="0">
+              <a:buNone/>
+            </a:pPr>
+            <a:r>
+              <a:rPr lang="en-US" sz="1000" dirty="0">
                 <a:solidFill>
                   <a:srgbClr val="1F1235"/>
                 </a:solidFill>
               </a:rPr>
               <a:t>✓  PICK주문: Realtime 추적 + 상세 + 재주문</a:t>
             </a:r>
-            <a:endParaRPr lang="en-US" sz="1050" dirty="0"/>
+            <a:endParaRPr lang="en-US" sz="1000" dirty="0"/>
           </a:p>
         </p:txBody>
       </p:sp>
@@ -2756,31 +2756,31 @@
         </p:nvSpPr>
         <p:spPr>
           <a:xfrm>
-            <a:off x="4590288" y="2624328"/>
-            <a:ext cx="3438144" cy="338328"/>
-          </a:xfrm>
-          <a:prstGeom prst="rect">
-            <a:avLst/>
-          </a:prstGeom>
-          <a:noFill/>
-          <a:ln/>
-        </p:spPr>
-        <p:txBody>
-          <a:bodyPr wrap="square" rtlCol="0" anchor="ctr"/>
-          <a:lstStyle/>
-          <a:p>
-            <a:pPr indent="0" marL="0">
-              <a:buNone/>
-            </a:pPr>
-            <a:r>
-              <a:rPr lang="en-US" sz="1050" dirty="0">
+            <a:off x="4325112" y="2596896"/>
+            <a:ext cx="3401568" cy="338328"/>
+          </a:xfrm>
+          <a:prstGeom prst="rect">
+            <a:avLst/>
+          </a:prstGeom>
+          <a:noFill/>
+          <a:ln/>
+        </p:spPr>
+        <p:txBody>
+          <a:bodyPr wrap="square" rtlCol="0" anchor="ctr"/>
+          <a:lstStyle/>
+          <a:p>
+            <a:pPr indent="0" marL="0">
+              <a:buNone/>
+            </a:pPr>
+            <a:r>
+              <a:rPr lang="en-US" sz="1000" dirty="0">
                 <a:solidFill>
                   <a:srgbClr val="1F1235"/>
                 </a:solidFill>
               </a:rPr>
               <a:t>✓  알림 드로어 + 딥링크 + 자동 트리거</a:t>
             </a:r>
-            <a:endParaRPr lang="en-US" sz="1050" dirty="0"/>
+            <a:endParaRPr lang="en-US" sz="1000" dirty="0"/>
           </a:p>
         </p:txBody>
       </p:sp>
@@ -2792,31 +2792,31 @@
         </p:nvSpPr>
         <p:spPr>
           <a:xfrm>
-            <a:off x="4590288" y="2980944"/>
-            <a:ext cx="3438144" cy="338328"/>
-          </a:xfrm>
-          <a:prstGeom prst="rect">
-            <a:avLst/>
-          </a:prstGeom>
-          <a:noFill/>
-          <a:ln/>
-        </p:spPr>
-        <p:txBody>
-          <a:bodyPr wrap="square" rtlCol="0" anchor="ctr"/>
-          <a:lstStyle/>
-          <a:p>
-            <a:pPr indent="0" marL="0">
-              <a:buNone/>
-            </a:pPr>
-            <a:r>
-              <a:rPr lang="en-US" sz="1050" dirty="0">
+            <a:off x="4325112" y="2944368"/>
+            <a:ext cx="3401568" cy="338328"/>
+          </a:xfrm>
+          <a:prstGeom prst="rect">
+            <a:avLst/>
+          </a:prstGeom>
+          <a:noFill/>
+          <a:ln/>
+        </p:spPr>
+        <p:txBody>
+          <a:bodyPr wrap="square" rtlCol="0" anchor="ctr"/>
+          <a:lstStyle/>
+          <a:p>
+            <a:pPr indent="0" marL="0">
+              <a:buNone/>
+            </a:pPr>
+            <a:r>
+              <a:rPr lang="en-US" sz="1000" dirty="0">
                 <a:solidFill>
                   <a:srgbClr val="1F1235"/>
                 </a:solidFill>
               </a:rPr>
               <a:t>✓  주간 영업시간 아코디언 + 실사 이미지</a:t>
             </a:r>
-            <a:endParaRPr lang="en-US" sz="1050" dirty="0"/>
+            <a:endParaRPr lang="en-US" sz="1000" dirty="0"/>
           </a:p>
         </p:txBody>
       </p:sp>
@@ -2828,8 +2828,8 @@
         </p:nvSpPr>
         <p:spPr>
           <a:xfrm>
-            <a:off x="8458200" y="3566160"/>
-            <a:ext cx="3840480" cy="2423160"/>
+            <a:off x="8092440" y="960120"/>
+            <a:ext cx="3749040" cy="2423160"/>
           </a:xfrm>
           <a:prstGeom prst="roundRect">
             <a:avLst>
@@ -2855,8 +2855,8 @@
         </p:nvSpPr>
         <p:spPr>
           <a:xfrm>
-            <a:off x="8595360" y="3675888"/>
-            <a:ext cx="3566160" cy="384048"/>
+            <a:off x="8202168" y="1069848"/>
+            <a:ext cx="3529584" cy="384048"/>
           </a:xfrm>
           <a:prstGeom prst="roundRect">
             <a:avLst>
@@ -2882,8 +2882,8 @@
         </p:nvSpPr>
         <p:spPr>
           <a:xfrm>
-            <a:off x="8595360" y="3675888"/>
-            <a:ext cx="3566160" cy="384048"/>
+            <a:off x="8202168" y="1069848"/>
+            <a:ext cx="3529584" cy="384048"/>
           </a:xfrm>
           <a:prstGeom prst="rect">
             <a:avLst/>
@@ -2918,31 +2918,31 @@
         </p:nvSpPr>
         <p:spPr>
           <a:xfrm>
-            <a:off x="8659368" y="4160520"/>
-            <a:ext cx="3438144" cy="338328"/>
-          </a:xfrm>
-          <a:prstGeom prst="rect">
-            <a:avLst/>
-          </a:prstGeom>
-          <a:noFill/>
-          <a:ln/>
-        </p:spPr>
-        <p:txBody>
-          <a:bodyPr wrap="square" rtlCol="0" anchor="ctr"/>
-          <a:lstStyle/>
-          <a:p>
-            <a:pPr indent="0" marL="0">
-              <a:buNone/>
-            </a:pPr>
-            <a:r>
-              <a:rPr lang="en-US" sz="1050" dirty="0">
+            <a:off x="8257032" y="1554480"/>
+            <a:ext cx="3401568" cy="338328"/>
+          </a:xfrm>
+          <a:prstGeom prst="rect">
+            <a:avLst/>
+          </a:prstGeom>
+          <a:noFill/>
+          <a:ln/>
+        </p:spPr>
+        <p:txBody>
+          <a:bodyPr wrap="square" rtlCol="0" anchor="ctr"/>
+          <a:lstStyle/>
+          <a:p>
+            <a:pPr indent="0" marL="0">
+              <a:buNone/>
+            </a:pPr>
+            <a:r>
+              <a:rPr lang="en-US" sz="1000" dirty="0">
                 <a:solidFill>
                   <a:srgbClr val="1F1235"/>
                 </a:solidFill>
               </a:rPr>
               <a:t>✓  가맹점 목록 (카테고리/전문검색 필터)</a:t>
             </a:r>
-            <a:endParaRPr lang="en-US" sz="1050" dirty="0"/>
+            <a:endParaRPr lang="en-US" sz="1000" dirty="0"/>
           </a:p>
         </p:txBody>
       </p:sp>
@@ -2954,31 +2954,31 @@
         </p:nvSpPr>
         <p:spPr>
           <a:xfrm>
-            <a:off x="8659368" y="4517136"/>
-            <a:ext cx="3438144" cy="338328"/>
-          </a:xfrm>
-          <a:prstGeom prst="rect">
-            <a:avLst/>
-          </a:prstGeom>
-          <a:noFill/>
-          <a:ln/>
-        </p:spPr>
-        <p:txBody>
-          <a:bodyPr wrap="square" rtlCol="0" anchor="ctr"/>
-          <a:lstStyle/>
-          <a:p>
-            <a:pPr indent="0" marL="0">
-              <a:buNone/>
-            </a:pPr>
-            <a:r>
-              <a:rPr lang="en-US" sz="1050" dirty="0">
+            <a:off x="8257032" y="1901952"/>
+            <a:ext cx="3401568" cy="338328"/>
+          </a:xfrm>
+          <a:prstGeom prst="rect">
+            <a:avLst/>
+          </a:prstGeom>
+          <a:noFill/>
+          <a:ln/>
+        </p:spPr>
+        <p:txBody>
+          <a:bodyPr wrap="square" rtlCol="0" anchor="ctr"/>
+          <a:lstStyle/>
+          <a:p>
+            <a:pPr indent="0" marL="0">
+              <a:buNone/>
+            </a:pPr>
+            <a:r>
+              <a:rPr lang="en-US" sz="1000" dirty="0">
                 <a:solidFill>
                   <a:srgbClr val="1F1235"/>
                 </a:solidFill>
               </a:rPr>
               <a:t>✓  가맹점 상세 + 메뉴 옵션 + 리뷰(이미지)</a:t>
             </a:r>
-            <a:endParaRPr lang="en-US" sz="1050" dirty="0"/>
+            <a:endParaRPr lang="en-US" sz="1000" dirty="0"/>
           </a:p>
         </p:txBody>
       </p:sp>
@@ -2990,31 +2990,31 @@
         </p:nvSpPr>
         <p:spPr>
           <a:xfrm>
-            <a:off x="8659368" y="4873752"/>
-            <a:ext cx="3438144" cy="338328"/>
-          </a:xfrm>
-          <a:prstGeom prst="rect">
-            <a:avLst/>
-          </a:prstGeom>
-          <a:noFill/>
-          <a:ln/>
-        </p:spPr>
-        <p:txBody>
-          <a:bodyPr wrap="square" rtlCol="0" anchor="ctr"/>
-          <a:lstStyle/>
-          <a:p>
-            <a:pPr indent="0" marL="0">
-              <a:buNone/>
-            </a:pPr>
-            <a:r>
-              <a:rPr lang="en-US" sz="1050" dirty="0">
+            <a:off x="8257032" y="2249424"/>
+            <a:ext cx="3401568" cy="338328"/>
+          </a:xfrm>
+          <a:prstGeom prst="rect">
+            <a:avLst/>
+          </a:prstGeom>
+          <a:noFill/>
+          <a:ln/>
+        </p:spPr>
+        <p:txBody>
+          <a:bodyPr wrap="square" rtlCol="0" anchor="ctr"/>
+          <a:lstStyle/>
+          <a:p>
+            <a:pPr indent="0" marL="0">
+              <a:buNone/>
+            </a:pPr>
+            <a:r>
+              <a:rPr lang="en-US" sz="1000" dirty="0">
                 <a:solidFill>
                   <a:srgbClr val="1F1235"/>
                 </a:solidFill>
               </a:rPr>
               <a:t>✓  쿠폰(3종) + PICK 할인 + 배달 메모</a:t>
             </a:r>
-            <a:endParaRPr lang="en-US" sz="1050" dirty="0"/>
+            <a:endParaRPr lang="en-US" sz="1000" dirty="0"/>
           </a:p>
         </p:txBody>
       </p:sp>
@@ -3026,31 +3026,31 @@
         </p:nvSpPr>
         <p:spPr>
           <a:xfrm>
-            <a:off x="8659368" y="5230368"/>
-            <a:ext cx="3438144" cy="338328"/>
-          </a:xfrm>
-          <a:prstGeom prst="rect">
-            <a:avLst/>
-          </a:prstGeom>
-          <a:noFill/>
-          <a:ln/>
-        </p:spPr>
-        <p:txBody>
-          <a:bodyPr wrap="square" rtlCol="0" anchor="ctr"/>
-          <a:lstStyle/>
-          <a:p>
-            <a:pPr indent="0" marL="0">
-              <a:buNone/>
-            </a:pPr>
-            <a:r>
-              <a:rPr lang="en-US" sz="1050" dirty="0">
+            <a:off x="8257032" y="2596896"/>
+            <a:ext cx="3401568" cy="338328"/>
+          </a:xfrm>
+          <a:prstGeom prst="rect">
+            <a:avLst/>
+          </a:prstGeom>
+          <a:noFill/>
+          <a:ln/>
+        </p:spPr>
+        <p:txBody>
+          <a:bodyPr wrap="square" rtlCol="0" anchor="ctr"/>
+          <a:lstStyle/>
+          <a:p>
+            <a:pPr indent="0" marL="0">
+              <a:buNone/>
+            </a:pPr>
+            <a:r>
+              <a:rPr lang="en-US" sz="1000" dirty="0">
                 <a:solidFill>
                   <a:srgbClr val="1F1235"/>
                 </a:solidFill>
               </a:rPr>
               <a:t>✓  PICK 결제 + 토스페이먼츠 카드 결제</a:t>
             </a:r>
-            <a:endParaRPr lang="en-US" sz="1050" dirty="0"/>
+            <a:endParaRPr lang="en-US" sz="1000" dirty="0"/>
           </a:p>
         </p:txBody>
       </p:sp>
@@ -3062,31 +3062,31 @@
         </p:nvSpPr>
         <p:spPr>
           <a:xfrm>
-            <a:off x="8659368" y="5586984"/>
-            <a:ext cx="3438144" cy="338328"/>
-          </a:xfrm>
-          <a:prstGeom prst="rect">
-            <a:avLst/>
-          </a:prstGeom>
-          <a:noFill/>
-          <a:ln/>
-        </p:spPr>
-        <p:txBody>
-          <a:bodyPr wrap="square" rtlCol="0" anchor="ctr"/>
-          <a:lstStyle/>
-          <a:p>
-            <a:pPr indent="0" marL="0">
-              <a:buNone/>
-            </a:pPr>
-            <a:r>
-              <a:rPr lang="en-US" sz="1050" dirty="0">
+            <a:off x="8257032" y="2944368"/>
+            <a:ext cx="3401568" cy="338328"/>
+          </a:xfrm>
+          <a:prstGeom prst="rect">
+            <a:avLst/>
+          </a:prstGeom>
+          <a:noFill/>
+          <a:ln/>
+        </p:spPr>
+        <p:txBody>
+          <a:bodyPr wrap="square" rtlCol="0" anchor="ctr"/>
+          <a:lstStyle/>
+          <a:p>
+            <a:pPr indent="0" marL="0">
+              <a:buNone/>
+            </a:pPr>
+            <a:r>
+              <a:rPr lang="en-US" sz="1000" dirty="0">
                 <a:solidFill>
                   <a:srgbClr val="1F1235"/>
                 </a:solidFill>
               </a:rPr>
               <a:t>✓  주문 생성 → PICK 차감 → 완료 적립</a:t>
             </a:r>
-            <a:endParaRPr lang="en-US" sz="1050" dirty="0"/>
+            <a:endParaRPr lang="en-US" sz="1000" dirty="0"/>
           </a:p>
         </p:txBody>
       </p:sp>
@@ -3098,8 +3098,8 @@
         </p:nvSpPr>
         <p:spPr>
           <a:xfrm>
-            <a:off x="320040" y="3566160"/>
-            <a:ext cx="3840480" cy="2423160"/>
+            <a:off x="228600" y="3566160"/>
+            <a:ext cx="3749040" cy="2423160"/>
           </a:xfrm>
           <a:prstGeom prst="roundRect">
             <a:avLst>
@@ -3125,8 +3125,8 @@
         </p:nvSpPr>
         <p:spPr>
           <a:xfrm>
-            <a:off x="457200" y="3675888"/>
-            <a:ext cx="3566160" cy="384048"/>
+            <a:off x="338328" y="3675888"/>
+            <a:ext cx="3529584" cy="384048"/>
           </a:xfrm>
           <a:prstGeom prst="roundRect">
             <a:avLst>
@@ -3152,8 +3152,8 @@
         </p:nvSpPr>
         <p:spPr>
           <a:xfrm>
-            <a:off x="457200" y="3675888"/>
-            <a:ext cx="3566160" cy="384048"/>
+            <a:off x="338328" y="3675888"/>
+            <a:ext cx="3529584" cy="384048"/>
           </a:xfrm>
           <a:prstGeom prst="rect">
             <a:avLst/>
@@ -3188,31 +3188,31 @@
         </p:nvSpPr>
         <p:spPr>
           <a:xfrm>
-            <a:off x="521208" y="4160520"/>
-            <a:ext cx="3438144" cy="338328"/>
-          </a:xfrm>
-          <a:prstGeom prst="rect">
-            <a:avLst/>
-          </a:prstGeom>
-          <a:noFill/>
-          <a:ln/>
-        </p:spPr>
-        <p:txBody>
-          <a:bodyPr wrap="square" rtlCol="0" anchor="ctr"/>
-          <a:lstStyle/>
-          <a:p>
-            <a:pPr indent="0" marL="0">
-              <a:buNone/>
-            </a:pPr>
-            <a:r>
-              <a:rPr lang="en-US" sz="1050" dirty="0">
+            <a:off x="393192" y="4160520"/>
+            <a:ext cx="3401568" cy="338328"/>
+          </a:xfrm>
+          <a:prstGeom prst="rect">
+            <a:avLst/>
+          </a:prstGeom>
+          <a:noFill/>
+          <a:ln/>
+        </p:spPr>
+        <p:txBody>
+          <a:bodyPr wrap="square" rtlCol="0" anchor="ctr"/>
+          <a:lstStyle/>
+          <a:p>
+            <a:pPr indent="0" marL="0">
+              <a:buNone/>
+            </a:pPr>
+            <a:r>
+              <a:rPr lang="en-US" sz="1000" dirty="0">
                 <a:solidFill>
                   <a:srgbClr val="1F1235"/>
                 </a:solidFill>
               </a:rPr>
               <a:t>✓  가게 등록·설정·쿠폰 관리·주간 영업시간</a:t>
             </a:r>
-            <a:endParaRPr lang="en-US" sz="1050" dirty="0"/>
+            <a:endParaRPr lang="en-US" sz="1000" dirty="0"/>
           </a:p>
         </p:txBody>
       </p:sp>
@@ -3224,31 +3224,31 @@
         </p:nvSpPr>
         <p:spPr>
           <a:xfrm>
-            <a:off x="521208" y="4517136"/>
-            <a:ext cx="3438144" cy="338328"/>
-          </a:xfrm>
-          <a:prstGeom prst="rect">
-            <a:avLst/>
-          </a:prstGeom>
-          <a:noFill/>
-          <a:ln/>
-        </p:spPr>
-        <p:txBody>
-          <a:bodyPr wrap="square" rtlCol="0" anchor="ctr"/>
-          <a:lstStyle/>
-          <a:p>
-            <a:pPr indent="0" marL="0">
-              <a:buNone/>
-            </a:pPr>
-            <a:r>
-              <a:rPr lang="en-US" sz="1050" dirty="0">
+            <a:off x="393192" y="4507992"/>
+            <a:ext cx="3401568" cy="338328"/>
+          </a:xfrm>
+          <a:prstGeom prst="rect">
+            <a:avLst/>
+          </a:prstGeom>
+          <a:noFill/>
+          <a:ln/>
+        </p:spPr>
+        <p:txBody>
+          <a:bodyPr wrap="square" rtlCol="0" anchor="ctr"/>
+          <a:lstStyle/>
+          <a:p>
+            <a:pPr indent="0" marL="0">
+              <a:buNone/>
+            </a:pPr>
+            <a:r>
+              <a:rPr lang="en-US" sz="1000" dirty="0">
                 <a:solidFill>
                   <a:srgbClr val="1F1235"/>
                 </a:solidFill>
               </a:rPr>
               <a:t>✓  주문 관리: 수락 ETA + 거절 확인 팝업</a:t>
             </a:r>
-            <a:endParaRPr lang="en-US" sz="1050" dirty="0"/>
+            <a:endParaRPr lang="en-US" sz="1000" dirty="0"/>
           </a:p>
         </p:txBody>
       </p:sp>
@@ -3260,31 +3260,31 @@
         </p:nvSpPr>
         <p:spPr>
           <a:xfrm>
-            <a:off x="521208" y="4873752"/>
-            <a:ext cx="3438144" cy="338328"/>
-          </a:xfrm>
-          <a:prstGeom prst="rect">
-            <a:avLst/>
-          </a:prstGeom>
-          <a:noFill/>
-          <a:ln/>
-        </p:spPr>
-        <p:txBody>
-          <a:bodyPr wrap="square" rtlCol="0" anchor="ctr"/>
-          <a:lstStyle/>
-          <a:p>
-            <a:pPr indent="0" marL="0">
-              <a:buNone/>
-            </a:pPr>
-            <a:r>
-              <a:rPr lang="en-US" sz="1050" dirty="0">
+            <a:off x="393192" y="4855464"/>
+            <a:ext cx="3401568" cy="338328"/>
+          </a:xfrm>
+          <a:prstGeom prst="rect">
+            <a:avLst/>
+          </a:prstGeom>
+          <a:noFill/>
+          <a:ln/>
+        </p:spPr>
+        <p:txBody>
+          <a:bodyPr wrap="square" rtlCol="0" anchor="ctr"/>
+          <a:lstStyle/>
+          <a:p>
+            <a:pPr indent="0" marL="0">
+              <a:buNone/>
+            </a:pPr>
+            <a:r>
+              <a:rPr lang="en-US" sz="1000" dirty="0">
                 <a:solidFill>
                   <a:srgbClr val="1F1235"/>
                 </a:solidFill>
               </a:rPr>
               <a:t>✓  메뉴 옵션 그룹/옵션 CRUD UI</a:t>
             </a:r>
-            <a:endParaRPr lang="en-US" sz="1050" dirty="0"/>
+            <a:endParaRPr lang="en-US" sz="1000" dirty="0"/>
           </a:p>
         </p:txBody>
       </p:sp>
@@ -3296,31 +3296,31 @@
         </p:nvSpPr>
         <p:spPr>
           <a:xfrm>
-            <a:off x="521208" y="5230368"/>
-            <a:ext cx="3438144" cy="338328"/>
-          </a:xfrm>
-          <a:prstGeom prst="rect">
-            <a:avLst/>
-          </a:prstGeom>
-          <a:noFill/>
-          <a:ln/>
-        </p:spPr>
-        <p:txBody>
-          <a:bodyPr wrap="square" rtlCol="0" anchor="ctr"/>
-          <a:lstStyle/>
-          <a:p>
-            <a:pPr indent="0" marL="0">
-              <a:buNone/>
-            </a:pPr>
-            <a:r>
-              <a:rPr lang="en-US" sz="1050" dirty="0">
+            <a:off x="393192" y="5202936"/>
+            <a:ext cx="3401568" cy="338328"/>
+          </a:xfrm>
+          <a:prstGeom prst="rect">
+            <a:avLst/>
+          </a:prstGeom>
+          <a:noFill/>
+          <a:ln/>
+        </p:spPr>
+        <p:txBody>
+          <a:bodyPr wrap="square" rtlCol="0" anchor="ctr"/>
+          <a:lstStyle/>
+          <a:p>
+            <a:pPr indent="0" marL="0">
+              <a:buNone/>
+            </a:pPr>
+            <a:r>
+              <a:rPr lang="en-US" sz="1000" dirty="0">
                 <a:solidFill>
                   <a:srgbClr val="1F1235"/>
                 </a:solidFill>
               </a:rPr>
               <a:t>✓  매출 통계 대시보드 + 주간 차트</a:t>
             </a:r>
-            <a:endParaRPr lang="en-US" sz="1050" dirty="0"/>
+            <a:endParaRPr lang="en-US" sz="1000" dirty="0"/>
           </a:p>
         </p:txBody>
       </p:sp>
@@ -3332,31 +3332,31 @@
         </p:nvSpPr>
         <p:spPr>
           <a:xfrm>
-            <a:off x="521208" y="5586984"/>
-            <a:ext cx="3438144" cy="338328"/>
-          </a:xfrm>
-          <a:prstGeom prst="rect">
-            <a:avLst/>
-          </a:prstGeom>
-          <a:noFill/>
-          <a:ln/>
-        </p:spPr>
-        <p:txBody>
-          <a:bodyPr wrap="square" rtlCol="0" anchor="ctr"/>
-          <a:lstStyle/>
-          <a:p>
-            <a:pPr indent="0" marL="0">
-              <a:buNone/>
-            </a:pPr>
-            <a:r>
-              <a:rPr lang="en-US" sz="1050" dirty="0">
+            <a:off x="393192" y="5550408"/>
+            <a:ext cx="3401568" cy="338328"/>
+          </a:xfrm>
+          <a:prstGeom prst="rect">
+            <a:avLst/>
+          </a:prstGeom>
+          <a:noFill/>
+          <a:ln/>
+        </p:spPr>
+        <p:txBody>
+          <a:bodyPr wrap="square" rtlCol="0" anchor="ctr"/>
+          <a:lstStyle/>
+          <a:p>
+            <a:pPr indent="0" marL="0">
+              <a:buNone/>
+            </a:pPr>
+            <a:r>
+              <a:rPr lang="en-US" sz="1000" dirty="0">
                 <a:solidFill>
                   <a:srgbClr val="1F1235"/>
                 </a:solidFill>
               </a:rPr>
               <a:t>✓  신규 주문 소리 알림 (Web Audio API)</a:t>
             </a:r>
-            <a:endParaRPr lang="en-US" sz="1050" dirty="0"/>
+            <a:endParaRPr lang="en-US" sz="1000" dirty="0"/>
           </a:p>
         </p:txBody>
       </p:sp>
@@ -3368,8 +3368,8 @@
         </p:nvSpPr>
         <p:spPr>
           <a:xfrm>
-            <a:off x="4389120" y="6172200"/>
-            <a:ext cx="3840480" cy="2423160"/>
+            <a:off x="4160520" y="3566160"/>
+            <a:ext cx="3749040" cy="2423160"/>
           </a:xfrm>
           <a:prstGeom prst="roundRect">
             <a:avLst>
@@ -3395,8 +3395,8 @@
         </p:nvSpPr>
         <p:spPr>
           <a:xfrm>
-            <a:off x="4526280" y="6281928"/>
-            <a:ext cx="3566160" cy="384048"/>
+            <a:off x="4270248" y="3675888"/>
+            <a:ext cx="3529584" cy="384048"/>
           </a:xfrm>
           <a:prstGeom prst="roundRect">
             <a:avLst>
@@ -3422,8 +3422,8 @@
         </p:nvSpPr>
         <p:spPr>
           <a:xfrm>
-            <a:off x="4526280" y="6281928"/>
-            <a:ext cx="3566160" cy="384048"/>
+            <a:off x="4270248" y="3675888"/>
+            <a:ext cx="3529584" cy="384048"/>
           </a:xfrm>
           <a:prstGeom prst="rect">
             <a:avLst/>
@@ -3458,31 +3458,31 @@
         </p:nvSpPr>
         <p:spPr>
           <a:xfrm>
-            <a:off x="4590288" y="6766560"/>
-            <a:ext cx="3438144" cy="338328"/>
-          </a:xfrm>
-          <a:prstGeom prst="rect">
-            <a:avLst/>
-          </a:prstGeom>
-          <a:noFill/>
-          <a:ln/>
-        </p:spPr>
-        <p:txBody>
-          <a:bodyPr wrap="square" rtlCol="0" anchor="ctr"/>
-          <a:lstStyle/>
-          <a:p>
-            <a:pPr indent="0" marL="0">
-              <a:buNone/>
-            </a:pPr>
-            <a:r>
-              <a:rPr lang="en-US" sz="1050" dirty="0">
+            <a:off x="4325112" y="4160520"/>
+            <a:ext cx="3401568" cy="338328"/>
+          </a:xfrm>
+          <a:prstGeom prst="rect">
+            <a:avLst/>
+          </a:prstGeom>
+          <a:noFill/>
+          <a:ln/>
+        </p:spPr>
+        <p:txBody>
+          <a:bodyPr wrap="square" rtlCol="0" anchor="ctr"/>
+          <a:lstStyle/>
+          <a:p>
+            <a:pPr indent="0" marL="0">
+              <a:buNone/>
+            </a:pPr>
+            <a:r>
+              <a:rPr lang="en-US" sz="1000" dirty="0">
                 <a:solidFill>
                   <a:srgbClr val="1F1235"/>
                 </a:solidFill>
               </a:rPr>
               <a:t>✓  배달 수락 → PICK 자동 지급 + 위치 공유</a:t>
             </a:r>
-            <a:endParaRPr lang="en-US" sz="1050" dirty="0"/>
+            <a:endParaRPr lang="en-US" sz="1000" dirty="0"/>
           </a:p>
         </p:txBody>
       </p:sp>
@@ -3494,31 +3494,31 @@
         </p:nvSpPr>
         <p:spPr>
           <a:xfrm>
-            <a:off x="4590288" y="7123176"/>
-            <a:ext cx="3438144" cy="338328"/>
-          </a:xfrm>
-          <a:prstGeom prst="rect">
-            <a:avLst/>
-          </a:prstGeom>
-          <a:noFill/>
-          <a:ln/>
-        </p:spPr>
-        <p:txBody>
-          <a:bodyPr wrap="square" rtlCol="0" anchor="ctr"/>
-          <a:lstStyle/>
-          <a:p>
-            <a:pPr indent="0" marL="0">
-              <a:buNone/>
-            </a:pPr>
-            <a:r>
-              <a:rPr lang="en-US" sz="1050" dirty="0">
+            <a:off x="4325112" y="4507992"/>
+            <a:ext cx="3401568" cy="338328"/>
+          </a:xfrm>
+          <a:prstGeom prst="rect">
+            <a:avLst/>
+          </a:prstGeom>
+          <a:noFill/>
+          <a:ln/>
+        </p:spPr>
+        <p:txBody>
+          <a:bodyPr wrap="square" rtlCol="0" anchor="ctr"/>
+          <a:lstStyle/>
+          <a:p>
+            <a:pPr indent="0" marL="0">
+              <a:buNone/>
+            </a:pPr>
+            <a:r>
+              <a:rPr lang="en-US" sz="1000" dirty="0">
                 <a:solidFill>
                   <a:srgbClr val="1F1235"/>
                 </a:solidFill>
               </a:rPr>
               <a:t>✓  수익 내역 실DB + 주간/월간 차트</a:t>
             </a:r>
-            <a:endParaRPr lang="en-US" sz="1050" dirty="0"/>
+            <a:endParaRPr lang="en-US" sz="1000" dirty="0"/>
           </a:p>
         </p:txBody>
       </p:sp>
@@ -3530,31 +3530,31 @@
         </p:nvSpPr>
         <p:spPr>
           <a:xfrm>
-            <a:off x="4590288" y="7479792"/>
-            <a:ext cx="3438144" cy="338328"/>
-          </a:xfrm>
-          <a:prstGeom prst="rect">
-            <a:avLst/>
-          </a:prstGeom>
-          <a:noFill/>
-          <a:ln/>
-        </p:spPr>
-        <p:txBody>
-          <a:bodyPr wrap="square" rtlCol="0" anchor="ctr"/>
-          <a:lstStyle/>
-          <a:p>
-            <a:pPr indent="0" marL="0">
-              <a:buNone/>
-            </a:pPr>
-            <a:r>
-              <a:rPr lang="en-US" sz="1050" dirty="0">
+            <a:off x="4325112" y="4855464"/>
+            <a:ext cx="3401568" cy="338328"/>
+          </a:xfrm>
+          <a:prstGeom prst="rect">
+            <a:avLst/>
+          </a:prstGeom>
+          <a:noFill/>
+          <a:ln/>
+        </p:spPr>
+        <p:txBody>
+          <a:bodyPr wrap="square" rtlCol="0" anchor="ctr"/>
+          <a:lstStyle/>
+          <a:p>
+            <a:pPr indent="0" marL="0">
+              <a:buNone/>
+            </a:pPr>
+            <a:r>
+              <a:rPr lang="en-US" sz="1000" dirty="0">
                 <a:solidFill>
                   <a:srgbClr val="1F1235"/>
                 </a:solidFill>
               </a:rPr>
               <a:t>✓  FCM 푸시 알림 + 관리자 일괄 발송</a:t>
             </a:r>
-            <a:endParaRPr lang="en-US" sz="1050" dirty="0"/>
+            <a:endParaRPr lang="en-US" sz="1000" dirty="0"/>
           </a:p>
         </p:txBody>
       </p:sp>
@@ -3566,31 +3566,31 @@
         </p:nvSpPr>
         <p:spPr>
           <a:xfrm>
-            <a:off x="4590288" y="7836408"/>
-            <a:ext cx="3438144" cy="338328"/>
-          </a:xfrm>
-          <a:prstGeom prst="rect">
-            <a:avLst/>
-          </a:prstGeom>
-          <a:noFill/>
-          <a:ln/>
-        </p:spPr>
-        <p:txBody>
-          <a:bodyPr wrap="square" rtlCol="0" anchor="ctr"/>
-          <a:lstStyle/>
-          <a:p>
-            <a:pPr indent="0" marL="0">
-              <a:buNone/>
-            </a:pPr>
-            <a:r>
-              <a:rPr lang="en-US" sz="1050" dirty="0">
+            <a:off x="4325112" y="5202936"/>
+            <a:ext cx="3401568" cy="338328"/>
+          </a:xfrm>
+          <a:prstGeom prst="rect">
+            <a:avLst/>
+          </a:prstGeom>
+          <a:noFill/>
+          <a:ln/>
+        </p:spPr>
+        <p:txBody>
+          <a:bodyPr wrap="square" rtlCol="0" anchor="ctr"/>
+          <a:lstStyle/>
+          <a:p>
+            <a:pPr indent="0" marL="0">
+              <a:buNone/>
+            </a:pPr>
+            <a:r>
+              <a:rPr lang="en-US" sz="1000" dirty="0">
                 <a:solidFill>
                   <a:srgbClr val="1F1235"/>
                 </a:solidFill>
               </a:rPr>
               <a:t>✓  PWA 오프라인 캐싱 (Serwist)</a:t>
             </a:r>
-            <a:endParaRPr lang="en-US" sz="1050" dirty="0"/>
+            <a:endParaRPr lang="en-US" sz="1000" dirty="0"/>
           </a:p>
         </p:txBody>
       </p:sp>
@@ -3602,31 +3602,31 @@
         </p:nvSpPr>
         <p:spPr>
           <a:xfrm>
-            <a:off x="4590288" y="8193024"/>
-            <a:ext cx="3438144" cy="338328"/>
-          </a:xfrm>
-          <a:prstGeom prst="rect">
-            <a:avLst/>
-          </a:prstGeom>
-          <a:noFill/>
-          <a:ln/>
-        </p:spPr>
-        <p:txBody>
-          <a:bodyPr wrap="square" rtlCol="0" anchor="ctr"/>
-          <a:lstStyle/>
-          <a:p>
-            <a:pPr indent="0" marL="0">
-              <a:buNone/>
-            </a:pPr>
-            <a:r>
-              <a:rPr lang="en-US" sz="1050" dirty="0">
+            <a:off x="4325112" y="5550408"/>
+            <a:ext cx="3401568" cy="338328"/>
+          </a:xfrm>
+          <a:prstGeom prst="rect">
+            <a:avLst/>
+          </a:prstGeom>
+          <a:noFill/>
+          <a:ln/>
+        </p:spPr>
+        <p:txBody>
+          <a:bodyPr wrap="square" rtlCol="0" anchor="ctr"/>
+          <a:lstStyle/>
+          <a:p>
+            <a:pPr indent="0" marL="0">
+              <a:buNone/>
+            </a:pPr>
+            <a:r>
+              <a:rPr lang="en-US" sz="1000" dirty="0">
                 <a:solidFill>
                   <a:srgbClr val="1F1235"/>
                 </a:solidFill>
               </a:rPr>
               <a:t>✓  Sentry 모니터링 + 가맹점 광고 시스템</a:t>
             </a:r>
-            <a:endParaRPr lang="en-US" sz="1050" dirty="0"/>
+            <a:endParaRPr lang="en-US" sz="1000" dirty="0"/>
           </a:p>
         </p:txBody>
       </p:sp>
@@ -3638,8 +3638,8 @@
         </p:nvSpPr>
         <p:spPr>
           <a:xfrm>
-            <a:off x="8458200" y="6172200"/>
-            <a:ext cx="3840480" cy="2423160"/>
+            <a:off x="8092440" y="3566160"/>
+            <a:ext cx="3749040" cy="2423160"/>
           </a:xfrm>
           <a:prstGeom prst="roundRect">
             <a:avLst>
@@ -3665,8 +3665,8 @@
         </p:nvSpPr>
         <p:spPr>
           <a:xfrm>
-            <a:off x="8595360" y="6281928"/>
-            <a:ext cx="3566160" cy="384048"/>
+            <a:off x="8202168" y="3675888"/>
+            <a:ext cx="3529584" cy="384048"/>
           </a:xfrm>
           <a:prstGeom prst="roundRect">
             <a:avLst>
@@ -3692,8 +3692,8 @@
         </p:nvSpPr>
         <p:spPr>
           <a:xfrm>
-            <a:off x="8595360" y="6281928"/>
-            <a:ext cx="3566160" cy="384048"/>
+            <a:off x="8202168" y="3675888"/>
+            <a:ext cx="3529584" cy="384048"/>
           </a:xfrm>
           <a:prstGeom prst="rect">
             <a:avLst/>
@@ -3728,31 +3728,31 @@
         </p:nvSpPr>
         <p:spPr>
           <a:xfrm>
-            <a:off x="8659368" y="6766560"/>
-            <a:ext cx="3438144" cy="338328"/>
-          </a:xfrm>
-          <a:prstGeom prst="rect">
-            <a:avLst/>
-          </a:prstGeom>
-          <a:noFill/>
-          <a:ln/>
-        </p:spPr>
-        <p:txBody>
-          <a:bodyPr wrap="square" rtlCol="0" anchor="ctr"/>
-          <a:lstStyle/>
-          <a:p>
-            <a:pPr indent="0" marL="0">
-              <a:buNone/>
-            </a:pPr>
-            <a:r>
-              <a:rPr lang="en-US" sz="1050" dirty="0">
+            <a:off x="8257032" y="4160520"/>
+            <a:ext cx="3401568" cy="338328"/>
+          </a:xfrm>
+          <a:prstGeom prst="rect">
+            <a:avLst/>
+          </a:prstGeom>
+          <a:noFill/>
+          <a:ln/>
+        </p:spPr>
+        <p:txBody>
+          <a:bodyPr wrap="square" rtlCol="0" anchor="ctr"/>
+          <a:lstStyle/>
+          <a:p>
+            <a:pPr indent="0" marL="0">
+              <a:buNone/>
+            </a:pPr>
+            <a:r>
+              <a:rPr lang="en-US" sz="1000" dirty="0">
                 <a:solidFill>
                   <a:srgbClr val="1F1235"/>
                 </a:solidFill>
               </a:rPr>
               <a:t>✓  DB 인덱스 30개+ (GIN 전문검색 포함)</a:t>
             </a:r>
-            <a:endParaRPr lang="en-US" sz="1050" dirty="0"/>
+            <a:endParaRPr lang="en-US" sz="1000" dirty="0"/>
           </a:p>
         </p:txBody>
       </p:sp>
@@ -3764,31 +3764,31 @@
         </p:nvSpPr>
         <p:spPr>
           <a:xfrm>
-            <a:off x="8659368" y="7123176"/>
-            <a:ext cx="3438144" cy="338328"/>
-          </a:xfrm>
-          <a:prstGeom prst="rect">
-            <a:avLst/>
-          </a:prstGeom>
-          <a:noFill/>
-          <a:ln/>
-        </p:spPr>
-        <p:txBody>
-          <a:bodyPr wrap="square" rtlCol="0" anchor="ctr"/>
-          <a:lstStyle/>
-          <a:p>
-            <a:pPr indent="0" marL="0">
-              <a:buNone/>
-            </a:pPr>
-            <a:r>
-              <a:rPr lang="en-US" sz="1050" dirty="0">
+            <a:off x="8257032" y="4507992"/>
+            <a:ext cx="3401568" cy="338328"/>
+          </a:xfrm>
+          <a:prstGeom prst="rect">
+            <a:avLst/>
+          </a:prstGeom>
+          <a:noFill/>
+          <a:ln/>
+        </p:spPr>
+        <p:txBody>
+          <a:bodyPr wrap="square" rtlCol="0" anchor="ctr"/>
+          <a:lstStyle/>
+          <a:p>
+            <a:pPr indent="0" marL="0">
+              <a:buNone/>
+            </a:pPr>
+            <a:r>
+              <a:rPr lang="en-US" sz="1000" dirty="0">
                 <a:solidFill>
                   <a:srgbClr val="1F1235"/>
                 </a:solidFill>
               </a:rPr>
               <a:t>✓  운영 RLS 정책 + Storage 버킷 정책</a:t>
             </a:r>
-            <a:endParaRPr lang="en-US" sz="1050" dirty="0"/>
+            <a:endParaRPr lang="en-US" sz="1000" dirty="0"/>
           </a:p>
         </p:txBody>
       </p:sp>
@@ -3800,31 +3800,31 @@
         </p:nvSpPr>
         <p:spPr>
           <a:xfrm>
-            <a:off x="8659368" y="7479792"/>
-            <a:ext cx="3438144" cy="338328"/>
-          </a:xfrm>
-          <a:prstGeom prst="rect">
-            <a:avLst/>
-          </a:prstGeom>
-          <a:noFill/>
-          <a:ln/>
-        </p:spPr>
-        <p:txBody>
-          <a:bodyPr wrap="square" rtlCol="0" anchor="ctr"/>
-          <a:lstStyle/>
-          <a:p>
-            <a:pPr indent="0" marL="0">
-              <a:buNone/>
-            </a:pPr>
-            <a:r>
-              <a:rPr lang="en-US" sz="1050" dirty="0">
+            <a:off x="8257032" y="4855464"/>
+            <a:ext cx="3401568" cy="338328"/>
+          </a:xfrm>
+          <a:prstGeom prst="rect">
+            <a:avLst/>
+          </a:prstGeom>
+          <a:noFill/>
+          <a:ln/>
+        </p:spPr>
+        <p:txBody>
+          <a:bodyPr wrap="square" rtlCol="0" anchor="ctr"/>
+          <a:lstStyle/>
+          <a:p>
+            <a:pPr indent="0" marL="0">
+              <a:buNone/>
+            </a:pPr>
+            <a:r>
+              <a:rPr lang="en-US" sz="1000" dirty="0">
                 <a:solidFill>
                   <a:srgbClr val="1F1235"/>
                 </a:solidFill>
               </a:rPr>
               <a:t>✓  관리자 5탭: 통계·회원·가게·쿠폰·FCM 푸시</a:t>
             </a:r>
-            <a:endParaRPr lang="en-US" sz="1050" dirty="0"/>
+            <a:endParaRPr lang="en-US" sz="1000" dirty="0"/>
           </a:p>
         </p:txBody>
       </p:sp>
@@ -3836,31 +3836,31 @@
         </p:nvSpPr>
         <p:spPr>
           <a:xfrm>
-            <a:off x="8659368" y="7836408"/>
-            <a:ext cx="3438144" cy="338328"/>
-          </a:xfrm>
-          <a:prstGeom prst="rect">
-            <a:avLst/>
-          </a:prstGeom>
-          <a:noFill/>
-          <a:ln/>
-        </p:spPr>
-        <p:txBody>
-          <a:bodyPr wrap="square" rtlCol="0" anchor="ctr"/>
-          <a:lstStyle/>
-          <a:p>
-            <a:pPr indent="0" marL="0">
-              <a:buNone/>
-            </a:pPr>
-            <a:r>
-              <a:rPr lang="en-US" sz="1050" dirty="0">
+            <a:off x="8257032" y="5202936"/>
+            <a:ext cx="3401568" cy="338328"/>
+          </a:xfrm>
+          <a:prstGeom prst="rect">
+            <a:avLst/>
+          </a:prstGeom>
+          <a:noFill/>
+          <a:ln/>
+        </p:spPr>
+        <p:txBody>
+          <a:bodyPr wrap="square" rtlCol="0" anchor="ctr"/>
+          <a:lstStyle/>
+          <a:p>
+            <a:pPr indent="0" marL="0">
+              <a:buNone/>
+            </a:pPr>
+            <a:r>
+              <a:rPr lang="en-US" sz="1000" dirty="0">
                 <a:solidFill>
                   <a:srgbClr val="1F1235"/>
                 </a:solidFill>
               </a:rPr>
               <a:t>✓  404·에러·로딩·스플래시 페이지</a:t>
             </a:r>
-            <a:endParaRPr lang="en-US" sz="1050" dirty="0"/>
+            <a:endParaRPr lang="en-US" sz="1000" dirty="0"/>
           </a:p>
         </p:txBody>
       </p:sp>
@@ -3872,31 +3872,31 @@
         </p:nvSpPr>
         <p:spPr>
           <a:xfrm>
-            <a:off x="8659368" y="8193024"/>
-            <a:ext cx="3438144" cy="338328"/>
-          </a:xfrm>
-          <a:prstGeom prst="rect">
-            <a:avLst/>
-          </a:prstGeom>
-          <a:noFill/>
-          <a:ln/>
-        </p:spPr>
-        <p:txBody>
-          <a:bodyPr wrap="square" rtlCol="0" anchor="ctr"/>
-          <a:lstStyle/>
-          <a:p>
-            <a:pPr indent="0" marL="0">
-              <a:buNone/>
-            </a:pPr>
-            <a:r>
-              <a:rPr lang="en-US" sz="1050" dirty="0">
+            <a:off x="8257032" y="5550408"/>
+            <a:ext cx="3401568" cy="338328"/>
+          </a:xfrm>
+          <a:prstGeom prst="rect">
+            <a:avLst/>
+          </a:prstGeom>
+          <a:noFill/>
+          <a:ln/>
+        </p:spPr>
+        <p:txBody>
+          <a:bodyPr wrap="square" rtlCol="0" anchor="ctr"/>
+          <a:lstStyle/>
+          <a:p>
+            <a:pPr indent="0" marL="0">
+              <a:buNone/>
+            </a:pPr>
+            <a:r>
+              <a:rPr lang="en-US" sz="1000" dirty="0">
                 <a:solidFill>
                   <a:srgbClr val="1F1235"/>
                 </a:solidFill>
               </a:rPr>
               <a:t>✓  다크모드 + Tailwind dark: 클래스 전면 적용</a:t>
             </a:r>
-            <a:endParaRPr lang="en-US" sz="1050" dirty="0"/>
+            <a:endParaRPr lang="en-US" sz="1000" dirty="0"/>
           </a:p>
         </p:txBody>
       </p:sp>
@@ -4127,8 +4127,8 @@
         </p:nvSpPr>
         <p:spPr>
           <a:xfrm>
-            <a:off x="365760" y="2057400"/>
-            <a:ext cx="3931920" cy="1280160"/>
+            <a:off x="228600" y="2057400"/>
+            <a:ext cx="3749040" cy="1280160"/>
           </a:xfrm>
           <a:prstGeom prst="roundRect">
             <a:avLst>
@@ -4154,8 +4154,8 @@
         </p:nvSpPr>
         <p:spPr>
           <a:xfrm>
-            <a:off x="530352" y="2176272"/>
-            <a:ext cx="3566160" cy="329184"/>
+            <a:off x="365760" y="2176272"/>
+            <a:ext cx="3474720" cy="329184"/>
           </a:xfrm>
           <a:prstGeom prst="roundRect">
             <a:avLst>
@@ -4181,8 +4181,8 @@
         </p:nvSpPr>
         <p:spPr>
           <a:xfrm>
-            <a:off x="530352" y="2176272"/>
-            <a:ext cx="3566160" cy="329184"/>
+            <a:off x="365760" y="2176272"/>
+            <a:ext cx="3474720" cy="329184"/>
           </a:xfrm>
           <a:prstGeom prst="rect">
             <a:avLst/>
@@ -4217,8 +4217,8 @@
         </p:nvSpPr>
         <p:spPr>
           <a:xfrm>
-            <a:off x="566928" y="2569464"/>
-            <a:ext cx="3529584" cy="694944"/>
+            <a:off x="393192" y="2569464"/>
+            <a:ext cx="3419856" cy="694944"/>
           </a:xfrm>
           <a:prstGeom prst="rect">
             <a:avLst/>
@@ -4281,8 +4281,8 @@
         </p:nvSpPr>
         <p:spPr>
           <a:xfrm>
-            <a:off x="4572000" y="2057400"/>
-            <a:ext cx="3931920" cy="1280160"/>
+            <a:off x="4133088" y="2057400"/>
+            <a:ext cx="3749040" cy="1280160"/>
           </a:xfrm>
           <a:prstGeom prst="roundRect">
             <a:avLst>
@@ -4308,8 +4308,8 @@
         </p:nvSpPr>
         <p:spPr>
           <a:xfrm>
-            <a:off x="4736592" y="2176272"/>
-            <a:ext cx="3566160" cy="329184"/>
+            <a:off x="4270248" y="2176272"/>
+            <a:ext cx="3474720" cy="329184"/>
           </a:xfrm>
           <a:prstGeom prst="roundRect">
             <a:avLst>
@@ -4335,8 +4335,8 @@
         </p:nvSpPr>
         <p:spPr>
           <a:xfrm>
-            <a:off x="4736592" y="2176272"/>
-            <a:ext cx="3566160" cy="329184"/>
+            <a:off x="4270248" y="2176272"/>
+            <a:ext cx="3474720" cy="329184"/>
           </a:xfrm>
           <a:prstGeom prst="rect">
             <a:avLst/>
@@ -4371,8 +4371,8 @@
         </p:nvSpPr>
         <p:spPr>
           <a:xfrm>
-            <a:off x="4773168" y="2569464"/>
-            <a:ext cx="3529584" cy="694944"/>
+            <a:off x="4297680" y="2569464"/>
+            <a:ext cx="3419856" cy="694944"/>
           </a:xfrm>
           <a:prstGeom prst="rect">
             <a:avLst/>
@@ -4435,8 +4435,8 @@
         </p:nvSpPr>
         <p:spPr>
           <a:xfrm>
-            <a:off x="8778240" y="2057400"/>
-            <a:ext cx="3931920" cy="1280160"/>
+            <a:off x="8037576" y="2057400"/>
+            <a:ext cx="3749040" cy="1280160"/>
           </a:xfrm>
           <a:prstGeom prst="roundRect">
             <a:avLst>
@@ -4462,8 +4462,8 @@
         </p:nvSpPr>
         <p:spPr>
           <a:xfrm>
-            <a:off x="8942832" y="2176272"/>
-            <a:ext cx="3566160" cy="329184"/>
+            <a:off x="8174736" y="2176272"/>
+            <a:ext cx="3474720" cy="329184"/>
           </a:xfrm>
           <a:prstGeom prst="roundRect">
             <a:avLst>
@@ -4489,8 +4489,8 @@
         </p:nvSpPr>
         <p:spPr>
           <a:xfrm>
-            <a:off x="8942832" y="2176272"/>
-            <a:ext cx="3566160" cy="329184"/>
+            <a:off x="8174736" y="2176272"/>
+            <a:ext cx="3474720" cy="329184"/>
           </a:xfrm>
           <a:prstGeom prst="rect">
             <a:avLst/>
@@ -4525,8 +4525,8 @@
         </p:nvSpPr>
         <p:spPr>
           <a:xfrm>
-            <a:off x="8979408" y="2569464"/>
-            <a:ext cx="3529584" cy="694944"/>
+            <a:off x="8202168" y="2569464"/>
+            <a:ext cx="3419856" cy="694944"/>
           </a:xfrm>
           <a:prstGeom prst="rect">
             <a:avLst/>
@@ -4652,8 +4652,8 @@
         </p:nvSpPr>
         <p:spPr>
           <a:xfrm>
-            <a:off x="365760" y="3886200"/>
-            <a:ext cx="3931920" cy="1280160"/>
+            <a:off x="228600" y="3886200"/>
+            <a:ext cx="3749040" cy="1280160"/>
           </a:xfrm>
           <a:prstGeom prst="roundRect">
             <a:avLst>
@@ -4679,8 +4679,8 @@
         </p:nvSpPr>
         <p:spPr>
           <a:xfrm>
-            <a:off x="530352" y="4005072"/>
-            <a:ext cx="3566160" cy="329184"/>
+            <a:off x="365760" y="4005072"/>
+            <a:ext cx="3474720" cy="329184"/>
           </a:xfrm>
           <a:prstGeom prst="roundRect">
             <a:avLst>
@@ -4706,8 +4706,8 @@
         </p:nvSpPr>
         <p:spPr>
           <a:xfrm>
-            <a:off x="530352" y="4005072"/>
-            <a:ext cx="3566160" cy="329184"/>
+            <a:off x="365760" y="4005072"/>
+            <a:ext cx="3474720" cy="329184"/>
           </a:xfrm>
           <a:prstGeom prst="rect">
             <a:avLst/>
@@ -4728,7 +4728,7 @@
                   <a:srgbClr val="D97706"/>
                 </a:solidFill>
               </a:rPr>
-              <a:t>Firebase 환경변수 설정</a:t>
+              <a:t>Firebase 환경변수 ✅</a:t>
             </a:r>
             <a:endParaRPr lang="en-US" sz="1200" dirty="0"/>
           </a:p>
@@ -4742,8 +4742,8 @@
         </p:nvSpPr>
         <p:spPr>
           <a:xfrm>
-            <a:off x="566928" y="4398264"/>
-            <a:ext cx="3529584" cy="694944"/>
+            <a:off x="393192" y="4398264"/>
+            <a:ext cx="3419856" cy="694944"/>
           </a:xfrm>
           <a:prstGeom prst="rect">
             <a:avLst/>
@@ -4764,7 +4764,7 @@
                   <a:srgbClr val="6B7280"/>
                 </a:solidFill>
               </a:rPr>
-              <a:t>FIREBASE_ADMIN_SDK_JSON 주입</a:t>
+              <a:t>API Key ~ App ID 완성</a:t>
             </a:r>
             <a:endParaRPr lang="en-US" sz="1050" dirty="0"/>
           </a:p>
@@ -4778,7 +4778,7 @@
                   <a:srgbClr val="6B7280"/>
                 </a:solidFill>
               </a:rPr>
-              <a:t>VAPID 키 발급 및 설정</a:t>
+              <a:t>VAPID 키 완성</a:t>
             </a:r>
             <a:endParaRPr lang="en-US" sz="1050" dirty="0"/>
           </a:p>
@@ -4792,7 +4792,7 @@
                   <a:srgbClr val="6B7280"/>
                 </a:solidFill>
               </a:rPr>
-              <a:t>FCM 실제 발송 테스트</a:t>
+              <a:t>Admin SDK JSON 완성</a:t>
             </a:r>
             <a:endParaRPr lang="en-US" sz="1050" dirty="0"/>
           </a:p>
@@ -4806,8 +4806,8 @@
         </p:nvSpPr>
         <p:spPr>
           <a:xfrm>
-            <a:off x="4572000" y="3886200"/>
-            <a:ext cx="3931920" cy="1280160"/>
+            <a:off x="4133088" y="3886200"/>
+            <a:ext cx="3749040" cy="1280160"/>
           </a:xfrm>
           <a:prstGeom prst="roundRect">
             <a:avLst>
@@ -4833,8 +4833,8 @@
         </p:nvSpPr>
         <p:spPr>
           <a:xfrm>
-            <a:off x="4736592" y="4005072"/>
-            <a:ext cx="3566160" cy="329184"/>
+            <a:off x="4270248" y="4005072"/>
+            <a:ext cx="3474720" cy="329184"/>
           </a:xfrm>
           <a:prstGeom prst="roundRect">
             <a:avLst>
@@ -4860,8 +4860,8 @@
         </p:nvSpPr>
         <p:spPr>
           <a:xfrm>
-            <a:off x="4736592" y="4005072"/>
-            <a:ext cx="3566160" cy="329184"/>
+            <a:off x="4270248" y="4005072"/>
+            <a:ext cx="3474720" cy="329184"/>
           </a:xfrm>
           <a:prstGeom prst="rect">
             <a:avLst/>
@@ -4882,7 +4882,7 @@
                   <a:srgbClr val="D97706"/>
                 </a:solidFill>
               </a:rPr>
-              <a:t>카카오 OAuth 키 설정</a:t>
+              <a:t>카카오 API 키 확인</a:t>
             </a:r>
             <a:endParaRPr lang="en-US" sz="1200" dirty="0"/>
           </a:p>
@@ -4896,8 +4896,8 @@
         </p:nvSpPr>
         <p:spPr>
           <a:xfrm>
-            <a:off x="4773168" y="4398264"/>
-            <a:ext cx="3529584" cy="694944"/>
+            <a:off x="4297680" y="4398264"/>
+            <a:ext cx="3419856" cy="694944"/>
           </a:xfrm>
           <a:prstGeom prst="rect">
             <a:avLst/>
@@ -4918,7 +4918,7 @@
                   <a:srgbClr val="6B7280"/>
                 </a:solidFill>
               </a:rPr>
-              <a:t>Supabase → Kakao provider 활성화</a:t>
+              <a:t>앱 키 → JavaScript 키 재확인</a:t>
             </a:r>
             <a:endParaRPr lang="en-US" sz="1050" dirty="0"/>
           </a:p>
@@ -4932,7 +4932,7 @@
                   <a:srgbClr val="6B7280"/>
                 </a:solidFill>
               </a:rPr>
-              <a:t>Redirect URI 등록</a:t>
+              <a:t>NEXT_PUBLIC_KAKAO_MAP_KEY 검증</a:t>
             </a:r>
             <a:endParaRPr lang="en-US" sz="1050" dirty="0"/>
           </a:p>
@@ -4946,7 +4946,7 @@
                   <a:srgbClr val="6B7280"/>
                 </a:solidFill>
               </a:rPr>
-              <a:t>실계정 로그인 테스트</a:t>
+              <a:t>Kakao Map 지도 표시 테스트</a:t>
             </a:r>
             <a:endParaRPr lang="en-US" sz="1050" dirty="0"/>
           </a:p>
@@ -4960,8 +4960,8 @@
         </p:nvSpPr>
         <p:spPr>
           <a:xfrm>
-            <a:off x="8778240" y="3886200"/>
-            <a:ext cx="3931920" cy="1280160"/>
+            <a:off x="8037576" y="3886200"/>
+            <a:ext cx="3749040" cy="1280160"/>
           </a:xfrm>
           <a:prstGeom prst="roundRect">
             <a:avLst>
@@ -4987,8 +4987,8 @@
         </p:nvSpPr>
         <p:spPr>
           <a:xfrm>
-            <a:off x="8942832" y="4005072"/>
-            <a:ext cx="3566160" cy="329184"/>
+            <a:off x="8174736" y="4005072"/>
+            <a:ext cx="3474720" cy="329184"/>
           </a:xfrm>
           <a:prstGeom prst="roundRect">
             <a:avLst>
@@ -5014,8 +5014,8 @@
         </p:nvSpPr>
         <p:spPr>
           <a:xfrm>
-            <a:off x="8942832" y="4005072"/>
-            <a:ext cx="3566160" cy="329184"/>
+            <a:off x="8174736" y="4005072"/>
+            <a:ext cx="3474720" cy="329184"/>
           </a:xfrm>
           <a:prstGeom prst="rect">
             <a:avLst/>
@@ -5036,7 +5036,7 @@
                   <a:srgbClr val="D97706"/>
                 </a:solidFill>
               </a:rPr>
-              <a:t>샘플 데이터 투입</a:t>
+              <a:t>샘플 데이터 + 배포</a:t>
             </a:r>
             <a:endParaRPr lang="en-US" sz="1200" dirty="0"/>
           </a:p>
@@ -5050,8 +5050,8 @@
         </p:nvSpPr>
         <p:spPr>
           <a:xfrm>
-            <a:off x="8979408" y="4398264"/>
-            <a:ext cx="3529584" cy="694944"/>
+            <a:off x="8202168" y="4398264"/>
+            <a:ext cx="3419856" cy="694944"/>
           </a:xfrm>
           <a:prstGeom prst="rect">
             <a:avLst/>
@@ -5177,8 +5177,8 @@
         </p:nvSpPr>
         <p:spPr>
           <a:xfrm>
-            <a:off x="365760" y="5715000"/>
-            <a:ext cx="3931920" cy="1280160"/>
+            <a:off x="228600" y="5715000"/>
+            <a:ext cx="3749040" cy="1280160"/>
           </a:xfrm>
           <a:prstGeom prst="roundRect">
             <a:avLst>
@@ -5204,8 +5204,8 @@
         </p:nvSpPr>
         <p:spPr>
           <a:xfrm>
-            <a:off x="530352" y="5833872"/>
-            <a:ext cx="3566160" cy="329184"/>
+            <a:off x="365760" y="5833872"/>
+            <a:ext cx="3474720" cy="329184"/>
           </a:xfrm>
           <a:prstGeom prst="roundRect">
             <a:avLst>
@@ -5231,8 +5231,8 @@
         </p:nvSpPr>
         <p:spPr>
           <a:xfrm>
-            <a:off x="530352" y="5833872"/>
-            <a:ext cx="3566160" cy="329184"/>
+            <a:off x="365760" y="5833872"/>
+            <a:ext cx="3474720" cy="329184"/>
           </a:xfrm>
           <a:prstGeom prst="rect">
             <a:avLst/>
@@ -5267,8 +5267,8 @@
         </p:nvSpPr>
         <p:spPr>
           <a:xfrm>
-            <a:off x="566928" y="6227064"/>
-            <a:ext cx="3529584" cy="694944"/>
+            <a:off x="393192" y="6227064"/>
+            <a:ext cx="3419856" cy="694944"/>
           </a:xfrm>
           <a:prstGeom prst="rect">
             <a:avLst/>
@@ -5331,8 +5331,8 @@
         </p:nvSpPr>
         <p:spPr>
           <a:xfrm>
-            <a:off x="4572000" y="5715000"/>
-            <a:ext cx="3931920" cy="1280160"/>
+            <a:off x="4133088" y="5715000"/>
+            <a:ext cx="3749040" cy="1280160"/>
           </a:xfrm>
           <a:prstGeom prst="roundRect">
             <a:avLst>
@@ -5358,8 +5358,8 @@
         </p:nvSpPr>
         <p:spPr>
           <a:xfrm>
-            <a:off x="4736592" y="5833872"/>
-            <a:ext cx="3566160" cy="329184"/>
+            <a:off x="4270248" y="5833872"/>
+            <a:ext cx="3474720" cy="329184"/>
           </a:xfrm>
           <a:prstGeom prst="roundRect">
             <a:avLst>
@@ -5385,8 +5385,8 @@
         </p:nvSpPr>
         <p:spPr>
           <a:xfrm>
-            <a:off x="4736592" y="5833872"/>
-            <a:ext cx="3566160" cy="329184"/>
+            <a:off x="4270248" y="5833872"/>
+            <a:ext cx="3474720" cy="329184"/>
           </a:xfrm>
           <a:prstGeom prst="rect">
             <a:avLst/>
@@ -5421,8 +5421,8 @@
         </p:nvSpPr>
         <p:spPr>
           <a:xfrm>
-            <a:off x="4773168" y="6227064"/>
-            <a:ext cx="3529584" cy="694944"/>
+            <a:off x="4297680" y="6227064"/>
+            <a:ext cx="3419856" cy="694944"/>
           </a:xfrm>
           <a:prstGeom prst="rect">
             <a:avLst/>
@@ -5485,8 +5485,8 @@
         </p:nvSpPr>
         <p:spPr>
           <a:xfrm>
-            <a:off x="8778240" y="5715000"/>
-            <a:ext cx="3931920" cy="1280160"/>
+            <a:off x="8037576" y="5715000"/>
+            <a:ext cx="3749040" cy="1280160"/>
           </a:xfrm>
           <a:prstGeom prst="roundRect">
             <a:avLst>
@@ -5512,8 +5512,8 @@
         </p:nvSpPr>
         <p:spPr>
           <a:xfrm>
-            <a:off x="8942832" y="5833872"/>
-            <a:ext cx="3566160" cy="329184"/>
+            <a:off x="8174736" y="5833872"/>
+            <a:ext cx="3474720" cy="329184"/>
           </a:xfrm>
           <a:prstGeom prst="roundRect">
             <a:avLst>
@@ -5539,8 +5539,8 @@
         </p:nvSpPr>
         <p:spPr>
           <a:xfrm>
-            <a:off x="8942832" y="5833872"/>
-            <a:ext cx="3566160" cy="329184"/>
+            <a:off x="8174736" y="5833872"/>
+            <a:ext cx="3474720" cy="329184"/>
           </a:xfrm>
           <a:prstGeom prst="rect">
             <a:avLst/>
@@ -5575,8 +5575,8 @@
         </p:nvSpPr>
         <p:spPr>
           <a:xfrm>
-            <a:off x="8979408" y="6227064"/>
-            <a:ext cx="3529584" cy="694944"/>
+            <a:off x="8202168" y="6227064"/>
+            <a:ext cx="3419856" cy="694944"/>
           </a:xfrm>
           <a:prstGeom prst="rect">
             <a:avLst/>
@@ -5732,12 +5732,12 @@
         </p:nvSpPr>
         <p:spPr>
           <a:xfrm>
-            <a:off x="274320" y="914400"/>
-            <a:ext cx="2926080" cy="4983480"/>
+            <a:off x="182880" y="914400"/>
+            <a:ext cx="2743200" cy="4983480"/>
           </a:xfrm>
           <a:prstGeom prst="roundRect">
             <a:avLst>
-              <a:gd name="adj" fmla="val 5625"/>
+              <a:gd name="adj" fmla="val 6000"/>
             </a:avLst>
           </a:prstGeom>
           <a:solidFill>
@@ -5759,8 +5759,8 @@
         </p:nvSpPr>
         <p:spPr>
           <a:xfrm>
-            <a:off x="411480" y="1024128"/>
-            <a:ext cx="2651760" cy="822960"/>
+            <a:off x="292608" y="1024128"/>
+            <a:ext cx="2523744" cy="822960"/>
           </a:xfrm>
           <a:prstGeom prst="roundRect">
             <a:avLst>
@@ -5786,8 +5786,8 @@
         </p:nvSpPr>
         <p:spPr>
           <a:xfrm>
-            <a:off x="411480" y="1024128"/>
-            <a:ext cx="2651760" cy="402336"/>
+            <a:off x="292608" y="1024128"/>
+            <a:ext cx="2523744" cy="402336"/>
           </a:xfrm>
           <a:prstGeom prst="rect">
             <a:avLst/>
@@ -5822,7 +5822,7 @@
         </p:nvSpPr>
         <p:spPr>
           <a:xfrm>
-            <a:off x="411480" y="1417320"/>
+            <a:off x="320040" y="1417320"/>
             <a:ext cx="2651760" cy="347472"/>
           </a:xfrm>
           <a:prstGeom prst="rect">
@@ -5858,7 +5858,7 @@
         </p:nvSpPr>
         <p:spPr>
           <a:xfrm>
-            <a:off x="822960" y="1938528"/>
+            <a:off x="640080" y="1938528"/>
             <a:ext cx="1828800" cy="320040"/>
           </a:xfrm>
           <a:prstGeom prst="roundRect">
@@ -5885,7 +5885,7 @@
         </p:nvSpPr>
         <p:spPr>
           <a:xfrm>
-            <a:off x="822960" y="1938528"/>
+            <a:off x="640080" y="1938528"/>
             <a:ext cx="1828800" cy="320040"/>
           </a:xfrm>
           <a:prstGeom prst="rect">
@@ -5921,31 +5921,31 @@
         </p:nvSpPr>
         <p:spPr>
           <a:xfrm>
-            <a:off x="438912" y="2377440"/>
-            <a:ext cx="2606040" cy="420624"/>
-          </a:xfrm>
-          <a:prstGeom prst="rect">
-            <a:avLst/>
-          </a:prstGeom>
-          <a:noFill/>
-          <a:ln/>
-        </p:spPr>
-        <p:txBody>
-          <a:bodyPr wrap="square" rtlCol="0" anchor="ctr"/>
-          <a:lstStyle/>
-          <a:p>
-            <a:pPr indent="0" marL="0">
-              <a:buNone/>
-            </a:pPr>
-            <a:r>
-              <a:rPr lang="en-US" sz="1050" dirty="0">
+            <a:off x="320040" y="2377440"/>
+            <a:ext cx="2468880" cy="402336"/>
+          </a:xfrm>
+          <a:prstGeom prst="rect">
+            <a:avLst/>
+          </a:prstGeom>
+          <a:noFill/>
+          <a:ln/>
+        </p:spPr>
+        <p:txBody>
+          <a:bodyPr wrap="square" rtlCol="0" anchor="ctr"/>
+          <a:lstStyle/>
+          <a:p>
+            <a:pPr indent="0" marL="0">
+              <a:buNone/>
+            </a:pPr>
+            <a:r>
+              <a:rPr lang="en-US" sz="1000" dirty="0">
                 <a:solidFill>
                   <a:srgbClr val="1F1235"/>
                 </a:solidFill>
               </a:rPr>
               <a:t>✅ 로그인/회원가입 + 카카오 소셜 로그인</a:t>
             </a:r>
-            <a:endParaRPr lang="en-US" sz="1050" dirty="0"/>
+            <a:endParaRPr lang="en-US" sz="1000" dirty="0"/>
           </a:p>
         </p:txBody>
       </p:sp>
@@ -5957,31 +5957,31 @@
         </p:nvSpPr>
         <p:spPr>
           <a:xfrm>
-            <a:off x="438912" y="2852928"/>
-            <a:ext cx="2606040" cy="420624"/>
-          </a:xfrm>
-          <a:prstGeom prst="rect">
-            <a:avLst/>
-          </a:prstGeom>
-          <a:noFill/>
-          <a:ln/>
-        </p:spPr>
-        <p:txBody>
-          <a:bodyPr wrap="square" rtlCol="0" anchor="ctr"/>
-          <a:lstStyle/>
-          <a:p>
-            <a:pPr indent="0" marL="0">
-              <a:buNone/>
-            </a:pPr>
-            <a:r>
-              <a:rPr lang="en-US" sz="1050" dirty="0">
+            <a:off x="320040" y="2816352"/>
+            <a:ext cx="2468880" cy="402336"/>
+          </a:xfrm>
+          <a:prstGeom prst="rect">
+            <a:avLst/>
+          </a:prstGeom>
+          <a:noFill/>
+          <a:ln/>
+        </p:spPr>
+        <p:txBody>
+          <a:bodyPr wrap="square" rtlCol="0" anchor="ctr"/>
+          <a:lstStyle/>
+          <a:p>
+            <a:pPr indent="0" marL="0">
+              <a:buNone/>
+            </a:pPr>
+            <a:r>
+              <a:rPr lang="en-US" sz="1000" dirty="0">
                 <a:solidFill>
                   <a:srgbClr val="1F1235"/>
                 </a:solidFill>
               </a:rPr>
               <a:t>✅ 홈 탭 + 전문검색(GIN) + 광고</a:t>
             </a:r>
-            <a:endParaRPr lang="en-US" sz="1050" dirty="0"/>
+            <a:endParaRPr lang="en-US" sz="1000" dirty="0"/>
           </a:p>
         </p:txBody>
       </p:sp>
@@ -5993,31 +5993,31 @@
         </p:nvSpPr>
         <p:spPr>
           <a:xfrm>
-            <a:off x="438912" y="3328416"/>
-            <a:ext cx="2606040" cy="420624"/>
-          </a:xfrm>
-          <a:prstGeom prst="rect">
-            <a:avLst/>
-          </a:prstGeom>
-          <a:noFill/>
-          <a:ln/>
-        </p:spPr>
-        <p:txBody>
-          <a:bodyPr wrap="square" rtlCol="0" anchor="ctr"/>
-          <a:lstStyle/>
-          <a:p>
-            <a:pPr indent="0" marL="0">
-              <a:buNone/>
-            </a:pPr>
-            <a:r>
-              <a:rPr lang="en-US" sz="1050" dirty="0">
+            <a:off x="320040" y="3255264"/>
+            <a:ext cx="2468880" cy="402336"/>
+          </a:xfrm>
+          <a:prstGeom prst="rect">
+            <a:avLst/>
+          </a:prstGeom>
+          <a:noFill/>
+          <a:ln/>
+        </p:spPr>
+        <p:txBody>
+          <a:bodyPr wrap="square" rtlCol="0" anchor="ctr"/>
+          <a:lstStyle/>
+          <a:p>
+            <a:pPr indent="0" marL="0">
+              <a:buNone/>
+            </a:pPr>
+            <a:r>
+              <a:rPr lang="en-US" sz="1000" dirty="0">
                 <a:solidFill>
                   <a:srgbClr val="1F1235"/>
                 </a:solidFill>
               </a:rPr>
               <a:t>✅ 지갑·주문·리뷰(이미지)·레퍼럴·알림</a:t>
             </a:r>
-            <a:endParaRPr lang="en-US" sz="1050" dirty="0"/>
+            <a:endParaRPr lang="en-US" sz="1000" dirty="0"/>
           </a:p>
         </p:txBody>
       </p:sp>
@@ -6029,31 +6029,31 @@
         </p:nvSpPr>
         <p:spPr>
           <a:xfrm>
-            <a:off x="438912" y="3803904"/>
-            <a:ext cx="2606040" cy="420624"/>
-          </a:xfrm>
-          <a:prstGeom prst="rect">
-            <a:avLst/>
-          </a:prstGeom>
-          <a:noFill/>
-          <a:ln/>
-        </p:spPr>
-        <p:txBody>
-          <a:bodyPr wrap="square" rtlCol="0" anchor="ctr"/>
-          <a:lstStyle/>
-          <a:p>
-            <a:pPr indent="0" marL="0">
-              <a:buNone/>
-            </a:pPr>
-            <a:r>
-              <a:rPr lang="en-US" sz="1050" dirty="0">
+            <a:off x="320040" y="3694176"/>
+            <a:ext cx="2468880" cy="402336"/>
+          </a:xfrm>
+          <a:prstGeom prst="rect">
+            <a:avLst/>
+          </a:prstGeom>
+          <a:noFill/>
+          <a:ln/>
+        </p:spPr>
+        <p:txBody>
+          <a:bodyPr wrap="square" rtlCol="0" anchor="ctr"/>
+          <a:lstStyle/>
+          <a:p>
+            <a:pPr indent="0" marL="0">
+              <a:buNone/>
+            </a:pPr>
+            <a:r>
+              <a:rPr lang="en-US" sz="1000" dirty="0">
                 <a:solidFill>
                   <a:srgbClr val="1F1235"/>
                 </a:solidFill>
               </a:rPr>
               <a:t>✅ 사장님 / 라이더 / 관리자 전체</a:t>
             </a:r>
-            <a:endParaRPr lang="en-US" sz="1050" dirty="0"/>
+            <a:endParaRPr lang="en-US" sz="1000" dirty="0"/>
           </a:p>
         </p:txBody>
       </p:sp>
@@ -6065,31 +6065,31 @@
         </p:nvSpPr>
         <p:spPr>
           <a:xfrm>
-            <a:off x="438912" y="4279392"/>
-            <a:ext cx="2606040" cy="420624"/>
-          </a:xfrm>
-          <a:prstGeom prst="rect">
-            <a:avLst/>
-          </a:prstGeom>
-          <a:noFill/>
-          <a:ln/>
-        </p:spPr>
-        <p:txBody>
-          <a:bodyPr wrap="square" rtlCol="0" anchor="ctr"/>
-          <a:lstStyle/>
-          <a:p>
-            <a:pPr indent="0" marL="0">
-              <a:buNone/>
-            </a:pPr>
-            <a:r>
-              <a:rPr lang="en-US" sz="1050" dirty="0">
+            <a:off x="320040" y="4133088"/>
+            <a:ext cx="2468880" cy="402336"/>
+          </a:xfrm>
+          <a:prstGeom prst="rect">
+            <a:avLst/>
+          </a:prstGeom>
+          <a:noFill/>
+          <a:ln/>
+        </p:spPr>
+        <p:txBody>
+          <a:bodyPr wrap="square" rtlCol="0" anchor="ctr"/>
+          <a:lstStyle/>
+          <a:p>
+            <a:pPr indent="0" marL="0">
+              <a:buNone/>
+            </a:pPr>
+            <a:r>
+              <a:rPr lang="en-US" sz="1000" dirty="0">
                 <a:solidFill>
                   <a:srgbClr val="1F1235"/>
                 </a:solidFill>
               </a:rPr>
               <a:t>✅ 쿠폰 (3종) + 토스페이먼츠 카드결제</a:t>
             </a:r>
-            <a:endParaRPr lang="en-US" sz="1050" dirty="0"/>
+            <a:endParaRPr lang="en-US" sz="1000" dirty="0"/>
           </a:p>
         </p:txBody>
       </p:sp>
@@ -6101,31 +6101,31 @@
         </p:nvSpPr>
         <p:spPr>
           <a:xfrm>
-            <a:off x="438912" y="4754880"/>
-            <a:ext cx="2606040" cy="420624"/>
-          </a:xfrm>
-          <a:prstGeom prst="rect">
-            <a:avLst/>
-          </a:prstGeom>
-          <a:noFill/>
-          <a:ln/>
-        </p:spPr>
-        <p:txBody>
-          <a:bodyPr wrap="square" rtlCol="0" anchor="ctr"/>
-          <a:lstStyle/>
-          <a:p>
-            <a:pPr indent="0" marL="0">
-              <a:buNone/>
-            </a:pPr>
-            <a:r>
-              <a:rPr lang="en-US" sz="1050" dirty="0">
+            <a:off x="320040" y="4572000"/>
+            <a:ext cx="2468880" cy="402336"/>
+          </a:xfrm>
+          <a:prstGeom prst="rect">
+            <a:avLst/>
+          </a:prstGeom>
+          <a:noFill/>
+          <a:ln/>
+        </p:spPr>
+        <p:txBody>
+          <a:bodyPr wrap="square" rtlCol="0" anchor="ctr"/>
+          <a:lstStyle/>
+          <a:p>
+            <a:pPr indent="0" marL="0">
+              <a:buNone/>
+            </a:pPr>
+            <a:r>
+              <a:rPr lang="en-US" sz="1000" dirty="0">
                 <a:solidFill>
                   <a:srgbClr val="1F1235"/>
                 </a:solidFill>
               </a:rPr>
               <a:t>✅ RBAC 미들웨어 + 운영 RLS</a:t>
             </a:r>
-            <a:endParaRPr lang="en-US" sz="1050" dirty="0"/>
+            <a:endParaRPr lang="en-US" sz="1000" dirty="0"/>
           </a:p>
         </p:txBody>
       </p:sp>
@@ -6137,31 +6137,31 @@
         </p:nvSpPr>
         <p:spPr>
           <a:xfrm>
-            <a:off x="438912" y="5230368"/>
-            <a:ext cx="2606040" cy="420624"/>
-          </a:xfrm>
-          <a:prstGeom prst="rect">
-            <a:avLst/>
-          </a:prstGeom>
-          <a:noFill/>
-          <a:ln/>
-        </p:spPr>
-        <p:txBody>
-          <a:bodyPr wrap="square" rtlCol="0" anchor="ctr"/>
-          <a:lstStyle/>
-          <a:p>
-            <a:pPr indent="0" marL="0">
-              <a:buNone/>
-            </a:pPr>
-            <a:r>
-              <a:rPr lang="en-US" sz="1050" dirty="0">
+            <a:off x="320040" y="5010912"/>
+            <a:ext cx="2468880" cy="402336"/>
+          </a:xfrm>
+          <a:prstGeom prst="rect">
+            <a:avLst/>
+          </a:prstGeom>
+          <a:noFill/>
+          <a:ln/>
+        </p:spPr>
+        <p:txBody>
+          <a:bodyPr wrap="square" rtlCol="0" anchor="ctr"/>
+          <a:lstStyle/>
+          <a:p>
+            <a:pPr indent="0" marL="0">
+              <a:buNone/>
+            </a:pPr>
+            <a:r>
+              <a:rPr lang="en-US" sz="1000" dirty="0">
                 <a:solidFill>
                   <a:srgbClr val="1F1235"/>
                 </a:solidFill>
               </a:rPr>
               <a:t>✅ DB 인덱스 30개+ 최적화</a:t>
             </a:r>
-            <a:endParaRPr lang="en-US" sz="1050" dirty="0"/>
+            <a:endParaRPr lang="en-US" sz="1000" dirty="0"/>
           </a:p>
         </p:txBody>
       </p:sp>
@@ -6173,31 +6173,31 @@
         </p:nvSpPr>
         <p:spPr>
           <a:xfrm>
-            <a:off x="438912" y="5705856"/>
-            <a:ext cx="2606040" cy="420624"/>
-          </a:xfrm>
-          <a:prstGeom prst="rect">
-            <a:avLst/>
-          </a:prstGeom>
-          <a:noFill/>
-          <a:ln/>
-        </p:spPr>
-        <p:txBody>
-          <a:bodyPr wrap="square" rtlCol="0" anchor="ctr"/>
-          <a:lstStyle/>
-          <a:p>
-            <a:pPr indent="0" marL="0">
-              <a:buNone/>
-            </a:pPr>
-            <a:r>
-              <a:rPr lang="en-US" sz="1050" dirty="0">
+            <a:off x="320040" y="5449824"/>
+            <a:ext cx="2468880" cy="402336"/>
+          </a:xfrm>
+          <a:prstGeom prst="rect">
+            <a:avLst/>
+          </a:prstGeom>
+          <a:noFill/>
+          <a:ln/>
+        </p:spPr>
+        <p:txBody>
+          <a:bodyPr wrap="square" rtlCol="0" anchor="ctr"/>
+          <a:lstStyle/>
+          <a:p>
+            <a:pPr indent="0" marL="0">
+              <a:buNone/>
+            </a:pPr>
+            <a:r>
+              <a:rPr lang="en-US" sz="1000" dirty="0">
                 <a:solidFill>
                   <a:srgbClr val="1F1235"/>
                 </a:solidFill>
               </a:rPr>
               <a:t>✅ FCM 푸시 알림 + 관리자 일괄 발송</a:t>
             </a:r>
-            <a:endParaRPr lang="en-US" sz="1050" dirty="0"/>
+            <a:endParaRPr lang="en-US" sz="1000" dirty="0"/>
           </a:p>
         </p:txBody>
       </p:sp>
@@ -6209,12 +6209,12 @@
         </p:nvSpPr>
         <p:spPr>
           <a:xfrm>
-            <a:off x="3429000" y="914400"/>
-            <a:ext cx="2926080" cy="4983480"/>
+            <a:off x="3136392" y="914400"/>
+            <a:ext cx="2743200" cy="4983480"/>
           </a:xfrm>
           <a:prstGeom prst="roundRect">
             <a:avLst>
-              <a:gd name="adj" fmla="val 5625"/>
+              <a:gd name="adj" fmla="val 6000"/>
             </a:avLst>
           </a:prstGeom>
           <a:solidFill>
@@ -6236,8 +6236,8 @@
         </p:nvSpPr>
         <p:spPr>
           <a:xfrm>
-            <a:off x="3566160" y="1024128"/>
-            <a:ext cx="2651760" cy="822960"/>
+            <a:off x="3246120" y="1024128"/>
+            <a:ext cx="2523744" cy="822960"/>
           </a:xfrm>
           <a:prstGeom prst="roundRect">
             <a:avLst>
@@ -6263,8 +6263,8 @@
         </p:nvSpPr>
         <p:spPr>
           <a:xfrm>
-            <a:off x="3566160" y="1024128"/>
-            <a:ext cx="2651760" cy="402336"/>
+            <a:off x="3246120" y="1024128"/>
+            <a:ext cx="2523744" cy="402336"/>
           </a:xfrm>
           <a:prstGeom prst="rect">
             <a:avLst/>
@@ -6299,7 +6299,7 @@
         </p:nvSpPr>
         <p:spPr>
           <a:xfrm>
-            <a:off x="3566160" y="1417320"/>
+            <a:off x="3273552" y="1417320"/>
             <a:ext cx="2651760" cy="347472"/>
           </a:xfrm>
           <a:prstGeom prst="rect">
@@ -6335,7 +6335,7 @@
         </p:nvSpPr>
         <p:spPr>
           <a:xfrm>
-            <a:off x="3977640" y="1938528"/>
+            <a:off x="3593592" y="1938528"/>
             <a:ext cx="1828800" cy="320040"/>
           </a:xfrm>
           <a:prstGeom prst="roundRect">
@@ -6362,7 +6362,7 @@
         </p:nvSpPr>
         <p:spPr>
           <a:xfrm>
-            <a:off x="3977640" y="1938528"/>
+            <a:off x="3593592" y="1938528"/>
             <a:ext cx="1828800" cy="320040"/>
           </a:xfrm>
           <a:prstGeom prst="rect">
@@ -6398,31 +6398,31 @@
         </p:nvSpPr>
         <p:spPr>
           <a:xfrm>
-            <a:off x="3593592" y="2377440"/>
-            <a:ext cx="2606040" cy="420624"/>
-          </a:xfrm>
-          <a:prstGeom prst="rect">
-            <a:avLst/>
-          </a:prstGeom>
-          <a:noFill/>
-          <a:ln/>
-        </p:spPr>
-        <p:txBody>
-          <a:bodyPr wrap="square" rtlCol="0" anchor="ctr"/>
-          <a:lstStyle/>
-          <a:p>
-            <a:pPr indent="0" marL="0">
-              <a:buNone/>
-            </a:pPr>
-            <a:r>
-              <a:rPr lang="en-US" sz="1050" dirty="0">
+            <a:off x="3273552" y="2377440"/>
+            <a:ext cx="2468880" cy="402336"/>
+          </a:xfrm>
+          <a:prstGeom prst="rect">
+            <a:avLst/>
+          </a:prstGeom>
+          <a:noFill/>
+          <a:ln/>
+        </p:spPr>
+        <p:txBody>
+          <a:bodyPr wrap="square" rtlCol="0" anchor="ctr"/>
+          <a:lstStyle/>
+          <a:p>
+            <a:pPr indent="0" marL="0">
+              <a:buNone/>
+            </a:pPr>
+            <a:r>
+              <a:rPr lang="en-US" sz="1000" dirty="0">
                 <a:solidFill>
                   <a:srgbClr val="1F1235"/>
                 </a:solidFill>
               </a:rPr>
               <a:t>✅ 다크모드 (Tailwind dark: 전면 적용)</a:t>
             </a:r>
-            <a:endParaRPr lang="en-US" sz="1050" dirty="0"/>
+            <a:endParaRPr lang="en-US" sz="1000" dirty="0"/>
           </a:p>
         </p:txBody>
       </p:sp>
@@ -6434,31 +6434,31 @@
         </p:nvSpPr>
         <p:spPr>
           <a:xfrm>
-            <a:off x="3593592" y="2852928"/>
-            <a:ext cx="2606040" cy="420624"/>
-          </a:xfrm>
-          <a:prstGeom prst="rect">
-            <a:avLst/>
-          </a:prstGeom>
-          <a:noFill/>
-          <a:ln/>
-        </p:spPr>
-        <p:txBody>
-          <a:bodyPr wrap="square" rtlCol="0" anchor="ctr"/>
-          <a:lstStyle/>
-          <a:p>
-            <a:pPr indent="0" marL="0">
-              <a:buNone/>
-            </a:pPr>
-            <a:r>
-              <a:rPr lang="en-US" sz="1050" dirty="0">
+            <a:off x="3273552" y="2816352"/>
+            <a:ext cx="2468880" cy="402336"/>
+          </a:xfrm>
+          <a:prstGeom prst="rect">
+            <a:avLst/>
+          </a:prstGeom>
+          <a:noFill/>
+          <a:ln/>
+        </p:spPr>
+        <p:txBody>
+          <a:bodyPr wrap="square" rtlCol="0" anchor="ctr"/>
+          <a:lstStyle/>
+          <a:p>
+            <a:pPr indent="0" marL="0">
+              <a:buNone/>
+            </a:pPr>
+            <a:r>
+              <a:rPr lang="en-US" sz="1000" dirty="0">
                 <a:solidFill>
                   <a:srgbClr val="1F1235"/>
                 </a:solidFill>
               </a:rPr>
               <a:t>✅ 다중 배달 주소 + 카카오 주소검색</a:t>
             </a:r>
-            <a:endParaRPr lang="en-US" sz="1050" dirty="0"/>
+            <a:endParaRPr lang="en-US" sz="1000" dirty="0"/>
           </a:p>
         </p:txBody>
       </p:sp>
@@ -6470,31 +6470,31 @@
         </p:nvSpPr>
         <p:spPr>
           <a:xfrm>
-            <a:off x="3593592" y="3328416"/>
-            <a:ext cx="2606040" cy="420624"/>
-          </a:xfrm>
-          <a:prstGeom prst="rect">
-            <a:avLst/>
-          </a:prstGeom>
-          <a:noFill/>
-          <a:ln/>
-        </p:spPr>
-        <p:txBody>
-          <a:bodyPr wrap="square" rtlCol="0" anchor="ctr"/>
-          <a:lstStyle/>
-          <a:p>
-            <a:pPr indent="0" marL="0">
-              <a:buNone/>
-            </a:pPr>
-            <a:r>
-              <a:rPr lang="en-US" sz="1050" dirty="0">
+            <a:off x="3273552" y="3255264"/>
+            <a:ext cx="2468880" cy="402336"/>
+          </a:xfrm>
+          <a:prstGeom prst="rect">
+            <a:avLst/>
+          </a:prstGeom>
+          <a:noFill/>
+          <a:ln/>
+        </p:spPr>
+        <p:txBody>
+          <a:bodyPr wrap="square" rtlCol="0" anchor="ctr"/>
+          <a:lstStyle/>
+          <a:p>
+            <a:pPr indent="0" marL="0">
+              <a:buNone/>
+            </a:pPr>
+            <a:r>
+              <a:rPr lang="en-US" sz="1000" dirty="0">
                 <a:solidFill>
                   <a:srgbClr val="1F1235"/>
                 </a:solidFill>
               </a:rPr>
               <a:t>✅ PICK 등급 적립 배율 적용</a:t>
             </a:r>
-            <a:endParaRPr lang="en-US" sz="1050" dirty="0"/>
+            <a:endParaRPr lang="en-US" sz="1000" dirty="0"/>
           </a:p>
         </p:txBody>
       </p:sp>
@@ -6506,31 +6506,31 @@
         </p:nvSpPr>
         <p:spPr>
           <a:xfrm>
-            <a:off x="3593592" y="3803904"/>
-            <a:ext cx="2606040" cy="420624"/>
-          </a:xfrm>
-          <a:prstGeom prst="rect">
-            <a:avLst/>
-          </a:prstGeom>
-          <a:noFill/>
-          <a:ln/>
-        </p:spPr>
-        <p:txBody>
-          <a:bodyPr wrap="square" rtlCol="0" anchor="ctr"/>
-          <a:lstStyle/>
-          <a:p>
-            <a:pPr indent="0" marL="0">
-              <a:buNone/>
-            </a:pPr>
-            <a:r>
-              <a:rPr lang="en-US" sz="1050" dirty="0">
+            <a:off x="3273552" y="3694176"/>
+            <a:ext cx="2468880" cy="402336"/>
+          </a:xfrm>
+          <a:prstGeom prst="rect">
+            <a:avLst/>
+          </a:prstGeom>
+          <a:noFill/>
+          <a:ln/>
+        </p:spPr>
+        <p:txBody>
+          <a:bodyPr wrap="square" rtlCol="0" anchor="ctr"/>
+          <a:lstStyle/>
+          <a:p>
+            <a:pPr indent="0" marL="0">
+              <a:buNone/>
+            </a:pPr>
+            <a:r>
+              <a:rPr lang="en-US" sz="1000" dirty="0">
                 <a:solidFill>
                   <a:srgbClr val="1F1235"/>
                 </a:solidFill>
               </a:rPr>
               <a:t>✅ 가맹점 광고·노출 시스템</a:t>
             </a:r>
-            <a:endParaRPr lang="en-US" sz="1050" dirty="0"/>
+            <a:endParaRPr lang="en-US" sz="1000" dirty="0"/>
           </a:p>
         </p:txBody>
       </p:sp>
@@ -6542,31 +6542,31 @@
         </p:nvSpPr>
         <p:spPr>
           <a:xfrm>
-            <a:off x="3593592" y="4279392"/>
-            <a:ext cx="2606040" cy="420624"/>
-          </a:xfrm>
-          <a:prstGeom prst="rect">
-            <a:avLst/>
-          </a:prstGeom>
-          <a:noFill/>
-          <a:ln/>
-        </p:spPr>
-        <p:txBody>
-          <a:bodyPr wrap="square" rtlCol="0" anchor="ctr"/>
-          <a:lstStyle/>
-          <a:p>
-            <a:pPr indent="0" marL="0">
-              <a:buNone/>
-            </a:pPr>
-            <a:r>
-              <a:rPr lang="en-US" sz="1050" dirty="0">
+            <a:off x="3273552" y="4133088"/>
+            <a:ext cx="2468880" cy="402336"/>
+          </a:xfrm>
+          <a:prstGeom prst="rect">
+            <a:avLst/>
+          </a:prstGeom>
+          <a:noFill/>
+          <a:ln/>
+        </p:spPr>
+        <p:txBody>
+          <a:bodyPr wrap="square" rtlCol="0" anchor="ctr"/>
+          <a:lstStyle/>
+          <a:p>
+            <a:pPr indent="0" marL="0">
+              <a:buNone/>
+            </a:pPr>
+            <a:r>
+              <a:rPr lang="en-US" sz="1000" dirty="0">
                 <a:solidFill>
                   <a:srgbClr val="1F1235"/>
                 </a:solidFill>
               </a:rPr>
               <a:t>✅ 주간 영업시간 표시 + 실사 이미지</a:t>
             </a:r>
-            <a:endParaRPr lang="en-US" sz="1050" dirty="0"/>
+            <a:endParaRPr lang="en-US" sz="1000" dirty="0"/>
           </a:p>
         </p:txBody>
       </p:sp>
@@ -6578,31 +6578,31 @@
         </p:nvSpPr>
         <p:spPr>
           <a:xfrm>
-            <a:off x="3593592" y="4754880"/>
-            <a:ext cx="2606040" cy="420624"/>
-          </a:xfrm>
-          <a:prstGeom prst="rect">
-            <a:avLst/>
-          </a:prstGeom>
-          <a:noFill/>
-          <a:ln/>
-        </p:spPr>
-        <p:txBody>
-          <a:bodyPr wrap="square" rtlCol="0" anchor="ctr"/>
-          <a:lstStyle/>
-          <a:p>
-            <a:pPr indent="0" marL="0">
-              <a:buNone/>
-            </a:pPr>
-            <a:r>
-              <a:rPr lang="en-US" sz="1050" dirty="0">
+            <a:off x="3273552" y="4572000"/>
+            <a:ext cx="2468880" cy="402336"/>
+          </a:xfrm>
+          <a:prstGeom prst="rect">
+            <a:avLst/>
+          </a:prstGeom>
+          <a:noFill/>
+          <a:ln/>
+        </p:spPr>
+        <p:txBody>
+          <a:bodyPr wrap="square" rtlCol="0" anchor="ctr"/>
+          <a:lstStyle/>
+          <a:p>
+            <a:pPr indent="0" marL="0">
+              <a:buNone/>
+            </a:pPr>
+            <a:r>
+              <a:rPr lang="en-US" sz="1000" dirty="0">
                 <a:solidFill>
                   <a:srgbClr val="1F1235"/>
                 </a:solidFill>
               </a:rPr>
               <a:t>✅ FCM 푸시 알림 완성</a:t>
             </a:r>
-            <a:endParaRPr lang="en-US" sz="1050" dirty="0"/>
+            <a:endParaRPr lang="en-US" sz="1000" dirty="0"/>
           </a:p>
         </p:txBody>
       </p:sp>
@@ -6614,12 +6614,12 @@
         </p:nvSpPr>
         <p:spPr>
           <a:xfrm>
-            <a:off x="6583680" y="914400"/>
-            <a:ext cx="2926080" cy="4983480"/>
+            <a:off x="6089904" y="914400"/>
+            <a:ext cx="2743200" cy="4983480"/>
           </a:xfrm>
           <a:prstGeom prst="roundRect">
             <a:avLst>
-              <a:gd name="adj" fmla="val 5625"/>
+              <a:gd name="adj" fmla="val 6000"/>
             </a:avLst>
           </a:prstGeom>
           <a:solidFill>
@@ -6641,8 +6641,8 @@
         </p:nvSpPr>
         <p:spPr>
           <a:xfrm>
-            <a:off x="6720840" y="1024128"/>
-            <a:ext cx="2651760" cy="822960"/>
+            <a:off x="6199632" y="1024128"/>
+            <a:ext cx="2523744" cy="822960"/>
           </a:xfrm>
           <a:prstGeom prst="roundRect">
             <a:avLst>
@@ -6668,8 +6668,8 @@
         </p:nvSpPr>
         <p:spPr>
           <a:xfrm>
-            <a:off x="6720840" y="1024128"/>
-            <a:ext cx="2651760" cy="402336"/>
+            <a:off x="6199632" y="1024128"/>
+            <a:ext cx="2523744" cy="402336"/>
           </a:xfrm>
           <a:prstGeom prst="rect">
             <a:avLst/>
@@ -6704,7 +6704,7 @@
         </p:nvSpPr>
         <p:spPr>
           <a:xfrm>
-            <a:off x="6720840" y="1417320"/>
+            <a:off x="6227064" y="1417320"/>
             <a:ext cx="2651760" cy="347472"/>
           </a:xfrm>
           <a:prstGeom prst="rect">
@@ -6740,7 +6740,7 @@
         </p:nvSpPr>
         <p:spPr>
           <a:xfrm>
-            <a:off x="7132320" y="1938528"/>
+            <a:off x="6547104" y="1938528"/>
             <a:ext cx="1828800" cy="320040"/>
           </a:xfrm>
           <a:prstGeom prst="roundRect">
@@ -6767,7 +6767,7 @@
         </p:nvSpPr>
         <p:spPr>
           <a:xfrm>
-            <a:off x="7132320" y="1938528"/>
+            <a:off x="6547104" y="1938528"/>
             <a:ext cx="1828800" cy="320040"/>
           </a:xfrm>
           <a:prstGeom prst="rect">
@@ -6803,31 +6803,31 @@
         </p:nvSpPr>
         <p:spPr>
           <a:xfrm>
-            <a:off x="6748272" y="2377440"/>
-            <a:ext cx="2606040" cy="420624"/>
-          </a:xfrm>
-          <a:prstGeom prst="rect">
-            <a:avLst/>
-          </a:prstGeom>
-          <a:noFill/>
-          <a:ln/>
-        </p:spPr>
-        <p:txBody>
-          <a:bodyPr wrap="square" rtlCol="0" anchor="ctr"/>
-          <a:lstStyle/>
-          <a:p>
-            <a:pPr indent="0" marL="0">
-              <a:buNone/>
-            </a:pPr>
-            <a:r>
-              <a:rPr lang="en-US" sz="1050" dirty="0">
+            <a:off x="6227064" y="2377440"/>
+            <a:ext cx="2468880" cy="402336"/>
+          </a:xfrm>
+          <a:prstGeom prst="rect">
+            <a:avLst/>
+          </a:prstGeom>
+          <a:noFill/>
+          <a:ln/>
+        </p:spPr>
+        <p:txBody>
+          <a:bodyPr wrap="square" rtlCol="0" anchor="ctr"/>
+          <a:lstStyle/>
+          <a:p>
+            <a:pPr indent="0" marL="0">
+              <a:buNone/>
+            </a:pPr>
+            <a:r>
+              <a:rPr lang="en-US" sz="1000" dirty="0">
                 <a:solidFill>
                   <a:srgbClr val="1F1235"/>
                 </a:solidFill>
               </a:rPr>
               <a:t>✅ 토스페이먼츠 카드·간편결제</a:t>
             </a:r>
-            <a:endParaRPr lang="en-US" sz="1050" dirty="0"/>
+            <a:endParaRPr lang="en-US" sz="1000" dirty="0"/>
           </a:p>
         </p:txBody>
       </p:sp>
@@ -6839,31 +6839,31 @@
         </p:nvSpPr>
         <p:spPr>
           <a:xfrm>
-            <a:off x="6748272" y="2852928"/>
-            <a:ext cx="2606040" cy="420624"/>
-          </a:xfrm>
-          <a:prstGeom prst="rect">
-            <a:avLst/>
-          </a:prstGeom>
-          <a:noFill/>
-          <a:ln/>
-        </p:spPr>
-        <p:txBody>
-          <a:bodyPr wrap="square" rtlCol="0" anchor="ctr"/>
-          <a:lstStyle/>
-          <a:p>
-            <a:pPr indent="0" marL="0">
-              <a:buNone/>
-            </a:pPr>
-            <a:r>
-              <a:rPr lang="en-US" sz="1050" dirty="0">
+            <a:off x="6227064" y="2816352"/>
+            <a:ext cx="2468880" cy="402336"/>
+          </a:xfrm>
+          <a:prstGeom prst="rect">
+            <a:avLst/>
+          </a:prstGeom>
+          <a:noFill/>
+          <a:ln/>
+        </p:spPr>
+        <p:txBody>
+          <a:bodyPr wrap="square" rtlCol="0" anchor="ctr"/>
+          <a:lstStyle/>
+          <a:p>
+            <a:pPr indent="0" marL="0">
+              <a:buNone/>
+            </a:pPr>
+            <a:r>
+              <a:rPr lang="en-US" sz="1000" dirty="0">
                 <a:solidFill>
                   <a:srgbClr val="1F1235"/>
                 </a:solidFill>
               </a:rPr>
               <a:t>✅ PWA 오프라인 (Serwist 캐싱)</a:t>
             </a:r>
-            <a:endParaRPr lang="en-US" sz="1050" dirty="0"/>
+            <a:endParaRPr lang="en-US" sz="1000" dirty="0"/>
           </a:p>
         </p:txBody>
       </p:sp>
@@ -6875,31 +6875,31 @@
         </p:nvSpPr>
         <p:spPr>
           <a:xfrm>
-            <a:off x="6748272" y="3328416"/>
-            <a:ext cx="2606040" cy="420624"/>
-          </a:xfrm>
-          <a:prstGeom prst="rect">
-            <a:avLst/>
-          </a:prstGeom>
-          <a:noFill/>
-          <a:ln/>
-        </p:spPr>
-        <p:txBody>
-          <a:bodyPr wrap="square" rtlCol="0" anchor="ctr"/>
-          <a:lstStyle/>
-          <a:p>
-            <a:pPr indent="0" marL="0">
-              <a:buNone/>
-            </a:pPr>
-            <a:r>
-              <a:rPr lang="en-US" sz="1050" dirty="0">
+            <a:off x="6227064" y="3255264"/>
+            <a:ext cx="2468880" cy="402336"/>
+          </a:xfrm>
+          <a:prstGeom prst="rect">
+            <a:avLst/>
+          </a:prstGeom>
+          <a:noFill/>
+          <a:ln/>
+        </p:spPr>
+        <p:txBody>
+          <a:bodyPr wrap="square" rtlCol="0" anchor="ctr"/>
+          <a:lstStyle/>
+          <a:p>
+            <a:pPr indent="0" marL="0">
+              <a:buNone/>
+            </a:pPr>
+            <a:r>
+              <a:rPr lang="en-US" sz="1000" dirty="0">
                 <a:solidFill>
                   <a:srgbClr val="1F1235"/>
                 </a:solidFill>
               </a:rPr>
               <a:t>✅ 가맹점 광고 시스템</a:t>
             </a:r>
-            <a:endParaRPr lang="en-US" sz="1050" dirty="0"/>
+            <a:endParaRPr lang="en-US" sz="1000" dirty="0"/>
           </a:p>
         </p:txBody>
       </p:sp>
@@ -6911,31 +6911,31 @@
         </p:nvSpPr>
         <p:spPr>
           <a:xfrm>
-            <a:off x="6748272" y="3803904"/>
-            <a:ext cx="2606040" cy="420624"/>
-          </a:xfrm>
-          <a:prstGeom prst="rect">
-            <a:avLst/>
-          </a:prstGeom>
-          <a:noFill/>
-          <a:ln/>
-        </p:spPr>
-        <p:txBody>
-          <a:bodyPr wrap="square" rtlCol="0" anchor="ctr"/>
-          <a:lstStyle/>
-          <a:p>
-            <a:pPr indent="0" marL="0">
-              <a:buNone/>
-            </a:pPr>
-            <a:r>
-              <a:rPr lang="en-US" sz="1050" dirty="0">
+            <a:off x="6227064" y="3694176"/>
+            <a:ext cx="2468880" cy="402336"/>
+          </a:xfrm>
+          <a:prstGeom prst="rect">
+            <a:avLst/>
+          </a:prstGeom>
+          <a:noFill/>
+          <a:ln/>
+        </p:spPr>
+        <p:txBody>
+          <a:bodyPr wrap="square" rtlCol="0" anchor="ctr"/>
+          <a:lstStyle/>
+          <a:p>
+            <a:pPr indent="0" marL="0">
+              <a:buNone/>
+            </a:pPr>
+            <a:r>
+              <a:rPr lang="en-US" sz="1000" dirty="0">
                 <a:solidFill>
                   <a:srgbClr val="1F1235"/>
                 </a:solidFill>
               </a:rPr>
               <a:t>✅ Sentry 모니터링 설정</a:t>
             </a:r>
-            <a:endParaRPr lang="en-US" sz="1050" dirty="0"/>
+            <a:endParaRPr lang="en-US" sz="1000" dirty="0"/>
           </a:p>
         </p:txBody>
       </p:sp>
@@ -6947,31 +6947,31 @@
         </p:nvSpPr>
         <p:spPr>
           <a:xfrm>
-            <a:off x="6748272" y="4279392"/>
-            <a:ext cx="2606040" cy="420624"/>
-          </a:xfrm>
-          <a:prstGeom prst="rect">
-            <a:avLst/>
-          </a:prstGeom>
-          <a:noFill/>
-          <a:ln/>
-        </p:spPr>
-        <p:txBody>
-          <a:bodyPr wrap="square" rtlCol="0" anchor="ctr"/>
-          <a:lstStyle/>
-          <a:p>
-            <a:pPr indent="0" marL="0">
-              <a:buNone/>
-            </a:pPr>
-            <a:r>
-              <a:rPr lang="en-US" sz="1050" dirty="0">
+            <a:off x="6227064" y="4133088"/>
+            <a:ext cx="2468880" cy="402336"/>
+          </a:xfrm>
+          <a:prstGeom prst="rect">
+            <a:avLst/>
+          </a:prstGeom>
+          <a:noFill/>
+          <a:ln/>
+        </p:spPr>
+        <p:txBody>
+          <a:bodyPr wrap="square" rtlCol="0" anchor="ctr"/>
+          <a:lstStyle/>
+          <a:p>
+            <a:pPr indent="0" marL="0">
+              <a:buNone/>
+            </a:pPr>
+            <a:r>
+              <a:rPr lang="en-US" sz="1000" dirty="0">
                 <a:solidFill>
                   <a:srgbClr val="1F1235"/>
                 </a:solidFill>
               </a:rPr>
               <a:t>✅ 카카오 소셜 로그인</a:t>
             </a:r>
-            <a:endParaRPr lang="en-US" sz="1050" dirty="0"/>
+            <a:endParaRPr lang="en-US" sz="1000" dirty="0"/>
           </a:p>
         </p:txBody>
       </p:sp>
@@ -6983,31 +6983,31 @@
         </p:nvSpPr>
         <p:spPr>
           <a:xfrm>
-            <a:off x="6748272" y="4754880"/>
-            <a:ext cx="2606040" cy="420624"/>
-          </a:xfrm>
-          <a:prstGeom prst="rect">
-            <a:avLst/>
-          </a:prstGeom>
-          <a:noFill/>
-          <a:ln/>
-        </p:spPr>
-        <p:txBody>
-          <a:bodyPr wrap="square" rtlCol="0" anchor="ctr"/>
-          <a:lstStyle/>
-          <a:p>
-            <a:pPr indent="0" marL="0">
-              <a:buNone/>
-            </a:pPr>
-            <a:r>
-              <a:rPr lang="en-US" sz="1050" dirty="0">
+            <a:off x="6227064" y="4572000"/>
+            <a:ext cx="2468880" cy="402336"/>
+          </a:xfrm>
+          <a:prstGeom prst="rect">
+            <a:avLst/>
+          </a:prstGeom>
+          <a:noFill/>
+          <a:ln/>
+        </p:spPr>
+        <p:txBody>
+          <a:bodyPr wrap="square" rtlCol="0" anchor="ctr"/>
+          <a:lstStyle/>
+          <a:p>
+            <a:pPr indent="0" marL="0">
+              <a:buNone/>
+            </a:pPr>
+            <a:r>
+              <a:rPr lang="en-US" sz="1000" dirty="0">
                 <a:solidFill>
                   <a:srgbClr val="1F1235"/>
                 </a:solidFill>
               </a:rPr>
               <a:t>✅ 전문검색 GIN + RPC 함수</a:t>
             </a:r>
-            <a:endParaRPr lang="en-US" sz="1050" dirty="0"/>
+            <a:endParaRPr lang="en-US" sz="1000" dirty="0"/>
           </a:p>
         </p:txBody>
       </p:sp>
@@ -7019,12 +7019,12 @@
         </p:nvSpPr>
         <p:spPr>
           <a:xfrm>
-            <a:off x="9738360" y="914400"/>
-            <a:ext cx="2926080" cy="4983480"/>
+            <a:off x="9043416" y="914400"/>
+            <a:ext cx="2743200" cy="4983480"/>
           </a:xfrm>
           <a:prstGeom prst="roundRect">
             <a:avLst>
-              <a:gd name="adj" fmla="val 5625"/>
+              <a:gd name="adj" fmla="val 6000"/>
             </a:avLst>
           </a:prstGeom>
           <a:solidFill>
@@ -7046,8 +7046,8 @@
         </p:nvSpPr>
         <p:spPr>
           <a:xfrm>
-            <a:off x="9875520" y="1024128"/>
-            <a:ext cx="2651760" cy="822960"/>
+            <a:off x="9153144" y="1024128"/>
+            <a:ext cx="2523744" cy="822960"/>
           </a:xfrm>
           <a:prstGeom prst="roundRect">
             <a:avLst>
@@ -7073,8 +7073,8 @@
         </p:nvSpPr>
         <p:spPr>
           <a:xfrm>
-            <a:off x="9875520" y="1024128"/>
-            <a:ext cx="2651760" cy="402336"/>
+            <a:off x="9153144" y="1024128"/>
+            <a:ext cx="2523744" cy="402336"/>
           </a:xfrm>
           <a:prstGeom prst="rect">
             <a:avLst/>
@@ -7109,7 +7109,7 @@
         </p:nvSpPr>
         <p:spPr>
           <a:xfrm>
-            <a:off x="9875520" y="1417320"/>
+            <a:off x="9180576" y="1417320"/>
             <a:ext cx="2651760" cy="347472"/>
           </a:xfrm>
           <a:prstGeom prst="rect">
@@ -7145,7 +7145,7 @@
         </p:nvSpPr>
         <p:spPr>
           <a:xfrm>
-            <a:off x="10287000" y="1938528"/>
+            <a:off x="9500616" y="1938528"/>
             <a:ext cx="1828800" cy="320040"/>
           </a:xfrm>
           <a:prstGeom prst="roundRect">
@@ -7172,7 +7172,7 @@
         </p:nvSpPr>
         <p:spPr>
           <a:xfrm>
-            <a:off x="10287000" y="1938528"/>
+            <a:off x="9500616" y="1938528"/>
             <a:ext cx="1828800" cy="320040"/>
           </a:xfrm>
           <a:prstGeom prst="rect">
@@ -7208,31 +7208,31 @@
         </p:nvSpPr>
         <p:spPr>
           <a:xfrm>
-            <a:off x="9902952" y="2377440"/>
-            <a:ext cx="2606040" cy="420624"/>
-          </a:xfrm>
-          <a:prstGeom prst="rect">
-            <a:avLst/>
-          </a:prstGeom>
-          <a:noFill/>
-          <a:ln/>
-        </p:spPr>
-        <p:txBody>
-          <a:bodyPr wrap="square" rtlCol="0" anchor="ctr"/>
-          <a:lstStyle/>
-          <a:p>
-            <a:pPr indent="0" marL="0">
-              <a:buNone/>
-            </a:pPr>
-            <a:r>
-              <a:rPr lang="en-US" sz="1050" dirty="0">
+            <a:off x="9180576" y="2377440"/>
+            <a:ext cx="2468880" cy="402336"/>
+          </a:xfrm>
+          <a:prstGeom prst="rect">
+            <a:avLst/>
+          </a:prstGeom>
+          <a:noFill/>
+          <a:ln/>
+        </p:spPr>
+        <p:txBody>
+          <a:bodyPr wrap="square" rtlCol="0" anchor="ctr"/>
+          <a:lstStyle/>
+          <a:p>
+            <a:pPr indent="0" marL="0">
+              <a:buNone/>
+            </a:pPr>
+            <a:r>
+              <a:rPr lang="en-US" sz="1000" dirty="0">
                 <a:solidFill>
                   <a:srgbClr val="1F1235"/>
                 </a:solidFill>
               </a:rPr>
               <a:t>⏳ Pi Network SDK 인증</a:t>
             </a:r>
-            <a:endParaRPr lang="en-US" sz="1050" dirty="0"/>
+            <a:endParaRPr lang="en-US" sz="1000" dirty="0"/>
           </a:p>
         </p:txBody>
       </p:sp>
@@ -7244,31 +7244,31 @@
         </p:nvSpPr>
         <p:spPr>
           <a:xfrm>
-            <a:off x="9902952" y="2852928"/>
-            <a:ext cx="2606040" cy="420624"/>
-          </a:xfrm>
-          <a:prstGeom prst="rect">
-            <a:avLst/>
-          </a:prstGeom>
-          <a:noFill/>
-          <a:ln/>
-        </p:spPr>
-        <p:txBody>
-          <a:bodyPr wrap="square" rtlCol="0" anchor="ctr"/>
-          <a:lstStyle/>
-          <a:p>
-            <a:pPr indent="0" marL="0">
-              <a:buNone/>
-            </a:pPr>
-            <a:r>
-              <a:rPr lang="en-US" sz="1050" dirty="0">
+            <a:off x="9180576" y="2816352"/>
+            <a:ext cx="2468880" cy="402336"/>
+          </a:xfrm>
+          <a:prstGeom prst="rect">
+            <a:avLst/>
+          </a:prstGeom>
+          <a:noFill/>
+          <a:ln/>
+        </p:spPr>
+        <p:txBody>
+          <a:bodyPr wrap="square" rtlCol="0" anchor="ctr"/>
+          <a:lstStyle/>
+          <a:p>
+            <a:pPr indent="0" marL="0">
+              <a:buNone/>
+            </a:pPr>
+            <a:r>
+              <a:rPr lang="en-US" sz="1000" dirty="0">
                 <a:solidFill>
                   <a:srgbClr val="1F1235"/>
                 </a:solidFill>
               </a:rPr>
               <a:t>⏳ Pi 코인 결제 연동</a:t>
             </a:r>
-            <a:endParaRPr lang="en-US" sz="1050" dirty="0"/>
+            <a:endParaRPr lang="en-US" sz="1000" dirty="0"/>
           </a:p>
         </p:txBody>
       </p:sp>
@@ -7280,31 +7280,31 @@
         </p:nvSpPr>
         <p:spPr>
           <a:xfrm>
-            <a:off x="9902952" y="3328416"/>
-            <a:ext cx="2606040" cy="420624"/>
-          </a:xfrm>
-          <a:prstGeom prst="rect">
-            <a:avLst/>
-          </a:prstGeom>
-          <a:noFill/>
-          <a:ln/>
-        </p:spPr>
-        <p:txBody>
-          <a:bodyPr wrap="square" rtlCol="0" anchor="ctr"/>
-          <a:lstStyle/>
-          <a:p>
-            <a:pPr indent="0" marL="0">
-              <a:buNone/>
-            </a:pPr>
-            <a:r>
-              <a:rPr lang="en-US" sz="1050" dirty="0">
+            <a:off x="9180576" y="3255264"/>
+            <a:ext cx="2468880" cy="402336"/>
+          </a:xfrm>
+          <a:prstGeom prst="rect">
+            <a:avLst/>
+          </a:prstGeom>
+          <a:noFill/>
+          <a:ln/>
+        </p:spPr>
+        <p:txBody>
+          <a:bodyPr wrap="square" rtlCol="0" anchor="ctr"/>
+          <a:lstStyle/>
+          <a:p>
+            <a:pPr indent="0" marL="0">
+              <a:buNone/>
+            </a:pPr>
+            <a:r>
+              <a:rPr lang="en-US" sz="1000" dirty="0">
                 <a:solidFill>
                   <a:srgbClr val="1F1235"/>
                 </a:solidFill>
               </a:rPr>
               <a:t>⏳ PICK ↔ Pi 토큰 전환</a:t>
             </a:r>
-            <a:endParaRPr lang="en-US" sz="1050" dirty="0"/>
+            <a:endParaRPr lang="en-US" sz="1000" dirty="0"/>
           </a:p>
         </p:txBody>
       </p:sp>
@@ -7316,31 +7316,31 @@
         </p:nvSpPr>
         <p:spPr>
           <a:xfrm>
-            <a:off x="9902952" y="3803904"/>
-            <a:ext cx="2606040" cy="420624"/>
-          </a:xfrm>
-          <a:prstGeom prst="rect">
-            <a:avLst/>
-          </a:prstGeom>
-          <a:noFill/>
-          <a:ln/>
-        </p:spPr>
-        <p:txBody>
-          <a:bodyPr wrap="square" rtlCol="0" anchor="ctr"/>
-          <a:lstStyle/>
-          <a:p>
-            <a:pPr indent="0" marL="0">
-              <a:buNone/>
-            </a:pPr>
-            <a:r>
-              <a:rPr lang="en-US" sz="1050" dirty="0">
+            <a:off x="9180576" y="3694176"/>
+            <a:ext cx="2468880" cy="402336"/>
+          </a:xfrm>
+          <a:prstGeom prst="rect">
+            <a:avLst/>
+          </a:prstGeom>
+          <a:noFill/>
+          <a:ln/>
+        </p:spPr>
+        <p:txBody>
+          <a:bodyPr wrap="square" rtlCol="0" anchor="ctr"/>
+          <a:lstStyle/>
+          <a:p>
+            <a:pPr indent="0" marL="0">
+              <a:buNone/>
+            </a:pPr>
+            <a:r>
+              <a:rPr lang="en-US" sz="1000" dirty="0">
                 <a:solidFill>
                   <a:srgbClr val="1F1235"/>
                 </a:solidFill>
               </a:rPr>
               <a:t>⏳ Pi 기반 정산 시스템</a:t>
             </a:r>
-            <a:endParaRPr lang="en-US" sz="1050" dirty="0"/>
+            <a:endParaRPr lang="en-US" sz="1000" dirty="0"/>
           </a:p>
         </p:txBody>
       </p:sp>
@@ -9958,8 +9958,8 @@
         </p:nvSpPr>
         <p:spPr>
           <a:xfrm>
-            <a:off x="365760" y="914400"/>
-            <a:ext cx="3840480" cy="1965960"/>
+            <a:off x="228600" y="914400"/>
+            <a:ext cx="3749040" cy="1965960"/>
           </a:xfrm>
           <a:prstGeom prst="roundRect">
             <a:avLst>
@@ -9985,7 +9985,7 @@
         </p:nvSpPr>
         <p:spPr>
           <a:xfrm>
-            <a:off x="530352" y="1097280"/>
+            <a:off x="393192" y="1097280"/>
             <a:ext cx="530352" cy="530352"/>
           </a:xfrm>
           <a:prstGeom prst="roundRect">
@@ -10012,7 +10012,7 @@
         </p:nvSpPr>
         <p:spPr>
           <a:xfrm>
-            <a:off x="530352" y="1078992"/>
+            <a:off x="393192" y="1078992"/>
             <a:ext cx="548640" cy="548640"/>
           </a:xfrm>
           <a:prstGeom prst="rect">
@@ -10048,8 +10048,8 @@
         </p:nvSpPr>
         <p:spPr>
           <a:xfrm>
-            <a:off x="1170432" y="1115568"/>
-            <a:ext cx="2871216" cy="365760"/>
+            <a:off x="1033272" y="1115568"/>
+            <a:ext cx="2743200" cy="365760"/>
           </a:xfrm>
           <a:prstGeom prst="rect">
             <a:avLst/>
@@ -10084,8 +10084,8 @@
         </p:nvSpPr>
         <p:spPr>
           <a:xfrm>
-            <a:off x="566928" y="1600200"/>
-            <a:ext cx="3474720" cy="1143000"/>
+            <a:off x="429768" y="1600200"/>
+            <a:ext cx="3337560" cy="1143000"/>
           </a:xfrm>
           <a:prstGeom prst="rect">
             <a:avLst/>
@@ -10148,8 +10148,8 @@
         </p:nvSpPr>
         <p:spPr>
           <a:xfrm>
-            <a:off x="4453128" y="914400"/>
-            <a:ext cx="3840480" cy="1965960"/>
+            <a:off x="4160520" y="914400"/>
+            <a:ext cx="3749040" cy="1965960"/>
           </a:xfrm>
           <a:prstGeom prst="roundRect">
             <a:avLst>
@@ -10175,7 +10175,7 @@
         </p:nvSpPr>
         <p:spPr>
           <a:xfrm>
-            <a:off x="4617720" y="1097280"/>
+            <a:off x="4325112" y="1097280"/>
             <a:ext cx="530352" cy="530352"/>
           </a:xfrm>
           <a:prstGeom prst="roundRect">
@@ -10202,7 +10202,7 @@
         </p:nvSpPr>
         <p:spPr>
           <a:xfrm>
-            <a:off x="4617720" y="1078992"/>
+            <a:off x="4325112" y="1078992"/>
             <a:ext cx="548640" cy="548640"/>
           </a:xfrm>
           <a:prstGeom prst="rect">
@@ -10238,8 +10238,8 @@
         </p:nvSpPr>
         <p:spPr>
           <a:xfrm>
-            <a:off x="5257800" y="1115568"/>
-            <a:ext cx="2871216" cy="365760"/>
+            <a:off x="4965192" y="1115568"/>
+            <a:ext cx="2743200" cy="365760"/>
           </a:xfrm>
           <a:prstGeom prst="rect">
             <a:avLst/>
@@ -10274,8 +10274,8 @@
         </p:nvSpPr>
         <p:spPr>
           <a:xfrm>
-            <a:off x="4654296" y="1600200"/>
-            <a:ext cx="3474720" cy="1143000"/>
+            <a:off x="4361688" y="1600200"/>
+            <a:ext cx="3337560" cy="1143000"/>
           </a:xfrm>
           <a:prstGeom prst="rect">
             <a:avLst/>
@@ -10338,8 +10338,8 @@
         </p:nvSpPr>
         <p:spPr>
           <a:xfrm>
-            <a:off x="8540496" y="3063240"/>
-            <a:ext cx="3840480" cy="1965960"/>
+            <a:off x="8092440" y="914400"/>
+            <a:ext cx="3749040" cy="1965960"/>
           </a:xfrm>
           <a:prstGeom prst="roundRect">
             <a:avLst>
@@ -10365,7 +10365,7 @@
         </p:nvSpPr>
         <p:spPr>
           <a:xfrm>
-            <a:off x="8705088" y="3246120"/>
+            <a:off x="8257032" y="1097280"/>
             <a:ext cx="530352" cy="530352"/>
           </a:xfrm>
           <a:prstGeom prst="roundRect">
@@ -10392,7 +10392,7 @@
         </p:nvSpPr>
         <p:spPr>
           <a:xfrm>
-            <a:off x="8705088" y="3227832"/>
+            <a:off x="8257032" y="1078992"/>
             <a:ext cx="548640" cy="548640"/>
           </a:xfrm>
           <a:prstGeom prst="rect">
@@ -10428,8 +10428,8 @@
         </p:nvSpPr>
         <p:spPr>
           <a:xfrm>
-            <a:off x="9345168" y="3264408"/>
-            <a:ext cx="2871216" cy="365760"/>
+            <a:off x="8897112" y="1115568"/>
+            <a:ext cx="2743200" cy="365760"/>
           </a:xfrm>
           <a:prstGeom prst="rect">
             <a:avLst/>
@@ -10464,8 +10464,8 @@
         </p:nvSpPr>
         <p:spPr>
           <a:xfrm>
-            <a:off x="8741664" y="3749040"/>
-            <a:ext cx="3474720" cy="1143000"/>
+            <a:off x="8293608" y="1600200"/>
+            <a:ext cx="3337560" cy="1143000"/>
           </a:xfrm>
           <a:prstGeom prst="rect">
             <a:avLst/>
@@ -10528,8 +10528,8 @@
         </p:nvSpPr>
         <p:spPr>
           <a:xfrm>
-            <a:off x="365760" y="3063240"/>
-            <a:ext cx="3840480" cy="1965960"/>
+            <a:off x="228600" y="3063240"/>
+            <a:ext cx="3749040" cy="1965960"/>
           </a:xfrm>
           <a:prstGeom prst="roundRect">
             <a:avLst>
@@ -10555,7 +10555,7 @@
         </p:nvSpPr>
         <p:spPr>
           <a:xfrm>
-            <a:off x="530352" y="3246120"/>
+            <a:off x="393192" y="3246120"/>
             <a:ext cx="530352" cy="530352"/>
           </a:xfrm>
           <a:prstGeom prst="roundRect">
@@ -10582,7 +10582,7 @@
         </p:nvSpPr>
         <p:spPr>
           <a:xfrm>
-            <a:off x="530352" y="3227832"/>
+            <a:off x="393192" y="3227832"/>
             <a:ext cx="548640" cy="548640"/>
           </a:xfrm>
           <a:prstGeom prst="rect">
@@ -10618,8 +10618,8 @@
         </p:nvSpPr>
         <p:spPr>
           <a:xfrm>
-            <a:off x="1170432" y="3264408"/>
-            <a:ext cx="2871216" cy="365760"/>
+            <a:off x="1033272" y="3264408"/>
+            <a:ext cx="2743200" cy="365760"/>
           </a:xfrm>
           <a:prstGeom prst="rect">
             <a:avLst/>
@@ -10654,8 +10654,8 @@
         </p:nvSpPr>
         <p:spPr>
           <a:xfrm>
-            <a:off x="566928" y="3749040"/>
-            <a:ext cx="3474720" cy="1143000"/>
+            <a:off x="429768" y="3749040"/>
+            <a:ext cx="3337560" cy="1143000"/>
           </a:xfrm>
           <a:prstGeom prst="rect">
             <a:avLst/>
@@ -10718,8 +10718,8 @@
         </p:nvSpPr>
         <p:spPr>
           <a:xfrm>
-            <a:off x="4453128" y="5212080"/>
-            <a:ext cx="3840480" cy="1965960"/>
+            <a:off x="4160520" y="3063240"/>
+            <a:ext cx="3749040" cy="1965960"/>
           </a:xfrm>
           <a:prstGeom prst="roundRect">
             <a:avLst>
@@ -10745,7 +10745,7 @@
         </p:nvSpPr>
         <p:spPr>
           <a:xfrm>
-            <a:off x="4617720" y="5394960"/>
+            <a:off x="4325112" y="3246120"/>
             <a:ext cx="530352" cy="530352"/>
           </a:xfrm>
           <a:prstGeom prst="roundRect">
@@ -10772,7 +10772,7 @@
         </p:nvSpPr>
         <p:spPr>
           <a:xfrm>
-            <a:off x="4617720" y="5376672"/>
+            <a:off x="4325112" y="3227832"/>
             <a:ext cx="548640" cy="548640"/>
           </a:xfrm>
           <a:prstGeom prst="rect">
@@ -10808,8 +10808,8 @@
         </p:nvSpPr>
         <p:spPr>
           <a:xfrm>
-            <a:off x="5257800" y="5413248"/>
-            <a:ext cx="2871216" cy="365760"/>
+            <a:off x="4965192" y="3264408"/>
+            <a:ext cx="2743200" cy="365760"/>
           </a:xfrm>
           <a:prstGeom prst="rect">
             <a:avLst/>
@@ -10844,8 +10844,8 @@
         </p:nvSpPr>
         <p:spPr>
           <a:xfrm>
-            <a:off x="4654296" y="5897880"/>
-            <a:ext cx="3474720" cy="1143000"/>
+            <a:off x="4361688" y="3749040"/>
+            <a:ext cx="3337560" cy="1143000"/>
           </a:xfrm>
           <a:prstGeom prst="rect">
             <a:avLst/>
@@ -10908,8 +10908,8 @@
         </p:nvSpPr>
         <p:spPr>
           <a:xfrm>
-            <a:off x="8540496" y="5212080"/>
-            <a:ext cx="3840480" cy="1965960"/>
+            <a:off x="8092440" y="3063240"/>
+            <a:ext cx="3749040" cy="1965960"/>
           </a:xfrm>
           <a:prstGeom prst="roundRect">
             <a:avLst>
@@ -10935,7 +10935,7 @@
         </p:nvSpPr>
         <p:spPr>
           <a:xfrm>
-            <a:off x="8705088" y="5394960"/>
+            <a:off x="8257032" y="3246120"/>
             <a:ext cx="530352" cy="530352"/>
           </a:xfrm>
           <a:prstGeom prst="roundRect">
@@ -10962,7 +10962,7 @@
         </p:nvSpPr>
         <p:spPr>
           <a:xfrm>
-            <a:off x="8705088" y="5376672"/>
+            <a:off x="8257032" y="3227832"/>
             <a:ext cx="548640" cy="548640"/>
           </a:xfrm>
           <a:prstGeom prst="rect">
@@ -10998,8 +10998,8 @@
         </p:nvSpPr>
         <p:spPr>
           <a:xfrm>
-            <a:off x="9345168" y="5413248"/>
-            <a:ext cx="2871216" cy="365760"/>
+            <a:off x="8897112" y="3264408"/>
+            <a:ext cx="2743200" cy="365760"/>
           </a:xfrm>
           <a:prstGeom prst="rect">
             <a:avLst/>
@@ -11034,8 +11034,8 @@
         </p:nvSpPr>
         <p:spPr>
           <a:xfrm>
-            <a:off x="8741664" y="5897880"/>
-            <a:ext cx="3474720" cy="1143000"/>
+            <a:off x="8293608" y="3749040"/>
+            <a:ext cx="3337560" cy="1143000"/>
           </a:xfrm>
           <a:prstGeom prst="rect">
             <a:avLst/>
@@ -11254,8 +11254,8 @@
         </p:nvSpPr>
         <p:spPr>
           <a:xfrm>
-            <a:off x="365760" y="914400"/>
-            <a:ext cx="3840480" cy="1965960"/>
+            <a:off x="228600" y="914400"/>
+            <a:ext cx="3749040" cy="1965960"/>
           </a:xfrm>
           <a:prstGeom prst="roundRect">
             <a:avLst>
@@ -11281,7 +11281,7 @@
         </p:nvSpPr>
         <p:spPr>
           <a:xfrm>
-            <a:off x="530352" y="1097280"/>
+            <a:off x="393192" y="1097280"/>
             <a:ext cx="530352" cy="530352"/>
           </a:xfrm>
           <a:prstGeom prst="roundRect">
@@ -11308,7 +11308,7 @@
         </p:nvSpPr>
         <p:spPr>
           <a:xfrm>
-            <a:off x="530352" y="1078992"/>
+            <a:off x="393192" y="1078992"/>
             <a:ext cx="548640" cy="548640"/>
           </a:xfrm>
           <a:prstGeom prst="rect">
@@ -11344,8 +11344,8 @@
         </p:nvSpPr>
         <p:spPr>
           <a:xfrm>
-            <a:off x="1170432" y="1115568"/>
-            <a:ext cx="2871216" cy="365760"/>
+            <a:off x="1033272" y="1115568"/>
+            <a:ext cx="2743200" cy="365760"/>
           </a:xfrm>
           <a:prstGeom prst="rect">
             <a:avLst/>
@@ -11380,8 +11380,8 @@
         </p:nvSpPr>
         <p:spPr>
           <a:xfrm>
-            <a:off x="566928" y="1600200"/>
-            <a:ext cx="3474720" cy="1143000"/>
+            <a:off x="429768" y="1600200"/>
+            <a:ext cx="3337560" cy="1143000"/>
           </a:xfrm>
           <a:prstGeom prst="rect">
             <a:avLst/>
@@ -11444,8 +11444,8 @@
         </p:nvSpPr>
         <p:spPr>
           <a:xfrm>
-            <a:off x="4453128" y="914400"/>
-            <a:ext cx="3840480" cy="1965960"/>
+            <a:off x="4160520" y="914400"/>
+            <a:ext cx="3749040" cy="1965960"/>
           </a:xfrm>
           <a:prstGeom prst="roundRect">
             <a:avLst>
@@ -11471,7 +11471,7 @@
         </p:nvSpPr>
         <p:spPr>
           <a:xfrm>
-            <a:off x="4617720" y="1097280"/>
+            <a:off x="4325112" y="1097280"/>
             <a:ext cx="530352" cy="530352"/>
           </a:xfrm>
           <a:prstGeom prst="roundRect">
@@ -11498,7 +11498,7 @@
         </p:nvSpPr>
         <p:spPr>
           <a:xfrm>
-            <a:off x="4617720" y="1078992"/>
+            <a:off x="4325112" y="1078992"/>
             <a:ext cx="548640" cy="548640"/>
           </a:xfrm>
           <a:prstGeom prst="rect">
@@ -11534,8 +11534,8 @@
         </p:nvSpPr>
         <p:spPr>
           <a:xfrm>
-            <a:off x="5257800" y="1115568"/>
-            <a:ext cx="2871216" cy="365760"/>
+            <a:off x="4965192" y="1115568"/>
+            <a:ext cx="2743200" cy="365760"/>
           </a:xfrm>
           <a:prstGeom prst="rect">
             <a:avLst/>
@@ -11570,8 +11570,8 @@
         </p:nvSpPr>
         <p:spPr>
           <a:xfrm>
-            <a:off x="4654296" y="1600200"/>
-            <a:ext cx="3474720" cy="1143000"/>
+            <a:off x="4361688" y="1600200"/>
+            <a:ext cx="3337560" cy="1143000"/>
           </a:xfrm>
           <a:prstGeom prst="rect">
             <a:avLst/>
@@ -11634,8 +11634,8 @@
         </p:nvSpPr>
         <p:spPr>
           <a:xfrm>
-            <a:off x="8540496" y="3063240"/>
-            <a:ext cx="3840480" cy="1965960"/>
+            <a:off x="8092440" y="914400"/>
+            <a:ext cx="3749040" cy="1965960"/>
           </a:xfrm>
           <a:prstGeom prst="roundRect">
             <a:avLst>
@@ -11661,7 +11661,7 @@
         </p:nvSpPr>
         <p:spPr>
           <a:xfrm>
-            <a:off x="8705088" y="3246120"/>
+            <a:off x="8257032" y="1097280"/>
             <a:ext cx="530352" cy="530352"/>
           </a:xfrm>
           <a:prstGeom prst="roundRect">
@@ -11688,7 +11688,7 @@
         </p:nvSpPr>
         <p:spPr>
           <a:xfrm>
-            <a:off x="8705088" y="3227832"/>
+            <a:off x="8257032" y="1078992"/>
             <a:ext cx="548640" cy="548640"/>
           </a:xfrm>
           <a:prstGeom prst="rect">
@@ -11724,8 +11724,8 @@
         </p:nvSpPr>
         <p:spPr>
           <a:xfrm>
-            <a:off x="9345168" y="3264408"/>
-            <a:ext cx="2871216" cy="365760"/>
+            <a:off x="8897112" y="1115568"/>
+            <a:ext cx="2743200" cy="365760"/>
           </a:xfrm>
           <a:prstGeom prst="rect">
             <a:avLst/>
@@ -11760,8 +11760,8 @@
         </p:nvSpPr>
         <p:spPr>
           <a:xfrm>
-            <a:off x="8741664" y="3749040"/>
-            <a:ext cx="3474720" cy="1143000"/>
+            <a:off x="8293608" y="1600200"/>
+            <a:ext cx="3337560" cy="1143000"/>
           </a:xfrm>
           <a:prstGeom prst="rect">
             <a:avLst/>
@@ -11824,8 +11824,8 @@
         </p:nvSpPr>
         <p:spPr>
           <a:xfrm>
-            <a:off x="365760" y="3063240"/>
-            <a:ext cx="3840480" cy="1965960"/>
+            <a:off x="228600" y="3063240"/>
+            <a:ext cx="3749040" cy="1965960"/>
           </a:xfrm>
           <a:prstGeom prst="roundRect">
             <a:avLst>
@@ -11851,7 +11851,7 @@
         </p:nvSpPr>
         <p:spPr>
           <a:xfrm>
-            <a:off x="530352" y="3246120"/>
+            <a:off x="393192" y="3246120"/>
             <a:ext cx="530352" cy="530352"/>
           </a:xfrm>
           <a:prstGeom prst="roundRect">
@@ -11878,7 +11878,7 @@
         </p:nvSpPr>
         <p:spPr>
           <a:xfrm>
-            <a:off x="530352" y="3227832"/>
+            <a:off x="393192" y="3227832"/>
             <a:ext cx="548640" cy="548640"/>
           </a:xfrm>
           <a:prstGeom prst="rect">
@@ -11914,8 +11914,8 @@
         </p:nvSpPr>
         <p:spPr>
           <a:xfrm>
-            <a:off x="1170432" y="3264408"/>
-            <a:ext cx="2871216" cy="365760"/>
+            <a:off x="1033272" y="3264408"/>
+            <a:ext cx="2743200" cy="365760"/>
           </a:xfrm>
           <a:prstGeom prst="rect">
             <a:avLst/>
@@ -11950,8 +11950,8 @@
         </p:nvSpPr>
         <p:spPr>
           <a:xfrm>
-            <a:off x="566928" y="3749040"/>
-            <a:ext cx="3474720" cy="1143000"/>
+            <a:off x="429768" y="3749040"/>
+            <a:ext cx="3337560" cy="1143000"/>
           </a:xfrm>
           <a:prstGeom prst="rect">
             <a:avLst/>
@@ -12014,8 +12014,8 @@
         </p:nvSpPr>
         <p:spPr>
           <a:xfrm>
-            <a:off x="4453128" y="5212080"/>
-            <a:ext cx="3840480" cy="1965960"/>
+            <a:off x="4160520" y="3063240"/>
+            <a:ext cx="3749040" cy="1965960"/>
           </a:xfrm>
           <a:prstGeom prst="roundRect">
             <a:avLst>
@@ -12041,7 +12041,7 @@
         </p:nvSpPr>
         <p:spPr>
           <a:xfrm>
-            <a:off x="4617720" y="5394960"/>
+            <a:off x="4325112" y="3246120"/>
             <a:ext cx="530352" cy="530352"/>
           </a:xfrm>
           <a:prstGeom prst="roundRect">
@@ -12068,7 +12068,7 @@
         </p:nvSpPr>
         <p:spPr>
           <a:xfrm>
-            <a:off x="4617720" y="5376672"/>
+            <a:off x="4325112" y="3227832"/>
             <a:ext cx="548640" cy="548640"/>
           </a:xfrm>
           <a:prstGeom prst="rect">
@@ -12104,8 +12104,8 @@
         </p:nvSpPr>
         <p:spPr>
           <a:xfrm>
-            <a:off x="5257800" y="5413248"/>
-            <a:ext cx="2871216" cy="365760"/>
+            <a:off x="4965192" y="3264408"/>
+            <a:ext cx="2743200" cy="365760"/>
           </a:xfrm>
           <a:prstGeom prst="rect">
             <a:avLst/>
@@ -12140,8 +12140,8 @@
         </p:nvSpPr>
         <p:spPr>
           <a:xfrm>
-            <a:off x="4654296" y="5897880"/>
-            <a:ext cx="3474720" cy="1143000"/>
+            <a:off x="4361688" y="3749040"/>
+            <a:ext cx="3337560" cy="1143000"/>
           </a:xfrm>
           <a:prstGeom prst="rect">
             <a:avLst/>
@@ -12204,8 +12204,8 @@
         </p:nvSpPr>
         <p:spPr>
           <a:xfrm>
-            <a:off x="8540496" y="5212080"/>
-            <a:ext cx="3840480" cy="1965960"/>
+            <a:off x="8092440" y="3063240"/>
+            <a:ext cx="3749040" cy="1965960"/>
           </a:xfrm>
           <a:prstGeom prst="roundRect">
             <a:avLst>
@@ -12231,7 +12231,7 @@
         </p:nvSpPr>
         <p:spPr>
           <a:xfrm>
-            <a:off x="8705088" y="5394960"/>
+            <a:off x="8257032" y="3246120"/>
             <a:ext cx="530352" cy="530352"/>
           </a:xfrm>
           <a:prstGeom prst="roundRect">
@@ -12258,7 +12258,7 @@
         </p:nvSpPr>
         <p:spPr>
           <a:xfrm>
-            <a:off x="8705088" y="5376672"/>
+            <a:off x="8257032" y="3227832"/>
             <a:ext cx="548640" cy="548640"/>
           </a:xfrm>
           <a:prstGeom prst="rect">
@@ -12294,8 +12294,8 @@
         </p:nvSpPr>
         <p:spPr>
           <a:xfrm>
-            <a:off x="9345168" y="5413248"/>
-            <a:ext cx="2871216" cy="365760"/>
+            <a:off x="8897112" y="3264408"/>
+            <a:ext cx="2743200" cy="365760"/>
           </a:xfrm>
           <a:prstGeom prst="rect">
             <a:avLst/>
@@ -12330,8 +12330,8 @@
         </p:nvSpPr>
         <p:spPr>
           <a:xfrm>
-            <a:off x="8741664" y="5897880"/>
-            <a:ext cx="3474720" cy="1143000"/>
+            <a:off x="8293608" y="3749040"/>
+            <a:ext cx="3337560" cy="1143000"/>
           </a:xfrm>
           <a:prstGeom prst="rect">
             <a:avLst/>
@@ -12550,8 +12550,8 @@
         </p:nvSpPr>
         <p:spPr>
           <a:xfrm>
-            <a:off x="365760" y="914400"/>
-            <a:ext cx="3840480" cy="1965960"/>
+            <a:off x="228600" y="914400"/>
+            <a:ext cx="3749040" cy="1965960"/>
           </a:xfrm>
           <a:prstGeom prst="roundRect">
             <a:avLst>
@@ -12577,7 +12577,7 @@
         </p:nvSpPr>
         <p:spPr>
           <a:xfrm>
-            <a:off x="530352" y="1097280"/>
+            <a:off x="393192" y="1097280"/>
             <a:ext cx="530352" cy="530352"/>
           </a:xfrm>
           <a:prstGeom prst="roundRect">
@@ -12604,7 +12604,7 @@
         </p:nvSpPr>
         <p:spPr>
           <a:xfrm>
-            <a:off x="530352" y="1078992"/>
+            <a:off x="393192" y="1078992"/>
             <a:ext cx="548640" cy="548640"/>
           </a:xfrm>
           <a:prstGeom prst="rect">
@@ -12640,8 +12640,8 @@
         </p:nvSpPr>
         <p:spPr>
           <a:xfrm>
-            <a:off x="1170432" y="1115568"/>
-            <a:ext cx="2871216" cy="365760"/>
+            <a:off x="1033272" y="1115568"/>
+            <a:ext cx="2743200" cy="365760"/>
           </a:xfrm>
           <a:prstGeom prst="rect">
             <a:avLst/>
@@ -12676,8 +12676,8 @@
         </p:nvSpPr>
         <p:spPr>
           <a:xfrm>
-            <a:off x="566928" y="1600200"/>
-            <a:ext cx="3474720" cy="1143000"/>
+            <a:off x="429768" y="1600200"/>
+            <a:ext cx="3337560" cy="1143000"/>
           </a:xfrm>
           <a:prstGeom prst="rect">
             <a:avLst/>
@@ -12740,8 +12740,8 @@
         </p:nvSpPr>
         <p:spPr>
           <a:xfrm>
-            <a:off x="4453128" y="914400"/>
-            <a:ext cx="3840480" cy="1965960"/>
+            <a:off x="4160520" y="914400"/>
+            <a:ext cx="3749040" cy="1965960"/>
           </a:xfrm>
           <a:prstGeom prst="roundRect">
             <a:avLst>
@@ -12767,7 +12767,7 @@
         </p:nvSpPr>
         <p:spPr>
           <a:xfrm>
-            <a:off x="4617720" y="1097280"/>
+            <a:off x="4325112" y="1097280"/>
             <a:ext cx="530352" cy="530352"/>
           </a:xfrm>
           <a:prstGeom prst="roundRect">
@@ -12794,7 +12794,7 @@
         </p:nvSpPr>
         <p:spPr>
           <a:xfrm>
-            <a:off x="4617720" y="1078992"/>
+            <a:off x="4325112" y="1078992"/>
             <a:ext cx="548640" cy="548640"/>
           </a:xfrm>
           <a:prstGeom prst="rect">
@@ -12830,8 +12830,8 @@
         </p:nvSpPr>
         <p:spPr>
           <a:xfrm>
-            <a:off x="5257800" y="1115568"/>
-            <a:ext cx="2871216" cy="365760"/>
+            <a:off x="4965192" y="1115568"/>
+            <a:ext cx="2743200" cy="365760"/>
           </a:xfrm>
           <a:prstGeom prst="rect">
             <a:avLst/>
@@ -12866,8 +12866,8 @@
         </p:nvSpPr>
         <p:spPr>
           <a:xfrm>
-            <a:off x="4654296" y="1600200"/>
-            <a:ext cx="3474720" cy="1143000"/>
+            <a:off x="4361688" y="1600200"/>
+            <a:ext cx="3337560" cy="1143000"/>
           </a:xfrm>
           <a:prstGeom prst="rect">
             <a:avLst/>
@@ -12930,8 +12930,8 @@
         </p:nvSpPr>
         <p:spPr>
           <a:xfrm>
-            <a:off x="8540496" y="3063240"/>
-            <a:ext cx="3840480" cy="1965960"/>
+            <a:off x="8092440" y="914400"/>
+            <a:ext cx="3749040" cy="1965960"/>
           </a:xfrm>
           <a:prstGeom prst="roundRect">
             <a:avLst>
@@ -12957,7 +12957,7 @@
         </p:nvSpPr>
         <p:spPr>
           <a:xfrm>
-            <a:off x="8705088" y="3246120"/>
+            <a:off x="8257032" y="1097280"/>
             <a:ext cx="530352" cy="530352"/>
           </a:xfrm>
           <a:prstGeom prst="roundRect">
@@ -12984,7 +12984,7 @@
         </p:nvSpPr>
         <p:spPr>
           <a:xfrm>
-            <a:off x="8705088" y="3227832"/>
+            <a:off x="8257032" y="1078992"/>
             <a:ext cx="548640" cy="548640"/>
           </a:xfrm>
           <a:prstGeom prst="rect">
@@ -13020,8 +13020,8 @@
         </p:nvSpPr>
         <p:spPr>
           <a:xfrm>
-            <a:off x="9345168" y="3264408"/>
-            <a:ext cx="2871216" cy="365760"/>
+            <a:off x="8897112" y="1115568"/>
+            <a:ext cx="2743200" cy="365760"/>
           </a:xfrm>
           <a:prstGeom prst="rect">
             <a:avLst/>
@@ -13056,8 +13056,8 @@
         </p:nvSpPr>
         <p:spPr>
           <a:xfrm>
-            <a:off x="8741664" y="3749040"/>
-            <a:ext cx="3474720" cy="1143000"/>
+            <a:off x="8293608" y="1600200"/>
+            <a:ext cx="3337560" cy="1143000"/>
           </a:xfrm>
           <a:prstGeom prst="rect">
             <a:avLst/>
@@ -13120,8 +13120,8 @@
         </p:nvSpPr>
         <p:spPr>
           <a:xfrm>
-            <a:off x="365760" y="3063240"/>
-            <a:ext cx="3840480" cy="1965960"/>
+            <a:off x="228600" y="3063240"/>
+            <a:ext cx="3749040" cy="1965960"/>
           </a:xfrm>
           <a:prstGeom prst="roundRect">
             <a:avLst>
@@ -13147,7 +13147,7 @@
         </p:nvSpPr>
         <p:spPr>
           <a:xfrm>
-            <a:off x="530352" y="3246120"/>
+            <a:off x="393192" y="3246120"/>
             <a:ext cx="530352" cy="530352"/>
           </a:xfrm>
           <a:prstGeom prst="roundRect">
@@ -13174,7 +13174,7 @@
         </p:nvSpPr>
         <p:spPr>
           <a:xfrm>
-            <a:off x="530352" y="3227832"/>
+            <a:off x="393192" y="3227832"/>
             <a:ext cx="548640" cy="548640"/>
           </a:xfrm>
           <a:prstGeom prst="rect">
@@ -13210,8 +13210,8 @@
         </p:nvSpPr>
         <p:spPr>
           <a:xfrm>
-            <a:off x="1170432" y="3264408"/>
-            <a:ext cx="2871216" cy="365760"/>
+            <a:off x="1033272" y="3264408"/>
+            <a:ext cx="2743200" cy="365760"/>
           </a:xfrm>
           <a:prstGeom prst="rect">
             <a:avLst/>
@@ -13246,8 +13246,8 @@
         </p:nvSpPr>
         <p:spPr>
           <a:xfrm>
-            <a:off x="566928" y="3749040"/>
-            <a:ext cx="3474720" cy="1143000"/>
+            <a:off x="429768" y="3749040"/>
+            <a:ext cx="3337560" cy="1143000"/>
           </a:xfrm>
           <a:prstGeom prst="rect">
             <a:avLst/>
@@ -13310,8 +13310,8 @@
         </p:nvSpPr>
         <p:spPr>
           <a:xfrm>
-            <a:off x="4453128" y="5212080"/>
-            <a:ext cx="3840480" cy="1965960"/>
+            <a:off x="4160520" y="3063240"/>
+            <a:ext cx="3749040" cy="1965960"/>
           </a:xfrm>
           <a:prstGeom prst="roundRect">
             <a:avLst>
@@ -13337,7 +13337,7 @@
         </p:nvSpPr>
         <p:spPr>
           <a:xfrm>
-            <a:off x="4617720" y="5394960"/>
+            <a:off x="4325112" y="3246120"/>
             <a:ext cx="530352" cy="530352"/>
           </a:xfrm>
           <a:prstGeom prst="roundRect">
@@ -13364,7 +13364,7 @@
         </p:nvSpPr>
         <p:spPr>
           <a:xfrm>
-            <a:off x="4617720" y="5376672"/>
+            <a:off x="4325112" y="3227832"/>
             <a:ext cx="548640" cy="548640"/>
           </a:xfrm>
           <a:prstGeom prst="rect">
@@ -13400,8 +13400,8 @@
         </p:nvSpPr>
         <p:spPr>
           <a:xfrm>
-            <a:off x="5257800" y="5413248"/>
-            <a:ext cx="2871216" cy="365760"/>
+            <a:off x="4965192" y="3264408"/>
+            <a:ext cx="2743200" cy="365760"/>
           </a:xfrm>
           <a:prstGeom prst="rect">
             <a:avLst/>
@@ -13436,8 +13436,8 @@
         </p:nvSpPr>
         <p:spPr>
           <a:xfrm>
-            <a:off x="4654296" y="5897880"/>
-            <a:ext cx="3474720" cy="1143000"/>
+            <a:off x="4361688" y="3749040"/>
+            <a:ext cx="3337560" cy="1143000"/>
           </a:xfrm>
           <a:prstGeom prst="rect">
             <a:avLst/>
@@ -13500,8 +13500,8 @@
         </p:nvSpPr>
         <p:spPr>
           <a:xfrm>
-            <a:off x="8540496" y="5212080"/>
-            <a:ext cx="3840480" cy="1965960"/>
+            <a:off x="8092440" y="3063240"/>
+            <a:ext cx="3749040" cy="1965960"/>
           </a:xfrm>
           <a:prstGeom prst="roundRect">
             <a:avLst>
@@ -13527,7 +13527,7 @@
         </p:nvSpPr>
         <p:spPr>
           <a:xfrm>
-            <a:off x="8705088" y="5394960"/>
+            <a:off x="8257032" y="3246120"/>
             <a:ext cx="530352" cy="530352"/>
           </a:xfrm>
           <a:prstGeom prst="roundRect">
@@ -13554,7 +13554,7 @@
         </p:nvSpPr>
         <p:spPr>
           <a:xfrm>
-            <a:off x="8705088" y="5376672"/>
+            <a:off x="8257032" y="3227832"/>
             <a:ext cx="548640" cy="548640"/>
           </a:xfrm>
           <a:prstGeom prst="rect">
@@ -13590,8 +13590,8 @@
         </p:nvSpPr>
         <p:spPr>
           <a:xfrm>
-            <a:off x="9345168" y="5413248"/>
-            <a:ext cx="2871216" cy="365760"/>
+            <a:off x="8897112" y="3264408"/>
+            <a:ext cx="2743200" cy="365760"/>
           </a:xfrm>
           <a:prstGeom prst="rect">
             <a:avLst/>
@@ -13626,8 +13626,8 @@
         </p:nvSpPr>
         <p:spPr>
           <a:xfrm>
-            <a:off x="8741664" y="5897880"/>
-            <a:ext cx="3474720" cy="1143000"/>
+            <a:off x="8293608" y="3749040"/>
+            <a:ext cx="3337560" cy="1143000"/>
           </a:xfrm>
           <a:prstGeom prst="rect">
             <a:avLst/>
@@ -13846,8 +13846,8 @@
         </p:nvSpPr>
         <p:spPr>
           <a:xfrm>
-            <a:off x="365760" y="914400"/>
-            <a:ext cx="3840480" cy="1965960"/>
+            <a:off x="228600" y="914400"/>
+            <a:ext cx="3749040" cy="1965960"/>
           </a:xfrm>
           <a:prstGeom prst="roundRect">
             <a:avLst>
@@ -13873,7 +13873,7 @@
         </p:nvSpPr>
         <p:spPr>
           <a:xfrm>
-            <a:off x="530352" y="1097280"/>
+            <a:off x="393192" y="1097280"/>
             <a:ext cx="530352" cy="530352"/>
           </a:xfrm>
           <a:prstGeom prst="roundRect">
@@ -13900,7 +13900,7 @@
         </p:nvSpPr>
         <p:spPr>
           <a:xfrm>
-            <a:off x="530352" y="1078992"/>
+            <a:off x="393192" y="1078992"/>
             <a:ext cx="548640" cy="548640"/>
           </a:xfrm>
           <a:prstGeom prst="rect">
@@ -13936,8 +13936,8 @@
         </p:nvSpPr>
         <p:spPr>
           <a:xfrm>
-            <a:off x="1170432" y="1115568"/>
-            <a:ext cx="2871216" cy="365760"/>
+            <a:off x="1033272" y="1115568"/>
+            <a:ext cx="2743200" cy="365760"/>
           </a:xfrm>
           <a:prstGeom prst="rect">
             <a:avLst/>
@@ -13972,8 +13972,8 @@
         </p:nvSpPr>
         <p:spPr>
           <a:xfrm>
-            <a:off x="566928" y="1600200"/>
-            <a:ext cx="3474720" cy="1143000"/>
+            <a:off x="429768" y="1600200"/>
+            <a:ext cx="3337560" cy="1143000"/>
           </a:xfrm>
           <a:prstGeom prst="rect">
             <a:avLst/>
@@ -14036,8 +14036,8 @@
         </p:nvSpPr>
         <p:spPr>
           <a:xfrm>
-            <a:off x="4453128" y="914400"/>
-            <a:ext cx="3840480" cy="1965960"/>
+            <a:off x="4160520" y="914400"/>
+            <a:ext cx="3749040" cy="1965960"/>
           </a:xfrm>
           <a:prstGeom prst="roundRect">
             <a:avLst>
@@ -14063,7 +14063,7 @@
         </p:nvSpPr>
         <p:spPr>
           <a:xfrm>
-            <a:off x="4617720" y="1097280"/>
+            <a:off x="4325112" y="1097280"/>
             <a:ext cx="530352" cy="530352"/>
           </a:xfrm>
           <a:prstGeom prst="roundRect">
@@ -14090,7 +14090,7 @@
         </p:nvSpPr>
         <p:spPr>
           <a:xfrm>
-            <a:off x="4617720" y="1078992"/>
+            <a:off x="4325112" y="1078992"/>
             <a:ext cx="548640" cy="548640"/>
           </a:xfrm>
           <a:prstGeom prst="rect">
@@ -14126,8 +14126,8 @@
         </p:nvSpPr>
         <p:spPr>
           <a:xfrm>
-            <a:off x="5257800" y="1115568"/>
-            <a:ext cx="2871216" cy="365760"/>
+            <a:off x="4965192" y="1115568"/>
+            <a:ext cx="2743200" cy="365760"/>
           </a:xfrm>
           <a:prstGeom prst="rect">
             <a:avLst/>
@@ -14162,8 +14162,8 @@
         </p:nvSpPr>
         <p:spPr>
           <a:xfrm>
-            <a:off x="4654296" y="1600200"/>
-            <a:ext cx="3474720" cy="1143000"/>
+            <a:off x="4361688" y="1600200"/>
+            <a:ext cx="3337560" cy="1143000"/>
           </a:xfrm>
           <a:prstGeom prst="rect">
             <a:avLst/>
@@ -14226,8 +14226,8 @@
         </p:nvSpPr>
         <p:spPr>
           <a:xfrm>
-            <a:off x="8540496" y="3063240"/>
-            <a:ext cx="3840480" cy="1965960"/>
+            <a:off x="8092440" y="914400"/>
+            <a:ext cx="3749040" cy="1965960"/>
           </a:xfrm>
           <a:prstGeom prst="roundRect">
             <a:avLst>
@@ -14253,7 +14253,7 @@
         </p:nvSpPr>
         <p:spPr>
           <a:xfrm>
-            <a:off x="8705088" y="3246120"/>
+            <a:off x="8257032" y="1097280"/>
             <a:ext cx="530352" cy="530352"/>
           </a:xfrm>
           <a:prstGeom prst="roundRect">
@@ -14280,7 +14280,7 @@
         </p:nvSpPr>
         <p:spPr>
           <a:xfrm>
-            <a:off x="8705088" y="3227832"/>
+            <a:off x="8257032" y="1078992"/>
             <a:ext cx="548640" cy="548640"/>
           </a:xfrm>
           <a:prstGeom prst="rect">
@@ -14316,8 +14316,8 @@
         </p:nvSpPr>
         <p:spPr>
           <a:xfrm>
-            <a:off x="9345168" y="3264408"/>
-            <a:ext cx="2871216" cy="365760"/>
+            <a:off x="8897112" y="1115568"/>
+            <a:ext cx="2743200" cy="365760"/>
           </a:xfrm>
           <a:prstGeom prst="rect">
             <a:avLst/>
@@ -14352,8 +14352,8 @@
         </p:nvSpPr>
         <p:spPr>
           <a:xfrm>
-            <a:off x="8741664" y="3749040"/>
-            <a:ext cx="3474720" cy="1143000"/>
+            <a:off x="8293608" y="1600200"/>
+            <a:ext cx="3337560" cy="1143000"/>
           </a:xfrm>
           <a:prstGeom prst="rect">
             <a:avLst/>
@@ -14416,8 +14416,8 @@
         </p:nvSpPr>
         <p:spPr>
           <a:xfrm>
-            <a:off x="365760" y="3063240"/>
-            <a:ext cx="3840480" cy="1965960"/>
+            <a:off x="228600" y="3063240"/>
+            <a:ext cx="3749040" cy="1965960"/>
           </a:xfrm>
           <a:prstGeom prst="roundRect">
             <a:avLst>
@@ -14443,7 +14443,7 @@
         </p:nvSpPr>
         <p:spPr>
           <a:xfrm>
-            <a:off x="530352" y="3246120"/>
+            <a:off x="393192" y="3246120"/>
             <a:ext cx="530352" cy="530352"/>
           </a:xfrm>
           <a:prstGeom prst="roundRect">
@@ -14470,7 +14470,7 @@
         </p:nvSpPr>
         <p:spPr>
           <a:xfrm>
-            <a:off x="530352" y="3227832"/>
+            <a:off x="393192" y="3227832"/>
             <a:ext cx="548640" cy="548640"/>
           </a:xfrm>
           <a:prstGeom prst="rect">
@@ -14506,8 +14506,8 @@
         </p:nvSpPr>
         <p:spPr>
           <a:xfrm>
-            <a:off x="1170432" y="3264408"/>
-            <a:ext cx="2871216" cy="365760"/>
+            <a:off x="1033272" y="3264408"/>
+            <a:ext cx="2743200" cy="365760"/>
           </a:xfrm>
           <a:prstGeom prst="rect">
             <a:avLst/>
@@ -14542,8 +14542,8 @@
         </p:nvSpPr>
         <p:spPr>
           <a:xfrm>
-            <a:off x="566928" y="3749040"/>
-            <a:ext cx="3474720" cy="1143000"/>
+            <a:off x="429768" y="3749040"/>
+            <a:ext cx="3337560" cy="1143000"/>
           </a:xfrm>
           <a:prstGeom prst="rect">
             <a:avLst/>
@@ -14606,8 +14606,8 @@
         </p:nvSpPr>
         <p:spPr>
           <a:xfrm>
-            <a:off x="4453128" y="5212080"/>
-            <a:ext cx="3840480" cy="1965960"/>
+            <a:off x="4160520" y="3063240"/>
+            <a:ext cx="3749040" cy="1965960"/>
           </a:xfrm>
           <a:prstGeom prst="roundRect">
             <a:avLst>
@@ -14633,7 +14633,7 @@
         </p:nvSpPr>
         <p:spPr>
           <a:xfrm>
-            <a:off x="4617720" y="5394960"/>
+            <a:off x="4325112" y="3246120"/>
             <a:ext cx="530352" cy="530352"/>
           </a:xfrm>
           <a:prstGeom prst="roundRect">
@@ -14660,7 +14660,7 @@
         </p:nvSpPr>
         <p:spPr>
           <a:xfrm>
-            <a:off x="4617720" y="5376672"/>
+            <a:off x="4325112" y="3227832"/>
             <a:ext cx="548640" cy="548640"/>
           </a:xfrm>
           <a:prstGeom prst="rect">
@@ -14696,8 +14696,8 @@
         </p:nvSpPr>
         <p:spPr>
           <a:xfrm>
-            <a:off x="5257800" y="5413248"/>
-            <a:ext cx="2871216" cy="365760"/>
+            <a:off x="4965192" y="3264408"/>
+            <a:ext cx="2743200" cy="365760"/>
           </a:xfrm>
           <a:prstGeom prst="rect">
             <a:avLst/>
@@ -14732,8 +14732,8 @@
         </p:nvSpPr>
         <p:spPr>
           <a:xfrm>
-            <a:off x="4654296" y="5897880"/>
-            <a:ext cx="3474720" cy="1143000"/>
+            <a:off x="4361688" y="3749040"/>
+            <a:ext cx="3337560" cy="1143000"/>
           </a:xfrm>
           <a:prstGeom prst="rect">
             <a:avLst/>
@@ -14796,8 +14796,8 @@
         </p:nvSpPr>
         <p:spPr>
           <a:xfrm>
-            <a:off x="8540496" y="5212080"/>
-            <a:ext cx="3840480" cy="1965960"/>
+            <a:off x="8092440" y="3063240"/>
+            <a:ext cx="3749040" cy="1965960"/>
           </a:xfrm>
           <a:prstGeom prst="roundRect">
             <a:avLst>
@@ -14823,7 +14823,7 @@
         </p:nvSpPr>
         <p:spPr>
           <a:xfrm>
-            <a:off x="8705088" y="5394960"/>
+            <a:off x="8257032" y="3246120"/>
             <a:ext cx="530352" cy="530352"/>
           </a:xfrm>
           <a:prstGeom prst="roundRect">
@@ -14850,7 +14850,7 @@
         </p:nvSpPr>
         <p:spPr>
           <a:xfrm>
-            <a:off x="8705088" y="5376672"/>
+            <a:off x="8257032" y="3227832"/>
             <a:ext cx="548640" cy="548640"/>
           </a:xfrm>
           <a:prstGeom prst="rect">
@@ -14886,8 +14886,8 @@
         </p:nvSpPr>
         <p:spPr>
           <a:xfrm>
-            <a:off x="9345168" y="5413248"/>
-            <a:ext cx="2871216" cy="365760"/>
+            <a:off x="8897112" y="3264408"/>
+            <a:ext cx="2743200" cy="365760"/>
           </a:xfrm>
           <a:prstGeom prst="rect">
             <a:avLst/>
@@ -14922,8 +14922,8 @@
         </p:nvSpPr>
         <p:spPr>
           <a:xfrm>
-            <a:off x="8741664" y="5897880"/>
-            <a:ext cx="3474720" cy="1143000"/>
+            <a:off x="8293608" y="3749040"/>
+            <a:ext cx="3337560" cy="1143000"/>
           </a:xfrm>
           <a:prstGeom prst="rect">
             <a:avLst/>
@@ -15142,8 +15142,8 @@
         </p:nvSpPr>
         <p:spPr>
           <a:xfrm>
-            <a:off x="365760" y="914400"/>
-            <a:ext cx="3840480" cy="1965960"/>
+            <a:off x="228600" y="914400"/>
+            <a:ext cx="3749040" cy="1965960"/>
           </a:xfrm>
           <a:prstGeom prst="roundRect">
             <a:avLst>
@@ -15169,7 +15169,7 @@
         </p:nvSpPr>
         <p:spPr>
           <a:xfrm>
-            <a:off x="530352" y="1097280"/>
+            <a:off x="393192" y="1097280"/>
             <a:ext cx="530352" cy="530352"/>
           </a:xfrm>
           <a:prstGeom prst="roundRect">
@@ -15196,7 +15196,7 @@
         </p:nvSpPr>
         <p:spPr>
           <a:xfrm>
-            <a:off x="530352" y="1078992"/>
+            <a:off x="393192" y="1078992"/>
             <a:ext cx="548640" cy="548640"/>
           </a:xfrm>
           <a:prstGeom prst="rect">
@@ -15232,8 +15232,8 @@
         </p:nvSpPr>
         <p:spPr>
           <a:xfrm>
-            <a:off x="1170432" y="1115568"/>
-            <a:ext cx="2871216" cy="365760"/>
+            <a:off x="1033272" y="1115568"/>
+            <a:ext cx="2743200" cy="365760"/>
           </a:xfrm>
           <a:prstGeom prst="rect">
             <a:avLst/>
@@ -15268,8 +15268,8 @@
         </p:nvSpPr>
         <p:spPr>
           <a:xfrm>
-            <a:off x="566928" y="1600200"/>
-            <a:ext cx="3474720" cy="1143000"/>
+            <a:off x="429768" y="1600200"/>
+            <a:ext cx="3337560" cy="1143000"/>
           </a:xfrm>
           <a:prstGeom prst="rect">
             <a:avLst/>
@@ -15332,8 +15332,8 @@
         </p:nvSpPr>
         <p:spPr>
           <a:xfrm>
-            <a:off x="4453128" y="914400"/>
-            <a:ext cx="3840480" cy="1965960"/>
+            <a:off x="4160520" y="914400"/>
+            <a:ext cx="3749040" cy="1965960"/>
           </a:xfrm>
           <a:prstGeom prst="roundRect">
             <a:avLst>
@@ -15359,7 +15359,7 @@
         </p:nvSpPr>
         <p:spPr>
           <a:xfrm>
-            <a:off x="4617720" y="1097280"/>
+            <a:off x="4325112" y="1097280"/>
             <a:ext cx="530352" cy="530352"/>
           </a:xfrm>
           <a:prstGeom prst="roundRect">
@@ -15386,7 +15386,7 @@
         </p:nvSpPr>
         <p:spPr>
           <a:xfrm>
-            <a:off x="4617720" y="1078992"/>
+            <a:off x="4325112" y="1078992"/>
             <a:ext cx="548640" cy="548640"/>
           </a:xfrm>
           <a:prstGeom prst="rect">
@@ -15422,8 +15422,8 @@
         </p:nvSpPr>
         <p:spPr>
           <a:xfrm>
-            <a:off x="5257800" y="1115568"/>
-            <a:ext cx="2871216" cy="365760"/>
+            <a:off x="4965192" y="1115568"/>
+            <a:ext cx="2743200" cy="365760"/>
           </a:xfrm>
           <a:prstGeom prst="rect">
             <a:avLst/>
@@ -15458,8 +15458,8 @@
         </p:nvSpPr>
         <p:spPr>
           <a:xfrm>
-            <a:off x="4654296" y="1600200"/>
-            <a:ext cx="3474720" cy="1143000"/>
+            <a:off x="4361688" y="1600200"/>
+            <a:ext cx="3337560" cy="1143000"/>
           </a:xfrm>
           <a:prstGeom prst="rect">
             <a:avLst/>
@@ -15522,8 +15522,8 @@
         </p:nvSpPr>
         <p:spPr>
           <a:xfrm>
-            <a:off x="8540496" y="3063240"/>
-            <a:ext cx="3840480" cy="1965960"/>
+            <a:off x="8092440" y="914400"/>
+            <a:ext cx="3749040" cy="1965960"/>
           </a:xfrm>
           <a:prstGeom prst="roundRect">
             <a:avLst>
@@ -15549,7 +15549,7 @@
         </p:nvSpPr>
         <p:spPr>
           <a:xfrm>
-            <a:off x="8705088" y="3246120"/>
+            <a:off x="8257032" y="1097280"/>
             <a:ext cx="530352" cy="530352"/>
           </a:xfrm>
           <a:prstGeom prst="roundRect">
@@ -15576,7 +15576,7 @@
         </p:nvSpPr>
         <p:spPr>
           <a:xfrm>
-            <a:off x="8705088" y="3227832"/>
+            <a:off x="8257032" y="1078992"/>
             <a:ext cx="548640" cy="548640"/>
           </a:xfrm>
           <a:prstGeom prst="rect">
@@ -15612,8 +15612,8 @@
         </p:nvSpPr>
         <p:spPr>
           <a:xfrm>
-            <a:off x="9345168" y="3264408"/>
-            <a:ext cx="2871216" cy="365760"/>
+            <a:off x="8897112" y="1115568"/>
+            <a:ext cx="2743200" cy="365760"/>
           </a:xfrm>
           <a:prstGeom prst="rect">
             <a:avLst/>
@@ -15648,8 +15648,8 @@
         </p:nvSpPr>
         <p:spPr>
           <a:xfrm>
-            <a:off x="8741664" y="3749040"/>
-            <a:ext cx="3474720" cy="1143000"/>
+            <a:off x="8293608" y="1600200"/>
+            <a:ext cx="3337560" cy="1143000"/>
           </a:xfrm>
           <a:prstGeom prst="rect">
             <a:avLst/>
@@ -15712,8 +15712,8 @@
         </p:nvSpPr>
         <p:spPr>
           <a:xfrm>
-            <a:off x="365760" y="3063240"/>
-            <a:ext cx="3840480" cy="1965960"/>
+            <a:off x="228600" y="3063240"/>
+            <a:ext cx="3749040" cy="1965960"/>
           </a:xfrm>
           <a:prstGeom prst="roundRect">
             <a:avLst>
@@ -15739,7 +15739,7 @@
         </p:nvSpPr>
         <p:spPr>
           <a:xfrm>
-            <a:off x="530352" y="3246120"/>
+            <a:off x="393192" y="3246120"/>
             <a:ext cx="530352" cy="530352"/>
           </a:xfrm>
           <a:prstGeom prst="roundRect">
@@ -15766,7 +15766,7 @@
         </p:nvSpPr>
         <p:spPr>
           <a:xfrm>
-            <a:off x="530352" y="3227832"/>
+            <a:off x="393192" y="3227832"/>
             <a:ext cx="548640" cy="548640"/>
           </a:xfrm>
           <a:prstGeom prst="rect">
@@ -15802,8 +15802,8 @@
         </p:nvSpPr>
         <p:spPr>
           <a:xfrm>
-            <a:off x="1170432" y="3264408"/>
-            <a:ext cx="2871216" cy="365760"/>
+            <a:off x="1033272" y="3264408"/>
+            <a:ext cx="2743200" cy="365760"/>
           </a:xfrm>
           <a:prstGeom prst="rect">
             <a:avLst/>
@@ -15838,8 +15838,8 @@
         </p:nvSpPr>
         <p:spPr>
           <a:xfrm>
-            <a:off x="566928" y="3749040"/>
-            <a:ext cx="3474720" cy="1143000"/>
+            <a:off x="429768" y="3749040"/>
+            <a:ext cx="3337560" cy="1143000"/>
           </a:xfrm>
           <a:prstGeom prst="rect">
             <a:avLst/>
@@ -15902,8 +15902,8 @@
         </p:nvSpPr>
         <p:spPr>
           <a:xfrm>
-            <a:off x="4453128" y="5212080"/>
-            <a:ext cx="3840480" cy="1965960"/>
+            <a:off x="4160520" y="3063240"/>
+            <a:ext cx="3749040" cy="1965960"/>
           </a:xfrm>
           <a:prstGeom prst="roundRect">
             <a:avLst>
@@ -15929,7 +15929,7 @@
         </p:nvSpPr>
         <p:spPr>
           <a:xfrm>
-            <a:off x="4617720" y="5394960"/>
+            <a:off x="4325112" y="3246120"/>
             <a:ext cx="530352" cy="530352"/>
           </a:xfrm>
           <a:prstGeom prst="roundRect">
@@ -15956,7 +15956,7 @@
         </p:nvSpPr>
         <p:spPr>
           <a:xfrm>
-            <a:off x="4617720" y="5376672"/>
+            <a:off x="4325112" y="3227832"/>
             <a:ext cx="548640" cy="548640"/>
           </a:xfrm>
           <a:prstGeom prst="rect">
@@ -15992,8 +15992,8 @@
         </p:nvSpPr>
         <p:spPr>
           <a:xfrm>
-            <a:off x="5257800" y="5413248"/>
-            <a:ext cx="2871216" cy="365760"/>
+            <a:off x="4965192" y="3264408"/>
+            <a:ext cx="2743200" cy="365760"/>
           </a:xfrm>
           <a:prstGeom prst="rect">
             <a:avLst/>
@@ -16028,8 +16028,8 @@
         </p:nvSpPr>
         <p:spPr>
           <a:xfrm>
-            <a:off x="4654296" y="5897880"/>
-            <a:ext cx="3474720" cy="1143000"/>
+            <a:off x="4361688" y="3749040"/>
+            <a:ext cx="3337560" cy="1143000"/>
           </a:xfrm>
           <a:prstGeom prst="rect">
             <a:avLst/>
@@ -16092,8 +16092,8 @@
         </p:nvSpPr>
         <p:spPr>
           <a:xfrm>
-            <a:off x="8540496" y="5212080"/>
-            <a:ext cx="3840480" cy="1965960"/>
+            <a:off x="8092440" y="3063240"/>
+            <a:ext cx="3749040" cy="1965960"/>
           </a:xfrm>
           <a:prstGeom prst="roundRect">
             <a:avLst>
@@ -16119,7 +16119,7 @@
         </p:nvSpPr>
         <p:spPr>
           <a:xfrm>
-            <a:off x="8705088" y="5394960"/>
+            <a:off x="8257032" y="3246120"/>
             <a:ext cx="530352" cy="530352"/>
           </a:xfrm>
           <a:prstGeom prst="roundRect">
@@ -16146,7 +16146,7 @@
         </p:nvSpPr>
         <p:spPr>
           <a:xfrm>
-            <a:off x="8705088" y="5376672"/>
+            <a:off x="8257032" y="3227832"/>
             <a:ext cx="548640" cy="548640"/>
           </a:xfrm>
           <a:prstGeom prst="rect">
@@ -16182,8 +16182,8 @@
         </p:nvSpPr>
         <p:spPr>
           <a:xfrm>
-            <a:off x="9345168" y="5413248"/>
-            <a:ext cx="2871216" cy="365760"/>
+            <a:off x="8897112" y="3264408"/>
+            <a:ext cx="2743200" cy="365760"/>
           </a:xfrm>
           <a:prstGeom prst="rect">
             <a:avLst/>
@@ -16218,8 +16218,8 @@
         </p:nvSpPr>
         <p:spPr>
           <a:xfrm>
-            <a:off x="8741664" y="5897880"/>
-            <a:ext cx="3474720" cy="1143000"/>
+            <a:off x="8293608" y="3749040"/>
+            <a:ext cx="3337560" cy="1143000"/>
           </a:xfrm>
           <a:prstGeom prst="rect">
             <a:avLst/>
@@ -16438,8 +16438,8 @@
         </p:nvSpPr>
         <p:spPr>
           <a:xfrm>
-            <a:off x="365760" y="914400"/>
-            <a:ext cx="3840480" cy="1965960"/>
+            <a:off x="228600" y="914400"/>
+            <a:ext cx="3749040" cy="1965960"/>
           </a:xfrm>
           <a:prstGeom prst="roundRect">
             <a:avLst>
@@ -16465,7 +16465,7 @@
         </p:nvSpPr>
         <p:spPr>
           <a:xfrm>
-            <a:off x="530352" y="1097280"/>
+            <a:off x="393192" y="1097280"/>
             <a:ext cx="530352" cy="530352"/>
           </a:xfrm>
           <a:prstGeom prst="roundRect">
@@ -16492,7 +16492,7 @@
         </p:nvSpPr>
         <p:spPr>
           <a:xfrm>
-            <a:off x="530352" y="1078992"/>
+            <a:off x="393192" y="1078992"/>
             <a:ext cx="548640" cy="548640"/>
           </a:xfrm>
           <a:prstGeom prst="rect">
@@ -16528,8 +16528,8 @@
         </p:nvSpPr>
         <p:spPr>
           <a:xfrm>
-            <a:off x="1170432" y="1115568"/>
-            <a:ext cx="2871216" cy="365760"/>
+            <a:off x="1033272" y="1115568"/>
+            <a:ext cx="2743200" cy="365760"/>
           </a:xfrm>
           <a:prstGeom prst="rect">
             <a:avLst/>
@@ -16564,8 +16564,8 @@
         </p:nvSpPr>
         <p:spPr>
           <a:xfrm>
-            <a:off x="566928" y="1600200"/>
-            <a:ext cx="3474720" cy="1143000"/>
+            <a:off x="429768" y="1600200"/>
+            <a:ext cx="3337560" cy="1143000"/>
           </a:xfrm>
           <a:prstGeom prst="rect">
             <a:avLst/>
@@ -16628,8 +16628,8 @@
         </p:nvSpPr>
         <p:spPr>
           <a:xfrm>
-            <a:off x="4453128" y="914400"/>
-            <a:ext cx="3840480" cy="1965960"/>
+            <a:off x="4160520" y="914400"/>
+            <a:ext cx="3749040" cy="1965960"/>
           </a:xfrm>
           <a:prstGeom prst="roundRect">
             <a:avLst>
@@ -16655,7 +16655,7 @@
         </p:nvSpPr>
         <p:spPr>
           <a:xfrm>
-            <a:off x="4617720" y="1097280"/>
+            <a:off x="4325112" y="1097280"/>
             <a:ext cx="530352" cy="530352"/>
           </a:xfrm>
           <a:prstGeom prst="roundRect">
@@ -16682,7 +16682,7 @@
         </p:nvSpPr>
         <p:spPr>
           <a:xfrm>
-            <a:off x="4617720" y="1078992"/>
+            <a:off x="4325112" y="1078992"/>
             <a:ext cx="548640" cy="548640"/>
           </a:xfrm>
           <a:prstGeom prst="rect">
@@ -16718,8 +16718,8 @@
         </p:nvSpPr>
         <p:spPr>
           <a:xfrm>
-            <a:off x="5257800" y="1115568"/>
-            <a:ext cx="2871216" cy="365760"/>
+            <a:off x="4965192" y="1115568"/>
+            <a:ext cx="2743200" cy="365760"/>
           </a:xfrm>
           <a:prstGeom prst="rect">
             <a:avLst/>
@@ -16754,8 +16754,8 @@
         </p:nvSpPr>
         <p:spPr>
           <a:xfrm>
-            <a:off x="4654296" y="1600200"/>
-            <a:ext cx="3474720" cy="1143000"/>
+            <a:off x="4361688" y="1600200"/>
+            <a:ext cx="3337560" cy="1143000"/>
           </a:xfrm>
           <a:prstGeom prst="rect">
             <a:avLst/>
@@ -16818,8 +16818,8 @@
         </p:nvSpPr>
         <p:spPr>
           <a:xfrm>
-            <a:off x="8540496" y="3063240"/>
-            <a:ext cx="3840480" cy="1965960"/>
+            <a:off x="8092440" y="914400"/>
+            <a:ext cx="3749040" cy="1965960"/>
           </a:xfrm>
           <a:prstGeom prst="roundRect">
             <a:avLst>
@@ -16845,7 +16845,7 @@
         </p:nvSpPr>
         <p:spPr>
           <a:xfrm>
-            <a:off x="8705088" y="3246120"/>
+            <a:off x="8257032" y="1097280"/>
             <a:ext cx="530352" cy="530352"/>
           </a:xfrm>
           <a:prstGeom prst="roundRect">
@@ -16872,7 +16872,7 @@
         </p:nvSpPr>
         <p:spPr>
           <a:xfrm>
-            <a:off x="8705088" y="3227832"/>
+            <a:off x="8257032" y="1078992"/>
             <a:ext cx="548640" cy="548640"/>
           </a:xfrm>
           <a:prstGeom prst="rect">
@@ -16908,8 +16908,8 @@
         </p:nvSpPr>
         <p:spPr>
           <a:xfrm>
-            <a:off x="9345168" y="3264408"/>
-            <a:ext cx="2871216" cy="365760"/>
+            <a:off x="8897112" y="1115568"/>
+            <a:ext cx="2743200" cy="365760"/>
           </a:xfrm>
           <a:prstGeom prst="rect">
             <a:avLst/>
@@ -16944,8 +16944,8 @@
         </p:nvSpPr>
         <p:spPr>
           <a:xfrm>
-            <a:off x="8741664" y="3749040"/>
-            <a:ext cx="3474720" cy="1143000"/>
+            <a:off x="8293608" y="1600200"/>
+            <a:ext cx="3337560" cy="1143000"/>
           </a:xfrm>
           <a:prstGeom prst="rect">
             <a:avLst/>
@@ -17008,8 +17008,8 @@
         </p:nvSpPr>
         <p:spPr>
           <a:xfrm>
-            <a:off x="365760" y="3063240"/>
-            <a:ext cx="3840480" cy="1965960"/>
+            <a:off x="228600" y="3063240"/>
+            <a:ext cx="3749040" cy="1965960"/>
           </a:xfrm>
           <a:prstGeom prst="roundRect">
             <a:avLst>
@@ -17035,7 +17035,7 @@
         </p:nvSpPr>
         <p:spPr>
           <a:xfrm>
-            <a:off x="530352" y="3246120"/>
+            <a:off x="393192" y="3246120"/>
             <a:ext cx="530352" cy="530352"/>
           </a:xfrm>
           <a:prstGeom prst="roundRect">
@@ -17062,7 +17062,7 @@
         </p:nvSpPr>
         <p:spPr>
           <a:xfrm>
-            <a:off x="530352" y="3227832"/>
+            <a:off x="393192" y="3227832"/>
             <a:ext cx="548640" cy="548640"/>
           </a:xfrm>
           <a:prstGeom prst="rect">
@@ -17098,8 +17098,8 @@
         </p:nvSpPr>
         <p:spPr>
           <a:xfrm>
-            <a:off x="1170432" y="3264408"/>
-            <a:ext cx="2871216" cy="365760"/>
+            <a:off x="1033272" y="3264408"/>
+            <a:ext cx="2743200" cy="365760"/>
           </a:xfrm>
           <a:prstGeom prst="rect">
             <a:avLst/>
@@ -17134,8 +17134,8 @@
         </p:nvSpPr>
         <p:spPr>
           <a:xfrm>
-            <a:off x="566928" y="3749040"/>
-            <a:ext cx="3474720" cy="1143000"/>
+            <a:off x="429768" y="3749040"/>
+            <a:ext cx="3337560" cy="1143000"/>
           </a:xfrm>
           <a:prstGeom prst="rect">
             <a:avLst/>
@@ -17198,8 +17198,8 @@
         </p:nvSpPr>
         <p:spPr>
           <a:xfrm>
-            <a:off x="4453128" y="5212080"/>
-            <a:ext cx="3840480" cy="1965960"/>
+            <a:off x="4160520" y="3063240"/>
+            <a:ext cx="3749040" cy="1965960"/>
           </a:xfrm>
           <a:prstGeom prst="roundRect">
             <a:avLst>
@@ -17225,7 +17225,7 @@
         </p:nvSpPr>
         <p:spPr>
           <a:xfrm>
-            <a:off x="4617720" y="5394960"/>
+            <a:off x="4325112" y="3246120"/>
             <a:ext cx="530352" cy="530352"/>
           </a:xfrm>
           <a:prstGeom prst="roundRect">
@@ -17252,7 +17252,7 @@
         </p:nvSpPr>
         <p:spPr>
           <a:xfrm>
-            <a:off x="4617720" y="5376672"/>
+            <a:off x="4325112" y="3227832"/>
             <a:ext cx="548640" cy="548640"/>
           </a:xfrm>
           <a:prstGeom prst="rect">
@@ -17288,8 +17288,8 @@
         </p:nvSpPr>
         <p:spPr>
           <a:xfrm>
-            <a:off x="5257800" y="5413248"/>
-            <a:ext cx="2871216" cy="365760"/>
+            <a:off x="4965192" y="3264408"/>
+            <a:ext cx="2743200" cy="365760"/>
           </a:xfrm>
           <a:prstGeom prst="rect">
             <a:avLst/>
@@ -17324,8 +17324,8 @@
         </p:nvSpPr>
         <p:spPr>
           <a:xfrm>
-            <a:off x="4654296" y="5897880"/>
-            <a:ext cx="3474720" cy="1143000"/>
+            <a:off x="4361688" y="3749040"/>
+            <a:ext cx="3337560" cy="1143000"/>
           </a:xfrm>
           <a:prstGeom prst="rect">
             <a:avLst/>
@@ -17388,8 +17388,8 @@
         </p:nvSpPr>
         <p:spPr>
           <a:xfrm>
-            <a:off x="8540496" y="5212080"/>
-            <a:ext cx="3840480" cy="1965960"/>
+            <a:off x="8092440" y="3063240"/>
+            <a:ext cx="3749040" cy="1965960"/>
           </a:xfrm>
           <a:prstGeom prst="roundRect">
             <a:avLst>
@@ -17415,7 +17415,7 @@
         </p:nvSpPr>
         <p:spPr>
           <a:xfrm>
-            <a:off x="8705088" y="5394960"/>
+            <a:off x="8257032" y="3246120"/>
             <a:ext cx="530352" cy="530352"/>
           </a:xfrm>
           <a:prstGeom prst="roundRect">
@@ -17442,7 +17442,7 @@
         </p:nvSpPr>
         <p:spPr>
           <a:xfrm>
-            <a:off x="8705088" y="5376672"/>
+            <a:off x="8257032" y="3227832"/>
             <a:ext cx="548640" cy="548640"/>
           </a:xfrm>
           <a:prstGeom prst="rect">
@@ -17478,8 +17478,8 @@
         </p:nvSpPr>
         <p:spPr>
           <a:xfrm>
-            <a:off x="9345168" y="5413248"/>
-            <a:ext cx="2871216" cy="365760"/>
+            <a:off x="8897112" y="3264408"/>
+            <a:ext cx="2743200" cy="365760"/>
           </a:xfrm>
           <a:prstGeom prst="rect">
             <a:avLst/>
@@ -17514,8 +17514,8 @@
         </p:nvSpPr>
         <p:spPr>
           <a:xfrm>
-            <a:off x="8741664" y="5897880"/>
-            <a:ext cx="3474720" cy="1143000"/>
+            <a:off x="8293608" y="3749040"/>
+            <a:ext cx="3337560" cy="1143000"/>
           </a:xfrm>
           <a:prstGeom prst="rect">
             <a:avLst/>
@@ -17695,7 +17695,7 @@
                   <a:srgbClr val="4C1D95"/>
                 </a:solidFill>
               </a:rPr>
-              <a:t>🏁  Storage RLS · 관리자 FCM 푸시 · Phase 1~3 완전 완성</a:t>
+              <a:t>🏁  FCM 푸시 · 지도 수정 · 주소 검색 버그 · .env 완성</a:t>
             </a:r>
             <a:endParaRPr lang="en-US" sz="1800" dirty="0"/>
           </a:p>
@@ -17734,8 +17734,8 @@
         </p:nvSpPr>
         <p:spPr>
           <a:xfrm>
-            <a:off x="365760" y="914400"/>
-            <a:ext cx="3840480" cy="1965960"/>
+            <a:off x="228600" y="914400"/>
+            <a:ext cx="3749040" cy="1965960"/>
           </a:xfrm>
           <a:prstGeom prst="roundRect">
             <a:avLst>
@@ -17761,7 +17761,7 @@
         </p:nvSpPr>
         <p:spPr>
           <a:xfrm>
-            <a:off x="530352" y="1097280"/>
+            <a:off x="393192" y="1097280"/>
             <a:ext cx="530352" cy="530352"/>
           </a:xfrm>
           <a:prstGeom prst="roundRect">
@@ -17788,7 +17788,7 @@
         </p:nvSpPr>
         <p:spPr>
           <a:xfrm>
-            <a:off x="530352" y="1078992"/>
+            <a:off x="393192" y="1078992"/>
             <a:ext cx="548640" cy="548640"/>
           </a:xfrm>
           <a:prstGeom prst="rect">
@@ -17810,7 +17810,7 @@
                   <a:srgbClr val="000000"/>
                 </a:solidFill>
               </a:rPr>
-              <a:t>🪣</a:t>
+              <a:t>🗺️</a:t>
             </a:r>
             <a:endParaRPr lang="en-US" sz="1800" dirty="0"/>
           </a:p>
@@ -17824,8 +17824,8 @@
         </p:nvSpPr>
         <p:spPr>
           <a:xfrm>
-            <a:off x="1170432" y="1115568"/>
-            <a:ext cx="2871216" cy="365760"/>
+            <a:off x="1033272" y="1115568"/>
+            <a:ext cx="2743200" cy="365760"/>
           </a:xfrm>
           <a:prstGeom prst="rect">
             <a:avLst/>
@@ -17846,7 +17846,7 @@
                   <a:srgbClr val="0D9488"/>
                 </a:solidFill>
               </a:rPr>
-              <a:t>Storage RLS 수정</a:t>
+              <a:t>KakaoMap SDK 수정</a:t>
             </a:r>
             <a:endParaRPr lang="en-US" sz="1200" dirty="0"/>
           </a:p>
@@ -17860,8 +17860,8 @@
         </p:nvSpPr>
         <p:spPr>
           <a:xfrm>
-            <a:off x="566928" y="1600200"/>
-            <a:ext cx="3474720" cy="1143000"/>
+            <a:off x="429768" y="1600200"/>
+            <a:ext cx="3337560" cy="1143000"/>
           </a:xfrm>
           <a:prstGeom prst="rect">
             <a:avLst/>
@@ -17882,7 +17882,7 @@
                   <a:srgbClr val="1F1235"/>
                 </a:solidFill>
               </a:rPr>
-              <a:t>버킷명 pick-pick-images → pick-pick-image 수정</a:t>
+              <a:t>libraries=services 누락 수정</a:t>
             </a:r>
             <a:endParaRPr lang="en-US" sz="1050" dirty="0"/>
           </a:p>
@@ -17896,7 +17896,7 @@
                   <a:srgbClr val="1F1235"/>
                 </a:solidFill>
               </a:rPr>
-              <a:t>4개 운영 정책 신규 생성</a:t>
+              <a:t>onerror 핸들러 + 디버그 로깅 추가</a:t>
             </a:r>
             <a:endParaRPr lang="en-US" sz="1050" dirty="0"/>
           </a:p>
@@ -17910,7 +17910,7 @@
                   <a:srgbClr val="1F1235"/>
                 </a:solidFill>
               </a:rPr>
-              <a:t>(공개 SELECT / 인증 INSERT·UPDATE·DELETE)</a:t>
+              <a:t>스크립트 재로드 충돌 방지 로직</a:t>
             </a:r>
             <a:endParaRPr lang="en-US" sz="1050" dirty="0"/>
           </a:p>
@@ -17924,8 +17924,8 @@
         </p:nvSpPr>
         <p:spPr>
           <a:xfrm>
-            <a:off x="4453128" y="914400"/>
-            <a:ext cx="3840480" cy="1965960"/>
+            <a:off x="4160520" y="914400"/>
+            <a:ext cx="3749040" cy="1965960"/>
           </a:xfrm>
           <a:prstGeom prst="roundRect">
             <a:avLst>
@@ -17951,7 +17951,7 @@
         </p:nvSpPr>
         <p:spPr>
           <a:xfrm>
-            <a:off x="4617720" y="1097280"/>
+            <a:off x="4325112" y="1097280"/>
             <a:ext cx="530352" cy="530352"/>
           </a:xfrm>
           <a:prstGeom prst="roundRect">
@@ -17978,7 +17978,7 @@
         </p:nvSpPr>
         <p:spPr>
           <a:xfrm>
-            <a:off x="4617720" y="1078992"/>
+            <a:off x="4325112" y="1078992"/>
             <a:ext cx="548640" cy="548640"/>
           </a:xfrm>
           <a:prstGeom prst="rect">
@@ -18000,7 +18000,7 @@
                   <a:srgbClr val="000000"/>
                 </a:solidFill>
               </a:rPr>
-              <a:t>📡</a:t>
+              <a:t>📍</a:t>
             </a:r>
             <a:endParaRPr lang="en-US" sz="1800" dirty="0"/>
           </a:p>
@@ -18014,8 +18014,8 @@
         </p:nvSpPr>
         <p:spPr>
           <a:xfrm>
-            <a:off x="5257800" y="1115568"/>
-            <a:ext cx="2871216" cy="365760"/>
+            <a:off x="4965192" y="1115568"/>
+            <a:ext cx="2743200" cy="365760"/>
           </a:xfrm>
           <a:prstGeom prst="rect">
             <a:avLst/>
@@ -18036,7 +18036,7 @@
                   <a:srgbClr val="0D9488"/>
                 </a:solidFill>
               </a:rPr>
-              <a:t>관리자 FCM 일괄 발송 API</a:t>
+              <a:t>홈 위치 바 동적화</a:t>
             </a:r>
             <a:endParaRPr lang="en-US" sz="1200" dirty="0"/>
           </a:p>
@@ -18050,8 +18050,8 @@
         </p:nvSpPr>
         <p:spPr>
           <a:xfrm>
-            <a:off x="4654296" y="1600200"/>
-            <a:ext cx="3474720" cy="1143000"/>
+            <a:off x="4361688" y="1600200"/>
+            <a:ext cx="3337560" cy="1143000"/>
           </a:xfrm>
           <a:prstGeom prst="rect">
             <a:avLst/>
@@ -18072,7 +18072,7 @@
                   <a:srgbClr val="1F1235"/>
                 </a:solidFill>
               </a:rPr>
-              <a:t>POST /api/admin/push 신규 API</a:t>
+              <a:t>하드코딩 '역삼동' 제거</a:t>
             </a:r>
             <a:endParaRPr lang="en-US" sz="1050" dirty="0"/>
           </a:p>
@@ -18086,7 +18086,7 @@
                   <a:srgbClr val="1F1235"/>
                 </a:solidFill>
               </a:rPr>
-              <a:t>역할별 필터 (전체·사용자·사장님·라이더)</a:t>
+              <a:t>LocationBar.tsx 클라이언트 컴포넌트</a:t>
             </a:r>
             <a:endParaRPr lang="en-US" sz="1050" dirty="0"/>
           </a:p>
@@ -18100,7 +18100,7 @@
                   <a:srgbClr val="1F1235"/>
                 </a:solidFill>
               </a:rPr>
-              <a:t>500개 청크 멀티캐스트 발송</a:t>
+              <a:t>기본 배달 주소 API 연동 표시</a:t>
             </a:r>
             <a:endParaRPr lang="en-US" sz="1050" dirty="0"/>
           </a:p>
@@ -18114,8 +18114,8 @@
         </p:nvSpPr>
         <p:spPr>
           <a:xfrm>
-            <a:off x="8540496" y="3063240"/>
-            <a:ext cx="3840480" cy="1965960"/>
+            <a:off x="8092440" y="914400"/>
+            <a:ext cx="3749040" cy="1965960"/>
           </a:xfrm>
           <a:prstGeom prst="roundRect">
             <a:avLst>
@@ -18141,7 +18141,7 @@
         </p:nvSpPr>
         <p:spPr>
           <a:xfrm>
-            <a:off x="8705088" y="3246120"/>
+            <a:off x="8257032" y="1097280"/>
             <a:ext cx="530352" cy="530352"/>
           </a:xfrm>
           <a:prstGeom prst="roundRect">
@@ -18168,7 +18168,7 @@
         </p:nvSpPr>
         <p:spPr>
           <a:xfrm>
-            <a:off x="8705088" y="3227832"/>
+            <a:off x="8257032" y="1078992"/>
             <a:ext cx="548640" cy="548640"/>
           </a:xfrm>
           <a:prstGeom prst="rect">
@@ -18190,7 +18190,7 @@
                   <a:srgbClr val="000000"/>
                 </a:solidFill>
               </a:rPr>
-              <a:t>🔔</a:t>
+              <a:t>🔍</a:t>
             </a:r>
             <a:endParaRPr lang="en-US" sz="1800" dirty="0"/>
           </a:p>
@@ -18204,8 +18204,8 @@
         </p:nvSpPr>
         <p:spPr>
           <a:xfrm>
-            <a:off x="9345168" y="3264408"/>
-            <a:ext cx="2871216" cy="365760"/>
+            <a:off x="8897112" y="1115568"/>
+            <a:ext cx="2743200" cy="365760"/>
           </a:xfrm>
           <a:prstGeom prst="rect">
             <a:avLst/>
@@ -18226,7 +18226,7 @@
                   <a:srgbClr val="0D9488"/>
                 </a:solidFill>
               </a:rPr>
-              <a:t>관리자 대시보드 5번째 탭</a:t>
+              <a:t>주소 검색 버그 수정</a:t>
             </a:r>
             <a:endParaRPr lang="en-US" sz="1200" dirty="0"/>
           </a:p>
@@ -18240,8 +18240,8 @@
         </p:nvSpPr>
         <p:spPr>
           <a:xfrm>
-            <a:off x="8741664" y="3749040"/>
-            <a:ext cx="3474720" cy="1143000"/>
+            <a:off x="8293608" y="1600200"/>
+            <a:ext cx="3337560" cy="1143000"/>
           </a:xfrm>
           <a:prstGeom prst="rect">
             <a:avLst/>
@@ -18262,7 +18262,7 @@
                   <a:srgbClr val="1F1235"/>
                 </a:solidFill>
               </a:rPr>
-              <a:t>PushTab 컴포넌트 (Bell 아이콘)</a:t>
+              <a:t>Daum Postcode embed 타이밍 버그</a:t>
             </a:r>
             <a:endParaRPr lang="en-US" sz="1050" dirty="0"/>
           </a:p>
@@ -18276,7 +18276,7 @@
                   <a:srgbClr val="1F1235"/>
                 </a:solidFill>
               </a:rPr>
-              <a:t>제목·내용·URL·역할 선택 UI</a:t>
+              <a:t>setSearchOpen → useEffect 패턴 변경</a:t>
             </a:r>
             <a:endParaRPr lang="en-US" sz="1050" dirty="0"/>
           </a:p>
@@ -18290,7 +18290,7 @@
                   <a:srgbClr val="1F1235"/>
                 </a:solidFill>
               </a:rPr>
-              <a:t>발송 결과 카드 (전송 기기수 표시)</a:t>
+              <a:t>DOM 마운트 후 embed 실행 보장</a:t>
             </a:r>
             <a:endParaRPr lang="en-US" sz="1050" dirty="0"/>
           </a:p>
@@ -18304,8 +18304,8 @@
         </p:nvSpPr>
         <p:spPr>
           <a:xfrm>
-            <a:off x="365760" y="3063240"/>
-            <a:ext cx="3840480" cy="1965960"/>
+            <a:off x="228600" y="3063240"/>
+            <a:ext cx="3749040" cy="1965960"/>
           </a:xfrm>
           <a:prstGeom prst="roundRect">
             <a:avLst>
@@ -18331,7 +18331,7 @@
         </p:nvSpPr>
         <p:spPr>
           <a:xfrm>
-            <a:off x="530352" y="3246120"/>
+            <a:off x="393192" y="3246120"/>
             <a:ext cx="530352" cy="530352"/>
           </a:xfrm>
           <a:prstGeom prst="roundRect">
@@ -18358,7 +18358,7 @@
         </p:nvSpPr>
         <p:spPr>
           <a:xfrm>
-            <a:off x="530352" y="3227832"/>
+            <a:off x="393192" y="3227832"/>
             <a:ext cx="548640" cy="548640"/>
           </a:xfrm>
           <a:prstGeom prst="rect">
@@ -18380,7 +18380,7 @@
                   <a:srgbClr val="000000"/>
                 </a:solidFill>
               </a:rPr>
-              <a:t>🏆</a:t>
+              <a:t>🔥</a:t>
             </a:r>
             <a:endParaRPr lang="en-US" sz="1800" dirty="0"/>
           </a:p>
@@ -18394,8 +18394,8 @@
         </p:nvSpPr>
         <p:spPr>
           <a:xfrm>
-            <a:off x="1170432" y="3264408"/>
-            <a:ext cx="2871216" cy="365760"/>
+            <a:off x="1033272" y="3264408"/>
+            <a:ext cx="2743200" cy="365760"/>
           </a:xfrm>
           <a:prstGeom prst="rect">
             <a:avLst/>
@@ -18416,7 +18416,7 @@
                   <a:srgbClr val="0D9488"/>
                 </a:solidFill>
               </a:rPr>
-              <a:t>미착수 기능 0개 달성</a:t>
+              <a:t>Firebase 환경변수 완성</a:t>
             </a:r>
             <a:endParaRPr lang="en-US" sz="1200" dirty="0"/>
           </a:p>
@@ -18430,8 +18430,8 @@
         </p:nvSpPr>
         <p:spPr>
           <a:xfrm>
-            <a:off x="566928" y="3749040"/>
-            <a:ext cx="3474720" cy="1143000"/>
+            <a:off x="429768" y="3749040"/>
+            <a:ext cx="3337560" cy="1143000"/>
           </a:xfrm>
           <a:prstGeom prst="rect">
             <a:avLst/>
@@ -18452,7 +18452,7 @@
                   <a:srgbClr val="1F1235"/>
                 </a:solidFill>
               </a:rPr>
-              <a:t>Phase 1~3 전체 완성</a:t>
+              <a:t>API Key ~ App ID 6개 설정</a:t>
             </a:r>
             <a:endParaRPr lang="en-US" sz="1050" dirty="0"/>
           </a:p>
@@ -18466,7 +18466,7 @@
                   <a:srgbClr val="1F1235"/>
                 </a:solidFill>
               </a:rPr>
-              <a:t>총 55개+ 기능 구현 완료</a:t>
+              <a:t>VAPID 키 (웹 푸시 인증서)</a:t>
             </a:r>
             <a:endParaRPr lang="en-US" sz="1050" dirty="0"/>
           </a:p>
@@ -18480,7 +18480,7 @@
                   <a:srgbClr val="1F1235"/>
                 </a:solidFill>
               </a:rPr>
-              <a:t>Pi Network 연동만 남은 상태</a:t>
+              <a:t>Admin SDK JSON 서버 전용 키</a:t>
             </a:r>
             <a:endParaRPr lang="en-US" sz="1050" dirty="0"/>
           </a:p>
@@ -18494,8 +18494,8 @@
         </p:nvSpPr>
         <p:spPr>
           <a:xfrm>
-            <a:off x="4453128" y="5212080"/>
-            <a:ext cx="3840480" cy="1965960"/>
+            <a:off x="4160520" y="3063240"/>
+            <a:ext cx="3749040" cy="1965960"/>
           </a:xfrm>
           <a:prstGeom prst="roundRect">
             <a:avLst>
@@ -18521,7 +18521,7 @@
         </p:nvSpPr>
         <p:spPr>
           <a:xfrm>
-            <a:off x="4617720" y="5394960"/>
+            <a:off x="4325112" y="3246120"/>
             <a:ext cx="530352" cy="530352"/>
           </a:xfrm>
           <a:prstGeom prst="roundRect">
@@ -18548,7 +18548,7 @@
         </p:nvSpPr>
         <p:spPr>
           <a:xfrm>
-            <a:off x="4617720" y="5376672"/>
+            <a:off x="4325112" y="3227832"/>
             <a:ext cx="548640" cy="548640"/>
           </a:xfrm>
           <a:prstGeom prst="rect">
@@ -18570,7 +18570,7 @@
                   <a:srgbClr val="000000"/>
                 </a:solidFill>
               </a:rPr>
-              <a:t>📊</a:t>
+              <a:t>🔑</a:t>
             </a:r>
             <a:endParaRPr lang="en-US" sz="1800" dirty="0"/>
           </a:p>
@@ -18584,8 +18584,8 @@
         </p:nvSpPr>
         <p:spPr>
           <a:xfrm>
-            <a:off x="5257800" y="5413248"/>
-            <a:ext cx="2871216" cy="365760"/>
+            <a:off x="4965192" y="3264408"/>
+            <a:ext cx="2743200" cy="365760"/>
           </a:xfrm>
           <a:prstGeom prst="rect">
             <a:avLst/>
@@ -18606,7 +18606,7 @@
                   <a:srgbClr val="0D9488"/>
                 </a:solidFill>
               </a:rPr>
-              <a:t>관리자 대시보드 5탭 완성</a:t>
+              <a:t>카카오 도메인 등록</a:t>
             </a:r>
             <a:endParaRPr lang="en-US" sz="1200" dirty="0"/>
           </a:p>
@@ -18620,8 +18620,8 @@
         </p:nvSpPr>
         <p:spPr>
           <a:xfrm>
-            <a:off x="4654296" y="5897880"/>
-            <a:ext cx="3474720" cy="1143000"/>
+            <a:off x="4361688" y="3749040"/>
+            <a:ext cx="3337560" cy="1143000"/>
           </a:xfrm>
           <a:prstGeom prst="rect">
             <a:avLst/>
@@ -18642,7 +18642,7 @@
                   <a:srgbClr val="1F1235"/>
                 </a:solidFill>
               </a:rPr>
-              <a:t>통계 · 회원 · 가게 · 쿠폰 · FCM 푸시</a:t>
+              <a:t>JS Key → JavaScript SDK 도메인</a:t>
             </a:r>
             <a:endParaRPr lang="en-US" sz="1050" dirty="0"/>
           </a:p>
@@ -18656,7 +18656,7 @@
                   <a:srgbClr val="1F1235"/>
                 </a:solidFill>
               </a:rPr>
-              <a:t>PICK 지급 + 가게 승인 + 쿠폰 CRUD</a:t>
+              <a:t>http/https localhost:3000 등록</a:t>
             </a:r>
             <a:endParaRPr lang="en-US" sz="1050" dirty="0"/>
           </a:p>
@@ -18670,7 +18670,7 @@
                   <a:srgbClr val="1F1235"/>
                 </a:solidFill>
               </a:rPr>
-              <a:t>플랫폼 전체 운영 가능 상태</a:t>
+              <a:t>기존 '사이트 도메인' → 이름 변경됨</a:t>
             </a:r>
             <a:endParaRPr lang="en-US" sz="1050" dirty="0"/>
           </a:p>
@@ -18684,8 +18684,8 @@
         </p:nvSpPr>
         <p:spPr>
           <a:xfrm>
-            <a:off x="8540496" y="5212080"/>
-            <a:ext cx="3840480" cy="1965960"/>
+            <a:off x="8092440" y="3063240"/>
+            <a:ext cx="3749040" cy="1965960"/>
           </a:xfrm>
           <a:prstGeom prst="roundRect">
             <a:avLst>
@@ -18711,7 +18711,7 @@
         </p:nvSpPr>
         <p:spPr>
           <a:xfrm>
-            <a:off x="8705088" y="5394960"/>
+            <a:off x="8257032" y="3246120"/>
             <a:ext cx="530352" cy="530352"/>
           </a:xfrm>
           <a:prstGeom prst="roundRect">
@@ -18738,7 +18738,7 @@
         </p:nvSpPr>
         <p:spPr>
           <a:xfrm>
-            <a:off x="8705088" y="5376672"/>
+            <a:off x="8257032" y="3227832"/>
             <a:ext cx="548640" cy="548640"/>
           </a:xfrm>
           <a:prstGeom prst="rect">
@@ -18774,8 +18774,8 @@
         </p:nvSpPr>
         <p:spPr>
           <a:xfrm>
-            <a:off x="9345168" y="5413248"/>
-            <a:ext cx="2871216" cy="365760"/>
+            <a:off x="8897112" y="3264408"/>
+            <a:ext cx="2743200" cy="365760"/>
           </a:xfrm>
           <a:prstGeom prst="rect">
             <a:avLst/>
@@ -18796,7 +18796,7 @@
                   <a:srgbClr val="0D9488"/>
                 </a:solidFill>
               </a:rPr>
-              <a:t>서비스 런칭 준비 완료</a:t>
+              <a:t>런칭 준비 진행 중</a:t>
             </a:r>
             <a:endParaRPr lang="en-US" sz="1200" dirty="0"/>
           </a:p>
@@ -18810,8 +18810,8 @@
         </p:nvSpPr>
         <p:spPr>
           <a:xfrm>
-            <a:off x="8741664" y="5897880"/>
-            <a:ext cx="3474720" cy="1143000"/>
+            <a:off x="8293608" y="3749040"/>
+            <a:ext cx="3337560" cy="1143000"/>
           </a:xfrm>
           <a:prstGeom prst="rect">
             <a:avLst/>
@@ -18832,7 +18832,7 @@
                   <a:srgbClr val="1F1235"/>
                 </a:solidFill>
               </a:rPr>
-              <a:t>46개 커밋 / API 라우트 57개</a:t>
+              <a:t>Kakao API 키 타입 확인 필요</a:t>
             </a:r>
             <a:endParaRPr lang="en-US" sz="1050" dirty="0"/>
           </a:p>
@@ -18846,7 +18846,7 @@
                   <a:srgbClr val="1F1235"/>
                 </a:solidFill>
               </a:rPr>
-              <a:t>Day 1~7 총 7일 개발</a:t>
+              <a:t>앱 키 JavaScript 키 재확인</a:t>
             </a:r>
             <a:endParaRPr lang="en-US" sz="1050" dirty="0"/>
           </a:p>
@@ -18860,7 +18860,7 @@
                   <a:srgbClr val="1F1235"/>
                 </a:solidFill>
               </a:rPr>
-              <a:t>배달앱 기본 기능 100% 완성</a:t>
+              <a:t>Vercel 배포 전 최종 점검 단계</a:t>
             </a:r>
             <a:endParaRPr lang="en-US" sz="1050" dirty="0"/>
           </a:p>

--- a/PICKPICK_프로젝트현황.pptx
+++ b/PICKPICK_프로젝트현황.pptx
@@ -17,9 +17,10 @@
     <p:sldId id="265" r:id="rId11"/>
     <p:sldId id="266" r:id="rId12"/>
     <p:sldId id="267" r:id="rId13"/>
+    <p:sldId id="268" r:id="rId14"/>
   </p:sldIdLst>
   <p:notesMasterIdLst>
-    <p:notesMasterId r:id="rId14"/>
+    <p:notesMasterId r:id="rId15"/>
   </p:notesMasterIdLst>
   <p:sldSz cx="12192000" cy="6858000"/>
   <p:notesSz cx="6858000" cy="12192000"/>
@@ -819,6 +820,94 @@
 </p:notes>
 </file>
 
+<file path=ppt/notesSlides/notesSlide13.xml><?xml version="1.0" encoding="utf-8"?>
+<p:notes xmlns:a="http://schemas.openxmlformats.org/drawingml/2006/main" xmlns:r="http://schemas.openxmlformats.org/officeDocument/2006/relationships" xmlns:p="http://schemas.openxmlformats.org/presentationml/2006/main">
+  <p:cSld>
+    <p:spTree>
+      <p:nvGrpSpPr>
+        <p:cNvPr id="1" name=""/>
+        <p:cNvGrpSpPr/>
+        <p:nvPr/>
+      </p:nvGrpSpPr>
+      <p:grpSpPr>
+        <a:xfrm>
+          <a:off x="0" y="0"/>
+          <a:ext cx="0" cy="0"/>
+          <a:chOff x="0" y="0"/>
+          <a:chExt cx="0" cy="0"/>
+        </a:xfrm>
+      </p:grpSpPr>
+      <p:sp>
+        <p:nvSpPr>
+          <p:cNvPr id="2" name="Slide Image Placeholder 1"/>
+          <p:cNvSpPr>
+            <a:spLocks noGrp="1" noRot="1" noChangeAspect="1"/>
+          </p:cNvSpPr>
+          <p:nvPr>
+            <p:ph type="sldImg"/>
+          </p:nvPr>
+        </p:nvSpPr>
+        <p:spPr/>
+      </p:sp>
+      <p:sp>
+        <p:nvSpPr>
+          <p:cNvPr id="3" name="Notes Placeholder 2"/>
+          <p:cNvSpPr>
+            <a:spLocks noGrp="1"/>
+          </p:cNvSpPr>
+          <p:nvPr>
+            <p:ph type="body" idx="1"/>
+          </p:nvPr>
+        </p:nvSpPr>
+        <p:spPr/>
+        <p:txBody>
+          <a:bodyPr/>
+          <a:lstStyle/>
+          <a:p>
+            <a:r>
+              <a:rPr lang="en-US" dirty="0"/>
+              <a:t/>
+            </a:r>
+            <a:endParaRPr lang="en-US" dirty="0"/>
+          </a:p>
+        </p:txBody>
+      </p:sp>
+      <p:sp>
+        <p:nvSpPr>
+          <p:cNvPr id="4" name="Slide Number Placeholder 3"/>
+          <p:cNvSpPr>
+            <a:spLocks noGrp="1"/>
+          </p:cNvSpPr>
+          <p:nvPr>
+            <p:ph type="sldNum" sz="quarter" idx="10"/>
+          </p:nvPr>
+        </p:nvSpPr>
+        <p:spPr/>
+        <p:txBody>
+          <a:bodyPr/>
+          <a:lstStyle/>
+          <a:p>
+            <a:fld id="{F7021451-1387-4CA6-816F-3879F97B5CBC}" type="slidenum">
+              <a:rPr lang="en-US"/>
+              <a:t>13</a:t>
+            </a:fld>
+            <a:endParaRPr lang="en-US"/>
+          </a:p>
+        </p:txBody>
+      </p:sp>
+    </p:spTree>
+    <p:extLst>
+      <p:ext uri="{BB962C8B-B14F-4D97-AF65-F5344CB8AC3E}">
+        <p14:creationId xmlns:p14="http://schemas.microsoft.com/office/powerpoint/2010/main" val="1024086991"/>
+      </p:ext>
+    </p:extLst>
+  </p:cSld>
+  <p:clrMapOvr>
+    <a:masterClrMapping/>
+  </p:clrMapOvr>
+</p:notes>
+</file>
+
 <file path=ppt/notesSlides/notesSlide2.xml><?xml version="1.0" encoding="utf-8"?>
 <p:notes xmlns:a="http://schemas.openxmlformats.org/drawingml/2006/main" xmlns:r="http://schemas.openxmlformats.org/officeDocument/2006/relationships" xmlns:p="http://schemas.openxmlformats.org/presentationml/2006/main">
   <p:cSld>
@@ -2073,7 +2162,7 @@
                   <a:srgbClr val="C4B5FD"/>
                 </a:solidFill>
               </a:rPr>
-              <a:t>2026년 4월 13일  |  Firebase 완성 · 지도/주소 수정 · 카카오 키 확인 중</a:t>
+              <a:t>2026년 4월 14일  |  알림음 TTS 완성 · 라이더 실시간 알림 · 주문 플로우 버그 수정</a:t>
             </a:r>
             <a:endParaRPr lang="en-US" sz="1400" dirty="0"/>
           </a:p>
@@ -2221,1429 +2310,18 @@
       </p:grpSpPr>
       <p:sp>
         <p:nvSpPr>
-          <p:cNvPr id="2" name="Text 0"/>
-          <p:cNvSpPr/>
-          <p:nvPr/>
-        </p:nvSpPr>
-        <p:spPr>
-          <a:xfrm>
-            <a:off x="365760" y="228600"/>
-            <a:ext cx="12070080" cy="594360"/>
-          </a:xfrm>
-          <a:prstGeom prst="rect">
-            <a:avLst/>
-          </a:prstGeom>
-          <a:noFill/>
-          <a:ln/>
-        </p:spPr>
-        <p:txBody>
-          <a:bodyPr wrap="square" rtlCol="0" anchor="ctr"/>
-          <a:lstStyle/>
-          <a:p>
-            <a:pPr indent="0" marL="0">
-              <a:buNone/>
-            </a:pPr>
-            <a:r>
-              <a:rPr lang="en-US" sz="2400" b="1" dirty="0">
-                <a:solidFill>
-                  <a:srgbClr val="4C1D95"/>
-                </a:solidFill>
-              </a:rPr>
-              <a:t>✅  완료된 기능 전체 목록 (4/13 최종)</a:t>
-            </a:r>
-            <a:endParaRPr lang="en-US" sz="2400" dirty="0"/>
-          </a:p>
-        </p:txBody>
-      </p:sp>
-      <p:sp>
-        <p:nvSpPr>
-          <p:cNvPr id="3" name="Shape 1"/>
-          <p:cNvSpPr/>
-          <p:nvPr/>
-        </p:nvSpPr>
-        <p:spPr>
-          <a:xfrm>
-            <a:off x="365760" y="804672"/>
-            <a:ext cx="3840480" cy="45720"/>
-          </a:xfrm>
-          <a:prstGeom prst="rect">
-            <a:avLst/>
-          </a:prstGeom>
-          <a:solidFill>
-            <a:srgbClr val="16A34A"/>
-          </a:solidFill>
-          <a:ln w="12700">
-            <a:solidFill>
-              <a:srgbClr val="16A34A"/>
-            </a:solidFill>
-            <a:prstDash val="solid"/>
-          </a:ln>
-        </p:spPr>
-      </p:sp>
-      <p:sp>
-        <p:nvSpPr>
-          <p:cNvPr id="4" name="Shape 2"/>
-          <p:cNvSpPr/>
-          <p:nvPr/>
-        </p:nvSpPr>
-        <p:spPr>
-          <a:xfrm>
-            <a:off x="228600" y="960120"/>
-            <a:ext cx="3749040" cy="2423160"/>
+          <p:cNvPr id="2" name="Shape 0"/>
+          <p:cNvSpPr/>
+          <p:nvPr/>
+        </p:nvSpPr>
+        <p:spPr>
+          <a:xfrm>
+            <a:off x="365760" y="164592"/>
+            <a:ext cx="2560320" cy="502920"/>
           </a:xfrm>
           <a:prstGeom prst="roundRect">
             <a:avLst>
-              <a:gd name="adj" fmla="val 5660"/>
-            </a:avLst>
-          </a:prstGeom>
-          <a:solidFill>
-            <a:srgbClr val="EDE9FE"/>
-          </a:solidFill>
-          <a:ln w="12700">
-            <a:solidFill>
-              <a:srgbClr val="6B21A8"/>
-            </a:solidFill>
-            <a:prstDash val="solid"/>
-          </a:ln>
-        </p:spPr>
-      </p:sp>
-      <p:sp>
-        <p:nvSpPr>
-          <p:cNvPr id="5" name="Shape 3"/>
-          <p:cNvSpPr/>
-          <p:nvPr/>
-        </p:nvSpPr>
-        <p:spPr>
-          <a:xfrm>
-            <a:off x="338328" y="1069848"/>
-            <a:ext cx="3529584" cy="384048"/>
-          </a:xfrm>
-          <a:prstGeom prst="roundRect">
-            <a:avLst>
-              <a:gd name="adj" fmla="val 19048"/>
-            </a:avLst>
-          </a:prstGeom>
-          <a:solidFill>
-            <a:srgbClr val="6B21A8"/>
-          </a:solidFill>
-          <a:ln w="12700">
-            <a:solidFill>
-              <a:srgbClr val="6B21A8"/>
-            </a:solidFill>
-            <a:prstDash val="solid"/>
-          </a:ln>
-        </p:spPr>
-      </p:sp>
-      <p:sp>
-        <p:nvSpPr>
-          <p:cNvPr id="6" name="Text 4"/>
-          <p:cNvSpPr/>
-          <p:nvPr/>
-        </p:nvSpPr>
-        <p:spPr>
-          <a:xfrm>
-            <a:off x="338328" y="1069848"/>
-            <a:ext cx="3529584" cy="384048"/>
-          </a:xfrm>
-          <a:prstGeom prst="rect">
-            <a:avLst/>
-          </a:prstGeom>
-          <a:noFill/>
-          <a:ln/>
-        </p:spPr>
-        <p:txBody>
-          <a:bodyPr wrap="square" rtlCol="0" anchor="ctr"/>
-          <a:lstStyle/>
-          <a:p>
-            <a:pPr algn="ctr" indent="0" marL="0">
-              <a:buNone/>
-            </a:pPr>
-            <a:r>
-              <a:rPr lang="en-US" sz="1200" b="1" dirty="0">
-                <a:solidFill>
-                  <a:srgbClr val="FFFFFF"/>
-                </a:solidFill>
-              </a:rPr>
-              <a:t>🔐 인증 / 사용자 관리</a:t>
-            </a:r>
-            <a:endParaRPr lang="en-US" sz="1200" dirty="0"/>
-          </a:p>
-        </p:txBody>
-      </p:sp>
-      <p:sp>
-        <p:nvSpPr>
-          <p:cNvPr id="7" name="Text 5"/>
-          <p:cNvSpPr/>
-          <p:nvPr/>
-        </p:nvSpPr>
-        <p:spPr>
-          <a:xfrm>
-            <a:off x="393192" y="1554480"/>
-            <a:ext cx="3401568" cy="338328"/>
-          </a:xfrm>
-          <a:prstGeom prst="rect">
-            <a:avLst/>
-          </a:prstGeom>
-          <a:noFill/>
-          <a:ln/>
-        </p:spPr>
-        <p:txBody>
-          <a:bodyPr wrap="square" rtlCol="0" anchor="ctr"/>
-          <a:lstStyle/>
-          <a:p>
-            <a:pPr indent="0" marL="0">
-              <a:buNone/>
-            </a:pPr>
-            <a:r>
-              <a:rPr lang="en-US" sz="1000" dirty="0">
-                <a:solidFill>
-                  <a:srgbClr val="1F1235"/>
-                </a:solidFill>
-              </a:rPr>
-              <a:t>✓  이메일 로그인/회원가입 + 지갑 자동생성</a:t>
-            </a:r>
-            <a:endParaRPr lang="en-US" sz="1000" dirty="0"/>
-          </a:p>
-        </p:txBody>
-      </p:sp>
-      <p:sp>
-        <p:nvSpPr>
-          <p:cNvPr id="8" name="Text 6"/>
-          <p:cNvSpPr/>
-          <p:nvPr/>
-        </p:nvSpPr>
-        <p:spPr>
-          <a:xfrm>
-            <a:off x="393192" y="1901952"/>
-            <a:ext cx="3401568" cy="338328"/>
-          </a:xfrm>
-          <a:prstGeom prst="rect">
-            <a:avLst/>
-          </a:prstGeom>
-          <a:noFill/>
-          <a:ln/>
-        </p:spPr>
-        <p:txBody>
-          <a:bodyPr wrap="square" rtlCol="0" anchor="ctr"/>
-          <a:lstStyle/>
-          <a:p>
-            <a:pPr indent="0" marL="0">
-              <a:buNone/>
-            </a:pPr>
-            <a:r>
-              <a:rPr lang="en-US" sz="1000" dirty="0">
-                <a:solidFill>
-                  <a:srgbClr val="1F1235"/>
-                </a:solidFill>
-              </a:rPr>
-              <a:t>✓  카카오 소셜 로그인 + OAuth 콜백</a:t>
-            </a:r>
-            <a:endParaRPr lang="en-US" sz="1000" dirty="0"/>
-          </a:p>
-        </p:txBody>
-      </p:sp>
-      <p:sp>
-        <p:nvSpPr>
-          <p:cNvPr id="9" name="Text 7"/>
-          <p:cNvSpPr/>
-          <p:nvPr/>
-        </p:nvSpPr>
-        <p:spPr>
-          <a:xfrm>
-            <a:off x="393192" y="2249424"/>
-            <a:ext cx="3401568" cy="338328"/>
-          </a:xfrm>
-          <a:prstGeom prst="rect">
-            <a:avLst/>
-          </a:prstGeom>
-          <a:noFill/>
-          <a:ln/>
-        </p:spPr>
-        <p:txBody>
-          <a:bodyPr wrap="square" rtlCol="0" anchor="ctr"/>
-          <a:lstStyle/>
-          <a:p>
-            <a:pPr indent="0" marL="0">
-              <a:buNone/>
-            </a:pPr>
-            <a:r>
-              <a:rPr lang="en-US" sz="1000" dirty="0">
-                <a:solidFill>
-                  <a:srgbClr val="1F1235"/>
-                </a:solidFill>
-              </a:rPr>
-              <a:t>✓  RBAC 미들웨어 (user/owner/rider/admin)</a:t>
-            </a:r>
-            <a:endParaRPr lang="en-US" sz="1000" dirty="0"/>
-          </a:p>
-        </p:txBody>
-      </p:sp>
-      <p:sp>
-        <p:nvSpPr>
-          <p:cNvPr id="10" name="Text 8"/>
-          <p:cNvSpPr/>
-          <p:nvPr/>
-        </p:nvSpPr>
-        <p:spPr>
-          <a:xfrm>
-            <a:off x="393192" y="2596896"/>
-            <a:ext cx="3401568" cy="338328"/>
-          </a:xfrm>
-          <a:prstGeom prst="rect">
-            <a:avLst/>
-          </a:prstGeom>
-          <a:noFill/>
-          <a:ln/>
-        </p:spPr>
-        <p:txBody>
-          <a:bodyPr wrap="square" rtlCol="0" anchor="ctr"/>
-          <a:lstStyle/>
-          <a:p>
-            <a:pPr indent="0" marL="0">
-              <a:buNone/>
-            </a:pPr>
-            <a:r>
-              <a:rPr lang="en-US" sz="1000" dirty="0">
-                <a:solidFill>
-                  <a:srgbClr val="1F1235"/>
-                </a:solidFill>
-              </a:rPr>
-              <a:t>✓  비밀번호 찾기·재설정 + 검색 히스토리</a:t>
-            </a:r>
-            <a:endParaRPr lang="en-US" sz="1000" dirty="0"/>
-          </a:p>
-        </p:txBody>
-      </p:sp>
-      <p:sp>
-        <p:nvSpPr>
-          <p:cNvPr id="11" name="Text 9"/>
-          <p:cNvSpPr/>
-          <p:nvPr/>
-        </p:nvSpPr>
-        <p:spPr>
-          <a:xfrm>
-            <a:off x="393192" y="2944368"/>
-            <a:ext cx="3401568" cy="338328"/>
-          </a:xfrm>
-          <a:prstGeom prst="rect">
-            <a:avLst/>
-          </a:prstGeom>
-          <a:noFill/>
-          <a:ln/>
-        </p:spPr>
-        <p:txBody>
-          <a:bodyPr wrap="square" rtlCol="0" anchor="ctr"/>
-          <a:lstStyle/>
-          <a:p>
-            <a:pPr indent="0" marL="0">
-              <a:buNone/>
-            </a:pPr>
-            <a:r>
-              <a:rPr lang="en-US" sz="1000" dirty="0">
-                <a:solidFill>
-                  <a:srgbClr val="1F1235"/>
-                </a:solidFill>
-              </a:rPr>
-              <a:t>✓  프로필 수정 + 다중 배달 주소 + 레퍼럴</a:t>
-            </a:r>
-            <a:endParaRPr lang="en-US" sz="1000" dirty="0"/>
-          </a:p>
-        </p:txBody>
-      </p:sp>
-      <p:sp>
-        <p:nvSpPr>
-          <p:cNvPr id="12" name="Shape 10"/>
-          <p:cNvSpPr/>
-          <p:nvPr/>
-        </p:nvSpPr>
-        <p:spPr>
-          <a:xfrm>
-            <a:off x="4160520" y="960120"/>
-            <a:ext cx="3749040" cy="2423160"/>
-          </a:xfrm>
-          <a:prstGeom prst="roundRect">
-            <a:avLst>
-              <a:gd name="adj" fmla="val 5660"/>
-            </a:avLst>
-          </a:prstGeom>
-          <a:solidFill>
-            <a:srgbClr val="E0F2FE"/>
-          </a:solidFill>
-          <a:ln w="12700">
-            <a:solidFill>
-              <a:srgbClr val="0369A1"/>
-            </a:solidFill>
-            <a:prstDash val="solid"/>
-          </a:ln>
-        </p:spPr>
-      </p:sp>
-      <p:sp>
-        <p:nvSpPr>
-          <p:cNvPr id="13" name="Shape 11"/>
-          <p:cNvSpPr/>
-          <p:nvPr/>
-        </p:nvSpPr>
-        <p:spPr>
-          <a:xfrm>
-            <a:off x="4270248" y="1069848"/>
-            <a:ext cx="3529584" cy="384048"/>
-          </a:xfrm>
-          <a:prstGeom prst="roundRect">
-            <a:avLst>
-              <a:gd name="adj" fmla="val 19048"/>
-            </a:avLst>
-          </a:prstGeom>
-          <a:solidFill>
-            <a:srgbClr val="0369A1"/>
-          </a:solidFill>
-          <a:ln w="12700">
-            <a:solidFill>
-              <a:srgbClr val="0369A1"/>
-            </a:solidFill>
-            <a:prstDash val="solid"/>
-          </a:ln>
-        </p:spPr>
-      </p:sp>
-      <p:sp>
-        <p:nvSpPr>
-          <p:cNvPr id="14" name="Text 12"/>
-          <p:cNvSpPr/>
-          <p:nvPr/>
-        </p:nvSpPr>
-        <p:spPr>
-          <a:xfrm>
-            <a:off x="4270248" y="1069848"/>
-            <a:ext cx="3529584" cy="384048"/>
-          </a:xfrm>
-          <a:prstGeom prst="rect">
-            <a:avLst/>
-          </a:prstGeom>
-          <a:noFill/>
-          <a:ln/>
-        </p:spPr>
-        <p:txBody>
-          <a:bodyPr wrap="square" rtlCol="0" anchor="ctr"/>
-          <a:lstStyle/>
-          <a:p>
-            <a:pPr algn="ctr" indent="0" marL="0">
-              <a:buNone/>
-            </a:pPr>
-            <a:r>
-              <a:rPr lang="en-US" sz="1200" b="1" dirty="0">
-                <a:solidFill>
-                  <a:srgbClr val="FFFFFF"/>
-                </a:solidFill>
-              </a:rPr>
-              <a:t>🏠 사용자 탭 (4개) + UX</a:t>
-            </a:r>
-            <a:endParaRPr lang="en-US" sz="1200" dirty="0"/>
-          </a:p>
-        </p:txBody>
-      </p:sp>
-      <p:sp>
-        <p:nvSpPr>
-          <p:cNvPr id="15" name="Text 13"/>
-          <p:cNvSpPr/>
-          <p:nvPr/>
-        </p:nvSpPr>
-        <p:spPr>
-          <a:xfrm>
-            <a:off x="4325112" y="1554480"/>
-            <a:ext cx="3401568" cy="338328"/>
-          </a:xfrm>
-          <a:prstGeom prst="rect">
-            <a:avLst/>
-          </a:prstGeom>
-          <a:noFill/>
-          <a:ln/>
-        </p:spPr>
-        <p:txBody>
-          <a:bodyPr wrap="square" rtlCol="0" anchor="ctr"/>
-          <a:lstStyle/>
-          <a:p>
-            <a:pPr indent="0" marL="0">
-              <a:buNone/>
-            </a:pPr>
-            <a:r>
-              <a:rPr lang="en-US" sz="1000" dirty="0">
-                <a:solidFill>
-                  <a:srgbClr val="1F1235"/>
-                </a:solidFill>
-              </a:rPr>
-              <a:t>✓  홈: 카테고리·검색(GIN)·인기가게·광고</a:t>
-            </a:r>
-            <a:endParaRPr lang="en-US" sz="1000" dirty="0"/>
-          </a:p>
-        </p:txBody>
-      </p:sp>
-      <p:sp>
-        <p:nvSpPr>
-          <p:cNvPr id="16" name="Text 14"/>
-          <p:cNvSpPr/>
-          <p:nvPr/>
-        </p:nvSpPr>
-        <p:spPr>
-          <a:xfrm>
-            <a:off x="4325112" y="1901952"/>
-            <a:ext cx="3401568" cy="338328"/>
-          </a:xfrm>
-          <a:prstGeom prst="rect">
-            <a:avLst/>
-          </a:prstGeom>
-          <a:noFill/>
-          <a:ln/>
-        </p:spPr>
-        <p:txBody>
-          <a:bodyPr wrap="square" rtlCol="0" anchor="ctr"/>
-          <a:lstStyle/>
-          <a:p>
-            <a:pPr indent="0" marL="0">
-              <a:buNone/>
-            </a:pPr>
-            <a:r>
-              <a:rPr lang="en-US" sz="1000" dirty="0">
-                <a:solidFill>
-                  <a:srgbClr val="1F1235"/>
-                </a:solidFill>
-              </a:rPr>
-              <a:t>✓  지갑: 실잔액 + 충전 + PICK 보내기</a:t>
-            </a:r>
-            <a:endParaRPr lang="en-US" sz="1000" dirty="0"/>
-          </a:p>
-        </p:txBody>
-      </p:sp>
-      <p:sp>
-        <p:nvSpPr>
-          <p:cNvPr id="17" name="Text 15"/>
-          <p:cNvSpPr/>
-          <p:nvPr/>
-        </p:nvSpPr>
-        <p:spPr>
-          <a:xfrm>
-            <a:off x="4325112" y="2249424"/>
-            <a:ext cx="3401568" cy="338328"/>
-          </a:xfrm>
-          <a:prstGeom prst="rect">
-            <a:avLst/>
-          </a:prstGeom>
-          <a:noFill/>
-          <a:ln/>
-        </p:spPr>
-        <p:txBody>
-          <a:bodyPr wrap="square" rtlCol="0" anchor="ctr"/>
-          <a:lstStyle/>
-          <a:p>
-            <a:pPr indent="0" marL="0">
-              <a:buNone/>
-            </a:pPr>
-            <a:r>
-              <a:rPr lang="en-US" sz="1000" dirty="0">
-                <a:solidFill>
-                  <a:srgbClr val="1F1235"/>
-                </a:solidFill>
-              </a:rPr>
-              <a:t>✓  PICK주문: Realtime 추적 + 상세 + 재주문</a:t>
-            </a:r>
-            <a:endParaRPr lang="en-US" sz="1000" dirty="0"/>
-          </a:p>
-        </p:txBody>
-      </p:sp>
-      <p:sp>
-        <p:nvSpPr>
-          <p:cNvPr id="18" name="Text 16"/>
-          <p:cNvSpPr/>
-          <p:nvPr/>
-        </p:nvSpPr>
-        <p:spPr>
-          <a:xfrm>
-            <a:off x="4325112" y="2596896"/>
-            <a:ext cx="3401568" cy="338328"/>
-          </a:xfrm>
-          <a:prstGeom prst="rect">
-            <a:avLst/>
-          </a:prstGeom>
-          <a:noFill/>
-          <a:ln/>
-        </p:spPr>
-        <p:txBody>
-          <a:bodyPr wrap="square" rtlCol="0" anchor="ctr"/>
-          <a:lstStyle/>
-          <a:p>
-            <a:pPr indent="0" marL="0">
-              <a:buNone/>
-            </a:pPr>
-            <a:r>
-              <a:rPr lang="en-US" sz="1000" dirty="0">
-                <a:solidFill>
-                  <a:srgbClr val="1F1235"/>
-                </a:solidFill>
-              </a:rPr>
-              <a:t>✓  알림 드로어 + 딥링크 + 자동 트리거</a:t>
-            </a:r>
-            <a:endParaRPr lang="en-US" sz="1000" dirty="0"/>
-          </a:p>
-        </p:txBody>
-      </p:sp>
-      <p:sp>
-        <p:nvSpPr>
-          <p:cNvPr id="19" name="Text 17"/>
-          <p:cNvSpPr/>
-          <p:nvPr/>
-        </p:nvSpPr>
-        <p:spPr>
-          <a:xfrm>
-            <a:off x="4325112" y="2944368"/>
-            <a:ext cx="3401568" cy="338328"/>
-          </a:xfrm>
-          <a:prstGeom prst="rect">
-            <a:avLst/>
-          </a:prstGeom>
-          <a:noFill/>
-          <a:ln/>
-        </p:spPr>
-        <p:txBody>
-          <a:bodyPr wrap="square" rtlCol="0" anchor="ctr"/>
-          <a:lstStyle/>
-          <a:p>
-            <a:pPr indent="0" marL="0">
-              <a:buNone/>
-            </a:pPr>
-            <a:r>
-              <a:rPr lang="en-US" sz="1000" dirty="0">
-                <a:solidFill>
-                  <a:srgbClr val="1F1235"/>
-                </a:solidFill>
-              </a:rPr>
-              <a:t>✓  주간 영업시간 아코디언 + 실사 이미지</a:t>
-            </a:r>
-            <a:endParaRPr lang="en-US" sz="1000" dirty="0"/>
-          </a:p>
-        </p:txBody>
-      </p:sp>
-      <p:sp>
-        <p:nvSpPr>
-          <p:cNvPr id="20" name="Shape 18"/>
-          <p:cNvSpPr/>
-          <p:nvPr/>
-        </p:nvSpPr>
-        <p:spPr>
-          <a:xfrm>
-            <a:off x="8092440" y="960120"/>
-            <a:ext cx="3749040" cy="2423160"/>
-          </a:xfrm>
-          <a:prstGeom prst="roundRect">
-            <a:avLst>
-              <a:gd name="adj" fmla="val 5660"/>
-            </a:avLst>
-          </a:prstGeom>
-          <a:solidFill>
-            <a:srgbClr val="DCFCE7"/>
-          </a:solidFill>
-          <a:ln w="12700">
-            <a:solidFill>
-              <a:srgbClr val="16A34A"/>
-            </a:solidFill>
-            <a:prstDash val="solid"/>
-          </a:ln>
-        </p:spPr>
-      </p:sp>
-      <p:sp>
-        <p:nvSpPr>
-          <p:cNvPr id="21" name="Shape 19"/>
-          <p:cNvSpPr/>
-          <p:nvPr/>
-        </p:nvSpPr>
-        <p:spPr>
-          <a:xfrm>
-            <a:off x="8202168" y="1069848"/>
-            <a:ext cx="3529584" cy="384048"/>
-          </a:xfrm>
-          <a:prstGeom prst="roundRect">
-            <a:avLst>
-              <a:gd name="adj" fmla="val 19048"/>
-            </a:avLst>
-          </a:prstGeom>
-          <a:solidFill>
-            <a:srgbClr val="16A34A"/>
-          </a:solidFill>
-          <a:ln w="12700">
-            <a:solidFill>
-              <a:srgbClr val="16A34A"/>
-            </a:solidFill>
-            <a:prstDash val="solid"/>
-          </a:ln>
-        </p:spPr>
-      </p:sp>
-      <p:sp>
-        <p:nvSpPr>
-          <p:cNvPr id="22" name="Text 20"/>
-          <p:cNvSpPr/>
-          <p:nvPr/>
-        </p:nvSpPr>
-        <p:spPr>
-          <a:xfrm>
-            <a:off x="8202168" y="1069848"/>
-            <a:ext cx="3529584" cy="384048"/>
-          </a:xfrm>
-          <a:prstGeom prst="rect">
-            <a:avLst/>
-          </a:prstGeom>
-          <a:noFill/>
-          <a:ln/>
-        </p:spPr>
-        <p:txBody>
-          <a:bodyPr wrap="square" rtlCol="0" anchor="ctr"/>
-          <a:lstStyle/>
-          <a:p>
-            <a:pPr algn="ctr" indent="0" marL="0">
-              <a:buNone/>
-            </a:pPr>
-            <a:r>
-              <a:rPr lang="en-US" sz="1200" b="1" dirty="0">
-                <a:solidFill>
-                  <a:srgbClr val="FFFFFF"/>
-                </a:solidFill>
-              </a:rPr>
-              <a:t>🛒 가맹점 / 주문 플로우</a:t>
-            </a:r>
-            <a:endParaRPr lang="en-US" sz="1200" dirty="0"/>
-          </a:p>
-        </p:txBody>
-      </p:sp>
-      <p:sp>
-        <p:nvSpPr>
-          <p:cNvPr id="23" name="Text 21"/>
-          <p:cNvSpPr/>
-          <p:nvPr/>
-        </p:nvSpPr>
-        <p:spPr>
-          <a:xfrm>
-            <a:off x="8257032" y="1554480"/>
-            <a:ext cx="3401568" cy="338328"/>
-          </a:xfrm>
-          <a:prstGeom prst="rect">
-            <a:avLst/>
-          </a:prstGeom>
-          <a:noFill/>
-          <a:ln/>
-        </p:spPr>
-        <p:txBody>
-          <a:bodyPr wrap="square" rtlCol="0" anchor="ctr"/>
-          <a:lstStyle/>
-          <a:p>
-            <a:pPr indent="0" marL="0">
-              <a:buNone/>
-            </a:pPr>
-            <a:r>
-              <a:rPr lang="en-US" sz="1000" dirty="0">
-                <a:solidFill>
-                  <a:srgbClr val="1F1235"/>
-                </a:solidFill>
-              </a:rPr>
-              <a:t>✓  가맹점 목록 (카테고리/전문검색 필터)</a:t>
-            </a:r>
-            <a:endParaRPr lang="en-US" sz="1000" dirty="0"/>
-          </a:p>
-        </p:txBody>
-      </p:sp>
-      <p:sp>
-        <p:nvSpPr>
-          <p:cNvPr id="24" name="Text 22"/>
-          <p:cNvSpPr/>
-          <p:nvPr/>
-        </p:nvSpPr>
-        <p:spPr>
-          <a:xfrm>
-            <a:off x="8257032" y="1901952"/>
-            <a:ext cx="3401568" cy="338328"/>
-          </a:xfrm>
-          <a:prstGeom prst="rect">
-            <a:avLst/>
-          </a:prstGeom>
-          <a:noFill/>
-          <a:ln/>
-        </p:spPr>
-        <p:txBody>
-          <a:bodyPr wrap="square" rtlCol="0" anchor="ctr"/>
-          <a:lstStyle/>
-          <a:p>
-            <a:pPr indent="0" marL="0">
-              <a:buNone/>
-            </a:pPr>
-            <a:r>
-              <a:rPr lang="en-US" sz="1000" dirty="0">
-                <a:solidFill>
-                  <a:srgbClr val="1F1235"/>
-                </a:solidFill>
-              </a:rPr>
-              <a:t>✓  가맹점 상세 + 메뉴 옵션 + 리뷰(이미지)</a:t>
-            </a:r>
-            <a:endParaRPr lang="en-US" sz="1000" dirty="0"/>
-          </a:p>
-        </p:txBody>
-      </p:sp>
-      <p:sp>
-        <p:nvSpPr>
-          <p:cNvPr id="25" name="Text 23"/>
-          <p:cNvSpPr/>
-          <p:nvPr/>
-        </p:nvSpPr>
-        <p:spPr>
-          <a:xfrm>
-            <a:off x="8257032" y="2249424"/>
-            <a:ext cx="3401568" cy="338328"/>
-          </a:xfrm>
-          <a:prstGeom prst="rect">
-            <a:avLst/>
-          </a:prstGeom>
-          <a:noFill/>
-          <a:ln/>
-        </p:spPr>
-        <p:txBody>
-          <a:bodyPr wrap="square" rtlCol="0" anchor="ctr"/>
-          <a:lstStyle/>
-          <a:p>
-            <a:pPr indent="0" marL="0">
-              <a:buNone/>
-            </a:pPr>
-            <a:r>
-              <a:rPr lang="en-US" sz="1000" dirty="0">
-                <a:solidFill>
-                  <a:srgbClr val="1F1235"/>
-                </a:solidFill>
-              </a:rPr>
-              <a:t>✓  쿠폰(3종) + PICK 할인 + 배달 메모</a:t>
-            </a:r>
-            <a:endParaRPr lang="en-US" sz="1000" dirty="0"/>
-          </a:p>
-        </p:txBody>
-      </p:sp>
-      <p:sp>
-        <p:nvSpPr>
-          <p:cNvPr id="26" name="Text 24"/>
-          <p:cNvSpPr/>
-          <p:nvPr/>
-        </p:nvSpPr>
-        <p:spPr>
-          <a:xfrm>
-            <a:off x="8257032" y="2596896"/>
-            <a:ext cx="3401568" cy="338328"/>
-          </a:xfrm>
-          <a:prstGeom prst="rect">
-            <a:avLst/>
-          </a:prstGeom>
-          <a:noFill/>
-          <a:ln/>
-        </p:spPr>
-        <p:txBody>
-          <a:bodyPr wrap="square" rtlCol="0" anchor="ctr"/>
-          <a:lstStyle/>
-          <a:p>
-            <a:pPr indent="0" marL="0">
-              <a:buNone/>
-            </a:pPr>
-            <a:r>
-              <a:rPr lang="en-US" sz="1000" dirty="0">
-                <a:solidFill>
-                  <a:srgbClr val="1F1235"/>
-                </a:solidFill>
-              </a:rPr>
-              <a:t>✓  PICK 결제 + 토스페이먼츠 카드 결제</a:t>
-            </a:r>
-            <a:endParaRPr lang="en-US" sz="1000" dirty="0"/>
-          </a:p>
-        </p:txBody>
-      </p:sp>
-      <p:sp>
-        <p:nvSpPr>
-          <p:cNvPr id="27" name="Text 25"/>
-          <p:cNvSpPr/>
-          <p:nvPr/>
-        </p:nvSpPr>
-        <p:spPr>
-          <a:xfrm>
-            <a:off x="8257032" y="2944368"/>
-            <a:ext cx="3401568" cy="338328"/>
-          </a:xfrm>
-          <a:prstGeom prst="rect">
-            <a:avLst/>
-          </a:prstGeom>
-          <a:noFill/>
-          <a:ln/>
-        </p:spPr>
-        <p:txBody>
-          <a:bodyPr wrap="square" rtlCol="0" anchor="ctr"/>
-          <a:lstStyle/>
-          <a:p>
-            <a:pPr indent="0" marL="0">
-              <a:buNone/>
-            </a:pPr>
-            <a:r>
-              <a:rPr lang="en-US" sz="1000" dirty="0">
-                <a:solidFill>
-                  <a:srgbClr val="1F1235"/>
-                </a:solidFill>
-              </a:rPr>
-              <a:t>✓  주문 생성 → PICK 차감 → 완료 적립</a:t>
-            </a:r>
-            <a:endParaRPr lang="en-US" sz="1000" dirty="0"/>
-          </a:p>
-        </p:txBody>
-      </p:sp>
-      <p:sp>
-        <p:nvSpPr>
-          <p:cNvPr id="28" name="Shape 26"/>
-          <p:cNvSpPr/>
-          <p:nvPr/>
-        </p:nvSpPr>
-        <p:spPr>
-          <a:xfrm>
-            <a:off x="228600" y="3566160"/>
-            <a:ext cx="3749040" cy="2423160"/>
-          </a:xfrm>
-          <a:prstGeom prst="roundRect">
-            <a:avLst>
-              <a:gd name="adj" fmla="val 5660"/>
-            </a:avLst>
-          </a:prstGeom>
-          <a:solidFill>
-            <a:srgbClr val="FFFBEB"/>
-          </a:solidFill>
-          <a:ln w="12700">
-            <a:solidFill>
-              <a:srgbClr val="D97706"/>
-            </a:solidFill>
-            <a:prstDash val="solid"/>
-          </a:ln>
-        </p:spPr>
-      </p:sp>
-      <p:sp>
-        <p:nvSpPr>
-          <p:cNvPr id="29" name="Shape 27"/>
-          <p:cNvSpPr/>
-          <p:nvPr/>
-        </p:nvSpPr>
-        <p:spPr>
-          <a:xfrm>
-            <a:off x="338328" y="3675888"/>
-            <a:ext cx="3529584" cy="384048"/>
-          </a:xfrm>
-          <a:prstGeom prst="roundRect">
-            <a:avLst>
-              <a:gd name="adj" fmla="val 19048"/>
-            </a:avLst>
-          </a:prstGeom>
-          <a:solidFill>
-            <a:srgbClr val="D97706"/>
-          </a:solidFill>
-          <a:ln w="12700">
-            <a:solidFill>
-              <a:srgbClr val="D97706"/>
-            </a:solidFill>
-            <a:prstDash val="solid"/>
-          </a:ln>
-        </p:spPr>
-      </p:sp>
-      <p:sp>
-        <p:nvSpPr>
-          <p:cNvPr id="30" name="Text 28"/>
-          <p:cNvSpPr/>
-          <p:nvPr/>
-        </p:nvSpPr>
-        <p:spPr>
-          <a:xfrm>
-            <a:off x="338328" y="3675888"/>
-            <a:ext cx="3529584" cy="384048"/>
-          </a:xfrm>
-          <a:prstGeom prst="rect">
-            <a:avLst/>
-          </a:prstGeom>
-          <a:noFill/>
-          <a:ln/>
-        </p:spPr>
-        <p:txBody>
-          <a:bodyPr wrap="square" rtlCol="0" anchor="ctr"/>
-          <a:lstStyle/>
-          <a:p>
-            <a:pPr algn="ctr" indent="0" marL="0">
-              <a:buNone/>
-            </a:pPr>
-            <a:r>
-              <a:rPr lang="en-US" sz="1200" b="1" dirty="0">
-                <a:solidFill>
-                  <a:srgbClr val="FFFFFF"/>
-                </a:solidFill>
-              </a:rPr>
-              <a:t>👨‍🍳 사장님 기능</a:t>
-            </a:r>
-            <a:endParaRPr lang="en-US" sz="1200" dirty="0"/>
-          </a:p>
-        </p:txBody>
-      </p:sp>
-      <p:sp>
-        <p:nvSpPr>
-          <p:cNvPr id="31" name="Text 29"/>
-          <p:cNvSpPr/>
-          <p:nvPr/>
-        </p:nvSpPr>
-        <p:spPr>
-          <a:xfrm>
-            <a:off x="393192" y="4160520"/>
-            <a:ext cx="3401568" cy="338328"/>
-          </a:xfrm>
-          <a:prstGeom prst="rect">
-            <a:avLst/>
-          </a:prstGeom>
-          <a:noFill/>
-          <a:ln/>
-        </p:spPr>
-        <p:txBody>
-          <a:bodyPr wrap="square" rtlCol="0" anchor="ctr"/>
-          <a:lstStyle/>
-          <a:p>
-            <a:pPr indent="0" marL="0">
-              <a:buNone/>
-            </a:pPr>
-            <a:r>
-              <a:rPr lang="en-US" sz="1000" dirty="0">
-                <a:solidFill>
-                  <a:srgbClr val="1F1235"/>
-                </a:solidFill>
-              </a:rPr>
-              <a:t>✓  가게 등록·설정·쿠폰 관리·주간 영업시간</a:t>
-            </a:r>
-            <a:endParaRPr lang="en-US" sz="1000" dirty="0"/>
-          </a:p>
-        </p:txBody>
-      </p:sp>
-      <p:sp>
-        <p:nvSpPr>
-          <p:cNvPr id="32" name="Text 30"/>
-          <p:cNvSpPr/>
-          <p:nvPr/>
-        </p:nvSpPr>
-        <p:spPr>
-          <a:xfrm>
-            <a:off x="393192" y="4507992"/>
-            <a:ext cx="3401568" cy="338328"/>
-          </a:xfrm>
-          <a:prstGeom prst="rect">
-            <a:avLst/>
-          </a:prstGeom>
-          <a:noFill/>
-          <a:ln/>
-        </p:spPr>
-        <p:txBody>
-          <a:bodyPr wrap="square" rtlCol="0" anchor="ctr"/>
-          <a:lstStyle/>
-          <a:p>
-            <a:pPr indent="0" marL="0">
-              <a:buNone/>
-            </a:pPr>
-            <a:r>
-              <a:rPr lang="en-US" sz="1000" dirty="0">
-                <a:solidFill>
-                  <a:srgbClr val="1F1235"/>
-                </a:solidFill>
-              </a:rPr>
-              <a:t>✓  주문 관리: 수락 ETA + 거절 확인 팝업</a:t>
-            </a:r>
-            <a:endParaRPr lang="en-US" sz="1000" dirty="0"/>
-          </a:p>
-        </p:txBody>
-      </p:sp>
-      <p:sp>
-        <p:nvSpPr>
-          <p:cNvPr id="33" name="Text 31"/>
-          <p:cNvSpPr/>
-          <p:nvPr/>
-        </p:nvSpPr>
-        <p:spPr>
-          <a:xfrm>
-            <a:off x="393192" y="4855464"/>
-            <a:ext cx="3401568" cy="338328"/>
-          </a:xfrm>
-          <a:prstGeom prst="rect">
-            <a:avLst/>
-          </a:prstGeom>
-          <a:noFill/>
-          <a:ln/>
-        </p:spPr>
-        <p:txBody>
-          <a:bodyPr wrap="square" rtlCol="0" anchor="ctr"/>
-          <a:lstStyle/>
-          <a:p>
-            <a:pPr indent="0" marL="0">
-              <a:buNone/>
-            </a:pPr>
-            <a:r>
-              <a:rPr lang="en-US" sz="1000" dirty="0">
-                <a:solidFill>
-                  <a:srgbClr val="1F1235"/>
-                </a:solidFill>
-              </a:rPr>
-              <a:t>✓  메뉴 옵션 그룹/옵션 CRUD UI</a:t>
-            </a:r>
-            <a:endParaRPr lang="en-US" sz="1000" dirty="0"/>
-          </a:p>
-        </p:txBody>
-      </p:sp>
-      <p:sp>
-        <p:nvSpPr>
-          <p:cNvPr id="34" name="Text 32"/>
-          <p:cNvSpPr/>
-          <p:nvPr/>
-        </p:nvSpPr>
-        <p:spPr>
-          <a:xfrm>
-            <a:off x="393192" y="5202936"/>
-            <a:ext cx="3401568" cy="338328"/>
-          </a:xfrm>
-          <a:prstGeom prst="rect">
-            <a:avLst/>
-          </a:prstGeom>
-          <a:noFill/>
-          <a:ln/>
-        </p:spPr>
-        <p:txBody>
-          <a:bodyPr wrap="square" rtlCol="0" anchor="ctr"/>
-          <a:lstStyle/>
-          <a:p>
-            <a:pPr indent="0" marL="0">
-              <a:buNone/>
-            </a:pPr>
-            <a:r>
-              <a:rPr lang="en-US" sz="1000" dirty="0">
-                <a:solidFill>
-                  <a:srgbClr val="1F1235"/>
-                </a:solidFill>
-              </a:rPr>
-              <a:t>✓  매출 통계 대시보드 + 주간 차트</a:t>
-            </a:r>
-            <a:endParaRPr lang="en-US" sz="1000" dirty="0"/>
-          </a:p>
-        </p:txBody>
-      </p:sp>
-      <p:sp>
-        <p:nvSpPr>
-          <p:cNvPr id="35" name="Text 33"/>
-          <p:cNvSpPr/>
-          <p:nvPr/>
-        </p:nvSpPr>
-        <p:spPr>
-          <a:xfrm>
-            <a:off x="393192" y="5550408"/>
-            <a:ext cx="3401568" cy="338328"/>
-          </a:xfrm>
-          <a:prstGeom prst="rect">
-            <a:avLst/>
-          </a:prstGeom>
-          <a:noFill/>
-          <a:ln/>
-        </p:spPr>
-        <p:txBody>
-          <a:bodyPr wrap="square" rtlCol="0" anchor="ctr"/>
-          <a:lstStyle/>
-          <a:p>
-            <a:pPr indent="0" marL="0">
-              <a:buNone/>
-            </a:pPr>
-            <a:r>
-              <a:rPr lang="en-US" sz="1000" dirty="0">
-                <a:solidFill>
-                  <a:srgbClr val="1F1235"/>
-                </a:solidFill>
-              </a:rPr>
-              <a:t>✓  신규 주문 소리 알림 (Web Audio API)</a:t>
-            </a:r>
-            <a:endParaRPr lang="en-US" sz="1000" dirty="0"/>
-          </a:p>
-        </p:txBody>
-      </p:sp>
-      <p:sp>
-        <p:nvSpPr>
-          <p:cNvPr id="36" name="Shape 34"/>
-          <p:cNvSpPr/>
-          <p:nvPr/>
-        </p:nvSpPr>
-        <p:spPr>
-          <a:xfrm>
-            <a:off x="4160520" y="3566160"/>
-            <a:ext cx="3749040" cy="2423160"/>
-          </a:xfrm>
-          <a:prstGeom prst="roundRect">
-            <a:avLst>
-              <a:gd name="adj" fmla="val 5660"/>
-            </a:avLst>
-          </a:prstGeom>
-          <a:solidFill>
-            <a:srgbClr val="ECFEFF"/>
-          </a:solidFill>
-          <a:ln w="12700">
-            <a:solidFill>
-              <a:srgbClr val="0891B2"/>
-            </a:solidFill>
-            <a:prstDash val="solid"/>
-          </a:ln>
-        </p:spPr>
-      </p:sp>
-      <p:sp>
-        <p:nvSpPr>
-          <p:cNvPr id="37" name="Shape 35"/>
-          <p:cNvSpPr/>
-          <p:nvPr/>
-        </p:nvSpPr>
-        <p:spPr>
-          <a:xfrm>
-            <a:off x="4270248" y="3675888"/>
-            <a:ext cx="3529584" cy="384048"/>
-          </a:xfrm>
-          <a:prstGeom prst="roundRect">
-            <a:avLst>
-              <a:gd name="adj" fmla="val 19048"/>
-            </a:avLst>
-          </a:prstGeom>
-          <a:solidFill>
-            <a:srgbClr val="0891B2"/>
-          </a:solidFill>
-          <a:ln w="12700">
-            <a:solidFill>
-              <a:srgbClr val="0891B2"/>
-            </a:solidFill>
-            <a:prstDash val="solid"/>
-          </a:ln>
-        </p:spPr>
-      </p:sp>
-      <p:sp>
-        <p:nvSpPr>
-          <p:cNvPr id="38" name="Text 36"/>
-          <p:cNvSpPr/>
-          <p:nvPr/>
-        </p:nvSpPr>
-        <p:spPr>
-          <a:xfrm>
-            <a:off x="4270248" y="3675888"/>
-            <a:ext cx="3529584" cy="384048"/>
-          </a:xfrm>
-          <a:prstGeom prst="rect">
-            <a:avLst/>
-          </a:prstGeom>
-          <a:noFill/>
-          <a:ln/>
-        </p:spPr>
-        <p:txBody>
-          <a:bodyPr wrap="square" rtlCol="0" anchor="ctr"/>
-          <a:lstStyle/>
-          <a:p>
-            <a:pPr algn="ctr" indent="0" marL="0">
-              <a:buNone/>
-            </a:pPr>
-            <a:r>
-              <a:rPr lang="en-US" sz="1200" b="1" dirty="0">
-                <a:solidFill>
-                  <a:srgbClr val="FFFFFF"/>
-                </a:solidFill>
-              </a:rPr>
-              <a:t>🛵 라이더 / PWA / 인프라</a:t>
-            </a:r>
-            <a:endParaRPr lang="en-US" sz="1200" dirty="0"/>
-          </a:p>
-        </p:txBody>
-      </p:sp>
-      <p:sp>
-        <p:nvSpPr>
-          <p:cNvPr id="39" name="Text 37"/>
-          <p:cNvSpPr/>
-          <p:nvPr/>
-        </p:nvSpPr>
-        <p:spPr>
-          <a:xfrm>
-            <a:off x="4325112" y="4160520"/>
-            <a:ext cx="3401568" cy="338328"/>
-          </a:xfrm>
-          <a:prstGeom prst="rect">
-            <a:avLst/>
-          </a:prstGeom>
-          <a:noFill/>
-          <a:ln/>
-        </p:spPr>
-        <p:txBody>
-          <a:bodyPr wrap="square" rtlCol="0" anchor="ctr"/>
-          <a:lstStyle/>
-          <a:p>
-            <a:pPr indent="0" marL="0">
-              <a:buNone/>
-            </a:pPr>
-            <a:r>
-              <a:rPr lang="en-US" sz="1000" dirty="0">
-                <a:solidFill>
-                  <a:srgbClr val="1F1235"/>
-                </a:solidFill>
-              </a:rPr>
-              <a:t>✓  배달 수락 → PICK 자동 지급 + 위치 공유</a:t>
-            </a:r>
-            <a:endParaRPr lang="en-US" sz="1000" dirty="0"/>
-          </a:p>
-        </p:txBody>
-      </p:sp>
-      <p:sp>
-        <p:nvSpPr>
-          <p:cNvPr id="40" name="Text 38"/>
-          <p:cNvSpPr/>
-          <p:nvPr/>
-        </p:nvSpPr>
-        <p:spPr>
-          <a:xfrm>
-            <a:off x="4325112" y="4507992"/>
-            <a:ext cx="3401568" cy="338328"/>
-          </a:xfrm>
-          <a:prstGeom prst="rect">
-            <a:avLst/>
-          </a:prstGeom>
-          <a:noFill/>
-          <a:ln/>
-        </p:spPr>
-        <p:txBody>
-          <a:bodyPr wrap="square" rtlCol="0" anchor="ctr"/>
-          <a:lstStyle/>
-          <a:p>
-            <a:pPr indent="0" marL="0">
-              <a:buNone/>
-            </a:pPr>
-            <a:r>
-              <a:rPr lang="en-US" sz="1000" dirty="0">
-                <a:solidFill>
-                  <a:srgbClr val="1F1235"/>
-                </a:solidFill>
-              </a:rPr>
-              <a:t>✓  수익 내역 실DB + 주간/월간 차트</a:t>
-            </a:r>
-            <a:endParaRPr lang="en-US" sz="1000" dirty="0"/>
-          </a:p>
-        </p:txBody>
-      </p:sp>
-      <p:sp>
-        <p:nvSpPr>
-          <p:cNvPr id="41" name="Text 39"/>
-          <p:cNvSpPr/>
-          <p:nvPr/>
-        </p:nvSpPr>
-        <p:spPr>
-          <a:xfrm>
-            <a:off x="4325112" y="4855464"/>
-            <a:ext cx="3401568" cy="338328"/>
-          </a:xfrm>
-          <a:prstGeom prst="rect">
-            <a:avLst/>
-          </a:prstGeom>
-          <a:noFill/>
-          <a:ln/>
-        </p:spPr>
-        <p:txBody>
-          <a:bodyPr wrap="square" rtlCol="0" anchor="ctr"/>
-          <a:lstStyle/>
-          <a:p>
-            <a:pPr indent="0" marL="0">
-              <a:buNone/>
-            </a:pPr>
-            <a:r>
-              <a:rPr lang="en-US" sz="1000" dirty="0">
-                <a:solidFill>
-                  <a:srgbClr val="1F1235"/>
-                </a:solidFill>
-              </a:rPr>
-              <a:t>✓  FCM 푸시 알림 + 관리자 일괄 발송</a:t>
-            </a:r>
-            <a:endParaRPr lang="en-US" sz="1000" dirty="0"/>
-          </a:p>
-        </p:txBody>
-      </p:sp>
-      <p:sp>
-        <p:nvSpPr>
-          <p:cNvPr id="42" name="Text 40"/>
-          <p:cNvSpPr/>
-          <p:nvPr/>
-        </p:nvSpPr>
-        <p:spPr>
-          <a:xfrm>
-            <a:off x="4325112" y="5202936"/>
-            <a:ext cx="3401568" cy="338328"/>
-          </a:xfrm>
-          <a:prstGeom prst="rect">
-            <a:avLst/>
-          </a:prstGeom>
-          <a:noFill/>
-          <a:ln/>
-        </p:spPr>
-        <p:txBody>
-          <a:bodyPr wrap="square" rtlCol="0" anchor="ctr"/>
-          <a:lstStyle/>
-          <a:p>
-            <a:pPr indent="0" marL="0">
-              <a:buNone/>
-            </a:pPr>
-            <a:r>
-              <a:rPr lang="en-US" sz="1000" dirty="0">
-                <a:solidFill>
-                  <a:srgbClr val="1F1235"/>
-                </a:solidFill>
-              </a:rPr>
-              <a:t>✓  PWA 오프라인 캐싱 (Serwist)</a:t>
-            </a:r>
-            <a:endParaRPr lang="en-US" sz="1000" dirty="0"/>
-          </a:p>
-        </p:txBody>
-      </p:sp>
-      <p:sp>
-        <p:nvSpPr>
-          <p:cNvPr id="43" name="Text 41"/>
-          <p:cNvSpPr/>
-          <p:nvPr/>
-        </p:nvSpPr>
-        <p:spPr>
-          <a:xfrm>
-            <a:off x="4325112" y="5550408"/>
-            <a:ext cx="3401568" cy="338328"/>
-          </a:xfrm>
-          <a:prstGeom prst="rect">
-            <a:avLst/>
-          </a:prstGeom>
-          <a:noFill/>
-          <a:ln/>
-        </p:spPr>
-        <p:txBody>
-          <a:bodyPr wrap="square" rtlCol="0" anchor="ctr"/>
-          <a:lstStyle/>
-          <a:p>
-            <a:pPr indent="0" marL="0">
-              <a:buNone/>
-            </a:pPr>
-            <a:r>
-              <a:rPr lang="en-US" sz="1000" dirty="0">
-                <a:solidFill>
-                  <a:srgbClr val="1F1235"/>
-                </a:solidFill>
-              </a:rPr>
-              <a:t>✓  Sentry 모니터링 + 가맹점 광고 시스템</a:t>
-            </a:r>
-            <a:endParaRPr lang="en-US" sz="1000" dirty="0"/>
-          </a:p>
-        </p:txBody>
-      </p:sp>
-      <p:sp>
-        <p:nvSpPr>
-          <p:cNvPr id="44" name="Shape 42"/>
-          <p:cNvSpPr/>
-          <p:nvPr/>
-        </p:nvSpPr>
-        <p:spPr>
-          <a:xfrm>
-            <a:off x="8092440" y="3566160"/>
-            <a:ext cx="3749040" cy="2423160"/>
-          </a:xfrm>
-          <a:prstGeom prst="roundRect">
-            <a:avLst>
-              <a:gd name="adj" fmla="val 5660"/>
+              <a:gd name="adj" fmla="val 18182"/>
             </a:avLst>
           </a:prstGeom>
           <a:solidFill>
@@ -3659,26 +2337,96 @@
       </p:sp>
       <p:sp>
         <p:nvSpPr>
-          <p:cNvPr id="45" name="Shape 43"/>
-          <p:cNvSpPr/>
-          <p:nvPr/>
-        </p:nvSpPr>
-        <p:spPr>
-          <a:xfrm>
-            <a:off x="8202168" y="3675888"/>
-            <a:ext cx="3529584" cy="384048"/>
-          </a:xfrm>
-          <a:prstGeom prst="roundRect">
-            <a:avLst>
-              <a:gd name="adj" fmla="val 19048"/>
-            </a:avLst>
-          </a:prstGeom>
-          <a:solidFill>
-            <a:srgbClr val="EA580C"/>
+          <p:cNvPr id="3" name="Text 1"/>
+          <p:cNvSpPr/>
+          <p:nvPr/>
+        </p:nvSpPr>
+        <p:spPr>
+          <a:xfrm>
+            <a:off x="365760" y="164592"/>
+            <a:ext cx="2560320" cy="502920"/>
+          </a:xfrm>
+          <a:prstGeom prst="rect">
+            <a:avLst/>
+          </a:prstGeom>
+          <a:noFill/>
+          <a:ln/>
+        </p:spPr>
+        <p:txBody>
+          <a:bodyPr wrap="square" rtlCol="0" anchor="ctr"/>
+          <a:lstStyle/>
+          <a:p>
+            <a:pPr algn="ctr" indent="0" marL="0">
+              <a:buNone/>
+            </a:pPr>
+            <a:r>
+              <a:rPr lang="en-US" sz="1100" b="1" dirty="0">
+                <a:solidFill>
+                  <a:srgbClr val="EA580C"/>
+                </a:solidFill>
+              </a:rPr>
+              <a:t>📅  2026. 04. 14 (Day 9)</a:t>
+            </a:r>
+            <a:endParaRPr lang="en-US" sz="1100" dirty="0"/>
+          </a:p>
+        </p:txBody>
+      </p:sp>
+      <p:sp>
+        <p:nvSpPr>
+          <p:cNvPr id="4" name="Text 2"/>
+          <p:cNvSpPr/>
+          <p:nvPr/>
+        </p:nvSpPr>
+        <p:spPr>
+          <a:xfrm>
+            <a:off x="3108960" y="201168"/>
+            <a:ext cx="9326880" cy="502920"/>
+          </a:xfrm>
+          <a:prstGeom prst="rect">
+            <a:avLst/>
+          </a:prstGeom>
+          <a:noFill/>
+          <a:ln/>
+        </p:spPr>
+        <p:txBody>
+          <a:bodyPr wrap="square" rtlCol="0" anchor="ctr"/>
+          <a:lstStyle/>
+          <a:p>
+            <a:pPr indent="0" marL="0">
+              <a:buNone/>
+            </a:pPr>
+            <a:r>
+              <a:rPr lang="en-US" sz="1900" b="1" dirty="0">
+                <a:solidFill>
+                  <a:srgbClr val="4C1D95"/>
+                </a:solidFill>
+              </a:rPr>
+              <a:t>🔔  알림음 TTS 완성 · 라이더 실시간 알림 · 주문 플로우 개선</a:t>
+            </a:r>
+            <a:endParaRPr lang="en-US" sz="1900" dirty="0"/>
+          </a:p>
+        </p:txBody>
+      </p:sp>
+      <p:sp>
+        <p:nvSpPr>
+          <p:cNvPr id="5" name="Shape 3"/>
+          <p:cNvSpPr/>
+          <p:nvPr/>
+        </p:nvSpPr>
+        <p:spPr>
+          <a:xfrm>
+            <a:off x="365760" y="713232"/>
+            <a:ext cx="11704320" cy="36576"/>
+          </a:xfrm>
+          <a:prstGeom prst="rect">
+            <a:avLst/>
+          </a:prstGeom>
+          <a:solidFill>
+            <a:srgbClr val="E9D5FF"/>
           </a:solidFill>
           <a:ln w="12700">
             <a:solidFill>
-              <a:srgbClr val="EA580C"/>
+              <a:srgbClr val="E9D5FF"/>
             </a:solidFill>
             <a:prstDash val="solid"/>
           </a:ln>
@@ -3686,14 +2434,68 @@
       </p:sp>
       <p:sp>
         <p:nvSpPr>
-          <p:cNvPr id="46" name="Text 44"/>
-          <p:cNvSpPr/>
-          <p:nvPr/>
-        </p:nvSpPr>
-        <p:spPr>
-          <a:xfrm>
-            <a:off x="8202168" y="3675888"/>
-            <a:ext cx="3529584" cy="384048"/>
+          <p:cNvPr id="6" name="Shape 4"/>
+          <p:cNvSpPr/>
+          <p:nvPr/>
+        </p:nvSpPr>
+        <p:spPr>
+          <a:xfrm>
+            <a:off x="228600" y="914400"/>
+            <a:ext cx="3749040" cy="1965960"/>
+          </a:xfrm>
+          <a:prstGeom prst="roundRect">
+            <a:avLst>
+              <a:gd name="adj" fmla="val 6977"/>
+            </a:avLst>
+          </a:prstGeom>
+          <a:solidFill>
+            <a:srgbClr val="FFEDD5"/>
+          </a:solidFill>
+          <a:ln w="12700">
+            <a:solidFill>
+              <a:srgbClr val="FDBA74"/>
+            </a:solidFill>
+            <a:prstDash val="solid"/>
+          </a:ln>
+        </p:spPr>
+      </p:sp>
+      <p:sp>
+        <p:nvSpPr>
+          <p:cNvPr id="7" name="Shape 5"/>
+          <p:cNvSpPr/>
+          <p:nvPr/>
+        </p:nvSpPr>
+        <p:spPr>
+          <a:xfrm>
+            <a:off x="393192" y="1097280"/>
+            <a:ext cx="530352" cy="530352"/>
+          </a:xfrm>
+          <a:prstGeom prst="roundRect">
+            <a:avLst>
+              <a:gd name="adj" fmla="val 17241"/>
+            </a:avLst>
+          </a:prstGeom>
+          <a:solidFill>
+            <a:srgbClr val="FFFFFF"/>
+          </a:solidFill>
+          <a:ln w="12700">
+            <a:solidFill>
+              <a:srgbClr val="FDBA74"/>
+            </a:solidFill>
+            <a:prstDash val="solid"/>
+          </a:ln>
+        </p:spPr>
+      </p:sp>
+      <p:sp>
+        <p:nvSpPr>
+          <p:cNvPr id="8" name="Text 6"/>
+          <p:cNvSpPr/>
+          <p:nvPr/>
+        </p:nvSpPr>
+        <p:spPr>
+          <a:xfrm>
+            <a:off x="393192" y="1078992"/>
+            <a:ext cx="548640" cy="548640"/>
           </a:xfrm>
           <a:prstGeom prst="rect">
             <a:avLst/>
@@ -3709,12 +2511,48 @@
               <a:buNone/>
             </a:pPr>
             <a:r>
+              <a:rPr lang="en-US" sz="1800" dirty="0">
+                <a:solidFill>
+                  <a:srgbClr val="000000"/>
+                </a:solidFill>
+              </a:rPr>
+              <a:t>🔔</a:t>
+            </a:r>
+            <a:endParaRPr lang="en-US" sz="1800" dirty="0"/>
+          </a:p>
+        </p:txBody>
+      </p:sp>
+      <p:sp>
+        <p:nvSpPr>
+          <p:cNvPr id="9" name="Text 7"/>
+          <p:cNvSpPr/>
+          <p:nvPr/>
+        </p:nvSpPr>
+        <p:spPr>
+          <a:xfrm>
+            <a:off x="1033272" y="1115568"/>
+            <a:ext cx="2743200" cy="365760"/>
+          </a:xfrm>
+          <a:prstGeom prst="rect">
+            <a:avLst/>
+          </a:prstGeom>
+          <a:noFill/>
+          <a:ln/>
+        </p:spPr>
+        <p:txBody>
+          <a:bodyPr wrap="square" rtlCol="0" anchor="ctr"/>
+          <a:lstStyle/>
+          <a:p>
+            <a:pPr indent="0" marL="0">
+              <a:buNone/>
+            </a:pPr>
+            <a:r>
               <a:rPr lang="en-US" sz="1200" b="1" dirty="0">
                 <a:solidFill>
-                  <a:srgbClr val="FFFFFF"/>
-                </a:solidFill>
-              </a:rPr>
-              <a:t>🛡️ DB / 보안 / 관리자</a:t>
+                  <a:srgbClr val="EA580C"/>
+                </a:solidFill>
+              </a:rPr>
+              <a:t>사장님 알림음 완성</a:t>
             </a:r>
             <a:endParaRPr lang="en-US" sz="1200" dirty="0"/>
           </a:p>
@@ -3722,181 +2560,1015 @@
       </p:sp>
       <p:sp>
         <p:nvSpPr>
-          <p:cNvPr id="47" name="Text 45"/>
-          <p:cNvSpPr/>
-          <p:nvPr/>
-        </p:nvSpPr>
-        <p:spPr>
-          <a:xfrm>
-            <a:off x="8257032" y="4160520"/>
-            <a:ext cx="3401568" cy="338328"/>
-          </a:xfrm>
-          <a:prstGeom prst="rect">
-            <a:avLst/>
-          </a:prstGeom>
-          <a:noFill/>
-          <a:ln/>
-        </p:spPr>
-        <p:txBody>
-          <a:bodyPr wrap="square" rtlCol="0" anchor="ctr"/>
-          <a:lstStyle/>
-          <a:p>
-            <a:pPr indent="0" marL="0">
-              <a:buNone/>
-            </a:pPr>
-            <a:r>
-              <a:rPr lang="en-US" sz="1000" dirty="0">
-                <a:solidFill>
-                  <a:srgbClr val="1F1235"/>
-                </a:solidFill>
-              </a:rPr>
-              <a:t>✓  DB 인덱스 30개+ (GIN 전문검색 포함)</a:t>
-            </a:r>
-            <a:endParaRPr lang="en-US" sz="1000" dirty="0"/>
-          </a:p>
-        </p:txBody>
-      </p:sp>
-      <p:sp>
-        <p:nvSpPr>
-          <p:cNvPr id="48" name="Text 46"/>
-          <p:cNvSpPr/>
-          <p:nvPr/>
-        </p:nvSpPr>
-        <p:spPr>
-          <a:xfrm>
-            <a:off x="8257032" y="4507992"/>
-            <a:ext cx="3401568" cy="338328"/>
-          </a:xfrm>
-          <a:prstGeom prst="rect">
-            <a:avLst/>
-          </a:prstGeom>
-          <a:noFill/>
-          <a:ln/>
-        </p:spPr>
-        <p:txBody>
-          <a:bodyPr wrap="square" rtlCol="0" anchor="ctr"/>
-          <a:lstStyle/>
-          <a:p>
-            <a:pPr indent="0" marL="0">
-              <a:buNone/>
-            </a:pPr>
-            <a:r>
-              <a:rPr lang="en-US" sz="1000" dirty="0">
-                <a:solidFill>
-                  <a:srgbClr val="1F1235"/>
-                </a:solidFill>
-              </a:rPr>
-              <a:t>✓  운영 RLS 정책 + Storage 버킷 정책</a:t>
-            </a:r>
-            <a:endParaRPr lang="en-US" sz="1000" dirty="0"/>
-          </a:p>
-        </p:txBody>
-      </p:sp>
-      <p:sp>
-        <p:nvSpPr>
-          <p:cNvPr id="49" name="Text 47"/>
-          <p:cNvSpPr/>
-          <p:nvPr/>
-        </p:nvSpPr>
-        <p:spPr>
-          <a:xfrm>
-            <a:off x="8257032" y="4855464"/>
-            <a:ext cx="3401568" cy="338328"/>
-          </a:xfrm>
-          <a:prstGeom prst="rect">
-            <a:avLst/>
-          </a:prstGeom>
-          <a:noFill/>
-          <a:ln/>
-        </p:spPr>
-        <p:txBody>
-          <a:bodyPr wrap="square" rtlCol="0" anchor="ctr"/>
-          <a:lstStyle/>
-          <a:p>
-            <a:pPr indent="0" marL="0">
-              <a:buNone/>
-            </a:pPr>
-            <a:r>
-              <a:rPr lang="en-US" sz="1000" dirty="0">
-                <a:solidFill>
-                  <a:srgbClr val="1F1235"/>
-                </a:solidFill>
-              </a:rPr>
-              <a:t>✓  관리자 5탭: 통계·회원·가게·쿠폰·FCM 푸시</a:t>
-            </a:r>
-            <a:endParaRPr lang="en-US" sz="1000" dirty="0"/>
-          </a:p>
-        </p:txBody>
-      </p:sp>
-      <p:sp>
-        <p:nvSpPr>
-          <p:cNvPr id="50" name="Text 48"/>
-          <p:cNvSpPr/>
-          <p:nvPr/>
-        </p:nvSpPr>
-        <p:spPr>
-          <a:xfrm>
-            <a:off x="8257032" y="5202936"/>
-            <a:ext cx="3401568" cy="338328"/>
-          </a:xfrm>
-          <a:prstGeom prst="rect">
-            <a:avLst/>
-          </a:prstGeom>
-          <a:noFill/>
-          <a:ln/>
-        </p:spPr>
-        <p:txBody>
-          <a:bodyPr wrap="square" rtlCol="0" anchor="ctr"/>
-          <a:lstStyle/>
-          <a:p>
-            <a:pPr indent="0" marL="0">
-              <a:buNone/>
-            </a:pPr>
-            <a:r>
-              <a:rPr lang="en-US" sz="1000" dirty="0">
-                <a:solidFill>
-                  <a:srgbClr val="1F1235"/>
-                </a:solidFill>
-              </a:rPr>
-              <a:t>✓  404·에러·로딩·스플래시 페이지</a:t>
-            </a:r>
-            <a:endParaRPr lang="en-US" sz="1000" dirty="0"/>
-          </a:p>
-        </p:txBody>
-      </p:sp>
-      <p:sp>
-        <p:nvSpPr>
-          <p:cNvPr id="51" name="Text 49"/>
-          <p:cNvSpPr/>
-          <p:nvPr/>
-        </p:nvSpPr>
-        <p:spPr>
-          <a:xfrm>
-            <a:off x="8257032" y="5550408"/>
-            <a:ext cx="3401568" cy="338328"/>
-          </a:xfrm>
-          <a:prstGeom prst="rect">
-            <a:avLst/>
-          </a:prstGeom>
-          <a:noFill/>
-          <a:ln/>
-        </p:spPr>
-        <p:txBody>
-          <a:bodyPr wrap="square" rtlCol="0" anchor="ctr"/>
-          <a:lstStyle/>
-          <a:p>
-            <a:pPr indent="0" marL="0">
-              <a:buNone/>
-            </a:pPr>
-            <a:r>
-              <a:rPr lang="en-US" sz="1000" dirty="0">
-                <a:solidFill>
-                  <a:srgbClr val="1F1235"/>
-                </a:solidFill>
-              </a:rPr>
-              <a:t>✓  다크모드 + Tailwind dark: 클래스 전면 적용</a:t>
-            </a:r>
-            <a:endParaRPr lang="en-US" sz="1000" dirty="0"/>
+          <p:cNvPr id="10" name="Text 8"/>
+          <p:cNvSpPr/>
+          <p:nvPr/>
+        </p:nvSpPr>
+        <p:spPr>
+          <a:xfrm>
+            <a:off x="429768" y="1600200"/>
+            <a:ext cx="3337560" cy="1143000"/>
+          </a:xfrm>
+          <a:prstGeom prst="rect">
+            <a:avLst/>
+          </a:prstGeom>
+          <a:noFill/>
+          <a:ln/>
+        </p:spPr>
+        <p:txBody>
+          <a:bodyPr wrap="square" rtlCol="0" anchor="ctr"/>
+          <a:lstStyle/>
+          <a:p>
+            <a:pPr indent="0" marL="0">
+              <a:buNone/>
+            </a:pPr>
+            <a:r>
+              <a:rPr lang="en-US" sz="1050" dirty="0">
+                <a:solidFill>
+                  <a:srgbClr val="1F1235"/>
+                </a:solidFill>
+              </a:rPr>
+              <a:t>HTMLAudioElement 사전 렌더링 방식</a:t>
+            </a:r>
+            <a:endParaRPr lang="en-US" sz="1050" dirty="0"/>
+          </a:p>
+          <a:p>
+            <a:pPr indent="0" marL="0">
+              <a:buNone/>
+            </a:pPr>
+            <a:r>
+              <a:rPr lang="en-US" sz="1050" dirty="0">
+                <a:solidFill>
+                  <a:srgbClr val="1F1235"/>
+                </a:solidFill>
+              </a:rPr>
+              <a:t>TTS '픽픽 주문이 들어왔습니다'</a:t>
+            </a:r>
+            <a:endParaRPr lang="en-US" sz="1050" dirty="0"/>
+          </a:p>
+          <a:p>
+            <a:pPr indent="0" marL="0">
+              <a:buNone/>
+            </a:pPr>
+            <a:r>
+              <a:rPr lang="en-US" sz="1050" dirty="0">
+                <a:solidFill>
+                  <a:srgbClr val="1F1235"/>
+                </a:solidFill>
+              </a:rPr>
+              <a:t>3초 반복 · 수락 시 자동 중단</a:t>
+            </a:r>
+            <a:endParaRPr lang="en-US" sz="1050" dirty="0"/>
+          </a:p>
+        </p:txBody>
+      </p:sp>
+      <p:sp>
+        <p:nvSpPr>
+          <p:cNvPr id="11" name="Shape 9"/>
+          <p:cNvSpPr/>
+          <p:nvPr/>
+        </p:nvSpPr>
+        <p:spPr>
+          <a:xfrm>
+            <a:off x="4160520" y="914400"/>
+            <a:ext cx="3749040" cy="1965960"/>
+          </a:xfrm>
+          <a:prstGeom prst="roundRect">
+            <a:avLst>
+              <a:gd name="adj" fmla="val 6977"/>
+            </a:avLst>
+          </a:prstGeom>
+          <a:solidFill>
+            <a:srgbClr val="FFEDD5"/>
+          </a:solidFill>
+          <a:ln w="12700">
+            <a:solidFill>
+              <a:srgbClr val="FDBA74"/>
+            </a:solidFill>
+            <a:prstDash val="solid"/>
+          </a:ln>
+        </p:spPr>
+      </p:sp>
+      <p:sp>
+        <p:nvSpPr>
+          <p:cNvPr id="12" name="Shape 10"/>
+          <p:cNvSpPr/>
+          <p:nvPr/>
+        </p:nvSpPr>
+        <p:spPr>
+          <a:xfrm>
+            <a:off x="4325112" y="1097280"/>
+            <a:ext cx="530352" cy="530352"/>
+          </a:xfrm>
+          <a:prstGeom prst="roundRect">
+            <a:avLst>
+              <a:gd name="adj" fmla="val 17241"/>
+            </a:avLst>
+          </a:prstGeom>
+          <a:solidFill>
+            <a:srgbClr val="FFFFFF"/>
+          </a:solidFill>
+          <a:ln w="12700">
+            <a:solidFill>
+              <a:srgbClr val="FDBA74"/>
+            </a:solidFill>
+            <a:prstDash val="solid"/>
+          </a:ln>
+        </p:spPr>
+      </p:sp>
+      <p:sp>
+        <p:nvSpPr>
+          <p:cNvPr id="13" name="Text 11"/>
+          <p:cNvSpPr/>
+          <p:nvPr/>
+        </p:nvSpPr>
+        <p:spPr>
+          <a:xfrm>
+            <a:off x="4325112" y="1078992"/>
+            <a:ext cx="548640" cy="548640"/>
+          </a:xfrm>
+          <a:prstGeom prst="rect">
+            <a:avLst/>
+          </a:prstGeom>
+          <a:noFill/>
+          <a:ln/>
+        </p:spPr>
+        <p:txBody>
+          <a:bodyPr wrap="square" rtlCol="0" anchor="ctr"/>
+          <a:lstStyle/>
+          <a:p>
+            <a:pPr algn="ctr" indent="0" marL="0">
+              <a:buNone/>
+            </a:pPr>
+            <a:r>
+              <a:rPr lang="en-US" sz="1800" dirty="0">
+                <a:solidFill>
+                  <a:srgbClr val="000000"/>
+                </a:solidFill>
+              </a:rPr>
+              <a:t>🛵</a:t>
+            </a:r>
+            <a:endParaRPr lang="en-US" sz="1800" dirty="0"/>
+          </a:p>
+        </p:txBody>
+      </p:sp>
+      <p:sp>
+        <p:nvSpPr>
+          <p:cNvPr id="14" name="Text 12"/>
+          <p:cNvSpPr/>
+          <p:nvPr/>
+        </p:nvSpPr>
+        <p:spPr>
+          <a:xfrm>
+            <a:off x="4965192" y="1115568"/>
+            <a:ext cx="2743200" cy="365760"/>
+          </a:xfrm>
+          <a:prstGeom prst="rect">
+            <a:avLst/>
+          </a:prstGeom>
+          <a:noFill/>
+          <a:ln/>
+        </p:spPr>
+        <p:txBody>
+          <a:bodyPr wrap="square" rtlCol="0" anchor="ctr"/>
+          <a:lstStyle/>
+          <a:p>
+            <a:pPr indent="0" marL="0">
+              <a:buNone/>
+            </a:pPr>
+            <a:r>
+              <a:rPr lang="en-US" sz="1200" b="1" dirty="0">
+                <a:solidFill>
+                  <a:srgbClr val="EA580C"/>
+                </a:solidFill>
+              </a:rPr>
+              <a:t>라이더 알림음 + Realtime</a:t>
+            </a:r>
+            <a:endParaRPr lang="en-US" sz="1200" dirty="0"/>
+          </a:p>
+        </p:txBody>
+      </p:sp>
+      <p:sp>
+        <p:nvSpPr>
+          <p:cNvPr id="15" name="Text 13"/>
+          <p:cNvSpPr/>
+          <p:nvPr/>
+        </p:nvSpPr>
+        <p:spPr>
+          <a:xfrm>
+            <a:off x="4361688" y="1600200"/>
+            <a:ext cx="3337560" cy="1143000"/>
+          </a:xfrm>
+          <a:prstGeom prst="rect">
+            <a:avLst/>
+          </a:prstGeom>
+          <a:noFill/>
+          <a:ln/>
+        </p:spPr>
+        <p:txBody>
+          <a:bodyPr wrap="square" rtlCol="0" anchor="ctr"/>
+          <a:lstStyle/>
+          <a:p>
+            <a:pPr indent="0" marL="0">
+              <a:buNone/>
+            </a:pPr>
+            <a:r>
+              <a:rPr lang="en-US" sz="1050" dirty="0">
+                <a:solidFill>
+                  <a:srgbClr val="1F1235"/>
+                </a:solidFill>
+              </a:rPr>
+              <a:t>TTS '픽픽 라이더 요청이 왔습니다'</a:t>
+            </a:r>
+            <a:endParaRPr lang="en-US" sz="1050" dirty="0"/>
+          </a:p>
+          <a:p>
+            <a:pPr indent="0" marL="0">
+              <a:buNone/>
+            </a:pPr>
+            <a:r>
+              <a:rPr lang="en-US" sz="1050" dirty="0">
+                <a:solidFill>
+                  <a:srgbClr val="1F1235"/>
+                </a:solidFill>
+              </a:rPr>
+              <a:t>Supabase Realtime orders.status=ready</a:t>
+            </a:r>
+            <a:endParaRPr lang="en-US" sz="1050" dirty="0"/>
+          </a:p>
+          <a:p>
+            <a:pPr indent="0" marL="0">
+              <a:buNone/>
+            </a:pPr>
+            <a:r>
+              <a:rPr lang="en-US" sz="1050" dirty="0">
+                <a:solidFill>
+                  <a:srgbClr val="1F1235"/>
+                </a:solidFill>
+              </a:rPr>
+              <a:t>수락 시 알림 자동 중단</a:t>
+            </a:r>
+            <a:endParaRPr lang="en-US" sz="1050" dirty="0"/>
+          </a:p>
+        </p:txBody>
+      </p:sp>
+      <p:sp>
+        <p:nvSpPr>
+          <p:cNvPr id="16" name="Shape 14"/>
+          <p:cNvSpPr/>
+          <p:nvPr/>
+        </p:nvSpPr>
+        <p:spPr>
+          <a:xfrm>
+            <a:off x="8092440" y="914400"/>
+            <a:ext cx="3749040" cy="1965960"/>
+          </a:xfrm>
+          <a:prstGeom prst="roundRect">
+            <a:avLst>
+              <a:gd name="adj" fmla="val 6977"/>
+            </a:avLst>
+          </a:prstGeom>
+          <a:solidFill>
+            <a:srgbClr val="FFEDD5"/>
+          </a:solidFill>
+          <a:ln w="12700">
+            <a:solidFill>
+              <a:srgbClr val="FDBA74"/>
+            </a:solidFill>
+            <a:prstDash val="solid"/>
+          </a:ln>
+        </p:spPr>
+      </p:sp>
+      <p:sp>
+        <p:nvSpPr>
+          <p:cNvPr id="17" name="Shape 15"/>
+          <p:cNvSpPr/>
+          <p:nvPr/>
+        </p:nvSpPr>
+        <p:spPr>
+          <a:xfrm>
+            <a:off x="8257032" y="1097280"/>
+            <a:ext cx="530352" cy="530352"/>
+          </a:xfrm>
+          <a:prstGeom prst="roundRect">
+            <a:avLst>
+              <a:gd name="adj" fmla="val 17241"/>
+            </a:avLst>
+          </a:prstGeom>
+          <a:solidFill>
+            <a:srgbClr val="FFFFFF"/>
+          </a:solidFill>
+          <a:ln w="12700">
+            <a:solidFill>
+              <a:srgbClr val="FDBA74"/>
+            </a:solidFill>
+            <a:prstDash val="solid"/>
+          </a:ln>
+        </p:spPr>
+      </p:sp>
+      <p:sp>
+        <p:nvSpPr>
+          <p:cNvPr id="18" name="Text 16"/>
+          <p:cNvSpPr/>
+          <p:nvPr/>
+        </p:nvSpPr>
+        <p:spPr>
+          <a:xfrm>
+            <a:off x="8257032" y="1078992"/>
+            <a:ext cx="548640" cy="548640"/>
+          </a:xfrm>
+          <a:prstGeom prst="rect">
+            <a:avLst/>
+          </a:prstGeom>
+          <a:noFill/>
+          <a:ln/>
+        </p:spPr>
+        <p:txBody>
+          <a:bodyPr wrap="square" rtlCol="0" anchor="ctr"/>
+          <a:lstStyle/>
+          <a:p>
+            <a:pPr algn="ctr" indent="0" marL="0">
+              <a:buNone/>
+            </a:pPr>
+            <a:r>
+              <a:rPr lang="en-US" sz="1800" dirty="0">
+                <a:solidFill>
+                  <a:srgbClr val="000000"/>
+                </a:solidFill>
+              </a:rPr>
+              <a:t>👨‍🍳</a:t>
+            </a:r>
+            <a:endParaRPr lang="en-US" sz="1800" dirty="0"/>
+          </a:p>
+        </p:txBody>
+      </p:sp>
+      <p:sp>
+        <p:nvSpPr>
+          <p:cNvPr id="19" name="Text 17"/>
+          <p:cNvSpPr/>
+          <p:nvPr/>
+        </p:nvSpPr>
+        <p:spPr>
+          <a:xfrm>
+            <a:off x="8897112" y="1115568"/>
+            <a:ext cx="2743200" cy="365760"/>
+          </a:xfrm>
+          <a:prstGeom prst="rect">
+            <a:avLst/>
+          </a:prstGeom>
+          <a:noFill/>
+          <a:ln/>
+        </p:spPr>
+        <p:txBody>
+          <a:bodyPr wrap="square" rtlCol="0" anchor="ctr"/>
+          <a:lstStyle/>
+          <a:p>
+            <a:pPr indent="0" marL="0">
+              <a:buNone/>
+            </a:pPr>
+            <a:r>
+              <a:rPr lang="en-US" sz="1200" b="1" dirty="0">
+                <a:solidFill>
+                  <a:srgbClr val="EA580C"/>
+                </a:solidFill>
+              </a:rPr>
+              <a:t>조리 중 라이더 호출 분리</a:t>
+            </a:r>
+            <a:endParaRPr lang="en-US" sz="1200" dirty="0"/>
+          </a:p>
+        </p:txBody>
+      </p:sp>
+      <p:sp>
+        <p:nvSpPr>
+          <p:cNvPr id="20" name="Text 18"/>
+          <p:cNvSpPr/>
+          <p:nvPr/>
+        </p:nvSpPr>
+        <p:spPr>
+          <a:xfrm>
+            <a:off x="8293608" y="1600200"/>
+            <a:ext cx="3337560" cy="1143000"/>
+          </a:xfrm>
+          <a:prstGeom prst="rect">
+            <a:avLst/>
+          </a:prstGeom>
+          <a:noFill/>
+          <a:ln/>
+        </p:spPr>
+        <p:txBody>
+          <a:bodyPr wrap="square" rtlCol="0" anchor="ctr"/>
+          <a:lstStyle/>
+          <a:p>
+            <a:pPr indent="0" marL="0">
+              <a:buNone/>
+            </a:pPr>
+            <a:r>
+              <a:rPr lang="en-US" sz="1050" dirty="0">
+                <a:solidFill>
+                  <a:srgbClr val="1F1235"/>
+                </a:solidFill>
+              </a:rPr>
+              <a:t>조리 중 '라이더 호출' 버튼 독립</a:t>
+            </a:r>
+            <a:endParaRPr lang="en-US" sz="1050" dirty="0"/>
+          </a:p>
+          <a:p>
+            <a:pPr indent="0" marL="0">
+              <a:buNone/>
+            </a:pPr>
+            <a:r>
+              <a:rPr lang="en-US" sz="1050" dirty="0">
+                <a:solidFill>
+                  <a:srgbClr val="1F1235"/>
+                </a:solidFill>
+              </a:rPr>
+              <a:t>조리 전 미리 라이더 출발 가능</a:t>
+            </a:r>
+            <a:endParaRPr lang="en-US" sz="1050" dirty="0"/>
+          </a:p>
+          <a:p>
+            <a:pPr indent="0" marL="0">
+              <a:buNone/>
+            </a:pPr>
+            <a:r>
+              <a:rPr lang="en-US" sz="1050" dirty="0">
+                <a:solidFill>
+                  <a:srgbClr val="1F1235"/>
+                </a:solidFill>
+              </a:rPr>
+              <a:t>'조리 완료' 버튼 병행 유지</a:t>
+            </a:r>
+            <a:endParaRPr lang="en-US" sz="1050" dirty="0"/>
+          </a:p>
+        </p:txBody>
+      </p:sp>
+      <p:sp>
+        <p:nvSpPr>
+          <p:cNvPr id="21" name="Shape 19"/>
+          <p:cNvSpPr/>
+          <p:nvPr/>
+        </p:nvSpPr>
+        <p:spPr>
+          <a:xfrm>
+            <a:off x="228600" y="3063240"/>
+            <a:ext cx="3749040" cy="1965960"/>
+          </a:xfrm>
+          <a:prstGeom prst="roundRect">
+            <a:avLst>
+              <a:gd name="adj" fmla="val 6977"/>
+            </a:avLst>
+          </a:prstGeom>
+          <a:solidFill>
+            <a:srgbClr val="FFEDD5"/>
+          </a:solidFill>
+          <a:ln w="12700">
+            <a:solidFill>
+              <a:srgbClr val="FDBA74"/>
+            </a:solidFill>
+            <a:prstDash val="solid"/>
+          </a:ln>
+        </p:spPr>
+      </p:sp>
+      <p:sp>
+        <p:nvSpPr>
+          <p:cNvPr id="22" name="Shape 20"/>
+          <p:cNvSpPr/>
+          <p:nvPr/>
+        </p:nvSpPr>
+        <p:spPr>
+          <a:xfrm>
+            <a:off x="393192" y="3246120"/>
+            <a:ext cx="530352" cy="530352"/>
+          </a:xfrm>
+          <a:prstGeom prst="roundRect">
+            <a:avLst>
+              <a:gd name="adj" fmla="val 17241"/>
+            </a:avLst>
+          </a:prstGeom>
+          <a:solidFill>
+            <a:srgbClr val="FFFFFF"/>
+          </a:solidFill>
+          <a:ln w="12700">
+            <a:solidFill>
+              <a:srgbClr val="FDBA74"/>
+            </a:solidFill>
+            <a:prstDash val="solid"/>
+          </a:ln>
+        </p:spPr>
+      </p:sp>
+      <p:sp>
+        <p:nvSpPr>
+          <p:cNvPr id="23" name="Text 21"/>
+          <p:cNvSpPr/>
+          <p:nvPr/>
+        </p:nvSpPr>
+        <p:spPr>
+          <a:xfrm>
+            <a:off x="393192" y="3227832"/>
+            <a:ext cx="548640" cy="548640"/>
+          </a:xfrm>
+          <a:prstGeom prst="rect">
+            <a:avLst/>
+          </a:prstGeom>
+          <a:noFill/>
+          <a:ln/>
+        </p:spPr>
+        <p:txBody>
+          <a:bodyPr wrap="square" rtlCol="0" anchor="ctr"/>
+          <a:lstStyle/>
+          <a:p>
+            <a:pPr algn="ctr" indent="0" marL="0">
+              <a:buNone/>
+            </a:pPr>
+            <a:r>
+              <a:rPr lang="en-US" sz="1800" dirty="0">
+                <a:solidFill>
+                  <a:srgbClr val="000000"/>
+                </a:solidFill>
+              </a:rPr>
+              <a:t>✅</a:t>
+            </a:r>
+            <a:endParaRPr lang="en-US" sz="1800" dirty="0"/>
+          </a:p>
+        </p:txBody>
+      </p:sp>
+      <p:sp>
+        <p:nvSpPr>
+          <p:cNvPr id="24" name="Text 22"/>
+          <p:cNvSpPr/>
+          <p:nvPr/>
+        </p:nvSpPr>
+        <p:spPr>
+          <a:xfrm>
+            <a:off x="1033272" y="3264408"/>
+            <a:ext cx="2743200" cy="365760"/>
+          </a:xfrm>
+          <a:prstGeom prst="rect">
+            <a:avLst/>
+          </a:prstGeom>
+          <a:noFill/>
+          <a:ln/>
+        </p:spPr>
+        <p:txBody>
+          <a:bodyPr wrap="square" rtlCol="0" anchor="ctr"/>
+          <a:lstStyle/>
+          <a:p>
+            <a:pPr indent="0" marL="0">
+              <a:buNone/>
+            </a:pPr>
+            <a:r>
+              <a:rPr lang="en-US" sz="1200" b="1" dirty="0">
+                <a:solidFill>
+                  <a:srgbClr val="EA580C"/>
+                </a:solidFill>
+              </a:rPr>
+              <a:t>PICK 주문 즉시 confirmed</a:t>
+            </a:r>
+            <a:endParaRPr lang="en-US" sz="1200" dirty="0"/>
+          </a:p>
+        </p:txBody>
+      </p:sp>
+      <p:sp>
+        <p:nvSpPr>
+          <p:cNvPr id="25" name="Text 23"/>
+          <p:cNvSpPr/>
+          <p:nvPr/>
+        </p:nvSpPr>
+        <p:spPr>
+          <a:xfrm>
+            <a:off x="429768" y="3749040"/>
+            <a:ext cx="3337560" cy="1143000"/>
+          </a:xfrm>
+          <a:prstGeom prst="rect">
+            <a:avLst/>
+          </a:prstGeom>
+          <a:noFill/>
+          <a:ln/>
+        </p:spPr>
+        <p:txBody>
+          <a:bodyPr wrap="square" rtlCol="0" anchor="ctr"/>
+          <a:lstStyle/>
+          <a:p>
+            <a:pPr indent="0" marL="0">
+              <a:buNone/>
+            </a:pPr>
+            <a:r>
+              <a:rPr lang="en-US" sz="1050" dirty="0">
+                <a:solidFill>
+                  <a:srgbClr val="1F1235"/>
+                </a:solidFill>
+              </a:rPr>
+              <a:t>PICK 결제 시 pending 대신 confirmed</a:t>
+            </a:r>
+            <a:endParaRPr lang="en-US" sz="1050" dirty="0"/>
+          </a:p>
+          <a:p>
+            <a:pPr indent="0" marL="0">
+              <a:buNone/>
+            </a:pPr>
+            <a:r>
+              <a:rPr lang="en-US" sz="1050" dirty="0">
+                <a:solidFill>
+                  <a:srgbClr val="1F1235"/>
+                </a:solidFill>
+              </a:rPr>
+              <a:t>confirmed_at 자동 기록</a:t>
+            </a:r>
+            <a:endParaRPr lang="en-US" sz="1050" dirty="0"/>
+          </a:p>
+          <a:p>
+            <a:pPr indent="0" marL="0">
+              <a:buNone/>
+            </a:pPr>
+            <a:r>
+              <a:rPr lang="en-US" sz="1050" dirty="0">
+                <a:solidFill>
+                  <a:srgbClr val="1F1235"/>
+                </a:solidFill>
+              </a:rPr>
+              <a:t>'결제 확인 중' 대기 없이 즉시 수락</a:t>
+            </a:r>
+            <a:endParaRPr lang="en-US" sz="1050" dirty="0"/>
+          </a:p>
+        </p:txBody>
+      </p:sp>
+      <p:sp>
+        <p:nvSpPr>
+          <p:cNvPr id="26" name="Shape 24"/>
+          <p:cNvSpPr/>
+          <p:nvPr/>
+        </p:nvSpPr>
+        <p:spPr>
+          <a:xfrm>
+            <a:off x="4160520" y="3063240"/>
+            <a:ext cx="3749040" cy="1965960"/>
+          </a:xfrm>
+          <a:prstGeom prst="roundRect">
+            <a:avLst>
+              <a:gd name="adj" fmla="val 6977"/>
+            </a:avLst>
+          </a:prstGeom>
+          <a:solidFill>
+            <a:srgbClr val="FFEDD5"/>
+          </a:solidFill>
+          <a:ln w="12700">
+            <a:solidFill>
+              <a:srgbClr val="FDBA74"/>
+            </a:solidFill>
+            <a:prstDash val="solid"/>
+          </a:ln>
+        </p:spPr>
+      </p:sp>
+      <p:sp>
+        <p:nvSpPr>
+          <p:cNvPr id="27" name="Shape 25"/>
+          <p:cNvSpPr/>
+          <p:nvPr/>
+        </p:nvSpPr>
+        <p:spPr>
+          <a:xfrm>
+            <a:off x="4325112" y="3246120"/>
+            <a:ext cx="530352" cy="530352"/>
+          </a:xfrm>
+          <a:prstGeom prst="roundRect">
+            <a:avLst>
+              <a:gd name="adj" fmla="val 17241"/>
+            </a:avLst>
+          </a:prstGeom>
+          <a:solidFill>
+            <a:srgbClr val="FFFFFF"/>
+          </a:solidFill>
+          <a:ln w="12700">
+            <a:solidFill>
+              <a:srgbClr val="FDBA74"/>
+            </a:solidFill>
+            <a:prstDash val="solid"/>
+          </a:ln>
+        </p:spPr>
+      </p:sp>
+      <p:sp>
+        <p:nvSpPr>
+          <p:cNvPr id="28" name="Text 26"/>
+          <p:cNvSpPr/>
+          <p:nvPr/>
+        </p:nvSpPr>
+        <p:spPr>
+          <a:xfrm>
+            <a:off x="4325112" y="3227832"/>
+            <a:ext cx="548640" cy="548640"/>
+          </a:xfrm>
+          <a:prstGeom prst="rect">
+            <a:avLst/>
+          </a:prstGeom>
+          <a:noFill/>
+          <a:ln/>
+        </p:spPr>
+        <p:txBody>
+          <a:bodyPr wrap="square" rtlCol="0" anchor="ctr"/>
+          <a:lstStyle/>
+          <a:p>
+            <a:pPr algn="ctr" indent="0" marL="0">
+              <a:buNone/>
+            </a:pPr>
+            <a:r>
+              <a:rPr lang="en-US" sz="1800" dirty="0">
+                <a:solidFill>
+                  <a:srgbClr val="000000"/>
+                </a:solidFill>
+              </a:rPr>
+              <a:t>🔧</a:t>
+            </a:r>
+            <a:endParaRPr lang="en-US" sz="1800" dirty="0"/>
+          </a:p>
+        </p:txBody>
+      </p:sp>
+      <p:sp>
+        <p:nvSpPr>
+          <p:cNvPr id="29" name="Text 27"/>
+          <p:cNvSpPr/>
+          <p:nvPr/>
+        </p:nvSpPr>
+        <p:spPr>
+          <a:xfrm>
+            <a:off x="4965192" y="3264408"/>
+            <a:ext cx="2743200" cy="365760"/>
+          </a:xfrm>
+          <a:prstGeom prst="rect">
+            <a:avLst/>
+          </a:prstGeom>
+          <a:noFill/>
+          <a:ln/>
+        </p:spPr>
+        <p:txBody>
+          <a:bodyPr wrap="square" rtlCol="0" anchor="ctr"/>
+          <a:lstStyle/>
+          <a:p>
+            <a:pPr indent="0" marL="0">
+              <a:buNone/>
+            </a:pPr>
+            <a:r>
+              <a:rPr lang="en-US" sz="1200" b="1" dirty="0">
+                <a:solidFill>
+                  <a:srgbClr val="EA580C"/>
+                </a:solidFill>
+              </a:rPr>
+              <a:t>FK 모호성 버그 수정</a:t>
+            </a:r>
+            <a:endParaRPr lang="en-US" sz="1200" dirty="0"/>
+          </a:p>
+        </p:txBody>
+      </p:sp>
+      <p:sp>
+        <p:nvSpPr>
+          <p:cNvPr id="30" name="Text 28"/>
+          <p:cNvSpPr/>
+          <p:nvPr/>
+        </p:nvSpPr>
+        <p:spPr>
+          <a:xfrm>
+            <a:off x="4361688" y="3749040"/>
+            <a:ext cx="3337560" cy="1143000"/>
+          </a:xfrm>
+          <a:prstGeom prst="rect">
+            <a:avLst/>
+          </a:prstGeom>
+          <a:noFill/>
+          <a:ln/>
+        </p:spPr>
+        <p:txBody>
+          <a:bodyPr wrap="square" rtlCol="0" anchor="ctr"/>
+          <a:lstStyle/>
+          <a:p>
+            <a:pPr indent="0" marL="0">
+              <a:buNone/>
+            </a:pPr>
+            <a:r>
+              <a:rPr lang="en-US" sz="1050" dirty="0">
+                <a:solidFill>
+                  <a:srgbClr val="1F1235"/>
+                </a:solidFill>
+              </a:rPr>
+              <a:t>PGRST201 오류 (orders→users FK 2개)</a:t>
+            </a:r>
+            <a:endParaRPr lang="en-US" sz="1050" dirty="0"/>
+          </a:p>
+          <a:p>
+            <a:pPr indent="0" marL="0">
+              <a:buNone/>
+            </a:pPr>
+            <a:r>
+              <a:rPr lang="en-US" sz="1050" dirty="0">
+                <a:solidFill>
+                  <a:srgbClr val="1F1235"/>
+                </a:solidFill>
+              </a:rPr>
+              <a:t>users!orders_user_id_fkey 힌트 적용</a:t>
+            </a:r>
+            <a:endParaRPr lang="en-US" sz="1050" dirty="0"/>
+          </a:p>
+          <a:p>
+            <a:pPr indent="0" marL="0">
+              <a:buNone/>
+            </a:pPr>
+            <a:r>
+              <a:rPr lang="en-US" sz="1050" dirty="0">
+                <a:solidFill>
+                  <a:srgbClr val="1F1235"/>
+                </a:solidFill>
+              </a:rPr>
+              <a:t>통계·주문·라이더 API 4곳 수정</a:t>
+            </a:r>
+            <a:endParaRPr lang="en-US" sz="1050" dirty="0"/>
+          </a:p>
+        </p:txBody>
+      </p:sp>
+      <p:sp>
+        <p:nvSpPr>
+          <p:cNvPr id="31" name="Shape 29"/>
+          <p:cNvSpPr/>
+          <p:nvPr/>
+        </p:nvSpPr>
+        <p:spPr>
+          <a:xfrm>
+            <a:off x="8092440" y="3063240"/>
+            <a:ext cx="3749040" cy="1965960"/>
+          </a:xfrm>
+          <a:prstGeom prst="roundRect">
+            <a:avLst>
+              <a:gd name="adj" fmla="val 6977"/>
+            </a:avLst>
+          </a:prstGeom>
+          <a:solidFill>
+            <a:srgbClr val="FFEDD5"/>
+          </a:solidFill>
+          <a:ln w="12700">
+            <a:solidFill>
+              <a:srgbClr val="FDBA74"/>
+            </a:solidFill>
+            <a:prstDash val="solid"/>
+          </a:ln>
+        </p:spPr>
+      </p:sp>
+      <p:sp>
+        <p:nvSpPr>
+          <p:cNvPr id="32" name="Shape 30"/>
+          <p:cNvSpPr/>
+          <p:nvPr/>
+        </p:nvSpPr>
+        <p:spPr>
+          <a:xfrm>
+            <a:off x="8257032" y="3246120"/>
+            <a:ext cx="530352" cy="530352"/>
+          </a:xfrm>
+          <a:prstGeom prst="roundRect">
+            <a:avLst>
+              <a:gd name="adj" fmla="val 17241"/>
+            </a:avLst>
+          </a:prstGeom>
+          <a:solidFill>
+            <a:srgbClr val="FFFFFF"/>
+          </a:solidFill>
+          <a:ln w="12700">
+            <a:solidFill>
+              <a:srgbClr val="FDBA74"/>
+            </a:solidFill>
+            <a:prstDash val="solid"/>
+          </a:ln>
+        </p:spPr>
+      </p:sp>
+      <p:sp>
+        <p:nvSpPr>
+          <p:cNvPr id="33" name="Text 31"/>
+          <p:cNvSpPr/>
+          <p:nvPr/>
+        </p:nvSpPr>
+        <p:spPr>
+          <a:xfrm>
+            <a:off x="8257032" y="3227832"/>
+            <a:ext cx="548640" cy="548640"/>
+          </a:xfrm>
+          <a:prstGeom prst="rect">
+            <a:avLst/>
+          </a:prstGeom>
+          <a:noFill/>
+          <a:ln/>
+        </p:spPr>
+        <p:txBody>
+          <a:bodyPr wrap="square" rtlCol="0" anchor="ctr"/>
+          <a:lstStyle/>
+          <a:p>
+            <a:pPr algn="ctr" indent="0" marL="0">
+              <a:buNone/>
+            </a:pPr>
+            <a:r>
+              <a:rPr lang="en-US" sz="1800" dirty="0">
+                <a:solidFill>
+                  <a:srgbClr val="000000"/>
+                </a:solidFill>
+              </a:rPr>
+              <a:t>🏷️</a:t>
+            </a:r>
+            <a:endParaRPr lang="en-US" sz="1800" dirty="0"/>
+          </a:p>
+        </p:txBody>
+      </p:sp>
+      <p:sp>
+        <p:nvSpPr>
+          <p:cNvPr id="34" name="Text 32"/>
+          <p:cNvSpPr/>
+          <p:nvPr/>
+        </p:nvSpPr>
+        <p:spPr>
+          <a:xfrm>
+            <a:off x="8897112" y="3264408"/>
+            <a:ext cx="2743200" cy="365760"/>
+          </a:xfrm>
+          <a:prstGeom prst="rect">
+            <a:avLst/>
+          </a:prstGeom>
+          <a:noFill/>
+          <a:ln/>
+        </p:spPr>
+        <p:txBody>
+          <a:bodyPr wrap="square" rtlCol="0" anchor="ctr"/>
+          <a:lstStyle/>
+          <a:p>
+            <a:pPr indent="0" marL="0">
+              <a:buNone/>
+            </a:pPr>
+            <a:r>
+              <a:rPr lang="en-US" sz="1200" b="1" dirty="0">
+                <a:solidFill>
+                  <a:srgbClr val="EA580C"/>
+                </a:solidFill>
+              </a:rPr>
+              <a:t>메뉴 카테고리 정리</a:t>
+            </a:r>
+            <a:endParaRPr lang="en-US" sz="1200" dirty="0"/>
+          </a:p>
+        </p:txBody>
+      </p:sp>
+      <p:sp>
+        <p:nvSpPr>
+          <p:cNvPr id="35" name="Text 33"/>
+          <p:cNvSpPr/>
+          <p:nvPr/>
+        </p:nvSpPr>
+        <p:spPr>
+          <a:xfrm>
+            <a:off x="8293608" y="3749040"/>
+            <a:ext cx="3337560" cy="1143000"/>
+          </a:xfrm>
+          <a:prstGeom prst="rect">
+            <a:avLst/>
+          </a:prstGeom>
+          <a:noFill/>
+          <a:ln/>
+        </p:spPr>
+        <p:txBody>
+          <a:bodyPr wrap="square" rtlCol="0" anchor="ctr"/>
+          <a:lstStyle/>
+          <a:p>
+            <a:pPr indent="0" marL="0">
+              <a:buNone/>
+            </a:pPr>
+            <a:r>
+              <a:rPr lang="en-US" sz="1050" dirty="0">
+                <a:solidFill>
+                  <a:srgbClr val="1F1235"/>
+                </a:solidFill>
+              </a:rPr>
+              <a:t>업종 중복 항목 제거 (치킨·피자 등)</a:t>
+            </a:r>
+            <a:endParaRPr lang="en-US" sz="1050" dirty="0"/>
+          </a:p>
+          <a:p>
+            <a:pPr indent="0" marL="0">
+              <a:buNone/>
+            </a:pPr>
+            <a:r>
+              <a:rPr lang="en-US" sz="1050" dirty="0">
+                <a:solidFill>
+                  <a:srgbClr val="1F1235"/>
+                </a:solidFill>
+              </a:rPr>
+              <a:t>메뉴 섹션 전용 7개로 정리</a:t>
+            </a:r>
+            <a:endParaRPr lang="en-US" sz="1050" dirty="0"/>
+          </a:p>
+          <a:p>
+            <a:pPr indent="0" marL="0">
+              <a:buNone/>
+            </a:pPr>
+            <a:r>
+              <a:rPr lang="en-US" sz="1050" dirty="0">
+                <a:solidFill>
+                  <a:srgbClr val="1F1235"/>
+                </a:solidFill>
+              </a:rPr>
+              <a:t>메인·사이드·음료·세트·디저트·스낵·기타</a:t>
+            </a:r>
+            <a:endParaRPr lang="en-US" sz="1050" dirty="0"/>
           </a:p>
         </p:txBody>
       </p:sp>
@@ -3957,14 +3629,14 @@
               <a:buNone/>
             </a:pPr>
             <a:r>
-              <a:rPr lang="en-US" sz="2600" b="1" dirty="0">
+              <a:rPr lang="en-US" sz="2400" b="1" dirty="0">
                 <a:solidFill>
                   <a:srgbClr val="4C1D95"/>
                 </a:solidFill>
               </a:rPr>
-              <a:t>🚀  Phase 1~3 완성 · 다음 단계 로드맵</a:t>
-            </a:r>
-            <a:endParaRPr lang="en-US" sz="2600" dirty="0"/>
+              <a:t>✅  완료된 기능 전체 목록 (4/14 최종)</a:t>
+            </a:r>
+            <a:endParaRPr lang="en-US" sz="2400" dirty="0"/>
           </a:p>
         </p:txBody>
       </p:sp>
@@ -3977,7 +3649,7 @@
         <p:spPr>
           <a:xfrm>
             <a:off x="365760" y="804672"/>
-            <a:ext cx="3657600" cy="45720"/>
+            <a:ext cx="3840480" cy="45720"/>
           </a:xfrm>
           <a:prstGeom prst="rect">
             <a:avLst/>
@@ -4001,12 +3673,552 @@
         </p:nvSpPr>
         <p:spPr>
           <a:xfrm>
-            <a:off x="365760" y="914400"/>
-            <a:ext cx="12070080" cy="548640"/>
+            <a:off x="228600" y="960120"/>
+            <a:ext cx="3749040" cy="2423160"/>
           </a:xfrm>
           <a:prstGeom prst="roundRect">
             <a:avLst>
-              <a:gd name="adj" fmla="val 20000"/>
+              <a:gd name="adj" fmla="val 5660"/>
+            </a:avLst>
+          </a:prstGeom>
+          <a:solidFill>
+            <a:srgbClr val="EDE9FE"/>
+          </a:solidFill>
+          <a:ln w="12700">
+            <a:solidFill>
+              <a:srgbClr val="6B21A8"/>
+            </a:solidFill>
+            <a:prstDash val="solid"/>
+          </a:ln>
+        </p:spPr>
+      </p:sp>
+      <p:sp>
+        <p:nvSpPr>
+          <p:cNvPr id="5" name="Shape 3"/>
+          <p:cNvSpPr/>
+          <p:nvPr/>
+        </p:nvSpPr>
+        <p:spPr>
+          <a:xfrm>
+            <a:off x="338328" y="1069848"/>
+            <a:ext cx="3529584" cy="384048"/>
+          </a:xfrm>
+          <a:prstGeom prst="roundRect">
+            <a:avLst>
+              <a:gd name="adj" fmla="val 19048"/>
+            </a:avLst>
+          </a:prstGeom>
+          <a:solidFill>
+            <a:srgbClr val="6B21A8"/>
+          </a:solidFill>
+          <a:ln w="12700">
+            <a:solidFill>
+              <a:srgbClr val="6B21A8"/>
+            </a:solidFill>
+            <a:prstDash val="solid"/>
+          </a:ln>
+        </p:spPr>
+      </p:sp>
+      <p:sp>
+        <p:nvSpPr>
+          <p:cNvPr id="6" name="Text 4"/>
+          <p:cNvSpPr/>
+          <p:nvPr/>
+        </p:nvSpPr>
+        <p:spPr>
+          <a:xfrm>
+            <a:off x="338328" y="1069848"/>
+            <a:ext cx="3529584" cy="384048"/>
+          </a:xfrm>
+          <a:prstGeom prst="rect">
+            <a:avLst/>
+          </a:prstGeom>
+          <a:noFill/>
+          <a:ln/>
+        </p:spPr>
+        <p:txBody>
+          <a:bodyPr wrap="square" rtlCol="0" anchor="ctr"/>
+          <a:lstStyle/>
+          <a:p>
+            <a:pPr algn="ctr" indent="0" marL="0">
+              <a:buNone/>
+            </a:pPr>
+            <a:r>
+              <a:rPr lang="en-US" sz="1200" b="1" dirty="0">
+                <a:solidFill>
+                  <a:srgbClr val="FFFFFF"/>
+                </a:solidFill>
+              </a:rPr>
+              <a:t>🔐 인증 / 사용자 관리</a:t>
+            </a:r>
+            <a:endParaRPr lang="en-US" sz="1200" dirty="0"/>
+          </a:p>
+        </p:txBody>
+      </p:sp>
+      <p:sp>
+        <p:nvSpPr>
+          <p:cNvPr id="7" name="Text 5"/>
+          <p:cNvSpPr/>
+          <p:nvPr/>
+        </p:nvSpPr>
+        <p:spPr>
+          <a:xfrm>
+            <a:off x="393192" y="1554480"/>
+            <a:ext cx="3401568" cy="338328"/>
+          </a:xfrm>
+          <a:prstGeom prst="rect">
+            <a:avLst/>
+          </a:prstGeom>
+          <a:noFill/>
+          <a:ln/>
+        </p:spPr>
+        <p:txBody>
+          <a:bodyPr wrap="square" rtlCol="0" anchor="ctr"/>
+          <a:lstStyle/>
+          <a:p>
+            <a:pPr indent="0" marL="0">
+              <a:buNone/>
+            </a:pPr>
+            <a:r>
+              <a:rPr lang="en-US" sz="1000" dirty="0">
+                <a:solidFill>
+                  <a:srgbClr val="1F1235"/>
+                </a:solidFill>
+              </a:rPr>
+              <a:t>✓  이메일 로그인/회원가입 + 지갑 자동생성</a:t>
+            </a:r>
+            <a:endParaRPr lang="en-US" sz="1000" dirty="0"/>
+          </a:p>
+        </p:txBody>
+      </p:sp>
+      <p:sp>
+        <p:nvSpPr>
+          <p:cNvPr id="8" name="Text 6"/>
+          <p:cNvSpPr/>
+          <p:nvPr/>
+        </p:nvSpPr>
+        <p:spPr>
+          <a:xfrm>
+            <a:off x="393192" y="1901952"/>
+            <a:ext cx="3401568" cy="338328"/>
+          </a:xfrm>
+          <a:prstGeom prst="rect">
+            <a:avLst/>
+          </a:prstGeom>
+          <a:noFill/>
+          <a:ln/>
+        </p:spPr>
+        <p:txBody>
+          <a:bodyPr wrap="square" rtlCol="0" anchor="ctr"/>
+          <a:lstStyle/>
+          <a:p>
+            <a:pPr indent="0" marL="0">
+              <a:buNone/>
+            </a:pPr>
+            <a:r>
+              <a:rPr lang="en-US" sz="1000" dirty="0">
+                <a:solidFill>
+                  <a:srgbClr val="1F1235"/>
+                </a:solidFill>
+              </a:rPr>
+              <a:t>✓  카카오 소셜 로그인 (비즈니스 인증 후 재추가)</a:t>
+            </a:r>
+            <a:endParaRPr lang="en-US" sz="1000" dirty="0"/>
+          </a:p>
+        </p:txBody>
+      </p:sp>
+      <p:sp>
+        <p:nvSpPr>
+          <p:cNvPr id="9" name="Text 7"/>
+          <p:cNvSpPr/>
+          <p:nvPr/>
+        </p:nvSpPr>
+        <p:spPr>
+          <a:xfrm>
+            <a:off x="393192" y="2249424"/>
+            <a:ext cx="3401568" cy="338328"/>
+          </a:xfrm>
+          <a:prstGeom prst="rect">
+            <a:avLst/>
+          </a:prstGeom>
+          <a:noFill/>
+          <a:ln/>
+        </p:spPr>
+        <p:txBody>
+          <a:bodyPr wrap="square" rtlCol="0" anchor="ctr"/>
+          <a:lstStyle/>
+          <a:p>
+            <a:pPr indent="0" marL="0">
+              <a:buNone/>
+            </a:pPr>
+            <a:r>
+              <a:rPr lang="en-US" sz="1000" dirty="0">
+                <a:solidFill>
+                  <a:srgbClr val="1F1235"/>
+                </a:solidFill>
+              </a:rPr>
+              <a:t>✓  RBAC 미들웨어 (user/owner/rider/admin)</a:t>
+            </a:r>
+            <a:endParaRPr lang="en-US" sz="1000" dirty="0"/>
+          </a:p>
+        </p:txBody>
+      </p:sp>
+      <p:sp>
+        <p:nvSpPr>
+          <p:cNvPr id="10" name="Text 8"/>
+          <p:cNvSpPr/>
+          <p:nvPr/>
+        </p:nvSpPr>
+        <p:spPr>
+          <a:xfrm>
+            <a:off x="393192" y="2596896"/>
+            <a:ext cx="3401568" cy="338328"/>
+          </a:xfrm>
+          <a:prstGeom prst="rect">
+            <a:avLst/>
+          </a:prstGeom>
+          <a:noFill/>
+          <a:ln/>
+        </p:spPr>
+        <p:txBody>
+          <a:bodyPr wrap="square" rtlCol="0" anchor="ctr"/>
+          <a:lstStyle/>
+          <a:p>
+            <a:pPr indent="0" marL="0">
+              <a:buNone/>
+            </a:pPr>
+            <a:r>
+              <a:rPr lang="en-US" sz="1000" dirty="0">
+                <a:solidFill>
+                  <a:srgbClr val="1F1235"/>
+                </a:solidFill>
+              </a:rPr>
+              <a:t>✓  비밀번호 찾기·재설정 + 검색 히스토리</a:t>
+            </a:r>
+            <a:endParaRPr lang="en-US" sz="1000" dirty="0"/>
+          </a:p>
+        </p:txBody>
+      </p:sp>
+      <p:sp>
+        <p:nvSpPr>
+          <p:cNvPr id="11" name="Text 9"/>
+          <p:cNvSpPr/>
+          <p:nvPr/>
+        </p:nvSpPr>
+        <p:spPr>
+          <a:xfrm>
+            <a:off x="393192" y="2944368"/>
+            <a:ext cx="3401568" cy="338328"/>
+          </a:xfrm>
+          <a:prstGeom prst="rect">
+            <a:avLst/>
+          </a:prstGeom>
+          <a:noFill/>
+          <a:ln/>
+        </p:spPr>
+        <p:txBody>
+          <a:bodyPr wrap="square" rtlCol="0" anchor="ctr"/>
+          <a:lstStyle/>
+          <a:p>
+            <a:pPr indent="0" marL="0">
+              <a:buNone/>
+            </a:pPr>
+            <a:r>
+              <a:rPr lang="en-US" sz="1000" dirty="0">
+                <a:solidFill>
+                  <a:srgbClr val="1F1235"/>
+                </a:solidFill>
+              </a:rPr>
+              <a:t>✓  프로필 수정 + 다중 배달 주소 + 레퍼럴</a:t>
+            </a:r>
+            <a:endParaRPr lang="en-US" sz="1000" dirty="0"/>
+          </a:p>
+        </p:txBody>
+      </p:sp>
+      <p:sp>
+        <p:nvSpPr>
+          <p:cNvPr id="12" name="Shape 10"/>
+          <p:cNvSpPr/>
+          <p:nvPr/>
+        </p:nvSpPr>
+        <p:spPr>
+          <a:xfrm>
+            <a:off x="4160520" y="960120"/>
+            <a:ext cx="3749040" cy="2423160"/>
+          </a:xfrm>
+          <a:prstGeom prst="roundRect">
+            <a:avLst>
+              <a:gd name="adj" fmla="val 5660"/>
+            </a:avLst>
+          </a:prstGeom>
+          <a:solidFill>
+            <a:srgbClr val="E0F2FE"/>
+          </a:solidFill>
+          <a:ln w="12700">
+            <a:solidFill>
+              <a:srgbClr val="0369A1"/>
+            </a:solidFill>
+            <a:prstDash val="solid"/>
+          </a:ln>
+        </p:spPr>
+      </p:sp>
+      <p:sp>
+        <p:nvSpPr>
+          <p:cNvPr id="13" name="Shape 11"/>
+          <p:cNvSpPr/>
+          <p:nvPr/>
+        </p:nvSpPr>
+        <p:spPr>
+          <a:xfrm>
+            <a:off x="4270248" y="1069848"/>
+            <a:ext cx="3529584" cy="384048"/>
+          </a:xfrm>
+          <a:prstGeom prst="roundRect">
+            <a:avLst>
+              <a:gd name="adj" fmla="val 19048"/>
+            </a:avLst>
+          </a:prstGeom>
+          <a:solidFill>
+            <a:srgbClr val="0369A1"/>
+          </a:solidFill>
+          <a:ln w="12700">
+            <a:solidFill>
+              <a:srgbClr val="0369A1"/>
+            </a:solidFill>
+            <a:prstDash val="solid"/>
+          </a:ln>
+        </p:spPr>
+      </p:sp>
+      <p:sp>
+        <p:nvSpPr>
+          <p:cNvPr id="14" name="Text 12"/>
+          <p:cNvSpPr/>
+          <p:nvPr/>
+        </p:nvSpPr>
+        <p:spPr>
+          <a:xfrm>
+            <a:off x="4270248" y="1069848"/>
+            <a:ext cx="3529584" cy="384048"/>
+          </a:xfrm>
+          <a:prstGeom prst="rect">
+            <a:avLst/>
+          </a:prstGeom>
+          <a:noFill/>
+          <a:ln/>
+        </p:spPr>
+        <p:txBody>
+          <a:bodyPr wrap="square" rtlCol="0" anchor="ctr"/>
+          <a:lstStyle/>
+          <a:p>
+            <a:pPr algn="ctr" indent="0" marL="0">
+              <a:buNone/>
+            </a:pPr>
+            <a:r>
+              <a:rPr lang="en-US" sz="1200" b="1" dirty="0">
+                <a:solidFill>
+                  <a:srgbClr val="FFFFFF"/>
+                </a:solidFill>
+              </a:rPr>
+              <a:t>🏠 사용자 탭 (4개) + UX</a:t>
+            </a:r>
+            <a:endParaRPr lang="en-US" sz="1200" dirty="0"/>
+          </a:p>
+        </p:txBody>
+      </p:sp>
+      <p:sp>
+        <p:nvSpPr>
+          <p:cNvPr id="15" name="Text 13"/>
+          <p:cNvSpPr/>
+          <p:nvPr/>
+        </p:nvSpPr>
+        <p:spPr>
+          <a:xfrm>
+            <a:off x="4325112" y="1554480"/>
+            <a:ext cx="3401568" cy="338328"/>
+          </a:xfrm>
+          <a:prstGeom prst="rect">
+            <a:avLst/>
+          </a:prstGeom>
+          <a:noFill/>
+          <a:ln/>
+        </p:spPr>
+        <p:txBody>
+          <a:bodyPr wrap="square" rtlCol="0" anchor="ctr"/>
+          <a:lstStyle/>
+          <a:p>
+            <a:pPr indent="0" marL="0">
+              <a:buNone/>
+            </a:pPr>
+            <a:r>
+              <a:rPr lang="en-US" sz="1000" dirty="0">
+                <a:solidFill>
+                  <a:srgbClr val="1F1235"/>
+                </a:solidFill>
+              </a:rPr>
+              <a:t>✓  홈: 카테고리·검색(GIN)·인기가게·광고</a:t>
+            </a:r>
+            <a:endParaRPr lang="en-US" sz="1000" dirty="0"/>
+          </a:p>
+        </p:txBody>
+      </p:sp>
+      <p:sp>
+        <p:nvSpPr>
+          <p:cNvPr id="16" name="Text 14"/>
+          <p:cNvSpPr/>
+          <p:nvPr/>
+        </p:nvSpPr>
+        <p:spPr>
+          <a:xfrm>
+            <a:off x="4325112" y="1901952"/>
+            <a:ext cx="3401568" cy="338328"/>
+          </a:xfrm>
+          <a:prstGeom prst="rect">
+            <a:avLst/>
+          </a:prstGeom>
+          <a:noFill/>
+          <a:ln/>
+        </p:spPr>
+        <p:txBody>
+          <a:bodyPr wrap="square" rtlCol="0" anchor="ctr"/>
+          <a:lstStyle/>
+          <a:p>
+            <a:pPr indent="0" marL="0">
+              <a:buNone/>
+            </a:pPr>
+            <a:r>
+              <a:rPr lang="en-US" sz="1000" dirty="0">
+                <a:solidFill>
+                  <a:srgbClr val="1F1235"/>
+                </a:solidFill>
+              </a:rPr>
+              <a:t>✓  지갑: 실잔액 + 충전 + PICK 보내기</a:t>
+            </a:r>
+            <a:endParaRPr lang="en-US" sz="1000" dirty="0"/>
+          </a:p>
+        </p:txBody>
+      </p:sp>
+      <p:sp>
+        <p:nvSpPr>
+          <p:cNvPr id="17" name="Text 15"/>
+          <p:cNvSpPr/>
+          <p:nvPr/>
+        </p:nvSpPr>
+        <p:spPr>
+          <a:xfrm>
+            <a:off x="4325112" y="2249424"/>
+            <a:ext cx="3401568" cy="338328"/>
+          </a:xfrm>
+          <a:prstGeom prst="rect">
+            <a:avLst/>
+          </a:prstGeom>
+          <a:noFill/>
+          <a:ln/>
+        </p:spPr>
+        <p:txBody>
+          <a:bodyPr wrap="square" rtlCol="0" anchor="ctr"/>
+          <a:lstStyle/>
+          <a:p>
+            <a:pPr indent="0" marL="0">
+              <a:buNone/>
+            </a:pPr>
+            <a:r>
+              <a:rPr lang="en-US" sz="1000" dirty="0">
+                <a:solidFill>
+                  <a:srgbClr val="1F1235"/>
+                </a:solidFill>
+              </a:rPr>
+              <a:t>✓  PICK주문: Realtime 추적 + 상세 + 재주문</a:t>
+            </a:r>
+            <a:endParaRPr lang="en-US" sz="1000" dirty="0"/>
+          </a:p>
+        </p:txBody>
+      </p:sp>
+      <p:sp>
+        <p:nvSpPr>
+          <p:cNvPr id="18" name="Text 16"/>
+          <p:cNvSpPr/>
+          <p:nvPr/>
+        </p:nvSpPr>
+        <p:spPr>
+          <a:xfrm>
+            <a:off x="4325112" y="2596896"/>
+            <a:ext cx="3401568" cy="338328"/>
+          </a:xfrm>
+          <a:prstGeom prst="rect">
+            <a:avLst/>
+          </a:prstGeom>
+          <a:noFill/>
+          <a:ln/>
+        </p:spPr>
+        <p:txBody>
+          <a:bodyPr wrap="square" rtlCol="0" anchor="ctr"/>
+          <a:lstStyle/>
+          <a:p>
+            <a:pPr indent="0" marL="0">
+              <a:buNone/>
+            </a:pPr>
+            <a:r>
+              <a:rPr lang="en-US" sz="1000" dirty="0">
+                <a:solidFill>
+                  <a:srgbClr val="1F1235"/>
+                </a:solidFill>
+              </a:rPr>
+              <a:t>✓  알림 드로어 + 딥링크 + 자동 트리거</a:t>
+            </a:r>
+            <a:endParaRPr lang="en-US" sz="1000" dirty="0"/>
+          </a:p>
+        </p:txBody>
+      </p:sp>
+      <p:sp>
+        <p:nvSpPr>
+          <p:cNvPr id="19" name="Text 17"/>
+          <p:cNvSpPr/>
+          <p:nvPr/>
+        </p:nvSpPr>
+        <p:spPr>
+          <a:xfrm>
+            <a:off x="4325112" y="2944368"/>
+            <a:ext cx="3401568" cy="338328"/>
+          </a:xfrm>
+          <a:prstGeom prst="rect">
+            <a:avLst/>
+          </a:prstGeom>
+          <a:noFill/>
+          <a:ln/>
+        </p:spPr>
+        <p:txBody>
+          <a:bodyPr wrap="square" rtlCol="0" anchor="ctr"/>
+          <a:lstStyle/>
+          <a:p>
+            <a:pPr indent="0" marL="0">
+              <a:buNone/>
+            </a:pPr>
+            <a:r>
+              <a:rPr lang="en-US" sz="1000" dirty="0">
+                <a:solidFill>
+                  <a:srgbClr val="1F1235"/>
+                </a:solidFill>
+              </a:rPr>
+              <a:t>✓  주간 영업시간 아코디언 + 실사 이미지</a:t>
+            </a:r>
+            <a:endParaRPr lang="en-US" sz="1000" dirty="0"/>
+          </a:p>
+        </p:txBody>
+      </p:sp>
+      <p:sp>
+        <p:nvSpPr>
+          <p:cNvPr id="20" name="Shape 18"/>
+          <p:cNvSpPr/>
+          <p:nvPr/>
+        </p:nvSpPr>
+        <p:spPr>
+          <a:xfrm>
+            <a:off x="8092440" y="960120"/>
+            <a:ext cx="3749040" cy="2423160"/>
+          </a:xfrm>
+          <a:prstGeom prst="roundRect">
+            <a:avLst>
+              <a:gd name="adj" fmla="val 5660"/>
             </a:avLst>
           </a:prstGeom>
           <a:solidFill>
@@ -4022,58 +4234,22 @@
       </p:sp>
       <p:sp>
         <p:nvSpPr>
-          <p:cNvPr id="5" name="Text 3"/>
-          <p:cNvSpPr/>
-          <p:nvPr/>
-        </p:nvSpPr>
-        <p:spPr>
-          <a:xfrm>
-            <a:off x="365760" y="914400"/>
-            <a:ext cx="12070080" cy="548640"/>
-          </a:xfrm>
-          <a:prstGeom prst="rect">
-            <a:avLst/>
-          </a:prstGeom>
-          <a:noFill/>
-          <a:ln/>
-        </p:spPr>
-        <p:txBody>
-          <a:bodyPr wrap="square" rtlCol="0" anchor="ctr"/>
-          <a:lstStyle/>
-          <a:p>
-            <a:pPr algn="ctr" indent="0" marL="0">
-              <a:buNone/>
-            </a:pPr>
-            <a:r>
-              <a:rPr lang="en-US" sz="1400" b="1" dirty="0">
-                <a:solidFill>
-                  <a:srgbClr val="16A34A"/>
-                </a:solidFill>
-              </a:rPr>
-              <a:t>🎉  Phase 1~3 완성! 55개+ 기능 구현 · 미착수 기능 0개 · Pi Network 연동만 남음</a:t>
-            </a:r>
-            <a:endParaRPr lang="en-US" sz="1400" dirty="0"/>
-          </a:p>
-        </p:txBody>
-      </p:sp>
-      <p:sp>
-        <p:nvSpPr>
-          <p:cNvPr id="6" name="Shape 4"/>
-          <p:cNvSpPr/>
-          <p:nvPr/>
-        </p:nvSpPr>
-        <p:spPr>
-          <a:xfrm>
-            <a:off x="365760" y="1600200"/>
-            <a:ext cx="1325880" cy="384048"/>
+          <p:cNvPr id="21" name="Shape 19"/>
+          <p:cNvSpPr/>
+          <p:nvPr/>
+        </p:nvSpPr>
+        <p:spPr>
+          <a:xfrm>
+            <a:off x="8202168" y="1069848"/>
+            <a:ext cx="3529584" cy="384048"/>
           </a:xfrm>
           <a:prstGeom prst="roundRect">
             <a:avLst>
-              <a:gd name="adj" fmla="val 23810"/>
+              <a:gd name="adj" fmla="val 19048"/>
             </a:avLst>
           </a:prstGeom>
           <a:solidFill>
-            <a:srgbClr val="DCFCE7"/>
+            <a:srgbClr val="16A34A"/>
           </a:solidFill>
           <a:ln w="12700">
             <a:solidFill>
@@ -4085,14 +4261,14 @@
       </p:sp>
       <p:sp>
         <p:nvSpPr>
-          <p:cNvPr id="7" name="Text 5"/>
-          <p:cNvSpPr/>
-          <p:nvPr/>
-        </p:nvSpPr>
-        <p:spPr>
-          <a:xfrm>
-            <a:off x="365760" y="1600200"/>
-            <a:ext cx="1325880" cy="384048"/>
+          <p:cNvPr id="22" name="Text 20"/>
+          <p:cNvSpPr/>
+          <p:nvPr/>
+        </p:nvSpPr>
+        <p:spPr>
+          <a:xfrm>
+            <a:off x="8202168" y="1069848"/>
+            <a:ext cx="3529584" cy="384048"/>
           </a:xfrm>
           <a:prstGeom prst="rect">
             <a:avLst/>
@@ -4108,493 +4284,211 @@
               <a:buNone/>
             </a:pPr>
             <a:r>
-              <a:rPr lang="en-US" sz="1100" b="1" dirty="0">
-                <a:solidFill>
-                  <a:srgbClr val="16A34A"/>
-                </a:solidFill>
-              </a:rPr>
-              <a:t>✅ Phase 1~3</a:t>
-            </a:r>
-            <a:endParaRPr lang="en-US" sz="1100" dirty="0"/>
-          </a:p>
-        </p:txBody>
-      </p:sp>
-      <p:sp>
-        <p:nvSpPr>
-          <p:cNvPr id="8" name="Shape 6"/>
-          <p:cNvSpPr/>
-          <p:nvPr/>
-        </p:nvSpPr>
-        <p:spPr>
-          <a:xfrm>
-            <a:off x="228600" y="2057400"/>
-            <a:ext cx="3749040" cy="1280160"/>
+              <a:rPr lang="en-US" sz="1200" b="1" dirty="0">
+                <a:solidFill>
+                  <a:srgbClr val="FFFFFF"/>
+                </a:solidFill>
+              </a:rPr>
+              <a:t>🛒 가맹점 / 주문 플로우</a:t>
+            </a:r>
+            <a:endParaRPr lang="en-US" sz="1200" dirty="0"/>
+          </a:p>
+        </p:txBody>
+      </p:sp>
+      <p:sp>
+        <p:nvSpPr>
+          <p:cNvPr id="23" name="Text 21"/>
+          <p:cNvSpPr/>
+          <p:nvPr/>
+        </p:nvSpPr>
+        <p:spPr>
+          <a:xfrm>
+            <a:off x="8257032" y="1554480"/>
+            <a:ext cx="3401568" cy="338328"/>
+          </a:xfrm>
+          <a:prstGeom prst="rect">
+            <a:avLst/>
+          </a:prstGeom>
+          <a:noFill/>
+          <a:ln/>
+        </p:spPr>
+        <p:txBody>
+          <a:bodyPr wrap="square" rtlCol="0" anchor="ctr"/>
+          <a:lstStyle/>
+          <a:p>
+            <a:pPr indent="0" marL="0">
+              <a:buNone/>
+            </a:pPr>
+            <a:r>
+              <a:rPr lang="en-US" sz="1000" dirty="0">
+                <a:solidFill>
+                  <a:srgbClr val="1F1235"/>
+                </a:solidFill>
+              </a:rPr>
+              <a:t>✓  가맹점 목록 (카테고리/전문검색 필터)</a:t>
+            </a:r>
+            <a:endParaRPr lang="en-US" sz="1000" dirty="0"/>
+          </a:p>
+        </p:txBody>
+      </p:sp>
+      <p:sp>
+        <p:nvSpPr>
+          <p:cNvPr id="24" name="Text 22"/>
+          <p:cNvSpPr/>
+          <p:nvPr/>
+        </p:nvSpPr>
+        <p:spPr>
+          <a:xfrm>
+            <a:off x="8257032" y="1901952"/>
+            <a:ext cx="3401568" cy="338328"/>
+          </a:xfrm>
+          <a:prstGeom prst="rect">
+            <a:avLst/>
+          </a:prstGeom>
+          <a:noFill/>
+          <a:ln/>
+        </p:spPr>
+        <p:txBody>
+          <a:bodyPr wrap="square" rtlCol="0" anchor="ctr"/>
+          <a:lstStyle/>
+          <a:p>
+            <a:pPr indent="0" marL="0">
+              <a:buNone/>
+            </a:pPr>
+            <a:r>
+              <a:rPr lang="en-US" sz="1000" dirty="0">
+                <a:solidFill>
+                  <a:srgbClr val="1F1235"/>
+                </a:solidFill>
+              </a:rPr>
+              <a:t>✓  가맹점 상세 + 메뉴 옵션 + 리뷰(이미지)</a:t>
+            </a:r>
+            <a:endParaRPr lang="en-US" sz="1000" dirty="0"/>
+          </a:p>
+        </p:txBody>
+      </p:sp>
+      <p:sp>
+        <p:nvSpPr>
+          <p:cNvPr id="25" name="Text 23"/>
+          <p:cNvSpPr/>
+          <p:nvPr/>
+        </p:nvSpPr>
+        <p:spPr>
+          <a:xfrm>
+            <a:off x="8257032" y="2249424"/>
+            <a:ext cx="3401568" cy="338328"/>
+          </a:xfrm>
+          <a:prstGeom prst="rect">
+            <a:avLst/>
+          </a:prstGeom>
+          <a:noFill/>
+          <a:ln/>
+        </p:spPr>
+        <p:txBody>
+          <a:bodyPr wrap="square" rtlCol="0" anchor="ctr"/>
+          <a:lstStyle/>
+          <a:p>
+            <a:pPr indent="0" marL="0">
+              <a:buNone/>
+            </a:pPr>
+            <a:r>
+              <a:rPr lang="en-US" sz="1000" dirty="0">
+                <a:solidFill>
+                  <a:srgbClr val="1F1235"/>
+                </a:solidFill>
+              </a:rPr>
+              <a:t>✓  쿠폰(3종) + PICK 할인 + 배달 메모</a:t>
+            </a:r>
+            <a:endParaRPr lang="en-US" sz="1000" dirty="0"/>
+          </a:p>
+        </p:txBody>
+      </p:sp>
+      <p:sp>
+        <p:nvSpPr>
+          <p:cNvPr id="26" name="Text 24"/>
+          <p:cNvSpPr/>
+          <p:nvPr/>
+        </p:nvSpPr>
+        <p:spPr>
+          <a:xfrm>
+            <a:off x="8257032" y="2596896"/>
+            <a:ext cx="3401568" cy="338328"/>
+          </a:xfrm>
+          <a:prstGeom prst="rect">
+            <a:avLst/>
+          </a:prstGeom>
+          <a:noFill/>
+          <a:ln/>
+        </p:spPr>
+        <p:txBody>
+          <a:bodyPr wrap="square" rtlCol="0" anchor="ctr"/>
+          <a:lstStyle/>
+          <a:p>
+            <a:pPr indent="0" marL="0">
+              <a:buNone/>
+            </a:pPr>
+            <a:r>
+              <a:rPr lang="en-US" sz="1000" dirty="0">
+                <a:solidFill>
+                  <a:srgbClr val="1F1235"/>
+                </a:solidFill>
+              </a:rPr>
+              <a:t>✓  PICK 결제 + 토스페이먼츠 카드 결제</a:t>
+            </a:r>
+            <a:endParaRPr lang="en-US" sz="1000" dirty="0"/>
+          </a:p>
+        </p:txBody>
+      </p:sp>
+      <p:sp>
+        <p:nvSpPr>
+          <p:cNvPr id="27" name="Text 25"/>
+          <p:cNvSpPr/>
+          <p:nvPr/>
+        </p:nvSpPr>
+        <p:spPr>
+          <a:xfrm>
+            <a:off x="8257032" y="2944368"/>
+            <a:ext cx="3401568" cy="338328"/>
+          </a:xfrm>
+          <a:prstGeom prst="rect">
+            <a:avLst/>
+          </a:prstGeom>
+          <a:noFill/>
+          <a:ln/>
+        </p:spPr>
+        <p:txBody>
+          <a:bodyPr wrap="square" rtlCol="0" anchor="ctr"/>
+          <a:lstStyle/>
+          <a:p>
+            <a:pPr indent="0" marL="0">
+              <a:buNone/>
+            </a:pPr>
+            <a:r>
+              <a:rPr lang="en-US" sz="1000" dirty="0">
+                <a:solidFill>
+                  <a:srgbClr val="1F1235"/>
+                </a:solidFill>
+              </a:rPr>
+              <a:t>✓  주문 생성 → PICK 차감 → 완료 적립</a:t>
+            </a:r>
+            <a:endParaRPr lang="en-US" sz="1000" dirty="0"/>
+          </a:p>
+        </p:txBody>
+      </p:sp>
+      <p:sp>
+        <p:nvSpPr>
+          <p:cNvPr id="28" name="Shape 26"/>
+          <p:cNvSpPr/>
+          <p:nvPr/>
+        </p:nvSpPr>
+        <p:spPr>
+          <a:xfrm>
+            <a:off x="228600" y="3566160"/>
+            <a:ext cx="3749040" cy="2423160"/>
           </a:xfrm>
           <a:prstGeom prst="roundRect">
             <a:avLst>
-              <a:gd name="adj" fmla="val 9286"/>
-            </a:avLst>
-          </a:prstGeom>
-          <a:solidFill>
-            <a:srgbClr val="FFFFFF"/>
-          </a:solidFill>
-          <a:ln w="12700">
-            <a:solidFill>
-              <a:srgbClr val="E9D5FF"/>
-            </a:solidFill>
-            <a:prstDash val="solid"/>
-          </a:ln>
-        </p:spPr>
-      </p:sp>
-      <p:sp>
-        <p:nvSpPr>
-          <p:cNvPr id="9" name="Shape 7"/>
-          <p:cNvSpPr/>
-          <p:nvPr/>
-        </p:nvSpPr>
-        <p:spPr>
-          <a:xfrm>
-            <a:off x="365760" y="2176272"/>
-            <a:ext cx="3474720" cy="329184"/>
-          </a:xfrm>
-          <a:prstGeom prst="roundRect">
-            <a:avLst>
-              <a:gd name="adj" fmla="val 22222"/>
-            </a:avLst>
-          </a:prstGeom>
-          <a:solidFill>
-            <a:srgbClr val="DCFCE7"/>
-          </a:solidFill>
-          <a:ln w="12700">
-            <a:solidFill>
-              <a:srgbClr val="DCFCE7"/>
-            </a:solidFill>
-            <a:prstDash val="solid"/>
-          </a:ln>
-        </p:spPr>
-      </p:sp>
-      <p:sp>
-        <p:nvSpPr>
-          <p:cNvPr id="10" name="Text 8"/>
-          <p:cNvSpPr/>
-          <p:nvPr/>
-        </p:nvSpPr>
-        <p:spPr>
-          <a:xfrm>
-            <a:off x="365760" y="2176272"/>
-            <a:ext cx="3474720" cy="329184"/>
-          </a:xfrm>
-          <a:prstGeom prst="rect">
-            <a:avLst/>
-          </a:prstGeom>
-          <a:noFill/>
-          <a:ln/>
-        </p:spPr>
-        <p:txBody>
-          <a:bodyPr wrap="square" rtlCol="0" anchor="ctr"/>
-          <a:lstStyle/>
-          <a:p>
-            <a:pPr algn="ctr" indent="0" marL="0">
-              <a:buNone/>
-            </a:pPr>
-            <a:r>
-              <a:rPr lang="en-US" sz="1200" b="1" dirty="0">
-                <a:solidFill>
-                  <a:srgbClr val="16A34A"/>
-                </a:solidFill>
-              </a:rPr>
-              <a:t>인증 · 지갑 · 주문 플로우</a:t>
-            </a:r>
-            <a:endParaRPr lang="en-US" sz="1200" dirty="0"/>
-          </a:p>
-        </p:txBody>
-      </p:sp>
-      <p:sp>
-        <p:nvSpPr>
-          <p:cNvPr id="11" name="Text 9"/>
-          <p:cNvSpPr/>
-          <p:nvPr/>
-        </p:nvSpPr>
-        <p:spPr>
-          <a:xfrm>
-            <a:off x="393192" y="2569464"/>
-            <a:ext cx="3419856" cy="694944"/>
-          </a:xfrm>
-          <a:prstGeom prst="rect">
-            <a:avLst/>
-          </a:prstGeom>
-          <a:noFill/>
-          <a:ln/>
-        </p:spPr>
-        <p:txBody>
-          <a:bodyPr wrap="square" rtlCol="0" anchor="ctr"/>
-          <a:lstStyle/>
-          <a:p>
-            <a:pPr indent="0" marL="0">
-              <a:buNone/>
-            </a:pPr>
-            <a:r>
-              <a:rPr lang="en-US" sz="1050" dirty="0">
-                <a:solidFill>
-                  <a:srgbClr val="6B7280"/>
-                </a:solidFill>
-              </a:rPr>
-              <a:t>이메일 + 카카오 소셜 로그인</a:t>
-            </a:r>
-            <a:endParaRPr lang="en-US" sz="1050" dirty="0"/>
-          </a:p>
-          <a:p>
-            <a:pPr indent="0" marL="0">
-              <a:buNone/>
-            </a:pPr>
-            <a:r>
-              <a:rPr lang="en-US" sz="1050" dirty="0">
-                <a:solidFill>
-                  <a:srgbClr val="6B7280"/>
-                </a:solidFill>
-              </a:rPr>
-              <a:t>PICK 토큰 지갑 + 토스페이먼츠</a:t>
-            </a:r>
-            <a:endParaRPr lang="en-US" sz="1050" dirty="0"/>
-          </a:p>
-          <a:p>
-            <a:pPr indent="0" marL="0">
-              <a:buNone/>
-            </a:pPr>
-            <a:r>
-              <a:rPr lang="en-US" sz="1050" dirty="0">
-                <a:solidFill>
-                  <a:srgbClr val="6B7280"/>
-                </a:solidFill>
-              </a:rPr>
-              <a:t>Realtime 주문 추적 완성</a:t>
-            </a:r>
-            <a:endParaRPr lang="en-US" sz="1050" dirty="0"/>
-          </a:p>
-        </p:txBody>
-      </p:sp>
-      <p:sp>
-        <p:nvSpPr>
-          <p:cNvPr id="12" name="Shape 10"/>
-          <p:cNvSpPr/>
-          <p:nvPr/>
-        </p:nvSpPr>
-        <p:spPr>
-          <a:xfrm>
-            <a:off x="4133088" y="2057400"/>
-            <a:ext cx="3749040" cy="1280160"/>
-          </a:xfrm>
-          <a:prstGeom prst="roundRect">
-            <a:avLst>
-              <a:gd name="adj" fmla="val 9286"/>
-            </a:avLst>
-          </a:prstGeom>
-          <a:solidFill>
-            <a:srgbClr val="FFFFFF"/>
-          </a:solidFill>
-          <a:ln w="12700">
-            <a:solidFill>
-              <a:srgbClr val="E9D5FF"/>
-            </a:solidFill>
-            <a:prstDash val="solid"/>
-          </a:ln>
-        </p:spPr>
-      </p:sp>
-      <p:sp>
-        <p:nvSpPr>
-          <p:cNvPr id="13" name="Shape 11"/>
-          <p:cNvSpPr/>
-          <p:nvPr/>
-        </p:nvSpPr>
-        <p:spPr>
-          <a:xfrm>
-            <a:off x="4270248" y="2176272"/>
-            <a:ext cx="3474720" cy="329184"/>
-          </a:xfrm>
-          <a:prstGeom prst="roundRect">
-            <a:avLst>
-              <a:gd name="adj" fmla="val 22222"/>
-            </a:avLst>
-          </a:prstGeom>
-          <a:solidFill>
-            <a:srgbClr val="DCFCE7"/>
-          </a:solidFill>
-          <a:ln w="12700">
-            <a:solidFill>
-              <a:srgbClr val="DCFCE7"/>
-            </a:solidFill>
-            <a:prstDash val="solid"/>
-          </a:ln>
-        </p:spPr>
-      </p:sp>
-      <p:sp>
-        <p:nvSpPr>
-          <p:cNvPr id="14" name="Text 12"/>
-          <p:cNvSpPr/>
-          <p:nvPr/>
-        </p:nvSpPr>
-        <p:spPr>
-          <a:xfrm>
-            <a:off x="4270248" y="2176272"/>
-            <a:ext cx="3474720" cy="329184"/>
-          </a:xfrm>
-          <a:prstGeom prst="rect">
-            <a:avLst/>
-          </a:prstGeom>
-          <a:noFill/>
-          <a:ln/>
-        </p:spPr>
-        <p:txBody>
-          <a:bodyPr wrap="square" rtlCol="0" anchor="ctr"/>
-          <a:lstStyle/>
-          <a:p>
-            <a:pPr algn="ctr" indent="0" marL="0">
-              <a:buNone/>
-            </a:pPr>
-            <a:r>
-              <a:rPr lang="en-US" sz="1200" b="1" dirty="0">
-                <a:solidFill>
-                  <a:srgbClr val="16A34A"/>
-                </a:solidFill>
-              </a:rPr>
-              <a:t>사장님 · 라이더 · 관리자</a:t>
-            </a:r>
-            <a:endParaRPr lang="en-US" sz="1200" dirty="0"/>
-          </a:p>
-        </p:txBody>
-      </p:sp>
-      <p:sp>
-        <p:nvSpPr>
-          <p:cNvPr id="15" name="Text 13"/>
-          <p:cNvSpPr/>
-          <p:nvPr/>
-        </p:nvSpPr>
-        <p:spPr>
-          <a:xfrm>
-            <a:off x="4297680" y="2569464"/>
-            <a:ext cx="3419856" cy="694944"/>
-          </a:xfrm>
-          <a:prstGeom prst="rect">
-            <a:avLst/>
-          </a:prstGeom>
-          <a:noFill/>
-          <a:ln/>
-        </p:spPr>
-        <p:txBody>
-          <a:bodyPr wrap="square" rtlCol="0" anchor="ctr"/>
-          <a:lstStyle/>
-          <a:p>
-            <a:pPr indent="0" marL="0">
-              <a:buNone/>
-            </a:pPr>
-            <a:r>
-              <a:rPr lang="en-US" sz="1050" dirty="0">
-                <a:solidFill>
-                  <a:srgbClr val="6B7280"/>
-                </a:solidFill>
-              </a:rPr>
-              <a:t>사장님 주문/메뉴/정산/통계</a:t>
-            </a:r>
-            <a:endParaRPr lang="en-US" sz="1050" dirty="0"/>
-          </a:p>
-          <a:p>
-            <a:pPr indent="0" marL="0">
-              <a:buNone/>
-            </a:pPr>
-            <a:r>
-              <a:rPr lang="en-US" sz="1050" dirty="0">
-                <a:solidFill>
-                  <a:srgbClr val="6B7280"/>
-                </a:solidFill>
-              </a:rPr>
-              <a:t>라이더 수락/위치공유/수익</a:t>
-            </a:r>
-            <a:endParaRPr lang="en-US" sz="1050" dirty="0"/>
-          </a:p>
-          <a:p>
-            <a:pPr indent="0" marL="0">
-              <a:buNone/>
-            </a:pPr>
-            <a:r>
-              <a:rPr lang="en-US" sz="1050" dirty="0">
-                <a:solidFill>
-                  <a:srgbClr val="6B7280"/>
-                </a:solidFill>
-              </a:rPr>
-              <a:t>관리자 5탭 대시보드</a:t>
-            </a:r>
-            <a:endParaRPr lang="en-US" sz="1050" dirty="0"/>
-          </a:p>
-        </p:txBody>
-      </p:sp>
-      <p:sp>
-        <p:nvSpPr>
-          <p:cNvPr id="16" name="Shape 14"/>
-          <p:cNvSpPr/>
-          <p:nvPr/>
-        </p:nvSpPr>
-        <p:spPr>
-          <a:xfrm>
-            <a:off x="8037576" y="2057400"/>
-            <a:ext cx="3749040" cy="1280160"/>
-          </a:xfrm>
-          <a:prstGeom prst="roundRect">
-            <a:avLst>
-              <a:gd name="adj" fmla="val 9286"/>
-            </a:avLst>
-          </a:prstGeom>
-          <a:solidFill>
-            <a:srgbClr val="FFFFFF"/>
-          </a:solidFill>
-          <a:ln w="12700">
-            <a:solidFill>
-              <a:srgbClr val="E9D5FF"/>
-            </a:solidFill>
-            <a:prstDash val="solid"/>
-          </a:ln>
-        </p:spPr>
-      </p:sp>
-      <p:sp>
-        <p:nvSpPr>
-          <p:cNvPr id="17" name="Shape 15"/>
-          <p:cNvSpPr/>
-          <p:nvPr/>
-        </p:nvSpPr>
-        <p:spPr>
-          <a:xfrm>
-            <a:off x="8174736" y="2176272"/>
-            <a:ext cx="3474720" cy="329184"/>
-          </a:xfrm>
-          <a:prstGeom prst="roundRect">
-            <a:avLst>
-              <a:gd name="adj" fmla="val 22222"/>
-            </a:avLst>
-          </a:prstGeom>
-          <a:solidFill>
-            <a:srgbClr val="DCFCE7"/>
-          </a:solidFill>
-          <a:ln w="12700">
-            <a:solidFill>
-              <a:srgbClr val="DCFCE7"/>
-            </a:solidFill>
-            <a:prstDash val="solid"/>
-          </a:ln>
-        </p:spPr>
-      </p:sp>
-      <p:sp>
-        <p:nvSpPr>
-          <p:cNvPr id="18" name="Text 16"/>
-          <p:cNvSpPr/>
-          <p:nvPr/>
-        </p:nvSpPr>
-        <p:spPr>
-          <a:xfrm>
-            <a:off x="8174736" y="2176272"/>
-            <a:ext cx="3474720" cy="329184"/>
-          </a:xfrm>
-          <a:prstGeom prst="rect">
-            <a:avLst/>
-          </a:prstGeom>
-          <a:noFill/>
-          <a:ln/>
-        </p:spPr>
-        <p:txBody>
-          <a:bodyPr wrap="square" rtlCol="0" anchor="ctr"/>
-          <a:lstStyle/>
-          <a:p>
-            <a:pPr algn="ctr" indent="0" marL="0">
-              <a:buNone/>
-            </a:pPr>
-            <a:r>
-              <a:rPr lang="en-US" sz="1200" b="1" dirty="0">
-                <a:solidFill>
-                  <a:srgbClr val="16A34A"/>
-                </a:solidFill>
-              </a:rPr>
-              <a:t>PWA · 보안 · DB 최적화</a:t>
-            </a:r>
-            <a:endParaRPr lang="en-US" sz="1200" dirty="0"/>
-          </a:p>
-        </p:txBody>
-      </p:sp>
-      <p:sp>
-        <p:nvSpPr>
-          <p:cNvPr id="19" name="Text 17"/>
-          <p:cNvSpPr/>
-          <p:nvPr/>
-        </p:nvSpPr>
-        <p:spPr>
-          <a:xfrm>
-            <a:off x="8202168" y="2569464"/>
-            <a:ext cx="3419856" cy="694944"/>
-          </a:xfrm>
-          <a:prstGeom prst="rect">
-            <a:avLst/>
-          </a:prstGeom>
-          <a:noFill/>
-          <a:ln/>
-        </p:spPr>
-        <p:txBody>
-          <a:bodyPr wrap="square" rtlCol="0" anchor="ctr"/>
-          <a:lstStyle/>
-          <a:p>
-            <a:pPr indent="0" marL="0">
-              <a:buNone/>
-            </a:pPr>
-            <a:r>
-              <a:rPr lang="en-US" sz="1050" dirty="0">
-                <a:solidFill>
-                  <a:srgbClr val="6B7280"/>
-                </a:solidFill>
-              </a:rPr>
-              <a:t>Serwist 오프라인 캐싱</a:t>
-            </a:r>
-            <a:endParaRPr lang="en-US" sz="1050" dirty="0"/>
-          </a:p>
-          <a:p>
-            <a:pPr indent="0" marL="0">
-              <a:buNone/>
-            </a:pPr>
-            <a:r>
-              <a:rPr lang="en-US" sz="1050" dirty="0">
-                <a:solidFill>
-                  <a:srgbClr val="6B7280"/>
-                </a:solidFill>
-              </a:rPr>
-              <a:t>RLS + 인덱스 30개+ + FCM 푸시</a:t>
-            </a:r>
-            <a:endParaRPr lang="en-US" sz="1050" dirty="0"/>
-          </a:p>
-          <a:p>
-            <a:pPr indent="0" marL="0">
-              <a:buNone/>
-            </a:pPr>
-            <a:r>
-              <a:rPr lang="en-US" sz="1050" dirty="0">
-                <a:solidFill>
-                  <a:srgbClr val="6B7280"/>
-                </a:solidFill>
-              </a:rPr>
-              <a:t>Sentry + Storage 정책 완성</a:t>
-            </a:r>
-            <a:endParaRPr lang="en-US" sz="1050" dirty="0"/>
-          </a:p>
-        </p:txBody>
-      </p:sp>
-      <p:sp>
-        <p:nvSpPr>
-          <p:cNvPr id="20" name="Shape 18"/>
-          <p:cNvSpPr/>
-          <p:nvPr/>
-        </p:nvSpPr>
-        <p:spPr>
-          <a:xfrm>
-            <a:off x="365760" y="3429000"/>
-            <a:ext cx="1325880" cy="384048"/>
-          </a:xfrm>
-          <a:prstGeom prst="roundRect">
-            <a:avLst>
-              <a:gd name="adj" fmla="val 23810"/>
+              <a:gd name="adj" fmla="val 5660"/>
             </a:avLst>
           </a:prstGeom>
           <a:solidFill>
@@ -4610,62 +4504,26 @@
       </p:sp>
       <p:sp>
         <p:nvSpPr>
-          <p:cNvPr id="21" name="Text 19"/>
-          <p:cNvSpPr/>
-          <p:nvPr/>
-        </p:nvSpPr>
-        <p:spPr>
-          <a:xfrm>
-            <a:off x="365760" y="3429000"/>
-            <a:ext cx="1325880" cy="384048"/>
-          </a:xfrm>
-          <a:prstGeom prst="rect">
-            <a:avLst/>
-          </a:prstGeom>
-          <a:noFill/>
-          <a:ln/>
-        </p:spPr>
-        <p:txBody>
-          <a:bodyPr wrap="square" rtlCol="0" anchor="ctr"/>
-          <a:lstStyle/>
-          <a:p>
-            <a:pPr algn="ctr" indent="0" marL="0">
-              <a:buNone/>
-            </a:pPr>
-            <a:r>
-              <a:rPr lang="en-US" sz="1100" b="1" dirty="0">
-                <a:solidFill>
-                  <a:srgbClr val="D97706"/>
-                </a:solidFill>
-              </a:rPr>
-              <a:t>🟡 런칭 준비</a:t>
-            </a:r>
-            <a:endParaRPr lang="en-US" sz="1100" dirty="0"/>
-          </a:p>
-        </p:txBody>
-      </p:sp>
-      <p:sp>
-        <p:nvSpPr>
-          <p:cNvPr id="22" name="Shape 20"/>
-          <p:cNvSpPr/>
-          <p:nvPr/>
-        </p:nvSpPr>
-        <p:spPr>
-          <a:xfrm>
-            <a:off x="228600" y="3886200"/>
-            <a:ext cx="3749040" cy="1280160"/>
+          <p:cNvPr id="29" name="Shape 27"/>
+          <p:cNvSpPr/>
+          <p:nvPr/>
+        </p:nvSpPr>
+        <p:spPr>
+          <a:xfrm>
+            <a:off x="338328" y="3675888"/>
+            <a:ext cx="3529584" cy="384048"/>
           </a:xfrm>
           <a:prstGeom prst="roundRect">
             <a:avLst>
-              <a:gd name="adj" fmla="val 9286"/>
+              <a:gd name="adj" fmla="val 19048"/>
             </a:avLst>
           </a:prstGeom>
           <a:solidFill>
-            <a:srgbClr val="FFFFFF"/>
+            <a:srgbClr val="D97706"/>
           </a:solidFill>
           <a:ln w="12700">
             <a:solidFill>
-              <a:srgbClr val="E9D5FF"/>
+              <a:srgbClr val="D97706"/>
             </a:solidFill>
             <a:prstDash val="solid"/>
           </a:ln>
@@ -4673,26 +4531,278 @@
       </p:sp>
       <p:sp>
         <p:nvSpPr>
-          <p:cNvPr id="23" name="Shape 21"/>
-          <p:cNvSpPr/>
-          <p:nvPr/>
-        </p:nvSpPr>
-        <p:spPr>
-          <a:xfrm>
-            <a:off x="365760" y="4005072"/>
-            <a:ext cx="3474720" cy="329184"/>
+          <p:cNvPr id="30" name="Text 28"/>
+          <p:cNvSpPr/>
+          <p:nvPr/>
+        </p:nvSpPr>
+        <p:spPr>
+          <a:xfrm>
+            <a:off x="338328" y="3675888"/>
+            <a:ext cx="3529584" cy="384048"/>
+          </a:xfrm>
+          <a:prstGeom prst="rect">
+            <a:avLst/>
+          </a:prstGeom>
+          <a:noFill/>
+          <a:ln/>
+        </p:spPr>
+        <p:txBody>
+          <a:bodyPr wrap="square" rtlCol="0" anchor="ctr"/>
+          <a:lstStyle/>
+          <a:p>
+            <a:pPr algn="ctr" indent="0" marL="0">
+              <a:buNone/>
+            </a:pPr>
+            <a:r>
+              <a:rPr lang="en-US" sz="1200" b="1" dirty="0">
+                <a:solidFill>
+                  <a:srgbClr val="FFFFFF"/>
+                </a:solidFill>
+              </a:rPr>
+              <a:t>👨‍🍳 사장님 기능</a:t>
+            </a:r>
+            <a:endParaRPr lang="en-US" sz="1200" dirty="0"/>
+          </a:p>
+        </p:txBody>
+      </p:sp>
+      <p:sp>
+        <p:nvSpPr>
+          <p:cNvPr id="31" name="Text 29"/>
+          <p:cNvSpPr/>
+          <p:nvPr/>
+        </p:nvSpPr>
+        <p:spPr>
+          <a:xfrm>
+            <a:off x="393192" y="4160520"/>
+            <a:ext cx="3401568" cy="338328"/>
+          </a:xfrm>
+          <a:prstGeom prst="rect">
+            <a:avLst/>
+          </a:prstGeom>
+          <a:noFill/>
+          <a:ln/>
+        </p:spPr>
+        <p:txBody>
+          <a:bodyPr wrap="square" rtlCol="0" anchor="ctr"/>
+          <a:lstStyle/>
+          <a:p>
+            <a:pPr indent="0" marL="0">
+              <a:buNone/>
+            </a:pPr>
+            <a:r>
+              <a:rPr lang="en-US" sz="1000" dirty="0">
+                <a:solidFill>
+                  <a:srgbClr val="1F1235"/>
+                </a:solidFill>
+              </a:rPr>
+              <a:t>✓  가게 등록·설정·쿠폰 관리·주간 영업시간</a:t>
+            </a:r>
+            <a:endParaRPr lang="en-US" sz="1000" dirty="0"/>
+          </a:p>
+        </p:txBody>
+      </p:sp>
+      <p:sp>
+        <p:nvSpPr>
+          <p:cNvPr id="32" name="Text 30"/>
+          <p:cNvSpPr/>
+          <p:nvPr/>
+        </p:nvSpPr>
+        <p:spPr>
+          <a:xfrm>
+            <a:off x="393192" y="4507992"/>
+            <a:ext cx="3401568" cy="338328"/>
+          </a:xfrm>
+          <a:prstGeom prst="rect">
+            <a:avLst/>
+          </a:prstGeom>
+          <a:noFill/>
+          <a:ln/>
+        </p:spPr>
+        <p:txBody>
+          <a:bodyPr wrap="square" rtlCol="0" anchor="ctr"/>
+          <a:lstStyle/>
+          <a:p>
+            <a:pPr indent="0" marL="0">
+              <a:buNone/>
+            </a:pPr>
+            <a:r>
+              <a:rPr lang="en-US" sz="1000" dirty="0">
+                <a:solidFill>
+                  <a:srgbClr val="1F1235"/>
+                </a:solidFill>
+              </a:rPr>
+              <a:t>✓  주문 관리: 수락 ETA + 거절 확인 팝업</a:t>
+            </a:r>
+            <a:endParaRPr lang="en-US" sz="1000" dirty="0"/>
+          </a:p>
+        </p:txBody>
+      </p:sp>
+      <p:sp>
+        <p:nvSpPr>
+          <p:cNvPr id="33" name="Text 31"/>
+          <p:cNvSpPr/>
+          <p:nvPr/>
+        </p:nvSpPr>
+        <p:spPr>
+          <a:xfrm>
+            <a:off x="393192" y="4855464"/>
+            <a:ext cx="3401568" cy="338328"/>
+          </a:xfrm>
+          <a:prstGeom prst="rect">
+            <a:avLst/>
+          </a:prstGeom>
+          <a:noFill/>
+          <a:ln/>
+        </p:spPr>
+        <p:txBody>
+          <a:bodyPr wrap="square" rtlCol="0" anchor="ctr"/>
+          <a:lstStyle/>
+          <a:p>
+            <a:pPr indent="0" marL="0">
+              <a:buNone/>
+            </a:pPr>
+            <a:r>
+              <a:rPr lang="en-US" sz="1000" dirty="0">
+                <a:solidFill>
+                  <a:srgbClr val="1F1235"/>
+                </a:solidFill>
+              </a:rPr>
+              <a:t>✓  메뉴 옵션 그룹/옵션 CRUD UI</a:t>
+            </a:r>
+            <a:endParaRPr lang="en-US" sz="1000" dirty="0"/>
+          </a:p>
+        </p:txBody>
+      </p:sp>
+      <p:sp>
+        <p:nvSpPr>
+          <p:cNvPr id="34" name="Text 32"/>
+          <p:cNvSpPr/>
+          <p:nvPr/>
+        </p:nvSpPr>
+        <p:spPr>
+          <a:xfrm>
+            <a:off x="393192" y="5202936"/>
+            <a:ext cx="3401568" cy="338328"/>
+          </a:xfrm>
+          <a:prstGeom prst="rect">
+            <a:avLst/>
+          </a:prstGeom>
+          <a:noFill/>
+          <a:ln/>
+        </p:spPr>
+        <p:txBody>
+          <a:bodyPr wrap="square" rtlCol="0" anchor="ctr"/>
+          <a:lstStyle/>
+          <a:p>
+            <a:pPr indent="0" marL="0">
+              <a:buNone/>
+            </a:pPr>
+            <a:r>
+              <a:rPr lang="en-US" sz="1000" dirty="0">
+                <a:solidFill>
+                  <a:srgbClr val="1F1235"/>
+                </a:solidFill>
+              </a:rPr>
+              <a:t>✓  매출 통계 대시보드 + 주간 차트</a:t>
+            </a:r>
+            <a:endParaRPr lang="en-US" sz="1000" dirty="0"/>
+          </a:p>
+        </p:txBody>
+      </p:sp>
+      <p:sp>
+        <p:nvSpPr>
+          <p:cNvPr id="35" name="Text 33"/>
+          <p:cNvSpPr/>
+          <p:nvPr/>
+        </p:nvSpPr>
+        <p:spPr>
+          <a:xfrm>
+            <a:off x="393192" y="5550408"/>
+            <a:ext cx="3401568" cy="338328"/>
+          </a:xfrm>
+          <a:prstGeom prst="rect">
+            <a:avLst/>
+          </a:prstGeom>
+          <a:noFill/>
+          <a:ln/>
+        </p:spPr>
+        <p:txBody>
+          <a:bodyPr wrap="square" rtlCol="0" anchor="ctr"/>
+          <a:lstStyle/>
+          <a:p>
+            <a:pPr indent="0" marL="0">
+              <a:buNone/>
+            </a:pPr>
+            <a:r>
+              <a:rPr lang="en-US" sz="1000" dirty="0">
+                <a:solidFill>
+                  <a:srgbClr val="1F1235"/>
+                </a:solidFill>
+              </a:rPr>
+              <a:t>✓  신규주문 TTS 알림 '픽픽 주문이 들어왔습니다'</a:t>
+            </a:r>
+            <a:endParaRPr lang="en-US" sz="1000" dirty="0"/>
+          </a:p>
+        </p:txBody>
+      </p:sp>
+      <p:sp>
+        <p:nvSpPr>
+          <p:cNvPr id="36" name="Text 34"/>
+          <p:cNvSpPr/>
+          <p:nvPr/>
+        </p:nvSpPr>
+        <p:spPr>
+          <a:xfrm>
+            <a:off x="393192" y="5897880"/>
+            <a:ext cx="3401568" cy="338328"/>
+          </a:xfrm>
+          <a:prstGeom prst="rect">
+            <a:avLst/>
+          </a:prstGeom>
+          <a:noFill/>
+          <a:ln/>
+        </p:spPr>
+        <p:txBody>
+          <a:bodyPr wrap="square" rtlCol="0" anchor="ctr"/>
+          <a:lstStyle/>
+          <a:p>
+            <a:pPr indent="0" marL="0">
+              <a:buNone/>
+            </a:pPr>
+            <a:r>
+              <a:rPr lang="en-US" sz="1000" dirty="0">
+                <a:solidFill>
+                  <a:srgbClr val="1F1235"/>
+                </a:solidFill>
+              </a:rPr>
+              <a:t>✓  조리 중 라이더 호출 버튼 분리</a:t>
+            </a:r>
+            <a:endParaRPr lang="en-US" sz="1000" dirty="0"/>
+          </a:p>
+        </p:txBody>
+      </p:sp>
+      <p:sp>
+        <p:nvSpPr>
+          <p:cNvPr id="37" name="Shape 35"/>
+          <p:cNvSpPr/>
+          <p:nvPr/>
+        </p:nvSpPr>
+        <p:spPr>
+          <a:xfrm>
+            <a:off x="4160520" y="3566160"/>
+            <a:ext cx="3749040" cy="2423160"/>
           </a:xfrm>
           <a:prstGeom prst="roundRect">
             <a:avLst>
-              <a:gd name="adj" fmla="val 22222"/>
+              <a:gd name="adj" fmla="val 5660"/>
             </a:avLst>
           </a:prstGeom>
           <a:solidFill>
-            <a:srgbClr val="FFFBEB"/>
+            <a:srgbClr val="ECFEFF"/>
           </a:solidFill>
           <a:ln w="12700">
             <a:solidFill>
-              <a:srgbClr val="FFFBEB"/>
+              <a:srgbClr val="0891B2"/>
             </a:solidFill>
             <a:prstDash val="solid"/>
           </a:ln>
@@ -4700,126 +4810,26 @@
       </p:sp>
       <p:sp>
         <p:nvSpPr>
-          <p:cNvPr id="24" name="Text 22"/>
-          <p:cNvSpPr/>
-          <p:nvPr/>
-        </p:nvSpPr>
-        <p:spPr>
-          <a:xfrm>
-            <a:off x="365760" y="4005072"/>
-            <a:ext cx="3474720" cy="329184"/>
-          </a:xfrm>
-          <a:prstGeom prst="rect">
-            <a:avLst/>
-          </a:prstGeom>
-          <a:noFill/>
-          <a:ln/>
-        </p:spPr>
-        <p:txBody>
-          <a:bodyPr wrap="square" rtlCol="0" anchor="ctr"/>
-          <a:lstStyle/>
-          <a:p>
-            <a:pPr algn="ctr" indent="0" marL="0">
-              <a:buNone/>
-            </a:pPr>
-            <a:r>
-              <a:rPr lang="en-US" sz="1200" b="1" dirty="0">
-                <a:solidFill>
-                  <a:srgbClr val="D97706"/>
-                </a:solidFill>
-              </a:rPr>
-              <a:t>Firebase 환경변수 ✅</a:t>
-            </a:r>
-            <a:endParaRPr lang="en-US" sz="1200" dirty="0"/>
-          </a:p>
-        </p:txBody>
-      </p:sp>
-      <p:sp>
-        <p:nvSpPr>
-          <p:cNvPr id="25" name="Text 23"/>
-          <p:cNvSpPr/>
-          <p:nvPr/>
-        </p:nvSpPr>
-        <p:spPr>
-          <a:xfrm>
-            <a:off x="393192" y="4398264"/>
-            <a:ext cx="3419856" cy="694944"/>
-          </a:xfrm>
-          <a:prstGeom prst="rect">
-            <a:avLst/>
-          </a:prstGeom>
-          <a:noFill/>
-          <a:ln/>
-        </p:spPr>
-        <p:txBody>
-          <a:bodyPr wrap="square" rtlCol="0" anchor="ctr"/>
-          <a:lstStyle/>
-          <a:p>
-            <a:pPr indent="0" marL="0">
-              <a:buNone/>
-            </a:pPr>
-            <a:r>
-              <a:rPr lang="en-US" sz="1050" dirty="0">
-                <a:solidFill>
-                  <a:srgbClr val="6B7280"/>
-                </a:solidFill>
-              </a:rPr>
-              <a:t>API Key ~ App ID 완성</a:t>
-            </a:r>
-            <a:endParaRPr lang="en-US" sz="1050" dirty="0"/>
-          </a:p>
-          <a:p>
-            <a:pPr indent="0" marL="0">
-              <a:buNone/>
-            </a:pPr>
-            <a:r>
-              <a:rPr lang="en-US" sz="1050" dirty="0">
-                <a:solidFill>
-                  <a:srgbClr val="6B7280"/>
-                </a:solidFill>
-              </a:rPr>
-              <a:t>VAPID 키 완성</a:t>
-            </a:r>
-            <a:endParaRPr lang="en-US" sz="1050" dirty="0"/>
-          </a:p>
-          <a:p>
-            <a:pPr indent="0" marL="0">
-              <a:buNone/>
-            </a:pPr>
-            <a:r>
-              <a:rPr lang="en-US" sz="1050" dirty="0">
-                <a:solidFill>
-                  <a:srgbClr val="6B7280"/>
-                </a:solidFill>
-              </a:rPr>
-              <a:t>Admin SDK JSON 완성</a:t>
-            </a:r>
-            <a:endParaRPr lang="en-US" sz="1050" dirty="0"/>
-          </a:p>
-        </p:txBody>
-      </p:sp>
-      <p:sp>
-        <p:nvSpPr>
-          <p:cNvPr id="26" name="Shape 24"/>
-          <p:cNvSpPr/>
-          <p:nvPr/>
-        </p:nvSpPr>
-        <p:spPr>
-          <a:xfrm>
-            <a:off x="4133088" y="3886200"/>
-            <a:ext cx="3749040" cy="1280160"/>
+          <p:cNvPr id="38" name="Shape 36"/>
+          <p:cNvSpPr/>
+          <p:nvPr/>
+        </p:nvSpPr>
+        <p:spPr>
+          <a:xfrm>
+            <a:off x="4270248" y="3675888"/>
+            <a:ext cx="3529584" cy="384048"/>
           </a:xfrm>
           <a:prstGeom prst="roundRect">
             <a:avLst>
-              <a:gd name="adj" fmla="val 9286"/>
+              <a:gd name="adj" fmla="val 19048"/>
             </a:avLst>
           </a:prstGeom>
           <a:solidFill>
-            <a:srgbClr val="FFFFFF"/>
+            <a:srgbClr val="0891B2"/>
           </a:solidFill>
           <a:ln w="12700">
             <a:solidFill>
-              <a:srgbClr val="E9D5FF"/>
+              <a:srgbClr val="0891B2"/>
             </a:solidFill>
             <a:prstDash val="solid"/>
           </a:ln>
@@ -4827,299 +4837,234 @@
       </p:sp>
       <p:sp>
         <p:nvSpPr>
-          <p:cNvPr id="27" name="Shape 25"/>
-          <p:cNvSpPr/>
-          <p:nvPr/>
-        </p:nvSpPr>
-        <p:spPr>
-          <a:xfrm>
-            <a:off x="4270248" y="4005072"/>
-            <a:ext cx="3474720" cy="329184"/>
+          <p:cNvPr id="39" name="Text 37"/>
+          <p:cNvSpPr/>
+          <p:nvPr/>
+        </p:nvSpPr>
+        <p:spPr>
+          <a:xfrm>
+            <a:off x="4270248" y="3675888"/>
+            <a:ext cx="3529584" cy="384048"/>
+          </a:xfrm>
+          <a:prstGeom prst="rect">
+            <a:avLst/>
+          </a:prstGeom>
+          <a:noFill/>
+          <a:ln/>
+        </p:spPr>
+        <p:txBody>
+          <a:bodyPr wrap="square" rtlCol="0" anchor="ctr"/>
+          <a:lstStyle/>
+          <a:p>
+            <a:pPr algn="ctr" indent="0" marL="0">
+              <a:buNone/>
+            </a:pPr>
+            <a:r>
+              <a:rPr lang="en-US" sz="1200" b="1" dirty="0">
+                <a:solidFill>
+                  <a:srgbClr val="FFFFFF"/>
+                </a:solidFill>
+              </a:rPr>
+              <a:t>🛵 라이더 / PWA / 인프라</a:t>
+            </a:r>
+            <a:endParaRPr lang="en-US" sz="1200" dirty="0"/>
+          </a:p>
+        </p:txBody>
+      </p:sp>
+      <p:sp>
+        <p:nvSpPr>
+          <p:cNvPr id="40" name="Text 38"/>
+          <p:cNvSpPr/>
+          <p:nvPr/>
+        </p:nvSpPr>
+        <p:spPr>
+          <a:xfrm>
+            <a:off x="4325112" y="4160520"/>
+            <a:ext cx="3401568" cy="338328"/>
+          </a:xfrm>
+          <a:prstGeom prst="rect">
+            <a:avLst/>
+          </a:prstGeom>
+          <a:noFill/>
+          <a:ln/>
+        </p:spPr>
+        <p:txBody>
+          <a:bodyPr wrap="square" rtlCol="0" anchor="ctr"/>
+          <a:lstStyle/>
+          <a:p>
+            <a:pPr indent="0" marL="0">
+              <a:buNone/>
+            </a:pPr>
+            <a:r>
+              <a:rPr lang="en-US" sz="1000" dirty="0">
+                <a:solidFill>
+                  <a:srgbClr val="1F1235"/>
+                </a:solidFill>
+              </a:rPr>
+              <a:t>✓  배달 수락 → PICK 자동 지급 + 위치 공유</a:t>
+            </a:r>
+            <a:endParaRPr lang="en-US" sz="1000" dirty="0"/>
+          </a:p>
+        </p:txBody>
+      </p:sp>
+      <p:sp>
+        <p:nvSpPr>
+          <p:cNvPr id="41" name="Text 39"/>
+          <p:cNvSpPr/>
+          <p:nvPr/>
+        </p:nvSpPr>
+        <p:spPr>
+          <a:xfrm>
+            <a:off x="4325112" y="4507992"/>
+            <a:ext cx="3401568" cy="338328"/>
+          </a:xfrm>
+          <a:prstGeom prst="rect">
+            <a:avLst/>
+          </a:prstGeom>
+          <a:noFill/>
+          <a:ln/>
+        </p:spPr>
+        <p:txBody>
+          <a:bodyPr wrap="square" rtlCol="0" anchor="ctr"/>
+          <a:lstStyle/>
+          <a:p>
+            <a:pPr indent="0" marL="0">
+              <a:buNone/>
+            </a:pPr>
+            <a:r>
+              <a:rPr lang="en-US" sz="1000" dirty="0">
+                <a:solidFill>
+                  <a:srgbClr val="1F1235"/>
+                </a:solidFill>
+              </a:rPr>
+              <a:t>✓  라이더 TTS 알림 '픽픽 라이더 요청이 왔습니다'</a:t>
+            </a:r>
+            <a:endParaRPr lang="en-US" sz="1000" dirty="0"/>
+          </a:p>
+        </p:txBody>
+      </p:sp>
+      <p:sp>
+        <p:nvSpPr>
+          <p:cNvPr id="42" name="Text 40"/>
+          <p:cNvSpPr/>
+          <p:nvPr/>
+        </p:nvSpPr>
+        <p:spPr>
+          <a:xfrm>
+            <a:off x="4325112" y="4855464"/>
+            <a:ext cx="3401568" cy="338328"/>
+          </a:xfrm>
+          <a:prstGeom prst="rect">
+            <a:avLst/>
+          </a:prstGeom>
+          <a:noFill/>
+          <a:ln/>
+        </p:spPr>
+        <p:txBody>
+          <a:bodyPr wrap="square" rtlCol="0" anchor="ctr"/>
+          <a:lstStyle/>
+          <a:p>
+            <a:pPr indent="0" marL="0">
+              <a:buNone/>
+            </a:pPr>
+            <a:r>
+              <a:rPr lang="en-US" sz="1000" dirty="0">
+                <a:solidFill>
+                  <a:srgbClr val="1F1235"/>
+                </a:solidFill>
+              </a:rPr>
+              <a:t>✓  FCM 푸시 알림 + 관리자 일괄 발송</a:t>
+            </a:r>
+            <a:endParaRPr lang="en-US" sz="1000" dirty="0"/>
+          </a:p>
+        </p:txBody>
+      </p:sp>
+      <p:sp>
+        <p:nvSpPr>
+          <p:cNvPr id="43" name="Text 41"/>
+          <p:cNvSpPr/>
+          <p:nvPr/>
+        </p:nvSpPr>
+        <p:spPr>
+          <a:xfrm>
+            <a:off x="4325112" y="5202936"/>
+            <a:ext cx="3401568" cy="338328"/>
+          </a:xfrm>
+          <a:prstGeom prst="rect">
+            <a:avLst/>
+          </a:prstGeom>
+          <a:noFill/>
+          <a:ln/>
+        </p:spPr>
+        <p:txBody>
+          <a:bodyPr wrap="square" rtlCol="0" anchor="ctr"/>
+          <a:lstStyle/>
+          <a:p>
+            <a:pPr indent="0" marL="0">
+              <a:buNone/>
+            </a:pPr>
+            <a:r>
+              <a:rPr lang="en-US" sz="1000" dirty="0">
+                <a:solidFill>
+                  <a:srgbClr val="1F1235"/>
+                </a:solidFill>
+              </a:rPr>
+              <a:t>✓  PWA 오프라인 캐싱 (Serwist)</a:t>
+            </a:r>
+            <a:endParaRPr lang="en-US" sz="1000" dirty="0"/>
+          </a:p>
+        </p:txBody>
+      </p:sp>
+      <p:sp>
+        <p:nvSpPr>
+          <p:cNvPr id="44" name="Text 42"/>
+          <p:cNvSpPr/>
+          <p:nvPr/>
+        </p:nvSpPr>
+        <p:spPr>
+          <a:xfrm>
+            <a:off x="4325112" y="5550408"/>
+            <a:ext cx="3401568" cy="338328"/>
+          </a:xfrm>
+          <a:prstGeom prst="rect">
+            <a:avLst/>
+          </a:prstGeom>
+          <a:noFill/>
+          <a:ln/>
+        </p:spPr>
+        <p:txBody>
+          <a:bodyPr wrap="square" rtlCol="0" anchor="ctr"/>
+          <a:lstStyle/>
+          <a:p>
+            <a:pPr indent="0" marL="0">
+              <a:buNone/>
+            </a:pPr>
+            <a:r>
+              <a:rPr lang="en-US" sz="1000" dirty="0">
+                <a:solidFill>
+                  <a:srgbClr val="1F1235"/>
+                </a:solidFill>
+              </a:rPr>
+              <a:t>✓  Sentry 모니터링 + 가맹점 광고 시스템</a:t>
+            </a:r>
+            <a:endParaRPr lang="en-US" sz="1000" dirty="0"/>
+          </a:p>
+        </p:txBody>
+      </p:sp>
+      <p:sp>
+        <p:nvSpPr>
+          <p:cNvPr id="45" name="Shape 43"/>
+          <p:cNvSpPr/>
+          <p:nvPr/>
+        </p:nvSpPr>
+        <p:spPr>
+          <a:xfrm>
+            <a:off x="8092440" y="3566160"/>
+            <a:ext cx="3749040" cy="2423160"/>
           </a:xfrm>
           <a:prstGeom prst="roundRect">
             <a:avLst>
-              <a:gd name="adj" fmla="val 22222"/>
-            </a:avLst>
-          </a:prstGeom>
-          <a:solidFill>
-            <a:srgbClr val="FFFBEB"/>
-          </a:solidFill>
-          <a:ln w="12700">
-            <a:solidFill>
-              <a:srgbClr val="FFFBEB"/>
-            </a:solidFill>
-            <a:prstDash val="solid"/>
-          </a:ln>
-        </p:spPr>
-      </p:sp>
-      <p:sp>
-        <p:nvSpPr>
-          <p:cNvPr id="28" name="Text 26"/>
-          <p:cNvSpPr/>
-          <p:nvPr/>
-        </p:nvSpPr>
-        <p:spPr>
-          <a:xfrm>
-            <a:off x="4270248" y="4005072"/>
-            <a:ext cx="3474720" cy="329184"/>
-          </a:xfrm>
-          <a:prstGeom prst="rect">
-            <a:avLst/>
-          </a:prstGeom>
-          <a:noFill/>
-          <a:ln/>
-        </p:spPr>
-        <p:txBody>
-          <a:bodyPr wrap="square" rtlCol="0" anchor="ctr"/>
-          <a:lstStyle/>
-          <a:p>
-            <a:pPr algn="ctr" indent="0" marL="0">
-              <a:buNone/>
-            </a:pPr>
-            <a:r>
-              <a:rPr lang="en-US" sz="1200" b="1" dirty="0">
-                <a:solidFill>
-                  <a:srgbClr val="D97706"/>
-                </a:solidFill>
-              </a:rPr>
-              <a:t>카카오 API 키 확인</a:t>
-            </a:r>
-            <a:endParaRPr lang="en-US" sz="1200" dirty="0"/>
-          </a:p>
-        </p:txBody>
-      </p:sp>
-      <p:sp>
-        <p:nvSpPr>
-          <p:cNvPr id="29" name="Text 27"/>
-          <p:cNvSpPr/>
-          <p:nvPr/>
-        </p:nvSpPr>
-        <p:spPr>
-          <a:xfrm>
-            <a:off x="4297680" y="4398264"/>
-            <a:ext cx="3419856" cy="694944"/>
-          </a:xfrm>
-          <a:prstGeom prst="rect">
-            <a:avLst/>
-          </a:prstGeom>
-          <a:noFill/>
-          <a:ln/>
-        </p:spPr>
-        <p:txBody>
-          <a:bodyPr wrap="square" rtlCol="0" anchor="ctr"/>
-          <a:lstStyle/>
-          <a:p>
-            <a:pPr indent="0" marL="0">
-              <a:buNone/>
-            </a:pPr>
-            <a:r>
-              <a:rPr lang="en-US" sz="1050" dirty="0">
-                <a:solidFill>
-                  <a:srgbClr val="6B7280"/>
-                </a:solidFill>
-              </a:rPr>
-              <a:t>앱 키 → JavaScript 키 재확인</a:t>
-            </a:r>
-            <a:endParaRPr lang="en-US" sz="1050" dirty="0"/>
-          </a:p>
-          <a:p>
-            <a:pPr indent="0" marL="0">
-              <a:buNone/>
-            </a:pPr>
-            <a:r>
-              <a:rPr lang="en-US" sz="1050" dirty="0">
-                <a:solidFill>
-                  <a:srgbClr val="6B7280"/>
-                </a:solidFill>
-              </a:rPr>
-              <a:t>NEXT_PUBLIC_KAKAO_MAP_KEY 검증</a:t>
-            </a:r>
-            <a:endParaRPr lang="en-US" sz="1050" dirty="0"/>
-          </a:p>
-          <a:p>
-            <a:pPr indent="0" marL="0">
-              <a:buNone/>
-            </a:pPr>
-            <a:r>
-              <a:rPr lang="en-US" sz="1050" dirty="0">
-                <a:solidFill>
-                  <a:srgbClr val="6B7280"/>
-                </a:solidFill>
-              </a:rPr>
-              <a:t>Kakao Map 지도 표시 테스트</a:t>
-            </a:r>
-            <a:endParaRPr lang="en-US" sz="1050" dirty="0"/>
-          </a:p>
-        </p:txBody>
-      </p:sp>
-      <p:sp>
-        <p:nvSpPr>
-          <p:cNvPr id="30" name="Shape 28"/>
-          <p:cNvSpPr/>
-          <p:nvPr/>
-        </p:nvSpPr>
-        <p:spPr>
-          <a:xfrm>
-            <a:off x="8037576" y="3886200"/>
-            <a:ext cx="3749040" cy="1280160"/>
-          </a:xfrm>
-          <a:prstGeom prst="roundRect">
-            <a:avLst>
-              <a:gd name="adj" fmla="val 9286"/>
-            </a:avLst>
-          </a:prstGeom>
-          <a:solidFill>
-            <a:srgbClr val="FFFFFF"/>
-          </a:solidFill>
-          <a:ln w="12700">
-            <a:solidFill>
-              <a:srgbClr val="E9D5FF"/>
-            </a:solidFill>
-            <a:prstDash val="solid"/>
-          </a:ln>
-        </p:spPr>
-      </p:sp>
-      <p:sp>
-        <p:nvSpPr>
-          <p:cNvPr id="31" name="Shape 29"/>
-          <p:cNvSpPr/>
-          <p:nvPr/>
-        </p:nvSpPr>
-        <p:spPr>
-          <a:xfrm>
-            <a:off x="8174736" y="4005072"/>
-            <a:ext cx="3474720" cy="329184"/>
-          </a:xfrm>
-          <a:prstGeom prst="roundRect">
-            <a:avLst>
-              <a:gd name="adj" fmla="val 22222"/>
-            </a:avLst>
-          </a:prstGeom>
-          <a:solidFill>
-            <a:srgbClr val="FFFBEB"/>
-          </a:solidFill>
-          <a:ln w="12700">
-            <a:solidFill>
-              <a:srgbClr val="FFFBEB"/>
-            </a:solidFill>
-            <a:prstDash val="solid"/>
-          </a:ln>
-        </p:spPr>
-      </p:sp>
-      <p:sp>
-        <p:nvSpPr>
-          <p:cNvPr id="32" name="Text 30"/>
-          <p:cNvSpPr/>
-          <p:nvPr/>
-        </p:nvSpPr>
-        <p:spPr>
-          <a:xfrm>
-            <a:off x="8174736" y="4005072"/>
-            <a:ext cx="3474720" cy="329184"/>
-          </a:xfrm>
-          <a:prstGeom prst="rect">
-            <a:avLst/>
-          </a:prstGeom>
-          <a:noFill/>
-          <a:ln/>
-        </p:spPr>
-        <p:txBody>
-          <a:bodyPr wrap="square" rtlCol="0" anchor="ctr"/>
-          <a:lstStyle/>
-          <a:p>
-            <a:pPr algn="ctr" indent="0" marL="0">
-              <a:buNone/>
-            </a:pPr>
-            <a:r>
-              <a:rPr lang="en-US" sz="1200" b="1" dirty="0">
-                <a:solidFill>
-                  <a:srgbClr val="D97706"/>
-                </a:solidFill>
-              </a:rPr>
-              <a:t>샘플 데이터 + 배포</a:t>
-            </a:r>
-            <a:endParaRPr lang="en-US" sz="1200" dirty="0"/>
-          </a:p>
-        </p:txBody>
-      </p:sp>
-      <p:sp>
-        <p:nvSpPr>
-          <p:cNvPr id="33" name="Text 31"/>
-          <p:cNvSpPr/>
-          <p:nvPr/>
-        </p:nvSpPr>
-        <p:spPr>
-          <a:xfrm>
-            <a:off x="8202168" y="4398264"/>
-            <a:ext cx="3419856" cy="694944"/>
-          </a:xfrm>
-          <a:prstGeom prst="rect">
-            <a:avLst/>
-          </a:prstGeom>
-          <a:noFill/>
-          <a:ln/>
-        </p:spPr>
-        <p:txBody>
-          <a:bodyPr wrap="square" rtlCol="0" anchor="ctr"/>
-          <a:lstStyle/>
-          <a:p>
-            <a:pPr indent="0" marL="0">
-              <a:buNone/>
-            </a:pPr>
-            <a:r>
-              <a:rPr lang="en-US" sz="1050" dirty="0">
-                <a:solidFill>
-                  <a:srgbClr val="6B7280"/>
-                </a:solidFill>
-              </a:rPr>
-              <a:t>실 가맹점 + 메뉴 데이터 추가</a:t>
-            </a:r>
-            <a:endParaRPr lang="en-US" sz="1050" dirty="0"/>
-          </a:p>
-          <a:p>
-            <a:pPr indent="0" marL="0">
-              <a:buNone/>
-            </a:pPr>
-            <a:r>
-              <a:rPr lang="en-US" sz="1050" dirty="0">
-                <a:solidFill>
-                  <a:srgbClr val="6B7280"/>
-                </a:solidFill>
-              </a:rPr>
-              <a:t>관리자 계정 role='admin' 설정</a:t>
-            </a:r>
-            <a:endParaRPr lang="en-US" sz="1050" dirty="0"/>
-          </a:p>
-          <a:p>
-            <a:pPr indent="0" marL="0">
-              <a:buNone/>
-            </a:pPr>
-            <a:r>
-              <a:rPr lang="en-US" sz="1050" dirty="0">
-                <a:solidFill>
-                  <a:srgbClr val="6B7280"/>
-                </a:solidFill>
-              </a:rPr>
-              <a:t>Vercel 프로덕션 배포 확인</a:t>
-            </a:r>
-            <a:endParaRPr lang="en-US" sz="1050" dirty="0"/>
-          </a:p>
-        </p:txBody>
-      </p:sp>
-      <p:sp>
-        <p:nvSpPr>
-          <p:cNvPr id="34" name="Shape 32"/>
-          <p:cNvSpPr/>
-          <p:nvPr/>
-        </p:nvSpPr>
-        <p:spPr>
-          <a:xfrm>
-            <a:off x="365760" y="5257800"/>
-            <a:ext cx="1325880" cy="384048"/>
-          </a:xfrm>
-          <a:prstGeom prst="roundRect">
-            <a:avLst>
-              <a:gd name="adj" fmla="val 23810"/>
+              <a:gd name="adj" fmla="val 5660"/>
             </a:avLst>
           </a:prstGeom>
           <a:solidFill>
@@ -5135,62 +5080,26 @@
       </p:sp>
       <p:sp>
         <p:nvSpPr>
-          <p:cNvPr id="35" name="Text 33"/>
-          <p:cNvSpPr/>
-          <p:nvPr/>
-        </p:nvSpPr>
-        <p:spPr>
-          <a:xfrm>
-            <a:off x="365760" y="5257800"/>
-            <a:ext cx="1325880" cy="384048"/>
-          </a:xfrm>
-          <a:prstGeom prst="rect">
-            <a:avLst/>
-          </a:prstGeom>
-          <a:noFill/>
-          <a:ln/>
-        </p:spPr>
-        <p:txBody>
-          <a:bodyPr wrap="square" rtlCol="0" anchor="ctr"/>
-          <a:lstStyle/>
-          <a:p>
-            <a:pPr algn="ctr" indent="0" marL="0">
-              <a:buNone/>
-            </a:pPr>
-            <a:r>
-              <a:rPr lang="en-US" sz="1100" b="1" dirty="0">
-                <a:solidFill>
-                  <a:srgbClr val="EA580C"/>
-                </a:solidFill>
-              </a:rPr>
-              <a:t>⏳ Phase 4</a:t>
-            </a:r>
-            <a:endParaRPr lang="en-US" sz="1100" dirty="0"/>
-          </a:p>
-        </p:txBody>
-      </p:sp>
-      <p:sp>
-        <p:nvSpPr>
-          <p:cNvPr id="36" name="Shape 34"/>
-          <p:cNvSpPr/>
-          <p:nvPr/>
-        </p:nvSpPr>
-        <p:spPr>
-          <a:xfrm>
-            <a:off x="228600" y="5715000"/>
-            <a:ext cx="3749040" cy="1280160"/>
+          <p:cNvPr id="46" name="Shape 44"/>
+          <p:cNvSpPr/>
+          <p:nvPr/>
+        </p:nvSpPr>
+        <p:spPr>
+          <a:xfrm>
+            <a:off x="8202168" y="3675888"/>
+            <a:ext cx="3529584" cy="384048"/>
           </a:xfrm>
           <a:prstGeom prst="roundRect">
             <a:avLst>
-              <a:gd name="adj" fmla="val 9286"/>
+              <a:gd name="adj" fmla="val 19048"/>
             </a:avLst>
           </a:prstGeom>
           <a:solidFill>
-            <a:srgbClr val="FFFFFF"/>
+            <a:srgbClr val="EA580C"/>
           </a:solidFill>
           <a:ln w="12700">
             <a:solidFill>
-              <a:srgbClr val="E9D5FF"/>
+              <a:srgbClr val="EA580C"/>
             </a:solidFill>
             <a:prstDash val="solid"/>
           </a:ln>
@@ -5198,41 +5107,14 @@
       </p:sp>
       <p:sp>
         <p:nvSpPr>
-          <p:cNvPr id="37" name="Shape 35"/>
-          <p:cNvSpPr/>
-          <p:nvPr/>
-        </p:nvSpPr>
-        <p:spPr>
-          <a:xfrm>
-            <a:off x="365760" y="5833872"/>
-            <a:ext cx="3474720" cy="329184"/>
-          </a:xfrm>
-          <a:prstGeom prst="roundRect">
-            <a:avLst>
-              <a:gd name="adj" fmla="val 22222"/>
-            </a:avLst>
-          </a:prstGeom>
-          <a:solidFill>
-            <a:srgbClr val="FFEDD5"/>
-          </a:solidFill>
-          <a:ln w="12700">
-            <a:solidFill>
-              <a:srgbClr val="FFEDD5"/>
-            </a:solidFill>
-            <a:prstDash val="solid"/>
-          </a:ln>
-        </p:spPr>
-      </p:sp>
-      <p:sp>
-        <p:nvSpPr>
-          <p:cNvPr id="38" name="Text 36"/>
-          <p:cNvSpPr/>
-          <p:nvPr/>
-        </p:nvSpPr>
-        <p:spPr>
-          <a:xfrm>
-            <a:off x="365760" y="5833872"/>
-            <a:ext cx="3474720" cy="329184"/>
+          <p:cNvPr id="47" name="Text 45"/>
+          <p:cNvSpPr/>
+          <p:nvPr/>
+        </p:nvSpPr>
+        <p:spPr>
+          <a:xfrm>
+            <a:off x="8202168" y="3675888"/>
+            <a:ext cx="3529584" cy="384048"/>
           </a:xfrm>
           <a:prstGeom prst="rect">
             <a:avLst/>
@@ -5250,10 +5132,10 @@
             <a:r>
               <a:rPr lang="en-US" sz="1200" b="1" dirty="0">
                 <a:solidFill>
-                  <a:srgbClr val="EA580C"/>
-                </a:solidFill>
-              </a:rPr>
-              <a:t>Pi Network SDK 인증</a:t>
+                  <a:srgbClr val="FFFFFF"/>
+                </a:solidFill>
+              </a:rPr>
+              <a:t>🛡️ DB / 보안 / 관리자</a:t>
             </a:r>
             <a:endParaRPr lang="en-US" sz="1200" dirty="0"/>
           </a:p>
@@ -5261,373 +5143,181 @@
       </p:sp>
       <p:sp>
         <p:nvSpPr>
-          <p:cNvPr id="39" name="Text 37"/>
-          <p:cNvSpPr/>
-          <p:nvPr/>
-        </p:nvSpPr>
-        <p:spPr>
-          <a:xfrm>
-            <a:off x="393192" y="6227064"/>
-            <a:ext cx="3419856" cy="694944"/>
-          </a:xfrm>
-          <a:prstGeom prst="rect">
-            <a:avLst/>
-          </a:prstGeom>
-          <a:noFill/>
-          <a:ln/>
-        </p:spPr>
-        <p:txBody>
-          <a:bodyPr wrap="square" rtlCol="0" anchor="ctr"/>
-          <a:lstStyle/>
-          <a:p>
-            <a:pPr indent="0" marL="0">
-              <a:buNone/>
-            </a:pPr>
-            <a:r>
-              <a:rPr lang="en-US" sz="1050" dirty="0">
-                <a:solidFill>
-                  <a:srgbClr val="6B7280"/>
-                </a:solidFill>
-              </a:rPr>
-              <a:t>Pi SDK 연동 (Mainnet 개방 후)</a:t>
-            </a:r>
-            <a:endParaRPr lang="en-US" sz="1050" dirty="0"/>
-          </a:p>
-          <a:p>
-            <a:pPr indent="0" marL="0">
-              <a:buNone/>
-            </a:pPr>
-            <a:r>
-              <a:rPr lang="en-US" sz="1050" dirty="0">
-                <a:solidFill>
-                  <a:srgbClr val="6B7280"/>
-                </a:solidFill>
-              </a:rPr>
-              <a:t>pi_uid / pi_username 필드 활성화</a:t>
-            </a:r>
-            <a:endParaRPr lang="en-US" sz="1050" dirty="0"/>
-          </a:p>
-          <a:p>
-            <a:pPr indent="0" marL="0">
-              <a:buNone/>
-            </a:pPr>
-            <a:r>
-              <a:rPr lang="en-US" sz="1050" dirty="0">
-                <a:solidFill>
-                  <a:srgbClr val="6B7280"/>
-                </a:solidFill>
-              </a:rPr>
-              <a:t>Pi 기반 로그인 플로우</a:t>
-            </a:r>
-            <a:endParaRPr lang="en-US" sz="1050" dirty="0"/>
-          </a:p>
-        </p:txBody>
-      </p:sp>
-      <p:sp>
-        <p:nvSpPr>
-          <p:cNvPr id="40" name="Shape 38"/>
-          <p:cNvSpPr/>
-          <p:nvPr/>
-        </p:nvSpPr>
-        <p:spPr>
-          <a:xfrm>
-            <a:off x="4133088" y="5715000"/>
-            <a:ext cx="3749040" cy="1280160"/>
-          </a:xfrm>
-          <a:prstGeom prst="roundRect">
-            <a:avLst>
-              <a:gd name="adj" fmla="val 9286"/>
-            </a:avLst>
-          </a:prstGeom>
-          <a:solidFill>
-            <a:srgbClr val="FFFFFF"/>
-          </a:solidFill>
-          <a:ln w="12700">
-            <a:solidFill>
-              <a:srgbClr val="E9D5FF"/>
-            </a:solidFill>
-            <a:prstDash val="solid"/>
-          </a:ln>
-        </p:spPr>
-      </p:sp>
-      <p:sp>
-        <p:nvSpPr>
-          <p:cNvPr id="41" name="Shape 39"/>
-          <p:cNvSpPr/>
-          <p:nvPr/>
-        </p:nvSpPr>
-        <p:spPr>
-          <a:xfrm>
-            <a:off x="4270248" y="5833872"/>
-            <a:ext cx="3474720" cy="329184"/>
-          </a:xfrm>
-          <a:prstGeom prst="roundRect">
-            <a:avLst>
-              <a:gd name="adj" fmla="val 22222"/>
-            </a:avLst>
-          </a:prstGeom>
-          <a:solidFill>
-            <a:srgbClr val="FFEDD5"/>
-          </a:solidFill>
-          <a:ln w="12700">
-            <a:solidFill>
-              <a:srgbClr val="FFEDD5"/>
-            </a:solidFill>
-            <a:prstDash val="solid"/>
-          </a:ln>
-        </p:spPr>
-      </p:sp>
-      <p:sp>
-        <p:nvSpPr>
-          <p:cNvPr id="42" name="Text 40"/>
-          <p:cNvSpPr/>
-          <p:nvPr/>
-        </p:nvSpPr>
-        <p:spPr>
-          <a:xfrm>
-            <a:off x="4270248" y="5833872"/>
-            <a:ext cx="3474720" cy="329184"/>
-          </a:xfrm>
-          <a:prstGeom prst="rect">
-            <a:avLst/>
-          </a:prstGeom>
-          <a:noFill/>
-          <a:ln/>
-        </p:spPr>
-        <p:txBody>
-          <a:bodyPr wrap="square" rtlCol="0" anchor="ctr"/>
-          <a:lstStyle/>
-          <a:p>
-            <a:pPr algn="ctr" indent="0" marL="0">
-              <a:buNone/>
-            </a:pPr>
-            <a:r>
-              <a:rPr lang="en-US" sz="1200" b="1" dirty="0">
-                <a:solidFill>
-                  <a:srgbClr val="EA580C"/>
-                </a:solidFill>
-              </a:rPr>
-              <a:t>Pi 코인 결제 연동</a:t>
-            </a:r>
-            <a:endParaRPr lang="en-US" sz="1200" dirty="0"/>
-          </a:p>
-        </p:txBody>
-      </p:sp>
-      <p:sp>
-        <p:nvSpPr>
-          <p:cNvPr id="43" name="Text 41"/>
-          <p:cNvSpPr/>
-          <p:nvPr/>
-        </p:nvSpPr>
-        <p:spPr>
-          <a:xfrm>
-            <a:off x="4297680" y="6227064"/>
-            <a:ext cx="3419856" cy="694944"/>
-          </a:xfrm>
-          <a:prstGeom prst="rect">
-            <a:avLst/>
-          </a:prstGeom>
-          <a:noFill/>
-          <a:ln/>
-        </p:spPr>
-        <p:txBody>
-          <a:bodyPr wrap="square" rtlCol="0" anchor="ctr"/>
-          <a:lstStyle/>
-          <a:p>
-            <a:pPr indent="0" marL="0">
-              <a:buNone/>
-            </a:pPr>
-            <a:r>
-              <a:rPr lang="en-US" sz="1050" dirty="0">
-                <a:solidFill>
-                  <a:srgbClr val="6B7280"/>
-                </a:solidFill>
-              </a:rPr>
-              <a:t>Pi 결제 API 연동</a:t>
-            </a:r>
-            <a:endParaRPr lang="en-US" sz="1050" dirty="0"/>
-          </a:p>
-          <a:p>
-            <a:pPr indent="0" marL="0">
-              <a:buNone/>
-            </a:pPr>
-            <a:r>
-              <a:rPr lang="en-US" sz="1050" dirty="0">
-                <a:solidFill>
-                  <a:srgbClr val="6B7280"/>
-                </a:solidFill>
-              </a:rPr>
-              <a:t>PICK ↔ Pi 토큰 전환</a:t>
-            </a:r>
-            <a:endParaRPr lang="en-US" sz="1050" dirty="0"/>
-          </a:p>
-          <a:p>
-            <a:pPr indent="0" marL="0">
-              <a:buNone/>
-            </a:pPr>
-            <a:r>
-              <a:rPr lang="en-US" sz="1050" dirty="0">
-                <a:solidFill>
-                  <a:srgbClr val="6B7280"/>
-                </a:solidFill>
-              </a:rPr>
-              <a:t>Pi 기반 정산 시스템</a:t>
-            </a:r>
-            <a:endParaRPr lang="en-US" sz="1050" dirty="0"/>
-          </a:p>
-        </p:txBody>
-      </p:sp>
-      <p:sp>
-        <p:nvSpPr>
-          <p:cNvPr id="44" name="Shape 42"/>
-          <p:cNvSpPr/>
-          <p:nvPr/>
-        </p:nvSpPr>
-        <p:spPr>
-          <a:xfrm>
-            <a:off x="8037576" y="5715000"/>
-            <a:ext cx="3749040" cy="1280160"/>
-          </a:xfrm>
-          <a:prstGeom prst="roundRect">
-            <a:avLst>
-              <a:gd name="adj" fmla="val 9286"/>
-            </a:avLst>
-          </a:prstGeom>
-          <a:solidFill>
-            <a:srgbClr val="FFFFFF"/>
-          </a:solidFill>
-          <a:ln w="12700">
-            <a:solidFill>
-              <a:srgbClr val="E9D5FF"/>
-            </a:solidFill>
-            <a:prstDash val="solid"/>
-          </a:ln>
-        </p:spPr>
-      </p:sp>
-      <p:sp>
-        <p:nvSpPr>
-          <p:cNvPr id="45" name="Shape 43"/>
-          <p:cNvSpPr/>
-          <p:nvPr/>
-        </p:nvSpPr>
-        <p:spPr>
-          <a:xfrm>
-            <a:off x="8174736" y="5833872"/>
-            <a:ext cx="3474720" cy="329184"/>
-          </a:xfrm>
-          <a:prstGeom prst="roundRect">
-            <a:avLst>
-              <a:gd name="adj" fmla="val 22222"/>
-            </a:avLst>
-          </a:prstGeom>
-          <a:solidFill>
-            <a:srgbClr val="FFEDD5"/>
-          </a:solidFill>
-          <a:ln w="12700">
-            <a:solidFill>
-              <a:srgbClr val="FFEDD5"/>
-            </a:solidFill>
-            <a:prstDash val="solid"/>
-          </a:ln>
-        </p:spPr>
-      </p:sp>
-      <p:sp>
-        <p:nvSpPr>
-          <p:cNvPr id="46" name="Text 44"/>
-          <p:cNvSpPr/>
-          <p:nvPr/>
-        </p:nvSpPr>
-        <p:spPr>
-          <a:xfrm>
-            <a:off x="8174736" y="5833872"/>
-            <a:ext cx="3474720" cy="329184"/>
-          </a:xfrm>
-          <a:prstGeom prst="rect">
-            <a:avLst/>
-          </a:prstGeom>
-          <a:noFill/>
-          <a:ln/>
-        </p:spPr>
-        <p:txBody>
-          <a:bodyPr wrap="square" rtlCol="0" anchor="ctr"/>
-          <a:lstStyle/>
-          <a:p>
-            <a:pPr algn="ctr" indent="0" marL="0">
-              <a:buNone/>
-            </a:pPr>
-            <a:r>
-              <a:rPr lang="en-US" sz="1200" b="1" dirty="0">
-                <a:solidFill>
-                  <a:srgbClr val="EA580C"/>
-                </a:solidFill>
-              </a:rPr>
-              <a:t>Pi 생태계 확장</a:t>
-            </a:r>
-            <a:endParaRPr lang="en-US" sz="1200" dirty="0"/>
-          </a:p>
-        </p:txBody>
-      </p:sp>
-      <p:sp>
-        <p:nvSpPr>
-          <p:cNvPr id="47" name="Text 45"/>
-          <p:cNvSpPr/>
-          <p:nvPr/>
-        </p:nvSpPr>
-        <p:spPr>
-          <a:xfrm>
-            <a:off x="8202168" y="6227064"/>
-            <a:ext cx="3419856" cy="694944"/>
-          </a:xfrm>
-          <a:prstGeom prst="rect">
-            <a:avLst/>
-          </a:prstGeom>
-          <a:noFill/>
-          <a:ln/>
-        </p:spPr>
-        <p:txBody>
-          <a:bodyPr wrap="square" rtlCol="0" anchor="ctr"/>
-          <a:lstStyle/>
-          <a:p>
-            <a:pPr indent="0" marL="0">
-              <a:buNone/>
-            </a:pPr>
-            <a:r>
-              <a:rPr lang="en-US" sz="1050" dirty="0">
-                <a:solidFill>
-                  <a:srgbClr val="6B7280"/>
-                </a:solidFill>
-              </a:rPr>
-              <a:t>Pi 마이닝 연동 혜택</a:t>
-            </a:r>
-            <a:endParaRPr lang="en-US" sz="1050" dirty="0"/>
-          </a:p>
-          <a:p>
-            <a:pPr indent="0" marL="0">
-              <a:buNone/>
-            </a:pPr>
-            <a:r>
-              <a:rPr lang="en-US" sz="1050" dirty="0">
-                <a:solidFill>
-                  <a:srgbClr val="6B7280"/>
-                </a:solidFill>
-              </a:rPr>
-              <a:t>Pi 홀더 전용 할인 쿠폰</a:t>
-            </a:r>
-            <a:endParaRPr lang="en-US" sz="1050" dirty="0"/>
-          </a:p>
-          <a:p>
-            <a:pPr indent="0" marL="0">
-              <a:buNone/>
-            </a:pPr>
-            <a:r>
-              <a:rPr lang="en-US" sz="1050" dirty="0">
-                <a:solidFill>
-                  <a:srgbClr val="6B7280"/>
-                </a:solidFill>
-              </a:rPr>
-              <a:t>Pi Network 커뮤니티 마케팅</a:t>
-            </a:r>
-            <a:endParaRPr lang="en-US" sz="1050" dirty="0"/>
+          <p:cNvPr id="48" name="Text 46"/>
+          <p:cNvSpPr/>
+          <p:nvPr/>
+        </p:nvSpPr>
+        <p:spPr>
+          <a:xfrm>
+            <a:off x="8257032" y="4160520"/>
+            <a:ext cx="3401568" cy="338328"/>
+          </a:xfrm>
+          <a:prstGeom prst="rect">
+            <a:avLst/>
+          </a:prstGeom>
+          <a:noFill/>
+          <a:ln/>
+        </p:spPr>
+        <p:txBody>
+          <a:bodyPr wrap="square" rtlCol="0" anchor="ctr"/>
+          <a:lstStyle/>
+          <a:p>
+            <a:pPr indent="0" marL="0">
+              <a:buNone/>
+            </a:pPr>
+            <a:r>
+              <a:rPr lang="en-US" sz="1000" dirty="0">
+                <a:solidFill>
+                  <a:srgbClr val="1F1235"/>
+                </a:solidFill>
+              </a:rPr>
+              <a:t>✓  DB 인덱스 30개+ (GIN 전문검색 포함)</a:t>
+            </a:r>
+            <a:endParaRPr lang="en-US" sz="1000" dirty="0"/>
+          </a:p>
+        </p:txBody>
+      </p:sp>
+      <p:sp>
+        <p:nvSpPr>
+          <p:cNvPr id="49" name="Text 47"/>
+          <p:cNvSpPr/>
+          <p:nvPr/>
+        </p:nvSpPr>
+        <p:spPr>
+          <a:xfrm>
+            <a:off x="8257032" y="4507992"/>
+            <a:ext cx="3401568" cy="338328"/>
+          </a:xfrm>
+          <a:prstGeom prst="rect">
+            <a:avLst/>
+          </a:prstGeom>
+          <a:noFill/>
+          <a:ln/>
+        </p:spPr>
+        <p:txBody>
+          <a:bodyPr wrap="square" rtlCol="0" anchor="ctr"/>
+          <a:lstStyle/>
+          <a:p>
+            <a:pPr indent="0" marL="0">
+              <a:buNone/>
+            </a:pPr>
+            <a:r>
+              <a:rPr lang="en-US" sz="1000" dirty="0">
+                <a:solidFill>
+                  <a:srgbClr val="1F1235"/>
+                </a:solidFill>
+              </a:rPr>
+              <a:t>✓  운영 RLS 정책 + Storage 버킷 정책</a:t>
+            </a:r>
+            <a:endParaRPr lang="en-US" sz="1000" dirty="0"/>
+          </a:p>
+        </p:txBody>
+      </p:sp>
+      <p:sp>
+        <p:nvSpPr>
+          <p:cNvPr id="50" name="Text 48"/>
+          <p:cNvSpPr/>
+          <p:nvPr/>
+        </p:nvSpPr>
+        <p:spPr>
+          <a:xfrm>
+            <a:off x="8257032" y="4855464"/>
+            <a:ext cx="3401568" cy="338328"/>
+          </a:xfrm>
+          <a:prstGeom prst="rect">
+            <a:avLst/>
+          </a:prstGeom>
+          <a:noFill/>
+          <a:ln/>
+        </p:spPr>
+        <p:txBody>
+          <a:bodyPr wrap="square" rtlCol="0" anchor="ctr"/>
+          <a:lstStyle/>
+          <a:p>
+            <a:pPr indent="0" marL="0">
+              <a:buNone/>
+            </a:pPr>
+            <a:r>
+              <a:rPr lang="en-US" sz="1000" dirty="0">
+                <a:solidFill>
+                  <a:srgbClr val="1F1235"/>
+                </a:solidFill>
+              </a:rPr>
+              <a:t>✓  관리자 5탭: 통계·회원·가게·쿠폰·FCM 푸시</a:t>
+            </a:r>
+            <a:endParaRPr lang="en-US" sz="1000" dirty="0"/>
+          </a:p>
+        </p:txBody>
+      </p:sp>
+      <p:sp>
+        <p:nvSpPr>
+          <p:cNvPr id="51" name="Text 49"/>
+          <p:cNvSpPr/>
+          <p:nvPr/>
+        </p:nvSpPr>
+        <p:spPr>
+          <a:xfrm>
+            <a:off x="8257032" y="5202936"/>
+            <a:ext cx="3401568" cy="338328"/>
+          </a:xfrm>
+          <a:prstGeom prst="rect">
+            <a:avLst/>
+          </a:prstGeom>
+          <a:noFill/>
+          <a:ln/>
+        </p:spPr>
+        <p:txBody>
+          <a:bodyPr wrap="square" rtlCol="0" anchor="ctr"/>
+          <a:lstStyle/>
+          <a:p>
+            <a:pPr indent="0" marL="0">
+              <a:buNone/>
+            </a:pPr>
+            <a:r>
+              <a:rPr lang="en-US" sz="1000" dirty="0">
+                <a:solidFill>
+                  <a:srgbClr val="1F1235"/>
+                </a:solidFill>
+              </a:rPr>
+              <a:t>✓  404·에러·로딩·스플래시 페이지</a:t>
+            </a:r>
+            <a:endParaRPr lang="en-US" sz="1000" dirty="0"/>
+          </a:p>
+        </p:txBody>
+      </p:sp>
+      <p:sp>
+        <p:nvSpPr>
+          <p:cNvPr id="52" name="Text 50"/>
+          <p:cNvSpPr/>
+          <p:nvPr/>
+        </p:nvSpPr>
+        <p:spPr>
+          <a:xfrm>
+            <a:off x="8257032" y="5550408"/>
+            <a:ext cx="3401568" cy="338328"/>
+          </a:xfrm>
+          <a:prstGeom prst="rect">
+            <a:avLst/>
+          </a:prstGeom>
+          <a:noFill/>
+          <a:ln/>
+        </p:spPr>
+        <p:txBody>
+          <a:bodyPr wrap="square" rtlCol="0" anchor="ctr"/>
+          <a:lstStyle/>
+          <a:p>
+            <a:pPr indent="0" marL="0">
+              <a:buNone/>
+            </a:pPr>
+            <a:r>
+              <a:rPr lang="en-US" sz="1000" dirty="0">
+                <a:solidFill>
+                  <a:srgbClr val="1F1235"/>
+                </a:solidFill>
+              </a:rPr>
+              <a:t>✓  다크모드 + Tailwind dark: 클래스 전면 적용</a:t>
+            </a:r>
+            <a:endParaRPr lang="en-US" sz="1000" dirty="0"/>
           </a:p>
         </p:txBody>
       </p:sp>
@@ -5693,6 +5383,1737 @@
                   <a:srgbClr val="4C1D95"/>
                 </a:solidFill>
               </a:rPr>
+              <a:t>🚀  Phase 1~3 완성 · 다음 단계 로드맵</a:t>
+            </a:r>
+            <a:endParaRPr lang="en-US" sz="2600" dirty="0"/>
+          </a:p>
+        </p:txBody>
+      </p:sp>
+      <p:sp>
+        <p:nvSpPr>
+          <p:cNvPr id="3" name="Shape 1"/>
+          <p:cNvSpPr/>
+          <p:nvPr/>
+        </p:nvSpPr>
+        <p:spPr>
+          <a:xfrm>
+            <a:off x="365760" y="804672"/>
+            <a:ext cx="3657600" cy="45720"/>
+          </a:xfrm>
+          <a:prstGeom prst="rect">
+            <a:avLst/>
+          </a:prstGeom>
+          <a:solidFill>
+            <a:srgbClr val="16A34A"/>
+          </a:solidFill>
+          <a:ln w="12700">
+            <a:solidFill>
+              <a:srgbClr val="16A34A"/>
+            </a:solidFill>
+            <a:prstDash val="solid"/>
+          </a:ln>
+        </p:spPr>
+      </p:sp>
+      <p:sp>
+        <p:nvSpPr>
+          <p:cNvPr id="4" name="Shape 2"/>
+          <p:cNvSpPr/>
+          <p:nvPr/>
+        </p:nvSpPr>
+        <p:spPr>
+          <a:xfrm>
+            <a:off x="365760" y="914400"/>
+            <a:ext cx="12070080" cy="548640"/>
+          </a:xfrm>
+          <a:prstGeom prst="roundRect">
+            <a:avLst>
+              <a:gd name="adj" fmla="val 20000"/>
+            </a:avLst>
+          </a:prstGeom>
+          <a:solidFill>
+            <a:srgbClr val="DCFCE7"/>
+          </a:solidFill>
+          <a:ln w="12700">
+            <a:solidFill>
+              <a:srgbClr val="16A34A"/>
+            </a:solidFill>
+            <a:prstDash val="solid"/>
+          </a:ln>
+        </p:spPr>
+      </p:sp>
+      <p:sp>
+        <p:nvSpPr>
+          <p:cNvPr id="5" name="Text 3"/>
+          <p:cNvSpPr/>
+          <p:nvPr/>
+        </p:nvSpPr>
+        <p:spPr>
+          <a:xfrm>
+            <a:off x="365760" y="914400"/>
+            <a:ext cx="12070080" cy="548640"/>
+          </a:xfrm>
+          <a:prstGeom prst="rect">
+            <a:avLst/>
+          </a:prstGeom>
+          <a:noFill/>
+          <a:ln/>
+        </p:spPr>
+        <p:txBody>
+          <a:bodyPr wrap="square" rtlCol="0" anchor="ctr"/>
+          <a:lstStyle/>
+          <a:p>
+            <a:pPr algn="ctr" indent="0" marL="0">
+              <a:buNone/>
+            </a:pPr>
+            <a:r>
+              <a:rPr lang="en-US" sz="1400" b="1" dirty="0">
+                <a:solidFill>
+                  <a:srgbClr val="16A34A"/>
+                </a:solidFill>
+              </a:rPr>
+              <a:t>🎉  Phase 1~3 완성! 55개+ 기능 구현 · 미착수 기능 0개 · Pi Network 연동만 남음</a:t>
+            </a:r>
+            <a:endParaRPr lang="en-US" sz="1400" dirty="0"/>
+          </a:p>
+        </p:txBody>
+      </p:sp>
+      <p:sp>
+        <p:nvSpPr>
+          <p:cNvPr id="6" name="Shape 4"/>
+          <p:cNvSpPr/>
+          <p:nvPr/>
+        </p:nvSpPr>
+        <p:spPr>
+          <a:xfrm>
+            <a:off x="365760" y="1600200"/>
+            <a:ext cx="1325880" cy="384048"/>
+          </a:xfrm>
+          <a:prstGeom prst="roundRect">
+            <a:avLst>
+              <a:gd name="adj" fmla="val 23810"/>
+            </a:avLst>
+          </a:prstGeom>
+          <a:solidFill>
+            <a:srgbClr val="DCFCE7"/>
+          </a:solidFill>
+          <a:ln w="12700">
+            <a:solidFill>
+              <a:srgbClr val="16A34A"/>
+            </a:solidFill>
+            <a:prstDash val="solid"/>
+          </a:ln>
+        </p:spPr>
+      </p:sp>
+      <p:sp>
+        <p:nvSpPr>
+          <p:cNvPr id="7" name="Text 5"/>
+          <p:cNvSpPr/>
+          <p:nvPr/>
+        </p:nvSpPr>
+        <p:spPr>
+          <a:xfrm>
+            <a:off x="365760" y="1600200"/>
+            <a:ext cx="1325880" cy="384048"/>
+          </a:xfrm>
+          <a:prstGeom prst="rect">
+            <a:avLst/>
+          </a:prstGeom>
+          <a:noFill/>
+          <a:ln/>
+        </p:spPr>
+        <p:txBody>
+          <a:bodyPr wrap="square" rtlCol="0" anchor="ctr"/>
+          <a:lstStyle/>
+          <a:p>
+            <a:pPr algn="ctr" indent="0" marL="0">
+              <a:buNone/>
+            </a:pPr>
+            <a:r>
+              <a:rPr lang="en-US" sz="1100" b="1" dirty="0">
+                <a:solidFill>
+                  <a:srgbClr val="16A34A"/>
+                </a:solidFill>
+              </a:rPr>
+              <a:t>✅ Phase 1~3</a:t>
+            </a:r>
+            <a:endParaRPr lang="en-US" sz="1100" dirty="0"/>
+          </a:p>
+        </p:txBody>
+      </p:sp>
+      <p:sp>
+        <p:nvSpPr>
+          <p:cNvPr id="8" name="Shape 6"/>
+          <p:cNvSpPr/>
+          <p:nvPr/>
+        </p:nvSpPr>
+        <p:spPr>
+          <a:xfrm>
+            <a:off x="228600" y="2057400"/>
+            <a:ext cx="3749040" cy="1280160"/>
+          </a:xfrm>
+          <a:prstGeom prst="roundRect">
+            <a:avLst>
+              <a:gd name="adj" fmla="val 9286"/>
+            </a:avLst>
+          </a:prstGeom>
+          <a:solidFill>
+            <a:srgbClr val="FFFFFF"/>
+          </a:solidFill>
+          <a:ln w="12700">
+            <a:solidFill>
+              <a:srgbClr val="E9D5FF"/>
+            </a:solidFill>
+            <a:prstDash val="solid"/>
+          </a:ln>
+        </p:spPr>
+      </p:sp>
+      <p:sp>
+        <p:nvSpPr>
+          <p:cNvPr id="9" name="Shape 7"/>
+          <p:cNvSpPr/>
+          <p:nvPr/>
+        </p:nvSpPr>
+        <p:spPr>
+          <a:xfrm>
+            <a:off x="365760" y="2176272"/>
+            <a:ext cx="3474720" cy="329184"/>
+          </a:xfrm>
+          <a:prstGeom prst="roundRect">
+            <a:avLst>
+              <a:gd name="adj" fmla="val 22222"/>
+            </a:avLst>
+          </a:prstGeom>
+          <a:solidFill>
+            <a:srgbClr val="DCFCE7"/>
+          </a:solidFill>
+          <a:ln w="12700">
+            <a:solidFill>
+              <a:srgbClr val="DCFCE7"/>
+            </a:solidFill>
+            <a:prstDash val="solid"/>
+          </a:ln>
+        </p:spPr>
+      </p:sp>
+      <p:sp>
+        <p:nvSpPr>
+          <p:cNvPr id="10" name="Text 8"/>
+          <p:cNvSpPr/>
+          <p:nvPr/>
+        </p:nvSpPr>
+        <p:spPr>
+          <a:xfrm>
+            <a:off x="365760" y="2176272"/>
+            <a:ext cx="3474720" cy="329184"/>
+          </a:xfrm>
+          <a:prstGeom prst="rect">
+            <a:avLst/>
+          </a:prstGeom>
+          <a:noFill/>
+          <a:ln/>
+        </p:spPr>
+        <p:txBody>
+          <a:bodyPr wrap="square" rtlCol="0" anchor="ctr"/>
+          <a:lstStyle/>
+          <a:p>
+            <a:pPr algn="ctr" indent="0" marL="0">
+              <a:buNone/>
+            </a:pPr>
+            <a:r>
+              <a:rPr lang="en-US" sz="1200" b="1" dirty="0">
+                <a:solidFill>
+                  <a:srgbClr val="16A34A"/>
+                </a:solidFill>
+              </a:rPr>
+              <a:t>인증 · 지갑 · 주문 플로우</a:t>
+            </a:r>
+            <a:endParaRPr lang="en-US" sz="1200" dirty="0"/>
+          </a:p>
+        </p:txBody>
+      </p:sp>
+      <p:sp>
+        <p:nvSpPr>
+          <p:cNvPr id="11" name="Text 9"/>
+          <p:cNvSpPr/>
+          <p:nvPr/>
+        </p:nvSpPr>
+        <p:spPr>
+          <a:xfrm>
+            <a:off x="393192" y="2569464"/>
+            <a:ext cx="3419856" cy="694944"/>
+          </a:xfrm>
+          <a:prstGeom prst="rect">
+            <a:avLst/>
+          </a:prstGeom>
+          <a:noFill/>
+          <a:ln/>
+        </p:spPr>
+        <p:txBody>
+          <a:bodyPr wrap="square" rtlCol="0" anchor="ctr"/>
+          <a:lstStyle/>
+          <a:p>
+            <a:pPr indent="0" marL="0">
+              <a:buNone/>
+            </a:pPr>
+            <a:r>
+              <a:rPr lang="en-US" sz="1050" dirty="0">
+                <a:solidFill>
+                  <a:srgbClr val="6B7280"/>
+                </a:solidFill>
+              </a:rPr>
+              <a:t>이메일 로그인 (카카오 비즈니스 후 추가)</a:t>
+            </a:r>
+            <a:endParaRPr lang="en-US" sz="1050" dirty="0"/>
+          </a:p>
+          <a:p>
+            <a:pPr indent="0" marL="0">
+              <a:buNone/>
+            </a:pPr>
+            <a:r>
+              <a:rPr lang="en-US" sz="1050" dirty="0">
+                <a:solidFill>
+                  <a:srgbClr val="6B7280"/>
+                </a:solidFill>
+              </a:rPr>
+              <a:t>PICK 토큰 지갑 + 토스페이먼츠</a:t>
+            </a:r>
+            <a:endParaRPr lang="en-US" sz="1050" dirty="0"/>
+          </a:p>
+          <a:p>
+            <a:pPr indent="0" marL="0">
+              <a:buNone/>
+            </a:pPr>
+            <a:r>
+              <a:rPr lang="en-US" sz="1050" dirty="0">
+                <a:solidFill>
+                  <a:srgbClr val="6B7280"/>
+                </a:solidFill>
+              </a:rPr>
+              <a:t>Realtime 주문 추적 완성</a:t>
+            </a:r>
+            <a:endParaRPr lang="en-US" sz="1050" dirty="0"/>
+          </a:p>
+        </p:txBody>
+      </p:sp>
+      <p:sp>
+        <p:nvSpPr>
+          <p:cNvPr id="12" name="Shape 10"/>
+          <p:cNvSpPr/>
+          <p:nvPr/>
+        </p:nvSpPr>
+        <p:spPr>
+          <a:xfrm>
+            <a:off x="4133088" y="2057400"/>
+            <a:ext cx="3749040" cy="1280160"/>
+          </a:xfrm>
+          <a:prstGeom prst="roundRect">
+            <a:avLst>
+              <a:gd name="adj" fmla="val 9286"/>
+            </a:avLst>
+          </a:prstGeom>
+          <a:solidFill>
+            <a:srgbClr val="FFFFFF"/>
+          </a:solidFill>
+          <a:ln w="12700">
+            <a:solidFill>
+              <a:srgbClr val="E9D5FF"/>
+            </a:solidFill>
+            <a:prstDash val="solid"/>
+          </a:ln>
+        </p:spPr>
+      </p:sp>
+      <p:sp>
+        <p:nvSpPr>
+          <p:cNvPr id="13" name="Shape 11"/>
+          <p:cNvSpPr/>
+          <p:nvPr/>
+        </p:nvSpPr>
+        <p:spPr>
+          <a:xfrm>
+            <a:off x="4270248" y="2176272"/>
+            <a:ext cx="3474720" cy="329184"/>
+          </a:xfrm>
+          <a:prstGeom prst="roundRect">
+            <a:avLst>
+              <a:gd name="adj" fmla="val 22222"/>
+            </a:avLst>
+          </a:prstGeom>
+          <a:solidFill>
+            <a:srgbClr val="DCFCE7"/>
+          </a:solidFill>
+          <a:ln w="12700">
+            <a:solidFill>
+              <a:srgbClr val="DCFCE7"/>
+            </a:solidFill>
+            <a:prstDash val="solid"/>
+          </a:ln>
+        </p:spPr>
+      </p:sp>
+      <p:sp>
+        <p:nvSpPr>
+          <p:cNvPr id="14" name="Text 12"/>
+          <p:cNvSpPr/>
+          <p:nvPr/>
+        </p:nvSpPr>
+        <p:spPr>
+          <a:xfrm>
+            <a:off x="4270248" y="2176272"/>
+            <a:ext cx="3474720" cy="329184"/>
+          </a:xfrm>
+          <a:prstGeom prst="rect">
+            <a:avLst/>
+          </a:prstGeom>
+          <a:noFill/>
+          <a:ln/>
+        </p:spPr>
+        <p:txBody>
+          <a:bodyPr wrap="square" rtlCol="0" anchor="ctr"/>
+          <a:lstStyle/>
+          <a:p>
+            <a:pPr algn="ctr" indent="0" marL="0">
+              <a:buNone/>
+            </a:pPr>
+            <a:r>
+              <a:rPr lang="en-US" sz="1200" b="1" dirty="0">
+                <a:solidFill>
+                  <a:srgbClr val="16A34A"/>
+                </a:solidFill>
+              </a:rPr>
+              <a:t>사장님 · 라이더 · 관리자</a:t>
+            </a:r>
+            <a:endParaRPr lang="en-US" sz="1200" dirty="0"/>
+          </a:p>
+        </p:txBody>
+      </p:sp>
+      <p:sp>
+        <p:nvSpPr>
+          <p:cNvPr id="15" name="Text 13"/>
+          <p:cNvSpPr/>
+          <p:nvPr/>
+        </p:nvSpPr>
+        <p:spPr>
+          <a:xfrm>
+            <a:off x="4297680" y="2569464"/>
+            <a:ext cx="3419856" cy="694944"/>
+          </a:xfrm>
+          <a:prstGeom prst="rect">
+            <a:avLst/>
+          </a:prstGeom>
+          <a:noFill/>
+          <a:ln/>
+        </p:spPr>
+        <p:txBody>
+          <a:bodyPr wrap="square" rtlCol="0" anchor="ctr"/>
+          <a:lstStyle/>
+          <a:p>
+            <a:pPr indent="0" marL="0">
+              <a:buNone/>
+            </a:pPr>
+            <a:r>
+              <a:rPr lang="en-US" sz="1050" dirty="0">
+                <a:solidFill>
+                  <a:srgbClr val="6B7280"/>
+                </a:solidFill>
+              </a:rPr>
+              <a:t>사장님 주문/메뉴/정산/통계</a:t>
+            </a:r>
+            <a:endParaRPr lang="en-US" sz="1050" dirty="0"/>
+          </a:p>
+          <a:p>
+            <a:pPr indent="0" marL="0">
+              <a:buNone/>
+            </a:pPr>
+            <a:r>
+              <a:rPr lang="en-US" sz="1050" dirty="0">
+                <a:solidFill>
+                  <a:srgbClr val="6B7280"/>
+                </a:solidFill>
+              </a:rPr>
+              <a:t>라이더 수락/위치공유/수익</a:t>
+            </a:r>
+            <a:endParaRPr lang="en-US" sz="1050" dirty="0"/>
+          </a:p>
+          <a:p>
+            <a:pPr indent="0" marL="0">
+              <a:buNone/>
+            </a:pPr>
+            <a:r>
+              <a:rPr lang="en-US" sz="1050" dirty="0">
+                <a:solidFill>
+                  <a:srgbClr val="6B7280"/>
+                </a:solidFill>
+              </a:rPr>
+              <a:t>관리자 5탭 대시보드</a:t>
+            </a:r>
+            <a:endParaRPr lang="en-US" sz="1050" dirty="0"/>
+          </a:p>
+        </p:txBody>
+      </p:sp>
+      <p:sp>
+        <p:nvSpPr>
+          <p:cNvPr id="16" name="Shape 14"/>
+          <p:cNvSpPr/>
+          <p:nvPr/>
+        </p:nvSpPr>
+        <p:spPr>
+          <a:xfrm>
+            <a:off x="8037576" y="2057400"/>
+            <a:ext cx="3749040" cy="1280160"/>
+          </a:xfrm>
+          <a:prstGeom prst="roundRect">
+            <a:avLst>
+              <a:gd name="adj" fmla="val 9286"/>
+            </a:avLst>
+          </a:prstGeom>
+          <a:solidFill>
+            <a:srgbClr val="FFFFFF"/>
+          </a:solidFill>
+          <a:ln w="12700">
+            <a:solidFill>
+              <a:srgbClr val="E9D5FF"/>
+            </a:solidFill>
+            <a:prstDash val="solid"/>
+          </a:ln>
+        </p:spPr>
+      </p:sp>
+      <p:sp>
+        <p:nvSpPr>
+          <p:cNvPr id="17" name="Shape 15"/>
+          <p:cNvSpPr/>
+          <p:nvPr/>
+        </p:nvSpPr>
+        <p:spPr>
+          <a:xfrm>
+            <a:off x="8174736" y="2176272"/>
+            <a:ext cx="3474720" cy="329184"/>
+          </a:xfrm>
+          <a:prstGeom prst="roundRect">
+            <a:avLst>
+              <a:gd name="adj" fmla="val 22222"/>
+            </a:avLst>
+          </a:prstGeom>
+          <a:solidFill>
+            <a:srgbClr val="DCFCE7"/>
+          </a:solidFill>
+          <a:ln w="12700">
+            <a:solidFill>
+              <a:srgbClr val="DCFCE7"/>
+            </a:solidFill>
+            <a:prstDash val="solid"/>
+          </a:ln>
+        </p:spPr>
+      </p:sp>
+      <p:sp>
+        <p:nvSpPr>
+          <p:cNvPr id="18" name="Text 16"/>
+          <p:cNvSpPr/>
+          <p:nvPr/>
+        </p:nvSpPr>
+        <p:spPr>
+          <a:xfrm>
+            <a:off x="8174736" y="2176272"/>
+            <a:ext cx="3474720" cy="329184"/>
+          </a:xfrm>
+          <a:prstGeom prst="rect">
+            <a:avLst/>
+          </a:prstGeom>
+          <a:noFill/>
+          <a:ln/>
+        </p:spPr>
+        <p:txBody>
+          <a:bodyPr wrap="square" rtlCol="0" anchor="ctr"/>
+          <a:lstStyle/>
+          <a:p>
+            <a:pPr algn="ctr" indent="0" marL="0">
+              <a:buNone/>
+            </a:pPr>
+            <a:r>
+              <a:rPr lang="en-US" sz="1200" b="1" dirty="0">
+                <a:solidFill>
+                  <a:srgbClr val="16A34A"/>
+                </a:solidFill>
+              </a:rPr>
+              <a:t>PWA · 보안 · DB 최적화</a:t>
+            </a:r>
+            <a:endParaRPr lang="en-US" sz="1200" dirty="0"/>
+          </a:p>
+        </p:txBody>
+      </p:sp>
+      <p:sp>
+        <p:nvSpPr>
+          <p:cNvPr id="19" name="Text 17"/>
+          <p:cNvSpPr/>
+          <p:nvPr/>
+        </p:nvSpPr>
+        <p:spPr>
+          <a:xfrm>
+            <a:off x="8202168" y="2569464"/>
+            <a:ext cx="3419856" cy="694944"/>
+          </a:xfrm>
+          <a:prstGeom prst="rect">
+            <a:avLst/>
+          </a:prstGeom>
+          <a:noFill/>
+          <a:ln/>
+        </p:spPr>
+        <p:txBody>
+          <a:bodyPr wrap="square" rtlCol="0" anchor="ctr"/>
+          <a:lstStyle/>
+          <a:p>
+            <a:pPr indent="0" marL="0">
+              <a:buNone/>
+            </a:pPr>
+            <a:r>
+              <a:rPr lang="en-US" sz="1050" dirty="0">
+                <a:solidFill>
+                  <a:srgbClr val="6B7280"/>
+                </a:solidFill>
+              </a:rPr>
+              <a:t>Serwist 오프라인 캐싱</a:t>
+            </a:r>
+            <a:endParaRPr lang="en-US" sz="1050" dirty="0"/>
+          </a:p>
+          <a:p>
+            <a:pPr indent="0" marL="0">
+              <a:buNone/>
+            </a:pPr>
+            <a:r>
+              <a:rPr lang="en-US" sz="1050" dirty="0">
+                <a:solidFill>
+                  <a:srgbClr val="6B7280"/>
+                </a:solidFill>
+              </a:rPr>
+              <a:t>RLS + 인덱스 30개+ + FCM 푸시</a:t>
+            </a:r>
+            <a:endParaRPr lang="en-US" sz="1050" dirty="0"/>
+          </a:p>
+          <a:p>
+            <a:pPr indent="0" marL="0">
+              <a:buNone/>
+            </a:pPr>
+            <a:r>
+              <a:rPr lang="en-US" sz="1050" dirty="0">
+                <a:solidFill>
+                  <a:srgbClr val="6B7280"/>
+                </a:solidFill>
+              </a:rPr>
+              <a:t>Sentry + Storage 정책 완성</a:t>
+            </a:r>
+            <a:endParaRPr lang="en-US" sz="1050" dirty="0"/>
+          </a:p>
+        </p:txBody>
+      </p:sp>
+      <p:sp>
+        <p:nvSpPr>
+          <p:cNvPr id="20" name="Shape 18"/>
+          <p:cNvSpPr/>
+          <p:nvPr/>
+        </p:nvSpPr>
+        <p:spPr>
+          <a:xfrm>
+            <a:off x="365760" y="3429000"/>
+            <a:ext cx="1325880" cy="384048"/>
+          </a:xfrm>
+          <a:prstGeom prst="roundRect">
+            <a:avLst>
+              <a:gd name="adj" fmla="val 23810"/>
+            </a:avLst>
+          </a:prstGeom>
+          <a:solidFill>
+            <a:srgbClr val="FFFBEB"/>
+          </a:solidFill>
+          <a:ln w="12700">
+            <a:solidFill>
+              <a:srgbClr val="D97706"/>
+            </a:solidFill>
+            <a:prstDash val="solid"/>
+          </a:ln>
+        </p:spPr>
+      </p:sp>
+      <p:sp>
+        <p:nvSpPr>
+          <p:cNvPr id="21" name="Text 19"/>
+          <p:cNvSpPr/>
+          <p:nvPr/>
+        </p:nvSpPr>
+        <p:spPr>
+          <a:xfrm>
+            <a:off x="365760" y="3429000"/>
+            <a:ext cx="1325880" cy="384048"/>
+          </a:xfrm>
+          <a:prstGeom prst="rect">
+            <a:avLst/>
+          </a:prstGeom>
+          <a:noFill/>
+          <a:ln/>
+        </p:spPr>
+        <p:txBody>
+          <a:bodyPr wrap="square" rtlCol="0" anchor="ctr"/>
+          <a:lstStyle/>
+          <a:p>
+            <a:pPr algn="ctr" indent="0" marL="0">
+              <a:buNone/>
+            </a:pPr>
+            <a:r>
+              <a:rPr lang="en-US" sz="1100" b="1" dirty="0">
+                <a:solidFill>
+                  <a:srgbClr val="D97706"/>
+                </a:solidFill>
+              </a:rPr>
+              <a:t>🟡 런칭 준비</a:t>
+            </a:r>
+            <a:endParaRPr lang="en-US" sz="1100" dirty="0"/>
+          </a:p>
+        </p:txBody>
+      </p:sp>
+      <p:sp>
+        <p:nvSpPr>
+          <p:cNvPr id="22" name="Shape 20"/>
+          <p:cNvSpPr/>
+          <p:nvPr/>
+        </p:nvSpPr>
+        <p:spPr>
+          <a:xfrm>
+            <a:off x="228600" y="3886200"/>
+            <a:ext cx="3749040" cy="1280160"/>
+          </a:xfrm>
+          <a:prstGeom prst="roundRect">
+            <a:avLst>
+              <a:gd name="adj" fmla="val 9286"/>
+            </a:avLst>
+          </a:prstGeom>
+          <a:solidFill>
+            <a:srgbClr val="FFFFFF"/>
+          </a:solidFill>
+          <a:ln w="12700">
+            <a:solidFill>
+              <a:srgbClr val="E9D5FF"/>
+            </a:solidFill>
+            <a:prstDash val="solid"/>
+          </a:ln>
+        </p:spPr>
+      </p:sp>
+      <p:sp>
+        <p:nvSpPr>
+          <p:cNvPr id="23" name="Shape 21"/>
+          <p:cNvSpPr/>
+          <p:nvPr/>
+        </p:nvSpPr>
+        <p:spPr>
+          <a:xfrm>
+            <a:off x="365760" y="4005072"/>
+            <a:ext cx="3474720" cy="329184"/>
+          </a:xfrm>
+          <a:prstGeom prst="roundRect">
+            <a:avLst>
+              <a:gd name="adj" fmla="val 22222"/>
+            </a:avLst>
+          </a:prstGeom>
+          <a:solidFill>
+            <a:srgbClr val="FFFBEB"/>
+          </a:solidFill>
+          <a:ln w="12700">
+            <a:solidFill>
+              <a:srgbClr val="FFFBEB"/>
+            </a:solidFill>
+            <a:prstDash val="solid"/>
+          </a:ln>
+        </p:spPr>
+      </p:sp>
+      <p:sp>
+        <p:nvSpPr>
+          <p:cNvPr id="24" name="Text 22"/>
+          <p:cNvSpPr/>
+          <p:nvPr/>
+        </p:nvSpPr>
+        <p:spPr>
+          <a:xfrm>
+            <a:off x="365760" y="4005072"/>
+            <a:ext cx="3474720" cy="329184"/>
+          </a:xfrm>
+          <a:prstGeom prst="rect">
+            <a:avLst/>
+          </a:prstGeom>
+          <a:noFill/>
+          <a:ln/>
+        </p:spPr>
+        <p:txBody>
+          <a:bodyPr wrap="square" rtlCol="0" anchor="ctr"/>
+          <a:lstStyle/>
+          <a:p>
+            <a:pPr algn="ctr" indent="0" marL="0">
+              <a:buNone/>
+            </a:pPr>
+            <a:r>
+              <a:rPr lang="en-US" sz="1200" b="1" dirty="0">
+                <a:solidFill>
+                  <a:srgbClr val="D97706"/>
+                </a:solidFill>
+              </a:rPr>
+              <a:t>Firebase 환경변수 ✅</a:t>
+            </a:r>
+            <a:endParaRPr lang="en-US" sz="1200" dirty="0"/>
+          </a:p>
+        </p:txBody>
+      </p:sp>
+      <p:sp>
+        <p:nvSpPr>
+          <p:cNvPr id="25" name="Text 23"/>
+          <p:cNvSpPr/>
+          <p:nvPr/>
+        </p:nvSpPr>
+        <p:spPr>
+          <a:xfrm>
+            <a:off x="393192" y="4398264"/>
+            <a:ext cx="3419856" cy="694944"/>
+          </a:xfrm>
+          <a:prstGeom prst="rect">
+            <a:avLst/>
+          </a:prstGeom>
+          <a:noFill/>
+          <a:ln/>
+        </p:spPr>
+        <p:txBody>
+          <a:bodyPr wrap="square" rtlCol="0" anchor="ctr"/>
+          <a:lstStyle/>
+          <a:p>
+            <a:pPr indent="0" marL="0">
+              <a:buNone/>
+            </a:pPr>
+            <a:r>
+              <a:rPr lang="en-US" sz="1050" dirty="0">
+                <a:solidFill>
+                  <a:srgbClr val="6B7280"/>
+                </a:solidFill>
+              </a:rPr>
+              <a:t>API Key ~ App ID 완성</a:t>
+            </a:r>
+            <a:endParaRPr lang="en-US" sz="1050" dirty="0"/>
+          </a:p>
+          <a:p>
+            <a:pPr indent="0" marL="0">
+              <a:buNone/>
+            </a:pPr>
+            <a:r>
+              <a:rPr lang="en-US" sz="1050" dirty="0">
+                <a:solidFill>
+                  <a:srgbClr val="6B7280"/>
+                </a:solidFill>
+              </a:rPr>
+              <a:t>VAPID 키 완성</a:t>
+            </a:r>
+            <a:endParaRPr lang="en-US" sz="1050" dirty="0"/>
+          </a:p>
+          <a:p>
+            <a:pPr indent="0" marL="0">
+              <a:buNone/>
+            </a:pPr>
+            <a:r>
+              <a:rPr lang="en-US" sz="1050" dirty="0">
+                <a:solidFill>
+                  <a:srgbClr val="6B7280"/>
+                </a:solidFill>
+              </a:rPr>
+              <a:t>Admin SDK JSON 완성</a:t>
+            </a:r>
+            <a:endParaRPr lang="en-US" sz="1050" dirty="0"/>
+          </a:p>
+        </p:txBody>
+      </p:sp>
+      <p:sp>
+        <p:nvSpPr>
+          <p:cNvPr id="26" name="Shape 24"/>
+          <p:cNvSpPr/>
+          <p:nvPr/>
+        </p:nvSpPr>
+        <p:spPr>
+          <a:xfrm>
+            <a:off x="4133088" y="3886200"/>
+            <a:ext cx="3749040" cy="1280160"/>
+          </a:xfrm>
+          <a:prstGeom prst="roundRect">
+            <a:avLst>
+              <a:gd name="adj" fmla="val 9286"/>
+            </a:avLst>
+          </a:prstGeom>
+          <a:solidFill>
+            <a:srgbClr val="FFFFFF"/>
+          </a:solidFill>
+          <a:ln w="12700">
+            <a:solidFill>
+              <a:srgbClr val="E9D5FF"/>
+            </a:solidFill>
+            <a:prstDash val="solid"/>
+          </a:ln>
+        </p:spPr>
+      </p:sp>
+      <p:sp>
+        <p:nvSpPr>
+          <p:cNvPr id="27" name="Shape 25"/>
+          <p:cNvSpPr/>
+          <p:nvPr/>
+        </p:nvSpPr>
+        <p:spPr>
+          <a:xfrm>
+            <a:off x="4270248" y="4005072"/>
+            <a:ext cx="3474720" cy="329184"/>
+          </a:xfrm>
+          <a:prstGeom prst="roundRect">
+            <a:avLst>
+              <a:gd name="adj" fmla="val 22222"/>
+            </a:avLst>
+          </a:prstGeom>
+          <a:solidFill>
+            <a:srgbClr val="FFFBEB"/>
+          </a:solidFill>
+          <a:ln w="12700">
+            <a:solidFill>
+              <a:srgbClr val="FFFBEB"/>
+            </a:solidFill>
+            <a:prstDash val="solid"/>
+          </a:ln>
+        </p:spPr>
+      </p:sp>
+      <p:sp>
+        <p:nvSpPr>
+          <p:cNvPr id="28" name="Text 26"/>
+          <p:cNvSpPr/>
+          <p:nvPr/>
+        </p:nvSpPr>
+        <p:spPr>
+          <a:xfrm>
+            <a:off x="4270248" y="4005072"/>
+            <a:ext cx="3474720" cy="329184"/>
+          </a:xfrm>
+          <a:prstGeom prst="rect">
+            <a:avLst/>
+          </a:prstGeom>
+          <a:noFill/>
+          <a:ln/>
+        </p:spPr>
+        <p:txBody>
+          <a:bodyPr wrap="square" rtlCol="0" anchor="ctr"/>
+          <a:lstStyle/>
+          <a:p>
+            <a:pPr algn="ctr" indent="0" marL="0">
+              <a:buNone/>
+            </a:pPr>
+            <a:r>
+              <a:rPr lang="en-US" sz="1200" b="1" dirty="0">
+                <a:solidFill>
+                  <a:srgbClr val="D97706"/>
+                </a:solidFill>
+              </a:rPr>
+              <a:t>카카오 API 키 확인</a:t>
+            </a:r>
+            <a:endParaRPr lang="en-US" sz="1200" dirty="0"/>
+          </a:p>
+        </p:txBody>
+      </p:sp>
+      <p:sp>
+        <p:nvSpPr>
+          <p:cNvPr id="29" name="Text 27"/>
+          <p:cNvSpPr/>
+          <p:nvPr/>
+        </p:nvSpPr>
+        <p:spPr>
+          <a:xfrm>
+            <a:off x="4297680" y="4398264"/>
+            <a:ext cx="3419856" cy="694944"/>
+          </a:xfrm>
+          <a:prstGeom prst="rect">
+            <a:avLst/>
+          </a:prstGeom>
+          <a:noFill/>
+          <a:ln/>
+        </p:spPr>
+        <p:txBody>
+          <a:bodyPr wrap="square" rtlCol="0" anchor="ctr"/>
+          <a:lstStyle/>
+          <a:p>
+            <a:pPr indent="0" marL="0">
+              <a:buNone/>
+            </a:pPr>
+            <a:r>
+              <a:rPr lang="en-US" sz="1050" dirty="0">
+                <a:solidFill>
+                  <a:srgbClr val="6B7280"/>
+                </a:solidFill>
+              </a:rPr>
+              <a:t>앱 키 → JavaScript 키 재확인</a:t>
+            </a:r>
+            <a:endParaRPr lang="en-US" sz="1050" dirty="0"/>
+          </a:p>
+          <a:p>
+            <a:pPr indent="0" marL="0">
+              <a:buNone/>
+            </a:pPr>
+            <a:r>
+              <a:rPr lang="en-US" sz="1050" dirty="0">
+                <a:solidFill>
+                  <a:srgbClr val="6B7280"/>
+                </a:solidFill>
+              </a:rPr>
+              <a:t>NEXT_PUBLIC_KAKAO_MAP_KEY 검증</a:t>
+            </a:r>
+            <a:endParaRPr lang="en-US" sz="1050" dirty="0"/>
+          </a:p>
+          <a:p>
+            <a:pPr indent="0" marL="0">
+              <a:buNone/>
+            </a:pPr>
+            <a:r>
+              <a:rPr lang="en-US" sz="1050" dirty="0">
+                <a:solidFill>
+                  <a:srgbClr val="6B7280"/>
+                </a:solidFill>
+              </a:rPr>
+              <a:t>Kakao Map 지도 표시 테스트</a:t>
+            </a:r>
+            <a:endParaRPr lang="en-US" sz="1050" dirty="0"/>
+          </a:p>
+        </p:txBody>
+      </p:sp>
+      <p:sp>
+        <p:nvSpPr>
+          <p:cNvPr id="30" name="Shape 28"/>
+          <p:cNvSpPr/>
+          <p:nvPr/>
+        </p:nvSpPr>
+        <p:spPr>
+          <a:xfrm>
+            <a:off x="8037576" y="3886200"/>
+            <a:ext cx="3749040" cy="1280160"/>
+          </a:xfrm>
+          <a:prstGeom prst="roundRect">
+            <a:avLst>
+              <a:gd name="adj" fmla="val 9286"/>
+            </a:avLst>
+          </a:prstGeom>
+          <a:solidFill>
+            <a:srgbClr val="FFFFFF"/>
+          </a:solidFill>
+          <a:ln w="12700">
+            <a:solidFill>
+              <a:srgbClr val="E9D5FF"/>
+            </a:solidFill>
+            <a:prstDash val="solid"/>
+          </a:ln>
+        </p:spPr>
+      </p:sp>
+      <p:sp>
+        <p:nvSpPr>
+          <p:cNvPr id="31" name="Shape 29"/>
+          <p:cNvSpPr/>
+          <p:nvPr/>
+        </p:nvSpPr>
+        <p:spPr>
+          <a:xfrm>
+            <a:off x="8174736" y="4005072"/>
+            <a:ext cx="3474720" cy="329184"/>
+          </a:xfrm>
+          <a:prstGeom prst="roundRect">
+            <a:avLst>
+              <a:gd name="adj" fmla="val 22222"/>
+            </a:avLst>
+          </a:prstGeom>
+          <a:solidFill>
+            <a:srgbClr val="FFFBEB"/>
+          </a:solidFill>
+          <a:ln w="12700">
+            <a:solidFill>
+              <a:srgbClr val="FFFBEB"/>
+            </a:solidFill>
+            <a:prstDash val="solid"/>
+          </a:ln>
+        </p:spPr>
+      </p:sp>
+      <p:sp>
+        <p:nvSpPr>
+          <p:cNvPr id="32" name="Text 30"/>
+          <p:cNvSpPr/>
+          <p:nvPr/>
+        </p:nvSpPr>
+        <p:spPr>
+          <a:xfrm>
+            <a:off x="8174736" y="4005072"/>
+            <a:ext cx="3474720" cy="329184"/>
+          </a:xfrm>
+          <a:prstGeom prst="rect">
+            <a:avLst/>
+          </a:prstGeom>
+          <a:noFill/>
+          <a:ln/>
+        </p:spPr>
+        <p:txBody>
+          <a:bodyPr wrap="square" rtlCol="0" anchor="ctr"/>
+          <a:lstStyle/>
+          <a:p>
+            <a:pPr algn="ctr" indent="0" marL="0">
+              <a:buNone/>
+            </a:pPr>
+            <a:r>
+              <a:rPr lang="en-US" sz="1200" b="1" dirty="0">
+                <a:solidFill>
+                  <a:srgbClr val="D97706"/>
+                </a:solidFill>
+              </a:rPr>
+              <a:t>샘플 데이터 + 배포</a:t>
+            </a:r>
+            <a:endParaRPr lang="en-US" sz="1200" dirty="0"/>
+          </a:p>
+        </p:txBody>
+      </p:sp>
+      <p:sp>
+        <p:nvSpPr>
+          <p:cNvPr id="33" name="Text 31"/>
+          <p:cNvSpPr/>
+          <p:nvPr/>
+        </p:nvSpPr>
+        <p:spPr>
+          <a:xfrm>
+            <a:off x="8202168" y="4398264"/>
+            <a:ext cx="3419856" cy="694944"/>
+          </a:xfrm>
+          <a:prstGeom prst="rect">
+            <a:avLst/>
+          </a:prstGeom>
+          <a:noFill/>
+          <a:ln/>
+        </p:spPr>
+        <p:txBody>
+          <a:bodyPr wrap="square" rtlCol="0" anchor="ctr"/>
+          <a:lstStyle/>
+          <a:p>
+            <a:pPr indent="0" marL="0">
+              <a:buNone/>
+            </a:pPr>
+            <a:r>
+              <a:rPr lang="en-US" sz="1050" dirty="0">
+                <a:solidFill>
+                  <a:srgbClr val="6B7280"/>
+                </a:solidFill>
+              </a:rPr>
+              <a:t>실 가맹점 + 메뉴 데이터 추가</a:t>
+            </a:r>
+            <a:endParaRPr lang="en-US" sz="1050" dirty="0"/>
+          </a:p>
+          <a:p>
+            <a:pPr indent="0" marL="0">
+              <a:buNone/>
+            </a:pPr>
+            <a:r>
+              <a:rPr lang="en-US" sz="1050" dirty="0">
+                <a:solidFill>
+                  <a:srgbClr val="6B7280"/>
+                </a:solidFill>
+              </a:rPr>
+              <a:t>관리자 계정 role='admin' 설정</a:t>
+            </a:r>
+            <a:endParaRPr lang="en-US" sz="1050" dirty="0"/>
+          </a:p>
+          <a:p>
+            <a:pPr indent="0" marL="0">
+              <a:buNone/>
+            </a:pPr>
+            <a:r>
+              <a:rPr lang="en-US" sz="1050" dirty="0">
+                <a:solidFill>
+                  <a:srgbClr val="6B7280"/>
+                </a:solidFill>
+              </a:rPr>
+              <a:t>Vercel 프로덕션 배포 확인</a:t>
+            </a:r>
+            <a:endParaRPr lang="en-US" sz="1050" dirty="0"/>
+          </a:p>
+        </p:txBody>
+      </p:sp>
+      <p:sp>
+        <p:nvSpPr>
+          <p:cNvPr id="34" name="Shape 32"/>
+          <p:cNvSpPr/>
+          <p:nvPr/>
+        </p:nvSpPr>
+        <p:spPr>
+          <a:xfrm>
+            <a:off x="365760" y="5257800"/>
+            <a:ext cx="1325880" cy="384048"/>
+          </a:xfrm>
+          <a:prstGeom prst="roundRect">
+            <a:avLst>
+              <a:gd name="adj" fmla="val 23810"/>
+            </a:avLst>
+          </a:prstGeom>
+          <a:solidFill>
+            <a:srgbClr val="FFEDD5"/>
+          </a:solidFill>
+          <a:ln w="12700">
+            <a:solidFill>
+              <a:srgbClr val="EA580C"/>
+            </a:solidFill>
+            <a:prstDash val="solid"/>
+          </a:ln>
+        </p:spPr>
+      </p:sp>
+      <p:sp>
+        <p:nvSpPr>
+          <p:cNvPr id="35" name="Text 33"/>
+          <p:cNvSpPr/>
+          <p:nvPr/>
+        </p:nvSpPr>
+        <p:spPr>
+          <a:xfrm>
+            <a:off x="365760" y="5257800"/>
+            <a:ext cx="1325880" cy="384048"/>
+          </a:xfrm>
+          <a:prstGeom prst="rect">
+            <a:avLst/>
+          </a:prstGeom>
+          <a:noFill/>
+          <a:ln/>
+        </p:spPr>
+        <p:txBody>
+          <a:bodyPr wrap="square" rtlCol="0" anchor="ctr"/>
+          <a:lstStyle/>
+          <a:p>
+            <a:pPr algn="ctr" indent="0" marL="0">
+              <a:buNone/>
+            </a:pPr>
+            <a:r>
+              <a:rPr lang="en-US" sz="1100" b="1" dirty="0">
+                <a:solidFill>
+                  <a:srgbClr val="EA580C"/>
+                </a:solidFill>
+              </a:rPr>
+              <a:t>⏳ Phase 4</a:t>
+            </a:r>
+            <a:endParaRPr lang="en-US" sz="1100" dirty="0"/>
+          </a:p>
+        </p:txBody>
+      </p:sp>
+      <p:sp>
+        <p:nvSpPr>
+          <p:cNvPr id="36" name="Shape 34"/>
+          <p:cNvSpPr/>
+          <p:nvPr/>
+        </p:nvSpPr>
+        <p:spPr>
+          <a:xfrm>
+            <a:off x="228600" y="5715000"/>
+            <a:ext cx="3749040" cy="1280160"/>
+          </a:xfrm>
+          <a:prstGeom prst="roundRect">
+            <a:avLst>
+              <a:gd name="adj" fmla="val 9286"/>
+            </a:avLst>
+          </a:prstGeom>
+          <a:solidFill>
+            <a:srgbClr val="FFFFFF"/>
+          </a:solidFill>
+          <a:ln w="12700">
+            <a:solidFill>
+              <a:srgbClr val="E9D5FF"/>
+            </a:solidFill>
+            <a:prstDash val="solid"/>
+          </a:ln>
+        </p:spPr>
+      </p:sp>
+      <p:sp>
+        <p:nvSpPr>
+          <p:cNvPr id="37" name="Shape 35"/>
+          <p:cNvSpPr/>
+          <p:nvPr/>
+        </p:nvSpPr>
+        <p:spPr>
+          <a:xfrm>
+            <a:off x="365760" y="5833872"/>
+            <a:ext cx="3474720" cy="329184"/>
+          </a:xfrm>
+          <a:prstGeom prst="roundRect">
+            <a:avLst>
+              <a:gd name="adj" fmla="val 22222"/>
+            </a:avLst>
+          </a:prstGeom>
+          <a:solidFill>
+            <a:srgbClr val="FFEDD5"/>
+          </a:solidFill>
+          <a:ln w="12700">
+            <a:solidFill>
+              <a:srgbClr val="FFEDD5"/>
+            </a:solidFill>
+            <a:prstDash val="solid"/>
+          </a:ln>
+        </p:spPr>
+      </p:sp>
+      <p:sp>
+        <p:nvSpPr>
+          <p:cNvPr id="38" name="Text 36"/>
+          <p:cNvSpPr/>
+          <p:nvPr/>
+        </p:nvSpPr>
+        <p:spPr>
+          <a:xfrm>
+            <a:off x="365760" y="5833872"/>
+            <a:ext cx="3474720" cy="329184"/>
+          </a:xfrm>
+          <a:prstGeom prst="rect">
+            <a:avLst/>
+          </a:prstGeom>
+          <a:noFill/>
+          <a:ln/>
+        </p:spPr>
+        <p:txBody>
+          <a:bodyPr wrap="square" rtlCol="0" anchor="ctr"/>
+          <a:lstStyle/>
+          <a:p>
+            <a:pPr algn="ctr" indent="0" marL="0">
+              <a:buNone/>
+            </a:pPr>
+            <a:r>
+              <a:rPr lang="en-US" sz="1200" b="1" dirty="0">
+                <a:solidFill>
+                  <a:srgbClr val="EA580C"/>
+                </a:solidFill>
+              </a:rPr>
+              <a:t>Pi Network SDK 인증</a:t>
+            </a:r>
+            <a:endParaRPr lang="en-US" sz="1200" dirty="0"/>
+          </a:p>
+        </p:txBody>
+      </p:sp>
+      <p:sp>
+        <p:nvSpPr>
+          <p:cNvPr id="39" name="Text 37"/>
+          <p:cNvSpPr/>
+          <p:nvPr/>
+        </p:nvSpPr>
+        <p:spPr>
+          <a:xfrm>
+            <a:off x="393192" y="6227064"/>
+            <a:ext cx="3419856" cy="694944"/>
+          </a:xfrm>
+          <a:prstGeom prst="rect">
+            <a:avLst/>
+          </a:prstGeom>
+          <a:noFill/>
+          <a:ln/>
+        </p:spPr>
+        <p:txBody>
+          <a:bodyPr wrap="square" rtlCol="0" anchor="ctr"/>
+          <a:lstStyle/>
+          <a:p>
+            <a:pPr indent="0" marL="0">
+              <a:buNone/>
+            </a:pPr>
+            <a:r>
+              <a:rPr lang="en-US" sz="1050" dirty="0">
+                <a:solidFill>
+                  <a:srgbClr val="6B7280"/>
+                </a:solidFill>
+              </a:rPr>
+              <a:t>Pi SDK 연동 (Mainnet 개방 후)</a:t>
+            </a:r>
+            <a:endParaRPr lang="en-US" sz="1050" dirty="0"/>
+          </a:p>
+          <a:p>
+            <a:pPr indent="0" marL="0">
+              <a:buNone/>
+            </a:pPr>
+            <a:r>
+              <a:rPr lang="en-US" sz="1050" dirty="0">
+                <a:solidFill>
+                  <a:srgbClr val="6B7280"/>
+                </a:solidFill>
+              </a:rPr>
+              <a:t>pi_uid / pi_username 필드 활성화</a:t>
+            </a:r>
+            <a:endParaRPr lang="en-US" sz="1050" dirty="0"/>
+          </a:p>
+          <a:p>
+            <a:pPr indent="0" marL="0">
+              <a:buNone/>
+            </a:pPr>
+            <a:r>
+              <a:rPr lang="en-US" sz="1050" dirty="0">
+                <a:solidFill>
+                  <a:srgbClr val="6B7280"/>
+                </a:solidFill>
+              </a:rPr>
+              <a:t>Pi 기반 로그인 플로우</a:t>
+            </a:r>
+            <a:endParaRPr lang="en-US" sz="1050" dirty="0"/>
+          </a:p>
+        </p:txBody>
+      </p:sp>
+      <p:sp>
+        <p:nvSpPr>
+          <p:cNvPr id="40" name="Shape 38"/>
+          <p:cNvSpPr/>
+          <p:nvPr/>
+        </p:nvSpPr>
+        <p:spPr>
+          <a:xfrm>
+            <a:off x="4133088" y="5715000"/>
+            <a:ext cx="3749040" cy="1280160"/>
+          </a:xfrm>
+          <a:prstGeom prst="roundRect">
+            <a:avLst>
+              <a:gd name="adj" fmla="val 9286"/>
+            </a:avLst>
+          </a:prstGeom>
+          <a:solidFill>
+            <a:srgbClr val="FFFFFF"/>
+          </a:solidFill>
+          <a:ln w="12700">
+            <a:solidFill>
+              <a:srgbClr val="E9D5FF"/>
+            </a:solidFill>
+            <a:prstDash val="solid"/>
+          </a:ln>
+        </p:spPr>
+      </p:sp>
+      <p:sp>
+        <p:nvSpPr>
+          <p:cNvPr id="41" name="Shape 39"/>
+          <p:cNvSpPr/>
+          <p:nvPr/>
+        </p:nvSpPr>
+        <p:spPr>
+          <a:xfrm>
+            <a:off x="4270248" y="5833872"/>
+            <a:ext cx="3474720" cy="329184"/>
+          </a:xfrm>
+          <a:prstGeom prst="roundRect">
+            <a:avLst>
+              <a:gd name="adj" fmla="val 22222"/>
+            </a:avLst>
+          </a:prstGeom>
+          <a:solidFill>
+            <a:srgbClr val="FFEDD5"/>
+          </a:solidFill>
+          <a:ln w="12700">
+            <a:solidFill>
+              <a:srgbClr val="FFEDD5"/>
+            </a:solidFill>
+            <a:prstDash val="solid"/>
+          </a:ln>
+        </p:spPr>
+      </p:sp>
+      <p:sp>
+        <p:nvSpPr>
+          <p:cNvPr id="42" name="Text 40"/>
+          <p:cNvSpPr/>
+          <p:nvPr/>
+        </p:nvSpPr>
+        <p:spPr>
+          <a:xfrm>
+            <a:off x="4270248" y="5833872"/>
+            <a:ext cx="3474720" cy="329184"/>
+          </a:xfrm>
+          <a:prstGeom prst="rect">
+            <a:avLst/>
+          </a:prstGeom>
+          <a:noFill/>
+          <a:ln/>
+        </p:spPr>
+        <p:txBody>
+          <a:bodyPr wrap="square" rtlCol="0" anchor="ctr"/>
+          <a:lstStyle/>
+          <a:p>
+            <a:pPr algn="ctr" indent="0" marL="0">
+              <a:buNone/>
+            </a:pPr>
+            <a:r>
+              <a:rPr lang="en-US" sz="1200" b="1" dirty="0">
+                <a:solidFill>
+                  <a:srgbClr val="EA580C"/>
+                </a:solidFill>
+              </a:rPr>
+              <a:t>Pi 코인 결제 연동</a:t>
+            </a:r>
+            <a:endParaRPr lang="en-US" sz="1200" dirty="0"/>
+          </a:p>
+        </p:txBody>
+      </p:sp>
+      <p:sp>
+        <p:nvSpPr>
+          <p:cNvPr id="43" name="Text 41"/>
+          <p:cNvSpPr/>
+          <p:nvPr/>
+        </p:nvSpPr>
+        <p:spPr>
+          <a:xfrm>
+            <a:off x="4297680" y="6227064"/>
+            <a:ext cx="3419856" cy="694944"/>
+          </a:xfrm>
+          <a:prstGeom prst="rect">
+            <a:avLst/>
+          </a:prstGeom>
+          <a:noFill/>
+          <a:ln/>
+        </p:spPr>
+        <p:txBody>
+          <a:bodyPr wrap="square" rtlCol="0" anchor="ctr"/>
+          <a:lstStyle/>
+          <a:p>
+            <a:pPr indent="0" marL="0">
+              <a:buNone/>
+            </a:pPr>
+            <a:r>
+              <a:rPr lang="en-US" sz="1050" dirty="0">
+                <a:solidFill>
+                  <a:srgbClr val="6B7280"/>
+                </a:solidFill>
+              </a:rPr>
+              <a:t>Pi 결제 API 연동</a:t>
+            </a:r>
+            <a:endParaRPr lang="en-US" sz="1050" dirty="0"/>
+          </a:p>
+          <a:p>
+            <a:pPr indent="0" marL="0">
+              <a:buNone/>
+            </a:pPr>
+            <a:r>
+              <a:rPr lang="en-US" sz="1050" dirty="0">
+                <a:solidFill>
+                  <a:srgbClr val="6B7280"/>
+                </a:solidFill>
+              </a:rPr>
+              <a:t>PICK ↔ Pi 토큰 전환</a:t>
+            </a:r>
+            <a:endParaRPr lang="en-US" sz="1050" dirty="0"/>
+          </a:p>
+          <a:p>
+            <a:pPr indent="0" marL="0">
+              <a:buNone/>
+            </a:pPr>
+            <a:r>
+              <a:rPr lang="en-US" sz="1050" dirty="0">
+                <a:solidFill>
+                  <a:srgbClr val="6B7280"/>
+                </a:solidFill>
+              </a:rPr>
+              <a:t>Pi 기반 정산 시스템</a:t>
+            </a:r>
+            <a:endParaRPr lang="en-US" sz="1050" dirty="0"/>
+          </a:p>
+        </p:txBody>
+      </p:sp>
+      <p:sp>
+        <p:nvSpPr>
+          <p:cNvPr id="44" name="Shape 42"/>
+          <p:cNvSpPr/>
+          <p:nvPr/>
+        </p:nvSpPr>
+        <p:spPr>
+          <a:xfrm>
+            <a:off x="8037576" y="5715000"/>
+            <a:ext cx="3749040" cy="1280160"/>
+          </a:xfrm>
+          <a:prstGeom prst="roundRect">
+            <a:avLst>
+              <a:gd name="adj" fmla="val 9286"/>
+            </a:avLst>
+          </a:prstGeom>
+          <a:solidFill>
+            <a:srgbClr val="FFFFFF"/>
+          </a:solidFill>
+          <a:ln w="12700">
+            <a:solidFill>
+              <a:srgbClr val="E9D5FF"/>
+            </a:solidFill>
+            <a:prstDash val="solid"/>
+          </a:ln>
+        </p:spPr>
+      </p:sp>
+      <p:sp>
+        <p:nvSpPr>
+          <p:cNvPr id="45" name="Shape 43"/>
+          <p:cNvSpPr/>
+          <p:nvPr/>
+        </p:nvSpPr>
+        <p:spPr>
+          <a:xfrm>
+            <a:off x="8174736" y="5833872"/>
+            <a:ext cx="3474720" cy="329184"/>
+          </a:xfrm>
+          <a:prstGeom prst="roundRect">
+            <a:avLst>
+              <a:gd name="adj" fmla="val 22222"/>
+            </a:avLst>
+          </a:prstGeom>
+          <a:solidFill>
+            <a:srgbClr val="FFEDD5"/>
+          </a:solidFill>
+          <a:ln w="12700">
+            <a:solidFill>
+              <a:srgbClr val="FFEDD5"/>
+            </a:solidFill>
+            <a:prstDash val="solid"/>
+          </a:ln>
+        </p:spPr>
+      </p:sp>
+      <p:sp>
+        <p:nvSpPr>
+          <p:cNvPr id="46" name="Text 44"/>
+          <p:cNvSpPr/>
+          <p:nvPr/>
+        </p:nvSpPr>
+        <p:spPr>
+          <a:xfrm>
+            <a:off x="8174736" y="5833872"/>
+            <a:ext cx="3474720" cy="329184"/>
+          </a:xfrm>
+          <a:prstGeom prst="rect">
+            <a:avLst/>
+          </a:prstGeom>
+          <a:noFill/>
+          <a:ln/>
+        </p:spPr>
+        <p:txBody>
+          <a:bodyPr wrap="square" rtlCol="0" anchor="ctr"/>
+          <a:lstStyle/>
+          <a:p>
+            <a:pPr algn="ctr" indent="0" marL="0">
+              <a:buNone/>
+            </a:pPr>
+            <a:r>
+              <a:rPr lang="en-US" sz="1200" b="1" dirty="0">
+                <a:solidFill>
+                  <a:srgbClr val="EA580C"/>
+                </a:solidFill>
+              </a:rPr>
+              <a:t>Pi 생태계 확장</a:t>
+            </a:r>
+            <a:endParaRPr lang="en-US" sz="1200" dirty="0"/>
+          </a:p>
+        </p:txBody>
+      </p:sp>
+      <p:sp>
+        <p:nvSpPr>
+          <p:cNvPr id="47" name="Text 45"/>
+          <p:cNvSpPr/>
+          <p:nvPr/>
+        </p:nvSpPr>
+        <p:spPr>
+          <a:xfrm>
+            <a:off x="8202168" y="6227064"/>
+            <a:ext cx="3419856" cy="694944"/>
+          </a:xfrm>
+          <a:prstGeom prst="rect">
+            <a:avLst/>
+          </a:prstGeom>
+          <a:noFill/>
+          <a:ln/>
+        </p:spPr>
+        <p:txBody>
+          <a:bodyPr wrap="square" rtlCol="0" anchor="ctr"/>
+          <a:lstStyle/>
+          <a:p>
+            <a:pPr indent="0" marL="0">
+              <a:buNone/>
+            </a:pPr>
+            <a:r>
+              <a:rPr lang="en-US" sz="1050" dirty="0">
+                <a:solidFill>
+                  <a:srgbClr val="6B7280"/>
+                </a:solidFill>
+              </a:rPr>
+              <a:t>Pi 마이닝 연동 혜택</a:t>
+            </a:r>
+            <a:endParaRPr lang="en-US" sz="1050" dirty="0"/>
+          </a:p>
+          <a:p>
+            <a:pPr indent="0" marL="0">
+              <a:buNone/>
+            </a:pPr>
+            <a:r>
+              <a:rPr lang="en-US" sz="1050" dirty="0">
+                <a:solidFill>
+                  <a:srgbClr val="6B7280"/>
+                </a:solidFill>
+              </a:rPr>
+              <a:t>Pi 홀더 전용 할인 쿠폰</a:t>
+            </a:r>
+            <a:endParaRPr lang="en-US" sz="1050" dirty="0"/>
+          </a:p>
+          <a:p>
+            <a:pPr indent="0" marL="0">
+              <a:buNone/>
+            </a:pPr>
+            <a:r>
+              <a:rPr lang="en-US" sz="1050" dirty="0">
+                <a:solidFill>
+                  <a:srgbClr val="6B7280"/>
+                </a:solidFill>
+              </a:rPr>
+              <a:t>Pi Network 커뮤니티 마케팅</a:t>
+            </a:r>
+            <a:endParaRPr lang="en-US" sz="1050" dirty="0"/>
+          </a:p>
+        </p:txBody>
+      </p:sp>
+    </p:spTree>
+  </p:cSld>
+  <p:clrMapOvr>
+    <a:masterClrMapping/>
+  </p:clrMapOvr>
+</p:sld>
+</file>
+
+<file path=ppt/slides/slide13.xml><?xml version="1.0" encoding="utf-8"?>
+<p:sld xmlns:a="http://schemas.openxmlformats.org/drawingml/2006/main" xmlns:r="http://schemas.openxmlformats.org/officeDocument/2006/relationships" xmlns:p="http://schemas.openxmlformats.org/presentationml/2006/main">
+  <p:cSld name="Slide 13">
+    <p:bg>
+      <p:bgPr>
+        <a:solidFill>
+          <a:srgbClr val="FAF5FF"/>
+        </a:solidFill>
+      </p:bgPr>
+    </p:bg>
+    <p:spTree>
+      <p:nvGrpSpPr>
+        <p:cNvPr id="1" name=""/>
+        <p:cNvGrpSpPr/>
+        <p:nvPr/>
+      </p:nvGrpSpPr>
+      <p:grpSpPr>
+        <a:xfrm>
+          <a:off x="0" y="0"/>
+          <a:ext cx="0" cy="0"/>
+          <a:chOff x="0" y="0"/>
+          <a:chExt cx="0" cy="0"/>
+        </a:xfrm>
+      </p:grpSpPr>
+      <p:sp>
+        <p:nvSpPr>
+          <p:cNvPr id="2" name="Text 0"/>
+          <p:cNvSpPr/>
+          <p:nvPr/>
+        </p:nvSpPr>
+        <p:spPr>
+          <a:xfrm>
+            <a:off x="365760" y="228600"/>
+            <a:ext cx="12070080" cy="594360"/>
+          </a:xfrm>
+          <a:prstGeom prst="rect">
+            <a:avLst/>
+          </a:prstGeom>
+          <a:noFill/>
+          <a:ln/>
+        </p:spPr>
+        <p:txBody>
+          <a:bodyPr wrap="square" rtlCol="0" anchor="ctr"/>
+          <a:lstStyle/>
+          <a:p>
+            <a:pPr indent="0" marL="0">
+              <a:buNone/>
+            </a:pPr>
+            <a:r>
+              <a:rPr lang="en-US" sz="2600" b="1" dirty="0">
+                <a:solidFill>
+                  <a:srgbClr val="4C1D95"/>
+                </a:solidFill>
+              </a:rPr>
               <a:t>🗺️  전체 개발 로드맵</a:t>
             </a:r>
             <a:endParaRPr lang="en-US" sz="2600" dirty="0"/>
@@ -5943,7 +7364,7 @@
                   <a:srgbClr val="1F1235"/>
                 </a:solidFill>
               </a:rPr>
-              <a:t>✅ 로그인/회원가입 + 카카오 소셜 로그인</a:t>
+              <a:t>✅ 로그인/회원가입 (이메일 단독 · 카카오 추후)</a:t>
             </a:r>
             <a:endParaRPr lang="en-US" sz="1000" dirty="0"/>
           </a:p>
@@ -6969,7 +8390,7 @@
                   <a:srgbClr val="1F1235"/>
                 </a:solidFill>
               </a:rPr>
-              <a:t>✅ 카카오 소셜 로그인</a:t>
+              <a:t>⏳ 카카오 소셜 로그인 (비즈니스 인증 후)</a:t>
             </a:r>
             <a:endParaRPr lang="en-US" sz="1000" dirty="0"/>
           </a:p>
@@ -7406,7 +8827,7 @@
                   <a:srgbClr val="4C1D95"/>
                 </a:solidFill>
               </a:rPr>
-              <a:t>📊  PICK PICK 진행 현황 (4/13 최종)</a:t>
+              <a:t>📊  PICK PICK 진행 현황 (4/14 최종)</a:t>
             </a:r>
             <a:endParaRPr lang="en-US" sz="2600" dirty="0"/>
           </a:p>
@@ -17659,7 +19080,7 @@
                   <a:srgbClr val="0D9488"/>
                 </a:solidFill>
               </a:rPr>
-              <a:t>📅  2026. 04. 13 (Day 7)</a:t>
+              <a:t>📅  2026. 04. 14 (Day 8)</a:t>
             </a:r>
             <a:endParaRPr lang="en-US" sz="1100" dirty="0"/>
           </a:p>
@@ -17695,7 +19116,7 @@
                   <a:srgbClr val="4C1D95"/>
                 </a:solidFill>
               </a:rPr>
-              <a:t>🏁  FCM 푸시 · 지도 수정 · 주소 검색 버그 · .env 완성</a:t>
+              <a:t>🔐  카카오 로그인 설정 · KOE205 원인 분석 · 이메일 로그인 단독 운영 확정</a:t>
             </a:r>
             <a:endParaRPr lang="en-US" sz="1800" dirty="0"/>
           </a:p>
@@ -17810,7 +19231,7 @@
                   <a:srgbClr val="000000"/>
                 </a:solidFill>
               </a:rPr>
-              <a:t>🗺️</a:t>
+              <a:t>🔐</a:t>
             </a:r>
             <a:endParaRPr lang="en-US" sz="1800" dirty="0"/>
           </a:p>
@@ -17846,7 +19267,7 @@
                   <a:srgbClr val="0D9488"/>
                 </a:solidFill>
               </a:rPr>
-              <a:t>KakaoMap SDK 수정</a:t>
+              <a:t>카카오 소셜 로그인 설정 시도</a:t>
             </a:r>
             <a:endParaRPr lang="en-US" sz="1200" dirty="0"/>
           </a:p>
@@ -17882,7 +19303,7 @@
                   <a:srgbClr val="1F1235"/>
                 </a:solidFill>
               </a:rPr>
-              <a:t>libraries=services 누락 수정</a:t>
+              <a:t>Supabase Kakao Provider 설정</a:t>
             </a:r>
             <a:endParaRPr lang="en-US" sz="1050" dirty="0"/>
           </a:p>
@@ -17896,7 +19317,7 @@
                   <a:srgbClr val="1F1235"/>
                 </a:solidFill>
               </a:rPr>
-              <a:t>onerror 핸들러 + 디버그 로깅 추가</a:t>
+              <a:t>REST API 키 + Client Secret 입력</a:t>
             </a:r>
             <a:endParaRPr lang="en-US" sz="1050" dirty="0"/>
           </a:p>
@@ -17910,7 +19331,7 @@
                   <a:srgbClr val="1F1235"/>
                 </a:solidFill>
               </a:rPr>
-              <a:t>스크립트 재로드 충돌 방지 로직</a:t>
+              <a:t>Redirect URI 등록 (플랫폼 키 페이지)</a:t>
             </a:r>
             <a:endParaRPr lang="en-US" sz="1050" dirty="0"/>
           </a:p>
@@ -18000,7 +19421,7 @@
                   <a:srgbClr val="000000"/>
                 </a:solidFill>
               </a:rPr>
-              <a:t>📍</a:t>
+              <a:t>❌</a:t>
             </a:r>
             <a:endParaRPr lang="en-US" sz="1800" dirty="0"/>
           </a:p>
@@ -18036,7 +19457,7 @@
                   <a:srgbClr val="0D9488"/>
                 </a:solidFill>
               </a:rPr>
-              <a:t>홈 위치 바 동적화</a:t>
+              <a:t>KOE205 에러 원인 분석</a:t>
             </a:r>
             <a:endParaRPr lang="en-US" sz="1200" dirty="0"/>
           </a:p>
@@ -18072,7 +19493,7 @@
                   <a:srgbClr val="1F1235"/>
                 </a:solidFill>
               </a:rPr>
-              <a:t>하드코딩 '역삼동' 제거</a:t>
+              <a:t>account_email 스코프 요청 거부</a:t>
             </a:r>
             <a:endParaRPr lang="en-US" sz="1050" dirty="0"/>
           </a:p>
@@ -18086,7 +19507,7 @@
                   <a:srgbClr val="1F1235"/>
                 </a:solidFill>
               </a:rPr>
-              <a:t>LocationBar.tsx 클라이언트 컴포넌트</a:t>
+              <a:t>Supabase가 내부적으로 이메일 요청</a:t>
             </a:r>
             <a:endParaRPr lang="en-US" sz="1050" dirty="0"/>
           </a:p>
@@ -18100,7 +19521,7 @@
                   <a:srgbClr val="1F1235"/>
                 </a:solidFill>
               </a:rPr>
-              <a:t>기본 배달 주소 API 연동 표시</a:t>
+              <a:t>비즈니스 인증 없이 이메일 스코프 불가</a:t>
             </a:r>
             <a:endParaRPr lang="en-US" sz="1050" dirty="0"/>
           </a:p>
@@ -18226,7 +19647,7 @@
                   <a:srgbClr val="0D9488"/>
                 </a:solidFill>
               </a:rPr>
-              <a:t>주소 검색 버그 수정</a:t>
+              <a:t>해결책 탐색</a:t>
             </a:r>
             <a:endParaRPr lang="en-US" sz="1200" dirty="0"/>
           </a:p>
@@ -18262,7 +19683,7 @@
                   <a:srgbClr val="1F1235"/>
                 </a:solidFill>
               </a:rPr>
-              <a:t>Daum Postcode embed 타이밍 버그</a:t>
+              <a:t>scopes 옵션 수정 시도 (효과 없음)</a:t>
             </a:r>
             <a:endParaRPr lang="en-US" sz="1050" dirty="0"/>
           </a:p>
@@ -18276,7 +19697,7 @@
                   <a:srgbClr val="1F1235"/>
                 </a:solidFill>
               </a:rPr>
-              <a:t>setSearchOpen → useEffect 패턴 변경</a:t>
+              <a:t>Allow users without email 토글 ON</a:t>
             </a:r>
             <a:endParaRPr lang="en-US" sz="1050" dirty="0"/>
           </a:p>
@@ -18290,7 +19711,7 @@
                   <a:srgbClr val="1F1235"/>
                 </a:solidFill>
               </a:rPr>
-              <a:t>DOM 마운트 후 embed 실행 보장</a:t>
+              <a:t>Supabase 하드코딩 scope 문제 확인</a:t>
             </a:r>
             <a:endParaRPr lang="en-US" sz="1050" dirty="0"/>
           </a:p>
@@ -18380,7 +19801,7 @@
                   <a:srgbClr val="000000"/>
                 </a:solidFill>
               </a:rPr>
-              <a:t>🔥</a:t>
+              <a:t>✅</a:t>
             </a:r>
             <a:endParaRPr lang="en-US" sz="1800" dirty="0"/>
           </a:p>
@@ -18416,7 +19837,7 @@
                   <a:srgbClr val="0D9488"/>
                 </a:solidFill>
               </a:rPr>
-              <a:t>Firebase 환경변수 완성</a:t>
+              <a:t>카카오 로그인 제거 결정</a:t>
             </a:r>
             <a:endParaRPr lang="en-US" sz="1200" dirty="0"/>
           </a:p>
@@ -18452,7 +19873,7 @@
                   <a:srgbClr val="1F1235"/>
                 </a:solidFill>
               </a:rPr>
-              <a:t>API Key ~ App ID 6개 설정</a:t>
+              <a:t>비즈니스 인증 후 재추가 예정</a:t>
             </a:r>
             <a:endParaRPr lang="en-US" sz="1050" dirty="0"/>
           </a:p>
@@ -18466,7 +19887,7 @@
                   <a:srgbClr val="1F1235"/>
                 </a:solidFill>
               </a:rPr>
-              <a:t>VAPID 키 (웹 푸시 인증서)</a:t>
+              <a:t>로그인 페이지 카카오 버튼 제거</a:t>
             </a:r>
             <a:endParaRPr lang="en-US" sz="1050" dirty="0"/>
           </a:p>
@@ -18480,7 +19901,7 @@
                   <a:srgbClr val="1F1235"/>
                 </a:solidFill>
               </a:rPr>
-              <a:t>Admin SDK JSON 서버 전용 키</a:t>
+              <a:t>이메일/비밀번호 로그인만 운영</a:t>
             </a:r>
             <a:endParaRPr lang="en-US" sz="1050" dirty="0"/>
           </a:p>
@@ -18570,7 +19991,7 @@
                   <a:srgbClr val="000000"/>
                 </a:solidFill>
               </a:rPr>
-              <a:t>🔑</a:t>
+              <a:t>🗺️</a:t>
             </a:r>
             <a:endParaRPr lang="en-US" sz="1800" dirty="0"/>
           </a:p>
@@ -18606,7 +20027,7 @@
                   <a:srgbClr val="0D9488"/>
                 </a:solidFill>
               </a:rPr>
-              <a:t>카카오 도메인 등록</a:t>
+              <a:t>카카오맵은 정상 유지</a:t>
             </a:r>
             <a:endParaRPr lang="en-US" sz="1200" dirty="0"/>
           </a:p>
@@ -18642,7 +20063,7 @@
                   <a:srgbClr val="1F1235"/>
                 </a:solidFill>
               </a:rPr>
-              <a:t>JS Key → JavaScript SDK 도메인</a:t>
+              <a:t>지도 SDK (JS Key) 정상 작동</a:t>
             </a:r>
             <a:endParaRPr lang="en-US" sz="1050" dirty="0"/>
           </a:p>
@@ -18656,7 +20077,7 @@
                   <a:srgbClr val="1F1235"/>
                 </a:solidFill>
               </a:rPr>
-              <a:t>http/https localhost:3000 등록</a:t>
+              <a:t>주소 검색 Daum Postcode 정상</a:t>
             </a:r>
             <a:endParaRPr lang="en-US" sz="1050" dirty="0"/>
           </a:p>
@@ -18670,7 +20091,7 @@
                   <a:srgbClr val="1F1235"/>
                 </a:solidFill>
               </a:rPr>
-              <a:t>기존 '사이트 도메인' → 이름 변경됨</a:t>
+              <a:t>소셜 로그인만 제거, 지도 무관</a:t>
             </a:r>
             <a:endParaRPr lang="en-US" sz="1050" dirty="0"/>
           </a:p>
@@ -18796,7 +20217,7 @@
                   <a:srgbClr val="0D9488"/>
                 </a:solidFill>
               </a:rPr>
-              <a:t>런칭 준비 진행 중</a:t>
+              <a:t>다음 단계: Vercel 배포</a:t>
             </a:r>
             <a:endParaRPr lang="en-US" sz="1200" dirty="0"/>
           </a:p>
@@ -18832,7 +20253,7 @@
                   <a:srgbClr val="1F1235"/>
                 </a:solidFill>
               </a:rPr>
-              <a:t>Kakao API 키 타입 확인 필요</a:t>
+              <a:t>이메일 로그인 단독 운영 확정</a:t>
             </a:r>
             <a:endParaRPr lang="en-US" sz="1050" dirty="0"/>
           </a:p>
@@ -18846,7 +20267,7 @@
                   <a:srgbClr val="1F1235"/>
                 </a:solidFill>
               </a:rPr>
-              <a:t>앱 키 JavaScript 키 재확인</a:t>
+              <a:t>샘플 데이터 추가 후 배포 예정</a:t>
             </a:r>
             <a:endParaRPr lang="en-US" sz="1050" dirty="0"/>
           </a:p>
@@ -18860,7 +20281,7 @@
                   <a:srgbClr val="1F1235"/>
                 </a:solidFill>
               </a:rPr>
-              <a:t>Vercel 배포 전 최종 점검 단계</a:t>
+              <a:t>카카오 비즈니스 인증 별도 진행</a:t>
             </a:r>
             <a:endParaRPr lang="en-US" sz="1050" dirty="0"/>
           </a:p>

--- a/PICKPICK_프로젝트현황.pptx
+++ b/PICKPICK_프로젝트현황.pptx
@@ -18,9 +18,10 @@
     <p:sldId id="266" r:id="rId12"/>
     <p:sldId id="267" r:id="rId13"/>
     <p:sldId id="268" r:id="rId14"/>
+    <p:sldId id="269" r:id="rId15"/>
   </p:sldIdLst>
   <p:notesMasterIdLst>
-    <p:notesMasterId r:id="rId15"/>
+    <p:notesMasterId r:id="rId16"/>
   </p:notesMasterIdLst>
   <p:sldSz cx="12192000" cy="6858000"/>
   <p:notesSz cx="6858000" cy="12192000"/>
@@ -908,6 +909,94 @@
 </p:notes>
 </file>
 
+<file path=ppt/notesSlides/notesSlide14.xml><?xml version="1.0" encoding="utf-8"?>
+<p:notes xmlns:a="http://schemas.openxmlformats.org/drawingml/2006/main" xmlns:r="http://schemas.openxmlformats.org/officeDocument/2006/relationships" xmlns:p="http://schemas.openxmlformats.org/presentationml/2006/main">
+  <p:cSld>
+    <p:spTree>
+      <p:nvGrpSpPr>
+        <p:cNvPr id="1" name=""/>
+        <p:cNvGrpSpPr/>
+        <p:nvPr/>
+      </p:nvGrpSpPr>
+      <p:grpSpPr>
+        <a:xfrm>
+          <a:off x="0" y="0"/>
+          <a:ext cx="0" cy="0"/>
+          <a:chOff x="0" y="0"/>
+          <a:chExt cx="0" cy="0"/>
+        </a:xfrm>
+      </p:grpSpPr>
+      <p:sp>
+        <p:nvSpPr>
+          <p:cNvPr id="2" name="Slide Image Placeholder 1"/>
+          <p:cNvSpPr>
+            <a:spLocks noGrp="1" noRot="1" noChangeAspect="1"/>
+          </p:cNvSpPr>
+          <p:nvPr>
+            <p:ph type="sldImg"/>
+          </p:nvPr>
+        </p:nvSpPr>
+        <p:spPr/>
+      </p:sp>
+      <p:sp>
+        <p:nvSpPr>
+          <p:cNvPr id="3" name="Notes Placeholder 2"/>
+          <p:cNvSpPr>
+            <a:spLocks noGrp="1"/>
+          </p:cNvSpPr>
+          <p:nvPr>
+            <p:ph type="body" idx="1"/>
+          </p:nvPr>
+        </p:nvSpPr>
+        <p:spPr/>
+        <p:txBody>
+          <a:bodyPr/>
+          <a:lstStyle/>
+          <a:p>
+            <a:r>
+              <a:rPr lang="en-US" dirty="0"/>
+              <a:t/>
+            </a:r>
+            <a:endParaRPr lang="en-US" dirty="0"/>
+          </a:p>
+        </p:txBody>
+      </p:sp>
+      <p:sp>
+        <p:nvSpPr>
+          <p:cNvPr id="4" name="Slide Number Placeholder 3"/>
+          <p:cNvSpPr>
+            <a:spLocks noGrp="1"/>
+          </p:cNvSpPr>
+          <p:nvPr>
+            <p:ph type="sldNum" sz="quarter" idx="10"/>
+          </p:nvPr>
+        </p:nvSpPr>
+        <p:spPr/>
+        <p:txBody>
+          <a:bodyPr/>
+          <a:lstStyle/>
+          <a:p>
+            <a:fld id="{F7021451-1387-4CA6-816F-3879F97B5CBC}" type="slidenum">
+              <a:rPr lang="en-US"/>
+              <a:t>14</a:t>
+            </a:fld>
+            <a:endParaRPr lang="en-US"/>
+          </a:p>
+        </p:txBody>
+      </p:sp>
+    </p:spTree>
+    <p:extLst>
+      <p:ext uri="{BB962C8B-B14F-4D97-AF65-F5344CB8AC3E}">
+        <p14:creationId xmlns:p14="http://schemas.microsoft.com/office/powerpoint/2010/main" val="1024086991"/>
+      </p:ext>
+    </p:extLst>
+  </p:cSld>
+  <p:clrMapOvr>
+    <a:masterClrMapping/>
+  </p:clrMapOvr>
+</p:notes>
+</file>
+
 <file path=ppt/notesSlides/notesSlide2.xml><?xml version="1.0" encoding="utf-8"?>
 <p:notes xmlns:a="http://schemas.openxmlformats.org/drawingml/2006/main" xmlns:r="http://schemas.openxmlformats.org/officeDocument/2006/relationships" xmlns:p="http://schemas.openxmlformats.org/presentationml/2006/main">
   <p:cSld>
@@ -2162,7 +2251,7 @@
                   <a:srgbClr val="C4B5FD"/>
                 </a:solidFill>
               </a:rPr>
-              <a:t>2026년 4월 14일  |  알림음 TTS 완성 · 라이더 실시간 알림 · 주문 플로우 버그 수정</a:t>
+              <a:t>2026년 4월 16일  |  지갑 탭 재디자인 · 출석 Tap-to-Earn · 사장님 자체 리워드 설정</a:t>
             </a:r>
             <a:endParaRPr lang="en-US" sz="1400" dirty="0"/>
           </a:p>
@@ -3606,79 +3695,18 @@
       </p:grpSpPr>
       <p:sp>
         <p:nvSpPr>
-          <p:cNvPr id="2" name="Text 0"/>
-          <p:cNvSpPr/>
-          <p:nvPr/>
-        </p:nvSpPr>
-        <p:spPr>
-          <a:xfrm>
-            <a:off x="365760" y="228600"/>
-            <a:ext cx="12070080" cy="594360"/>
-          </a:xfrm>
-          <a:prstGeom prst="rect">
-            <a:avLst/>
-          </a:prstGeom>
-          <a:noFill/>
-          <a:ln/>
-        </p:spPr>
-        <p:txBody>
-          <a:bodyPr wrap="square" rtlCol="0" anchor="ctr"/>
-          <a:lstStyle/>
-          <a:p>
-            <a:pPr indent="0" marL="0">
-              <a:buNone/>
-            </a:pPr>
-            <a:r>
-              <a:rPr lang="en-US" sz="2400" b="1" dirty="0">
-                <a:solidFill>
-                  <a:srgbClr val="4C1D95"/>
-                </a:solidFill>
-              </a:rPr>
-              <a:t>✅  완료된 기능 전체 목록 (4/14 최종)</a:t>
-            </a:r>
-            <a:endParaRPr lang="en-US" sz="2400" dirty="0"/>
-          </a:p>
-        </p:txBody>
-      </p:sp>
-      <p:sp>
-        <p:nvSpPr>
-          <p:cNvPr id="3" name="Shape 1"/>
-          <p:cNvSpPr/>
-          <p:nvPr/>
-        </p:nvSpPr>
-        <p:spPr>
-          <a:xfrm>
-            <a:off x="365760" y="804672"/>
-            <a:ext cx="3840480" cy="45720"/>
-          </a:xfrm>
-          <a:prstGeom prst="rect">
-            <a:avLst/>
-          </a:prstGeom>
-          <a:solidFill>
-            <a:srgbClr val="16A34A"/>
-          </a:solidFill>
-          <a:ln w="12700">
-            <a:solidFill>
-              <a:srgbClr val="16A34A"/>
-            </a:solidFill>
-            <a:prstDash val="solid"/>
-          </a:ln>
-        </p:spPr>
-      </p:sp>
-      <p:sp>
-        <p:nvSpPr>
-          <p:cNvPr id="4" name="Shape 2"/>
-          <p:cNvSpPr/>
-          <p:nvPr/>
-        </p:nvSpPr>
-        <p:spPr>
-          <a:xfrm>
-            <a:off x="228600" y="960120"/>
-            <a:ext cx="3749040" cy="2423160"/>
+          <p:cNvPr id="2" name="Shape 0"/>
+          <p:cNvSpPr/>
+          <p:nvPr/>
+        </p:nvSpPr>
+        <p:spPr>
+          <a:xfrm>
+            <a:off x="365760" y="164592"/>
+            <a:ext cx="2651760" cy="502920"/>
           </a:xfrm>
           <a:prstGeom prst="roundRect">
             <a:avLst>
-              <a:gd name="adj" fmla="val 5660"/>
+              <a:gd name="adj" fmla="val 18182"/>
             </a:avLst>
           </a:prstGeom>
           <a:solidFill>
@@ -3694,26 +3722,96 @@
       </p:sp>
       <p:sp>
         <p:nvSpPr>
+          <p:cNvPr id="3" name="Text 1"/>
+          <p:cNvSpPr/>
+          <p:nvPr/>
+        </p:nvSpPr>
+        <p:spPr>
+          <a:xfrm>
+            <a:off x="365760" y="164592"/>
+            <a:ext cx="2651760" cy="502920"/>
+          </a:xfrm>
+          <a:prstGeom prst="rect">
+            <a:avLst/>
+          </a:prstGeom>
+          <a:noFill/>
+          <a:ln/>
+        </p:spPr>
+        <p:txBody>
+          <a:bodyPr wrap="square" rtlCol="0" anchor="ctr"/>
+          <a:lstStyle/>
+          <a:p>
+            <a:pPr algn="ctr" indent="0" marL="0">
+              <a:buNone/>
+            </a:pPr>
+            <a:r>
+              <a:rPr lang="en-US" sz="1100" b="1" dirty="0">
+                <a:solidFill>
+                  <a:srgbClr val="6B21A8"/>
+                </a:solidFill>
+              </a:rPr>
+              <a:t>📅  2026. 04. 16 (Day 10)</a:t>
+            </a:r>
+            <a:endParaRPr lang="en-US" sz="1100" dirty="0"/>
+          </a:p>
+        </p:txBody>
+      </p:sp>
+      <p:sp>
+        <p:nvSpPr>
+          <p:cNvPr id="4" name="Text 2"/>
+          <p:cNvSpPr/>
+          <p:nvPr/>
+        </p:nvSpPr>
+        <p:spPr>
+          <a:xfrm>
+            <a:off x="3200400" y="201168"/>
+            <a:ext cx="9235440" cy="502920"/>
+          </a:xfrm>
+          <a:prstGeom prst="rect">
+            <a:avLst/>
+          </a:prstGeom>
+          <a:noFill/>
+          <a:ln/>
+        </p:spPr>
+        <p:txBody>
+          <a:bodyPr wrap="square" rtlCol="0" anchor="ctr"/>
+          <a:lstStyle/>
+          <a:p>
+            <a:pPr indent="0" marL="0">
+              <a:buNone/>
+            </a:pPr>
+            <a:r>
+              <a:rPr lang="en-US" sz="1900" b="1" dirty="0">
+                <a:solidFill>
+                  <a:srgbClr val="4C1D95"/>
+                </a:solidFill>
+              </a:rPr>
+              <a:t>💜  지갑 재디자인 · Tap-to-Earn · 사장님 자체 리워드 설정</a:t>
+            </a:r>
+            <a:endParaRPr lang="en-US" sz="1900" dirty="0"/>
+          </a:p>
+        </p:txBody>
+      </p:sp>
+      <p:sp>
+        <p:nvSpPr>
           <p:cNvPr id="5" name="Shape 3"/>
           <p:cNvSpPr/>
           <p:nvPr/>
         </p:nvSpPr>
         <p:spPr>
           <a:xfrm>
-            <a:off x="338328" y="1069848"/>
-            <a:ext cx="3529584" cy="384048"/>
-          </a:xfrm>
-          <a:prstGeom prst="roundRect">
-            <a:avLst>
-              <a:gd name="adj" fmla="val 19048"/>
-            </a:avLst>
-          </a:prstGeom>
-          <a:solidFill>
-            <a:srgbClr val="6B21A8"/>
+            <a:off x="365760" y="713232"/>
+            <a:ext cx="11704320" cy="36576"/>
+          </a:xfrm>
+          <a:prstGeom prst="rect">
+            <a:avLst/>
+          </a:prstGeom>
+          <a:solidFill>
+            <a:srgbClr val="E9D5FF"/>
           </a:solidFill>
           <a:ln w="12700">
             <a:solidFill>
-              <a:srgbClr val="6B21A8"/>
+              <a:srgbClr val="E9D5FF"/>
             </a:solidFill>
             <a:prstDash val="solid"/>
           </a:ln>
@@ -3721,242 +3819,26 @@
       </p:sp>
       <p:sp>
         <p:nvSpPr>
-          <p:cNvPr id="6" name="Text 4"/>
-          <p:cNvSpPr/>
-          <p:nvPr/>
-        </p:nvSpPr>
-        <p:spPr>
-          <a:xfrm>
-            <a:off x="338328" y="1069848"/>
-            <a:ext cx="3529584" cy="384048"/>
-          </a:xfrm>
-          <a:prstGeom prst="rect">
-            <a:avLst/>
-          </a:prstGeom>
-          <a:noFill/>
-          <a:ln/>
-        </p:spPr>
-        <p:txBody>
-          <a:bodyPr wrap="square" rtlCol="0" anchor="ctr"/>
-          <a:lstStyle/>
-          <a:p>
-            <a:pPr algn="ctr" indent="0" marL="0">
-              <a:buNone/>
-            </a:pPr>
-            <a:r>
-              <a:rPr lang="en-US" sz="1200" b="1" dirty="0">
-                <a:solidFill>
-                  <a:srgbClr val="FFFFFF"/>
-                </a:solidFill>
-              </a:rPr>
-              <a:t>🔐 인증 / 사용자 관리</a:t>
-            </a:r>
-            <a:endParaRPr lang="en-US" sz="1200" dirty="0"/>
-          </a:p>
-        </p:txBody>
-      </p:sp>
-      <p:sp>
-        <p:nvSpPr>
-          <p:cNvPr id="7" name="Text 5"/>
-          <p:cNvSpPr/>
-          <p:nvPr/>
-        </p:nvSpPr>
-        <p:spPr>
-          <a:xfrm>
-            <a:off x="393192" y="1554480"/>
-            <a:ext cx="3401568" cy="338328"/>
-          </a:xfrm>
-          <a:prstGeom prst="rect">
-            <a:avLst/>
-          </a:prstGeom>
-          <a:noFill/>
-          <a:ln/>
-        </p:spPr>
-        <p:txBody>
-          <a:bodyPr wrap="square" rtlCol="0" anchor="ctr"/>
-          <a:lstStyle/>
-          <a:p>
-            <a:pPr indent="0" marL="0">
-              <a:buNone/>
-            </a:pPr>
-            <a:r>
-              <a:rPr lang="en-US" sz="1000" dirty="0">
-                <a:solidFill>
-                  <a:srgbClr val="1F1235"/>
-                </a:solidFill>
-              </a:rPr>
-              <a:t>✓  이메일 로그인/회원가입 + 지갑 자동생성</a:t>
-            </a:r>
-            <a:endParaRPr lang="en-US" sz="1000" dirty="0"/>
-          </a:p>
-        </p:txBody>
-      </p:sp>
-      <p:sp>
-        <p:nvSpPr>
-          <p:cNvPr id="8" name="Text 6"/>
-          <p:cNvSpPr/>
-          <p:nvPr/>
-        </p:nvSpPr>
-        <p:spPr>
-          <a:xfrm>
-            <a:off x="393192" y="1901952"/>
-            <a:ext cx="3401568" cy="338328"/>
-          </a:xfrm>
-          <a:prstGeom prst="rect">
-            <a:avLst/>
-          </a:prstGeom>
-          <a:noFill/>
-          <a:ln/>
-        </p:spPr>
-        <p:txBody>
-          <a:bodyPr wrap="square" rtlCol="0" anchor="ctr"/>
-          <a:lstStyle/>
-          <a:p>
-            <a:pPr indent="0" marL="0">
-              <a:buNone/>
-            </a:pPr>
-            <a:r>
-              <a:rPr lang="en-US" sz="1000" dirty="0">
-                <a:solidFill>
-                  <a:srgbClr val="1F1235"/>
-                </a:solidFill>
-              </a:rPr>
-              <a:t>✓  카카오 소셜 로그인 (비즈니스 인증 후 재추가)</a:t>
-            </a:r>
-            <a:endParaRPr lang="en-US" sz="1000" dirty="0"/>
-          </a:p>
-        </p:txBody>
-      </p:sp>
-      <p:sp>
-        <p:nvSpPr>
-          <p:cNvPr id="9" name="Text 7"/>
-          <p:cNvSpPr/>
-          <p:nvPr/>
-        </p:nvSpPr>
-        <p:spPr>
-          <a:xfrm>
-            <a:off x="393192" y="2249424"/>
-            <a:ext cx="3401568" cy="338328"/>
-          </a:xfrm>
-          <a:prstGeom prst="rect">
-            <a:avLst/>
-          </a:prstGeom>
-          <a:noFill/>
-          <a:ln/>
-        </p:spPr>
-        <p:txBody>
-          <a:bodyPr wrap="square" rtlCol="0" anchor="ctr"/>
-          <a:lstStyle/>
-          <a:p>
-            <a:pPr indent="0" marL="0">
-              <a:buNone/>
-            </a:pPr>
-            <a:r>
-              <a:rPr lang="en-US" sz="1000" dirty="0">
-                <a:solidFill>
-                  <a:srgbClr val="1F1235"/>
-                </a:solidFill>
-              </a:rPr>
-              <a:t>✓  RBAC 미들웨어 (user/owner/rider/admin)</a:t>
-            </a:r>
-            <a:endParaRPr lang="en-US" sz="1000" dirty="0"/>
-          </a:p>
-        </p:txBody>
-      </p:sp>
-      <p:sp>
-        <p:nvSpPr>
-          <p:cNvPr id="10" name="Text 8"/>
-          <p:cNvSpPr/>
-          <p:nvPr/>
-        </p:nvSpPr>
-        <p:spPr>
-          <a:xfrm>
-            <a:off x="393192" y="2596896"/>
-            <a:ext cx="3401568" cy="338328"/>
-          </a:xfrm>
-          <a:prstGeom prst="rect">
-            <a:avLst/>
-          </a:prstGeom>
-          <a:noFill/>
-          <a:ln/>
-        </p:spPr>
-        <p:txBody>
-          <a:bodyPr wrap="square" rtlCol="0" anchor="ctr"/>
-          <a:lstStyle/>
-          <a:p>
-            <a:pPr indent="0" marL="0">
-              <a:buNone/>
-            </a:pPr>
-            <a:r>
-              <a:rPr lang="en-US" sz="1000" dirty="0">
-                <a:solidFill>
-                  <a:srgbClr val="1F1235"/>
-                </a:solidFill>
-              </a:rPr>
-              <a:t>✓  비밀번호 찾기·재설정 + 검색 히스토리</a:t>
-            </a:r>
-            <a:endParaRPr lang="en-US" sz="1000" dirty="0"/>
-          </a:p>
-        </p:txBody>
-      </p:sp>
-      <p:sp>
-        <p:nvSpPr>
-          <p:cNvPr id="11" name="Text 9"/>
-          <p:cNvSpPr/>
-          <p:nvPr/>
-        </p:nvSpPr>
-        <p:spPr>
-          <a:xfrm>
-            <a:off x="393192" y="2944368"/>
-            <a:ext cx="3401568" cy="338328"/>
-          </a:xfrm>
-          <a:prstGeom prst="rect">
-            <a:avLst/>
-          </a:prstGeom>
-          <a:noFill/>
-          <a:ln/>
-        </p:spPr>
-        <p:txBody>
-          <a:bodyPr wrap="square" rtlCol="0" anchor="ctr"/>
-          <a:lstStyle/>
-          <a:p>
-            <a:pPr indent="0" marL="0">
-              <a:buNone/>
-            </a:pPr>
-            <a:r>
-              <a:rPr lang="en-US" sz="1000" dirty="0">
-                <a:solidFill>
-                  <a:srgbClr val="1F1235"/>
-                </a:solidFill>
-              </a:rPr>
-              <a:t>✓  프로필 수정 + 다중 배달 주소 + 레퍼럴</a:t>
-            </a:r>
-            <a:endParaRPr lang="en-US" sz="1000" dirty="0"/>
-          </a:p>
-        </p:txBody>
-      </p:sp>
-      <p:sp>
-        <p:nvSpPr>
-          <p:cNvPr id="12" name="Shape 10"/>
-          <p:cNvSpPr/>
-          <p:nvPr/>
-        </p:nvSpPr>
-        <p:spPr>
-          <a:xfrm>
-            <a:off x="4160520" y="960120"/>
-            <a:ext cx="3749040" cy="2423160"/>
+          <p:cNvPr id="6" name="Shape 4"/>
+          <p:cNvSpPr/>
+          <p:nvPr/>
+        </p:nvSpPr>
+        <p:spPr>
+          <a:xfrm>
+            <a:off x="228600" y="914400"/>
+            <a:ext cx="3749040" cy="2148840"/>
           </a:xfrm>
           <a:prstGeom prst="roundRect">
             <a:avLst>
-              <a:gd name="adj" fmla="val 5660"/>
+              <a:gd name="adj" fmla="val 6383"/>
             </a:avLst>
           </a:prstGeom>
           <a:solidFill>
-            <a:srgbClr val="E0F2FE"/>
+            <a:srgbClr val="EDE9FE"/>
           </a:solidFill>
           <a:ln w="12700">
             <a:solidFill>
-              <a:srgbClr val="0369A1"/>
+              <a:srgbClr val="C4B5FD"/>
             </a:solidFill>
             <a:prstDash val="solid"/>
           </a:ln>
@@ -3964,26 +3846,26 @@
       </p:sp>
       <p:sp>
         <p:nvSpPr>
-          <p:cNvPr id="13" name="Shape 11"/>
-          <p:cNvSpPr/>
-          <p:nvPr/>
-        </p:nvSpPr>
-        <p:spPr>
-          <a:xfrm>
-            <a:off x="4270248" y="1069848"/>
-            <a:ext cx="3529584" cy="384048"/>
+          <p:cNvPr id="7" name="Shape 5"/>
+          <p:cNvSpPr/>
+          <p:nvPr/>
+        </p:nvSpPr>
+        <p:spPr>
+          <a:xfrm>
+            <a:off x="393192" y="1097280"/>
+            <a:ext cx="530352" cy="530352"/>
           </a:xfrm>
           <a:prstGeom prst="roundRect">
             <a:avLst>
-              <a:gd name="adj" fmla="val 19048"/>
+              <a:gd name="adj" fmla="val 17241"/>
             </a:avLst>
           </a:prstGeom>
           <a:solidFill>
-            <a:srgbClr val="0369A1"/>
+            <a:srgbClr val="FFFFFF"/>
           </a:solidFill>
           <a:ln w="12700">
             <a:solidFill>
-              <a:srgbClr val="0369A1"/>
+              <a:srgbClr val="C4B5FD"/>
             </a:solidFill>
             <a:prstDash val="solid"/>
           </a:ln>
@@ -3991,14 +3873,14 @@
       </p:sp>
       <p:sp>
         <p:nvSpPr>
-          <p:cNvPr id="14" name="Text 12"/>
-          <p:cNvSpPr/>
-          <p:nvPr/>
-        </p:nvSpPr>
-        <p:spPr>
-          <a:xfrm>
-            <a:off x="4270248" y="1069848"/>
-            <a:ext cx="3529584" cy="384048"/>
+          <p:cNvPr id="8" name="Text 6"/>
+          <p:cNvSpPr/>
+          <p:nvPr/>
+        </p:nvSpPr>
+        <p:spPr>
+          <a:xfrm>
+            <a:off x="393192" y="1078992"/>
+            <a:ext cx="548640" cy="548640"/>
           </a:xfrm>
           <a:prstGeom prst="rect">
             <a:avLst/>
@@ -4014,12 +3896,48 @@
               <a:buNone/>
             </a:pPr>
             <a:r>
+              <a:rPr lang="en-US" sz="1800" dirty="0">
+                <a:solidFill>
+                  <a:srgbClr val="000000"/>
+                </a:solidFill>
+              </a:rPr>
+              <a:t>💜</a:t>
+            </a:r>
+            <a:endParaRPr lang="en-US" sz="1800" dirty="0"/>
+          </a:p>
+        </p:txBody>
+      </p:sp>
+      <p:sp>
+        <p:nvSpPr>
+          <p:cNvPr id="9" name="Text 7"/>
+          <p:cNvSpPr/>
+          <p:nvPr/>
+        </p:nvSpPr>
+        <p:spPr>
+          <a:xfrm>
+            <a:off x="1033272" y="1115568"/>
+            <a:ext cx="2743200" cy="365760"/>
+          </a:xfrm>
+          <a:prstGeom prst="rect">
+            <a:avLst/>
+          </a:prstGeom>
+          <a:noFill/>
+          <a:ln/>
+        </p:spPr>
+        <p:txBody>
+          <a:bodyPr wrap="square" rtlCol="0" anchor="ctr"/>
+          <a:lstStyle/>
+          <a:p>
+            <a:pPr indent="0" marL="0">
+              <a:buNone/>
+            </a:pPr>
+            <a:r>
               <a:rPr lang="en-US" sz="1200" b="1" dirty="0">
                 <a:solidFill>
-                  <a:srgbClr val="FFFFFF"/>
-                </a:solidFill>
-              </a:rPr>
-              <a:t>🏠 사용자 탭 (4개) + UX</a:t>
+                  <a:srgbClr val="6B21A8"/>
+                </a:solidFill>
+              </a:rPr>
+              <a:t>지갑 탭 전면 재디자인</a:t>
             </a:r>
             <a:endParaRPr lang="en-US" sz="1200" dirty="0"/>
           </a:p>
@@ -4027,206 +3945,104 @@
       </p:sp>
       <p:sp>
         <p:nvSpPr>
-          <p:cNvPr id="15" name="Text 13"/>
-          <p:cNvSpPr/>
-          <p:nvPr/>
-        </p:nvSpPr>
-        <p:spPr>
-          <a:xfrm>
-            <a:off x="4325112" y="1554480"/>
-            <a:ext cx="3401568" cy="338328"/>
-          </a:xfrm>
-          <a:prstGeom prst="rect">
-            <a:avLst/>
-          </a:prstGeom>
-          <a:noFill/>
-          <a:ln/>
-        </p:spPr>
-        <p:txBody>
-          <a:bodyPr wrap="square" rtlCol="0" anchor="ctr"/>
-          <a:lstStyle/>
-          <a:p>
-            <a:pPr indent="0" marL="0">
-              <a:buNone/>
-            </a:pPr>
-            <a:r>
-              <a:rPr lang="en-US" sz="1000" dirty="0">
-                <a:solidFill>
-                  <a:srgbClr val="1F1235"/>
-                </a:solidFill>
-              </a:rPr>
-              <a:t>✓  홈: 카테고리·검색(GIN)·인기가게·광고</a:t>
-            </a:r>
-            <a:endParaRPr lang="en-US" sz="1000" dirty="0"/>
-          </a:p>
-        </p:txBody>
-      </p:sp>
-      <p:sp>
-        <p:nvSpPr>
-          <p:cNvPr id="16" name="Text 14"/>
-          <p:cNvSpPr/>
-          <p:nvPr/>
-        </p:nvSpPr>
-        <p:spPr>
-          <a:xfrm>
-            <a:off x="4325112" y="1901952"/>
-            <a:ext cx="3401568" cy="338328"/>
-          </a:xfrm>
-          <a:prstGeom prst="rect">
-            <a:avLst/>
-          </a:prstGeom>
-          <a:noFill/>
-          <a:ln/>
-        </p:spPr>
-        <p:txBody>
-          <a:bodyPr wrap="square" rtlCol="0" anchor="ctr"/>
-          <a:lstStyle/>
-          <a:p>
-            <a:pPr indent="0" marL="0">
-              <a:buNone/>
-            </a:pPr>
-            <a:r>
-              <a:rPr lang="en-US" sz="1000" dirty="0">
-                <a:solidFill>
-                  <a:srgbClr val="1F1235"/>
-                </a:solidFill>
-              </a:rPr>
-              <a:t>✓  지갑: 실잔액 + 충전 + PICK 보내기</a:t>
-            </a:r>
-            <a:endParaRPr lang="en-US" sz="1000" dirty="0"/>
-          </a:p>
-        </p:txBody>
-      </p:sp>
-      <p:sp>
-        <p:nvSpPr>
-          <p:cNvPr id="17" name="Text 15"/>
-          <p:cNvSpPr/>
-          <p:nvPr/>
-        </p:nvSpPr>
-        <p:spPr>
-          <a:xfrm>
-            <a:off x="4325112" y="2249424"/>
-            <a:ext cx="3401568" cy="338328"/>
-          </a:xfrm>
-          <a:prstGeom prst="rect">
-            <a:avLst/>
-          </a:prstGeom>
-          <a:noFill/>
-          <a:ln/>
-        </p:spPr>
-        <p:txBody>
-          <a:bodyPr wrap="square" rtlCol="0" anchor="ctr"/>
-          <a:lstStyle/>
-          <a:p>
-            <a:pPr indent="0" marL="0">
-              <a:buNone/>
-            </a:pPr>
-            <a:r>
-              <a:rPr lang="en-US" sz="1000" dirty="0">
-                <a:solidFill>
-                  <a:srgbClr val="1F1235"/>
-                </a:solidFill>
-              </a:rPr>
-              <a:t>✓  PICK주문: Realtime 추적 + 상세 + 재주문</a:t>
-            </a:r>
-            <a:endParaRPr lang="en-US" sz="1000" dirty="0"/>
-          </a:p>
-        </p:txBody>
-      </p:sp>
-      <p:sp>
-        <p:nvSpPr>
-          <p:cNvPr id="18" name="Text 16"/>
-          <p:cNvSpPr/>
-          <p:nvPr/>
-        </p:nvSpPr>
-        <p:spPr>
-          <a:xfrm>
-            <a:off x="4325112" y="2596896"/>
-            <a:ext cx="3401568" cy="338328"/>
-          </a:xfrm>
-          <a:prstGeom prst="rect">
-            <a:avLst/>
-          </a:prstGeom>
-          <a:noFill/>
-          <a:ln/>
-        </p:spPr>
-        <p:txBody>
-          <a:bodyPr wrap="square" rtlCol="0" anchor="ctr"/>
-          <a:lstStyle/>
-          <a:p>
-            <a:pPr indent="0" marL="0">
-              <a:buNone/>
-            </a:pPr>
-            <a:r>
-              <a:rPr lang="en-US" sz="1000" dirty="0">
-                <a:solidFill>
-                  <a:srgbClr val="1F1235"/>
-                </a:solidFill>
-              </a:rPr>
-              <a:t>✓  알림 드로어 + 딥링크 + 자동 트리거</a:t>
-            </a:r>
-            <a:endParaRPr lang="en-US" sz="1000" dirty="0"/>
-          </a:p>
-        </p:txBody>
-      </p:sp>
-      <p:sp>
-        <p:nvSpPr>
-          <p:cNvPr id="19" name="Text 17"/>
-          <p:cNvSpPr/>
-          <p:nvPr/>
-        </p:nvSpPr>
-        <p:spPr>
-          <a:xfrm>
-            <a:off x="4325112" y="2944368"/>
-            <a:ext cx="3401568" cy="338328"/>
-          </a:xfrm>
-          <a:prstGeom prst="rect">
-            <a:avLst/>
-          </a:prstGeom>
-          <a:noFill/>
-          <a:ln/>
-        </p:spPr>
-        <p:txBody>
-          <a:bodyPr wrap="square" rtlCol="0" anchor="ctr"/>
-          <a:lstStyle/>
-          <a:p>
-            <a:pPr indent="0" marL="0">
-              <a:buNone/>
-            </a:pPr>
-            <a:r>
-              <a:rPr lang="en-US" sz="1000" dirty="0">
-                <a:solidFill>
-                  <a:srgbClr val="1F1235"/>
-                </a:solidFill>
-              </a:rPr>
-              <a:t>✓  주간 영업시간 아코디언 + 실사 이미지</a:t>
-            </a:r>
-            <a:endParaRPr lang="en-US" sz="1000" dirty="0"/>
-          </a:p>
-        </p:txBody>
-      </p:sp>
-      <p:sp>
-        <p:nvSpPr>
-          <p:cNvPr id="20" name="Shape 18"/>
-          <p:cNvSpPr/>
-          <p:nvPr/>
-        </p:nvSpPr>
-        <p:spPr>
-          <a:xfrm>
-            <a:off x="8092440" y="960120"/>
-            <a:ext cx="3749040" cy="2423160"/>
+          <p:cNvPr id="10" name="Text 8"/>
+          <p:cNvSpPr/>
+          <p:nvPr/>
+        </p:nvSpPr>
+        <p:spPr>
+          <a:xfrm>
+            <a:off x="429768" y="1627632"/>
+            <a:ext cx="3337560" cy="1298448"/>
+          </a:xfrm>
+          <a:prstGeom prst="rect">
+            <a:avLst/>
+          </a:prstGeom>
+          <a:noFill/>
+          <a:ln/>
+        </p:spPr>
+        <p:txBody>
+          <a:bodyPr wrap="square" rtlCol="0" anchor="ctr"/>
+          <a:lstStyle/>
+          <a:p>
+            <a:pPr indent="0" marL="0">
+              <a:buNone/>
+            </a:pPr>
+            <a:r>
+              <a:rPr lang="en-US" sz="1050" dirty="0">
+                <a:solidFill>
+                  <a:srgbClr val="1F1235"/>
+                </a:solidFill>
+              </a:rPr>
+              <a:t>퍼플 브랜드 테마 통일</a:t>
+            </a:r>
+            <a:endParaRPr lang="en-US" sz="1050" dirty="0"/>
+          </a:p>
+          <a:p>
+            <a:pPr indent="0" marL="0">
+              <a:buNone/>
+            </a:pPr>
+            <a:r>
+              <a:rPr lang="en-US" sz="1050" dirty="0">
+                <a:solidFill>
+                  <a:srgbClr val="1F1235"/>
+                </a:solidFill>
+              </a:rPr>
+              <a:t>Pi 잔액 UI (디자인 선설계)</a:t>
+            </a:r>
+            <a:endParaRPr lang="en-US" sz="1050" dirty="0"/>
+          </a:p>
+          <a:p>
+            <a:pPr indent="0" marL="0">
+              <a:buNone/>
+            </a:pPr>
+            <a:r>
+              <a:rPr lang="en-US" sz="1050" dirty="0">
+                <a:solidFill>
+                  <a:srgbClr val="1F1235"/>
+                </a:solidFill>
+              </a:rPr>
+              <a:t>PICK↔Pi 교환 카드 (1π=300P)</a:t>
+            </a:r>
+            <a:endParaRPr lang="en-US" sz="1050" dirty="0"/>
+          </a:p>
+          <a:p>
+            <a:pPr indent="0" marL="0">
+              <a:buNone/>
+            </a:pPr>
+            <a:r>
+              <a:rPr lang="en-US" sz="1050" dirty="0">
+                <a:solidFill>
+                  <a:srgbClr val="1F1235"/>
+                </a:solidFill>
+              </a:rPr>
+              <a:t>100억 PICK 발행 · 1PICK=₩1 정보</a:t>
+            </a:r>
+            <a:endParaRPr lang="en-US" sz="1050" dirty="0"/>
+          </a:p>
+        </p:txBody>
+      </p:sp>
+      <p:sp>
+        <p:nvSpPr>
+          <p:cNvPr id="11" name="Shape 9"/>
+          <p:cNvSpPr/>
+          <p:nvPr/>
+        </p:nvSpPr>
+        <p:spPr>
+          <a:xfrm>
+            <a:off x="4160520" y="914400"/>
+            <a:ext cx="3749040" cy="2148840"/>
           </a:xfrm>
           <a:prstGeom prst="roundRect">
             <a:avLst>
-              <a:gd name="adj" fmla="val 5660"/>
+              <a:gd name="adj" fmla="val 6383"/>
             </a:avLst>
           </a:prstGeom>
           <a:solidFill>
-            <a:srgbClr val="DCFCE7"/>
+            <a:srgbClr val="EDE9FE"/>
           </a:solidFill>
           <a:ln w="12700">
             <a:solidFill>
-              <a:srgbClr val="16A34A"/>
+              <a:srgbClr val="C4B5FD"/>
             </a:solidFill>
             <a:prstDash val="solid"/>
           </a:ln>
@@ -4234,26 +4050,26 @@
       </p:sp>
       <p:sp>
         <p:nvSpPr>
-          <p:cNvPr id="21" name="Shape 19"/>
-          <p:cNvSpPr/>
-          <p:nvPr/>
-        </p:nvSpPr>
-        <p:spPr>
-          <a:xfrm>
-            <a:off x="8202168" y="1069848"/>
-            <a:ext cx="3529584" cy="384048"/>
+          <p:cNvPr id="12" name="Shape 10"/>
+          <p:cNvSpPr/>
+          <p:nvPr/>
+        </p:nvSpPr>
+        <p:spPr>
+          <a:xfrm>
+            <a:off x="4325112" y="1097280"/>
+            <a:ext cx="530352" cy="530352"/>
           </a:xfrm>
           <a:prstGeom prst="roundRect">
             <a:avLst>
-              <a:gd name="adj" fmla="val 19048"/>
+              <a:gd name="adj" fmla="val 17241"/>
             </a:avLst>
           </a:prstGeom>
           <a:solidFill>
-            <a:srgbClr val="16A34A"/>
+            <a:srgbClr val="FFFFFF"/>
           </a:solidFill>
           <a:ln w="12700">
             <a:solidFill>
-              <a:srgbClr val="16A34A"/>
+              <a:srgbClr val="C4B5FD"/>
             </a:solidFill>
             <a:prstDash val="solid"/>
           </a:ln>
@@ -4261,14 +4077,14 @@
       </p:sp>
       <p:sp>
         <p:nvSpPr>
-          <p:cNvPr id="22" name="Text 20"/>
-          <p:cNvSpPr/>
-          <p:nvPr/>
-        </p:nvSpPr>
-        <p:spPr>
-          <a:xfrm>
-            <a:off x="8202168" y="1069848"/>
-            <a:ext cx="3529584" cy="384048"/>
+          <p:cNvPr id="13" name="Text 11"/>
+          <p:cNvSpPr/>
+          <p:nvPr/>
+        </p:nvSpPr>
+        <p:spPr>
+          <a:xfrm>
+            <a:off x="4325112" y="1078992"/>
+            <a:ext cx="548640" cy="548640"/>
           </a:xfrm>
           <a:prstGeom prst="rect">
             <a:avLst/>
@@ -4284,12 +4100,48 @@
               <a:buNone/>
             </a:pPr>
             <a:r>
+              <a:rPr lang="en-US" sz="1800" dirty="0">
+                <a:solidFill>
+                  <a:srgbClr val="000000"/>
+                </a:solidFill>
+              </a:rPr>
+              <a:t>📅</a:t>
+            </a:r>
+            <a:endParaRPr lang="en-US" sz="1800" dirty="0"/>
+          </a:p>
+        </p:txBody>
+      </p:sp>
+      <p:sp>
+        <p:nvSpPr>
+          <p:cNvPr id="14" name="Text 12"/>
+          <p:cNvSpPr/>
+          <p:nvPr/>
+        </p:nvSpPr>
+        <p:spPr>
+          <a:xfrm>
+            <a:off x="4965192" y="1115568"/>
+            <a:ext cx="2743200" cy="365760"/>
+          </a:xfrm>
+          <a:prstGeom prst="rect">
+            <a:avLst/>
+          </a:prstGeom>
+          <a:noFill/>
+          <a:ln/>
+        </p:spPr>
+        <p:txBody>
+          <a:bodyPr wrap="square" rtlCol="0" anchor="ctr"/>
+          <a:lstStyle/>
+          <a:p>
+            <a:pPr indent="0" marL="0">
+              <a:buNone/>
+            </a:pPr>
+            <a:r>
               <a:rPr lang="en-US" sz="1200" b="1" dirty="0">
                 <a:solidFill>
-                  <a:srgbClr val="FFFFFF"/>
-                </a:solidFill>
-              </a:rPr>
-              <a:t>🛒 가맹점 / 주문 플로우</a:t>
+                  <a:srgbClr val="6B21A8"/>
+                </a:solidFill>
+              </a:rPr>
+              <a:t>출석 Tap-to-Earn</a:t>
             </a:r>
             <a:endParaRPr lang="en-US" sz="1200" dirty="0"/>
           </a:p>
@@ -4297,206 +4149,104 @@
       </p:sp>
       <p:sp>
         <p:nvSpPr>
-          <p:cNvPr id="23" name="Text 21"/>
-          <p:cNvSpPr/>
-          <p:nvPr/>
-        </p:nvSpPr>
-        <p:spPr>
-          <a:xfrm>
-            <a:off x="8257032" y="1554480"/>
-            <a:ext cx="3401568" cy="338328"/>
-          </a:xfrm>
-          <a:prstGeom prst="rect">
-            <a:avLst/>
-          </a:prstGeom>
-          <a:noFill/>
-          <a:ln/>
-        </p:spPr>
-        <p:txBody>
-          <a:bodyPr wrap="square" rtlCol="0" anchor="ctr"/>
-          <a:lstStyle/>
-          <a:p>
-            <a:pPr indent="0" marL="0">
-              <a:buNone/>
-            </a:pPr>
-            <a:r>
-              <a:rPr lang="en-US" sz="1000" dirty="0">
-                <a:solidFill>
-                  <a:srgbClr val="1F1235"/>
-                </a:solidFill>
-              </a:rPr>
-              <a:t>✓  가맹점 목록 (카테고리/전문검색 필터)</a:t>
-            </a:r>
-            <a:endParaRPr lang="en-US" sz="1000" dirty="0"/>
-          </a:p>
-        </p:txBody>
-      </p:sp>
-      <p:sp>
-        <p:nvSpPr>
-          <p:cNvPr id="24" name="Text 22"/>
-          <p:cNvSpPr/>
-          <p:nvPr/>
-        </p:nvSpPr>
-        <p:spPr>
-          <a:xfrm>
-            <a:off x="8257032" y="1901952"/>
-            <a:ext cx="3401568" cy="338328"/>
-          </a:xfrm>
-          <a:prstGeom prst="rect">
-            <a:avLst/>
-          </a:prstGeom>
-          <a:noFill/>
-          <a:ln/>
-        </p:spPr>
-        <p:txBody>
-          <a:bodyPr wrap="square" rtlCol="0" anchor="ctr"/>
-          <a:lstStyle/>
-          <a:p>
-            <a:pPr indent="0" marL="0">
-              <a:buNone/>
-            </a:pPr>
-            <a:r>
-              <a:rPr lang="en-US" sz="1000" dirty="0">
-                <a:solidFill>
-                  <a:srgbClr val="1F1235"/>
-                </a:solidFill>
-              </a:rPr>
-              <a:t>✓  가맹점 상세 + 메뉴 옵션 + 리뷰(이미지)</a:t>
-            </a:r>
-            <a:endParaRPr lang="en-US" sz="1000" dirty="0"/>
-          </a:p>
-        </p:txBody>
-      </p:sp>
-      <p:sp>
-        <p:nvSpPr>
-          <p:cNvPr id="25" name="Text 23"/>
-          <p:cNvSpPr/>
-          <p:nvPr/>
-        </p:nvSpPr>
-        <p:spPr>
-          <a:xfrm>
-            <a:off x="8257032" y="2249424"/>
-            <a:ext cx="3401568" cy="338328"/>
-          </a:xfrm>
-          <a:prstGeom prst="rect">
-            <a:avLst/>
-          </a:prstGeom>
-          <a:noFill/>
-          <a:ln/>
-        </p:spPr>
-        <p:txBody>
-          <a:bodyPr wrap="square" rtlCol="0" anchor="ctr"/>
-          <a:lstStyle/>
-          <a:p>
-            <a:pPr indent="0" marL="0">
-              <a:buNone/>
-            </a:pPr>
-            <a:r>
-              <a:rPr lang="en-US" sz="1000" dirty="0">
-                <a:solidFill>
-                  <a:srgbClr val="1F1235"/>
-                </a:solidFill>
-              </a:rPr>
-              <a:t>✓  쿠폰(3종) + PICK 할인 + 배달 메모</a:t>
-            </a:r>
-            <a:endParaRPr lang="en-US" sz="1000" dirty="0"/>
-          </a:p>
-        </p:txBody>
-      </p:sp>
-      <p:sp>
-        <p:nvSpPr>
-          <p:cNvPr id="26" name="Text 24"/>
-          <p:cNvSpPr/>
-          <p:nvPr/>
-        </p:nvSpPr>
-        <p:spPr>
-          <a:xfrm>
-            <a:off x="8257032" y="2596896"/>
-            <a:ext cx="3401568" cy="338328"/>
-          </a:xfrm>
-          <a:prstGeom prst="rect">
-            <a:avLst/>
-          </a:prstGeom>
-          <a:noFill/>
-          <a:ln/>
-        </p:spPr>
-        <p:txBody>
-          <a:bodyPr wrap="square" rtlCol="0" anchor="ctr"/>
-          <a:lstStyle/>
-          <a:p>
-            <a:pPr indent="0" marL="0">
-              <a:buNone/>
-            </a:pPr>
-            <a:r>
-              <a:rPr lang="en-US" sz="1000" dirty="0">
-                <a:solidFill>
-                  <a:srgbClr val="1F1235"/>
-                </a:solidFill>
-              </a:rPr>
-              <a:t>✓  PICK 결제 + 토스페이먼츠 카드 결제</a:t>
-            </a:r>
-            <a:endParaRPr lang="en-US" sz="1000" dirty="0"/>
-          </a:p>
-        </p:txBody>
-      </p:sp>
-      <p:sp>
-        <p:nvSpPr>
-          <p:cNvPr id="27" name="Text 25"/>
-          <p:cNvSpPr/>
-          <p:nvPr/>
-        </p:nvSpPr>
-        <p:spPr>
-          <a:xfrm>
-            <a:off x="8257032" y="2944368"/>
-            <a:ext cx="3401568" cy="338328"/>
-          </a:xfrm>
-          <a:prstGeom prst="rect">
-            <a:avLst/>
-          </a:prstGeom>
-          <a:noFill/>
-          <a:ln/>
-        </p:spPr>
-        <p:txBody>
-          <a:bodyPr wrap="square" rtlCol="0" anchor="ctr"/>
-          <a:lstStyle/>
-          <a:p>
-            <a:pPr indent="0" marL="0">
-              <a:buNone/>
-            </a:pPr>
-            <a:r>
-              <a:rPr lang="en-US" sz="1000" dirty="0">
-                <a:solidFill>
-                  <a:srgbClr val="1F1235"/>
-                </a:solidFill>
-              </a:rPr>
-              <a:t>✓  주문 생성 → PICK 차감 → 완료 적립</a:t>
-            </a:r>
-            <a:endParaRPr lang="en-US" sz="1000" dirty="0"/>
-          </a:p>
-        </p:txBody>
-      </p:sp>
-      <p:sp>
-        <p:nvSpPr>
-          <p:cNvPr id="28" name="Shape 26"/>
-          <p:cNvSpPr/>
-          <p:nvPr/>
-        </p:nvSpPr>
-        <p:spPr>
-          <a:xfrm>
-            <a:off x="228600" y="3566160"/>
-            <a:ext cx="3749040" cy="2423160"/>
+          <p:cNvPr id="15" name="Text 13"/>
+          <p:cNvSpPr/>
+          <p:nvPr/>
+        </p:nvSpPr>
+        <p:spPr>
+          <a:xfrm>
+            <a:off x="4361688" y="1627632"/>
+            <a:ext cx="3337560" cy="1298448"/>
+          </a:xfrm>
+          <a:prstGeom prst="rect">
+            <a:avLst/>
+          </a:prstGeom>
+          <a:noFill/>
+          <a:ln/>
+        </p:spPr>
+        <p:txBody>
+          <a:bodyPr wrap="square" rtlCol="0" anchor="ctr"/>
+          <a:lstStyle/>
+          <a:p>
+            <a:pPr indent="0" marL="0">
+              <a:buNone/>
+            </a:pPr>
+            <a:r>
+              <a:rPr lang="en-US" sz="1050" dirty="0">
+                <a:solidFill>
+                  <a:srgbClr val="1F1235"/>
+                </a:solidFill>
+              </a:rPr>
+              <a:t>매일 출석 → 50 PICK 자동 지급</a:t>
+            </a:r>
+            <a:endParaRPr lang="en-US" sz="1050" dirty="0"/>
+          </a:p>
+          <a:p>
+            <a:pPr indent="0" marL="0">
+              <a:buNone/>
+            </a:pPr>
+            <a:r>
+              <a:rPr lang="en-US" sz="1050" dirty="0">
+                <a:solidFill>
+                  <a:srgbClr val="1F1235"/>
+                </a:solidFill>
+              </a:rPr>
+              <a:t>daily_checkins 테이블 + API</a:t>
+            </a:r>
+            <a:endParaRPr lang="en-US" sz="1050" dirty="0"/>
+          </a:p>
+          <a:p>
+            <a:pPr indent="0" marL="0">
+              <a:buNone/>
+            </a:pPr>
+            <a:r>
+              <a:rPr lang="en-US" sz="1050" dirty="0">
+                <a:solidFill>
+                  <a:srgbClr val="1F1235"/>
+                </a:solidFill>
+              </a:rPr>
+              <a:t>연속 streak 카운터 + 진행 바</a:t>
+            </a:r>
+            <a:endParaRPr lang="en-US" sz="1050" dirty="0"/>
+          </a:p>
+          <a:p>
+            <a:pPr indent="0" marL="0">
+              <a:buNone/>
+            </a:pPr>
+            <a:r>
+              <a:rPr lang="en-US" sz="1050" dirty="0">
+                <a:solidFill>
+                  <a:srgbClr val="1F1235"/>
+                </a:solidFill>
+              </a:rPr>
+              <a:t>중복 체크인 방지 (DB UNIQUE)</a:t>
+            </a:r>
+            <a:endParaRPr lang="en-US" sz="1050" dirty="0"/>
+          </a:p>
+        </p:txBody>
+      </p:sp>
+      <p:sp>
+        <p:nvSpPr>
+          <p:cNvPr id="16" name="Shape 14"/>
+          <p:cNvSpPr/>
+          <p:nvPr/>
+        </p:nvSpPr>
+        <p:spPr>
+          <a:xfrm>
+            <a:off x="8092440" y="914400"/>
+            <a:ext cx="3749040" cy="2148840"/>
           </a:xfrm>
           <a:prstGeom prst="roundRect">
             <a:avLst>
-              <a:gd name="adj" fmla="val 5660"/>
+              <a:gd name="adj" fmla="val 6383"/>
             </a:avLst>
           </a:prstGeom>
           <a:solidFill>
-            <a:srgbClr val="FFFBEB"/>
+            <a:srgbClr val="EDE9FE"/>
           </a:solidFill>
           <a:ln w="12700">
             <a:solidFill>
-              <a:srgbClr val="D97706"/>
+              <a:srgbClr val="C4B5FD"/>
             </a:solidFill>
             <a:prstDash val="solid"/>
           </a:ln>
@@ -4504,26 +4254,26 @@
       </p:sp>
       <p:sp>
         <p:nvSpPr>
-          <p:cNvPr id="29" name="Shape 27"/>
-          <p:cNvSpPr/>
-          <p:nvPr/>
-        </p:nvSpPr>
-        <p:spPr>
-          <a:xfrm>
-            <a:off x="338328" y="3675888"/>
-            <a:ext cx="3529584" cy="384048"/>
+          <p:cNvPr id="17" name="Shape 15"/>
+          <p:cNvSpPr/>
+          <p:nvPr/>
+        </p:nvSpPr>
+        <p:spPr>
+          <a:xfrm>
+            <a:off x="8257032" y="1097280"/>
+            <a:ext cx="530352" cy="530352"/>
           </a:xfrm>
           <a:prstGeom prst="roundRect">
             <a:avLst>
-              <a:gd name="adj" fmla="val 19048"/>
+              <a:gd name="adj" fmla="val 17241"/>
             </a:avLst>
           </a:prstGeom>
           <a:solidFill>
-            <a:srgbClr val="D97706"/>
+            <a:srgbClr val="FFFFFF"/>
           </a:solidFill>
           <a:ln w="12700">
             <a:solidFill>
-              <a:srgbClr val="D97706"/>
+              <a:srgbClr val="C4B5FD"/>
             </a:solidFill>
             <a:prstDash val="solid"/>
           </a:ln>
@@ -4531,14 +4281,14 @@
       </p:sp>
       <p:sp>
         <p:nvSpPr>
-          <p:cNvPr id="30" name="Text 28"/>
-          <p:cNvSpPr/>
-          <p:nvPr/>
-        </p:nvSpPr>
-        <p:spPr>
-          <a:xfrm>
-            <a:off x="338328" y="3675888"/>
-            <a:ext cx="3529584" cy="384048"/>
+          <p:cNvPr id="18" name="Text 16"/>
+          <p:cNvSpPr/>
+          <p:nvPr/>
+        </p:nvSpPr>
+        <p:spPr>
+          <a:xfrm>
+            <a:off x="8257032" y="1078992"/>
+            <a:ext cx="548640" cy="548640"/>
           </a:xfrm>
           <a:prstGeom prst="rect">
             <a:avLst/>
@@ -4554,12 +4304,48 @@
               <a:buNone/>
             </a:pPr>
             <a:r>
+              <a:rPr lang="en-US" sz="1800" dirty="0">
+                <a:solidFill>
+                  <a:srgbClr val="000000"/>
+                </a:solidFill>
+              </a:rPr>
+              <a:t>🎁</a:t>
+            </a:r>
+            <a:endParaRPr lang="en-US" sz="1800" dirty="0"/>
+          </a:p>
+        </p:txBody>
+      </p:sp>
+      <p:sp>
+        <p:nvSpPr>
+          <p:cNvPr id="19" name="Text 17"/>
+          <p:cNvSpPr/>
+          <p:nvPr/>
+        </p:nvSpPr>
+        <p:spPr>
+          <a:xfrm>
+            <a:off x="8897112" y="1115568"/>
+            <a:ext cx="2743200" cy="365760"/>
+          </a:xfrm>
+          <a:prstGeom prst="rect">
+            <a:avLst/>
+          </a:prstGeom>
+          <a:noFill/>
+          <a:ln/>
+        </p:spPr>
+        <p:txBody>
+          <a:bodyPr wrap="square" rtlCol="0" anchor="ctr"/>
+          <a:lstStyle/>
+          <a:p>
+            <a:pPr indent="0" marL="0">
+              <a:buNone/>
+            </a:pPr>
+            <a:r>
               <a:rPr lang="en-US" sz="1200" b="1" dirty="0">
                 <a:solidFill>
-                  <a:srgbClr val="FFFFFF"/>
-                </a:solidFill>
-              </a:rPr>
-              <a:t>👨‍🍳 사장님 기능</a:t>
+                  <a:srgbClr val="6B21A8"/>
+                </a:solidFill>
+              </a:rPr>
+              <a:t>친구 초대 리워드 재배치</a:t>
             </a:r>
             <a:endParaRPr lang="en-US" sz="1200" dirty="0"/>
           </a:p>
@@ -4567,242 +4353,104 @@
       </p:sp>
       <p:sp>
         <p:nvSpPr>
-          <p:cNvPr id="31" name="Text 29"/>
-          <p:cNvSpPr/>
-          <p:nvPr/>
-        </p:nvSpPr>
-        <p:spPr>
-          <a:xfrm>
-            <a:off x="393192" y="4160520"/>
-            <a:ext cx="3401568" cy="338328"/>
-          </a:xfrm>
-          <a:prstGeom prst="rect">
-            <a:avLst/>
-          </a:prstGeom>
-          <a:noFill/>
-          <a:ln/>
-        </p:spPr>
-        <p:txBody>
-          <a:bodyPr wrap="square" rtlCol="0" anchor="ctr"/>
-          <a:lstStyle/>
-          <a:p>
-            <a:pPr indent="0" marL="0">
-              <a:buNone/>
-            </a:pPr>
-            <a:r>
-              <a:rPr lang="en-US" sz="1000" dirty="0">
-                <a:solidFill>
-                  <a:srgbClr val="1F1235"/>
-                </a:solidFill>
-              </a:rPr>
-              <a:t>✓  가게 등록·설정·쿠폰 관리·주간 영업시간</a:t>
-            </a:r>
-            <a:endParaRPr lang="en-US" sz="1000" dirty="0"/>
-          </a:p>
-        </p:txBody>
-      </p:sp>
-      <p:sp>
-        <p:nvSpPr>
-          <p:cNvPr id="32" name="Text 30"/>
-          <p:cNvSpPr/>
-          <p:nvPr/>
-        </p:nvSpPr>
-        <p:spPr>
-          <a:xfrm>
-            <a:off x="393192" y="4507992"/>
-            <a:ext cx="3401568" cy="338328"/>
-          </a:xfrm>
-          <a:prstGeom prst="rect">
-            <a:avLst/>
-          </a:prstGeom>
-          <a:noFill/>
-          <a:ln/>
-        </p:spPr>
-        <p:txBody>
-          <a:bodyPr wrap="square" rtlCol="0" anchor="ctr"/>
-          <a:lstStyle/>
-          <a:p>
-            <a:pPr indent="0" marL="0">
-              <a:buNone/>
-            </a:pPr>
-            <a:r>
-              <a:rPr lang="en-US" sz="1000" dirty="0">
-                <a:solidFill>
-                  <a:srgbClr val="1F1235"/>
-                </a:solidFill>
-              </a:rPr>
-              <a:t>✓  주문 관리: 수락 ETA + 거절 확인 팝업</a:t>
-            </a:r>
-            <a:endParaRPr lang="en-US" sz="1000" dirty="0"/>
-          </a:p>
-        </p:txBody>
-      </p:sp>
-      <p:sp>
-        <p:nvSpPr>
-          <p:cNvPr id="33" name="Text 31"/>
-          <p:cNvSpPr/>
-          <p:nvPr/>
-        </p:nvSpPr>
-        <p:spPr>
-          <a:xfrm>
-            <a:off x="393192" y="4855464"/>
-            <a:ext cx="3401568" cy="338328"/>
-          </a:xfrm>
-          <a:prstGeom prst="rect">
-            <a:avLst/>
-          </a:prstGeom>
-          <a:noFill/>
-          <a:ln/>
-        </p:spPr>
-        <p:txBody>
-          <a:bodyPr wrap="square" rtlCol="0" anchor="ctr"/>
-          <a:lstStyle/>
-          <a:p>
-            <a:pPr indent="0" marL="0">
-              <a:buNone/>
-            </a:pPr>
-            <a:r>
-              <a:rPr lang="en-US" sz="1000" dirty="0">
-                <a:solidFill>
-                  <a:srgbClr val="1F1235"/>
-                </a:solidFill>
-              </a:rPr>
-              <a:t>✓  메뉴 옵션 그룹/옵션 CRUD UI</a:t>
-            </a:r>
-            <a:endParaRPr lang="en-US" sz="1000" dirty="0"/>
-          </a:p>
-        </p:txBody>
-      </p:sp>
-      <p:sp>
-        <p:nvSpPr>
-          <p:cNvPr id="34" name="Text 32"/>
-          <p:cNvSpPr/>
-          <p:nvPr/>
-        </p:nvSpPr>
-        <p:spPr>
-          <a:xfrm>
-            <a:off x="393192" y="5202936"/>
-            <a:ext cx="3401568" cy="338328"/>
-          </a:xfrm>
-          <a:prstGeom prst="rect">
-            <a:avLst/>
-          </a:prstGeom>
-          <a:noFill/>
-          <a:ln/>
-        </p:spPr>
-        <p:txBody>
-          <a:bodyPr wrap="square" rtlCol="0" anchor="ctr"/>
-          <a:lstStyle/>
-          <a:p>
-            <a:pPr indent="0" marL="0">
-              <a:buNone/>
-            </a:pPr>
-            <a:r>
-              <a:rPr lang="en-US" sz="1000" dirty="0">
-                <a:solidFill>
-                  <a:srgbClr val="1F1235"/>
-                </a:solidFill>
-              </a:rPr>
-              <a:t>✓  매출 통계 대시보드 + 주간 차트</a:t>
-            </a:r>
-            <a:endParaRPr lang="en-US" sz="1000" dirty="0"/>
-          </a:p>
-        </p:txBody>
-      </p:sp>
-      <p:sp>
-        <p:nvSpPr>
-          <p:cNvPr id="35" name="Text 33"/>
-          <p:cNvSpPr/>
-          <p:nvPr/>
-        </p:nvSpPr>
-        <p:spPr>
-          <a:xfrm>
-            <a:off x="393192" y="5550408"/>
-            <a:ext cx="3401568" cy="338328"/>
-          </a:xfrm>
-          <a:prstGeom prst="rect">
-            <a:avLst/>
-          </a:prstGeom>
-          <a:noFill/>
-          <a:ln/>
-        </p:spPr>
-        <p:txBody>
-          <a:bodyPr wrap="square" rtlCol="0" anchor="ctr"/>
-          <a:lstStyle/>
-          <a:p>
-            <a:pPr indent="0" marL="0">
-              <a:buNone/>
-            </a:pPr>
-            <a:r>
-              <a:rPr lang="en-US" sz="1000" dirty="0">
-                <a:solidFill>
-                  <a:srgbClr val="1F1235"/>
-                </a:solidFill>
-              </a:rPr>
-              <a:t>✓  신규주문 TTS 알림 '픽픽 주문이 들어왔습니다'</a:t>
-            </a:r>
-            <a:endParaRPr lang="en-US" sz="1000" dirty="0"/>
-          </a:p>
-        </p:txBody>
-      </p:sp>
-      <p:sp>
-        <p:nvSpPr>
-          <p:cNvPr id="36" name="Text 34"/>
-          <p:cNvSpPr/>
-          <p:nvPr/>
-        </p:nvSpPr>
-        <p:spPr>
-          <a:xfrm>
-            <a:off x="393192" y="5897880"/>
-            <a:ext cx="3401568" cy="338328"/>
-          </a:xfrm>
-          <a:prstGeom prst="rect">
-            <a:avLst/>
-          </a:prstGeom>
-          <a:noFill/>
-          <a:ln/>
-        </p:spPr>
-        <p:txBody>
-          <a:bodyPr wrap="square" rtlCol="0" anchor="ctr"/>
-          <a:lstStyle/>
-          <a:p>
-            <a:pPr indent="0" marL="0">
-              <a:buNone/>
-            </a:pPr>
-            <a:r>
-              <a:rPr lang="en-US" sz="1000" dirty="0">
-                <a:solidFill>
-                  <a:srgbClr val="1F1235"/>
-                </a:solidFill>
-              </a:rPr>
-              <a:t>✓  조리 중 라이더 호출 버튼 분리</a:t>
-            </a:r>
-            <a:endParaRPr lang="en-US" sz="1000" dirty="0"/>
-          </a:p>
-        </p:txBody>
-      </p:sp>
-      <p:sp>
-        <p:nvSpPr>
-          <p:cNvPr id="37" name="Shape 35"/>
-          <p:cNvSpPr/>
-          <p:nvPr/>
-        </p:nvSpPr>
-        <p:spPr>
-          <a:xfrm>
-            <a:off x="4160520" y="3566160"/>
-            <a:ext cx="3749040" cy="2423160"/>
+          <p:cNvPr id="20" name="Text 18"/>
+          <p:cNvSpPr/>
+          <p:nvPr/>
+        </p:nvSpPr>
+        <p:spPr>
+          <a:xfrm>
+            <a:off x="8293608" y="1627632"/>
+            <a:ext cx="3337560" cy="1298448"/>
+          </a:xfrm>
+          <a:prstGeom prst="rect">
+            <a:avLst/>
+          </a:prstGeom>
+          <a:noFill/>
+          <a:ln/>
+        </p:spPr>
+        <p:txBody>
+          <a:bodyPr wrap="square" rtlCol="0" anchor="ctr"/>
+          <a:lstStyle/>
+          <a:p>
+            <a:pPr indent="0" marL="0">
+              <a:buNone/>
+            </a:pPr>
+            <a:r>
+              <a:rPr lang="en-US" sz="1050" dirty="0">
+                <a:solidFill>
+                  <a:srgbClr val="1F1235"/>
+                </a:solidFill>
+              </a:rPr>
+              <a:t>사용자 MyPick: 5,000 PICK 지급</a:t>
+            </a:r>
+            <a:endParaRPr lang="en-US" sz="1050" dirty="0"/>
+          </a:p>
+          <a:p>
+            <a:pPr indent="0" marL="0">
+              <a:buNone/>
+            </a:pPr>
+            <a:r>
+              <a:rPr lang="en-US" sz="1050" dirty="0">
+                <a:solidFill>
+                  <a:srgbClr val="1F1235"/>
+                </a:solidFill>
+              </a:rPr>
+              <a:t>사장님 대시보드: 20,000 PICK</a:t>
+            </a:r>
+            <a:endParaRPr lang="en-US" sz="1050" dirty="0"/>
+          </a:p>
+          <a:p>
+            <a:pPr indent="0" marL="0">
+              <a:buNone/>
+            </a:pPr>
+            <a:r>
+              <a:rPr lang="en-US" sz="1050" dirty="0">
+                <a:solidFill>
+                  <a:srgbClr val="1F1235"/>
+                </a:solidFill>
+              </a:rPr>
+              <a:t>라이더 내정보: 10,000 PICK</a:t>
+            </a:r>
+            <a:endParaRPr lang="en-US" sz="1050" dirty="0"/>
+          </a:p>
+          <a:p>
+            <a:pPr indent="0" marL="0">
+              <a:buNone/>
+            </a:pPr>
+            <a:r>
+              <a:rPr lang="en-US" sz="1050" dirty="0">
+                <a:solidFill>
+                  <a:srgbClr val="1F1235"/>
+                </a:solidFill>
+              </a:rPr>
+              <a:t>지갑탭에서 제거 → 역할별 분산</a:t>
+            </a:r>
+            <a:endParaRPr lang="en-US" sz="1050" dirty="0"/>
+          </a:p>
+        </p:txBody>
+      </p:sp>
+      <p:sp>
+        <p:nvSpPr>
+          <p:cNvPr id="21" name="Shape 19"/>
+          <p:cNvSpPr/>
+          <p:nvPr/>
+        </p:nvSpPr>
+        <p:spPr>
+          <a:xfrm>
+            <a:off x="228600" y="3246120"/>
+            <a:ext cx="3749040" cy="2148840"/>
           </a:xfrm>
           <a:prstGeom prst="roundRect">
             <a:avLst>
-              <a:gd name="adj" fmla="val 5660"/>
+              <a:gd name="adj" fmla="val 6383"/>
             </a:avLst>
           </a:prstGeom>
           <a:solidFill>
-            <a:srgbClr val="ECFEFF"/>
+            <a:srgbClr val="EDE9FE"/>
           </a:solidFill>
           <a:ln w="12700">
             <a:solidFill>
-              <a:srgbClr val="0891B2"/>
+              <a:srgbClr val="C4B5FD"/>
             </a:solidFill>
             <a:prstDash val="solid"/>
           </a:ln>
@@ -4810,26 +4458,26 @@
       </p:sp>
       <p:sp>
         <p:nvSpPr>
-          <p:cNvPr id="38" name="Shape 36"/>
-          <p:cNvSpPr/>
-          <p:nvPr/>
-        </p:nvSpPr>
-        <p:spPr>
-          <a:xfrm>
-            <a:off x="4270248" y="3675888"/>
-            <a:ext cx="3529584" cy="384048"/>
+          <p:cNvPr id="22" name="Shape 20"/>
+          <p:cNvSpPr/>
+          <p:nvPr/>
+        </p:nvSpPr>
+        <p:spPr>
+          <a:xfrm>
+            <a:off x="393192" y="3429000"/>
+            <a:ext cx="530352" cy="530352"/>
           </a:xfrm>
           <a:prstGeom prst="roundRect">
             <a:avLst>
-              <a:gd name="adj" fmla="val 19048"/>
+              <a:gd name="adj" fmla="val 17241"/>
             </a:avLst>
           </a:prstGeom>
           <a:solidFill>
-            <a:srgbClr val="0891B2"/>
+            <a:srgbClr val="FFFFFF"/>
           </a:solidFill>
           <a:ln w="12700">
             <a:solidFill>
-              <a:srgbClr val="0891B2"/>
+              <a:srgbClr val="C4B5FD"/>
             </a:solidFill>
             <a:prstDash val="solid"/>
           </a:ln>
@@ -4837,14 +4485,14 @@
       </p:sp>
       <p:sp>
         <p:nvSpPr>
-          <p:cNvPr id="39" name="Text 37"/>
-          <p:cNvSpPr/>
-          <p:nvPr/>
-        </p:nvSpPr>
-        <p:spPr>
-          <a:xfrm>
-            <a:off x="4270248" y="3675888"/>
-            <a:ext cx="3529584" cy="384048"/>
+          <p:cNvPr id="23" name="Text 21"/>
+          <p:cNvSpPr/>
+          <p:nvPr/>
+        </p:nvSpPr>
+        <p:spPr>
+          <a:xfrm>
+            <a:off x="393192" y="3410712"/>
+            <a:ext cx="548640" cy="548640"/>
           </a:xfrm>
           <a:prstGeom prst="rect">
             <a:avLst/>
@@ -4860,12 +4508,48 @@
               <a:buNone/>
             </a:pPr>
             <a:r>
+              <a:rPr lang="en-US" sz="1800" dirty="0">
+                <a:solidFill>
+                  <a:srgbClr val="000000"/>
+                </a:solidFill>
+              </a:rPr>
+              <a:t>📸</a:t>
+            </a:r>
+            <a:endParaRPr lang="en-US" sz="1800" dirty="0"/>
+          </a:p>
+        </p:txBody>
+      </p:sp>
+      <p:sp>
+        <p:nvSpPr>
+          <p:cNvPr id="24" name="Text 22"/>
+          <p:cNvSpPr/>
+          <p:nvPr/>
+        </p:nvSpPr>
+        <p:spPr>
+          <a:xfrm>
+            <a:off x="1033272" y="3447288"/>
+            <a:ext cx="2743200" cy="365760"/>
+          </a:xfrm>
+          <a:prstGeom prst="rect">
+            <a:avLst/>
+          </a:prstGeom>
+          <a:noFill/>
+          <a:ln/>
+        </p:spPr>
+        <p:txBody>
+          <a:bodyPr wrap="square" rtlCol="0" anchor="ctr"/>
+          <a:lstStyle/>
+          <a:p>
+            <a:pPr indent="0" marL="0">
+              <a:buNone/>
+            </a:pPr>
+            <a:r>
               <a:rPr lang="en-US" sz="1200" b="1" dirty="0">
                 <a:solidFill>
-                  <a:srgbClr val="FFFFFF"/>
-                </a:solidFill>
-              </a:rPr>
-              <a:t>🛵 라이더 / PWA / 인프라</a:t>
+                  <a:srgbClr val="6B21A8"/>
+                </a:solidFill>
+              </a:rPr>
+              <a:t>사진 리뷰 보상 설정</a:t>
             </a:r>
             <a:endParaRPr lang="en-US" sz="1200" dirty="0"/>
           </a:p>
@@ -4873,206 +4557,104 @@
       </p:sp>
       <p:sp>
         <p:nvSpPr>
-          <p:cNvPr id="40" name="Text 38"/>
-          <p:cNvSpPr/>
-          <p:nvPr/>
-        </p:nvSpPr>
-        <p:spPr>
-          <a:xfrm>
-            <a:off x="4325112" y="4160520"/>
-            <a:ext cx="3401568" cy="338328"/>
-          </a:xfrm>
-          <a:prstGeom prst="rect">
-            <a:avLst/>
-          </a:prstGeom>
-          <a:noFill/>
-          <a:ln/>
-        </p:spPr>
-        <p:txBody>
-          <a:bodyPr wrap="square" rtlCol="0" anchor="ctr"/>
-          <a:lstStyle/>
-          <a:p>
-            <a:pPr indent="0" marL="0">
-              <a:buNone/>
-            </a:pPr>
-            <a:r>
-              <a:rPr lang="en-US" sz="1000" dirty="0">
-                <a:solidFill>
-                  <a:srgbClr val="1F1235"/>
-                </a:solidFill>
-              </a:rPr>
-              <a:t>✓  배달 수락 → PICK 자동 지급 + 위치 공유</a:t>
-            </a:r>
-            <a:endParaRPr lang="en-US" sz="1000" dirty="0"/>
-          </a:p>
-        </p:txBody>
-      </p:sp>
-      <p:sp>
-        <p:nvSpPr>
-          <p:cNvPr id="41" name="Text 39"/>
-          <p:cNvSpPr/>
-          <p:nvPr/>
-        </p:nvSpPr>
-        <p:spPr>
-          <a:xfrm>
-            <a:off x="4325112" y="4507992"/>
-            <a:ext cx="3401568" cy="338328"/>
-          </a:xfrm>
-          <a:prstGeom prst="rect">
-            <a:avLst/>
-          </a:prstGeom>
-          <a:noFill/>
-          <a:ln/>
-        </p:spPr>
-        <p:txBody>
-          <a:bodyPr wrap="square" rtlCol="0" anchor="ctr"/>
-          <a:lstStyle/>
-          <a:p>
-            <a:pPr indent="0" marL="0">
-              <a:buNone/>
-            </a:pPr>
-            <a:r>
-              <a:rPr lang="en-US" sz="1000" dirty="0">
-                <a:solidFill>
-                  <a:srgbClr val="1F1235"/>
-                </a:solidFill>
-              </a:rPr>
-              <a:t>✓  라이더 TTS 알림 '픽픽 라이더 요청이 왔습니다'</a:t>
-            </a:r>
-            <a:endParaRPr lang="en-US" sz="1000" dirty="0"/>
-          </a:p>
-        </p:txBody>
-      </p:sp>
-      <p:sp>
-        <p:nvSpPr>
-          <p:cNvPr id="42" name="Text 40"/>
-          <p:cNvSpPr/>
-          <p:nvPr/>
-        </p:nvSpPr>
-        <p:spPr>
-          <a:xfrm>
-            <a:off x="4325112" y="4855464"/>
-            <a:ext cx="3401568" cy="338328"/>
-          </a:xfrm>
-          <a:prstGeom prst="rect">
-            <a:avLst/>
-          </a:prstGeom>
-          <a:noFill/>
-          <a:ln/>
-        </p:spPr>
-        <p:txBody>
-          <a:bodyPr wrap="square" rtlCol="0" anchor="ctr"/>
-          <a:lstStyle/>
-          <a:p>
-            <a:pPr indent="0" marL="0">
-              <a:buNone/>
-            </a:pPr>
-            <a:r>
-              <a:rPr lang="en-US" sz="1000" dirty="0">
-                <a:solidFill>
-                  <a:srgbClr val="1F1235"/>
-                </a:solidFill>
-              </a:rPr>
-              <a:t>✓  FCM 푸시 알림 + 관리자 일괄 발송</a:t>
-            </a:r>
-            <a:endParaRPr lang="en-US" sz="1000" dirty="0"/>
-          </a:p>
-        </p:txBody>
-      </p:sp>
-      <p:sp>
-        <p:nvSpPr>
-          <p:cNvPr id="43" name="Text 41"/>
-          <p:cNvSpPr/>
-          <p:nvPr/>
-        </p:nvSpPr>
-        <p:spPr>
-          <a:xfrm>
-            <a:off x="4325112" y="5202936"/>
-            <a:ext cx="3401568" cy="338328"/>
-          </a:xfrm>
-          <a:prstGeom prst="rect">
-            <a:avLst/>
-          </a:prstGeom>
-          <a:noFill/>
-          <a:ln/>
-        </p:spPr>
-        <p:txBody>
-          <a:bodyPr wrap="square" rtlCol="0" anchor="ctr"/>
-          <a:lstStyle/>
-          <a:p>
-            <a:pPr indent="0" marL="0">
-              <a:buNone/>
-            </a:pPr>
-            <a:r>
-              <a:rPr lang="en-US" sz="1000" dirty="0">
-                <a:solidFill>
-                  <a:srgbClr val="1F1235"/>
-                </a:solidFill>
-              </a:rPr>
-              <a:t>✓  PWA 오프라인 캐싱 (Serwist)</a:t>
-            </a:r>
-            <a:endParaRPr lang="en-US" sz="1000" dirty="0"/>
-          </a:p>
-        </p:txBody>
-      </p:sp>
-      <p:sp>
-        <p:nvSpPr>
-          <p:cNvPr id="44" name="Text 42"/>
-          <p:cNvSpPr/>
-          <p:nvPr/>
-        </p:nvSpPr>
-        <p:spPr>
-          <a:xfrm>
-            <a:off x="4325112" y="5550408"/>
-            <a:ext cx="3401568" cy="338328"/>
-          </a:xfrm>
-          <a:prstGeom prst="rect">
-            <a:avLst/>
-          </a:prstGeom>
-          <a:noFill/>
-          <a:ln/>
-        </p:spPr>
-        <p:txBody>
-          <a:bodyPr wrap="square" rtlCol="0" anchor="ctr"/>
-          <a:lstStyle/>
-          <a:p>
-            <a:pPr indent="0" marL="0">
-              <a:buNone/>
-            </a:pPr>
-            <a:r>
-              <a:rPr lang="en-US" sz="1000" dirty="0">
-                <a:solidFill>
-                  <a:srgbClr val="1F1235"/>
-                </a:solidFill>
-              </a:rPr>
-              <a:t>✓  Sentry 모니터링 + 가맹점 광고 시스템</a:t>
-            </a:r>
-            <a:endParaRPr lang="en-US" sz="1000" dirty="0"/>
-          </a:p>
-        </p:txBody>
-      </p:sp>
-      <p:sp>
-        <p:nvSpPr>
-          <p:cNvPr id="45" name="Shape 43"/>
-          <p:cNvSpPr/>
-          <p:nvPr/>
-        </p:nvSpPr>
-        <p:spPr>
-          <a:xfrm>
-            <a:off x="8092440" y="3566160"/>
-            <a:ext cx="3749040" cy="2423160"/>
+          <p:cNvPr id="25" name="Text 23"/>
+          <p:cNvSpPr/>
+          <p:nvPr/>
+        </p:nvSpPr>
+        <p:spPr>
+          <a:xfrm>
+            <a:off x="429768" y="3959352"/>
+            <a:ext cx="3337560" cy="1298448"/>
+          </a:xfrm>
+          <a:prstGeom prst="rect">
+            <a:avLst/>
+          </a:prstGeom>
+          <a:noFill/>
+          <a:ln/>
+        </p:spPr>
+        <p:txBody>
+          <a:bodyPr wrap="square" rtlCol="0" anchor="ctr"/>
+          <a:lstStyle/>
+          <a:p>
+            <a:pPr indent="0" marL="0">
+              <a:buNone/>
+            </a:pPr>
+            <a:r>
+              <a:rPr lang="en-US" sz="1050" dirty="0">
+                <a:solidFill>
+                  <a:srgbClr val="1F1235"/>
+                </a:solidFill>
+              </a:rPr>
+              <a:t>원화 입력 → PICK 자동환산</a:t>
+            </a:r>
+            <a:endParaRPr lang="en-US" sz="1050" dirty="0"/>
+          </a:p>
+          <a:p>
+            <a:pPr indent="0" marL="0">
+              <a:buNone/>
+            </a:pPr>
+            <a:r>
+              <a:rPr lang="en-US" sz="1050" dirty="0">
+                <a:solidFill>
+                  <a:srgbClr val="1F1235"/>
+                </a:solidFill>
+              </a:rPr>
+              <a:t>₩300 / ₩500 / ₩1,000 단계 버튼</a:t>
+            </a:r>
+            <a:endParaRPr lang="en-US" sz="1050" dirty="0"/>
+          </a:p>
+          <a:p>
+            <a:pPr indent="0" marL="0">
+              <a:buNone/>
+            </a:pPr>
+            <a:r>
+              <a:rPr lang="en-US" sz="1050" dirty="0">
+                <a:solidFill>
+                  <a:srgbClr val="1F1235"/>
+                </a:solidFill>
+              </a:rPr>
+              <a:t>PICK 시세 변동 시 원화가치 유지</a:t>
+            </a:r>
+            <a:endParaRPr lang="en-US" sz="1050" dirty="0"/>
+          </a:p>
+          <a:p>
+            <a:pPr indent="0" marL="0">
+              <a:buNone/>
+            </a:pPr>
+            <a:r>
+              <a:rPr lang="en-US" sz="1050" dirty="0">
+                <a:solidFill>
+                  <a:srgbClr val="1F1235"/>
+                </a:solidFill>
+              </a:rPr>
+              <a:t>stores.photo_review_reward_krw DB</a:t>
+            </a:r>
+            <a:endParaRPr lang="en-US" sz="1050" dirty="0"/>
+          </a:p>
+        </p:txBody>
+      </p:sp>
+      <p:sp>
+        <p:nvSpPr>
+          <p:cNvPr id="26" name="Shape 24"/>
+          <p:cNvSpPr/>
+          <p:nvPr/>
+        </p:nvSpPr>
+        <p:spPr>
+          <a:xfrm>
+            <a:off x="4160520" y="3246120"/>
+            <a:ext cx="3749040" cy="2148840"/>
           </a:xfrm>
           <a:prstGeom prst="roundRect">
             <a:avLst>
-              <a:gd name="adj" fmla="val 5660"/>
+              <a:gd name="adj" fmla="val 6383"/>
             </a:avLst>
           </a:prstGeom>
           <a:solidFill>
-            <a:srgbClr val="FFEDD5"/>
+            <a:srgbClr val="EDE9FE"/>
           </a:solidFill>
           <a:ln w="12700">
             <a:solidFill>
-              <a:srgbClr val="EA580C"/>
+              <a:srgbClr val="C4B5FD"/>
             </a:solidFill>
             <a:prstDash val="solid"/>
           </a:ln>
@@ -5080,26 +4662,26 @@
       </p:sp>
       <p:sp>
         <p:nvSpPr>
-          <p:cNvPr id="46" name="Shape 44"/>
-          <p:cNvSpPr/>
-          <p:nvPr/>
-        </p:nvSpPr>
-        <p:spPr>
-          <a:xfrm>
-            <a:off x="8202168" y="3675888"/>
-            <a:ext cx="3529584" cy="384048"/>
+          <p:cNvPr id="27" name="Shape 25"/>
+          <p:cNvSpPr/>
+          <p:nvPr/>
+        </p:nvSpPr>
+        <p:spPr>
+          <a:xfrm>
+            <a:off x="4325112" y="3429000"/>
+            <a:ext cx="530352" cy="530352"/>
           </a:xfrm>
           <a:prstGeom prst="roundRect">
             <a:avLst>
-              <a:gd name="adj" fmla="val 19048"/>
+              <a:gd name="adj" fmla="val 17241"/>
             </a:avLst>
           </a:prstGeom>
           <a:solidFill>
-            <a:srgbClr val="EA580C"/>
+            <a:srgbClr val="FFFFFF"/>
           </a:solidFill>
           <a:ln w="12700">
             <a:solidFill>
-              <a:srgbClr val="EA580C"/>
+              <a:srgbClr val="C4B5FD"/>
             </a:solidFill>
             <a:prstDash val="solid"/>
           </a:ln>
@@ -5107,14 +4689,14 @@
       </p:sp>
       <p:sp>
         <p:nvSpPr>
-          <p:cNvPr id="47" name="Text 45"/>
-          <p:cNvSpPr/>
-          <p:nvPr/>
-        </p:nvSpPr>
-        <p:spPr>
-          <a:xfrm>
-            <a:off x="8202168" y="3675888"/>
-            <a:ext cx="3529584" cy="384048"/>
+          <p:cNvPr id="28" name="Text 26"/>
+          <p:cNvSpPr/>
+          <p:nvPr/>
+        </p:nvSpPr>
+        <p:spPr>
+          <a:xfrm>
+            <a:off x="4325112" y="3410712"/>
+            <a:ext cx="548640" cy="548640"/>
           </a:xfrm>
           <a:prstGeom prst="rect">
             <a:avLst/>
@@ -5130,12 +4712,48 @@
               <a:buNone/>
             </a:pPr>
             <a:r>
+              <a:rPr lang="en-US" sz="1800" dirty="0">
+                <a:solidFill>
+                  <a:srgbClr val="000000"/>
+                </a:solidFill>
+              </a:rPr>
+              <a:t>🎟️</a:t>
+            </a:r>
+            <a:endParaRPr lang="en-US" sz="1800" dirty="0"/>
+          </a:p>
+        </p:txBody>
+      </p:sp>
+      <p:sp>
+        <p:nvSpPr>
+          <p:cNvPr id="29" name="Text 27"/>
+          <p:cNvSpPr/>
+          <p:nvPr/>
+        </p:nvSpPr>
+        <p:spPr>
+          <a:xfrm>
+            <a:off x="4965192" y="3447288"/>
+            <a:ext cx="2743200" cy="365760"/>
+          </a:xfrm>
+          <a:prstGeom prst="rect">
+            <a:avLst/>
+          </a:prstGeom>
+          <a:noFill/>
+          <a:ln/>
+        </p:spPr>
+        <p:txBody>
+          <a:bodyPr wrap="square" rtlCol="0" anchor="ctr"/>
+          <a:lstStyle/>
+          <a:p>
+            <a:pPr indent="0" marL="0">
+              <a:buNone/>
+            </a:pPr>
+            <a:r>
               <a:rPr lang="en-US" sz="1200" b="1" dirty="0">
                 <a:solidFill>
-                  <a:srgbClr val="FFFFFF"/>
-                </a:solidFill>
-              </a:rPr>
-              <a:t>🛡️ DB / 보안 / 관리자</a:t>
+                  <a:srgbClr val="6B21A8"/>
+                </a:solidFill>
+              </a:rPr>
+              <a:t>쿠폰 KRW 입력 방식</a:t>
             </a:r>
             <a:endParaRPr lang="en-US" sz="1200" dirty="0"/>
           </a:p>
@@ -5143,181 +4761,283 @@
       </p:sp>
       <p:sp>
         <p:nvSpPr>
-          <p:cNvPr id="48" name="Text 46"/>
-          <p:cNvSpPr/>
-          <p:nvPr/>
-        </p:nvSpPr>
-        <p:spPr>
-          <a:xfrm>
-            <a:off x="8257032" y="4160520"/>
-            <a:ext cx="3401568" cy="338328"/>
-          </a:xfrm>
-          <a:prstGeom prst="rect">
-            <a:avLst/>
-          </a:prstGeom>
-          <a:noFill/>
-          <a:ln/>
-        </p:spPr>
-        <p:txBody>
-          <a:bodyPr wrap="square" rtlCol="0" anchor="ctr"/>
-          <a:lstStyle/>
-          <a:p>
-            <a:pPr indent="0" marL="0">
-              <a:buNone/>
-            </a:pPr>
-            <a:r>
-              <a:rPr lang="en-US" sz="1000" dirty="0">
-                <a:solidFill>
-                  <a:srgbClr val="1F1235"/>
-                </a:solidFill>
-              </a:rPr>
-              <a:t>✓  DB 인덱스 30개+ (GIN 전문검색 포함)</a:t>
-            </a:r>
-            <a:endParaRPr lang="en-US" sz="1000" dirty="0"/>
-          </a:p>
-        </p:txBody>
-      </p:sp>
-      <p:sp>
-        <p:nvSpPr>
-          <p:cNvPr id="49" name="Text 47"/>
-          <p:cNvSpPr/>
-          <p:nvPr/>
-        </p:nvSpPr>
-        <p:spPr>
-          <a:xfrm>
-            <a:off x="8257032" y="4507992"/>
-            <a:ext cx="3401568" cy="338328"/>
-          </a:xfrm>
-          <a:prstGeom prst="rect">
-            <a:avLst/>
-          </a:prstGeom>
-          <a:noFill/>
-          <a:ln/>
-        </p:spPr>
-        <p:txBody>
-          <a:bodyPr wrap="square" rtlCol="0" anchor="ctr"/>
-          <a:lstStyle/>
-          <a:p>
-            <a:pPr indent="0" marL="0">
-              <a:buNone/>
-            </a:pPr>
-            <a:r>
-              <a:rPr lang="en-US" sz="1000" dirty="0">
-                <a:solidFill>
-                  <a:srgbClr val="1F1235"/>
-                </a:solidFill>
-              </a:rPr>
-              <a:t>✓  운영 RLS 정책 + Storage 버킷 정책</a:t>
-            </a:r>
-            <a:endParaRPr lang="en-US" sz="1000" dirty="0"/>
-          </a:p>
-        </p:txBody>
-      </p:sp>
-      <p:sp>
-        <p:nvSpPr>
-          <p:cNvPr id="50" name="Text 48"/>
-          <p:cNvSpPr/>
-          <p:nvPr/>
-        </p:nvSpPr>
-        <p:spPr>
-          <a:xfrm>
-            <a:off x="8257032" y="4855464"/>
-            <a:ext cx="3401568" cy="338328"/>
-          </a:xfrm>
-          <a:prstGeom prst="rect">
-            <a:avLst/>
-          </a:prstGeom>
-          <a:noFill/>
-          <a:ln/>
-        </p:spPr>
-        <p:txBody>
-          <a:bodyPr wrap="square" rtlCol="0" anchor="ctr"/>
-          <a:lstStyle/>
-          <a:p>
-            <a:pPr indent="0" marL="0">
-              <a:buNone/>
-            </a:pPr>
-            <a:r>
-              <a:rPr lang="en-US" sz="1000" dirty="0">
-                <a:solidFill>
-                  <a:srgbClr val="1F1235"/>
-                </a:solidFill>
-              </a:rPr>
-              <a:t>✓  관리자 5탭: 통계·회원·가게·쿠폰·FCM 푸시</a:t>
-            </a:r>
-            <a:endParaRPr lang="en-US" sz="1000" dirty="0"/>
-          </a:p>
-        </p:txBody>
-      </p:sp>
-      <p:sp>
-        <p:nvSpPr>
-          <p:cNvPr id="51" name="Text 49"/>
-          <p:cNvSpPr/>
-          <p:nvPr/>
-        </p:nvSpPr>
-        <p:spPr>
-          <a:xfrm>
-            <a:off x="8257032" y="5202936"/>
-            <a:ext cx="3401568" cy="338328"/>
-          </a:xfrm>
-          <a:prstGeom prst="rect">
-            <a:avLst/>
-          </a:prstGeom>
-          <a:noFill/>
-          <a:ln/>
-        </p:spPr>
-        <p:txBody>
-          <a:bodyPr wrap="square" rtlCol="0" anchor="ctr"/>
-          <a:lstStyle/>
-          <a:p>
-            <a:pPr indent="0" marL="0">
-              <a:buNone/>
-            </a:pPr>
-            <a:r>
-              <a:rPr lang="en-US" sz="1000" dirty="0">
-                <a:solidFill>
-                  <a:srgbClr val="1F1235"/>
-                </a:solidFill>
-              </a:rPr>
-              <a:t>✓  404·에러·로딩·스플래시 페이지</a:t>
-            </a:r>
-            <a:endParaRPr lang="en-US" sz="1000" dirty="0"/>
-          </a:p>
-        </p:txBody>
-      </p:sp>
-      <p:sp>
-        <p:nvSpPr>
-          <p:cNvPr id="52" name="Text 50"/>
-          <p:cNvSpPr/>
-          <p:nvPr/>
-        </p:nvSpPr>
-        <p:spPr>
-          <a:xfrm>
-            <a:off x="8257032" y="5550408"/>
-            <a:ext cx="3401568" cy="338328"/>
-          </a:xfrm>
-          <a:prstGeom prst="rect">
-            <a:avLst/>
-          </a:prstGeom>
-          <a:noFill/>
-          <a:ln/>
-        </p:spPr>
-        <p:txBody>
-          <a:bodyPr wrap="square" rtlCol="0" anchor="ctr"/>
-          <a:lstStyle/>
-          <a:p>
-            <a:pPr indent="0" marL="0">
-              <a:buNone/>
-            </a:pPr>
-            <a:r>
-              <a:rPr lang="en-US" sz="1000" dirty="0">
-                <a:solidFill>
-                  <a:srgbClr val="1F1235"/>
-                </a:solidFill>
-              </a:rPr>
-              <a:t>✓  다크모드 + Tailwind dark: 클래스 전면 적용</a:t>
-            </a:r>
-            <a:endParaRPr lang="en-US" sz="1000" dirty="0"/>
+          <p:cNvPr id="30" name="Text 28"/>
+          <p:cNvSpPr/>
+          <p:nvPr/>
+        </p:nvSpPr>
+        <p:spPr>
+          <a:xfrm>
+            <a:off x="4361688" y="3959352"/>
+            <a:ext cx="3337560" cy="1298448"/>
+          </a:xfrm>
+          <a:prstGeom prst="rect">
+            <a:avLst/>
+          </a:prstGeom>
+          <a:noFill/>
+          <a:ln/>
+        </p:spPr>
+        <p:txBody>
+          <a:bodyPr wrap="square" rtlCol="0" anchor="ctr"/>
+          <a:lstStyle/>
+          <a:p>
+            <a:pPr indent="0" marL="0">
+              <a:buNone/>
+            </a:pPr>
+            <a:r>
+              <a:rPr lang="en-US" sz="1050" dirty="0">
+                <a:solidFill>
+                  <a:srgbClr val="1F1235"/>
+                </a:solidFill>
+              </a:rPr>
+              <a:t>fixed_pick 쿠폰: 원화 → PICK 환산</a:t>
+            </a:r>
+            <a:endParaRPr lang="en-US" sz="1050" dirty="0"/>
+          </a:p>
+          <a:p>
+            <a:pPr indent="0" marL="0">
+              <a:buNone/>
+            </a:pPr>
+            <a:r>
+              <a:rPr lang="en-US" sz="1050" dirty="0">
+                <a:solidFill>
+                  <a:srgbClr val="1F1235"/>
+                </a:solidFill>
+              </a:rPr>
+              <a:t>₩500 입력 → 500P 자동 표시</a:t>
+            </a:r>
+            <a:endParaRPr lang="en-US" sz="1050" dirty="0"/>
+          </a:p>
+          <a:p>
+            <a:pPr indent="0" marL="0">
+              <a:buNone/>
+            </a:pPr>
+            <a:r>
+              <a:rPr lang="en-US" sz="1050" dirty="0">
+                <a:solidFill>
+                  <a:srgbClr val="1F1235"/>
+                </a:solidFill>
+              </a:rPr>
+              <a:t>시세 변동 안내 문구 포함</a:t>
+            </a:r>
+            <a:endParaRPr lang="en-US" sz="1050" dirty="0"/>
+          </a:p>
+          <a:p>
+            <a:pPr indent="0" marL="0">
+              <a:buNone/>
+            </a:pPr>
+            <a:r>
+              <a:rPr lang="en-US" sz="1050" dirty="0">
+                <a:solidFill>
+                  <a:srgbClr val="1F1235"/>
+                </a:solidFill>
+              </a:rPr>
+              <a:t>가맹점 PICK 잔액 차감 구조</a:t>
+            </a:r>
+            <a:endParaRPr lang="en-US" sz="1050" dirty="0"/>
+          </a:p>
+        </p:txBody>
+      </p:sp>
+      <p:sp>
+        <p:nvSpPr>
+          <p:cNvPr id="31" name="Shape 29"/>
+          <p:cNvSpPr/>
+          <p:nvPr/>
+        </p:nvSpPr>
+        <p:spPr>
+          <a:xfrm>
+            <a:off x="8092440" y="3246120"/>
+            <a:ext cx="3749040" cy="2148840"/>
+          </a:xfrm>
+          <a:prstGeom prst="roundRect">
+            <a:avLst>
+              <a:gd name="adj" fmla="val 6383"/>
+            </a:avLst>
+          </a:prstGeom>
+          <a:solidFill>
+            <a:srgbClr val="EDE9FE"/>
+          </a:solidFill>
+          <a:ln w="12700">
+            <a:solidFill>
+              <a:srgbClr val="C4B5FD"/>
+            </a:solidFill>
+            <a:prstDash val="solid"/>
+          </a:ln>
+        </p:spPr>
+      </p:sp>
+      <p:sp>
+        <p:nvSpPr>
+          <p:cNvPr id="32" name="Shape 30"/>
+          <p:cNvSpPr/>
+          <p:nvPr/>
+        </p:nvSpPr>
+        <p:spPr>
+          <a:xfrm>
+            <a:off x="8257032" y="3429000"/>
+            <a:ext cx="530352" cy="530352"/>
+          </a:xfrm>
+          <a:prstGeom prst="roundRect">
+            <a:avLst>
+              <a:gd name="adj" fmla="val 17241"/>
+            </a:avLst>
+          </a:prstGeom>
+          <a:solidFill>
+            <a:srgbClr val="FFFFFF"/>
+          </a:solidFill>
+          <a:ln w="12700">
+            <a:solidFill>
+              <a:srgbClr val="C4B5FD"/>
+            </a:solidFill>
+            <a:prstDash val="solid"/>
+          </a:ln>
+        </p:spPr>
+      </p:sp>
+      <p:sp>
+        <p:nvSpPr>
+          <p:cNvPr id="33" name="Text 31"/>
+          <p:cNvSpPr/>
+          <p:nvPr/>
+        </p:nvSpPr>
+        <p:spPr>
+          <a:xfrm>
+            <a:off x="8257032" y="3410712"/>
+            <a:ext cx="548640" cy="548640"/>
+          </a:xfrm>
+          <a:prstGeom prst="rect">
+            <a:avLst/>
+          </a:prstGeom>
+          <a:noFill/>
+          <a:ln/>
+        </p:spPr>
+        <p:txBody>
+          <a:bodyPr wrap="square" rtlCol="0" anchor="ctr"/>
+          <a:lstStyle/>
+          <a:p>
+            <a:pPr algn="ctr" indent="0" marL="0">
+              <a:buNone/>
+            </a:pPr>
+            <a:r>
+              <a:rPr lang="en-US" sz="1800" dirty="0">
+                <a:solidFill>
+                  <a:srgbClr val="000000"/>
+                </a:solidFill>
+              </a:rPr>
+              <a:t>🗑️</a:t>
+            </a:r>
+            <a:endParaRPr lang="en-US" sz="1800" dirty="0"/>
+          </a:p>
+        </p:txBody>
+      </p:sp>
+      <p:sp>
+        <p:nvSpPr>
+          <p:cNvPr id="34" name="Text 32"/>
+          <p:cNvSpPr/>
+          <p:nvPr/>
+        </p:nvSpPr>
+        <p:spPr>
+          <a:xfrm>
+            <a:off x="8897112" y="3447288"/>
+            <a:ext cx="2743200" cy="365760"/>
+          </a:xfrm>
+          <a:prstGeom prst="rect">
+            <a:avLst/>
+          </a:prstGeom>
+          <a:noFill/>
+          <a:ln/>
+        </p:spPr>
+        <p:txBody>
+          <a:bodyPr wrap="square" rtlCol="0" anchor="ctr"/>
+          <a:lstStyle/>
+          <a:p>
+            <a:pPr indent="0" marL="0">
+              <a:buNone/>
+            </a:pPr>
+            <a:r>
+              <a:rPr lang="en-US" sz="1200" b="1" dirty="0">
+                <a:solidFill>
+                  <a:srgbClr val="6B21A8"/>
+                </a:solidFill>
+              </a:rPr>
+              <a:t>가게설정 UI 정리</a:t>
+            </a:r>
+            <a:endParaRPr lang="en-US" sz="1200" dirty="0"/>
+          </a:p>
+        </p:txBody>
+      </p:sp>
+      <p:sp>
+        <p:nvSpPr>
+          <p:cNvPr id="35" name="Text 33"/>
+          <p:cNvSpPr/>
+          <p:nvPr/>
+        </p:nvSpPr>
+        <p:spPr>
+          <a:xfrm>
+            <a:off x="8293608" y="3959352"/>
+            <a:ext cx="3337560" cy="1298448"/>
+          </a:xfrm>
+          <a:prstGeom prst="rect">
+            <a:avLst/>
+          </a:prstGeom>
+          <a:noFill/>
+          <a:ln/>
+        </p:spPr>
+        <p:txBody>
+          <a:bodyPr wrap="square" rtlCol="0" anchor="ctr"/>
+          <a:lstStyle/>
+          <a:p>
+            <a:pPr indent="0" marL="0">
+              <a:buNone/>
+            </a:pPr>
+            <a:r>
+              <a:rPr lang="en-US" sz="1050" dirty="0">
+                <a:solidFill>
+                  <a:srgbClr val="1F1235"/>
+                </a:solidFill>
+              </a:rPr>
+              <a:t>PICK 적립률 설정 섹션 제거</a:t>
+            </a:r>
+            <a:endParaRPr lang="en-US" sz="1050" dirty="0"/>
+          </a:p>
+          <a:p>
+            <a:pPr indent="0" marL="0">
+              <a:buNone/>
+            </a:pPr>
+            <a:r>
+              <a:rPr lang="en-US" sz="1050" dirty="0">
+                <a:solidFill>
+                  <a:srgbClr val="1F1235"/>
+                </a:solidFill>
+              </a:rPr>
+              <a:t>사장님 직접 조율 불필요 항목</a:t>
+            </a:r>
+            <a:endParaRPr lang="en-US" sz="1050" dirty="0"/>
+          </a:p>
+          <a:p>
+            <a:pPr indent="0" marL="0">
+              <a:buNone/>
+            </a:pPr>
+            <a:r>
+              <a:rPr lang="en-US" sz="1050" dirty="0">
+                <a:solidFill>
+                  <a:srgbClr val="1F1235"/>
+                </a:solidFill>
+              </a:rPr>
+              <a:t>픽업대기 라이더 배정 상태 표시</a:t>
+            </a:r>
+            <a:endParaRPr lang="en-US" sz="1050" dirty="0"/>
+          </a:p>
+          <a:p>
+            <a:pPr indent="0" marL="0">
+              <a:buNone/>
+            </a:pPr>
+            <a:r>
+              <a:rPr lang="en-US" sz="1050" dirty="0">
+                <a:solidFill>
+                  <a:srgbClr val="1F1235"/>
+                </a:solidFill>
+              </a:rPr>
+              <a:t>주문 상태 메시지 조건부 분기</a:t>
+            </a:r>
+            <a:endParaRPr lang="en-US" sz="1050" dirty="0"/>
           </a:p>
         </p:txBody>
       </p:sp>
@@ -5378,14 +5098,14 @@
               <a:buNone/>
             </a:pPr>
             <a:r>
-              <a:rPr lang="en-US" sz="2600" b="1" dirty="0">
+              <a:rPr lang="en-US" sz="2400" b="1" dirty="0">
                 <a:solidFill>
                   <a:srgbClr val="4C1D95"/>
                 </a:solidFill>
               </a:rPr>
-              <a:t>🚀  Phase 1~3 완성 · 다음 단계 로드맵</a:t>
-            </a:r>
-            <a:endParaRPr lang="en-US" sz="2600" dirty="0"/>
+              <a:t>✅  완료된 기능 전체 목록 (4/16 최신)</a:t>
+            </a:r>
+            <a:endParaRPr lang="en-US" sz="2400" dirty="0"/>
           </a:p>
         </p:txBody>
       </p:sp>
@@ -5398,7 +5118,7 @@
         <p:spPr>
           <a:xfrm>
             <a:off x="365760" y="804672"/>
-            <a:ext cx="3657600" cy="45720"/>
+            <a:ext cx="3840480" cy="45720"/>
           </a:xfrm>
           <a:prstGeom prst="rect">
             <a:avLst/>
@@ -5422,12 +5142,552 @@
         </p:nvSpPr>
         <p:spPr>
           <a:xfrm>
-            <a:off x="365760" y="914400"/>
-            <a:ext cx="12070080" cy="548640"/>
+            <a:off x="228600" y="960120"/>
+            <a:ext cx="3749040" cy="2423160"/>
           </a:xfrm>
           <a:prstGeom prst="roundRect">
             <a:avLst>
-              <a:gd name="adj" fmla="val 20000"/>
+              <a:gd name="adj" fmla="val 5660"/>
+            </a:avLst>
+          </a:prstGeom>
+          <a:solidFill>
+            <a:srgbClr val="EDE9FE"/>
+          </a:solidFill>
+          <a:ln w="12700">
+            <a:solidFill>
+              <a:srgbClr val="6B21A8"/>
+            </a:solidFill>
+            <a:prstDash val="solid"/>
+          </a:ln>
+        </p:spPr>
+      </p:sp>
+      <p:sp>
+        <p:nvSpPr>
+          <p:cNvPr id="5" name="Shape 3"/>
+          <p:cNvSpPr/>
+          <p:nvPr/>
+        </p:nvSpPr>
+        <p:spPr>
+          <a:xfrm>
+            <a:off x="338328" y="1069848"/>
+            <a:ext cx="3529584" cy="384048"/>
+          </a:xfrm>
+          <a:prstGeom prst="roundRect">
+            <a:avLst>
+              <a:gd name="adj" fmla="val 19048"/>
+            </a:avLst>
+          </a:prstGeom>
+          <a:solidFill>
+            <a:srgbClr val="6B21A8"/>
+          </a:solidFill>
+          <a:ln w="12700">
+            <a:solidFill>
+              <a:srgbClr val="6B21A8"/>
+            </a:solidFill>
+            <a:prstDash val="solid"/>
+          </a:ln>
+        </p:spPr>
+      </p:sp>
+      <p:sp>
+        <p:nvSpPr>
+          <p:cNvPr id="6" name="Text 4"/>
+          <p:cNvSpPr/>
+          <p:nvPr/>
+        </p:nvSpPr>
+        <p:spPr>
+          <a:xfrm>
+            <a:off x="338328" y="1069848"/>
+            <a:ext cx="3529584" cy="384048"/>
+          </a:xfrm>
+          <a:prstGeom prst="rect">
+            <a:avLst/>
+          </a:prstGeom>
+          <a:noFill/>
+          <a:ln/>
+        </p:spPr>
+        <p:txBody>
+          <a:bodyPr wrap="square" rtlCol="0" anchor="ctr"/>
+          <a:lstStyle/>
+          <a:p>
+            <a:pPr algn="ctr" indent="0" marL="0">
+              <a:buNone/>
+            </a:pPr>
+            <a:r>
+              <a:rPr lang="en-US" sz="1200" b="1" dirty="0">
+                <a:solidFill>
+                  <a:srgbClr val="FFFFFF"/>
+                </a:solidFill>
+              </a:rPr>
+              <a:t>🔐 인증 / 사용자 관리</a:t>
+            </a:r>
+            <a:endParaRPr lang="en-US" sz="1200" dirty="0"/>
+          </a:p>
+        </p:txBody>
+      </p:sp>
+      <p:sp>
+        <p:nvSpPr>
+          <p:cNvPr id="7" name="Text 5"/>
+          <p:cNvSpPr/>
+          <p:nvPr/>
+        </p:nvSpPr>
+        <p:spPr>
+          <a:xfrm>
+            <a:off x="393192" y="1554480"/>
+            <a:ext cx="3401568" cy="338328"/>
+          </a:xfrm>
+          <a:prstGeom prst="rect">
+            <a:avLst/>
+          </a:prstGeom>
+          <a:noFill/>
+          <a:ln/>
+        </p:spPr>
+        <p:txBody>
+          <a:bodyPr wrap="square" rtlCol="0" anchor="ctr"/>
+          <a:lstStyle/>
+          <a:p>
+            <a:pPr indent="0" marL="0">
+              <a:buNone/>
+            </a:pPr>
+            <a:r>
+              <a:rPr lang="en-US" sz="1000" dirty="0">
+                <a:solidFill>
+                  <a:srgbClr val="1F1235"/>
+                </a:solidFill>
+              </a:rPr>
+              <a:t>✓  이메일 로그인/회원가입 + 지갑 자동생성</a:t>
+            </a:r>
+            <a:endParaRPr lang="en-US" sz="1000" dirty="0"/>
+          </a:p>
+        </p:txBody>
+      </p:sp>
+      <p:sp>
+        <p:nvSpPr>
+          <p:cNvPr id="8" name="Text 6"/>
+          <p:cNvSpPr/>
+          <p:nvPr/>
+        </p:nvSpPr>
+        <p:spPr>
+          <a:xfrm>
+            <a:off x="393192" y="1901952"/>
+            <a:ext cx="3401568" cy="338328"/>
+          </a:xfrm>
+          <a:prstGeom prst="rect">
+            <a:avLst/>
+          </a:prstGeom>
+          <a:noFill/>
+          <a:ln/>
+        </p:spPr>
+        <p:txBody>
+          <a:bodyPr wrap="square" rtlCol="0" anchor="ctr"/>
+          <a:lstStyle/>
+          <a:p>
+            <a:pPr indent="0" marL="0">
+              <a:buNone/>
+            </a:pPr>
+            <a:r>
+              <a:rPr lang="en-US" sz="1000" dirty="0">
+                <a:solidFill>
+                  <a:srgbClr val="1F1235"/>
+                </a:solidFill>
+              </a:rPr>
+              <a:t>✓  카카오 소셜 로그인 (비즈니스 인증 후 재추가)</a:t>
+            </a:r>
+            <a:endParaRPr lang="en-US" sz="1000" dirty="0"/>
+          </a:p>
+        </p:txBody>
+      </p:sp>
+      <p:sp>
+        <p:nvSpPr>
+          <p:cNvPr id="9" name="Text 7"/>
+          <p:cNvSpPr/>
+          <p:nvPr/>
+        </p:nvSpPr>
+        <p:spPr>
+          <a:xfrm>
+            <a:off x="393192" y="2249424"/>
+            <a:ext cx="3401568" cy="338328"/>
+          </a:xfrm>
+          <a:prstGeom prst="rect">
+            <a:avLst/>
+          </a:prstGeom>
+          <a:noFill/>
+          <a:ln/>
+        </p:spPr>
+        <p:txBody>
+          <a:bodyPr wrap="square" rtlCol="0" anchor="ctr"/>
+          <a:lstStyle/>
+          <a:p>
+            <a:pPr indent="0" marL="0">
+              <a:buNone/>
+            </a:pPr>
+            <a:r>
+              <a:rPr lang="en-US" sz="1000" dirty="0">
+                <a:solidFill>
+                  <a:srgbClr val="1F1235"/>
+                </a:solidFill>
+              </a:rPr>
+              <a:t>✓  RBAC 미들웨어 (user/owner/rider/admin)</a:t>
+            </a:r>
+            <a:endParaRPr lang="en-US" sz="1000" dirty="0"/>
+          </a:p>
+        </p:txBody>
+      </p:sp>
+      <p:sp>
+        <p:nvSpPr>
+          <p:cNvPr id="10" name="Text 8"/>
+          <p:cNvSpPr/>
+          <p:nvPr/>
+        </p:nvSpPr>
+        <p:spPr>
+          <a:xfrm>
+            <a:off x="393192" y="2596896"/>
+            <a:ext cx="3401568" cy="338328"/>
+          </a:xfrm>
+          <a:prstGeom prst="rect">
+            <a:avLst/>
+          </a:prstGeom>
+          <a:noFill/>
+          <a:ln/>
+        </p:spPr>
+        <p:txBody>
+          <a:bodyPr wrap="square" rtlCol="0" anchor="ctr"/>
+          <a:lstStyle/>
+          <a:p>
+            <a:pPr indent="0" marL="0">
+              <a:buNone/>
+            </a:pPr>
+            <a:r>
+              <a:rPr lang="en-US" sz="1000" dirty="0">
+                <a:solidFill>
+                  <a:srgbClr val="1F1235"/>
+                </a:solidFill>
+              </a:rPr>
+              <a:t>✓  비밀번호 찾기·재설정 + 검색 히스토리</a:t>
+            </a:r>
+            <a:endParaRPr lang="en-US" sz="1000" dirty="0"/>
+          </a:p>
+        </p:txBody>
+      </p:sp>
+      <p:sp>
+        <p:nvSpPr>
+          <p:cNvPr id="11" name="Text 9"/>
+          <p:cNvSpPr/>
+          <p:nvPr/>
+        </p:nvSpPr>
+        <p:spPr>
+          <a:xfrm>
+            <a:off x="393192" y="2944368"/>
+            <a:ext cx="3401568" cy="338328"/>
+          </a:xfrm>
+          <a:prstGeom prst="rect">
+            <a:avLst/>
+          </a:prstGeom>
+          <a:noFill/>
+          <a:ln/>
+        </p:spPr>
+        <p:txBody>
+          <a:bodyPr wrap="square" rtlCol="0" anchor="ctr"/>
+          <a:lstStyle/>
+          <a:p>
+            <a:pPr indent="0" marL="0">
+              <a:buNone/>
+            </a:pPr>
+            <a:r>
+              <a:rPr lang="en-US" sz="1000" dirty="0">
+                <a:solidFill>
+                  <a:srgbClr val="1F1235"/>
+                </a:solidFill>
+              </a:rPr>
+              <a:t>✓  프로필 수정 + 다중 배달 주소 + 레퍼럴</a:t>
+            </a:r>
+            <a:endParaRPr lang="en-US" sz="1000" dirty="0"/>
+          </a:p>
+        </p:txBody>
+      </p:sp>
+      <p:sp>
+        <p:nvSpPr>
+          <p:cNvPr id="12" name="Shape 10"/>
+          <p:cNvSpPr/>
+          <p:nvPr/>
+        </p:nvSpPr>
+        <p:spPr>
+          <a:xfrm>
+            <a:off x="4160520" y="960120"/>
+            <a:ext cx="3749040" cy="2423160"/>
+          </a:xfrm>
+          <a:prstGeom prst="roundRect">
+            <a:avLst>
+              <a:gd name="adj" fmla="val 5660"/>
+            </a:avLst>
+          </a:prstGeom>
+          <a:solidFill>
+            <a:srgbClr val="E0F2FE"/>
+          </a:solidFill>
+          <a:ln w="12700">
+            <a:solidFill>
+              <a:srgbClr val="0369A1"/>
+            </a:solidFill>
+            <a:prstDash val="solid"/>
+          </a:ln>
+        </p:spPr>
+      </p:sp>
+      <p:sp>
+        <p:nvSpPr>
+          <p:cNvPr id="13" name="Shape 11"/>
+          <p:cNvSpPr/>
+          <p:nvPr/>
+        </p:nvSpPr>
+        <p:spPr>
+          <a:xfrm>
+            <a:off x="4270248" y="1069848"/>
+            <a:ext cx="3529584" cy="384048"/>
+          </a:xfrm>
+          <a:prstGeom prst="roundRect">
+            <a:avLst>
+              <a:gd name="adj" fmla="val 19048"/>
+            </a:avLst>
+          </a:prstGeom>
+          <a:solidFill>
+            <a:srgbClr val="0369A1"/>
+          </a:solidFill>
+          <a:ln w="12700">
+            <a:solidFill>
+              <a:srgbClr val="0369A1"/>
+            </a:solidFill>
+            <a:prstDash val="solid"/>
+          </a:ln>
+        </p:spPr>
+      </p:sp>
+      <p:sp>
+        <p:nvSpPr>
+          <p:cNvPr id="14" name="Text 12"/>
+          <p:cNvSpPr/>
+          <p:nvPr/>
+        </p:nvSpPr>
+        <p:spPr>
+          <a:xfrm>
+            <a:off x="4270248" y="1069848"/>
+            <a:ext cx="3529584" cy="384048"/>
+          </a:xfrm>
+          <a:prstGeom prst="rect">
+            <a:avLst/>
+          </a:prstGeom>
+          <a:noFill/>
+          <a:ln/>
+        </p:spPr>
+        <p:txBody>
+          <a:bodyPr wrap="square" rtlCol="0" anchor="ctr"/>
+          <a:lstStyle/>
+          <a:p>
+            <a:pPr algn="ctr" indent="0" marL="0">
+              <a:buNone/>
+            </a:pPr>
+            <a:r>
+              <a:rPr lang="en-US" sz="1200" b="1" dirty="0">
+                <a:solidFill>
+                  <a:srgbClr val="FFFFFF"/>
+                </a:solidFill>
+              </a:rPr>
+              <a:t>🏠 사용자 탭 (4개) + UX</a:t>
+            </a:r>
+            <a:endParaRPr lang="en-US" sz="1200" dirty="0"/>
+          </a:p>
+        </p:txBody>
+      </p:sp>
+      <p:sp>
+        <p:nvSpPr>
+          <p:cNvPr id="15" name="Text 13"/>
+          <p:cNvSpPr/>
+          <p:nvPr/>
+        </p:nvSpPr>
+        <p:spPr>
+          <a:xfrm>
+            <a:off x="4325112" y="1554480"/>
+            <a:ext cx="3401568" cy="338328"/>
+          </a:xfrm>
+          <a:prstGeom prst="rect">
+            <a:avLst/>
+          </a:prstGeom>
+          <a:noFill/>
+          <a:ln/>
+        </p:spPr>
+        <p:txBody>
+          <a:bodyPr wrap="square" rtlCol="0" anchor="ctr"/>
+          <a:lstStyle/>
+          <a:p>
+            <a:pPr indent="0" marL="0">
+              <a:buNone/>
+            </a:pPr>
+            <a:r>
+              <a:rPr lang="en-US" sz="1000" dirty="0">
+                <a:solidFill>
+                  <a:srgbClr val="1F1235"/>
+                </a:solidFill>
+              </a:rPr>
+              <a:t>✓  홈: 카테고리·검색(GIN)·인기가게·광고</a:t>
+            </a:r>
+            <a:endParaRPr lang="en-US" sz="1000" dirty="0"/>
+          </a:p>
+        </p:txBody>
+      </p:sp>
+      <p:sp>
+        <p:nvSpPr>
+          <p:cNvPr id="16" name="Text 14"/>
+          <p:cNvSpPr/>
+          <p:nvPr/>
+        </p:nvSpPr>
+        <p:spPr>
+          <a:xfrm>
+            <a:off x="4325112" y="1901952"/>
+            <a:ext cx="3401568" cy="338328"/>
+          </a:xfrm>
+          <a:prstGeom prst="rect">
+            <a:avLst/>
+          </a:prstGeom>
+          <a:noFill/>
+          <a:ln/>
+        </p:spPr>
+        <p:txBody>
+          <a:bodyPr wrap="square" rtlCol="0" anchor="ctr"/>
+          <a:lstStyle/>
+          <a:p>
+            <a:pPr indent="0" marL="0">
+              <a:buNone/>
+            </a:pPr>
+            <a:r>
+              <a:rPr lang="en-US" sz="1000" dirty="0">
+                <a:solidFill>
+                  <a:srgbClr val="1F1235"/>
+                </a:solidFill>
+              </a:rPr>
+              <a:t>✓  지갑: 퍼플 재디자인 + Pi UI + 출석 Tap-to-Earn</a:t>
+            </a:r>
+            <a:endParaRPr lang="en-US" sz="1000" dirty="0"/>
+          </a:p>
+        </p:txBody>
+      </p:sp>
+      <p:sp>
+        <p:nvSpPr>
+          <p:cNvPr id="17" name="Text 15"/>
+          <p:cNvSpPr/>
+          <p:nvPr/>
+        </p:nvSpPr>
+        <p:spPr>
+          <a:xfrm>
+            <a:off x="4325112" y="2249424"/>
+            <a:ext cx="3401568" cy="338328"/>
+          </a:xfrm>
+          <a:prstGeom prst="rect">
+            <a:avLst/>
+          </a:prstGeom>
+          <a:noFill/>
+          <a:ln/>
+        </p:spPr>
+        <p:txBody>
+          <a:bodyPr wrap="square" rtlCol="0" anchor="ctr"/>
+          <a:lstStyle/>
+          <a:p>
+            <a:pPr indent="0" marL="0">
+              <a:buNone/>
+            </a:pPr>
+            <a:r>
+              <a:rPr lang="en-US" sz="1000" dirty="0">
+                <a:solidFill>
+                  <a:srgbClr val="1F1235"/>
+                </a:solidFill>
+              </a:rPr>
+              <a:t>✓  PICK주문: Realtime 추적 + 상세 + 재주문</a:t>
+            </a:r>
+            <a:endParaRPr lang="en-US" sz="1000" dirty="0"/>
+          </a:p>
+        </p:txBody>
+      </p:sp>
+      <p:sp>
+        <p:nvSpPr>
+          <p:cNvPr id="18" name="Text 16"/>
+          <p:cNvSpPr/>
+          <p:nvPr/>
+        </p:nvSpPr>
+        <p:spPr>
+          <a:xfrm>
+            <a:off x="4325112" y="2596896"/>
+            <a:ext cx="3401568" cy="338328"/>
+          </a:xfrm>
+          <a:prstGeom prst="rect">
+            <a:avLst/>
+          </a:prstGeom>
+          <a:noFill/>
+          <a:ln/>
+        </p:spPr>
+        <p:txBody>
+          <a:bodyPr wrap="square" rtlCol="0" anchor="ctr"/>
+          <a:lstStyle/>
+          <a:p>
+            <a:pPr indent="0" marL="0">
+              <a:buNone/>
+            </a:pPr>
+            <a:r>
+              <a:rPr lang="en-US" sz="1000" dirty="0">
+                <a:solidFill>
+                  <a:srgbClr val="1F1235"/>
+                </a:solidFill>
+              </a:rPr>
+              <a:t>✓  알림 드로어 + 딥링크 + 자동 트리거</a:t>
+            </a:r>
+            <a:endParaRPr lang="en-US" sz="1000" dirty="0"/>
+          </a:p>
+        </p:txBody>
+      </p:sp>
+      <p:sp>
+        <p:nvSpPr>
+          <p:cNvPr id="19" name="Text 17"/>
+          <p:cNvSpPr/>
+          <p:nvPr/>
+        </p:nvSpPr>
+        <p:spPr>
+          <a:xfrm>
+            <a:off x="4325112" y="2944368"/>
+            <a:ext cx="3401568" cy="338328"/>
+          </a:xfrm>
+          <a:prstGeom prst="rect">
+            <a:avLst/>
+          </a:prstGeom>
+          <a:noFill/>
+          <a:ln/>
+        </p:spPr>
+        <p:txBody>
+          <a:bodyPr wrap="square" rtlCol="0" anchor="ctr"/>
+          <a:lstStyle/>
+          <a:p>
+            <a:pPr indent="0" marL="0">
+              <a:buNone/>
+            </a:pPr>
+            <a:r>
+              <a:rPr lang="en-US" sz="1000" dirty="0">
+                <a:solidFill>
+                  <a:srgbClr val="1F1235"/>
+                </a:solidFill>
+              </a:rPr>
+              <a:t>✓  친구 초대 역할별 배치 (5K/10K/20K PICK)</a:t>
+            </a:r>
+            <a:endParaRPr lang="en-US" sz="1000" dirty="0"/>
+          </a:p>
+        </p:txBody>
+      </p:sp>
+      <p:sp>
+        <p:nvSpPr>
+          <p:cNvPr id="20" name="Shape 18"/>
+          <p:cNvSpPr/>
+          <p:nvPr/>
+        </p:nvSpPr>
+        <p:spPr>
+          <a:xfrm>
+            <a:off x="8092440" y="960120"/>
+            <a:ext cx="3749040" cy="2423160"/>
+          </a:xfrm>
+          <a:prstGeom prst="roundRect">
+            <a:avLst>
+              <a:gd name="adj" fmla="val 5660"/>
             </a:avLst>
           </a:prstGeom>
           <a:solidFill>
@@ -5443,58 +5703,22 @@
       </p:sp>
       <p:sp>
         <p:nvSpPr>
-          <p:cNvPr id="5" name="Text 3"/>
-          <p:cNvSpPr/>
-          <p:nvPr/>
-        </p:nvSpPr>
-        <p:spPr>
-          <a:xfrm>
-            <a:off x="365760" y="914400"/>
-            <a:ext cx="12070080" cy="548640"/>
-          </a:xfrm>
-          <a:prstGeom prst="rect">
-            <a:avLst/>
-          </a:prstGeom>
-          <a:noFill/>
-          <a:ln/>
-        </p:spPr>
-        <p:txBody>
-          <a:bodyPr wrap="square" rtlCol="0" anchor="ctr"/>
-          <a:lstStyle/>
-          <a:p>
-            <a:pPr algn="ctr" indent="0" marL="0">
-              <a:buNone/>
-            </a:pPr>
-            <a:r>
-              <a:rPr lang="en-US" sz="1400" b="1" dirty="0">
-                <a:solidFill>
-                  <a:srgbClr val="16A34A"/>
-                </a:solidFill>
-              </a:rPr>
-              <a:t>🎉  Phase 1~3 완성! 55개+ 기능 구현 · 미착수 기능 0개 · Pi Network 연동만 남음</a:t>
-            </a:r>
-            <a:endParaRPr lang="en-US" sz="1400" dirty="0"/>
-          </a:p>
-        </p:txBody>
-      </p:sp>
-      <p:sp>
-        <p:nvSpPr>
-          <p:cNvPr id="6" name="Shape 4"/>
-          <p:cNvSpPr/>
-          <p:nvPr/>
-        </p:nvSpPr>
-        <p:spPr>
-          <a:xfrm>
-            <a:off x="365760" y="1600200"/>
-            <a:ext cx="1325880" cy="384048"/>
+          <p:cNvPr id="21" name="Shape 19"/>
+          <p:cNvSpPr/>
+          <p:nvPr/>
+        </p:nvSpPr>
+        <p:spPr>
+          <a:xfrm>
+            <a:off x="8202168" y="1069848"/>
+            <a:ext cx="3529584" cy="384048"/>
           </a:xfrm>
           <a:prstGeom prst="roundRect">
             <a:avLst>
-              <a:gd name="adj" fmla="val 23810"/>
+              <a:gd name="adj" fmla="val 19048"/>
             </a:avLst>
           </a:prstGeom>
           <a:solidFill>
-            <a:srgbClr val="DCFCE7"/>
+            <a:srgbClr val="16A34A"/>
           </a:solidFill>
           <a:ln w="12700">
             <a:solidFill>
@@ -5506,14 +5730,14 @@
       </p:sp>
       <p:sp>
         <p:nvSpPr>
-          <p:cNvPr id="7" name="Text 5"/>
-          <p:cNvSpPr/>
-          <p:nvPr/>
-        </p:nvSpPr>
-        <p:spPr>
-          <a:xfrm>
-            <a:off x="365760" y="1600200"/>
-            <a:ext cx="1325880" cy="384048"/>
+          <p:cNvPr id="22" name="Text 20"/>
+          <p:cNvSpPr/>
+          <p:nvPr/>
+        </p:nvSpPr>
+        <p:spPr>
+          <a:xfrm>
+            <a:off x="8202168" y="1069848"/>
+            <a:ext cx="3529584" cy="384048"/>
           </a:xfrm>
           <a:prstGeom prst="rect">
             <a:avLst/>
@@ -5529,493 +5753,211 @@
               <a:buNone/>
             </a:pPr>
             <a:r>
-              <a:rPr lang="en-US" sz="1100" b="1" dirty="0">
-                <a:solidFill>
-                  <a:srgbClr val="16A34A"/>
-                </a:solidFill>
-              </a:rPr>
-              <a:t>✅ Phase 1~3</a:t>
-            </a:r>
-            <a:endParaRPr lang="en-US" sz="1100" dirty="0"/>
-          </a:p>
-        </p:txBody>
-      </p:sp>
-      <p:sp>
-        <p:nvSpPr>
-          <p:cNvPr id="8" name="Shape 6"/>
-          <p:cNvSpPr/>
-          <p:nvPr/>
-        </p:nvSpPr>
-        <p:spPr>
-          <a:xfrm>
-            <a:off x="228600" y="2057400"/>
-            <a:ext cx="3749040" cy="1280160"/>
+              <a:rPr lang="en-US" sz="1200" b="1" dirty="0">
+                <a:solidFill>
+                  <a:srgbClr val="FFFFFF"/>
+                </a:solidFill>
+              </a:rPr>
+              <a:t>🛒 가맹점 / 주문 플로우</a:t>
+            </a:r>
+            <a:endParaRPr lang="en-US" sz="1200" dirty="0"/>
+          </a:p>
+        </p:txBody>
+      </p:sp>
+      <p:sp>
+        <p:nvSpPr>
+          <p:cNvPr id="23" name="Text 21"/>
+          <p:cNvSpPr/>
+          <p:nvPr/>
+        </p:nvSpPr>
+        <p:spPr>
+          <a:xfrm>
+            <a:off x="8257032" y="1554480"/>
+            <a:ext cx="3401568" cy="338328"/>
+          </a:xfrm>
+          <a:prstGeom prst="rect">
+            <a:avLst/>
+          </a:prstGeom>
+          <a:noFill/>
+          <a:ln/>
+        </p:spPr>
+        <p:txBody>
+          <a:bodyPr wrap="square" rtlCol="0" anchor="ctr"/>
+          <a:lstStyle/>
+          <a:p>
+            <a:pPr indent="0" marL="0">
+              <a:buNone/>
+            </a:pPr>
+            <a:r>
+              <a:rPr lang="en-US" sz="1000" dirty="0">
+                <a:solidFill>
+                  <a:srgbClr val="1F1235"/>
+                </a:solidFill>
+              </a:rPr>
+              <a:t>✓  가맹점 목록 (카테고리/전문검색 필터)</a:t>
+            </a:r>
+            <a:endParaRPr lang="en-US" sz="1000" dirty="0"/>
+          </a:p>
+        </p:txBody>
+      </p:sp>
+      <p:sp>
+        <p:nvSpPr>
+          <p:cNvPr id="24" name="Text 22"/>
+          <p:cNvSpPr/>
+          <p:nvPr/>
+        </p:nvSpPr>
+        <p:spPr>
+          <a:xfrm>
+            <a:off x="8257032" y="1901952"/>
+            <a:ext cx="3401568" cy="338328"/>
+          </a:xfrm>
+          <a:prstGeom prst="rect">
+            <a:avLst/>
+          </a:prstGeom>
+          <a:noFill/>
+          <a:ln/>
+        </p:spPr>
+        <p:txBody>
+          <a:bodyPr wrap="square" rtlCol="0" anchor="ctr"/>
+          <a:lstStyle/>
+          <a:p>
+            <a:pPr indent="0" marL="0">
+              <a:buNone/>
+            </a:pPr>
+            <a:r>
+              <a:rPr lang="en-US" sz="1000" dirty="0">
+                <a:solidFill>
+                  <a:srgbClr val="1F1235"/>
+                </a:solidFill>
+              </a:rPr>
+              <a:t>✓  가맹점 상세 + 메뉴 옵션 + 리뷰(이미지)</a:t>
+            </a:r>
+            <a:endParaRPr lang="en-US" sz="1000" dirty="0"/>
+          </a:p>
+        </p:txBody>
+      </p:sp>
+      <p:sp>
+        <p:nvSpPr>
+          <p:cNvPr id="25" name="Text 23"/>
+          <p:cNvSpPr/>
+          <p:nvPr/>
+        </p:nvSpPr>
+        <p:spPr>
+          <a:xfrm>
+            <a:off x="8257032" y="2249424"/>
+            <a:ext cx="3401568" cy="338328"/>
+          </a:xfrm>
+          <a:prstGeom prst="rect">
+            <a:avLst/>
+          </a:prstGeom>
+          <a:noFill/>
+          <a:ln/>
+        </p:spPr>
+        <p:txBody>
+          <a:bodyPr wrap="square" rtlCol="0" anchor="ctr"/>
+          <a:lstStyle/>
+          <a:p>
+            <a:pPr indent="0" marL="0">
+              <a:buNone/>
+            </a:pPr>
+            <a:r>
+              <a:rPr lang="en-US" sz="1000" dirty="0">
+                <a:solidFill>
+                  <a:srgbClr val="1F1235"/>
+                </a:solidFill>
+              </a:rPr>
+              <a:t>✓  쿠폰(3종) + PICK 할인 + 배달 메모</a:t>
+            </a:r>
+            <a:endParaRPr lang="en-US" sz="1000" dirty="0"/>
+          </a:p>
+        </p:txBody>
+      </p:sp>
+      <p:sp>
+        <p:nvSpPr>
+          <p:cNvPr id="26" name="Text 24"/>
+          <p:cNvSpPr/>
+          <p:nvPr/>
+        </p:nvSpPr>
+        <p:spPr>
+          <a:xfrm>
+            <a:off x="8257032" y="2596896"/>
+            <a:ext cx="3401568" cy="338328"/>
+          </a:xfrm>
+          <a:prstGeom prst="rect">
+            <a:avLst/>
+          </a:prstGeom>
+          <a:noFill/>
+          <a:ln/>
+        </p:spPr>
+        <p:txBody>
+          <a:bodyPr wrap="square" rtlCol="0" anchor="ctr"/>
+          <a:lstStyle/>
+          <a:p>
+            <a:pPr indent="0" marL="0">
+              <a:buNone/>
+            </a:pPr>
+            <a:r>
+              <a:rPr lang="en-US" sz="1000" dirty="0">
+                <a:solidFill>
+                  <a:srgbClr val="1F1235"/>
+                </a:solidFill>
+              </a:rPr>
+              <a:t>✓  PICK 결제 + 토스페이먼츠 카드 결제</a:t>
+            </a:r>
+            <a:endParaRPr lang="en-US" sz="1000" dirty="0"/>
+          </a:p>
+        </p:txBody>
+      </p:sp>
+      <p:sp>
+        <p:nvSpPr>
+          <p:cNvPr id="27" name="Text 25"/>
+          <p:cNvSpPr/>
+          <p:nvPr/>
+        </p:nvSpPr>
+        <p:spPr>
+          <a:xfrm>
+            <a:off x="8257032" y="2944368"/>
+            <a:ext cx="3401568" cy="338328"/>
+          </a:xfrm>
+          <a:prstGeom prst="rect">
+            <a:avLst/>
+          </a:prstGeom>
+          <a:noFill/>
+          <a:ln/>
+        </p:spPr>
+        <p:txBody>
+          <a:bodyPr wrap="square" rtlCol="0" anchor="ctr"/>
+          <a:lstStyle/>
+          <a:p>
+            <a:pPr indent="0" marL="0">
+              <a:buNone/>
+            </a:pPr>
+            <a:r>
+              <a:rPr lang="en-US" sz="1000" dirty="0">
+                <a:solidFill>
+                  <a:srgbClr val="1F1235"/>
+                </a:solidFill>
+              </a:rPr>
+              <a:t>✓  주문 생성 → PICK 차감 → 완료 적립</a:t>
+            </a:r>
+            <a:endParaRPr lang="en-US" sz="1000" dirty="0"/>
+          </a:p>
+        </p:txBody>
+      </p:sp>
+      <p:sp>
+        <p:nvSpPr>
+          <p:cNvPr id="28" name="Shape 26"/>
+          <p:cNvSpPr/>
+          <p:nvPr/>
+        </p:nvSpPr>
+        <p:spPr>
+          <a:xfrm>
+            <a:off x="228600" y="3566160"/>
+            <a:ext cx="3749040" cy="2423160"/>
           </a:xfrm>
           <a:prstGeom prst="roundRect">
             <a:avLst>
-              <a:gd name="adj" fmla="val 9286"/>
-            </a:avLst>
-          </a:prstGeom>
-          <a:solidFill>
-            <a:srgbClr val="FFFFFF"/>
-          </a:solidFill>
-          <a:ln w="12700">
-            <a:solidFill>
-              <a:srgbClr val="E9D5FF"/>
-            </a:solidFill>
-            <a:prstDash val="solid"/>
-          </a:ln>
-        </p:spPr>
-      </p:sp>
-      <p:sp>
-        <p:nvSpPr>
-          <p:cNvPr id="9" name="Shape 7"/>
-          <p:cNvSpPr/>
-          <p:nvPr/>
-        </p:nvSpPr>
-        <p:spPr>
-          <a:xfrm>
-            <a:off x="365760" y="2176272"/>
-            <a:ext cx="3474720" cy="329184"/>
-          </a:xfrm>
-          <a:prstGeom prst="roundRect">
-            <a:avLst>
-              <a:gd name="adj" fmla="val 22222"/>
-            </a:avLst>
-          </a:prstGeom>
-          <a:solidFill>
-            <a:srgbClr val="DCFCE7"/>
-          </a:solidFill>
-          <a:ln w="12700">
-            <a:solidFill>
-              <a:srgbClr val="DCFCE7"/>
-            </a:solidFill>
-            <a:prstDash val="solid"/>
-          </a:ln>
-        </p:spPr>
-      </p:sp>
-      <p:sp>
-        <p:nvSpPr>
-          <p:cNvPr id="10" name="Text 8"/>
-          <p:cNvSpPr/>
-          <p:nvPr/>
-        </p:nvSpPr>
-        <p:spPr>
-          <a:xfrm>
-            <a:off x="365760" y="2176272"/>
-            <a:ext cx="3474720" cy="329184"/>
-          </a:xfrm>
-          <a:prstGeom prst="rect">
-            <a:avLst/>
-          </a:prstGeom>
-          <a:noFill/>
-          <a:ln/>
-        </p:spPr>
-        <p:txBody>
-          <a:bodyPr wrap="square" rtlCol="0" anchor="ctr"/>
-          <a:lstStyle/>
-          <a:p>
-            <a:pPr algn="ctr" indent="0" marL="0">
-              <a:buNone/>
-            </a:pPr>
-            <a:r>
-              <a:rPr lang="en-US" sz="1200" b="1" dirty="0">
-                <a:solidFill>
-                  <a:srgbClr val="16A34A"/>
-                </a:solidFill>
-              </a:rPr>
-              <a:t>인증 · 지갑 · 주문 플로우</a:t>
-            </a:r>
-            <a:endParaRPr lang="en-US" sz="1200" dirty="0"/>
-          </a:p>
-        </p:txBody>
-      </p:sp>
-      <p:sp>
-        <p:nvSpPr>
-          <p:cNvPr id="11" name="Text 9"/>
-          <p:cNvSpPr/>
-          <p:nvPr/>
-        </p:nvSpPr>
-        <p:spPr>
-          <a:xfrm>
-            <a:off x="393192" y="2569464"/>
-            <a:ext cx="3419856" cy="694944"/>
-          </a:xfrm>
-          <a:prstGeom prst="rect">
-            <a:avLst/>
-          </a:prstGeom>
-          <a:noFill/>
-          <a:ln/>
-        </p:spPr>
-        <p:txBody>
-          <a:bodyPr wrap="square" rtlCol="0" anchor="ctr"/>
-          <a:lstStyle/>
-          <a:p>
-            <a:pPr indent="0" marL="0">
-              <a:buNone/>
-            </a:pPr>
-            <a:r>
-              <a:rPr lang="en-US" sz="1050" dirty="0">
-                <a:solidFill>
-                  <a:srgbClr val="6B7280"/>
-                </a:solidFill>
-              </a:rPr>
-              <a:t>이메일 로그인 (카카오 비즈니스 후 추가)</a:t>
-            </a:r>
-            <a:endParaRPr lang="en-US" sz="1050" dirty="0"/>
-          </a:p>
-          <a:p>
-            <a:pPr indent="0" marL="0">
-              <a:buNone/>
-            </a:pPr>
-            <a:r>
-              <a:rPr lang="en-US" sz="1050" dirty="0">
-                <a:solidFill>
-                  <a:srgbClr val="6B7280"/>
-                </a:solidFill>
-              </a:rPr>
-              <a:t>PICK 토큰 지갑 + 토스페이먼츠</a:t>
-            </a:r>
-            <a:endParaRPr lang="en-US" sz="1050" dirty="0"/>
-          </a:p>
-          <a:p>
-            <a:pPr indent="0" marL="0">
-              <a:buNone/>
-            </a:pPr>
-            <a:r>
-              <a:rPr lang="en-US" sz="1050" dirty="0">
-                <a:solidFill>
-                  <a:srgbClr val="6B7280"/>
-                </a:solidFill>
-              </a:rPr>
-              <a:t>Realtime 주문 추적 완성</a:t>
-            </a:r>
-            <a:endParaRPr lang="en-US" sz="1050" dirty="0"/>
-          </a:p>
-        </p:txBody>
-      </p:sp>
-      <p:sp>
-        <p:nvSpPr>
-          <p:cNvPr id="12" name="Shape 10"/>
-          <p:cNvSpPr/>
-          <p:nvPr/>
-        </p:nvSpPr>
-        <p:spPr>
-          <a:xfrm>
-            <a:off x="4133088" y="2057400"/>
-            <a:ext cx="3749040" cy="1280160"/>
-          </a:xfrm>
-          <a:prstGeom prst="roundRect">
-            <a:avLst>
-              <a:gd name="adj" fmla="val 9286"/>
-            </a:avLst>
-          </a:prstGeom>
-          <a:solidFill>
-            <a:srgbClr val="FFFFFF"/>
-          </a:solidFill>
-          <a:ln w="12700">
-            <a:solidFill>
-              <a:srgbClr val="E9D5FF"/>
-            </a:solidFill>
-            <a:prstDash val="solid"/>
-          </a:ln>
-        </p:spPr>
-      </p:sp>
-      <p:sp>
-        <p:nvSpPr>
-          <p:cNvPr id="13" name="Shape 11"/>
-          <p:cNvSpPr/>
-          <p:nvPr/>
-        </p:nvSpPr>
-        <p:spPr>
-          <a:xfrm>
-            <a:off x="4270248" y="2176272"/>
-            <a:ext cx="3474720" cy="329184"/>
-          </a:xfrm>
-          <a:prstGeom prst="roundRect">
-            <a:avLst>
-              <a:gd name="adj" fmla="val 22222"/>
-            </a:avLst>
-          </a:prstGeom>
-          <a:solidFill>
-            <a:srgbClr val="DCFCE7"/>
-          </a:solidFill>
-          <a:ln w="12700">
-            <a:solidFill>
-              <a:srgbClr val="DCFCE7"/>
-            </a:solidFill>
-            <a:prstDash val="solid"/>
-          </a:ln>
-        </p:spPr>
-      </p:sp>
-      <p:sp>
-        <p:nvSpPr>
-          <p:cNvPr id="14" name="Text 12"/>
-          <p:cNvSpPr/>
-          <p:nvPr/>
-        </p:nvSpPr>
-        <p:spPr>
-          <a:xfrm>
-            <a:off x="4270248" y="2176272"/>
-            <a:ext cx="3474720" cy="329184"/>
-          </a:xfrm>
-          <a:prstGeom prst="rect">
-            <a:avLst/>
-          </a:prstGeom>
-          <a:noFill/>
-          <a:ln/>
-        </p:spPr>
-        <p:txBody>
-          <a:bodyPr wrap="square" rtlCol="0" anchor="ctr"/>
-          <a:lstStyle/>
-          <a:p>
-            <a:pPr algn="ctr" indent="0" marL="0">
-              <a:buNone/>
-            </a:pPr>
-            <a:r>
-              <a:rPr lang="en-US" sz="1200" b="1" dirty="0">
-                <a:solidFill>
-                  <a:srgbClr val="16A34A"/>
-                </a:solidFill>
-              </a:rPr>
-              <a:t>사장님 · 라이더 · 관리자</a:t>
-            </a:r>
-            <a:endParaRPr lang="en-US" sz="1200" dirty="0"/>
-          </a:p>
-        </p:txBody>
-      </p:sp>
-      <p:sp>
-        <p:nvSpPr>
-          <p:cNvPr id="15" name="Text 13"/>
-          <p:cNvSpPr/>
-          <p:nvPr/>
-        </p:nvSpPr>
-        <p:spPr>
-          <a:xfrm>
-            <a:off x="4297680" y="2569464"/>
-            <a:ext cx="3419856" cy="694944"/>
-          </a:xfrm>
-          <a:prstGeom prst="rect">
-            <a:avLst/>
-          </a:prstGeom>
-          <a:noFill/>
-          <a:ln/>
-        </p:spPr>
-        <p:txBody>
-          <a:bodyPr wrap="square" rtlCol="0" anchor="ctr"/>
-          <a:lstStyle/>
-          <a:p>
-            <a:pPr indent="0" marL="0">
-              <a:buNone/>
-            </a:pPr>
-            <a:r>
-              <a:rPr lang="en-US" sz="1050" dirty="0">
-                <a:solidFill>
-                  <a:srgbClr val="6B7280"/>
-                </a:solidFill>
-              </a:rPr>
-              <a:t>사장님 주문/메뉴/정산/통계</a:t>
-            </a:r>
-            <a:endParaRPr lang="en-US" sz="1050" dirty="0"/>
-          </a:p>
-          <a:p>
-            <a:pPr indent="0" marL="0">
-              <a:buNone/>
-            </a:pPr>
-            <a:r>
-              <a:rPr lang="en-US" sz="1050" dirty="0">
-                <a:solidFill>
-                  <a:srgbClr val="6B7280"/>
-                </a:solidFill>
-              </a:rPr>
-              <a:t>라이더 수락/위치공유/수익</a:t>
-            </a:r>
-            <a:endParaRPr lang="en-US" sz="1050" dirty="0"/>
-          </a:p>
-          <a:p>
-            <a:pPr indent="0" marL="0">
-              <a:buNone/>
-            </a:pPr>
-            <a:r>
-              <a:rPr lang="en-US" sz="1050" dirty="0">
-                <a:solidFill>
-                  <a:srgbClr val="6B7280"/>
-                </a:solidFill>
-              </a:rPr>
-              <a:t>관리자 5탭 대시보드</a:t>
-            </a:r>
-            <a:endParaRPr lang="en-US" sz="1050" dirty="0"/>
-          </a:p>
-        </p:txBody>
-      </p:sp>
-      <p:sp>
-        <p:nvSpPr>
-          <p:cNvPr id="16" name="Shape 14"/>
-          <p:cNvSpPr/>
-          <p:nvPr/>
-        </p:nvSpPr>
-        <p:spPr>
-          <a:xfrm>
-            <a:off x="8037576" y="2057400"/>
-            <a:ext cx="3749040" cy="1280160"/>
-          </a:xfrm>
-          <a:prstGeom prst="roundRect">
-            <a:avLst>
-              <a:gd name="adj" fmla="val 9286"/>
-            </a:avLst>
-          </a:prstGeom>
-          <a:solidFill>
-            <a:srgbClr val="FFFFFF"/>
-          </a:solidFill>
-          <a:ln w="12700">
-            <a:solidFill>
-              <a:srgbClr val="E9D5FF"/>
-            </a:solidFill>
-            <a:prstDash val="solid"/>
-          </a:ln>
-        </p:spPr>
-      </p:sp>
-      <p:sp>
-        <p:nvSpPr>
-          <p:cNvPr id="17" name="Shape 15"/>
-          <p:cNvSpPr/>
-          <p:nvPr/>
-        </p:nvSpPr>
-        <p:spPr>
-          <a:xfrm>
-            <a:off x="8174736" y="2176272"/>
-            <a:ext cx="3474720" cy="329184"/>
-          </a:xfrm>
-          <a:prstGeom prst="roundRect">
-            <a:avLst>
-              <a:gd name="adj" fmla="val 22222"/>
-            </a:avLst>
-          </a:prstGeom>
-          <a:solidFill>
-            <a:srgbClr val="DCFCE7"/>
-          </a:solidFill>
-          <a:ln w="12700">
-            <a:solidFill>
-              <a:srgbClr val="DCFCE7"/>
-            </a:solidFill>
-            <a:prstDash val="solid"/>
-          </a:ln>
-        </p:spPr>
-      </p:sp>
-      <p:sp>
-        <p:nvSpPr>
-          <p:cNvPr id="18" name="Text 16"/>
-          <p:cNvSpPr/>
-          <p:nvPr/>
-        </p:nvSpPr>
-        <p:spPr>
-          <a:xfrm>
-            <a:off x="8174736" y="2176272"/>
-            <a:ext cx="3474720" cy="329184"/>
-          </a:xfrm>
-          <a:prstGeom prst="rect">
-            <a:avLst/>
-          </a:prstGeom>
-          <a:noFill/>
-          <a:ln/>
-        </p:spPr>
-        <p:txBody>
-          <a:bodyPr wrap="square" rtlCol="0" anchor="ctr"/>
-          <a:lstStyle/>
-          <a:p>
-            <a:pPr algn="ctr" indent="0" marL="0">
-              <a:buNone/>
-            </a:pPr>
-            <a:r>
-              <a:rPr lang="en-US" sz="1200" b="1" dirty="0">
-                <a:solidFill>
-                  <a:srgbClr val="16A34A"/>
-                </a:solidFill>
-              </a:rPr>
-              <a:t>PWA · 보안 · DB 최적화</a:t>
-            </a:r>
-            <a:endParaRPr lang="en-US" sz="1200" dirty="0"/>
-          </a:p>
-        </p:txBody>
-      </p:sp>
-      <p:sp>
-        <p:nvSpPr>
-          <p:cNvPr id="19" name="Text 17"/>
-          <p:cNvSpPr/>
-          <p:nvPr/>
-        </p:nvSpPr>
-        <p:spPr>
-          <a:xfrm>
-            <a:off x="8202168" y="2569464"/>
-            <a:ext cx="3419856" cy="694944"/>
-          </a:xfrm>
-          <a:prstGeom prst="rect">
-            <a:avLst/>
-          </a:prstGeom>
-          <a:noFill/>
-          <a:ln/>
-        </p:spPr>
-        <p:txBody>
-          <a:bodyPr wrap="square" rtlCol="0" anchor="ctr"/>
-          <a:lstStyle/>
-          <a:p>
-            <a:pPr indent="0" marL="0">
-              <a:buNone/>
-            </a:pPr>
-            <a:r>
-              <a:rPr lang="en-US" sz="1050" dirty="0">
-                <a:solidFill>
-                  <a:srgbClr val="6B7280"/>
-                </a:solidFill>
-              </a:rPr>
-              <a:t>Serwist 오프라인 캐싱</a:t>
-            </a:r>
-            <a:endParaRPr lang="en-US" sz="1050" dirty="0"/>
-          </a:p>
-          <a:p>
-            <a:pPr indent="0" marL="0">
-              <a:buNone/>
-            </a:pPr>
-            <a:r>
-              <a:rPr lang="en-US" sz="1050" dirty="0">
-                <a:solidFill>
-                  <a:srgbClr val="6B7280"/>
-                </a:solidFill>
-              </a:rPr>
-              <a:t>RLS + 인덱스 30개+ + FCM 푸시</a:t>
-            </a:r>
-            <a:endParaRPr lang="en-US" sz="1050" dirty="0"/>
-          </a:p>
-          <a:p>
-            <a:pPr indent="0" marL="0">
-              <a:buNone/>
-            </a:pPr>
-            <a:r>
-              <a:rPr lang="en-US" sz="1050" dirty="0">
-                <a:solidFill>
-                  <a:srgbClr val="6B7280"/>
-                </a:solidFill>
-              </a:rPr>
-              <a:t>Sentry + Storage 정책 완성</a:t>
-            </a:r>
-            <a:endParaRPr lang="en-US" sz="1050" dirty="0"/>
-          </a:p>
-        </p:txBody>
-      </p:sp>
-      <p:sp>
-        <p:nvSpPr>
-          <p:cNvPr id="20" name="Shape 18"/>
-          <p:cNvSpPr/>
-          <p:nvPr/>
-        </p:nvSpPr>
-        <p:spPr>
-          <a:xfrm>
-            <a:off x="365760" y="3429000"/>
-            <a:ext cx="1325880" cy="384048"/>
-          </a:xfrm>
-          <a:prstGeom prst="roundRect">
-            <a:avLst>
-              <a:gd name="adj" fmla="val 23810"/>
+              <a:gd name="adj" fmla="val 5660"/>
             </a:avLst>
           </a:prstGeom>
           <a:solidFill>
@@ -6031,62 +5973,26 @@
       </p:sp>
       <p:sp>
         <p:nvSpPr>
-          <p:cNvPr id="21" name="Text 19"/>
-          <p:cNvSpPr/>
-          <p:nvPr/>
-        </p:nvSpPr>
-        <p:spPr>
-          <a:xfrm>
-            <a:off x="365760" y="3429000"/>
-            <a:ext cx="1325880" cy="384048"/>
-          </a:xfrm>
-          <a:prstGeom prst="rect">
-            <a:avLst/>
-          </a:prstGeom>
-          <a:noFill/>
-          <a:ln/>
-        </p:spPr>
-        <p:txBody>
-          <a:bodyPr wrap="square" rtlCol="0" anchor="ctr"/>
-          <a:lstStyle/>
-          <a:p>
-            <a:pPr algn="ctr" indent="0" marL="0">
-              <a:buNone/>
-            </a:pPr>
-            <a:r>
-              <a:rPr lang="en-US" sz="1100" b="1" dirty="0">
-                <a:solidFill>
-                  <a:srgbClr val="D97706"/>
-                </a:solidFill>
-              </a:rPr>
-              <a:t>🟡 런칭 준비</a:t>
-            </a:r>
-            <a:endParaRPr lang="en-US" sz="1100" dirty="0"/>
-          </a:p>
-        </p:txBody>
-      </p:sp>
-      <p:sp>
-        <p:nvSpPr>
-          <p:cNvPr id="22" name="Shape 20"/>
-          <p:cNvSpPr/>
-          <p:nvPr/>
-        </p:nvSpPr>
-        <p:spPr>
-          <a:xfrm>
-            <a:off x="228600" y="3886200"/>
-            <a:ext cx="3749040" cy="1280160"/>
+          <p:cNvPr id="29" name="Shape 27"/>
+          <p:cNvSpPr/>
+          <p:nvPr/>
+        </p:nvSpPr>
+        <p:spPr>
+          <a:xfrm>
+            <a:off x="338328" y="3675888"/>
+            <a:ext cx="3529584" cy="384048"/>
           </a:xfrm>
           <a:prstGeom prst="roundRect">
             <a:avLst>
-              <a:gd name="adj" fmla="val 9286"/>
+              <a:gd name="adj" fmla="val 19048"/>
             </a:avLst>
           </a:prstGeom>
           <a:solidFill>
-            <a:srgbClr val="FFFFFF"/>
+            <a:srgbClr val="D97706"/>
           </a:solidFill>
           <a:ln w="12700">
             <a:solidFill>
-              <a:srgbClr val="E9D5FF"/>
+              <a:srgbClr val="D97706"/>
             </a:solidFill>
             <a:prstDash val="solid"/>
           </a:ln>
@@ -6094,26 +6000,278 @@
       </p:sp>
       <p:sp>
         <p:nvSpPr>
-          <p:cNvPr id="23" name="Shape 21"/>
-          <p:cNvSpPr/>
-          <p:nvPr/>
-        </p:nvSpPr>
-        <p:spPr>
-          <a:xfrm>
-            <a:off x="365760" y="4005072"/>
-            <a:ext cx="3474720" cy="329184"/>
+          <p:cNvPr id="30" name="Text 28"/>
+          <p:cNvSpPr/>
+          <p:nvPr/>
+        </p:nvSpPr>
+        <p:spPr>
+          <a:xfrm>
+            <a:off x="338328" y="3675888"/>
+            <a:ext cx="3529584" cy="384048"/>
+          </a:xfrm>
+          <a:prstGeom prst="rect">
+            <a:avLst/>
+          </a:prstGeom>
+          <a:noFill/>
+          <a:ln/>
+        </p:spPr>
+        <p:txBody>
+          <a:bodyPr wrap="square" rtlCol="0" anchor="ctr"/>
+          <a:lstStyle/>
+          <a:p>
+            <a:pPr algn="ctr" indent="0" marL="0">
+              <a:buNone/>
+            </a:pPr>
+            <a:r>
+              <a:rPr lang="en-US" sz="1200" b="1" dirty="0">
+                <a:solidFill>
+                  <a:srgbClr val="FFFFFF"/>
+                </a:solidFill>
+              </a:rPr>
+              <a:t>👨‍🍳 사장님 기능</a:t>
+            </a:r>
+            <a:endParaRPr lang="en-US" sz="1200" dirty="0"/>
+          </a:p>
+        </p:txBody>
+      </p:sp>
+      <p:sp>
+        <p:nvSpPr>
+          <p:cNvPr id="31" name="Text 29"/>
+          <p:cNvSpPr/>
+          <p:nvPr/>
+        </p:nvSpPr>
+        <p:spPr>
+          <a:xfrm>
+            <a:off x="393192" y="4160520"/>
+            <a:ext cx="3401568" cy="338328"/>
+          </a:xfrm>
+          <a:prstGeom prst="rect">
+            <a:avLst/>
+          </a:prstGeom>
+          <a:noFill/>
+          <a:ln/>
+        </p:spPr>
+        <p:txBody>
+          <a:bodyPr wrap="square" rtlCol="0" anchor="ctr"/>
+          <a:lstStyle/>
+          <a:p>
+            <a:pPr indent="0" marL="0">
+              <a:buNone/>
+            </a:pPr>
+            <a:r>
+              <a:rPr lang="en-US" sz="1000" dirty="0">
+                <a:solidFill>
+                  <a:srgbClr val="1F1235"/>
+                </a:solidFill>
+              </a:rPr>
+              <a:t>✓  가게 등록·설정·쿠폰(KRW 입력)·영업시간</a:t>
+            </a:r>
+            <a:endParaRPr lang="en-US" sz="1000" dirty="0"/>
+          </a:p>
+        </p:txBody>
+      </p:sp>
+      <p:sp>
+        <p:nvSpPr>
+          <p:cNvPr id="32" name="Text 30"/>
+          <p:cNvSpPr/>
+          <p:nvPr/>
+        </p:nvSpPr>
+        <p:spPr>
+          <a:xfrm>
+            <a:off x="393192" y="4507992"/>
+            <a:ext cx="3401568" cy="338328"/>
+          </a:xfrm>
+          <a:prstGeom prst="rect">
+            <a:avLst/>
+          </a:prstGeom>
+          <a:noFill/>
+          <a:ln/>
+        </p:spPr>
+        <p:txBody>
+          <a:bodyPr wrap="square" rtlCol="0" anchor="ctr"/>
+          <a:lstStyle/>
+          <a:p>
+            <a:pPr indent="0" marL="0">
+              <a:buNone/>
+            </a:pPr>
+            <a:r>
+              <a:rPr lang="en-US" sz="1000" dirty="0">
+                <a:solidFill>
+                  <a:srgbClr val="1F1235"/>
+                </a:solidFill>
+              </a:rPr>
+              <a:t>✓  사진 리뷰 보상 설정 (원화→PICK 자동환산)</a:t>
+            </a:r>
+            <a:endParaRPr lang="en-US" sz="1000" dirty="0"/>
+          </a:p>
+        </p:txBody>
+      </p:sp>
+      <p:sp>
+        <p:nvSpPr>
+          <p:cNvPr id="33" name="Text 31"/>
+          <p:cNvSpPr/>
+          <p:nvPr/>
+        </p:nvSpPr>
+        <p:spPr>
+          <a:xfrm>
+            <a:off x="393192" y="4855464"/>
+            <a:ext cx="3401568" cy="338328"/>
+          </a:xfrm>
+          <a:prstGeom prst="rect">
+            <a:avLst/>
+          </a:prstGeom>
+          <a:noFill/>
+          <a:ln/>
+        </p:spPr>
+        <p:txBody>
+          <a:bodyPr wrap="square" rtlCol="0" anchor="ctr"/>
+          <a:lstStyle/>
+          <a:p>
+            <a:pPr indent="0" marL="0">
+              <a:buNone/>
+            </a:pPr>
+            <a:r>
+              <a:rPr lang="en-US" sz="1000" dirty="0">
+                <a:solidFill>
+                  <a:srgbClr val="1F1235"/>
+                </a:solidFill>
+              </a:rPr>
+              <a:t>✓  주문 관리: 수락 ETA + 거절 확인 팝업</a:t>
+            </a:r>
+            <a:endParaRPr lang="en-US" sz="1000" dirty="0"/>
+          </a:p>
+        </p:txBody>
+      </p:sp>
+      <p:sp>
+        <p:nvSpPr>
+          <p:cNvPr id="34" name="Text 32"/>
+          <p:cNvSpPr/>
+          <p:nvPr/>
+        </p:nvSpPr>
+        <p:spPr>
+          <a:xfrm>
+            <a:off x="393192" y="5202936"/>
+            <a:ext cx="3401568" cy="338328"/>
+          </a:xfrm>
+          <a:prstGeom prst="rect">
+            <a:avLst/>
+          </a:prstGeom>
+          <a:noFill/>
+          <a:ln/>
+        </p:spPr>
+        <p:txBody>
+          <a:bodyPr wrap="square" rtlCol="0" anchor="ctr"/>
+          <a:lstStyle/>
+          <a:p>
+            <a:pPr indent="0" marL="0">
+              <a:buNone/>
+            </a:pPr>
+            <a:r>
+              <a:rPr lang="en-US" sz="1000" dirty="0">
+                <a:solidFill>
+                  <a:srgbClr val="1F1235"/>
+                </a:solidFill>
+              </a:rPr>
+              <a:t>✓  매출 통계 대시보드 + 주간 차트</a:t>
+            </a:r>
+            <a:endParaRPr lang="en-US" sz="1000" dirty="0"/>
+          </a:p>
+        </p:txBody>
+      </p:sp>
+      <p:sp>
+        <p:nvSpPr>
+          <p:cNvPr id="35" name="Text 33"/>
+          <p:cNvSpPr/>
+          <p:nvPr/>
+        </p:nvSpPr>
+        <p:spPr>
+          <a:xfrm>
+            <a:off x="393192" y="5550408"/>
+            <a:ext cx="3401568" cy="338328"/>
+          </a:xfrm>
+          <a:prstGeom prst="rect">
+            <a:avLst/>
+          </a:prstGeom>
+          <a:noFill/>
+          <a:ln/>
+        </p:spPr>
+        <p:txBody>
+          <a:bodyPr wrap="square" rtlCol="0" anchor="ctr"/>
+          <a:lstStyle/>
+          <a:p>
+            <a:pPr indent="0" marL="0">
+              <a:buNone/>
+            </a:pPr>
+            <a:r>
+              <a:rPr lang="en-US" sz="1000" dirty="0">
+                <a:solidFill>
+                  <a:srgbClr val="1F1235"/>
+                </a:solidFill>
+              </a:rPr>
+              <a:t>✓  신규주문 TTS 알림 '픽픽 주문이 들어왔습니다'</a:t>
+            </a:r>
+            <a:endParaRPr lang="en-US" sz="1000" dirty="0"/>
+          </a:p>
+        </p:txBody>
+      </p:sp>
+      <p:sp>
+        <p:nvSpPr>
+          <p:cNvPr id="36" name="Text 34"/>
+          <p:cNvSpPr/>
+          <p:nvPr/>
+        </p:nvSpPr>
+        <p:spPr>
+          <a:xfrm>
+            <a:off x="393192" y="5897880"/>
+            <a:ext cx="3401568" cy="338328"/>
+          </a:xfrm>
+          <a:prstGeom prst="rect">
+            <a:avLst/>
+          </a:prstGeom>
+          <a:noFill/>
+          <a:ln/>
+        </p:spPr>
+        <p:txBody>
+          <a:bodyPr wrap="square" rtlCol="0" anchor="ctr"/>
+          <a:lstStyle/>
+          <a:p>
+            <a:pPr indent="0" marL="0">
+              <a:buNone/>
+            </a:pPr>
+            <a:r>
+              <a:rPr lang="en-US" sz="1000" dirty="0">
+                <a:solidFill>
+                  <a:srgbClr val="1F1235"/>
+                </a:solidFill>
+              </a:rPr>
+              <a:t>✓  신규 가맹점 초대 리워드 20,000 PICK</a:t>
+            </a:r>
+            <a:endParaRPr lang="en-US" sz="1000" dirty="0"/>
+          </a:p>
+        </p:txBody>
+      </p:sp>
+      <p:sp>
+        <p:nvSpPr>
+          <p:cNvPr id="37" name="Shape 35"/>
+          <p:cNvSpPr/>
+          <p:nvPr/>
+        </p:nvSpPr>
+        <p:spPr>
+          <a:xfrm>
+            <a:off x="4160520" y="3566160"/>
+            <a:ext cx="3749040" cy="2423160"/>
           </a:xfrm>
           <a:prstGeom prst="roundRect">
             <a:avLst>
-              <a:gd name="adj" fmla="val 22222"/>
+              <a:gd name="adj" fmla="val 5660"/>
             </a:avLst>
           </a:prstGeom>
           <a:solidFill>
-            <a:srgbClr val="FFFBEB"/>
+            <a:srgbClr val="ECFEFF"/>
           </a:solidFill>
           <a:ln w="12700">
             <a:solidFill>
-              <a:srgbClr val="FFFBEB"/>
+              <a:srgbClr val="0891B2"/>
             </a:solidFill>
             <a:prstDash val="solid"/>
           </a:ln>
@@ -6121,126 +6279,26 @@
       </p:sp>
       <p:sp>
         <p:nvSpPr>
-          <p:cNvPr id="24" name="Text 22"/>
-          <p:cNvSpPr/>
-          <p:nvPr/>
-        </p:nvSpPr>
-        <p:spPr>
-          <a:xfrm>
-            <a:off x="365760" y="4005072"/>
-            <a:ext cx="3474720" cy="329184"/>
-          </a:xfrm>
-          <a:prstGeom prst="rect">
-            <a:avLst/>
-          </a:prstGeom>
-          <a:noFill/>
-          <a:ln/>
-        </p:spPr>
-        <p:txBody>
-          <a:bodyPr wrap="square" rtlCol="0" anchor="ctr"/>
-          <a:lstStyle/>
-          <a:p>
-            <a:pPr algn="ctr" indent="0" marL="0">
-              <a:buNone/>
-            </a:pPr>
-            <a:r>
-              <a:rPr lang="en-US" sz="1200" b="1" dirty="0">
-                <a:solidFill>
-                  <a:srgbClr val="D97706"/>
-                </a:solidFill>
-              </a:rPr>
-              <a:t>Firebase 환경변수 ✅</a:t>
-            </a:r>
-            <a:endParaRPr lang="en-US" sz="1200" dirty="0"/>
-          </a:p>
-        </p:txBody>
-      </p:sp>
-      <p:sp>
-        <p:nvSpPr>
-          <p:cNvPr id="25" name="Text 23"/>
-          <p:cNvSpPr/>
-          <p:nvPr/>
-        </p:nvSpPr>
-        <p:spPr>
-          <a:xfrm>
-            <a:off x="393192" y="4398264"/>
-            <a:ext cx="3419856" cy="694944"/>
-          </a:xfrm>
-          <a:prstGeom prst="rect">
-            <a:avLst/>
-          </a:prstGeom>
-          <a:noFill/>
-          <a:ln/>
-        </p:spPr>
-        <p:txBody>
-          <a:bodyPr wrap="square" rtlCol="0" anchor="ctr"/>
-          <a:lstStyle/>
-          <a:p>
-            <a:pPr indent="0" marL="0">
-              <a:buNone/>
-            </a:pPr>
-            <a:r>
-              <a:rPr lang="en-US" sz="1050" dirty="0">
-                <a:solidFill>
-                  <a:srgbClr val="6B7280"/>
-                </a:solidFill>
-              </a:rPr>
-              <a:t>API Key ~ App ID 완성</a:t>
-            </a:r>
-            <a:endParaRPr lang="en-US" sz="1050" dirty="0"/>
-          </a:p>
-          <a:p>
-            <a:pPr indent="0" marL="0">
-              <a:buNone/>
-            </a:pPr>
-            <a:r>
-              <a:rPr lang="en-US" sz="1050" dirty="0">
-                <a:solidFill>
-                  <a:srgbClr val="6B7280"/>
-                </a:solidFill>
-              </a:rPr>
-              <a:t>VAPID 키 완성</a:t>
-            </a:r>
-            <a:endParaRPr lang="en-US" sz="1050" dirty="0"/>
-          </a:p>
-          <a:p>
-            <a:pPr indent="0" marL="0">
-              <a:buNone/>
-            </a:pPr>
-            <a:r>
-              <a:rPr lang="en-US" sz="1050" dirty="0">
-                <a:solidFill>
-                  <a:srgbClr val="6B7280"/>
-                </a:solidFill>
-              </a:rPr>
-              <a:t>Admin SDK JSON 완성</a:t>
-            </a:r>
-            <a:endParaRPr lang="en-US" sz="1050" dirty="0"/>
-          </a:p>
-        </p:txBody>
-      </p:sp>
-      <p:sp>
-        <p:nvSpPr>
-          <p:cNvPr id="26" name="Shape 24"/>
-          <p:cNvSpPr/>
-          <p:nvPr/>
-        </p:nvSpPr>
-        <p:spPr>
-          <a:xfrm>
-            <a:off x="4133088" y="3886200"/>
-            <a:ext cx="3749040" cy="1280160"/>
+          <p:cNvPr id="38" name="Shape 36"/>
+          <p:cNvSpPr/>
+          <p:nvPr/>
+        </p:nvSpPr>
+        <p:spPr>
+          <a:xfrm>
+            <a:off x="4270248" y="3675888"/>
+            <a:ext cx="3529584" cy="384048"/>
           </a:xfrm>
           <a:prstGeom prst="roundRect">
             <a:avLst>
-              <a:gd name="adj" fmla="val 9286"/>
+              <a:gd name="adj" fmla="val 19048"/>
             </a:avLst>
           </a:prstGeom>
           <a:solidFill>
-            <a:srgbClr val="FFFFFF"/>
+            <a:srgbClr val="0891B2"/>
           </a:solidFill>
           <a:ln w="12700">
             <a:solidFill>
-              <a:srgbClr val="E9D5FF"/>
+              <a:srgbClr val="0891B2"/>
             </a:solidFill>
             <a:prstDash val="solid"/>
           </a:ln>
@@ -6248,299 +6306,234 @@
       </p:sp>
       <p:sp>
         <p:nvSpPr>
-          <p:cNvPr id="27" name="Shape 25"/>
-          <p:cNvSpPr/>
-          <p:nvPr/>
-        </p:nvSpPr>
-        <p:spPr>
-          <a:xfrm>
-            <a:off x="4270248" y="4005072"/>
-            <a:ext cx="3474720" cy="329184"/>
+          <p:cNvPr id="39" name="Text 37"/>
+          <p:cNvSpPr/>
+          <p:nvPr/>
+        </p:nvSpPr>
+        <p:spPr>
+          <a:xfrm>
+            <a:off x="4270248" y="3675888"/>
+            <a:ext cx="3529584" cy="384048"/>
+          </a:xfrm>
+          <a:prstGeom prst="rect">
+            <a:avLst/>
+          </a:prstGeom>
+          <a:noFill/>
+          <a:ln/>
+        </p:spPr>
+        <p:txBody>
+          <a:bodyPr wrap="square" rtlCol="0" anchor="ctr"/>
+          <a:lstStyle/>
+          <a:p>
+            <a:pPr algn="ctr" indent="0" marL="0">
+              <a:buNone/>
+            </a:pPr>
+            <a:r>
+              <a:rPr lang="en-US" sz="1200" b="1" dirty="0">
+                <a:solidFill>
+                  <a:srgbClr val="FFFFFF"/>
+                </a:solidFill>
+              </a:rPr>
+              <a:t>🛵 라이더 / PWA / 인프라</a:t>
+            </a:r>
+            <a:endParaRPr lang="en-US" sz="1200" dirty="0"/>
+          </a:p>
+        </p:txBody>
+      </p:sp>
+      <p:sp>
+        <p:nvSpPr>
+          <p:cNvPr id="40" name="Text 38"/>
+          <p:cNvSpPr/>
+          <p:nvPr/>
+        </p:nvSpPr>
+        <p:spPr>
+          <a:xfrm>
+            <a:off x="4325112" y="4160520"/>
+            <a:ext cx="3401568" cy="338328"/>
+          </a:xfrm>
+          <a:prstGeom prst="rect">
+            <a:avLst/>
+          </a:prstGeom>
+          <a:noFill/>
+          <a:ln/>
+        </p:spPr>
+        <p:txBody>
+          <a:bodyPr wrap="square" rtlCol="0" anchor="ctr"/>
+          <a:lstStyle/>
+          <a:p>
+            <a:pPr indent="0" marL="0">
+              <a:buNone/>
+            </a:pPr>
+            <a:r>
+              <a:rPr lang="en-US" sz="1000" dirty="0">
+                <a:solidFill>
+                  <a:srgbClr val="1F1235"/>
+                </a:solidFill>
+              </a:rPr>
+              <a:t>✓  배달 수락 → PICK 자동 지급 + 위치 공유</a:t>
+            </a:r>
+            <a:endParaRPr lang="en-US" sz="1000" dirty="0"/>
+          </a:p>
+        </p:txBody>
+      </p:sp>
+      <p:sp>
+        <p:nvSpPr>
+          <p:cNvPr id="41" name="Text 39"/>
+          <p:cNvSpPr/>
+          <p:nvPr/>
+        </p:nvSpPr>
+        <p:spPr>
+          <a:xfrm>
+            <a:off x="4325112" y="4507992"/>
+            <a:ext cx="3401568" cy="338328"/>
+          </a:xfrm>
+          <a:prstGeom prst="rect">
+            <a:avLst/>
+          </a:prstGeom>
+          <a:noFill/>
+          <a:ln/>
+        </p:spPr>
+        <p:txBody>
+          <a:bodyPr wrap="square" rtlCol="0" anchor="ctr"/>
+          <a:lstStyle/>
+          <a:p>
+            <a:pPr indent="0" marL="0">
+              <a:buNone/>
+            </a:pPr>
+            <a:r>
+              <a:rPr lang="en-US" sz="1000" dirty="0">
+                <a:solidFill>
+                  <a:srgbClr val="1F1235"/>
+                </a:solidFill>
+              </a:rPr>
+              <a:t>✓  라이더 TTS 알림 '픽픽 라이더 요청이 왔습니다'</a:t>
+            </a:r>
+            <a:endParaRPr lang="en-US" sz="1000" dirty="0"/>
+          </a:p>
+        </p:txBody>
+      </p:sp>
+      <p:sp>
+        <p:nvSpPr>
+          <p:cNvPr id="42" name="Text 40"/>
+          <p:cNvSpPr/>
+          <p:nvPr/>
+        </p:nvSpPr>
+        <p:spPr>
+          <a:xfrm>
+            <a:off x="4325112" y="4855464"/>
+            <a:ext cx="3401568" cy="338328"/>
+          </a:xfrm>
+          <a:prstGeom prst="rect">
+            <a:avLst/>
+          </a:prstGeom>
+          <a:noFill/>
+          <a:ln/>
+        </p:spPr>
+        <p:txBody>
+          <a:bodyPr wrap="square" rtlCol="0" anchor="ctr"/>
+          <a:lstStyle/>
+          <a:p>
+            <a:pPr indent="0" marL="0">
+              <a:buNone/>
+            </a:pPr>
+            <a:r>
+              <a:rPr lang="en-US" sz="1000" dirty="0">
+                <a:solidFill>
+                  <a:srgbClr val="1F1235"/>
+                </a:solidFill>
+              </a:rPr>
+              <a:t>✓  FCM 푸시 알림 + 관리자 일괄 발송</a:t>
+            </a:r>
+            <a:endParaRPr lang="en-US" sz="1000" dirty="0"/>
+          </a:p>
+        </p:txBody>
+      </p:sp>
+      <p:sp>
+        <p:nvSpPr>
+          <p:cNvPr id="43" name="Text 41"/>
+          <p:cNvSpPr/>
+          <p:nvPr/>
+        </p:nvSpPr>
+        <p:spPr>
+          <a:xfrm>
+            <a:off x="4325112" y="5202936"/>
+            <a:ext cx="3401568" cy="338328"/>
+          </a:xfrm>
+          <a:prstGeom prst="rect">
+            <a:avLst/>
+          </a:prstGeom>
+          <a:noFill/>
+          <a:ln/>
+        </p:spPr>
+        <p:txBody>
+          <a:bodyPr wrap="square" rtlCol="0" anchor="ctr"/>
+          <a:lstStyle/>
+          <a:p>
+            <a:pPr indent="0" marL="0">
+              <a:buNone/>
+            </a:pPr>
+            <a:r>
+              <a:rPr lang="en-US" sz="1000" dirty="0">
+                <a:solidFill>
+                  <a:srgbClr val="1F1235"/>
+                </a:solidFill>
+              </a:rPr>
+              <a:t>✓  PWA 오프라인 캐싱 (Serwist)</a:t>
+            </a:r>
+            <a:endParaRPr lang="en-US" sz="1000" dirty="0"/>
+          </a:p>
+        </p:txBody>
+      </p:sp>
+      <p:sp>
+        <p:nvSpPr>
+          <p:cNvPr id="44" name="Text 42"/>
+          <p:cNvSpPr/>
+          <p:nvPr/>
+        </p:nvSpPr>
+        <p:spPr>
+          <a:xfrm>
+            <a:off x="4325112" y="5550408"/>
+            <a:ext cx="3401568" cy="338328"/>
+          </a:xfrm>
+          <a:prstGeom prst="rect">
+            <a:avLst/>
+          </a:prstGeom>
+          <a:noFill/>
+          <a:ln/>
+        </p:spPr>
+        <p:txBody>
+          <a:bodyPr wrap="square" rtlCol="0" anchor="ctr"/>
+          <a:lstStyle/>
+          <a:p>
+            <a:pPr indent="0" marL="0">
+              <a:buNone/>
+            </a:pPr>
+            <a:r>
+              <a:rPr lang="en-US" sz="1000" dirty="0">
+                <a:solidFill>
+                  <a:srgbClr val="1F1235"/>
+                </a:solidFill>
+              </a:rPr>
+              <a:t>✓  Sentry 모니터링 + 가맹점 광고 시스템</a:t>
+            </a:r>
+            <a:endParaRPr lang="en-US" sz="1000" dirty="0"/>
+          </a:p>
+        </p:txBody>
+      </p:sp>
+      <p:sp>
+        <p:nvSpPr>
+          <p:cNvPr id="45" name="Shape 43"/>
+          <p:cNvSpPr/>
+          <p:nvPr/>
+        </p:nvSpPr>
+        <p:spPr>
+          <a:xfrm>
+            <a:off x="8092440" y="3566160"/>
+            <a:ext cx="3749040" cy="2423160"/>
           </a:xfrm>
           <a:prstGeom prst="roundRect">
             <a:avLst>
-              <a:gd name="adj" fmla="val 22222"/>
-            </a:avLst>
-          </a:prstGeom>
-          <a:solidFill>
-            <a:srgbClr val="FFFBEB"/>
-          </a:solidFill>
-          <a:ln w="12700">
-            <a:solidFill>
-              <a:srgbClr val="FFFBEB"/>
-            </a:solidFill>
-            <a:prstDash val="solid"/>
-          </a:ln>
-        </p:spPr>
-      </p:sp>
-      <p:sp>
-        <p:nvSpPr>
-          <p:cNvPr id="28" name="Text 26"/>
-          <p:cNvSpPr/>
-          <p:nvPr/>
-        </p:nvSpPr>
-        <p:spPr>
-          <a:xfrm>
-            <a:off x="4270248" y="4005072"/>
-            <a:ext cx="3474720" cy="329184"/>
-          </a:xfrm>
-          <a:prstGeom prst="rect">
-            <a:avLst/>
-          </a:prstGeom>
-          <a:noFill/>
-          <a:ln/>
-        </p:spPr>
-        <p:txBody>
-          <a:bodyPr wrap="square" rtlCol="0" anchor="ctr"/>
-          <a:lstStyle/>
-          <a:p>
-            <a:pPr algn="ctr" indent="0" marL="0">
-              <a:buNone/>
-            </a:pPr>
-            <a:r>
-              <a:rPr lang="en-US" sz="1200" b="1" dirty="0">
-                <a:solidFill>
-                  <a:srgbClr val="D97706"/>
-                </a:solidFill>
-              </a:rPr>
-              <a:t>카카오 API 키 확인</a:t>
-            </a:r>
-            <a:endParaRPr lang="en-US" sz="1200" dirty="0"/>
-          </a:p>
-        </p:txBody>
-      </p:sp>
-      <p:sp>
-        <p:nvSpPr>
-          <p:cNvPr id="29" name="Text 27"/>
-          <p:cNvSpPr/>
-          <p:nvPr/>
-        </p:nvSpPr>
-        <p:spPr>
-          <a:xfrm>
-            <a:off x="4297680" y="4398264"/>
-            <a:ext cx="3419856" cy="694944"/>
-          </a:xfrm>
-          <a:prstGeom prst="rect">
-            <a:avLst/>
-          </a:prstGeom>
-          <a:noFill/>
-          <a:ln/>
-        </p:spPr>
-        <p:txBody>
-          <a:bodyPr wrap="square" rtlCol="0" anchor="ctr"/>
-          <a:lstStyle/>
-          <a:p>
-            <a:pPr indent="0" marL="0">
-              <a:buNone/>
-            </a:pPr>
-            <a:r>
-              <a:rPr lang="en-US" sz="1050" dirty="0">
-                <a:solidFill>
-                  <a:srgbClr val="6B7280"/>
-                </a:solidFill>
-              </a:rPr>
-              <a:t>앱 키 → JavaScript 키 재확인</a:t>
-            </a:r>
-            <a:endParaRPr lang="en-US" sz="1050" dirty="0"/>
-          </a:p>
-          <a:p>
-            <a:pPr indent="0" marL="0">
-              <a:buNone/>
-            </a:pPr>
-            <a:r>
-              <a:rPr lang="en-US" sz="1050" dirty="0">
-                <a:solidFill>
-                  <a:srgbClr val="6B7280"/>
-                </a:solidFill>
-              </a:rPr>
-              <a:t>NEXT_PUBLIC_KAKAO_MAP_KEY 검증</a:t>
-            </a:r>
-            <a:endParaRPr lang="en-US" sz="1050" dirty="0"/>
-          </a:p>
-          <a:p>
-            <a:pPr indent="0" marL="0">
-              <a:buNone/>
-            </a:pPr>
-            <a:r>
-              <a:rPr lang="en-US" sz="1050" dirty="0">
-                <a:solidFill>
-                  <a:srgbClr val="6B7280"/>
-                </a:solidFill>
-              </a:rPr>
-              <a:t>Kakao Map 지도 표시 테스트</a:t>
-            </a:r>
-            <a:endParaRPr lang="en-US" sz="1050" dirty="0"/>
-          </a:p>
-        </p:txBody>
-      </p:sp>
-      <p:sp>
-        <p:nvSpPr>
-          <p:cNvPr id="30" name="Shape 28"/>
-          <p:cNvSpPr/>
-          <p:nvPr/>
-        </p:nvSpPr>
-        <p:spPr>
-          <a:xfrm>
-            <a:off x="8037576" y="3886200"/>
-            <a:ext cx="3749040" cy="1280160"/>
-          </a:xfrm>
-          <a:prstGeom prst="roundRect">
-            <a:avLst>
-              <a:gd name="adj" fmla="val 9286"/>
-            </a:avLst>
-          </a:prstGeom>
-          <a:solidFill>
-            <a:srgbClr val="FFFFFF"/>
-          </a:solidFill>
-          <a:ln w="12700">
-            <a:solidFill>
-              <a:srgbClr val="E9D5FF"/>
-            </a:solidFill>
-            <a:prstDash val="solid"/>
-          </a:ln>
-        </p:spPr>
-      </p:sp>
-      <p:sp>
-        <p:nvSpPr>
-          <p:cNvPr id="31" name="Shape 29"/>
-          <p:cNvSpPr/>
-          <p:nvPr/>
-        </p:nvSpPr>
-        <p:spPr>
-          <a:xfrm>
-            <a:off x="8174736" y="4005072"/>
-            <a:ext cx="3474720" cy="329184"/>
-          </a:xfrm>
-          <a:prstGeom prst="roundRect">
-            <a:avLst>
-              <a:gd name="adj" fmla="val 22222"/>
-            </a:avLst>
-          </a:prstGeom>
-          <a:solidFill>
-            <a:srgbClr val="FFFBEB"/>
-          </a:solidFill>
-          <a:ln w="12700">
-            <a:solidFill>
-              <a:srgbClr val="FFFBEB"/>
-            </a:solidFill>
-            <a:prstDash val="solid"/>
-          </a:ln>
-        </p:spPr>
-      </p:sp>
-      <p:sp>
-        <p:nvSpPr>
-          <p:cNvPr id="32" name="Text 30"/>
-          <p:cNvSpPr/>
-          <p:nvPr/>
-        </p:nvSpPr>
-        <p:spPr>
-          <a:xfrm>
-            <a:off x="8174736" y="4005072"/>
-            <a:ext cx="3474720" cy="329184"/>
-          </a:xfrm>
-          <a:prstGeom prst="rect">
-            <a:avLst/>
-          </a:prstGeom>
-          <a:noFill/>
-          <a:ln/>
-        </p:spPr>
-        <p:txBody>
-          <a:bodyPr wrap="square" rtlCol="0" anchor="ctr"/>
-          <a:lstStyle/>
-          <a:p>
-            <a:pPr algn="ctr" indent="0" marL="0">
-              <a:buNone/>
-            </a:pPr>
-            <a:r>
-              <a:rPr lang="en-US" sz="1200" b="1" dirty="0">
-                <a:solidFill>
-                  <a:srgbClr val="D97706"/>
-                </a:solidFill>
-              </a:rPr>
-              <a:t>샘플 데이터 + 배포</a:t>
-            </a:r>
-            <a:endParaRPr lang="en-US" sz="1200" dirty="0"/>
-          </a:p>
-        </p:txBody>
-      </p:sp>
-      <p:sp>
-        <p:nvSpPr>
-          <p:cNvPr id="33" name="Text 31"/>
-          <p:cNvSpPr/>
-          <p:nvPr/>
-        </p:nvSpPr>
-        <p:spPr>
-          <a:xfrm>
-            <a:off x="8202168" y="4398264"/>
-            <a:ext cx="3419856" cy="694944"/>
-          </a:xfrm>
-          <a:prstGeom prst="rect">
-            <a:avLst/>
-          </a:prstGeom>
-          <a:noFill/>
-          <a:ln/>
-        </p:spPr>
-        <p:txBody>
-          <a:bodyPr wrap="square" rtlCol="0" anchor="ctr"/>
-          <a:lstStyle/>
-          <a:p>
-            <a:pPr indent="0" marL="0">
-              <a:buNone/>
-            </a:pPr>
-            <a:r>
-              <a:rPr lang="en-US" sz="1050" dirty="0">
-                <a:solidFill>
-                  <a:srgbClr val="6B7280"/>
-                </a:solidFill>
-              </a:rPr>
-              <a:t>실 가맹점 + 메뉴 데이터 추가</a:t>
-            </a:r>
-            <a:endParaRPr lang="en-US" sz="1050" dirty="0"/>
-          </a:p>
-          <a:p>
-            <a:pPr indent="0" marL="0">
-              <a:buNone/>
-            </a:pPr>
-            <a:r>
-              <a:rPr lang="en-US" sz="1050" dirty="0">
-                <a:solidFill>
-                  <a:srgbClr val="6B7280"/>
-                </a:solidFill>
-              </a:rPr>
-              <a:t>관리자 계정 role='admin' 설정</a:t>
-            </a:r>
-            <a:endParaRPr lang="en-US" sz="1050" dirty="0"/>
-          </a:p>
-          <a:p>
-            <a:pPr indent="0" marL="0">
-              <a:buNone/>
-            </a:pPr>
-            <a:r>
-              <a:rPr lang="en-US" sz="1050" dirty="0">
-                <a:solidFill>
-                  <a:srgbClr val="6B7280"/>
-                </a:solidFill>
-              </a:rPr>
-              <a:t>Vercel 프로덕션 배포 확인</a:t>
-            </a:r>
-            <a:endParaRPr lang="en-US" sz="1050" dirty="0"/>
-          </a:p>
-        </p:txBody>
-      </p:sp>
-      <p:sp>
-        <p:nvSpPr>
-          <p:cNvPr id="34" name="Shape 32"/>
-          <p:cNvSpPr/>
-          <p:nvPr/>
-        </p:nvSpPr>
-        <p:spPr>
-          <a:xfrm>
-            <a:off x="365760" y="5257800"/>
-            <a:ext cx="1325880" cy="384048"/>
-          </a:xfrm>
-          <a:prstGeom prst="roundRect">
-            <a:avLst>
-              <a:gd name="adj" fmla="val 23810"/>
+              <a:gd name="adj" fmla="val 5660"/>
             </a:avLst>
           </a:prstGeom>
           <a:solidFill>
@@ -6556,62 +6549,26 @@
       </p:sp>
       <p:sp>
         <p:nvSpPr>
-          <p:cNvPr id="35" name="Text 33"/>
-          <p:cNvSpPr/>
-          <p:nvPr/>
-        </p:nvSpPr>
-        <p:spPr>
-          <a:xfrm>
-            <a:off x="365760" y="5257800"/>
-            <a:ext cx="1325880" cy="384048"/>
-          </a:xfrm>
-          <a:prstGeom prst="rect">
-            <a:avLst/>
-          </a:prstGeom>
-          <a:noFill/>
-          <a:ln/>
-        </p:spPr>
-        <p:txBody>
-          <a:bodyPr wrap="square" rtlCol="0" anchor="ctr"/>
-          <a:lstStyle/>
-          <a:p>
-            <a:pPr algn="ctr" indent="0" marL="0">
-              <a:buNone/>
-            </a:pPr>
-            <a:r>
-              <a:rPr lang="en-US" sz="1100" b="1" dirty="0">
-                <a:solidFill>
-                  <a:srgbClr val="EA580C"/>
-                </a:solidFill>
-              </a:rPr>
-              <a:t>⏳ Phase 4</a:t>
-            </a:r>
-            <a:endParaRPr lang="en-US" sz="1100" dirty="0"/>
-          </a:p>
-        </p:txBody>
-      </p:sp>
-      <p:sp>
-        <p:nvSpPr>
-          <p:cNvPr id="36" name="Shape 34"/>
-          <p:cNvSpPr/>
-          <p:nvPr/>
-        </p:nvSpPr>
-        <p:spPr>
-          <a:xfrm>
-            <a:off x="228600" y="5715000"/>
-            <a:ext cx="3749040" cy="1280160"/>
+          <p:cNvPr id="46" name="Shape 44"/>
+          <p:cNvSpPr/>
+          <p:nvPr/>
+        </p:nvSpPr>
+        <p:spPr>
+          <a:xfrm>
+            <a:off x="8202168" y="3675888"/>
+            <a:ext cx="3529584" cy="384048"/>
           </a:xfrm>
           <a:prstGeom prst="roundRect">
             <a:avLst>
-              <a:gd name="adj" fmla="val 9286"/>
+              <a:gd name="adj" fmla="val 19048"/>
             </a:avLst>
           </a:prstGeom>
           <a:solidFill>
-            <a:srgbClr val="FFFFFF"/>
+            <a:srgbClr val="EA580C"/>
           </a:solidFill>
           <a:ln w="12700">
             <a:solidFill>
-              <a:srgbClr val="E9D5FF"/>
+              <a:srgbClr val="EA580C"/>
             </a:solidFill>
             <a:prstDash val="solid"/>
           </a:ln>
@@ -6619,41 +6576,14 @@
       </p:sp>
       <p:sp>
         <p:nvSpPr>
-          <p:cNvPr id="37" name="Shape 35"/>
-          <p:cNvSpPr/>
-          <p:nvPr/>
-        </p:nvSpPr>
-        <p:spPr>
-          <a:xfrm>
-            <a:off x="365760" y="5833872"/>
-            <a:ext cx="3474720" cy="329184"/>
-          </a:xfrm>
-          <a:prstGeom prst="roundRect">
-            <a:avLst>
-              <a:gd name="adj" fmla="val 22222"/>
-            </a:avLst>
-          </a:prstGeom>
-          <a:solidFill>
-            <a:srgbClr val="FFEDD5"/>
-          </a:solidFill>
-          <a:ln w="12700">
-            <a:solidFill>
-              <a:srgbClr val="FFEDD5"/>
-            </a:solidFill>
-            <a:prstDash val="solid"/>
-          </a:ln>
-        </p:spPr>
-      </p:sp>
-      <p:sp>
-        <p:nvSpPr>
-          <p:cNvPr id="38" name="Text 36"/>
-          <p:cNvSpPr/>
-          <p:nvPr/>
-        </p:nvSpPr>
-        <p:spPr>
-          <a:xfrm>
-            <a:off x="365760" y="5833872"/>
-            <a:ext cx="3474720" cy="329184"/>
+          <p:cNvPr id="47" name="Text 45"/>
+          <p:cNvSpPr/>
+          <p:nvPr/>
+        </p:nvSpPr>
+        <p:spPr>
+          <a:xfrm>
+            <a:off x="8202168" y="3675888"/>
+            <a:ext cx="3529584" cy="384048"/>
           </a:xfrm>
           <a:prstGeom prst="rect">
             <a:avLst/>
@@ -6671,10 +6601,10 @@
             <a:r>
               <a:rPr lang="en-US" sz="1200" b="1" dirty="0">
                 <a:solidFill>
-                  <a:srgbClr val="EA580C"/>
-                </a:solidFill>
-              </a:rPr>
-              <a:t>Pi Network SDK 인증</a:t>
+                  <a:srgbClr val="FFFFFF"/>
+                </a:solidFill>
+              </a:rPr>
+              <a:t>🛡️ DB / 보안 / 관리자</a:t>
             </a:r>
             <a:endParaRPr lang="en-US" sz="1200" dirty="0"/>
           </a:p>
@@ -6682,373 +6612,181 @@
       </p:sp>
       <p:sp>
         <p:nvSpPr>
-          <p:cNvPr id="39" name="Text 37"/>
-          <p:cNvSpPr/>
-          <p:nvPr/>
-        </p:nvSpPr>
-        <p:spPr>
-          <a:xfrm>
-            <a:off x="393192" y="6227064"/>
-            <a:ext cx="3419856" cy="694944"/>
-          </a:xfrm>
-          <a:prstGeom prst="rect">
-            <a:avLst/>
-          </a:prstGeom>
-          <a:noFill/>
-          <a:ln/>
-        </p:spPr>
-        <p:txBody>
-          <a:bodyPr wrap="square" rtlCol="0" anchor="ctr"/>
-          <a:lstStyle/>
-          <a:p>
-            <a:pPr indent="0" marL="0">
-              <a:buNone/>
-            </a:pPr>
-            <a:r>
-              <a:rPr lang="en-US" sz="1050" dirty="0">
-                <a:solidFill>
-                  <a:srgbClr val="6B7280"/>
-                </a:solidFill>
-              </a:rPr>
-              <a:t>Pi SDK 연동 (Mainnet 개방 후)</a:t>
-            </a:r>
-            <a:endParaRPr lang="en-US" sz="1050" dirty="0"/>
-          </a:p>
-          <a:p>
-            <a:pPr indent="0" marL="0">
-              <a:buNone/>
-            </a:pPr>
-            <a:r>
-              <a:rPr lang="en-US" sz="1050" dirty="0">
-                <a:solidFill>
-                  <a:srgbClr val="6B7280"/>
-                </a:solidFill>
-              </a:rPr>
-              <a:t>pi_uid / pi_username 필드 활성화</a:t>
-            </a:r>
-            <a:endParaRPr lang="en-US" sz="1050" dirty="0"/>
-          </a:p>
-          <a:p>
-            <a:pPr indent="0" marL="0">
-              <a:buNone/>
-            </a:pPr>
-            <a:r>
-              <a:rPr lang="en-US" sz="1050" dirty="0">
-                <a:solidFill>
-                  <a:srgbClr val="6B7280"/>
-                </a:solidFill>
-              </a:rPr>
-              <a:t>Pi 기반 로그인 플로우</a:t>
-            </a:r>
-            <a:endParaRPr lang="en-US" sz="1050" dirty="0"/>
-          </a:p>
-        </p:txBody>
-      </p:sp>
-      <p:sp>
-        <p:nvSpPr>
-          <p:cNvPr id="40" name="Shape 38"/>
-          <p:cNvSpPr/>
-          <p:nvPr/>
-        </p:nvSpPr>
-        <p:spPr>
-          <a:xfrm>
-            <a:off x="4133088" y="5715000"/>
-            <a:ext cx="3749040" cy="1280160"/>
-          </a:xfrm>
-          <a:prstGeom prst="roundRect">
-            <a:avLst>
-              <a:gd name="adj" fmla="val 9286"/>
-            </a:avLst>
-          </a:prstGeom>
-          <a:solidFill>
-            <a:srgbClr val="FFFFFF"/>
-          </a:solidFill>
-          <a:ln w="12700">
-            <a:solidFill>
-              <a:srgbClr val="E9D5FF"/>
-            </a:solidFill>
-            <a:prstDash val="solid"/>
-          </a:ln>
-        </p:spPr>
-      </p:sp>
-      <p:sp>
-        <p:nvSpPr>
-          <p:cNvPr id="41" name="Shape 39"/>
-          <p:cNvSpPr/>
-          <p:nvPr/>
-        </p:nvSpPr>
-        <p:spPr>
-          <a:xfrm>
-            <a:off x="4270248" y="5833872"/>
-            <a:ext cx="3474720" cy="329184"/>
-          </a:xfrm>
-          <a:prstGeom prst="roundRect">
-            <a:avLst>
-              <a:gd name="adj" fmla="val 22222"/>
-            </a:avLst>
-          </a:prstGeom>
-          <a:solidFill>
-            <a:srgbClr val="FFEDD5"/>
-          </a:solidFill>
-          <a:ln w="12700">
-            <a:solidFill>
-              <a:srgbClr val="FFEDD5"/>
-            </a:solidFill>
-            <a:prstDash val="solid"/>
-          </a:ln>
-        </p:spPr>
-      </p:sp>
-      <p:sp>
-        <p:nvSpPr>
-          <p:cNvPr id="42" name="Text 40"/>
-          <p:cNvSpPr/>
-          <p:nvPr/>
-        </p:nvSpPr>
-        <p:spPr>
-          <a:xfrm>
-            <a:off x="4270248" y="5833872"/>
-            <a:ext cx="3474720" cy="329184"/>
-          </a:xfrm>
-          <a:prstGeom prst="rect">
-            <a:avLst/>
-          </a:prstGeom>
-          <a:noFill/>
-          <a:ln/>
-        </p:spPr>
-        <p:txBody>
-          <a:bodyPr wrap="square" rtlCol="0" anchor="ctr"/>
-          <a:lstStyle/>
-          <a:p>
-            <a:pPr algn="ctr" indent="0" marL="0">
-              <a:buNone/>
-            </a:pPr>
-            <a:r>
-              <a:rPr lang="en-US" sz="1200" b="1" dirty="0">
-                <a:solidFill>
-                  <a:srgbClr val="EA580C"/>
-                </a:solidFill>
-              </a:rPr>
-              <a:t>Pi 코인 결제 연동</a:t>
-            </a:r>
-            <a:endParaRPr lang="en-US" sz="1200" dirty="0"/>
-          </a:p>
-        </p:txBody>
-      </p:sp>
-      <p:sp>
-        <p:nvSpPr>
-          <p:cNvPr id="43" name="Text 41"/>
-          <p:cNvSpPr/>
-          <p:nvPr/>
-        </p:nvSpPr>
-        <p:spPr>
-          <a:xfrm>
-            <a:off x="4297680" y="6227064"/>
-            <a:ext cx="3419856" cy="694944"/>
-          </a:xfrm>
-          <a:prstGeom prst="rect">
-            <a:avLst/>
-          </a:prstGeom>
-          <a:noFill/>
-          <a:ln/>
-        </p:spPr>
-        <p:txBody>
-          <a:bodyPr wrap="square" rtlCol="0" anchor="ctr"/>
-          <a:lstStyle/>
-          <a:p>
-            <a:pPr indent="0" marL="0">
-              <a:buNone/>
-            </a:pPr>
-            <a:r>
-              <a:rPr lang="en-US" sz="1050" dirty="0">
-                <a:solidFill>
-                  <a:srgbClr val="6B7280"/>
-                </a:solidFill>
-              </a:rPr>
-              <a:t>Pi 결제 API 연동</a:t>
-            </a:r>
-            <a:endParaRPr lang="en-US" sz="1050" dirty="0"/>
-          </a:p>
-          <a:p>
-            <a:pPr indent="0" marL="0">
-              <a:buNone/>
-            </a:pPr>
-            <a:r>
-              <a:rPr lang="en-US" sz="1050" dirty="0">
-                <a:solidFill>
-                  <a:srgbClr val="6B7280"/>
-                </a:solidFill>
-              </a:rPr>
-              <a:t>PICK ↔ Pi 토큰 전환</a:t>
-            </a:r>
-            <a:endParaRPr lang="en-US" sz="1050" dirty="0"/>
-          </a:p>
-          <a:p>
-            <a:pPr indent="0" marL="0">
-              <a:buNone/>
-            </a:pPr>
-            <a:r>
-              <a:rPr lang="en-US" sz="1050" dirty="0">
-                <a:solidFill>
-                  <a:srgbClr val="6B7280"/>
-                </a:solidFill>
-              </a:rPr>
-              <a:t>Pi 기반 정산 시스템</a:t>
-            </a:r>
-            <a:endParaRPr lang="en-US" sz="1050" dirty="0"/>
-          </a:p>
-        </p:txBody>
-      </p:sp>
-      <p:sp>
-        <p:nvSpPr>
-          <p:cNvPr id="44" name="Shape 42"/>
-          <p:cNvSpPr/>
-          <p:nvPr/>
-        </p:nvSpPr>
-        <p:spPr>
-          <a:xfrm>
-            <a:off x="8037576" y="5715000"/>
-            <a:ext cx="3749040" cy="1280160"/>
-          </a:xfrm>
-          <a:prstGeom prst="roundRect">
-            <a:avLst>
-              <a:gd name="adj" fmla="val 9286"/>
-            </a:avLst>
-          </a:prstGeom>
-          <a:solidFill>
-            <a:srgbClr val="FFFFFF"/>
-          </a:solidFill>
-          <a:ln w="12700">
-            <a:solidFill>
-              <a:srgbClr val="E9D5FF"/>
-            </a:solidFill>
-            <a:prstDash val="solid"/>
-          </a:ln>
-        </p:spPr>
-      </p:sp>
-      <p:sp>
-        <p:nvSpPr>
-          <p:cNvPr id="45" name="Shape 43"/>
-          <p:cNvSpPr/>
-          <p:nvPr/>
-        </p:nvSpPr>
-        <p:spPr>
-          <a:xfrm>
-            <a:off x="8174736" y="5833872"/>
-            <a:ext cx="3474720" cy="329184"/>
-          </a:xfrm>
-          <a:prstGeom prst="roundRect">
-            <a:avLst>
-              <a:gd name="adj" fmla="val 22222"/>
-            </a:avLst>
-          </a:prstGeom>
-          <a:solidFill>
-            <a:srgbClr val="FFEDD5"/>
-          </a:solidFill>
-          <a:ln w="12700">
-            <a:solidFill>
-              <a:srgbClr val="FFEDD5"/>
-            </a:solidFill>
-            <a:prstDash val="solid"/>
-          </a:ln>
-        </p:spPr>
-      </p:sp>
-      <p:sp>
-        <p:nvSpPr>
-          <p:cNvPr id="46" name="Text 44"/>
-          <p:cNvSpPr/>
-          <p:nvPr/>
-        </p:nvSpPr>
-        <p:spPr>
-          <a:xfrm>
-            <a:off x="8174736" y="5833872"/>
-            <a:ext cx="3474720" cy="329184"/>
-          </a:xfrm>
-          <a:prstGeom prst="rect">
-            <a:avLst/>
-          </a:prstGeom>
-          <a:noFill/>
-          <a:ln/>
-        </p:spPr>
-        <p:txBody>
-          <a:bodyPr wrap="square" rtlCol="0" anchor="ctr"/>
-          <a:lstStyle/>
-          <a:p>
-            <a:pPr algn="ctr" indent="0" marL="0">
-              <a:buNone/>
-            </a:pPr>
-            <a:r>
-              <a:rPr lang="en-US" sz="1200" b="1" dirty="0">
-                <a:solidFill>
-                  <a:srgbClr val="EA580C"/>
-                </a:solidFill>
-              </a:rPr>
-              <a:t>Pi 생태계 확장</a:t>
-            </a:r>
-            <a:endParaRPr lang="en-US" sz="1200" dirty="0"/>
-          </a:p>
-        </p:txBody>
-      </p:sp>
-      <p:sp>
-        <p:nvSpPr>
-          <p:cNvPr id="47" name="Text 45"/>
-          <p:cNvSpPr/>
-          <p:nvPr/>
-        </p:nvSpPr>
-        <p:spPr>
-          <a:xfrm>
-            <a:off x="8202168" y="6227064"/>
-            <a:ext cx="3419856" cy="694944"/>
-          </a:xfrm>
-          <a:prstGeom prst="rect">
-            <a:avLst/>
-          </a:prstGeom>
-          <a:noFill/>
-          <a:ln/>
-        </p:spPr>
-        <p:txBody>
-          <a:bodyPr wrap="square" rtlCol="0" anchor="ctr"/>
-          <a:lstStyle/>
-          <a:p>
-            <a:pPr indent="0" marL="0">
-              <a:buNone/>
-            </a:pPr>
-            <a:r>
-              <a:rPr lang="en-US" sz="1050" dirty="0">
-                <a:solidFill>
-                  <a:srgbClr val="6B7280"/>
-                </a:solidFill>
-              </a:rPr>
-              <a:t>Pi 마이닝 연동 혜택</a:t>
-            </a:r>
-            <a:endParaRPr lang="en-US" sz="1050" dirty="0"/>
-          </a:p>
-          <a:p>
-            <a:pPr indent="0" marL="0">
-              <a:buNone/>
-            </a:pPr>
-            <a:r>
-              <a:rPr lang="en-US" sz="1050" dirty="0">
-                <a:solidFill>
-                  <a:srgbClr val="6B7280"/>
-                </a:solidFill>
-              </a:rPr>
-              <a:t>Pi 홀더 전용 할인 쿠폰</a:t>
-            </a:r>
-            <a:endParaRPr lang="en-US" sz="1050" dirty="0"/>
-          </a:p>
-          <a:p>
-            <a:pPr indent="0" marL="0">
-              <a:buNone/>
-            </a:pPr>
-            <a:r>
-              <a:rPr lang="en-US" sz="1050" dirty="0">
-                <a:solidFill>
-                  <a:srgbClr val="6B7280"/>
-                </a:solidFill>
-              </a:rPr>
-              <a:t>Pi Network 커뮤니티 마케팅</a:t>
-            </a:r>
-            <a:endParaRPr lang="en-US" sz="1050" dirty="0"/>
+          <p:cNvPr id="48" name="Text 46"/>
+          <p:cNvSpPr/>
+          <p:nvPr/>
+        </p:nvSpPr>
+        <p:spPr>
+          <a:xfrm>
+            <a:off x="8257032" y="4160520"/>
+            <a:ext cx="3401568" cy="338328"/>
+          </a:xfrm>
+          <a:prstGeom prst="rect">
+            <a:avLst/>
+          </a:prstGeom>
+          <a:noFill/>
+          <a:ln/>
+        </p:spPr>
+        <p:txBody>
+          <a:bodyPr wrap="square" rtlCol="0" anchor="ctr"/>
+          <a:lstStyle/>
+          <a:p>
+            <a:pPr indent="0" marL="0">
+              <a:buNone/>
+            </a:pPr>
+            <a:r>
+              <a:rPr lang="en-US" sz="1000" dirty="0">
+                <a:solidFill>
+                  <a:srgbClr val="1F1235"/>
+                </a:solidFill>
+              </a:rPr>
+              <a:t>✓  DB 인덱스 30개+ (GIN 전문검색 포함)</a:t>
+            </a:r>
+            <a:endParaRPr lang="en-US" sz="1000" dirty="0"/>
+          </a:p>
+        </p:txBody>
+      </p:sp>
+      <p:sp>
+        <p:nvSpPr>
+          <p:cNvPr id="49" name="Text 47"/>
+          <p:cNvSpPr/>
+          <p:nvPr/>
+        </p:nvSpPr>
+        <p:spPr>
+          <a:xfrm>
+            <a:off x="8257032" y="4507992"/>
+            <a:ext cx="3401568" cy="338328"/>
+          </a:xfrm>
+          <a:prstGeom prst="rect">
+            <a:avLst/>
+          </a:prstGeom>
+          <a:noFill/>
+          <a:ln/>
+        </p:spPr>
+        <p:txBody>
+          <a:bodyPr wrap="square" rtlCol="0" anchor="ctr"/>
+          <a:lstStyle/>
+          <a:p>
+            <a:pPr indent="0" marL="0">
+              <a:buNone/>
+            </a:pPr>
+            <a:r>
+              <a:rPr lang="en-US" sz="1000" dirty="0">
+                <a:solidFill>
+                  <a:srgbClr val="1F1235"/>
+                </a:solidFill>
+              </a:rPr>
+              <a:t>✓  운영 RLS 정책 + Storage 버킷 정책</a:t>
+            </a:r>
+            <a:endParaRPr lang="en-US" sz="1000" dirty="0"/>
+          </a:p>
+        </p:txBody>
+      </p:sp>
+      <p:sp>
+        <p:nvSpPr>
+          <p:cNvPr id="50" name="Text 48"/>
+          <p:cNvSpPr/>
+          <p:nvPr/>
+        </p:nvSpPr>
+        <p:spPr>
+          <a:xfrm>
+            <a:off x="8257032" y="4855464"/>
+            <a:ext cx="3401568" cy="338328"/>
+          </a:xfrm>
+          <a:prstGeom prst="rect">
+            <a:avLst/>
+          </a:prstGeom>
+          <a:noFill/>
+          <a:ln/>
+        </p:spPr>
+        <p:txBody>
+          <a:bodyPr wrap="square" rtlCol="0" anchor="ctr"/>
+          <a:lstStyle/>
+          <a:p>
+            <a:pPr indent="0" marL="0">
+              <a:buNone/>
+            </a:pPr>
+            <a:r>
+              <a:rPr lang="en-US" sz="1000" dirty="0">
+                <a:solidFill>
+                  <a:srgbClr val="1F1235"/>
+                </a:solidFill>
+              </a:rPr>
+              <a:t>✓  관리자 5탭: 통계·회원·가게·쿠폰·FCM 푸시</a:t>
+            </a:r>
+            <a:endParaRPr lang="en-US" sz="1000" dirty="0"/>
+          </a:p>
+        </p:txBody>
+      </p:sp>
+      <p:sp>
+        <p:nvSpPr>
+          <p:cNvPr id="51" name="Text 49"/>
+          <p:cNvSpPr/>
+          <p:nvPr/>
+        </p:nvSpPr>
+        <p:spPr>
+          <a:xfrm>
+            <a:off x="8257032" y="5202936"/>
+            <a:ext cx="3401568" cy="338328"/>
+          </a:xfrm>
+          <a:prstGeom prst="rect">
+            <a:avLst/>
+          </a:prstGeom>
+          <a:noFill/>
+          <a:ln/>
+        </p:spPr>
+        <p:txBody>
+          <a:bodyPr wrap="square" rtlCol="0" anchor="ctr"/>
+          <a:lstStyle/>
+          <a:p>
+            <a:pPr indent="0" marL="0">
+              <a:buNone/>
+            </a:pPr>
+            <a:r>
+              <a:rPr lang="en-US" sz="1000" dirty="0">
+                <a:solidFill>
+                  <a:srgbClr val="1F1235"/>
+                </a:solidFill>
+              </a:rPr>
+              <a:t>✓  404·에러·로딩·스플래시 페이지</a:t>
+            </a:r>
+            <a:endParaRPr lang="en-US" sz="1000" dirty="0"/>
+          </a:p>
+        </p:txBody>
+      </p:sp>
+      <p:sp>
+        <p:nvSpPr>
+          <p:cNvPr id="52" name="Text 50"/>
+          <p:cNvSpPr/>
+          <p:nvPr/>
+        </p:nvSpPr>
+        <p:spPr>
+          <a:xfrm>
+            <a:off x="8257032" y="5550408"/>
+            <a:ext cx="3401568" cy="338328"/>
+          </a:xfrm>
+          <a:prstGeom prst="rect">
+            <a:avLst/>
+          </a:prstGeom>
+          <a:noFill/>
+          <a:ln/>
+        </p:spPr>
+        <p:txBody>
+          <a:bodyPr wrap="square" rtlCol="0" anchor="ctr"/>
+          <a:lstStyle/>
+          <a:p>
+            <a:pPr indent="0" marL="0">
+              <a:buNone/>
+            </a:pPr>
+            <a:r>
+              <a:rPr lang="en-US" sz="1000" dirty="0">
+                <a:solidFill>
+                  <a:srgbClr val="1F1235"/>
+                </a:solidFill>
+              </a:rPr>
+              <a:t>✓  다크모드 + Tailwind dark: 클래스 전면 적용</a:t>
+            </a:r>
+            <a:endParaRPr lang="en-US" sz="1000" dirty="0"/>
           </a:p>
         </p:txBody>
       </p:sp>
@@ -7114,6 +6852,1737 @@
                   <a:srgbClr val="4C1D95"/>
                 </a:solidFill>
               </a:rPr>
+              <a:t>🚀  Phase 1~3 완성 · 다음 단계 로드맵</a:t>
+            </a:r>
+            <a:endParaRPr lang="en-US" sz="2600" dirty="0"/>
+          </a:p>
+        </p:txBody>
+      </p:sp>
+      <p:sp>
+        <p:nvSpPr>
+          <p:cNvPr id="3" name="Shape 1"/>
+          <p:cNvSpPr/>
+          <p:nvPr/>
+        </p:nvSpPr>
+        <p:spPr>
+          <a:xfrm>
+            <a:off x="365760" y="804672"/>
+            <a:ext cx="3657600" cy="45720"/>
+          </a:xfrm>
+          <a:prstGeom prst="rect">
+            <a:avLst/>
+          </a:prstGeom>
+          <a:solidFill>
+            <a:srgbClr val="16A34A"/>
+          </a:solidFill>
+          <a:ln w="12700">
+            <a:solidFill>
+              <a:srgbClr val="16A34A"/>
+            </a:solidFill>
+            <a:prstDash val="solid"/>
+          </a:ln>
+        </p:spPr>
+      </p:sp>
+      <p:sp>
+        <p:nvSpPr>
+          <p:cNvPr id="4" name="Shape 2"/>
+          <p:cNvSpPr/>
+          <p:nvPr/>
+        </p:nvSpPr>
+        <p:spPr>
+          <a:xfrm>
+            <a:off x="365760" y="914400"/>
+            <a:ext cx="12070080" cy="548640"/>
+          </a:xfrm>
+          <a:prstGeom prst="roundRect">
+            <a:avLst>
+              <a:gd name="adj" fmla="val 20000"/>
+            </a:avLst>
+          </a:prstGeom>
+          <a:solidFill>
+            <a:srgbClr val="DCFCE7"/>
+          </a:solidFill>
+          <a:ln w="12700">
+            <a:solidFill>
+              <a:srgbClr val="16A34A"/>
+            </a:solidFill>
+            <a:prstDash val="solid"/>
+          </a:ln>
+        </p:spPr>
+      </p:sp>
+      <p:sp>
+        <p:nvSpPr>
+          <p:cNvPr id="5" name="Text 3"/>
+          <p:cNvSpPr/>
+          <p:nvPr/>
+        </p:nvSpPr>
+        <p:spPr>
+          <a:xfrm>
+            <a:off x="365760" y="914400"/>
+            <a:ext cx="12070080" cy="548640"/>
+          </a:xfrm>
+          <a:prstGeom prst="rect">
+            <a:avLst/>
+          </a:prstGeom>
+          <a:noFill/>
+          <a:ln/>
+        </p:spPr>
+        <p:txBody>
+          <a:bodyPr wrap="square" rtlCol="0" anchor="ctr"/>
+          <a:lstStyle/>
+          <a:p>
+            <a:pPr algn="ctr" indent="0" marL="0">
+              <a:buNone/>
+            </a:pPr>
+            <a:r>
+              <a:rPr lang="en-US" sz="1400" b="1" dirty="0">
+                <a:solidFill>
+                  <a:srgbClr val="16A34A"/>
+                </a:solidFill>
+              </a:rPr>
+              <a:t>🎉  Phase 1~3 완성! 55개+ 기능 구현 · 미착수 기능 0개 · Pi Network 연동만 남음</a:t>
+            </a:r>
+            <a:endParaRPr lang="en-US" sz="1400" dirty="0"/>
+          </a:p>
+        </p:txBody>
+      </p:sp>
+      <p:sp>
+        <p:nvSpPr>
+          <p:cNvPr id="6" name="Shape 4"/>
+          <p:cNvSpPr/>
+          <p:nvPr/>
+        </p:nvSpPr>
+        <p:spPr>
+          <a:xfrm>
+            <a:off x="365760" y="1600200"/>
+            <a:ext cx="1325880" cy="384048"/>
+          </a:xfrm>
+          <a:prstGeom prst="roundRect">
+            <a:avLst>
+              <a:gd name="adj" fmla="val 23810"/>
+            </a:avLst>
+          </a:prstGeom>
+          <a:solidFill>
+            <a:srgbClr val="DCFCE7"/>
+          </a:solidFill>
+          <a:ln w="12700">
+            <a:solidFill>
+              <a:srgbClr val="16A34A"/>
+            </a:solidFill>
+            <a:prstDash val="solid"/>
+          </a:ln>
+        </p:spPr>
+      </p:sp>
+      <p:sp>
+        <p:nvSpPr>
+          <p:cNvPr id="7" name="Text 5"/>
+          <p:cNvSpPr/>
+          <p:nvPr/>
+        </p:nvSpPr>
+        <p:spPr>
+          <a:xfrm>
+            <a:off x="365760" y="1600200"/>
+            <a:ext cx="1325880" cy="384048"/>
+          </a:xfrm>
+          <a:prstGeom prst="rect">
+            <a:avLst/>
+          </a:prstGeom>
+          <a:noFill/>
+          <a:ln/>
+        </p:spPr>
+        <p:txBody>
+          <a:bodyPr wrap="square" rtlCol="0" anchor="ctr"/>
+          <a:lstStyle/>
+          <a:p>
+            <a:pPr algn="ctr" indent="0" marL="0">
+              <a:buNone/>
+            </a:pPr>
+            <a:r>
+              <a:rPr lang="en-US" sz="1100" b="1" dirty="0">
+                <a:solidFill>
+                  <a:srgbClr val="16A34A"/>
+                </a:solidFill>
+              </a:rPr>
+              <a:t>✅ Phase 1~3</a:t>
+            </a:r>
+            <a:endParaRPr lang="en-US" sz="1100" dirty="0"/>
+          </a:p>
+        </p:txBody>
+      </p:sp>
+      <p:sp>
+        <p:nvSpPr>
+          <p:cNvPr id="8" name="Shape 6"/>
+          <p:cNvSpPr/>
+          <p:nvPr/>
+        </p:nvSpPr>
+        <p:spPr>
+          <a:xfrm>
+            <a:off x="228600" y="2057400"/>
+            <a:ext cx="3749040" cy="1280160"/>
+          </a:xfrm>
+          <a:prstGeom prst="roundRect">
+            <a:avLst>
+              <a:gd name="adj" fmla="val 9286"/>
+            </a:avLst>
+          </a:prstGeom>
+          <a:solidFill>
+            <a:srgbClr val="FFFFFF"/>
+          </a:solidFill>
+          <a:ln w="12700">
+            <a:solidFill>
+              <a:srgbClr val="E9D5FF"/>
+            </a:solidFill>
+            <a:prstDash val="solid"/>
+          </a:ln>
+        </p:spPr>
+      </p:sp>
+      <p:sp>
+        <p:nvSpPr>
+          <p:cNvPr id="9" name="Shape 7"/>
+          <p:cNvSpPr/>
+          <p:nvPr/>
+        </p:nvSpPr>
+        <p:spPr>
+          <a:xfrm>
+            <a:off x="365760" y="2176272"/>
+            <a:ext cx="3474720" cy="329184"/>
+          </a:xfrm>
+          <a:prstGeom prst="roundRect">
+            <a:avLst>
+              <a:gd name="adj" fmla="val 22222"/>
+            </a:avLst>
+          </a:prstGeom>
+          <a:solidFill>
+            <a:srgbClr val="DCFCE7"/>
+          </a:solidFill>
+          <a:ln w="12700">
+            <a:solidFill>
+              <a:srgbClr val="DCFCE7"/>
+            </a:solidFill>
+            <a:prstDash val="solid"/>
+          </a:ln>
+        </p:spPr>
+      </p:sp>
+      <p:sp>
+        <p:nvSpPr>
+          <p:cNvPr id="10" name="Text 8"/>
+          <p:cNvSpPr/>
+          <p:nvPr/>
+        </p:nvSpPr>
+        <p:spPr>
+          <a:xfrm>
+            <a:off x="365760" y="2176272"/>
+            <a:ext cx="3474720" cy="329184"/>
+          </a:xfrm>
+          <a:prstGeom prst="rect">
+            <a:avLst/>
+          </a:prstGeom>
+          <a:noFill/>
+          <a:ln/>
+        </p:spPr>
+        <p:txBody>
+          <a:bodyPr wrap="square" rtlCol="0" anchor="ctr"/>
+          <a:lstStyle/>
+          <a:p>
+            <a:pPr algn="ctr" indent="0" marL="0">
+              <a:buNone/>
+            </a:pPr>
+            <a:r>
+              <a:rPr lang="en-US" sz="1200" b="1" dirty="0">
+                <a:solidFill>
+                  <a:srgbClr val="16A34A"/>
+                </a:solidFill>
+              </a:rPr>
+              <a:t>인증 · 지갑 · 주문 플로우</a:t>
+            </a:r>
+            <a:endParaRPr lang="en-US" sz="1200" dirty="0"/>
+          </a:p>
+        </p:txBody>
+      </p:sp>
+      <p:sp>
+        <p:nvSpPr>
+          <p:cNvPr id="11" name="Text 9"/>
+          <p:cNvSpPr/>
+          <p:nvPr/>
+        </p:nvSpPr>
+        <p:spPr>
+          <a:xfrm>
+            <a:off x="393192" y="2569464"/>
+            <a:ext cx="3419856" cy="694944"/>
+          </a:xfrm>
+          <a:prstGeom prst="rect">
+            <a:avLst/>
+          </a:prstGeom>
+          <a:noFill/>
+          <a:ln/>
+        </p:spPr>
+        <p:txBody>
+          <a:bodyPr wrap="square" rtlCol="0" anchor="ctr"/>
+          <a:lstStyle/>
+          <a:p>
+            <a:pPr indent="0" marL="0">
+              <a:buNone/>
+            </a:pPr>
+            <a:r>
+              <a:rPr lang="en-US" sz="1050" dirty="0">
+                <a:solidFill>
+                  <a:srgbClr val="6B7280"/>
+                </a:solidFill>
+              </a:rPr>
+              <a:t>이메일 로그인 (카카오 비즈니스 후 추가)</a:t>
+            </a:r>
+            <a:endParaRPr lang="en-US" sz="1050" dirty="0"/>
+          </a:p>
+          <a:p>
+            <a:pPr indent="0" marL="0">
+              <a:buNone/>
+            </a:pPr>
+            <a:r>
+              <a:rPr lang="en-US" sz="1050" dirty="0">
+                <a:solidFill>
+                  <a:srgbClr val="6B7280"/>
+                </a:solidFill>
+              </a:rPr>
+              <a:t>PICK 토큰 지갑 + 토스페이먼츠</a:t>
+            </a:r>
+            <a:endParaRPr lang="en-US" sz="1050" dirty="0"/>
+          </a:p>
+          <a:p>
+            <a:pPr indent="0" marL="0">
+              <a:buNone/>
+            </a:pPr>
+            <a:r>
+              <a:rPr lang="en-US" sz="1050" dirty="0">
+                <a:solidFill>
+                  <a:srgbClr val="6B7280"/>
+                </a:solidFill>
+              </a:rPr>
+              <a:t>Realtime 주문 추적 완성</a:t>
+            </a:r>
+            <a:endParaRPr lang="en-US" sz="1050" dirty="0"/>
+          </a:p>
+        </p:txBody>
+      </p:sp>
+      <p:sp>
+        <p:nvSpPr>
+          <p:cNvPr id="12" name="Shape 10"/>
+          <p:cNvSpPr/>
+          <p:nvPr/>
+        </p:nvSpPr>
+        <p:spPr>
+          <a:xfrm>
+            <a:off x="4133088" y="2057400"/>
+            <a:ext cx="3749040" cy="1280160"/>
+          </a:xfrm>
+          <a:prstGeom prst="roundRect">
+            <a:avLst>
+              <a:gd name="adj" fmla="val 9286"/>
+            </a:avLst>
+          </a:prstGeom>
+          <a:solidFill>
+            <a:srgbClr val="FFFFFF"/>
+          </a:solidFill>
+          <a:ln w="12700">
+            <a:solidFill>
+              <a:srgbClr val="E9D5FF"/>
+            </a:solidFill>
+            <a:prstDash val="solid"/>
+          </a:ln>
+        </p:spPr>
+      </p:sp>
+      <p:sp>
+        <p:nvSpPr>
+          <p:cNvPr id="13" name="Shape 11"/>
+          <p:cNvSpPr/>
+          <p:nvPr/>
+        </p:nvSpPr>
+        <p:spPr>
+          <a:xfrm>
+            <a:off x="4270248" y="2176272"/>
+            <a:ext cx="3474720" cy="329184"/>
+          </a:xfrm>
+          <a:prstGeom prst="roundRect">
+            <a:avLst>
+              <a:gd name="adj" fmla="val 22222"/>
+            </a:avLst>
+          </a:prstGeom>
+          <a:solidFill>
+            <a:srgbClr val="DCFCE7"/>
+          </a:solidFill>
+          <a:ln w="12700">
+            <a:solidFill>
+              <a:srgbClr val="DCFCE7"/>
+            </a:solidFill>
+            <a:prstDash val="solid"/>
+          </a:ln>
+        </p:spPr>
+      </p:sp>
+      <p:sp>
+        <p:nvSpPr>
+          <p:cNvPr id="14" name="Text 12"/>
+          <p:cNvSpPr/>
+          <p:nvPr/>
+        </p:nvSpPr>
+        <p:spPr>
+          <a:xfrm>
+            <a:off x="4270248" y="2176272"/>
+            <a:ext cx="3474720" cy="329184"/>
+          </a:xfrm>
+          <a:prstGeom prst="rect">
+            <a:avLst/>
+          </a:prstGeom>
+          <a:noFill/>
+          <a:ln/>
+        </p:spPr>
+        <p:txBody>
+          <a:bodyPr wrap="square" rtlCol="0" anchor="ctr"/>
+          <a:lstStyle/>
+          <a:p>
+            <a:pPr algn="ctr" indent="0" marL="0">
+              <a:buNone/>
+            </a:pPr>
+            <a:r>
+              <a:rPr lang="en-US" sz="1200" b="1" dirty="0">
+                <a:solidFill>
+                  <a:srgbClr val="16A34A"/>
+                </a:solidFill>
+              </a:rPr>
+              <a:t>사장님 · 라이더 · 관리자</a:t>
+            </a:r>
+            <a:endParaRPr lang="en-US" sz="1200" dirty="0"/>
+          </a:p>
+        </p:txBody>
+      </p:sp>
+      <p:sp>
+        <p:nvSpPr>
+          <p:cNvPr id="15" name="Text 13"/>
+          <p:cNvSpPr/>
+          <p:nvPr/>
+        </p:nvSpPr>
+        <p:spPr>
+          <a:xfrm>
+            <a:off x="4297680" y="2569464"/>
+            <a:ext cx="3419856" cy="694944"/>
+          </a:xfrm>
+          <a:prstGeom prst="rect">
+            <a:avLst/>
+          </a:prstGeom>
+          <a:noFill/>
+          <a:ln/>
+        </p:spPr>
+        <p:txBody>
+          <a:bodyPr wrap="square" rtlCol="0" anchor="ctr"/>
+          <a:lstStyle/>
+          <a:p>
+            <a:pPr indent="0" marL="0">
+              <a:buNone/>
+            </a:pPr>
+            <a:r>
+              <a:rPr lang="en-US" sz="1050" dirty="0">
+                <a:solidFill>
+                  <a:srgbClr val="6B7280"/>
+                </a:solidFill>
+              </a:rPr>
+              <a:t>사장님 주문/메뉴/정산/통계</a:t>
+            </a:r>
+            <a:endParaRPr lang="en-US" sz="1050" dirty="0"/>
+          </a:p>
+          <a:p>
+            <a:pPr indent="0" marL="0">
+              <a:buNone/>
+            </a:pPr>
+            <a:r>
+              <a:rPr lang="en-US" sz="1050" dirty="0">
+                <a:solidFill>
+                  <a:srgbClr val="6B7280"/>
+                </a:solidFill>
+              </a:rPr>
+              <a:t>라이더 수락/위치공유/수익</a:t>
+            </a:r>
+            <a:endParaRPr lang="en-US" sz="1050" dirty="0"/>
+          </a:p>
+          <a:p>
+            <a:pPr indent="0" marL="0">
+              <a:buNone/>
+            </a:pPr>
+            <a:r>
+              <a:rPr lang="en-US" sz="1050" dirty="0">
+                <a:solidFill>
+                  <a:srgbClr val="6B7280"/>
+                </a:solidFill>
+              </a:rPr>
+              <a:t>관리자 5탭 대시보드</a:t>
+            </a:r>
+            <a:endParaRPr lang="en-US" sz="1050" dirty="0"/>
+          </a:p>
+        </p:txBody>
+      </p:sp>
+      <p:sp>
+        <p:nvSpPr>
+          <p:cNvPr id="16" name="Shape 14"/>
+          <p:cNvSpPr/>
+          <p:nvPr/>
+        </p:nvSpPr>
+        <p:spPr>
+          <a:xfrm>
+            <a:off x="8037576" y="2057400"/>
+            <a:ext cx="3749040" cy="1280160"/>
+          </a:xfrm>
+          <a:prstGeom prst="roundRect">
+            <a:avLst>
+              <a:gd name="adj" fmla="val 9286"/>
+            </a:avLst>
+          </a:prstGeom>
+          <a:solidFill>
+            <a:srgbClr val="FFFFFF"/>
+          </a:solidFill>
+          <a:ln w="12700">
+            <a:solidFill>
+              <a:srgbClr val="E9D5FF"/>
+            </a:solidFill>
+            <a:prstDash val="solid"/>
+          </a:ln>
+        </p:spPr>
+      </p:sp>
+      <p:sp>
+        <p:nvSpPr>
+          <p:cNvPr id="17" name="Shape 15"/>
+          <p:cNvSpPr/>
+          <p:nvPr/>
+        </p:nvSpPr>
+        <p:spPr>
+          <a:xfrm>
+            <a:off x="8174736" y="2176272"/>
+            <a:ext cx="3474720" cy="329184"/>
+          </a:xfrm>
+          <a:prstGeom prst="roundRect">
+            <a:avLst>
+              <a:gd name="adj" fmla="val 22222"/>
+            </a:avLst>
+          </a:prstGeom>
+          <a:solidFill>
+            <a:srgbClr val="DCFCE7"/>
+          </a:solidFill>
+          <a:ln w="12700">
+            <a:solidFill>
+              <a:srgbClr val="DCFCE7"/>
+            </a:solidFill>
+            <a:prstDash val="solid"/>
+          </a:ln>
+        </p:spPr>
+      </p:sp>
+      <p:sp>
+        <p:nvSpPr>
+          <p:cNvPr id="18" name="Text 16"/>
+          <p:cNvSpPr/>
+          <p:nvPr/>
+        </p:nvSpPr>
+        <p:spPr>
+          <a:xfrm>
+            <a:off x="8174736" y="2176272"/>
+            <a:ext cx="3474720" cy="329184"/>
+          </a:xfrm>
+          <a:prstGeom prst="rect">
+            <a:avLst/>
+          </a:prstGeom>
+          <a:noFill/>
+          <a:ln/>
+        </p:spPr>
+        <p:txBody>
+          <a:bodyPr wrap="square" rtlCol="0" anchor="ctr"/>
+          <a:lstStyle/>
+          <a:p>
+            <a:pPr algn="ctr" indent="0" marL="0">
+              <a:buNone/>
+            </a:pPr>
+            <a:r>
+              <a:rPr lang="en-US" sz="1200" b="1" dirty="0">
+                <a:solidFill>
+                  <a:srgbClr val="16A34A"/>
+                </a:solidFill>
+              </a:rPr>
+              <a:t>PWA · 보안 · DB 최적화</a:t>
+            </a:r>
+            <a:endParaRPr lang="en-US" sz="1200" dirty="0"/>
+          </a:p>
+        </p:txBody>
+      </p:sp>
+      <p:sp>
+        <p:nvSpPr>
+          <p:cNvPr id="19" name="Text 17"/>
+          <p:cNvSpPr/>
+          <p:nvPr/>
+        </p:nvSpPr>
+        <p:spPr>
+          <a:xfrm>
+            <a:off x="8202168" y="2569464"/>
+            <a:ext cx="3419856" cy="694944"/>
+          </a:xfrm>
+          <a:prstGeom prst="rect">
+            <a:avLst/>
+          </a:prstGeom>
+          <a:noFill/>
+          <a:ln/>
+        </p:spPr>
+        <p:txBody>
+          <a:bodyPr wrap="square" rtlCol="0" anchor="ctr"/>
+          <a:lstStyle/>
+          <a:p>
+            <a:pPr indent="0" marL="0">
+              <a:buNone/>
+            </a:pPr>
+            <a:r>
+              <a:rPr lang="en-US" sz="1050" dirty="0">
+                <a:solidFill>
+                  <a:srgbClr val="6B7280"/>
+                </a:solidFill>
+              </a:rPr>
+              <a:t>Serwist 오프라인 캐싱</a:t>
+            </a:r>
+            <a:endParaRPr lang="en-US" sz="1050" dirty="0"/>
+          </a:p>
+          <a:p>
+            <a:pPr indent="0" marL="0">
+              <a:buNone/>
+            </a:pPr>
+            <a:r>
+              <a:rPr lang="en-US" sz="1050" dirty="0">
+                <a:solidFill>
+                  <a:srgbClr val="6B7280"/>
+                </a:solidFill>
+              </a:rPr>
+              <a:t>RLS + 인덱스 30개+ + FCM 푸시</a:t>
+            </a:r>
+            <a:endParaRPr lang="en-US" sz="1050" dirty="0"/>
+          </a:p>
+          <a:p>
+            <a:pPr indent="0" marL="0">
+              <a:buNone/>
+            </a:pPr>
+            <a:r>
+              <a:rPr lang="en-US" sz="1050" dirty="0">
+                <a:solidFill>
+                  <a:srgbClr val="6B7280"/>
+                </a:solidFill>
+              </a:rPr>
+              <a:t>Sentry + Storage 정책 완성</a:t>
+            </a:r>
+            <a:endParaRPr lang="en-US" sz="1050" dirty="0"/>
+          </a:p>
+        </p:txBody>
+      </p:sp>
+      <p:sp>
+        <p:nvSpPr>
+          <p:cNvPr id="20" name="Shape 18"/>
+          <p:cNvSpPr/>
+          <p:nvPr/>
+        </p:nvSpPr>
+        <p:spPr>
+          <a:xfrm>
+            <a:off x="365760" y="3429000"/>
+            <a:ext cx="1325880" cy="384048"/>
+          </a:xfrm>
+          <a:prstGeom prst="roundRect">
+            <a:avLst>
+              <a:gd name="adj" fmla="val 23810"/>
+            </a:avLst>
+          </a:prstGeom>
+          <a:solidFill>
+            <a:srgbClr val="FFFBEB"/>
+          </a:solidFill>
+          <a:ln w="12700">
+            <a:solidFill>
+              <a:srgbClr val="D97706"/>
+            </a:solidFill>
+            <a:prstDash val="solid"/>
+          </a:ln>
+        </p:spPr>
+      </p:sp>
+      <p:sp>
+        <p:nvSpPr>
+          <p:cNvPr id="21" name="Text 19"/>
+          <p:cNvSpPr/>
+          <p:nvPr/>
+        </p:nvSpPr>
+        <p:spPr>
+          <a:xfrm>
+            <a:off x="365760" y="3429000"/>
+            <a:ext cx="1325880" cy="384048"/>
+          </a:xfrm>
+          <a:prstGeom prst="rect">
+            <a:avLst/>
+          </a:prstGeom>
+          <a:noFill/>
+          <a:ln/>
+        </p:spPr>
+        <p:txBody>
+          <a:bodyPr wrap="square" rtlCol="0" anchor="ctr"/>
+          <a:lstStyle/>
+          <a:p>
+            <a:pPr algn="ctr" indent="0" marL="0">
+              <a:buNone/>
+            </a:pPr>
+            <a:r>
+              <a:rPr lang="en-US" sz="1100" b="1" dirty="0">
+                <a:solidFill>
+                  <a:srgbClr val="D97706"/>
+                </a:solidFill>
+              </a:rPr>
+              <a:t>🟡 런칭 준비</a:t>
+            </a:r>
+            <a:endParaRPr lang="en-US" sz="1100" dirty="0"/>
+          </a:p>
+        </p:txBody>
+      </p:sp>
+      <p:sp>
+        <p:nvSpPr>
+          <p:cNvPr id="22" name="Shape 20"/>
+          <p:cNvSpPr/>
+          <p:nvPr/>
+        </p:nvSpPr>
+        <p:spPr>
+          <a:xfrm>
+            <a:off x="228600" y="3886200"/>
+            <a:ext cx="3749040" cy="1280160"/>
+          </a:xfrm>
+          <a:prstGeom prst="roundRect">
+            <a:avLst>
+              <a:gd name="adj" fmla="val 9286"/>
+            </a:avLst>
+          </a:prstGeom>
+          <a:solidFill>
+            <a:srgbClr val="FFFFFF"/>
+          </a:solidFill>
+          <a:ln w="12700">
+            <a:solidFill>
+              <a:srgbClr val="E9D5FF"/>
+            </a:solidFill>
+            <a:prstDash val="solid"/>
+          </a:ln>
+        </p:spPr>
+      </p:sp>
+      <p:sp>
+        <p:nvSpPr>
+          <p:cNvPr id="23" name="Shape 21"/>
+          <p:cNvSpPr/>
+          <p:nvPr/>
+        </p:nvSpPr>
+        <p:spPr>
+          <a:xfrm>
+            <a:off x="365760" y="4005072"/>
+            <a:ext cx="3474720" cy="329184"/>
+          </a:xfrm>
+          <a:prstGeom prst="roundRect">
+            <a:avLst>
+              <a:gd name="adj" fmla="val 22222"/>
+            </a:avLst>
+          </a:prstGeom>
+          <a:solidFill>
+            <a:srgbClr val="FFFBEB"/>
+          </a:solidFill>
+          <a:ln w="12700">
+            <a:solidFill>
+              <a:srgbClr val="FFFBEB"/>
+            </a:solidFill>
+            <a:prstDash val="solid"/>
+          </a:ln>
+        </p:spPr>
+      </p:sp>
+      <p:sp>
+        <p:nvSpPr>
+          <p:cNvPr id="24" name="Text 22"/>
+          <p:cNvSpPr/>
+          <p:nvPr/>
+        </p:nvSpPr>
+        <p:spPr>
+          <a:xfrm>
+            <a:off x="365760" y="4005072"/>
+            <a:ext cx="3474720" cy="329184"/>
+          </a:xfrm>
+          <a:prstGeom prst="rect">
+            <a:avLst/>
+          </a:prstGeom>
+          <a:noFill/>
+          <a:ln/>
+        </p:spPr>
+        <p:txBody>
+          <a:bodyPr wrap="square" rtlCol="0" anchor="ctr"/>
+          <a:lstStyle/>
+          <a:p>
+            <a:pPr algn="ctr" indent="0" marL="0">
+              <a:buNone/>
+            </a:pPr>
+            <a:r>
+              <a:rPr lang="en-US" sz="1200" b="1" dirty="0">
+                <a:solidFill>
+                  <a:srgbClr val="D97706"/>
+                </a:solidFill>
+              </a:rPr>
+              <a:t>Firebase 환경변수 ✅</a:t>
+            </a:r>
+            <a:endParaRPr lang="en-US" sz="1200" dirty="0"/>
+          </a:p>
+        </p:txBody>
+      </p:sp>
+      <p:sp>
+        <p:nvSpPr>
+          <p:cNvPr id="25" name="Text 23"/>
+          <p:cNvSpPr/>
+          <p:nvPr/>
+        </p:nvSpPr>
+        <p:spPr>
+          <a:xfrm>
+            <a:off x="393192" y="4398264"/>
+            <a:ext cx="3419856" cy="694944"/>
+          </a:xfrm>
+          <a:prstGeom prst="rect">
+            <a:avLst/>
+          </a:prstGeom>
+          <a:noFill/>
+          <a:ln/>
+        </p:spPr>
+        <p:txBody>
+          <a:bodyPr wrap="square" rtlCol="0" anchor="ctr"/>
+          <a:lstStyle/>
+          <a:p>
+            <a:pPr indent="0" marL="0">
+              <a:buNone/>
+            </a:pPr>
+            <a:r>
+              <a:rPr lang="en-US" sz="1050" dirty="0">
+                <a:solidFill>
+                  <a:srgbClr val="6B7280"/>
+                </a:solidFill>
+              </a:rPr>
+              <a:t>API Key ~ App ID 완성</a:t>
+            </a:r>
+            <a:endParaRPr lang="en-US" sz="1050" dirty="0"/>
+          </a:p>
+          <a:p>
+            <a:pPr indent="0" marL="0">
+              <a:buNone/>
+            </a:pPr>
+            <a:r>
+              <a:rPr lang="en-US" sz="1050" dirty="0">
+                <a:solidFill>
+                  <a:srgbClr val="6B7280"/>
+                </a:solidFill>
+              </a:rPr>
+              <a:t>VAPID 키 완성</a:t>
+            </a:r>
+            <a:endParaRPr lang="en-US" sz="1050" dirty="0"/>
+          </a:p>
+          <a:p>
+            <a:pPr indent="0" marL="0">
+              <a:buNone/>
+            </a:pPr>
+            <a:r>
+              <a:rPr lang="en-US" sz="1050" dirty="0">
+                <a:solidFill>
+                  <a:srgbClr val="6B7280"/>
+                </a:solidFill>
+              </a:rPr>
+              <a:t>Admin SDK JSON 완성</a:t>
+            </a:r>
+            <a:endParaRPr lang="en-US" sz="1050" dirty="0"/>
+          </a:p>
+        </p:txBody>
+      </p:sp>
+      <p:sp>
+        <p:nvSpPr>
+          <p:cNvPr id="26" name="Shape 24"/>
+          <p:cNvSpPr/>
+          <p:nvPr/>
+        </p:nvSpPr>
+        <p:spPr>
+          <a:xfrm>
+            <a:off x="4133088" y="3886200"/>
+            <a:ext cx="3749040" cy="1280160"/>
+          </a:xfrm>
+          <a:prstGeom prst="roundRect">
+            <a:avLst>
+              <a:gd name="adj" fmla="val 9286"/>
+            </a:avLst>
+          </a:prstGeom>
+          <a:solidFill>
+            <a:srgbClr val="FFFFFF"/>
+          </a:solidFill>
+          <a:ln w="12700">
+            <a:solidFill>
+              <a:srgbClr val="E9D5FF"/>
+            </a:solidFill>
+            <a:prstDash val="solid"/>
+          </a:ln>
+        </p:spPr>
+      </p:sp>
+      <p:sp>
+        <p:nvSpPr>
+          <p:cNvPr id="27" name="Shape 25"/>
+          <p:cNvSpPr/>
+          <p:nvPr/>
+        </p:nvSpPr>
+        <p:spPr>
+          <a:xfrm>
+            <a:off x="4270248" y="4005072"/>
+            <a:ext cx="3474720" cy="329184"/>
+          </a:xfrm>
+          <a:prstGeom prst="roundRect">
+            <a:avLst>
+              <a:gd name="adj" fmla="val 22222"/>
+            </a:avLst>
+          </a:prstGeom>
+          <a:solidFill>
+            <a:srgbClr val="FFFBEB"/>
+          </a:solidFill>
+          <a:ln w="12700">
+            <a:solidFill>
+              <a:srgbClr val="FFFBEB"/>
+            </a:solidFill>
+            <a:prstDash val="solid"/>
+          </a:ln>
+        </p:spPr>
+      </p:sp>
+      <p:sp>
+        <p:nvSpPr>
+          <p:cNvPr id="28" name="Text 26"/>
+          <p:cNvSpPr/>
+          <p:nvPr/>
+        </p:nvSpPr>
+        <p:spPr>
+          <a:xfrm>
+            <a:off x="4270248" y="4005072"/>
+            <a:ext cx="3474720" cy="329184"/>
+          </a:xfrm>
+          <a:prstGeom prst="rect">
+            <a:avLst/>
+          </a:prstGeom>
+          <a:noFill/>
+          <a:ln/>
+        </p:spPr>
+        <p:txBody>
+          <a:bodyPr wrap="square" rtlCol="0" anchor="ctr"/>
+          <a:lstStyle/>
+          <a:p>
+            <a:pPr algn="ctr" indent="0" marL="0">
+              <a:buNone/>
+            </a:pPr>
+            <a:r>
+              <a:rPr lang="en-US" sz="1200" b="1" dirty="0">
+                <a:solidFill>
+                  <a:srgbClr val="D97706"/>
+                </a:solidFill>
+              </a:rPr>
+              <a:t>카카오 API 키 확인</a:t>
+            </a:r>
+            <a:endParaRPr lang="en-US" sz="1200" dirty="0"/>
+          </a:p>
+        </p:txBody>
+      </p:sp>
+      <p:sp>
+        <p:nvSpPr>
+          <p:cNvPr id="29" name="Text 27"/>
+          <p:cNvSpPr/>
+          <p:nvPr/>
+        </p:nvSpPr>
+        <p:spPr>
+          <a:xfrm>
+            <a:off x="4297680" y="4398264"/>
+            <a:ext cx="3419856" cy="694944"/>
+          </a:xfrm>
+          <a:prstGeom prst="rect">
+            <a:avLst/>
+          </a:prstGeom>
+          <a:noFill/>
+          <a:ln/>
+        </p:spPr>
+        <p:txBody>
+          <a:bodyPr wrap="square" rtlCol="0" anchor="ctr"/>
+          <a:lstStyle/>
+          <a:p>
+            <a:pPr indent="0" marL="0">
+              <a:buNone/>
+            </a:pPr>
+            <a:r>
+              <a:rPr lang="en-US" sz="1050" dirty="0">
+                <a:solidFill>
+                  <a:srgbClr val="6B7280"/>
+                </a:solidFill>
+              </a:rPr>
+              <a:t>앱 키 → JavaScript 키 재확인</a:t>
+            </a:r>
+            <a:endParaRPr lang="en-US" sz="1050" dirty="0"/>
+          </a:p>
+          <a:p>
+            <a:pPr indent="0" marL="0">
+              <a:buNone/>
+            </a:pPr>
+            <a:r>
+              <a:rPr lang="en-US" sz="1050" dirty="0">
+                <a:solidFill>
+                  <a:srgbClr val="6B7280"/>
+                </a:solidFill>
+              </a:rPr>
+              <a:t>NEXT_PUBLIC_KAKAO_MAP_KEY 검증</a:t>
+            </a:r>
+            <a:endParaRPr lang="en-US" sz="1050" dirty="0"/>
+          </a:p>
+          <a:p>
+            <a:pPr indent="0" marL="0">
+              <a:buNone/>
+            </a:pPr>
+            <a:r>
+              <a:rPr lang="en-US" sz="1050" dirty="0">
+                <a:solidFill>
+                  <a:srgbClr val="6B7280"/>
+                </a:solidFill>
+              </a:rPr>
+              <a:t>Kakao Map 지도 표시 테스트</a:t>
+            </a:r>
+            <a:endParaRPr lang="en-US" sz="1050" dirty="0"/>
+          </a:p>
+        </p:txBody>
+      </p:sp>
+      <p:sp>
+        <p:nvSpPr>
+          <p:cNvPr id="30" name="Shape 28"/>
+          <p:cNvSpPr/>
+          <p:nvPr/>
+        </p:nvSpPr>
+        <p:spPr>
+          <a:xfrm>
+            <a:off x="8037576" y="3886200"/>
+            <a:ext cx="3749040" cy="1280160"/>
+          </a:xfrm>
+          <a:prstGeom prst="roundRect">
+            <a:avLst>
+              <a:gd name="adj" fmla="val 9286"/>
+            </a:avLst>
+          </a:prstGeom>
+          <a:solidFill>
+            <a:srgbClr val="FFFFFF"/>
+          </a:solidFill>
+          <a:ln w="12700">
+            <a:solidFill>
+              <a:srgbClr val="E9D5FF"/>
+            </a:solidFill>
+            <a:prstDash val="solid"/>
+          </a:ln>
+        </p:spPr>
+      </p:sp>
+      <p:sp>
+        <p:nvSpPr>
+          <p:cNvPr id="31" name="Shape 29"/>
+          <p:cNvSpPr/>
+          <p:nvPr/>
+        </p:nvSpPr>
+        <p:spPr>
+          <a:xfrm>
+            <a:off x="8174736" y="4005072"/>
+            <a:ext cx="3474720" cy="329184"/>
+          </a:xfrm>
+          <a:prstGeom prst="roundRect">
+            <a:avLst>
+              <a:gd name="adj" fmla="val 22222"/>
+            </a:avLst>
+          </a:prstGeom>
+          <a:solidFill>
+            <a:srgbClr val="FFFBEB"/>
+          </a:solidFill>
+          <a:ln w="12700">
+            <a:solidFill>
+              <a:srgbClr val="FFFBEB"/>
+            </a:solidFill>
+            <a:prstDash val="solid"/>
+          </a:ln>
+        </p:spPr>
+      </p:sp>
+      <p:sp>
+        <p:nvSpPr>
+          <p:cNvPr id="32" name="Text 30"/>
+          <p:cNvSpPr/>
+          <p:nvPr/>
+        </p:nvSpPr>
+        <p:spPr>
+          <a:xfrm>
+            <a:off x="8174736" y="4005072"/>
+            <a:ext cx="3474720" cy="329184"/>
+          </a:xfrm>
+          <a:prstGeom prst="rect">
+            <a:avLst/>
+          </a:prstGeom>
+          <a:noFill/>
+          <a:ln/>
+        </p:spPr>
+        <p:txBody>
+          <a:bodyPr wrap="square" rtlCol="0" anchor="ctr"/>
+          <a:lstStyle/>
+          <a:p>
+            <a:pPr algn="ctr" indent="0" marL="0">
+              <a:buNone/>
+            </a:pPr>
+            <a:r>
+              <a:rPr lang="en-US" sz="1200" b="1" dirty="0">
+                <a:solidFill>
+                  <a:srgbClr val="D97706"/>
+                </a:solidFill>
+              </a:rPr>
+              <a:t>샘플 데이터 + 배포</a:t>
+            </a:r>
+            <a:endParaRPr lang="en-US" sz="1200" dirty="0"/>
+          </a:p>
+        </p:txBody>
+      </p:sp>
+      <p:sp>
+        <p:nvSpPr>
+          <p:cNvPr id="33" name="Text 31"/>
+          <p:cNvSpPr/>
+          <p:nvPr/>
+        </p:nvSpPr>
+        <p:spPr>
+          <a:xfrm>
+            <a:off x="8202168" y="4398264"/>
+            <a:ext cx="3419856" cy="694944"/>
+          </a:xfrm>
+          <a:prstGeom prst="rect">
+            <a:avLst/>
+          </a:prstGeom>
+          <a:noFill/>
+          <a:ln/>
+        </p:spPr>
+        <p:txBody>
+          <a:bodyPr wrap="square" rtlCol="0" anchor="ctr"/>
+          <a:lstStyle/>
+          <a:p>
+            <a:pPr indent="0" marL="0">
+              <a:buNone/>
+            </a:pPr>
+            <a:r>
+              <a:rPr lang="en-US" sz="1050" dirty="0">
+                <a:solidFill>
+                  <a:srgbClr val="6B7280"/>
+                </a:solidFill>
+              </a:rPr>
+              <a:t>실 가맹점 + 메뉴 데이터 추가</a:t>
+            </a:r>
+            <a:endParaRPr lang="en-US" sz="1050" dirty="0"/>
+          </a:p>
+          <a:p>
+            <a:pPr indent="0" marL="0">
+              <a:buNone/>
+            </a:pPr>
+            <a:r>
+              <a:rPr lang="en-US" sz="1050" dirty="0">
+                <a:solidFill>
+                  <a:srgbClr val="6B7280"/>
+                </a:solidFill>
+              </a:rPr>
+              <a:t>관리자 계정 role='admin' 설정</a:t>
+            </a:r>
+            <a:endParaRPr lang="en-US" sz="1050" dirty="0"/>
+          </a:p>
+          <a:p>
+            <a:pPr indent="0" marL="0">
+              <a:buNone/>
+            </a:pPr>
+            <a:r>
+              <a:rPr lang="en-US" sz="1050" dirty="0">
+                <a:solidFill>
+                  <a:srgbClr val="6B7280"/>
+                </a:solidFill>
+              </a:rPr>
+              <a:t>Vercel 프로덕션 배포 확인</a:t>
+            </a:r>
+            <a:endParaRPr lang="en-US" sz="1050" dirty="0"/>
+          </a:p>
+        </p:txBody>
+      </p:sp>
+      <p:sp>
+        <p:nvSpPr>
+          <p:cNvPr id="34" name="Shape 32"/>
+          <p:cNvSpPr/>
+          <p:nvPr/>
+        </p:nvSpPr>
+        <p:spPr>
+          <a:xfrm>
+            <a:off x="365760" y="5257800"/>
+            <a:ext cx="1325880" cy="384048"/>
+          </a:xfrm>
+          <a:prstGeom prst="roundRect">
+            <a:avLst>
+              <a:gd name="adj" fmla="val 23810"/>
+            </a:avLst>
+          </a:prstGeom>
+          <a:solidFill>
+            <a:srgbClr val="FFEDD5"/>
+          </a:solidFill>
+          <a:ln w="12700">
+            <a:solidFill>
+              <a:srgbClr val="EA580C"/>
+            </a:solidFill>
+            <a:prstDash val="solid"/>
+          </a:ln>
+        </p:spPr>
+      </p:sp>
+      <p:sp>
+        <p:nvSpPr>
+          <p:cNvPr id="35" name="Text 33"/>
+          <p:cNvSpPr/>
+          <p:nvPr/>
+        </p:nvSpPr>
+        <p:spPr>
+          <a:xfrm>
+            <a:off x="365760" y="5257800"/>
+            <a:ext cx="1325880" cy="384048"/>
+          </a:xfrm>
+          <a:prstGeom prst="rect">
+            <a:avLst/>
+          </a:prstGeom>
+          <a:noFill/>
+          <a:ln/>
+        </p:spPr>
+        <p:txBody>
+          <a:bodyPr wrap="square" rtlCol="0" anchor="ctr"/>
+          <a:lstStyle/>
+          <a:p>
+            <a:pPr algn="ctr" indent="0" marL="0">
+              <a:buNone/>
+            </a:pPr>
+            <a:r>
+              <a:rPr lang="en-US" sz="1100" b="1" dirty="0">
+                <a:solidFill>
+                  <a:srgbClr val="EA580C"/>
+                </a:solidFill>
+              </a:rPr>
+              <a:t>⏳ Phase 4</a:t>
+            </a:r>
+            <a:endParaRPr lang="en-US" sz="1100" dirty="0"/>
+          </a:p>
+        </p:txBody>
+      </p:sp>
+      <p:sp>
+        <p:nvSpPr>
+          <p:cNvPr id="36" name="Shape 34"/>
+          <p:cNvSpPr/>
+          <p:nvPr/>
+        </p:nvSpPr>
+        <p:spPr>
+          <a:xfrm>
+            <a:off x="228600" y="5715000"/>
+            <a:ext cx="3749040" cy="1280160"/>
+          </a:xfrm>
+          <a:prstGeom prst="roundRect">
+            <a:avLst>
+              <a:gd name="adj" fmla="val 9286"/>
+            </a:avLst>
+          </a:prstGeom>
+          <a:solidFill>
+            <a:srgbClr val="FFFFFF"/>
+          </a:solidFill>
+          <a:ln w="12700">
+            <a:solidFill>
+              <a:srgbClr val="E9D5FF"/>
+            </a:solidFill>
+            <a:prstDash val="solid"/>
+          </a:ln>
+        </p:spPr>
+      </p:sp>
+      <p:sp>
+        <p:nvSpPr>
+          <p:cNvPr id="37" name="Shape 35"/>
+          <p:cNvSpPr/>
+          <p:nvPr/>
+        </p:nvSpPr>
+        <p:spPr>
+          <a:xfrm>
+            <a:off x="365760" y="5833872"/>
+            <a:ext cx="3474720" cy="329184"/>
+          </a:xfrm>
+          <a:prstGeom prst="roundRect">
+            <a:avLst>
+              <a:gd name="adj" fmla="val 22222"/>
+            </a:avLst>
+          </a:prstGeom>
+          <a:solidFill>
+            <a:srgbClr val="FFEDD5"/>
+          </a:solidFill>
+          <a:ln w="12700">
+            <a:solidFill>
+              <a:srgbClr val="FFEDD5"/>
+            </a:solidFill>
+            <a:prstDash val="solid"/>
+          </a:ln>
+        </p:spPr>
+      </p:sp>
+      <p:sp>
+        <p:nvSpPr>
+          <p:cNvPr id="38" name="Text 36"/>
+          <p:cNvSpPr/>
+          <p:nvPr/>
+        </p:nvSpPr>
+        <p:spPr>
+          <a:xfrm>
+            <a:off x="365760" y="5833872"/>
+            <a:ext cx="3474720" cy="329184"/>
+          </a:xfrm>
+          <a:prstGeom prst="rect">
+            <a:avLst/>
+          </a:prstGeom>
+          <a:noFill/>
+          <a:ln/>
+        </p:spPr>
+        <p:txBody>
+          <a:bodyPr wrap="square" rtlCol="0" anchor="ctr"/>
+          <a:lstStyle/>
+          <a:p>
+            <a:pPr algn="ctr" indent="0" marL="0">
+              <a:buNone/>
+            </a:pPr>
+            <a:r>
+              <a:rPr lang="en-US" sz="1200" b="1" dirty="0">
+                <a:solidFill>
+                  <a:srgbClr val="EA580C"/>
+                </a:solidFill>
+              </a:rPr>
+              <a:t>Pi Network SDK 인증</a:t>
+            </a:r>
+            <a:endParaRPr lang="en-US" sz="1200" dirty="0"/>
+          </a:p>
+        </p:txBody>
+      </p:sp>
+      <p:sp>
+        <p:nvSpPr>
+          <p:cNvPr id="39" name="Text 37"/>
+          <p:cNvSpPr/>
+          <p:nvPr/>
+        </p:nvSpPr>
+        <p:spPr>
+          <a:xfrm>
+            <a:off x="393192" y="6227064"/>
+            <a:ext cx="3419856" cy="694944"/>
+          </a:xfrm>
+          <a:prstGeom prst="rect">
+            <a:avLst/>
+          </a:prstGeom>
+          <a:noFill/>
+          <a:ln/>
+        </p:spPr>
+        <p:txBody>
+          <a:bodyPr wrap="square" rtlCol="0" anchor="ctr"/>
+          <a:lstStyle/>
+          <a:p>
+            <a:pPr indent="0" marL="0">
+              <a:buNone/>
+            </a:pPr>
+            <a:r>
+              <a:rPr lang="en-US" sz="1050" dirty="0">
+                <a:solidFill>
+                  <a:srgbClr val="6B7280"/>
+                </a:solidFill>
+              </a:rPr>
+              <a:t>Pi SDK 연동 (Mainnet 개방 후)</a:t>
+            </a:r>
+            <a:endParaRPr lang="en-US" sz="1050" dirty="0"/>
+          </a:p>
+          <a:p>
+            <a:pPr indent="0" marL="0">
+              <a:buNone/>
+            </a:pPr>
+            <a:r>
+              <a:rPr lang="en-US" sz="1050" dirty="0">
+                <a:solidFill>
+                  <a:srgbClr val="6B7280"/>
+                </a:solidFill>
+              </a:rPr>
+              <a:t>pi_uid / pi_username 필드 활성화</a:t>
+            </a:r>
+            <a:endParaRPr lang="en-US" sz="1050" dirty="0"/>
+          </a:p>
+          <a:p>
+            <a:pPr indent="0" marL="0">
+              <a:buNone/>
+            </a:pPr>
+            <a:r>
+              <a:rPr lang="en-US" sz="1050" dirty="0">
+                <a:solidFill>
+                  <a:srgbClr val="6B7280"/>
+                </a:solidFill>
+              </a:rPr>
+              <a:t>Pi 기반 로그인 플로우</a:t>
+            </a:r>
+            <a:endParaRPr lang="en-US" sz="1050" dirty="0"/>
+          </a:p>
+        </p:txBody>
+      </p:sp>
+      <p:sp>
+        <p:nvSpPr>
+          <p:cNvPr id="40" name="Shape 38"/>
+          <p:cNvSpPr/>
+          <p:nvPr/>
+        </p:nvSpPr>
+        <p:spPr>
+          <a:xfrm>
+            <a:off x="4133088" y="5715000"/>
+            <a:ext cx="3749040" cy="1280160"/>
+          </a:xfrm>
+          <a:prstGeom prst="roundRect">
+            <a:avLst>
+              <a:gd name="adj" fmla="val 9286"/>
+            </a:avLst>
+          </a:prstGeom>
+          <a:solidFill>
+            <a:srgbClr val="FFFFFF"/>
+          </a:solidFill>
+          <a:ln w="12700">
+            <a:solidFill>
+              <a:srgbClr val="E9D5FF"/>
+            </a:solidFill>
+            <a:prstDash val="solid"/>
+          </a:ln>
+        </p:spPr>
+      </p:sp>
+      <p:sp>
+        <p:nvSpPr>
+          <p:cNvPr id="41" name="Shape 39"/>
+          <p:cNvSpPr/>
+          <p:nvPr/>
+        </p:nvSpPr>
+        <p:spPr>
+          <a:xfrm>
+            <a:off x="4270248" y="5833872"/>
+            <a:ext cx="3474720" cy="329184"/>
+          </a:xfrm>
+          <a:prstGeom prst="roundRect">
+            <a:avLst>
+              <a:gd name="adj" fmla="val 22222"/>
+            </a:avLst>
+          </a:prstGeom>
+          <a:solidFill>
+            <a:srgbClr val="FFEDD5"/>
+          </a:solidFill>
+          <a:ln w="12700">
+            <a:solidFill>
+              <a:srgbClr val="FFEDD5"/>
+            </a:solidFill>
+            <a:prstDash val="solid"/>
+          </a:ln>
+        </p:spPr>
+      </p:sp>
+      <p:sp>
+        <p:nvSpPr>
+          <p:cNvPr id="42" name="Text 40"/>
+          <p:cNvSpPr/>
+          <p:nvPr/>
+        </p:nvSpPr>
+        <p:spPr>
+          <a:xfrm>
+            <a:off x="4270248" y="5833872"/>
+            <a:ext cx="3474720" cy="329184"/>
+          </a:xfrm>
+          <a:prstGeom prst="rect">
+            <a:avLst/>
+          </a:prstGeom>
+          <a:noFill/>
+          <a:ln/>
+        </p:spPr>
+        <p:txBody>
+          <a:bodyPr wrap="square" rtlCol="0" anchor="ctr"/>
+          <a:lstStyle/>
+          <a:p>
+            <a:pPr algn="ctr" indent="0" marL="0">
+              <a:buNone/>
+            </a:pPr>
+            <a:r>
+              <a:rPr lang="en-US" sz="1200" b="1" dirty="0">
+                <a:solidFill>
+                  <a:srgbClr val="EA580C"/>
+                </a:solidFill>
+              </a:rPr>
+              <a:t>Pi 코인 결제 연동</a:t>
+            </a:r>
+            <a:endParaRPr lang="en-US" sz="1200" dirty="0"/>
+          </a:p>
+        </p:txBody>
+      </p:sp>
+      <p:sp>
+        <p:nvSpPr>
+          <p:cNvPr id="43" name="Text 41"/>
+          <p:cNvSpPr/>
+          <p:nvPr/>
+        </p:nvSpPr>
+        <p:spPr>
+          <a:xfrm>
+            <a:off x="4297680" y="6227064"/>
+            <a:ext cx="3419856" cy="694944"/>
+          </a:xfrm>
+          <a:prstGeom prst="rect">
+            <a:avLst/>
+          </a:prstGeom>
+          <a:noFill/>
+          <a:ln/>
+        </p:spPr>
+        <p:txBody>
+          <a:bodyPr wrap="square" rtlCol="0" anchor="ctr"/>
+          <a:lstStyle/>
+          <a:p>
+            <a:pPr indent="0" marL="0">
+              <a:buNone/>
+            </a:pPr>
+            <a:r>
+              <a:rPr lang="en-US" sz="1050" dirty="0">
+                <a:solidFill>
+                  <a:srgbClr val="6B7280"/>
+                </a:solidFill>
+              </a:rPr>
+              <a:t>Pi 결제 API 연동</a:t>
+            </a:r>
+            <a:endParaRPr lang="en-US" sz="1050" dirty="0"/>
+          </a:p>
+          <a:p>
+            <a:pPr indent="0" marL="0">
+              <a:buNone/>
+            </a:pPr>
+            <a:r>
+              <a:rPr lang="en-US" sz="1050" dirty="0">
+                <a:solidFill>
+                  <a:srgbClr val="6B7280"/>
+                </a:solidFill>
+              </a:rPr>
+              <a:t>PICK ↔ Pi 토큰 전환</a:t>
+            </a:r>
+            <a:endParaRPr lang="en-US" sz="1050" dirty="0"/>
+          </a:p>
+          <a:p>
+            <a:pPr indent="0" marL="0">
+              <a:buNone/>
+            </a:pPr>
+            <a:r>
+              <a:rPr lang="en-US" sz="1050" dirty="0">
+                <a:solidFill>
+                  <a:srgbClr val="6B7280"/>
+                </a:solidFill>
+              </a:rPr>
+              <a:t>Pi 기반 정산 시스템</a:t>
+            </a:r>
+            <a:endParaRPr lang="en-US" sz="1050" dirty="0"/>
+          </a:p>
+        </p:txBody>
+      </p:sp>
+      <p:sp>
+        <p:nvSpPr>
+          <p:cNvPr id="44" name="Shape 42"/>
+          <p:cNvSpPr/>
+          <p:nvPr/>
+        </p:nvSpPr>
+        <p:spPr>
+          <a:xfrm>
+            <a:off x="8037576" y="5715000"/>
+            <a:ext cx="3749040" cy="1280160"/>
+          </a:xfrm>
+          <a:prstGeom prst="roundRect">
+            <a:avLst>
+              <a:gd name="adj" fmla="val 9286"/>
+            </a:avLst>
+          </a:prstGeom>
+          <a:solidFill>
+            <a:srgbClr val="FFFFFF"/>
+          </a:solidFill>
+          <a:ln w="12700">
+            <a:solidFill>
+              <a:srgbClr val="E9D5FF"/>
+            </a:solidFill>
+            <a:prstDash val="solid"/>
+          </a:ln>
+        </p:spPr>
+      </p:sp>
+      <p:sp>
+        <p:nvSpPr>
+          <p:cNvPr id="45" name="Shape 43"/>
+          <p:cNvSpPr/>
+          <p:nvPr/>
+        </p:nvSpPr>
+        <p:spPr>
+          <a:xfrm>
+            <a:off x="8174736" y="5833872"/>
+            <a:ext cx="3474720" cy="329184"/>
+          </a:xfrm>
+          <a:prstGeom prst="roundRect">
+            <a:avLst>
+              <a:gd name="adj" fmla="val 22222"/>
+            </a:avLst>
+          </a:prstGeom>
+          <a:solidFill>
+            <a:srgbClr val="FFEDD5"/>
+          </a:solidFill>
+          <a:ln w="12700">
+            <a:solidFill>
+              <a:srgbClr val="FFEDD5"/>
+            </a:solidFill>
+            <a:prstDash val="solid"/>
+          </a:ln>
+        </p:spPr>
+      </p:sp>
+      <p:sp>
+        <p:nvSpPr>
+          <p:cNvPr id="46" name="Text 44"/>
+          <p:cNvSpPr/>
+          <p:nvPr/>
+        </p:nvSpPr>
+        <p:spPr>
+          <a:xfrm>
+            <a:off x="8174736" y="5833872"/>
+            <a:ext cx="3474720" cy="329184"/>
+          </a:xfrm>
+          <a:prstGeom prst="rect">
+            <a:avLst/>
+          </a:prstGeom>
+          <a:noFill/>
+          <a:ln/>
+        </p:spPr>
+        <p:txBody>
+          <a:bodyPr wrap="square" rtlCol="0" anchor="ctr"/>
+          <a:lstStyle/>
+          <a:p>
+            <a:pPr algn="ctr" indent="0" marL="0">
+              <a:buNone/>
+            </a:pPr>
+            <a:r>
+              <a:rPr lang="en-US" sz="1200" b="1" dirty="0">
+                <a:solidFill>
+                  <a:srgbClr val="EA580C"/>
+                </a:solidFill>
+              </a:rPr>
+              <a:t>Pi 생태계 확장</a:t>
+            </a:r>
+            <a:endParaRPr lang="en-US" sz="1200" dirty="0"/>
+          </a:p>
+        </p:txBody>
+      </p:sp>
+      <p:sp>
+        <p:nvSpPr>
+          <p:cNvPr id="47" name="Text 45"/>
+          <p:cNvSpPr/>
+          <p:nvPr/>
+        </p:nvSpPr>
+        <p:spPr>
+          <a:xfrm>
+            <a:off x="8202168" y="6227064"/>
+            <a:ext cx="3419856" cy="694944"/>
+          </a:xfrm>
+          <a:prstGeom prst="rect">
+            <a:avLst/>
+          </a:prstGeom>
+          <a:noFill/>
+          <a:ln/>
+        </p:spPr>
+        <p:txBody>
+          <a:bodyPr wrap="square" rtlCol="0" anchor="ctr"/>
+          <a:lstStyle/>
+          <a:p>
+            <a:pPr indent="0" marL="0">
+              <a:buNone/>
+            </a:pPr>
+            <a:r>
+              <a:rPr lang="en-US" sz="1050" dirty="0">
+                <a:solidFill>
+                  <a:srgbClr val="6B7280"/>
+                </a:solidFill>
+              </a:rPr>
+              <a:t>Pi 마이닝 연동 혜택</a:t>
+            </a:r>
+            <a:endParaRPr lang="en-US" sz="1050" dirty="0"/>
+          </a:p>
+          <a:p>
+            <a:pPr indent="0" marL="0">
+              <a:buNone/>
+            </a:pPr>
+            <a:r>
+              <a:rPr lang="en-US" sz="1050" dirty="0">
+                <a:solidFill>
+                  <a:srgbClr val="6B7280"/>
+                </a:solidFill>
+              </a:rPr>
+              <a:t>Pi 홀더 전용 할인 쿠폰</a:t>
+            </a:r>
+            <a:endParaRPr lang="en-US" sz="1050" dirty="0"/>
+          </a:p>
+          <a:p>
+            <a:pPr indent="0" marL="0">
+              <a:buNone/>
+            </a:pPr>
+            <a:r>
+              <a:rPr lang="en-US" sz="1050" dirty="0">
+                <a:solidFill>
+                  <a:srgbClr val="6B7280"/>
+                </a:solidFill>
+              </a:rPr>
+              <a:t>Pi Network 커뮤니티 마케팅</a:t>
+            </a:r>
+            <a:endParaRPr lang="en-US" sz="1050" dirty="0"/>
+          </a:p>
+        </p:txBody>
+      </p:sp>
+    </p:spTree>
+  </p:cSld>
+  <p:clrMapOvr>
+    <a:masterClrMapping/>
+  </p:clrMapOvr>
+</p:sld>
+</file>
+
+<file path=ppt/slides/slide14.xml><?xml version="1.0" encoding="utf-8"?>
+<p:sld xmlns:a="http://schemas.openxmlformats.org/drawingml/2006/main" xmlns:r="http://schemas.openxmlformats.org/officeDocument/2006/relationships" xmlns:p="http://schemas.openxmlformats.org/presentationml/2006/main">
+  <p:cSld name="Slide 14">
+    <p:bg>
+      <p:bgPr>
+        <a:solidFill>
+          <a:srgbClr val="FAF5FF"/>
+        </a:solidFill>
+      </p:bgPr>
+    </p:bg>
+    <p:spTree>
+      <p:nvGrpSpPr>
+        <p:cNvPr id="1" name=""/>
+        <p:cNvGrpSpPr/>
+        <p:nvPr/>
+      </p:nvGrpSpPr>
+      <p:grpSpPr>
+        <a:xfrm>
+          <a:off x="0" y="0"/>
+          <a:ext cx="0" cy="0"/>
+          <a:chOff x="0" y="0"/>
+          <a:chExt cx="0" cy="0"/>
+        </a:xfrm>
+      </p:grpSpPr>
+      <p:sp>
+        <p:nvSpPr>
+          <p:cNvPr id="2" name="Text 0"/>
+          <p:cNvSpPr/>
+          <p:nvPr/>
+        </p:nvSpPr>
+        <p:spPr>
+          <a:xfrm>
+            <a:off x="365760" y="228600"/>
+            <a:ext cx="12070080" cy="594360"/>
+          </a:xfrm>
+          <a:prstGeom prst="rect">
+            <a:avLst/>
+          </a:prstGeom>
+          <a:noFill/>
+          <a:ln/>
+        </p:spPr>
+        <p:txBody>
+          <a:bodyPr wrap="square" rtlCol="0" anchor="ctr"/>
+          <a:lstStyle/>
+          <a:p>
+            <a:pPr indent="0" marL="0">
+              <a:buNone/>
+            </a:pPr>
+            <a:r>
+              <a:rPr lang="en-US" sz="2600" b="1" dirty="0">
+                <a:solidFill>
+                  <a:srgbClr val="4C1D95"/>
+                </a:solidFill>
+              </a:rPr>
               <a:t>🗺️  전체 개발 로드맵</a:t>
             </a:r>
             <a:endParaRPr lang="en-US" sz="2600" dirty="0"/>
@@ -8827,7 +10296,7 @@
                   <a:srgbClr val="4C1D95"/>
                 </a:solidFill>
               </a:rPr>
-              <a:t>📊  PICK PICK 진행 현황 (4/14 최종)</a:t>
+              <a:t>📊  PICK PICK 진행 현황 (4/16 최신)</a:t>
             </a:r>
             <a:endParaRPr lang="en-US" sz="2600" dirty="0"/>
           </a:p>
@@ -10812,22 +12281,81 @@
       </p:sp>
       <p:sp>
         <p:nvSpPr>
-          <p:cNvPr id="68" name="Shape 66"/>
-          <p:cNvSpPr/>
-          <p:nvPr/>
-        </p:nvSpPr>
-        <p:spPr>
-          <a:xfrm>
-            <a:off x="10332720" y="1188720"/>
-            <a:ext cx="2103120" cy="1188720"/>
-          </a:xfrm>
-          <a:prstGeom prst="roundRect">
-            <a:avLst>
-              <a:gd name="adj" fmla="val 11538"/>
-            </a:avLst>
-          </a:prstGeom>
-          <a:solidFill>
-            <a:srgbClr val="DCFCE7"/>
+          <p:cNvPr id="68" name="Text 66"/>
+          <p:cNvSpPr/>
+          <p:nvPr/>
+        </p:nvSpPr>
+        <p:spPr>
+          <a:xfrm>
+            <a:off x="457200" y="6217920"/>
+            <a:ext cx="3840480" cy="256032"/>
+          </a:xfrm>
+          <a:prstGeom prst="rect">
+            <a:avLst/>
+          </a:prstGeom>
+          <a:noFill/>
+          <a:ln/>
+        </p:spPr>
+        <p:txBody>
+          <a:bodyPr wrap="square" rtlCol="0" anchor="ctr"/>
+          <a:lstStyle/>
+          <a:p>
+            <a:pPr indent="0" marL="0">
+              <a:buNone/>
+            </a:pPr>
+            <a:r>
+              <a:rPr lang="en-US" sz="1050" dirty="0">
+                <a:solidFill>
+                  <a:srgbClr val="1F1235"/>
+                </a:solidFill>
+              </a:rPr>
+              <a:t>지갑 탭 재디자인 + Pi UI + 출석 Tap-to-Earn</a:t>
+            </a:r>
+            <a:endParaRPr lang="en-US" sz="1050" dirty="0"/>
+          </a:p>
+        </p:txBody>
+      </p:sp>
+      <p:sp>
+        <p:nvSpPr>
+          <p:cNvPr id="69" name="Shape 67"/>
+          <p:cNvSpPr/>
+          <p:nvPr/>
+        </p:nvSpPr>
+        <p:spPr>
+          <a:xfrm>
+            <a:off x="4434840" y="6272784"/>
+            <a:ext cx="5029200" cy="137160"/>
+          </a:xfrm>
+          <a:prstGeom prst="rect">
+            <a:avLst/>
+          </a:prstGeom>
+          <a:solidFill>
+            <a:srgbClr val="E5E7EB"/>
+          </a:solidFill>
+          <a:ln w="12700">
+            <a:solidFill>
+              <a:srgbClr val="E5E7EB"/>
+            </a:solidFill>
+            <a:prstDash val="solid"/>
+          </a:ln>
+        </p:spPr>
+      </p:sp>
+      <p:sp>
+        <p:nvSpPr>
+          <p:cNvPr id="70" name="Shape 68"/>
+          <p:cNvSpPr/>
+          <p:nvPr/>
+        </p:nvSpPr>
+        <p:spPr>
+          <a:xfrm>
+            <a:off x="4434840" y="6272784"/>
+            <a:ext cx="5029200" cy="137160"/>
+          </a:xfrm>
+          <a:prstGeom prst="rect">
+            <a:avLst/>
+          </a:prstGeom>
+          <a:solidFill>
+            <a:srgbClr val="16A34A"/>
           </a:solidFill>
           <a:ln w="12700">
             <a:solidFill>
@@ -10839,7 +12367,314 @@
       </p:sp>
       <p:sp>
         <p:nvSpPr>
-          <p:cNvPr id="69" name="Text 67"/>
+          <p:cNvPr id="71" name="Text 69"/>
+          <p:cNvSpPr/>
+          <p:nvPr/>
+        </p:nvSpPr>
+        <p:spPr>
+          <a:xfrm>
+            <a:off x="9601200" y="6217920"/>
+            <a:ext cx="640080" cy="256032"/>
+          </a:xfrm>
+          <a:prstGeom prst="rect">
+            <a:avLst/>
+          </a:prstGeom>
+          <a:noFill/>
+          <a:ln/>
+        </p:spPr>
+        <p:txBody>
+          <a:bodyPr wrap="square" rtlCol="0" anchor="ctr"/>
+          <a:lstStyle/>
+          <a:p>
+            <a:pPr algn="r" indent="0" marL="0">
+              <a:buNone/>
+            </a:pPr>
+            <a:r>
+              <a:rPr lang="en-US" sz="1050" b="1" dirty="0">
+                <a:solidFill>
+                  <a:srgbClr val="16A34A"/>
+                </a:solidFill>
+              </a:rPr>
+              <a:t>100%</a:t>
+            </a:r>
+            <a:endParaRPr lang="en-US" sz="1050" dirty="0"/>
+          </a:p>
+        </p:txBody>
+      </p:sp>
+      <p:sp>
+        <p:nvSpPr>
+          <p:cNvPr id="72" name="Text 70"/>
+          <p:cNvSpPr/>
+          <p:nvPr/>
+        </p:nvSpPr>
+        <p:spPr>
+          <a:xfrm>
+            <a:off x="457200" y="6547104"/>
+            <a:ext cx="3840480" cy="256032"/>
+          </a:xfrm>
+          <a:prstGeom prst="rect">
+            <a:avLst/>
+          </a:prstGeom>
+          <a:noFill/>
+          <a:ln/>
+        </p:spPr>
+        <p:txBody>
+          <a:bodyPr wrap="square" rtlCol="0" anchor="ctr"/>
+          <a:lstStyle/>
+          <a:p>
+            <a:pPr indent="0" marL="0">
+              <a:buNone/>
+            </a:pPr>
+            <a:r>
+              <a:rPr lang="en-US" sz="1050" dirty="0">
+                <a:solidFill>
+                  <a:srgbClr val="1F1235"/>
+                </a:solidFill>
+              </a:rPr>
+              <a:t>사장님 사진리뷰보상 + 쿠폰 KRW 입력 설정</a:t>
+            </a:r>
+            <a:endParaRPr lang="en-US" sz="1050" dirty="0"/>
+          </a:p>
+        </p:txBody>
+      </p:sp>
+      <p:sp>
+        <p:nvSpPr>
+          <p:cNvPr id="73" name="Shape 71"/>
+          <p:cNvSpPr/>
+          <p:nvPr/>
+        </p:nvSpPr>
+        <p:spPr>
+          <a:xfrm>
+            <a:off x="4434840" y="6601968"/>
+            <a:ext cx="5029200" cy="137160"/>
+          </a:xfrm>
+          <a:prstGeom prst="rect">
+            <a:avLst/>
+          </a:prstGeom>
+          <a:solidFill>
+            <a:srgbClr val="E5E7EB"/>
+          </a:solidFill>
+          <a:ln w="12700">
+            <a:solidFill>
+              <a:srgbClr val="E5E7EB"/>
+            </a:solidFill>
+            <a:prstDash val="solid"/>
+          </a:ln>
+        </p:spPr>
+      </p:sp>
+      <p:sp>
+        <p:nvSpPr>
+          <p:cNvPr id="74" name="Shape 72"/>
+          <p:cNvSpPr/>
+          <p:nvPr/>
+        </p:nvSpPr>
+        <p:spPr>
+          <a:xfrm>
+            <a:off x="4434840" y="6601968"/>
+            <a:ext cx="5029200" cy="137160"/>
+          </a:xfrm>
+          <a:prstGeom prst="rect">
+            <a:avLst/>
+          </a:prstGeom>
+          <a:solidFill>
+            <a:srgbClr val="16A34A"/>
+          </a:solidFill>
+          <a:ln w="12700">
+            <a:solidFill>
+              <a:srgbClr val="16A34A"/>
+            </a:solidFill>
+            <a:prstDash val="solid"/>
+          </a:ln>
+        </p:spPr>
+      </p:sp>
+      <p:sp>
+        <p:nvSpPr>
+          <p:cNvPr id="75" name="Text 73"/>
+          <p:cNvSpPr/>
+          <p:nvPr/>
+        </p:nvSpPr>
+        <p:spPr>
+          <a:xfrm>
+            <a:off x="9601200" y="6547104"/>
+            <a:ext cx="640080" cy="256032"/>
+          </a:xfrm>
+          <a:prstGeom prst="rect">
+            <a:avLst/>
+          </a:prstGeom>
+          <a:noFill/>
+          <a:ln/>
+        </p:spPr>
+        <p:txBody>
+          <a:bodyPr wrap="square" rtlCol="0" anchor="ctr"/>
+          <a:lstStyle/>
+          <a:p>
+            <a:pPr algn="r" indent="0" marL="0">
+              <a:buNone/>
+            </a:pPr>
+            <a:r>
+              <a:rPr lang="en-US" sz="1050" b="1" dirty="0">
+                <a:solidFill>
+                  <a:srgbClr val="16A34A"/>
+                </a:solidFill>
+              </a:rPr>
+              <a:t>100%</a:t>
+            </a:r>
+            <a:endParaRPr lang="en-US" sz="1050" dirty="0"/>
+          </a:p>
+        </p:txBody>
+      </p:sp>
+      <p:sp>
+        <p:nvSpPr>
+          <p:cNvPr id="76" name="Text 74"/>
+          <p:cNvSpPr/>
+          <p:nvPr/>
+        </p:nvSpPr>
+        <p:spPr>
+          <a:xfrm>
+            <a:off x="457200" y="6876288"/>
+            <a:ext cx="3840480" cy="256032"/>
+          </a:xfrm>
+          <a:prstGeom prst="rect">
+            <a:avLst/>
+          </a:prstGeom>
+          <a:noFill/>
+          <a:ln/>
+        </p:spPr>
+        <p:txBody>
+          <a:bodyPr wrap="square" rtlCol="0" anchor="ctr"/>
+          <a:lstStyle/>
+          <a:p>
+            <a:pPr indent="0" marL="0">
+              <a:buNone/>
+            </a:pPr>
+            <a:r>
+              <a:rPr lang="en-US" sz="1050" dirty="0">
+                <a:solidFill>
+                  <a:srgbClr val="1F1235"/>
+                </a:solidFill>
+              </a:rPr>
+              <a:t>친구 초대 리워드 역할별 배치 (사용자·사장님·라이더)</a:t>
+            </a:r>
+            <a:endParaRPr lang="en-US" sz="1050" dirty="0"/>
+          </a:p>
+        </p:txBody>
+      </p:sp>
+      <p:sp>
+        <p:nvSpPr>
+          <p:cNvPr id="77" name="Shape 75"/>
+          <p:cNvSpPr/>
+          <p:nvPr/>
+        </p:nvSpPr>
+        <p:spPr>
+          <a:xfrm>
+            <a:off x="4434840" y="6931152"/>
+            <a:ext cx="5029200" cy="137160"/>
+          </a:xfrm>
+          <a:prstGeom prst="rect">
+            <a:avLst/>
+          </a:prstGeom>
+          <a:solidFill>
+            <a:srgbClr val="E5E7EB"/>
+          </a:solidFill>
+          <a:ln w="12700">
+            <a:solidFill>
+              <a:srgbClr val="E5E7EB"/>
+            </a:solidFill>
+            <a:prstDash val="solid"/>
+          </a:ln>
+        </p:spPr>
+      </p:sp>
+      <p:sp>
+        <p:nvSpPr>
+          <p:cNvPr id="78" name="Shape 76"/>
+          <p:cNvSpPr/>
+          <p:nvPr/>
+        </p:nvSpPr>
+        <p:spPr>
+          <a:xfrm>
+            <a:off x="4434840" y="6931152"/>
+            <a:ext cx="5029200" cy="137160"/>
+          </a:xfrm>
+          <a:prstGeom prst="rect">
+            <a:avLst/>
+          </a:prstGeom>
+          <a:solidFill>
+            <a:srgbClr val="16A34A"/>
+          </a:solidFill>
+          <a:ln w="12700">
+            <a:solidFill>
+              <a:srgbClr val="16A34A"/>
+            </a:solidFill>
+            <a:prstDash val="solid"/>
+          </a:ln>
+        </p:spPr>
+      </p:sp>
+      <p:sp>
+        <p:nvSpPr>
+          <p:cNvPr id="79" name="Text 77"/>
+          <p:cNvSpPr/>
+          <p:nvPr/>
+        </p:nvSpPr>
+        <p:spPr>
+          <a:xfrm>
+            <a:off x="9601200" y="6876288"/>
+            <a:ext cx="640080" cy="256032"/>
+          </a:xfrm>
+          <a:prstGeom prst="rect">
+            <a:avLst/>
+          </a:prstGeom>
+          <a:noFill/>
+          <a:ln/>
+        </p:spPr>
+        <p:txBody>
+          <a:bodyPr wrap="square" rtlCol="0" anchor="ctr"/>
+          <a:lstStyle/>
+          <a:p>
+            <a:pPr algn="r" indent="0" marL="0">
+              <a:buNone/>
+            </a:pPr>
+            <a:r>
+              <a:rPr lang="en-US" sz="1050" b="1" dirty="0">
+                <a:solidFill>
+                  <a:srgbClr val="16A34A"/>
+                </a:solidFill>
+              </a:rPr>
+              <a:t>100%</a:t>
+            </a:r>
+            <a:endParaRPr lang="en-US" sz="1050" dirty="0"/>
+          </a:p>
+        </p:txBody>
+      </p:sp>
+      <p:sp>
+        <p:nvSpPr>
+          <p:cNvPr id="80" name="Shape 78"/>
+          <p:cNvSpPr/>
+          <p:nvPr/>
+        </p:nvSpPr>
+        <p:spPr>
+          <a:xfrm>
+            <a:off x="10332720" y="1188720"/>
+            <a:ext cx="2103120" cy="1188720"/>
+          </a:xfrm>
+          <a:prstGeom prst="roundRect">
+            <a:avLst>
+              <a:gd name="adj" fmla="val 11538"/>
+            </a:avLst>
+          </a:prstGeom>
+          <a:solidFill>
+            <a:srgbClr val="DCFCE7"/>
+          </a:solidFill>
+          <a:ln w="12700">
+            <a:solidFill>
+              <a:srgbClr val="16A34A"/>
+            </a:solidFill>
+            <a:prstDash val="solid"/>
+          </a:ln>
+        </p:spPr>
+      </p:sp>
+      <p:sp>
+        <p:nvSpPr>
+          <p:cNvPr id="81" name="Text 79"/>
           <p:cNvSpPr/>
           <p:nvPr/>
         </p:nvSpPr>
@@ -10875,7 +12710,7 @@
       </p:sp>
       <p:sp>
         <p:nvSpPr>
-          <p:cNvPr id="70" name="Text 68"/>
+          <p:cNvPr id="82" name="Text 80"/>
           <p:cNvSpPr/>
           <p:nvPr/>
         </p:nvSpPr>
@@ -10903,7 +12738,7 @@
                   <a:srgbClr val="16A34A"/>
                 </a:solidFill>
               </a:rPr>
-              <a:t>55개+</a:t>
+              <a:t>60개+</a:t>
             </a:r>
             <a:endParaRPr lang="en-US" sz="1800" dirty="0"/>
           </a:p>
@@ -10911,7 +12746,7 @@
       </p:sp>
       <p:sp>
         <p:nvSpPr>
-          <p:cNvPr id="71" name="Text 69"/>
+          <p:cNvPr id="83" name="Text 81"/>
           <p:cNvSpPr/>
           <p:nvPr/>
         </p:nvSpPr>
@@ -10947,7 +12782,7 @@
       </p:sp>
       <p:sp>
         <p:nvSpPr>
-          <p:cNvPr id="72" name="Shape 70"/>
+          <p:cNvPr id="84" name="Shape 82"/>
           <p:cNvSpPr/>
           <p:nvPr/>
         </p:nvSpPr>
@@ -10974,7 +12809,7 @@
       </p:sp>
       <p:sp>
         <p:nvSpPr>
-          <p:cNvPr id="73" name="Text 71"/>
+          <p:cNvPr id="85" name="Text 83"/>
           <p:cNvSpPr/>
           <p:nvPr/>
         </p:nvSpPr>
@@ -11010,7 +12845,7 @@
       </p:sp>
       <p:sp>
         <p:nvSpPr>
-          <p:cNvPr id="74" name="Text 72"/>
+          <p:cNvPr id="86" name="Text 84"/>
           <p:cNvSpPr/>
           <p:nvPr/>
         </p:nvSpPr>
@@ -11046,7 +12881,7 @@
       </p:sp>
       <p:sp>
         <p:nvSpPr>
-          <p:cNvPr id="75" name="Text 73"/>
+          <p:cNvPr id="87" name="Text 85"/>
           <p:cNvSpPr/>
           <p:nvPr/>
         </p:nvSpPr>
@@ -11082,7 +12917,7 @@
       </p:sp>
       <p:sp>
         <p:nvSpPr>
-          <p:cNvPr id="76" name="Shape 74"/>
+          <p:cNvPr id="88" name="Shape 86"/>
           <p:cNvSpPr/>
           <p:nvPr/>
         </p:nvSpPr>
@@ -11109,7 +12944,7 @@
       </p:sp>
       <p:sp>
         <p:nvSpPr>
-          <p:cNvPr id="77" name="Text 75"/>
+          <p:cNvPr id="89" name="Text 87"/>
           <p:cNvSpPr/>
           <p:nvPr/>
         </p:nvSpPr>
@@ -11145,7 +12980,7 @@
       </p:sp>
       <p:sp>
         <p:nvSpPr>
-          <p:cNvPr id="78" name="Text 76"/>
+          <p:cNvPr id="90" name="Text 88"/>
           <p:cNvSpPr/>
           <p:nvPr/>
         </p:nvSpPr>
@@ -11181,7 +13016,7 @@
       </p:sp>
       <p:sp>
         <p:nvSpPr>
-          <p:cNvPr id="79" name="Text 77"/>
+          <p:cNvPr id="91" name="Text 89"/>
           <p:cNvSpPr/>
           <p:nvPr/>
         </p:nvSpPr>

--- a/PICKPICK_프로젝트현황.pptx
+++ b/PICKPICK_프로젝트현황.pptx
@@ -19,9 +19,10 @@
     <p:sldId id="267" r:id="rId13"/>
     <p:sldId id="268" r:id="rId14"/>
     <p:sldId id="269" r:id="rId15"/>
+    <p:sldId id="270" r:id="rId16"/>
   </p:sldIdLst>
   <p:notesMasterIdLst>
-    <p:notesMasterId r:id="rId16"/>
+    <p:notesMasterId r:id="rId17"/>
   </p:notesMasterIdLst>
   <p:sldSz cx="12192000" cy="6858000"/>
   <p:notesSz cx="6858000" cy="12192000"/>
@@ -997,6 +998,94 @@
 </p:notes>
 </file>
 
+<file path=ppt/notesSlides/notesSlide15.xml><?xml version="1.0" encoding="utf-8"?>
+<p:notes xmlns:a="http://schemas.openxmlformats.org/drawingml/2006/main" xmlns:r="http://schemas.openxmlformats.org/officeDocument/2006/relationships" xmlns:p="http://schemas.openxmlformats.org/presentationml/2006/main">
+  <p:cSld>
+    <p:spTree>
+      <p:nvGrpSpPr>
+        <p:cNvPr id="1" name=""/>
+        <p:cNvGrpSpPr/>
+        <p:nvPr/>
+      </p:nvGrpSpPr>
+      <p:grpSpPr>
+        <a:xfrm>
+          <a:off x="0" y="0"/>
+          <a:ext cx="0" cy="0"/>
+          <a:chOff x="0" y="0"/>
+          <a:chExt cx="0" cy="0"/>
+        </a:xfrm>
+      </p:grpSpPr>
+      <p:sp>
+        <p:nvSpPr>
+          <p:cNvPr id="2" name="Slide Image Placeholder 1"/>
+          <p:cNvSpPr>
+            <a:spLocks noGrp="1" noRot="1" noChangeAspect="1"/>
+          </p:cNvSpPr>
+          <p:nvPr>
+            <p:ph type="sldImg"/>
+          </p:nvPr>
+        </p:nvSpPr>
+        <p:spPr/>
+      </p:sp>
+      <p:sp>
+        <p:nvSpPr>
+          <p:cNvPr id="3" name="Notes Placeholder 2"/>
+          <p:cNvSpPr>
+            <a:spLocks noGrp="1"/>
+          </p:cNvSpPr>
+          <p:nvPr>
+            <p:ph type="body" idx="1"/>
+          </p:nvPr>
+        </p:nvSpPr>
+        <p:spPr/>
+        <p:txBody>
+          <a:bodyPr/>
+          <a:lstStyle/>
+          <a:p>
+            <a:r>
+              <a:rPr lang="en-US" dirty="0"/>
+              <a:t/>
+            </a:r>
+            <a:endParaRPr lang="en-US" dirty="0"/>
+          </a:p>
+        </p:txBody>
+      </p:sp>
+      <p:sp>
+        <p:nvSpPr>
+          <p:cNvPr id="4" name="Slide Number Placeholder 3"/>
+          <p:cNvSpPr>
+            <a:spLocks noGrp="1"/>
+          </p:cNvSpPr>
+          <p:nvPr>
+            <p:ph type="sldNum" sz="quarter" idx="10"/>
+          </p:nvPr>
+        </p:nvSpPr>
+        <p:spPr/>
+        <p:txBody>
+          <a:bodyPr/>
+          <a:lstStyle/>
+          <a:p>
+            <a:fld id="{F7021451-1387-4CA6-816F-3879F97B5CBC}" type="slidenum">
+              <a:rPr lang="en-US"/>
+              <a:t>15</a:t>
+            </a:fld>
+            <a:endParaRPr lang="en-US"/>
+          </a:p>
+        </p:txBody>
+      </p:sp>
+    </p:spTree>
+    <p:extLst>
+      <p:ext uri="{BB962C8B-B14F-4D97-AF65-F5344CB8AC3E}">
+        <p14:creationId xmlns:p14="http://schemas.microsoft.com/office/powerpoint/2010/main" val="1024086991"/>
+      </p:ext>
+    </p:extLst>
+  </p:cSld>
+  <p:clrMapOvr>
+    <a:masterClrMapping/>
+  </p:clrMapOvr>
+</p:notes>
+</file>
+
 <file path=ppt/notesSlides/notesSlide2.xml><?xml version="1.0" encoding="utf-8"?>
 <p:notes xmlns:a="http://schemas.openxmlformats.org/drawingml/2006/main" xmlns:r="http://schemas.openxmlformats.org/officeDocument/2006/relationships" xmlns:p="http://schemas.openxmlformats.org/presentationml/2006/main">
   <p:cSld>
@@ -2251,7 +2340,7 @@
                   <a:srgbClr val="C4B5FD"/>
                 </a:solidFill>
               </a:rPr>
-              <a:t>2026년 4월 16일  |  지갑 탭 재디자인 · 출석 Tap-to-Earn · 사장님 자체 리워드 설정</a:t>
+              <a:t>2026년 4월 16일  |  레퍼럴 재설계 · 리뷰보상 연동 · 라이더 5km 필터 · 자동오프라인 Cron</a:t>
             </a:r>
             <a:endParaRPr lang="en-US" sz="1400" dirty="0"/>
           </a:p>
@@ -5075,60 +5164,26 @@
       </p:grpSpPr>
       <p:sp>
         <p:nvSpPr>
-          <p:cNvPr id="2" name="Text 0"/>
-          <p:cNvSpPr/>
-          <p:nvPr/>
-        </p:nvSpPr>
-        <p:spPr>
-          <a:xfrm>
-            <a:off x="365760" y="228600"/>
-            <a:ext cx="12070080" cy="594360"/>
-          </a:xfrm>
-          <a:prstGeom prst="rect">
-            <a:avLst/>
-          </a:prstGeom>
-          <a:noFill/>
-          <a:ln/>
-        </p:spPr>
-        <p:txBody>
-          <a:bodyPr wrap="square" rtlCol="0" anchor="ctr"/>
-          <a:lstStyle/>
-          <a:p>
-            <a:pPr indent="0" marL="0">
-              <a:buNone/>
-            </a:pPr>
-            <a:r>
-              <a:rPr lang="en-US" sz="2400" b="1" dirty="0">
-                <a:solidFill>
-                  <a:srgbClr val="4C1D95"/>
-                </a:solidFill>
-              </a:rPr>
-              <a:t>✅  완료된 기능 전체 목록 (4/16 최신)</a:t>
-            </a:r>
-            <a:endParaRPr lang="en-US" sz="2400" dirty="0"/>
-          </a:p>
-        </p:txBody>
-      </p:sp>
-      <p:sp>
-        <p:nvSpPr>
-          <p:cNvPr id="3" name="Shape 1"/>
-          <p:cNvSpPr/>
-          <p:nvPr/>
-        </p:nvSpPr>
-        <p:spPr>
-          <a:xfrm>
-            <a:off x="365760" y="804672"/>
-            <a:ext cx="3840480" cy="45720"/>
-          </a:xfrm>
-          <a:prstGeom prst="rect">
-            <a:avLst/>
-          </a:prstGeom>
-          <a:solidFill>
-            <a:srgbClr val="16A34A"/>
+          <p:cNvPr id="2" name="Shape 0"/>
+          <p:cNvSpPr/>
+          <p:nvPr/>
+        </p:nvSpPr>
+        <p:spPr>
+          <a:xfrm>
+            <a:off x="365760" y="164592"/>
+            <a:ext cx="2651760" cy="502920"/>
+          </a:xfrm>
+          <a:prstGeom prst="roundRect">
+            <a:avLst>
+              <a:gd name="adj" fmla="val 18182"/>
+            </a:avLst>
+          </a:prstGeom>
+          <a:solidFill>
+            <a:srgbClr val="FDF2F8"/>
           </a:solidFill>
           <a:ln w="12700">
             <a:solidFill>
-              <a:srgbClr val="16A34A"/>
+              <a:srgbClr val="BE185D"/>
             </a:solidFill>
             <a:prstDash val="solid"/>
           </a:ln>
@@ -5136,26 +5191,96 @@
       </p:sp>
       <p:sp>
         <p:nvSpPr>
-          <p:cNvPr id="4" name="Shape 2"/>
-          <p:cNvSpPr/>
-          <p:nvPr/>
-        </p:nvSpPr>
-        <p:spPr>
-          <a:xfrm>
-            <a:off x="228600" y="960120"/>
-            <a:ext cx="3749040" cy="2423160"/>
-          </a:xfrm>
-          <a:prstGeom prst="roundRect">
-            <a:avLst>
-              <a:gd name="adj" fmla="val 5660"/>
-            </a:avLst>
-          </a:prstGeom>
-          <a:solidFill>
-            <a:srgbClr val="EDE9FE"/>
+          <p:cNvPr id="3" name="Text 1"/>
+          <p:cNvSpPr/>
+          <p:nvPr/>
+        </p:nvSpPr>
+        <p:spPr>
+          <a:xfrm>
+            <a:off x="365760" y="164592"/>
+            <a:ext cx="2651760" cy="502920"/>
+          </a:xfrm>
+          <a:prstGeom prst="rect">
+            <a:avLst/>
+          </a:prstGeom>
+          <a:noFill/>
+          <a:ln/>
+        </p:spPr>
+        <p:txBody>
+          <a:bodyPr wrap="square" rtlCol="0" anchor="ctr"/>
+          <a:lstStyle/>
+          <a:p>
+            <a:pPr algn="ctr" indent="0" marL="0">
+              <a:buNone/>
+            </a:pPr>
+            <a:r>
+              <a:rPr lang="en-US" sz="1100" b="1" dirty="0">
+                <a:solidFill>
+                  <a:srgbClr val="BE185D"/>
+                </a:solidFill>
+              </a:rPr>
+              <a:t>📅  2026. 04. 16 (Day 11)</a:t>
+            </a:r>
+            <a:endParaRPr lang="en-US" sz="1100" dirty="0"/>
+          </a:p>
+        </p:txBody>
+      </p:sp>
+      <p:sp>
+        <p:nvSpPr>
+          <p:cNvPr id="4" name="Text 2"/>
+          <p:cNvSpPr/>
+          <p:nvPr/>
+        </p:nvSpPr>
+        <p:spPr>
+          <a:xfrm>
+            <a:off x="3200400" y="201168"/>
+            <a:ext cx="9235440" cy="502920"/>
+          </a:xfrm>
+          <a:prstGeom prst="rect">
+            <a:avLst/>
+          </a:prstGeom>
+          <a:noFill/>
+          <a:ln/>
+        </p:spPr>
+        <p:txBody>
+          <a:bodyPr wrap="square" rtlCol="0" anchor="ctr"/>
+          <a:lstStyle/>
+          <a:p>
+            <a:pPr indent="0" marL="0">
+              <a:buNone/>
+            </a:pPr>
+            <a:r>
+              <a:rPr lang="en-US" sz="1800" b="1" dirty="0">
+                <a:solidFill>
+                  <a:srgbClr val="4C1D95"/>
+                </a:solidFill>
+              </a:rPr>
+              <a:t>🔗  레퍼럴 재설계 · 리뷰보상 연동 · 라이더 위치 필터 · 자동오프라인</a:t>
+            </a:r>
+            <a:endParaRPr lang="en-US" sz="1800" dirty="0"/>
+          </a:p>
+        </p:txBody>
+      </p:sp>
+      <p:sp>
+        <p:nvSpPr>
+          <p:cNvPr id="5" name="Shape 3"/>
+          <p:cNvSpPr/>
+          <p:nvPr/>
+        </p:nvSpPr>
+        <p:spPr>
+          <a:xfrm>
+            <a:off x="365760" y="713232"/>
+            <a:ext cx="11704320" cy="36576"/>
+          </a:xfrm>
+          <a:prstGeom prst="rect">
+            <a:avLst/>
+          </a:prstGeom>
+          <a:solidFill>
+            <a:srgbClr val="E9D5FF"/>
           </a:solidFill>
           <a:ln w="12700">
             <a:solidFill>
-              <a:srgbClr val="6B21A8"/>
+              <a:srgbClr val="E9D5FF"/>
             </a:solidFill>
             <a:prstDash val="solid"/>
           </a:ln>
@@ -5163,26 +5288,26 @@
       </p:sp>
       <p:sp>
         <p:nvSpPr>
-          <p:cNvPr id="5" name="Shape 3"/>
-          <p:cNvSpPr/>
-          <p:nvPr/>
-        </p:nvSpPr>
-        <p:spPr>
-          <a:xfrm>
-            <a:off x="338328" y="1069848"/>
-            <a:ext cx="3529584" cy="384048"/>
+          <p:cNvPr id="6" name="Shape 4"/>
+          <p:cNvSpPr/>
+          <p:nvPr/>
+        </p:nvSpPr>
+        <p:spPr>
+          <a:xfrm>
+            <a:off x="228600" y="914400"/>
+            <a:ext cx="3749040" cy="2148840"/>
           </a:xfrm>
           <a:prstGeom prst="roundRect">
             <a:avLst>
-              <a:gd name="adj" fmla="val 19048"/>
+              <a:gd name="adj" fmla="val 6383"/>
             </a:avLst>
           </a:prstGeom>
           <a:solidFill>
-            <a:srgbClr val="6B21A8"/>
+            <a:srgbClr val="FDF2F8"/>
           </a:solidFill>
           <a:ln w="12700">
             <a:solidFill>
-              <a:srgbClr val="6B21A8"/>
+              <a:srgbClr val="F9A8D4"/>
             </a:solidFill>
             <a:prstDash val="solid"/>
           </a:ln>
@@ -5190,242 +5315,26 @@
       </p:sp>
       <p:sp>
         <p:nvSpPr>
-          <p:cNvPr id="6" name="Text 4"/>
-          <p:cNvSpPr/>
-          <p:nvPr/>
-        </p:nvSpPr>
-        <p:spPr>
-          <a:xfrm>
-            <a:off x="338328" y="1069848"/>
-            <a:ext cx="3529584" cy="384048"/>
-          </a:xfrm>
-          <a:prstGeom prst="rect">
-            <a:avLst/>
-          </a:prstGeom>
-          <a:noFill/>
-          <a:ln/>
-        </p:spPr>
-        <p:txBody>
-          <a:bodyPr wrap="square" rtlCol="0" anchor="ctr"/>
-          <a:lstStyle/>
-          <a:p>
-            <a:pPr algn="ctr" indent="0" marL="0">
-              <a:buNone/>
-            </a:pPr>
-            <a:r>
-              <a:rPr lang="en-US" sz="1200" b="1" dirty="0">
-                <a:solidFill>
-                  <a:srgbClr val="FFFFFF"/>
-                </a:solidFill>
-              </a:rPr>
-              <a:t>🔐 인증 / 사용자 관리</a:t>
-            </a:r>
-            <a:endParaRPr lang="en-US" sz="1200" dirty="0"/>
-          </a:p>
-        </p:txBody>
-      </p:sp>
-      <p:sp>
-        <p:nvSpPr>
-          <p:cNvPr id="7" name="Text 5"/>
-          <p:cNvSpPr/>
-          <p:nvPr/>
-        </p:nvSpPr>
-        <p:spPr>
-          <a:xfrm>
-            <a:off x="393192" y="1554480"/>
-            <a:ext cx="3401568" cy="338328"/>
-          </a:xfrm>
-          <a:prstGeom prst="rect">
-            <a:avLst/>
-          </a:prstGeom>
-          <a:noFill/>
-          <a:ln/>
-        </p:spPr>
-        <p:txBody>
-          <a:bodyPr wrap="square" rtlCol="0" anchor="ctr"/>
-          <a:lstStyle/>
-          <a:p>
-            <a:pPr indent="0" marL="0">
-              <a:buNone/>
-            </a:pPr>
-            <a:r>
-              <a:rPr lang="en-US" sz="1000" dirty="0">
-                <a:solidFill>
-                  <a:srgbClr val="1F1235"/>
-                </a:solidFill>
-              </a:rPr>
-              <a:t>✓  이메일 로그인/회원가입 + 지갑 자동생성</a:t>
-            </a:r>
-            <a:endParaRPr lang="en-US" sz="1000" dirty="0"/>
-          </a:p>
-        </p:txBody>
-      </p:sp>
-      <p:sp>
-        <p:nvSpPr>
-          <p:cNvPr id="8" name="Text 6"/>
-          <p:cNvSpPr/>
-          <p:nvPr/>
-        </p:nvSpPr>
-        <p:spPr>
-          <a:xfrm>
-            <a:off x="393192" y="1901952"/>
-            <a:ext cx="3401568" cy="338328"/>
-          </a:xfrm>
-          <a:prstGeom prst="rect">
-            <a:avLst/>
-          </a:prstGeom>
-          <a:noFill/>
-          <a:ln/>
-        </p:spPr>
-        <p:txBody>
-          <a:bodyPr wrap="square" rtlCol="0" anchor="ctr"/>
-          <a:lstStyle/>
-          <a:p>
-            <a:pPr indent="0" marL="0">
-              <a:buNone/>
-            </a:pPr>
-            <a:r>
-              <a:rPr lang="en-US" sz="1000" dirty="0">
-                <a:solidFill>
-                  <a:srgbClr val="1F1235"/>
-                </a:solidFill>
-              </a:rPr>
-              <a:t>✓  카카오 소셜 로그인 (비즈니스 인증 후 재추가)</a:t>
-            </a:r>
-            <a:endParaRPr lang="en-US" sz="1000" dirty="0"/>
-          </a:p>
-        </p:txBody>
-      </p:sp>
-      <p:sp>
-        <p:nvSpPr>
-          <p:cNvPr id="9" name="Text 7"/>
-          <p:cNvSpPr/>
-          <p:nvPr/>
-        </p:nvSpPr>
-        <p:spPr>
-          <a:xfrm>
-            <a:off x="393192" y="2249424"/>
-            <a:ext cx="3401568" cy="338328"/>
-          </a:xfrm>
-          <a:prstGeom prst="rect">
-            <a:avLst/>
-          </a:prstGeom>
-          <a:noFill/>
-          <a:ln/>
-        </p:spPr>
-        <p:txBody>
-          <a:bodyPr wrap="square" rtlCol="0" anchor="ctr"/>
-          <a:lstStyle/>
-          <a:p>
-            <a:pPr indent="0" marL="0">
-              <a:buNone/>
-            </a:pPr>
-            <a:r>
-              <a:rPr lang="en-US" sz="1000" dirty="0">
-                <a:solidFill>
-                  <a:srgbClr val="1F1235"/>
-                </a:solidFill>
-              </a:rPr>
-              <a:t>✓  RBAC 미들웨어 (user/owner/rider/admin)</a:t>
-            </a:r>
-            <a:endParaRPr lang="en-US" sz="1000" dirty="0"/>
-          </a:p>
-        </p:txBody>
-      </p:sp>
-      <p:sp>
-        <p:nvSpPr>
-          <p:cNvPr id="10" name="Text 8"/>
-          <p:cNvSpPr/>
-          <p:nvPr/>
-        </p:nvSpPr>
-        <p:spPr>
-          <a:xfrm>
-            <a:off x="393192" y="2596896"/>
-            <a:ext cx="3401568" cy="338328"/>
-          </a:xfrm>
-          <a:prstGeom prst="rect">
-            <a:avLst/>
-          </a:prstGeom>
-          <a:noFill/>
-          <a:ln/>
-        </p:spPr>
-        <p:txBody>
-          <a:bodyPr wrap="square" rtlCol="0" anchor="ctr"/>
-          <a:lstStyle/>
-          <a:p>
-            <a:pPr indent="0" marL="0">
-              <a:buNone/>
-            </a:pPr>
-            <a:r>
-              <a:rPr lang="en-US" sz="1000" dirty="0">
-                <a:solidFill>
-                  <a:srgbClr val="1F1235"/>
-                </a:solidFill>
-              </a:rPr>
-              <a:t>✓  비밀번호 찾기·재설정 + 검색 히스토리</a:t>
-            </a:r>
-            <a:endParaRPr lang="en-US" sz="1000" dirty="0"/>
-          </a:p>
-        </p:txBody>
-      </p:sp>
-      <p:sp>
-        <p:nvSpPr>
-          <p:cNvPr id="11" name="Text 9"/>
-          <p:cNvSpPr/>
-          <p:nvPr/>
-        </p:nvSpPr>
-        <p:spPr>
-          <a:xfrm>
-            <a:off x="393192" y="2944368"/>
-            <a:ext cx="3401568" cy="338328"/>
-          </a:xfrm>
-          <a:prstGeom prst="rect">
-            <a:avLst/>
-          </a:prstGeom>
-          <a:noFill/>
-          <a:ln/>
-        </p:spPr>
-        <p:txBody>
-          <a:bodyPr wrap="square" rtlCol="0" anchor="ctr"/>
-          <a:lstStyle/>
-          <a:p>
-            <a:pPr indent="0" marL="0">
-              <a:buNone/>
-            </a:pPr>
-            <a:r>
-              <a:rPr lang="en-US" sz="1000" dirty="0">
-                <a:solidFill>
-                  <a:srgbClr val="1F1235"/>
-                </a:solidFill>
-              </a:rPr>
-              <a:t>✓  프로필 수정 + 다중 배달 주소 + 레퍼럴</a:t>
-            </a:r>
-            <a:endParaRPr lang="en-US" sz="1000" dirty="0"/>
-          </a:p>
-        </p:txBody>
-      </p:sp>
-      <p:sp>
-        <p:nvSpPr>
-          <p:cNvPr id="12" name="Shape 10"/>
-          <p:cNvSpPr/>
-          <p:nvPr/>
-        </p:nvSpPr>
-        <p:spPr>
-          <a:xfrm>
-            <a:off x="4160520" y="960120"/>
-            <a:ext cx="3749040" cy="2423160"/>
+          <p:cNvPr id="7" name="Shape 5"/>
+          <p:cNvSpPr/>
+          <p:nvPr/>
+        </p:nvSpPr>
+        <p:spPr>
+          <a:xfrm>
+            <a:off x="393192" y="1097280"/>
+            <a:ext cx="530352" cy="530352"/>
           </a:xfrm>
           <a:prstGeom prst="roundRect">
             <a:avLst>
-              <a:gd name="adj" fmla="val 5660"/>
+              <a:gd name="adj" fmla="val 17241"/>
             </a:avLst>
           </a:prstGeom>
           <a:solidFill>
-            <a:srgbClr val="E0F2FE"/>
+            <a:srgbClr val="FFFFFF"/>
           </a:solidFill>
           <a:ln w="12700">
             <a:solidFill>
-              <a:srgbClr val="0369A1"/>
+              <a:srgbClr val="F9A8D4"/>
             </a:solidFill>
             <a:prstDash val="solid"/>
           </a:ln>
@@ -5433,26 +5342,176 @@
       </p:sp>
       <p:sp>
         <p:nvSpPr>
-          <p:cNvPr id="13" name="Shape 11"/>
-          <p:cNvSpPr/>
-          <p:nvPr/>
-        </p:nvSpPr>
-        <p:spPr>
-          <a:xfrm>
-            <a:off x="4270248" y="1069848"/>
-            <a:ext cx="3529584" cy="384048"/>
+          <p:cNvPr id="8" name="Text 6"/>
+          <p:cNvSpPr/>
+          <p:nvPr/>
+        </p:nvSpPr>
+        <p:spPr>
+          <a:xfrm>
+            <a:off x="393192" y="1078992"/>
+            <a:ext cx="548640" cy="548640"/>
+          </a:xfrm>
+          <a:prstGeom prst="rect">
+            <a:avLst/>
+          </a:prstGeom>
+          <a:noFill/>
+          <a:ln/>
+        </p:spPr>
+        <p:txBody>
+          <a:bodyPr wrap="square" rtlCol="0" anchor="ctr"/>
+          <a:lstStyle/>
+          <a:p>
+            <a:pPr algn="ctr" indent="0" marL="0">
+              <a:buNone/>
+            </a:pPr>
+            <a:r>
+              <a:rPr lang="en-US" sz="1800" dirty="0">
+                <a:solidFill>
+                  <a:srgbClr val="000000"/>
+                </a:solidFill>
+              </a:rPr>
+              <a:t>🔗</a:t>
+            </a:r>
+            <a:endParaRPr lang="en-US" sz="1800" dirty="0"/>
+          </a:p>
+        </p:txBody>
+      </p:sp>
+      <p:sp>
+        <p:nvSpPr>
+          <p:cNvPr id="9" name="Text 7"/>
+          <p:cNvSpPr/>
+          <p:nvPr/>
+        </p:nvSpPr>
+        <p:spPr>
+          <a:xfrm>
+            <a:off x="1033272" y="1115568"/>
+            <a:ext cx="2743200" cy="365760"/>
+          </a:xfrm>
+          <a:prstGeom prst="rect">
+            <a:avLst/>
+          </a:prstGeom>
+          <a:noFill/>
+          <a:ln/>
+        </p:spPr>
+        <p:txBody>
+          <a:bodyPr wrap="square" rtlCol="0" anchor="ctr"/>
+          <a:lstStyle/>
+          <a:p>
+            <a:pPr indent="0" marL="0">
+              <a:buNone/>
+            </a:pPr>
+            <a:r>
+              <a:rPr lang="en-US" sz="1200" b="1" dirty="0">
+                <a:solidFill>
+                  <a:srgbClr val="BE185D"/>
+                </a:solidFill>
+              </a:rPr>
+              <a:t>레퍼럴 시스템 재설계</a:t>
+            </a:r>
+            <a:endParaRPr lang="en-US" sz="1200" dirty="0"/>
+          </a:p>
+        </p:txBody>
+      </p:sp>
+      <p:sp>
+        <p:nvSpPr>
+          <p:cNvPr id="10" name="Text 8"/>
+          <p:cNvSpPr/>
+          <p:nvPr/>
+        </p:nvSpPr>
+        <p:spPr>
+          <a:xfrm>
+            <a:off x="429768" y="1627632"/>
+            <a:ext cx="3337560" cy="1298448"/>
+          </a:xfrm>
+          <a:prstGeom prst="rect">
+            <a:avLst/>
+          </a:prstGeom>
+          <a:noFill/>
+          <a:ln/>
+        </p:spPr>
+        <p:txBody>
+          <a:bodyPr wrap="square" rtlCol="0" anchor="ctr"/>
+          <a:lstStyle/>
+          <a:p>
+            <a:pPr indent="0" marL="0">
+              <a:buNone/>
+            </a:pPr>
+            <a:r>
+              <a:rPr lang="en-US" sz="1000" dirty="0">
+                <a:solidFill>
+                  <a:srgbClr val="1F1235"/>
+                </a:solidFill>
+              </a:rPr>
+              <a:t>초대자: 역할 무관 5,000 PICK 고정</a:t>
+            </a:r>
+            <a:endParaRPr lang="en-US" sz="1000" dirty="0"/>
+          </a:p>
+          <a:p>
+            <a:pPr indent="0" marL="0">
+              <a:buNone/>
+            </a:pPr>
+            <a:r>
+              <a:rPr lang="en-US" sz="1000" dirty="0">
+                <a:solidFill>
+                  <a:srgbClr val="1F1235"/>
+                </a:solidFill>
+              </a:rPr>
+              <a:t>신규 가입자: 역할별 웰컴 보너스</a:t>
+            </a:r>
+            <a:endParaRPr lang="en-US" sz="1000" dirty="0"/>
+          </a:p>
+          <a:p>
+            <a:pPr indent="0" marL="0">
+              <a:buNone/>
+            </a:pPr>
+            <a:r>
+              <a:rPr lang="en-US" sz="1000" dirty="0">
+                <a:solidFill>
+                  <a:srgbClr val="1F1235"/>
+                </a:solidFill>
+              </a:rPr>
+              <a:t>  사용자 5K · 사장님 20K · 라이더 10K</a:t>
+            </a:r>
+            <a:endParaRPr lang="en-US" sz="1000" dirty="0"/>
+          </a:p>
+          <a:p>
+            <a:pPr indent="0" marL="0">
+              <a:buNone/>
+            </a:pPr>
+            <a:r>
+              <a:rPr lang="en-US" sz="1000" dirty="0">
+                <a:solidFill>
+                  <a:srgbClr val="1F1235"/>
+                </a:solidFill>
+              </a:rPr>
+              <a:t>회원가입 시 자동 지급 (서버사이드)</a:t>
+            </a:r>
+            <a:endParaRPr lang="en-US" sz="1000" dirty="0"/>
+          </a:p>
+        </p:txBody>
+      </p:sp>
+      <p:sp>
+        <p:nvSpPr>
+          <p:cNvPr id="11" name="Shape 9"/>
+          <p:cNvSpPr/>
+          <p:nvPr/>
+        </p:nvSpPr>
+        <p:spPr>
+          <a:xfrm>
+            <a:off x="4160520" y="914400"/>
+            <a:ext cx="3749040" cy="2148840"/>
           </a:xfrm>
           <a:prstGeom prst="roundRect">
             <a:avLst>
-              <a:gd name="adj" fmla="val 19048"/>
+              <a:gd name="adj" fmla="val 6383"/>
             </a:avLst>
           </a:prstGeom>
           <a:solidFill>
-            <a:srgbClr val="0369A1"/>
+            <a:srgbClr val="FDF2F8"/>
           </a:solidFill>
           <a:ln w="12700">
             <a:solidFill>
-              <a:srgbClr val="0369A1"/>
+              <a:srgbClr val="F9A8D4"/>
             </a:solidFill>
             <a:prstDash val="solid"/>
           </a:ln>
@@ -5460,242 +5519,26 @@
       </p:sp>
       <p:sp>
         <p:nvSpPr>
-          <p:cNvPr id="14" name="Text 12"/>
-          <p:cNvSpPr/>
-          <p:nvPr/>
-        </p:nvSpPr>
-        <p:spPr>
-          <a:xfrm>
-            <a:off x="4270248" y="1069848"/>
-            <a:ext cx="3529584" cy="384048"/>
-          </a:xfrm>
-          <a:prstGeom prst="rect">
-            <a:avLst/>
-          </a:prstGeom>
-          <a:noFill/>
-          <a:ln/>
-        </p:spPr>
-        <p:txBody>
-          <a:bodyPr wrap="square" rtlCol="0" anchor="ctr"/>
-          <a:lstStyle/>
-          <a:p>
-            <a:pPr algn="ctr" indent="0" marL="0">
-              <a:buNone/>
-            </a:pPr>
-            <a:r>
-              <a:rPr lang="en-US" sz="1200" b="1" dirty="0">
-                <a:solidFill>
-                  <a:srgbClr val="FFFFFF"/>
-                </a:solidFill>
-              </a:rPr>
-              <a:t>🏠 사용자 탭 (4개) + UX</a:t>
-            </a:r>
-            <a:endParaRPr lang="en-US" sz="1200" dirty="0"/>
-          </a:p>
-        </p:txBody>
-      </p:sp>
-      <p:sp>
-        <p:nvSpPr>
-          <p:cNvPr id="15" name="Text 13"/>
-          <p:cNvSpPr/>
-          <p:nvPr/>
-        </p:nvSpPr>
-        <p:spPr>
-          <a:xfrm>
-            <a:off x="4325112" y="1554480"/>
-            <a:ext cx="3401568" cy="338328"/>
-          </a:xfrm>
-          <a:prstGeom prst="rect">
-            <a:avLst/>
-          </a:prstGeom>
-          <a:noFill/>
-          <a:ln/>
-        </p:spPr>
-        <p:txBody>
-          <a:bodyPr wrap="square" rtlCol="0" anchor="ctr"/>
-          <a:lstStyle/>
-          <a:p>
-            <a:pPr indent="0" marL="0">
-              <a:buNone/>
-            </a:pPr>
-            <a:r>
-              <a:rPr lang="en-US" sz="1000" dirty="0">
-                <a:solidFill>
-                  <a:srgbClr val="1F1235"/>
-                </a:solidFill>
-              </a:rPr>
-              <a:t>✓  홈: 카테고리·검색(GIN)·인기가게·광고</a:t>
-            </a:r>
-            <a:endParaRPr lang="en-US" sz="1000" dirty="0"/>
-          </a:p>
-        </p:txBody>
-      </p:sp>
-      <p:sp>
-        <p:nvSpPr>
-          <p:cNvPr id="16" name="Text 14"/>
-          <p:cNvSpPr/>
-          <p:nvPr/>
-        </p:nvSpPr>
-        <p:spPr>
-          <a:xfrm>
-            <a:off x="4325112" y="1901952"/>
-            <a:ext cx="3401568" cy="338328"/>
-          </a:xfrm>
-          <a:prstGeom prst="rect">
-            <a:avLst/>
-          </a:prstGeom>
-          <a:noFill/>
-          <a:ln/>
-        </p:spPr>
-        <p:txBody>
-          <a:bodyPr wrap="square" rtlCol="0" anchor="ctr"/>
-          <a:lstStyle/>
-          <a:p>
-            <a:pPr indent="0" marL="0">
-              <a:buNone/>
-            </a:pPr>
-            <a:r>
-              <a:rPr lang="en-US" sz="1000" dirty="0">
-                <a:solidFill>
-                  <a:srgbClr val="1F1235"/>
-                </a:solidFill>
-              </a:rPr>
-              <a:t>✓  지갑: 퍼플 재디자인 + Pi UI + 출석 Tap-to-Earn</a:t>
-            </a:r>
-            <a:endParaRPr lang="en-US" sz="1000" dirty="0"/>
-          </a:p>
-        </p:txBody>
-      </p:sp>
-      <p:sp>
-        <p:nvSpPr>
-          <p:cNvPr id="17" name="Text 15"/>
-          <p:cNvSpPr/>
-          <p:nvPr/>
-        </p:nvSpPr>
-        <p:spPr>
-          <a:xfrm>
-            <a:off x="4325112" y="2249424"/>
-            <a:ext cx="3401568" cy="338328"/>
-          </a:xfrm>
-          <a:prstGeom prst="rect">
-            <a:avLst/>
-          </a:prstGeom>
-          <a:noFill/>
-          <a:ln/>
-        </p:spPr>
-        <p:txBody>
-          <a:bodyPr wrap="square" rtlCol="0" anchor="ctr"/>
-          <a:lstStyle/>
-          <a:p>
-            <a:pPr indent="0" marL="0">
-              <a:buNone/>
-            </a:pPr>
-            <a:r>
-              <a:rPr lang="en-US" sz="1000" dirty="0">
-                <a:solidFill>
-                  <a:srgbClr val="1F1235"/>
-                </a:solidFill>
-              </a:rPr>
-              <a:t>✓  PICK주문: Realtime 추적 + 상세 + 재주문</a:t>
-            </a:r>
-            <a:endParaRPr lang="en-US" sz="1000" dirty="0"/>
-          </a:p>
-        </p:txBody>
-      </p:sp>
-      <p:sp>
-        <p:nvSpPr>
-          <p:cNvPr id="18" name="Text 16"/>
-          <p:cNvSpPr/>
-          <p:nvPr/>
-        </p:nvSpPr>
-        <p:spPr>
-          <a:xfrm>
-            <a:off x="4325112" y="2596896"/>
-            <a:ext cx="3401568" cy="338328"/>
-          </a:xfrm>
-          <a:prstGeom prst="rect">
-            <a:avLst/>
-          </a:prstGeom>
-          <a:noFill/>
-          <a:ln/>
-        </p:spPr>
-        <p:txBody>
-          <a:bodyPr wrap="square" rtlCol="0" anchor="ctr"/>
-          <a:lstStyle/>
-          <a:p>
-            <a:pPr indent="0" marL="0">
-              <a:buNone/>
-            </a:pPr>
-            <a:r>
-              <a:rPr lang="en-US" sz="1000" dirty="0">
-                <a:solidFill>
-                  <a:srgbClr val="1F1235"/>
-                </a:solidFill>
-              </a:rPr>
-              <a:t>✓  알림 드로어 + 딥링크 + 자동 트리거</a:t>
-            </a:r>
-            <a:endParaRPr lang="en-US" sz="1000" dirty="0"/>
-          </a:p>
-        </p:txBody>
-      </p:sp>
-      <p:sp>
-        <p:nvSpPr>
-          <p:cNvPr id="19" name="Text 17"/>
-          <p:cNvSpPr/>
-          <p:nvPr/>
-        </p:nvSpPr>
-        <p:spPr>
-          <a:xfrm>
-            <a:off x="4325112" y="2944368"/>
-            <a:ext cx="3401568" cy="338328"/>
-          </a:xfrm>
-          <a:prstGeom prst="rect">
-            <a:avLst/>
-          </a:prstGeom>
-          <a:noFill/>
-          <a:ln/>
-        </p:spPr>
-        <p:txBody>
-          <a:bodyPr wrap="square" rtlCol="0" anchor="ctr"/>
-          <a:lstStyle/>
-          <a:p>
-            <a:pPr indent="0" marL="0">
-              <a:buNone/>
-            </a:pPr>
-            <a:r>
-              <a:rPr lang="en-US" sz="1000" dirty="0">
-                <a:solidFill>
-                  <a:srgbClr val="1F1235"/>
-                </a:solidFill>
-              </a:rPr>
-              <a:t>✓  친구 초대 역할별 배치 (5K/10K/20K PICK)</a:t>
-            </a:r>
-            <a:endParaRPr lang="en-US" sz="1000" dirty="0"/>
-          </a:p>
-        </p:txBody>
-      </p:sp>
-      <p:sp>
-        <p:nvSpPr>
-          <p:cNvPr id="20" name="Shape 18"/>
-          <p:cNvSpPr/>
-          <p:nvPr/>
-        </p:nvSpPr>
-        <p:spPr>
-          <a:xfrm>
-            <a:off x="8092440" y="960120"/>
-            <a:ext cx="3749040" cy="2423160"/>
+          <p:cNvPr id="12" name="Shape 10"/>
+          <p:cNvSpPr/>
+          <p:nvPr/>
+        </p:nvSpPr>
+        <p:spPr>
+          <a:xfrm>
+            <a:off x="4325112" y="1097280"/>
+            <a:ext cx="530352" cy="530352"/>
           </a:xfrm>
           <a:prstGeom prst="roundRect">
             <a:avLst>
-              <a:gd name="adj" fmla="val 5660"/>
+              <a:gd name="adj" fmla="val 17241"/>
             </a:avLst>
           </a:prstGeom>
           <a:solidFill>
-            <a:srgbClr val="DCFCE7"/>
+            <a:srgbClr val="FFFFFF"/>
           </a:solidFill>
           <a:ln w="12700">
             <a:solidFill>
-              <a:srgbClr val="16A34A"/>
+              <a:srgbClr val="F9A8D4"/>
             </a:solidFill>
             <a:prstDash val="solid"/>
           </a:ln>
@@ -5703,26 +5546,176 @@
       </p:sp>
       <p:sp>
         <p:nvSpPr>
-          <p:cNvPr id="21" name="Shape 19"/>
-          <p:cNvSpPr/>
-          <p:nvPr/>
-        </p:nvSpPr>
-        <p:spPr>
-          <a:xfrm>
-            <a:off x="8202168" y="1069848"/>
-            <a:ext cx="3529584" cy="384048"/>
+          <p:cNvPr id="13" name="Text 11"/>
+          <p:cNvSpPr/>
+          <p:nvPr/>
+        </p:nvSpPr>
+        <p:spPr>
+          <a:xfrm>
+            <a:off x="4325112" y="1078992"/>
+            <a:ext cx="548640" cy="548640"/>
+          </a:xfrm>
+          <a:prstGeom prst="rect">
+            <a:avLst/>
+          </a:prstGeom>
+          <a:noFill/>
+          <a:ln/>
+        </p:spPr>
+        <p:txBody>
+          <a:bodyPr wrap="square" rtlCol="0" anchor="ctr"/>
+          <a:lstStyle/>
+          <a:p>
+            <a:pPr algn="ctr" indent="0" marL="0">
+              <a:buNone/>
+            </a:pPr>
+            <a:r>
+              <a:rPr lang="en-US" sz="1800" dirty="0">
+                <a:solidFill>
+                  <a:srgbClr val="000000"/>
+                </a:solidFill>
+              </a:rPr>
+              <a:t>👥</a:t>
+            </a:r>
+            <a:endParaRPr lang="en-US" sz="1800" dirty="0"/>
+          </a:p>
+        </p:txBody>
+      </p:sp>
+      <p:sp>
+        <p:nvSpPr>
+          <p:cNvPr id="14" name="Text 12"/>
+          <p:cNvSpPr/>
+          <p:nvPr/>
+        </p:nvSpPr>
+        <p:spPr>
+          <a:xfrm>
+            <a:off x="4965192" y="1115568"/>
+            <a:ext cx="2743200" cy="365760"/>
+          </a:xfrm>
+          <a:prstGeom prst="rect">
+            <a:avLst/>
+          </a:prstGeom>
+          <a:noFill/>
+          <a:ln/>
+        </p:spPr>
+        <p:txBody>
+          <a:bodyPr wrap="square" rtlCol="0" anchor="ctr"/>
+          <a:lstStyle/>
+          <a:p>
+            <a:pPr indent="0" marL="0">
+              <a:buNone/>
+            </a:pPr>
+            <a:r>
+              <a:rPr lang="en-US" sz="1200" b="1" dirty="0">
+                <a:solidFill>
+                  <a:srgbClr val="BE185D"/>
+                </a:solidFill>
+              </a:rPr>
+              <a:t>MyPICK 초대 3버튼</a:t>
+            </a:r>
+            <a:endParaRPr lang="en-US" sz="1200" dirty="0"/>
+          </a:p>
+        </p:txBody>
+      </p:sp>
+      <p:sp>
+        <p:nvSpPr>
+          <p:cNvPr id="15" name="Text 13"/>
+          <p:cNvSpPr/>
+          <p:nvPr/>
+        </p:nvSpPr>
+        <p:spPr>
+          <a:xfrm>
+            <a:off x="4361688" y="1627632"/>
+            <a:ext cx="3337560" cy="1298448"/>
+          </a:xfrm>
+          <a:prstGeom prst="rect">
+            <a:avLst/>
+          </a:prstGeom>
+          <a:noFill/>
+          <a:ln/>
+        </p:spPr>
+        <p:txBody>
+          <a:bodyPr wrap="square" rtlCol="0" anchor="ctr"/>
+          <a:lstStyle/>
+          <a:p>
+            <a:pPr indent="0" marL="0">
+              <a:buNone/>
+            </a:pPr>
+            <a:r>
+              <a:rPr lang="en-US" sz="1000" dirty="0">
+                <a:solidFill>
+                  <a:srgbClr val="1F1235"/>
+                </a:solidFill>
+              </a:rPr>
+              <a:t>일반 초대 / 사장님 초대 / 라이더 초대</a:t>
+            </a:r>
+            <a:endParaRPr lang="en-US" sz="1000" dirty="0"/>
+          </a:p>
+          <a:p>
+            <a:pPr indent="0" marL="0">
+              <a:buNone/>
+            </a:pPr>
+            <a:r>
+              <a:rPr lang="en-US" sz="1000" dirty="0">
+                <a:solidFill>
+                  <a:srgbClr val="1F1235"/>
+                </a:solidFill>
+              </a:rPr>
+              <a:t>역할별 링크 (?ref=CODE&amp;role=XXX)</a:t>
+            </a:r>
+            <a:endParaRPr lang="en-US" sz="1000" dirty="0"/>
+          </a:p>
+          <a:p>
+            <a:pPr indent="0" marL="0">
+              <a:buNone/>
+            </a:pPr>
+            <a:r>
+              <a:rPr lang="en-US" sz="1000" dirty="0">
+                <a:solidFill>
+                  <a:srgbClr val="1F1235"/>
+                </a:solidFill>
+              </a:rPr>
+              <a:t>'상대방 +X,000 P' 라벨 + 복사 피드백</a:t>
+            </a:r>
+            <a:endParaRPr lang="en-US" sz="1000" dirty="0"/>
+          </a:p>
+          <a:p>
+            <a:pPr indent="0" marL="0">
+              <a:buNone/>
+            </a:pPr>
+            <a:r>
+              <a:rPr lang="en-US" sz="1000" dirty="0">
+                <a:solidFill>
+                  <a:srgbClr val="1F1235"/>
+                </a:solidFill>
+              </a:rPr>
+              <a:t>사장님·라이더 대시보드도 자체 버튼</a:t>
+            </a:r>
+            <a:endParaRPr lang="en-US" sz="1000" dirty="0"/>
+          </a:p>
+        </p:txBody>
+      </p:sp>
+      <p:sp>
+        <p:nvSpPr>
+          <p:cNvPr id="16" name="Shape 14"/>
+          <p:cNvSpPr/>
+          <p:nvPr/>
+        </p:nvSpPr>
+        <p:spPr>
+          <a:xfrm>
+            <a:off x="8092440" y="914400"/>
+            <a:ext cx="3749040" cy="2148840"/>
           </a:xfrm>
           <a:prstGeom prst="roundRect">
             <a:avLst>
-              <a:gd name="adj" fmla="val 19048"/>
+              <a:gd name="adj" fmla="val 6383"/>
             </a:avLst>
           </a:prstGeom>
           <a:solidFill>
-            <a:srgbClr val="16A34A"/>
+            <a:srgbClr val="FDF2F8"/>
           </a:solidFill>
           <a:ln w="12700">
             <a:solidFill>
-              <a:srgbClr val="16A34A"/>
+              <a:srgbClr val="F9A8D4"/>
             </a:solidFill>
             <a:prstDash val="solid"/>
           </a:ln>
@@ -5730,242 +5723,26 @@
       </p:sp>
       <p:sp>
         <p:nvSpPr>
-          <p:cNvPr id="22" name="Text 20"/>
-          <p:cNvSpPr/>
-          <p:nvPr/>
-        </p:nvSpPr>
-        <p:spPr>
-          <a:xfrm>
-            <a:off x="8202168" y="1069848"/>
-            <a:ext cx="3529584" cy="384048"/>
-          </a:xfrm>
-          <a:prstGeom prst="rect">
-            <a:avLst/>
-          </a:prstGeom>
-          <a:noFill/>
-          <a:ln/>
-        </p:spPr>
-        <p:txBody>
-          <a:bodyPr wrap="square" rtlCol="0" anchor="ctr"/>
-          <a:lstStyle/>
-          <a:p>
-            <a:pPr algn="ctr" indent="0" marL="0">
-              <a:buNone/>
-            </a:pPr>
-            <a:r>
-              <a:rPr lang="en-US" sz="1200" b="1" dirty="0">
-                <a:solidFill>
-                  <a:srgbClr val="FFFFFF"/>
-                </a:solidFill>
-              </a:rPr>
-              <a:t>🛒 가맹점 / 주문 플로우</a:t>
-            </a:r>
-            <a:endParaRPr lang="en-US" sz="1200" dirty="0"/>
-          </a:p>
-        </p:txBody>
-      </p:sp>
-      <p:sp>
-        <p:nvSpPr>
-          <p:cNvPr id="23" name="Text 21"/>
-          <p:cNvSpPr/>
-          <p:nvPr/>
-        </p:nvSpPr>
-        <p:spPr>
-          <a:xfrm>
-            <a:off x="8257032" y="1554480"/>
-            <a:ext cx="3401568" cy="338328"/>
-          </a:xfrm>
-          <a:prstGeom prst="rect">
-            <a:avLst/>
-          </a:prstGeom>
-          <a:noFill/>
-          <a:ln/>
-        </p:spPr>
-        <p:txBody>
-          <a:bodyPr wrap="square" rtlCol="0" anchor="ctr"/>
-          <a:lstStyle/>
-          <a:p>
-            <a:pPr indent="0" marL="0">
-              <a:buNone/>
-            </a:pPr>
-            <a:r>
-              <a:rPr lang="en-US" sz="1000" dirty="0">
-                <a:solidFill>
-                  <a:srgbClr val="1F1235"/>
-                </a:solidFill>
-              </a:rPr>
-              <a:t>✓  가맹점 목록 (카테고리/전문검색 필터)</a:t>
-            </a:r>
-            <a:endParaRPr lang="en-US" sz="1000" dirty="0"/>
-          </a:p>
-        </p:txBody>
-      </p:sp>
-      <p:sp>
-        <p:nvSpPr>
-          <p:cNvPr id="24" name="Text 22"/>
-          <p:cNvSpPr/>
-          <p:nvPr/>
-        </p:nvSpPr>
-        <p:spPr>
-          <a:xfrm>
-            <a:off x="8257032" y="1901952"/>
-            <a:ext cx="3401568" cy="338328"/>
-          </a:xfrm>
-          <a:prstGeom prst="rect">
-            <a:avLst/>
-          </a:prstGeom>
-          <a:noFill/>
-          <a:ln/>
-        </p:spPr>
-        <p:txBody>
-          <a:bodyPr wrap="square" rtlCol="0" anchor="ctr"/>
-          <a:lstStyle/>
-          <a:p>
-            <a:pPr indent="0" marL="0">
-              <a:buNone/>
-            </a:pPr>
-            <a:r>
-              <a:rPr lang="en-US" sz="1000" dirty="0">
-                <a:solidFill>
-                  <a:srgbClr val="1F1235"/>
-                </a:solidFill>
-              </a:rPr>
-              <a:t>✓  가맹점 상세 + 메뉴 옵션 + 리뷰(이미지)</a:t>
-            </a:r>
-            <a:endParaRPr lang="en-US" sz="1000" dirty="0"/>
-          </a:p>
-        </p:txBody>
-      </p:sp>
-      <p:sp>
-        <p:nvSpPr>
-          <p:cNvPr id="25" name="Text 23"/>
-          <p:cNvSpPr/>
-          <p:nvPr/>
-        </p:nvSpPr>
-        <p:spPr>
-          <a:xfrm>
-            <a:off x="8257032" y="2249424"/>
-            <a:ext cx="3401568" cy="338328"/>
-          </a:xfrm>
-          <a:prstGeom prst="rect">
-            <a:avLst/>
-          </a:prstGeom>
-          <a:noFill/>
-          <a:ln/>
-        </p:spPr>
-        <p:txBody>
-          <a:bodyPr wrap="square" rtlCol="0" anchor="ctr"/>
-          <a:lstStyle/>
-          <a:p>
-            <a:pPr indent="0" marL="0">
-              <a:buNone/>
-            </a:pPr>
-            <a:r>
-              <a:rPr lang="en-US" sz="1000" dirty="0">
-                <a:solidFill>
-                  <a:srgbClr val="1F1235"/>
-                </a:solidFill>
-              </a:rPr>
-              <a:t>✓  쿠폰(3종) + PICK 할인 + 배달 메모</a:t>
-            </a:r>
-            <a:endParaRPr lang="en-US" sz="1000" dirty="0"/>
-          </a:p>
-        </p:txBody>
-      </p:sp>
-      <p:sp>
-        <p:nvSpPr>
-          <p:cNvPr id="26" name="Text 24"/>
-          <p:cNvSpPr/>
-          <p:nvPr/>
-        </p:nvSpPr>
-        <p:spPr>
-          <a:xfrm>
-            <a:off x="8257032" y="2596896"/>
-            <a:ext cx="3401568" cy="338328"/>
-          </a:xfrm>
-          <a:prstGeom prst="rect">
-            <a:avLst/>
-          </a:prstGeom>
-          <a:noFill/>
-          <a:ln/>
-        </p:spPr>
-        <p:txBody>
-          <a:bodyPr wrap="square" rtlCol="0" anchor="ctr"/>
-          <a:lstStyle/>
-          <a:p>
-            <a:pPr indent="0" marL="0">
-              <a:buNone/>
-            </a:pPr>
-            <a:r>
-              <a:rPr lang="en-US" sz="1000" dirty="0">
-                <a:solidFill>
-                  <a:srgbClr val="1F1235"/>
-                </a:solidFill>
-              </a:rPr>
-              <a:t>✓  PICK 결제 + 토스페이먼츠 카드 결제</a:t>
-            </a:r>
-            <a:endParaRPr lang="en-US" sz="1000" dirty="0"/>
-          </a:p>
-        </p:txBody>
-      </p:sp>
-      <p:sp>
-        <p:nvSpPr>
-          <p:cNvPr id="27" name="Text 25"/>
-          <p:cNvSpPr/>
-          <p:nvPr/>
-        </p:nvSpPr>
-        <p:spPr>
-          <a:xfrm>
-            <a:off x="8257032" y="2944368"/>
-            <a:ext cx="3401568" cy="338328"/>
-          </a:xfrm>
-          <a:prstGeom prst="rect">
-            <a:avLst/>
-          </a:prstGeom>
-          <a:noFill/>
-          <a:ln/>
-        </p:spPr>
-        <p:txBody>
-          <a:bodyPr wrap="square" rtlCol="0" anchor="ctr"/>
-          <a:lstStyle/>
-          <a:p>
-            <a:pPr indent="0" marL="0">
-              <a:buNone/>
-            </a:pPr>
-            <a:r>
-              <a:rPr lang="en-US" sz="1000" dirty="0">
-                <a:solidFill>
-                  <a:srgbClr val="1F1235"/>
-                </a:solidFill>
-              </a:rPr>
-              <a:t>✓  주문 생성 → PICK 차감 → 완료 적립</a:t>
-            </a:r>
-            <a:endParaRPr lang="en-US" sz="1000" dirty="0"/>
-          </a:p>
-        </p:txBody>
-      </p:sp>
-      <p:sp>
-        <p:nvSpPr>
-          <p:cNvPr id="28" name="Shape 26"/>
-          <p:cNvSpPr/>
-          <p:nvPr/>
-        </p:nvSpPr>
-        <p:spPr>
-          <a:xfrm>
-            <a:off x="228600" y="3566160"/>
-            <a:ext cx="3749040" cy="2423160"/>
+          <p:cNvPr id="17" name="Shape 15"/>
+          <p:cNvSpPr/>
+          <p:nvPr/>
+        </p:nvSpPr>
+        <p:spPr>
+          <a:xfrm>
+            <a:off x="8257032" y="1097280"/>
+            <a:ext cx="530352" cy="530352"/>
           </a:xfrm>
           <a:prstGeom prst="roundRect">
             <a:avLst>
-              <a:gd name="adj" fmla="val 5660"/>
+              <a:gd name="adj" fmla="val 17241"/>
             </a:avLst>
           </a:prstGeom>
           <a:solidFill>
-            <a:srgbClr val="FFFBEB"/>
+            <a:srgbClr val="FFFFFF"/>
           </a:solidFill>
           <a:ln w="12700">
             <a:solidFill>
-              <a:srgbClr val="D97706"/>
+              <a:srgbClr val="F9A8D4"/>
             </a:solidFill>
             <a:prstDash val="solid"/>
           </a:ln>
@@ -5973,26 +5750,176 @@
       </p:sp>
       <p:sp>
         <p:nvSpPr>
-          <p:cNvPr id="29" name="Shape 27"/>
-          <p:cNvSpPr/>
-          <p:nvPr/>
-        </p:nvSpPr>
-        <p:spPr>
-          <a:xfrm>
-            <a:off x="338328" y="3675888"/>
-            <a:ext cx="3529584" cy="384048"/>
+          <p:cNvPr id="18" name="Text 16"/>
+          <p:cNvSpPr/>
+          <p:nvPr/>
+        </p:nvSpPr>
+        <p:spPr>
+          <a:xfrm>
+            <a:off x="8257032" y="1078992"/>
+            <a:ext cx="548640" cy="548640"/>
+          </a:xfrm>
+          <a:prstGeom prst="rect">
+            <a:avLst/>
+          </a:prstGeom>
+          <a:noFill/>
+          <a:ln/>
+        </p:spPr>
+        <p:txBody>
+          <a:bodyPr wrap="square" rtlCol="0" anchor="ctr"/>
+          <a:lstStyle/>
+          <a:p>
+            <a:pPr algn="ctr" indent="0" marL="0">
+              <a:buNone/>
+            </a:pPr>
+            <a:r>
+              <a:rPr lang="en-US" sz="1800" dirty="0">
+                <a:solidFill>
+                  <a:srgbClr val="000000"/>
+                </a:solidFill>
+              </a:rPr>
+              <a:t>📸</a:t>
+            </a:r>
+            <a:endParaRPr lang="en-US" sz="1800" dirty="0"/>
+          </a:p>
+        </p:txBody>
+      </p:sp>
+      <p:sp>
+        <p:nvSpPr>
+          <p:cNvPr id="19" name="Text 17"/>
+          <p:cNvSpPr/>
+          <p:nvPr/>
+        </p:nvSpPr>
+        <p:spPr>
+          <a:xfrm>
+            <a:off x="8897112" y="1115568"/>
+            <a:ext cx="2743200" cy="365760"/>
+          </a:xfrm>
+          <a:prstGeom prst="rect">
+            <a:avLst/>
+          </a:prstGeom>
+          <a:noFill/>
+          <a:ln/>
+        </p:spPr>
+        <p:txBody>
+          <a:bodyPr wrap="square" rtlCol="0" anchor="ctr"/>
+          <a:lstStyle/>
+          <a:p>
+            <a:pPr indent="0" marL="0">
+              <a:buNone/>
+            </a:pPr>
+            <a:r>
+              <a:rPr lang="en-US" sz="1200" b="1" dirty="0">
+                <a:solidFill>
+                  <a:srgbClr val="BE185D"/>
+                </a:solidFill>
+              </a:rPr>
+              <a:t>리뷰 보상 가게설정 연동</a:t>
+            </a:r>
+            <a:endParaRPr lang="en-US" sz="1200" dirty="0"/>
+          </a:p>
+        </p:txBody>
+      </p:sp>
+      <p:sp>
+        <p:nvSpPr>
+          <p:cNvPr id="20" name="Text 18"/>
+          <p:cNvSpPr/>
+          <p:nvPr/>
+        </p:nvSpPr>
+        <p:spPr>
+          <a:xfrm>
+            <a:off x="8293608" y="1627632"/>
+            <a:ext cx="3337560" cy="1298448"/>
+          </a:xfrm>
+          <a:prstGeom prst="rect">
+            <a:avLst/>
+          </a:prstGeom>
+          <a:noFill/>
+          <a:ln/>
+        </p:spPr>
+        <p:txBody>
+          <a:bodyPr wrap="square" rtlCol="0" anchor="ctr"/>
+          <a:lstStyle/>
+          <a:p>
+            <a:pPr indent="0" marL="0">
+              <a:buNone/>
+            </a:pPr>
+            <a:r>
+              <a:rPr lang="en-US" sz="1000" dirty="0">
+                <a:solidFill>
+                  <a:srgbClr val="1F1235"/>
+                </a:solidFill>
+              </a:rPr>
+              <a:t>하드코딩 10 PICK → 가게 설정값 연동</a:t>
+            </a:r>
+            <a:endParaRPr lang="en-US" sz="1000" dirty="0"/>
+          </a:p>
+          <a:p>
+            <a:pPr indent="0" marL="0">
+              <a:buNone/>
+            </a:pPr>
+            <a:r>
+              <a:rPr lang="en-US" sz="1000" dirty="0">
+                <a:solidFill>
+                  <a:srgbClr val="1F1235"/>
+                </a:solidFill>
+              </a:rPr>
+              <a:t>photo_review_reward_krw 필드 활용</a:t>
+            </a:r>
+            <a:endParaRPr lang="en-US" sz="1000" dirty="0"/>
+          </a:p>
+          <a:p>
+            <a:pPr indent="0" marL="0">
+              <a:buNone/>
+            </a:pPr>
+            <a:r>
+              <a:rPr lang="en-US" sz="1000" dirty="0">
+                <a:solidFill>
+                  <a:srgbClr val="1F1235"/>
+                </a:solidFill>
+              </a:rPr>
+              <a:t>사진 첨부 시에만 보상 지급</a:t>
+            </a:r>
+            <a:endParaRPr lang="en-US" sz="1000" dirty="0"/>
+          </a:p>
+          <a:p>
+            <a:pPr indent="0" marL="0">
+              <a:buNone/>
+            </a:pPr>
+            <a:r>
+              <a:rPr lang="en-US" sz="1000" dirty="0">
+                <a:solidFill>
+                  <a:srgbClr val="1F1235"/>
+                </a:solidFill>
+              </a:rPr>
+              <a:t>보상 0인 가게는 알림 미표시</a:t>
+            </a:r>
+            <a:endParaRPr lang="en-US" sz="1000" dirty="0"/>
+          </a:p>
+        </p:txBody>
+      </p:sp>
+      <p:sp>
+        <p:nvSpPr>
+          <p:cNvPr id="21" name="Shape 19"/>
+          <p:cNvSpPr/>
+          <p:nvPr/>
+        </p:nvSpPr>
+        <p:spPr>
+          <a:xfrm>
+            <a:off x="228600" y="3246120"/>
+            <a:ext cx="3749040" cy="2148840"/>
           </a:xfrm>
           <a:prstGeom prst="roundRect">
             <a:avLst>
-              <a:gd name="adj" fmla="val 19048"/>
+              <a:gd name="adj" fmla="val 6383"/>
             </a:avLst>
           </a:prstGeom>
           <a:solidFill>
-            <a:srgbClr val="D97706"/>
+            <a:srgbClr val="FDF2F8"/>
           </a:solidFill>
           <a:ln w="12700">
             <a:solidFill>
-              <a:srgbClr val="D97706"/>
+              <a:srgbClr val="F9A8D4"/>
             </a:solidFill>
             <a:prstDash val="solid"/>
           </a:ln>
@@ -6000,278 +5927,26 @@
       </p:sp>
       <p:sp>
         <p:nvSpPr>
-          <p:cNvPr id="30" name="Text 28"/>
-          <p:cNvSpPr/>
-          <p:nvPr/>
-        </p:nvSpPr>
-        <p:spPr>
-          <a:xfrm>
-            <a:off x="338328" y="3675888"/>
-            <a:ext cx="3529584" cy="384048"/>
-          </a:xfrm>
-          <a:prstGeom prst="rect">
-            <a:avLst/>
-          </a:prstGeom>
-          <a:noFill/>
-          <a:ln/>
-        </p:spPr>
-        <p:txBody>
-          <a:bodyPr wrap="square" rtlCol="0" anchor="ctr"/>
-          <a:lstStyle/>
-          <a:p>
-            <a:pPr algn="ctr" indent="0" marL="0">
-              <a:buNone/>
-            </a:pPr>
-            <a:r>
-              <a:rPr lang="en-US" sz="1200" b="1" dirty="0">
-                <a:solidFill>
-                  <a:srgbClr val="FFFFFF"/>
-                </a:solidFill>
-              </a:rPr>
-              <a:t>👨‍🍳 사장님 기능</a:t>
-            </a:r>
-            <a:endParaRPr lang="en-US" sz="1200" dirty="0"/>
-          </a:p>
-        </p:txBody>
-      </p:sp>
-      <p:sp>
-        <p:nvSpPr>
-          <p:cNvPr id="31" name="Text 29"/>
-          <p:cNvSpPr/>
-          <p:nvPr/>
-        </p:nvSpPr>
-        <p:spPr>
-          <a:xfrm>
-            <a:off x="393192" y="4160520"/>
-            <a:ext cx="3401568" cy="338328"/>
-          </a:xfrm>
-          <a:prstGeom prst="rect">
-            <a:avLst/>
-          </a:prstGeom>
-          <a:noFill/>
-          <a:ln/>
-        </p:spPr>
-        <p:txBody>
-          <a:bodyPr wrap="square" rtlCol="0" anchor="ctr"/>
-          <a:lstStyle/>
-          <a:p>
-            <a:pPr indent="0" marL="0">
-              <a:buNone/>
-            </a:pPr>
-            <a:r>
-              <a:rPr lang="en-US" sz="1000" dirty="0">
-                <a:solidFill>
-                  <a:srgbClr val="1F1235"/>
-                </a:solidFill>
-              </a:rPr>
-              <a:t>✓  가게 등록·설정·쿠폰(KRW 입력)·영업시간</a:t>
-            </a:r>
-            <a:endParaRPr lang="en-US" sz="1000" dirty="0"/>
-          </a:p>
-        </p:txBody>
-      </p:sp>
-      <p:sp>
-        <p:nvSpPr>
-          <p:cNvPr id="32" name="Text 30"/>
-          <p:cNvSpPr/>
-          <p:nvPr/>
-        </p:nvSpPr>
-        <p:spPr>
-          <a:xfrm>
-            <a:off x="393192" y="4507992"/>
-            <a:ext cx="3401568" cy="338328"/>
-          </a:xfrm>
-          <a:prstGeom prst="rect">
-            <a:avLst/>
-          </a:prstGeom>
-          <a:noFill/>
-          <a:ln/>
-        </p:spPr>
-        <p:txBody>
-          <a:bodyPr wrap="square" rtlCol="0" anchor="ctr"/>
-          <a:lstStyle/>
-          <a:p>
-            <a:pPr indent="0" marL="0">
-              <a:buNone/>
-            </a:pPr>
-            <a:r>
-              <a:rPr lang="en-US" sz="1000" dirty="0">
-                <a:solidFill>
-                  <a:srgbClr val="1F1235"/>
-                </a:solidFill>
-              </a:rPr>
-              <a:t>✓  사진 리뷰 보상 설정 (원화→PICK 자동환산)</a:t>
-            </a:r>
-            <a:endParaRPr lang="en-US" sz="1000" dirty="0"/>
-          </a:p>
-        </p:txBody>
-      </p:sp>
-      <p:sp>
-        <p:nvSpPr>
-          <p:cNvPr id="33" name="Text 31"/>
-          <p:cNvSpPr/>
-          <p:nvPr/>
-        </p:nvSpPr>
-        <p:spPr>
-          <a:xfrm>
-            <a:off x="393192" y="4855464"/>
-            <a:ext cx="3401568" cy="338328"/>
-          </a:xfrm>
-          <a:prstGeom prst="rect">
-            <a:avLst/>
-          </a:prstGeom>
-          <a:noFill/>
-          <a:ln/>
-        </p:spPr>
-        <p:txBody>
-          <a:bodyPr wrap="square" rtlCol="0" anchor="ctr"/>
-          <a:lstStyle/>
-          <a:p>
-            <a:pPr indent="0" marL="0">
-              <a:buNone/>
-            </a:pPr>
-            <a:r>
-              <a:rPr lang="en-US" sz="1000" dirty="0">
-                <a:solidFill>
-                  <a:srgbClr val="1F1235"/>
-                </a:solidFill>
-              </a:rPr>
-              <a:t>✓  주문 관리: 수락 ETA + 거절 확인 팝업</a:t>
-            </a:r>
-            <a:endParaRPr lang="en-US" sz="1000" dirty="0"/>
-          </a:p>
-        </p:txBody>
-      </p:sp>
-      <p:sp>
-        <p:nvSpPr>
-          <p:cNvPr id="34" name="Text 32"/>
-          <p:cNvSpPr/>
-          <p:nvPr/>
-        </p:nvSpPr>
-        <p:spPr>
-          <a:xfrm>
-            <a:off x="393192" y="5202936"/>
-            <a:ext cx="3401568" cy="338328"/>
-          </a:xfrm>
-          <a:prstGeom prst="rect">
-            <a:avLst/>
-          </a:prstGeom>
-          <a:noFill/>
-          <a:ln/>
-        </p:spPr>
-        <p:txBody>
-          <a:bodyPr wrap="square" rtlCol="0" anchor="ctr"/>
-          <a:lstStyle/>
-          <a:p>
-            <a:pPr indent="0" marL="0">
-              <a:buNone/>
-            </a:pPr>
-            <a:r>
-              <a:rPr lang="en-US" sz="1000" dirty="0">
-                <a:solidFill>
-                  <a:srgbClr val="1F1235"/>
-                </a:solidFill>
-              </a:rPr>
-              <a:t>✓  매출 통계 대시보드 + 주간 차트</a:t>
-            </a:r>
-            <a:endParaRPr lang="en-US" sz="1000" dirty="0"/>
-          </a:p>
-        </p:txBody>
-      </p:sp>
-      <p:sp>
-        <p:nvSpPr>
-          <p:cNvPr id="35" name="Text 33"/>
-          <p:cNvSpPr/>
-          <p:nvPr/>
-        </p:nvSpPr>
-        <p:spPr>
-          <a:xfrm>
-            <a:off x="393192" y="5550408"/>
-            <a:ext cx="3401568" cy="338328"/>
-          </a:xfrm>
-          <a:prstGeom prst="rect">
-            <a:avLst/>
-          </a:prstGeom>
-          <a:noFill/>
-          <a:ln/>
-        </p:spPr>
-        <p:txBody>
-          <a:bodyPr wrap="square" rtlCol="0" anchor="ctr"/>
-          <a:lstStyle/>
-          <a:p>
-            <a:pPr indent="0" marL="0">
-              <a:buNone/>
-            </a:pPr>
-            <a:r>
-              <a:rPr lang="en-US" sz="1000" dirty="0">
-                <a:solidFill>
-                  <a:srgbClr val="1F1235"/>
-                </a:solidFill>
-              </a:rPr>
-              <a:t>✓  신규주문 TTS 알림 '픽픽 주문이 들어왔습니다'</a:t>
-            </a:r>
-            <a:endParaRPr lang="en-US" sz="1000" dirty="0"/>
-          </a:p>
-        </p:txBody>
-      </p:sp>
-      <p:sp>
-        <p:nvSpPr>
-          <p:cNvPr id="36" name="Text 34"/>
-          <p:cNvSpPr/>
-          <p:nvPr/>
-        </p:nvSpPr>
-        <p:spPr>
-          <a:xfrm>
-            <a:off x="393192" y="5897880"/>
-            <a:ext cx="3401568" cy="338328"/>
-          </a:xfrm>
-          <a:prstGeom prst="rect">
-            <a:avLst/>
-          </a:prstGeom>
-          <a:noFill/>
-          <a:ln/>
-        </p:spPr>
-        <p:txBody>
-          <a:bodyPr wrap="square" rtlCol="0" anchor="ctr"/>
-          <a:lstStyle/>
-          <a:p>
-            <a:pPr indent="0" marL="0">
-              <a:buNone/>
-            </a:pPr>
-            <a:r>
-              <a:rPr lang="en-US" sz="1000" dirty="0">
-                <a:solidFill>
-                  <a:srgbClr val="1F1235"/>
-                </a:solidFill>
-              </a:rPr>
-              <a:t>✓  신규 가맹점 초대 리워드 20,000 PICK</a:t>
-            </a:r>
-            <a:endParaRPr lang="en-US" sz="1000" dirty="0"/>
-          </a:p>
-        </p:txBody>
-      </p:sp>
-      <p:sp>
-        <p:nvSpPr>
-          <p:cNvPr id="37" name="Shape 35"/>
-          <p:cNvSpPr/>
-          <p:nvPr/>
-        </p:nvSpPr>
-        <p:spPr>
-          <a:xfrm>
-            <a:off x="4160520" y="3566160"/>
-            <a:ext cx="3749040" cy="2423160"/>
+          <p:cNvPr id="22" name="Shape 20"/>
+          <p:cNvSpPr/>
+          <p:nvPr/>
+        </p:nvSpPr>
+        <p:spPr>
+          <a:xfrm>
+            <a:off x="393192" y="3429000"/>
+            <a:ext cx="530352" cy="530352"/>
           </a:xfrm>
           <a:prstGeom prst="roundRect">
             <a:avLst>
-              <a:gd name="adj" fmla="val 5660"/>
+              <a:gd name="adj" fmla="val 17241"/>
             </a:avLst>
           </a:prstGeom>
           <a:solidFill>
-            <a:srgbClr val="ECFEFF"/>
+            <a:srgbClr val="FFFFFF"/>
           </a:solidFill>
           <a:ln w="12700">
             <a:solidFill>
-              <a:srgbClr val="0891B2"/>
+              <a:srgbClr val="F9A8D4"/>
             </a:solidFill>
             <a:prstDash val="solid"/>
           </a:ln>
@@ -6279,26 +5954,176 @@
       </p:sp>
       <p:sp>
         <p:nvSpPr>
-          <p:cNvPr id="38" name="Shape 36"/>
-          <p:cNvSpPr/>
-          <p:nvPr/>
-        </p:nvSpPr>
-        <p:spPr>
-          <a:xfrm>
-            <a:off x="4270248" y="3675888"/>
-            <a:ext cx="3529584" cy="384048"/>
+          <p:cNvPr id="23" name="Text 21"/>
+          <p:cNvSpPr/>
+          <p:nvPr/>
+        </p:nvSpPr>
+        <p:spPr>
+          <a:xfrm>
+            <a:off x="393192" y="3410712"/>
+            <a:ext cx="548640" cy="548640"/>
+          </a:xfrm>
+          <a:prstGeom prst="rect">
+            <a:avLst/>
+          </a:prstGeom>
+          <a:noFill/>
+          <a:ln/>
+        </p:spPr>
+        <p:txBody>
+          <a:bodyPr wrap="square" rtlCol="0" anchor="ctr"/>
+          <a:lstStyle/>
+          <a:p>
+            <a:pPr algn="ctr" indent="0" marL="0">
+              <a:buNone/>
+            </a:pPr>
+            <a:r>
+              <a:rPr lang="en-US" sz="1800" dirty="0">
+                <a:solidFill>
+                  <a:srgbClr val="000000"/>
+                </a:solidFill>
+              </a:rPr>
+              <a:t>📍</a:t>
+            </a:r>
+            <a:endParaRPr lang="en-US" sz="1800" dirty="0"/>
+          </a:p>
+        </p:txBody>
+      </p:sp>
+      <p:sp>
+        <p:nvSpPr>
+          <p:cNvPr id="24" name="Text 22"/>
+          <p:cNvSpPr/>
+          <p:nvPr/>
+        </p:nvSpPr>
+        <p:spPr>
+          <a:xfrm>
+            <a:off x="1033272" y="3447288"/>
+            <a:ext cx="2743200" cy="365760"/>
+          </a:xfrm>
+          <a:prstGeom prst="rect">
+            <a:avLst/>
+          </a:prstGeom>
+          <a:noFill/>
+          <a:ln/>
+        </p:spPr>
+        <p:txBody>
+          <a:bodyPr wrap="square" rtlCol="0" anchor="ctr"/>
+          <a:lstStyle/>
+          <a:p>
+            <a:pPr indent="0" marL="0">
+              <a:buNone/>
+            </a:pPr>
+            <a:r>
+              <a:rPr lang="en-US" sz="1200" b="1" dirty="0">
+                <a:solidFill>
+                  <a:srgbClr val="BE185D"/>
+                </a:solidFill>
+              </a:rPr>
+              <a:t>라이더 5km 반경 필터</a:t>
+            </a:r>
+            <a:endParaRPr lang="en-US" sz="1200" dirty="0"/>
+          </a:p>
+        </p:txBody>
+      </p:sp>
+      <p:sp>
+        <p:nvSpPr>
+          <p:cNvPr id="25" name="Text 23"/>
+          <p:cNvSpPr/>
+          <p:nvPr/>
+        </p:nvSpPr>
+        <p:spPr>
+          <a:xfrm>
+            <a:off x="429768" y="3959352"/>
+            <a:ext cx="3337560" cy="1298448"/>
+          </a:xfrm>
+          <a:prstGeom prst="rect">
+            <a:avLst/>
+          </a:prstGeom>
+          <a:noFill/>
+          <a:ln/>
+        </p:spPr>
+        <p:txBody>
+          <a:bodyPr wrap="square" rtlCol="0" anchor="ctr"/>
+          <a:lstStyle/>
+          <a:p>
+            <a:pPr indent="0" marL="0">
+              <a:buNone/>
+            </a:pPr>
+            <a:r>
+              <a:rPr lang="en-US" sz="1000" dirty="0">
+                <a:solidFill>
+                  <a:srgbClr val="1F1235"/>
+                </a:solidFill>
+              </a:rPr>
+              <a:t>Haversine 공식으로 거리 계산</a:t>
+            </a:r>
+            <a:endParaRPr lang="en-US" sz="1000" dirty="0"/>
+          </a:p>
+          <a:p>
+            <a:pPr indent="0" marL="0">
+              <a:buNone/>
+            </a:pPr>
+            <a:r>
+              <a:rPr lang="en-US" sz="1000" dirty="0">
+                <a:solidFill>
+                  <a:srgbClr val="1F1235"/>
+                </a:solidFill>
+              </a:rPr>
+              <a:t>가게 기준 5km 이내 주문만 노출</a:t>
+            </a:r>
+            <a:endParaRPr lang="en-US" sz="1000" dirty="0"/>
+          </a:p>
+          <a:p>
+            <a:pPr indent="0" marL="0">
+              <a:buNone/>
+            </a:pPr>
+            <a:r>
+              <a:rPr lang="en-US" sz="1000" dirty="0">
+                <a:solidFill>
+                  <a:srgbClr val="1F1235"/>
+                </a:solidFill>
+              </a:rPr>
+              <a:t>거리순 정렬 (가까운 주문 상단)</a:t>
+            </a:r>
+            <a:endParaRPr lang="en-US" sz="1000" dirty="0"/>
+          </a:p>
+          <a:p>
+            <a:pPr indent="0" marL="0">
+              <a:buNone/>
+            </a:pPr>
+            <a:r>
+              <a:rPr lang="en-US" sz="1000" dirty="0">
+                <a:solidFill>
+                  <a:srgbClr val="1F1235"/>
+                </a:solidFill>
+              </a:rPr>
+              <a:t>조리완료 알림도 5km 라이더만 수신</a:t>
+            </a:r>
+            <a:endParaRPr lang="en-US" sz="1000" dirty="0"/>
+          </a:p>
+        </p:txBody>
+      </p:sp>
+      <p:sp>
+        <p:nvSpPr>
+          <p:cNvPr id="26" name="Shape 24"/>
+          <p:cNvSpPr/>
+          <p:nvPr/>
+        </p:nvSpPr>
+        <p:spPr>
+          <a:xfrm>
+            <a:off x="4160520" y="3246120"/>
+            <a:ext cx="3749040" cy="2148840"/>
           </a:xfrm>
           <a:prstGeom prst="roundRect">
             <a:avLst>
-              <a:gd name="adj" fmla="val 19048"/>
+              <a:gd name="adj" fmla="val 6383"/>
             </a:avLst>
           </a:prstGeom>
           <a:solidFill>
-            <a:srgbClr val="0891B2"/>
+            <a:srgbClr val="FDF2F8"/>
           </a:solidFill>
           <a:ln w="12700">
             <a:solidFill>
-              <a:srgbClr val="0891B2"/>
+              <a:srgbClr val="F9A8D4"/>
             </a:solidFill>
             <a:prstDash val="solid"/>
           </a:ln>
@@ -6306,242 +6131,26 @@
       </p:sp>
       <p:sp>
         <p:nvSpPr>
-          <p:cNvPr id="39" name="Text 37"/>
-          <p:cNvSpPr/>
-          <p:nvPr/>
-        </p:nvSpPr>
-        <p:spPr>
-          <a:xfrm>
-            <a:off x="4270248" y="3675888"/>
-            <a:ext cx="3529584" cy="384048"/>
-          </a:xfrm>
-          <a:prstGeom prst="rect">
-            <a:avLst/>
-          </a:prstGeom>
-          <a:noFill/>
-          <a:ln/>
-        </p:spPr>
-        <p:txBody>
-          <a:bodyPr wrap="square" rtlCol="0" anchor="ctr"/>
-          <a:lstStyle/>
-          <a:p>
-            <a:pPr algn="ctr" indent="0" marL="0">
-              <a:buNone/>
-            </a:pPr>
-            <a:r>
-              <a:rPr lang="en-US" sz="1200" b="1" dirty="0">
-                <a:solidFill>
-                  <a:srgbClr val="FFFFFF"/>
-                </a:solidFill>
-              </a:rPr>
-              <a:t>🛵 라이더 / PWA / 인프라</a:t>
-            </a:r>
-            <a:endParaRPr lang="en-US" sz="1200" dirty="0"/>
-          </a:p>
-        </p:txBody>
-      </p:sp>
-      <p:sp>
-        <p:nvSpPr>
-          <p:cNvPr id="40" name="Text 38"/>
-          <p:cNvSpPr/>
-          <p:nvPr/>
-        </p:nvSpPr>
-        <p:spPr>
-          <a:xfrm>
-            <a:off x="4325112" y="4160520"/>
-            <a:ext cx="3401568" cy="338328"/>
-          </a:xfrm>
-          <a:prstGeom prst="rect">
-            <a:avLst/>
-          </a:prstGeom>
-          <a:noFill/>
-          <a:ln/>
-        </p:spPr>
-        <p:txBody>
-          <a:bodyPr wrap="square" rtlCol="0" anchor="ctr"/>
-          <a:lstStyle/>
-          <a:p>
-            <a:pPr indent="0" marL="0">
-              <a:buNone/>
-            </a:pPr>
-            <a:r>
-              <a:rPr lang="en-US" sz="1000" dirty="0">
-                <a:solidFill>
-                  <a:srgbClr val="1F1235"/>
-                </a:solidFill>
-              </a:rPr>
-              <a:t>✓  배달 수락 → PICK 자동 지급 + 위치 공유</a:t>
-            </a:r>
-            <a:endParaRPr lang="en-US" sz="1000" dirty="0"/>
-          </a:p>
-        </p:txBody>
-      </p:sp>
-      <p:sp>
-        <p:nvSpPr>
-          <p:cNvPr id="41" name="Text 39"/>
-          <p:cNvSpPr/>
-          <p:nvPr/>
-        </p:nvSpPr>
-        <p:spPr>
-          <a:xfrm>
-            <a:off x="4325112" y="4507992"/>
-            <a:ext cx="3401568" cy="338328"/>
-          </a:xfrm>
-          <a:prstGeom prst="rect">
-            <a:avLst/>
-          </a:prstGeom>
-          <a:noFill/>
-          <a:ln/>
-        </p:spPr>
-        <p:txBody>
-          <a:bodyPr wrap="square" rtlCol="0" anchor="ctr"/>
-          <a:lstStyle/>
-          <a:p>
-            <a:pPr indent="0" marL="0">
-              <a:buNone/>
-            </a:pPr>
-            <a:r>
-              <a:rPr lang="en-US" sz="1000" dirty="0">
-                <a:solidFill>
-                  <a:srgbClr val="1F1235"/>
-                </a:solidFill>
-              </a:rPr>
-              <a:t>✓  라이더 TTS 알림 '픽픽 라이더 요청이 왔습니다'</a:t>
-            </a:r>
-            <a:endParaRPr lang="en-US" sz="1000" dirty="0"/>
-          </a:p>
-        </p:txBody>
-      </p:sp>
-      <p:sp>
-        <p:nvSpPr>
-          <p:cNvPr id="42" name="Text 40"/>
-          <p:cNvSpPr/>
-          <p:nvPr/>
-        </p:nvSpPr>
-        <p:spPr>
-          <a:xfrm>
-            <a:off x="4325112" y="4855464"/>
-            <a:ext cx="3401568" cy="338328"/>
-          </a:xfrm>
-          <a:prstGeom prst="rect">
-            <a:avLst/>
-          </a:prstGeom>
-          <a:noFill/>
-          <a:ln/>
-        </p:spPr>
-        <p:txBody>
-          <a:bodyPr wrap="square" rtlCol="0" anchor="ctr"/>
-          <a:lstStyle/>
-          <a:p>
-            <a:pPr indent="0" marL="0">
-              <a:buNone/>
-            </a:pPr>
-            <a:r>
-              <a:rPr lang="en-US" sz="1000" dirty="0">
-                <a:solidFill>
-                  <a:srgbClr val="1F1235"/>
-                </a:solidFill>
-              </a:rPr>
-              <a:t>✓  FCM 푸시 알림 + 관리자 일괄 발송</a:t>
-            </a:r>
-            <a:endParaRPr lang="en-US" sz="1000" dirty="0"/>
-          </a:p>
-        </p:txBody>
-      </p:sp>
-      <p:sp>
-        <p:nvSpPr>
-          <p:cNvPr id="43" name="Text 41"/>
-          <p:cNvSpPr/>
-          <p:nvPr/>
-        </p:nvSpPr>
-        <p:spPr>
-          <a:xfrm>
-            <a:off x="4325112" y="5202936"/>
-            <a:ext cx="3401568" cy="338328"/>
-          </a:xfrm>
-          <a:prstGeom prst="rect">
-            <a:avLst/>
-          </a:prstGeom>
-          <a:noFill/>
-          <a:ln/>
-        </p:spPr>
-        <p:txBody>
-          <a:bodyPr wrap="square" rtlCol="0" anchor="ctr"/>
-          <a:lstStyle/>
-          <a:p>
-            <a:pPr indent="0" marL="0">
-              <a:buNone/>
-            </a:pPr>
-            <a:r>
-              <a:rPr lang="en-US" sz="1000" dirty="0">
-                <a:solidFill>
-                  <a:srgbClr val="1F1235"/>
-                </a:solidFill>
-              </a:rPr>
-              <a:t>✓  PWA 오프라인 캐싱 (Serwist)</a:t>
-            </a:r>
-            <a:endParaRPr lang="en-US" sz="1000" dirty="0"/>
-          </a:p>
-        </p:txBody>
-      </p:sp>
-      <p:sp>
-        <p:nvSpPr>
-          <p:cNvPr id="44" name="Text 42"/>
-          <p:cNvSpPr/>
-          <p:nvPr/>
-        </p:nvSpPr>
-        <p:spPr>
-          <a:xfrm>
-            <a:off x="4325112" y="5550408"/>
-            <a:ext cx="3401568" cy="338328"/>
-          </a:xfrm>
-          <a:prstGeom prst="rect">
-            <a:avLst/>
-          </a:prstGeom>
-          <a:noFill/>
-          <a:ln/>
-        </p:spPr>
-        <p:txBody>
-          <a:bodyPr wrap="square" rtlCol="0" anchor="ctr"/>
-          <a:lstStyle/>
-          <a:p>
-            <a:pPr indent="0" marL="0">
-              <a:buNone/>
-            </a:pPr>
-            <a:r>
-              <a:rPr lang="en-US" sz="1000" dirty="0">
-                <a:solidFill>
-                  <a:srgbClr val="1F1235"/>
-                </a:solidFill>
-              </a:rPr>
-              <a:t>✓  Sentry 모니터링 + 가맹점 광고 시스템</a:t>
-            </a:r>
-            <a:endParaRPr lang="en-US" sz="1000" dirty="0"/>
-          </a:p>
-        </p:txBody>
-      </p:sp>
-      <p:sp>
-        <p:nvSpPr>
-          <p:cNvPr id="45" name="Shape 43"/>
-          <p:cNvSpPr/>
-          <p:nvPr/>
-        </p:nvSpPr>
-        <p:spPr>
-          <a:xfrm>
-            <a:off x="8092440" y="3566160"/>
-            <a:ext cx="3749040" cy="2423160"/>
+          <p:cNvPr id="27" name="Shape 25"/>
+          <p:cNvSpPr/>
+          <p:nvPr/>
+        </p:nvSpPr>
+        <p:spPr>
+          <a:xfrm>
+            <a:off x="4325112" y="3429000"/>
+            <a:ext cx="530352" cy="530352"/>
           </a:xfrm>
           <a:prstGeom prst="roundRect">
             <a:avLst>
-              <a:gd name="adj" fmla="val 5660"/>
+              <a:gd name="adj" fmla="val 17241"/>
             </a:avLst>
           </a:prstGeom>
           <a:solidFill>
-            <a:srgbClr val="FFEDD5"/>
+            <a:srgbClr val="FFFFFF"/>
           </a:solidFill>
           <a:ln w="12700">
             <a:solidFill>
-              <a:srgbClr val="EA580C"/>
+              <a:srgbClr val="F9A8D4"/>
             </a:solidFill>
             <a:prstDash val="solid"/>
           </a:ln>
@@ -6549,26 +6158,176 @@
       </p:sp>
       <p:sp>
         <p:nvSpPr>
-          <p:cNvPr id="46" name="Shape 44"/>
-          <p:cNvSpPr/>
-          <p:nvPr/>
-        </p:nvSpPr>
-        <p:spPr>
-          <a:xfrm>
-            <a:off x="8202168" y="3675888"/>
-            <a:ext cx="3529584" cy="384048"/>
+          <p:cNvPr id="28" name="Text 26"/>
+          <p:cNvSpPr/>
+          <p:nvPr/>
+        </p:nvSpPr>
+        <p:spPr>
+          <a:xfrm>
+            <a:off x="4325112" y="3410712"/>
+            <a:ext cx="548640" cy="548640"/>
+          </a:xfrm>
+          <a:prstGeom prst="rect">
+            <a:avLst/>
+          </a:prstGeom>
+          <a:noFill/>
+          <a:ln/>
+        </p:spPr>
+        <p:txBody>
+          <a:bodyPr wrap="square" rtlCol="0" anchor="ctr"/>
+          <a:lstStyle/>
+          <a:p>
+            <a:pPr algn="ctr" indent="0" marL="0">
+              <a:buNone/>
+            </a:pPr>
+            <a:r>
+              <a:rPr lang="en-US" sz="1800" dirty="0">
+                <a:solidFill>
+                  <a:srgbClr val="000000"/>
+                </a:solidFill>
+              </a:rPr>
+              <a:t>⏰</a:t>
+            </a:r>
+            <a:endParaRPr lang="en-US" sz="1800" dirty="0"/>
+          </a:p>
+        </p:txBody>
+      </p:sp>
+      <p:sp>
+        <p:nvSpPr>
+          <p:cNvPr id="29" name="Text 27"/>
+          <p:cNvSpPr/>
+          <p:nvPr/>
+        </p:nvSpPr>
+        <p:spPr>
+          <a:xfrm>
+            <a:off x="4965192" y="3447288"/>
+            <a:ext cx="2743200" cy="365760"/>
+          </a:xfrm>
+          <a:prstGeom prst="rect">
+            <a:avLst/>
+          </a:prstGeom>
+          <a:noFill/>
+          <a:ln/>
+        </p:spPr>
+        <p:txBody>
+          <a:bodyPr wrap="square" rtlCol="0" anchor="ctr"/>
+          <a:lstStyle/>
+          <a:p>
+            <a:pPr indent="0" marL="0">
+              <a:buNone/>
+            </a:pPr>
+            <a:r>
+              <a:rPr lang="en-US" sz="1200" b="1" dirty="0">
+                <a:solidFill>
+                  <a:srgbClr val="BE185D"/>
+                </a:solidFill>
+              </a:rPr>
+              <a:t>라이더 자동오프라인 Cron</a:t>
+            </a:r>
+            <a:endParaRPr lang="en-US" sz="1200" dirty="0"/>
+          </a:p>
+        </p:txBody>
+      </p:sp>
+      <p:sp>
+        <p:nvSpPr>
+          <p:cNvPr id="30" name="Text 28"/>
+          <p:cNvSpPr/>
+          <p:nvPr/>
+        </p:nvSpPr>
+        <p:spPr>
+          <a:xfrm>
+            <a:off x="4361688" y="3959352"/>
+            <a:ext cx="3337560" cy="1298448"/>
+          </a:xfrm>
+          <a:prstGeom prst="rect">
+            <a:avLst/>
+          </a:prstGeom>
+          <a:noFill/>
+          <a:ln/>
+        </p:spPr>
+        <p:txBody>
+          <a:bodyPr wrap="square" rtlCol="0" anchor="ctr"/>
+          <a:lstStyle/>
+          <a:p>
+            <a:pPr indent="0" marL="0">
+              <a:buNone/>
+            </a:pPr>
+            <a:r>
+              <a:rPr lang="en-US" sz="1000" dirty="0">
+                <a:solidFill>
+                  <a:srgbClr val="1F1235"/>
+                </a:solidFill>
+              </a:rPr>
+              <a:t>10분간 위치 미업데이트 → 자동 오프라인</a:t>
+            </a:r>
+            <a:endParaRPr lang="en-US" sz="1000" dirty="0"/>
+          </a:p>
+          <a:p>
+            <a:pPr indent="0" marL="0">
+              <a:buNone/>
+            </a:pPr>
+            <a:r>
+              <a:rPr lang="en-US" sz="1000" dirty="0">
+                <a:solidFill>
+                  <a:srgbClr val="1F1235"/>
+                </a:solidFill>
+              </a:rPr>
+              <a:t>Vercel Cron 매 5분 실행</a:t>
+            </a:r>
+            <a:endParaRPr lang="en-US" sz="1000" dirty="0"/>
+          </a:p>
+          <a:p>
+            <a:pPr indent="0" marL="0">
+              <a:buNone/>
+            </a:pPr>
+            <a:r>
+              <a:rPr lang="en-US" sz="1000" dirty="0">
+                <a:solidFill>
+                  <a:srgbClr val="1F1235"/>
+                </a:solidFill>
+              </a:rPr>
+              <a:t>rider_locations.updated_at 기준 판별</a:t>
+            </a:r>
+            <a:endParaRPr lang="en-US" sz="1000" dirty="0"/>
+          </a:p>
+          <a:p>
+            <a:pPr indent="0" marL="0">
+              <a:buNone/>
+            </a:pPr>
+            <a:r>
+              <a:rPr lang="en-US" sz="1000" dirty="0">
+                <a:solidFill>
+                  <a:srgbClr val="1F1235"/>
+                </a:solidFill>
+              </a:rPr>
+              <a:t>오프라인 전환 시 라이더에게 알림 발송</a:t>
+            </a:r>
+            <a:endParaRPr lang="en-US" sz="1000" dirty="0"/>
+          </a:p>
+        </p:txBody>
+      </p:sp>
+      <p:sp>
+        <p:nvSpPr>
+          <p:cNvPr id="31" name="Shape 29"/>
+          <p:cNvSpPr/>
+          <p:nvPr/>
+        </p:nvSpPr>
+        <p:spPr>
+          <a:xfrm>
+            <a:off x="8092440" y="3246120"/>
+            <a:ext cx="3749040" cy="2148840"/>
           </a:xfrm>
           <a:prstGeom prst="roundRect">
             <a:avLst>
-              <a:gd name="adj" fmla="val 19048"/>
+              <a:gd name="adj" fmla="val 6383"/>
             </a:avLst>
           </a:prstGeom>
           <a:solidFill>
-            <a:srgbClr val="EA580C"/>
+            <a:srgbClr val="FDF2F8"/>
           </a:solidFill>
           <a:ln w="12700">
             <a:solidFill>
-              <a:srgbClr val="EA580C"/>
+              <a:srgbClr val="F9A8D4"/>
             </a:solidFill>
             <a:prstDash val="solid"/>
           </a:ln>
@@ -6576,14 +6335,41 @@
       </p:sp>
       <p:sp>
         <p:nvSpPr>
-          <p:cNvPr id="47" name="Text 45"/>
-          <p:cNvSpPr/>
-          <p:nvPr/>
-        </p:nvSpPr>
-        <p:spPr>
-          <a:xfrm>
-            <a:off x="8202168" y="3675888"/>
-            <a:ext cx="3529584" cy="384048"/>
+          <p:cNvPr id="32" name="Shape 30"/>
+          <p:cNvSpPr/>
+          <p:nvPr/>
+        </p:nvSpPr>
+        <p:spPr>
+          <a:xfrm>
+            <a:off x="8257032" y="3429000"/>
+            <a:ext cx="530352" cy="530352"/>
+          </a:xfrm>
+          <a:prstGeom prst="roundRect">
+            <a:avLst>
+              <a:gd name="adj" fmla="val 17241"/>
+            </a:avLst>
+          </a:prstGeom>
+          <a:solidFill>
+            <a:srgbClr val="FFFFFF"/>
+          </a:solidFill>
+          <a:ln w="12700">
+            <a:solidFill>
+              <a:srgbClr val="F9A8D4"/>
+            </a:solidFill>
+            <a:prstDash val="solid"/>
+          </a:ln>
+        </p:spPr>
+      </p:sp>
+      <p:sp>
+        <p:nvSpPr>
+          <p:cNvPr id="33" name="Text 31"/>
+          <p:cNvSpPr/>
+          <p:nvPr/>
+        </p:nvSpPr>
+        <p:spPr>
+          <a:xfrm>
+            <a:off x="8257032" y="3410712"/>
+            <a:ext cx="548640" cy="548640"/>
           </a:xfrm>
           <a:prstGeom prst="rect">
             <a:avLst/>
@@ -6599,12 +6385,48 @@
               <a:buNone/>
             </a:pPr>
             <a:r>
+              <a:rPr lang="en-US" sz="1800" dirty="0">
+                <a:solidFill>
+                  <a:srgbClr val="000000"/>
+                </a:solidFill>
+              </a:rPr>
+              <a:t>✅</a:t>
+            </a:r>
+            <a:endParaRPr lang="en-US" sz="1800" dirty="0"/>
+          </a:p>
+        </p:txBody>
+      </p:sp>
+      <p:sp>
+        <p:nvSpPr>
+          <p:cNvPr id="34" name="Text 32"/>
+          <p:cNvSpPr/>
+          <p:nvPr/>
+        </p:nvSpPr>
+        <p:spPr>
+          <a:xfrm>
+            <a:off x="8897112" y="3447288"/>
+            <a:ext cx="2743200" cy="365760"/>
+          </a:xfrm>
+          <a:prstGeom prst="rect">
+            <a:avLst/>
+          </a:prstGeom>
+          <a:noFill/>
+          <a:ln/>
+        </p:spPr>
+        <p:txBody>
+          <a:bodyPr wrap="square" rtlCol="0" anchor="ctr"/>
+          <a:lstStyle/>
+          <a:p>
+            <a:pPr indent="0" marL="0">
+              <a:buNone/>
+            </a:pPr>
+            <a:r>
               <a:rPr lang="en-US" sz="1200" b="1" dirty="0">
                 <a:solidFill>
-                  <a:srgbClr val="FFFFFF"/>
-                </a:solidFill>
-              </a:rPr>
-              <a:t>🛡️ DB / 보안 / 관리자</a:t>
+                  <a:srgbClr val="BE185D"/>
+                </a:solidFill>
+              </a:rPr>
+              <a:t>사장님/라이더 타 가게 주문</a:t>
             </a:r>
             <a:endParaRPr lang="en-US" sz="1200" dirty="0"/>
           </a:p>
@@ -6612,14 +6434,14 @@
       </p:sp>
       <p:sp>
         <p:nvSpPr>
-          <p:cNvPr id="48" name="Text 46"/>
-          <p:cNvSpPr/>
-          <p:nvPr/>
-        </p:nvSpPr>
-        <p:spPr>
-          <a:xfrm>
-            <a:off x="8257032" y="4160520"/>
-            <a:ext cx="3401568" cy="338328"/>
+          <p:cNvPr id="35" name="Text 33"/>
+          <p:cNvSpPr/>
+          <p:nvPr/>
+        </p:nvSpPr>
+        <p:spPr>
+          <a:xfrm>
+            <a:off x="8293608" y="3959352"/>
+            <a:ext cx="3337560" cy="1298448"/>
           </a:xfrm>
           <a:prstGeom prst="rect">
             <a:avLst/>
@@ -6640,32 +6462,10 @@
                   <a:srgbClr val="1F1235"/>
                 </a:solidFill>
               </a:rPr>
-              <a:t>✓  DB 인덱스 30개+ (GIN 전문검색 포함)</a:t>
+              <a:t>사장님·라이더도 타 가게 주문 가능</a:t>
             </a:r>
             <a:endParaRPr lang="en-US" sz="1000" dirty="0"/>
           </a:p>
-        </p:txBody>
-      </p:sp>
-      <p:sp>
-        <p:nvSpPr>
-          <p:cNvPr id="49" name="Text 47"/>
-          <p:cNvSpPr/>
-          <p:nvPr/>
-        </p:nvSpPr>
-        <p:spPr>
-          <a:xfrm>
-            <a:off x="8257032" y="4507992"/>
-            <a:ext cx="3401568" cy="338328"/>
-          </a:xfrm>
-          <a:prstGeom prst="rect">
-            <a:avLst/>
-          </a:prstGeom>
-          <a:noFill/>
-          <a:ln/>
-        </p:spPr>
-        <p:txBody>
-          <a:bodyPr wrap="square" rtlCol="0" anchor="ctr"/>
-          <a:lstStyle/>
           <a:p>
             <a:pPr indent="0" marL="0">
               <a:buNone/>
@@ -6676,32 +6476,10 @@
                   <a:srgbClr val="1F1235"/>
                 </a:solidFill>
               </a:rPr>
-              <a:t>✓  운영 RLS 정책 + Storage 버킷 정책</a:t>
+              <a:t>역할 제한 없음 (user/owner/rider 모두)</a:t>
             </a:r>
             <a:endParaRPr lang="en-US" sz="1000" dirty="0"/>
           </a:p>
-        </p:txBody>
-      </p:sp>
-      <p:sp>
-        <p:nvSpPr>
-          <p:cNvPr id="50" name="Text 48"/>
-          <p:cNvSpPr/>
-          <p:nvPr/>
-        </p:nvSpPr>
-        <p:spPr>
-          <a:xfrm>
-            <a:off x="8257032" y="4855464"/>
-            <a:ext cx="3401568" cy="338328"/>
-          </a:xfrm>
-          <a:prstGeom prst="rect">
-            <a:avLst/>
-          </a:prstGeom>
-          <a:noFill/>
-          <a:ln/>
-        </p:spPr>
-        <p:txBody>
-          <a:bodyPr wrap="square" rtlCol="0" anchor="ctr"/>
-          <a:lstStyle/>
           <a:p>
             <a:pPr indent="0" marL="0">
               <a:buNone/>
@@ -6712,32 +6490,10 @@
                   <a:srgbClr val="1F1235"/>
                 </a:solidFill>
               </a:rPr>
-              <a:t>✓  관리자 5탭: 통계·회원·가게·쿠폰·FCM 푸시</a:t>
+              <a:t>API 주문 생성에 역할 제약 없음</a:t>
             </a:r>
             <a:endParaRPr lang="en-US" sz="1000" dirty="0"/>
           </a:p>
-        </p:txBody>
-      </p:sp>
-      <p:sp>
-        <p:nvSpPr>
-          <p:cNvPr id="51" name="Text 49"/>
-          <p:cNvSpPr/>
-          <p:nvPr/>
-        </p:nvSpPr>
-        <p:spPr>
-          <a:xfrm>
-            <a:off x="8257032" y="5202936"/>
-            <a:ext cx="3401568" cy="338328"/>
-          </a:xfrm>
-          <a:prstGeom prst="rect">
-            <a:avLst/>
-          </a:prstGeom>
-          <a:noFill/>
-          <a:ln/>
-        </p:spPr>
-        <p:txBody>
-          <a:bodyPr wrap="square" rtlCol="0" anchor="ctr"/>
-          <a:lstStyle/>
           <a:p>
             <a:pPr indent="0" marL="0">
               <a:buNone/>
@@ -6748,43 +6504,7 @@
                   <a:srgbClr val="1F1235"/>
                 </a:solidFill>
               </a:rPr>
-              <a:t>✓  404·에러·로딩·스플래시 페이지</a:t>
-            </a:r>
-            <a:endParaRPr lang="en-US" sz="1000" dirty="0"/>
-          </a:p>
-        </p:txBody>
-      </p:sp>
-      <p:sp>
-        <p:nvSpPr>
-          <p:cNvPr id="52" name="Text 50"/>
-          <p:cNvSpPr/>
-          <p:nvPr/>
-        </p:nvSpPr>
-        <p:spPr>
-          <a:xfrm>
-            <a:off x="8257032" y="5550408"/>
-            <a:ext cx="3401568" cy="338328"/>
-          </a:xfrm>
-          <a:prstGeom prst="rect">
-            <a:avLst/>
-          </a:prstGeom>
-          <a:noFill/>
-          <a:ln/>
-        </p:spPr>
-        <p:txBody>
-          <a:bodyPr wrap="square" rtlCol="0" anchor="ctr"/>
-          <a:lstStyle/>
-          <a:p>
-            <a:pPr indent="0" marL="0">
-              <a:buNone/>
-            </a:pPr>
-            <a:r>
-              <a:rPr lang="en-US" sz="1000" dirty="0">
-                <a:solidFill>
-                  <a:srgbClr val="1F1235"/>
-                </a:solidFill>
-              </a:rPr>
-              <a:t>✓  다크모드 + Tailwind dark: 클래스 전면 적용</a:t>
+              <a:t>실제 사용 시나리오 검증 완료</a:t>
             </a:r>
             <a:endParaRPr lang="en-US" sz="1000" dirty="0"/>
           </a:p>
@@ -6847,14 +6567,14 @@
               <a:buNone/>
             </a:pPr>
             <a:r>
-              <a:rPr lang="en-US" sz="2600" b="1" dirty="0">
+              <a:rPr lang="en-US" sz="2400" b="1" dirty="0">
                 <a:solidFill>
                   <a:srgbClr val="4C1D95"/>
                 </a:solidFill>
               </a:rPr>
-              <a:t>🚀  Phase 1~3 완성 · 다음 단계 로드맵</a:t>
-            </a:r>
-            <a:endParaRPr lang="en-US" sz="2600" dirty="0"/>
+              <a:t>✅  완료된 기능 전체 목록 (4/16 최신)</a:t>
+            </a:r>
+            <a:endParaRPr lang="en-US" sz="2400" dirty="0"/>
           </a:p>
         </p:txBody>
       </p:sp>
@@ -6867,7 +6587,7 @@
         <p:spPr>
           <a:xfrm>
             <a:off x="365760" y="804672"/>
-            <a:ext cx="3657600" cy="45720"/>
+            <a:ext cx="3840480" cy="45720"/>
           </a:xfrm>
           <a:prstGeom prst="rect">
             <a:avLst/>
@@ -6891,12 +6611,552 @@
         </p:nvSpPr>
         <p:spPr>
           <a:xfrm>
-            <a:off x="365760" y="914400"/>
-            <a:ext cx="12070080" cy="548640"/>
+            <a:off x="228600" y="960120"/>
+            <a:ext cx="3749040" cy="2423160"/>
           </a:xfrm>
           <a:prstGeom prst="roundRect">
             <a:avLst>
-              <a:gd name="adj" fmla="val 20000"/>
+              <a:gd name="adj" fmla="val 5660"/>
+            </a:avLst>
+          </a:prstGeom>
+          <a:solidFill>
+            <a:srgbClr val="EDE9FE"/>
+          </a:solidFill>
+          <a:ln w="12700">
+            <a:solidFill>
+              <a:srgbClr val="6B21A8"/>
+            </a:solidFill>
+            <a:prstDash val="solid"/>
+          </a:ln>
+        </p:spPr>
+      </p:sp>
+      <p:sp>
+        <p:nvSpPr>
+          <p:cNvPr id="5" name="Shape 3"/>
+          <p:cNvSpPr/>
+          <p:nvPr/>
+        </p:nvSpPr>
+        <p:spPr>
+          <a:xfrm>
+            <a:off x="338328" y="1069848"/>
+            <a:ext cx="3529584" cy="384048"/>
+          </a:xfrm>
+          <a:prstGeom prst="roundRect">
+            <a:avLst>
+              <a:gd name="adj" fmla="val 19048"/>
+            </a:avLst>
+          </a:prstGeom>
+          <a:solidFill>
+            <a:srgbClr val="6B21A8"/>
+          </a:solidFill>
+          <a:ln w="12700">
+            <a:solidFill>
+              <a:srgbClr val="6B21A8"/>
+            </a:solidFill>
+            <a:prstDash val="solid"/>
+          </a:ln>
+        </p:spPr>
+      </p:sp>
+      <p:sp>
+        <p:nvSpPr>
+          <p:cNvPr id="6" name="Text 4"/>
+          <p:cNvSpPr/>
+          <p:nvPr/>
+        </p:nvSpPr>
+        <p:spPr>
+          <a:xfrm>
+            <a:off x="338328" y="1069848"/>
+            <a:ext cx="3529584" cy="384048"/>
+          </a:xfrm>
+          <a:prstGeom prst="rect">
+            <a:avLst/>
+          </a:prstGeom>
+          <a:noFill/>
+          <a:ln/>
+        </p:spPr>
+        <p:txBody>
+          <a:bodyPr wrap="square" rtlCol="0" anchor="ctr"/>
+          <a:lstStyle/>
+          <a:p>
+            <a:pPr algn="ctr" indent="0" marL="0">
+              <a:buNone/>
+            </a:pPr>
+            <a:r>
+              <a:rPr lang="en-US" sz="1200" b="1" dirty="0">
+                <a:solidFill>
+                  <a:srgbClr val="FFFFFF"/>
+                </a:solidFill>
+              </a:rPr>
+              <a:t>🔐 인증 / 사용자 관리</a:t>
+            </a:r>
+            <a:endParaRPr lang="en-US" sz="1200" dirty="0"/>
+          </a:p>
+        </p:txBody>
+      </p:sp>
+      <p:sp>
+        <p:nvSpPr>
+          <p:cNvPr id="7" name="Text 5"/>
+          <p:cNvSpPr/>
+          <p:nvPr/>
+        </p:nvSpPr>
+        <p:spPr>
+          <a:xfrm>
+            <a:off x="393192" y="1554480"/>
+            <a:ext cx="3401568" cy="338328"/>
+          </a:xfrm>
+          <a:prstGeom prst="rect">
+            <a:avLst/>
+          </a:prstGeom>
+          <a:noFill/>
+          <a:ln/>
+        </p:spPr>
+        <p:txBody>
+          <a:bodyPr wrap="square" rtlCol="0" anchor="ctr"/>
+          <a:lstStyle/>
+          <a:p>
+            <a:pPr indent="0" marL="0">
+              <a:buNone/>
+            </a:pPr>
+            <a:r>
+              <a:rPr lang="en-US" sz="1000" dirty="0">
+                <a:solidFill>
+                  <a:srgbClr val="1F1235"/>
+                </a:solidFill>
+              </a:rPr>
+              <a:t>✓  이메일 로그인/회원가입 + 지갑 자동생성</a:t>
+            </a:r>
+            <a:endParaRPr lang="en-US" sz="1000" dirty="0"/>
+          </a:p>
+        </p:txBody>
+      </p:sp>
+      <p:sp>
+        <p:nvSpPr>
+          <p:cNvPr id="8" name="Text 6"/>
+          <p:cNvSpPr/>
+          <p:nvPr/>
+        </p:nvSpPr>
+        <p:spPr>
+          <a:xfrm>
+            <a:off x="393192" y="1901952"/>
+            <a:ext cx="3401568" cy="338328"/>
+          </a:xfrm>
+          <a:prstGeom prst="rect">
+            <a:avLst/>
+          </a:prstGeom>
+          <a:noFill/>
+          <a:ln/>
+        </p:spPr>
+        <p:txBody>
+          <a:bodyPr wrap="square" rtlCol="0" anchor="ctr"/>
+          <a:lstStyle/>
+          <a:p>
+            <a:pPr indent="0" marL="0">
+              <a:buNone/>
+            </a:pPr>
+            <a:r>
+              <a:rPr lang="en-US" sz="1000" dirty="0">
+                <a:solidFill>
+                  <a:srgbClr val="1F1235"/>
+                </a:solidFill>
+              </a:rPr>
+              <a:t>✓  카카오 소셜 로그인 (비즈니스 인증 후 재추가)</a:t>
+            </a:r>
+            <a:endParaRPr lang="en-US" sz="1000" dirty="0"/>
+          </a:p>
+        </p:txBody>
+      </p:sp>
+      <p:sp>
+        <p:nvSpPr>
+          <p:cNvPr id="9" name="Text 7"/>
+          <p:cNvSpPr/>
+          <p:nvPr/>
+        </p:nvSpPr>
+        <p:spPr>
+          <a:xfrm>
+            <a:off x="393192" y="2249424"/>
+            <a:ext cx="3401568" cy="338328"/>
+          </a:xfrm>
+          <a:prstGeom prst="rect">
+            <a:avLst/>
+          </a:prstGeom>
+          <a:noFill/>
+          <a:ln/>
+        </p:spPr>
+        <p:txBody>
+          <a:bodyPr wrap="square" rtlCol="0" anchor="ctr"/>
+          <a:lstStyle/>
+          <a:p>
+            <a:pPr indent="0" marL="0">
+              <a:buNone/>
+            </a:pPr>
+            <a:r>
+              <a:rPr lang="en-US" sz="1000" dirty="0">
+                <a:solidFill>
+                  <a:srgbClr val="1F1235"/>
+                </a:solidFill>
+              </a:rPr>
+              <a:t>✓  RBAC 미들웨어 (user/owner/rider/admin)</a:t>
+            </a:r>
+            <a:endParaRPr lang="en-US" sz="1000" dirty="0"/>
+          </a:p>
+        </p:txBody>
+      </p:sp>
+      <p:sp>
+        <p:nvSpPr>
+          <p:cNvPr id="10" name="Text 8"/>
+          <p:cNvSpPr/>
+          <p:nvPr/>
+        </p:nvSpPr>
+        <p:spPr>
+          <a:xfrm>
+            <a:off x="393192" y="2596896"/>
+            <a:ext cx="3401568" cy="338328"/>
+          </a:xfrm>
+          <a:prstGeom prst="rect">
+            <a:avLst/>
+          </a:prstGeom>
+          <a:noFill/>
+          <a:ln/>
+        </p:spPr>
+        <p:txBody>
+          <a:bodyPr wrap="square" rtlCol="0" anchor="ctr"/>
+          <a:lstStyle/>
+          <a:p>
+            <a:pPr indent="0" marL="0">
+              <a:buNone/>
+            </a:pPr>
+            <a:r>
+              <a:rPr lang="en-US" sz="1000" dirty="0">
+                <a:solidFill>
+                  <a:srgbClr val="1F1235"/>
+                </a:solidFill>
+              </a:rPr>
+              <a:t>✓  비밀번호 찾기·재설정 + 검색 히스토리</a:t>
+            </a:r>
+            <a:endParaRPr lang="en-US" sz="1000" dirty="0"/>
+          </a:p>
+        </p:txBody>
+      </p:sp>
+      <p:sp>
+        <p:nvSpPr>
+          <p:cNvPr id="11" name="Text 9"/>
+          <p:cNvSpPr/>
+          <p:nvPr/>
+        </p:nvSpPr>
+        <p:spPr>
+          <a:xfrm>
+            <a:off x="393192" y="2944368"/>
+            <a:ext cx="3401568" cy="338328"/>
+          </a:xfrm>
+          <a:prstGeom prst="rect">
+            <a:avLst/>
+          </a:prstGeom>
+          <a:noFill/>
+          <a:ln/>
+        </p:spPr>
+        <p:txBody>
+          <a:bodyPr wrap="square" rtlCol="0" anchor="ctr"/>
+          <a:lstStyle/>
+          <a:p>
+            <a:pPr indent="0" marL="0">
+              <a:buNone/>
+            </a:pPr>
+            <a:r>
+              <a:rPr lang="en-US" sz="1000" dirty="0">
+                <a:solidFill>
+                  <a:srgbClr val="1F1235"/>
+                </a:solidFill>
+              </a:rPr>
+              <a:t>✓  프로필 수정 + 다중 배달 주소 + 레퍼럴 재설계</a:t>
+            </a:r>
+            <a:endParaRPr lang="en-US" sz="1000" dirty="0"/>
+          </a:p>
+        </p:txBody>
+      </p:sp>
+      <p:sp>
+        <p:nvSpPr>
+          <p:cNvPr id="12" name="Shape 10"/>
+          <p:cNvSpPr/>
+          <p:nvPr/>
+        </p:nvSpPr>
+        <p:spPr>
+          <a:xfrm>
+            <a:off x="4160520" y="960120"/>
+            <a:ext cx="3749040" cy="2423160"/>
+          </a:xfrm>
+          <a:prstGeom prst="roundRect">
+            <a:avLst>
+              <a:gd name="adj" fmla="val 5660"/>
+            </a:avLst>
+          </a:prstGeom>
+          <a:solidFill>
+            <a:srgbClr val="E0F2FE"/>
+          </a:solidFill>
+          <a:ln w="12700">
+            <a:solidFill>
+              <a:srgbClr val="0369A1"/>
+            </a:solidFill>
+            <a:prstDash val="solid"/>
+          </a:ln>
+        </p:spPr>
+      </p:sp>
+      <p:sp>
+        <p:nvSpPr>
+          <p:cNvPr id="13" name="Shape 11"/>
+          <p:cNvSpPr/>
+          <p:nvPr/>
+        </p:nvSpPr>
+        <p:spPr>
+          <a:xfrm>
+            <a:off x="4270248" y="1069848"/>
+            <a:ext cx="3529584" cy="384048"/>
+          </a:xfrm>
+          <a:prstGeom prst="roundRect">
+            <a:avLst>
+              <a:gd name="adj" fmla="val 19048"/>
+            </a:avLst>
+          </a:prstGeom>
+          <a:solidFill>
+            <a:srgbClr val="0369A1"/>
+          </a:solidFill>
+          <a:ln w="12700">
+            <a:solidFill>
+              <a:srgbClr val="0369A1"/>
+            </a:solidFill>
+            <a:prstDash val="solid"/>
+          </a:ln>
+        </p:spPr>
+      </p:sp>
+      <p:sp>
+        <p:nvSpPr>
+          <p:cNvPr id="14" name="Text 12"/>
+          <p:cNvSpPr/>
+          <p:nvPr/>
+        </p:nvSpPr>
+        <p:spPr>
+          <a:xfrm>
+            <a:off x="4270248" y="1069848"/>
+            <a:ext cx="3529584" cy="384048"/>
+          </a:xfrm>
+          <a:prstGeom prst="rect">
+            <a:avLst/>
+          </a:prstGeom>
+          <a:noFill/>
+          <a:ln/>
+        </p:spPr>
+        <p:txBody>
+          <a:bodyPr wrap="square" rtlCol="0" anchor="ctr"/>
+          <a:lstStyle/>
+          <a:p>
+            <a:pPr algn="ctr" indent="0" marL="0">
+              <a:buNone/>
+            </a:pPr>
+            <a:r>
+              <a:rPr lang="en-US" sz="1200" b="1" dirty="0">
+                <a:solidFill>
+                  <a:srgbClr val="FFFFFF"/>
+                </a:solidFill>
+              </a:rPr>
+              <a:t>🏠 사용자 탭 (4개) + UX</a:t>
+            </a:r>
+            <a:endParaRPr lang="en-US" sz="1200" dirty="0"/>
+          </a:p>
+        </p:txBody>
+      </p:sp>
+      <p:sp>
+        <p:nvSpPr>
+          <p:cNvPr id="15" name="Text 13"/>
+          <p:cNvSpPr/>
+          <p:nvPr/>
+        </p:nvSpPr>
+        <p:spPr>
+          <a:xfrm>
+            <a:off x="4325112" y="1554480"/>
+            <a:ext cx="3401568" cy="338328"/>
+          </a:xfrm>
+          <a:prstGeom prst="rect">
+            <a:avLst/>
+          </a:prstGeom>
+          <a:noFill/>
+          <a:ln/>
+        </p:spPr>
+        <p:txBody>
+          <a:bodyPr wrap="square" rtlCol="0" anchor="ctr"/>
+          <a:lstStyle/>
+          <a:p>
+            <a:pPr indent="0" marL="0">
+              <a:buNone/>
+            </a:pPr>
+            <a:r>
+              <a:rPr lang="en-US" sz="1000" dirty="0">
+                <a:solidFill>
+                  <a:srgbClr val="1F1235"/>
+                </a:solidFill>
+              </a:rPr>
+              <a:t>✓  홈: 카테고리·검색(GIN)·인기가게·광고</a:t>
+            </a:r>
+            <a:endParaRPr lang="en-US" sz="1000" dirty="0"/>
+          </a:p>
+        </p:txBody>
+      </p:sp>
+      <p:sp>
+        <p:nvSpPr>
+          <p:cNvPr id="16" name="Text 14"/>
+          <p:cNvSpPr/>
+          <p:nvPr/>
+        </p:nvSpPr>
+        <p:spPr>
+          <a:xfrm>
+            <a:off x="4325112" y="1901952"/>
+            <a:ext cx="3401568" cy="338328"/>
+          </a:xfrm>
+          <a:prstGeom prst="rect">
+            <a:avLst/>
+          </a:prstGeom>
+          <a:noFill/>
+          <a:ln/>
+        </p:spPr>
+        <p:txBody>
+          <a:bodyPr wrap="square" rtlCol="0" anchor="ctr"/>
+          <a:lstStyle/>
+          <a:p>
+            <a:pPr indent="0" marL="0">
+              <a:buNone/>
+            </a:pPr>
+            <a:r>
+              <a:rPr lang="en-US" sz="1000" dirty="0">
+                <a:solidFill>
+                  <a:srgbClr val="1F1235"/>
+                </a:solidFill>
+              </a:rPr>
+              <a:t>✓  지갑: 퍼플 재디자인 + Pi UI + 출석 Tap-to-Earn</a:t>
+            </a:r>
+            <a:endParaRPr lang="en-US" sz="1000" dirty="0"/>
+          </a:p>
+        </p:txBody>
+      </p:sp>
+      <p:sp>
+        <p:nvSpPr>
+          <p:cNvPr id="17" name="Text 15"/>
+          <p:cNvSpPr/>
+          <p:nvPr/>
+        </p:nvSpPr>
+        <p:spPr>
+          <a:xfrm>
+            <a:off x="4325112" y="2249424"/>
+            <a:ext cx="3401568" cy="338328"/>
+          </a:xfrm>
+          <a:prstGeom prst="rect">
+            <a:avLst/>
+          </a:prstGeom>
+          <a:noFill/>
+          <a:ln/>
+        </p:spPr>
+        <p:txBody>
+          <a:bodyPr wrap="square" rtlCol="0" anchor="ctr"/>
+          <a:lstStyle/>
+          <a:p>
+            <a:pPr indent="0" marL="0">
+              <a:buNone/>
+            </a:pPr>
+            <a:r>
+              <a:rPr lang="en-US" sz="1000" dirty="0">
+                <a:solidFill>
+                  <a:srgbClr val="1F1235"/>
+                </a:solidFill>
+              </a:rPr>
+              <a:t>✓  PICK주문: Realtime 추적 + 상세 + 재주문</a:t>
+            </a:r>
+            <a:endParaRPr lang="en-US" sz="1000" dirty="0"/>
+          </a:p>
+        </p:txBody>
+      </p:sp>
+      <p:sp>
+        <p:nvSpPr>
+          <p:cNvPr id="18" name="Text 16"/>
+          <p:cNvSpPr/>
+          <p:nvPr/>
+        </p:nvSpPr>
+        <p:spPr>
+          <a:xfrm>
+            <a:off x="4325112" y="2596896"/>
+            <a:ext cx="3401568" cy="338328"/>
+          </a:xfrm>
+          <a:prstGeom prst="rect">
+            <a:avLst/>
+          </a:prstGeom>
+          <a:noFill/>
+          <a:ln/>
+        </p:spPr>
+        <p:txBody>
+          <a:bodyPr wrap="square" rtlCol="0" anchor="ctr"/>
+          <a:lstStyle/>
+          <a:p>
+            <a:pPr indent="0" marL="0">
+              <a:buNone/>
+            </a:pPr>
+            <a:r>
+              <a:rPr lang="en-US" sz="1000" dirty="0">
+                <a:solidFill>
+                  <a:srgbClr val="1F1235"/>
+                </a:solidFill>
+              </a:rPr>
+              <a:t>✓  알림 드로어 + 딥링크 + 자동 트리거</a:t>
+            </a:r>
+            <a:endParaRPr lang="en-US" sz="1000" dirty="0"/>
+          </a:p>
+        </p:txBody>
+      </p:sp>
+      <p:sp>
+        <p:nvSpPr>
+          <p:cNvPr id="19" name="Text 17"/>
+          <p:cNvSpPr/>
+          <p:nvPr/>
+        </p:nvSpPr>
+        <p:spPr>
+          <a:xfrm>
+            <a:off x="4325112" y="2944368"/>
+            <a:ext cx="3401568" cy="338328"/>
+          </a:xfrm>
+          <a:prstGeom prst="rect">
+            <a:avLst/>
+          </a:prstGeom>
+          <a:noFill/>
+          <a:ln/>
+        </p:spPr>
+        <p:txBody>
+          <a:bodyPr wrap="square" rtlCol="0" anchor="ctr"/>
+          <a:lstStyle/>
+          <a:p>
+            <a:pPr indent="0" marL="0">
+              <a:buNone/>
+            </a:pPr>
+            <a:r>
+              <a:rPr lang="en-US" sz="1000" dirty="0">
+                <a:solidFill>
+                  <a:srgbClr val="1F1235"/>
+                </a:solidFill>
+              </a:rPr>
+              <a:t>✓  MyPICK 초대 3버튼 (사용자·사장님·라이더)</a:t>
+            </a:r>
+            <a:endParaRPr lang="en-US" sz="1000" dirty="0"/>
+          </a:p>
+        </p:txBody>
+      </p:sp>
+      <p:sp>
+        <p:nvSpPr>
+          <p:cNvPr id="20" name="Shape 18"/>
+          <p:cNvSpPr/>
+          <p:nvPr/>
+        </p:nvSpPr>
+        <p:spPr>
+          <a:xfrm>
+            <a:off x="8092440" y="960120"/>
+            <a:ext cx="3749040" cy="2423160"/>
+          </a:xfrm>
+          <a:prstGeom prst="roundRect">
+            <a:avLst>
+              <a:gd name="adj" fmla="val 5660"/>
             </a:avLst>
           </a:prstGeom>
           <a:solidFill>
@@ -6912,58 +7172,22 @@
       </p:sp>
       <p:sp>
         <p:nvSpPr>
-          <p:cNvPr id="5" name="Text 3"/>
-          <p:cNvSpPr/>
-          <p:nvPr/>
-        </p:nvSpPr>
-        <p:spPr>
-          <a:xfrm>
-            <a:off x="365760" y="914400"/>
-            <a:ext cx="12070080" cy="548640"/>
-          </a:xfrm>
-          <a:prstGeom prst="rect">
-            <a:avLst/>
-          </a:prstGeom>
-          <a:noFill/>
-          <a:ln/>
-        </p:spPr>
-        <p:txBody>
-          <a:bodyPr wrap="square" rtlCol="0" anchor="ctr"/>
-          <a:lstStyle/>
-          <a:p>
-            <a:pPr algn="ctr" indent="0" marL="0">
-              <a:buNone/>
-            </a:pPr>
-            <a:r>
-              <a:rPr lang="en-US" sz="1400" b="1" dirty="0">
-                <a:solidFill>
-                  <a:srgbClr val="16A34A"/>
-                </a:solidFill>
-              </a:rPr>
-              <a:t>🎉  Phase 1~3 완성! 55개+ 기능 구현 · 미착수 기능 0개 · Pi Network 연동만 남음</a:t>
-            </a:r>
-            <a:endParaRPr lang="en-US" sz="1400" dirty="0"/>
-          </a:p>
-        </p:txBody>
-      </p:sp>
-      <p:sp>
-        <p:nvSpPr>
-          <p:cNvPr id="6" name="Shape 4"/>
-          <p:cNvSpPr/>
-          <p:nvPr/>
-        </p:nvSpPr>
-        <p:spPr>
-          <a:xfrm>
-            <a:off x="365760" y="1600200"/>
-            <a:ext cx="1325880" cy="384048"/>
+          <p:cNvPr id="21" name="Shape 19"/>
+          <p:cNvSpPr/>
+          <p:nvPr/>
+        </p:nvSpPr>
+        <p:spPr>
+          <a:xfrm>
+            <a:off x="8202168" y="1069848"/>
+            <a:ext cx="3529584" cy="384048"/>
           </a:xfrm>
           <a:prstGeom prst="roundRect">
             <a:avLst>
-              <a:gd name="adj" fmla="val 23810"/>
+              <a:gd name="adj" fmla="val 19048"/>
             </a:avLst>
           </a:prstGeom>
           <a:solidFill>
-            <a:srgbClr val="DCFCE7"/>
+            <a:srgbClr val="16A34A"/>
           </a:solidFill>
           <a:ln w="12700">
             <a:solidFill>
@@ -6975,14 +7199,14 @@
       </p:sp>
       <p:sp>
         <p:nvSpPr>
-          <p:cNvPr id="7" name="Text 5"/>
-          <p:cNvSpPr/>
-          <p:nvPr/>
-        </p:nvSpPr>
-        <p:spPr>
-          <a:xfrm>
-            <a:off x="365760" y="1600200"/>
-            <a:ext cx="1325880" cy="384048"/>
+          <p:cNvPr id="22" name="Text 20"/>
+          <p:cNvSpPr/>
+          <p:nvPr/>
+        </p:nvSpPr>
+        <p:spPr>
+          <a:xfrm>
+            <a:off x="8202168" y="1069848"/>
+            <a:ext cx="3529584" cy="384048"/>
           </a:xfrm>
           <a:prstGeom prst="rect">
             <a:avLst/>
@@ -6998,493 +7222,211 @@
               <a:buNone/>
             </a:pPr>
             <a:r>
-              <a:rPr lang="en-US" sz="1100" b="1" dirty="0">
-                <a:solidFill>
-                  <a:srgbClr val="16A34A"/>
-                </a:solidFill>
-              </a:rPr>
-              <a:t>✅ Phase 1~3</a:t>
-            </a:r>
-            <a:endParaRPr lang="en-US" sz="1100" dirty="0"/>
-          </a:p>
-        </p:txBody>
-      </p:sp>
-      <p:sp>
-        <p:nvSpPr>
-          <p:cNvPr id="8" name="Shape 6"/>
-          <p:cNvSpPr/>
-          <p:nvPr/>
-        </p:nvSpPr>
-        <p:spPr>
-          <a:xfrm>
-            <a:off x="228600" y="2057400"/>
-            <a:ext cx="3749040" cy="1280160"/>
+              <a:rPr lang="en-US" sz="1200" b="1" dirty="0">
+                <a:solidFill>
+                  <a:srgbClr val="FFFFFF"/>
+                </a:solidFill>
+              </a:rPr>
+              <a:t>🛒 가맹점 / 주문 플로우</a:t>
+            </a:r>
+            <a:endParaRPr lang="en-US" sz="1200" dirty="0"/>
+          </a:p>
+        </p:txBody>
+      </p:sp>
+      <p:sp>
+        <p:nvSpPr>
+          <p:cNvPr id="23" name="Text 21"/>
+          <p:cNvSpPr/>
+          <p:nvPr/>
+        </p:nvSpPr>
+        <p:spPr>
+          <a:xfrm>
+            <a:off x="8257032" y="1554480"/>
+            <a:ext cx="3401568" cy="338328"/>
+          </a:xfrm>
+          <a:prstGeom prst="rect">
+            <a:avLst/>
+          </a:prstGeom>
+          <a:noFill/>
+          <a:ln/>
+        </p:spPr>
+        <p:txBody>
+          <a:bodyPr wrap="square" rtlCol="0" anchor="ctr"/>
+          <a:lstStyle/>
+          <a:p>
+            <a:pPr indent="0" marL="0">
+              <a:buNone/>
+            </a:pPr>
+            <a:r>
+              <a:rPr lang="en-US" sz="1000" dirty="0">
+                <a:solidFill>
+                  <a:srgbClr val="1F1235"/>
+                </a:solidFill>
+              </a:rPr>
+              <a:t>✓  가맹점 목록 (카테고리/전문검색 필터)</a:t>
+            </a:r>
+            <a:endParaRPr lang="en-US" sz="1000" dirty="0"/>
+          </a:p>
+        </p:txBody>
+      </p:sp>
+      <p:sp>
+        <p:nvSpPr>
+          <p:cNvPr id="24" name="Text 22"/>
+          <p:cNvSpPr/>
+          <p:nvPr/>
+        </p:nvSpPr>
+        <p:spPr>
+          <a:xfrm>
+            <a:off x="8257032" y="1901952"/>
+            <a:ext cx="3401568" cy="338328"/>
+          </a:xfrm>
+          <a:prstGeom prst="rect">
+            <a:avLst/>
+          </a:prstGeom>
+          <a:noFill/>
+          <a:ln/>
+        </p:spPr>
+        <p:txBody>
+          <a:bodyPr wrap="square" rtlCol="0" anchor="ctr"/>
+          <a:lstStyle/>
+          <a:p>
+            <a:pPr indent="0" marL="0">
+              <a:buNone/>
+            </a:pPr>
+            <a:r>
+              <a:rPr lang="en-US" sz="1000" dirty="0">
+                <a:solidFill>
+                  <a:srgbClr val="1F1235"/>
+                </a:solidFill>
+              </a:rPr>
+              <a:t>✓  가맹점 상세 + 메뉴 옵션 + 리뷰(이미지)</a:t>
+            </a:r>
+            <a:endParaRPr lang="en-US" sz="1000" dirty="0"/>
+          </a:p>
+        </p:txBody>
+      </p:sp>
+      <p:sp>
+        <p:nvSpPr>
+          <p:cNvPr id="25" name="Text 23"/>
+          <p:cNvSpPr/>
+          <p:nvPr/>
+        </p:nvSpPr>
+        <p:spPr>
+          <a:xfrm>
+            <a:off x="8257032" y="2249424"/>
+            <a:ext cx="3401568" cy="338328"/>
+          </a:xfrm>
+          <a:prstGeom prst="rect">
+            <a:avLst/>
+          </a:prstGeom>
+          <a:noFill/>
+          <a:ln/>
+        </p:spPr>
+        <p:txBody>
+          <a:bodyPr wrap="square" rtlCol="0" anchor="ctr"/>
+          <a:lstStyle/>
+          <a:p>
+            <a:pPr indent="0" marL="0">
+              <a:buNone/>
+            </a:pPr>
+            <a:r>
+              <a:rPr lang="en-US" sz="1000" dirty="0">
+                <a:solidFill>
+                  <a:srgbClr val="1F1235"/>
+                </a:solidFill>
+              </a:rPr>
+              <a:t>✓  쿠폰(3종) + PICK 할인 + 배달 메모</a:t>
+            </a:r>
+            <a:endParaRPr lang="en-US" sz="1000" dirty="0"/>
+          </a:p>
+        </p:txBody>
+      </p:sp>
+      <p:sp>
+        <p:nvSpPr>
+          <p:cNvPr id="26" name="Text 24"/>
+          <p:cNvSpPr/>
+          <p:nvPr/>
+        </p:nvSpPr>
+        <p:spPr>
+          <a:xfrm>
+            <a:off x="8257032" y="2596896"/>
+            <a:ext cx="3401568" cy="338328"/>
+          </a:xfrm>
+          <a:prstGeom prst="rect">
+            <a:avLst/>
+          </a:prstGeom>
+          <a:noFill/>
+          <a:ln/>
+        </p:spPr>
+        <p:txBody>
+          <a:bodyPr wrap="square" rtlCol="0" anchor="ctr"/>
+          <a:lstStyle/>
+          <a:p>
+            <a:pPr indent="0" marL="0">
+              <a:buNone/>
+            </a:pPr>
+            <a:r>
+              <a:rPr lang="en-US" sz="1000" dirty="0">
+                <a:solidFill>
+                  <a:srgbClr val="1F1235"/>
+                </a:solidFill>
+              </a:rPr>
+              <a:t>✓  PICK 결제 + 토스페이먼츠 카드 결제</a:t>
+            </a:r>
+            <a:endParaRPr lang="en-US" sz="1000" dirty="0"/>
+          </a:p>
+        </p:txBody>
+      </p:sp>
+      <p:sp>
+        <p:nvSpPr>
+          <p:cNvPr id="27" name="Text 25"/>
+          <p:cNvSpPr/>
+          <p:nvPr/>
+        </p:nvSpPr>
+        <p:spPr>
+          <a:xfrm>
+            <a:off x="8257032" y="2944368"/>
+            <a:ext cx="3401568" cy="338328"/>
+          </a:xfrm>
+          <a:prstGeom prst="rect">
+            <a:avLst/>
+          </a:prstGeom>
+          <a:noFill/>
+          <a:ln/>
+        </p:spPr>
+        <p:txBody>
+          <a:bodyPr wrap="square" rtlCol="0" anchor="ctr"/>
+          <a:lstStyle/>
+          <a:p>
+            <a:pPr indent="0" marL="0">
+              <a:buNone/>
+            </a:pPr>
+            <a:r>
+              <a:rPr lang="en-US" sz="1000" dirty="0">
+                <a:solidFill>
+                  <a:srgbClr val="1F1235"/>
+                </a:solidFill>
+              </a:rPr>
+              <a:t>✓  주문 생성 → PICK 차감 → 완료 적립</a:t>
+            </a:r>
+            <a:endParaRPr lang="en-US" sz="1000" dirty="0"/>
+          </a:p>
+        </p:txBody>
+      </p:sp>
+      <p:sp>
+        <p:nvSpPr>
+          <p:cNvPr id="28" name="Shape 26"/>
+          <p:cNvSpPr/>
+          <p:nvPr/>
+        </p:nvSpPr>
+        <p:spPr>
+          <a:xfrm>
+            <a:off x="228600" y="3566160"/>
+            <a:ext cx="3749040" cy="2423160"/>
           </a:xfrm>
           <a:prstGeom prst="roundRect">
             <a:avLst>
-              <a:gd name="adj" fmla="val 9286"/>
-            </a:avLst>
-          </a:prstGeom>
-          <a:solidFill>
-            <a:srgbClr val="FFFFFF"/>
-          </a:solidFill>
-          <a:ln w="12700">
-            <a:solidFill>
-              <a:srgbClr val="E9D5FF"/>
-            </a:solidFill>
-            <a:prstDash val="solid"/>
-          </a:ln>
-        </p:spPr>
-      </p:sp>
-      <p:sp>
-        <p:nvSpPr>
-          <p:cNvPr id="9" name="Shape 7"/>
-          <p:cNvSpPr/>
-          <p:nvPr/>
-        </p:nvSpPr>
-        <p:spPr>
-          <a:xfrm>
-            <a:off x="365760" y="2176272"/>
-            <a:ext cx="3474720" cy="329184"/>
-          </a:xfrm>
-          <a:prstGeom prst="roundRect">
-            <a:avLst>
-              <a:gd name="adj" fmla="val 22222"/>
-            </a:avLst>
-          </a:prstGeom>
-          <a:solidFill>
-            <a:srgbClr val="DCFCE7"/>
-          </a:solidFill>
-          <a:ln w="12700">
-            <a:solidFill>
-              <a:srgbClr val="DCFCE7"/>
-            </a:solidFill>
-            <a:prstDash val="solid"/>
-          </a:ln>
-        </p:spPr>
-      </p:sp>
-      <p:sp>
-        <p:nvSpPr>
-          <p:cNvPr id="10" name="Text 8"/>
-          <p:cNvSpPr/>
-          <p:nvPr/>
-        </p:nvSpPr>
-        <p:spPr>
-          <a:xfrm>
-            <a:off x="365760" y="2176272"/>
-            <a:ext cx="3474720" cy="329184"/>
-          </a:xfrm>
-          <a:prstGeom prst="rect">
-            <a:avLst/>
-          </a:prstGeom>
-          <a:noFill/>
-          <a:ln/>
-        </p:spPr>
-        <p:txBody>
-          <a:bodyPr wrap="square" rtlCol="0" anchor="ctr"/>
-          <a:lstStyle/>
-          <a:p>
-            <a:pPr algn="ctr" indent="0" marL="0">
-              <a:buNone/>
-            </a:pPr>
-            <a:r>
-              <a:rPr lang="en-US" sz="1200" b="1" dirty="0">
-                <a:solidFill>
-                  <a:srgbClr val="16A34A"/>
-                </a:solidFill>
-              </a:rPr>
-              <a:t>인증 · 지갑 · 주문 플로우</a:t>
-            </a:r>
-            <a:endParaRPr lang="en-US" sz="1200" dirty="0"/>
-          </a:p>
-        </p:txBody>
-      </p:sp>
-      <p:sp>
-        <p:nvSpPr>
-          <p:cNvPr id="11" name="Text 9"/>
-          <p:cNvSpPr/>
-          <p:nvPr/>
-        </p:nvSpPr>
-        <p:spPr>
-          <a:xfrm>
-            <a:off x="393192" y="2569464"/>
-            <a:ext cx="3419856" cy="694944"/>
-          </a:xfrm>
-          <a:prstGeom prst="rect">
-            <a:avLst/>
-          </a:prstGeom>
-          <a:noFill/>
-          <a:ln/>
-        </p:spPr>
-        <p:txBody>
-          <a:bodyPr wrap="square" rtlCol="0" anchor="ctr"/>
-          <a:lstStyle/>
-          <a:p>
-            <a:pPr indent="0" marL="0">
-              <a:buNone/>
-            </a:pPr>
-            <a:r>
-              <a:rPr lang="en-US" sz="1050" dirty="0">
-                <a:solidFill>
-                  <a:srgbClr val="6B7280"/>
-                </a:solidFill>
-              </a:rPr>
-              <a:t>이메일 로그인 (카카오 비즈니스 후 추가)</a:t>
-            </a:r>
-            <a:endParaRPr lang="en-US" sz="1050" dirty="0"/>
-          </a:p>
-          <a:p>
-            <a:pPr indent="0" marL="0">
-              <a:buNone/>
-            </a:pPr>
-            <a:r>
-              <a:rPr lang="en-US" sz="1050" dirty="0">
-                <a:solidFill>
-                  <a:srgbClr val="6B7280"/>
-                </a:solidFill>
-              </a:rPr>
-              <a:t>PICK 토큰 지갑 + 토스페이먼츠</a:t>
-            </a:r>
-            <a:endParaRPr lang="en-US" sz="1050" dirty="0"/>
-          </a:p>
-          <a:p>
-            <a:pPr indent="0" marL="0">
-              <a:buNone/>
-            </a:pPr>
-            <a:r>
-              <a:rPr lang="en-US" sz="1050" dirty="0">
-                <a:solidFill>
-                  <a:srgbClr val="6B7280"/>
-                </a:solidFill>
-              </a:rPr>
-              <a:t>Realtime 주문 추적 완성</a:t>
-            </a:r>
-            <a:endParaRPr lang="en-US" sz="1050" dirty="0"/>
-          </a:p>
-        </p:txBody>
-      </p:sp>
-      <p:sp>
-        <p:nvSpPr>
-          <p:cNvPr id="12" name="Shape 10"/>
-          <p:cNvSpPr/>
-          <p:nvPr/>
-        </p:nvSpPr>
-        <p:spPr>
-          <a:xfrm>
-            <a:off x="4133088" y="2057400"/>
-            <a:ext cx="3749040" cy="1280160"/>
-          </a:xfrm>
-          <a:prstGeom prst="roundRect">
-            <a:avLst>
-              <a:gd name="adj" fmla="val 9286"/>
-            </a:avLst>
-          </a:prstGeom>
-          <a:solidFill>
-            <a:srgbClr val="FFFFFF"/>
-          </a:solidFill>
-          <a:ln w="12700">
-            <a:solidFill>
-              <a:srgbClr val="E9D5FF"/>
-            </a:solidFill>
-            <a:prstDash val="solid"/>
-          </a:ln>
-        </p:spPr>
-      </p:sp>
-      <p:sp>
-        <p:nvSpPr>
-          <p:cNvPr id="13" name="Shape 11"/>
-          <p:cNvSpPr/>
-          <p:nvPr/>
-        </p:nvSpPr>
-        <p:spPr>
-          <a:xfrm>
-            <a:off x="4270248" y="2176272"/>
-            <a:ext cx="3474720" cy="329184"/>
-          </a:xfrm>
-          <a:prstGeom prst="roundRect">
-            <a:avLst>
-              <a:gd name="adj" fmla="val 22222"/>
-            </a:avLst>
-          </a:prstGeom>
-          <a:solidFill>
-            <a:srgbClr val="DCFCE7"/>
-          </a:solidFill>
-          <a:ln w="12700">
-            <a:solidFill>
-              <a:srgbClr val="DCFCE7"/>
-            </a:solidFill>
-            <a:prstDash val="solid"/>
-          </a:ln>
-        </p:spPr>
-      </p:sp>
-      <p:sp>
-        <p:nvSpPr>
-          <p:cNvPr id="14" name="Text 12"/>
-          <p:cNvSpPr/>
-          <p:nvPr/>
-        </p:nvSpPr>
-        <p:spPr>
-          <a:xfrm>
-            <a:off x="4270248" y="2176272"/>
-            <a:ext cx="3474720" cy="329184"/>
-          </a:xfrm>
-          <a:prstGeom prst="rect">
-            <a:avLst/>
-          </a:prstGeom>
-          <a:noFill/>
-          <a:ln/>
-        </p:spPr>
-        <p:txBody>
-          <a:bodyPr wrap="square" rtlCol="0" anchor="ctr"/>
-          <a:lstStyle/>
-          <a:p>
-            <a:pPr algn="ctr" indent="0" marL="0">
-              <a:buNone/>
-            </a:pPr>
-            <a:r>
-              <a:rPr lang="en-US" sz="1200" b="1" dirty="0">
-                <a:solidFill>
-                  <a:srgbClr val="16A34A"/>
-                </a:solidFill>
-              </a:rPr>
-              <a:t>사장님 · 라이더 · 관리자</a:t>
-            </a:r>
-            <a:endParaRPr lang="en-US" sz="1200" dirty="0"/>
-          </a:p>
-        </p:txBody>
-      </p:sp>
-      <p:sp>
-        <p:nvSpPr>
-          <p:cNvPr id="15" name="Text 13"/>
-          <p:cNvSpPr/>
-          <p:nvPr/>
-        </p:nvSpPr>
-        <p:spPr>
-          <a:xfrm>
-            <a:off x="4297680" y="2569464"/>
-            <a:ext cx="3419856" cy="694944"/>
-          </a:xfrm>
-          <a:prstGeom prst="rect">
-            <a:avLst/>
-          </a:prstGeom>
-          <a:noFill/>
-          <a:ln/>
-        </p:spPr>
-        <p:txBody>
-          <a:bodyPr wrap="square" rtlCol="0" anchor="ctr"/>
-          <a:lstStyle/>
-          <a:p>
-            <a:pPr indent="0" marL="0">
-              <a:buNone/>
-            </a:pPr>
-            <a:r>
-              <a:rPr lang="en-US" sz="1050" dirty="0">
-                <a:solidFill>
-                  <a:srgbClr val="6B7280"/>
-                </a:solidFill>
-              </a:rPr>
-              <a:t>사장님 주문/메뉴/정산/통계</a:t>
-            </a:r>
-            <a:endParaRPr lang="en-US" sz="1050" dirty="0"/>
-          </a:p>
-          <a:p>
-            <a:pPr indent="0" marL="0">
-              <a:buNone/>
-            </a:pPr>
-            <a:r>
-              <a:rPr lang="en-US" sz="1050" dirty="0">
-                <a:solidFill>
-                  <a:srgbClr val="6B7280"/>
-                </a:solidFill>
-              </a:rPr>
-              <a:t>라이더 수락/위치공유/수익</a:t>
-            </a:r>
-            <a:endParaRPr lang="en-US" sz="1050" dirty="0"/>
-          </a:p>
-          <a:p>
-            <a:pPr indent="0" marL="0">
-              <a:buNone/>
-            </a:pPr>
-            <a:r>
-              <a:rPr lang="en-US" sz="1050" dirty="0">
-                <a:solidFill>
-                  <a:srgbClr val="6B7280"/>
-                </a:solidFill>
-              </a:rPr>
-              <a:t>관리자 5탭 대시보드</a:t>
-            </a:r>
-            <a:endParaRPr lang="en-US" sz="1050" dirty="0"/>
-          </a:p>
-        </p:txBody>
-      </p:sp>
-      <p:sp>
-        <p:nvSpPr>
-          <p:cNvPr id="16" name="Shape 14"/>
-          <p:cNvSpPr/>
-          <p:nvPr/>
-        </p:nvSpPr>
-        <p:spPr>
-          <a:xfrm>
-            <a:off x="8037576" y="2057400"/>
-            <a:ext cx="3749040" cy="1280160"/>
-          </a:xfrm>
-          <a:prstGeom prst="roundRect">
-            <a:avLst>
-              <a:gd name="adj" fmla="val 9286"/>
-            </a:avLst>
-          </a:prstGeom>
-          <a:solidFill>
-            <a:srgbClr val="FFFFFF"/>
-          </a:solidFill>
-          <a:ln w="12700">
-            <a:solidFill>
-              <a:srgbClr val="E9D5FF"/>
-            </a:solidFill>
-            <a:prstDash val="solid"/>
-          </a:ln>
-        </p:spPr>
-      </p:sp>
-      <p:sp>
-        <p:nvSpPr>
-          <p:cNvPr id="17" name="Shape 15"/>
-          <p:cNvSpPr/>
-          <p:nvPr/>
-        </p:nvSpPr>
-        <p:spPr>
-          <a:xfrm>
-            <a:off x="8174736" y="2176272"/>
-            <a:ext cx="3474720" cy="329184"/>
-          </a:xfrm>
-          <a:prstGeom prst="roundRect">
-            <a:avLst>
-              <a:gd name="adj" fmla="val 22222"/>
-            </a:avLst>
-          </a:prstGeom>
-          <a:solidFill>
-            <a:srgbClr val="DCFCE7"/>
-          </a:solidFill>
-          <a:ln w="12700">
-            <a:solidFill>
-              <a:srgbClr val="DCFCE7"/>
-            </a:solidFill>
-            <a:prstDash val="solid"/>
-          </a:ln>
-        </p:spPr>
-      </p:sp>
-      <p:sp>
-        <p:nvSpPr>
-          <p:cNvPr id="18" name="Text 16"/>
-          <p:cNvSpPr/>
-          <p:nvPr/>
-        </p:nvSpPr>
-        <p:spPr>
-          <a:xfrm>
-            <a:off x="8174736" y="2176272"/>
-            <a:ext cx="3474720" cy="329184"/>
-          </a:xfrm>
-          <a:prstGeom prst="rect">
-            <a:avLst/>
-          </a:prstGeom>
-          <a:noFill/>
-          <a:ln/>
-        </p:spPr>
-        <p:txBody>
-          <a:bodyPr wrap="square" rtlCol="0" anchor="ctr"/>
-          <a:lstStyle/>
-          <a:p>
-            <a:pPr algn="ctr" indent="0" marL="0">
-              <a:buNone/>
-            </a:pPr>
-            <a:r>
-              <a:rPr lang="en-US" sz="1200" b="1" dirty="0">
-                <a:solidFill>
-                  <a:srgbClr val="16A34A"/>
-                </a:solidFill>
-              </a:rPr>
-              <a:t>PWA · 보안 · DB 최적화</a:t>
-            </a:r>
-            <a:endParaRPr lang="en-US" sz="1200" dirty="0"/>
-          </a:p>
-        </p:txBody>
-      </p:sp>
-      <p:sp>
-        <p:nvSpPr>
-          <p:cNvPr id="19" name="Text 17"/>
-          <p:cNvSpPr/>
-          <p:nvPr/>
-        </p:nvSpPr>
-        <p:spPr>
-          <a:xfrm>
-            <a:off x="8202168" y="2569464"/>
-            <a:ext cx="3419856" cy="694944"/>
-          </a:xfrm>
-          <a:prstGeom prst="rect">
-            <a:avLst/>
-          </a:prstGeom>
-          <a:noFill/>
-          <a:ln/>
-        </p:spPr>
-        <p:txBody>
-          <a:bodyPr wrap="square" rtlCol="0" anchor="ctr"/>
-          <a:lstStyle/>
-          <a:p>
-            <a:pPr indent="0" marL="0">
-              <a:buNone/>
-            </a:pPr>
-            <a:r>
-              <a:rPr lang="en-US" sz="1050" dirty="0">
-                <a:solidFill>
-                  <a:srgbClr val="6B7280"/>
-                </a:solidFill>
-              </a:rPr>
-              <a:t>Serwist 오프라인 캐싱</a:t>
-            </a:r>
-            <a:endParaRPr lang="en-US" sz="1050" dirty="0"/>
-          </a:p>
-          <a:p>
-            <a:pPr indent="0" marL="0">
-              <a:buNone/>
-            </a:pPr>
-            <a:r>
-              <a:rPr lang="en-US" sz="1050" dirty="0">
-                <a:solidFill>
-                  <a:srgbClr val="6B7280"/>
-                </a:solidFill>
-              </a:rPr>
-              <a:t>RLS + 인덱스 30개+ + FCM 푸시</a:t>
-            </a:r>
-            <a:endParaRPr lang="en-US" sz="1050" dirty="0"/>
-          </a:p>
-          <a:p>
-            <a:pPr indent="0" marL="0">
-              <a:buNone/>
-            </a:pPr>
-            <a:r>
-              <a:rPr lang="en-US" sz="1050" dirty="0">
-                <a:solidFill>
-                  <a:srgbClr val="6B7280"/>
-                </a:solidFill>
-              </a:rPr>
-              <a:t>Sentry + Storage 정책 완성</a:t>
-            </a:r>
-            <a:endParaRPr lang="en-US" sz="1050" dirty="0"/>
-          </a:p>
-        </p:txBody>
-      </p:sp>
-      <p:sp>
-        <p:nvSpPr>
-          <p:cNvPr id="20" name="Shape 18"/>
-          <p:cNvSpPr/>
-          <p:nvPr/>
-        </p:nvSpPr>
-        <p:spPr>
-          <a:xfrm>
-            <a:off x="365760" y="3429000"/>
-            <a:ext cx="1325880" cy="384048"/>
-          </a:xfrm>
-          <a:prstGeom prst="roundRect">
-            <a:avLst>
-              <a:gd name="adj" fmla="val 23810"/>
+              <a:gd name="adj" fmla="val 5660"/>
             </a:avLst>
           </a:prstGeom>
           <a:solidFill>
@@ -7500,62 +7442,26 @@
       </p:sp>
       <p:sp>
         <p:nvSpPr>
-          <p:cNvPr id="21" name="Text 19"/>
-          <p:cNvSpPr/>
-          <p:nvPr/>
-        </p:nvSpPr>
-        <p:spPr>
-          <a:xfrm>
-            <a:off x="365760" y="3429000"/>
-            <a:ext cx="1325880" cy="384048"/>
-          </a:xfrm>
-          <a:prstGeom prst="rect">
-            <a:avLst/>
-          </a:prstGeom>
-          <a:noFill/>
-          <a:ln/>
-        </p:spPr>
-        <p:txBody>
-          <a:bodyPr wrap="square" rtlCol="0" anchor="ctr"/>
-          <a:lstStyle/>
-          <a:p>
-            <a:pPr algn="ctr" indent="0" marL="0">
-              <a:buNone/>
-            </a:pPr>
-            <a:r>
-              <a:rPr lang="en-US" sz="1100" b="1" dirty="0">
-                <a:solidFill>
-                  <a:srgbClr val="D97706"/>
-                </a:solidFill>
-              </a:rPr>
-              <a:t>🟡 런칭 준비</a:t>
-            </a:r>
-            <a:endParaRPr lang="en-US" sz="1100" dirty="0"/>
-          </a:p>
-        </p:txBody>
-      </p:sp>
-      <p:sp>
-        <p:nvSpPr>
-          <p:cNvPr id="22" name="Shape 20"/>
-          <p:cNvSpPr/>
-          <p:nvPr/>
-        </p:nvSpPr>
-        <p:spPr>
-          <a:xfrm>
-            <a:off x="228600" y="3886200"/>
-            <a:ext cx="3749040" cy="1280160"/>
+          <p:cNvPr id="29" name="Shape 27"/>
+          <p:cNvSpPr/>
+          <p:nvPr/>
+        </p:nvSpPr>
+        <p:spPr>
+          <a:xfrm>
+            <a:off x="338328" y="3675888"/>
+            <a:ext cx="3529584" cy="384048"/>
           </a:xfrm>
           <a:prstGeom prst="roundRect">
             <a:avLst>
-              <a:gd name="adj" fmla="val 9286"/>
+              <a:gd name="adj" fmla="val 19048"/>
             </a:avLst>
           </a:prstGeom>
           <a:solidFill>
-            <a:srgbClr val="FFFFFF"/>
+            <a:srgbClr val="D97706"/>
           </a:solidFill>
           <a:ln w="12700">
             <a:solidFill>
-              <a:srgbClr val="E9D5FF"/>
+              <a:srgbClr val="D97706"/>
             </a:solidFill>
             <a:prstDash val="solid"/>
           </a:ln>
@@ -7563,26 +7469,278 @@
       </p:sp>
       <p:sp>
         <p:nvSpPr>
-          <p:cNvPr id="23" name="Shape 21"/>
-          <p:cNvSpPr/>
-          <p:nvPr/>
-        </p:nvSpPr>
-        <p:spPr>
-          <a:xfrm>
-            <a:off x="365760" y="4005072"/>
-            <a:ext cx="3474720" cy="329184"/>
+          <p:cNvPr id="30" name="Text 28"/>
+          <p:cNvSpPr/>
+          <p:nvPr/>
+        </p:nvSpPr>
+        <p:spPr>
+          <a:xfrm>
+            <a:off x="338328" y="3675888"/>
+            <a:ext cx="3529584" cy="384048"/>
+          </a:xfrm>
+          <a:prstGeom prst="rect">
+            <a:avLst/>
+          </a:prstGeom>
+          <a:noFill/>
+          <a:ln/>
+        </p:spPr>
+        <p:txBody>
+          <a:bodyPr wrap="square" rtlCol="0" anchor="ctr"/>
+          <a:lstStyle/>
+          <a:p>
+            <a:pPr algn="ctr" indent="0" marL="0">
+              <a:buNone/>
+            </a:pPr>
+            <a:r>
+              <a:rPr lang="en-US" sz="1200" b="1" dirty="0">
+                <a:solidFill>
+                  <a:srgbClr val="FFFFFF"/>
+                </a:solidFill>
+              </a:rPr>
+              <a:t>👨‍🍳 사장님 기능</a:t>
+            </a:r>
+            <a:endParaRPr lang="en-US" sz="1200" dirty="0"/>
+          </a:p>
+        </p:txBody>
+      </p:sp>
+      <p:sp>
+        <p:nvSpPr>
+          <p:cNvPr id="31" name="Text 29"/>
+          <p:cNvSpPr/>
+          <p:nvPr/>
+        </p:nvSpPr>
+        <p:spPr>
+          <a:xfrm>
+            <a:off x="393192" y="4160520"/>
+            <a:ext cx="3401568" cy="338328"/>
+          </a:xfrm>
+          <a:prstGeom prst="rect">
+            <a:avLst/>
+          </a:prstGeom>
+          <a:noFill/>
+          <a:ln/>
+        </p:spPr>
+        <p:txBody>
+          <a:bodyPr wrap="square" rtlCol="0" anchor="ctr"/>
+          <a:lstStyle/>
+          <a:p>
+            <a:pPr indent="0" marL="0">
+              <a:buNone/>
+            </a:pPr>
+            <a:r>
+              <a:rPr lang="en-US" sz="1000" dirty="0">
+                <a:solidFill>
+                  <a:srgbClr val="1F1235"/>
+                </a:solidFill>
+              </a:rPr>
+              <a:t>✓  가게 등록·설정·쿠폰(KRW 입력)·영업시간</a:t>
+            </a:r>
+            <a:endParaRPr lang="en-US" sz="1000" dirty="0"/>
+          </a:p>
+        </p:txBody>
+      </p:sp>
+      <p:sp>
+        <p:nvSpPr>
+          <p:cNvPr id="32" name="Text 30"/>
+          <p:cNvSpPr/>
+          <p:nvPr/>
+        </p:nvSpPr>
+        <p:spPr>
+          <a:xfrm>
+            <a:off x="393192" y="4507992"/>
+            <a:ext cx="3401568" cy="338328"/>
+          </a:xfrm>
+          <a:prstGeom prst="rect">
+            <a:avLst/>
+          </a:prstGeom>
+          <a:noFill/>
+          <a:ln/>
+        </p:spPr>
+        <p:txBody>
+          <a:bodyPr wrap="square" rtlCol="0" anchor="ctr"/>
+          <a:lstStyle/>
+          <a:p>
+            <a:pPr indent="0" marL="0">
+              <a:buNone/>
+            </a:pPr>
+            <a:r>
+              <a:rPr lang="en-US" sz="1000" dirty="0">
+                <a:solidFill>
+                  <a:srgbClr val="1F1235"/>
+                </a:solidFill>
+              </a:rPr>
+              <a:t>✓  사진 리뷰 보상 설정 연동 (photo_review_reward_krw)</a:t>
+            </a:r>
+            <a:endParaRPr lang="en-US" sz="1000" dirty="0"/>
+          </a:p>
+        </p:txBody>
+      </p:sp>
+      <p:sp>
+        <p:nvSpPr>
+          <p:cNvPr id="33" name="Text 31"/>
+          <p:cNvSpPr/>
+          <p:nvPr/>
+        </p:nvSpPr>
+        <p:spPr>
+          <a:xfrm>
+            <a:off x="393192" y="4855464"/>
+            <a:ext cx="3401568" cy="338328"/>
+          </a:xfrm>
+          <a:prstGeom prst="rect">
+            <a:avLst/>
+          </a:prstGeom>
+          <a:noFill/>
+          <a:ln/>
+        </p:spPr>
+        <p:txBody>
+          <a:bodyPr wrap="square" rtlCol="0" anchor="ctr"/>
+          <a:lstStyle/>
+          <a:p>
+            <a:pPr indent="0" marL="0">
+              <a:buNone/>
+            </a:pPr>
+            <a:r>
+              <a:rPr lang="en-US" sz="1000" dirty="0">
+                <a:solidFill>
+                  <a:srgbClr val="1F1235"/>
+                </a:solidFill>
+              </a:rPr>
+              <a:t>✓  주문 관리: 수락 ETA + 거절 확인 팝업</a:t>
+            </a:r>
+            <a:endParaRPr lang="en-US" sz="1000" dirty="0"/>
+          </a:p>
+        </p:txBody>
+      </p:sp>
+      <p:sp>
+        <p:nvSpPr>
+          <p:cNvPr id="34" name="Text 32"/>
+          <p:cNvSpPr/>
+          <p:nvPr/>
+        </p:nvSpPr>
+        <p:spPr>
+          <a:xfrm>
+            <a:off x="393192" y="5202936"/>
+            <a:ext cx="3401568" cy="338328"/>
+          </a:xfrm>
+          <a:prstGeom prst="rect">
+            <a:avLst/>
+          </a:prstGeom>
+          <a:noFill/>
+          <a:ln/>
+        </p:spPr>
+        <p:txBody>
+          <a:bodyPr wrap="square" rtlCol="0" anchor="ctr"/>
+          <a:lstStyle/>
+          <a:p>
+            <a:pPr indent="0" marL="0">
+              <a:buNone/>
+            </a:pPr>
+            <a:r>
+              <a:rPr lang="en-US" sz="1000" dirty="0">
+                <a:solidFill>
+                  <a:srgbClr val="1F1235"/>
+                </a:solidFill>
+              </a:rPr>
+              <a:t>✓  매출 통계 대시보드 + 주간 차트</a:t>
+            </a:r>
+            <a:endParaRPr lang="en-US" sz="1000" dirty="0"/>
+          </a:p>
+        </p:txBody>
+      </p:sp>
+      <p:sp>
+        <p:nvSpPr>
+          <p:cNvPr id="35" name="Text 33"/>
+          <p:cNvSpPr/>
+          <p:nvPr/>
+        </p:nvSpPr>
+        <p:spPr>
+          <a:xfrm>
+            <a:off x="393192" y="5550408"/>
+            <a:ext cx="3401568" cy="338328"/>
+          </a:xfrm>
+          <a:prstGeom prst="rect">
+            <a:avLst/>
+          </a:prstGeom>
+          <a:noFill/>
+          <a:ln/>
+        </p:spPr>
+        <p:txBody>
+          <a:bodyPr wrap="square" rtlCol="0" anchor="ctr"/>
+          <a:lstStyle/>
+          <a:p>
+            <a:pPr indent="0" marL="0">
+              <a:buNone/>
+            </a:pPr>
+            <a:r>
+              <a:rPr lang="en-US" sz="1000" dirty="0">
+                <a:solidFill>
+                  <a:srgbClr val="1F1235"/>
+                </a:solidFill>
+              </a:rPr>
+              <a:t>✓  신규주문 TTS 알림 '픽픽 주문이 들어왔습니다'</a:t>
+            </a:r>
+            <a:endParaRPr lang="en-US" sz="1000" dirty="0"/>
+          </a:p>
+        </p:txBody>
+      </p:sp>
+      <p:sp>
+        <p:nvSpPr>
+          <p:cNvPr id="36" name="Text 34"/>
+          <p:cNvSpPr/>
+          <p:nvPr/>
+        </p:nvSpPr>
+        <p:spPr>
+          <a:xfrm>
+            <a:off x="393192" y="5897880"/>
+            <a:ext cx="3401568" cy="338328"/>
+          </a:xfrm>
+          <a:prstGeom prst="rect">
+            <a:avLst/>
+          </a:prstGeom>
+          <a:noFill/>
+          <a:ln/>
+        </p:spPr>
+        <p:txBody>
+          <a:bodyPr wrap="square" rtlCol="0" anchor="ctr"/>
+          <a:lstStyle/>
+          <a:p>
+            <a:pPr indent="0" marL="0">
+              <a:buNone/>
+            </a:pPr>
+            <a:r>
+              <a:rPr lang="en-US" sz="1000" dirty="0">
+                <a:solidFill>
+                  <a:srgbClr val="1F1235"/>
+                </a:solidFill>
+              </a:rPr>
+              <a:t>✓  신규 가맹점 초대 리워드 20,000 PICK</a:t>
+            </a:r>
+            <a:endParaRPr lang="en-US" sz="1000" dirty="0"/>
+          </a:p>
+        </p:txBody>
+      </p:sp>
+      <p:sp>
+        <p:nvSpPr>
+          <p:cNvPr id="37" name="Shape 35"/>
+          <p:cNvSpPr/>
+          <p:nvPr/>
+        </p:nvSpPr>
+        <p:spPr>
+          <a:xfrm>
+            <a:off x="4160520" y="3566160"/>
+            <a:ext cx="3749040" cy="2423160"/>
           </a:xfrm>
           <a:prstGeom prst="roundRect">
             <a:avLst>
-              <a:gd name="adj" fmla="val 22222"/>
+              <a:gd name="adj" fmla="val 5660"/>
             </a:avLst>
           </a:prstGeom>
           <a:solidFill>
-            <a:srgbClr val="FFFBEB"/>
+            <a:srgbClr val="ECFEFF"/>
           </a:solidFill>
           <a:ln w="12700">
             <a:solidFill>
-              <a:srgbClr val="FFFBEB"/>
+              <a:srgbClr val="0891B2"/>
             </a:solidFill>
             <a:prstDash val="solid"/>
           </a:ln>
@@ -7590,126 +7748,26 @@
       </p:sp>
       <p:sp>
         <p:nvSpPr>
-          <p:cNvPr id="24" name="Text 22"/>
-          <p:cNvSpPr/>
-          <p:nvPr/>
-        </p:nvSpPr>
-        <p:spPr>
-          <a:xfrm>
-            <a:off x="365760" y="4005072"/>
-            <a:ext cx="3474720" cy="329184"/>
-          </a:xfrm>
-          <a:prstGeom prst="rect">
-            <a:avLst/>
-          </a:prstGeom>
-          <a:noFill/>
-          <a:ln/>
-        </p:spPr>
-        <p:txBody>
-          <a:bodyPr wrap="square" rtlCol="0" anchor="ctr"/>
-          <a:lstStyle/>
-          <a:p>
-            <a:pPr algn="ctr" indent="0" marL="0">
-              <a:buNone/>
-            </a:pPr>
-            <a:r>
-              <a:rPr lang="en-US" sz="1200" b="1" dirty="0">
-                <a:solidFill>
-                  <a:srgbClr val="D97706"/>
-                </a:solidFill>
-              </a:rPr>
-              <a:t>Firebase 환경변수 ✅</a:t>
-            </a:r>
-            <a:endParaRPr lang="en-US" sz="1200" dirty="0"/>
-          </a:p>
-        </p:txBody>
-      </p:sp>
-      <p:sp>
-        <p:nvSpPr>
-          <p:cNvPr id="25" name="Text 23"/>
-          <p:cNvSpPr/>
-          <p:nvPr/>
-        </p:nvSpPr>
-        <p:spPr>
-          <a:xfrm>
-            <a:off x="393192" y="4398264"/>
-            <a:ext cx="3419856" cy="694944"/>
-          </a:xfrm>
-          <a:prstGeom prst="rect">
-            <a:avLst/>
-          </a:prstGeom>
-          <a:noFill/>
-          <a:ln/>
-        </p:spPr>
-        <p:txBody>
-          <a:bodyPr wrap="square" rtlCol="0" anchor="ctr"/>
-          <a:lstStyle/>
-          <a:p>
-            <a:pPr indent="0" marL="0">
-              <a:buNone/>
-            </a:pPr>
-            <a:r>
-              <a:rPr lang="en-US" sz="1050" dirty="0">
-                <a:solidFill>
-                  <a:srgbClr val="6B7280"/>
-                </a:solidFill>
-              </a:rPr>
-              <a:t>API Key ~ App ID 완성</a:t>
-            </a:r>
-            <a:endParaRPr lang="en-US" sz="1050" dirty="0"/>
-          </a:p>
-          <a:p>
-            <a:pPr indent="0" marL="0">
-              <a:buNone/>
-            </a:pPr>
-            <a:r>
-              <a:rPr lang="en-US" sz="1050" dirty="0">
-                <a:solidFill>
-                  <a:srgbClr val="6B7280"/>
-                </a:solidFill>
-              </a:rPr>
-              <a:t>VAPID 키 완성</a:t>
-            </a:r>
-            <a:endParaRPr lang="en-US" sz="1050" dirty="0"/>
-          </a:p>
-          <a:p>
-            <a:pPr indent="0" marL="0">
-              <a:buNone/>
-            </a:pPr>
-            <a:r>
-              <a:rPr lang="en-US" sz="1050" dirty="0">
-                <a:solidFill>
-                  <a:srgbClr val="6B7280"/>
-                </a:solidFill>
-              </a:rPr>
-              <a:t>Admin SDK JSON 완성</a:t>
-            </a:r>
-            <a:endParaRPr lang="en-US" sz="1050" dirty="0"/>
-          </a:p>
-        </p:txBody>
-      </p:sp>
-      <p:sp>
-        <p:nvSpPr>
-          <p:cNvPr id="26" name="Shape 24"/>
-          <p:cNvSpPr/>
-          <p:nvPr/>
-        </p:nvSpPr>
-        <p:spPr>
-          <a:xfrm>
-            <a:off x="4133088" y="3886200"/>
-            <a:ext cx="3749040" cy="1280160"/>
+          <p:cNvPr id="38" name="Shape 36"/>
+          <p:cNvSpPr/>
+          <p:nvPr/>
+        </p:nvSpPr>
+        <p:spPr>
+          <a:xfrm>
+            <a:off x="4270248" y="3675888"/>
+            <a:ext cx="3529584" cy="384048"/>
           </a:xfrm>
           <a:prstGeom prst="roundRect">
             <a:avLst>
-              <a:gd name="adj" fmla="val 9286"/>
+              <a:gd name="adj" fmla="val 19048"/>
             </a:avLst>
           </a:prstGeom>
           <a:solidFill>
-            <a:srgbClr val="FFFFFF"/>
+            <a:srgbClr val="0891B2"/>
           </a:solidFill>
           <a:ln w="12700">
             <a:solidFill>
-              <a:srgbClr val="E9D5FF"/>
+              <a:srgbClr val="0891B2"/>
             </a:solidFill>
             <a:prstDash val="solid"/>
           </a:ln>
@@ -7717,299 +7775,234 @@
       </p:sp>
       <p:sp>
         <p:nvSpPr>
-          <p:cNvPr id="27" name="Shape 25"/>
-          <p:cNvSpPr/>
-          <p:nvPr/>
-        </p:nvSpPr>
-        <p:spPr>
-          <a:xfrm>
-            <a:off x="4270248" y="4005072"/>
-            <a:ext cx="3474720" cy="329184"/>
+          <p:cNvPr id="39" name="Text 37"/>
+          <p:cNvSpPr/>
+          <p:nvPr/>
+        </p:nvSpPr>
+        <p:spPr>
+          <a:xfrm>
+            <a:off x="4270248" y="3675888"/>
+            <a:ext cx="3529584" cy="384048"/>
+          </a:xfrm>
+          <a:prstGeom prst="rect">
+            <a:avLst/>
+          </a:prstGeom>
+          <a:noFill/>
+          <a:ln/>
+        </p:spPr>
+        <p:txBody>
+          <a:bodyPr wrap="square" rtlCol="0" anchor="ctr"/>
+          <a:lstStyle/>
+          <a:p>
+            <a:pPr algn="ctr" indent="0" marL="0">
+              <a:buNone/>
+            </a:pPr>
+            <a:r>
+              <a:rPr lang="en-US" sz="1200" b="1" dirty="0">
+                <a:solidFill>
+                  <a:srgbClr val="FFFFFF"/>
+                </a:solidFill>
+              </a:rPr>
+              <a:t>🛵 라이더 / PWA / 인프라</a:t>
+            </a:r>
+            <a:endParaRPr lang="en-US" sz="1200" dirty="0"/>
+          </a:p>
+        </p:txBody>
+      </p:sp>
+      <p:sp>
+        <p:nvSpPr>
+          <p:cNvPr id="40" name="Text 38"/>
+          <p:cNvSpPr/>
+          <p:nvPr/>
+        </p:nvSpPr>
+        <p:spPr>
+          <a:xfrm>
+            <a:off x="4325112" y="4160520"/>
+            <a:ext cx="3401568" cy="338328"/>
+          </a:xfrm>
+          <a:prstGeom prst="rect">
+            <a:avLst/>
+          </a:prstGeom>
+          <a:noFill/>
+          <a:ln/>
+        </p:spPr>
+        <p:txBody>
+          <a:bodyPr wrap="square" rtlCol="0" anchor="ctr"/>
+          <a:lstStyle/>
+          <a:p>
+            <a:pPr indent="0" marL="0">
+              <a:buNone/>
+            </a:pPr>
+            <a:r>
+              <a:rPr lang="en-US" sz="1000" dirty="0">
+                <a:solidFill>
+                  <a:srgbClr val="1F1235"/>
+                </a:solidFill>
+              </a:rPr>
+              <a:t>✓  배달 수락 → PICK 자동 지급 + 위치 공유</a:t>
+            </a:r>
+            <a:endParaRPr lang="en-US" sz="1000" dirty="0"/>
+          </a:p>
+        </p:txBody>
+      </p:sp>
+      <p:sp>
+        <p:nvSpPr>
+          <p:cNvPr id="41" name="Text 39"/>
+          <p:cNvSpPr/>
+          <p:nvPr/>
+        </p:nvSpPr>
+        <p:spPr>
+          <a:xfrm>
+            <a:off x="4325112" y="4507992"/>
+            <a:ext cx="3401568" cy="338328"/>
+          </a:xfrm>
+          <a:prstGeom prst="rect">
+            <a:avLst/>
+          </a:prstGeom>
+          <a:noFill/>
+          <a:ln/>
+        </p:spPr>
+        <p:txBody>
+          <a:bodyPr wrap="square" rtlCol="0" anchor="ctr"/>
+          <a:lstStyle/>
+          <a:p>
+            <a:pPr indent="0" marL="0">
+              <a:buNone/>
+            </a:pPr>
+            <a:r>
+              <a:rPr lang="en-US" sz="1000" dirty="0">
+                <a:solidFill>
+                  <a:srgbClr val="1F1235"/>
+                </a:solidFill>
+              </a:rPr>
+              <a:t>✓  라이더 5km 반경 필터링 + 거리순 정렬</a:t>
+            </a:r>
+            <a:endParaRPr lang="en-US" sz="1000" dirty="0"/>
+          </a:p>
+        </p:txBody>
+      </p:sp>
+      <p:sp>
+        <p:nvSpPr>
+          <p:cNvPr id="42" name="Text 40"/>
+          <p:cNvSpPr/>
+          <p:nvPr/>
+        </p:nvSpPr>
+        <p:spPr>
+          <a:xfrm>
+            <a:off x="4325112" y="4855464"/>
+            <a:ext cx="3401568" cy="338328"/>
+          </a:xfrm>
+          <a:prstGeom prst="rect">
+            <a:avLst/>
+          </a:prstGeom>
+          <a:noFill/>
+          <a:ln/>
+        </p:spPr>
+        <p:txBody>
+          <a:bodyPr wrap="square" rtlCol="0" anchor="ctr"/>
+          <a:lstStyle/>
+          <a:p>
+            <a:pPr indent="0" marL="0">
+              <a:buNone/>
+            </a:pPr>
+            <a:r>
+              <a:rPr lang="en-US" sz="1000" dirty="0">
+                <a:solidFill>
+                  <a:srgbClr val="1F1235"/>
+                </a:solidFill>
+              </a:rPr>
+              <a:t>✓  10분 자동오프라인 Cron (매 5분 실행)</a:t>
+            </a:r>
+            <a:endParaRPr lang="en-US" sz="1000" dirty="0"/>
+          </a:p>
+        </p:txBody>
+      </p:sp>
+      <p:sp>
+        <p:nvSpPr>
+          <p:cNvPr id="43" name="Text 41"/>
+          <p:cNvSpPr/>
+          <p:nvPr/>
+        </p:nvSpPr>
+        <p:spPr>
+          <a:xfrm>
+            <a:off x="4325112" y="5202936"/>
+            <a:ext cx="3401568" cy="338328"/>
+          </a:xfrm>
+          <a:prstGeom prst="rect">
+            <a:avLst/>
+          </a:prstGeom>
+          <a:noFill/>
+          <a:ln/>
+        </p:spPr>
+        <p:txBody>
+          <a:bodyPr wrap="square" rtlCol="0" anchor="ctr"/>
+          <a:lstStyle/>
+          <a:p>
+            <a:pPr indent="0" marL="0">
+              <a:buNone/>
+            </a:pPr>
+            <a:r>
+              <a:rPr lang="en-US" sz="1000" dirty="0">
+                <a:solidFill>
+                  <a:srgbClr val="1F1235"/>
+                </a:solidFill>
+              </a:rPr>
+              <a:t>✓  FCM 푸시 알림 + 관리자 일괄 발송</a:t>
+            </a:r>
+            <a:endParaRPr lang="en-US" sz="1000" dirty="0"/>
+          </a:p>
+        </p:txBody>
+      </p:sp>
+      <p:sp>
+        <p:nvSpPr>
+          <p:cNvPr id="44" name="Text 42"/>
+          <p:cNvSpPr/>
+          <p:nvPr/>
+        </p:nvSpPr>
+        <p:spPr>
+          <a:xfrm>
+            <a:off x="4325112" y="5550408"/>
+            <a:ext cx="3401568" cy="338328"/>
+          </a:xfrm>
+          <a:prstGeom prst="rect">
+            <a:avLst/>
+          </a:prstGeom>
+          <a:noFill/>
+          <a:ln/>
+        </p:spPr>
+        <p:txBody>
+          <a:bodyPr wrap="square" rtlCol="0" anchor="ctr"/>
+          <a:lstStyle/>
+          <a:p>
+            <a:pPr indent="0" marL="0">
+              <a:buNone/>
+            </a:pPr>
+            <a:r>
+              <a:rPr lang="en-US" sz="1000" dirty="0">
+                <a:solidFill>
+                  <a:srgbClr val="1F1235"/>
+                </a:solidFill>
+              </a:rPr>
+              <a:t>✓  PWA 오프라인 캐싱 (Serwist) + Sentry 모니터링</a:t>
+            </a:r>
+            <a:endParaRPr lang="en-US" sz="1000" dirty="0"/>
+          </a:p>
+        </p:txBody>
+      </p:sp>
+      <p:sp>
+        <p:nvSpPr>
+          <p:cNvPr id="45" name="Shape 43"/>
+          <p:cNvSpPr/>
+          <p:nvPr/>
+        </p:nvSpPr>
+        <p:spPr>
+          <a:xfrm>
+            <a:off x="8092440" y="3566160"/>
+            <a:ext cx="3749040" cy="2423160"/>
           </a:xfrm>
           <a:prstGeom prst="roundRect">
             <a:avLst>
-              <a:gd name="adj" fmla="val 22222"/>
-            </a:avLst>
-          </a:prstGeom>
-          <a:solidFill>
-            <a:srgbClr val="FFFBEB"/>
-          </a:solidFill>
-          <a:ln w="12700">
-            <a:solidFill>
-              <a:srgbClr val="FFFBEB"/>
-            </a:solidFill>
-            <a:prstDash val="solid"/>
-          </a:ln>
-        </p:spPr>
-      </p:sp>
-      <p:sp>
-        <p:nvSpPr>
-          <p:cNvPr id="28" name="Text 26"/>
-          <p:cNvSpPr/>
-          <p:nvPr/>
-        </p:nvSpPr>
-        <p:spPr>
-          <a:xfrm>
-            <a:off x="4270248" y="4005072"/>
-            <a:ext cx="3474720" cy="329184"/>
-          </a:xfrm>
-          <a:prstGeom prst="rect">
-            <a:avLst/>
-          </a:prstGeom>
-          <a:noFill/>
-          <a:ln/>
-        </p:spPr>
-        <p:txBody>
-          <a:bodyPr wrap="square" rtlCol="0" anchor="ctr"/>
-          <a:lstStyle/>
-          <a:p>
-            <a:pPr algn="ctr" indent="0" marL="0">
-              <a:buNone/>
-            </a:pPr>
-            <a:r>
-              <a:rPr lang="en-US" sz="1200" b="1" dirty="0">
-                <a:solidFill>
-                  <a:srgbClr val="D97706"/>
-                </a:solidFill>
-              </a:rPr>
-              <a:t>카카오 API 키 확인</a:t>
-            </a:r>
-            <a:endParaRPr lang="en-US" sz="1200" dirty="0"/>
-          </a:p>
-        </p:txBody>
-      </p:sp>
-      <p:sp>
-        <p:nvSpPr>
-          <p:cNvPr id="29" name="Text 27"/>
-          <p:cNvSpPr/>
-          <p:nvPr/>
-        </p:nvSpPr>
-        <p:spPr>
-          <a:xfrm>
-            <a:off x="4297680" y="4398264"/>
-            <a:ext cx="3419856" cy="694944"/>
-          </a:xfrm>
-          <a:prstGeom prst="rect">
-            <a:avLst/>
-          </a:prstGeom>
-          <a:noFill/>
-          <a:ln/>
-        </p:spPr>
-        <p:txBody>
-          <a:bodyPr wrap="square" rtlCol="0" anchor="ctr"/>
-          <a:lstStyle/>
-          <a:p>
-            <a:pPr indent="0" marL="0">
-              <a:buNone/>
-            </a:pPr>
-            <a:r>
-              <a:rPr lang="en-US" sz="1050" dirty="0">
-                <a:solidFill>
-                  <a:srgbClr val="6B7280"/>
-                </a:solidFill>
-              </a:rPr>
-              <a:t>앱 키 → JavaScript 키 재확인</a:t>
-            </a:r>
-            <a:endParaRPr lang="en-US" sz="1050" dirty="0"/>
-          </a:p>
-          <a:p>
-            <a:pPr indent="0" marL="0">
-              <a:buNone/>
-            </a:pPr>
-            <a:r>
-              <a:rPr lang="en-US" sz="1050" dirty="0">
-                <a:solidFill>
-                  <a:srgbClr val="6B7280"/>
-                </a:solidFill>
-              </a:rPr>
-              <a:t>NEXT_PUBLIC_KAKAO_MAP_KEY 검증</a:t>
-            </a:r>
-            <a:endParaRPr lang="en-US" sz="1050" dirty="0"/>
-          </a:p>
-          <a:p>
-            <a:pPr indent="0" marL="0">
-              <a:buNone/>
-            </a:pPr>
-            <a:r>
-              <a:rPr lang="en-US" sz="1050" dirty="0">
-                <a:solidFill>
-                  <a:srgbClr val="6B7280"/>
-                </a:solidFill>
-              </a:rPr>
-              <a:t>Kakao Map 지도 표시 테스트</a:t>
-            </a:r>
-            <a:endParaRPr lang="en-US" sz="1050" dirty="0"/>
-          </a:p>
-        </p:txBody>
-      </p:sp>
-      <p:sp>
-        <p:nvSpPr>
-          <p:cNvPr id="30" name="Shape 28"/>
-          <p:cNvSpPr/>
-          <p:nvPr/>
-        </p:nvSpPr>
-        <p:spPr>
-          <a:xfrm>
-            <a:off x="8037576" y="3886200"/>
-            <a:ext cx="3749040" cy="1280160"/>
-          </a:xfrm>
-          <a:prstGeom prst="roundRect">
-            <a:avLst>
-              <a:gd name="adj" fmla="val 9286"/>
-            </a:avLst>
-          </a:prstGeom>
-          <a:solidFill>
-            <a:srgbClr val="FFFFFF"/>
-          </a:solidFill>
-          <a:ln w="12700">
-            <a:solidFill>
-              <a:srgbClr val="E9D5FF"/>
-            </a:solidFill>
-            <a:prstDash val="solid"/>
-          </a:ln>
-        </p:spPr>
-      </p:sp>
-      <p:sp>
-        <p:nvSpPr>
-          <p:cNvPr id="31" name="Shape 29"/>
-          <p:cNvSpPr/>
-          <p:nvPr/>
-        </p:nvSpPr>
-        <p:spPr>
-          <a:xfrm>
-            <a:off x="8174736" y="4005072"/>
-            <a:ext cx="3474720" cy="329184"/>
-          </a:xfrm>
-          <a:prstGeom prst="roundRect">
-            <a:avLst>
-              <a:gd name="adj" fmla="val 22222"/>
-            </a:avLst>
-          </a:prstGeom>
-          <a:solidFill>
-            <a:srgbClr val="FFFBEB"/>
-          </a:solidFill>
-          <a:ln w="12700">
-            <a:solidFill>
-              <a:srgbClr val="FFFBEB"/>
-            </a:solidFill>
-            <a:prstDash val="solid"/>
-          </a:ln>
-        </p:spPr>
-      </p:sp>
-      <p:sp>
-        <p:nvSpPr>
-          <p:cNvPr id="32" name="Text 30"/>
-          <p:cNvSpPr/>
-          <p:nvPr/>
-        </p:nvSpPr>
-        <p:spPr>
-          <a:xfrm>
-            <a:off x="8174736" y="4005072"/>
-            <a:ext cx="3474720" cy="329184"/>
-          </a:xfrm>
-          <a:prstGeom prst="rect">
-            <a:avLst/>
-          </a:prstGeom>
-          <a:noFill/>
-          <a:ln/>
-        </p:spPr>
-        <p:txBody>
-          <a:bodyPr wrap="square" rtlCol="0" anchor="ctr"/>
-          <a:lstStyle/>
-          <a:p>
-            <a:pPr algn="ctr" indent="0" marL="0">
-              <a:buNone/>
-            </a:pPr>
-            <a:r>
-              <a:rPr lang="en-US" sz="1200" b="1" dirty="0">
-                <a:solidFill>
-                  <a:srgbClr val="D97706"/>
-                </a:solidFill>
-              </a:rPr>
-              <a:t>샘플 데이터 + 배포</a:t>
-            </a:r>
-            <a:endParaRPr lang="en-US" sz="1200" dirty="0"/>
-          </a:p>
-        </p:txBody>
-      </p:sp>
-      <p:sp>
-        <p:nvSpPr>
-          <p:cNvPr id="33" name="Text 31"/>
-          <p:cNvSpPr/>
-          <p:nvPr/>
-        </p:nvSpPr>
-        <p:spPr>
-          <a:xfrm>
-            <a:off x="8202168" y="4398264"/>
-            <a:ext cx="3419856" cy="694944"/>
-          </a:xfrm>
-          <a:prstGeom prst="rect">
-            <a:avLst/>
-          </a:prstGeom>
-          <a:noFill/>
-          <a:ln/>
-        </p:spPr>
-        <p:txBody>
-          <a:bodyPr wrap="square" rtlCol="0" anchor="ctr"/>
-          <a:lstStyle/>
-          <a:p>
-            <a:pPr indent="0" marL="0">
-              <a:buNone/>
-            </a:pPr>
-            <a:r>
-              <a:rPr lang="en-US" sz="1050" dirty="0">
-                <a:solidFill>
-                  <a:srgbClr val="6B7280"/>
-                </a:solidFill>
-              </a:rPr>
-              <a:t>실 가맹점 + 메뉴 데이터 추가</a:t>
-            </a:r>
-            <a:endParaRPr lang="en-US" sz="1050" dirty="0"/>
-          </a:p>
-          <a:p>
-            <a:pPr indent="0" marL="0">
-              <a:buNone/>
-            </a:pPr>
-            <a:r>
-              <a:rPr lang="en-US" sz="1050" dirty="0">
-                <a:solidFill>
-                  <a:srgbClr val="6B7280"/>
-                </a:solidFill>
-              </a:rPr>
-              <a:t>관리자 계정 role='admin' 설정</a:t>
-            </a:r>
-            <a:endParaRPr lang="en-US" sz="1050" dirty="0"/>
-          </a:p>
-          <a:p>
-            <a:pPr indent="0" marL="0">
-              <a:buNone/>
-            </a:pPr>
-            <a:r>
-              <a:rPr lang="en-US" sz="1050" dirty="0">
-                <a:solidFill>
-                  <a:srgbClr val="6B7280"/>
-                </a:solidFill>
-              </a:rPr>
-              <a:t>Vercel 프로덕션 배포 확인</a:t>
-            </a:r>
-            <a:endParaRPr lang="en-US" sz="1050" dirty="0"/>
-          </a:p>
-        </p:txBody>
-      </p:sp>
-      <p:sp>
-        <p:nvSpPr>
-          <p:cNvPr id="34" name="Shape 32"/>
-          <p:cNvSpPr/>
-          <p:nvPr/>
-        </p:nvSpPr>
-        <p:spPr>
-          <a:xfrm>
-            <a:off x="365760" y="5257800"/>
-            <a:ext cx="1325880" cy="384048"/>
-          </a:xfrm>
-          <a:prstGeom prst="roundRect">
-            <a:avLst>
-              <a:gd name="adj" fmla="val 23810"/>
+              <a:gd name="adj" fmla="val 5660"/>
             </a:avLst>
           </a:prstGeom>
           <a:solidFill>
@@ -8025,62 +8018,26 @@
       </p:sp>
       <p:sp>
         <p:nvSpPr>
-          <p:cNvPr id="35" name="Text 33"/>
-          <p:cNvSpPr/>
-          <p:nvPr/>
-        </p:nvSpPr>
-        <p:spPr>
-          <a:xfrm>
-            <a:off x="365760" y="5257800"/>
-            <a:ext cx="1325880" cy="384048"/>
-          </a:xfrm>
-          <a:prstGeom prst="rect">
-            <a:avLst/>
-          </a:prstGeom>
-          <a:noFill/>
-          <a:ln/>
-        </p:spPr>
-        <p:txBody>
-          <a:bodyPr wrap="square" rtlCol="0" anchor="ctr"/>
-          <a:lstStyle/>
-          <a:p>
-            <a:pPr algn="ctr" indent="0" marL="0">
-              <a:buNone/>
-            </a:pPr>
-            <a:r>
-              <a:rPr lang="en-US" sz="1100" b="1" dirty="0">
-                <a:solidFill>
-                  <a:srgbClr val="EA580C"/>
-                </a:solidFill>
-              </a:rPr>
-              <a:t>⏳ Phase 4</a:t>
-            </a:r>
-            <a:endParaRPr lang="en-US" sz="1100" dirty="0"/>
-          </a:p>
-        </p:txBody>
-      </p:sp>
-      <p:sp>
-        <p:nvSpPr>
-          <p:cNvPr id="36" name="Shape 34"/>
-          <p:cNvSpPr/>
-          <p:nvPr/>
-        </p:nvSpPr>
-        <p:spPr>
-          <a:xfrm>
-            <a:off x="228600" y="5715000"/>
-            <a:ext cx="3749040" cy="1280160"/>
+          <p:cNvPr id="46" name="Shape 44"/>
+          <p:cNvSpPr/>
+          <p:nvPr/>
+        </p:nvSpPr>
+        <p:spPr>
+          <a:xfrm>
+            <a:off x="8202168" y="3675888"/>
+            <a:ext cx="3529584" cy="384048"/>
           </a:xfrm>
           <a:prstGeom prst="roundRect">
             <a:avLst>
-              <a:gd name="adj" fmla="val 9286"/>
+              <a:gd name="adj" fmla="val 19048"/>
             </a:avLst>
           </a:prstGeom>
           <a:solidFill>
-            <a:srgbClr val="FFFFFF"/>
+            <a:srgbClr val="EA580C"/>
           </a:solidFill>
           <a:ln w="12700">
             <a:solidFill>
-              <a:srgbClr val="E9D5FF"/>
+              <a:srgbClr val="EA580C"/>
             </a:solidFill>
             <a:prstDash val="solid"/>
           </a:ln>
@@ -8088,41 +8045,14 @@
       </p:sp>
       <p:sp>
         <p:nvSpPr>
-          <p:cNvPr id="37" name="Shape 35"/>
-          <p:cNvSpPr/>
-          <p:nvPr/>
-        </p:nvSpPr>
-        <p:spPr>
-          <a:xfrm>
-            <a:off x="365760" y="5833872"/>
-            <a:ext cx="3474720" cy="329184"/>
-          </a:xfrm>
-          <a:prstGeom prst="roundRect">
-            <a:avLst>
-              <a:gd name="adj" fmla="val 22222"/>
-            </a:avLst>
-          </a:prstGeom>
-          <a:solidFill>
-            <a:srgbClr val="FFEDD5"/>
-          </a:solidFill>
-          <a:ln w="12700">
-            <a:solidFill>
-              <a:srgbClr val="FFEDD5"/>
-            </a:solidFill>
-            <a:prstDash val="solid"/>
-          </a:ln>
-        </p:spPr>
-      </p:sp>
-      <p:sp>
-        <p:nvSpPr>
-          <p:cNvPr id="38" name="Text 36"/>
-          <p:cNvSpPr/>
-          <p:nvPr/>
-        </p:nvSpPr>
-        <p:spPr>
-          <a:xfrm>
-            <a:off x="365760" y="5833872"/>
-            <a:ext cx="3474720" cy="329184"/>
+          <p:cNvPr id="47" name="Text 45"/>
+          <p:cNvSpPr/>
+          <p:nvPr/>
+        </p:nvSpPr>
+        <p:spPr>
+          <a:xfrm>
+            <a:off x="8202168" y="3675888"/>
+            <a:ext cx="3529584" cy="384048"/>
           </a:xfrm>
           <a:prstGeom prst="rect">
             <a:avLst/>
@@ -8140,10 +8070,10 @@
             <a:r>
               <a:rPr lang="en-US" sz="1200" b="1" dirty="0">
                 <a:solidFill>
-                  <a:srgbClr val="EA580C"/>
-                </a:solidFill>
-              </a:rPr>
-              <a:t>Pi Network SDK 인증</a:t>
+                  <a:srgbClr val="FFFFFF"/>
+                </a:solidFill>
+              </a:rPr>
+              <a:t>🛡️ DB / 보안 / 관리자</a:t>
             </a:r>
             <a:endParaRPr lang="en-US" sz="1200" dirty="0"/>
           </a:p>
@@ -8151,373 +8081,181 @@
       </p:sp>
       <p:sp>
         <p:nvSpPr>
-          <p:cNvPr id="39" name="Text 37"/>
-          <p:cNvSpPr/>
-          <p:nvPr/>
-        </p:nvSpPr>
-        <p:spPr>
-          <a:xfrm>
-            <a:off x="393192" y="6227064"/>
-            <a:ext cx="3419856" cy="694944"/>
-          </a:xfrm>
-          <a:prstGeom prst="rect">
-            <a:avLst/>
-          </a:prstGeom>
-          <a:noFill/>
-          <a:ln/>
-        </p:spPr>
-        <p:txBody>
-          <a:bodyPr wrap="square" rtlCol="0" anchor="ctr"/>
-          <a:lstStyle/>
-          <a:p>
-            <a:pPr indent="0" marL="0">
-              <a:buNone/>
-            </a:pPr>
-            <a:r>
-              <a:rPr lang="en-US" sz="1050" dirty="0">
-                <a:solidFill>
-                  <a:srgbClr val="6B7280"/>
-                </a:solidFill>
-              </a:rPr>
-              <a:t>Pi SDK 연동 (Mainnet 개방 후)</a:t>
-            </a:r>
-            <a:endParaRPr lang="en-US" sz="1050" dirty="0"/>
-          </a:p>
-          <a:p>
-            <a:pPr indent="0" marL="0">
-              <a:buNone/>
-            </a:pPr>
-            <a:r>
-              <a:rPr lang="en-US" sz="1050" dirty="0">
-                <a:solidFill>
-                  <a:srgbClr val="6B7280"/>
-                </a:solidFill>
-              </a:rPr>
-              <a:t>pi_uid / pi_username 필드 활성화</a:t>
-            </a:r>
-            <a:endParaRPr lang="en-US" sz="1050" dirty="0"/>
-          </a:p>
-          <a:p>
-            <a:pPr indent="0" marL="0">
-              <a:buNone/>
-            </a:pPr>
-            <a:r>
-              <a:rPr lang="en-US" sz="1050" dirty="0">
-                <a:solidFill>
-                  <a:srgbClr val="6B7280"/>
-                </a:solidFill>
-              </a:rPr>
-              <a:t>Pi 기반 로그인 플로우</a:t>
-            </a:r>
-            <a:endParaRPr lang="en-US" sz="1050" dirty="0"/>
-          </a:p>
-        </p:txBody>
-      </p:sp>
-      <p:sp>
-        <p:nvSpPr>
-          <p:cNvPr id="40" name="Shape 38"/>
-          <p:cNvSpPr/>
-          <p:nvPr/>
-        </p:nvSpPr>
-        <p:spPr>
-          <a:xfrm>
-            <a:off x="4133088" y="5715000"/>
-            <a:ext cx="3749040" cy="1280160"/>
-          </a:xfrm>
-          <a:prstGeom prst="roundRect">
-            <a:avLst>
-              <a:gd name="adj" fmla="val 9286"/>
-            </a:avLst>
-          </a:prstGeom>
-          <a:solidFill>
-            <a:srgbClr val="FFFFFF"/>
-          </a:solidFill>
-          <a:ln w="12700">
-            <a:solidFill>
-              <a:srgbClr val="E9D5FF"/>
-            </a:solidFill>
-            <a:prstDash val="solid"/>
-          </a:ln>
-        </p:spPr>
-      </p:sp>
-      <p:sp>
-        <p:nvSpPr>
-          <p:cNvPr id="41" name="Shape 39"/>
-          <p:cNvSpPr/>
-          <p:nvPr/>
-        </p:nvSpPr>
-        <p:spPr>
-          <a:xfrm>
-            <a:off x="4270248" y="5833872"/>
-            <a:ext cx="3474720" cy="329184"/>
-          </a:xfrm>
-          <a:prstGeom prst="roundRect">
-            <a:avLst>
-              <a:gd name="adj" fmla="val 22222"/>
-            </a:avLst>
-          </a:prstGeom>
-          <a:solidFill>
-            <a:srgbClr val="FFEDD5"/>
-          </a:solidFill>
-          <a:ln w="12700">
-            <a:solidFill>
-              <a:srgbClr val="FFEDD5"/>
-            </a:solidFill>
-            <a:prstDash val="solid"/>
-          </a:ln>
-        </p:spPr>
-      </p:sp>
-      <p:sp>
-        <p:nvSpPr>
-          <p:cNvPr id="42" name="Text 40"/>
-          <p:cNvSpPr/>
-          <p:nvPr/>
-        </p:nvSpPr>
-        <p:spPr>
-          <a:xfrm>
-            <a:off x="4270248" y="5833872"/>
-            <a:ext cx="3474720" cy="329184"/>
-          </a:xfrm>
-          <a:prstGeom prst="rect">
-            <a:avLst/>
-          </a:prstGeom>
-          <a:noFill/>
-          <a:ln/>
-        </p:spPr>
-        <p:txBody>
-          <a:bodyPr wrap="square" rtlCol="0" anchor="ctr"/>
-          <a:lstStyle/>
-          <a:p>
-            <a:pPr algn="ctr" indent="0" marL="0">
-              <a:buNone/>
-            </a:pPr>
-            <a:r>
-              <a:rPr lang="en-US" sz="1200" b="1" dirty="0">
-                <a:solidFill>
-                  <a:srgbClr val="EA580C"/>
-                </a:solidFill>
-              </a:rPr>
-              <a:t>Pi 코인 결제 연동</a:t>
-            </a:r>
-            <a:endParaRPr lang="en-US" sz="1200" dirty="0"/>
-          </a:p>
-        </p:txBody>
-      </p:sp>
-      <p:sp>
-        <p:nvSpPr>
-          <p:cNvPr id="43" name="Text 41"/>
-          <p:cNvSpPr/>
-          <p:nvPr/>
-        </p:nvSpPr>
-        <p:spPr>
-          <a:xfrm>
-            <a:off x="4297680" y="6227064"/>
-            <a:ext cx="3419856" cy="694944"/>
-          </a:xfrm>
-          <a:prstGeom prst="rect">
-            <a:avLst/>
-          </a:prstGeom>
-          <a:noFill/>
-          <a:ln/>
-        </p:spPr>
-        <p:txBody>
-          <a:bodyPr wrap="square" rtlCol="0" anchor="ctr"/>
-          <a:lstStyle/>
-          <a:p>
-            <a:pPr indent="0" marL="0">
-              <a:buNone/>
-            </a:pPr>
-            <a:r>
-              <a:rPr lang="en-US" sz="1050" dirty="0">
-                <a:solidFill>
-                  <a:srgbClr val="6B7280"/>
-                </a:solidFill>
-              </a:rPr>
-              <a:t>Pi 결제 API 연동</a:t>
-            </a:r>
-            <a:endParaRPr lang="en-US" sz="1050" dirty="0"/>
-          </a:p>
-          <a:p>
-            <a:pPr indent="0" marL="0">
-              <a:buNone/>
-            </a:pPr>
-            <a:r>
-              <a:rPr lang="en-US" sz="1050" dirty="0">
-                <a:solidFill>
-                  <a:srgbClr val="6B7280"/>
-                </a:solidFill>
-              </a:rPr>
-              <a:t>PICK ↔ Pi 토큰 전환</a:t>
-            </a:r>
-            <a:endParaRPr lang="en-US" sz="1050" dirty="0"/>
-          </a:p>
-          <a:p>
-            <a:pPr indent="0" marL="0">
-              <a:buNone/>
-            </a:pPr>
-            <a:r>
-              <a:rPr lang="en-US" sz="1050" dirty="0">
-                <a:solidFill>
-                  <a:srgbClr val="6B7280"/>
-                </a:solidFill>
-              </a:rPr>
-              <a:t>Pi 기반 정산 시스템</a:t>
-            </a:r>
-            <a:endParaRPr lang="en-US" sz="1050" dirty="0"/>
-          </a:p>
-        </p:txBody>
-      </p:sp>
-      <p:sp>
-        <p:nvSpPr>
-          <p:cNvPr id="44" name="Shape 42"/>
-          <p:cNvSpPr/>
-          <p:nvPr/>
-        </p:nvSpPr>
-        <p:spPr>
-          <a:xfrm>
-            <a:off x="8037576" y="5715000"/>
-            <a:ext cx="3749040" cy="1280160"/>
-          </a:xfrm>
-          <a:prstGeom prst="roundRect">
-            <a:avLst>
-              <a:gd name="adj" fmla="val 9286"/>
-            </a:avLst>
-          </a:prstGeom>
-          <a:solidFill>
-            <a:srgbClr val="FFFFFF"/>
-          </a:solidFill>
-          <a:ln w="12700">
-            <a:solidFill>
-              <a:srgbClr val="E9D5FF"/>
-            </a:solidFill>
-            <a:prstDash val="solid"/>
-          </a:ln>
-        </p:spPr>
-      </p:sp>
-      <p:sp>
-        <p:nvSpPr>
-          <p:cNvPr id="45" name="Shape 43"/>
-          <p:cNvSpPr/>
-          <p:nvPr/>
-        </p:nvSpPr>
-        <p:spPr>
-          <a:xfrm>
-            <a:off x="8174736" y="5833872"/>
-            <a:ext cx="3474720" cy="329184"/>
-          </a:xfrm>
-          <a:prstGeom prst="roundRect">
-            <a:avLst>
-              <a:gd name="adj" fmla="val 22222"/>
-            </a:avLst>
-          </a:prstGeom>
-          <a:solidFill>
-            <a:srgbClr val="FFEDD5"/>
-          </a:solidFill>
-          <a:ln w="12700">
-            <a:solidFill>
-              <a:srgbClr val="FFEDD5"/>
-            </a:solidFill>
-            <a:prstDash val="solid"/>
-          </a:ln>
-        </p:spPr>
-      </p:sp>
-      <p:sp>
-        <p:nvSpPr>
-          <p:cNvPr id="46" name="Text 44"/>
-          <p:cNvSpPr/>
-          <p:nvPr/>
-        </p:nvSpPr>
-        <p:spPr>
-          <a:xfrm>
-            <a:off x="8174736" y="5833872"/>
-            <a:ext cx="3474720" cy="329184"/>
-          </a:xfrm>
-          <a:prstGeom prst="rect">
-            <a:avLst/>
-          </a:prstGeom>
-          <a:noFill/>
-          <a:ln/>
-        </p:spPr>
-        <p:txBody>
-          <a:bodyPr wrap="square" rtlCol="0" anchor="ctr"/>
-          <a:lstStyle/>
-          <a:p>
-            <a:pPr algn="ctr" indent="0" marL="0">
-              <a:buNone/>
-            </a:pPr>
-            <a:r>
-              <a:rPr lang="en-US" sz="1200" b="1" dirty="0">
-                <a:solidFill>
-                  <a:srgbClr val="EA580C"/>
-                </a:solidFill>
-              </a:rPr>
-              <a:t>Pi 생태계 확장</a:t>
-            </a:r>
-            <a:endParaRPr lang="en-US" sz="1200" dirty="0"/>
-          </a:p>
-        </p:txBody>
-      </p:sp>
-      <p:sp>
-        <p:nvSpPr>
-          <p:cNvPr id="47" name="Text 45"/>
-          <p:cNvSpPr/>
-          <p:nvPr/>
-        </p:nvSpPr>
-        <p:spPr>
-          <a:xfrm>
-            <a:off x="8202168" y="6227064"/>
-            <a:ext cx="3419856" cy="694944"/>
-          </a:xfrm>
-          <a:prstGeom prst="rect">
-            <a:avLst/>
-          </a:prstGeom>
-          <a:noFill/>
-          <a:ln/>
-        </p:spPr>
-        <p:txBody>
-          <a:bodyPr wrap="square" rtlCol="0" anchor="ctr"/>
-          <a:lstStyle/>
-          <a:p>
-            <a:pPr indent="0" marL="0">
-              <a:buNone/>
-            </a:pPr>
-            <a:r>
-              <a:rPr lang="en-US" sz="1050" dirty="0">
-                <a:solidFill>
-                  <a:srgbClr val="6B7280"/>
-                </a:solidFill>
-              </a:rPr>
-              <a:t>Pi 마이닝 연동 혜택</a:t>
-            </a:r>
-            <a:endParaRPr lang="en-US" sz="1050" dirty="0"/>
-          </a:p>
-          <a:p>
-            <a:pPr indent="0" marL="0">
-              <a:buNone/>
-            </a:pPr>
-            <a:r>
-              <a:rPr lang="en-US" sz="1050" dirty="0">
-                <a:solidFill>
-                  <a:srgbClr val="6B7280"/>
-                </a:solidFill>
-              </a:rPr>
-              <a:t>Pi 홀더 전용 할인 쿠폰</a:t>
-            </a:r>
-            <a:endParaRPr lang="en-US" sz="1050" dirty="0"/>
-          </a:p>
-          <a:p>
-            <a:pPr indent="0" marL="0">
-              <a:buNone/>
-            </a:pPr>
-            <a:r>
-              <a:rPr lang="en-US" sz="1050" dirty="0">
-                <a:solidFill>
-                  <a:srgbClr val="6B7280"/>
-                </a:solidFill>
-              </a:rPr>
-              <a:t>Pi Network 커뮤니티 마케팅</a:t>
-            </a:r>
-            <a:endParaRPr lang="en-US" sz="1050" dirty="0"/>
+          <p:cNvPr id="48" name="Text 46"/>
+          <p:cNvSpPr/>
+          <p:nvPr/>
+        </p:nvSpPr>
+        <p:spPr>
+          <a:xfrm>
+            <a:off x="8257032" y="4160520"/>
+            <a:ext cx="3401568" cy="338328"/>
+          </a:xfrm>
+          <a:prstGeom prst="rect">
+            <a:avLst/>
+          </a:prstGeom>
+          <a:noFill/>
+          <a:ln/>
+        </p:spPr>
+        <p:txBody>
+          <a:bodyPr wrap="square" rtlCol="0" anchor="ctr"/>
+          <a:lstStyle/>
+          <a:p>
+            <a:pPr indent="0" marL="0">
+              <a:buNone/>
+            </a:pPr>
+            <a:r>
+              <a:rPr lang="en-US" sz="1000" dirty="0">
+                <a:solidFill>
+                  <a:srgbClr val="1F1235"/>
+                </a:solidFill>
+              </a:rPr>
+              <a:t>✓  DB 인덱스 30개+ (GIN 전문검색 포함)</a:t>
+            </a:r>
+            <a:endParaRPr lang="en-US" sz="1000" dirty="0"/>
+          </a:p>
+        </p:txBody>
+      </p:sp>
+      <p:sp>
+        <p:nvSpPr>
+          <p:cNvPr id="49" name="Text 47"/>
+          <p:cNvSpPr/>
+          <p:nvPr/>
+        </p:nvSpPr>
+        <p:spPr>
+          <a:xfrm>
+            <a:off x="8257032" y="4507992"/>
+            <a:ext cx="3401568" cy="338328"/>
+          </a:xfrm>
+          <a:prstGeom prst="rect">
+            <a:avLst/>
+          </a:prstGeom>
+          <a:noFill/>
+          <a:ln/>
+        </p:spPr>
+        <p:txBody>
+          <a:bodyPr wrap="square" rtlCol="0" anchor="ctr"/>
+          <a:lstStyle/>
+          <a:p>
+            <a:pPr indent="0" marL="0">
+              <a:buNone/>
+            </a:pPr>
+            <a:r>
+              <a:rPr lang="en-US" sz="1000" dirty="0">
+                <a:solidFill>
+                  <a:srgbClr val="1F1235"/>
+                </a:solidFill>
+              </a:rPr>
+              <a:t>✓  운영 RLS 정책 + Storage 버킷 정책</a:t>
+            </a:r>
+            <a:endParaRPr lang="en-US" sz="1000" dirty="0"/>
+          </a:p>
+        </p:txBody>
+      </p:sp>
+      <p:sp>
+        <p:nvSpPr>
+          <p:cNvPr id="50" name="Text 48"/>
+          <p:cNvSpPr/>
+          <p:nvPr/>
+        </p:nvSpPr>
+        <p:spPr>
+          <a:xfrm>
+            <a:off x="8257032" y="4855464"/>
+            <a:ext cx="3401568" cy="338328"/>
+          </a:xfrm>
+          <a:prstGeom prst="rect">
+            <a:avLst/>
+          </a:prstGeom>
+          <a:noFill/>
+          <a:ln/>
+        </p:spPr>
+        <p:txBody>
+          <a:bodyPr wrap="square" rtlCol="0" anchor="ctr"/>
+          <a:lstStyle/>
+          <a:p>
+            <a:pPr indent="0" marL="0">
+              <a:buNone/>
+            </a:pPr>
+            <a:r>
+              <a:rPr lang="en-US" sz="1000" dirty="0">
+                <a:solidFill>
+                  <a:srgbClr val="1F1235"/>
+                </a:solidFill>
+              </a:rPr>
+              <a:t>✓  관리자 5탭: 통계·회원·가게·쿠폰·FCM 푸시</a:t>
+            </a:r>
+            <a:endParaRPr lang="en-US" sz="1000" dirty="0"/>
+          </a:p>
+        </p:txBody>
+      </p:sp>
+      <p:sp>
+        <p:nvSpPr>
+          <p:cNvPr id="51" name="Text 49"/>
+          <p:cNvSpPr/>
+          <p:nvPr/>
+        </p:nvSpPr>
+        <p:spPr>
+          <a:xfrm>
+            <a:off x="8257032" y="5202936"/>
+            <a:ext cx="3401568" cy="338328"/>
+          </a:xfrm>
+          <a:prstGeom prst="rect">
+            <a:avLst/>
+          </a:prstGeom>
+          <a:noFill/>
+          <a:ln/>
+        </p:spPr>
+        <p:txBody>
+          <a:bodyPr wrap="square" rtlCol="0" anchor="ctr"/>
+          <a:lstStyle/>
+          <a:p>
+            <a:pPr indent="0" marL="0">
+              <a:buNone/>
+            </a:pPr>
+            <a:r>
+              <a:rPr lang="en-US" sz="1000" dirty="0">
+                <a:solidFill>
+                  <a:srgbClr val="1F1235"/>
+                </a:solidFill>
+              </a:rPr>
+              <a:t>✓  404·에러·로딩·스플래시 페이지</a:t>
+            </a:r>
+            <a:endParaRPr lang="en-US" sz="1000" dirty="0"/>
+          </a:p>
+        </p:txBody>
+      </p:sp>
+      <p:sp>
+        <p:nvSpPr>
+          <p:cNvPr id="52" name="Text 50"/>
+          <p:cNvSpPr/>
+          <p:nvPr/>
+        </p:nvSpPr>
+        <p:spPr>
+          <a:xfrm>
+            <a:off x="8257032" y="5550408"/>
+            <a:ext cx="3401568" cy="338328"/>
+          </a:xfrm>
+          <a:prstGeom prst="rect">
+            <a:avLst/>
+          </a:prstGeom>
+          <a:noFill/>
+          <a:ln/>
+        </p:spPr>
+        <p:txBody>
+          <a:bodyPr wrap="square" rtlCol="0" anchor="ctr"/>
+          <a:lstStyle/>
+          <a:p>
+            <a:pPr indent="0" marL="0">
+              <a:buNone/>
+            </a:pPr>
+            <a:r>
+              <a:rPr lang="en-US" sz="1000" dirty="0">
+                <a:solidFill>
+                  <a:srgbClr val="1F1235"/>
+                </a:solidFill>
+              </a:rPr>
+              <a:t>✓  다크모드 + Tailwind dark: 클래스 전면 적용</a:t>
+            </a:r>
+            <a:endParaRPr lang="en-US" sz="1000" dirty="0"/>
           </a:p>
         </p:txBody>
       </p:sp>
@@ -8583,6 +8321,1737 @@
                   <a:srgbClr val="4C1D95"/>
                 </a:solidFill>
               </a:rPr>
+              <a:t>🚀  Phase 1~3 완성 · 다음 단계 로드맵</a:t>
+            </a:r>
+            <a:endParaRPr lang="en-US" sz="2600" dirty="0"/>
+          </a:p>
+        </p:txBody>
+      </p:sp>
+      <p:sp>
+        <p:nvSpPr>
+          <p:cNvPr id="3" name="Shape 1"/>
+          <p:cNvSpPr/>
+          <p:nvPr/>
+        </p:nvSpPr>
+        <p:spPr>
+          <a:xfrm>
+            <a:off x="365760" y="804672"/>
+            <a:ext cx="3657600" cy="45720"/>
+          </a:xfrm>
+          <a:prstGeom prst="rect">
+            <a:avLst/>
+          </a:prstGeom>
+          <a:solidFill>
+            <a:srgbClr val="16A34A"/>
+          </a:solidFill>
+          <a:ln w="12700">
+            <a:solidFill>
+              <a:srgbClr val="16A34A"/>
+            </a:solidFill>
+            <a:prstDash val="solid"/>
+          </a:ln>
+        </p:spPr>
+      </p:sp>
+      <p:sp>
+        <p:nvSpPr>
+          <p:cNvPr id="4" name="Shape 2"/>
+          <p:cNvSpPr/>
+          <p:nvPr/>
+        </p:nvSpPr>
+        <p:spPr>
+          <a:xfrm>
+            <a:off x="365760" y="914400"/>
+            <a:ext cx="12070080" cy="548640"/>
+          </a:xfrm>
+          <a:prstGeom prst="roundRect">
+            <a:avLst>
+              <a:gd name="adj" fmla="val 20000"/>
+            </a:avLst>
+          </a:prstGeom>
+          <a:solidFill>
+            <a:srgbClr val="DCFCE7"/>
+          </a:solidFill>
+          <a:ln w="12700">
+            <a:solidFill>
+              <a:srgbClr val="16A34A"/>
+            </a:solidFill>
+            <a:prstDash val="solid"/>
+          </a:ln>
+        </p:spPr>
+      </p:sp>
+      <p:sp>
+        <p:nvSpPr>
+          <p:cNvPr id="5" name="Text 3"/>
+          <p:cNvSpPr/>
+          <p:nvPr/>
+        </p:nvSpPr>
+        <p:spPr>
+          <a:xfrm>
+            <a:off x="365760" y="914400"/>
+            <a:ext cx="12070080" cy="548640"/>
+          </a:xfrm>
+          <a:prstGeom prst="rect">
+            <a:avLst/>
+          </a:prstGeom>
+          <a:noFill/>
+          <a:ln/>
+        </p:spPr>
+        <p:txBody>
+          <a:bodyPr wrap="square" rtlCol="0" anchor="ctr"/>
+          <a:lstStyle/>
+          <a:p>
+            <a:pPr algn="ctr" indent="0" marL="0">
+              <a:buNone/>
+            </a:pPr>
+            <a:r>
+              <a:rPr lang="en-US" sz="1400" b="1" dirty="0">
+                <a:solidFill>
+                  <a:srgbClr val="16A34A"/>
+                </a:solidFill>
+              </a:rPr>
+              <a:t>🎉  Phase 1~3 완성! 55개+ 기능 구현 · 미착수 기능 0개 · Pi Network 연동만 남음</a:t>
+            </a:r>
+            <a:endParaRPr lang="en-US" sz="1400" dirty="0"/>
+          </a:p>
+        </p:txBody>
+      </p:sp>
+      <p:sp>
+        <p:nvSpPr>
+          <p:cNvPr id="6" name="Shape 4"/>
+          <p:cNvSpPr/>
+          <p:nvPr/>
+        </p:nvSpPr>
+        <p:spPr>
+          <a:xfrm>
+            <a:off x="365760" y="1600200"/>
+            <a:ext cx="1325880" cy="384048"/>
+          </a:xfrm>
+          <a:prstGeom prst="roundRect">
+            <a:avLst>
+              <a:gd name="adj" fmla="val 23810"/>
+            </a:avLst>
+          </a:prstGeom>
+          <a:solidFill>
+            <a:srgbClr val="DCFCE7"/>
+          </a:solidFill>
+          <a:ln w="12700">
+            <a:solidFill>
+              <a:srgbClr val="16A34A"/>
+            </a:solidFill>
+            <a:prstDash val="solid"/>
+          </a:ln>
+        </p:spPr>
+      </p:sp>
+      <p:sp>
+        <p:nvSpPr>
+          <p:cNvPr id="7" name="Text 5"/>
+          <p:cNvSpPr/>
+          <p:nvPr/>
+        </p:nvSpPr>
+        <p:spPr>
+          <a:xfrm>
+            <a:off x="365760" y="1600200"/>
+            <a:ext cx="1325880" cy="384048"/>
+          </a:xfrm>
+          <a:prstGeom prst="rect">
+            <a:avLst/>
+          </a:prstGeom>
+          <a:noFill/>
+          <a:ln/>
+        </p:spPr>
+        <p:txBody>
+          <a:bodyPr wrap="square" rtlCol="0" anchor="ctr"/>
+          <a:lstStyle/>
+          <a:p>
+            <a:pPr algn="ctr" indent="0" marL="0">
+              <a:buNone/>
+            </a:pPr>
+            <a:r>
+              <a:rPr lang="en-US" sz="1100" b="1" dirty="0">
+                <a:solidFill>
+                  <a:srgbClr val="16A34A"/>
+                </a:solidFill>
+              </a:rPr>
+              <a:t>✅ Phase 1~3</a:t>
+            </a:r>
+            <a:endParaRPr lang="en-US" sz="1100" dirty="0"/>
+          </a:p>
+        </p:txBody>
+      </p:sp>
+      <p:sp>
+        <p:nvSpPr>
+          <p:cNvPr id="8" name="Shape 6"/>
+          <p:cNvSpPr/>
+          <p:nvPr/>
+        </p:nvSpPr>
+        <p:spPr>
+          <a:xfrm>
+            <a:off x="228600" y="2057400"/>
+            <a:ext cx="3749040" cy="1280160"/>
+          </a:xfrm>
+          <a:prstGeom prst="roundRect">
+            <a:avLst>
+              <a:gd name="adj" fmla="val 9286"/>
+            </a:avLst>
+          </a:prstGeom>
+          <a:solidFill>
+            <a:srgbClr val="FFFFFF"/>
+          </a:solidFill>
+          <a:ln w="12700">
+            <a:solidFill>
+              <a:srgbClr val="E9D5FF"/>
+            </a:solidFill>
+            <a:prstDash val="solid"/>
+          </a:ln>
+        </p:spPr>
+      </p:sp>
+      <p:sp>
+        <p:nvSpPr>
+          <p:cNvPr id="9" name="Shape 7"/>
+          <p:cNvSpPr/>
+          <p:nvPr/>
+        </p:nvSpPr>
+        <p:spPr>
+          <a:xfrm>
+            <a:off x="365760" y="2176272"/>
+            <a:ext cx="3474720" cy="329184"/>
+          </a:xfrm>
+          <a:prstGeom prst="roundRect">
+            <a:avLst>
+              <a:gd name="adj" fmla="val 22222"/>
+            </a:avLst>
+          </a:prstGeom>
+          <a:solidFill>
+            <a:srgbClr val="DCFCE7"/>
+          </a:solidFill>
+          <a:ln w="12700">
+            <a:solidFill>
+              <a:srgbClr val="DCFCE7"/>
+            </a:solidFill>
+            <a:prstDash val="solid"/>
+          </a:ln>
+        </p:spPr>
+      </p:sp>
+      <p:sp>
+        <p:nvSpPr>
+          <p:cNvPr id="10" name="Text 8"/>
+          <p:cNvSpPr/>
+          <p:nvPr/>
+        </p:nvSpPr>
+        <p:spPr>
+          <a:xfrm>
+            <a:off x="365760" y="2176272"/>
+            <a:ext cx="3474720" cy="329184"/>
+          </a:xfrm>
+          <a:prstGeom prst="rect">
+            <a:avLst/>
+          </a:prstGeom>
+          <a:noFill/>
+          <a:ln/>
+        </p:spPr>
+        <p:txBody>
+          <a:bodyPr wrap="square" rtlCol="0" anchor="ctr"/>
+          <a:lstStyle/>
+          <a:p>
+            <a:pPr algn="ctr" indent="0" marL="0">
+              <a:buNone/>
+            </a:pPr>
+            <a:r>
+              <a:rPr lang="en-US" sz="1200" b="1" dirty="0">
+                <a:solidFill>
+                  <a:srgbClr val="16A34A"/>
+                </a:solidFill>
+              </a:rPr>
+              <a:t>인증 · 지갑 · 주문 플로우</a:t>
+            </a:r>
+            <a:endParaRPr lang="en-US" sz="1200" dirty="0"/>
+          </a:p>
+        </p:txBody>
+      </p:sp>
+      <p:sp>
+        <p:nvSpPr>
+          <p:cNvPr id="11" name="Text 9"/>
+          <p:cNvSpPr/>
+          <p:nvPr/>
+        </p:nvSpPr>
+        <p:spPr>
+          <a:xfrm>
+            <a:off x="393192" y="2569464"/>
+            <a:ext cx="3419856" cy="694944"/>
+          </a:xfrm>
+          <a:prstGeom prst="rect">
+            <a:avLst/>
+          </a:prstGeom>
+          <a:noFill/>
+          <a:ln/>
+        </p:spPr>
+        <p:txBody>
+          <a:bodyPr wrap="square" rtlCol="0" anchor="ctr"/>
+          <a:lstStyle/>
+          <a:p>
+            <a:pPr indent="0" marL="0">
+              <a:buNone/>
+            </a:pPr>
+            <a:r>
+              <a:rPr lang="en-US" sz="1050" dirty="0">
+                <a:solidFill>
+                  <a:srgbClr val="6B7280"/>
+                </a:solidFill>
+              </a:rPr>
+              <a:t>이메일 로그인 (카카오 비즈니스 후 추가)</a:t>
+            </a:r>
+            <a:endParaRPr lang="en-US" sz="1050" dirty="0"/>
+          </a:p>
+          <a:p>
+            <a:pPr indent="0" marL="0">
+              <a:buNone/>
+            </a:pPr>
+            <a:r>
+              <a:rPr lang="en-US" sz="1050" dirty="0">
+                <a:solidFill>
+                  <a:srgbClr val="6B7280"/>
+                </a:solidFill>
+              </a:rPr>
+              <a:t>PICK 토큰 지갑 + 토스페이먼츠</a:t>
+            </a:r>
+            <a:endParaRPr lang="en-US" sz="1050" dirty="0"/>
+          </a:p>
+          <a:p>
+            <a:pPr indent="0" marL="0">
+              <a:buNone/>
+            </a:pPr>
+            <a:r>
+              <a:rPr lang="en-US" sz="1050" dirty="0">
+                <a:solidFill>
+                  <a:srgbClr val="6B7280"/>
+                </a:solidFill>
+              </a:rPr>
+              <a:t>Realtime 주문 추적 완성</a:t>
+            </a:r>
+            <a:endParaRPr lang="en-US" sz="1050" dirty="0"/>
+          </a:p>
+        </p:txBody>
+      </p:sp>
+      <p:sp>
+        <p:nvSpPr>
+          <p:cNvPr id="12" name="Shape 10"/>
+          <p:cNvSpPr/>
+          <p:nvPr/>
+        </p:nvSpPr>
+        <p:spPr>
+          <a:xfrm>
+            <a:off x="4133088" y="2057400"/>
+            <a:ext cx="3749040" cy="1280160"/>
+          </a:xfrm>
+          <a:prstGeom prst="roundRect">
+            <a:avLst>
+              <a:gd name="adj" fmla="val 9286"/>
+            </a:avLst>
+          </a:prstGeom>
+          <a:solidFill>
+            <a:srgbClr val="FFFFFF"/>
+          </a:solidFill>
+          <a:ln w="12700">
+            <a:solidFill>
+              <a:srgbClr val="E9D5FF"/>
+            </a:solidFill>
+            <a:prstDash val="solid"/>
+          </a:ln>
+        </p:spPr>
+      </p:sp>
+      <p:sp>
+        <p:nvSpPr>
+          <p:cNvPr id="13" name="Shape 11"/>
+          <p:cNvSpPr/>
+          <p:nvPr/>
+        </p:nvSpPr>
+        <p:spPr>
+          <a:xfrm>
+            <a:off x="4270248" y="2176272"/>
+            <a:ext cx="3474720" cy="329184"/>
+          </a:xfrm>
+          <a:prstGeom prst="roundRect">
+            <a:avLst>
+              <a:gd name="adj" fmla="val 22222"/>
+            </a:avLst>
+          </a:prstGeom>
+          <a:solidFill>
+            <a:srgbClr val="DCFCE7"/>
+          </a:solidFill>
+          <a:ln w="12700">
+            <a:solidFill>
+              <a:srgbClr val="DCFCE7"/>
+            </a:solidFill>
+            <a:prstDash val="solid"/>
+          </a:ln>
+        </p:spPr>
+      </p:sp>
+      <p:sp>
+        <p:nvSpPr>
+          <p:cNvPr id="14" name="Text 12"/>
+          <p:cNvSpPr/>
+          <p:nvPr/>
+        </p:nvSpPr>
+        <p:spPr>
+          <a:xfrm>
+            <a:off x="4270248" y="2176272"/>
+            <a:ext cx="3474720" cy="329184"/>
+          </a:xfrm>
+          <a:prstGeom prst="rect">
+            <a:avLst/>
+          </a:prstGeom>
+          <a:noFill/>
+          <a:ln/>
+        </p:spPr>
+        <p:txBody>
+          <a:bodyPr wrap="square" rtlCol="0" anchor="ctr"/>
+          <a:lstStyle/>
+          <a:p>
+            <a:pPr algn="ctr" indent="0" marL="0">
+              <a:buNone/>
+            </a:pPr>
+            <a:r>
+              <a:rPr lang="en-US" sz="1200" b="1" dirty="0">
+                <a:solidFill>
+                  <a:srgbClr val="16A34A"/>
+                </a:solidFill>
+              </a:rPr>
+              <a:t>사장님 · 라이더 · 관리자</a:t>
+            </a:r>
+            <a:endParaRPr lang="en-US" sz="1200" dirty="0"/>
+          </a:p>
+        </p:txBody>
+      </p:sp>
+      <p:sp>
+        <p:nvSpPr>
+          <p:cNvPr id="15" name="Text 13"/>
+          <p:cNvSpPr/>
+          <p:nvPr/>
+        </p:nvSpPr>
+        <p:spPr>
+          <a:xfrm>
+            <a:off x="4297680" y="2569464"/>
+            <a:ext cx="3419856" cy="694944"/>
+          </a:xfrm>
+          <a:prstGeom prst="rect">
+            <a:avLst/>
+          </a:prstGeom>
+          <a:noFill/>
+          <a:ln/>
+        </p:spPr>
+        <p:txBody>
+          <a:bodyPr wrap="square" rtlCol="0" anchor="ctr"/>
+          <a:lstStyle/>
+          <a:p>
+            <a:pPr indent="0" marL="0">
+              <a:buNone/>
+            </a:pPr>
+            <a:r>
+              <a:rPr lang="en-US" sz="1050" dirty="0">
+                <a:solidFill>
+                  <a:srgbClr val="6B7280"/>
+                </a:solidFill>
+              </a:rPr>
+              <a:t>사장님 주문/메뉴/정산/통계</a:t>
+            </a:r>
+            <a:endParaRPr lang="en-US" sz="1050" dirty="0"/>
+          </a:p>
+          <a:p>
+            <a:pPr indent="0" marL="0">
+              <a:buNone/>
+            </a:pPr>
+            <a:r>
+              <a:rPr lang="en-US" sz="1050" dirty="0">
+                <a:solidFill>
+                  <a:srgbClr val="6B7280"/>
+                </a:solidFill>
+              </a:rPr>
+              <a:t>라이더 수락/위치공유/수익</a:t>
+            </a:r>
+            <a:endParaRPr lang="en-US" sz="1050" dirty="0"/>
+          </a:p>
+          <a:p>
+            <a:pPr indent="0" marL="0">
+              <a:buNone/>
+            </a:pPr>
+            <a:r>
+              <a:rPr lang="en-US" sz="1050" dirty="0">
+                <a:solidFill>
+                  <a:srgbClr val="6B7280"/>
+                </a:solidFill>
+              </a:rPr>
+              <a:t>관리자 5탭 대시보드</a:t>
+            </a:r>
+            <a:endParaRPr lang="en-US" sz="1050" dirty="0"/>
+          </a:p>
+        </p:txBody>
+      </p:sp>
+      <p:sp>
+        <p:nvSpPr>
+          <p:cNvPr id="16" name="Shape 14"/>
+          <p:cNvSpPr/>
+          <p:nvPr/>
+        </p:nvSpPr>
+        <p:spPr>
+          <a:xfrm>
+            <a:off x="8037576" y="2057400"/>
+            <a:ext cx="3749040" cy="1280160"/>
+          </a:xfrm>
+          <a:prstGeom prst="roundRect">
+            <a:avLst>
+              <a:gd name="adj" fmla="val 9286"/>
+            </a:avLst>
+          </a:prstGeom>
+          <a:solidFill>
+            <a:srgbClr val="FFFFFF"/>
+          </a:solidFill>
+          <a:ln w="12700">
+            <a:solidFill>
+              <a:srgbClr val="E9D5FF"/>
+            </a:solidFill>
+            <a:prstDash val="solid"/>
+          </a:ln>
+        </p:spPr>
+      </p:sp>
+      <p:sp>
+        <p:nvSpPr>
+          <p:cNvPr id="17" name="Shape 15"/>
+          <p:cNvSpPr/>
+          <p:nvPr/>
+        </p:nvSpPr>
+        <p:spPr>
+          <a:xfrm>
+            <a:off x="8174736" y="2176272"/>
+            <a:ext cx="3474720" cy="329184"/>
+          </a:xfrm>
+          <a:prstGeom prst="roundRect">
+            <a:avLst>
+              <a:gd name="adj" fmla="val 22222"/>
+            </a:avLst>
+          </a:prstGeom>
+          <a:solidFill>
+            <a:srgbClr val="DCFCE7"/>
+          </a:solidFill>
+          <a:ln w="12700">
+            <a:solidFill>
+              <a:srgbClr val="DCFCE7"/>
+            </a:solidFill>
+            <a:prstDash val="solid"/>
+          </a:ln>
+        </p:spPr>
+      </p:sp>
+      <p:sp>
+        <p:nvSpPr>
+          <p:cNvPr id="18" name="Text 16"/>
+          <p:cNvSpPr/>
+          <p:nvPr/>
+        </p:nvSpPr>
+        <p:spPr>
+          <a:xfrm>
+            <a:off x="8174736" y="2176272"/>
+            <a:ext cx="3474720" cy="329184"/>
+          </a:xfrm>
+          <a:prstGeom prst="rect">
+            <a:avLst/>
+          </a:prstGeom>
+          <a:noFill/>
+          <a:ln/>
+        </p:spPr>
+        <p:txBody>
+          <a:bodyPr wrap="square" rtlCol="0" anchor="ctr"/>
+          <a:lstStyle/>
+          <a:p>
+            <a:pPr algn="ctr" indent="0" marL="0">
+              <a:buNone/>
+            </a:pPr>
+            <a:r>
+              <a:rPr lang="en-US" sz="1200" b="1" dirty="0">
+                <a:solidFill>
+                  <a:srgbClr val="16A34A"/>
+                </a:solidFill>
+              </a:rPr>
+              <a:t>PWA · 보안 · DB 최적화</a:t>
+            </a:r>
+            <a:endParaRPr lang="en-US" sz="1200" dirty="0"/>
+          </a:p>
+        </p:txBody>
+      </p:sp>
+      <p:sp>
+        <p:nvSpPr>
+          <p:cNvPr id="19" name="Text 17"/>
+          <p:cNvSpPr/>
+          <p:nvPr/>
+        </p:nvSpPr>
+        <p:spPr>
+          <a:xfrm>
+            <a:off x="8202168" y="2569464"/>
+            <a:ext cx="3419856" cy="694944"/>
+          </a:xfrm>
+          <a:prstGeom prst="rect">
+            <a:avLst/>
+          </a:prstGeom>
+          <a:noFill/>
+          <a:ln/>
+        </p:spPr>
+        <p:txBody>
+          <a:bodyPr wrap="square" rtlCol="0" anchor="ctr"/>
+          <a:lstStyle/>
+          <a:p>
+            <a:pPr indent="0" marL="0">
+              <a:buNone/>
+            </a:pPr>
+            <a:r>
+              <a:rPr lang="en-US" sz="1050" dirty="0">
+                <a:solidFill>
+                  <a:srgbClr val="6B7280"/>
+                </a:solidFill>
+              </a:rPr>
+              <a:t>Serwist 오프라인 캐싱</a:t>
+            </a:r>
+            <a:endParaRPr lang="en-US" sz="1050" dirty="0"/>
+          </a:p>
+          <a:p>
+            <a:pPr indent="0" marL="0">
+              <a:buNone/>
+            </a:pPr>
+            <a:r>
+              <a:rPr lang="en-US" sz="1050" dirty="0">
+                <a:solidFill>
+                  <a:srgbClr val="6B7280"/>
+                </a:solidFill>
+              </a:rPr>
+              <a:t>RLS + 인덱스 30개+ + FCM 푸시</a:t>
+            </a:r>
+            <a:endParaRPr lang="en-US" sz="1050" dirty="0"/>
+          </a:p>
+          <a:p>
+            <a:pPr indent="0" marL="0">
+              <a:buNone/>
+            </a:pPr>
+            <a:r>
+              <a:rPr lang="en-US" sz="1050" dirty="0">
+                <a:solidFill>
+                  <a:srgbClr val="6B7280"/>
+                </a:solidFill>
+              </a:rPr>
+              <a:t>Sentry + Storage 정책 완성</a:t>
+            </a:r>
+            <a:endParaRPr lang="en-US" sz="1050" dirty="0"/>
+          </a:p>
+        </p:txBody>
+      </p:sp>
+      <p:sp>
+        <p:nvSpPr>
+          <p:cNvPr id="20" name="Shape 18"/>
+          <p:cNvSpPr/>
+          <p:nvPr/>
+        </p:nvSpPr>
+        <p:spPr>
+          <a:xfrm>
+            <a:off x="365760" y="3429000"/>
+            <a:ext cx="1325880" cy="384048"/>
+          </a:xfrm>
+          <a:prstGeom prst="roundRect">
+            <a:avLst>
+              <a:gd name="adj" fmla="val 23810"/>
+            </a:avLst>
+          </a:prstGeom>
+          <a:solidFill>
+            <a:srgbClr val="FFFBEB"/>
+          </a:solidFill>
+          <a:ln w="12700">
+            <a:solidFill>
+              <a:srgbClr val="D97706"/>
+            </a:solidFill>
+            <a:prstDash val="solid"/>
+          </a:ln>
+        </p:spPr>
+      </p:sp>
+      <p:sp>
+        <p:nvSpPr>
+          <p:cNvPr id="21" name="Text 19"/>
+          <p:cNvSpPr/>
+          <p:nvPr/>
+        </p:nvSpPr>
+        <p:spPr>
+          <a:xfrm>
+            <a:off x="365760" y="3429000"/>
+            <a:ext cx="1325880" cy="384048"/>
+          </a:xfrm>
+          <a:prstGeom prst="rect">
+            <a:avLst/>
+          </a:prstGeom>
+          <a:noFill/>
+          <a:ln/>
+        </p:spPr>
+        <p:txBody>
+          <a:bodyPr wrap="square" rtlCol="0" anchor="ctr"/>
+          <a:lstStyle/>
+          <a:p>
+            <a:pPr algn="ctr" indent="0" marL="0">
+              <a:buNone/>
+            </a:pPr>
+            <a:r>
+              <a:rPr lang="en-US" sz="1100" b="1" dirty="0">
+                <a:solidFill>
+                  <a:srgbClr val="D97706"/>
+                </a:solidFill>
+              </a:rPr>
+              <a:t>🟡 런칭 준비</a:t>
+            </a:r>
+            <a:endParaRPr lang="en-US" sz="1100" dirty="0"/>
+          </a:p>
+        </p:txBody>
+      </p:sp>
+      <p:sp>
+        <p:nvSpPr>
+          <p:cNvPr id="22" name="Shape 20"/>
+          <p:cNvSpPr/>
+          <p:nvPr/>
+        </p:nvSpPr>
+        <p:spPr>
+          <a:xfrm>
+            <a:off x="228600" y="3886200"/>
+            <a:ext cx="3749040" cy="1280160"/>
+          </a:xfrm>
+          <a:prstGeom prst="roundRect">
+            <a:avLst>
+              <a:gd name="adj" fmla="val 9286"/>
+            </a:avLst>
+          </a:prstGeom>
+          <a:solidFill>
+            <a:srgbClr val="FFFFFF"/>
+          </a:solidFill>
+          <a:ln w="12700">
+            <a:solidFill>
+              <a:srgbClr val="E9D5FF"/>
+            </a:solidFill>
+            <a:prstDash val="solid"/>
+          </a:ln>
+        </p:spPr>
+      </p:sp>
+      <p:sp>
+        <p:nvSpPr>
+          <p:cNvPr id="23" name="Shape 21"/>
+          <p:cNvSpPr/>
+          <p:nvPr/>
+        </p:nvSpPr>
+        <p:spPr>
+          <a:xfrm>
+            <a:off x="365760" y="4005072"/>
+            <a:ext cx="3474720" cy="329184"/>
+          </a:xfrm>
+          <a:prstGeom prst="roundRect">
+            <a:avLst>
+              <a:gd name="adj" fmla="val 22222"/>
+            </a:avLst>
+          </a:prstGeom>
+          <a:solidFill>
+            <a:srgbClr val="FFFBEB"/>
+          </a:solidFill>
+          <a:ln w="12700">
+            <a:solidFill>
+              <a:srgbClr val="FFFBEB"/>
+            </a:solidFill>
+            <a:prstDash val="solid"/>
+          </a:ln>
+        </p:spPr>
+      </p:sp>
+      <p:sp>
+        <p:nvSpPr>
+          <p:cNvPr id="24" name="Text 22"/>
+          <p:cNvSpPr/>
+          <p:nvPr/>
+        </p:nvSpPr>
+        <p:spPr>
+          <a:xfrm>
+            <a:off x="365760" y="4005072"/>
+            <a:ext cx="3474720" cy="329184"/>
+          </a:xfrm>
+          <a:prstGeom prst="rect">
+            <a:avLst/>
+          </a:prstGeom>
+          <a:noFill/>
+          <a:ln/>
+        </p:spPr>
+        <p:txBody>
+          <a:bodyPr wrap="square" rtlCol="0" anchor="ctr"/>
+          <a:lstStyle/>
+          <a:p>
+            <a:pPr algn="ctr" indent="0" marL="0">
+              <a:buNone/>
+            </a:pPr>
+            <a:r>
+              <a:rPr lang="en-US" sz="1200" b="1" dirty="0">
+                <a:solidFill>
+                  <a:srgbClr val="D97706"/>
+                </a:solidFill>
+              </a:rPr>
+              <a:t>Firebase 환경변수 ✅</a:t>
+            </a:r>
+            <a:endParaRPr lang="en-US" sz="1200" dirty="0"/>
+          </a:p>
+        </p:txBody>
+      </p:sp>
+      <p:sp>
+        <p:nvSpPr>
+          <p:cNvPr id="25" name="Text 23"/>
+          <p:cNvSpPr/>
+          <p:nvPr/>
+        </p:nvSpPr>
+        <p:spPr>
+          <a:xfrm>
+            <a:off x="393192" y="4398264"/>
+            <a:ext cx="3419856" cy="694944"/>
+          </a:xfrm>
+          <a:prstGeom prst="rect">
+            <a:avLst/>
+          </a:prstGeom>
+          <a:noFill/>
+          <a:ln/>
+        </p:spPr>
+        <p:txBody>
+          <a:bodyPr wrap="square" rtlCol="0" anchor="ctr"/>
+          <a:lstStyle/>
+          <a:p>
+            <a:pPr indent="0" marL="0">
+              <a:buNone/>
+            </a:pPr>
+            <a:r>
+              <a:rPr lang="en-US" sz="1050" dirty="0">
+                <a:solidFill>
+                  <a:srgbClr val="6B7280"/>
+                </a:solidFill>
+              </a:rPr>
+              <a:t>API Key ~ App ID 완성</a:t>
+            </a:r>
+            <a:endParaRPr lang="en-US" sz="1050" dirty="0"/>
+          </a:p>
+          <a:p>
+            <a:pPr indent="0" marL="0">
+              <a:buNone/>
+            </a:pPr>
+            <a:r>
+              <a:rPr lang="en-US" sz="1050" dirty="0">
+                <a:solidFill>
+                  <a:srgbClr val="6B7280"/>
+                </a:solidFill>
+              </a:rPr>
+              <a:t>VAPID 키 완성</a:t>
+            </a:r>
+            <a:endParaRPr lang="en-US" sz="1050" dirty="0"/>
+          </a:p>
+          <a:p>
+            <a:pPr indent="0" marL="0">
+              <a:buNone/>
+            </a:pPr>
+            <a:r>
+              <a:rPr lang="en-US" sz="1050" dirty="0">
+                <a:solidFill>
+                  <a:srgbClr val="6B7280"/>
+                </a:solidFill>
+              </a:rPr>
+              <a:t>Admin SDK JSON 완성</a:t>
+            </a:r>
+            <a:endParaRPr lang="en-US" sz="1050" dirty="0"/>
+          </a:p>
+        </p:txBody>
+      </p:sp>
+      <p:sp>
+        <p:nvSpPr>
+          <p:cNvPr id="26" name="Shape 24"/>
+          <p:cNvSpPr/>
+          <p:nvPr/>
+        </p:nvSpPr>
+        <p:spPr>
+          <a:xfrm>
+            <a:off x="4133088" y="3886200"/>
+            <a:ext cx="3749040" cy="1280160"/>
+          </a:xfrm>
+          <a:prstGeom prst="roundRect">
+            <a:avLst>
+              <a:gd name="adj" fmla="val 9286"/>
+            </a:avLst>
+          </a:prstGeom>
+          <a:solidFill>
+            <a:srgbClr val="FFFFFF"/>
+          </a:solidFill>
+          <a:ln w="12700">
+            <a:solidFill>
+              <a:srgbClr val="E9D5FF"/>
+            </a:solidFill>
+            <a:prstDash val="solid"/>
+          </a:ln>
+        </p:spPr>
+      </p:sp>
+      <p:sp>
+        <p:nvSpPr>
+          <p:cNvPr id="27" name="Shape 25"/>
+          <p:cNvSpPr/>
+          <p:nvPr/>
+        </p:nvSpPr>
+        <p:spPr>
+          <a:xfrm>
+            <a:off x="4270248" y="4005072"/>
+            <a:ext cx="3474720" cy="329184"/>
+          </a:xfrm>
+          <a:prstGeom prst="roundRect">
+            <a:avLst>
+              <a:gd name="adj" fmla="val 22222"/>
+            </a:avLst>
+          </a:prstGeom>
+          <a:solidFill>
+            <a:srgbClr val="FFFBEB"/>
+          </a:solidFill>
+          <a:ln w="12700">
+            <a:solidFill>
+              <a:srgbClr val="FFFBEB"/>
+            </a:solidFill>
+            <a:prstDash val="solid"/>
+          </a:ln>
+        </p:spPr>
+      </p:sp>
+      <p:sp>
+        <p:nvSpPr>
+          <p:cNvPr id="28" name="Text 26"/>
+          <p:cNvSpPr/>
+          <p:nvPr/>
+        </p:nvSpPr>
+        <p:spPr>
+          <a:xfrm>
+            <a:off x="4270248" y="4005072"/>
+            <a:ext cx="3474720" cy="329184"/>
+          </a:xfrm>
+          <a:prstGeom prst="rect">
+            <a:avLst/>
+          </a:prstGeom>
+          <a:noFill/>
+          <a:ln/>
+        </p:spPr>
+        <p:txBody>
+          <a:bodyPr wrap="square" rtlCol="0" anchor="ctr"/>
+          <a:lstStyle/>
+          <a:p>
+            <a:pPr algn="ctr" indent="0" marL="0">
+              <a:buNone/>
+            </a:pPr>
+            <a:r>
+              <a:rPr lang="en-US" sz="1200" b="1" dirty="0">
+                <a:solidFill>
+                  <a:srgbClr val="D97706"/>
+                </a:solidFill>
+              </a:rPr>
+              <a:t>카카오 API 키 확인</a:t>
+            </a:r>
+            <a:endParaRPr lang="en-US" sz="1200" dirty="0"/>
+          </a:p>
+        </p:txBody>
+      </p:sp>
+      <p:sp>
+        <p:nvSpPr>
+          <p:cNvPr id="29" name="Text 27"/>
+          <p:cNvSpPr/>
+          <p:nvPr/>
+        </p:nvSpPr>
+        <p:spPr>
+          <a:xfrm>
+            <a:off x="4297680" y="4398264"/>
+            <a:ext cx="3419856" cy="694944"/>
+          </a:xfrm>
+          <a:prstGeom prst="rect">
+            <a:avLst/>
+          </a:prstGeom>
+          <a:noFill/>
+          <a:ln/>
+        </p:spPr>
+        <p:txBody>
+          <a:bodyPr wrap="square" rtlCol="0" anchor="ctr"/>
+          <a:lstStyle/>
+          <a:p>
+            <a:pPr indent="0" marL="0">
+              <a:buNone/>
+            </a:pPr>
+            <a:r>
+              <a:rPr lang="en-US" sz="1050" dirty="0">
+                <a:solidFill>
+                  <a:srgbClr val="6B7280"/>
+                </a:solidFill>
+              </a:rPr>
+              <a:t>앱 키 → JavaScript 키 재확인</a:t>
+            </a:r>
+            <a:endParaRPr lang="en-US" sz="1050" dirty="0"/>
+          </a:p>
+          <a:p>
+            <a:pPr indent="0" marL="0">
+              <a:buNone/>
+            </a:pPr>
+            <a:r>
+              <a:rPr lang="en-US" sz="1050" dirty="0">
+                <a:solidFill>
+                  <a:srgbClr val="6B7280"/>
+                </a:solidFill>
+              </a:rPr>
+              <a:t>NEXT_PUBLIC_KAKAO_MAP_KEY 검증</a:t>
+            </a:r>
+            <a:endParaRPr lang="en-US" sz="1050" dirty="0"/>
+          </a:p>
+          <a:p>
+            <a:pPr indent="0" marL="0">
+              <a:buNone/>
+            </a:pPr>
+            <a:r>
+              <a:rPr lang="en-US" sz="1050" dirty="0">
+                <a:solidFill>
+                  <a:srgbClr val="6B7280"/>
+                </a:solidFill>
+              </a:rPr>
+              <a:t>Kakao Map 지도 표시 테스트</a:t>
+            </a:r>
+            <a:endParaRPr lang="en-US" sz="1050" dirty="0"/>
+          </a:p>
+        </p:txBody>
+      </p:sp>
+      <p:sp>
+        <p:nvSpPr>
+          <p:cNvPr id="30" name="Shape 28"/>
+          <p:cNvSpPr/>
+          <p:nvPr/>
+        </p:nvSpPr>
+        <p:spPr>
+          <a:xfrm>
+            <a:off x="8037576" y="3886200"/>
+            <a:ext cx="3749040" cy="1280160"/>
+          </a:xfrm>
+          <a:prstGeom prst="roundRect">
+            <a:avLst>
+              <a:gd name="adj" fmla="val 9286"/>
+            </a:avLst>
+          </a:prstGeom>
+          <a:solidFill>
+            <a:srgbClr val="FFFFFF"/>
+          </a:solidFill>
+          <a:ln w="12700">
+            <a:solidFill>
+              <a:srgbClr val="E9D5FF"/>
+            </a:solidFill>
+            <a:prstDash val="solid"/>
+          </a:ln>
+        </p:spPr>
+      </p:sp>
+      <p:sp>
+        <p:nvSpPr>
+          <p:cNvPr id="31" name="Shape 29"/>
+          <p:cNvSpPr/>
+          <p:nvPr/>
+        </p:nvSpPr>
+        <p:spPr>
+          <a:xfrm>
+            <a:off x="8174736" y="4005072"/>
+            <a:ext cx="3474720" cy="329184"/>
+          </a:xfrm>
+          <a:prstGeom prst="roundRect">
+            <a:avLst>
+              <a:gd name="adj" fmla="val 22222"/>
+            </a:avLst>
+          </a:prstGeom>
+          <a:solidFill>
+            <a:srgbClr val="FFFBEB"/>
+          </a:solidFill>
+          <a:ln w="12700">
+            <a:solidFill>
+              <a:srgbClr val="FFFBEB"/>
+            </a:solidFill>
+            <a:prstDash val="solid"/>
+          </a:ln>
+        </p:spPr>
+      </p:sp>
+      <p:sp>
+        <p:nvSpPr>
+          <p:cNvPr id="32" name="Text 30"/>
+          <p:cNvSpPr/>
+          <p:nvPr/>
+        </p:nvSpPr>
+        <p:spPr>
+          <a:xfrm>
+            <a:off x="8174736" y="4005072"/>
+            <a:ext cx="3474720" cy="329184"/>
+          </a:xfrm>
+          <a:prstGeom prst="rect">
+            <a:avLst/>
+          </a:prstGeom>
+          <a:noFill/>
+          <a:ln/>
+        </p:spPr>
+        <p:txBody>
+          <a:bodyPr wrap="square" rtlCol="0" anchor="ctr"/>
+          <a:lstStyle/>
+          <a:p>
+            <a:pPr algn="ctr" indent="0" marL="0">
+              <a:buNone/>
+            </a:pPr>
+            <a:r>
+              <a:rPr lang="en-US" sz="1200" b="1" dirty="0">
+                <a:solidFill>
+                  <a:srgbClr val="D97706"/>
+                </a:solidFill>
+              </a:rPr>
+              <a:t>샘플 데이터 + 배포</a:t>
+            </a:r>
+            <a:endParaRPr lang="en-US" sz="1200" dirty="0"/>
+          </a:p>
+        </p:txBody>
+      </p:sp>
+      <p:sp>
+        <p:nvSpPr>
+          <p:cNvPr id="33" name="Text 31"/>
+          <p:cNvSpPr/>
+          <p:nvPr/>
+        </p:nvSpPr>
+        <p:spPr>
+          <a:xfrm>
+            <a:off x="8202168" y="4398264"/>
+            <a:ext cx="3419856" cy="694944"/>
+          </a:xfrm>
+          <a:prstGeom prst="rect">
+            <a:avLst/>
+          </a:prstGeom>
+          <a:noFill/>
+          <a:ln/>
+        </p:spPr>
+        <p:txBody>
+          <a:bodyPr wrap="square" rtlCol="0" anchor="ctr"/>
+          <a:lstStyle/>
+          <a:p>
+            <a:pPr indent="0" marL="0">
+              <a:buNone/>
+            </a:pPr>
+            <a:r>
+              <a:rPr lang="en-US" sz="1050" dirty="0">
+                <a:solidFill>
+                  <a:srgbClr val="6B7280"/>
+                </a:solidFill>
+              </a:rPr>
+              <a:t>실 가맹점 + 메뉴 데이터 추가</a:t>
+            </a:r>
+            <a:endParaRPr lang="en-US" sz="1050" dirty="0"/>
+          </a:p>
+          <a:p>
+            <a:pPr indent="0" marL="0">
+              <a:buNone/>
+            </a:pPr>
+            <a:r>
+              <a:rPr lang="en-US" sz="1050" dirty="0">
+                <a:solidFill>
+                  <a:srgbClr val="6B7280"/>
+                </a:solidFill>
+              </a:rPr>
+              <a:t>관리자 계정 role='admin' 설정</a:t>
+            </a:r>
+            <a:endParaRPr lang="en-US" sz="1050" dirty="0"/>
+          </a:p>
+          <a:p>
+            <a:pPr indent="0" marL="0">
+              <a:buNone/>
+            </a:pPr>
+            <a:r>
+              <a:rPr lang="en-US" sz="1050" dirty="0">
+                <a:solidFill>
+                  <a:srgbClr val="6B7280"/>
+                </a:solidFill>
+              </a:rPr>
+              <a:t>Vercel 프로덕션 배포 확인</a:t>
+            </a:r>
+            <a:endParaRPr lang="en-US" sz="1050" dirty="0"/>
+          </a:p>
+        </p:txBody>
+      </p:sp>
+      <p:sp>
+        <p:nvSpPr>
+          <p:cNvPr id="34" name="Shape 32"/>
+          <p:cNvSpPr/>
+          <p:nvPr/>
+        </p:nvSpPr>
+        <p:spPr>
+          <a:xfrm>
+            <a:off x="365760" y="5257800"/>
+            <a:ext cx="1325880" cy="384048"/>
+          </a:xfrm>
+          <a:prstGeom prst="roundRect">
+            <a:avLst>
+              <a:gd name="adj" fmla="val 23810"/>
+            </a:avLst>
+          </a:prstGeom>
+          <a:solidFill>
+            <a:srgbClr val="FFEDD5"/>
+          </a:solidFill>
+          <a:ln w="12700">
+            <a:solidFill>
+              <a:srgbClr val="EA580C"/>
+            </a:solidFill>
+            <a:prstDash val="solid"/>
+          </a:ln>
+        </p:spPr>
+      </p:sp>
+      <p:sp>
+        <p:nvSpPr>
+          <p:cNvPr id="35" name="Text 33"/>
+          <p:cNvSpPr/>
+          <p:nvPr/>
+        </p:nvSpPr>
+        <p:spPr>
+          <a:xfrm>
+            <a:off x="365760" y="5257800"/>
+            <a:ext cx="1325880" cy="384048"/>
+          </a:xfrm>
+          <a:prstGeom prst="rect">
+            <a:avLst/>
+          </a:prstGeom>
+          <a:noFill/>
+          <a:ln/>
+        </p:spPr>
+        <p:txBody>
+          <a:bodyPr wrap="square" rtlCol="0" anchor="ctr"/>
+          <a:lstStyle/>
+          <a:p>
+            <a:pPr algn="ctr" indent="0" marL="0">
+              <a:buNone/>
+            </a:pPr>
+            <a:r>
+              <a:rPr lang="en-US" sz="1100" b="1" dirty="0">
+                <a:solidFill>
+                  <a:srgbClr val="EA580C"/>
+                </a:solidFill>
+              </a:rPr>
+              <a:t>⏳ Phase 4</a:t>
+            </a:r>
+            <a:endParaRPr lang="en-US" sz="1100" dirty="0"/>
+          </a:p>
+        </p:txBody>
+      </p:sp>
+      <p:sp>
+        <p:nvSpPr>
+          <p:cNvPr id="36" name="Shape 34"/>
+          <p:cNvSpPr/>
+          <p:nvPr/>
+        </p:nvSpPr>
+        <p:spPr>
+          <a:xfrm>
+            <a:off x="228600" y="5715000"/>
+            <a:ext cx="3749040" cy="1280160"/>
+          </a:xfrm>
+          <a:prstGeom prst="roundRect">
+            <a:avLst>
+              <a:gd name="adj" fmla="val 9286"/>
+            </a:avLst>
+          </a:prstGeom>
+          <a:solidFill>
+            <a:srgbClr val="FFFFFF"/>
+          </a:solidFill>
+          <a:ln w="12700">
+            <a:solidFill>
+              <a:srgbClr val="E9D5FF"/>
+            </a:solidFill>
+            <a:prstDash val="solid"/>
+          </a:ln>
+        </p:spPr>
+      </p:sp>
+      <p:sp>
+        <p:nvSpPr>
+          <p:cNvPr id="37" name="Shape 35"/>
+          <p:cNvSpPr/>
+          <p:nvPr/>
+        </p:nvSpPr>
+        <p:spPr>
+          <a:xfrm>
+            <a:off x="365760" y="5833872"/>
+            <a:ext cx="3474720" cy="329184"/>
+          </a:xfrm>
+          <a:prstGeom prst="roundRect">
+            <a:avLst>
+              <a:gd name="adj" fmla="val 22222"/>
+            </a:avLst>
+          </a:prstGeom>
+          <a:solidFill>
+            <a:srgbClr val="FFEDD5"/>
+          </a:solidFill>
+          <a:ln w="12700">
+            <a:solidFill>
+              <a:srgbClr val="FFEDD5"/>
+            </a:solidFill>
+            <a:prstDash val="solid"/>
+          </a:ln>
+        </p:spPr>
+      </p:sp>
+      <p:sp>
+        <p:nvSpPr>
+          <p:cNvPr id="38" name="Text 36"/>
+          <p:cNvSpPr/>
+          <p:nvPr/>
+        </p:nvSpPr>
+        <p:spPr>
+          <a:xfrm>
+            <a:off x="365760" y="5833872"/>
+            <a:ext cx="3474720" cy="329184"/>
+          </a:xfrm>
+          <a:prstGeom prst="rect">
+            <a:avLst/>
+          </a:prstGeom>
+          <a:noFill/>
+          <a:ln/>
+        </p:spPr>
+        <p:txBody>
+          <a:bodyPr wrap="square" rtlCol="0" anchor="ctr"/>
+          <a:lstStyle/>
+          <a:p>
+            <a:pPr algn="ctr" indent="0" marL="0">
+              <a:buNone/>
+            </a:pPr>
+            <a:r>
+              <a:rPr lang="en-US" sz="1200" b="1" dirty="0">
+                <a:solidFill>
+                  <a:srgbClr val="EA580C"/>
+                </a:solidFill>
+              </a:rPr>
+              <a:t>Pi Network SDK 인증</a:t>
+            </a:r>
+            <a:endParaRPr lang="en-US" sz="1200" dirty="0"/>
+          </a:p>
+        </p:txBody>
+      </p:sp>
+      <p:sp>
+        <p:nvSpPr>
+          <p:cNvPr id="39" name="Text 37"/>
+          <p:cNvSpPr/>
+          <p:nvPr/>
+        </p:nvSpPr>
+        <p:spPr>
+          <a:xfrm>
+            <a:off x="393192" y="6227064"/>
+            <a:ext cx="3419856" cy="694944"/>
+          </a:xfrm>
+          <a:prstGeom prst="rect">
+            <a:avLst/>
+          </a:prstGeom>
+          <a:noFill/>
+          <a:ln/>
+        </p:spPr>
+        <p:txBody>
+          <a:bodyPr wrap="square" rtlCol="0" anchor="ctr"/>
+          <a:lstStyle/>
+          <a:p>
+            <a:pPr indent="0" marL="0">
+              <a:buNone/>
+            </a:pPr>
+            <a:r>
+              <a:rPr lang="en-US" sz="1050" dirty="0">
+                <a:solidFill>
+                  <a:srgbClr val="6B7280"/>
+                </a:solidFill>
+              </a:rPr>
+              <a:t>Pi SDK 연동 (Mainnet 개방 후)</a:t>
+            </a:r>
+            <a:endParaRPr lang="en-US" sz="1050" dirty="0"/>
+          </a:p>
+          <a:p>
+            <a:pPr indent="0" marL="0">
+              <a:buNone/>
+            </a:pPr>
+            <a:r>
+              <a:rPr lang="en-US" sz="1050" dirty="0">
+                <a:solidFill>
+                  <a:srgbClr val="6B7280"/>
+                </a:solidFill>
+              </a:rPr>
+              <a:t>pi_uid / pi_username 필드 활성화</a:t>
+            </a:r>
+            <a:endParaRPr lang="en-US" sz="1050" dirty="0"/>
+          </a:p>
+          <a:p>
+            <a:pPr indent="0" marL="0">
+              <a:buNone/>
+            </a:pPr>
+            <a:r>
+              <a:rPr lang="en-US" sz="1050" dirty="0">
+                <a:solidFill>
+                  <a:srgbClr val="6B7280"/>
+                </a:solidFill>
+              </a:rPr>
+              <a:t>Pi 기반 로그인 플로우</a:t>
+            </a:r>
+            <a:endParaRPr lang="en-US" sz="1050" dirty="0"/>
+          </a:p>
+        </p:txBody>
+      </p:sp>
+      <p:sp>
+        <p:nvSpPr>
+          <p:cNvPr id="40" name="Shape 38"/>
+          <p:cNvSpPr/>
+          <p:nvPr/>
+        </p:nvSpPr>
+        <p:spPr>
+          <a:xfrm>
+            <a:off x="4133088" y="5715000"/>
+            <a:ext cx="3749040" cy="1280160"/>
+          </a:xfrm>
+          <a:prstGeom prst="roundRect">
+            <a:avLst>
+              <a:gd name="adj" fmla="val 9286"/>
+            </a:avLst>
+          </a:prstGeom>
+          <a:solidFill>
+            <a:srgbClr val="FFFFFF"/>
+          </a:solidFill>
+          <a:ln w="12700">
+            <a:solidFill>
+              <a:srgbClr val="E9D5FF"/>
+            </a:solidFill>
+            <a:prstDash val="solid"/>
+          </a:ln>
+        </p:spPr>
+      </p:sp>
+      <p:sp>
+        <p:nvSpPr>
+          <p:cNvPr id="41" name="Shape 39"/>
+          <p:cNvSpPr/>
+          <p:nvPr/>
+        </p:nvSpPr>
+        <p:spPr>
+          <a:xfrm>
+            <a:off x="4270248" y="5833872"/>
+            <a:ext cx="3474720" cy="329184"/>
+          </a:xfrm>
+          <a:prstGeom prst="roundRect">
+            <a:avLst>
+              <a:gd name="adj" fmla="val 22222"/>
+            </a:avLst>
+          </a:prstGeom>
+          <a:solidFill>
+            <a:srgbClr val="FFEDD5"/>
+          </a:solidFill>
+          <a:ln w="12700">
+            <a:solidFill>
+              <a:srgbClr val="FFEDD5"/>
+            </a:solidFill>
+            <a:prstDash val="solid"/>
+          </a:ln>
+        </p:spPr>
+      </p:sp>
+      <p:sp>
+        <p:nvSpPr>
+          <p:cNvPr id="42" name="Text 40"/>
+          <p:cNvSpPr/>
+          <p:nvPr/>
+        </p:nvSpPr>
+        <p:spPr>
+          <a:xfrm>
+            <a:off x="4270248" y="5833872"/>
+            <a:ext cx="3474720" cy="329184"/>
+          </a:xfrm>
+          <a:prstGeom prst="rect">
+            <a:avLst/>
+          </a:prstGeom>
+          <a:noFill/>
+          <a:ln/>
+        </p:spPr>
+        <p:txBody>
+          <a:bodyPr wrap="square" rtlCol="0" anchor="ctr"/>
+          <a:lstStyle/>
+          <a:p>
+            <a:pPr algn="ctr" indent="0" marL="0">
+              <a:buNone/>
+            </a:pPr>
+            <a:r>
+              <a:rPr lang="en-US" sz="1200" b="1" dirty="0">
+                <a:solidFill>
+                  <a:srgbClr val="EA580C"/>
+                </a:solidFill>
+              </a:rPr>
+              <a:t>Pi 코인 결제 연동</a:t>
+            </a:r>
+            <a:endParaRPr lang="en-US" sz="1200" dirty="0"/>
+          </a:p>
+        </p:txBody>
+      </p:sp>
+      <p:sp>
+        <p:nvSpPr>
+          <p:cNvPr id="43" name="Text 41"/>
+          <p:cNvSpPr/>
+          <p:nvPr/>
+        </p:nvSpPr>
+        <p:spPr>
+          <a:xfrm>
+            <a:off x="4297680" y="6227064"/>
+            <a:ext cx="3419856" cy="694944"/>
+          </a:xfrm>
+          <a:prstGeom prst="rect">
+            <a:avLst/>
+          </a:prstGeom>
+          <a:noFill/>
+          <a:ln/>
+        </p:spPr>
+        <p:txBody>
+          <a:bodyPr wrap="square" rtlCol="0" anchor="ctr"/>
+          <a:lstStyle/>
+          <a:p>
+            <a:pPr indent="0" marL="0">
+              <a:buNone/>
+            </a:pPr>
+            <a:r>
+              <a:rPr lang="en-US" sz="1050" dirty="0">
+                <a:solidFill>
+                  <a:srgbClr val="6B7280"/>
+                </a:solidFill>
+              </a:rPr>
+              <a:t>Pi 결제 API 연동</a:t>
+            </a:r>
+            <a:endParaRPr lang="en-US" sz="1050" dirty="0"/>
+          </a:p>
+          <a:p>
+            <a:pPr indent="0" marL="0">
+              <a:buNone/>
+            </a:pPr>
+            <a:r>
+              <a:rPr lang="en-US" sz="1050" dirty="0">
+                <a:solidFill>
+                  <a:srgbClr val="6B7280"/>
+                </a:solidFill>
+              </a:rPr>
+              <a:t>PICK ↔ Pi 토큰 전환</a:t>
+            </a:r>
+            <a:endParaRPr lang="en-US" sz="1050" dirty="0"/>
+          </a:p>
+          <a:p>
+            <a:pPr indent="0" marL="0">
+              <a:buNone/>
+            </a:pPr>
+            <a:r>
+              <a:rPr lang="en-US" sz="1050" dirty="0">
+                <a:solidFill>
+                  <a:srgbClr val="6B7280"/>
+                </a:solidFill>
+              </a:rPr>
+              <a:t>Pi 기반 정산 시스템</a:t>
+            </a:r>
+            <a:endParaRPr lang="en-US" sz="1050" dirty="0"/>
+          </a:p>
+        </p:txBody>
+      </p:sp>
+      <p:sp>
+        <p:nvSpPr>
+          <p:cNvPr id="44" name="Shape 42"/>
+          <p:cNvSpPr/>
+          <p:nvPr/>
+        </p:nvSpPr>
+        <p:spPr>
+          <a:xfrm>
+            <a:off x="8037576" y="5715000"/>
+            <a:ext cx="3749040" cy="1280160"/>
+          </a:xfrm>
+          <a:prstGeom prst="roundRect">
+            <a:avLst>
+              <a:gd name="adj" fmla="val 9286"/>
+            </a:avLst>
+          </a:prstGeom>
+          <a:solidFill>
+            <a:srgbClr val="FFFFFF"/>
+          </a:solidFill>
+          <a:ln w="12700">
+            <a:solidFill>
+              <a:srgbClr val="E9D5FF"/>
+            </a:solidFill>
+            <a:prstDash val="solid"/>
+          </a:ln>
+        </p:spPr>
+      </p:sp>
+      <p:sp>
+        <p:nvSpPr>
+          <p:cNvPr id="45" name="Shape 43"/>
+          <p:cNvSpPr/>
+          <p:nvPr/>
+        </p:nvSpPr>
+        <p:spPr>
+          <a:xfrm>
+            <a:off x="8174736" y="5833872"/>
+            <a:ext cx="3474720" cy="329184"/>
+          </a:xfrm>
+          <a:prstGeom prst="roundRect">
+            <a:avLst>
+              <a:gd name="adj" fmla="val 22222"/>
+            </a:avLst>
+          </a:prstGeom>
+          <a:solidFill>
+            <a:srgbClr val="FFEDD5"/>
+          </a:solidFill>
+          <a:ln w="12700">
+            <a:solidFill>
+              <a:srgbClr val="FFEDD5"/>
+            </a:solidFill>
+            <a:prstDash val="solid"/>
+          </a:ln>
+        </p:spPr>
+      </p:sp>
+      <p:sp>
+        <p:nvSpPr>
+          <p:cNvPr id="46" name="Text 44"/>
+          <p:cNvSpPr/>
+          <p:nvPr/>
+        </p:nvSpPr>
+        <p:spPr>
+          <a:xfrm>
+            <a:off x="8174736" y="5833872"/>
+            <a:ext cx="3474720" cy="329184"/>
+          </a:xfrm>
+          <a:prstGeom prst="rect">
+            <a:avLst/>
+          </a:prstGeom>
+          <a:noFill/>
+          <a:ln/>
+        </p:spPr>
+        <p:txBody>
+          <a:bodyPr wrap="square" rtlCol="0" anchor="ctr"/>
+          <a:lstStyle/>
+          <a:p>
+            <a:pPr algn="ctr" indent="0" marL="0">
+              <a:buNone/>
+            </a:pPr>
+            <a:r>
+              <a:rPr lang="en-US" sz="1200" b="1" dirty="0">
+                <a:solidFill>
+                  <a:srgbClr val="EA580C"/>
+                </a:solidFill>
+              </a:rPr>
+              <a:t>Pi 생태계 확장</a:t>
+            </a:r>
+            <a:endParaRPr lang="en-US" sz="1200" dirty="0"/>
+          </a:p>
+        </p:txBody>
+      </p:sp>
+      <p:sp>
+        <p:nvSpPr>
+          <p:cNvPr id="47" name="Text 45"/>
+          <p:cNvSpPr/>
+          <p:nvPr/>
+        </p:nvSpPr>
+        <p:spPr>
+          <a:xfrm>
+            <a:off x="8202168" y="6227064"/>
+            <a:ext cx="3419856" cy="694944"/>
+          </a:xfrm>
+          <a:prstGeom prst="rect">
+            <a:avLst/>
+          </a:prstGeom>
+          <a:noFill/>
+          <a:ln/>
+        </p:spPr>
+        <p:txBody>
+          <a:bodyPr wrap="square" rtlCol="0" anchor="ctr"/>
+          <a:lstStyle/>
+          <a:p>
+            <a:pPr indent="0" marL="0">
+              <a:buNone/>
+            </a:pPr>
+            <a:r>
+              <a:rPr lang="en-US" sz="1050" dirty="0">
+                <a:solidFill>
+                  <a:srgbClr val="6B7280"/>
+                </a:solidFill>
+              </a:rPr>
+              <a:t>Pi 마이닝 연동 혜택</a:t>
+            </a:r>
+            <a:endParaRPr lang="en-US" sz="1050" dirty="0"/>
+          </a:p>
+          <a:p>
+            <a:pPr indent="0" marL="0">
+              <a:buNone/>
+            </a:pPr>
+            <a:r>
+              <a:rPr lang="en-US" sz="1050" dirty="0">
+                <a:solidFill>
+                  <a:srgbClr val="6B7280"/>
+                </a:solidFill>
+              </a:rPr>
+              <a:t>Pi 홀더 전용 할인 쿠폰</a:t>
+            </a:r>
+            <a:endParaRPr lang="en-US" sz="1050" dirty="0"/>
+          </a:p>
+          <a:p>
+            <a:pPr indent="0" marL="0">
+              <a:buNone/>
+            </a:pPr>
+            <a:r>
+              <a:rPr lang="en-US" sz="1050" dirty="0">
+                <a:solidFill>
+                  <a:srgbClr val="6B7280"/>
+                </a:solidFill>
+              </a:rPr>
+              <a:t>Pi Network 커뮤니티 마케팅</a:t>
+            </a:r>
+            <a:endParaRPr lang="en-US" sz="1050" dirty="0"/>
+          </a:p>
+        </p:txBody>
+      </p:sp>
+    </p:spTree>
+  </p:cSld>
+  <p:clrMapOvr>
+    <a:masterClrMapping/>
+  </p:clrMapOvr>
+</p:sld>
+</file>
+
+<file path=ppt/slides/slide15.xml><?xml version="1.0" encoding="utf-8"?>
+<p:sld xmlns:a="http://schemas.openxmlformats.org/drawingml/2006/main" xmlns:r="http://schemas.openxmlformats.org/officeDocument/2006/relationships" xmlns:p="http://schemas.openxmlformats.org/presentationml/2006/main">
+  <p:cSld name="Slide 15">
+    <p:bg>
+      <p:bgPr>
+        <a:solidFill>
+          <a:srgbClr val="FAF5FF"/>
+        </a:solidFill>
+      </p:bgPr>
+    </p:bg>
+    <p:spTree>
+      <p:nvGrpSpPr>
+        <p:cNvPr id="1" name=""/>
+        <p:cNvGrpSpPr/>
+        <p:nvPr/>
+      </p:nvGrpSpPr>
+      <p:grpSpPr>
+        <a:xfrm>
+          <a:off x="0" y="0"/>
+          <a:ext cx="0" cy="0"/>
+          <a:chOff x="0" y="0"/>
+          <a:chExt cx="0" cy="0"/>
+        </a:xfrm>
+      </p:grpSpPr>
+      <p:sp>
+        <p:nvSpPr>
+          <p:cNvPr id="2" name="Text 0"/>
+          <p:cNvSpPr/>
+          <p:nvPr/>
+        </p:nvSpPr>
+        <p:spPr>
+          <a:xfrm>
+            <a:off x="365760" y="228600"/>
+            <a:ext cx="12070080" cy="594360"/>
+          </a:xfrm>
+          <a:prstGeom prst="rect">
+            <a:avLst/>
+          </a:prstGeom>
+          <a:noFill/>
+          <a:ln/>
+        </p:spPr>
+        <p:txBody>
+          <a:bodyPr wrap="square" rtlCol="0" anchor="ctr"/>
+          <a:lstStyle/>
+          <a:p>
+            <a:pPr indent="0" marL="0">
+              <a:buNone/>
+            </a:pPr>
+            <a:r>
+              <a:rPr lang="en-US" sz="2600" b="1" dirty="0">
+                <a:solidFill>
+                  <a:srgbClr val="4C1D95"/>
+                </a:solidFill>
+              </a:rPr>
               <a:t>🗺️  전체 개발 로드맵</a:t>
             </a:r>
             <a:endParaRPr lang="en-US" sz="2600" dirty="0"/>
@@ -10336,30 +11805,30 @@
         <p:spPr>
           <a:xfrm>
             <a:off x="457200" y="950976"/>
-            <a:ext cx="3840480" cy="256032"/>
-          </a:xfrm>
-          <a:prstGeom prst="rect">
-            <a:avLst/>
-          </a:prstGeom>
-          <a:noFill/>
-          <a:ln/>
-        </p:spPr>
-        <p:txBody>
-          <a:bodyPr wrap="square" rtlCol="0" anchor="ctr"/>
-          <a:lstStyle/>
-          <a:p>
-            <a:pPr indent="0" marL="0">
-              <a:buNone/>
-            </a:pPr>
-            <a:r>
-              <a:rPr lang="en-US" sz="1050" dirty="0">
+            <a:ext cx="3840480" cy="237744"/>
+          </a:xfrm>
+          <a:prstGeom prst="rect">
+            <a:avLst/>
+          </a:prstGeom>
+          <a:noFill/>
+          <a:ln/>
+        </p:spPr>
+        <p:txBody>
+          <a:bodyPr wrap="square" rtlCol="0" anchor="ctr"/>
+          <a:lstStyle/>
+          <a:p>
+            <a:pPr indent="0" marL="0">
+              <a:buNone/>
+            </a:pPr>
+            <a:r>
+              <a:rPr lang="en-US" sz="1000" dirty="0">
                 <a:solidFill>
                   <a:srgbClr val="1F1235"/>
                 </a:solidFill>
               </a:rPr>
               <a:t>인증 / 이메일 로그인 + 지갑 자동생성</a:t>
             </a:r>
-            <a:endParaRPr lang="en-US" sz="1050" dirty="0"/>
+            <a:endParaRPr lang="en-US" sz="1000" dirty="0"/>
           </a:p>
         </p:txBody>
       </p:sp>
@@ -10372,7 +11841,7 @@
         <p:spPr>
           <a:xfrm>
             <a:off x="4434840" y="1005840"/>
-            <a:ext cx="5029200" cy="137160"/>
+            <a:ext cx="5029200" cy="118872"/>
           </a:xfrm>
           <a:prstGeom prst="rect">
             <a:avLst/>
@@ -10397,7 +11866,7 @@
         <p:spPr>
           <a:xfrm>
             <a:off x="4434840" y="1005840"/>
-            <a:ext cx="5029200" cy="137160"/>
+            <a:ext cx="5029200" cy="118872"/>
           </a:xfrm>
           <a:prstGeom prst="rect">
             <a:avLst/>
@@ -10422,7 +11891,7 @@
         <p:spPr>
           <a:xfrm>
             <a:off x="9601200" y="950976"/>
-            <a:ext cx="640080" cy="256032"/>
+            <a:ext cx="640080" cy="237744"/>
           </a:xfrm>
           <a:prstGeom prst="rect">
             <a:avLst/>
@@ -10438,14 +11907,14 @@
               <a:buNone/>
             </a:pPr>
             <a:r>
-              <a:rPr lang="en-US" sz="1050" b="1" dirty="0">
+              <a:rPr lang="en-US" sz="1000" b="1" dirty="0">
                 <a:solidFill>
                   <a:srgbClr val="16A34A"/>
                 </a:solidFill>
               </a:rPr>
               <a:t>100%</a:t>
             </a:r>
-            <a:endParaRPr lang="en-US" sz="1050" dirty="0"/>
+            <a:endParaRPr lang="en-US" sz="1000" dirty="0"/>
           </a:p>
         </p:txBody>
       </p:sp>
@@ -10457,31 +11926,31 @@
         </p:nvSpPr>
         <p:spPr>
           <a:xfrm>
-            <a:off x="457200" y="1280160"/>
-            <a:ext cx="3840480" cy="256032"/>
-          </a:xfrm>
-          <a:prstGeom prst="rect">
-            <a:avLst/>
-          </a:prstGeom>
-          <a:noFill/>
-          <a:ln/>
-        </p:spPr>
-        <p:txBody>
-          <a:bodyPr wrap="square" rtlCol="0" anchor="ctr"/>
-          <a:lstStyle/>
-          <a:p>
-            <a:pPr indent="0" marL="0">
-              <a:buNone/>
-            </a:pPr>
-            <a:r>
-              <a:rPr lang="en-US" sz="1050" dirty="0">
+            <a:off x="457200" y="1243584"/>
+            <a:ext cx="3840480" cy="237744"/>
+          </a:xfrm>
+          <a:prstGeom prst="rect">
+            <a:avLst/>
+          </a:prstGeom>
+          <a:noFill/>
+          <a:ln/>
+        </p:spPr>
+        <p:txBody>
+          <a:bodyPr wrap="square" rtlCol="0" anchor="ctr"/>
+          <a:lstStyle/>
+          <a:p>
+            <a:pPr indent="0" marL="0">
+              <a:buNone/>
+            </a:pPr>
+            <a:r>
+              <a:rPr lang="en-US" sz="1000" dirty="0">
                 <a:solidFill>
                   <a:srgbClr val="1F1235"/>
                 </a:solidFill>
               </a:rPr>
               <a:t>카카오 소셜 로그인 + OAuth 콜백</a:t>
             </a:r>
-            <a:endParaRPr lang="en-US" sz="1050" dirty="0"/>
+            <a:endParaRPr lang="en-US" sz="1000" dirty="0"/>
           </a:p>
         </p:txBody>
       </p:sp>
@@ -10493,8 +11962,8 @@
         </p:nvSpPr>
         <p:spPr>
           <a:xfrm>
-            <a:off x="4434840" y="1335024"/>
-            <a:ext cx="5029200" cy="137160"/>
+            <a:off x="4434840" y="1298448"/>
+            <a:ext cx="5029200" cy="118872"/>
           </a:xfrm>
           <a:prstGeom prst="rect">
             <a:avLst/>
@@ -10518,8 +11987,8 @@
         </p:nvSpPr>
         <p:spPr>
           <a:xfrm>
-            <a:off x="4434840" y="1335024"/>
-            <a:ext cx="5029200" cy="137160"/>
+            <a:off x="4434840" y="1298448"/>
+            <a:ext cx="5029200" cy="118872"/>
           </a:xfrm>
           <a:prstGeom prst="rect">
             <a:avLst/>
@@ -10543,8 +12012,8 @@
         </p:nvSpPr>
         <p:spPr>
           <a:xfrm>
-            <a:off x="9601200" y="1280160"/>
-            <a:ext cx="640080" cy="256032"/>
+            <a:off x="9601200" y="1243584"/>
+            <a:ext cx="640080" cy="237744"/>
           </a:xfrm>
           <a:prstGeom prst="rect">
             <a:avLst/>
@@ -10560,14 +12029,14 @@
               <a:buNone/>
             </a:pPr>
             <a:r>
-              <a:rPr lang="en-US" sz="1050" b="1" dirty="0">
+              <a:rPr lang="en-US" sz="1000" b="1" dirty="0">
                 <a:solidFill>
                   <a:srgbClr val="16A34A"/>
                 </a:solidFill>
               </a:rPr>
               <a:t>100%</a:t>
             </a:r>
-            <a:endParaRPr lang="en-US" sz="1050" dirty="0"/>
+            <a:endParaRPr lang="en-US" sz="1000" dirty="0"/>
           </a:p>
         </p:txBody>
       </p:sp>
@@ -10579,31 +12048,31 @@
         </p:nvSpPr>
         <p:spPr>
           <a:xfrm>
-            <a:off x="457200" y="1609344"/>
-            <a:ext cx="3840480" cy="256032"/>
-          </a:xfrm>
-          <a:prstGeom prst="rect">
-            <a:avLst/>
-          </a:prstGeom>
-          <a:noFill/>
-          <a:ln/>
-        </p:spPr>
-        <p:txBody>
-          <a:bodyPr wrap="square" rtlCol="0" anchor="ctr"/>
-          <a:lstStyle/>
-          <a:p>
-            <a:pPr indent="0" marL="0">
-              <a:buNone/>
-            </a:pPr>
-            <a:r>
-              <a:rPr lang="en-US" sz="1050" dirty="0">
+            <a:off x="457200" y="1536192"/>
+            <a:ext cx="3840480" cy="237744"/>
+          </a:xfrm>
+          <a:prstGeom prst="rect">
+            <a:avLst/>
+          </a:prstGeom>
+          <a:noFill/>
+          <a:ln/>
+        </p:spPr>
+        <p:txBody>
+          <a:bodyPr wrap="square" rtlCol="0" anchor="ctr"/>
+          <a:lstStyle/>
+          <a:p>
+            <a:pPr indent="0" marL="0">
+              <a:buNone/>
+            </a:pPr>
+            <a:r>
+              <a:rPr lang="en-US" sz="1000" dirty="0">
                 <a:solidFill>
                   <a:srgbClr val="1F1235"/>
                 </a:solidFill>
               </a:rPr>
               <a:t>홈 탭 + 검색(전문검색 GIN) + 가맹점</a:t>
             </a:r>
-            <a:endParaRPr lang="en-US" sz="1050" dirty="0"/>
+            <a:endParaRPr lang="en-US" sz="1000" dirty="0"/>
           </a:p>
         </p:txBody>
       </p:sp>
@@ -10615,8 +12084,8 @@
         </p:nvSpPr>
         <p:spPr>
           <a:xfrm>
-            <a:off x="4434840" y="1664208"/>
-            <a:ext cx="5029200" cy="137160"/>
+            <a:off x="4434840" y="1591056"/>
+            <a:ext cx="5029200" cy="118872"/>
           </a:xfrm>
           <a:prstGeom prst="rect">
             <a:avLst/>
@@ -10640,8 +12109,8 @@
         </p:nvSpPr>
         <p:spPr>
           <a:xfrm>
-            <a:off x="4434840" y="1664208"/>
-            <a:ext cx="5029200" cy="137160"/>
+            <a:off x="4434840" y="1591056"/>
+            <a:ext cx="5029200" cy="118872"/>
           </a:xfrm>
           <a:prstGeom prst="rect">
             <a:avLst/>
@@ -10665,8 +12134,8 @@
         </p:nvSpPr>
         <p:spPr>
           <a:xfrm>
-            <a:off x="9601200" y="1609344"/>
-            <a:ext cx="640080" cy="256032"/>
+            <a:off x="9601200" y="1536192"/>
+            <a:ext cx="640080" cy="237744"/>
           </a:xfrm>
           <a:prstGeom prst="rect">
             <a:avLst/>
@@ -10682,14 +12151,14 @@
               <a:buNone/>
             </a:pPr>
             <a:r>
-              <a:rPr lang="en-US" sz="1050" b="1" dirty="0">
+              <a:rPr lang="en-US" sz="1000" b="1" dirty="0">
                 <a:solidFill>
                   <a:srgbClr val="16A34A"/>
                 </a:solidFill>
               </a:rPr>
               <a:t>100%</a:t>
             </a:r>
-            <a:endParaRPr lang="en-US" sz="1050" dirty="0"/>
+            <a:endParaRPr lang="en-US" sz="1000" dirty="0"/>
           </a:p>
         </p:txBody>
       </p:sp>
@@ -10701,31 +12170,31 @@
         </p:nvSpPr>
         <p:spPr>
           <a:xfrm>
-            <a:off x="457200" y="1938528"/>
-            <a:ext cx="3840480" cy="256032"/>
-          </a:xfrm>
-          <a:prstGeom prst="rect">
-            <a:avLst/>
-          </a:prstGeom>
-          <a:noFill/>
-          <a:ln/>
-        </p:spPr>
-        <p:txBody>
-          <a:bodyPr wrap="square" rtlCol="0" anchor="ctr"/>
-          <a:lstStyle/>
-          <a:p>
-            <a:pPr indent="0" marL="0">
-              <a:buNone/>
-            </a:pPr>
-            <a:r>
-              <a:rPr lang="en-US" sz="1050" dirty="0">
+            <a:off x="457200" y="1828800"/>
+            <a:ext cx="3840480" cy="237744"/>
+          </a:xfrm>
+          <a:prstGeom prst="rect">
+            <a:avLst/>
+          </a:prstGeom>
+          <a:noFill/>
+          <a:ln/>
+        </p:spPr>
+        <p:txBody>
+          <a:bodyPr wrap="square" rtlCol="0" anchor="ctr"/>
+          <a:lstStyle/>
+          <a:p>
+            <a:pPr indent="0" marL="0">
+              <a:buNone/>
+            </a:pPr>
+            <a:r>
+              <a:rPr lang="en-US" sz="1000" dirty="0">
                 <a:solidFill>
                   <a:srgbClr val="1F1235"/>
                 </a:solidFill>
               </a:rPr>
               <a:t>지갑 탭 (충전·보내기·거래내역)</a:t>
             </a:r>
-            <a:endParaRPr lang="en-US" sz="1050" dirty="0"/>
+            <a:endParaRPr lang="en-US" sz="1000" dirty="0"/>
           </a:p>
         </p:txBody>
       </p:sp>
@@ -10737,8 +12206,8 @@
         </p:nvSpPr>
         <p:spPr>
           <a:xfrm>
-            <a:off x="4434840" y="1993392"/>
-            <a:ext cx="5029200" cy="137160"/>
+            <a:off x="4434840" y="1883664"/>
+            <a:ext cx="5029200" cy="118872"/>
           </a:xfrm>
           <a:prstGeom prst="rect">
             <a:avLst/>
@@ -10762,8 +12231,8 @@
         </p:nvSpPr>
         <p:spPr>
           <a:xfrm>
-            <a:off x="4434840" y="1993392"/>
-            <a:ext cx="5029200" cy="137160"/>
+            <a:off x="4434840" y="1883664"/>
+            <a:ext cx="5029200" cy="118872"/>
           </a:xfrm>
           <a:prstGeom prst="rect">
             <a:avLst/>
@@ -10787,8 +12256,8 @@
         </p:nvSpPr>
         <p:spPr>
           <a:xfrm>
-            <a:off x="9601200" y="1938528"/>
-            <a:ext cx="640080" cy="256032"/>
+            <a:off x="9601200" y="1828800"/>
+            <a:ext cx="640080" cy="237744"/>
           </a:xfrm>
           <a:prstGeom prst="rect">
             <a:avLst/>
@@ -10804,14 +12273,14 @@
               <a:buNone/>
             </a:pPr>
             <a:r>
-              <a:rPr lang="en-US" sz="1050" b="1" dirty="0">
+              <a:rPr lang="en-US" sz="1000" b="1" dirty="0">
                 <a:solidFill>
                   <a:srgbClr val="16A34A"/>
                 </a:solidFill>
               </a:rPr>
               <a:t>100%</a:t>
             </a:r>
-            <a:endParaRPr lang="en-US" sz="1050" dirty="0"/>
+            <a:endParaRPr lang="en-US" sz="1000" dirty="0"/>
           </a:p>
         </p:txBody>
       </p:sp>
@@ -10823,31 +12292,31 @@
         </p:nvSpPr>
         <p:spPr>
           <a:xfrm>
-            <a:off x="457200" y="2267712"/>
-            <a:ext cx="3840480" cy="256032"/>
-          </a:xfrm>
-          <a:prstGeom prst="rect">
-            <a:avLst/>
-          </a:prstGeom>
-          <a:noFill/>
-          <a:ln/>
-        </p:spPr>
-        <p:txBody>
-          <a:bodyPr wrap="square" rtlCol="0" anchor="ctr"/>
-          <a:lstStyle/>
-          <a:p>
-            <a:pPr indent="0" marL="0">
-              <a:buNone/>
-            </a:pPr>
-            <a:r>
-              <a:rPr lang="en-US" sz="1050" dirty="0">
+            <a:off x="457200" y="2121408"/>
+            <a:ext cx="3840480" cy="237744"/>
+          </a:xfrm>
+          <a:prstGeom prst="rect">
+            <a:avLst/>
+          </a:prstGeom>
+          <a:noFill/>
+          <a:ln/>
+        </p:spPr>
+        <p:txBody>
+          <a:bodyPr wrap="square" rtlCol="0" anchor="ctr"/>
+          <a:lstStyle/>
+          <a:p>
+            <a:pPr indent="0" marL="0">
+              <a:buNone/>
+            </a:pPr>
+            <a:r>
+              <a:rPr lang="en-US" sz="1000" dirty="0">
                 <a:solidFill>
                   <a:srgbClr val="1F1235"/>
                 </a:solidFill>
               </a:rPr>
               <a:t>PICK주문 탭 + 취소 + 재주문 + 리뷰(이미지)</a:t>
             </a:r>
-            <a:endParaRPr lang="en-US" sz="1050" dirty="0"/>
+            <a:endParaRPr lang="en-US" sz="1000" dirty="0"/>
           </a:p>
         </p:txBody>
       </p:sp>
@@ -10859,8 +12328,8 @@
         </p:nvSpPr>
         <p:spPr>
           <a:xfrm>
-            <a:off x="4434840" y="2322576"/>
-            <a:ext cx="5029200" cy="137160"/>
+            <a:off x="4434840" y="2176272"/>
+            <a:ext cx="5029200" cy="118872"/>
           </a:xfrm>
           <a:prstGeom prst="rect">
             <a:avLst/>
@@ -10884,8 +12353,8 @@
         </p:nvSpPr>
         <p:spPr>
           <a:xfrm>
-            <a:off x="4434840" y="2322576"/>
-            <a:ext cx="5029200" cy="137160"/>
+            <a:off x="4434840" y="2176272"/>
+            <a:ext cx="5029200" cy="118872"/>
           </a:xfrm>
           <a:prstGeom prst="rect">
             <a:avLst/>
@@ -10909,8 +12378,8 @@
         </p:nvSpPr>
         <p:spPr>
           <a:xfrm>
-            <a:off x="9601200" y="2267712"/>
-            <a:ext cx="640080" cy="256032"/>
+            <a:off x="9601200" y="2121408"/>
+            <a:ext cx="640080" cy="237744"/>
           </a:xfrm>
           <a:prstGeom prst="rect">
             <a:avLst/>
@@ -10926,14 +12395,14 @@
               <a:buNone/>
             </a:pPr>
             <a:r>
-              <a:rPr lang="en-US" sz="1050" b="1" dirty="0">
+              <a:rPr lang="en-US" sz="1000" b="1" dirty="0">
                 <a:solidFill>
                   <a:srgbClr val="16A34A"/>
                 </a:solidFill>
               </a:rPr>
               <a:t>100%</a:t>
             </a:r>
-            <a:endParaRPr lang="en-US" sz="1050" dirty="0"/>
+            <a:endParaRPr lang="en-US" sz="1000" dirty="0"/>
           </a:p>
         </p:txBody>
       </p:sp>
@@ -10945,31 +12414,31 @@
         </p:nvSpPr>
         <p:spPr>
           <a:xfrm>
-            <a:off x="457200" y="2596896"/>
-            <a:ext cx="3840480" cy="256032"/>
-          </a:xfrm>
-          <a:prstGeom prst="rect">
-            <a:avLst/>
-          </a:prstGeom>
-          <a:noFill/>
-          <a:ln/>
-        </p:spPr>
-        <p:txBody>
-          <a:bodyPr wrap="square" rtlCol="0" anchor="ctr"/>
-          <a:lstStyle/>
-          <a:p>
-            <a:pPr indent="0" marL="0">
-              <a:buNone/>
-            </a:pPr>
-            <a:r>
-              <a:rPr lang="en-US" sz="1050" dirty="0">
+            <a:off x="457200" y="2414016"/>
+            <a:ext cx="3840480" cy="237744"/>
+          </a:xfrm>
+          <a:prstGeom prst="rect">
+            <a:avLst/>
+          </a:prstGeom>
+          <a:noFill/>
+          <a:ln/>
+        </p:spPr>
+        <p:txBody>
+          <a:bodyPr wrap="square" rtlCol="0" anchor="ctr"/>
+          <a:lstStyle/>
+          <a:p>
+            <a:pPr indent="0" marL="0">
+              <a:buNone/>
+            </a:pPr>
+            <a:r>
+              <a:rPr lang="en-US" sz="1000" dirty="0">
                 <a:solidFill>
                   <a:srgbClr val="1F1235"/>
                 </a:solidFill>
               </a:rPr>
               <a:t>장바구니 + 메뉴 옵션 + 쿠폰 + PICK 할인</a:t>
             </a:r>
-            <a:endParaRPr lang="en-US" sz="1050" dirty="0"/>
+            <a:endParaRPr lang="en-US" sz="1000" dirty="0"/>
           </a:p>
         </p:txBody>
       </p:sp>
@@ -10981,8 +12450,8 @@
         </p:nvSpPr>
         <p:spPr>
           <a:xfrm>
-            <a:off x="4434840" y="2651760"/>
-            <a:ext cx="5029200" cy="137160"/>
+            <a:off x="4434840" y="2468880"/>
+            <a:ext cx="5029200" cy="118872"/>
           </a:xfrm>
           <a:prstGeom prst="rect">
             <a:avLst/>
@@ -11006,8 +12475,8 @@
         </p:nvSpPr>
         <p:spPr>
           <a:xfrm>
-            <a:off x="4434840" y="2651760"/>
-            <a:ext cx="5029200" cy="137160"/>
+            <a:off x="4434840" y="2468880"/>
+            <a:ext cx="5029200" cy="118872"/>
           </a:xfrm>
           <a:prstGeom prst="rect">
             <a:avLst/>
@@ -11031,8 +12500,8 @@
         </p:nvSpPr>
         <p:spPr>
           <a:xfrm>
-            <a:off x="9601200" y="2596896"/>
-            <a:ext cx="640080" cy="256032"/>
+            <a:off x="9601200" y="2414016"/>
+            <a:ext cx="640080" cy="237744"/>
           </a:xfrm>
           <a:prstGeom prst="rect">
             <a:avLst/>
@@ -11048,14 +12517,14 @@
               <a:buNone/>
             </a:pPr>
             <a:r>
-              <a:rPr lang="en-US" sz="1050" b="1" dirty="0">
+              <a:rPr lang="en-US" sz="1000" b="1" dirty="0">
                 <a:solidFill>
                   <a:srgbClr val="16A34A"/>
                 </a:solidFill>
               </a:rPr>
               <a:t>100%</a:t>
             </a:r>
-            <a:endParaRPr lang="en-US" sz="1050" dirty="0"/>
+            <a:endParaRPr lang="en-US" sz="1000" dirty="0"/>
           </a:p>
         </p:txBody>
       </p:sp>
@@ -11067,31 +12536,31 @@
         </p:nvSpPr>
         <p:spPr>
           <a:xfrm>
-            <a:off x="457200" y="2926080"/>
-            <a:ext cx="3840480" cy="256032"/>
-          </a:xfrm>
-          <a:prstGeom prst="rect">
-            <a:avLst/>
-          </a:prstGeom>
-          <a:noFill/>
-          <a:ln/>
-        </p:spPr>
-        <p:txBody>
-          <a:bodyPr wrap="square" rtlCol="0" anchor="ctr"/>
-          <a:lstStyle/>
-          <a:p>
-            <a:pPr indent="0" marL="0">
-              <a:buNone/>
-            </a:pPr>
-            <a:r>
-              <a:rPr lang="en-US" sz="1050" dirty="0">
+            <a:off x="457200" y="2706624"/>
+            <a:ext cx="3840480" cy="237744"/>
+          </a:xfrm>
+          <a:prstGeom prst="rect">
+            <a:avLst/>
+          </a:prstGeom>
+          <a:noFill/>
+          <a:ln/>
+        </p:spPr>
+        <p:txBody>
+          <a:bodyPr wrap="square" rtlCol="0" anchor="ctr"/>
+          <a:lstStyle/>
+          <a:p>
+            <a:pPr indent="0" marL="0">
+              <a:buNone/>
+            </a:pPr>
+            <a:r>
+              <a:rPr lang="en-US" sz="1000" dirty="0">
                 <a:solidFill>
                   <a:srgbClr val="1F1235"/>
                 </a:solidFill>
               </a:rPr>
               <a:t>사장님 대시보드 / 주문 / 메뉴 / 정산</a:t>
             </a:r>
-            <a:endParaRPr lang="en-US" sz="1050" dirty="0"/>
+            <a:endParaRPr lang="en-US" sz="1000" dirty="0"/>
           </a:p>
         </p:txBody>
       </p:sp>
@@ -11103,8 +12572,8 @@
         </p:nvSpPr>
         <p:spPr>
           <a:xfrm>
-            <a:off x="4434840" y="2980944"/>
-            <a:ext cx="5029200" cy="137160"/>
+            <a:off x="4434840" y="2761488"/>
+            <a:ext cx="5029200" cy="118872"/>
           </a:xfrm>
           <a:prstGeom prst="rect">
             <a:avLst/>
@@ -11128,8 +12597,8 @@
         </p:nvSpPr>
         <p:spPr>
           <a:xfrm>
-            <a:off x="4434840" y="2980944"/>
-            <a:ext cx="5029200" cy="137160"/>
+            <a:off x="4434840" y="2761488"/>
+            <a:ext cx="5029200" cy="118872"/>
           </a:xfrm>
           <a:prstGeom prst="rect">
             <a:avLst/>
@@ -11153,8 +12622,8 @@
         </p:nvSpPr>
         <p:spPr>
           <a:xfrm>
-            <a:off x="9601200" y="2926080"/>
-            <a:ext cx="640080" cy="256032"/>
+            <a:off x="9601200" y="2706624"/>
+            <a:ext cx="640080" cy="237744"/>
           </a:xfrm>
           <a:prstGeom prst="rect">
             <a:avLst/>
@@ -11170,14 +12639,14 @@
               <a:buNone/>
             </a:pPr>
             <a:r>
-              <a:rPr lang="en-US" sz="1050" b="1" dirty="0">
+              <a:rPr lang="en-US" sz="1000" b="1" dirty="0">
                 <a:solidFill>
                   <a:srgbClr val="16A34A"/>
                 </a:solidFill>
               </a:rPr>
               <a:t>100%</a:t>
             </a:r>
-            <a:endParaRPr lang="en-US" sz="1050" dirty="0"/>
+            <a:endParaRPr lang="en-US" sz="1000" dirty="0"/>
           </a:p>
         </p:txBody>
       </p:sp>
@@ -11189,31 +12658,31 @@
         </p:nvSpPr>
         <p:spPr>
           <a:xfrm>
-            <a:off x="457200" y="3255264"/>
-            <a:ext cx="3840480" cy="256032"/>
-          </a:xfrm>
-          <a:prstGeom prst="rect">
-            <a:avLst/>
-          </a:prstGeom>
-          <a:noFill/>
-          <a:ln/>
-        </p:spPr>
-        <p:txBody>
-          <a:bodyPr wrap="square" rtlCol="0" anchor="ctr"/>
-          <a:lstStyle/>
-          <a:p>
-            <a:pPr indent="0" marL="0">
-              <a:buNone/>
-            </a:pPr>
-            <a:r>
-              <a:rPr lang="en-US" sz="1050" dirty="0">
+            <a:off x="457200" y="2999232"/>
+            <a:ext cx="3840480" cy="237744"/>
+          </a:xfrm>
+          <a:prstGeom prst="rect">
+            <a:avLst/>
+          </a:prstGeom>
+          <a:noFill/>
+          <a:ln/>
+        </p:spPr>
+        <p:txBody>
+          <a:bodyPr wrap="square" rtlCol="0" anchor="ctr"/>
+          <a:lstStyle/>
+          <a:p>
+            <a:pPr indent="0" marL="0">
+              <a:buNone/>
+            </a:pPr>
+            <a:r>
+              <a:rPr lang="en-US" sz="1000" dirty="0">
                 <a:solidFill>
                   <a:srgbClr val="1F1235"/>
                 </a:solidFill>
               </a:rPr>
               <a:t>라이더 대시보드 / 배달 / 수익 / 위치 공유</a:t>
             </a:r>
-            <a:endParaRPr lang="en-US" sz="1050" dirty="0"/>
+            <a:endParaRPr lang="en-US" sz="1000" dirty="0"/>
           </a:p>
         </p:txBody>
       </p:sp>
@@ -11225,8 +12694,8 @@
         </p:nvSpPr>
         <p:spPr>
           <a:xfrm>
-            <a:off x="4434840" y="3310128"/>
-            <a:ext cx="5029200" cy="137160"/>
+            <a:off x="4434840" y="3054096"/>
+            <a:ext cx="5029200" cy="118872"/>
           </a:xfrm>
           <a:prstGeom prst="rect">
             <a:avLst/>
@@ -11250,8 +12719,8 @@
         </p:nvSpPr>
         <p:spPr>
           <a:xfrm>
-            <a:off x="4434840" y="3310128"/>
-            <a:ext cx="5029200" cy="137160"/>
+            <a:off x="4434840" y="3054096"/>
+            <a:ext cx="5029200" cy="118872"/>
           </a:xfrm>
           <a:prstGeom prst="rect">
             <a:avLst/>
@@ -11275,8 +12744,8 @@
         </p:nvSpPr>
         <p:spPr>
           <a:xfrm>
-            <a:off x="9601200" y="3255264"/>
-            <a:ext cx="640080" cy="256032"/>
+            <a:off x="9601200" y="2999232"/>
+            <a:ext cx="640080" cy="237744"/>
           </a:xfrm>
           <a:prstGeom prst="rect">
             <a:avLst/>
@@ -11292,14 +12761,14 @@
               <a:buNone/>
             </a:pPr>
             <a:r>
-              <a:rPr lang="en-US" sz="1050" b="1" dirty="0">
+              <a:rPr lang="en-US" sz="1000" b="1" dirty="0">
                 <a:solidFill>
                   <a:srgbClr val="16A34A"/>
                 </a:solidFill>
               </a:rPr>
               <a:t>100%</a:t>
             </a:r>
-            <a:endParaRPr lang="en-US" sz="1050" dirty="0"/>
+            <a:endParaRPr lang="en-US" sz="1000" dirty="0"/>
           </a:p>
         </p:txBody>
       </p:sp>
@@ -11311,31 +12780,31 @@
         </p:nvSpPr>
         <p:spPr>
           <a:xfrm>
-            <a:off x="457200" y="3584448"/>
-            <a:ext cx="3840480" cy="256032"/>
-          </a:xfrm>
-          <a:prstGeom prst="rect">
-            <a:avLst/>
-          </a:prstGeom>
-          <a:noFill/>
-          <a:ln/>
-        </p:spPr>
-        <p:txBody>
-          <a:bodyPr wrap="square" rtlCol="0" anchor="ctr"/>
-          <a:lstStyle/>
-          <a:p>
-            <a:pPr indent="0" marL="0">
-              <a:buNone/>
-            </a:pPr>
-            <a:r>
-              <a:rPr lang="en-US" sz="1050" dirty="0">
+            <a:off x="457200" y="3291840"/>
+            <a:ext cx="3840480" cy="237744"/>
+          </a:xfrm>
+          <a:prstGeom prst="rect">
+            <a:avLst/>
+          </a:prstGeom>
+          <a:noFill/>
+          <a:ln/>
+        </p:spPr>
+        <p:txBody>
+          <a:bodyPr wrap="square" rtlCol="0" anchor="ctr"/>
+          <a:lstStyle/>
+          <a:p>
+            <a:pPr indent="0" marL="0">
+              <a:buNone/>
+            </a:pPr>
+            <a:r>
+              <a:rPr lang="en-US" sz="1000" dirty="0">
                 <a:solidFill>
                   <a:srgbClr val="1F1235"/>
                 </a:solidFill>
               </a:rPr>
               <a:t>관리자 대시보드 + PICK 지급 + 가게 승인</a:t>
             </a:r>
-            <a:endParaRPr lang="en-US" sz="1050" dirty="0"/>
+            <a:endParaRPr lang="en-US" sz="1000" dirty="0"/>
           </a:p>
         </p:txBody>
       </p:sp>
@@ -11347,8 +12816,8 @@
         </p:nvSpPr>
         <p:spPr>
           <a:xfrm>
-            <a:off x="4434840" y="3639312"/>
-            <a:ext cx="5029200" cy="137160"/>
+            <a:off x="4434840" y="3346704"/>
+            <a:ext cx="5029200" cy="118872"/>
           </a:xfrm>
           <a:prstGeom prst="rect">
             <a:avLst/>
@@ -11372,8 +12841,8 @@
         </p:nvSpPr>
         <p:spPr>
           <a:xfrm>
-            <a:off x="4434840" y="3639312"/>
-            <a:ext cx="5029200" cy="137160"/>
+            <a:off x="4434840" y="3346704"/>
+            <a:ext cx="5029200" cy="118872"/>
           </a:xfrm>
           <a:prstGeom prst="rect">
             <a:avLst/>
@@ -11397,8 +12866,8 @@
         </p:nvSpPr>
         <p:spPr>
           <a:xfrm>
-            <a:off x="9601200" y="3584448"/>
-            <a:ext cx="640080" cy="256032"/>
+            <a:off x="9601200" y="3291840"/>
+            <a:ext cx="640080" cy="237744"/>
           </a:xfrm>
           <a:prstGeom prst="rect">
             <a:avLst/>
@@ -11414,14 +12883,14 @@
               <a:buNone/>
             </a:pPr>
             <a:r>
-              <a:rPr lang="en-US" sz="1050" b="1" dirty="0">
+              <a:rPr lang="en-US" sz="1000" b="1" dirty="0">
                 <a:solidFill>
                   <a:srgbClr val="16A34A"/>
                 </a:solidFill>
               </a:rPr>
               <a:t>100%</a:t>
             </a:r>
-            <a:endParaRPr lang="en-US" sz="1050" dirty="0"/>
+            <a:endParaRPr lang="en-US" sz="1000" dirty="0"/>
           </a:p>
         </p:txBody>
       </p:sp>
@@ -11433,31 +12902,31 @@
         </p:nvSpPr>
         <p:spPr>
           <a:xfrm>
-            <a:off x="457200" y="3913632"/>
-            <a:ext cx="3840480" cy="256032"/>
-          </a:xfrm>
-          <a:prstGeom prst="rect">
-            <a:avLst/>
-          </a:prstGeom>
-          <a:noFill/>
-          <a:ln/>
-        </p:spPr>
-        <p:txBody>
-          <a:bodyPr wrap="square" rtlCol="0" anchor="ctr"/>
-          <a:lstStyle/>
-          <a:p>
-            <a:pPr indent="0" marL="0">
-              <a:buNone/>
-            </a:pPr>
-            <a:r>
-              <a:rPr lang="en-US" sz="1050" dirty="0">
+            <a:off x="457200" y="3584448"/>
+            <a:ext cx="3840480" cy="237744"/>
+          </a:xfrm>
+          <a:prstGeom prst="rect">
+            <a:avLst/>
+          </a:prstGeom>
+          <a:noFill/>
+          <a:ln/>
+        </p:spPr>
+        <p:txBody>
+          <a:bodyPr wrap="square" rtlCol="0" anchor="ctr"/>
+          <a:lstStyle/>
+          <a:p>
+            <a:pPr indent="0" marL="0">
+              <a:buNone/>
+            </a:pPr>
+            <a:r>
+              <a:rPr lang="en-US" sz="1000" dirty="0">
                 <a:solidFill>
                   <a:srgbClr val="1F1235"/>
                 </a:solidFill>
               </a:rPr>
               <a:t>미들웨어 RBAC + 비밀번호 찾기/재설정</a:t>
             </a:r>
-            <a:endParaRPr lang="en-US" sz="1050" dirty="0"/>
+            <a:endParaRPr lang="en-US" sz="1000" dirty="0"/>
           </a:p>
         </p:txBody>
       </p:sp>
@@ -11469,8 +12938,8 @@
         </p:nvSpPr>
         <p:spPr>
           <a:xfrm>
-            <a:off x="4434840" y="3968496"/>
-            <a:ext cx="5029200" cy="137160"/>
+            <a:off x="4434840" y="3639312"/>
+            <a:ext cx="5029200" cy="118872"/>
           </a:xfrm>
           <a:prstGeom prst="rect">
             <a:avLst/>
@@ -11494,8 +12963,8 @@
         </p:nvSpPr>
         <p:spPr>
           <a:xfrm>
-            <a:off x="4434840" y="3968496"/>
-            <a:ext cx="5029200" cy="137160"/>
+            <a:off x="4434840" y="3639312"/>
+            <a:ext cx="5029200" cy="118872"/>
           </a:xfrm>
           <a:prstGeom prst="rect">
             <a:avLst/>
@@ -11519,8 +12988,8 @@
         </p:nvSpPr>
         <p:spPr>
           <a:xfrm>
-            <a:off x="9601200" y="3913632"/>
-            <a:ext cx="640080" cy="256032"/>
+            <a:off x="9601200" y="3584448"/>
+            <a:ext cx="640080" cy="237744"/>
           </a:xfrm>
           <a:prstGeom prst="rect">
             <a:avLst/>
@@ -11536,14 +13005,14 @@
               <a:buNone/>
             </a:pPr>
             <a:r>
-              <a:rPr lang="en-US" sz="1050" b="1" dirty="0">
+              <a:rPr lang="en-US" sz="1000" b="1" dirty="0">
                 <a:solidFill>
                   <a:srgbClr val="16A34A"/>
                 </a:solidFill>
               </a:rPr>
               <a:t>100%</a:t>
             </a:r>
-            <a:endParaRPr lang="en-US" sz="1050" dirty="0"/>
+            <a:endParaRPr lang="en-US" sz="1000" dirty="0"/>
           </a:p>
         </p:txBody>
       </p:sp>
@@ -11555,31 +13024,31 @@
         </p:nvSpPr>
         <p:spPr>
           <a:xfrm>
-            <a:off x="457200" y="4242816"/>
-            <a:ext cx="3840480" cy="256032"/>
-          </a:xfrm>
-          <a:prstGeom prst="rect">
-            <a:avLst/>
-          </a:prstGeom>
-          <a:noFill/>
-          <a:ln/>
-        </p:spPr>
-        <p:txBody>
-          <a:bodyPr wrap="square" rtlCol="0" anchor="ctr"/>
-          <a:lstStyle/>
-          <a:p>
-            <a:pPr indent="0" marL="0">
-              <a:buNone/>
-            </a:pPr>
-            <a:r>
-              <a:rPr lang="en-US" sz="1050" dirty="0">
+            <a:off x="457200" y="3877056"/>
+            <a:ext cx="3840480" cy="237744"/>
+          </a:xfrm>
+          <a:prstGeom prst="rect">
+            <a:avLst/>
+          </a:prstGeom>
+          <a:noFill/>
+          <a:ln/>
+        </p:spPr>
+        <p:txBody>
+          <a:bodyPr wrap="square" rtlCol="0" anchor="ctr"/>
+          <a:lstStyle/>
+          <a:p>
+            <a:pPr indent="0" marL="0">
+              <a:buNone/>
+            </a:pPr>
+            <a:r>
+              <a:rPr lang="en-US" sz="1000" dirty="0">
                 <a:solidFill>
                   <a:srgbClr val="1F1235"/>
                 </a:solidFill>
               </a:rPr>
               <a:t>DB 인덱스 30개+ + 운영 RLS 정책 전환</a:t>
             </a:r>
-            <a:endParaRPr lang="en-US" sz="1050" dirty="0"/>
+            <a:endParaRPr lang="en-US" sz="1000" dirty="0"/>
           </a:p>
         </p:txBody>
       </p:sp>
@@ -11591,8 +13060,8 @@
         </p:nvSpPr>
         <p:spPr>
           <a:xfrm>
-            <a:off x="4434840" y="4297680"/>
-            <a:ext cx="5029200" cy="137160"/>
+            <a:off x="4434840" y="3931920"/>
+            <a:ext cx="5029200" cy="118872"/>
           </a:xfrm>
           <a:prstGeom prst="rect">
             <a:avLst/>
@@ -11616,8 +13085,8 @@
         </p:nvSpPr>
         <p:spPr>
           <a:xfrm>
-            <a:off x="4434840" y="4297680"/>
-            <a:ext cx="5029200" cy="137160"/>
+            <a:off x="4434840" y="3931920"/>
+            <a:ext cx="5029200" cy="118872"/>
           </a:xfrm>
           <a:prstGeom prst="rect">
             <a:avLst/>
@@ -11641,8 +13110,8 @@
         </p:nvSpPr>
         <p:spPr>
           <a:xfrm>
-            <a:off x="9601200" y="4242816"/>
-            <a:ext cx="640080" cy="256032"/>
+            <a:off x="9601200" y="3877056"/>
+            <a:ext cx="640080" cy="237744"/>
           </a:xfrm>
           <a:prstGeom prst="rect">
             <a:avLst/>
@@ -11658,14 +13127,14 @@
               <a:buNone/>
             </a:pPr>
             <a:r>
-              <a:rPr lang="en-US" sz="1050" b="1" dirty="0">
+              <a:rPr lang="en-US" sz="1000" b="1" dirty="0">
                 <a:solidFill>
                   <a:srgbClr val="16A34A"/>
                 </a:solidFill>
               </a:rPr>
               <a:t>100%</a:t>
             </a:r>
-            <a:endParaRPr lang="en-US" sz="1050" dirty="0"/>
+            <a:endParaRPr lang="en-US" sz="1000" dirty="0"/>
           </a:p>
         </p:txBody>
       </p:sp>
@@ -11677,31 +13146,31 @@
         </p:nvSpPr>
         <p:spPr>
           <a:xfrm>
-            <a:off x="457200" y="4572000"/>
-            <a:ext cx="3840480" cy="256032"/>
-          </a:xfrm>
-          <a:prstGeom prst="rect">
-            <a:avLst/>
-          </a:prstGeom>
-          <a:noFill/>
-          <a:ln/>
-        </p:spPr>
-        <p:txBody>
-          <a:bodyPr wrap="square" rtlCol="0" anchor="ctr"/>
-          <a:lstStyle/>
-          <a:p>
-            <a:pPr indent="0" marL="0">
-              <a:buNone/>
-            </a:pPr>
-            <a:r>
-              <a:rPr lang="en-US" sz="1050" dirty="0">
+            <a:off x="457200" y="4169664"/>
+            <a:ext cx="3840480" cy="237744"/>
+          </a:xfrm>
+          <a:prstGeom prst="rect">
+            <a:avLst/>
+          </a:prstGeom>
+          <a:noFill/>
+          <a:ln/>
+        </p:spPr>
+        <p:txBody>
+          <a:bodyPr wrap="square" rtlCol="0" anchor="ctr"/>
+          <a:lstStyle/>
+          <a:p>
+            <a:pPr indent="0" marL="0">
+              <a:buNone/>
+            </a:pPr>
+            <a:r>
+              <a:rPr lang="en-US" sz="1000" dirty="0">
                 <a:solidFill>
                   <a:srgbClr val="1F1235"/>
                 </a:solidFill>
               </a:rPr>
               <a:t>PWA + 다크모드 + 에러/404/로딩 페이지</a:t>
             </a:r>
-            <a:endParaRPr lang="en-US" sz="1050" dirty="0"/>
+            <a:endParaRPr lang="en-US" sz="1000" dirty="0"/>
           </a:p>
         </p:txBody>
       </p:sp>
@@ -11713,8 +13182,8 @@
         </p:nvSpPr>
         <p:spPr>
           <a:xfrm>
-            <a:off x="4434840" y="4626864"/>
-            <a:ext cx="5029200" cy="137160"/>
+            <a:off x="4434840" y="4224528"/>
+            <a:ext cx="5029200" cy="118872"/>
           </a:xfrm>
           <a:prstGeom prst="rect">
             <a:avLst/>
@@ -11738,8 +13207,8 @@
         </p:nvSpPr>
         <p:spPr>
           <a:xfrm>
-            <a:off x="4434840" y="4626864"/>
-            <a:ext cx="5029200" cy="137160"/>
+            <a:off x="4434840" y="4224528"/>
+            <a:ext cx="5029200" cy="118872"/>
           </a:xfrm>
           <a:prstGeom prst="rect">
             <a:avLst/>
@@ -11763,8 +13232,8 @@
         </p:nvSpPr>
         <p:spPr>
           <a:xfrm>
-            <a:off x="9601200" y="4572000"/>
-            <a:ext cx="640080" cy="256032"/>
+            <a:off x="9601200" y="4169664"/>
+            <a:ext cx="640080" cy="237744"/>
           </a:xfrm>
           <a:prstGeom prst="rect">
             <a:avLst/>
@@ -11780,14 +13249,14 @@
               <a:buNone/>
             </a:pPr>
             <a:r>
-              <a:rPr lang="en-US" sz="1050" b="1" dirty="0">
+              <a:rPr lang="en-US" sz="1000" b="1" dirty="0">
                 <a:solidFill>
                   <a:srgbClr val="16A34A"/>
                 </a:solidFill>
               </a:rPr>
               <a:t>100%</a:t>
             </a:r>
-            <a:endParaRPr lang="en-US" sz="1050" dirty="0"/>
+            <a:endParaRPr lang="en-US" sz="1000" dirty="0"/>
           </a:p>
         </p:txBody>
       </p:sp>
@@ -11799,31 +13268,31 @@
         </p:nvSpPr>
         <p:spPr>
           <a:xfrm>
-            <a:off x="457200" y="4901184"/>
-            <a:ext cx="3840480" cy="256032"/>
-          </a:xfrm>
-          <a:prstGeom prst="rect">
-            <a:avLst/>
-          </a:prstGeom>
-          <a:noFill/>
-          <a:ln/>
-        </p:spPr>
-        <p:txBody>
-          <a:bodyPr wrap="square" rtlCol="0" anchor="ctr"/>
-          <a:lstStyle/>
-          <a:p>
-            <a:pPr indent="0" marL="0">
-              <a:buNone/>
-            </a:pPr>
-            <a:r>
-              <a:rPr lang="en-US" sz="1050" dirty="0">
+            <a:off x="457200" y="4462272"/>
+            <a:ext cx="3840480" cy="237744"/>
+          </a:xfrm>
+          <a:prstGeom prst="rect">
+            <a:avLst/>
+          </a:prstGeom>
+          <a:noFill/>
+          <a:ln/>
+        </p:spPr>
+        <p:txBody>
+          <a:bodyPr wrap="square" rtlCol="0" anchor="ctr"/>
+          <a:lstStyle/>
+          <a:p>
+            <a:pPr indent="0" marL="0">
+              <a:buNone/>
+            </a:pPr>
+            <a:r>
+              <a:rPr lang="en-US" sz="1000" dirty="0">
                 <a:solidFill>
                   <a:srgbClr val="1F1235"/>
                 </a:solidFill>
               </a:rPr>
               <a:t>토스페이먼츠 카드·간편결제 연동</a:t>
             </a:r>
-            <a:endParaRPr lang="en-US" sz="1050" dirty="0"/>
+            <a:endParaRPr lang="en-US" sz="1000" dirty="0"/>
           </a:p>
         </p:txBody>
       </p:sp>
@@ -11835,8 +13304,8 @@
         </p:nvSpPr>
         <p:spPr>
           <a:xfrm>
-            <a:off x="4434840" y="4956048"/>
-            <a:ext cx="5029200" cy="137160"/>
+            <a:off x="4434840" y="4517136"/>
+            <a:ext cx="5029200" cy="118872"/>
           </a:xfrm>
           <a:prstGeom prst="rect">
             <a:avLst/>
@@ -11860,8 +13329,8 @@
         </p:nvSpPr>
         <p:spPr>
           <a:xfrm>
-            <a:off x="4434840" y="4956048"/>
-            <a:ext cx="5029200" cy="137160"/>
+            <a:off x="4434840" y="4517136"/>
+            <a:ext cx="5029200" cy="118872"/>
           </a:xfrm>
           <a:prstGeom prst="rect">
             <a:avLst/>
@@ -11885,8 +13354,8 @@
         </p:nvSpPr>
         <p:spPr>
           <a:xfrm>
-            <a:off x="9601200" y="4901184"/>
-            <a:ext cx="640080" cy="256032"/>
+            <a:off x="9601200" y="4462272"/>
+            <a:ext cx="640080" cy="237744"/>
           </a:xfrm>
           <a:prstGeom prst="rect">
             <a:avLst/>
@@ -11902,14 +13371,14 @@
               <a:buNone/>
             </a:pPr>
             <a:r>
-              <a:rPr lang="en-US" sz="1050" b="1" dirty="0">
+              <a:rPr lang="en-US" sz="1000" b="1" dirty="0">
                 <a:solidFill>
                   <a:srgbClr val="16A34A"/>
                 </a:solidFill>
               </a:rPr>
               <a:t>100%</a:t>
             </a:r>
-            <a:endParaRPr lang="en-US" sz="1050" dirty="0"/>
+            <a:endParaRPr lang="en-US" sz="1000" dirty="0"/>
           </a:p>
         </p:txBody>
       </p:sp>
@@ -11921,31 +13390,31 @@
         </p:nvSpPr>
         <p:spPr>
           <a:xfrm>
-            <a:off x="457200" y="5230368"/>
-            <a:ext cx="3840480" cy="256032"/>
-          </a:xfrm>
-          <a:prstGeom prst="rect">
-            <a:avLst/>
-          </a:prstGeom>
-          <a:noFill/>
-          <a:ln/>
-        </p:spPr>
-        <p:txBody>
-          <a:bodyPr wrap="square" rtlCol="0" anchor="ctr"/>
-          <a:lstStyle/>
-          <a:p>
-            <a:pPr indent="0" marL="0">
-              <a:buNone/>
-            </a:pPr>
-            <a:r>
-              <a:rPr lang="en-US" sz="1050" dirty="0">
+            <a:off x="457200" y="4754880"/>
+            <a:ext cx="3840480" cy="237744"/>
+          </a:xfrm>
+          <a:prstGeom prst="rect">
+            <a:avLst/>
+          </a:prstGeom>
+          <a:noFill/>
+          <a:ln/>
+        </p:spPr>
+        <p:txBody>
+          <a:bodyPr wrap="square" rtlCol="0" anchor="ctr"/>
+          <a:lstStyle/>
+          <a:p>
+            <a:pPr indent="0" marL="0">
+              <a:buNone/>
+            </a:pPr>
+            <a:r>
+              <a:rPr lang="en-US" sz="1000" dirty="0">
                 <a:solidFill>
                   <a:srgbClr val="1F1235"/>
                 </a:solidFill>
               </a:rPr>
               <a:t>가맹점 광고 시스템 + Sentry 모니터링</a:t>
             </a:r>
-            <a:endParaRPr lang="en-US" sz="1050" dirty="0"/>
+            <a:endParaRPr lang="en-US" sz="1000" dirty="0"/>
           </a:p>
         </p:txBody>
       </p:sp>
@@ -11957,8 +13426,8 @@
         </p:nvSpPr>
         <p:spPr>
           <a:xfrm>
-            <a:off x="4434840" y="5285232"/>
-            <a:ext cx="5029200" cy="137160"/>
+            <a:off x="4434840" y="4809744"/>
+            <a:ext cx="5029200" cy="118872"/>
           </a:xfrm>
           <a:prstGeom prst="rect">
             <a:avLst/>
@@ -11982,8 +13451,8 @@
         </p:nvSpPr>
         <p:spPr>
           <a:xfrm>
-            <a:off x="4434840" y="5285232"/>
-            <a:ext cx="5029200" cy="137160"/>
+            <a:off x="4434840" y="4809744"/>
+            <a:ext cx="5029200" cy="118872"/>
           </a:xfrm>
           <a:prstGeom prst="rect">
             <a:avLst/>
@@ -12007,8 +13476,8 @@
         </p:nvSpPr>
         <p:spPr>
           <a:xfrm>
-            <a:off x="9601200" y="5230368"/>
-            <a:ext cx="640080" cy="256032"/>
+            <a:off x="9601200" y="4754880"/>
+            <a:ext cx="640080" cy="237744"/>
           </a:xfrm>
           <a:prstGeom prst="rect">
             <a:avLst/>
@@ -12024,14 +13493,14 @@
               <a:buNone/>
             </a:pPr>
             <a:r>
-              <a:rPr lang="en-US" sz="1050" b="1" dirty="0">
+              <a:rPr lang="en-US" sz="1000" b="1" dirty="0">
                 <a:solidFill>
                   <a:srgbClr val="16A34A"/>
                 </a:solidFill>
               </a:rPr>
               <a:t>100%</a:t>
             </a:r>
-            <a:endParaRPr lang="en-US" sz="1050" dirty="0"/>
+            <a:endParaRPr lang="en-US" sz="1000" dirty="0"/>
           </a:p>
         </p:txBody>
       </p:sp>
@@ -12043,31 +13512,31 @@
         </p:nvSpPr>
         <p:spPr>
           <a:xfrm>
-            <a:off x="457200" y="5559552"/>
-            <a:ext cx="3840480" cy="256032"/>
-          </a:xfrm>
-          <a:prstGeom prst="rect">
-            <a:avLst/>
-          </a:prstGeom>
-          <a:noFill/>
-          <a:ln/>
-        </p:spPr>
-        <p:txBody>
-          <a:bodyPr wrap="square" rtlCol="0" anchor="ctr"/>
-          <a:lstStyle/>
-          <a:p>
-            <a:pPr indent="0" marL="0">
-              <a:buNone/>
-            </a:pPr>
-            <a:r>
-              <a:rPr lang="en-US" sz="1050" dirty="0">
+            <a:off x="457200" y="5047488"/>
+            <a:ext cx="3840480" cy="237744"/>
+          </a:xfrm>
+          <a:prstGeom prst="rect">
+            <a:avLst/>
+          </a:prstGeom>
+          <a:noFill/>
+          <a:ln/>
+        </p:spPr>
+        <p:txBody>
+          <a:bodyPr wrap="square" rtlCol="0" anchor="ctr"/>
+          <a:lstStyle/>
+          <a:p>
+            <a:pPr indent="0" marL="0">
+              <a:buNone/>
+            </a:pPr>
+            <a:r>
+              <a:rPr lang="en-US" sz="1000" dirty="0">
                 <a:solidFill>
                   <a:srgbClr val="1F1235"/>
                 </a:solidFill>
               </a:rPr>
               <a:t>주간 영업시간 표시 + 실사 이미지 연동</a:t>
             </a:r>
-            <a:endParaRPr lang="en-US" sz="1050" dirty="0"/>
+            <a:endParaRPr lang="en-US" sz="1000" dirty="0"/>
           </a:p>
         </p:txBody>
       </p:sp>
@@ -12079,8 +13548,8 @@
         </p:nvSpPr>
         <p:spPr>
           <a:xfrm>
-            <a:off x="4434840" y="5614416"/>
-            <a:ext cx="5029200" cy="137160"/>
+            <a:off x="4434840" y="5102352"/>
+            <a:ext cx="5029200" cy="118872"/>
           </a:xfrm>
           <a:prstGeom prst="rect">
             <a:avLst/>
@@ -12104,8 +13573,8 @@
         </p:nvSpPr>
         <p:spPr>
           <a:xfrm>
-            <a:off x="4434840" y="5614416"/>
-            <a:ext cx="5029200" cy="137160"/>
+            <a:off x="4434840" y="5102352"/>
+            <a:ext cx="5029200" cy="118872"/>
           </a:xfrm>
           <a:prstGeom prst="rect">
             <a:avLst/>
@@ -12129,8 +13598,8 @@
         </p:nvSpPr>
         <p:spPr>
           <a:xfrm>
-            <a:off x="9601200" y="5559552"/>
-            <a:ext cx="640080" cy="256032"/>
+            <a:off x="9601200" y="5047488"/>
+            <a:ext cx="640080" cy="237744"/>
           </a:xfrm>
           <a:prstGeom prst="rect">
             <a:avLst/>
@@ -12146,14 +13615,14 @@
               <a:buNone/>
             </a:pPr>
             <a:r>
-              <a:rPr lang="en-US" sz="1050" b="1" dirty="0">
+              <a:rPr lang="en-US" sz="1000" b="1" dirty="0">
                 <a:solidFill>
                   <a:srgbClr val="16A34A"/>
                 </a:solidFill>
               </a:rPr>
               <a:t>100%</a:t>
             </a:r>
-            <a:endParaRPr lang="en-US" sz="1050" dirty="0"/>
+            <a:endParaRPr lang="en-US" sz="1000" dirty="0"/>
           </a:p>
         </p:txBody>
       </p:sp>
@@ -12165,31 +13634,31 @@
         </p:nvSpPr>
         <p:spPr>
           <a:xfrm>
-            <a:off x="457200" y="5888736"/>
-            <a:ext cx="3840480" cy="256032"/>
-          </a:xfrm>
-          <a:prstGeom prst="rect">
-            <a:avLst/>
-          </a:prstGeom>
-          <a:noFill/>
-          <a:ln/>
-        </p:spPr>
-        <p:txBody>
-          <a:bodyPr wrap="square" rtlCol="0" anchor="ctr"/>
-          <a:lstStyle/>
-          <a:p>
-            <a:pPr indent="0" marL="0">
-              <a:buNone/>
-            </a:pPr>
-            <a:r>
-              <a:rPr lang="en-US" sz="1050" dirty="0">
+            <a:off x="457200" y="5340096"/>
+            <a:ext cx="3840480" cy="237744"/>
+          </a:xfrm>
+          <a:prstGeom prst="rect">
+            <a:avLst/>
+          </a:prstGeom>
+          <a:noFill/>
+          <a:ln/>
+        </p:spPr>
+        <p:txBody>
+          <a:bodyPr wrap="square" rtlCol="0" anchor="ctr"/>
+          <a:lstStyle/>
+          <a:p>
+            <a:pPr indent="0" marL="0">
+              <a:buNone/>
+            </a:pPr>
+            <a:r>
+              <a:rPr lang="en-US" sz="1000" dirty="0">
                 <a:solidFill>
                   <a:srgbClr val="1F1235"/>
                 </a:solidFill>
               </a:rPr>
               <a:t>FCM 푸시 알림 + 관리자 일괄 발송</a:t>
             </a:r>
-            <a:endParaRPr lang="en-US" sz="1050" dirty="0"/>
+            <a:endParaRPr lang="en-US" sz="1000" dirty="0"/>
           </a:p>
         </p:txBody>
       </p:sp>
@@ -12201,8 +13670,8 @@
         </p:nvSpPr>
         <p:spPr>
           <a:xfrm>
-            <a:off x="4434840" y="5943600"/>
-            <a:ext cx="5029200" cy="137160"/>
+            <a:off x="4434840" y="5394960"/>
+            <a:ext cx="5029200" cy="118872"/>
           </a:xfrm>
           <a:prstGeom prst="rect">
             <a:avLst/>
@@ -12226,8 +13695,8 @@
         </p:nvSpPr>
         <p:spPr>
           <a:xfrm>
-            <a:off x="4434840" y="5943600"/>
-            <a:ext cx="5029200" cy="137160"/>
+            <a:off x="4434840" y="5394960"/>
+            <a:ext cx="5029200" cy="118872"/>
           </a:xfrm>
           <a:prstGeom prst="rect">
             <a:avLst/>
@@ -12251,8 +13720,8 @@
         </p:nvSpPr>
         <p:spPr>
           <a:xfrm>
-            <a:off x="9601200" y="5888736"/>
-            <a:ext cx="640080" cy="256032"/>
+            <a:off x="9601200" y="5340096"/>
+            <a:ext cx="640080" cy="237744"/>
           </a:xfrm>
           <a:prstGeom prst="rect">
             <a:avLst/>
@@ -12268,14 +13737,14 @@
               <a:buNone/>
             </a:pPr>
             <a:r>
-              <a:rPr lang="en-US" sz="1050" b="1" dirty="0">
+              <a:rPr lang="en-US" sz="1000" b="1" dirty="0">
                 <a:solidFill>
                   <a:srgbClr val="16A34A"/>
                 </a:solidFill>
               </a:rPr>
               <a:t>100%</a:t>
             </a:r>
-            <a:endParaRPr lang="en-US" sz="1050" dirty="0"/>
+            <a:endParaRPr lang="en-US" sz="1000" dirty="0"/>
           </a:p>
         </p:txBody>
       </p:sp>
@@ -12287,31 +13756,31 @@
         </p:nvSpPr>
         <p:spPr>
           <a:xfrm>
-            <a:off x="457200" y="6217920"/>
-            <a:ext cx="3840480" cy="256032"/>
-          </a:xfrm>
-          <a:prstGeom prst="rect">
-            <a:avLst/>
-          </a:prstGeom>
-          <a:noFill/>
-          <a:ln/>
-        </p:spPr>
-        <p:txBody>
-          <a:bodyPr wrap="square" rtlCol="0" anchor="ctr"/>
-          <a:lstStyle/>
-          <a:p>
-            <a:pPr indent="0" marL="0">
-              <a:buNone/>
-            </a:pPr>
-            <a:r>
-              <a:rPr lang="en-US" sz="1050" dirty="0">
+            <a:off x="457200" y="5632704"/>
+            <a:ext cx="3840480" cy="237744"/>
+          </a:xfrm>
+          <a:prstGeom prst="rect">
+            <a:avLst/>
+          </a:prstGeom>
+          <a:noFill/>
+          <a:ln/>
+        </p:spPr>
+        <p:txBody>
+          <a:bodyPr wrap="square" rtlCol="0" anchor="ctr"/>
+          <a:lstStyle/>
+          <a:p>
+            <a:pPr indent="0" marL="0">
+              <a:buNone/>
+            </a:pPr>
+            <a:r>
+              <a:rPr lang="en-US" sz="1000" dirty="0">
                 <a:solidFill>
                   <a:srgbClr val="1F1235"/>
                 </a:solidFill>
               </a:rPr>
               <a:t>지갑 탭 재디자인 + Pi UI + 출석 Tap-to-Earn</a:t>
             </a:r>
-            <a:endParaRPr lang="en-US" sz="1050" dirty="0"/>
+            <a:endParaRPr lang="en-US" sz="1000" dirty="0"/>
           </a:p>
         </p:txBody>
       </p:sp>
@@ -12323,8 +13792,8 @@
         </p:nvSpPr>
         <p:spPr>
           <a:xfrm>
-            <a:off x="4434840" y="6272784"/>
-            <a:ext cx="5029200" cy="137160"/>
+            <a:off x="4434840" y="5687568"/>
+            <a:ext cx="5029200" cy="118872"/>
           </a:xfrm>
           <a:prstGeom prst="rect">
             <a:avLst/>
@@ -12348,8 +13817,8 @@
         </p:nvSpPr>
         <p:spPr>
           <a:xfrm>
-            <a:off x="4434840" y="6272784"/>
-            <a:ext cx="5029200" cy="137160"/>
+            <a:off x="4434840" y="5687568"/>
+            <a:ext cx="5029200" cy="118872"/>
           </a:xfrm>
           <a:prstGeom prst="rect">
             <a:avLst/>
@@ -12373,8 +13842,8 @@
         </p:nvSpPr>
         <p:spPr>
           <a:xfrm>
-            <a:off x="9601200" y="6217920"/>
-            <a:ext cx="640080" cy="256032"/>
+            <a:off x="9601200" y="5632704"/>
+            <a:ext cx="640080" cy="237744"/>
           </a:xfrm>
           <a:prstGeom prst="rect">
             <a:avLst/>
@@ -12390,14 +13859,14 @@
               <a:buNone/>
             </a:pPr>
             <a:r>
-              <a:rPr lang="en-US" sz="1050" b="1" dirty="0">
+              <a:rPr lang="en-US" sz="1000" b="1" dirty="0">
                 <a:solidFill>
                   <a:srgbClr val="16A34A"/>
                 </a:solidFill>
               </a:rPr>
               <a:t>100%</a:t>
             </a:r>
-            <a:endParaRPr lang="en-US" sz="1050" dirty="0"/>
+            <a:endParaRPr lang="en-US" sz="1000" dirty="0"/>
           </a:p>
         </p:txBody>
       </p:sp>
@@ -12409,31 +13878,31 @@
         </p:nvSpPr>
         <p:spPr>
           <a:xfrm>
-            <a:off x="457200" y="6547104"/>
-            <a:ext cx="3840480" cy="256032"/>
-          </a:xfrm>
-          <a:prstGeom prst="rect">
-            <a:avLst/>
-          </a:prstGeom>
-          <a:noFill/>
-          <a:ln/>
-        </p:spPr>
-        <p:txBody>
-          <a:bodyPr wrap="square" rtlCol="0" anchor="ctr"/>
-          <a:lstStyle/>
-          <a:p>
-            <a:pPr indent="0" marL="0">
-              <a:buNone/>
-            </a:pPr>
-            <a:r>
-              <a:rPr lang="en-US" sz="1050" dirty="0">
+            <a:off x="457200" y="5925312"/>
+            <a:ext cx="3840480" cy="237744"/>
+          </a:xfrm>
+          <a:prstGeom prst="rect">
+            <a:avLst/>
+          </a:prstGeom>
+          <a:noFill/>
+          <a:ln/>
+        </p:spPr>
+        <p:txBody>
+          <a:bodyPr wrap="square" rtlCol="0" anchor="ctr"/>
+          <a:lstStyle/>
+          <a:p>
+            <a:pPr indent="0" marL="0">
+              <a:buNone/>
+            </a:pPr>
+            <a:r>
+              <a:rPr lang="en-US" sz="1000" dirty="0">
                 <a:solidFill>
                   <a:srgbClr val="1F1235"/>
                 </a:solidFill>
               </a:rPr>
               <a:t>사장님 사진리뷰보상 + 쿠폰 KRW 입력 설정</a:t>
             </a:r>
-            <a:endParaRPr lang="en-US" sz="1050" dirty="0"/>
+            <a:endParaRPr lang="en-US" sz="1000" dirty="0"/>
           </a:p>
         </p:txBody>
       </p:sp>
@@ -12445,8 +13914,8 @@
         </p:nvSpPr>
         <p:spPr>
           <a:xfrm>
-            <a:off x="4434840" y="6601968"/>
-            <a:ext cx="5029200" cy="137160"/>
+            <a:off x="4434840" y="5980176"/>
+            <a:ext cx="5029200" cy="118872"/>
           </a:xfrm>
           <a:prstGeom prst="rect">
             <a:avLst/>
@@ -12470,8 +13939,8 @@
         </p:nvSpPr>
         <p:spPr>
           <a:xfrm>
-            <a:off x="4434840" y="6601968"/>
-            <a:ext cx="5029200" cy="137160"/>
+            <a:off x="4434840" y="5980176"/>
+            <a:ext cx="5029200" cy="118872"/>
           </a:xfrm>
           <a:prstGeom prst="rect">
             <a:avLst/>
@@ -12495,8 +13964,8 @@
         </p:nvSpPr>
         <p:spPr>
           <a:xfrm>
-            <a:off x="9601200" y="6547104"/>
-            <a:ext cx="640080" cy="256032"/>
+            <a:off x="9601200" y="5925312"/>
+            <a:ext cx="640080" cy="237744"/>
           </a:xfrm>
           <a:prstGeom prst="rect">
             <a:avLst/>
@@ -12512,14 +13981,14 @@
               <a:buNone/>
             </a:pPr>
             <a:r>
-              <a:rPr lang="en-US" sz="1050" b="1" dirty="0">
+              <a:rPr lang="en-US" sz="1000" b="1" dirty="0">
                 <a:solidFill>
                   <a:srgbClr val="16A34A"/>
                 </a:solidFill>
               </a:rPr>
               <a:t>100%</a:t>
             </a:r>
-            <a:endParaRPr lang="en-US" sz="1050" dirty="0"/>
+            <a:endParaRPr lang="en-US" sz="1000" dirty="0"/>
           </a:p>
         </p:txBody>
       </p:sp>
@@ -12531,31 +14000,31 @@
         </p:nvSpPr>
         <p:spPr>
           <a:xfrm>
-            <a:off x="457200" y="6876288"/>
-            <a:ext cx="3840480" cy="256032"/>
-          </a:xfrm>
-          <a:prstGeom prst="rect">
-            <a:avLst/>
-          </a:prstGeom>
-          <a:noFill/>
-          <a:ln/>
-        </p:spPr>
-        <p:txBody>
-          <a:bodyPr wrap="square" rtlCol="0" anchor="ctr"/>
-          <a:lstStyle/>
-          <a:p>
-            <a:pPr indent="0" marL="0">
-              <a:buNone/>
-            </a:pPr>
-            <a:r>
-              <a:rPr lang="en-US" sz="1050" dirty="0">
+            <a:off x="457200" y="6217920"/>
+            <a:ext cx="3840480" cy="237744"/>
+          </a:xfrm>
+          <a:prstGeom prst="rect">
+            <a:avLst/>
+          </a:prstGeom>
+          <a:noFill/>
+          <a:ln/>
+        </p:spPr>
+        <p:txBody>
+          <a:bodyPr wrap="square" rtlCol="0" anchor="ctr"/>
+          <a:lstStyle/>
+          <a:p>
+            <a:pPr indent="0" marL="0">
+              <a:buNone/>
+            </a:pPr>
+            <a:r>
+              <a:rPr lang="en-US" sz="1000" dirty="0">
                 <a:solidFill>
                   <a:srgbClr val="1F1235"/>
                 </a:solidFill>
               </a:rPr>
               <a:t>친구 초대 리워드 역할별 배치 (사용자·사장님·라이더)</a:t>
             </a:r>
-            <a:endParaRPr lang="en-US" sz="1050" dirty="0"/>
+            <a:endParaRPr lang="en-US" sz="1000" dirty="0"/>
           </a:p>
         </p:txBody>
       </p:sp>
@@ -12567,8 +14036,8 @@
         </p:nvSpPr>
         <p:spPr>
           <a:xfrm>
-            <a:off x="4434840" y="6931152"/>
-            <a:ext cx="5029200" cy="137160"/>
+            <a:off x="4434840" y="6272784"/>
+            <a:ext cx="5029200" cy="118872"/>
           </a:xfrm>
           <a:prstGeom prst="rect">
             <a:avLst/>
@@ -12592,8 +14061,8 @@
         </p:nvSpPr>
         <p:spPr>
           <a:xfrm>
-            <a:off x="4434840" y="6931152"/>
-            <a:ext cx="5029200" cy="137160"/>
+            <a:off x="4434840" y="6272784"/>
+            <a:ext cx="5029200" cy="118872"/>
           </a:xfrm>
           <a:prstGeom prst="rect">
             <a:avLst/>
@@ -12617,8 +14086,8 @@
         </p:nvSpPr>
         <p:spPr>
           <a:xfrm>
-            <a:off x="9601200" y="6876288"/>
-            <a:ext cx="640080" cy="256032"/>
+            <a:off x="9601200" y="6217920"/>
+            <a:ext cx="640080" cy="237744"/>
           </a:xfrm>
           <a:prstGeom prst="rect">
             <a:avLst/>
@@ -12634,35 +14103,94 @@
               <a:buNone/>
             </a:pPr>
             <a:r>
-              <a:rPr lang="en-US" sz="1050" b="1" dirty="0">
+              <a:rPr lang="en-US" sz="1000" b="1" dirty="0">
                 <a:solidFill>
                   <a:srgbClr val="16A34A"/>
                 </a:solidFill>
               </a:rPr>
               <a:t>100%</a:t>
             </a:r>
-            <a:endParaRPr lang="en-US" sz="1050" dirty="0"/>
-          </a:p>
-        </p:txBody>
-      </p:sp>
-      <p:sp>
-        <p:nvSpPr>
-          <p:cNvPr id="80" name="Shape 78"/>
-          <p:cNvSpPr/>
-          <p:nvPr/>
-        </p:nvSpPr>
-        <p:spPr>
-          <a:xfrm>
-            <a:off x="10332720" y="1188720"/>
-            <a:ext cx="2103120" cy="1188720"/>
-          </a:xfrm>
-          <a:prstGeom prst="roundRect">
-            <a:avLst>
-              <a:gd name="adj" fmla="val 11538"/>
-            </a:avLst>
-          </a:prstGeom>
-          <a:solidFill>
-            <a:srgbClr val="DCFCE7"/>
+            <a:endParaRPr lang="en-US" sz="1000" dirty="0"/>
+          </a:p>
+        </p:txBody>
+      </p:sp>
+      <p:sp>
+        <p:nvSpPr>
+          <p:cNvPr id="80" name="Text 78"/>
+          <p:cNvSpPr/>
+          <p:nvPr/>
+        </p:nvSpPr>
+        <p:spPr>
+          <a:xfrm>
+            <a:off x="457200" y="6510528"/>
+            <a:ext cx="3840480" cy="237744"/>
+          </a:xfrm>
+          <a:prstGeom prst="rect">
+            <a:avLst/>
+          </a:prstGeom>
+          <a:noFill/>
+          <a:ln/>
+        </p:spPr>
+        <p:txBody>
+          <a:bodyPr wrap="square" rtlCol="0" anchor="ctr"/>
+          <a:lstStyle/>
+          <a:p>
+            <a:pPr indent="0" marL="0">
+              <a:buNone/>
+            </a:pPr>
+            <a:r>
+              <a:rPr lang="en-US" sz="1000" dirty="0">
+                <a:solidFill>
+                  <a:srgbClr val="1F1235"/>
+                </a:solidFill>
+              </a:rPr>
+              <a:t>레퍼럴 재설계: 초대자 5K 고정 · 역할별 웰컴 보너스</a:t>
+            </a:r>
+            <a:endParaRPr lang="en-US" sz="1000" dirty="0"/>
+          </a:p>
+        </p:txBody>
+      </p:sp>
+      <p:sp>
+        <p:nvSpPr>
+          <p:cNvPr id="81" name="Shape 79"/>
+          <p:cNvSpPr/>
+          <p:nvPr/>
+        </p:nvSpPr>
+        <p:spPr>
+          <a:xfrm>
+            <a:off x="4434840" y="6565392"/>
+            <a:ext cx="5029200" cy="118872"/>
+          </a:xfrm>
+          <a:prstGeom prst="rect">
+            <a:avLst/>
+          </a:prstGeom>
+          <a:solidFill>
+            <a:srgbClr val="E5E7EB"/>
+          </a:solidFill>
+          <a:ln w="12700">
+            <a:solidFill>
+              <a:srgbClr val="E5E7EB"/>
+            </a:solidFill>
+            <a:prstDash val="solid"/>
+          </a:ln>
+        </p:spPr>
+      </p:sp>
+      <p:sp>
+        <p:nvSpPr>
+          <p:cNvPr id="82" name="Shape 80"/>
+          <p:cNvSpPr/>
+          <p:nvPr/>
+        </p:nvSpPr>
+        <p:spPr>
+          <a:xfrm>
+            <a:off x="4434840" y="6565392"/>
+            <a:ext cx="5029200" cy="118872"/>
+          </a:xfrm>
+          <a:prstGeom prst="rect">
+            <a:avLst/>
+          </a:prstGeom>
+          <a:solidFill>
+            <a:srgbClr val="16A34A"/>
           </a:solidFill>
           <a:ln w="12700">
             <a:solidFill>
@@ -12674,7 +14202,192 @@
       </p:sp>
       <p:sp>
         <p:nvSpPr>
-          <p:cNvPr id="81" name="Text 79"/>
+          <p:cNvPr id="83" name="Text 81"/>
+          <p:cNvSpPr/>
+          <p:nvPr/>
+        </p:nvSpPr>
+        <p:spPr>
+          <a:xfrm>
+            <a:off x="9601200" y="6510528"/>
+            <a:ext cx="640080" cy="237744"/>
+          </a:xfrm>
+          <a:prstGeom prst="rect">
+            <a:avLst/>
+          </a:prstGeom>
+          <a:noFill/>
+          <a:ln/>
+        </p:spPr>
+        <p:txBody>
+          <a:bodyPr wrap="square" rtlCol="0" anchor="ctr"/>
+          <a:lstStyle/>
+          <a:p>
+            <a:pPr algn="r" indent="0" marL="0">
+              <a:buNone/>
+            </a:pPr>
+            <a:r>
+              <a:rPr lang="en-US" sz="1000" b="1" dirty="0">
+                <a:solidFill>
+                  <a:srgbClr val="16A34A"/>
+                </a:solidFill>
+              </a:rPr>
+              <a:t>100%</a:t>
+            </a:r>
+            <a:endParaRPr lang="en-US" sz="1000" dirty="0"/>
+          </a:p>
+        </p:txBody>
+      </p:sp>
+      <p:sp>
+        <p:nvSpPr>
+          <p:cNvPr id="84" name="Text 82"/>
+          <p:cNvSpPr/>
+          <p:nvPr/>
+        </p:nvSpPr>
+        <p:spPr>
+          <a:xfrm>
+            <a:off x="457200" y="6803136"/>
+            <a:ext cx="3840480" cy="237744"/>
+          </a:xfrm>
+          <a:prstGeom prst="rect">
+            <a:avLst/>
+          </a:prstGeom>
+          <a:noFill/>
+          <a:ln/>
+        </p:spPr>
+        <p:txBody>
+          <a:bodyPr wrap="square" rtlCol="0" anchor="ctr"/>
+          <a:lstStyle/>
+          <a:p>
+            <a:pPr indent="0" marL="0">
+              <a:buNone/>
+            </a:pPr>
+            <a:r>
+              <a:rPr lang="en-US" sz="1000" dirty="0">
+                <a:solidFill>
+                  <a:srgbClr val="1F1235"/>
+                </a:solidFill>
+              </a:rPr>
+              <a:t>라이더 5km 반경 필터링 + 10분 자동오프라인 Cron</a:t>
+            </a:r>
+            <a:endParaRPr lang="en-US" sz="1000" dirty="0"/>
+          </a:p>
+        </p:txBody>
+      </p:sp>
+      <p:sp>
+        <p:nvSpPr>
+          <p:cNvPr id="85" name="Shape 83"/>
+          <p:cNvSpPr/>
+          <p:nvPr/>
+        </p:nvSpPr>
+        <p:spPr>
+          <a:xfrm>
+            <a:off x="4434840" y="6858000"/>
+            <a:ext cx="5029200" cy="118872"/>
+          </a:xfrm>
+          <a:prstGeom prst="rect">
+            <a:avLst/>
+          </a:prstGeom>
+          <a:solidFill>
+            <a:srgbClr val="E5E7EB"/>
+          </a:solidFill>
+          <a:ln w="12700">
+            <a:solidFill>
+              <a:srgbClr val="E5E7EB"/>
+            </a:solidFill>
+            <a:prstDash val="solid"/>
+          </a:ln>
+        </p:spPr>
+      </p:sp>
+      <p:sp>
+        <p:nvSpPr>
+          <p:cNvPr id="86" name="Shape 84"/>
+          <p:cNvSpPr/>
+          <p:nvPr/>
+        </p:nvSpPr>
+        <p:spPr>
+          <a:xfrm>
+            <a:off x="4434840" y="6858000"/>
+            <a:ext cx="5029200" cy="118872"/>
+          </a:xfrm>
+          <a:prstGeom prst="rect">
+            <a:avLst/>
+          </a:prstGeom>
+          <a:solidFill>
+            <a:srgbClr val="16A34A"/>
+          </a:solidFill>
+          <a:ln w="12700">
+            <a:solidFill>
+              <a:srgbClr val="16A34A"/>
+            </a:solidFill>
+            <a:prstDash val="solid"/>
+          </a:ln>
+        </p:spPr>
+      </p:sp>
+      <p:sp>
+        <p:nvSpPr>
+          <p:cNvPr id="87" name="Text 85"/>
+          <p:cNvSpPr/>
+          <p:nvPr/>
+        </p:nvSpPr>
+        <p:spPr>
+          <a:xfrm>
+            <a:off x="9601200" y="6803136"/>
+            <a:ext cx="640080" cy="237744"/>
+          </a:xfrm>
+          <a:prstGeom prst="rect">
+            <a:avLst/>
+          </a:prstGeom>
+          <a:noFill/>
+          <a:ln/>
+        </p:spPr>
+        <p:txBody>
+          <a:bodyPr wrap="square" rtlCol="0" anchor="ctr"/>
+          <a:lstStyle/>
+          <a:p>
+            <a:pPr algn="r" indent="0" marL="0">
+              <a:buNone/>
+            </a:pPr>
+            <a:r>
+              <a:rPr lang="en-US" sz="1000" b="1" dirty="0">
+                <a:solidFill>
+                  <a:srgbClr val="16A34A"/>
+                </a:solidFill>
+              </a:rPr>
+              <a:t>100%</a:t>
+            </a:r>
+            <a:endParaRPr lang="en-US" sz="1000" dirty="0"/>
+          </a:p>
+        </p:txBody>
+      </p:sp>
+      <p:sp>
+        <p:nvSpPr>
+          <p:cNvPr id="88" name="Shape 86"/>
+          <p:cNvSpPr/>
+          <p:nvPr/>
+        </p:nvSpPr>
+        <p:spPr>
+          <a:xfrm>
+            <a:off x="10332720" y="1188720"/>
+            <a:ext cx="2103120" cy="1188720"/>
+          </a:xfrm>
+          <a:prstGeom prst="roundRect">
+            <a:avLst>
+              <a:gd name="adj" fmla="val 11538"/>
+            </a:avLst>
+          </a:prstGeom>
+          <a:solidFill>
+            <a:srgbClr val="DCFCE7"/>
+          </a:solidFill>
+          <a:ln w="12700">
+            <a:solidFill>
+              <a:srgbClr val="16A34A"/>
+            </a:solidFill>
+            <a:prstDash val="solid"/>
+          </a:ln>
+        </p:spPr>
+      </p:sp>
+      <p:sp>
+        <p:nvSpPr>
+          <p:cNvPr id="89" name="Text 87"/>
           <p:cNvSpPr/>
           <p:nvPr/>
         </p:nvSpPr>
@@ -12710,7 +14423,7 @@
       </p:sp>
       <p:sp>
         <p:nvSpPr>
-          <p:cNvPr id="82" name="Text 80"/>
+          <p:cNvPr id="90" name="Text 88"/>
           <p:cNvSpPr/>
           <p:nvPr/>
         </p:nvSpPr>
@@ -12746,7 +14459,7 @@
       </p:sp>
       <p:sp>
         <p:nvSpPr>
-          <p:cNvPr id="83" name="Text 81"/>
+          <p:cNvPr id="91" name="Text 89"/>
           <p:cNvSpPr/>
           <p:nvPr/>
         </p:nvSpPr>
@@ -12782,7 +14495,7 @@
       </p:sp>
       <p:sp>
         <p:nvSpPr>
-          <p:cNvPr id="84" name="Shape 82"/>
+          <p:cNvPr id="92" name="Shape 90"/>
           <p:cNvSpPr/>
           <p:nvPr/>
         </p:nvSpPr>
@@ -12809,7 +14522,7 @@
       </p:sp>
       <p:sp>
         <p:nvSpPr>
-          <p:cNvPr id="85" name="Text 83"/>
+          <p:cNvPr id="93" name="Text 91"/>
           <p:cNvSpPr/>
           <p:nvPr/>
         </p:nvSpPr>
@@ -12845,7 +14558,7 @@
       </p:sp>
       <p:sp>
         <p:nvSpPr>
-          <p:cNvPr id="86" name="Text 84"/>
+          <p:cNvPr id="94" name="Text 92"/>
           <p:cNvSpPr/>
           <p:nvPr/>
         </p:nvSpPr>
@@ -12881,7 +14594,7 @@
       </p:sp>
       <p:sp>
         <p:nvSpPr>
-          <p:cNvPr id="87" name="Text 85"/>
+          <p:cNvPr id="95" name="Text 93"/>
           <p:cNvSpPr/>
           <p:nvPr/>
         </p:nvSpPr>
@@ -12917,7 +14630,7 @@
       </p:sp>
       <p:sp>
         <p:nvSpPr>
-          <p:cNvPr id="88" name="Shape 86"/>
+          <p:cNvPr id="96" name="Shape 94"/>
           <p:cNvSpPr/>
           <p:nvPr/>
         </p:nvSpPr>
@@ -12944,7 +14657,7 @@
       </p:sp>
       <p:sp>
         <p:nvSpPr>
-          <p:cNvPr id="89" name="Text 87"/>
+          <p:cNvPr id="97" name="Text 95"/>
           <p:cNvSpPr/>
           <p:nvPr/>
         </p:nvSpPr>
@@ -12980,7 +14693,7 @@
       </p:sp>
       <p:sp>
         <p:nvSpPr>
-          <p:cNvPr id="90" name="Text 88"/>
+          <p:cNvPr id="98" name="Text 96"/>
           <p:cNvSpPr/>
           <p:nvPr/>
         </p:nvSpPr>
@@ -13016,7 +14729,7 @@
       </p:sp>
       <p:sp>
         <p:nvSpPr>
-          <p:cNvPr id="91" name="Text 89"/>
+          <p:cNvPr id="99" name="Text 97"/>
           <p:cNvSpPr/>
           <p:nvPr/>
         </p:nvSpPr>

--- a/PICKPICK_프로젝트현황.pptx
+++ b/PICKPICK_프로젝트현황.pptx
@@ -20,9 +20,10 @@
     <p:sldId id="268" r:id="rId14"/>
     <p:sldId id="269" r:id="rId15"/>
     <p:sldId id="270" r:id="rId16"/>
+    <p:sldId id="271" r:id="rId17"/>
   </p:sldIdLst>
   <p:notesMasterIdLst>
-    <p:notesMasterId r:id="rId17"/>
+    <p:notesMasterId r:id="rId18"/>
   </p:notesMasterIdLst>
   <p:sldSz cx="12192000" cy="6858000"/>
   <p:notesSz cx="6858000" cy="12192000"/>
@@ -1086,6 +1087,94 @@
 </p:notes>
 </file>
 
+<file path=ppt/notesSlides/notesSlide16.xml><?xml version="1.0" encoding="utf-8"?>
+<p:notes xmlns:a="http://schemas.openxmlformats.org/drawingml/2006/main" xmlns:r="http://schemas.openxmlformats.org/officeDocument/2006/relationships" xmlns:p="http://schemas.openxmlformats.org/presentationml/2006/main">
+  <p:cSld>
+    <p:spTree>
+      <p:nvGrpSpPr>
+        <p:cNvPr id="1" name=""/>
+        <p:cNvGrpSpPr/>
+        <p:nvPr/>
+      </p:nvGrpSpPr>
+      <p:grpSpPr>
+        <a:xfrm>
+          <a:off x="0" y="0"/>
+          <a:ext cx="0" cy="0"/>
+          <a:chOff x="0" y="0"/>
+          <a:chExt cx="0" cy="0"/>
+        </a:xfrm>
+      </p:grpSpPr>
+      <p:sp>
+        <p:nvSpPr>
+          <p:cNvPr id="2" name="Slide Image Placeholder 1"/>
+          <p:cNvSpPr>
+            <a:spLocks noGrp="1" noRot="1" noChangeAspect="1"/>
+          </p:cNvSpPr>
+          <p:nvPr>
+            <p:ph type="sldImg"/>
+          </p:nvPr>
+        </p:nvSpPr>
+        <p:spPr/>
+      </p:sp>
+      <p:sp>
+        <p:nvSpPr>
+          <p:cNvPr id="3" name="Notes Placeholder 2"/>
+          <p:cNvSpPr>
+            <a:spLocks noGrp="1"/>
+          </p:cNvSpPr>
+          <p:nvPr>
+            <p:ph type="body" idx="1"/>
+          </p:nvPr>
+        </p:nvSpPr>
+        <p:spPr/>
+        <p:txBody>
+          <a:bodyPr/>
+          <a:lstStyle/>
+          <a:p>
+            <a:r>
+              <a:rPr lang="en-US" dirty="0"/>
+              <a:t/>
+            </a:r>
+            <a:endParaRPr lang="en-US" dirty="0"/>
+          </a:p>
+        </p:txBody>
+      </p:sp>
+      <p:sp>
+        <p:nvSpPr>
+          <p:cNvPr id="4" name="Slide Number Placeholder 3"/>
+          <p:cNvSpPr>
+            <a:spLocks noGrp="1"/>
+          </p:cNvSpPr>
+          <p:nvPr>
+            <p:ph type="sldNum" sz="quarter" idx="10"/>
+          </p:nvPr>
+        </p:nvSpPr>
+        <p:spPr/>
+        <p:txBody>
+          <a:bodyPr/>
+          <a:lstStyle/>
+          <a:p>
+            <a:fld id="{F7021451-1387-4CA6-816F-3879F97B5CBC}" type="slidenum">
+              <a:rPr lang="en-US"/>
+              <a:t>16</a:t>
+            </a:fld>
+            <a:endParaRPr lang="en-US"/>
+          </a:p>
+        </p:txBody>
+      </p:sp>
+    </p:spTree>
+    <p:extLst>
+      <p:ext uri="{BB962C8B-B14F-4D97-AF65-F5344CB8AC3E}">
+        <p14:creationId xmlns:p14="http://schemas.microsoft.com/office/powerpoint/2010/main" val="1024086991"/>
+      </p:ext>
+    </p:extLst>
+  </p:cSld>
+  <p:clrMapOvr>
+    <a:masterClrMapping/>
+  </p:clrMapOvr>
+</p:notes>
+</file>
+
 <file path=ppt/notesSlides/notesSlide2.xml><?xml version="1.0" encoding="utf-8"?>
 <p:notes xmlns:a="http://schemas.openxmlformats.org/drawingml/2006/main" xmlns:r="http://schemas.openxmlformats.org/officeDocument/2006/relationships" xmlns:p="http://schemas.openxmlformats.org/presentationml/2006/main">
   <p:cSld>
@@ -2340,7 +2429,7 @@
                   <a:srgbClr val="C4B5FD"/>
                 </a:solidFill>
               </a:rPr>
-              <a:t>2026년 4월 16일  |  레퍼럴 재설계 · 리뷰보상 연동 · 라이더 5km 필터 · 자동오프라인 Cron</a:t>
+              <a:t>2026년 4월 17일  |  주문 취소 감지 개선 · 라이더 상태 흐름 수정 · 알림 즉시 중단</a:t>
             </a:r>
             <a:endParaRPr lang="en-US" sz="1400" dirty="0"/>
           </a:p>
@@ -6544,60 +6633,26 @@
       </p:grpSpPr>
       <p:sp>
         <p:nvSpPr>
-          <p:cNvPr id="2" name="Text 0"/>
-          <p:cNvSpPr/>
-          <p:nvPr/>
-        </p:nvSpPr>
-        <p:spPr>
-          <a:xfrm>
-            <a:off x="365760" y="228600"/>
-            <a:ext cx="12070080" cy="594360"/>
-          </a:xfrm>
-          <a:prstGeom prst="rect">
-            <a:avLst/>
-          </a:prstGeom>
-          <a:noFill/>
-          <a:ln/>
-        </p:spPr>
-        <p:txBody>
-          <a:bodyPr wrap="square" rtlCol="0" anchor="ctr"/>
-          <a:lstStyle/>
-          <a:p>
-            <a:pPr indent="0" marL="0">
-              <a:buNone/>
-            </a:pPr>
-            <a:r>
-              <a:rPr lang="en-US" sz="2400" b="1" dirty="0">
-                <a:solidFill>
-                  <a:srgbClr val="4C1D95"/>
-                </a:solidFill>
-              </a:rPr>
-              <a:t>✅  완료된 기능 전체 목록 (4/16 최신)</a:t>
-            </a:r>
-            <a:endParaRPr lang="en-US" sz="2400" dirty="0"/>
-          </a:p>
-        </p:txBody>
-      </p:sp>
-      <p:sp>
-        <p:nvSpPr>
-          <p:cNvPr id="3" name="Shape 1"/>
-          <p:cNvSpPr/>
-          <p:nvPr/>
-        </p:nvSpPr>
-        <p:spPr>
-          <a:xfrm>
-            <a:off x="365760" y="804672"/>
-            <a:ext cx="3840480" cy="45720"/>
-          </a:xfrm>
-          <a:prstGeom prst="rect">
-            <a:avLst/>
-          </a:prstGeom>
-          <a:solidFill>
-            <a:srgbClr val="16A34A"/>
+          <p:cNvPr id="2" name="Shape 0"/>
+          <p:cNvSpPr/>
+          <p:nvPr/>
+        </p:nvSpPr>
+        <p:spPr>
+          <a:xfrm>
+            <a:off x="365760" y="164592"/>
+            <a:ext cx="2651760" cy="502920"/>
+          </a:xfrm>
+          <a:prstGeom prst="roundRect">
+            <a:avLst>
+              <a:gd name="adj" fmla="val 18182"/>
+            </a:avLst>
+          </a:prstGeom>
+          <a:solidFill>
+            <a:srgbClr val="F0FDFA"/>
           </a:solidFill>
           <a:ln w="12700">
             <a:solidFill>
-              <a:srgbClr val="16A34A"/>
+              <a:srgbClr val="0D9488"/>
             </a:solidFill>
             <a:prstDash val="solid"/>
           </a:ln>
@@ -6605,26 +6660,96 @@
       </p:sp>
       <p:sp>
         <p:nvSpPr>
-          <p:cNvPr id="4" name="Shape 2"/>
-          <p:cNvSpPr/>
-          <p:nvPr/>
-        </p:nvSpPr>
-        <p:spPr>
-          <a:xfrm>
-            <a:off x="228600" y="960120"/>
-            <a:ext cx="3749040" cy="2423160"/>
-          </a:xfrm>
-          <a:prstGeom prst="roundRect">
-            <a:avLst>
-              <a:gd name="adj" fmla="val 5660"/>
-            </a:avLst>
-          </a:prstGeom>
-          <a:solidFill>
-            <a:srgbClr val="EDE9FE"/>
+          <p:cNvPr id="3" name="Text 1"/>
+          <p:cNvSpPr/>
+          <p:nvPr/>
+        </p:nvSpPr>
+        <p:spPr>
+          <a:xfrm>
+            <a:off x="365760" y="164592"/>
+            <a:ext cx="2651760" cy="502920"/>
+          </a:xfrm>
+          <a:prstGeom prst="rect">
+            <a:avLst/>
+          </a:prstGeom>
+          <a:noFill/>
+          <a:ln/>
+        </p:spPr>
+        <p:txBody>
+          <a:bodyPr wrap="square" rtlCol="0" anchor="ctr"/>
+          <a:lstStyle/>
+          <a:p>
+            <a:pPr algn="ctr" indent="0" marL="0">
+              <a:buNone/>
+            </a:pPr>
+            <a:r>
+              <a:rPr lang="en-US" sz="1100" b="1" dirty="0">
+                <a:solidFill>
+                  <a:srgbClr val="0D9488"/>
+                </a:solidFill>
+              </a:rPr>
+              <a:t>📅  2026. 04. 17 (Day 12)</a:t>
+            </a:r>
+            <a:endParaRPr lang="en-US" sz="1100" dirty="0"/>
+          </a:p>
+        </p:txBody>
+      </p:sp>
+      <p:sp>
+        <p:nvSpPr>
+          <p:cNvPr id="4" name="Text 2"/>
+          <p:cNvSpPr/>
+          <p:nvPr/>
+        </p:nvSpPr>
+        <p:spPr>
+          <a:xfrm>
+            <a:off x="3200400" y="201168"/>
+            <a:ext cx="9235440" cy="502920"/>
+          </a:xfrm>
+          <a:prstGeom prst="rect">
+            <a:avLst/>
+          </a:prstGeom>
+          <a:noFill/>
+          <a:ln/>
+        </p:spPr>
+        <p:txBody>
+          <a:bodyPr wrap="square" rtlCol="0" anchor="ctr"/>
+          <a:lstStyle/>
+          <a:p>
+            <a:pPr indent="0" marL="0">
+              <a:buNone/>
+            </a:pPr>
+            <a:r>
+              <a:rPr lang="en-US" sz="1700" b="1" dirty="0">
+                <a:solidFill>
+                  <a:srgbClr val="4C1D95"/>
+                </a:solidFill>
+              </a:rPr>
+              <a:t>🔧  주문 취소 즉시 반영 · calling_rider 상태 흐름 재설계 · RLS 정책 추가</a:t>
+            </a:r>
+            <a:endParaRPr lang="en-US" sz="1700" dirty="0"/>
+          </a:p>
+        </p:txBody>
+      </p:sp>
+      <p:sp>
+        <p:nvSpPr>
+          <p:cNvPr id="5" name="Shape 3"/>
+          <p:cNvSpPr/>
+          <p:nvPr/>
+        </p:nvSpPr>
+        <p:spPr>
+          <a:xfrm>
+            <a:off x="365760" y="713232"/>
+            <a:ext cx="11704320" cy="36576"/>
+          </a:xfrm>
+          <a:prstGeom prst="rect">
+            <a:avLst/>
+          </a:prstGeom>
+          <a:solidFill>
+            <a:srgbClr val="E9D5FF"/>
           </a:solidFill>
           <a:ln w="12700">
             <a:solidFill>
-              <a:srgbClr val="6B21A8"/>
+              <a:srgbClr val="E9D5FF"/>
             </a:solidFill>
             <a:prstDash val="solid"/>
           </a:ln>
@@ -6632,26 +6757,26 @@
       </p:sp>
       <p:sp>
         <p:nvSpPr>
-          <p:cNvPr id="5" name="Shape 3"/>
-          <p:cNvSpPr/>
-          <p:nvPr/>
-        </p:nvSpPr>
-        <p:spPr>
-          <a:xfrm>
-            <a:off x="338328" y="1069848"/>
-            <a:ext cx="3529584" cy="384048"/>
+          <p:cNvPr id="6" name="Shape 4"/>
+          <p:cNvSpPr/>
+          <p:nvPr/>
+        </p:nvSpPr>
+        <p:spPr>
+          <a:xfrm>
+            <a:off x="228600" y="914400"/>
+            <a:ext cx="3749040" cy="2148840"/>
           </a:xfrm>
           <a:prstGeom prst="roundRect">
             <a:avLst>
-              <a:gd name="adj" fmla="val 19048"/>
+              <a:gd name="adj" fmla="val 6383"/>
             </a:avLst>
           </a:prstGeom>
           <a:solidFill>
-            <a:srgbClr val="6B21A8"/>
+            <a:srgbClr val="F0FDFA"/>
           </a:solidFill>
           <a:ln w="12700">
             <a:solidFill>
-              <a:srgbClr val="6B21A8"/>
+              <a:srgbClr val="99F6E4"/>
             </a:solidFill>
             <a:prstDash val="solid"/>
           </a:ln>
@@ -6659,242 +6784,26 @@
       </p:sp>
       <p:sp>
         <p:nvSpPr>
-          <p:cNvPr id="6" name="Text 4"/>
-          <p:cNvSpPr/>
-          <p:nvPr/>
-        </p:nvSpPr>
-        <p:spPr>
-          <a:xfrm>
-            <a:off x="338328" y="1069848"/>
-            <a:ext cx="3529584" cy="384048"/>
-          </a:xfrm>
-          <a:prstGeom prst="rect">
-            <a:avLst/>
-          </a:prstGeom>
-          <a:noFill/>
-          <a:ln/>
-        </p:spPr>
-        <p:txBody>
-          <a:bodyPr wrap="square" rtlCol="0" anchor="ctr"/>
-          <a:lstStyle/>
-          <a:p>
-            <a:pPr algn="ctr" indent="0" marL="0">
-              <a:buNone/>
-            </a:pPr>
-            <a:r>
-              <a:rPr lang="en-US" sz="1200" b="1" dirty="0">
-                <a:solidFill>
-                  <a:srgbClr val="FFFFFF"/>
-                </a:solidFill>
-              </a:rPr>
-              <a:t>🔐 인증 / 사용자 관리</a:t>
-            </a:r>
-            <a:endParaRPr lang="en-US" sz="1200" dirty="0"/>
-          </a:p>
-        </p:txBody>
-      </p:sp>
-      <p:sp>
-        <p:nvSpPr>
-          <p:cNvPr id="7" name="Text 5"/>
-          <p:cNvSpPr/>
-          <p:nvPr/>
-        </p:nvSpPr>
-        <p:spPr>
-          <a:xfrm>
-            <a:off x="393192" y="1554480"/>
-            <a:ext cx="3401568" cy="338328"/>
-          </a:xfrm>
-          <a:prstGeom prst="rect">
-            <a:avLst/>
-          </a:prstGeom>
-          <a:noFill/>
-          <a:ln/>
-        </p:spPr>
-        <p:txBody>
-          <a:bodyPr wrap="square" rtlCol="0" anchor="ctr"/>
-          <a:lstStyle/>
-          <a:p>
-            <a:pPr indent="0" marL="0">
-              <a:buNone/>
-            </a:pPr>
-            <a:r>
-              <a:rPr lang="en-US" sz="1000" dirty="0">
-                <a:solidFill>
-                  <a:srgbClr val="1F1235"/>
-                </a:solidFill>
-              </a:rPr>
-              <a:t>✓  이메일 로그인/회원가입 + 지갑 자동생성</a:t>
-            </a:r>
-            <a:endParaRPr lang="en-US" sz="1000" dirty="0"/>
-          </a:p>
-        </p:txBody>
-      </p:sp>
-      <p:sp>
-        <p:nvSpPr>
-          <p:cNvPr id="8" name="Text 6"/>
-          <p:cNvSpPr/>
-          <p:nvPr/>
-        </p:nvSpPr>
-        <p:spPr>
-          <a:xfrm>
-            <a:off x="393192" y="1901952"/>
-            <a:ext cx="3401568" cy="338328"/>
-          </a:xfrm>
-          <a:prstGeom prst="rect">
-            <a:avLst/>
-          </a:prstGeom>
-          <a:noFill/>
-          <a:ln/>
-        </p:spPr>
-        <p:txBody>
-          <a:bodyPr wrap="square" rtlCol="0" anchor="ctr"/>
-          <a:lstStyle/>
-          <a:p>
-            <a:pPr indent="0" marL="0">
-              <a:buNone/>
-            </a:pPr>
-            <a:r>
-              <a:rPr lang="en-US" sz="1000" dirty="0">
-                <a:solidFill>
-                  <a:srgbClr val="1F1235"/>
-                </a:solidFill>
-              </a:rPr>
-              <a:t>✓  카카오 소셜 로그인 (비즈니스 인증 후 재추가)</a:t>
-            </a:r>
-            <a:endParaRPr lang="en-US" sz="1000" dirty="0"/>
-          </a:p>
-        </p:txBody>
-      </p:sp>
-      <p:sp>
-        <p:nvSpPr>
-          <p:cNvPr id="9" name="Text 7"/>
-          <p:cNvSpPr/>
-          <p:nvPr/>
-        </p:nvSpPr>
-        <p:spPr>
-          <a:xfrm>
-            <a:off x="393192" y="2249424"/>
-            <a:ext cx="3401568" cy="338328"/>
-          </a:xfrm>
-          <a:prstGeom prst="rect">
-            <a:avLst/>
-          </a:prstGeom>
-          <a:noFill/>
-          <a:ln/>
-        </p:spPr>
-        <p:txBody>
-          <a:bodyPr wrap="square" rtlCol="0" anchor="ctr"/>
-          <a:lstStyle/>
-          <a:p>
-            <a:pPr indent="0" marL="0">
-              <a:buNone/>
-            </a:pPr>
-            <a:r>
-              <a:rPr lang="en-US" sz="1000" dirty="0">
-                <a:solidFill>
-                  <a:srgbClr val="1F1235"/>
-                </a:solidFill>
-              </a:rPr>
-              <a:t>✓  RBAC 미들웨어 (user/owner/rider/admin)</a:t>
-            </a:r>
-            <a:endParaRPr lang="en-US" sz="1000" dirty="0"/>
-          </a:p>
-        </p:txBody>
-      </p:sp>
-      <p:sp>
-        <p:nvSpPr>
-          <p:cNvPr id="10" name="Text 8"/>
-          <p:cNvSpPr/>
-          <p:nvPr/>
-        </p:nvSpPr>
-        <p:spPr>
-          <a:xfrm>
-            <a:off x="393192" y="2596896"/>
-            <a:ext cx="3401568" cy="338328"/>
-          </a:xfrm>
-          <a:prstGeom prst="rect">
-            <a:avLst/>
-          </a:prstGeom>
-          <a:noFill/>
-          <a:ln/>
-        </p:spPr>
-        <p:txBody>
-          <a:bodyPr wrap="square" rtlCol="0" anchor="ctr"/>
-          <a:lstStyle/>
-          <a:p>
-            <a:pPr indent="0" marL="0">
-              <a:buNone/>
-            </a:pPr>
-            <a:r>
-              <a:rPr lang="en-US" sz="1000" dirty="0">
-                <a:solidFill>
-                  <a:srgbClr val="1F1235"/>
-                </a:solidFill>
-              </a:rPr>
-              <a:t>✓  비밀번호 찾기·재설정 + 검색 히스토리</a:t>
-            </a:r>
-            <a:endParaRPr lang="en-US" sz="1000" dirty="0"/>
-          </a:p>
-        </p:txBody>
-      </p:sp>
-      <p:sp>
-        <p:nvSpPr>
-          <p:cNvPr id="11" name="Text 9"/>
-          <p:cNvSpPr/>
-          <p:nvPr/>
-        </p:nvSpPr>
-        <p:spPr>
-          <a:xfrm>
-            <a:off x="393192" y="2944368"/>
-            <a:ext cx="3401568" cy="338328"/>
-          </a:xfrm>
-          <a:prstGeom prst="rect">
-            <a:avLst/>
-          </a:prstGeom>
-          <a:noFill/>
-          <a:ln/>
-        </p:spPr>
-        <p:txBody>
-          <a:bodyPr wrap="square" rtlCol="0" anchor="ctr"/>
-          <a:lstStyle/>
-          <a:p>
-            <a:pPr indent="0" marL="0">
-              <a:buNone/>
-            </a:pPr>
-            <a:r>
-              <a:rPr lang="en-US" sz="1000" dirty="0">
-                <a:solidFill>
-                  <a:srgbClr val="1F1235"/>
-                </a:solidFill>
-              </a:rPr>
-              <a:t>✓  프로필 수정 + 다중 배달 주소 + 레퍼럴 재설계</a:t>
-            </a:r>
-            <a:endParaRPr lang="en-US" sz="1000" dirty="0"/>
-          </a:p>
-        </p:txBody>
-      </p:sp>
-      <p:sp>
-        <p:nvSpPr>
-          <p:cNvPr id="12" name="Shape 10"/>
-          <p:cNvSpPr/>
-          <p:nvPr/>
-        </p:nvSpPr>
-        <p:spPr>
-          <a:xfrm>
-            <a:off x="4160520" y="960120"/>
-            <a:ext cx="3749040" cy="2423160"/>
+          <p:cNvPr id="7" name="Shape 5"/>
+          <p:cNvSpPr/>
+          <p:nvPr/>
+        </p:nvSpPr>
+        <p:spPr>
+          <a:xfrm>
+            <a:off x="393192" y="1097280"/>
+            <a:ext cx="530352" cy="530352"/>
           </a:xfrm>
           <a:prstGeom prst="roundRect">
             <a:avLst>
-              <a:gd name="adj" fmla="val 5660"/>
+              <a:gd name="adj" fmla="val 17241"/>
             </a:avLst>
           </a:prstGeom>
           <a:solidFill>
-            <a:srgbClr val="E0F2FE"/>
+            <a:srgbClr val="FFFFFF"/>
           </a:solidFill>
           <a:ln w="12700">
             <a:solidFill>
-              <a:srgbClr val="0369A1"/>
+              <a:srgbClr val="99F6E4"/>
             </a:solidFill>
             <a:prstDash val="solid"/>
           </a:ln>
@@ -6902,26 +6811,176 @@
       </p:sp>
       <p:sp>
         <p:nvSpPr>
-          <p:cNvPr id="13" name="Shape 11"/>
-          <p:cNvSpPr/>
-          <p:nvPr/>
-        </p:nvSpPr>
-        <p:spPr>
-          <a:xfrm>
-            <a:off x="4270248" y="1069848"/>
-            <a:ext cx="3529584" cy="384048"/>
+          <p:cNvPr id="8" name="Text 6"/>
+          <p:cNvSpPr/>
+          <p:nvPr/>
+        </p:nvSpPr>
+        <p:spPr>
+          <a:xfrm>
+            <a:off x="393192" y="1078992"/>
+            <a:ext cx="548640" cy="548640"/>
+          </a:xfrm>
+          <a:prstGeom prst="rect">
+            <a:avLst/>
+          </a:prstGeom>
+          <a:noFill/>
+          <a:ln/>
+        </p:spPr>
+        <p:txBody>
+          <a:bodyPr wrap="square" rtlCol="0" anchor="ctr"/>
+          <a:lstStyle/>
+          <a:p>
+            <a:pPr algn="ctr" indent="0" marL="0">
+              <a:buNone/>
+            </a:pPr>
+            <a:r>
+              <a:rPr lang="en-US" sz="1800" dirty="0">
+                <a:solidFill>
+                  <a:srgbClr val="000000"/>
+                </a:solidFill>
+              </a:rPr>
+              <a:t>🚫</a:t>
+            </a:r>
+            <a:endParaRPr lang="en-US" sz="1800" dirty="0"/>
+          </a:p>
+        </p:txBody>
+      </p:sp>
+      <p:sp>
+        <p:nvSpPr>
+          <p:cNvPr id="9" name="Text 7"/>
+          <p:cNvSpPr/>
+          <p:nvPr/>
+        </p:nvSpPr>
+        <p:spPr>
+          <a:xfrm>
+            <a:off x="1033272" y="1115568"/>
+            <a:ext cx="2743200" cy="365760"/>
+          </a:xfrm>
+          <a:prstGeom prst="rect">
+            <a:avLst/>
+          </a:prstGeom>
+          <a:noFill/>
+          <a:ln/>
+        </p:spPr>
+        <p:txBody>
+          <a:bodyPr wrap="square" rtlCol="0" anchor="ctr"/>
+          <a:lstStyle/>
+          <a:p>
+            <a:pPr indent="0" marL="0">
+              <a:buNone/>
+            </a:pPr>
+            <a:r>
+              <a:rPr lang="en-US" sz="1200" b="1" dirty="0">
+                <a:solidFill>
+                  <a:srgbClr val="0D9488"/>
+                </a:solidFill>
+              </a:rPr>
+              <a:t>주문현황보기 홈이동 버그 수정</a:t>
+            </a:r>
+            <a:endParaRPr lang="en-US" sz="1200" dirty="0"/>
+          </a:p>
+        </p:txBody>
+      </p:sp>
+      <p:sp>
+        <p:nvSpPr>
+          <p:cNvPr id="10" name="Text 8"/>
+          <p:cNvSpPr/>
+          <p:nvPr/>
+        </p:nvSpPr>
+        <p:spPr>
+          <a:xfrm>
+            <a:off x="429768" y="1627632"/>
+            <a:ext cx="3337560" cy="1298448"/>
+          </a:xfrm>
+          <a:prstGeom prst="rect">
+            <a:avLst/>
+          </a:prstGeom>
+          <a:noFill/>
+          <a:ln/>
+        </p:spPr>
+        <p:txBody>
+          <a:bodyPr wrap="square" rtlCol="0" anchor="ctr"/>
+          <a:lstStyle/>
+          <a:p>
+            <a:pPr indent="0" marL="0">
+              <a:buNone/>
+            </a:pPr>
+            <a:r>
+              <a:rPr lang="en-US" sz="1000" dirty="0">
+                <a:solidFill>
+                  <a:srgbClr val="1F1235"/>
+                </a:solidFill>
+              </a:rPr>
+              <a:t>clearLastOrder() onClick 제거</a:t>
+            </a:r>
+            <a:endParaRPr lang="en-US" sz="1000" dirty="0"/>
+          </a:p>
+          <a:p>
+            <a:pPr indent="0" marL="0">
+              <a:buNone/>
+            </a:pPr>
+            <a:r>
+              <a:rPr lang="en-US" sz="1000" dirty="0">
+                <a:solidFill>
+                  <a:srgbClr val="1F1235"/>
+                </a:solidFill>
+              </a:rPr>
+              <a:t>취소 클릭 시 useEffect(!lastOrder)</a:t>
+            </a:r>
+            <a:endParaRPr lang="en-US" sz="1000" dirty="0"/>
+          </a:p>
+          <a:p>
+            <a:pPr indent="0" marL="0">
+              <a:buNone/>
+            </a:pPr>
+            <a:r>
+              <a:rPr lang="en-US" sz="1000" dirty="0">
+                <a:solidFill>
+                  <a:srgbClr val="1F1235"/>
+                </a:solidFill>
+              </a:rPr>
+              <a:t>→ /home 강제 이동 원인 차단</a:t>
+            </a:r>
+            <a:endParaRPr lang="en-US" sz="1000" dirty="0"/>
+          </a:p>
+          <a:p>
+            <a:pPr indent="0" marL="0">
+              <a:buNone/>
+            </a:pPr>
+            <a:r>
+              <a:rPr lang="en-US" sz="1000" dirty="0">
+                <a:solidFill>
+                  <a:srgbClr val="1F1235"/>
+                </a:solidFill>
+              </a:rPr>
+              <a:t>주문 현황 페이지 정상 이동</a:t>
+            </a:r>
+            <a:endParaRPr lang="en-US" sz="1000" dirty="0"/>
+          </a:p>
+        </p:txBody>
+      </p:sp>
+      <p:sp>
+        <p:nvSpPr>
+          <p:cNvPr id="11" name="Shape 9"/>
+          <p:cNvSpPr/>
+          <p:nvPr/>
+        </p:nvSpPr>
+        <p:spPr>
+          <a:xfrm>
+            <a:off x="4160520" y="914400"/>
+            <a:ext cx="3749040" cy="2148840"/>
           </a:xfrm>
           <a:prstGeom prst="roundRect">
             <a:avLst>
-              <a:gd name="adj" fmla="val 19048"/>
+              <a:gd name="adj" fmla="val 6383"/>
             </a:avLst>
           </a:prstGeom>
           <a:solidFill>
-            <a:srgbClr val="0369A1"/>
+            <a:srgbClr val="F0FDFA"/>
           </a:solidFill>
           <a:ln w="12700">
             <a:solidFill>
-              <a:srgbClr val="0369A1"/>
+              <a:srgbClr val="99F6E4"/>
             </a:solidFill>
             <a:prstDash val="solid"/>
           </a:ln>
@@ -6929,242 +6988,26 @@
       </p:sp>
       <p:sp>
         <p:nvSpPr>
-          <p:cNvPr id="14" name="Text 12"/>
-          <p:cNvSpPr/>
-          <p:nvPr/>
-        </p:nvSpPr>
-        <p:spPr>
-          <a:xfrm>
-            <a:off x="4270248" y="1069848"/>
-            <a:ext cx="3529584" cy="384048"/>
-          </a:xfrm>
-          <a:prstGeom prst="rect">
-            <a:avLst/>
-          </a:prstGeom>
-          <a:noFill/>
-          <a:ln/>
-        </p:spPr>
-        <p:txBody>
-          <a:bodyPr wrap="square" rtlCol="0" anchor="ctr"/>
-          <a:lstStyle/>
-          <a:p>
-            <a:pPr algn="ctr" indent="0" marL="0">
-              <a:buNone/>
-            </a:pPr>
-            <a:r>
-              <a:rPr lang="en-US" sz="1200" b="1" dirty="0">
-                <a:solidFill>
-                  <a:srgbClr val="FFFFFF"/>
-                </a:solidFill>
-              </a:rPr>
-              <a:t>🏠 사용자 탭 (4개) + UX</a:t>
-            </a:r>
-            <a:endParaRPr lang="en-US" sz="1200" dirty="0"/>
-          </a:p>
-        </p:txBody>
-      </p:sp>
-      <p:sp>
-        <p:nvSpPr>
-          <p:cNvPr id="15" name="Text 13"/>
-          <p:cNvSpPr/>
-          <p:nvPr/>
-        </p:nvSpPr>
-        <p:spPr>
-          <a:xfrm>
-            <a:off x="4325112" y="1554480"/>
-            <a:ext cx="3401568" cy="338328"/>
-          </a:xfrm>
-          <a:prstGeom prst="rect">
-            <a:avLst/>
-          </a:prstGeom>
-          <a:noFill/>
-          <a:ln/>
-        </p:spPr>
-        <p:txBody>
-          <a:bodyPr wrap="square" rtlCol="0" anchor="ctr"/>
-          <a:lstStyle/>
-          <a:p>
-            <a:pPr indent="0" marL="0">
-              <a:buNone/>
-            </a:pPr>
-            <a:r>
-              <a:rPr lang="en-US" sz="1000" dirty="0">
-                <a:solidFill>
-                  <a:srgbClr val="1F1235"/>
-                </a:solidFill>
-              </a:rPr>
-              <a:t>✓  홈: 카테고리·검색(GIN)·인기가게·광고</a:t>
-            </a:r>
-            <a:endParaRPr lang="en-US" sz="1000" dirty="0"/>
-          </a:p>
-        </p:txBody>
-      </p:sp>
-      <p:sp>
-        <p:nvSpPr>
-          <p:cNvPr id="16" name="Text 14"/>
-          <p:cNvSpPr/>
-          <p:nvPr/>
-        </p:nvSpPr>
-        <p:spPr>
-          <a:xfrm>
-            <a:off x="4325112" y="1901952"/>
-            <a:ext cx="3401568" cy="338328"/>
-          </a:xfrm>
-          <a:prstGeom prst="rect">
-            <a:avLst/>
-          </a:prstGeom>
-          <a:noFill/>
-          <a:ln/>
-        </p:spPr>
-        <p:txBody>
-          <a:bodyPr wrap="square" rtlCol="0" anchor="ctr"/>
-          <a:lstStyle/>
-          <a:p>
-            <a:pPr indent="0" marL="0">
-              <a:buNone/>
-            </a:pPr>
-            <a:r>
-              <a:rPr lang="en-US" sz="1000" dirty="0">
-                <a:solidFill>
-                  <a:srgbClr val="1F1235"/>
-                </a:solidFill>
-              </a:rPr>
-              <a:t>✓  지갑: 퍼플 재디자인 + Pi UI + 출석 Tap-to-Earn</a:t>
-            </a:r>
-            <a:endParaRPr lang="en-US" sz="1000" dirty="0"/>
-          </a:p>
-        </p:txBody>
-      </p:sp>
-      <p:sp>
-        <p:nvSpPr>
-          <p:cNvPr id="17" name="Text 15"/>
-          <p:cNvSpPr/>
-          <p:nvPr/>
-        </p:nvSpPr>
-        <p:spPr>
-          <a:xfrm>
-            <a:off x="4325112" y="2249424"/>
-            <a:ext cx="3401568" cy="338328"/>
-          </a:xfrm>
-          <a:prstGeom prst="rect">
-            <a:avLst/>
-          </a:prstGeom>
-          <a:noFill/>
-          <a:ln/>
-        </p:spPr>
-        <p:txBody>
-          <a:bodyPr wrap="square" rtlCol="0" anchor="ctr"/>
-          <a:lstStyle/>
-          <a:p>
-            <a:pPr indent="0" marL="0">
-              <a:buNone/>
-            </a:pPr>
-            <a:r>
-              <a:rPr lang="en-US" sz="1000" dirty="0">
-                <a:solidFill>
-                  <a:srgbClr val="1F1235"/>
-                </a:solidFill>
-              </a:rPr>
-              <a:t>✓  PICK주문: Realtime 추적 + 상세 + 재주문</a:t>
-            </a:r>
-            <a:endParaRPr lang="en-US" sz="1000" dirty="0"/>
-          </a:p>
-        </p:txBody>
-      </p:sp>
-      <p:sp>
-        <p:nvSpPr>
-          <p:cNvPr id="18" name="Text 16"/>
-          <p:cNvSpPr/>
-          <p:nvPr/>
-        </p:nvSpPr>
-        <p:spPr>
-          <a:xfrm>
-            <a:off x="4325112" y="2596896"/>
-            <a:ext cx="3401568" cy="338328"/>
-          </a:xfrm>
-          <a:prstGeom prst="rect">
-            <a:avLst/>
-          </a:prstGeom>
-          <a:noFill/>
-          <a:ln/>
-        </p:spPr>
-        <p:txBody>
-          <a:bodyPr wrap="square" rtlCol="0" anchor="ctr"/>
-          <a:lstStyle/>
-          <a:p>
-            <a:pPr indent="0" marL="0">
-              <a:buNone/>
-            </a:pPr>
-            <a:r>
-              <a:rPr lang="en-US" sz="1000" dirty="0">
-                <a:solidFill>
-                  <a:srgbClr val="1F1235"/>
-                </a:solidFill>
-              </a:rPr>
-              <a:t>✓  알림 드로어 + 딥링크 + 자동 트리거</a:t>
-            </a:r>
-            <a:endParaRPr lang="en-US" sz="1000" dirty="0"/>
-          </a:p>
-        </p:txBody>
-      </p:sp>
-      <p:sp>
-        <p:nvSpPr>
-          <p:cNvPr id="19" name="Text 17"/>
-          <p:cNvSpPr/>
-          <p:nvPr/>
-        </p:nvSpPr>
-        <p:spPr>
-          <a:xfrm>
-            <a:off x="4325112" y="2944368"/>
-            <a:ext cx="3401568" cy="338328"/>
-          </a:xfrm>
-          <a:prstGeom prst="rect">
-            <a:avLst/>
-          </a:prstGeom>
-          <a:noFill/>
-          <a:ln/>
-        </p:spPr>
-        <p:txBody>
-          <a:bodyPr wrap="square" rtlCol="0" anchor="ctr"/>
-          <a:lstStyle/>
-          <a:p>
-            <a:pPr indent="0" marL="0">
-              <a:buNone/>
-            </a:pPr>
-            <a:r>
-              <a:rPr lang="en-US" sz="1000" dirty="0">
-                <a:solidFill>
-                  <a:srgbClr val="1F1235"/>
-                </a:solidFill>
-              </a:rPr>
-              <a:t>✓  MyPICK 초대 3버튼 (사용자·사장님·라이더)</a:t>
-            </a:r>
-            <a:endParaRPr lang="en-US" sz="1000" dirty="0"/>
-          </a:p>
-        </p:txBody>
-      </p:sp>
-      <p:sp>
-        <p:nvSpPr>
-          <p:cNvPr id="20" name="Shape 18"/>
-          <p:cNvSpPr/>
-          <p:nvPr/>
-        </p:nvSpPr>
-        <p:spPr>
-          <a:xfrm>
-            <a:off x="8092440" y="960120"/>
-            <a:ext cx="3749040" cy="2423160"/>
+          <p:cNvPr id="12" name="Shape 10"/>
+          <p:cNvSpPr/>
+          <p:nvPr/>
+        </p:nvSpPr>
+        <p:spPr>
+          <a:xfrm>
+            <a:off x="4325112" y="1097280"/>
+            <a:ext cx="530352" cy="530352"/>
           </a:xfrm>
           <a:prstGeom prst="roundRect">
             <a:avLst>
-              <a:gd name="adj" fmla="val 5660"/>
+              <a:gd name="adj" fmla="val 17241"/>
             </a:avLst>
           </a:prstGeom>
           <a:solidFill>
-            <a:srgbClr val="DCFCE7"/>
+            <a:srgbClr val="FFFFFF"/>
           </a:solidFill>
           <a:ln w="12700">
             <a:solidFill>
-              <a:srgbClr val="16A34A"/>
+              <a:srgbClr val="99F6E4"/>
             </a:solidFill>
             <a:prstDash val="solid"/>
           </a:ln>
@@ -7172,26 +7015,176 @@
       </p:sp>
       <p:sp>
         <p:nvSpPr>
-          <p:cNvPr id="21" name="Shape 19"/>
-          <p:cNvSpPr/>
-          <p:nvPr/>
-        </p:nvSpPr>
-        <p:spPr>
-          <a:xfrm>
-            <a:off x="8202168" y="1069848"/>
-            <a:ext cx="3529584" cy="384048"/>
+          <p:cNvPr id="13" name="Text 11"/>
+          <p:cNvSpPr/>
+          <p:nvPr/>
+        </p:nvSpPr>
+        <p:spPr>
+          <a:xfrm>
+            <a:off x="4325112" y="1078992"/>
+            <a:ext cx="548640" cy="548640"/>
+          </a:xfrm>
+          <a:prstGeom prst="rect">
+            <a:avLst/>
+          </a:prstGeom>
+          <a:noFill/>
+          <a:ln/>
+        </p:spPr>
+        <p:txBody>
+          <a:bodyPr wrap="square" rtlCol="0" anchor="ctr"/>
+          <a:lstStyle/>
+          <a:p>
+            <a:pPr algn="ctr" indent="0" marL="0">
+              <a:buNone/>
+            </a:pPr>
+            <a:r>
+              <a:rPr lang="en-US" sz="1800" dirty="0">
+                <a:solidFill>
+                  <a:srgbClr val="000000"/>
+                </a:solidFill>
+              </a:rPr>
+              <a:t>🔔</a:t>
+            </a:r>
+            <a:endParaRPr lang="en-US" sz="1800" dirty="0"/>
+          </a:p>
+        </p:txBody>
+      </p:sp>
+      <p:sp>
+        <p:nvSpPr>
+          <p:cNvPr id="14" name="Text 12"/>
+          <p:cNvSpPr/>
+          <p:nvPr/>
+        </p:nvSpPr>
+        <p:spPr>
+          <a:xfrm>
+            <a:off x="4965192" y="1115568"/>
+            <a:ext cx="2743200" cy="365760"/>
+          </a:xfrm>
+          <a:prstGeom prst="rect">
+            <a:avLst/>
+          </a:prstGeom>
+          <a:noFill/>
+          <a:ln/>
+        </p:spPr>
+        <p:txBody>
+          <a:bodyPr wrap="square" rtlCol="0" anchor="ctr"/>
+          <a:lstStyle/>
+          <a:p>
+            <a:pPr indent="0" marL="0">
+              <a:buNone/>
+            </a:pPr>
+            <a:r>
+              <a:rPr lang="en-US" sz="1200" b="1" dirty="0">
+                <a:solidFill>
+                  <a:srgbClr val="0D9488"/>
+                </a:solidFill>
+              </a:rPr>
+              <a:t>취소 감지 즉시 반영</a:t>
+            </a:r>
+            <a:endParaRPr lang="en-US" sz="1200" dirty="0"/>
+          </a:p>
+        </p:txBody>
+      </p:sp>
+      <p:sp>
+        <p:nvSpPr>
+          <p:cNvPr id="15" name="Text 13"/>
+          <p:cNvSpPr/>
+          <p:nvPr/>
+        </p:nvSpPr>
+        <p:spPr>
+          <a:xfrm>
+            <a:off x="4361688" y="1627632"/>
+            <a:ext cx="3337560" cy="1298448"/>
+          </a:xfrm>
+          <a:prstGeom prst="rect">
+            <a:avLst/>
+          </a:prstGeom>
+          <a:noFill/>
+          <a:ln/>
+        </p:spPr>
+        <p:txBody>
+          <a:bodyPr wrap="square" rtlCol="0" anchor="ctr"/>
+          <a:lstStyle/>
+          <a:p>
+            <a:pPr indent="0" marL="0">
+              <a:buNone/>
+            </a:pPr>
+            <a:r>
+              <a:rPr lang="en-US" sz="1000" dirty="0">
+                <a:solidFill>
+                  <a:srgbClr val="1F1235"/>
+                </a:solidFill>
+              </a:rPr>
+              <a:t>사장님·라이더 대시보드</a:t>
+            </a:r>
+            <a:endParaRPr lang="en-US" sz="1000" dirty="0"/>
+          </a:p>
+          <a:p>
+            <a:pPr indent="0" marL="0">
+              <a:buNone/>
+            </a:pPr>
+            <a:r>
+              <a:rPr lang="en-US" sz="1000" dirty="0">
+                <a:solidFill>
+                  <a:srgbClr val="1F1235"/>
+                </a:solidFill>
+              </a:rPr>
+              <a:t>Polling 10s → 5s 단축</a:t>
+            </a:r>
+            <a:endParaRPr lang="en-US" sz="1000" dirty="0"/>
+          </a:p>
+          <a:p>
+            <a:pPr indent="0" marL="0">
+              <a:buNone/>
+            </a:pPr>
+            <a:r>
+              <a:rPr lang="en-US" sz="1000" dirty="0">
+                <a:solidFill>
+                  <a:srgbClr val="1F1235"/>
+                </a:solidFill>
+              </a:rPr>
+              <a:t>취소 주문 감지 즉시 알림 중단</a:t>
+            </a:r>
+            <a:endParaRPr lang="en-US" sz="1000" dirty="0"/>
+          </a:p>
+          <a:p>
+            <a:pPr indent="0" marL="0">
+              <a:buNone/>
+            </a:pPr>
+            <a:r>
+              <a:rPr lang="en-US" sz="1000" dirty="0">
+                <a:solidFill>
+                  <a:srgbClr val="1F1235"/>
+                </a:solidFill>
+              </a:rPr>
+              <a:t>useStoreOrderStatusRealtime 연동</a:t>
+            </a:r>
+            <a:endParaRPr lang="en-US" sz="1000" dirty="0"/>
+          </a:p>
+        </p:txBody>
+      </p:sp>
+      <p:sp>
+        <p:nvSpPr>
+          <p:cNvPr id="16" name="Shape 14"/>
+          <p:cNvSpPr/>
+          <p:nvPr/>
+        </p:nvSpPr>
+        <p:spPr>
+          <a:xfrm>
+            <a:off x="8092440" y="914400"/>
+            <a:ext cx="3749040" cy="2148840"/>
           </a:xfrm>
           <a:prstGeom prst="roundRect">
             <a:avLst>
-              <a:gd name="adj" fmla="val 19048"/>
+              <a:gd name="adj" fmla="val 6383"/>
             </a:avLst>
           </a:prstGeom>
           <a:solidFill>
-            <a:srgbClr val="16A34A"/>
+            <a:srgbClr val="F0FDFA"/>
           </a:solidFill>
           <a:ln w="12700">
             <a:solidFill>
-              <a:srgbClr val="16A34A"/>
+              <a:srgbClr val="99F6E4"/>
             </a:solidFill>
             <a:prstDash val="solid"/>
           </a:ln>
@@ -7199,242 +7192,26 @@
       </p:sp>
       <p:sp>
         <p:nvSpPr>
-          <p:cNvPr id="22" name="Text 20"/>
-          <p:cNvSpPr/>
-          <p:nvPr/>
-        </p:nvSpPr>
-        <p:spPr>
-          <a:xfrm>
-            <a:off x="8202168" y="1069848"/>
-            <a:ext cx="3529584" cy="384048"/>
-          </a:xfrm>
-          <a:prstGeom prst="rect">
-            <a:avLst/>
-          </a:prstGeom>
-          <a:noFill/>
-          <a:ln/>
-        </p:spPr>
-        <p:txBody>
-          <a:bodyPr wrap="square" rtlCol="0" anchor="ctr"/>
-          <a:lstStyle/>
-          <a:p>
-            <a:pPr algn="ctr" indent="0" marL="0">
-              <a:buNone/>
-            </a:pPr>
-            <a:r>
-              <a:rPr lang="en-US" sz="1200" b="1" dirty="0">
-                <a:solidFill>
-                  <a:srgbClr val="FFFFFF"/>
-                </a:solidFill>
-              </a:rPr>
-              <a:t>🛒 가맹점 / 주문 플로우</a:t>
-            </a:r>
-            <a:endParaRPr lang="en-US" sz="1200" dirty="0"/>
-          </a:p>
-        </p:txBody>
-      </p:sp>
-      <p:sp>
-        <p:nvSpPr>
-          <p:cNvPr id="23" name="Text 21"/>
-          <p:cNvSpPr/>
-          <p:nvPr/>
-        </p:nvSpPr>
-        <p:spPr>
-          <a:xfrm>
-            <a:off x="8257032" y="1554480"/>
-            <a:ext cx="3401568" cy="338328"/>
-          </a:xfrm>
-          <a:prstGeom prst="rect">
-            <a:avLst/>
-          </a:prstGeom>
-          <a:noFill/>
-          <a:ln/>
-        </p:spPr>
-        <p:txBody>
-          <a:bodyPr wrap="square" rtlCol="0" anchor="ctr"/>
-          <a:lstStyle/>
-          <a:p>
-            <a:pPr indent="0" marL="0">
-              <a:buNone/>
-            </a:pPr>
-            <a:r>
-              <a:rPr lang="en-US" sz="1000" dirty="0">
-                <a:solidFill>
-                  <a:srgbClr val="1F1235"/>
-                </a:solidFill>
-              </a:rPr>
-              <a:t>✓  가맹점 목록 (카테고리/전문검색 필터)</a:t>
-            </a:r>
-            <a:endParaRPr lang="en-US" sz="1000" dirty="0"/>
-          </a:p>
-        </p:txBody>
-      </p:sp>
-      <p:sp>
-        <p:nvSpPr>
-          <p:cNvPr id="24" name="Text 22"/>
-          <p:cNvSpPr/>
-          <p:nvPr/>
-        </p:nvSpPr>
-        <p:spPr>
-          <a:xfrm>
-            <a:off x="8257032" y="1901952"/>
-            <a:ext cx="3401568" cy="338328"/>
-          </a:xfrm>
-          <a:prstGeom prst="rect">
-            <a:avLst/>
-          </a:prstGeom>
-          <a:noFill/>
-          <a:ln/>
-        </p:spPr>
-        <p:txBody>
-          <a:bodyPr wrap="square" rtlCol="0" anchor="ctr"/>
-          <a:lstStyle/>
-          <a:p>
-            <a:pPr indent="0" marL="0">
-              <a:buNone/>
-            </a:pPr>
-            <a:r>
-              <a:rPr lang="en-US" sz="1000" dirty="0">
-                <a:solidFill>
-                  <a:srgbClr val="1F1235"/>
-                </a:solidFill>
-              </a:rPr>
-              <a:t>✓  가맹점 상세 + 메뉴 옵션 + 리뷰(이미지)</a:t>
-            </a:r>
-            <a:endParaRPr lang="en-US" sz="1000" dirty="0"/>
-          </a:p>
-        </p:txBody>
-      </p:sp>
-      <p:sp>
-        <p:nvSpPr>
-          <p:cNvPr id="25" name="Text 23"/>
-          <p:cNvSpPr/>
-          <p:nvPr/>
-        </p:nvSpPr>
-        <p:spPr>
-          <a:xfrm>
-            <a:off x="8257032" y="2249424"/>
-            <a:ext cx="3401568" cy="338328"/>
-          </a:xfrm>
-          <a:prstGeom prst="rect">
-            <a:avLst/>
-          </a:prstGeom>
-          <a:noFill/>
-          <a:ln/>
-        </p:spPr>
-        <p:txBody>
-          <a:bodyPr wrap="square" rtlCol="0" anchor="ctr"/>
-          <a:lstStyle/>
-          <a:p>
-            <a:pPr indent="0" marL="0">
-              <a:buNone/>
-            </a:pPr>
-            <a:r>
-              <a:rPr lang="en-US" sz="1000" dirty="0">
-                <a:solidFill>
-                  <a:srgbClr val="1F1235"/>
-                </a:solidFill>
-              </a:rPr>
-              <a:t>✓  쿠폰(3종) + PICK 할인 + 배달 메모</a:t>
-            </a:r>
-            <a:endParaRPr lang="en-US" sz="1000" dirty="0"/>
-          </a:p>
-        </p:txBody>
-      </p:sp>
-      <p:sp>
-        <p:nvSpPr>
-          <p:cNvPr id="26" name="Text 24"/>
-          <p:cNvSpPr/>
-          <p:nvPr/>
-        </p:nvSpPr>
-        <p:spPr>
-          <a:xfrm>
-            <a:off x="8257032" y="2596896"/>
-            <a:ext cx="3401568" cy="338328"/>
-          </a:xfrm>
-          <a:prstGeom prst="rect">
-            <a:avLst/>
-          </a:prstGeom>
-          <a:noFill/>
-          <a:ln/>
-        </p:spPr>
-        <p:txBody>
-          <a:bodyPr wrap="square" rtlCol="0" anchor="ctr"/>
-          <a:lstStyle/>
-          <a:p>
-            <a:pPr indent="0" marL="0">
-              <a:buNone/>
-            </a:pPr>
-            <a:r>
-              <a:rPr lang="en-US" sz="1000" dirty="0">
-                <a:solidFill>
-                  <a:srgbClr val="1F1235"/>
-                </a:solidFill>
-              </a:rPr>
-              <a:t>✓  PICK 결제 + 토스페이먼츠 카드 결제</a:t>
-            </a:r>
-            <a:endParaRPr lang="en-US" sz="1000" dirty="0"/>
-          </a:p>
-        </p:txBody>
-      </p:sp>
-      <p:sp>
-        <p:nvSpPr>
-          <p:cNvPr id="27" name="Text 25"/>
-          <p:cNvSpPr/>
-          <p:nvPr/>
-        </p:nvSpPr>
-        <p:spPr>
-          <a:xfrm>
-            <a:off x="8257032" y="2944368"/>
-            <a:ext cx="3401568" cy="338328"/>
-          </a:xfrm>
-          <a:prstGeom prst="rect">
-            <a:avLst/>
-          </a:prstGeom>
-          <a:noFill/>
-          <a:ln/>
-        </p:spPr>
-        <p:txBody>
-          <a:bodyPr wrap="square" rtlCol="0" anchor="ctr"/>
-          <a:lstStyle/>
-          <a:p>
-            <a:pPr indent="0" marL="0">
-              <a:buNone/>
-            </a:pPr>
-            <a:r>
-              <a:rPr lang="en-US" sz="1000" dirty="0">
-                <a:solidFill>
-                  <a:srgbClr val="1F1235"/>
-                </a:solidFill>
-              </a:rPr>
-              <a:t>✓  주문 생성 → PICK 차감 → 완료 적립</a:t>
-            </a:r>
-            <a:endParaRPr lang="en-US" sz="1000" dirty="0"/>
-          </a:p>
-        </p:txBody>
-      </p:sp>
-      <p:sp>
-        <p:nvSpPr>
-          <p:cNvPr id="28" name="Shape 26"/>
-          <p:cNvSpPr/>
-          <p:nvPr/>
-        </p:nvSpPr>
-        <p:spPr>
-          <a:xfrm>
-            <a:off x="228600" y="3566160"/>
-            <a:ext cx="3749040" cy="2423160"/>
+          <p:cNvPr id="17" name="Shape 15"/>
+          <p:cNvSpPr/>
+          <p:nvPr/>
+        </p:nvSpPr>
+        <p:spPr>
+          <a:xfrm>
+            <a:off x="8257032" y="1097280"/>
+            <a:ext cx="530352" cy="530352"/>
           </a:xfrm>
           <a:prstGeom prst="roundRect">
             <a:avLst>
-              <a:gd name="adj" fmla="val 5660"/>
+              <a:gd name="adj" fmla="val 17241"/>
             </a:avLst>
           </a:prstGeom>
           <a:solidFill>
-            <a:srgbClr val="FFFBEB"/>
+            <a:srgbClr val="FFFFFF"/>
           </a:solidFill>
           <a:ln w="12700">
             <a:solidFill>
-              <a:srgbClr val="D97706"/>
+              <a:srgbClr val="99F6E4"/>
             </a:solidFill>
             <a:prstDash val="solid"/>
           </a:ln>
@@ -7442,26 +7219,176 @@
       </p:sp>
       <p:sp>
         <p:nvSpPr>
-          <p:cNvPr id="29" name="Shape 27"/>
-          <p:cNvSpPr/>
-          <p:nvPr/>
-        </p:nvSpPr>
-        <p:spPr>
-          <a:xfrm>
-            <a:off x="338328" y="3675888"/>
-            <a:ext cx="3529584" cy="384048"/>
+          <p:cNvPr id="18" name="Text 16"/>
+          <p:cNvSpPr/>
+          <p:nvPr/>
+        </p:nvSpPr>
+        <p:spPr>
+          <a:xfrm>
+            <a:off x="8257032" y="1078992"/>
+            <a:ext cx="548640" cy="548640"/>
+          </a:xfrm>
+          <a:prstGeom prst="rect">
+            <a:avLst/>
+          </a:prstGeom>
+          <a:noFill/>
+          <a:ln/>
+        </p:spPr>
+        <p:txBody>
+          <a:bodyPr wrap="square" rtlCol="0" anchor="ctr"/>
+          <a:lstStyle/>
+          <a:p>
+            <a:pPr algn="ctr" indent="0" marL="0">
+              <a:buNone/>
+            </a:pPr>
+            <a:r>
+              <a:rPr lang="en-US" sz="1800" dirty="0">
+                <a:solidFill>
+                  <a:srgbClr val="000000"/>
+                </a:solidFill>
+              </a:rPr>
+              <a:t>🔄</a:t>
+            </a:r>
+            <a:endParaRPr lang="en-US" sz="1800" dirty="0"/>
+          </a:p>
+        </p:txBody>
+      </p:sp>
+      <p:sp>
+        <p:nvSpPr>
+          <p:cNvPr id="19" name="Text 17"/>
+          <p:cNvSpPr/>
+          <p:nvPr/>
+        </p:nvSpPr>
+        <p:spPr>
+          <a:xfrm>
+            <a:off x="8897112" y="1115568"/>
+            <a:ext cx="2743200" cy="365760"/>
+          </a:xfrm>
+          <a:prstGeom prst="rect">
+            <a:avLst/>
+          </a:prstGeom>
+          <a:noFill/>
+          <a:ln/>
+        </p:spPr>
+        <p:txBody>
+          <a:bodyPr wrap="square" rtlCol="0" anchor="ctr"/>
+          <a:lstStyle/>
+          <a:p>
+            <a:pPr indent="0" marL="0">
+              <a:buNone/>
+            </a:pPr>
+            <a:r>
+              <a:rPr lang="en-US" sz="1200" b="1" dirty="0">
+                <a:solidFill>
+                  <a:srgbClr val="0D9488"/>
+                </a:solidFill>
+              </a:rPr>
+              <a:t>calling_rider 상태 흐름 재설계</a:t>
+            </a:r>
+            <a:endParaRPr lang="en-US" sz="1200" dirty="0"/>
+          </a:p>
+        </p:txBody>
+      </p:sp>
+      <p:sp>
+        <p:nvSpPr>
+          <p:cNvPr id="20" name="Text 18"/>
+          <p:cNvSpPr/>
+          <p:nvPr/>
+        </p:nvSpPr>
+        <p:spPr>
+          <a:xfrm>
+            <a:off x="8293608" y="1627632"/>
+            <a:ext cx="3337560" cy="1298448"/>
+          </a:xfrm>
+          <a:prstGeom prst="rect">
+            <a:avLst/>
+          </a:prstGeom>
+          <a:noFill/>
+          <a:ln/>
+        </p:spPr>
+        <p:txBody>
+          <a:bodyPr wrap="square" rtlCol="0" anchor="ctr"/>
+          <a:lstStyle/>
+          <a:p>
+            <a:pPr indent="0" marL="0">
+              <a:buNone/>
+            </a:pPr>
+            <a:r>
+              <a:rPr lang="en-US" sz="1000" dirty="0">
+                <a:solidFill>
+                  <a:srgbClr val="1F1235"/>
+                </a:solidFill>
+              </a:rPr>
+              <a:t>수락 API: 상태별 분기 처리</a:t>
+            </a:r>
+            <a:endParaRPr lang="en-US" sz="1000" dirty="0"/>
+          </a:p>
+          <a:p>
+            <a:pPr indent="0" marL="0">
+              <a:buNone/>
+            </a:pPr>
+            <a:r>
+              <a:rPr lang="en-US" sz="1000" dirty="0">
+                <a:solidFill>
+                  <a:srgbClr val="1F1235"/>
+                </a:solidFill>
+              </a:rPr>
+              <a:t>  ready → picked_up 즉시 전환</a:t>
+            </a:r>
+            <a:endParaRPr lang="en-US" sz="1000" dirty="0"/>
+          </a:p>
+          <a:p>
+            <a:pPr indent="0" marL="0">
+              <a:buNone/>
+            </a:pPr>
+            <a:r>
+              <a:rPr lang="en-US" sz="1000" dirty="0">
+                <a:solidFill>
+                  <a:srgbClr val="1F1235"/>
+                </a:solidFill>
+              </a:rPr>
+              <a:t>  calling_rider → 상태 유지</a:t>
+            </a:r>
+            <a:endParaRPr lang="en-US" sz="1000" dirty="0"/>
+          </a:p>
+          <a:p>
+            <a:pPr indent="0" marL="0">
+              <a:buNone/>
+            </a:pPr>
+            <a:r>
+              <a:rPr lang="en-US" sz="1000" dirty="0">
+                <a:solidFill>
+                  <a:srgbClr val="1F1235"/>
+                </a:solidFill>
+              </a:rPr>
+              <a:t>rider_id만 배정, 조리완료 대기</a:t>
+            </a:r>
+            <a:endParaRPr lang="en-US" sz="1000" dirty="0"/>
+          </a:p>
+        </p:txBody>
+      </p:sp>
+      <p:sp>
+        <p:nvSpPr>
+          <p:cNvPr id="21" name="Shape 19"/>
+          <p:cNvSpPr/>
+          <p:nvPr/>
+        </p:nvSpPr>
+        <p:spPr>
+          <a:xfrm>
+            <a:off x="228600" y="3246120"/>
+            <a:ext cx="3749040" cy="2148840"/>
           </a:xfrm>
           <a:prstGeom prst="roundRect">
             <a:avLst>
-              <a:gd name="adj" fmla="val 19048"/>
+              <a:gd name="adj" fmla="val 6383"/>
             </a:avLst>
           </a:prstGeom>
           <a:solidFill>
-            <a:srgbClr val="D97706"/>
+            <a:srgbClr val="F0FDFA"/>
           </a:solidFill>
           <a:ln w="12700">
             <a:solidFill>
-              <a:srgbClr val="D97706"/>
+              <a:srgbClr val="99F6E4"/>
             </a:solidFill>
             <a:prstDash val="solid"/>
           </a:ln>
@@ -7469,278 +7396,26 @@
       </p:sp>
       <p:sp>
         <p:nvSpPr>
-          <p:cNvPr id="30" name="Text 28"/>
-          <p:cNvSpPr/>
-          <p:nvPr/>
-        </p:nvSpPr>
-        <p:spPr>
-          <a:xfrm>
-            <a:off x="338328" y="3675888"/>
-            <a:ext cx="3529584" cy="384048"/>
-          </a:xfrm>
-          <a:prstGeom prst="rect">
-            <a:avLst/>
-          </a:prstGeom>
-          <a:noFill/>
-          <a:ln/>
-        </p:spPr>
-        <p:txBody>
-          <a:bodyPr wrap="square" rtlCol="0" anchor="ctr"/>
-          <a:lstStyle/>
-          <a:p>
-            <a:pPr algn="ctr" indent="0" marL="0">
-              <a:buNone/>
-            </a:pPr>
-            <a:r>
-              <a:rPr lang="en-US" sz="1200" b="1" dirty="0">
-                <a:solidFill>
-                  <a:srgbClr val="FFFFFF"/>
-                </a:solidFill>
-              </a:rPr>
-              <a:t>👨‍🍳 사장님 기능</a:t>
-            </a:r>
-            <a:endParaRPr lang="en-US" sz="1200" dirty="0"/>
-          </a:p>
-        </p:txBody>
-      </p:sp>
-      <p:sp>
-        <p:nvSpPr>
-          <p:cNvPr id="31" name="Text 29"/>
-          <p:cNvSpPr/>
-          <p:nvPr/>
-        </p:nvSpPr>
-        <p:spPr>
-          <a:xfrm>
-            <a:off x="393192" y="4160520"/>
-            <a:ext cx="3401568" cy="338328"/>
-          </a:xfrm>
-          <a:prstGeom prst="rect">
-            <a:avLst/>
-          </a:prstGeom>
-          <a:noFill/>
-          <a:ln/>
-        </p:spPr>
-        <p:txBody>
-          <a:bodyPr wrap="square" rtlCol="0" anchor="ctr"/>
-          <a:lstStyle/>
-          <a:p>
-            <a:pPr indent="0" marL="0">
-              <a:buNone/>
-            </a:pPr>
-            <a:r>
-              <a:rPr lang="en-US" sz="1000" dirty="0">
-                <a:solidFill>
-                  <a:srgbClr val="1F1235"/>
-                </a:solidFill>
-              </a:rPr>
-              <a:t>✓  가게 등록·설정·쿠폰(KRW 입력)·영업시간</a:t>
-            </a:r>
-            <a:endParaRPr lang="en-US" sz="1000" dirty="0"/>
-          </a:p>
-        </p:txBody>
-      </p:sp>
-      <p:sp>
-        <p:nvSpPr>
-          <p:cNvPr id="32" name="Text 30"/>
-          <p:cNvSpPr/>
-          <p:nvPr/>
-        </p:nvSpPr>
-        <p:spPr>
-          <a:xfrm>
-            <a:off x="393192" y="4507992"/>
-            <a:ext cx="3401568" cy="338328"/>
-          </a:xfrm>
-          <a:prstGeom prst="rect">
-            <a:avLst/>
-          </a:prstGeom>
-          <a:noFill/>
-          <a:ln/>
-        </p:spPr>
-        <p:txBody>
-          <a:bodyPr wrap="square" rtlCol="0" anchor="ctr"/>
-          <a:lstStyle/>
-          <a:p>
-            <a:pPr indent="0" marL="0">
-              <a:buNone/>
-            </a:pPr>
-            <a:r>
-              <a:rPr lang="en-US" sz="1000" dirty="0">
-                <a:solidFill>
-                  <a:srgbClr val="1F1235"/>
-                </a:solidFill>
-              </a:rPr>
-              <a:t>✓  사진 리뷰 보상 설정 연동 (photo_review_reward_krw)</a:t>
-            </a:r>
-            <a:endParaRPr lang="en-US" sz="1000" dirty="0"/>
-          </a:p>
-        </p:txBody>
-      </p:sp>
-      <p:sp>
-        <p:nvSpPr>
-          <p:cNvPr id="33" name="Text 31"/>
-          <p:cNvSpPr/>
-          <p:nvPr/>
-        </p:nvSpPr>
-        <p:spPr>
-          <a:xfrm>
-            <a:off x="393192" y="4855464"/>
-            <a:ext cx="3401568" cy="338328"/>
-          </a:xfrm>
-          <a:prstGeom prst="rect">
-            <a:avLst/>
-          </a:prstGeom>
-          <a:noFill/>
-          <a:ln/>
-        </p:spPr>
-        <p:txBody>
-          <a:bodyPr wrap="square" rtlCol="0" anchor="ctr"/>
-          <a:lstStyle/>
-          <a:p>
-            <a:pPr indent="0" marL="0">
-              <a:buNone/>
-            </a:pPr>
-            <a:r>
-              <a:rPr lang="en-US" sz="1000" dirty="0">
-                <a:solidFill>
-                  <a:srgbClr val="1F1235"/>
-                </a:solidFill>
-              </a:rPr>
-              <a:t>✓  주문 관리: 수락 ETA + 거절 확인 팝업</a:t>
-            </a:r>
-            <a:endParaRPr lang="en-US" sz="1000" dirty="0"/>
-          </a:p>
-        </p:txBody>
-      </p:sp>
-      <p:sp>
-        <p:nvSpPr>
-          <p:cNvPr id="34" name="Text 32"/>
-          <p:cNvSpPr/>
-          <p:nvPr/>
-        </p:nvSpPr>
-        <p:spPr>
-          <a:xfrm>
-            <a:off x="393192" y="5202936"/>
-            <a:ext cx="3401568" cy="338328"/>
-          </a:xfrm>
-          <a:prstGeom prst="rect">
-            <a:avLst/>
-          </a:prstGeom>
-          <a:noFill/>
-          <a:ln/>
-        </p:spPr>
-        <p:txBody>
-          <a:bodyPr wrap="square" rtlCol="0" anchor="ctr"/>
-          <a:lstStyle/>
-          <a:p>
-            <a:pPr indent="0" marL="0">
-              <a:buNone/>
-            </a:pPr>
-            <a:r>
-              <a:rPr lang="en-US" sz="1000" dirty="0">
-                <a:solidFill>
-                  <a:srgbClr val="1F1235"/>
-                </a:solidFill>
-              </a:rPr>
-              <a:t>✓  매출 통계 대시보드 + 주간 차트</a:t>
-            </a:r>
-            <a:endParaRPr lang="en-US" sz="1000" dirty="0"/>
-          </a:p>
-        </p:txBody>
-      </p:sp>
-      <p:sp>
-        <p:nvSpPr>
-          <p:cNvPr id="35" name="Text 33"/>
-          <p:cNvSpPr/>
-          <p:nvPr/>
-        </p:nvSpPr>
-        <p:spPr>
-          <a:xfrm>
-            <a:off x="393192" y="5550408"/>
-            <a:ext cx="3401568" cy="338328"/>
-          </a:xfrm>
-          <a:prstGeom prst="rect">
-            <a:avLst/>
-          </a:prstGeom>
-          <a:noFill/>
-          <a:ln/>
-        </p:spPr>
-        <p:txBody>
-          <a:bodyPr wrap="square" rtlCol="0" anchor="ctr"/>
-          <a:lstStyle/>
-          <a:p>
-            <a:pPr indent="0" marL="0">
-              <a:buNone/>
-            </a:pPr>
-            <a:r>
-              <a:rPr lang="en-US" sz="1000" dirty="0">
-                <a:solidFill>
-                  <a:srgbClr val="1F1235"/>
-                </a:solidFill>
-              </a:rPr>
-              <a:t>✓  신규주문 TTS 알림 '픽픽 주문이 들어왔습니다'</a:t>
-            </a:r>
-            <a:endParaRPr lang="en-US" sz="1000" dirty="0"/>
-          </a:p>
-        </p:txBody>
-      </p:sp>
-      <p:sp>
-        <p:nvSpPr>
-          <p:cNvPr id="36" name="Text 34"/>
-          <p:cNvSpPr/>
-          <p:nvPr/>
-        </p:nvSpPr>
-        <p:spPr>
-          <a:xfrm>
-            <a:off x="393192" y="5897880"/>
-            <a:ext cx="3401568" cy="338328"/>
-          </a:xfrm>
-          <a:prstGeom prst="rect">
-            <a:avLst/>
-          </a:prstGeom>
-          <a:noFill/>
-          <a:ln/>
-        </p:spPr>
-        <p:txBody>
-          <a:bodyPr wrap="square" rtlCol="0" anchor="ctr"/>
-          <a:lstStyle/>
-          <a:p>
-            <a:pPr indent="0" marL="0">
-              <a:buNone/>
-            </a:pPr>
-            <a:r>
-              <a:rPr lang="en-US" sz="1000" dirty="0">
-                <a:solidFill>
-                  <a:srgbClr val="1F1235"/>
-                </a:solidFill>
-              </a:rPr>
-              <a:t>✓  신규 가맹점 초대 리워드 20,000 PICK</a:t>
-            </a:r>
-            <a:endParaRPr lang="en-US" sz="1000" dirty="0"/>
-          </a:p>
-        </p:txBody>
-      </p:sp>
-      <p:sp>
-        <p:nvSpPr>
-          <p:cNvPr id="37" name="Shape 35"/>
-          <p:cNvSpPr/>
-          <p:nvPr/>
-        </p:nvSpPr>
-        <p:spPr>
-          <a:xfrm>
-            <a:off x="4160520" y="3566160"/>
-            <a:ext cx="3749040" cy="2423160"/>
+          <p:cNvPr id="22" name="Shape 20"/>
+          <p:cNvSpPr/>
+          <p:nvPr/>
+        </p:nvSpPr>
+        <p:spPr>
+          <a:xfrm>
+            <a:off x="393192" y="3429000"/>
+            <a:ext cx="530352" cy="530352"/>
           </a:xfrm>
           <a:prstGeom prst="roundRect">
             <a:avLst>
-              <a:gd name="adj" fmla="val 5660"/>
+              <a:gd name="adj" fmla="val 17241"/>
             </a:avLst>
           </a:prstGeom>
           <a:solidFill>
-            <a:srgbClr val="ECFEFF"/>
+            <a:srgbClr val="FFFFFF"/>
           </a:solidFill>
           <a:ln w="12700">
             <a:solidFill>
-              <a:srgbClr val="0891B2"/>
+              <a:srgbClr val="99F6E4"/>
             </a:solidFill>
             <a:prstDash val="solid"/>
           </a:ln>
@@ -7748,26 +7423,176 @@
       </p:sp>
       <p:sp>
         <p:nvSpPr>
-          <p:cNvPr id="38" name="Shape 36"/>
-          <p:cNvSpPr/>
-          <p:nvPr/>
-        </p:nvSpPr>
-        <p:spPr>
-          <a:xfrm>
-            <a:off x="4270248" y="3675888"/>
-            <a:ext cx="3529584" cy="384048"/>
+          <p:cNvPr id="23" name="Text 21"/>
+          <p:cNvSpPr/>
+          <p:nvPr/>
+        </p:nvSpPr>
+        <p:spPr>
+          <a:xfrm>
+            <a:off x="393192" y="3410712"/>
+            <a:ext cx="548640" cy="548640"/>
+          </a:xfrm>
+          <a:prstGeom prst="rect">
+            <a:avLst/>
+          </a:prstGeom>
+          <a:noFill/>
+          <a:ln/>
+        </p:spPr>
+        <p:txBody>
+          <a:bodyPr wrap="square" rtlCol="0" anchor="ctr"/>
+          <a:lstStyle/>
+          <a:p>
+            <a:pPr algn="ctr" indent="0" marL="0">
+              <a:buNone/>
+            </a:pPr>
+            <a:r>
+              <a:rPr lang="en-US" sz="1800" dirty="0">
+                <a:solidFill>
+                  <a:srgbClr val="000000"/>
+                </a:solidFill>
+              </a:rPr>
+              <a:t>🛵</a:t>
+            </a:r>
+            <a:endParaRPr lang="en-US" sz="1800" dirty="0"/>
+          </a:p>
+        </p:txBody>
+      </p:sp>
+      <p:sp>
+        <p:nvSpPr>
+          <p:cNvPr id="24" name="Text 22"/>
+          <p:cNvSpPr/>
+          <p:nvPr/>
+        </p:nvSpPr>
+        <p:spPr>
+          <a:xfrm>
+            <a:off x="1033272" y="3447288"/>
+            <a:ext cx="2743200" cy="365760"/>
+          </a:xfrm>
+          <a:prstGeom prst="rect">
+            <a:avLst/>
+          </a:prstGeom>
+          <a:noFill/>
+          <a:ln/>
+        </p:spPr>
+        <p:txBody>
+          <a:bodyPr wrap="square" rtlCol="0" anchor="ctr"/>
+          <a:lstStyle/>
+          <a:p>
+            <a:pPr indent="0" marL="0">
+              <a:buNone/>
+            </a:pPr>
+            <a:r>
+              <a:rPr lang="en-US" sz="1200" b="1" dirty="0">
+                <a:solidFill>
+                  <a:srgbClr val="0D9488"/>
+                </a:solidFill>
+              </a:rPr>
+              <a:t>라이더 배달 페이지 개선</a:t>
+            </a:r>
+            <a:endParaRPr lang="en-US" sz="1200" dirty="0"/>
+          </a:p>
+        </p:txBody>
+      </p:sp>
+      <p:sp>
+        <p:nvSpPr>
+          <p:cNvPr id="25" name="Text 23"/>
+          <p:cNvSpPr/>
+          <p:nvPr/>
+        </p:nvSpPr>
+        <p:spPr>
+          <a:xfrm>
+            <a:off x="429768" y="3959352"/>
+            <a:ext cx="3337560" cy="1298448"/>
+          </a:xfrm>
+          <a:prstGeom prst="rect">
+            <a:avLst/>
+          </a:prstGeom>
+          <a:noFill/>
+          <a:ln/>
+        </p:spPr>
+        <p:txBody>
+          <a:bodyPr wrap="square" rtlCol="0" anchor="ctr"/>
+          <a:lstStyle/>
+          <a:p>
+            <a:pPr indent="0" marL="0">
+              <a:buNone/>
+            </a:pPr>
+            <a:r>
+              <a:rPr lang="en-US" sz="1000" dirty="0">
+                <a:solidFill>
+                  <a:srgbClr val="1F1235"/>
+                </a:solidFill>
+              </a:rPr>
+              <a:t>calling_rider: '조리 대기' 레이블</a:t>
+            </a:r>
+            <a:endParaRPr lang="en-US" sz="1000" dirty="0"/>
+          </a:p>
+          <a:p>
+            <a:pPr indent="0" marL="0">
+              <a:buNone/>
+            </a:pPr>
+            <a:r>
+              <a:rPr lang="en-US" sz="1000" dirty="0">
+                <a:solidFill>
+                  <a:srgbClr val="1F1235"/>
+                </a:solidFill>
+              </a:rPr>
+              <a:t>ready: '픽업 대기' + 픽업완료 버튼</a:t>
+            </a:r>
+            <a:endParaRPr lang="en-US" sz="1000" dirty="0"/>
+          </a:p>
+          <a:p>
+            <a:pPr indent="0" marL="0">
+              <a:buNone/>
+            </a:pPr>
+            <a:r>
+              <a:rPr lang="en-US" sz="1000" dirty="0">
+                <a:solidFill>
+                  <a:srgbClr val="1F1235"/>
+                </a:solidFill>
+              </a:rPr>
+              <a:t>activeStatuses에 calling_rider·ready 추가</a:t>
+            </a:r>
+            <a:endParaRPr lang="en-US" sz="1000" dirty="0"/>
+          </a:p>
+          <a:p>
+            <a:pPr indent="0" marL="0">
+              <a:buNone/>
+            </a:pPr>
+            <a:r>
+              <a:rPr lang="en-US" sz="1000" dirty="0">
+                <a:solidFill>
+                  <a:srgbClr val="1F1235"/>
+                </a:solidFill>
+              </a:rPr>
+              <a:t>조리완료 후 주문 사라짐 버그 수정</a:t>
+            </a:r>
+            <a:endParaRPr lang="en-US" sz="1000" dirty="0"/>
+          </a:p>
+        </p:txBody>
+      </p:sp>
+      <p:sp>
+        <p:nvSpPr>
+          <p:cNvPr id="26" name="Shape 24"/>
+          <p:cNvSpPr/>
+          <p:nvPr/>
+        </p:nvSpPr>
+        <p:spPr>
+          <a:xfrm>
+            <a:off x="4160520" y="3246120"/>
+            <a:ext cx="3749040" cy="2148840"/>
           </a:xfrm>
           <a:prstGeom prst="roundRect">
             <a:avLst>
-              <a:gd name="adj" fmla="val 19048"/>
+              <a:gd name="adj" fmla="val 6383"/>
             </a:avLst>
           </a:prstGeom>
           <a:solidFill>
-            <a:srgbClr val="0891B2"/>
+            <a:srgbClr val="F0FDFA"/>
           </a:solidFill>
           <a:ln w="12700">
             <a:solidFill>
-              <a:srgbClr val="0891B2"/>
+              <a:srgbClr val="99F6E4"/>
             </a:solidFill>
             <a:prstDash val="solid"/>
           </a:ln>
@@ -7775,242 +7600,26 @@
       </p:sp>
       <p:sp>
         <p:nvSpPr>
-          <p:cNvPr id="39" name="Text 37"/>
-          <p:cNvSpPr/>
-          <p:nvPr/>
-        </p:nvSpPr>
-        <p:spPr>
-          <a:xfrm>
-            <a:off x="4270248" y="3675888"/>
-            <a:ext cx="3529584" cy="384048"/>
-          </a:xfrm>
-          <a:prstGeom prst="rect">
-            <a:avLst/>
-          </a:prstGeom>
-          <a:noFill/>
-          <a:ln/>
-        </p:spPr>
-        <p:txBody>
-          <a:bodyPr wrap="square" rtlCol="0" anchor="ctr"/>
-          <a:lstStyle/>
-          <a:p>
-            <a:pPr algn="ctr" indent="0" marL="0">
-              <a:buNone/>
-            </a:pPr>
-            <a:r>
-              <a:rPr lang="en-US" sz="1200" b="1" dirty="0">
-                <a:solidFill>
-                  <a:srgbClr val="FFFFFF"/>
-                </a:solidFill>
-              </a:rPr>
-              <a:t>🛵 라이더 / PWA / 인프라</a:t>
-            </a:r>
-            <a:endParaRPr lang="en-US" sz="1200" dirty="0"/>
-          </a:p>
-        </p:txBody>
-      </p:sp>
-      <p:sp>
-        <p:nvSpPr>
-          <p:cNvPr id="40" name="Text 38"/>
-          <p:cNvSpPr/>
-          <p:nvPr/>
-        </p:nvSpPr>
-        <p:spPr>
-          <a:xfrm>
-            <a:off x="4325112" y="4160520"/>
-            <a:ext cx="3401568" cy="338328"/>
-          </a:xfrm>
-          <a:prstGeom prst="rect">
-            <a:avLst/>
-          </a:prstGeom>
-          <a:noFill/>
-          <a:ln/>
-        </p:spPr>
-        <p:txBody>
-          <a:bodyPr wrap="square" rtlCol="0" anchor="ctr"/>
-          <a:lstStyle/>
-          <a:p>
-            <a:pPr indent="0" marL="0">
-              <a:buNone/>
-            </a:pPr>
-            <a:r>
-              <a:rPr lang="en-US" sz="1000" dirty="0">
-                <a:solidFill>
-                  <a:srgbClr val="1F1235"/>
-                </a:solidFill>
-              </a:rPr>
-              <a:t>✓  배달 수락 → PICK 자동 지급 + 위치 공유</a:t>
-            </a:r>
-            <a:endParaRPr lang="en-US" sz="1000" dirty="0"/>
-          </a:p>
-        </p:txBody>
-      </p:sp>
-      <p:sp>
-        <p:nvSpPr>
-          <p:cNvPr id="41" name="Text 39"/>
-          <p:cNvSpPr/>
-          <p:nvPr/>
-        </p:nvSpPr>
-        <p:spPr>
-          <a:xfrm>
-            <a:off x="4325112" y="4507992"/>
-            <a:ext cx="3401568" cy="338328"/>
-          </a:xfrm>
-          <a:prstGeom prst="rect">
-            <a:avLst/>
-          </a:prstGeom>
-          <a:noFill/>
-          <a:ln/>
-        </p:spPr>
-        <p:txBody>
-          <a:bodyPr wrap="square" rtlCol="0" anchor="ctr"/>
-          <a:lstStyle/>
-          <a:p>
-            <a:pPr indent="0" marL="0">
-              <a:buNone/>
-            </a:pPr>
-            <a:r>
-              <a:rPr lang="en-US" sz="1000" dirty="0">
-                <a:solidFill>
-                  <a:srgbClr val="1F1235"/>
-                </a:solidFill>
-              </a:rPr>
-              <a:t>✓  라이더 5km 반경 필터링 + 거리순 정렬</a:t>
-            </a:r>
-            <a:endParaRPr lang="en-US" sz="1000" dirty="0"/>
-          </a:p>
-        </p:txBody>
-      </p:sp>
-      <p:sp>
-        <p:nvSpPr>
-          <p:cNvPr id="42" name="Text 40"/>
-          <p:cNvSpPr/>
-          <p:nvPr/>
-        </p:nvSpPr>
-        <p:spPr>
-          <a:xfrm>
-            <a:off x="4325112" y="4855464"/>
-            <a:ext cx="3401568" cy="338328"/>
-          </a:xfrm>
-          <a:prstGeom prst="rect">
-            <a:avLst/>
-          </a:prstGeom>
-          <a:noFill/>
-          <a:ln/>
-        </p:spPr>
-        <p:txBody>
-          <a:bodyPr wrap="square" rtlCol="0" anchor="ctr"/>
-          <a:lstStyle/>
-          <a:p>
-            <a:pPr indent="0" marL="0">
-              <a:buNone/>
-            </a:pPr>
-            <a:r>
-              <a:rPr lang="en-US" sz="1000" dirty="0">
-                <a:solidFill>
-                  <a:srgbClr val="1F1235"/>
-                </a:solidFill>
-              </a:rPr>
-              <a:t>✓  10분 자동오프라인 Cron (매 5분 실행)</a:t>
-            </a:r>
-            <a:endParaRPr lang="en-US" sz="1000" dirty="0"/>
-          </a:p>
-        </p:txBody>
-      </p:sp>
-      <p:sp>
-        <p:nvSpPr>
-          <p:cNvPr id="43" name="Text 41"/>
-          <p:cNvSpPr/>
-          <p:nvPr/>
-        </p:nvSpPr>
-        <p:spPr>
-          <a:xfrm>
-            <a:off x="4325112" y="5202936"/>
-            <a:ext cx="3401568" cy="338328"/>
-          </a:xfrm>
-          <a:prstGeom prst="rect">
-            <a:avLst/>
-          </a:prstGeom>
-          <a:noFill/>
-          <a:ln/>
-        </p:spPr>
-        <p:txBody>
-          <a:bodyPr wrap="square" rtlCol="0" anchor="ctr"/>
-          <a:lstStyle/>
-          <a:p>
-            <a:pPr indent="0" marL="0">
-              <a:buNone/>
-            </a:pPr>
-            <a:r>
-              <a:rPr lang="en-US" sz="1000" dirty="0">
-                <a:solidFill>
-                  <a:srgbClr val="1F1235"/>
-                </a:solidFill>
-              </a:rPr>
-              <a:t>✓  FCM 푸시 알림 + 관리자 일괄 발송</a:t>
-            </a:r>
-            <a:endParaRPr lang="en-US" sz="1000" dirty="0"/>
-          </a:p>
-        </p:txBody>
-      </p:sp>
-      <p:sp>
-        <p:nvSpPr>
-          <p:cNvPr id="44" name="Text 42"/>
-          <p:cNvSpPr/>
-          <p:nvPr/>
-        </p:nvSpPr>
-        <p:spPr>
-          <a:xfrm>
-            <a:off x="4325112" y="5550408"/>
-            <a:ext cx="3401568" cy="338328"/>
-          </a:xfrm>
-          <a:prstGeom prst="rect">
-            <a:avLst/>
-          </a:prstGeom>
-          <a:noFill/>
-          <a:ln/>
-        </p:spPr>
-        <p:txBody>
-          <a:bodyPr wrap="square" rtlCol="0" anchor="ctr"/>
-          <a:lstStyle/>
-          <a:p>
-            <a:pPr indent="0" marL="0">
-              <a:buNone/>
-            </a:pPr>
-            <a:r>
-              <a:rPr lang="en-US" sz="1000" dirty="0">
-                <a:solidFill>
-                  <a:srgbClr val="1F1235"/>
-                </a:solidFill>
-              </a:rPr>
-              <a:t>✓  PWA 오프라인 캐싱 (Serwist) + Sentry 모니터링</a:t>
-            </a:r>
-            <a:endParaRPr lang="en-US" sz="1000" dirty="0"/>
-          </a:p>
-        </p:txBody>
-      </p:sp>
-      <p:sp>
-        <p:nvSpPr>
-          <p:cNvPr id="45" name="Shape 43"/>
-          <p:cNvSpPr/>
-          <p:nvPr/>
-        </p:nvSpPr>
-        <p:spPr>
-          <a:xfrm>
-            <a:off x="8092440" y="3566160"/>
-            <a:ext cx="3749040" cy="2423160"/>
+          <p:cNvPr id="27" name="Shape 25"/>
+          <p:cNvSpPr/>
+          <p:nvPr/>
+        </p:nvSpPr>
+        <p:spPr>
+          <a:xfrm>
+            <a:off x="4325112" y="3429000"/>
+            <a:ext cx="530352" cy="530352"/>
           </a:xfrm>
           <a:prstGeom prst="roundRect">
             <a:avLst>
-              <a:gd name="adj" fmla="val 5660"/>
+              <a:gd name="adj" fmla="val 17241"/>
             </a:avLst>
           </a:prstGeom>
           <a:solidFill>
-            <a:srgbClr val="FFEDD5"/>
+            <a:srgbClr val="FFFFFF"/>
           </a:solidFill>
           <a:ln w="12700">
             <a:solidFill>
-              <a:srgbClr val="EA580C"/>
+              <a:srgbClr val="99F6E4"/>
             </a:solidFill>
             <a:prstDash val="solid"/>
           </a:ln>
@@ -8018,26 +7627,176 @@
       </p:sp>
       <p:sp>
         <p:nvSpPr>
-          <p:cNvPr id="46" name="Shape 44"/>
-          <p:cNvSpPr/>
-          <p:nvPr/>
-        </p:nvSpPr>
-        <p:spPr>
-          <a:xfrm>
-            <a:off x="8202168" y="3675888"/>
-            <a:ext cx="3529584" cy="384048"/>
+          <p:cNvPr id="28" name="Text 26"/>
+          <p:cNvSpPr/>
+          <p:nvPr/>
+        </p:nvSpPr>
+        <p:spPr>
+          <a:xfrm>
+            <a:off x="4325112" y="3410712"/>
+            <a:ext cx="548640" cy="548640"/>
+          </a:xfrm>
+          <a:prstGeom prst="rect">
+            <a:avLst/>
+          </a:prstGeom>
+          <a:noFill/>
+          <a:ln/>
+        </p:spPr>
+        <p:txBody>
+          <a:bodyPr wrap="square" rtlCol="0" anchor="ctr"/>
+          <a:lstStyle/>
+          <a:p>
+            <a:pPr algn="ctr" indent="0" marL="0">
+              <a:buNone/>
+            </a:pPr>
+            <a:r>
+              <a:rPr lang="en-US" sz="1800" dirty="0">
+                <a:solidFill>
+                  <a:srgbClr val="000000"/>
+                </a:solidFill>
+              </a:rPr>
+              <a:t>🛡️</a:t>
+            </a:r>
+            <a:endParaRPr lang="en-US" sz="1800" dirty="0"/>
+          </a:p>
+        </p:txBody>
+      </p:sp>
+      <p:sp>
+        <p:nvSpPr>
+          <p:cNvPr id="29" name="Text 27"/>
+          <p:cNvSpPr/>
+          <p:nvPr/>
+        </p:nvSpPr>
+        <p:spPr>
+          <a:xfrm>
+            <a:off x="4965192" y="3447288"/>
+            <a:ext cx="2743200" cy="365760"/>
+          </a:xfrm>
+          <a:prstGeom prst="rect">
+            <a:avLst/>
+          </a:prstGeom>
+          <a:noFill/>
+          <a:ln/>
+        </p:spPr>
+        <p:txBody>
+          <a:bodyPr wrap="square" rtlCol="0" anchor="ctr"/>
+          <a:lstStyle/>
+          <a:p>
+            <a:pPr indent="0" marL="0">
+              <a:buNone/>
+            </a:pPr>
+            <a:r>
+              <a:rPr lang="en-US" sz="1200" b="1" dirty="0">
+                <a:solidFill>
+                  <a:srgbClr val="0D9488"/>
+                </a:solidFill>
+              </a:rPr>
+              <a:t>Supabase RLS 정책 추가</a:t>
+            </a:r>
+            <a:endParaRPr lang="en-US" sz="1200" dirty="0"/>
+          </a:p>
+        </p:txBody>
+      </p:sp>
+      <p:sp>
+        <p:nvSpPr>
+          <p:cNvPr id="30" name="Text 28"/>
+          <p:cNvSpPr/>
+          <p:nvPr/>
+        </p:nvSpPr>
+        <p:spPr>
+          <a:xfrm>
+            <a:off x="4361688" y="3959352"/>
+            <a:ext cx="3337560" cy="1298448"/>
+          </a:xfrm>
+          <a:prstGeom prst="rect">
+            <a:avLst/>
+          </a:prstGeom>
+          <a:noFill/>
+          <a:ln/>
+        </p:spPr>
+        <p:txBody>
+          <a:bodyPr wrap="square" rtlCol="0" anchor="ctr"/>
+          <a:lstStyle/>
+          <a:p>
+            <a:pPr indent="0" marL="0">
+              <a:buNone/>
+            </a:pPr>
+            <a:r>
+              <a:rPr lang="en-US" sz="1000" dirty="0">
+                <a:solidFill>
+                  <a:srgbClr val="1F1235"/>
+                </a:solidFill>
+              </a:rPr>
+              <a:t>라이더 미배정 주문 조회 권한</a:t>
+            </a:r>
+            <a:endParaRPr lang="en-US" sz="1000" dirty="0"/>
+          </a:p>
+          <a:p>
+            <a:pPr indent="0" marL="0">
+              <a:buNone/>
+            </a:pPr>
+            <a:r>
+              <a:rPr lang="en-US" sz="1000" dirty="0">
+                <a:solidFill>
+                  <a:srgbClr val="1F1235"/>
+                </a:solidFill>
+              </a:rPr>
+              <a:t>riders_can_read_available_orders</a:t>
+            </a:r>
+            <a:endParaRPr lang="en-US" sz="1000" dirty="0"/>
+          </a:p>
+          <a:p>
+            <a:pPr indent="0" marL="0">
+              <a:buNone/>
+            </a:pPr>
+            <a:r>
+              <a:rPr lang="en-US" sz="1000" dirty="0">
+                <a:solidFill>
+                  <a:srgbClr val="1F1235"/>
+                </a:solidFill>
+              </a:rPr>
+              <a:t>status IN (ready, calling_rider)</a:t>
+            </a:r>
+            <a:endParaRPr lang="en-US" sz="1000" dirty="0"/>
+          </a:p>
+          <a:p>
+            <a:pPr indent="0" marL="0">
+              <a:buNone/>
+            </a:pPr>
+            <a:r>
+              <a:rPr lang="en-US" sz="1000" dirty="0">
+                <a:solidFill>
+                  <a:srgbClr val="1F1235"/>
+                </a:solidFill>
+              </a:rPr>
+              <a:t>AND rider_id IS NULL 조건 추가</a:t>
+            </a:r>
+            <a:endParaRPr lang="en-US" sz="1000" dirty="0"/>
+          </a:p>
+        </p:txBody>
+      </p:sp>
+      <p:sp>
+        <p:nvSpPr>
+          <p:cNvPr id="31" name="Shape 29"/>
+          <p:cNvSpPr/>
+          <p:nvPr/>
+        </p:nvSpPr>
+        <p:spPr>
+          <a:xfrm>
+            <a:off x="8092440" y="3246120"/>
+            <a:ext cx="3749040" cy="2148840"/>
           </a:xfrm>
           <a:prstGeom prst="roundRect">
             <a:avLst>
-              <a:gd name="adj" fmla="val 19048"/>
+              <a:gd name="adj" fmla="val 6383"/>
             </a:avLst>
           </a:prstGeom>
           <a:solidFill>
-            <a:srgbClr val="EA580C"/>
+            <a:srgbClr val="F0FDFA"/>
           </a:solidFill>
           <a:ln w="12700">
             <a:solidFill>
-              <a:srgbClr val="EA580C"/>
+              <a:srgbClr val="99F6E4"/>
             </a:solidFill>
             <a:prstDash val="solid"/>
           </a:ln>
@@ -8045,14 +7804,41 @@
       </p:sp>
       <p:sp>
         <p:nvSpPr>
-          <p:cNvPr id="47" name="Text 45"/>
-          <p:cNvSpPr/>
-          <p:nvPr/>
-        </p:nvSpPr>
-        <p:spPr>
-          <a:xfrm>
-            <a:off x="8202168" y="3675888"/>
-            <a:ext cx="3529584" cy="384048"/>
+          <p:cNvPr id="32" name="Shape 30"/>
+          <p:cNvSpPr/>
+          <p:nvPr/>
+        </p:nvSpPr>
+        <p:spPr>
+          <a:xfrm>
+            <a:off x="8257032" y="3429000"/>
+            <a:ext cx="530352" cy="530352"/>
+          </a:xfrm>
+          <a:prstGeom prst="roundRect">
+            <a:avLst>
+              <a:gd name="adj" fmla="val 17241"/>
+            </a:avLst>
+          </a:prstGeom>
+          <a:solidFill>
+            <a:srgbClr val="FFFFFF"/>
+          </a:solidFill>
+          <a:ln w="12700">
+            <a:solidFill>
+              <a:srgbClr val="99F6E4"/>
+            </a:solidFill>
+            <a:prstDash val="solid"/>
+          </a:ln>
+        </p:spPr>
+      </p:sp>
+      <p:sp>
+        <p:nvSpPr>
+          <p:cNvPr id="33" name="Text 31"/>
+          <p:cNvSpPr/>
+          <p:nvPr/>
+        </p:nvSpPr>
+        <p:spPr>
+          <a:xfrm>
+            <a:off x="8257032" y="3410712"/>
+            <a:ext cx="548640" cy="548640"/>
           </a:xfrm>
           <a:prstGeom prst="rect">
             <a:avLst/>
@@ -8068,12 +7854,48 @@
               <a:buNone/>
             </a:pPr>
             <a:r>
+              <a:rPr lang="en-US" sz="1800" dirty="0">
+                <a:solidFill>
+                  <a:srgbClr val="000000"/>
+                </a:solidFill>
+              </a:rPr>
+              <a:t>⚙️</a:t>
+            </a:r>
+            <a:endParaRPr lang="en-US" sz="1800" dirty="0"/>
+          </a:p>
+        </p:txBody>
+      </p:sp>
+      <p:sp>
+        <p:nvSpPr>
+          <p:cNvPr id="34" name="Text 32"/>
+          <p:cNvSpPr/>
+          <p:nvPr/>
+        </p:nvSpPr>
+        <p:spPr>
+          <a:xfrm>
+            <a:off x="8897112" y="3447288"/>
+            <a:ext cx="2743200" cy="365760"/>
+          </a:xfrm>
+          <a:prstGeom prst="rect">
+            <a:avLst/>
+          </a:prstGeom>
+          <a:noFill/>
+          <a:ln/>
+        </p:spPr>
+        <p:txBody>
+          <a:bodyPr wrap="square" rtlCol="0" anchor="ctr"/>
+          <a:lstStyle/>
+          <a:p>
+            <a:pPr indent="0" marL="0">
+              <a:buNone/>
+            </a:pPr>
+            <a:r>
               <a:rPr lang="en-US" sz="1200" b="1" dirty="0">
                 <a:solidFill>
-                  <a:srgbClr val="FFFFFF"/>
-                </a:solidFill>
-              </a:rPr>
-              <a:t>🛡️ DB / 보안 / 관리자</a:t>
+                  <a:srgbClr val="0D9488"/>
+                </a:solidFill>
+              </a:rPr>
+              <a:t>activeStatuses 전반 수정</a:t>
             </a:r>
             <a:endParaRPr lang="en-US" sz="1200" dirty="0"/>
           </a:p>
@@ -8081,14 +7903,14 @@
       </p:sp>
       <p:sp>
         <p:nvSpPr>
-          <p:cNvPr id="48" name="Text 46"/>
-          <p:cNvSpPr/>
-          <p:nvPr/>
-        </p:nvSpPr>
-        <p:spPr>
-          <a:xfrm>
-            <a:off x="8257032" y="4160520"/>
-            <a:ext cx="3401568" cy="338328"/>
+          <p:cNvPr id="35" name="Text 33"/>
+          <p:cNvSpPr/>
+          <p:nvPr/>
+        </p:nvSpPr>
+        <p:spPr>
+          <a:xfrm>
+            <a:off x="8293608" y="3959352"/>
+            <a:ext cx="3337560" cy="1298448"/>
           </a:xfrm>
           <a:prstGeom prst="rect">
             <a:avLst/>
@@ -8109,32 +7931,10 @@
                   <a:srgbClr val="1F1235"/>
                 </a:solidFill>
               </a:rPr>
-              <a:t>✓  DB 인덱스 30개+ (GIN 전문검색 포함)</a:t>
+              <a:t>owner API: calling_rider 누락 추가</a:t>
             </a:r>
             <a:endParaRPr lang="en-US" sz="1000" dirty="0"/>
           </a:p>
-        </p:txBody>
-      </p:sp>
-      <p:sp>
-        <p:nvSpPr>
-          <p:cNvPr id="49" name="Text 47"/>
-          <p:cNvSpPr/>
-          <p:nvPr/>
-        </p:nvSpPr>
-        <p:spPr>
-          <a:xfrm>
-            <a:off x="8257032" y="4507992"/>
-            <a:ext cx="3401568" cy="338328"/>
-          </a:xfrm>
-          <a:prstGeom prst="rect">
-            <a:avLst/>
-          </a:prstGeom>
-          <a:noFill/>
-          <a:ln/>
-        </p:spPr>
-        <p:txBody>
-          <a:bodyPr wrap="square" rtlCol="0" anchor="ctr"/>
-          <a:lstStyle/>
           <a:p>
             <a:pPr indent="0" marL="0">
               <a:buNone/>
@@ -8145,32 +7945,10 @@
                   <a:srgbClr val="1F1235"/>
                 </a:solidFill>
               </a:rPr>
-              <a:t>✓  운영 RLS 정책 + Storage 버킷 정책</a:t>
+              <a:t>rider deliveries: ready 누락 추가</a:t>
             </a:r>
             <a:endParaRPr lang="en-US" sz="1000" dirty="0"/>
           </a:p>
-        </p:txBody>
-      </p:sp>
-      <p:sp>
-        <p:nvSpPr>
-          <p:cNvPr id="50" name="Text 48"/>
-          <p:cNvSpPr/>
-          <p:nvPr/>
-        </p:nvSpPr>
-        <p:spPr>
-          <a:xfrm>
-            <a:off x="8257032" y="4855464"/>
-            <a:ext cx="3401568" cy="338328"/>
-          </a:xfrm>
-          <a:prstGeom prst="rect">
-            <a:avLst/>
-          </a:prstGeom>
-          <a:noFill/>
-          <a:ln/>
-        </p:spPr>
-        <p:txBody>
-          <a:bodyPr wrap="square" rtlCol="0" anchor="ctr"/>
-          <a:lstStyle/>
           <a:p>
             <a:pPr indent="0" marL="0">
               <a:buNone/>
@@ -8181,32 +7959,10 @@
                   <a:srgbClr val="1F1235"/>
                 </a:solidFill>
               </a:rPr>
-              <a:t>✓  관리자 5탭: 통계·회원·가게·쿠폰·FCM 푸시</a:t>
+              <a:t>rider dashboard: 취소 감지 폴링 개선</a:t>
             </a:r>
             <a:endParaRPr lang="en-US" sz="1000" dirty="0"/>
           </a:p>
-        </p:txBody>
-      </p:sp>
-      <p:sp>
-        <p:nvSpPr>
-          <p:cNvPr id="51" name="Text 49"/>
-          <p:cNvSpPr/>
-          <p:nvPr/>
-        </p:nvSpPr>
-        <p:spPr>
-          <a:xfrm>
-            <a:off x="8257032" y="5202936"/>
-            <a:ext cx="3401568" cy="338328"/>
-          </a:xfrm>
-          <a:prstGeom prst="rect">
-            <a:avLst/>
-          </a:prstGeom>
-          <a:noFill/>
-          <a:ln/>
-        </p:spPr>
-        <p:txBody>
-          <a:bodyPr wrap="square" rtlCol="0" anchor="ctr"/>
-          <a:lstStyle/>
           <a:p>
             <a:pPr indent="0" marL="0">
               <a:buNone/>
@@ -8217,43 +7973,7 @@
                   <a:srgbClr val="1F1235"/>
                 </a:solidFill>
               </a:rPr>
-              <a:t>✓  404·에러·로딩·스플래시 페이지</a:t>
-            </a:r>
-            <a:endParaRPr lang="en-US" sz="1000" dirty="0"/>
-          </a:p>
-        </p:txBody>
-      </p:sp>
-      <p:sp>
-        <p:nvSpPr>
-          <p:cNvPr id="52" name="Text 50"/>
-          <p:cNvSpPr/>
-          <p:nvPr/>
-        </p:nvSpPr>
-        <p:spPr>
-          <a:xfrm>
-            <a:off x="8257032" y="5550408"/>
-            <a:ext cx="3401568" cy="338328"/>
-          </a:xfrm>
-          <a:prstGeom prst="rect">
-            <a:avLst/>
-          </a:prstGeom>
-          <a:noFill/>
-          <a:ln/>
-        </p:spPr>
-        <p:txBody>
-          <a:bodyPr wrap="square" rtlCol="0" anchor="ctr"/>
-          <a:lstStyle/>
-          <a:p>
-            <a:pPr indent="0" marL="0">
-              <a:buNone/>
-            </a:pPr>
-            <a:r>
-              <a:rPr lang="en-US" sz="1000" dirty="0">
-                <a:solidFill>
-                  <a:srgbClr val="1F1235"/>
-                </a:solidFill>
-              </a:rPr>
-              <a:t>✓  다크모드 + Tailwind dark: 클래스 전면 적용</a:t>
+              <a:t>prevOrderCountRef 초기화 버그 수정</a:t>
             </a:r>
             <a:endParaRPr lang="en-US" sz="1000" dirty="0"/>
           </a:p>
@@ -8316,14 +8036,14 @@
               <a:buNone/>
             </a:pPr>
             <a:r>
-              <a:rPr lang="en-US" sz="2600" b="1" dirty="0">
+              <a:rPr lang="en-US" sz="2400" b="1" dirty="0">
                 <a:solidFill>
                   <a:srgbClr val="4C1D95"/>
                 </a:solidFill>
               </a:rPr>
-              <a:t>🚀  Phase 1~3 완성 · 다음 단계 로드맵</a:t>
-            </a:r>
-            <a:endParaRPr lang="en-US" sz="2600" dirty="0"/>
+              <a:t>✅  완료된 기능 전체 목록 (4/17 최신)</a:t>
+            </a:r>
+            <a:endParaRPr lang="en-US" sz="2400" dirty="0"/>
           </a:p>
         </p:txBody>
       </p:sp>
@@ -8336,7 +8056,7 @@
         <p:spPr>
           <a:xfrm>
             <a:off x="365760" y="804672"/>
-            <a:ext cx="3657600" cy="45720"/>
+            <a:ext cx="3840480" cy="45720"/>
           </a:xfrm>
           <a:prstGeom prst="rect">
             <a:avLst/>
@@ -8360,12 +8080,552 @@
         </p:nvSpPr>
         <p:spPr>
           <a:xfrm>
-            <a:off x="365760" y="914400"/>
-            <a:ext cx="12070080" cy="548640"/>
+            <a:off x="228600" y="960120"/>
+            <a:ext cx="3749040" cy="2423160"/>
           </a:xfrm>
           <a:prstGeom prst="roundRect">
             <a:avLst>
-              <a:gd name="adj" fmla="val 20000"/>
+              <a:gd name="adj" fmla="val 5660"/>
+            </a:avLst>
+          </a:prstGeom>
+          <a:solidFill>
+            <a:srgbClr val="EDE9FE"/>
+          </a:solidFill>
+          <a:ln w="12700">
+            <a:solidFill>
+              <a:srgbClr val="6B21A8"/>
+            </a:solidFill>
+            <a:prstDash val="solid"/>
+          </a:ln>
+        </p:spPr>
+      </p:sp>
+      <p:sp>
+        <p:nvSpPr>
+          <p:cNvPr id="5" name="Shape 3"/>
+          <p:cNvSpPr/>
+          <p:nvPr/>
+        </p:nvSpPr>
+        <p:spPr>
+          <a:xfrm>
+            <a:off x="338328" y="1069848"/>
+            <a:ext cx="3529584" cy="384048"/>
+          </a:xfrm>
+          <a:prstGeom prst="roundRect">
+            <a:avLst>
+              <a:gd name="adj" fmla="val 19048"/>
+            </a:avLst>
+          </a:prstGeom>
+          <a:solidFill>
+            <a:srgbClr val="6B21A8"/>
+          </a:solidFill>
+          <a:ln w="12700">
+            <a:solidFill>
+              <a:srgbClr val="6B21A8"/>
+            </a:solidFill>
+            <a:prstDash val="solid"/>
+          </a:ln>
+        </p:spPr>
+      </p:sp>
+      <p:sp>
+        <p:nvSpPr>
+          <p:cNvPr id="6" name="Text 4"/>
+          <p:cNvSpPr/>
+          <p:nvPr/>
+        </p:nvSpPr>
+        <p:spPr>
+          <a:xfrm>
+            <a:off x="338328" y="1069848"/>
+            <a:ext cx="3529584" cy="384048"/>
+          </a:xfrm>
+          <a:prstGeom prst="rect">
+            <a:avLst/>
+          </a:prstGeom>
+          <a:noFill/>
+          <a:ln/>
+        </p:spPr>
+        <p:txBody>
+          <a:bodyPr wrap="square" rtlCol="0" anchor="ctr"/>
+          <a:lstStyle/>
+          <a:p>
+            <a:pPr algn="ctr" indent="0" marL="0">
+              <a:buNone/>
+            </a:pPr>
+            <a:r>
+              <a:rPr lang="en-US" sz="1200" b="1" dirty="0">
+                <a:solidFill>
+                  <a:srgbClr val="FFFFFF"/>
+                </a:solidFill>
+              </a:rPr>
+              <a:t>🔐 인증 / 사용자 관리</a:t>
+            </a:r>
+            <a:endParaRPr lang="en-US" sz="1200" dirty="0"/>
+          </a:p>
+        </p:txBody>
+      </p:sp>
+      <p:sp>
+        <p:nvSpPr>
+          <p:cNvPr id="7" name="Text 5"/>
+          <p:cNvSpPr/>
+          <p:nvPr/>
+        </p:nvSpPr>
+        <p:spPr>
+          <a:xfrm>
+            <a:off x="393192" y="1554480"/>
+            <a:ext cx="3401568" cy="338328"/>
+          </a:xfrm>
+          <a:prstGeom prst="rect">
+            <a:avLst/>
+          </a:prstGeom>
+          <a:noFill/>
+          <a:ln/>
+        </p:spPr>
+        <p:txBody>
+          <a:bodyPr wrap="square" rtlCol="0" anchor="ctr"/>
+          <a:lstStyle/>
+          <a:p>
+            <a:pPr indent="0" marL="0">
+              <a:buNone/>
+            </a:pPr>
+            <a:r>
+              <a:rPr lang="en-US" sz="1000" dirty="0">
+                <a:solidFill>
+                  <a:srgbClr val="1F1235"/>
+                </a:solidFill>
+              </a:rPr>
+              <a:t>✓  이메일 로그인/회원가입 + 지갑 자동생성</a:t>
+            </a:r>
+            <a:endParaRPr lang="en-US" sz="1000" dirty="0"/>
+          </a:p>
+        </p:txBody>
+      </p:sp>
+      <p:sp>
+        <p:nvSpPr>
+          <p:cNvPr id="8" name="Text 6"/>
+          <p:cNvSpPr/>
+          <p:nvPr/>
+        </p:nvSpPr>
+        <p:spPr>
+          <a:xfrm>
+            <a:off x="393192" y="1901952"/>
+            <a:ext cx="3401568" cy="338328"/>
+          </a:xfrm>
+          <a:prstGeom prst="rect">
+            <a:avLst/>
+          </a:prstGeom>
+          <a:noFill/>
+          <a:ln/>
+        </p:spPr>
+        <p:txBody>
+          <a:bodyPr wrap="square" rtlCol="0" anchor="ctr"/>
+          <a:lstStyle/>
+          <a:p>
+            <a:pPr indent="0" marL="0">
+              <a:buNone/>
+            </a:pPr>
+            <a:r>
+              <a:rPr lang="en-US" sz="1000" dirty="0">
+                <a:solidFill>
+                  <a:srgbClr val="1F1235"/>
+                </a:solidFill>
+              </a:rPr>
+              <a:t>✓  카카오 소셜 로그인 (비즈니스 인증 후 재추가)</a:t>
+            </a:r>
+            <a:endParaRPr lang="en-US" sz="1000" dirty="0"/>
+          </a:p>
+        </p:txBody>
+      </p:sp>
+      <p:sp>
+        <p:nvSpPr>
+          <p:cNvPr id="9" name="Text 7"/>
+          <p:cNvSpPr/>
+          <p:nvPr/>
+        </p:nvSpPr>
+        <p:spPr>
+          <a:xfrm>
+            <a:off x="393192" y="2249424"/>
+            <a:ext cx="3401568" cy="338328"/>
+          </a:xfrm>
+          <a:prstGeom prst="rect">
+            <a:avLst/>
+          </a:prstGeom>
+          <a:noFill/>
+          <a:ln/>
+        </p:spPr>
+        <p:txBody>
+          <a:bodyPr wrap="square" rtlCol="0" anchor="ctr"/>
+          <a:lstStyle/>
+          <a:p>
+            <a:pPr indent="0" marL="0">
+              <a:buNone/>
+            </a:pPr>
+            <a:r>
+              <a:rPr lang="en-US" sz="1000" dirty="0">
+                <a:solidFill>
+                  <a:srgbClr val="1F1235"/>
+                </a:solidFill>
+              </a:rPr>
+              <a:t>✓  RBAC 미들웨어 (user/owner/rider/admin)</a:t>
+            </a:r>
+            <a:endParaRPr lang="en-US" sz="1000" dirty="0"/>
+          </a:p>
+        </p:txBody>
+      </p:sp>
+      <p:sp>
+        <p:nvSpPr>
+          <p:cNvPr id="10" name="Text 8"/>
+          <p:cNvSpPr/>
+          <p:nvPr/>
+        </p:nvSpPr>
+        <p:spPr>
+          <a:xfrm>
+            <a:off x="393192" y="2596896"/>
+            <a:ext cx="3401568" cy="338328"/>
+          </a:xfrm>
+          <a:prstGeom prst="rect">
+            <a:avLst/>
+          </a:prstGeom>
+          <a:noFill/>
+          <a:ln/>
+        </p:spPr>
+        <p:txBody>
+          <a:bodyPr wrap="square" rtlCol="0" anchor="ctr"/>
+          <a:lstStyle/>
+          <a:p>
+            <a:pPr indent="0" marL="0">
+              <a:buNone/>
+            </a:pPr>
+            <a:r>
+              <a:rPr lang="en-US" sz="1000" dirty="0">
+                <a:solidFill>
+                  <a:srgbClr val="1F1235"/>
+                </a:solidFill>
+              </a:rPr>
+              <a:t>✓  비밀번호 찾기·재설정 + 검색 히스토리</a:t>
+            </a:r>
+            <a:endParaRPr lang="en-US" sz="1000" dirty="0"/>
+          </a:p>
+        </p:txBody>
+      </p:sp>
+      <p:sp>
+        <p:nvSpPr>
+          <p:cNvPr id="11" name="Text 9"/>
+          <p:cNvSpPr/>
+          <p:nvPr/>
+        </p:nvSpPr>
+        <p:spPr>
+          <a:xfrm>
+            <a:off x="393192" y="2944368"/>
+            <a:ext cx="3401568" cy="338328"/>
+          </a:xfrm>
+          <a:prstGeom prst="rect">
+            <a:avLst/>
+          </a:prstGeom>
+          <a:noFill/>
+          <a:ln/>
+        </p:spPr>
+        <p:txBody>
+          <a:bodyPr wrap="square" rtlCol="0" anchor="ctr"/>
+          <a:lstStyle/>
+          <a:p>
+            <a:pPr indent="0" marL="0">
+              <a:buNone/>
+            </a:pPr>
+            <a:r>
+              <a:rPr lang="en-US" sz="1000" dirty="0">
+                <a:solidFill>
+                  <a:srgbClr val="1F1235"/>
+                </a:solidFill>
+              </a:rPr>
+              <a:t>✓  프로필 수정 + 다중 배달 주소 + 레퍼럴 재설계</a:t>
+            </a:r>
+            <a:endParaRPr lang="en-US" sz="1000" dirty="0"/>
+          </a:p>
+        </p:txBody>
+      </p:sp>
+      <p:sp>
+        <p:nvSpPr>
+          <p:cNvPr id="12" name="Shape 10"/>
+          <p:cNvSpPr/>
+          <p:nvPr/>
+        </p:nvSpPr>
+        <p:spPr>
+          <a:xfrm>
+            <a:off x="4160520" y="960120"/>
+            <a:ext cx="3749040" cy="2423160"/>
+          </a:xfrm>
+          <a:prstGeom prst="roundRect">
+            <a:avLst>
+              <a:gd name="adj" fmla="val 5660"/>
+            </a:avLst>
+          </a:prstGeom>
+          <a:solidFill>
+            <a:srgbClr val="E0F2FE"/>
+          </a:solidFill>
+          <a:ln w="12700">
+            <a:solidFill>
+              <a:srgbClr val="0369A1"/>
+            </a:solidFill>
+            <a:prstDash val="solid"/>
+          </a:ln>
+        </p:spPr>
+      </p:sp>
+      <p:sp>
+        <p:nvSpPr>
+          <p:cNvPr id="13" name="Shape 11"/>
+          <p:cNvSpPr/>
+          <p:nvPr/>
+        </p:nvSpPr>
+        <p:spPr>
+          <a:xfrm>
+            <a:off x="4270248" y="1069848"/>
+            <a:ext cx="3529584" cy="384048"/>
+          </a:xfrm>
+          <a:prstGeom prst="roundRect">
+            <a:avLst>
+              <a:gd name="adj" fmla="val 19048"/>
+            </a:avLst>
+          </a:prstGeom>
+          <a:solidFill>
+            <a:srgbClr val="0369A1"/>
+          </a:solidFill>
+          <a:ln w="12700">
+            <a:solidFill>
+              <a:srgbClr val="0369A1"/>
+            </a:solidFill>
+            <a:prstDash val="solid"/>
+          </a:ln>
+        </p:spPr>
+      </p:sp>
+      <p:sp>
+        <p:nvSpPr>
+          <p:cNvPr id="14" name="Text 12"/>
+          <p:cNvSpPr/>
+          <p:nvPr/>
+        </p:nvSpPr>
+        <p:spPr>
+          <a:xfrm>
+            <a:off x="4270248" y="1069848"/>
+            <a:ext cx="3529584" cy="384048"/>
+          </a:xfrm>
+          <a:prstGeom prst="rect">
+            <a:avLst/>
+          </a:prstGeom>
+          <a:noFill/>
+          <a:ln/>
+        </p:spPr>
+        <p:txBody>
+          <a:bodyPr wrap="square" rtlCol="0" anchor="ctr"/>
+          <a:lstStyle/>
+          <a:p>
+            <a:pPr algn="ctr" indent="0" marL="0">
+              <a:buNone/>
+            </a:pPr>
+            <a:r>
+              <a:rPr lang="en-US" sz="1200" b="1" dirty="0">
+                <a:solidFill>
+                  <a:srgbClr val="FFFFFF"/>
+                </a:solidFill>
+              </a:rPr>
+              <a:t>🏠 사용자 탭 (4개) + UX</a:t>
+            </a:r>
+            <a:endParaRPr lang="en-US" sz="1200" dirty="0"/>
+          </a:p>
+        </p:txBody>
+      </p:sp>
+      <p:sp>
+        <p:nvSpPr>
+          <p:cNvPr id="15" name="Text 13"/>
+          <p:cNvSpPr/>
+          <p:nvPr/>
+        </p:nvSpPr>
+        <p:spPr>
+          <a:xfrm>
+            <a:off x="4325112" y="1554480"/>
+            <a:ext cx="3401568" cy="338328"/>
+          </a:xfrm>
+          <a:prstGeom prst="rect">
+            <a:avLst/>
+          </a:prstGeom>
+          <a:noFill/>
+          <a:ln/>
+        </p:spPr>
+        <p:txBody>
+          <a:bodyPr wrap="square" rtlCol="0" anchor="ctr"/>
+          <a:lstStyle/>
+          <a:p>
+            <a:pPr indent="0" marL="0">
+              <a:buNone/>
+            </a:pPr>
+            <a:r>
+              <a:rPr lang="en-US" sz="1000" dirty="0">
+                <a:solidFill>
+                  <a:srgbClr val="1F1235"/>
+                </a:solidFill>
+              </a:rPr>
+              <a:t>✓  홈: 카테고리·검색(GIN)·인기가게·광고</a:t>
+            </a:r>
+            <a:endParaRPr lang="en-US" sz="1000" dirty="0"/>
+          </a:p>
+        </p:txBody>
+      </p:sp>
+      <p:sp>
+        <p:nvSpPr>
+          <p:cNvPr id="16" name="Text 14"/>
+          <p:cNvSpPr/>
+          <p:nvPr/>
+        </p:nvSpPr>
+        <p:spPr>
+          <a:xfrm>
+            <a:off x="4325112" y="1901952"/>
+            <a:ext cx="3401568" cy="338328"/>
+          </a:xfrm>
+          <a:prstGeom prst="rect">
+            <a:avLst/>
+          </a:prstGeom>
+          <a:noFill/>
+          <a:ln/>
+        </p:spPr>
+        <p:txBody>
+          <a:bodyPr wrap="square" rtlCol="0" anchor="ctr"/>
+          <a:lstStyle/>
+          <a:p>
+            <a:pPr indent="0" marL="0">
+              <a:buNone/>
+            </a:pPr>
+            <a:r>
+              <a:rPr lang="en-US" sz="1000" dirty="0">
+                <a:solidFill>
+                  <a:srgbClr val="1F1235"/>
+                </a:solidFill>
+              </a:rPr>
+              <a:t>✓  지갑: 퍼플 재디자인 + Pi UI + 출석 Tap-to-Earn</a:t>
+            </a:r>
+            <a:endParaRPr lang="en-US" sz="1000" dirty="0"/>
+          </a:p>
+        </p:txBody>
+      </p:sp>
+      <p:sp>
+        <p:nvSpPr>
+          <p:cNvPr id="17" name="Text 15"/>
+          <p:cNvSpPr/>
+          <p:nvPr/>
+        </p:nvSpPr>
+        <p:spPr>
+          <a:xfrm>
+            <a:off x="4325112" y="2249424"/>
+            <a:ext cx="3401568" cy="338328"/>
+          </a:xfrm>
+          <a:prstGeom prst="rect">
+            <a:avLst/>
+          </a:prstGeom>
+          <a:noFill/>
+          <a:ln/>
+        </p:spPr>
+        <p:txBody>
+          <a:bodyPr wrap="square" rtlCol="0" anchor="ctr"/>
+          <a:lstStyle/>
+          <a:p>
+            <a:pPr indent="0" marL="0">
+              <a:buNone/>
+            </a:pPr>
+            <a:r>
+              <a:rPr lang="en-US" sz="1000" dirty="0">
+                <a:solidFill>
+                  <a:srgbClr val="1F1235"/>
+                </a:solidFill>
+              </a:rPr>
+              <a:t>✓  PICK주문: Realtime 추적 + 상세 + 재주문</a:t>
+            </a:r>
+            <a:endParaRPr lang="en-US" sz="1000" dirty="0"/>
+          </a:p>
+        </p:txBody>
+      </p:sp>
+      <p:sp>
+        <p:nvSpPr>
+          <p:cNvPr id="18" name="Text 16"/>
+          <p:cNvSpPr/>
+          <p:nvPr/>
+        </p:nvSpPr>
+        <p:spPr>
+          <a:xfrm>
+            <a:off x="4325112" y="2596896"/>
+            <a:ext cx="3401568" cy="338328"/>
+          </a:xfrm>
+          <a:prstGeom prst="rect">
+            <a:avLst/>
+          </a:prstGeom>
+          <a:noFill/>
+          <a:ln/>
+        </p:spPr>
+        <p:txBody>
+          <a:bodyPr wrap="square" rtlCol="0" anchor="ctr"/>
+          <a:lstStyle/>
+          <a:p>
+            <a:pPr indent="0" marL="0">
+              <a:buNone/>
+            </a:pPr>
+            <a:r>
+              <a:rPr lang="en-US" sz="1000" dirty="0">
+                <a:solidFill>
+                  <a:srgbClr val="1F1235"/>
+                </a:solidFill>
+              </a:rPr>
+              <a:t>✓  알림 드로어 + 딥링크 + 자동 트리거</a:t>
+            </a:r>
+            <a:endParaRPr lang="en-US" sz="1000" dirty="0"/>
+          </a:p>
+        </p:txBody>
+      </p:sp>
+      <p:sp>
+        <p:nvSpPr>
+          <p:cNvPr id="19" name="Text 17"/>
+          <p:cNvSpPr/>
+          <p:nvPr/>
+        </p:nvSpPr>
+        <p:spPr>
+          <a:xfrm>
+            <a:off x="4325112" y="2944368"/>
+            <a:ext cx="3401568" cy="338328"/>
+          </a:xfrm>
+          <a:prstGeom prst="rect">
+            <a:avLst/>
+          </a:prstGeom>
+          <a:noFill/>
+          <a:ln/>
+        </p:spPr>
+        <p:txBody>
+          <a:bodyPr wrap="square" rtlCol="0" anchor="ctr"/>
+          <a:lstStyle/>
+          <a:p>
+            <a:pPr indent="0" marL="0">
+              <a:buNone/>
+            </a:pPr>
+            <a:r>
+              <a:rPr lang="en-US" sz="1000" dirty="0">
+                <a:solidFill>
+                  <a:srgbClr val="1F1235"/>
+                </a:solidFill>
+              </a:rPr>
+              <a:t>✓  MyPICK 초대 3버튼 (사용자·사장님·라이더)</a:t>
+            </a:r>
+            <a:endParaRPr lang="en-US" sz="1000" dirty="0"/>
+          </a:p>
+        </p:txBody>
+      </p:sp>
+      <p:sp>
+        <p:nvSpPr>
+          <p:cNvPr id="20" name="Shape 18"/>
+          <p:cNvSpPr/>
+          <p:nvPr/>
+        </p:nvSpPr>
+        <p:spPr>
+          <a:xfrm>
+            <a:off x="8092440" y="960120"/>
+            <a:ext cx="3749040" cy="2423160"/>
+          </a:xfrm>
+          <a:prstGeom prst="roundRect">
+            <a:avLst>
+              <a:gd name="adj" fmla="val 5660"/>
             </a:avLst>
           </a:prstGeom>
           <a:solidFill>
@@ -8381,58 +8641,22 @@
       </p:sp>
       <p:sp>
         <p:nvSpPr>
-          <p:cNvPr id="5" name="Text 3"/>
-          <p:cNvSpPr/>
-          <p:nvPr/>
-        </p:nvSpPr>
-        <p:spPr>
-          <a:xfrm>
-            <a:off x="365760" y="914400"/>
-            <a:ext cx="12070080" cy="548640"/>
-          </a:xfrm>
-          <a:prstGeom prst="rect">
-            <a:avLst/>
-          </a:prstGeom>
-          <a:noFill/>
-          <a:ln/>
-        </p:spPr>
-        <p:txBody>
-          <a:bodyPr wrap="square" rtlCol="0" anchor="ctr"/>
-          <a:lstStyle/>
-          <a:p>
-            <a:pPr algn="ctr" indent="0" marL="0">
-              <a:buNone/>
-            </a:pPr>
-            <a:r>
-              <a:rPr lang="en-US" sz="1400" b="1" dirty="0">
-                <a:solidFill>
-                  <a:srgbClr val="16A34A"/>
-                </a:solidFill>
-              </a:rPr>
-              <a:t>🎉  Phase 1~3 완성! 55개+ 기능 구현 · 미착수 기능 0개 · Pi Network 연동만 남음</a:t>
-            </a:r>
-            <a:endParaRPr lang="en-US" sz="1400" dirty="0"/>
-          </a:p>
-        </p:txBody>
-      </p:sp>
-      <p:sp>
-        <p:nvSpPr>
-          <p:cNvPr id="6" name="Shape 4"/>
-          <p:cNvSpPr/>
-          <p:nvPr/>
-        </p:nvSpPr>
-        <p:spPr>
-          <a:xfrm>
-            <a:off x="365760" y="1600200"/>
-            <a:ext cx="1325880" cy="384048"/>
+          <p:cNvPr id="21" name="Shape 19"/>
+          <p:cNvSpPr/>
+          <p:nvPr/>
+        </p:nvSpPr>
+        <p:spPr>
+          <a:xfrm>
+            <a:off x="8202168" y="1069848"/>
+            <a:ext cx="3529584" cy="384048"/>
           </a:xfrm>
           <a:prstGeom prst="roundRect">
             <a:avLst>
-              <a:gd name="adj" fmla="val 23810"/>
+              <a:gd name="adj" fmla="val 19048"/>
             </a:avLst>
           </a:prstGeom>
           <a:solidFill>
-            <a:srgbClr val="DCFCE7"/>
+            <a:srgbClr val="16A34A"/>
           </a:solidFill>
           <a:ln w="12700">
             <a:solidFill>
@@ -8444,14 +8668,14 @@
       </p:sp>
       <p:sp>
         <p:nvSpPr>
-          <p:cNvPr id="7" name="Text 5"/>
-          <p:cNvSpPr/>
-          <p:nvPr/>
-        </p:nvSpPr>
-        <p:spPr>
-          <a:xfrm>
-            <a:off x="365760" y="1600200"/>
-            <a:ext cx="1325880" cy="384048"/>
+          <p:cNvPr id="22" name="Text 20"/>
+          <p:cNvSpPr/>
+          <p:nvPr/>
+        </p:nvSpPr>
+        <p:spPr>
+          <a:xfrm>
+            <a:off x="8202168" y="1069848"/>
+            <a:ext cx="3529584" cy="384048"/>
           </a:xfrm>
           <a:prstGeom prst="rect">
             <a:avLst/>
@@ -8467,493 +8691,211 @@
               <a:buNone/>
             </a:pPr>
             <a:r>
-              <a:rPr lang="en-US" sz="1100" b="1" dirty="0">
-                <a:solidFill>
-                  <a:srgbClr val="16A34A"/>
-                </a:solidFill>
-              </a:rPr>
-              <a:t>✅ Phase 1~3</a:t>
-            </a:r>
-            <a:endParaRPr lang="en-US" sz="1100" dirty="0"/>
-          </a:p>
-        </p:txBody>
-      </p:sp>
-      <p:sp>
-        <p:nvSpPr>
-          <p:cNvPr id="8" name="Shape 6"/>
-          <p:cNvSpPr/>
-          <p:nvPr/>
-        </p:nvSpPr>
-        <p:spPr>
-          <a:xfrm>
-            <a:off x="228600" y="2057400"/>
-            <a:ext cx="3749040" cy="1280160"/>
+              <a:rPr lang="en-US" sz="1200" b="1" dirty="0">
+                <a:solidFill>
+                  <a:srgbClr val="FFFFFF"/>
+                </a:solidFill>
+              </a:rPr>
+              <a:t>🛒 가맹점 / 주문 플로우</a:t>
+            </a:r>
+            <a:endParaRPr lang="en-US" sz="1200" dirty="0"/>
+          </a:p>
+        </p:txBody>
+      </p:sp>
+      <p:sp>
+        <p:nvSpPr>
+          <p:cNvPr id="23" name="Text 21"/>
+          <p:cNvSpPr/>
+          <p:nvPr/>
+        </p:nvSpPr>
+        <p:spPr>
+          <a:xfrm>
+            <a:off x="8257032" y="1554480"/>
+            <a:ext cx="3401568" cy="338328"/>
+          </a:xfrm>
+          <a:prstGeom prst="rect">
+            <a:avLst/>
+          </a:prstGeom>
+          <a:noFill/>
+          <a:ln/>
+        </p:spPr>
+        <p:txBody>
+          <a:bodyPr wrap="square" rtlCol="0" anchor="ctr"/>
+          <a:lstStyle/>
+          <a:p>
+            <a:pPr indent="0" marL="0">
+              <a:buNone/>
+            </a:pPr>
+            <a:r>
+              <a:rPr lang="en-US" sz="1000" dirty="0">
+                <a:solidFill>
+                  <a:srgbClr val="1F1235"/>
+                </a:solidFill>
+              </a:rPr>
+              <a:t>✓  가맹점 목록 (카테고리/전문검색 필터)</a:t>
+            </a:r>
+            <a:endParaRPr lang="en-US" sz="1000" dirty="0"/>
+          </a:p>
+        </p:txBody>
+      </p:sp>
+      <p:sp>
+        <p:nvSpPr>
+          <p:cNvPr id="24" name="Text 22"/>
+          <p:cNvSpPr/>
+          <p:nvPr/>
+        </p:nvSpPr>
+        <p:spPr>
+          <a:xfrm>
+            <a:off x="8257032" y="1901952"/>
+            <a:ext cx="3401568" cy="338328"/>
+          </a:xfrm>
+          <a:prstGeom prst="rect">
+            <a:avLst/>
+          </a:prstGeom>
+          <a:noFill/>
+          <a:ln/>
+        </p:spPr>
+        <p:txBody>
+          <a:bodyPr wrap="square" rtlCol="0" anchor="ctr"/>
+          <a:lstStyle/>
+          <a:p>
+            <a:pPr indent="0" marL="0">
+              <a:buNone/>
+            </a:pPr>
+            <a:r>
+              <a:rPr lang="en-US" sz="1000" dirty="0">
+                <a:solidFill>
+                  <a:srgbClr val="1F1235"/>
+                </a:solidFill>
+              </a:rPr>
+              <a:t>✓  가맹점 상세 + 메뉴 옵션 + 리뷰(이미지)</a:t>
+            </a:r>
+            <a:endParaRPr lang="en-US" sz="1000" dirty="0"/>
+          </a:p>
+        </p:txBody>
+      </p:sp>
+      <p:sp>
+        <p:nvSpPr>
+          <p:cNvPr id="25" name="Text 23"/>
+          <p:cNvSpPr/>
+          <p:nvPr/>
+        </p:nvSpPr>
+        <p:spPr>
+          <a:xfrm>
+            <a:off x="8257032" y="2249424"/>
+            <a:ext cx="3401568" cy="338328"/>
+          </a:xfrm>
+          <a:prstGeom prst="rect">
+            <a:avLst/>
+          </a:prstGeom>
+          <a:noFill/>
+          <a:ln/>
+        </p:spPr>
+        <p:txBody>
+          <a:bodyPr wrap="square" rtlCol="0" anchor="ctr"/>
+          <a:lstStyle/>
+          <a:p>
+            <a:pPr indent="0" marL="0">
+              <a:buNone/>
+            </a:pPr>
+            <a:r>
+              <a:rPr lang="en-US" sz="1000" dirty="0">
+                <a:solidFill>
+                  <a:srgbClr val="1F1235"/>
+                </a:solidFill>
+              </a:rPr>
+              <a:t>✓  쿠폰(3종) + PICK 할인 + 배달 메모</a:t>
+            </a:r>
+            <a:endParaRPr lang="en-US" sz="1000" dirty="0"/>
+          </a:p>
+        </p:txBody>
+      </p:sp>
+      <p:sp>
+        <p:nvSpPr>
+          <p:cNvPr id="26" name="Text 24"/>
+          <p:cNvSpPr/>
+          <p:nvPr/>
+        </p:nvSpPr>
+        <p:spPr>
+          <a:xfrm>
+            <a:off x="8257032" y="2596896"/>
+            <a:ext cx="3401568" cy="338328"/>
+          </a:xfrm>
+          <a:prstGeom prst="rect">
+            <a:avLst/>
+          </a:prstGeom>
+          <a:noFill/>
+          <a:ln/>
+        </p:spPr>
+        <p:txBody>
+          <a:bodyPr wrap="square" rtlCol="0" anchor="ctr"/>
+          <a:lstStyle/>
+          <a:p>
+            <a:pPr indent="0" marL="0">
+              <a:buNone/>
+            </a:pPr>
+            <a:r>
+              <a:rPr lang="en-US" sz="1000" dirty="0">
+                <a:solidFill>
+                  <a:srgbClr val="1F1235"/>
+                </a:solidFill>
+              </a:rPr>
+              <a:t>✓  PICK 결제 + 토스페이먼츠 카드 결제</a:t>
+            </a:r>
+            <a:endParaRPr lang="en-US" sz="1000" dirty="0"/>
+          </a:p>
+        </p:txBody>
+      </p:sp>
+      <p:sp>
+        <p:nvSpPr>
+          <p:cNvPr id="27" name="Text 25"/>
+          <p:cNvSpPr/>
+          <p:nvPr/>
+        </p:nvSpPr>
+        <p:spPr>
+          <a:xfrm>
+            <a:off x="8257032" y="2944368"/>
+            <a:ext cx="3401568" cy="338328"/>
+          </a:xfrm>
+          <a:prstGeom prst="rect">
+            <a:avLst/>
+          </a:prstGeom>
+          <a:noFill/>
+          <a:ln/>
+        </p:spPr>
+        <p:txBody>
+          <a:bodyPr wrap="square" rtlCol="0" anchor="ctr"/>
+          <a:lstStyle/>
+          <a:p>
+            <a:pPr indent="0" marL="0">
+              <a:buNone/>
+            </a:pPr>
+            <a:r>
+              <a:rPr lang="en-US" sz="1000" dirty="0">
+                <a:solidFill>
+                  <a:srgbClr val="1F1235"/>
+                </a:solidFill>
+              </a:rPr>
+              <a:t>✓  주문 생성 → PICK 차감 → 완료 적립</a:t>
+            </a:r>
+            <a:endParaRPr lang="en-US" sz="1000" dirty="0"/>
+          </a:p>
+        </p:txBody>
+      </p:sp>
+      <p:sp>
+        <p:nvSpPr>
+          <p:cNvPr id="28" name="Shape 26"/>
+          <p:cNvSpPr/>
+          <p:nvPr/>
+        </p:nvSpPr>
+        <p:spPr>
+          <a:xfrm>
+            <a:off x="228600" y="3566160"/>
+            <a:ext cx="3749040" cy="2423160"/>
           </a:xfrm>
           <a:prstGeom prst="roundRect">
             <a:avLst>
-              <a:gd name="adj" fmla="val 9286"/>
-            </a:avLst>
-          </a:prstGeom>
-          <a:solidFill>
-            <a:srgbClr val="FFFFFF"/>
-          </a:solidFill>
-          <a:ln w="12700">
-            <a:solidFill>
-              <a:srgbClr val="E9D5FF"/>
-            </a:solidFill>
-            <a:prstDash val="solid"/>
-          </a:ln>
-        </p:spPr>
-      </p:sp>
-      <p:sp>
-        <p:nvSpPr>
-          <p:cNvPr id="9" name="Shape 7"/>
-          <p:cNvSpPr/>
-          <p:nvPr/>
-        </p:nvSpPr>
-        <p:spPr>
-          <a:xfrm>
-            <a:off x="365760" y="2176272"/>
-            <a:ext cx="3474720" cy="329184"/>
-          </a:xfrm>
-          <a:prstGeom prst="roundRect">
-            <a:avLst>
-              <a:gd name="adj" fmla="val 22222"/>
-            </a:avLst>
-          </a:prstGeom>
-          <a:solidFill>
-            <a:srgbClr val="DCFCE7"/>
-          </a:solidFill>
-          <a:ln w="12700">
-            <a:solidFill>
-              <a:srgbClr val="DCFCE7"/>
-            </a:solidFill>
-            <a:prstDash val="solid"/>
-          </a:ln>
-        </p:spPr>
-      </p:sp>
-      <p:sp>
-        <p:nvSpPr>
-          <p:cNvPr id="10" name="Text 8"/>
-          <p:cNvSpPr/>
-          <p:nvPr/>
-        </p:nvSpPr>
-        <p:spPr>
-          <a:xfrm>
-            <a:off x="365760" y="2176272"/>
-            <a:ext cx="3474720" cy="329184"/>
-          </a:xfrm>
-          <a:prstGeom prst="rect">
-            <a:avLst/>
-          </a:prstGeom>
-          <a:noFill/>
-          <a:ln/>
-        </p:spPr>
-        <p:txBody>
-          <a:bodyPr wrap="square" rtlCol="0" anchor="ctr"/>
-          <a:lstStyle/>
-          <a:p>
-            <a:pPr algn="ctr" indent="0" marL="0">
-              <a:buNone/>
-            </a:pPr>
-            <a:r>
-              <a:rPr lang="en-US" sz="1200" b="1" dirty="0">
-                <a:solidFill>
-                  <a:srgbClr val="16A34A"/>
-                </a:solidFill>
-              </a:rPr>
-              <a:t>인증 · 지갑 · 주문 플로우</a:t>
-            </a:r>
-            <a:endParaRPr lang="en-US" sz="1200" dirty="0"/>
-          </a:p>
-        </p:txBody>
-      </p:sp>
-      <p:sp>
-        <p:nvSpPr>
-          <p:cNvPr id="11" name="Text 9"/>
-          <p:cNvSpPr/>
-          <p:nvPr/>
-        </p:nvSpPr>
-        <p:spPr>
-          <a:xfrm>
-            <a:off x="393192" y="2569464"/>
-            <a:ext cx="3419856" cy="694944"/>
-          </a:xfrm>
-          <a:prstGeom prst="rect">
-            <a:avLst/>
-          </a:prstGeom>
-          <a:noFill/>
-          <a:ln/>
-        </p:spPr>
-        <p:txBody>
-          <a:bodyPr wrap="square" rtlCol="0" anchor="ctr"/>
-          <a:lstStyle/>
-          <a:p>
-            <a:pPr indent="0" marL="0">
-              <a:buNone/>
-            </a:pPr>
-            <a:r>
-              <a:rPr lang="en-US" sz="1050" dirty="0">
-                <a:solidFill>
-                  <a:srgbClr val="6B7280"/>
-                </a:solidFill>
-              </a:rPr>
-              <a:t>이메일 로그인 (카카오 비즈니스 후 추가)</a:t>
-            </a:r>
-            <a:endParaRPr lang="en-US" sz="1050" dirty="0"/>
-          </a:p>
-          <a:p>
-            <a:pPr indent="0" marL="0">
-              <a:buNone/>
-            </a:pPr>
-            <a:r>
-              <a:rPr lang="en-US" sz="1050" dirty="0">
-                <a:solidFill>
-                  <a:srgbClr val="6B7280"/>
-                </a:solidFill>
-              </a:rPr>
-              <a:t>PICK 토큰 지갑 + 토스페이먼츠</a:t>
-            </a:r>
-            <a:endParaRPr lang="en-US" sz="1050" dirty="0"/>
-          </a:p>
-          <a:p>
-            <a:pPr indent="0" marL="0">
-              <a:buNone/>
-            </a:pPr>
-            <a:r>
-              <a:rPr lang="en-US" sz="1050" dirty="0">
-                <a:solidFill>
-                  <a:srgbClr val="6B7280"/>
-                </a:solidFill>
-              </a:rPr>
-              <a:t>Realtime 주문 추적 완성</a:t>
-            </a:r>
-            <a:endParaRPr lang="en-US" sz="1050" dirty="0"/>
-          </a:p>
-        </p:txBody>
-      </p:sp>
-      <p:sp>
-        <p:nvSpPr>
-          <p:cNvPr id="12" name="Shape 10"/>
-          <p:cNvSpPr/>
-          <p:nvPr/>
-        </p:nvSpPr>
-        <p:spPr>
-          <a:xfrm>
-            <a:off x="4133088" y="2057400"/>
-            <a:ext cx="3749040" cy="1280160"/>
-          </a:xfrm>
-          <a:prstGeom prst="roundRect">
-            <a:avLst>
-              <a:gd name="adj" fmla="val 9286"/>
-            </a:avLst>
-          </a:prstGeom>
-          <a:solidFill>
-            <a:srgbClr val="FFFFFF"/>
-          </a:solidFill>
-          <a:ln w="12700">
-            <a:solidFill>
-              <a:srgbClr val="E9D5FF"/>
-            </a:solidFill>
-            <a:prstDash val="solid"/>
-          </a:ln>
-        </p:spPr>
-      </p:sp>
-      <p:sp>
-        <p:nvSpPr>
-          <p:cNvPr id="13" name="Shape 11"/>
-          <p:cNvSpPr/>
-          <p:nvPr/>
-        </p:nvSpPr>
-        <p:spPr>
-          <a:xfrm>
-            <a:off x="4270248" y="2176272"/>
-            <a:ext cx="3474720" cy="329184"/>
-          </a:xfrm>
-          <a:prstGeom prst="roundRect">
-            <a:avLst>
-              <a:gd name="adj" fmla="val 22222"/>
-            </a:avLst>
-          </a:prstGeom>
-          <a:solidFill>
-            <a:srgbClr val="DCFCE7"/>
-          </a:solidFill>
-          <a:ln w="12700">
-            <a:solidFill>
-              <a:srgbClr val="DCFCE7"/>
-            </a:solidFill>
-            <a:prstDash val="solid"/>
-          </a:ln>
-        </p:spPr>
-      </p:sp>
-      <p:sp>
-        <p:nvSpPr>
-          <p:cNvPr id="14" name="Text 12"/>
-          <p:cNvSpPr/>
-          <p:nvPr/>
-        </p:nvSpPr>
-        <p:spPr>
-          <a:xfrm>
-            <a:off x="4270248" y="2176272"/>
-            <a:ext cx="3474720" cy="329184"/>
-          </a:xfrm>
-          <a:prstGeom prst="rect">
-            <a:avLst/>
-          </a:prstGeom>
-          <a:noFill/>
-          <a:ln/>
-        </p:spPr>
-        <p:txBody>
-          <a:bodyPr wrap="square" rtlCol="0" anchor="ctr"/>
-          <a:lstStyle/>
-          <a:p>
-            <a:pPr algn="ctr" indent="0" marL="0">
-              <a:buNone/>
-            </a:pPr>
-            <a:r>
-              <a:rPr lang="en-US" sz="1200" b="1" dirty="0">
-                <a:solidFill>
-                  <a:srgbClr val="16A34A"/>
-                </a:solidFill>
-              </a:rPr>
-              <a:t>사장님 · 라이더 · 관리자</a:t>
-            </a:r>
-            <a:endParaRPr lang="en-US" sz="1200" dirty="0"/>
-          </a:p>
-        </p:txBody>
-      </p:sp>
-      <p:sp>
-        <p:nvSpPr>
-          <p:cNvPr id="15" name="Text 13"/>
-          <p:cNvSpPr/>
-          <p:nvPr/>
-        </p:nvSpPr>
-        <p:spPr>
-          <a:xfrm>
-            <a:off x="4297680" y="2569464"/>
-            <a:ext cx="3419856" cy="694944"/>
-          </a:xfrm>
-          <a:prstGeom prst="rect">
-            <a:avLst/>
-          </a:prstGeom>
-          <a:noFill/>
-          <a:ln/>
-        </p:spPr>
-        <p:txBody>
-          <a:bodyPr wrap="square" rtlCol="0" anchor="ctr"/>
-          <a:lstStyle/>
-          <a:p>
-            <a:pPr indent="0" marL="0">
-              <a:buNone/>
-            </a:pPr>
-            <a:r>
-              <a:rPr lang="en-US" sz="1050" dirty="0">
-                <a:solidFill>
-                  <a:srgbClr val="6B7280"/>
-                </a:solidFill>
-              </a:rPr>
-              <a:t>사장님 주문/메뉴/정산/통계</a:t>
-            </a:r>
-            <a:endParaRPr lang="en-US" sz="1050" dirty="0"/>
-          </a:p>
-          <a:p>
-            <a:pPr indent="0" marL="0">
-              <a:buNone/>
-            </a:pPr>
-            <a:r>
-              <a:rPr lang="en-US" sz="1050" dirty="0">
-                <a:solidFill>
-                  <a:srgbClr val="6B7280"/>
-                </a:solidFill>
-              </a:rPr>
-              <a:t>라이더 수락/위치공유/수익</a:t>
-            </a:r>
-            <a:endParaRPr lang="en-US" sz="1050" dirty="0"/>
-          </a:p>
-          <a:p>
-            <a:pPr indent="0" marL="0">
-              <a:buNone/>
-            </a:pPr>
-            <a:r>
-              <a:rPr lang="en-US" sz="1050" dirty="0">
-                <a:solidFill>
-                  <a:srgbClr val="6B7280"/>
-                </a:solidFill>
-              </a:rPr>
-              <a:t>관리자 5탭 대시보드</a:t>
-            </a:r>
-            <a:endParaRPr lang="en-US" sz="1050" dirty="0"/>
-          </a:p>
-        </p:txBody>
-      </p:sp>
-      <p:sp>
-        <p:nvSpPr>
-          <p:cNvPr id="16" name="Shape 14"/>
-          <p:cNvSpPr/>
-          <p:nvPr/>
-        </p:nvSpPr>
-        <p:spPr>
-          <a:xfrm>
-            <a:off x="8037576" y="2057400"/>
-            <a:ext cx="3749040" cy="1280160"/>
-          </a:xfrm>
-          <a:prstGeom prst="roundRect">
-            <a:avLst>
-              <a:gd name="adj" fmla="val 9286"/>
-            </a:avLst>
-          </a:prstGeom>
-          <a:solidFill>
-            <a:srgbClr val="FFFFFF"/>
-          </a:solidFill>
-          <a:ln w="12700">
-            <a:solidFill>
-              <a:srgbClr val="E9D5FF"/>
-            </a:solidFill>
-            <a:prstDash val="solid"/>
-          </a:ln>
-        </p:spPr>
-      </p:sp>
-      <p:sp>
-        <p:nvSpPr>
-          <p:cNvPr id="17" name="Shape 15"/>
-          <p:cNvSpPr/>
-          <p:nvPr/>
-        </p:nvSpPr>
-        <p:spPr>
-          <a:xfrm>
-            <a:off x="8174736" y="2176272"/>
-            <a:ext cx="3474720" cy="329184"/>
-          </a:xfrm>
-          <a:prstGeom prst="roundRect">
-            <a:avLst>
-              <a:gd name="adj" fmla="val 22222"/>
-            </a:avLst>
-          </a:prstGeom>
-          <a:solidFill>
-            <a:srgbClr val="DCFCE7"/>
-          </a:solidFill>
-          <a:ln w="12700">
-            <a:solidFill>
-              <a:srgbClr val="DCFCE7"/>
-            </a:solidFill>
-            <a:prstDash val="solid"/>
-          </a:ln>
-        </p:spPr>
-      </p:sp>
-      <p:sp>
-        <p:nvSpPr>
-          <p:cNvPr id="18" name="Text 16"/>
-          <p:cNvSpPr/>
-          <p:nvPr/>
-        </p:nvSpPr>
-        <p:spPr>
-          <a:xfrm>
-            <a:off x="8174736" y="2176272"/>
-            <a:ext cx="3474720" cy="329184"/>
-          </a:xfrm>
-          <a:prstGeom prst="rect">
-            <a:avLst/>
-          </a:prstGeom>
-          <a:noFill/>
-          <a:ln/>
-        </p:spPr>
-        <p:txBody>
-          <a:bodyPr wrap="square" rtlCol="0" anchor="ctr"/>
-          <a:lstStyle/>
-          <a:p>
-            <a:pPr algn="ctr" indent="0" marL="0">
-              <a:buNone/>
-            </a:pPr>
-            <a:r>
-              <a:rPr lang="en-US" sz="1200" b="1" dirty="0">
-                <a:solidFill>
-                  <a:srgbClr val="16A34A"/>
-                </a:solidFill>
-              </a:rPr>
-              <a:t>PWA · 보안 · DB 최적화</a:t>
-            </a:r>
-            <a:endParaRPr lang="en-US" sz="1200" dirty="0"/>
-          </a:p>
-        </p:txBody>
-      </p:sp>
-      <p:sp>
-        <p:nvSpPr>
-          <p:cNvPr id="19" name="Text 17"/>
-          <p:cNvSpPr/>
-          <p:nvPr/>
-        </p:nvSpPr>
-        <p:spPr>
-          <a:xfrm>
-            <a:off x="8202168" y="2569464"/>
-            <a:ext cx="3419856" cy="694944"/>
-          </a:xfrm>
-          <a:prstGeom prst="rect">
-            <a:avLst/>
-          </a:prstGeom>
-          <a:noFill/>
-          <a:ln/>
-        </p:spPr>
-        <p:txBody>
-          <a:bodyPr wrap="square" rtlCol="0" anchor="ctr"/>
-          <a:lstStyle/>
-          <a:p>
-            <a:pPr indent="0" marL="0">
-              <a:buNone/>
-            </a:pPr>
-            <a:r>
-              <a:rPr lang="en-US" sz="1050" dirty="0">
-                <a:solidFill>
-                  <a:srgbClr val="6B7280"/>
-                </a:solidFill>
-              </a:rPr>
-              <a:t>Serwist 오프라인 캐싱</a:t>
-            </a:r>
-            <a:endParaRPr lang="en-US" sz="1050" dirty="0"/>
-          </a:p>
-          <a:p>
-            <a:pPr indent="0" marL="0">
-              <a:buNone/>
-            </a:pPr>
-            <a:r>
-              <a:rPr lang="en-US" sz="1050" dirty="0">
-                <a:solidFill>
-                  <a:srgbClr val="6B7280"/>
-                </a:solidFill>
-              </a:rPr>
-              <a:t>RLS + 인덱스 30개+ + FCM 푸시</a:t>
-            </a:r>
-            <a:endParaRPr lang="en-US" sz="1050" dirty="0"/>
-          </a:p>
-          <a:p>
-            <a:pPr indent="0" marL="0">
-              <a:buNone/>
-            </a:pPr>
-            <a:r>
-              <a:rPr lang="en-US" sz="1050" dirty="0">
-                <a:solidFill>
-                  <a:srgbClr val="6B7280"/>
-                </a:solidFill>
-              </a:rPr>
-              <a:t>Sentry + Storage 정책 완성</a:t>
-            </a:r>
-            <a:endParaRPr lang="en-US" sz="1050" dirty="0"/>
-          </a:p>
-        </p:txBody>
-      </p:sp>
-      <p:sp>
-        <p:nvSpPr>
-          <p:cNvPr id="20" name="Shape 18"/>
-          <p:cNvSpPr/>
-          <p:nvPr/>
-        </p:nvSpPr>
-        <p:spPr>
-          <a:xfrm>
-            <a:off x="365760" y="3429000"/>
-            <a:ext cx="1325880" cy="384048"/>
-          </a:xfrm>
-          <a:prstGeom prst="roundRect">
-            <a:avLst>
-              <a:gd name="adj" fmla="val 23810"/>
+              <a:gd name="adj" fmla="val 5660"/>
             </a:avLst>
           </a:prstGeom>
           <a:solidFill>
@@ -8969,62 +8911,26 @@
       </p:sp>
       <p:sp>
         <p:nvSpPr>
-          <p:cNvPr id="21" name="Text 19"/>
-          <p:cNvSpPr/>
-          <p:nvPr/>
-        </p:nvSpPr>
-        <p:spPr>
-          <a:xfrm>
-            <a:off x="365760" y="3429000"/>
-            <a:ext cx="1325880" cy="384048"/>
-          </a:xfrm>
-          <a:prstGeom prst="rect">
-            <a:avLst/>
-          </a:prstGeom>
-          <a:noFill/>
-          <a:ln/>
-        </p:spPr>
-        <p:txBody>
-          <a:bodyPr wrap="square" rtlCol="0" anchor="ctr"/>
-          <a:lstStyle/>
-          <a:p>
-            <a:pPr algn="ctr" indent="0" marL="0">
-              <a:buNone/>
-            </a:pPr>
-            <a:r>
-              <a:rPr lang="en-US" sz="1100" b="1" dirty="0">
-                <a:solidFill>
-                  <a:srgbClr val="D97706"/>
-                </a:solidFill>
-              </a:rPr>
-              <a:t>🟡 런칭 준비</a:t>
-            </a:r>
-            <a:endParaRPr lang="en-US" sz="1100" dirty="0"/>
-          </a:p>
-        </p:txBody>
-      </p:sp>
-      <p:sp>
-        <p:nvSpPr>
-          <p:cNvPr id="22" name="Shape 20"/>
-          <p:cNvSpPr/>
-          <p:nvPr/>
-        </p:nvSpPr>
-        <p:spPr>
-          <a:xfrm>
-            <a:off x="228600" y="3886200"/>
-            <a:ext cx="3749040" cy="1280160"/>
+          <p:cNvPr id="29" name="Shape 27"/>
+          <p:cNvSpPr/>
+          <p:nvPr/>
+        </p:nvSpPr>
+        <p:spPr>
+          <a:xfrm>
+            <a:off x="338328" y="3675888"/>
+            <a:ext cx="3529584" cy="384048"/>
           </a:xfrm>
           <a:prstGeom prst="roundRect">
             <a:avLst>
-              <a:gd name="adj" fmla="val 9286"/>
+              <a:gd name="adj" fmla="val 19048"/>
             </a:avLst>
           </a:prstGeom>
           <a:solidFill>
-            <a:srgbClr val="FFFFFF"/>
+            <a:srgbClr val="D97706"/>
           </a:solidFill>
           <a:ln w="12700">
             <a:solidFill>
-              <a:srgbClr val="E9D5FF"/>
+              <a:srgbClr val="D97706"/>
             </a:solidFill>
             <a:prstDash val="solid"/>
           </a:ln>
@@ -9032,26 +8938,278 @@
       </p:sp>
       <p:sp>
         <p:nvSpPr>
-          <p:cNvPr id="23" name="Shape 21"/>
-          <p:cNvSpPr/>
-          <p:nvPr/>
-        </p:nvSpPr>
-        <p:spPr>
-          <a:xfrm>
-            <a:off x="365760" y="4005072"/>
-            <a:ext cx="3474720" cy="329184"/>
+          <p:cNvPr id="30" name="Text 28"/>
+          <p:cNvSpPr/>
+          <p:nvPr/>
+        </p:nvSpPr>
+        <p:spPr>
+          <a:xfrm>
+            <a:off x="338328" y="3675888"/>
+            <a:ext cx="3529584" cy="384048"/>
+          </a:xfrm>
+          <a:prstGeom prst="rect">
+            <a:avLst/>
+          </a:prstGeom>
+          <a:noFill/>
+          <a:ln/>
+        </p:spPr>
+        <p:txBody>
+          <a:bodyPr wrap="square" rtlCol="0" anchor="ctr"/>
+          <a:lstStyle/>
+          <a:p>
+            <a:pPr algn="ctr" indent="0" marL="0">
+              <a:buNone/>
+            </a:pPr>
+            <a:r>
+              <a:rPr lang="en-US" sz="1200" b="1" dirty="0">
+                <a:solidFill>
+                  <a:srgbClr val="FFFFFF"/>
+                </a:solidFill>
+              </a:rPr>
+              <a:t>👨‍🍳 사장님 기능</a:t>
+            </a:r>
+            <a:endParaRPr lang="en-US" sz="1200" dirty="0"/>
+          </a:p>
+        </p:txBody>
+      </p:sp>
+      <p:sp>
+        <p:nvSpPr>
+          <p:cNvPr id="31" name="Text 29"/>
+          <p:cNvSpPr/>
+          <p:nvPr/>
+        </p:nvSpPr>
+        <p:spPr>
+          <a:xfrm>
+            <a:off x="393192" y="4160520"/>
+            <a:ext cx="3401568" cy="338328"/>
+          </a:xfrm>
+          <a:prstGeom prst="rect">
+            <a:avLst/>
+          </a:prstGeom>
+          <a:noFill/>
+          <a:ln/>
+        </p:spPr>
+        <p:txBody>
+          <a:bodyPr wrap="square" rtlCol="0" anchor="ctr"/>
+          <a:lstStyle/>
+          <a:p>
+            <a:pPr indent="0" marL="0">
+              <a:buNone/>
+            </a:pPr>
+            <a:r>
+              <a:rPr lang="en-US" sz="1000" dirty="0">
+                <a:solidFill>
+                  <a:srgbClr val="1F1235"/>
+                </a:solidFill>
+              </a:rPr>
+              <a:t>✓  가게 등록·설정·쿠폰(KRW 입력)·영업시간</a:t>
+            </a:r>
+            <a:endParaRPr lang="en-US" sz="1000" dirty="0"/>
+          </a:p>
+        </p:txBody>
+      </p:sp>
+      <p:sp>
+        <p:nvSpPr>
+          <p:cNvPr id="32" name="Text 30"/>
+          <p:cNvSpPr/>
+          <p:nvPr/>
+        </p:nvSpPr>
+        <p:spPr>
+          <a:xfrm>
+            <a:off x="393192" y="4507992"/>
+            <a:ext cx="3401568" cy="338328"/>
+          </a:xfrm>
+          <a:prstGeom prst="rect">
+            <a:avLst/>
+          </a:prstGeom>
+          <a:noFill/>
+          <a:ln/>
+        </p:spPr>
+        <p:txBody>
+          <a:bodyPr wrap="square" rtlCol="0" anchor="ctr"/>
+          <a:lstStyle/>
+          <a:p>
+            <a:pPr indent="0" marL="0">
+              <a:buNone/>
+            </a:pPr>
+            <a:r>
+              <a:rPr lang="en-US" sz="1000" dirty="0">
+                <a:solidFill>
+                  <a:srgbClr val="1F1235"/>
+                </a:solidFill>
+              </a:rPr>
+              <a:t>✓  사진 리뷰 보상 설정 연동 (photo_review_reward_krw)</a:t>
+            </a:r>
+            <a:endParaRPr lang="en-US" sz="1000" dirty="0"/>
+          </a:p>
+        </p:txBody>
+      </p:sp>
+      <p:sp>
+        <p:nvSpPr>
+          <p:cNvPr id="33" name="Text 31"/>
+          <p:cNvSpPr/>
+          <p:nvPr/>
+        </p:nvSpPr>
+        <p:spPr>
+          <a:xfrm>
+            <a:off x="393192" y="4855464"/>
+            <a:ext cx="3401568" cy="338328"/>
+          </a:xfrm>
+          <a:prstGeom prst="rect">
+            <a:avLst/>
+          </a:prstGeom>
+          <a:noFill/>
+          <a:ln/>
+        </p:spPr>
+        <p:txBody>
+          <a:bodyPr wrap="square" rtlCol="0" anchor="ctr"/>
+          <a:lstStyle/>
+          <a:p>
+            <a:pPr indent="0" marL="0">
+              <a:buNone/>
+            </a:pPr>
+            <a:r>
+              <a:rPr lang="en-US" sz="1000" dirty="0">
+                <a:solidFill>
+                  <a:srgbClr val="1F1235"/>
+                </a:solidFill>
+              </a:rPr>
+              <a:t>✓  주문 관리: 수락 ETA + 거절 확인 팝업</a:t>
+            </a:r>
+            <a:endParaRPr lang="en-US" sz="1000" dirty="0"/>
+          </a:p>
+        </p:txBody>
+      </p:sp>
+      <p:sp>
+        <p:nvSpPr>
+          <p:cNvPr id="34" name="Text 32"/>
+          <p:cNvSpPr/>
+          <p:nvPr/>
+        </p:nvSpPr>
+        <p:spPr>
+          <a:xfrm>
+            <a:off x="393192" y="5202936"/>
+            <a:ext cx="3401568" cy="338328"/>
+          </a:xfrm>
+          <a:prstGeom prst="rect">
+            <a:avLst/>
+          </a:prstGeom>
+          <a:noFill/>
+          <a:ln/>
+        </p:spPr>
+        <p:txBody>
+          <a:bodyPr wrap="square" rtlCol="0" anchor="ctr"/>
+          <a:lstStyle/>
+          <a:p>
+            <a:pPr indent="0" marL="0">
+              <a:buNone/>
+            </a:pPr>
+            <a:r>
+              <a:rPr lang="en-US" sz="1000" dirty="0">
+                <a:solidFill>
+                  <a:srgbClr val="1F1235"/>
+                </a:solidFill>
+              </a:rPr>
+              <a:t>✓  매출 통계 대시보드 + 주간 차트</a:t>
+            </a:r>
+            <a:endParaRPr lang="en-US" sz="1000" dirty="0"/>
+          </a:p>
+        </p:txBody>
+      </p:sp>
+      <p:sp>
+        <p:nvSpPr>
+          <p:cNvPr id="35" name="Text 33"/>
+          <p:cNvSpPr/>
+          <p:nvPr/>
+        </p:nvSpPr>
+        <p:spPr>
+          <a:xfrm>
+            <a:off x="393192" y="5550408"/>
+            <a:ext cx="3401568" cy="338328"/>
+          </a:xfrm>
+          <a:prstGeom prst="rect">
+            <a:avLst/>
+          </a:prstGeom>
+          <a:noFill/>
+          <a:ln/>
+        </p:spPr>
+        <p:txBody>
+          <a:bodyPr wrap="square" rtlCol="0" anchor="ctr"/>
+          <a:lstStyle/>
+          <a:p>
+            <a:pPr indent="0" marL="0">
+              <a:buNone/>
+            </a:pPr>
+            <a:r>
+              <a:rPr lang="en-US" sz="1000" dirty="0">
+                <a:solidFill>
+                  <a:srgbClr val="1F1235"/>
+                </a:solidFill>
+              </a:rPr>
+              <a:t>✓  신규주문 TTS 알림 '픽픽 주문이 들어왔습니다'</a:t>
+            </a:r>
+            <a:endParaRPr lang="en-US" sz="1000" dirty="0"/>
+          </a:p>
+        </p:txBody>
+      </p:sp>
+      <p:sp>
+        <p:nvSpPr>
+          <p:cNvPr id="36" name="Text 34"/>
+          <p:cNvSpPr/>
+          <p:nvPr/>
+        </p:nvSpPr>
+        <p:spPr>
+          <a:xfrm>
+            <a:off x="393192" y="5897880"/>
+            <a:ext cx="3401568" cy="338328"/>
+          </a:xfrm>
+          <a:prstGeom prst="rect">
+            <a:avLst/>
+          </a:prstGeom>
+          <a:noFill/>
+          <a:ln/>
+        </p:spPr>
+        <p:txBody>
+          <a:bodyPr wrap="square" rtlCol="0" anchor="ctr"/>
+          <a:lstStyle/>
+          <a:p>
+            <a:pPr indent="0" marL="0">
+              <a:buNone/>
+            </a:pPr>
+            <a:r>
+              <a:rPr lang="en-US" sz="1000" dirty="0">
+                <a:solidFill>
+                  <a:srgbClr val="1F1235"/>
+                </a:solidFill>
+              </a:rPr>
+              <a:t>✓  신규 가맹점 초대 리워드 20,000 PICK</a:t>
+            </a:r>
+            <a:endParaRPr lang="en-US" sz="1000" dirty="0"/>
+          </a:p>
+        </p:txBody>
+      </p:sp>
+      <p:sp>
+        <p:nvSpPr>
+          <p:cNvPr id="37" name="Shape 35"/>
+          <p:cNvSpPr/>
+          <p:nvPr/>
+        </p:nvSpPr>
+        <p:spPr>
+          <a:xfrm>
+            <a:off x="4160520" y="3566160"/>
+            <a:ext cx="3749040" cy="2423160"/>
           </a:xfrm>
           <a:prstGeom prst="roundRect">
             <a:avLst>
-              <a:gd name="adj" fmla="val 22222"/>
+              <a:gd name="adj" fmla="val 5660"/>
             </a:avLst>
           </a:prstGeom>
           <a:solidFill>
-            <a:srgbClr val="FFFBEB"/>
+            <a:srgbClr val="ECFEFF"/>
           </a:solidFill>
           <a:ln w="12700">
             <a:solidFill>
-              <a:srgbClr val="FFFBEB"/>
+              <a:srgbClr val="0891B2"/>
             </a:solidFill>
             <a:prstDash val="solid"/>
           </a:ln>
@@ -9059,126 +9217,26 @@
       </p:sp>
       <p:sp>
         <p:nvSpPr>
-          <p:cNvPr id="24" name="Text 22"/>
-          <p:cNvSpPr/>
-          <p:nvPr/>
-        </p:nvSpPr>
-        <p:spPr>
-          <a:xfrm>
-            <a:off x="365760" y="4005072"/>
-            <a:ext cx="3474720" cy="329184"/>
-          </a:xfrm>
-          <a:prstGeom prst="rect">
-            <a:avLst/>
-          </a:prstGeom>
-          <a:noFill/>
-          <a:ln/>
-        </p:spPr>
-        <p:txBody>
-          <a:bodyPr wrap="square" rtlCol="0" anchor="ctr"/>
-          <a:lstStyle/>
-          <a:p>
-            <a:pPr algn="ctr" indent="0" marL="0">
-              <a:buNone/>
-            </a:pPr>
-            <a:r>
-              <a:rPr lang="en-US" sz="1200" b="1" dirty="0">
-                <a:solidFill>
-                  <a:srgbClr val="D97706"/>
-                </a:solidFill>
-              </a:rPr>
-              <a:t>Firebase 환경변수 ✅</a:t>
-            </a:r>
-            <a:endParaRPr lang="en-US" sz="1200" dirty="0"/>
-          </a:p>
-        </p:txBody>
-      </p:sp>
-      <p:sp>
-        <p:nvSpPr>
-          <p:cNvPr id="25" name="Text 23"/>
-          <p:cNvSpPr/>
-          <p:nvPr/>
-        </p:nvSpPr>
-        <p:spPr>
-          <a:xfrm>
-            <a:off x="393192" y="4398264"/>
-            <a:ext cx="3419856" cy="694944"/>
-          </a:xfrm>
-          <a:prstGeom prst="rect">
-            <a:avLst/>
-          </a:prstGeom>
-          <a:noFill/>
-          <a:ln/>
-        </p:spPr>
-        <p:txBody>
-          <a:bodyPr wrap="square" rtlCol="0" anchor="ctr"/>
-          <a:lstStyle/>
-          <a:p>
-            <a:pPr indent="0" marL="0">
-              <a:buNone/>
-            </a:pPr>
-            <a:r>
-              <a:rPr lang="en-US" sz="1050" dirty="0">
-                <a:solidFill>
-                  <a:srgbClr val="6B7280"/>
-                </a:solidFill>
-              </a:rPr>
-              <a:t>API Key ~ App ID 완성</a:t>
-            </a:r>
-            <a:endParaRPr lang="en-US" sz="1050" dirty="0"/>
-          </a:p>
-          <a:p>
-            <a:pPr indent="0" marL="0">
-              <a:buNone/>
-            </a:pPr>
-            <a:r>
-              <a:rPr lang="en-US" sz="1050" dirty="0">
-                <a:solidFill>
-                  <a:srgbClr val="6B7280"/>
-                </a:solidFill>
-              </a:rPr>
-              <a:t>VAPID 키 완성</a:t>
-            </a:r>
-            <a:endParaRPr lang="en-US" sz="1050" dirty="0"/>
-          </a:p>
-          <a:p>
-            <a:pPr indent="0" marL="0">
-              <a:buNone/>
-            </a:pPr>
-            <a:r>
-              <a:rPr lang="en-US" sz="1050" dirty="0">
-                <a:solidFill>
-                  <a:srgbClr val="6B7280"/>
-                </a:solidFill>
-              </a:rPr>
-              <a:t>Admin SDK JSON 완성</a:t>
-            </a:r>
-            <a:endParaRPr lang="en-US" sz="1050" dirty="0"/>
-          </a:p>
-        </p:txBody>
-      </p:sp>
-      <p:sp>
-        <p:nvSpPr>
-          <p:cNvPr id="26" name="Shape 24"/>
-          <p:cNvSpPr/>
-          <p:nvPr/>
-        </p:nvSpPr>
-        <p:spPr>
-          <a:xfrm>
-            <a:off x="4133088" y="3886200"/>
-            <a:ext cx="3749040" cy="1280160"/>
+          <p:cNvPr id="38" name="Shape 36"/>
+          <p:cNvSpPr/>
+          <p:nvPr/>
+        </p:nvSpPr>
+        <p:spPr>
+          <a:xfrm>
+            <a:off x="4270248" y="3675888"/>
+            <a:ext cx="3529584" cy="384048"/>
           </a:xfrm>
           <a:prstGeom prst="roundRect">
             <a:avLst>
-              <a:gd name="adj" fmla="val 9286"/>
+              <a:gd name="adj" fmla="val 19048"/>
             </a:avLst>
           </a:prstGeom>
           <a:solidFill>
-            <a:srgbClr val="FFFFFF"/>
+            <a:srgbClr val="0891B2"/>
           </a:solidFill>
           <a:ln w="12700">
             <a:solidFill>
-              <a:srgbClr val="E9D5FF"/>
+              <a:srgbClr val="0891B2"/>
             </a:solidFill>
             <a:prstDash val="solid"/>
           </a:ln>
@@ -9186,299 +9244,270 @@
       </p:sp>
       <p:sp>
         <p:nvSpPr>
-          <p:cNvPr id="27" name="Shape 25"/>
-          <p:cNvSpPr/>
-          <p:nvPr/>
-        </p:nvSpPr>
-        <p:spPr>
-          <a:xfrm>
-            <a:off x="4270248" y="4005072"/>
-            <a:ext cx="3474720" cy="329184"/>
+          <p:cNvPr id="39" name="Text 37"/>
+          <p:cNvSpPr/>
+          <p:nvPr/>
+        </p:nvSpPr>
+        <p:spPr>
+          <a:xfrm>
+            <a:off x="4270248" y="3675888"/>
+            <a:ext cx="3529584" cy="384048"/>
+          </a:xfrm>
+          <a:prstGeom prst="rect">
+            <a:avLst/>
+          </a:prstGeom>
+          <a:noFill/>
+          <a:ln/>
+        </p:spPr>
+        <p:txBody>
+          <a:bodyPr wrap="square" rtlCol="0" anchor="ctr"/>
+          <a:lstStyle/>
+          <a:p>
+            <a:pPr algn="ctr" indent="0" marL="0">
+              <a:buNone/>
+            </a:pPr>
+            <a:r>
+              <a:rPr lang="en-US" sz="1200" b="1" dirty="0">
+                <a:solidFill>
+                  <a:srgbClr val="FFFFFF"/>
+                </a:solidFill>
+              </a:rPr>
+              <a:t>🛵 라이더 / PWA / 인프라</a:t>
+            </a:r>
+            <a:endParaRPr lang="en-US" sz="1200" dirty="0"/>
+          </a:p>
+        </p:txBody>
+      </p:sp>
+      <p:sp>
+        <p:nvSpPr>
+          <p:cNvPr id="40" name="Text 38"/>
+          <p:cNvSpPr/>
+          <p:nvPr/>
+        </p:nvSpPr>
+        <p:spPr>
+          <a:xfrm>
+            <a:off x="4325112" y="4160520"/>
+            <a:ext cx="3401568" cy="338328"/>
+          </a:xfrm>
+          <a:prstGeom prst="rect">
+            <a:avLst/>
+          </a:prstGeom>
+          <a:noFill/>
+          <a:ln/>
+        </p:spPr>
+        <p:txBody>
+          <a:bodyPr wrap="square" rtlCol="0" anchor="ctr"/>
+          <a:lstStyle/>
+          <a:p>
+            <a:pPr indent="0" marL="0">
+              <a:buNone/>
+            </a:pPr>
+            <a:r>
+              <a:rPr lang="en-US" sz="1000" dirty="0">
+                <a:solidFill>
+                  <a:srgbClr val="1F1235"/>
+                </a:solidFill>
+              </a:rPr>
+              <a:t>✓  배달 수락 → PICK 자동 지급 + 위치 공유</a:t>
+            </a:r>
+            <a:endParaRPr lang="en-US" sz="1000" dirty="0"/>
+          </a:p>
+        </p:txBody>
+      </p:sp>
+      <p:sp>
+        <p:nvSpPr>
+          <p:cNvPr id="41" name="Text 39"/>
+          <p:cNvSpPr/>
+          <p:nvPr/>
+        </p:nvSpPr>
+        <p:spPr>
+          <a:xfrm>
+            <a:off x="4325112" y="4507992"/>
+            <a:ext cx="3401568" cy="338328"/>
+          </a:xfrm>
+          <a:prstGeom prst="rect">
+            <a:avLst/>
+          </a:prstGeom>
+          <a:noFill/>
+          <a:ln/>
+        </p:spPr>
+        <p:txBody>
+          <a:bodyPr wrap="square" rtlCol="0" anchor="ctr"/>
+          <a:lstStyle/>
+          <a:p>
+            <a:pPr indent="0" marL="0">
+              <a:buNone/>
+            </a:pPr>
+            <a:r>
+              <a:rPr lang="en-US" sz="1000" dirty="0">
+                <a:solidFill>
+                  <a:srgbClr val="1F1235"/>
+                </a:solidFill>
+              </a:rPr>
+              <a:t>✓  라이더 5km 반경 필터링 + 거리순 정렬</a:t>
+            </a:r>
+            <a:endParaRPr lang="en-US" sz="1000" dirty="0"/>
+          </a:p>
+        </p:txBody>
+      </p:sp>
+      <p:sp>
+        <p:nvSpPr>
+          <p:cNvPr id="42" name="Text 40"/>
+          <p:cNvSpPr/>
+          <p:nvPr/>
+        </p:nvSpPr>
+        <p:spPr>
+          <a:xfrm>
+            <a:off x="4325112" y="4855464"/>
+            <a:ext cx="3401568" cy="338328"/>
+          </a:xfrm>
+          <a:prstGeom prst="rect">
+            <a:avLst/>
+          </a:prstGeom>
+          <a:noFill/>
+          <a:ln/>
+        </p:spPr>
+        <p:txBody>
+          <a:bodyPr wrap="square" rtlCol="0" anchor="ctr"/>
+          <a:lstStyle/>
+          <a:p>
+            <a:pPr indent="0" marL="0">
+              <a:buNone/>
+            </a:pPr>
+            <a:r>
+              <a:rPr lang="en-US" sz="1000" dirty="0">
+                <a:solidFill>
+                  <a:srgbClr val="1F1235"/>
+                </a:solidFill>
+              </a:rPr>
+              <a:t>✓  10분 자동오프라인 Cron (매 5분 실행)</a:t>
+            </a:r>
+            <a:endParaRPr lang="en-US" sz="1000" dirty="0"/>
+          </a:p>
+        </p:txBody>
+      </p:sp>
+      <p:sp>
+        <p:nvSpPr>
+          <p:cNvPr id="43" name="Text 41"/>
+          <p:cNvSpPr/>
+          <p:nvPr/>
+        </p:nvSpPr>
+        <p:spPr>
+          <a:xfrm>
+            <a:off x="4325112" y="5202936"/>
+            <a:ext cx="3401568" cy="338328"/>
+          </a:xfrm>
+          <a:prstGeom prst="rect">
+            <a:avLst/>
+          </a:prstGeom>
+          <a:noFill/>
+          <a:ln/>
+        </p:spPr>
+        <p:txBody>
+          <a:bodyPr wrap="square" rtlCol="0" anchor="ctr"/>
+          <a:lstStyle/>
+          <a:p>
+            <a:pPr indent="0" marL="0">
+              <a:buNone/>
+            </a:pPr>
+            <a:r>
+              <a:rPr lang="en-US" sz="1000" dirty="0">
+                <a:solidFill>
+                  <a:srgbClr val="1F1235"/>
+                </a:solidFill>
+              </a:rPr>
+              <a:t>✓  calling_rider 상태 흐름 재설계 + 픽업완료 버튼</a:t>
+            </a:r>
+            <a:endParaRPr lang="en-US" sz="1000" dirty="0"/>
+          </a:p>
+        </p:txBody>
+      </p:sp>
+      <p:sp>
+        <p:nvSpPr>
+          <p:cNvPr id="44" name="Text 42"/>
+          <p:cNvSpPr/>
+          <p:nvPr/>
+        </p:nvSpPr>
+        <p:spPr>
+          <a:xfrm>
+            <a:off x="4325112" y="5550408"/>
+            <a:ext cx="3401568" cy="338328"/>
+          </a:xfrm>
+          <a:prstGeom prst="rect">
+            <a:avLst/>
+          </a:prstGeom>
+          <a:noFill/>
+          <a:ln/>
+        </p:spPr>
+        <p:txBody>
+          <a:bodyPr wrap="square" rtlCol="0" anchor="ctr"/>
+          <a:lstStyle/>
+          <a:p>
+            <a:pPr indent="0" marL="0">
+              <a:buNone/>
+            </a:pPr>
+            <a:r>
+              <a:rPr lang="en-US" sz="1000" dirty="0">
+                <a:solidFill>
+                  <a:srgbClr val="1F1235"/>
+                </a:solidFill>
+              </a:rPr>
+              <a:t>✓  FCM 푸시 알림 + 관리자 일괄 발송</a:t>
+            </a:r>
+            <a:endParaRPr lang="en-US" sz="1000" dirty="0"/>
+          </a:p>
+        </p:txBody>
+      </p:sp>
+      <p:sp>
+        <p:nvSpPr>
+          <p:cNvPr id="45" name="Text 43"/>
+          <p:cNvSpPr/>
+          <p:nvPr/>
+        </p:nvSpPr>
+        <p:spPr>
+          <a:xfrm>
+            <a:off x="4325112" y="5897880"/>
+            <a:ext cx="3401568" cy="338328"/>
+          </a:xfrm>
+          <a:prstGeom prst="rect">
+            <a:avLst/>
+          </a:prstGeom>
+          <a:noFill/>
+          <a:ln/>
+        </p:spPr>
+        <p:txBody>
+          <a:bodyPr wrap="square" rtlCol="0" anchor="ctr"/>
+          <a:lstStyle/>
+          <a:p>
+            <a:pPr indent="0" marL="0">
+              <a:buNone/>
+            </a:pPr>
+            <a:r>
+              <a:rPr lang="en-US" sz="1000" dirty="0">
+                <a:solidFill>
+                  <a:srgbClr val="1F1235"/>
+                </a:solidFill>
+              </a:rPr>
+              <a:t>✓  PWA 오프라인 캐싱 (Serwist) + Sentry 모니터링</a:t>
+            </a:r>
+            <a:endParaRPr lang="en-US" sz="1000" dirty="0"/>
+          </a:p>
+        </p:txBody>
+      </p:sp>
+      <p:sp>
+        <p:nvSpPr>
+          <p:cNvPr id="46" name="Shape 44"/>
+          <p:cNvSpPr/>
+          <p:nvPr/>
+        </p:nvSpPr>
+        <p:spPr>
+          <a:xfrm>
+            <a:off x="8092440" y="3566160"/>
+            <a:ext cx="3749040" cy="2423160"/>
           </a:xfrm>
           <a:prstGeom prst="roundRect">
             <a:avLst>
-              <a:gd name="adj" fmla="val 22222"/>
-            </a:avLst>
-          </a:prstGeom>
-          <a:solidFill>
-            <a:srgbClr val="FFFBEB"/>
-          </a:solidFill>
-          <a:ln w="12700">
-            <a:solidFill>
-              <a:srgbClr val="FFFBEB"/>
-            </a:solidFill>
-            <a:prstDash val="solid"/>
-          </a:ln>
-        </p:spPr>
-      </p:sp>
-      <p:sp>
-        <p:nvSpPr>
-          <p:cNvPr id="28" name="Text 26"/>
-          <p:cNvSpPr/>
-          <p:nvPr/>
-        </p:nvSpPr>
-        <p:spPr>
-          <a:xfrm>
-            <a:off x="4270248" y="4005072"/>
-            <a:ext cx="3474720" cy="329184"/>
-          </a:xfrm>
-          <a:prstGeom prst="rect">
-            <a:avLst/>
-          </a:prstGeom>
-          <a:noFill/>
-          <a:ln/>
-        </p:spPr>
-        <p:txBody>
-          <a:bodyPr wrap="square" rtlCol="0" anchor="ctr"/>
-          <a:lstStyle/>
-          <a:p>
-            <a:pPr algn="ctr" indent="0" marL="0">
-              <a:buNone/>
-            </a:pPr>
-            <a:r>
-              <a:rPr lang="en-US" sz="1200" b="1" dirty="0">
-                <a:solidFill>
-                  <a:srgbClr val="D97706"/>
-                </a:solidFill>
-              </a:rPr>
-              <a:t>카카오 API 키 확인</a:t>
-            </a:r>
-            <a:endParaRPr lang="en-US" sz="1200" dirty="0"/>
-          </a:p>
-        </p:txBody>
-      </p:sp>
-      <p:sp>
-        <p:nvSpPr>
-          <p:cNvPr id="29" name="Text 27"/>
-          <p:cNvSpPr/>
-          <p:nvPr/>
-        </p:nvSpPr>
-        <p:spPr>
-          <a:xfrm>
-            <a:off x="4297680" y="4398264"/>
-            <a:ext cx="3419856" cy="694944"/>
-          </a:xfrm>
-          <a:prstGeom prst="rect">
-            <a:avLst/>
-          </a:prstGeom>
-          <a:noFill/>
-          <a:ln/>
-        </p:spPr>
-        <p:txBody>
-          <a:bodyPr wrap="square" rtlCol="0" anchor="ctr"/>
-          <a:lstStyle/>
-          <a:p>
-            <a:pPr indent="0" marL="0">
-              <a:buNone/>
-            </a:pPr>
-            <a:r>
-              <a:rPr lang="en-US" sz="1050" dirty="0">
-                <a:solidFill>
-                  <a:srgbClr val="6B7280"/>
-                </a:solidFill>
-              </a:rPr>
-              <a:t>앱 키 → JavaScript 키 재확인</a:t>
-            </a:r>
-            <a:endParaRPr lang="en-US" sz="1050" dirty="0"/>
-          </a:p>
-          <a:p>
-            <a:pPr indent="0" marL="0">
-              <a:buNone/>
-            </a:pPr>
-            <a:r>
-              <a:rPr lang="en-US" sz="1050" dirty="0">
-                <a:solidFill>
-                  <a:srgbClr val="6B7280"/>
-                </a:solidFill>
-              </a:rPr>
-              <a:t>NEXT_PUBLIC_KAKAO_MAP_KEY 검증</a:t>
-            </a:r>
-            <a:endParaRPr lang="en-US" sz="1050" dirty="0"/>
-          </a:p>
-          <a:p>
-            <a:pPr indent="0" marL="0">
-              <a:buNone/>
-            </a:pPr>
-            <a:r>
-              <a:rPr lang="en-US" sz="1050" dirty="0">
-                <a:solidFill>
-                  <a:srgbClr val="6B7280"/>
-                </a:solidFill>
-              </a:rPr>
-              <a:t>Kakao Map 지도 표시 테스트</a:t>
-            </a:r>
-            <a:endParaRPr lang="en-US" sz="1050" dirty="0"/>
-          </a:p>
-        </p:txBody>
-      </p:sp>
-      <p:sp>
-        <p:nvSpPr>
-          <p:cNvPr id="30" name="Shape 28"/>
-          <p:cNvSpPr/>
-          <p:nvPr/>
-        </p:nvSpPr>
-        <p:spPr>
-          <a:xfrm>
-            <a:off x="8037576" y="3886200"/>
-            <a:ext cx="3749040" cy="1280160"/>
-          </a:xfrm>
-          <a:prstGeom prst="roundRect">
-            <a:avLst>
-              <a:gd name="adj" fmla="val 9286"/>
-            </a:avLst>
-          </a:prstGeom>
-          <a:solidFill>
-            <a:srgbClr val="FFFFFF"/>
-          </a:solidFill>
-          <a:ln w="12700">
-            <a:solidFill>
-              <a:srgbClr val="E9D5FF"/>
-            </a:solidFill>
-            <a:prstDash val="solid"/>
-          </a:ln>
-        </p:spPr>
-      </p:sp>
-      <p:sp>
-        <p:nvSpPr>
-          <p:cNvPr id="31" name="Shape 29"/>
-          <p:cNvSpPr/>
-          <p:nvPr/>
-        </p:nvSpPr>
-        <p:spPr>
-          <a:xfrm>
-            <a:off x="8174736" y="4005072"/>
-            <a:ext cx="3474720" cy="329184"/>
-          </a:xfrm>
-          <a:prstGeom prst="roundRect">
-            <a:avLst>
-              <a:gd name="adj" fmla="val 22222"/>
-            </a:avLst>
-          </a:prstGeom>
-          <a:solidFill>
-            <a:srgbClr val="FFFBEB"/>
-          </a:solidFill>
-          <a:ln w="12700">
-            <a:solidFill>
-              <a:srgbClr val="FFFBEB"/>
-            </a:solidFill>
-            <a:prstDash val="solid"/>
-          </a:ln>
-        </p:spPr>
-      </p:sp>
-      <p:sp>
-        <p:nvSpPr>
-          <p:cNvPr id="32" name="Text 30"/>
-          <p:cNvSpPr/>
-          <p:nvPr/>
-        </p:nvSpPr>
-        <p:spPr>
-          <a:xfrm>
-            <a:off x="8174736" y="4005072"/>
-            <a:ext cx="3474720" cy="329184"/>
-          </a:xfrm>
-          <a:prstGeom prst="rect">
-            <a:avLst/>
-          </a:prstGeom>
-          <a:noFill/>
-          <a:ln/>
-        </p:spPr>
-        <p:txBody>
-          <a:bodyPr wrap="square" rtlCol="0" anchor="ctr"/>
-          <a:lstStyle/>
-          <a:p>
-            <a:pPr algn="ctr" indent="0" marL="0">
-              <a:buNone/>
-            </a:pPr>
-            <a:r>
-              <a:rPr lang="en-US" sz="1200" b="1" dirty="0">
-                <a:solidFill>
-                  <a:srgbClr val="D97706"/>
-                </a:solidFill>
-              </a:rPr>
-              <a:t>샘플 데이터 + 배포</a:t>
-            </a:r>
-            <a:endParaRPr lang="en-US" sz="1200" dirty="0"/>
-          </a:p>
-        </p:txBody>
-      </p:sp>
-      <p:sp>
-        <p:nvSpPr>
-          <p:cNvPr id="33" name="Text 31"/>
-          <p:cNvSpPr/>
-          <p:nvPr/>
-        </p:nvSpPr>
-        <p:spPr>
-          <a:xfrm>
-            <a:off x="8202168" y="4398264"/>
-            <a:ext cx="3419856" cy="694944"/>
-          </a:xfrm>
-          <a:prstGeom prst="rect">
-            <a:avLst/>
-          </a:prstGeom>
-          <a:noFill/>
-          <a:ln/>
-        </p:spPr>
-        <p:txBody>
-          <a:bodyPr wrap="square" rtlCol="0" anchor="ctr"/>
-          <a:lstStyle/>
-          <a:p>
-            <a:pPr indent="0" marL="0">
-              <a:buNone/>
-            </a:pPr>
-            <a:r>
-              <a:rPr lang="en-US" sz="1050" dirty="0">
-                <a:solidFill>
-                  <a:srgbClr val="6B7280"/>
-                </a:solidFill>
-              </a:rPr>
-              <a:t>실 가맹점 + 메뉴 데이터 추가</a:t>
-            </a:r>
-            <a:endParaRPr lang="en-US" sz="1050" dirty="0"/>
-          </a:p>
-          <a:p>
-            <a:pPr indent="0" marL="0">
-              <a:buNone/>
-            </a:pPr>
-            <a:r>
-              <a:rPr lang="en-US" sz="1050" dirty="0">
-                <a:solidFill>
-                  <a:srgbClr val="6B7280"/>
-                </a:solidFill>
-              </a:rPr>
-              <a:t>관리자 계정 role='admin' 설정</a:t>
-            </a:r>
-            <a:endParaRPr lang="en-US" sz="1050" dirty="0"/>
-          </a:p>
-          <a:p>
-            <a:pPr indent="0" marL="0">
-              <a:buNone/>
-            </a:pPr>
-            <a:r>
-              <a:rPr lang="en-US" sz="1050" dirty="0">
-                <a:solidFill>
-                  <a:srgbClr val="6B7280"/>
-                </a:solidFill>
-              </a:rPr>
-              <a:t>Vercel 프로덕션 배포 확인</a:t>
-            </a:r>
-            <a:endParaRPr lang="en-US" sz="1050" dirty="0"/>
-          </a:p>
-        </p:txBody>
-      </p:sp>
-      <p:sp>
-        <p:nvSpPr>
-          <p:cNvPr id="34" name="Shape 32"/>
-          <p:cNvSpPr/>
-          <p:nvPr/>
-        </p:nvSpPr>
-        <p:spPr>
-          <a:xfrm>
-            <a:off x="365760" y="5257800"/>
-            <a:ext cx="1325880" cy="384048"/>
-          </a:xfrm>
-          <a:prstGeom prst="roundRect">
-            <a:avLst>
-              <a:gd name="adj" fmla="val 23810"/>
+              <a:gd name="adj" fmla="val 5660"/>
             </a:avLst>
           </a:prstGeom>
           <a:solidFill>
@@ -9494,62 +9523,26 @@
       </p:sp>
       <p:sp>
         <p:nvSpPr>
-          <p:cNvPr id="35" name="Text 33"/>
-          <p:cNvSpPr/>
-          <p:nvPr/>
-        </p:nvSpPr>
-        <p:spPr>
-          <a:xfrm>
-            <a:off x="365760" y="5257800"/>
-            <a:ext cx="1325880" cy="384048"/>
-          </a:xfrm>
-          <a:prstGeom prst="rect">
-            <a:avLst/>
-          </a:prstGeom>
-          <a:noFill/>
-          <a:ln/>
-        </p:spPr>
-        <p:txBody>
-          <a:bodyPr wrap="square" rtlCol="0" anchor="ctr"/>
-          <a:lstStyle/>
-          <a:p>
-            <a:pPr algn="ctr" indent="0" marL="0">
-              <a:buNone/>
-            </a:pPr>
-            <a:r>
-              <a:rPr lang="en-US" sz="1100" b="1" dirty="0">
-                <a:solidFill>
-                  <a:srgbClr val="EA580C"/>
-                </a:solidFill>
-              </a:rPr>
-              <a:t>⏳ Phase 4</a:t>
-            </a:r>
-            <a:endParaRPr lang="en-US" sz="1100" dirty="0"/>
-          </a:p>
-        </p:txBody>
-      </p:sp>
-      <p:sp>
-        <p:nvSpPr>
-          <p:cNvPr id="36" name="Shape 34"/>
-          <p:cNvSpPr/>
-          <p:nvPr/>
-        </p:nvSpPr>
-        <p:spPr>
-          <a:xfrm>
-            <a:off x="228600" y="5715000"/>
-            <a:ext cx="3749040" cy="1280160"/>
+          <p:cNvPr id="47" name="Shape 45"/>
+          <p:cNvSpPr/>
+          <p:nvPr/>
+        </p:nvSpPr>
+        <p:spPr>
+          <a:xfrm>
+            <a:off x="8202168" y="3675888"/>
+            <a:ext cx="3529584" cy="384048"/>
           </a:xfrm>
           <a:prstGeom prst="roundRect">
             <a:avLst>
-              <a:gd name="adj" fmla="val 9286"/>
+              <a:gd name="adj" fmla="val 19048"/>
             </a:avLst>
           </a:prstGeom>
           <a:solidFill>
-            <a:srgbClr val="FFFFFF"/>
+            <a:srgbClr val="EA580C"/>
           </a:solidFill>
           <a:ln w="12700">
             <a:solidFill>
-              <a:srgbClr val="E9D5FF"/>
+              <a:srgbClr val="EA580C"/>
             </a:solidFill>
             <a:prstDash val="solid"/>
           </a:ln>
@@ -9557,41 +9550,14 @@
       </p:sp>
       <p:sp>
         <p:nvSpPr>
-          <p:cNvPr id="37" name="Shape 35"/>
-          <p:cNvSpPr/>
-          <p:nvPr/>
-        </p:nvSpPr>
-        <p:spPr>
-          <a:xfrm>
-            <a:off x="365760" y="5833872"/>
-            <a:ext cx="3474720" cy="329184"/>
-          </a:xfrm>
-          <a:prstGeom prst="roundRect">
-            <a:avLst>
-              <a:gd name="adj" fmla="val 22222"/>
-            </a:avLst>
-          </a:prstGeom>
-          <a:solidFill>
-            <a:srgbClr val="FFEDD5"/>
-          </a:solidFill>
-          <a:ln w="12700">
-            <a:solidFill>
-              <a:srgbClr val="FFEDD5"/>
-            </a:solidFill>
-            <a:prstDash val="solid"/>
-          </a:ln>
-        </p:spPr>
-      </p:sp>
-      <p:sp>
-        <p:nvSpPr>
-          <p:cNvPr id="38" name="Text 36"/>
-          <p:cNvSpPr/>
-          <p:nvPr/>
-        </p:nvSpPr>
-        <p:spPr>
-          <a:xfrm>
-            <a:off x="365760" y="5833872"/>
-            <a:ext cx="3474720" cy="329184"/>
+          <p:cNvPr id="48" name="Text 46"/>
+          <p:cNvSpPr/>
+          <p:nvPr/>
+        </p:nvSpPr>
+        <p:spPr>
+          <a:xfrm>
+            <a:off x="8202168" y="3675888"/>
+            <a:ext cx="3529584" cy="384048"/>
           </a:xfrm>
           <a:prstGeom prst="rect">
             <a:avLst/>
@@ -9609,10 +9575,10 @@
             <a:r>
               <a:rPr lang="en-US" sz="1200" b="1" dirty="0">
                 <a:solidFill>
-                  <a:srgbClr val="EA580C"/>
-                </a:solidFill>
-              </a:rPr>
-              <a:t>Pi Network SDK 인증</a:t>
+                  <a:srgbClr val="FFFFFF"/>
+                </a:solidFill>
+              </a:rPr>
+              <a:t>🛡️ DB / 보안 / 관리자</a:t>
             </a:r>
             <a:endParaRPr lang="en-US" sz="1200" dirty="0"/>
           </a:p>
@@ -9620,373 +9586,217 @@
       </p:sp>
       <p:sp>
         <p:nvSpPr>
-          <p:cNvPr id="39" name="Text 37"/>
-          <p:cNvSpPr/>
-          <p:nvPr/>
-        </p:nvSpPr>
-        <p:spPr>
-          <a:xfrm>
-            <a:off x="393192" y="6227064"/>
-            <a:ext cx="3419856" cy="694944"/>
-          </a:xfrm>
-          <a:prstGeom prst="rect">
-            <a:avLst/>
-          </a:prstGeom>
-          <a:noFill/>
-          <a:ln/>
-        </p:spPr>
-        <p:txBody>
-          <a:bodyPr wrap="square" rtlCol="0" anchor="ctr"/>
-          <a:lstStyle/>
-          <a:p>
-            <a:pPr indent="0" marL="0">
-              <a:buNone/>
-            </a:pPr>
-            <a:r>
-              <a:rPr lang="en-US" sz="1050" dirty="0">
-                <a:solidFill>
-                  <a:srgbClr val="6B7280"/>
-                </a:solidFill>
-              </a:rPr>
-              <a:t>Pi SDK 연동 (Mainnet 개방 후)</a:t>
-            </a:r>
-            <a:endParaRPr lang="en-US" sz="1050" dirty="0"/>
-          </a:p>
-          <a:p>
-            <a:pPr indent="0" marL="0">
-              <a:buNone/>
-            </a:pPr>
-            <a:r>
-              <a:rPr lang="en-US" sz="1050" dirty="0">
-                <a:solidFill>
-                  <a:srgbClr val="6B7280"/>
-                </a:solidFill>
-              </a:rPr>
-              <a:t>pi_uid / pi_username 필드 활성화</a:t>
-            </a:r>
-            <a:endParaRPr lang="en-US" sz="1050" dirty="0"/>
-          </a:p>
-          <a:p>
-            <a:pPr indent="0" marL="0">
-              <a:buNone/>
-            </a:pPr>
-            <a:r>
-              <a:rPr lang="en-US" sz="1050" dirty="0">
-                <a:solidFill>
-                  <a:srgbClr val="6B7280"/>
-                </a:solidFill>
-              </a:rPr>
-              <a:t>Pi 기반 로그인 플로우</a:t>
-            </a:r>
-            <a:endParaRPr lang="en-US" sz="1050" dirty="0"/>
-          </a:p>
-        </p:txBody>
-      </p:sp>
-      <p:sp>
-        <p:nvSpPr>
-          <p:cNvPr id="40" name="Shape 38"/>
-          <p:cNvSpPr/>
-          <p:nvPr/>
-        </p:nvSpPr>
-        <p:spPr>
-          <a:xfrm>
-            <a:off x="4133088" y="5715000"/>
-            <a:ext cx="3749040" cy="1280160"/>
-          </a:xfrm>
-          <a:prstGeom prst="roundRect">
-            <a:avLst>
-              <a:gd name="adj" fmla="val 9286"/>
-            </a:avLst>
-          </a:prstGeom>
-          <a:solidFill>
-            <a:srgbClr val="FFFFFF"/>
-          </a:solidFill>
-          <a:ln w="12700">
-            <a:solidFill>
-              <a:srgbClr val="E9D5FF"/>
-            </a:solidFill>
-            <a:prstDash val="solid"/>
-          </a:ln>
-        </p:spPr>
-      </p:sp>
-      <p:sp>
-        <p:nvSpPr>
-          <p:cNvPr id="41" name="Shape 39"/>
-          <p:cNvSpPr/>
-          <p:nvPr/>
-        </p:nvSpPr>
-        <p:spPr>
-          <a:xfrm>
-            <a:off x="4270248" y="5833872"/>
-            <a:ext cx="3474720" cy="329184"/>
-          </a:xfrm>
-          <a:prstGeom prst="roundRect">
-            <a:avLst>
-              <a:gd name="adj" fmla="val 22222"/>
-            </a:avLst>
-          </a:prstGeom>
-          <a:solidFill>
-            <a:srgbClr val="FFEDD5"/>
-          </a:solidFill>
-          <a:ln w="12700">
-            <a:solidFill>
-              <a:srgbClr val="FFEDD5"/>
-            </a:solidFill>
-            <a:prstDash val="solid"/>
-          </a:ln>
-        </p:spPr>
-      </p:sp>
-      <p:sp>
-        <p:nvSpPr>
-          <p:cNvPr id="42" name="Text 40"/>
-          <p:cNvSpPr/>
-          <p:nvPr/>
-        </p:nvSpPr>
-        <p:spPr>
-          <a:xfrm>
-            <a:off x="4270248" y="5833872"/>
-            <a:ext cx="3474720" cy="329184"/>
-          </a:xfrm>
-          <a:prstGeom prst="rect">
-            <a:avLst/>
-          </a:prstGeom>
-          <a:noFill/>
-          <a:ln/>
-        </p:spPr>
-        <p:txBody>
-          <a:bodyPr wrap="square" rtlCol="0" anchor="ctr"/>
-          <a:lstStyle/>
-          <a:p>
-            <a:pPr algn="ctr" indent="0" marL="0">
-              <a:buNone/>
-            </a:pPr>
-            <a:r>
-              <a:rPr lang="en-US" sz="1200" b="1" dirty="0">
-                <a:solidFill>
-                  <a:srgbClr val="EA580C"/>
-                </a:solidFill>
-              </a:rPr>
-              <a:t>Pi 코인 결제 연동</a:t>
-            </a:r>
-            <a:endParaRPr lang="en-US" sz="1200" dirty="0"/>
-          </a:p>
-        </p:txBody>
-      </p:sp>
-      <p:sp>
-        <p:nvSpPr>
-          <p:cNvPr id="43" name="Text 41"/>
-          <p:cNvSpPr/>
-          <p:nvPr/>
-        </p:nvSpPr>
-        <p:spPr>
-          <a:xfrm>
-            <a:off x="4297680" y="6227064"/>
-            <a:ext cx="3419856" cy="694944"/>
-          </a:xfrm>
-          <a:prstGeom prst="rect">
-            <a:avLst/>
-          </a:prstGeom>
-          <a:noFill/>
-          <a:ln/>
-        </p:spPr>
-        <p:txBody>
-          <a:bodyPr wrap="square" rtlCol="0" anchor="ctr"/>
-          <a:lstStyle/>
-          <a:p>
-            <a:pPr indent="0" marL="0">
-              <a:buNone/>
-            </a:pPr>
-            <a:r>
-              <a:rPr lang="en-US" sz="1050" dirty="0">
-                <a:solidFill>
-                  <a:srgbClr val="6B7280"/>
-                </a:solidFill>
-              </a:rPr>
-              <a:t>Pi 결제 API 연동</a:t>
-            </a:r>
-            <a:endParaRPr lang="en-US" sz="1050" dirty="0"/>
-          </a:p>
-          <a:p>
-            <a:pPr indent="0" marL="0">
-              <a:buNone/>
-            </a:pPr>
-            <a:r>
-              <a:rPr lang="en-US" sz="1050" dirty="0">
-                <a:solidFill>
-                  <a:srgbClr val="6B7280"/>
-                </a:solidFill>
-              </a:rPr>
-              <a:t>PICK ↔ Pi 토큰 전환</a:t>
-            </a:r>
-            <a:endParaRPr lang="en-US" sz="1050" dirty="0"/>
-          </a:p>
-          <a:p>
-            <a:pPr indent="0" marL="0">
-              <a:buNone/>
-            </a:pPr>
-            <a:r>
-              <a:rPr lang="en-US" sz="1050" dirty="0">
-                <a:solidFill>
-                  <a:srgbClr val="6B7280"/>
-                </a:solidFill>
-              </a:rPr>
-              <a:t>Pi 기반 정산 시스템</a:t>
-            </a:r>
-            <a:endParaRPr lang="en-US" sz="1050" dirty="0"/>
-          </a:p>
-        </p:txBody>
-      </p:sp>
-      <p:sp>
-        <p:nvSpPr>
-          <p:cNvPr id="44" name="Shape 42"/>
-          <p:cNvSpPr/>
-          <p:nvPr/>
-        </p:nvSpPr>
-        <p:spPr>
-          <a:xfrm>
-            <a:off x="8037576" y="5715000"/>
-            <a:ext cx="3749040" cy="1280160"/>
-          </a:xfrm>
-          <a:prstGeom prst="roundRect">
-            <a:avLst>
-              <a:gd name="adj" fmla="val 9286"/>
-            </a:avLst>
-          </a:prstGeom>
-          <a:solidFill>
-            <a:srgbClr val="FFFFFF"/>
-          </a:solidFill>
-          <a:ln w="12700">
-            <a:solidFill>
-              <a:srgbClr val="E9D5FF"/>
-            </a:solidFill>
-            <a:prstDash val="solid"/>
-          </a:ln>
-        </p:spPr>
-      </p:sp>
-      <p:sp>
-        <p:nvSpPr>
-          <p:cNvPr id="45" name="Shape 43"/>
-          <p:cNvSpPr/>
-          <p:nvPr/>
-        </p:nvSpPr>
-        <p:spPr>
-          <a:xfrm>
-            <a:off x="8174736" y="5833872"/>
-            <a:ext cx="3474720" cy="329184"/>
-          </a:xfrm>
-          <a:prstGeom prst="roundRect">
-            <a:avLst>
-              <a:gd name="adj" fmla="val 22222"/>
-            </a:avLst>
-          </a:prstGeom>
-          <a:solidFill>
-            <a:srgbClr val="FFEDD5"/>
-          </a:solidFill>
-          <a:ln w="12700">
-            <a:solidFill>
-              <a:srgbClr val="FFEDD5"/>
-            </a:solidFill>
-            <a:prstDash val="solid"/>
-          </a:ln>
-        </p:spPr>
-      </p:sp>
-      <p:sp>
-        <p:nvSpPr>
-          <p:cNvPr id="46" name="Text 44"/>
-          <p:cNvSpPr/>
-          <p:nvPr/>
-        </p:nvSpPr>
-        <p:spPr>
-          <a:xfrm>
-            <a:off x="8174736" y="5833872"/>
-            <a:ext cx="3474720" cy="329184"/>
-          </a:xfrm>
-          <a:prstGeom prst="rect">
-            <a:avLst/>
-          </a:prstGeom>
-          <a:noFill/>
-          <a:ln/>
-        </p:spPr>
-        <p:txBody>
-          <a:bodyPr wrap="square" rtlCol="0" anchor="ctr"/>
-          <a:lstStyle/>
-          <a:p>
-            <a:pPr algn="ctr" indent="0" marL="0">
-              <a:buNone/>
-            </a:pPr>
-            <a:r>
-              <a:rPr lang="en-US" sz="1200" b="1" dirty="0">
-                <a:solidFill>
-                  <a:srgbClr val="EA580C"/>
-                </a:solidFill>
-              </a:rPr>
-              <a:t>Pi 생태계 확장</a:t>
-            </a:r>
-            <a:endParaRPr lang="en-US" sz="1200" dirty="0"/>
-          </a:p>
-        </p:txBody>
-      </p:sp>
-      <p:sp>
-        <p:nvSpPr>
-          <p:cNvPr id="47" name="Text 45"/>
-          <p:cNvSpPr/>
-          <p:nvPr/>
-        </p:nvSpPr>
-        <p:spPr>
-          <a:xfrm>
-            <a:off x="8202168" y="6227064"/>
-            <a:ext cx="3419856" cy="694944"/>
-          </a:xfrm>
-          <a:prstGeom prst="rect">
-            <a:avLst/>
-          </a:prstGeom>
-          <a:noFill/>
-          <a:ln/>
-        </p:spPr>
-        <p:txBody>
-          <a:bodyPr wrap="square" rtlCol="0" anchor="ctr"/>
-          <a:lstStyle/>
-          <a:p>
-            <a:pPr indent="0" marL="0">
-              <a:buNone/>
-            </a:pPr>
-            <a:r>
-              <a:rPr lang="en-US" sz="1050" dirty="0">
-                <a:solidFill>
-                  <a:srgbClr val="6B7280"/>
-                </a:solidFill>
-              </a:rPr>
-              <a:t>Pi 마이닝 연동 혜택</a:t>
-            </a:r>
-            <a:endParaRPr lang="en-US" sz="1050" dirty="0"/>
-          </a:p>
-          <a:p>
-            <a:pPr indent="0" marL="0">
-              <a:buNone/>
-            </a:pPr>
-            <a:r>
-              <a:rPr lang="en-US" sz="1050" dirty="0">
-                <a:solidFill>
-                  <a:srgbClr val="6B7280"/>
-                </a:solidFill>
-              </a:rPr>
-              <a:t>Pi 홀더 전용 할인 쿠폰</a:t>
-            </a:r>
-            <a:endParaRPr lang="en-US" sz="1050" dirty="0"/>
-          </a:p>
-          <a:p>
-            <a:pPr indent="0" marL="0">
-              <a:buNone/>
-            </a:pPr>
-            <a:r>
-              <a:rPr lang="en-US" sz="1050" dirty="0">
-                <a:solidFill>
-                  <a:srgbClr val="6B7280"/>
-                </a:solidFill>
-              </a:rPr>
-              <a:t>Pi Network 커뮤니티 마케팅</a:t>
-            </a:r>
-            <a:endParaRPr lang="en-US" sz="1050" dirty="0"/>
+          <p:cNvPr id="49" name="Text 47"/>
+          <p:cNvSpPr/>
+          <p:nvPr/>
+        </p:nvSpPr>
+        <p:spPr>
+          <a:xfrm>
+            <a:off x="8257032" y="4160520"/>
+            <a:ext cx="3401568" cy="338328"/>
+          </a:xfrm>
+          <a:prstGeom prst="rect">
+            <a:avLst/>
+          </a:prstGeom>
+          <a:noFill/>
+          <a:ln/>
+        </p:spPr>
+        <p:txBody>
+          <a:bodyPr wrap="square" rtlCol="0" anchor="ctr"/>
+          <a:lstStyle/>
+          <a:p>
+            <a:pPr indent="0" marL="0">
+              <a:buNone/>
+            </a:pPr>
+            <a:r>
+              <a:rPr lang="en-US" sz="1000" dirty="0">
+                <a:solidFill>
+                  <a:srgbClr val="1F1235"/>
+                </a:solidFill>
+              </a:rPr>
+              <a:t>✓  DB 인덱스 30개+ (GIN 전문검색 포함)</a:t>
+            </a:r>
+            <a:endParaRPr lang="en-US" sz="1000" dirty="0"/>
+          </a:p>
+        </p:txBody>
+      </p:sp>
+      <p:sp>
+        <p:nvSpPr>
+          <p:cNvPr id="50" name="Text 48"/>
+          <p:cNvSpPr/>
+          <p:nvPr/>
+        </p:nvSpPr>
+        <p:spPr>
+          <a:xfrm>
+            <a:off x="8257032" y="4507992"/>
+            <a:ext cx="3401568" cy="338328"/>
+          </a:xfrm>
+          <a:prstGeom prst="rect">
+            <a:avLst/>
+          </a:prstGeom>
+          <a:noFill/>
+          <a:ln/>
+        </p:spPr>
+        <p:txBody>
+          <a:bodyPr wrap="square" rtlCol="0" anchor="ctr"/>
+          <a:lstStyle/>
+          <a:p>
+            <a:pPr indent="0" marL="0">
+              <a:buNone/>
+            </a:pPr>
+            <a:r>
+              <a:rPr lang="en-US" sz="1000" dirty="0">
+                <a:solidFill>
+                  <a:srgbClr val="1F1235"/>
+                </a:solidFill>
+              </a:rPr>
+              <a:t>✓  운영 RLS 정책 + Storage 버킷 정책</a:t>
+            </a:r>
+            <a:endParaRPr lang="en-US" sz="1000" dirty="0"/>
+          </a:p>
+        </p:txBody>
+      </p:sp>
+      <p:sp>
+        <p:nvSpPr>
+          <p:cNvPr id="51" name="Text 49"/>
+          <p:cNvSpPr/>
+          <p:nvPr/>
+        </p:nvSpPr>
+        <p:spPr>
+          <a:xfrm>
+            <a:off x="8257032" y="4855464"/>
+            <a:ext cx="3401568" cy="338328"/>
+          </a:xfrm>
+          <a:prstGeom prst="rect">
+            <a:avLst/>
+          </a:prstGeom>
+          <a:noFill/>
+          <a:ln/>
+        </p:spPr>
+        <p:txBody>
+          <a:bodyPr wrap="square" rtlCol="0" anchor="ctr"/>
+          <a:lstStyle/>
+          <a:p>
+            <a:pPr indent="0" marL="0">
+              <a:buNone/>
+            </a:pPr>
+            <a:r>
+              <a:rPr lang="en-US" sz="1000" dirty="0">
+                <a:solidFill>
+                  <a:srgbClr val="1F1235"/>
+                </a:solidFill>
+              </a:rPr>
+              <a:t>✓  RLS 라이더 미배정 주문 조회 정책 추가</a:t>
+            </a:r>
+            <a:endParaRPr lang="en-US" sz="1000" dirty="0"/>
+          </a:p>
+        </p:txBody>
+      </p:sp>
+      <p:sp>
+        <p:nvSpPr>
+          <p:cNvPr id="52" name="Text 50"/>
+          <p:cNvSpPr/>
+          <p:nvPr/>
+        </p:nvSpPr>
+        <p:spPr>
+          <a:xfrm>
+            <a:off x="8257032" y="5202936"/>
+            <a:ext cx="3401568" cy="338328"/>
+          </a:xfrm>
+          <a:prstGeom prst="rect">
+            <a:avLst/>
+          </a:prstGeom>
+          <a:noFill/>
+          <a:ln/>
+        </p:spPr>
+        <p:txBody>
+          <a:bodyPr wrap="square" rtlCol="0" anchor="ctr"/>
+          <a:lstStyle/>
+          <a:p>
+            <a:pPr indent="0" marL="0">
+              <a:buNone/>
+            </a:pPr>
+            <a:r>
+              <a:rPr lang="en-US" sz="1000" dirty="0">
+                <a:solidFill>
+                  <a:srgbClr val="1F1235"/>
+                </a:solidFill>
+              </a:rPr>
+              <a:t>✓  관리자 5탭: 통계·회원·가게·쿠폰·FCM 푸시</a:t>
+            </a:r>
+            <a:endParaRPr lang="en-US" sz="1000" dirty="0"/>
+          </a:p>
+        </p:txBody>
+      </p:sp>
+      <p:sp>
+        <p:nvSpPr>
+          <p:cNvPr id="53" name="Text 51"/>
+          <p:cNvSpPr/>
+          <p:nvPr/>
+        </p:nvSpPr>
+        <p:spPr>
+          <a:xfrm>
+            <a:off x="8257032" y="5550408"/>
+            <a:ext cx="3401568" cy="338328"/>
+          </a:xfrm>
+          <a:prstGeom prst="rect">
+            <a:avLst/>
+          </a:prstGeom>
+          <a:noFill/>
+          <a:ln/>
+        </p:spPr>
+        <p:txBody>
+          <a:bodyPr wrap="square" rtlCol="0" anchor="ctr"/>
+          <a:lstStyle/>
+          <a:p>
+            <a:pPr indent="0" marL="0">
+              <a:buNone/>
+            </a:pPr>
+            <a:r>
+              <a:rPr lang="en-US" sz="1000" dirty="0">
+                <a:solidFill>
+                  <a:srgbClr val="1F1235"/>
+                </a:solidFill>
+              </a:rPr>
+              <a:t>✓  404·에러·로딩·스플래시 페이지</a:t>
+            </a:r>
+            <a:endParaRPr lang="en-US" sz="1000" dirty="0"/>
+          </a:p>
+        </p:txBody>
+      </p:sp>
+      <p:sp>
+        <p:nvSpPr>
+          <p:cNvPr id="54" name="Text 52"/>
+          <p:cNvSpPr/>
+          <p:nvPr/>
+        </p:nvSpPr>
+        <p:spPr>
+          <a:xfrm>
+            <a:off x="8257032" y="5897880"/>
+            <a:ext cx="3401568" cy="338328"/>
+          </a:xfrm>
+          <a:prstGeom prst="rect">
+            <a:avLst/>
+          </a:prstGeom>
+          <a:noFill/>
+          <a:ln/>
+        </p:spPr>
+        <p:txBody>
+          <a:bodyPr wrap="square" rtlCol="0" anchor="ctr"/>
+          <a:lstStyle/>
+          <a:p>
+            <a:pPr indent="0" marL="0">
+              <a:buNone/>
+            </a:pPr>
+            <a:r>
+              <a:rPr lang="en-US" sz="1000" dirty="0">
+                <a:solidFill>
+                  <a:srgbClr val="1F1235"/>
+                </a:solidFill>
+              </a:rPr>
+              <a:t>✓  다크모드 + Tailwind dark: 클래스 전면 적용</a:t>
+            </a:r>
+            <a:endParaRPr lang="en-US" sz="1000" dirty="0"/>
           </a:p>
         </p:txBody>
       </p:sp>
@@ -10052,6 +9862,1737 @@
                   <a:srgbClr val="4C1D95"/>
                 </a:solidFill>
               </a:rPr>
+              <a:t>🚀  Phase 1~3 완성 · 다음 단계 로드맵</a:t>
+            </a:r>
+            <a:endParaRPr lang="en-US" sz="2600" dirty="0"/>
+          </a:p>
+        </p:txBody>
+      </p:sp>
+      <p:sp>
+        <p:nvSpPr>
+          <p:cNvPr id="3" name="Shape 1"/>
+          <p:cNvSpPr/>
+          <p:nvPr/>
+        </p:nvSpPr>
+        <p:spPr>
+          <a:xfrm>
+            <a:off x="365760" y="804672"/>
+            <a:ext cx="3657600" cy="45720"/>
+          </a:xfrm>
+          <a:prstGeom prst="rect">
+            <a:avLst/>
+          </a:prstGeom>
+          <a:solidFill>
+            <a:srgbClr val="16A34A"/>
+          </a:solidFill>
+          <a:ln w="12700">
+            <a:solidFill>
+              <a:srgbClr val="16A34A"/>
+            </a:solidFill>
+            <a:prstDash val="solid"/>
+          </a:ln>
+        </p:spPr>
+      </p:sp>
+      <p:sp>
+        <p:nvSpPr>
+          <p:cNvPr id="4" name="Shape 2"/>
+          <p:cNvSpPr/>
+          <p:nvPr/>
+        </p:nvSpPr>
+        <p:spPr>
+          <a:xfrm>
+            <a:off x="365760" y="914400"/>
+            <a:ext cx="12070080" cy="548640"/>
+          </a:xfrm>
+          <a:prstGeom prst="roundRect">
+            <a:avLst>
+              <a:gd name="adj" fmla="val 20000"/>
+            </a:avLst>
+          </a:prstGeom>
+          <a:solidFill>
+            <a:srgbClr val="DCFCE7"/>
+          </a:solidFill>
+          <a:ln w="12700">
+            <a:solidFill>
+              <a:srgbClr val="16A34A"/>
+            </a:solidFill>
+            <a:prstDash val="solid"/>
+          </a:ln>
+        </p:spPr>
+      </p:sp>
+      <p:sp>
+        <p:nvSpPr>
+          <p:cNvPr id="5" name="Text 3"/>
+          <p:cNvSpPr/>
+          <p:nvPr/>
+        </p:nvSpPr>
+        <p:spPr>
+          <a:xfrm>
+            <a:off x="365760" y="914400"/>
+            <a:ext cx="12070080" cy="548640"/>
+          </a:xfrm>
+          <a:prstGeom prst="rect">
+            <a:avLst/>
+          </a:prstGeom>
+          <a:noFill/>
+          <a:ln/>
+        </p:spPr>
+        <p:txBody>
+          <a:bodyPr wrap="square" rtlCol="0" anchor="ctr"/>
+          <a:lstStyle/>
+          <a:p>
+            <a:pPr algn="ctr" indent="0" marL="0">
+              <a:buNone/>
+            </a:pPr>
+            <a:r>
+              <a:rPr lang="en-US" sz="1400" b="1" dirty="0">
+                <a:solidFill>
+                  <a:srgbClr val="16A34A"/>
+                </a:solidFill>
+              </a:rPr>
+              <a:t>🎉  Phase 1~3 완성! 65개+ 기능 구현 · 미착수 기능 0개 · Pi Network 연동만 남음</a:t>
+            </a:r>
+            <a:endParaRPr lang="en-US" sz="1400" dirty="0"/>
+          </a:p>
+        </p:txBody>
+      </p:sp>
+      <p:sp>
+        <p:nvSpPr>
+          <p:cNvPr id="6" name="Shape 4"/>
+          <p:cNvSpPr/>
+          <p:nvPr/>
+        </p:nvSpPr>
+        <p:spPr>
+          <a:xfrm>
+            <a:off x="365760" y="1600200"/>
+            <a:ext cx="1325880" cy="384048"/>
+          </a:xfrm>
+          <a:prstGeom prst="roundRect">
+            <a:avLst>
+              <a:gd name="adj" fmla="val 23810"/>
+            </a:avLst>
+          </a:prstGeom>
+          <a:solidFill>
+            <a:srgbClr val="DCFCE7"/>
+          </a:solidFill>
+          <a:ln w="12700">
+            <a:solidFill>
+              <a:srgbClr val="16A34A"/>
+            </a:solidFill>
+            <a:prstDash val="solid"/>
+          </a:ln>
+        </p:spPr>
+      </p:sp>
+      <p:sp>
+        <p:nvSpPr>
+          <p:cNvPr id="7" name="Text 5"/>
+          <p:cNvSpPr/>
+          <p:nvPr/>
+        </p:nvSpPr>
+        <p:spPr>
+          <a:xfrm>
+            <a:off x="365760" y="1600200"/>
+            <a:ext cx="1325880" cy="384048"/>
+          </a:xfrm>
+          <a:prstGeom prst="rect">
+            <a:avLst/>
+          </a:prstGeom>
+          <a:noFill/>
+          <a:ln/>
+        </p:spPr>
+        <p:txBody>
+          <a:bodyPr wrap="square" rtlCol="0" anchor="ctr"/>
+          <a:lstStyle/>
+          <a:p>
+            <a:pPr algn="ctr" indent="0" marL="0">
+              <a:buNone/>
+            </a:pPr>
+            <a:r>
+              <a:rPr lang="en-US" sz="1100" b="1" dirty="0">
+                <a:solidFill>
+                  <a:srgbClr val="16A34A"/>
+                </a:solidFill>
+              </a:rPr>
+              <a:t>✅ Phase 1~3</a:t>
+            </a:r>
+            <a:endParaRPr lang="en-US" sz="1100" dirty="0"/>
+          </a:p>
+        </p:txBody>
+      </p:sp>
+      <p:sp>
+        <p:nvSpPr>
+          <p:cNvPr id="8" name="Shape 6"/>
+          <p:cNvSpPr/>
+          <p:nvPr/>
+        </p:nvSpPr>
+        <p:spPr>
+          <a:xfrm>
+            <a:off x="228600" y="2057400"/>
+            <a:ext cx="3749040" cy="1280160"/>
+          </a:xfrm>
+          <a:prstGeom prst="roundRect">
+            <a:avLst>
+              <a:gd name="adj" fmla="val 9286"/>
+            </a:avLst>
+          </a:prstGeom>
+          <a:solidFill>
+            <a:srgbClr val="FFFFFF"/>
+          </a:solidFill>
+          <a:ln w="12700">
+            <a:solidFill>
+              <a:srgbClr val="E9D5FF"/>
+            </a:solidFill>
+            <a:prstDash val="solid"/>
+          </a:ln>
+        </p:spPr>
+      </p:sp>
+      <p:sp>
+        <p:nvSpPr>
+          <p:cNvPr id="9" name="Shape 7"/>
+          <p:cNvSpPr/>
+          <p:nvPr/>
+        </p:nvSpPr>
+        <p:spPr>
+          <a:xfrm>
+            <a:off x="365760" y="2176272"/>
+            <a:ext cx="3474720" cy="329184"/>
+          </a:xfrm>
+          <a:prstGeom prst="roundRect">
+            <a:avLst>
+              <a:gd name="adj" fmla="val 22222"/>
+            </a:avLst>
+          </a:prstGeom>
+          <a:solidFill>
+            <a:srgbClr val="DCFCE7"/>
+          </a:solidFill>
+          <a:ln w="12700">
+            <a:solidFill>
+              <a:srgbClr val="DCFCE7"/>
+            </a:solidFill>
+            <a:prstDash val="solid"/>
+          </a:ln>
+        </p:spPr>
+      </p:sp>
+      <p:sp>
+        <p:nvSpPr>
+          <p:cNvPr id="10" name="Text 8"/>
+          <p:cNvSpPr/>
+          <p:nvPr/>
+        </p:nvSpPr>
+        <p:spPr>
+          <a:xfrm>
+            <a:off x="365760" y="2176272"/>
+            <a:ext cx="3474720" cy="329184"/>
+          </a:xfrm>
+          <a:prstGeom prst="rect">
+            <a:avLst/>
+          </a:prstGeom>
+          <a:noFill/>
+          <a:ln/>
+        </p:spPr>
+        <p:txBody>
+          <a:bodyPr wrap="square" rtlCol="0" anchor="ctr"/>
+          <a:lstStyle/>
+          <a:p>
+            <a:pPr algn="ctr" indent="0" marL="0">
+              <a:buNone/>
+            </a:pPr>
+            <a:r>
+              <a:rPr lang="en-US" sz="1200" b="1" dirty="0">
+                <a:solidFill>
+                  <a:srgbClr val="16A34A"/>
+                </a:solidFill>
+              </a:rPr>
+              <a:t>인증 · 지갑 · 주문 플로우</a:t>
+            </a:r>
+            <a:endParaRPr lang="en-US" sz="1200" dirty="0"/>
+          </a:p>
+        </p:txBody>
+      </p:sp>
+      <p:sp>
+        <p:nvSpPr>
+          <p:cNvPr id="11" name="Text 9"/>
+          <p:cNvSpPr/>
+          <p:nvPr/>
+        </p:nvSpPr>
+        <p:spPr>
+          <a:xfrm>
+            <a:off x="393192" y="2569464"/>
+            <a:ext cx="3419856" cy="694944"/>
+          </a:xfrm>
+          <a:prstGeom prst="rect">
+            <a:avLst/>
+          </a:prstGeom>
+          <a:noFill/>
+          <a:ln/>
+        </p:spPr>
+        <p:txBody>
+          <a:bodyPr wrap="square" rtlCol="0" anchor="ctr"/>
+          <a:lstStyle/>
+          <a:p>
+            <a:pPr indent="0" marL="0">
+              <a:buNone/>
+            </a:pPr>
+            <a:r>
+              <a:rPr lang="en-US" sz="1050" dirty="0">
+                <a:solidFill>
+                  <a:srgbClr val="6B7280"/>
+                </a:solidFill>
+              </a:rPr>
+              <a:t>이메일 로그인 (카카오 비즈니스 후 추가)</a:t>
+            </a:r>
+            <a:endParaRPr lang="en-US" sz="1050" dirty="0"/>
+          </a:p>
+          <a:p>
+            <a:pPr indent="0" marL="0">
+              <a:buNone/>
+            </a:pPr>
+            <a:r>
+              <a:rPr lang="en-US" sz="1050" dirty="0">
+                <a:solidFill>
+                  <a:srgbClr val="6B7280"/>
+                </a:solidFill>
+              </a:rPr>
+              <a:t>PICK 토큰 지갑 + 토스페이먼츠</a:t>
+            </a:r>
+            <a:endParaRPr lang="en-US" sz="1050" dirty="0"/>
+          </a:p>
+          <a:p>
+            <a:pPr indent="0" marL="0">
+              <a:buNone/>
+            </a:pPr>
+            <a:r>
+              <a:rPr lang="en-US" sz="1050" dirty="0">
+                <a:solidFill>
+                  <a:srgbClr val="6B7280"/>
+                </a:solidFill>
+              </a:rPr>
+              <a:t>Realtime 주문 추적 완성</a:t>
+            </a:r>
+            <a:endParaRPr lang="en-US" sz="1050" dirty="0"/>
+          </a:p>
+        </p:txBody>
+      </p:sp>
+      <p:sp>
+        <p:nvSpPr>
+          <p:cNvPr id="12" name="Shape 10"/>
+          <p:cNvSpPr/>
+          <p:nvPr/>
+        </p:nvSpPr>
+        <p:spPr>
+          <a:xfrm>
+            <a:off x="4133088" y="2057400"/>
+            <a:ext cx="3749040" cy="1280160"/>
+          </a:xfrm>
+          <a:prstGeom prst="roundRect">
+            <a:avLst>
+              <a:gd name="adj" fmla="val 9286"/>
+            </a:avLst>
+          </a:prstGeom>
+          <a:solidFill>
+            <a:srgbClr val="FFFFFF"/>
+          </a:solidFill>
+          <a:ln w="12700">
+            <a:solidFill>
+              <a:srgbClr val="E9D5FF"/>
+            </a:solidFill>
+            <a:prstDash val="solid"/>
+          </a:ln>
+        </p:spPr>
+      </p:sp>
+      <p:sp>
+        <p:nvSpPr>
+          <p:cNvPr id="13" name="Shape 11"/>
+          <p:cNvSpPr/>
+          <p:nvPr/>
+        </p:nvSpPr>
+        <p:spPr>
+          <a:xfrm>
+            <a:off x="4270248" y="2176272"/>
+            <a:ext cx="3474720" cy="329184"/>
+          </a:xfrm>
+          <a:prstGeom prst="roundRect">
+            <a:avLst>
+              <a:gd name="adj" fmla="val 22222"/>
+            </a:avLst>
+          </a:prstGeom>
+          <a:solidFill>
+            <a:srgbClr val="DCFCE7"/>
+          </a:solidFill>
+          <a:ln w="12700">
+            <a:solidFill>
+              <a:srgbClr val="DCFCE7"/>
+            </a:solidFill>
+            <a:prstDash val="solid"/>
+          </a:ln>
+        </p:spPr>
+      </p:sp>
+      <p:sp>
+        <p:nvSpPr>
+          <p:cNvPr id="14" name="Text 12"/>
+          <p:cNvSpPr/>
+          <p:nvPr/>
+        </p:nvSpPr>
+        <p:spPr>
+          <a:xfrm>
+            <a:off x="4270248" y="2176272"/>
+            <a:ext cx="3474720" cy="329184"/>
+          </a:xfrm>
+          <a:prstGeom prst="rect">
+            <a:avLst/>
+          </a:prstGeom>
+          <a:noFill/>
+          <a:ln/>
+        </p:spPr>
+        <p:txBody>
+          <a:bodyPr wrap="square" rtlCol="0" anchor="ctr"/>
+          <a:lstStyle/>
+          <a:p>
+            <a:pPr algn="ctr" indent="0" marL="0">
+              <a:buNone/>
+            </a:pPr>
+            <a:r>
+              <a:rPr lang="en-US" sz="1200" b="1" dirty="0">
+                <a:solidFill>
+                  <a:srgbClr val="16A34A"/>
+                </a:solidFill>
+              </a:rPr>
+              <a:t>사장님 · 라이더 · 관리자</a:t>
+            </a:r>
+            <a:endParaRPr lang="en-US" sz="1200" dirty="0"/>
+          </a:p>
+        </p:txBody>
+      </p:sp>
+      <p:sp>
+        <p:nvSpPr>
+          <p:cNvPr id="15" name="Text 13"/>
+          <p:cNvSpPr/>
+          <p:nvPr/>
+        </p:nvSpPr>
+        <p:spPr>
+          <a:xfrm>
+            <a:off x="4297680" y="2569464"/>
+            <a:ext cx="3419856" cy="694944"/>
+          </a:xfrm>
+          <a:prstGeom prst="rect">
+            <a:avLst/>
+          </a:prstGeom>
+          <a:noFill/>
+          <a:ln/>
+        </p:spPr>
+        <p:txBody>
+          <a:bodyPr wrap="square" rtlCol="0" anchor="ctr"/>
+          <a:lstStyle/>
+          <a:p>
+            <a:pPr indent="0" marL="0">
+              <a:buNone/>
+            </a:pPr>
+            <a:r>
+              <a:rPr lang="en-US" sz="1050" dirty="0">
+                <a:solidFill>
+                  <a:srgbClr val="6B7280"/>
+                </a:solidFill>
+              </a:rPr>
+              <a:t>사장님 주문/메뉴/정산/통계</a:t>
+            </a:r>
+            <a:endParaRPr lang="en-US" sz="1050" dirty="0"/>
+          </a:p>
+          <a:p>
+            <a:pPr indent="0" marL="0">
+              <a:buNone/>
+            </a:pPr>
+            <a:r>
+              <a:rPr lang="en-US" sz="1050" dirty="0">
+                <a:solidFill>
+                  <a:srgbClr val="6B7280"/>
+                </a:solidFill>
+              </a:rPr>
+              <a:t>라이더 수락/위치공유/수익</a:t>
+            </a:r>
+            <a:endParaRPr lang="en-US" sz="1050" dirty="0"/>
+          </a:p>
+          <a:p>
+            <a:pPr indent="0" marL="0">
+              <a:buNone/>
+            </a:pPr>
+            <a:r>
+              <a:rPr lang="en-US" sz="1050" dirty="0">
+                <a:solidFill>
+                  <a:srgbClr val="6B7280"/>
+                </a:solidFill>
+              </a:rPr>
+              <a:t>관리자 5탭 대시보드</a:t>
+            </a:r>
+            <a:endParaRPr lang="en-US" sz="1050" dirty="0"/>
+          </a:p>
+        </p:txBody>
+      </p:sp>
+      <p:sp>
+        <p:nvSpPr>
+          <p:cNvPr id="16" name="Shape 14"/>
+          <p:cNvSpPr/>
+          <p:nvPr/>
+        </p:nvSpPr>
+        <p:spPr>
+          <a:xfrm>
+            <a:off x="8037576" y="2057400"/>
+            <a:ext cx="3749040" cy="1280160"/>
+          </a:xfrm>
+          <a:prstGeom prst="roundRect">
+            <a:avLst>
+              <a:gd name="adj" fmla="val 9286"/>
+            </a:avLst>
+          </a:prstGeom>
+          <a:solidFill>
+            <a:srgbClr val="FFFFFF"/>
+          </a:solidFill>
+          <a:ln w="12700">
+            <a:solidFill>
+              <a:srgbClr val="E9D5FF"/>
+            </a:solidFill>
+            <a:prstDash val="solid"/>
+          </a:ln>
+        </p:spPr>
+      </p:sp>
+      <p:sp>
+        <p:nvSpPr>
+          <p:cNvPr id="17" name="Shape 15"/>
+          <p:cNvSpPr/>
+          <p:nvPr/>
+        </p:nvSpPr>
+        <p:spPr>
+          <a:xfrm>
+            <a:off x="8174736" y="2176272"/>
+            <a:ext cx="3474720" cy="329184"/>
+          </a:xfrm>
+          <a:prstGeom prst="roundRect">
+            <a:avLst>
+              <a:gd name="adj" fmla="val 22222"/>
+            </a:avLst>
+          </a:prstGeom>
+          <a:solidFill>
+            <a:srgbClr val="DCFCE7"/>
+          </a:solidFill>
+          <a:ln w="12700">
+            <a:solidFill>
+              <a:srgbClr val="DCFCE7"/>
+            </a:solidFill>
+            <a:prstDash val="solid"/>
+          </a:ln>
+        </p:spPr>
+      </p:sp>
+      <p:sp>
+        <p:nvSpPr>
+          <p:cNvPr id="18" name="Text 16"/>
+          <p:cNvSpPr/>
+          <p:nvPr/>
+        </p:nvSpPr>
+        <p:spPr>
+          <a:xfrm>
+            <a:off x="8174736" y="2176272"/>
+            <a:ext cx="3474720" cy="329184"/>
+          </a:xfrm>
+          <a:prstGeom prst="rect">
+            <a:avLst/>
+          </a:prstGeom>
+          <a:noFill/>
+          <a:ln/>
+        </p:spPr>
+        <p:txBody>
+          <a:bodyPr wrap="square" rtlCol="0" anchor="ctr"/>
+          <a:lstStyle/>
+          <a:p>
+            <a:pPr algn="ctr" indent="0" marL="0">
+              <a:buNone/>
+            </a:pPr>
+            <a:r>
+              <a:rPr lang="en-US" sz="1200" b="1" dirty="0">
+                <a:solidFill>
+                  <a:srgbClr val="16A34A"/>
+                </a:solidFill>
+              </a:rPr>
+              <a:t>PWA · 보안 · DB 최적화</a:t>
+            </a:r>
+            <a:endParaRPr lang="en-US" sz="1200" dirty="0"/>
+          </a:p>
+        </p:txBody>
+      </p:sp>
+      <p:sp>
+        <p:nvSpPr>
+          <p:cNvPr id="19" name="Text 17"/>
+          <p:cNvSpPr/>
+          <p:nvPr/>
+        </p:nvSpPr>
+        <p:spPr>
+          <a:xfrm>
+            <a:off x="8202168" y="2569464"/>
+            <a:ext cx="3419856" cy="694944"/>
+          </a:xfrm>
+          <a:prstGeom prst="rect">
+            <a:avLst/>
+          </a:prstGeom>
+          <a:noFill/>
+          <a:ln/>
+        </p:spPr>
+        <p:txBody>
+          <a:bodyPr wrap="square" rtlCol="0" anchor="ctr"/>
+          <a:lstStyle/>
+          <a:p>
+            <a:pPr indent="0" marL="0">
+              <a:buNone/>
+            </a:pPr>
+            <a:r>
+              <a:rPr lang="en-US" sz="1050" dirty="0">
+                <a:solidFill>
+                  <a:srgbClr val="6B7280"/>
+                </a:solidFill>
+              </a:rPr>
+              <a:t>Serwist 오프라인 캐싱</a:t>
+            </a:r>
+            <a:endParaRPr lang="en-US" sz="1050" dirty="0"/>
+          </a:p>
+          <a:p>
+            <a:pPr indent="0" marL="0">
+              <a:buNone/>
+            </a:pPr>
+            <a:r>
+              <a:rPr lang="en-US" sz="1050" dirty="0">
+                <a:solidFill>
+                  <a:srgbClr val="6B7280"/>
+                </a:solidFill>
+              </a:rPr>
+              <a:t>RLS + 인덱스 30개+ + FCM 푸시</a:t>
+            </a:r>
+            <a:endParaRPr lang="en-US" sz="1050" dirty="0"/>
+          </a:p>
+          <a:p>
+            <a:pPr indent="0" marL="0">
+              <a:buNone/>
+            </a:pPr>
+            <a:r>
+              <a:rPr lang="en-US" sz="1050" dirty="0">
+                <a:solidFill>
+                  <a:srgbClr val="6B7280"/>
+                </a:solidFill>
+              </a:rPr>
+              <a:t>Sentry + Storage 정책 완성</a:t>
+            </a:r>
+            <a:endParaRPr lang="en-US" sz="1050" dirty="0"/>
+          </a:p>
+        </p:txBody>
+      </p:sp>
+      <p:sp>
+        <p:nvSpPr>
+          <p:cNvPr id="20" name="Shape 18"/>
+          <p:cNvSpPr/>
+          <p:nvPr/>
+        </p:nvSpPr>
+        <p:spPr>
+          <a:xfrm>
+            <a:off x="365760" y="3429000"/>
+            <a:ext cx="1325880" cy="384048"/>
+          </a:xfrm>
+          <a:prstGeom prst="roundRect">
+            <a:avLst>
+              <a:gd name="adj" fmla="val 23810"/>
+            </a:avLst>
+          </a:prstGeom>
+          <a:solidFill>
+            <a:srgbClr val="FFFBEB"/>
+          </a:solidFill>
+          <a:ln w="12700">
+            <a:solidFill>
+              <a:srgbClr val="D97706"/>
+            </a:solidFill>
+            <a:prstDash val="solid"/>
+          </a:ln>
+        </p:spPr>
+      </p:sp>
+      <p:sp>
+        <p:nvSpPr>
+          <p:cNvPr id="21" name="Text 19"/>
+          <p:cNvSpPr/>
+          <p:nvPr/>
+        </p:nvSpPr>
+        <p:spPr>
+          <a:xfrm>
+            <a:off x="365760" y="3429000"/>
+            <a:ext cx="1325880" cy="384048"/>
+          </a:xfrm>
+          <a:prstGeom prst="rect">
+            <a:avLst/>
+          </a:prstGeom>
+          <a:noFill/>
+          <a:ln/>
+        </p:spPr>
+        <p:txBody>
+          <a:bodyPr wrap="square" rtlCol="0" anchor="ctr"/>
+          <a:lstStyle/>
+          <a:p>
+            <a:pPr algn="ctr" indent="0" marL="0">
+              <a:buNone/>
+            </a:pPr>
+            <a:r>
+              <a:rPr lang="en-US" sz="1100" b="1" dirty="0">
+                <a:solidFill>
+                  <a:srgbClr val="D97706"/>
+                </a:solidFill>
+              </a:rPr>
+              <a:t>🟡 런칭 준비</a:t>
+            </a:r>
+            <a:endParaRPr lang="en-US" sz="1100" dirty="0"/>
+          </a:p>
+        </p:txBody>
+      </p:sp>
+      <p:sp>
+        <p:nvSpPr>
+          <p:cNvPr id="22" name="Shape 20"/>
+          <p:cNvSpPr/>
+          <p:nvPr/>
+        </p:nvSpPr>
+        <p:spPr>
+          <a:xfrm>
+            <a:off x="228600" y="3886200"/>
+            <a:ext cx="3749040" cy="1280160"/>
+          </a:xfrm>
+          <a:prstGeom prst="roundRect">
+            <a:avLst>
+              <a:gd name="adj" fmla="val 9286"/>
+            </a:avLst>
+          </a:prstGeom>
+          <a:solidFill>
+            <a:srgbClr val="FFFFFF"/>
+          </a:solidFill>
+          <a:ln w="12700">
+            <a:solidFill>
+              <a:srgbClr val="E9D5FF"/>
+            </a:solidFill>
+            <a:prstDash val="solid"/>
+          </a:ln>
+        </p:spPr>
+      </p:sp>
+      <p:sp>
+        <p:nvSpPr>
+          <p:cNvPr id="23" name="Shape 21"/>
+          <p:cNvSpPr/>
+          <p:nvPr/>
+        </p:nvSpPr>
+        <p:spPr>
+          <a:xfrm>
+            <a:off x="365760" y="4005072"/>
+            <a:ext cx="3474720" cy="329184"/>
+          </a:xfrm>
+          <a:prstGeom prst="roundRect">
+            <a:avLst>
+              <a:gd name="adj" fmla="val 22222"/>
+            </a:avLst>
+          </a:prstGeom>
+          <a:solidFill>
+            <a:srgbClr val="FFFBEB"/>
+          </a:solidFill>
+          <a:ln w="12700">
+            <a:solidFill>
+              <a:srgbClr val="FFFBEB"/>
+            </a:solidFill>
+            <a:prstDash val="solid"/>
+          </a:ln>
+        </p:spPr>
+      </p:sp>
+      <p:sp>
+        <p:nvSpPr>
+          <p:cNvPr id="24" name="Text 22"/>
+          <p:cNvSpPr/>
+          <p:nvPr/>
+        </p:nvSpPr>
+        <p:spPr>
+          <a:xfrm>
+            <a:off x="365760" y="4005072"/>
+            <a:ext cx="3474720" cy="329184"/>
+          </a:xfrm>
+          <a:prstGeom prst="rect">
+            <a:avLst/>
+          </a:prstGeom>
+          <a:noFill/>
+          <a:ln/>
+        </p:spPr>
+        <p:txBody>
+          <a:bodyPr wrap="square" rtlCol="0" anchor="ctr"/>
+          <a:lstStyle/>
+          <a:p>
+            <a:pPr algn="ctr" indent="0" marL="0">
+              <a:buNone/>
+            </a:pPr>
+            <a:r>
+              <a:rPr lang="en-US" sz="1200" b="1" dirty="0">
+                <a:solidFill>
+                  <a:srgbClr val="D97706"/>
+                </a:solidFill>
+              </a:rPr>
+              <a:t>Firebase 환경변수 ✅</a:t>
+            </a:r>
+            <a:endParaRPr lang="en-US" sz="1200" dirty="0"/>
+          </a:p>
+        </p:txBody>
+      </p:sp>
+      <p:sp>
+        <p:nvSpPr>
+          <p:cNvPr id="25" name="Text 23"/>
+          <p:cNvSpPr/>
+          <p:nvPr/>
+        </p:nvSpPr>
+        <p:spPr>
+          <a:xfrm>
+            <a:off x="393192" y="4398264"/>
+            <a:ext cx="3419856" cy="694944"/>
+          </a:xfrm>
+          <a:prstGeom prst="rect">
+            <a:avLst/>
+          </a:prstGeom>
+          <a:noFill/>
+          <a:ln/>
+        </p:spPr>
+        <p:txBody>
+          <a:bodyPr wrap="square" rtlCol="0" anchor="ctr"/>
+          <a:lstStyle/>
+          <a:p>
+            <a:pPr indent="0" marL="0">
+              <a:buNone/>
+            </a:pPr>
+            <a:r>
+              <a:rPr lang="en-US" sz="1050" dirty="0">
+                <a:solidFill>
+                  <a:srgbClr val="6B7280"/>
+                </a:solidFill>
+              </a:rPr>
+              <a:t>API Key ~ App ID 완성</a:t>
+            </a:r>
+            <a:endParaRPr lang="en-US" sz="1050" dirty="0"/>
+          </a:p>
+          <a:p>
+            <a:pPr indent="0" marL="0">
+              <a:buNone/>
+            </a:pPr>
+            <a:r>
+              <a:rPr lang="en-US" sz="1050" dirty="0">
+                <a:solidFill>
+                  <a:srgbClr val="6B7280"/>
+                </a:solidFill>
+              </a:rPr>
+              <a:t>VAPID 키 완성</a:t>
+            </a:r>
+            <a:endParaRPr lang="en-US" sz="1050" dirty="0"/>
+          </a:p>
+          <a:p>
+            <a:pPr indent="0" marL="0">
+              <a:buNone/>
+            </a:pPr>
+            <a:r>
+              <a:rPr lang="en-US" sz="1050" dirty="0">
+                <a:solidFill>
+                  <a:srgbClr val="6B7280"/>
+                </a:solidFill>
+              </a:rPr>
+              <a:t>Admin SDK JSON 완성</a:t>
+            </a:r>
+            <a:endParaRPr lang="en-US" sz="1050" dirty="0"/>
+          </a:p>
+        </p:txBody>
+      </p:sp>
+      <p:sp>
+        <p:nvSpPr>
+          <p:cNvPr id="26" name="Shape 24"/>
+          <p:cNvSpPr/>
+          <p:nvPr/>
+        </p:nvSpPr>
+        <p:spPr>
+          <a:xfrm>
+            <a:off x="4133088" y="3886200"/>
+            <a:ext cx="3749040" cy="1280160"/>
+          </a:xfrm>
+          <a:prstGeom prst="roundRect">
+            <a:avLst>
+              <a:gd name="adj" fmla="val 9286"/>
+            </a:avLst>
+          </a:prstGeom>
+          <a:solidFill>
+            <a:srgbClr val="FFFFFF"/>
+          </a:solidFill>
+          <a:ln w="12700">
+            <a:solidFill>
+              <a:srgbClr val="E9D5FF"/>
+            </a:solidFill>
+            <a:prstDash val="solid"/>
+          </a:ln>
+        </p:spPr>
+      </p:sp>
+      <p:sp>
+        <p:nvSpPr>
+          <p:cNvPr id="27" name="Shape 25"/>
+          <p:cNvSpPr/>
+          <p:nvPr/>
+        </p:nvSpPr>
+        <p:spPr>
+          <a:xfrm>
+            <a:off x="4270248" y="4005072"/>
+            <a:ext cx="3474720" cy="329184"/>
+          </a:xfrm>
+          <a:prstGeom prst="roundRect">
+            <a:avLst>
+              <a:gd name="adj" fmla="val 22222"/>
+            </a:avLst>
+          </a:prstGeom>
+          <a:solidFill>
+            <a:srgbClr val="FFFBEB"/>
+          </a:solidFill>
+          <a:ln w="12700">
+            <a:solidFill>
+              <a:srgbClr val="FFFBEB"/>
+            </a:solidFill>
+            <a:prstDash val="solid"/>
+          </a:ln>
+        </p:spPr>
+      </p:sp>
+      <p:sp>
+        <p:nvSpPr>
+          <p:cNvPr id="28" name="Text 26"/>
+          <p:cNvSpPr/>
+          <p:nvPr/>
+        </p:nvSpPr>
+        <p:spPr>
+          <a:xfrm>
+            <a:off x="4270248" y="4005072"/>
+            <a:ext cx="3474720" cy="329184"/>
+          </a:xfrm>
+          <a:prstGeom prst="rect">
+            <a:avLst/>
+          </a:prstGeom>
+          <a:noFill/>
+          <a:ln/>
+        </p:spPr>
+        <p:txBody>
+          <a:bodyPr wrap="square" rtlCol="0" anchor="ctr"/>
+          <a:lstStyle/>
+          <a:p>
+            <a:pPr algn="ctr" indent="0" marL="0">
+              <a:buNone/>
+            </a:pPr>
+            <a:r>
+              <a:rPr lang="en-US" sz="1200" b="1" dirty="0">
+                <a:solidFill>
+                  <a:srgbClr val="D97706"/>
+                </a:solidFill>
+              </a:rPr>
+              <a:t>카카오 API 키 확인</a:t>
+            </a:r>
+            <a:endParaRPr lang="en-US" sz="1200" dirty="0"/>
+          </a:p>
+        </p:txBody>
+      </p:sp>
+      <p:sp>
+        <p:nvSpPr>
+          <p:cNvPr id="29" name="Text 27"/>
+          <p:cNvSpPr/>
+          <p:nvPr/>
+        </p:nvSpPr>
+        <p:spPr>
+          <a:xfrm>
+            <a:off x="4297680" y="4398264"/>
+            <a:ext cx="3419856" cy="694944"/>
+          </a:xfrm>
+          <a:prstGeom prst="rect">
+            <a:avLst/>
+          </a:prstGeom>
+          <a:noFill/>
+          <a:ln/>
+        </p:spPr>
+        <p:txBody>
+          <a:bodyPr wrap="square" rtlCol="0" anchor="ctr"/>
+          <a:lstStyle/>
+          <a:p>
+            <a:pPr indent="0" marL="0">
+              <a:buNone/>
+            </a:pPr>
+            <a:r>
+              <a:rPr lang="en-US" sz="1050" dirty="0">
+                <a:solidFill>
+                  <a:srgbClr val="6B7280"/>
+                </a:solidFill>
+              </a:rPr>
+              <a:t>앱 키 → JavaScript 키 재확인</a:t>
+            </a:r>
+            <a:endParaRPr lang="en-US" sz="1050" dirty="0"/>
+          </a:p>
+          <a:p>
+            <a:pPr indent="0" marL="0">
+              <a:buNone/>
+            </a:pPr>
+            <a:r>
+              <a:rPr lang="en-US" sz="1050" dirty="0">
+                <a:solidFill>
+                  <a:srgbClr val="6B7280"/>
+                </a:solidFill>
+              </a:rPr>
+              <a:t>NEXT_PUBLIC_KAKAO_MAP_KEY 검증</a:t>
+            </a:r>
+            <a:endParaRPr lang="en-US" sz="1050" dirty="0"/>
+          </a:p>
+          <a:p>
+            <a:pPr indent="0" marL="0">
+              <a:buNone/>
+            </a:pPr>
+            <a:r>
+              <a:rPr lang="en-US" sz="1050" dirty="0">
+                <a:solidFill>
+                  <a:srgbClr val="6B7280"/>
+                </a:solidFill>
+              </a:rPr>
+              <a:t>Kakao Map 지도 표시 테스트</a:t>
+            </a:r>
+            <a:endParaRPr lang="en-US" sz="1050" dirty="0"/>
+          </a:p>
+        </p:txBody>
+      </p:sp>
+      <p:sp>
+        <p:nvSpPr>
+          <p:cNvPr id="30" name="Shape 28"/>
+          <p:cNvSpPr/>
+          <p:nvPr/>
+        </p:nvSpPr>
+        <p:spPr>
+          <a:xfrm>
+            <a:off x="8037576" y="3886200"/>
+            <a:ext cx="3749040" cy="1280160"/>
+          </a:xfrm>
+          <a:prstGeom prst="roundRect">
+            <a:avLst>
+              <a:gd name="adj" fmla="val 9286"/>
+            </a:avLst>
+          </a:prstGeom>
+          <a:solidFill>
+            <a:srgbClr val="FFFFFF"/>
+          </a:solidFill>
+          <a:ln w="12700">
+            <a:solidFill>
+              <a:srgbClr val="E9D5FF"/>
+            </a:solidFill>
+            <a:prstDash val="solid"/>
+          </a:ln>
+        </p:spPr>
+      </p:sp>
+      <p:sp>
+        <p:nvSpPr>
+          <p:cNvPr id="31" name="Shape 29"/>
+          <p:cNvSpPr/>
+          <p:nvPr/>
+        </p:nvSpPr>
+        <p:spPr>
+          <a:xfrm>
+            <a:off x="8174736" y="4005072"/>
+            <a:ext cx="3474720" cy="329184"/>
+          </a:xfrm>
+          <a:prstGeom prst="roundRect">
+            <a:avLst>
+              <a:gd name="adj" fmla="val 22222"/>
+            </a:avLst>
+          </a:prstGeom>
+          <a:solidFill>
+            <a:srgbClr val="FFFBEB"/>
+          </a:solidFill>
+          <a:ln w="12700">
+            <a:solidFill>
+              <a:srgbClr val="FFFBEB"/>
+            </a:solidFill>
+            <a:prstDash val="solid"/>
+          </a:ln>
+        </p:spPr>
+      </p:sp>
+      <p:sp>
+        <p:nvSpPr>
+          <p:cNvPr id="32" name="Text 30"/>
+          <p:cNvSpPr/>
+          <p:nvPr/>
+        </p:nvSpPr>
+        <p:spPr>
+          <a:xfrm>
+            <a:off x="8174736" y="4005072"/>
+            <a:ext cx="3474720" cy="329184"/>
+          </a:xfrm>
+          <a:prstGeom prst="rect">
+            <a:avLst/>
+          </a:prstGeom>
+          <a:noFill/>
+          <a:ln/>
+        </p:spPr>
+        <p:txBody>
+          <a:bodyPr wrap="square" rtlCol="0" anchor="ctr"/>
+          <a:lstStyle/>
+          <a:p>
+            <a:pPr algn="ctr" indent="0" marL="0">
+              <a:buNone/>
+            </a:pPr>
+            <a:r>
+              <a:rPr lang="en-US" sz="1200" b="1" dirty="0">
+                <a:solidFill>
+                  <a:srgbClr val="D97706"/>
+                </a:solidFill>
+              </a:rPr>
+              <a:t>샘플 데이터 + 배포</a:t>
+            </a:r>
+            <a:endParaRPr lang="en-US" sz="1200" dirty="0"/>
+          </a:p>
+        </p:txBody>
+      </p:sp>
+      <p:sp>
+        <p:nvSpPr>
+          <p:cNvPr id="33" name="Text 31"/>
+          <p:cNvSpPr/>
+          <p:nvPr/>
+        </p:nvSpPr>
+        <p:spPr>
+          <a:xfrm>
+            <a:off x="8202168" y="4398264"/>
+            <a:ext cx="3419856" cy="694944"/>
+          </a:xfrm>
+          <a:prstGeom prst="rect">
+            <a:avLst/>
+          </a:prstGeom>
+          <a:noFill/>
+          <a:ln/>
+        </p:spPr>
+        <p:txBody>
+          <a:bodyPr wrap="square" rtlCol="0" anchor="ctr"/>
+          <a:lstStyle/>
+          <a:p>
+            <a:pPr indent="0" marL="0">
+              <a:buNone/>
+            </a:pPr>
+            <a:r>
+              <a:rPr lang="en-US" sz="1050" dirty="0">
+                <a:solidFill>
+                  <a:srgbClr val="6B7280"/>
+                </a:solidFill>
+              </a:rPr>
+              <a:t>실 가맹점 + 메뉴 데이터 추가</a:t>
+            </a:r>
+            <a:endParaRPr lang="en-US" sz="1050" dirty="0"/>
+          </a:p>
+          <a:p>
+            <a:pPr indent="0" marL="0">
+              <a:buNone/>
+            </a:pPr>
+            <a:r>
+              <a:rPr lang="en-US" sz="1050" dirty="0">
+                <a:solidFill>
+                  <a:srgbClr val="6B7280"/>
+                </a:solidFill>
+              </a:rPr>
+              <a:t>관리자 계정 role='admin' 설정</a:t>
+            </a:r>
+            <a:endParaRPr lang="en-US" sz="1050" dirty="0"/>
+          </a:p>
+          <a:p>
+            <a:pPr indent="0" marL="0">
+              <a:buNone/>
+            </a:pPr>
+            <a:r>
+              <a:rPr lang="en-US" sz="1050" dirty="0">
+                <a:solidFill>
+                  <a:srgbClr val="6B7280"/>
+                </a:solidFill>
+              </a:rPr>
+              <a:t>Vercel 프로덕션 배포 확인</a:t>
+            </a:r>
+            <a:endParaRPr lang="en-US" sz="1050" dirty="0"/>
+          </a:p>
+        </p:txBody>
+      </p:sp>
+      <p:sp>
+        <p:nvSpPr>
+          <p:cNvPr id="34" name="Shape 32"/>
+          <p:cNvSpPr/>
+          <p:nvPr/>
+        </p:nvSpPr>
+        <p:spPr>
+          <a:xfrm>
+            <a:off x="365760" y="5257800"/>
+            <a:ext cx="1325880" cy="384048"/>
+          </a:xfrm>
+          <a:prstGeom prst="roundRect">
+            <a:avLst>
+              <a:gd name="adj" fmla="val 23810"/>
+            </a:avLst>
+          </a:prstGeom>
+          <a:solidFill>
+            <a:srgbClr val="FFEDD5"/>
+          </a:solidFill>
+          <a:ln w="12700">
+            <a:solidFill>
+              <a:srgbClr val="EA580C"/>
+            </a:solidFill>
+            <a:prstDash val="solid"/>
+          </a:ln>
+        </p:spPr>
+      </p:sp>
+      <p:sp>
+        <p:nvSpPr>
+          <p:cNvPr id="35" name="Text 33"/>
+          <p:cNvSpPr/>
+          <p:nvPr/>
+        </p:nvSpPr>
+        <p:spPr>
+          <a:xfrm>
+            <a:off x="365760" y="5257800"/>
+            <a:ext cx="1325880" cy="384048"/>
+          </a:xfrm>
+          <a:prstGeom prst="rect">
+            <a:avLst/>
+          </a:prstGeom>
+          <a:noFill/>
+          <a:ln/>
+        </p:spPr>
+        <p:txBody>
+          <a:bodyPr wrap="square" rtlCol="0" anchor="ctr"/>
+          <a:lstStyle/>
+          <a:p>
+            <a:pPr algn="ctr" indent="0" marL="0">
+              <a:buNone/>
+            </a:pPr>
+            <a:r>
+              <a:rPr lang="en-US" sz="1100" b="1" dirty="0">
+                <a:solidFill>
+                  <a:srgbClr val="EA580C"/>
+                </a:solidFill>
+              </a:rPr>
+              <a:t>⏳ Phase 4</a:t>
+            </a:r>
+            <a:endParaRPr lang="en-US" sz="1100" dirty="0"/>
+          </a:p>
+        </p:txBody>
+      </p:sp>
+      <p:sp>
+        <p:nvSpPr>
+          <p:cNvPr id="36" name="Shape 34"/>
+          <p:cNvSpPr/>
+          <p:nvPr/>
+        </p:nvSpPr>
+        <p:spPr>
+          <a:xfrm>
+            <a:off x="228600" y="5715000"/>
+            <a:ext cx="3749040" cy="1280160"/>
+          </a:xfrm>
+          <a:prstGeom prst="roundRect">
+            <a:avLst>
+              <a:gd name="adj" fmla="val 9286"/>
+            </a:avLst>
+          </a:prstGeom>
+          <a:solidFill>
+            <a:srgbClr val="FFFFFF"/>
+          </a:solidFill>
+          <a:ln w="12700">
+            <a:solidFill>
+              <a:srgbClr val="E9D5FF"/>
+            </a:solidFill>
+            <a:prstDash val="solid"/>
+          </a:ln>
+        </p:spPr>
+      </p:sp>
+      <p:sp>
+        <p:nvSpPr>
+          <p:cNvPr id="37" name="Shape 35"/>
+          <p:cNvSpPr/>
+          <p:nvPr/>
+        </p:nvSpPr>
+        <p:spPr>
+          <a:xfrm>
+            <a:off x="365760" y="5833872"/>
+            <a:ext cx="3474720" cy="329184"/>
+          </a:xfrm>
+          <a:prstGeom prst="roundRect">
+            <a:avLst>
+              <a:gd name="adj" fmla="val 22222"/>
+            </a:avLst>
+          </a:prstGeom>
+          <a:solidFill>
+            <a:srgbClr val="FFEDD5"/>
+          </a:solidFill>
+          <a:ln w="12700">
+            <a:solidFill>
+              <a:srgbClr val="FFEDD5"/>
+            </a:solidFill>
+            <a:prstDash val="solid"/>
+          </a:ln>
+        </p:spPr>
+      </p:sp>
+      <p:sp>
+        <p:nvSpPr>
+          <p:cNvPr id="38" name="Text 36"/>
+          <p:cNvSpPr/>
+          <p:nvPr/>
+        </p:nvSpPr>
+        <p:spPr>
+          <a:xfrm>
+            <a:off x="365760" y="5833872"/>
+            <a:ext cx="3474720" cy="329184"/>
+          </a:xfrm>
+          <a:prstGeom prst="rect">
+            <a:avLst/>
+          </a:prstGeom>
+          <a:noFill/>
+          <a:ln/>
+        </p:spPr>
+        <p:txBody>
+          <a:bodyPr wrap="square" rtlCol="0" anchor="ctr"/>
+          <a:lstStyle/>
+          <a:p>
+            <a:pPr algn="ctr" indent="0" marL="0">
+              <a:buNone/>
+            </a:pPr>
+            <a:r>
+              <a:rPr lang="en-US" sz="1200" b="1" dirty="0">
+                <a:solidFill>
+                  <a:srgbClr val="EA580C"/>
+                </a:solidFill>
+              </a:rPr>
+              <a:t>Pi Network SDK 인증</a:t>
+            </a:r>
+            <a:endParaRPr lang="en-US" sz="1200" dirty="0"/>
+          </a:p>
+        </p:txBody>
+      </p:sp>
+      <p:sp>
+        <p:nvSpPr>
+          <p:cNvPr id="39" name="Text 37"/>
+          <p:cNvSpPr/>
+          <p:nvPr/>
+        </p:nvSpPr>
+        <p:spPr>
+          <a:xfrm>
+            <a:off x="393192" y="6227064"/>
+            <a:ext cx="3419856" cy="694944"/>
+          </a:xfrm>
+          <a:prstGeom prst="rect">
+            <a:avLst/>
+          </a:prstGeom>
+          <a:noFill/>
+          <a:ln/>
+        </p:spPr>
+        <p:txBody>
+          <a:bodyPr wrap="square" rtlCol="0" anchor="ctr"/>
+          <a:lstStyle/>
+          <a:p>
+            <a:pPr indent="0" marL="0">
+              <a:buNone/>
+            </a:pPr>
+            <a:r>
+              <a:rPr lang="en-US" sz="1050" dirty="0">
+                <a:solidFill>
+                  <a:srgbClr val="6B7280"/>
+                </a:solidFill>
+              </a:rPr>
+              <a:t>Pi SDK 연동 (Mainnet 개방 후)</a:t>
+            </a:r>
+            <a:endParaRPr lang="en-US" sz="1050" dirty="0"/>
+          </a:p>
+          <a:p>
+            <a:pPr indent="0" marL="0">
+              <a:buNone/>
+            </a:pPr>
+            <a:r>
+              <a:rPr lang="en-US" sz="1050" dirty="0">
+                <a:solidFill>
+                  <a:srgbClr val="6B7280"/>
+                </a:solidFill>
+              </a:rPr>
+              <a:t>pi_uid / pi_username 필드 활성화</a:t>
+            </a:r>
+            <a:endParaRPr lang="en-US" sz="1050" dirty="0"/>
+          </a:p>
+          <a:p>
+            <a:pPr indent="0" marL="0">
+              <a:buNone/>
+            </a:pPr>
+            <a:r>
+              <a:rPr lang="en-US" sz="1050" dirty="0">
+                <a:solidFill>
+                  <a:srgbClr val="6B7280"/>
+                </a:solidFill>
+              </a:rPr>
+              <a:t>Pi 기반 로그인 플로우</a:t>
+            </a:r>
+            <a:endParaRPr lang="en-US" sz="1050" dirty="0"/>
+          </a:p>
+        </p:txBody>
+      </p:sp>
+      <p:sp>
+        <p:nvSpPr>
+          <p:cNvPr id="40" name="Shape 38"/>
+          <p:cNvSpPr/>
+          <p:nvPr/>
+        </p:nvSpPr>
+        <p:spPr>
+          <a:xfrm>
+            <a:off x="4133088" y="5715000"/>
+            <a:ext cx="3749040" cy="1280160"/>
+          </a:xfrm>
+          <a:prstGeom prst="roundRect">
+            <a:avLst>
+              <a:gd name="adj" fmla="val 9286"/>
+            </a:avLst>
+          </a:prstGeom>
+          <a:solidFill>
+            <a:srgbClr val="FFFFFF"/>
+          </a:solidFill>
+          <a:ln w="12700">
+            <a:solidFill>
+              <a:srgbClr val="E9D5FF"/>
+            </a:solidFill>
+            <a:prstDash val="solid"/>
+          </a:ln>
+        </p:spPr>
+      </p:sp>
+      <p:sp>
+        <p:nvSpPr>
+          <p:cNvPr id="41" name="Shape 39"/>
+          <p:cNvSpPr/>
+          <p:nvPr/>
+        </p:nvSpPr>
+        <p:spPr>
+          <a:xfrm>
+            <a:off x="4270248" y="5833872"/>
+            <a:ext cx="3474720" cy="329184"/>
+          </a:xfrm>
+          <a:prstGeom prst="roundRect">
+            <a:avLst>
+              <a:gd name="adj" fmla="val 22222"/>
+            </a:avLst>
+          </a:prstGeom>
+          <a:solidFill>
+            <a:srgbClr val="FFEDD5"/>
+          </a:solidFill>
+          <a:ln w="12700">
+            <a:solidFill>
+              <a:srgbClr val="FFEDD5"/>
+            </a:solidFill>
+            <a:prstDash val="solid"/>
+          </a:ln>
+        </p:spPr>
+      </p:sp>
+      <p:sp>
+        <p:nvSpPr>
+          <p:cNvPr id="42" name="Text 40"/>
+          <p:cNvSpPr/>
+          <p:nvPr/>
+        </p:nvSpPr>
+        <p:spPr>
+          <a:xfrm>
+            <a:off x="4270248" y="5833872"/>
+            <a:ext cx="3474720" cy="329184"/>
+          </a:xfrm>
+          <a:prstGeom prst="rect">
+            <a:avLst/>
+          </a:prstGeom>
+          <a:noFill/>
+          <a:ln/>
+        </p:spPr>
+        <p:txBody>
+          <a:bodyPr wrap="square" rtlCol="0" anchor="ctr"/>
+          <a:lstStyle/>
+          <a:p>
+            <a:pPr algn="ctr" indent="0" marL="0">
+              <a:buNone/>
+            </a:pPr>
+            <a:r>
+              <a:rPr lang="en-US" sz="1200" b="1" dirty="0">
+                <a:solidFill>
+                  <a:srgbClr val="EA580C"/>
+                </a:solidFill>
+              </a:rPr>
+              <a:t>Pi 코인 결제 연동</a:t>
+            </a:r>
+            <a:endParaRPr lang="en-US" sz="1200" dirty="0"/>
+          </a:p>
+        </p:txBody>
+      </p:sp>
+      <p:sp>
+        <p:nvSpPr>
+          <p:cNvPr id="43" name="Text 41"/>
+          <p:cNvSpPr/>
+          <p:nvPr/>
+        </p:nvSpPr>
+        <p:spPr>
+          <a:xfrm>
+            <a:off x="4297680" y="6227064"/>
+            <a:ext cx="3419856" cy="694944"/>
+          </a:xfrm>
+          <a:prstGeom prst="rect">
+            <a:avLst/>
+          </a:prstGeom>
+          <a:noFill/>
+          <a:ln/>
+        </p:spPr>
+        <p:txBody>
+          <a:bodyPr wrap="square" rtlCol="0" anchor="ctr"/>
+          <a:lstStyle/>
+          <a:p>
+            <a:pPr indent="0" marL="0">
+              <a:buNone/>
+            </a:pPr>
+            <a:r>
+              <a:rPr lang="en-US" sz="1050" dirty="0">
+                <a:solidFill>
+                  <a:srgbClr val="6B7280"/>
+                </a:solidFill>
+              </a:rPr>
+              <a:t>Pi 결제 API 연동</a:t>
+            </a:r>
+            <a:endParaRPr lang="en-US" sz="1050" dirty="0"/>
+          </a:p>
+          <a:p>
+            <a:pPr indent="0" marL="0">
+              <a:buNone/>
+            </a:pPr>
+            <a:r>
+              <a:rPr lang="en-US" sz="1050" dirty="0">
+                <a:solidFill>
+                  <a:srgbClr val="6B7280"/>
+                </a:solidFill>
+              </a:rPr>
+              <a:t>PICK ↔ Pi 토큰 전환</a:t>
+            </a:r>
+            <a:endParaRPr lang="en-US" sz="1050" dirty="0"/>
+          </a:p>
+          <a:p>
+            <a:pPr indent="0" marL="0">
+              <a:buNone/>
+            </a:pPr>
+            <a:r>
+              <a:rPr lang="en-US" sz="1050" dirty="0">
+                <a:solidFill>
+                  <a:srgbClr val="6B7280"/>
+                </a:solidFill>
+              </a:rPr>
+              <a:t>Pi 기반 정산 시스템</a:t>
+            </a:r>
+            <a:endParaRPr lang="en-US" sz="1050" dirty="0"/>
+          </a:p>
+        </p:txBody>
+      </p:sp>
+      <p:sp>
+        <p:nvSpPr>
+          <p:cNvPr id="44" name="Shape 42"/>
+          <p:cNvSpPr/>
+          <p:nvPr/>
+        </p:nvSpPr>
+        <p:spPr>
+          <a:xfrm>
+            <a:off x="8037576" y="5715000"/>
+            <a:ext cx="3749040" cy="1280160"/>
+          </a:xfrm>
+          <a:prstGeom prst="roundRect">
+            <a:avLst>
+              <a:gd name="adj" fmla="val 9286"/>
+            </a:avLst>
+          </a:prstGeom>
+          <a:solidFill>
+            <a:srgbClr val="FFFFFF"/>
+          </a:solidFill>
+          <a:ln w="12700">
+            <a:solidFill>
+              <a:srgbClr val="E9D5FF"/>
+            </a:solidFill>
+            <a:prstDash val="solid"/>
+          </a:ln>
+        </p:spPr>
+      </p:sp>
+      <p:sp>
+        <p:nvSpPr>
+          <p:cNvPr id="45" name="Shape 43"/>
+          <p:cNvSpPr/>
+          <p:nvPr/>
+        </p:nvSpPr>
+        <p:spPr>
+          <a:xfrm>
+            <a:off x="8174736" y="5833872"/>
+            <a:ext cx="3474720" cy="329184"/>
+          </a:xfrm>
+          <a:prstGeom prst="roundRect">
+            <a:avLst>
+              <a:gd name="adj" fmla="val 22222"/>
+            </a:avLst>
+          </a:prstGeom>
+          <a:solidFill>
+            <a:srgbClr val="FFEDD5"/>
+          </a:solidFill>
+          <a:ln w="12700">
+            <a:solidFill>
+              <a:srgbClr val="FFEDD5"/>
+            </a:solidFill>
+            <a:prstDash val="solid"/>
+          </a:ln>
+        </p:spPr>
+      </p:sp>
+      <p:sp>
+        <p:nvSpPr>
+          <p:cNvPr id="46" name="Text 44"/>
+          <p:cNvSpPr/>
+          <p:nvPr/>
+        </p:nvSpPr>
+        <p:spPr>
+          <a:xfrm>
+            <a:off x="8174736" y="5833872"/>
+            <a:ext cx="3474720" cy="329184"/>
+          </a:xfrm>
+          <a:prstGeom prst="rect">
+            <a:avLst/>
+          </a:prstGeom>
+          <a:noFill/>
+          <a:ln/>
+        </p:spPr>
+        <p:txBody>
+          <a:bodyPr wrap="square" rtlCol="0" anchor="ctr"/>
+          <a:lstStyle/>
+          <a:p>
+            <a:pPr algn="ctr" indent="0" marL="0">
+              <a:buNone/>
+            </a:pPr>
+            <a:r>
+              <a:rPr lang="en-US" sz="1200" b="1" dirty="0">
+                <a:solidFill>
+                  <a:srgbClr val="EA580C"/>
+                </a:solidFill>
+              </a:rPr>
+              <a:t>Pi 생태계 확장</a:t>
+            </a:r>
+            <a:endParaRPr lang="en-US" sz="1200" dirty="0"/>
+          </a:p>
+        </p:txBody>
+      </p:sp>
+      <p:sp>
+        <p:nvSpPr>
+          <p:cNvPr id="47" name="Text 45"/>
+          <p:cNvSpPr/>
+          <p:nvPr/>
+        </p:nvSpPr>
+        <p:spPr>
+          <a:xfrm>
+            <a:off x="8202168" y="6227064"/>
+            <a:ext cx="3419856" cy="694944"/>
+          </a:xfrm>
+          <a:prstGeom prst="rect">
+            <a:avLst/>
+          </a:prstGeom>
+          <a:noFill/>
+          <a:ln/>
+        </p:spPr>
+        <p:txBody>
+          <a:bodyPr wrap="square" rtlCol="0" anchor="ctr"/>
+          <a:lstStyle/>
+          <a:p>
+            <a:pPr indent="0" marL="0">
+              <a:buNone/>
+            </a:pPr>
+            <a:r>
+              <a:rPr lang="en-US" sz="1050" dirty="0">
+                <a:solidFill>
+                  <a:srgbClr val="6B7280"/>
+                </a:solidFill>
+              </a:rPr>
+              <a:t>Pi 마이닝 연동 혜택</a:t>
+            </a:r>
+            <a:endParaRPr lang="en-US" sz="1050" dirty="0"/>
+          </a:p>
+          <a:p>
+            <a:pPr indent="0" marL="0">
+              <a:buNone/>
+            </a:pPr>
+            <a:r>
+              <a:rPr lang="en-US" sz="1050" dirty="0">
+                <a:solidFill>
+                  <a:srgbClr val="6B7280"/>
+                </a:solidFill>
+              </a:rPr>
+              <a:t>Pi 홀더 전용 할인 쿠폰</a:t>
+            </a:r>
+            <a:endParaRPr lang="en-US" sz="1050" dirty="0"/>
+          </a:p>
+          <a:p>
+            <a:pPr indent="0" marL="0">
+              <a:buNone/>
+            </a:pPr>
+            <a:r>
+              <a:rPr lang="en-US" sz="1050" dirty="0">
+                <a:solidFill>
+                  <a:srgbClr val="6B7280"/>
+                </a:solidFill>
+              </a:rPr>
+              <a:t>Pi Network 커뮤니티 마케팅</a:t>
+            </a:r>
+            <a:endParaRPr lang="en-US" sz="1050" dirty="0"/>
+          </a:p>
+        </p:txBody>
+      </p:sp>
+    </p:spTree>
+  </p:cSld>
+  <p:clrMapOvr>
+    <a:masterClrMapping/>
+  </p:clrMapOvr>
+</p:sld>
+</file>
+
+<file path=ppt/slides/slide16.xml><?xml version="1.0" encoding="utf-8"?>
+<p:sld xmlns:a="http://schemas.openxmlformats.org/drawingml/2006/main" xmlns:r="http://schemas.openxmlformats.org/officeDocument/2006/relationships" xmlns:p="http://schemas.openxmlformats.org/presentationml/2006/main">
+  <p:cSld name="Slide 16">
+    <p:bg>
+      <p:bgPr>
+        <a:solidFill>
+          <a:srgbClr val="FAF5FF"/>
+        </a:solidFill>
+      </p:bgPr>
+    </p:bg>
+    <p:spTree>
+      <p:nvGrpSpPr>
+        <p:cNvPr id="1" name=""/>
+        <p:cNvGrpSpPr/>
+        <p:nvPr/>
+      </p:nvGrpSpPr>
+      <p:grpSpPr>
+        <a:xfrm>
+          <a:off x="0" y="0"/>
+          <a:ext cx="0" cy="0"/>
+          <a:chOff x="0" y="0"/>
+          <a:chExt cx="0" cy="0"/>
+        </a:xfrm>
+      </p:grpSpPr>
+      <p:sp>
+        <p:nvSpPr>
+          <p:cNvPr id="2" name="Text 0"/>
+          <p:cNvSpPr/>
+          <p:nvPr/>
+        </p:nvSpPr>
+        <p:spPr>
+          <a:xfrm>
+            <a:off x="365760" y="228600"/>
+            <a:ext cx="12070080" cy="594360"/>
+          </a:xfrm>
+          <a:prstGeom prst="rect">
+            <a:avLst/>
+          </a:prstGeom>
+          <a:noFill/>
+          <a:ln/>
+        </p:spPr>
+        <p:txBody>
+          <a:bodyPr wrap="square" rtlCol="0" anchor="ctr"/>
+          <a:lstStyle/>
+          <a:p>
+            <a:pPr indent="0" marL="0">
+              <a:buNone/>
+            </a:pPr>
+            <a:r>
+              <a:rPr lang="en-US" sz="2600" b="1" dirty="0">
+                <a:solidFill>
+                  <a:srgbClr val="4C1D95"/>
+                </a:solidFill>
+              </a:rPr>
               <a:t>🗺️  전체 개발 로드맵</a:t>
             </a:r>
             <a:endParaRPr lang="en-US" sz="2600" dirty="0"/>
@@ -11765,7 +13306,7 @@
                   <a:srgbClr val="4C1D95"/>
                 </a:solidFill>
               </a:rPr>
-              <a:t>📊  PICK PICK 진행 현황 (4/16 최신)</a:t>
+              <a:t>📊  PICK PICK 진행 현황 (4/17 최신)</a:t>
             </a:r>
             <a:endParaRPr lang="en-US" sz="2600" dirty="0"/>
           </a:p>
@@ -14360,22 +15901,81 @@
       </p:sp>
       <p:sp>
         <p:nvSpPr>
-          <p:cNvPr id="88" name="Shape 86"/>
-          <p:cNvSpPr/>
-          <p:nvPr/>
-        </p:nvSpPr>
-        <p:spPr>
-          <a:xfrm>
-            <a:off x="10332720" y="1188720"/>
-            <a:ext cx="2103120" cy="1188720"/>
-          </a:xfrm>
-          <a:prstGeom prst="roundRect">
-            <a:avLst>
-              <a:gd name="adj" fmla="val 11538"/>
-            </a:avLst>
-          </a:prstGeom>
-          <a:solidFill>
-            <a:srgbClr val="DCFCE7"/>
+          <p:cNvPr id="88" name="Text 86"/>
+          <p:cNvSpPr/>
+          <p:nvPr/>
+        </p:nvSpPr>
+        <p:spPr>
+          <a:xfrm>
+            <a:off x="457200" y="7095744"/>
+            <a:ext cx="3840480" cy="237744"/>
+          </a:xfrm>
+          <a:prstGeom prst="rect">
+            <a:avLst/>
+          </a:prstGeom>
+          <a:noFill/>
+          <a:ln/>
+        </p:spPr>
+        <p:txBody>
+          <a:bodyPr wrap="square" rtlCol="0" anchor="ctr"/>
+          <a:lstStyle/>
+          <a:p>
+            <a:pPr indent="0" marL="0">
+              <a:buNone/>
+            </a:pPr>
+            <a:r>
+              <a:rPr lang="en-US" sz="1000" dirty="0">
+                <a:solidFill>
+                  <a:srgbClr val="1F1235"/>
+                </a:solidFill>
+              </a:rPr>
+              <a:t>주문 취소 즉시 반영 · calling_rider 상태 흐름 재설계</a:t>
+            </a:r>
+            <a:endParaRPr lang="en-US" sz="1000" dirty="0"/>
+          </a:p>
+        </p:txBody>
+      </p:sp>
+      <p:sp>
+        <p:nvSpPr>
+          <p:cNvPr id="89" name="Shape 87"/>
+          <p:cNvSpPr/>
+          <p:nvPr/>
+        </p:nvSpPr>
+        <p:spPr>
+          <a:xfrm>
+            <a:off x="4434840" y="7150608"/>
+            <a:ext cx="5029200" cy="118872"/>
+          </a:xfrm>
+          <a:prstGeom prst="rect">
+            <a:avLst/>
+          </a:prstGeom>
+          <a:solidFill>
+            <a:srgbClr val="E5E7EB"/>
+          </a:solidFill>
+          <a:ln w="12700">
+            <a:solidFill>
+              <a:srgbClr val="E5E7EB"/>
+            </a:solidFill>
+            <a:prstDash val="solid"/>
+          </a:ln>
+        </p:spPr>
+      </p:sp>
+      <p:sp>
+        <p:nvSpPr>
+          <p:cNvPr id="90" name="Shape 88"/>
+          <p:cNvSpPr/>
+          <p:nvPr/>
+        </p:nvSpPr>
+        <p:spPr>
+          <a:xfrm>
+            <a:off x="4434840" y="7150608"/>
+            <a:ext cx="5029200" cy="118872"/>
+          </a:xfrm>
+          <a:prstGeom prst="rect">
+            <a:avLst/>
+          </a:prstGeom>
+          <a:solidFill>
+            <a:srgbClr val="16A34A"/>
           </a:solidFill>
           <a:ln w="12700">
             <a:solidFill>
@@ -14387,7 +15987,70 @@
       </p:sp>
       <p:sp>
         <p:nvSpPr>
-          <p:cNvPr id="89" name="Text 87"/>
+          <p:cNvPr id="91" name="Text 89"/>
+          <p:cNvSpPr/>
+          <p:nvPr/>
+        </p:nvSpPr>
+        <p:spPr>
+          <a:xfrm>
+            <a:off x="9601200" y="7095744"/>
+            <a:ext cx="640080" cy="237744"/>
+          </a:xfrm>
+          <a:prstGeom prst="rect">
+            <a:avLst/>
+          </a:prstGeom>
+          <a:noFill/>
+          <a:ln/>
+        </p:spPr>
+        <p:txBody>
+          <a:bodyPr wrap="square" rtlCol="0" anchor="ctr"/>
+          <a:lstStyle/>
+          <a:p>
+            <a:pPr algn="r" indent="0" marL="0">
+              <a:buNone/>
+            </a:pPr>
+            <a:r>
+              <a:rPr lang="en-US" sz="1000" b="1" dirty="0">
+                <a:solidFill>
+                  <a:srgbClr val="16A34A"/>
+                </a:solidFill>
+              </a:rPr>
+              <a:t>100%</a:t>
+            </a:r>
+            <a:endParaRPr lang="en-US" sz="1000" dirty="0"/>
+          </a:p>
+        </p:txBody>
+      </p:sp>
+      <p:sp>
+        <p:nvSpPr>
+          <p:cNvPr id="92" name="Shape 90"/>
+          <p:cNvSpPr/>
+          <p:nvPr/>
+        </p:nvSpPr>
+        <p:spPr>
+          <a:xfrm>
+            <a:off x="10332720" y="1188720"/>
+            <a:ext cx="2103120" cy="1188720"/>
+          </a:xfrm>
+          <a:prstGeom prst="roundRect">
+            <a:avLst>
+              <a:gd name="adj" fmla="val 11538"/>
+            </a:avLst>
+          </a:prstGeom>
+          <a:solidFill>
+            <a:srgbClr val="DCFCE7"/>
+          </a:solidFill>
+          <a:ln w="12700">
+            <a:solidFill>
+              <a:srgbClr val="16A34A"/>
+            </a:solidFill>
+            <a:prstDash val="solid"/>
+          </a:ln>
+        </p:spPr>
+      </p:sp>
+      <p:sp>
+        <p:nvSpPr>
+          <p:cNvPr id="93" name="Text 91"/>
           <p:cNvSpPr/>
           <p:nvPr/>
         </p:nvSpPr>
@@ -14423,7 +16086,7 @@
       </p:sp>
       <p:sp>
         <p:nvSpPr>
-          <p:cNvPr id="90" name="Text 88"/>
+          <p:cNvPr id="94" name="Text 92"/>
           <p:cNvSpPr/>
           <p:nvPr/>
         </p:nvSpPr>
@@ -14451,7 +16114,7 @@
                   <a:srgbClr val="16A34A"/>
                 </a:solidFill>
               </a:rPr>
-              <a:t>60개+</a:t>
+              <a:t>65개+</a:t>
             </a:r>
             <a:endParaRPr lang="en-US" sz="1800" dirty="0"/>
           </a:p>
@@ -14459,7 +16122,7 @@
       </p:sp>
       <p:sp>
         <p:nvSpPr>
-          <p:cNvPr id="91" name="Text 89"/>
+          <p:cNvPr id="95" name="Text 93"/>
           <p:cNvSpPr/>
           <p:nvPr/>
         </p:nvSpPr>
@@ -14495,7 +16158,7 @@
       </p:sp>
       <p:sp>
         <p:nvSpPr>
-          <p:cNvPr id="92" name="Shape 90"/>
+          <p:cNvPr id="96" name="Shape 94"/>
           <p:cNvSpPr/>
           <p:nvPr/>
         </p:nvSpPr>
@@ -14522,7 +16185,7 @@
       </p:sp>
       <p:sp>
         <p:nvSpPr>
-          <p:cNvPr id="93" name="Text 91"/>
+          <p:cNvPr id="97" name="Text 95"/>
           <p:cNvSpPr/>
           <p:nvPr/>
         </p:nvSpPr>
@@ -14558,7 +16221,7 @@
       </p:sp>
       <p:sp>
         <p:nvSpPr>
-          <p:cNvPr id="94" name="Text 92"/>
+          <p:cNvPr id="98" name="Text 96"/>
           <p:cNvSpPr/>
           <p:nvPr/>
         </p:nvSpPr>
@@ -14594,7 +16257,7 @@
       </p:sp>
       <p:sp>
         <p:nvSpPr>
-          <p:cNvPr id="95" name="Text 93"/>
+          <p:cNvPr id="99" name="Text 97"/>
           <p:cNvSpPr/>
           <p:nvPr/>
         </p:nvSpPr>
@@ -14630,7 +16293,7 @@
       </p:sp>
       <p:sp>
         <p:nvSpPr>
-          <p:cNvPr id="96" name="Shape 94"/>
+          <p:cNvPr id="100" name="Shape 98"/>
           <p:cNvSpPr/>
           <p:nvPr/>
         </p:nvSpPr>
@@ -14657,7 +16320,7 @@
       </p:sp>
       <p:sp>
         <p:nvSpPr>
-          <p:cNvPr id="97" name="Text 95"/>
+          <p:cNvPr id="101" name="Text 99"/>
           <p:cNvSpPr/>
           <p:nvPr/>
         </p:nvSpPr>
@@ -14693,7 +16356,7 @@
       </p:sp>
       <p:sp>
         <p:nvSpPr>
-          <p:cNvPr id="98" name="Text 96"/>
+          <p:cNvPr id="102" name="Text 100"/>
           <p:cNvSpPr/>
           <p:nvPr/>
         </p:nvSpPr>
@@ -14729,7 +16392,7 @@
       </p:sp>
       <p:sp>
         <p:nvSpPr>
-          <p:cNvPr id="99" name="Text 97"/>
+          <p:cNvPr id="103" name="Text 101"/>
           <p:cNvSpPr/>
           <p:nvPr/>
         </p:nvSpPr>

--- a/PICKPICK_프로젝트현황.pptx
+++ b/PICKPICK_프로젝트현황.pptx
@@ -21,9 +21,10 @@
     <p:sldId id="269" r:id="rId15"/>
     <p:sldId id="270" r:id="rId16"/>
     <p:sldId id="271" r:id="rId17"/>
+    <p:sldId id="272" r:id="rId18"/>
   </p:sldIdLst>
   <p:notesMasterIdLst>
-    <p:notesMasterId r:id="rId18"/>
+    <p:notesMasterId r:id="rId19"/>
   </p:notesMasterIdLst>
   <p:sldSz cx="12192000" cy="6858000"/>
   <p:notesSz cx="6858000" cy="12192000"/>
@@ -1175,6 +1176,94 @@
 </p:notes>
 </file>
 
+<file path=ppt/notesSlides/notesSlide17.xml><?xml version="1.0" encoding="utf-8"?>
+<p:notes xmlns:a="http://schemas.openxmlformats.org/drawingml/2006/main" xmlns:r="http://schemas.openxmlformats.org/officeDocument/2006/relationships" xmlns:p="http://schemas.openxmlformats.org/presentationml/2006/main">
+  <p:cSld>
+    <p:spTree>
+      <p:nvGrpSpPr>
+        <p:cNvPr id="1" name=""/>
+        <p:cNvGrpSpPr/>
+        <p:nvPr/>
+      </p:nvGrpSpPr>
+      <p:grpSpPr>
+        <a:xfrm>
+          <a:off x="0" y="0"/>
+          <a:ext cx="0" cy="0"/>
+          <a:chOff x="0" y="0"/>
+          <a:chExt cx="0" cy="0"/>
+        </a:xfrm>
+      </p:grpSpPr>
+      <p:sp>
+        <p:nvSpPr>
+          <p:cNvPr id="2" name="Slide Image Placeholder 1"/>
+          <p:cNvSpPr>
+            <a:spLocks noGrp="1" noRot="1" noChangeAspect="1"/>
+          </p:cNvSpPr>
+          <p:nvPr>
+            <p:ph type="sldImg"/>
+          </p:nvPr>
+        </p:nvSpPr>
+        <p:spPr/>
+      </p:sp>
+      <p:sp>
+        <p:nvSpPr>
+          <p:cNvPr id="3" name="Notes Placeholder 2"/>
+          <p:cNvSpPr>
+            <a:spLocks noGrp="1"/>
+          </p:cNvSpPr>
+          <p:nvPr>
+            <p:ph type="body" idx="1"/>
+          </p:nvPr>
+        </p:nvSpPr>
+        <p:spPr/>
+        <p:txBody>
+          <a:bodyPr/>
+          <a:lstStyle/>
+          <a:p>
+            <a:r>
+              <a:rPr lang="en-US" dirty="0"/>
+              <a:t/>
+            </a:r>
+            <a:endParaRPr lang="en-US" dirty="0"/>
+          </a:p>
+        </p:txBody>
+      </p:sp>
+      <p:sp>
+        <p:nvSpPr>
+          <p:cNvPr id="4" name="Slide Number Placeholder 3"/>
+          <p:cNvSpPr>
+            <a:spLocks noGrp="1"/>
+          </p:cNvSpPr>
+          <p:nvPr>
+            <p:ph type="sldNum" sz="quarter" idx="10"/>
+          </p:nvPr>
+        </p:nvSpPr>
+        <p:spPr/>
+        <p:txBody>
+          <a:bodyPr/>
+          <a:lstStyle/>
+          <a:p>
+            <a:fld id="{F7021451-1387-4CA6-816F-3879F97B5CBC}" type="slidenum">
+              <a:rPr lang="en-US"/>
+              <a:t>17</a:t>
+            </a:fld>
+            <a:endParaRPr lang="en-US"/>
+          </a:p>
+        </p:txBody>
+      </p:sp>
+    </p:spTree>
+    <p:extLst>
+      <p:ext uri="{BB962C8B-B14F-4D97-AF65-F5344CB8AC3E}">
+        <p14:creationId xmlns:p14="http://schemas.microsoft.com/office/powerpoint/2010/main" val="1024086991"/>
+      </p:ext>
+    </p:extLst>
+  </p:cSld>
+  <p:clrMapOvr>
+    <a:masterClrMapping/>
+  </p:clrMapOvr>
+</p:notes>
+</file>
+
 <file path=ppt/notesSlides/notesSlide2.xml><?xml version="1.0" encoding="utf-8"?>
 <p:notes xmlns:a="http://schemas.openxmlformats.org/drawingml/2006/main" xmlns:r="http://schemas.openxmlformats.org/officeDocument/2006/relationships" xmlns:p="http://schemas.openxmlformats.org/presentationml/2006/main">
   <p:cSld>
@@ -2429,7 +2518,7 @@
                   <a:srgbClr val="C4B5FD"/>
                 </a:solidFill>
               </a:rPr>
-              <a:t>2026년 4월 17일  |  주문 취소 감지 개선 · 라이더 상태 흐름 수정 · 알림 즉시 중단</a:t>
+              <a:t>2026년 4월 20일  |  주문 pending 흐름 · 라이더 자동오프라인 방지 · 조리완료 실시간 반영</a:t>
             </a:r>
             <a:endParaRPr lang="en-US" sz="1400" dirty="0"/>
           </a:p>
@@ -8013,56 +8102,22 @@
       </p:grpSpPr>
       <p:sp>
         <p:nvSpPr>
-          <p:cNvPr id="2" name="Text 0"/>
-          <p:cNvSpPr/>
-          <p:nvPr/>
-        </p:nvSpPr>
-        <p:spPr>
-          <a:xfrm>
-            <a:off x="365760" y="228600"/>
-            <a:ext cx="12070080" cy="594360"/>
-          </a:xfrm>
-          <a:prstGeom prst="rect">
-            <a:avLst/>
-          </a:prstGeom>
-          <a:noFill/>
-          <a:ln/>
-        </p:spPr>
-        <p:txBody>
-          <a:bodyPr wrap="square" rtlCol="0" anchor="ctr"/>
-          <a:lstStyle/>
-          <a:p>
-            <a:pPr indent="0" marL="0">
-              <a:buNone/>
-            </a:pPr>
-            <a:r>
-              <a:rPr lang="en-US" sz="2400" b="1" dirty="0">
-                <a:solidFill>
-                  <a:srgbClr val="4C1D95"/>
-                </a:solidFill>
-              </a:rPr>
-              <a:t>✅  완료된 기능 전체 목록 (4/17 최신)</a:t>
-            </a:r>
-            <a:endParaRPr lang="en-US" sz="2400" dirty="0"/>
-          </a:p>
-        </p:txBody>
-      </p:sp>
-      <p:sp>
-        <p:nvSpPr>
-          <p:cNvPr id="3" name="Shape 1"/>
-          <p:cNvSpPr/>
-          <p:nvPr/>
-        </p:nvSpPr>
-        <p:spPr>
-          <a:xfrm>
-            <a:off x="365760" y="804672"/>
-            <a:ext cx="3840480" cy="45720"/>
-          </a:xfrm>
-          <a:prstGeom prst="rect">
-            <a:avLst/>
-          </a:prstGeom>
-          <a:solidFill>
-            <a:srgbClr val="16A34A"/>
+          <p:cNvPr id="2" name="Shape 0"/>
+          <p:cNvSpPr/>
+          <p:nvPr/>
+        </p:nvSpPr>
+        <p:spPr>
+          <a:xfrm>
+            <a:off x="365760" y="164592"/>
+            <a:ext cx="2651760" cy="502920"/>
+          </a:xfrm>
+          <a:prstGeom prst="roundRect">
+            <a:avLst>
+              <a:gd name="adj" fmla="val 18182"/>
+            </a:avLst>
+          </a:prstGeom>
+          <a:solidFill>
+            <a:srgbClr val="F0FDF4"/>
           </a:solidFill>
           <a:ln w="12700">
             <a:solidFill>
@@ -8074,26 +8129,96 @@
       </p:sp>
       <p:sp>
         <p:nvSpPr>
-          <p:cNvPr id="4" name="Shape 2"/>
-          <p:cNvSpPr/>
-          <p:nvPr/>
-        </p:nvSpPr>
-        <p:spPr>
-          <a:xfrm>
-            <a:off x="228600" y="960120"/>
-            <a:ext cx="3749040" cy="2423160"/>
-          </a:xfrm>
-          <a:prstGeom prst="roundRect">
-            <a:avLst>
-              <a:gd name="adj" fmla="val 5660"/>
-            </a:avLst>
-          </a:prstGeom>
-          <a:solidFill>
-            <a:srgbClr val="EDE9FE"/>
+          <p:cNvPr id="3" name="Text 1"/>
+          <p:cNvSpPr/>
+          <p:nvPr/>
+        </p:nvSpPr>
+        <p:spPr>
+          <a:xfrm>
+            <a:off x="365760" y="164592"/>
+            <a:ext cx="2651760" cy="502920"/>
+          </a:xfrm>
+          <a:prstGeom prst="rect">
+            <a:avLst/>
+          </a:prstGeom>
+          <a:noFill/>
+          <a:ln/>
+        </p:spPr>
+        <p:txBody>
+          <a:bodyPr wrap="square" rtlCol="0" anchor="ctr"/>
+          <a:lstStyle/>
+          <a:p>
+            <a:pPr algn="ctr" indent="0" marL="0">
+              <a:buNone/>
+            </a:pPr>
+            <a:r>
+              <a:rPr lang="en-US" sz="1100" b="1" dirty="0">
+                <a:solidFill>
+                  <a:srgbClr val="16A34A"/>
+                </a:solidFill>
+              </a:rPr>
+              <a:t>📅  2026. 04. 20 (Day 13)</a:t>
+            </a:r>
+            <a:endParaRPr lang="en-US" sz="1100" dirty="0"/>
+          </a:p>
+        </p:txBody>
+      </p:sp>
+      <p:sp>
+        <p:nvSpPr>
+          <p:cNvPr id="4" name="Text 2"/>
+          <p:cNvSpPr/>
+          <p:nvPr/>
+        </p:nvSpPr>
+        <p:spPr>
+          <a:xfrm>
+            <a:off x="3200400" y="201168"/>
+            <a:ext cx="9235440" cy="502920"/>
+          </a:xfrm>
+          <a:prstGeom prst="rect">
+            <a:avLst/>
+          </a:prstGeom>
+          <a:noFill/>
+          <a:ln/>
+        </p:spPr>
+        <p:txBody>
+          <a:bodyPr wrap="square" rtlCol="0" anchor="ctr"/>
+          <a:lstStyle/>
+          <a:p>
+            <a:pPr indent="0" marL="0">
+              <a:buNone/>
+            </a:pPr>
+            <a:r>
+              <a:rPr lang="en-US" sz="1700" b="1" dirty="0">
+                <a:solidFill>
+                  <a:srgbClr val="4C1D95"/>
+                </a:solidFill>
+              </a:rPr>
+              <a:t>🔧  주문 흐름 재설계 · 라이더 안정성 · Pi Network 연동 플랜 수립</a:t>
+            </a:r>
+            <a:endParaRPr lang="en-US" sz="1700" dirty="0"/>
+          </a:p>
+        </p:txBody>
+      </p:sp>
+      <p:sp>
+        <p:nvSpPr>
+          <p:cNvPr id="5" name="Shape 3"/>
+          <p:cNvSpPr/>
+          <p:nvPr/>
+        </p:nvSpPr>
+        <p:spPr>
+          <a:xfrm>
+            <a:off x="365760" y="713232"/>
+            <a:ext cx="11704320" cy="36576"/>
+          </a:xfrm>
+          <a:prstGeom prst="rect">
+            <a:avLst/>
+          </a:prstGeom>
+          <a:solidFill>
+            <a:srgbClr val="E9D5FF"/>
           </a:solidFill>
           <a:ln w="12700">
             <a:solidFill>
-              <a:srgbClr val="6B21A8"/>
+              <a:srgbClr val="E9D5FF"/>
             </a:solidFill>
             <a:prstDash val="solid"/>
           </a:ln>
@@ -8101,26 +8226,26 @@
       </p:sp>
       <p:sp>
         <p:nvSpPr>
-          <p:cNvPr id="5" name="Shape 3"/>
-          <p:cNvSpPr/>
-          <p:nvPr/>
-        </p:nvSpPr>
-        <p:spPr>
-          <a:xfrm>
-            <a:off x="338328" y="1069848"/>
-            <a:ext cx="3529584" cy="384048"/>
+          <p:cNvPr id="6" name="Shape 4"/>
+          <p:cNvSpPr/>
+          <p:nvPr/>
+        </p:nvSpPr>
+        <p:spPr>
+          <a:xfrm>
+            <a:off x="228600" y="914400"/>
+            <a:ext cx="3749040" cy="2148840"/>
           </a:xfrm>
           <a:prstGeom prst="roundRect">
             <a:avLst>
-              <a:gd name="adj" fmla="val 19048"/>
+              <a:gd name="adj" fmla="val 6383"/>
             </a:avLst>
           </a:prstGeom>
           <a:solidFill>
-            <a:srgbClr val="6B21A8"/>
+            <a:srgbClr val="F0FDF4"/>
           </a:solidFill>
           <a:ln w="12700">
             <a:solidFill>
-              <a:srgbClr val="6B21A8"/>
+              <a:srgbClr val="86EFAC"/>
             </a:solidFill>
             <a:prstDash val="solid"/>
           </a:ln>
@@ -8128,242 +8253,26 @@
       </p:sp>
       <p:sp>
         <p:nvSpPr>
-          <p:cNvPr id="6" name="Text 4"/>
-          <p:cNvSpPr/>
-          <p:nvPr/>
-        </p:nvSpPr>
-        <p:spPr>
-          <a:xfrm>
-            <a:off x="338328" y="1069848"/>
-            <a:ext cx="3529584" cy="384048"/>
-          </a:xfrm>
-          <a:prstGeom prst="rect">
-            <a:avLst/>
-          </a:prstGeom>
-          <a:noFill/>
-          <a:ln/>
-        </p:spPr>
-        <p:txBody>
-          <a:bodyPr wrap="square" rtlCol="0" anchor="ctr"/>
-          <a:lstStyle/>
-          <a:p>
-            <a:pPr algn="ctr" indent="0" marL="0">
-              <a:buNone/>
-            </a:pPr>
-            <a:r>
-              <a:rPr lang="en-US" sz="1200" b="1" dirty="0">
-                <a:solidFill>
-                  <a:srgbClr val="FFFFFF"/>
-                </a:solidFill>
-              </a:rPr>
-              <a:t>🔐 인증 / 사용자 관리</a:t>
-            </a:r>
-            <a:endParaRPr lang="en-US" sz="1200" dirty="0"/>
-          </a:p>
-        </p:txBody>
-      </p:sp>
-      <p:sp>
-        <p:nvSpPr>
-          <p:cNvPr id="7" name="Text 5"/>
-          <p:cNvSpPr/>
-          <p:nvPr/>
-        </p:nvSpPr>
-        <p:spPr>
-          <a:xfrm>
-            <a:off x="393192" y="1554480"/>
-            <a:ext cx="3401568" cy="338328"/>
-          </a:xfrm>
-          <a:prstGeom prst="rect">
-            <a:avLst/>
-          </a:prstGeom>
-          <a:noFill/>
-          <a:ln/>
-        </p:spPr>
-        <p:txBody>
-          <a:bodyPr wrap="square" rtlCol="0" anchor="ctr"/>
-          <a:lstStyle/>
-          <a:p>
-            <a:pPr indent="0" marL="0">
-              <a:buNone/>
-            </a:pPr>
-            <a:r>
-              <a:rPr lang="en-US" sz="1000" dirty="0">
-                <a:solidFill>
-                  <a:srgbClr val="1F1235"/>
-                </a:solidFill>
-              </a:rPr>
-              <a:t>✓  이메일 로그인/회원가입 + 지갑 자동생성</a:t>
-            </a:r>
-            <a:endParaRPr lang="en-US" sz="1000" dirty="0"/>
-          </a:p>
-        </p:txBody>
-      </p:sp>
-      <p:sp>
-        <p:nvSpPr>
-          <p:cNvPr id="8" name="Text 6"/>
-          <p:cNvSpPr/>
-          <p:nvPr/>
-        </p:nvSpPr>
-        <p:spPr>
-          <a:xfrm>
-            <a:off x="393192" y="1901952"/>
-            <a:ext cx="3401568" cy="338328"/>
-          </a:xfrm>
-          <a:prstGeom prst="rect">
-            <a:avLst/>
-          </a:prstGeom>
-          <a:noFill/>
-          <a:ln/>
-        </p:spPr>
-        <p:txBody>
-          <a:bodyPr wrap="square" rtlCol="0" anchor="ctr"/>
-          <a:lstStyle/>
-          <a:p>
-            <a:pPr indent="0" marL="0">
-              <a:buNone/>
-            </a:pPr>
-            <a:r>
-              <a:rPr lang="en-US" sz="1000" dirty="0">
-                <a:solidFill>
-                  <a:srgbClr val="1F1235"/>
-                </a:solidFill>
-              </a:rPr>
-              <a:t>✓  카카오 소셜 로그인 (비즈니스 인증 후 재추가)</a:t>
-            </a:r>
-            <a:endParaRPr lang="en-US" sz="1000" dirty="0"/>
-          </a:p>
-        </p:txBody>
-      </p:sp>
-      <p:sp>
-        <p:nvSpPr>
-          <p:cNvPr id="9" name="Text 7"/>
-          <p:cNvSpPr/>
-          <p:nvPr/>
-        </p:nvSpPr>
-        <p:spPr>
-          <a:xfrm>
-            <a:off x="393192" y="2249424"/>
-            <a:ext cx="3401568" cy="338328"/>
-          </a:xfrm>
-          <a:prstGeom prst="rect">
-            <a:avLst/>
-          </a:prstGeom>
-          <a:noFill/>
-          <a:ln/>
-        </p:spPr>
-        <p:txBody>
-          <a:bodyPr wrap="square" rtlCol="0" anchor="ctr"/>
-          <a:lstStyle/>
-          <a:p>
-            <a:pPr indent="0" marL="0">
-              <a:buNone/>
-            </a:pPr>
-            <a:r>
-              <a:rPr lang="en-US" sz="1000" dirty="0">
-                <a:solidFill>
-                  <a:srgbClr val="1F1235"/>
-                </a:solidFill>
-              </a:rPr>
-              <a:t>✓  RBAC 미들웨어 (user/owner/rider/admin)</a:t>
-            </a:r>
-            <a:endParaRPr lang="en-US" sz="1000" dirty="0"/>
-          </a:p>
-        </p:txBody>
-      </p:sp>
-      <p:sp>
-        <p:nvSpPr>
-          <p:cNvPr id="10" name="Text 8"/>
-          <p:cNvSpPr/>
-          <p:nvPr/>
-        </p:nvSpPr>
-        <p:spPr>
-          <a:xfrm>
-            <a:off x="393192" y="2596896"/>
-            <a:ext cx="3401568" cy="338328"/>
-          </a:xfrm>
-          <a:prstGeom prst="rect">
-            <a:avLst/>
-          </a:prstGeom>
-          <a:noFill/>
-          <a:ln/>
-        </p:spPr>
-        <p:txBody>
-          <a:bodyPr wrap="square" rtlCol="0" anchor="ctr"/>
-          <a:lstStyle/>
-          <a:p>
-            <a:pPr indent="0" marL="0">
-              <a:buNone/>
-            </a:pPr>
-            <a:r>
-              <a:rPr lang="en-US" sz="1000" dirty="0">
-                <a:solidFill>
-                  <a:srgbClr val="1F1235"/>
-                </a:solidFill>
-              </a:rPr>
-              <a:t>✓  비밀번호 찾기·재설정 + 검색 히스토리</a:t>
-            </a:r>
-            <a:endParaRPr lang="en-US" sz="1000" dirty="0"/>
-          </a:p>
-        </p:txBody>
-      </p:sp>
-      <p:sp>
-        <p:nvSpPr>
-          <p:cNvPr id="11" name="Text 9"/>
-          <p:cNvSpPr/>
-          <p:nvPr/>
-        </p:nvSpPr>
-        <p:spPr>
-          <a:xfrm>
-            <a:off x="393192" y="2944368"/>
-            <a:ext cx="3401568" cy="338328"/>
-          </a:xfrm>
-          <a:prstGeom prst="rect">
-            <a:avLst/>
-          </a:prstGeom>
-          <a:noFill/>
-          <a:ln/>
-        </p:spPr>
-        <p:txBody>
-          <a:bodyPr wrap="square" rtlCol="0" anchor="ctr"/>
-          <a:lstStyle/>
-          <a:p>
-            <a:pPr indent="0" marL="0">
-              <a:buNone/>
-            </a:pPr>
-            <a:r>
-              <a:rPr lang="en-US" sz="1000" dirty="0">
-                <a:solidFill>
-                  <a:srgbClr val="1F1235"/>
-                </a:solidFill>
-              </a:rPr>
-              <a:t>✓  프로필 수정 + 다중 배달 주소 + 레퍼럴 재설계</a:t>
-            </a:r>
-            <a:endParaRPr lang="en-US" sz="1000" dirty="0"/>
-          </a:p>
-        </p:txBody>
-      </p:sp>
-      <p:sp>
-        <p:nvSpPr>
-          <p:cNvPr id="12" name="Shape 10"/>
-          <p:cNvSpPr/>
-          <p:nvPr/>
-        </p:nvSpPr>
-        <p:spPr>
-          <a:xfrm>
-            <a:off x="4160520" y="960120"/>
-            <a:ext cx="3749040" cy="2423160"/>
+          <p:cNvPr id="7" name="Shape 5"/>
+          <p:cNvSpPr/>
+          <p:nvPr/>
+        </p:nvSpPr>
+        <p:spPr>
+          <a:xfrm>
+            <a:off x="393192" y="1097280"/>
+            <a:ext cx="530352" cy="530352"/>
           </a:xfrm>
           <a:prstGeom prst="roundRect">
             <a:avLst>
-              <a:gd name="adj" fmla="val 5660"/>
+              <a:gd name="adj" fmla="val 17241"/>
             </a:avLst>
           </a:prstGeom>
           <a:solidFill>
-            <a:srgbClr val="E0F2FE"/>
+            <a:srgbClr val="FFFFFF"/>
           </a:solidFill>
           <a:ln w="12700">
             <a:solidFill>
-              <a:srgbClr val="0369A1"/>
+              <a:srgbClr val="86EFAC"/>
             </a:solidFill>
             <a:prstDash val="solid"/>
           </a:ln>
@@ -8371,26 +8280,176 @@
       </p:sp>
       <p:sp>
         <p:nvSpPr>
-          <p:cNvPr id="13" name="Shape 11"/>
-          <p:cNvSpPr/>
-          <p:nvPr/>
-        </p:nvSpPr>
-        <p:spPr>
-          <a:xfrm>
-            <a:off x="4270248" y="1069848"/>
-            <a:ext cx="3529584" cy="384048"/>
+          <p:cNvPr id="8" name="Text 6"/>
+          <p:cNvSpPr/>
+          <p:nvPr/>
+        </p:nvSpPr>
+        <p:spPr>
+          <a:xfrm>
+            <a:off x="393192" y="1078992"/>
+            <a:ext cx="548640" cy="548640"/>
+          </a:xfrm>
+          <a:prstGeom prst="rect">
+            <a:avLst/>
+          </a:prstGeom>
+          <a:noFill/>
+          <a:ln/>
+        </p:spPr>
+        <p:txBody>
+          <a:bodyPr wrap="square" rtlCol="0" anchor="ctr"/>
+          <a:lstStyle/>
+          <a:p>
+            <a:pPr algn="ctr" indent="0" marL="0">
+              <a:buNone/>
+            </a:pPr>
+            <a:r>
+              <a:rPr lang="en-US" sz="1800" dirty="0">
+                <a:solidFill>
+                  <a:srgbClr val="000000"/>
+                </a:solidFill>
+              </a:rPr>
+              <a:t>⏳</a:t>
+            </a:r>
+            <a:endParaRPr lang="en-US" sz="1800" dirty="0"/>
+          </a:p>
+        </p:txBody>
+      </p:sp>
+      <p:sp>
+        <p:nvSpPr>
+          <p:cNvPr id="9" name="Text 7"/>
+          <p:cNvSpPr/>
+          <p:nvPr/>
+        </p:nvSpPr>
+        <p:spPr>
+          <a:xfrm>
+            <a:off x="1033272" y="1115568"/>
+            <a:ext cx="2743200" cy="365760"/>
+          </a:xfrm>
+          <a:prstGeom prst="rect">
+            <a:avLst/>
+          </a:prstGeom>
+          <a:noFill/>
+          <a:ln/>
+        </p:spPr>
+        <p:txBody>
+          <a:bodyPr wrap="square" rtlCol="0" anchor="ctr"/>
+          <a:lstStyle/>
+          <a:p>
+            <a:pPr indent="0" marL="0">
+              <a:buNone/>
+            </a:pPr>
+            <a:r>
+              <a:rPr lang="en-US" sz="1200" b="1" dirty="0">
+                <a:solidFill>
+                  <a:srgbClr val="16A34A"/>
+                </a:solidFill>
+              </a:rPr>
+              <a:t>주문 pending 흐름 재설계</a:t>
+            </a:r>
+            <a:endParaRPr lang="en-US" sz="1200" dirty="0"/>
+          </a:p>
+        </p:txBody>
+      </p:sp>
+      <p:sp>
+        <p:nvSpPr>
+          <p:cNvPr id="10" name="Text 8"/>
+          <p:cNvSpPr/>
+          <p:nvPr/>
+        </p:nvSpPr>
+        <p:spPr>
+          <a:xfrm>
+            <a:off x="429768" y="1627632"/>
+            <a:ext cx="3337560" cy="1298448"/>
+          </a:xfrm>
+          <a:prstGeom prst="rect">
+            <a:avLst/>
+          </a:prstGeom>
+          <a:noFill/>
+          <a:ln/>
+        </p:spPr>
+        <p:txBody>
+          <a:bodyPr wrap="square" rtlCol="0" anchor="ctr"/>
+          <a:lstStyle/>
+          <a:p>
+            <a:pPr indent="0" marL="0">
+              <a:buNone/>
+            </a:pPr>
+            <a:r>
+              <a:rPr lang="en-US" sz="1000" dirty="0">
+                <a:solidFill>
+                  <a:srgbClr val="1F1235"/>
+                </a:solidFill>
+              </a:rPr>
+              <a:t>PICK 결제도 pending으로 시작</a:t>
+            </a:r>
+            <a:endParaRPr lang="en-US" sz="1000" dirty="0"/>
+          </a:p>
+          <a:p>
+            <a:pPr indent="0" marL="0">
+              <a:buNone/>
+            </a:pPr>
+            <a:r>
+              <a:rPr lang="en-US" sz="1000" dirty="0">
+                <a:solidFill>
+                  <a:srgbClr val="1F1235"/>
+                </a:solidFill>
+              </a:rPr>
+              <a:t>사장님 수락 후 confirmed 전환</a:t>
+            </a:r>
+            <a:endParaRPr lang="en-US" sz="1000" dirty="0"/>
+          </a:p>
+          <a:p>
+            <a:pPr indent="0" marL="0">
+              <a:buNone/>
+            </a:pPr>
+            <a:r>
+              <a:rPr lang="en-US" sz="1000" dirty="0">
+                <a:solidFill>
+                  <a:srgbClr val="1F1235"/>
+                </a:solidFill>
+              </a:rPr>
+              <a:t>유저 화면: '사장님 수락 대기' 표시</a:t>
+            </a:r>
+            <a:endParaRPr lang="en-US" sz="1000" dirty="0"/>
+          </a:p>
+          <a:p>
+            <a:pPr indent="0" marL="0">
+              <a:buNone/>
+            </a:pPr>
+            <a:r>
+              <a:rPr lang="en-US" sz="1000" dirty="0">
+                <a:solidFill>
+                  <a:srgbClr val="1F1235"/>
+                </a:solidFill>
+              </a:rPr>
+              <a:t>사장님 stats API pending 감지</a:t>
+            </a:r>
+            <a:endParaRPr lang="en-US" sz="1000" dirty="0"/>
+          </a:p>
+        </p:txBody>
+      </p:sp>
+      <p:sp>
+        <p:nvSpPr>
+          <p:cNvPr id="11" name="Shape 9"/>
+          <p:cNvSpPr/>
+          <p:nvPr/>
+        </p:nvSpPr>
+        <p:spPr>
+          <a:xfrm>
+            <a:off x="4160520" y="914400"/>
+            <a:ext cx="3749040" cy="2148840"/>
           </a:xfrm>
           <a:prstGeom prst="roundRect">
             <a:avLst>
-              <a:gd name="adj" fmla="val 19048"/>
+              <a:gd name="adj" fmla="val 6383"/>
             </a:avLst>
           </a:prstGeom>
           <a:solidFill>
-            <a:srgbClr val="0369A1"/>
+            <a:srgbClr val="F0FDF4"/>
           </a:solidFill>
           <a:ln w="12700">
             <a:solidFill>
-              <a:srgbClr val="0369A1"/>
+              <a:srgbClr val="86EFAC"/>
             </a:solidFill>
             <a:prstDash val="solid"/>
           </a:ln>
@@ -8398,242 +8457,26 @@
       </p:sp>
       <p:sp>
         <p:nvSpPr>
-          <p:cNvPr id="14" name="Text 12"/>
-          <p:cNvSpPr/>
-          <p:nvPr/>
-        </p:nvSpPr>
-        <p:spPr>
-          <a:xfrm>
-            <a:off x="4270248" y="1069848"/>
-            <a:ext cx="3529584" cy="384048"/>
-          </a:xfrm>
-          <a:prstGeom prst="rect">
-            <a:avLst/>
-          </a:prstGeom>
-          <a:noFill/>
-          <a:ln/>
-        </p:spPr>
-        <p:txBody>
-          <a:bodyPr wrap="square" rtlCol="0" anchor="ctr"/>
-          <a:lstStyle/>
-          <a:p>
-            <a:pPr algn="ctr" indent="0" marL="0">
-              <a:buNone/>
-            </a:pPr>
-            <a:r>
-              <a:rPr lang="en-US" sz="1200" b="1" dirty="0">
-                <a:solidFill>
-                  <a:srgbClr val="FFFFFF"/>
-                </a:solidFill>
-              </a:rPr>
-              <a:t>🏠 사용자 탭 (4개) + UX</a:t>
-            </a:r>
-            <a:endParaRPr lang="en-US" sz="1200" dirty="0"/>
-          </a:p>
-        </p:txBody>
-      </p:sp>
-      <p:sp>
-        <p:nvSpPr>
-          <p:cNvPr id="15" name="Text 13"/>
-          <p:cNvSpPr/>
-          <p:nvPr/>
-        </p:nvSpPr>
-        <p:spPr>
-          <a:xfrm>
-            <a:off x="4325112" y="1554480"/>
-            <a:ext cx="3401568" cy="338328"/>
-          </a:xfrm>
-          <a:prstGeom prst="rect">
-            <a:avLst/>
-          </a:prstGeom>
-          <a:noFill/>
-          <a:ln/>
-        </p:spPr>
-        <p:txBody>
-          <a:bodyPr wrap="square" rtlCol="0" anchor="ctr"/>
-          <a:lstStyle/>
-          <a:p>
-            <a:pPr indent="0" marL="0">
-              <a:buNone/>
-            </a:pPr>
-            <a:r>
-              <a:rPr lang="en-US" sz="1000" dirty="0">
-                <a:solidFill>
-                  <a:srgbClr val="1F1235"/>
-                </a:solidFill>
-              </a:rPr>
-              <a:t>✓  홈: 카테고리·검색(GIN)·인기가게·광고</a:t>
-            </a:r>
-            <a:endParaRPr lang="en-US" sz="1000" dirty="0"/>
-          </a:p>
-        </p:txBody>
-      </p:sp>
-      <p:sp>
-        <p:nvSpPr>
-          <p:cNvPr id="16" name="Text 14"/>
-          <p:cNvSpPr/>
-          <p:nvPr/>
-        </p:nvSpPr>
-        <p:spPr>
-          <a:xfrm>
-            <a:off x="4325112" y="1901952"/>
-            <a:ext cx="3401568" cy="338328"/>
-          </a:xfrm>
-          <a:prstGeom prst="rect">
-            <a:avLst/>
-          </a:prstGeom>
-          <a:noFill/>
-          <a:ln/>
-        </p:spPr>
-        <p:txBody>
-          <a:bodyPr wrap="square" rtlCol="0" anchor="ctr"/>
-          <a:lstStyle/>
-          <a:p>
-            <a:pPr indent="0" marL="0">
-              <a:buNone/>
-            </a:pPr>
-            <a:r>
-              <a:rPr lang="en-US" sz="1000" dirty="0">
-                <a:solidFill>
-                  <a:srgbClr val="1F1235"/>
-                </a:solidFill>
-              </a:rPr>
-              <a:t>✓  지갑: 퍼플 재디자인 + Pi UI + 출석 Tap-to-Earn</a:t>
-            </a:r>
-            <a:endParaRPr lang="en-US" sz="1000" dirty="0"/>
-          </a:p>
-        </p:txBody>
-      </p:sp>
-      <p:sp>
-        <p:nvSpPr>
-          <p:cNvPr id="17" name="Text 15"/>
-          <p:cNvSpPr/>
-          <p:nvPr/>
-        </p:nvSpPr>
-        <p:spPr>
-          <a:xfrm>
-            <a:off x="4325112" y="2249424"/>
-            <a:ext cx="3401568" cy="338328"/>
-          </a:xfrm>
-          <a:prstGeom prst="rect">
-            <a:avLst/>
-          </a:prstGeom>
-          <a:noFill/>
-          <a:ln/>
-        </p:spPr>
-        <p:txBody>
-          <a:bodyPr wrap="square" rtlCol="0" anchor="ctr"/>
-          <a:lstStyle/>
-          <a:p>
-            <a:pPr indent="0" marL="0">
-              <a:buNone/>
-            </a:pPr>
-            <a:r>
-              <a:rPr lang="en-US" sz="1000" dirty="0">
-                <a:solidFill>
-                  <a:srgbClr val="1F1235"/>
-                </a:solidFill>
-              </a:rPr>
-              <a:t>✓  PICK주문: Realtime 추적 + 상세 + 재주문</a:t>
-            </a:r>
-            <a:endParaRPr lang="en-US" sz="1000" dirty="0"/>
-          </a:p>
-        </p:txBody>
-      </p:sp>
-      <p:sp>
-        <p:nvSpPr>
-          <p:cNvPr id="18" name="Text 16"/>
-          <p:cNvSpPr/>
-          <p:nvPr/>
-        </p:nvSpPr>
-        <p:spPr>
-          <a:xfrm>
-            <a:off x="4325112" y="2596896"/>
-            <a:ext cx="3401568" cy="338328"/>
-          </a:xfrm>
-          <a:prstGeom prst="rect">
-            <a:avLst/>
-          </a:prstGeom>
-          <a:noFill/>
-          <a:ln/>
-        </p:spPr>
-        <p:txBody>
-          <a:bodyPr wrap="square" rtlCol="0" anchor="ctr"/>
-          <a:lstStyle/>
-          <a:p>
-            <a:pPr indent="0" marL="0">
-              <a:buNone/>
-            </a:pPr>
-            <a:r>
-              <a:rPr lang="en-US" sz="1000" dirty="0">
-                <a:solidFill>
-                  <a:srgbClr val="1F1235"/>
-                </a:solidFill>
-              </a:rPr>
-              <a:t>✓  알림 드로어 + 딥링크 + 자동 트리거</a:t>
-            </a:r>
-            <a:endParaRPr lang="en-US" sz="1000" dirty="0"/>
-          </a:p>
-        </p:txBody>
-      </p:sp>
-      <p:sp>
-        <p:nvSpPr>
-          <p:cNvPr id="19" name="Text 17"/>
-          <p:cNvSpPr/>
-          <p:nvPr/>
-        </p:nvSpPr>
-        <p:spPr>
-          <a:xfrm>
-            <a:off x="4325112" y="2944368"/>
-            <a:ext cx="3401568" cy="338328"/>
-          </a:xfrm>
-          <a:prstGeom prst="rect">
-            <a:avLst/>
-          </a:prstGeom>
-          <a:noFill/>
-          <a:ln/>
-        </p:spPr>
-        <p:txBody>
-          <a:bodyPr wrap="square" rtlCol="0" anchor="ctr"/>
-          <a:lstStyle/>
-          <a:p>
-            <a:pPr indent="0" marL="0">
-              <a:buNone/>
-            </a:pPr>
-            <a:r>
-              <a:rPr lang="en-US" sz="1000" dirty="0">
-                <a:solidFill>
-                  <a:srgbClr val="1F1235"/>
-                </a:solidFill>
-              </a:rPr>
-              <a:t>✓  MyPICK 초대 3버튼 (사용자·사장님·라이더)</a:t>
-            </a:r>
-            <a:endParaRPr lang="en-US" sz="1000" dirty="0"/>
-          </a:p>
-        </p:txBody>
-      </p:sp>
-      <p:sp>
-        <p:nvSpPr>
-          <p:cNvPr id="20" name="Shape 18"/>
-          <p:cNvSpPr/>
-          <p:nvPr/>
-        </p:nvSpPr>
-        <p:spPr>
-          <a:xfrm>
-            <a:off x="8092440" y="960120"/>
-            <a:ext cx="3749040" cy="2423160"/>
+          <p:cNvPr id="12" name="Shape 10"/>
+          <p:cNvSpPr/>
+          <p:nvPr/>
+        </p:nvSpPr>
+        <p:spPr>
+          <a:xfrm>
+            <a:off x="4325112" y="1097280"/>
+            <a:ext cx="530352" cy="530352"/>
           </a:xfrm>
           <a:prstGeom prst="roundRect">
             <a:avLst>
-              <a:gd name="adj" fmla="val 5660"/>
+              <a:gd name="adj" fmla="val 17241"/>
             </a:avLst>
           </a:prstGeom>
           <a:solidFill>
-            <a:srgbClr val="DCFCE7"/>
+            <a:srgbClr val="FFFFFF"/>
           </a:solidFill>
           <a:ln w="12700">
             <a:solidFill>
-              <a:srgbClr val="16A34A"/>
+              <a:srgbClr val="86EFAC"/>
             </a:solidFill>
             <a:prstDash val="solid"/>
           </a:ln>
@@ -8641,26 +8484,176 @@
       </p:sp>
       <p:sp>
         <p:nvSpPr>
-          <p:cNvPr id="21" name="Shape 19"/>
-          <p:cNvSpPr/>
-          <p:nvPr/>
-        </p:nvSpPr>
-        <p:spPr>
-          <a:xfrm>
-            <a:off x="8202168" y="1069848"/>
-            <a:ext cx="3529584" cy="384048"/>
+          <p:cNvPr id="13" name="Text 11"/>
+          <p:cNvSpPr/>
+          <p:nvPr/>
+        </p:nvSpPr>
+        <p:spPr>
+          <a:xfrm>
+            <a:off x="4325112" y="1078992"/>
+            <a:ext cx="548640" cy="548640"/>
+          </a:xfrm>
+          <a:prstGeom prst="rect">
+            <a:avLst/>
+          </a:prstGeom>
+          <a:noFill/>
+          <a:ln/>
+        </p:spPr>
+        <p:txBody>
+          <a:bodyPr wrap="square" rtlCol="0" anchor="ctr"/>
+          <a:lstStyle/>
+          <a:p>
+            <a:pPr algn="ctr" indent="0" marL="0">
+              <a:buNone/>
+            </a:pPr>
+            <a:r>
+              <a:rPr lang="en-US" sz="1800" dirty="0">
+                <a:solidFill>
+                  <a:srgbClr val="000000"/>
+                </a:solidFill>
+              </a:rPr>
+              <a:t>🔔</a:t>
+            </a:r>
+            <a:endParaRPr lang="en-US" sz="1800" dirty="0"/>
+          </a:p>
+        </p:txBody>
+      </p:sp>
+      <p:sp>
+        <p:nvSpPr>
+          <p:cNvPr id="14" name="Text 12"/>
+          <p:cNvSpPr/>
+          <p:nvPr/>
+        </p:nvSpPr>
+        <p:spPr>
+          <a:xfrm>
+            <a:off x="4965192" y="1115568"/>
+            <a:ext cx="2743200" cy="365760"/>
+          </a:xfrm>
+          <a:prstGeom prst="rect">
+            <a:avLst/>
+          </a:prstGeom>
+          <a:noFill/>
+          <a:ln/>
+        </p:spPr>
+        <p:txBody>
+          <a:bodyPr wrap="square" rtlCol="0" anchor="ctr"/>
+          <a:lstStyle/>
+          <a:p>
+            <a:pPr indent="0" marL="0">
+              <a:buNone/>
+            </a:pPr>
+            <a:r>
+              <a:rPr lang="en-US" sz="1200" b="1" dirty="0">
+                <a:solidFill>
+                  <a:srgbClr val="16A34A"/>
+                </a:solidFill>
+              </a:rPr>
+              <a:t>사장님 대시보드 알람 개선</a:t>
+            </a:r>
+            <a:endParaRPr lang="en-US" sz="1200" dirty="0"/>
+          </a:p>
+        </p:txBody>
+      </p:sp>
+      <p:sp>
+        <p:nvSpPr>
+          <p:cNvPr id="15" name="Text 13"/>
+          <p:cNvSpPr/>
+          <p:nvPr/>
+        </p:nvSpPr>
+        <p:spPr>
+          <a:xfrm>
+            <a:off x="4361688" y="1627632"/>
+            <a:ext cx="3337560" cy="1298448"/>
+          </a:xfrm>
+          <a:prstGeom prst="rect">
+            <a:avLst/>
+          </a:prstGeom>
+          <a:noFill/>
+          <a:ln/>
+        </p:spPr>
+        <p:txBody>
+          <a:bodyPr wrap="square" rtlCol="0" anchor="ctr"/>
+          <a:lstStyle/>
+          <a:p>
+            <a:pPr indent="0" marL="0">
+              <a:buNone/>
+            </a:pPr>
+            <a:r>
+              <a:rPr lang="en-US" sz="1000" dirty="0">
+                <a:solidFill>
+                  <a:srgbClr val="1F1235"/>
+                </a:solidFill>
+              </a:rPr>
+              <a:t>신규주문 카운트 pending 기준 수정</a:t>
+            </a:r>
+            <a:endParaRPr lang="en-US" sz="1000" dirty="0"/>
+          </a:p>
+          <a:p>
+            <a:pPr indent="0" marL="0">
+              <a:buNone/>
+            </a:pPr>
+            <a:r>
+              <a:rPr lang="en-US" sz="1000" dirty="0">
+                <a:solidFill>
+                  <a:srgbClr val="1F1235"/>
+                </a:solidFill>
+              </a:rPr>
+              <a:t>유저 취소 시 알람 즉시 중단</a:t>
+            </a:r>
+            <a:endParaRPr lang="en-US" sz="1000" dirty="0"/>
+          </a:p>
+          <a:p>
+            <a:pPr indent="0" marL="0">
+              <a:buNone/>
+            </a:pPr>
+            <a:r>
+              <a:rPr lang="en-US" sz="1000" dirty="0">
+                <a:solidFill>
+                  <a:srgbClr val="1F1235"/>
+                </a:solidFill>
+              </a:rPr>
+              <a:t>취소 감지 3중 보호 구조</a:t>
+            </a:r>
+            <a:endParaRPr lang="en-US" sz="1000" dirty="0"/>
+          </a:p>
+          <a:p>
+            <a:pPr indent="0" marL="0">
+              <a:buNone/>
+            </a:pPr>
+            <a:r>
+              <a:rPr lang="en-US" sz="1000" dirty="0">
+                <a:solidFill>
+                  <a:srgbClr val="1F1235"/>
+                </a:solidFill>
+              </a:rPr>
+              <a:t>(Realtime + 폴링 + pendingCount)</a:t>
+            </a:r>
+            <a:endParaRPr lang="en-US" sz="1000" dirty="0"/>
+          </a:p>
+        </p:txBody>
+      </p:sp>
+      <p:sp>
+        <p:nvSpPr>
+          <p:cNvPr id="16" name="Shape 14"/>
+          <p:cNvSpPr/>
+          <p:nvPr/>
+        </p:nvSpPr>
+        <p:spPr>
+          <a:xfrm>
+            <a:off x="8092440" y="914400"/>
+            <a:ext cx="3749040" cy="2148840"/>
           </a:xfrm>
           <a:prstGeom prst="roundRect">
             <a:avLst>
-              <a:gd name="adj" fmla="val 19048"/>
+              <a:gd name="adj" fmla="val 6383"/>
             </a:avLst>
           </a:prstGeom>
           <a:solidFill>
-            <a:srgbClr val="16A34A"/>
+            <a:srgbClr val="F0FDF4"/>
           </a:solidFill>
           <a:ln w="12700">
             <a:solidFill>
-              <a:srgbClr val="16A34A"/>
+              <a:srgbClr val="86EFAC"/>
             </a:solidFill>
             <a:prstDash val="solid"/>
           </a:ln>
@@ -8668,242 +8661,26 @@
       </p:sp>
       <p:sp>
         <p:nvSpPr>
-          <p:cNvPr id="22" name="Text 20"/>
-          <p:cNvSpPr/>
-          <p:nvPr/>
-        </p:nvSpPr>
-        <p:spPr>
-          <a:xfrm>
-            <a:off x="8202168" y="1069848"/>
-            <a:ext cx="3529584" cy="384048"/>
-          </a:xfrm>
-          <a:prstGeom prst="rect">
-            <a:avLst/>
-          </a:prstGeom>
-          <a:noFill/>
-          <a:ln/>
-        </p:spPr>
-        <p:txBody>
-          <a:bodyPr wrap="square" rtlCol="0" anchor="ctr"/>
-          <a:lstStyle/>
-          <a:p>
-            <a:pPr algn="ctr" indent="0" marL="0">
-              <a:buNone/>
-            </a:pPr>
-            <a:r>
-              <a:rPr lang="en-US" sz="1200" b="1" dirty="0">
-                <a:solidFill>
-                  <a:srgbClr val="FFFFFF"/>
-                </a:solidFill>
-              </a:rPr>
-              <a:t>🛒 가맹점 / 주문 플로우</a:t>
-            </a:r>
-            <a:endParaRPr lang="en-US" sz="1200" dirty="0"/>
-          </a:p>
-        </p:txBody>
-      </p:sp>
-      <p:sp>
-        <p:nvSpPr>
-          <p:cNvPr id="23" name="Text 21"/>
-          <p:cNvSpPr/>
-          <p:nvPr/>
-        </p:nvSpPr>
-        <p:spPr>
-          <a:xfrm>
-            <a:off x="8257032" y="1554480"/>
-            <a:ext cx="3401568" cy="338328"/>
-          </a:xfrm>
-          <a:prstGeom prst="rect">
-            <a:avLst/>
-          </a:prstGeom>
-          <a:noFill/>
-          <a:ln/>
-        </p:spPr>
-        <p:txBody>
-          <a:bodyPr wrap="square" rtlCol="0" anchor="ctr"/>
-          <a:lstStyle/>
-          <a:p>
-            <a:pPr indent="0" marL="0">
-              <a:buNone/>
-            </a:pPr>
-            <a:r>
-              <a:rPr lang="en-US" sz="1000" dirty="0">
-                <a:solidFill>
-                  <a:srgbClr val="1F1235"/>
-                </a:solidFill>
-              </a:rPr>
-              <a:t>✓  가맹점 목록 (카테고리/전문검색 필터)</a:t>
-            </a:r>
-            <a:endParaRPr lang="en-US" sz="1000" dirty="0"/>
-          </a:p>
-        </p:txBody>
-      </p:sp>
-      <p:sp>
-        <p:nvSpPr>
-          <p:cNvPr id="24" name="Text 22"/>
-          <p:cNvSpPr/>
-          <p:nvPr/>
-        </p:nvSpPr>
-        <p:spPr>
-          <a:xfrm>
-            <a:off x="8257032" y="1901952"/>
-            <a:ext cx="3401568" cy="338328"/>
-          </a:xfrm>
-          <a:prstGeom prst="rect">
-            <a:avLst/>
-          </a:prstGeom>
-          <a:noFill/>
-          <a:ln/>
-        </p:spPr>
-        <p:txBody>
-          <a:bodyPr wrap="square" rtlCol="0" anchor="ctr"/>
-          <a:lstStyle/>
-          <a:p>
-            <a:pPr indent="0" marL="0">
-              <a:buNone/>
-            </a:pPr>
-            <a:r>
-              <a:rPr lang="en-US" sz="1000" dirty="0">
-                <a:solidFill>
-                  <a:srgbClr val="1F1235"/>
-                </a:solidFill>
-              </a:rPr>
-              <a:t>✓  가맹점 상세 + 메뉴 옵션 + 리뷰(이미지)</a:t>
-            </a:r>
-            <a:endParaRPr lang="en-US" sz="1000" dirty="0"/>
-          </a:p>
-        </p:txBody>
-      </p:sp>
-      <p:sp>
-        <p:nvSpPr>
-          <p:cNvPr id="25" name="Text 23"/>
-          <p:cNvSpPr/>
-          <p:nvPr/>
-        </p:nvSpPr>
-        <p:spPr>
-          <a:xfrm>
-            <a:off x="8257032" y="2249424"/>
-            <a:ext cx="3401568" cy="338328"/>
-          </a:xfrm>
-          <a:prstGeom prst="rect">
-            <a:avLst/>
-          </a:prstGeom>
-          <a:noFill/>
-          <a:ln/>
-        </p:spPr>
-        <p:txBody>
-          <a:bodyPr wrap="square" rtlCol="0" anchor="ctr"/>
-          <a:lstStyle/>
-          <a:p>
-            <a:pPr indent="0" marL="0">
-              <a:buNone/>
-            </a:pPr>
-            <a:r>
-              <a:rPr lang="en-US" sz="1000" dirty="0">
-                <a:solidFill>
-                  <a:srgbClr val="1F1235"/>
-                </a:solidFill>
-              </a:rPr>
-              <a:t>✓  쿠폰(3종) + PICK 할인 + 배달 메모</a:t>
-            </a:r>
-            <a:endParaRPr lang="en-US" sz="1000" dirty="0"/>
-          </a:p>
-        </p:txBody>
-      </p:sp>
-      <p:sp>
-        <p:nvSpPr>
-          <p:cNvPr id="26" name="Text 24"/>
-          <p:cNvSpPr/>
-          <p:nvPr/>
-        </p:nvSpPr>
-        <p:spPr>
-          <a:xfrm>
-            <a:off x="8257032" y="2596896"/>
-            <a:ext cx="3401568" cy="338328"/>
-          </a:xfrm>
-          <a:prstGeom prst="rect">
-            <a:avLst/>
-          </a:prstGeom>
-          <a:noFill/>
-          <a:ln/>
-        </p:spPr>
-        <p:txBody>
-          <a:bodyPr wrap="square" rtlCol="0" anchor="ctr"/>
-          <a:lstStyle/>
-          <a:p>
-            <a:pPr indent="0" marL="0">
-              <a:buNone/>
-            </a:pPr>
-            <a:r>
-              <a:rPr lang="en-US" sz="1000" dirty="0">
-                <a:solidFill>
-                  <a:srgbClr val="1F1235"/>
-                </a:solidFill>
-              </a:rPr>
-              <a:t>✓  PICK 결제 + 토스페이먼츠 카드 결제</a:t>
-            </a:r>
-            <a:endParaRPr lang="en-US" sz="1000" dirty="0"/>
-          </a:p>
-        </p:txBody>
-      </p:sp>
-      <p:sp>
-        <p:nvSpPr>
-          <p:cNvPr id="27" name="Text 25"/>
-          <p:cNvSpPr/>
-          <p:nvPr/>
-        </p:nvSpPr>
-        <p:spPr>
-          <a:xfrm>
-            <a:off x="8257032" y="2944368"/>
-            <a:ext cx="3401568" cy="338328"/>
-          </a:xfrm>
-          <a:prstGeom prst="rect">
-            <a:avLst/>
-          </a:prstGeom>
-          <a:noFill/>
-          <a:ln/>
-        </p:spPr>
-        <p:txBody>
-          <a:bodyPr wrap="square" rtlCol="0" anchor="ctr"/>
-          <a:lstStyle/>
-          <a:p>
-            <a:pPr indent="0" marL="0">
-              <a:buNone/>
-            </a:pPr>
-            <a:r>
-              <a:rPr lang="en-US" sz="1000" dirty="0">
-                <a:solidFill>
-                  <a:srgbClr val="1F1235"/>
-                </a:solidFill>
-              </a:rPr>
-              <a:t>✓  주문 생성 → PICK 차감 → 완료 적립</a:t>
-            </a:r>
-            <a:endParaRPr lang="en-US" sz="1000" dirty="0"/>
-          </a:p>
-        </p:txBody>
-      </p:sp>
-      <p:sp>
-        <p:nvSpPr>
-          <p:cNvPr id="28" name="Shape 26"/>
-          <p:cNvSpPr/>
-          <p:nvPr/>
-        </p:nvSpPr>
-        <p:spPr>
-          <a:xfrm>
-            <a:off x="228600" y="3566160"/>
-            <a:ext cx="3749040" cy="2423160"/>
+          <p:cNvPr id="17" name="Shape 15"/>
+          <p:cNvSpPr/>
+          <p:nvPr/>
+        </p:nvSpPr>
+        <p:spPr>
+          <a:xfrm>
+            <a:off x="8257032" y="1097280"/>
+            <a:ext cx="530352" cy="530352"/>
           </a:xfrm>
           <a:prstGeom prst="roundRect">
             <a:avLst>
-              <a:gd name="adj" fmla="val 5660"/>
+              <a:gd name="adj" fmla="val 17241"/>
             </a:avLst>
           </a:prstGeom>
           <a:solidFill>
-            <a:srgbClr val="FFFBEB"/>
+            <a:srgbClr val="FFFFFF"/>
           </a:solidFill>
           <a:ln w="12700">
             <a:solidFill>
-              <a:srgbClr val="D97706"/>
+              <a:srgbClr val="86EFAC"/>
             </a:solidFill>
             <a:prstDash val="solid"/>
           </a:ln>
@@ -8911,26 +8688,176 @@
       </p:sp>
       <p:sp>
         <p:nvSpPr>
-          <p:cNvPr id="29" name="Shape 27"/>
-          <p:cNvSpPr/>
-          <p:nvPr/>
-        </p:nvSpPr>
-        <p:spPr>
-          <a:xfrm>
-            <a:off x="338328" y="3675888"/>
-            <a:ext cx="3529584" cy="384048"/>
+          <p:cNvPr id="18" name="Text 16"/>
+          <p:cNvSpPr/>
+          <p:nvPr/>
+        </p:nvSpPr>
+        <p:spPr>
+          <a:xfrm>
+            <a:off x="8257032" y="1078992"/>
+            <a:ext cx="548640" cy="548640"/>
+          </a:xfrm>
+          <a:prstGeom prst="rect">
+            <a:avLst/>
+          </a:prstGeom>
+          <a:noFill/>
+          <a:ln/>
+        </p:spPr>
+        <p:txBody>
+          <a:bodyPr wrap="square" rtlCol="0" anchor="ctr"/>
+          <a:lstStyle/>
+          <a:p>
+            <a:pPr algn="ctr" indent="0" marL="0">
+              <a:buNone/>
+            </a:pPr>
+            <a:r>
+              <a:rPr lang="en-US" sz="1800" dirty="0">
+                <a:solidFill>
+                  <a:srgbClr val="000000"/>
+                </a:solidFill>
+              </a:rPr>
+              <a:t>🛵</a:t>
+            </a:r>
+            <a:endParaRPr lang="en-US" sz="1800" dirty="0"/>
+          </a:p>
+        </p:txBody>
+      </p:sp>
+      <p:sp>
+        <p:nvSpPr>
+          <p:cNvPr id="19" name="Text 17"/>
+          <p:cNvSpPr/>
+          <p:nvPr/>
+        </p:nvSpPr>
+        <p:spPr>
+          <a:xfrm>
+            <a:off x="8897112" y="1115568"/>
+            <a:ext cx="2743200" cy="365760"/>
+          </a:xfrm>
+          <a:prstGeom prst="rect">
+            <a:avLst/>
+          </a:prstGeom>
+          <a:noFill/>
+          <a:ln/>
+        </p:spPr>
+        <p:txBody>
+          <a:bodyPr wrap="square" rtlCol="0" anchor="ctr"/>
+          <a:lstStyle/>
+          <a:p>
+            <a:pPr indent="0" marL="0">
+              <a:buNone/>
+            </a:pPr>
+            <a:r>
+              <a:rPr lang="en-US" sz="1200" b="1" dirty="0">
+                <a:solidFill>
+                  <a:srgbClr val="16A34A"/>
+                </a:solidFill>
+              </a:rPr>
+              <a:t>라이더 자동오프라인 방지</a:t>
+            </a:r>
+            <a:endParaRPr lang="en-US" sz="1200" dirty="0"/>
+          </a:p>
+        </p:txBody>
+      </p:sp>
+      <p:sp>
+        <p:nvSpPr>
+          <p:cNvPr id="20" name="Text 18"/>
+          <p:cNvSpPr/>
+          <p:nvPr/>
+        </p:nvSpPr>
+        <p:spPr>
+          <a:xfrm>
+            <a:off x="8293608" y="1627632"/>
+            <a:ext cx="3337560" cy="1298448"/>
+          </a:xfrm>
+          <a:prstGeom prst="rect">
+            <a:avLst/>
+          </a:prstGeom>
+          <a:noFill/>
+          <a:ln/>
+        </p:spPr>
+        <p:txBody>
+          <a:bodyPr wrap="square" rtlCol="0" anchor="ctr"/>
+          <a:lstStyle/>
+          <a:p>
+            <a:pPr indent="0" marL="0">
+              <a:buNone/>
+            </a:pPr>
+            <a:r>
+              <a:rPr lang="en-US" sz="1000" dirty="0">
+                <a:solidFill>
+                  <a:srgbClr val="1F1235"/>
+                </a:solidFill>
+              </a:rPr>
+              <a:t>온라인 상태 시 8분마다 heartbeat</a:t>
+            </a:r>
+            <a:endParaRPr lang="en-US" sz="1000" dirty="0"/>
+          </a:p>
+          <a:p>
+            <a:pPr indent="0" marL="0">
+              <a:buNone/>
+            </a:pPr>
+            <a:r>
+              <a:rPr lang="en-US" sz="1000" dirty="0">
+                <a:solidFill>
+                  <a:srgbClr val="1F1235"/>
+                </a:solidFill>
+              </a:rPr>
+              <a:t>GPS 좌표 자동 갱신</a:t>
+            </a:r>
+            <a:endParaRPr lang="en-US" sz="1000" dirty="0"/>
+          </a:p>
+          <a:p>
+            <a:pPr indent="0" marL="0">
+              <a:buNone/>
+            </a:pPr>
+            <a:r>
+              <a:rPr lang="en-US" sz="1000" dirty="0">
+                <a:solidFill>
+                  <a:srgbClr val="1F1235"/>
+                </a:solidFill>
+              </a:rPr>
+              <a:t>Cron 10분 기준 절대 미도달</a:t>
+            </a:r>
+            <a:endParaRPr lang="en-US" sz="1000" dirty="0"/>
+          </a:p>
+          <a:p>
+            <a:pPr indent="0" marL="0">
+              <a:buNone/>
+            </a:pPr>
+            <a:r>
+              <a:rPr lang="en-US" sz="1000" dirty="0">
+                <a:solidFill>
+                  <a:srgbClr val="1F1235"/>
+                </a:solidFill>
+              </a:rPr>
+              <a:t>앱 닫으면 자동오프라인 유지</a:t>
+            </a:r>
+            <a:endParaRPr lang="en-US" sz="1000" dirty="0"/>
+          </a:p>
+        </p:txBody>
+      </p:sp>
+      <p:sp>
+        <p:nvSpPr>
+          <p:cNvPr id="21" name="Shape 19"/>
+          <p:cNvSpPr/>
+          <p:nvPr/>
+        </p:nvSpPr>
+        <p:spPr>
+          <a:xfrm>
+            <a:off x="228600" y="3246120"/>
+            <a:ext cx="3749040" cy="2148840"/>
           </a:xfrm>
           <a:prstGeom prst="roundRect">
             <a:avLst>
-              <a:gd name="adj" fmla="val 19048"/>
+              <a:gd name="adj" fmla="val 6383"/>
             </a:avLst>
           </a:prstGeom>
           <a:solidFill>
-            <a:srgbClr val="D97706"/>
+            <a:srgbClr val="F0FDF4"/>
           </a:solidFill>
           <a:ln w="12700">
             <a:solidFill>
-              <a:srgbClr val="D97706"/>
+              <a:srgbClr val="86EFAC"/>
             </a:solidFill>
             <a:prstDash val="solid"/>
           </a:ln>
@@ -8938,278 +8865,26 @@
       </p:sp>
       <p:sp>
         <p:nvSpPr>
-          <p:cNvPr id="30" name="Text 28"/>
-          <p:cNvSpPr/>
-          <p:nvPr/>
-        </p:nvSpPr>
-        <p:spPr>
-          <a:xfrm>
-            <a:off x="338328" y="3675888"/>
-            <a:ext cx="3529584" cy="384048"/>
-          </a:xfrm>
-          <a:prstGeom prst="rect">
-            <a:avLst/>
-          </a:prstGeom>
-          <a:noFill/>
-          <a:ln/>
-        </p:spPr>
-        <p:txBody>
-          <a:bodyPr wrap="square" rtlCol="0" anchor="ctr"/>
-          <a:lstStyle/>
-          <a:p>
-            <a:pPr algn="ctr" indent="0" marL="0">
-              <a:buNone/>
-            </a:pPr>
-            <a:r>
-              <a:rPr lang="en-US" sz="1200" b="1" dirty="0">
-                <a:solidFill>
-                  <a:srgbClr val="FFFFFF"/>
-                </a:solidFill>
-              </a:rPr>
-              <a:t>👨‍🍳 사장님 기능</a:t>
-            </a:r>
-            <a:endParaRPr lang="en-US" sz="1200" dirty="0"/>
-          </a:p>
-        </p:txBody>
-      </p:sp>
-      <p:sp>
-        <p:nvSpPr>
-          <p:cNvPr id="31" name="Text 29"/>
-          <p:cNvSpPr/>
-          <p:nvPr/>
-        </p:nvSpPr>
-        <p:spPr>
-          <a:xfrm>
-            <a:off x="393192" y="4160520"/>
-            <a:ext cx="3401568" cy="338328"/>
-          </a:xfrm>
-          <a:prstGeom prst="rect">
-            <a:avLst/>
-          </a:prstGeom>
-          <a:noFill/>
-          <a:ln/>
-        </p:spPr>
-        <p:txBody>
-          <a:bodyPr wrap="square" rtlCol="0" anchor="ctr"/>
-          <a:lstStyle/>
-          <a:p>
-            <a:pPr indent="0" marL="0">
-              <a:buNone/>
-            </a:pPr>
-            <a:r>
-              <a:rPr lang="en-US" sz="1000" dirty="0">
-                <a:solidFill>
-                  <a:srgbClr val="1F1235"/>
-                </a:solidFill>
-              </a:rPr>
-              <a:t>✓  가게 등록·설정·쿠폰(KRW 입력)·영업시간</a:t>
-            </a:r>
-            <a:endParaRPr lang="en-US" sz="1000" dirty="0"/>
-          </a:p>
-        </p:txBody>
-      </p:sp>
-      <p:sp>
-        <p:nvSpPr>
-          <p:cNvPr id="32" name="Text 30"/>
-          <p:cNvSpPr/>
-          <p:nvPr/>
-        </p:nvSpPr>
-        <p:spPr>
-          <a:xfrm>
-            <a:off x="393192" y="4507992"/>
-            <a:ext cx="3401568" cy="338328"/>
-          </a:xfrm>
-          <a:prstGeom prst="rect">
-            <a:avLst/>
-          </a:prstGeom>
-          <a:noFill/>
-          <a:ln/>
-        </p:spPr>
-        <p:txBody>
-          <a:bodyPr wrap="square" rtlCol="0" anchor="ctr"/>
-          <a:lstStyle/>
-          <a:p>
-            <a:pPr indent="0" marL="0">
-              <a:buNone/>
-            </a:pPr>
-            <a:r>
-              <a:rPr lang="en-US" sz="1000" dirty="0">
-                <a:solidFill>
-                  <a:srgbClr val="1F1235"/>
-                </a:solidFill>
-              </a:rPr>
-              <a:t>✓  사진 리뷰 보상 설정 연동 (photo_review_reward_krw)</a:t>
-            </a:r>
-            <a:endParaRPr lang="en-US" sz="1000" dirty="0"/>
-          </a:p>
-        </p:txBody>
-      </p:sp>
-      <p:sp>
-        <p:nvSpPr>
-          <p:cNvPr id="33" name="Text 31"/>
-          <p:cNvSpPr/>
-          <p:nvPr/>
-        </p:nvSpPr>
-        <p:spPr>
-          <a:xfrm>
-            <a:off x="393192" y="4855464"/>
-            <a:ext cx="3401568" cy="338328"/>
-          </a:xfrm>
-          <a:prstGeom prst="rect">
-            <a:avLst/>
-          </a:prstGeom>
-          <a:noFill/>
-          <a:ln/>
-        </p:spPr>
-        <p:txBody>
-          <a:bodyPr wrap="square" rtlCol="0" anchor="ctr"/>
-          <a:lstStyle/>
-          <a:p>
-            <a:pPr indent="0" marL="0">
-              <a:buNone/>
-            </a:pPr>
-            <a:r>
-              <a:rPr lang="en-US" sz="1000" dirty="0">
-                <a:solidFill>
-                  <a:srgbClr val="1F1235"/>
-                </a:solidFill>
-              </a:rPr>
-              <a:t>✓  주문 관리: 수락 ETA + 거절 확인 팝업</a:t>
-            </a:r>
-            <a:endParaRPr lang="en-US" sz="1000" dirty="0"/>
-          </a:p>
-        </p:txBody>
-      </p:sp>
-      <p:sp>
-        <p:nvSpPr>
-          <p:cNvPr id="34" name="Text 32"/>
-          <p:cNvSpPr/>
-          <p:nvPr/>
-        </p:nvSpPr>
-        <p:spPr>
-          <a:xfrm>
-            <a:off x="393192" y="5202936"/>
-            <a:ext cx="3401568" cy="338328"/>
-          </a:xfrm>
-          <a:prstGeom prst="rect">
-            <a:avLst/>
-          </a:prstGeom>
-          <a:noFill/>
-          <a:ln/>
-        </p:spPr>
-        <p:txBody>
-          <a:bodyPr wrap="square" rtlCol="0" anchor="ctr"/>
-          <a:lstStyle/>
-          <a:p>
-            <a:pPr indent="0" marL="0">
-              <a:buNone/>
-            </a:pPr>
-            <a:r>
-              <a:rPr lang="en-US" sz="1000" dirty="0">
-                <a:solidFill>
-                  <a:srgbClr val="1F1235"/>
-                </a:solidFill>
-              </a:rPr>
-              <a:t>✓  매출 통계 대시보드 + 주간 차트</a:t>
-            </a:r>
-            <a:endParaRPr lang="en-US" sz="1000" dirty="0"/>
-          </a:p>
-        </p:txBody>
-      </p:sp>
-      <p:sp>
-        <p:nvSpPr>
-          <p:cNvPr id="35" name="Text 33"/>
-          <p:cNvSpPr/>
-          <p:nvPr/>
-        </p:nvSpPr>
-        <p:spPr>
-          <a:xfrm>
-            <a:off x="393192" y="5550408"/>
-            <a:ext cx="3401568" cy="338328"/>
-          </a:xfrm>
-          <a:prstGeom prst="rect">
-            <a:avLst/>
-          </a:prstGeom>
-          <a:noFill/>
-          <a:ln/>
-        </p:spPr>
-        <p:txBody>
-          <a:bodyPr wrap="square" rtlCol="0" anchor="ctr"/>
-          <a:lstStyle/>
-          <a:p>
-            <a:pPr indent="0" marL="0">
-              <a:buNone/>
-            </a:pPr>
-            <a:r>
-              <a:rPr lang="en-US" sz="1000" dirty="0">
-                <a:solidFill>
-                  <a:srgbClr val="1F1235"/>
-                </a:solidFill>
-              </a:rPr>
-              <a:t>✓  신규주문 TTS 알림 '픽픽 주문이 들어왔습니다'</a:t>
-            </a:r>
-            <a:endParaRPr lang="en-US" sz="1000" dirty="0"/>
-          </a:p>
-        </p:txBody>
-      </p:sp>
-      <p:sp>
-        <p:nvSpPr>
-          <p:cNvPr id="36" name="Text 34"/>
-          <p:cNvSpPr/>
-          <p:nvPr/>
-        </p:nvSpPr>
-        <p:spPr>
-          <a:xfrm>
-            <a:off x="393192" y="5897880"/>
-            <a:ext cx="3401568" cy="338328"/>
-          </a:xfrm>
-          <a:prstGeom prst="rect">
-            <a:avLst/>
-          </a:prstGeom>
-          <a:noFill/>
-          <a:ln/>
-        </p:spPr>
-        <p:txBody>
-          <a:bodyPr wrap="square" rtlCol="0" anchor="ctr"/>
-          <a:lstStyle/>
-          <a:p>
-            <a:pPr indent="0" marL="0">
-              <a:buNone/>
-            </a:pPr>
-            <a:r>
-              <a:rPr lang="en-US" sz="1000" dirty="0">
-                <a:solidFill>
-                  <a:srgbClr val="1F1235"/>
-                </a:solidFill>
-              </a:rPr>
-              <a:t>✓  신규 가맹점 초대 리워드 20,000 PICK</a:t>
-            </a:r>
-            <a:endParaRPr lang="en-US" sz="1000" dirty="0"/>
-          </a:p>
-        </p:txBody>
-      </p:sp>
-      <p:sp>
-        <p:nvSpPr>
-          <p:cNvPr id="37" name="Shape 35"/>
-          <p:cNvSpPr/>
-          <p:nvPr/>
-        </p:nvSpPr>
-        <p:spPr>
-          <a:xfrm>
-            <a:off x="4160520" y="3566160"/>
-            <a:ext cx="3749040" cy="2423160"/>
+          <p:cNvPr id="22" name="Shape 20"/>
+          <p:cNvSpPr/>
+          <p:nvPr/>
+        </p:nvSpPr>
+        <p:spPr>
+          <a:xfrm>
+            <a:off x="393192" y="3429000"/>
+            <a:ext cx="530352" cy="530352"/>
           </a:xfrm>
           <a:prstGeom prst="roundRect">
             <a:avLst>
-              <a:gd name="adj" fmla="val 5660"/>
+              <a:gd name="adj" fmla="val 17241"/>
             </a:avLst>
           </a:prstGeom>
           <a:solidFill>
-            <a:srgbClr val="ECFEFF"/>
+            <a:srgbClr val="FFFFFF"/>
           </a:solidFill>
           <a:ln w="12700">
             <a:solidFill>
-              <a:srgbClr val="0891B2"/>
+              <a:srgbClr val="86EFAC"/>
             </a:solidFill>
             <a:prstDash val="solid"/>
           </a:ln>
@@ -9217,26 +8892,176 @@
       </p:sp>
       <p:sp>
         <p:nvSpPr>
-          <p:cNvPr id="38" name="Shape 36"/>
-          <p:cNvSpPr/>
-          <p:nvPr/>
-        </p:nvSpPr>
-        <p:spPr>
-          <a:xfrm>
-            <a:off x="4270248" y="3675888"/>
-            <a:ext cx="3529584" cy="384048"/>
+          <p:cNvPr id="23" name="Text 21"/>
+          <p:cNvSpPr/>
+          <p:nvPr/>
+        </p:nvSpPr>
+        <p:spPr>
+          <a:xfrm>
+            <a:off x="393192" y="3410712"/>
+            <a:ext cx="548640" cy="548640"/>
+          </a:xfrm>
+          <a:prstGeom prst="rect">
+            <a:avLst/>
+          </a:prstGeom>
+          <a:noFill/>
+          <a:ln/>
+        </p:spPr>
+        <p:txBody>
+          <a:bodyPr wrap="square" rtlCol="0" anchor="ctr"/>
+          <a:lstStyle/>
+          <a:p>
+            <a:pPr algn="ctr" indent="0" marL="0">
+              <a:buNone/>
+            </a:pPr>
+            <a:r>
+              <a:rPr lang="en-US" sz="1800" dirty="0">
+                <a:solidFill>
+                  <a:srgbClr val="000000"/>
+                </a:solidFill>
+              </a:rPr>
+              <a:t>📦</a:t>
+            </a:r>
+            <a:endParaRPr lang="en-US" sz="1800" dirty="0"/>
+          </a:p>
+        </p:txBody>
+      </p:sp>
+      <p:sp>
+        <p:nvSpPr>
+          <p:cNvPr id="24" name="Text 22"/>
+          <p:cNvSpPr/>
+          <p:nvPr/>
+        </p:nvSpPr>
+        <p:spPr>
+          <a:xfrm>
+            <a:off x="1033272" y="3447288"/>
+            <a:ext cx="2743200" cy="365760"/>
+          </a:xfrm>
+          <a:prstGeom prst="rect">
+            <a:avLst/>
+          </a:prstGeom>
+          <a:noFill/>
+          <a:ln/>
+        </p:spPr>
+        <p:txBody>
+          <a:bodyPr wrap="square" rtlCol="0" anchor="ctr"/>
+          <a:lstStyle/>
+          <a:p>
+            <a:pPr indent="0" marL="0">
+              <a:buNone/>
+            </a:pPr>
+            <a:r>
+              <a:rPr lang="en-US" sz="1200" b="1" dirty="0">
+                <a:solidFill>
+                  <a:srgbClr val="16A34A"/>
+                </a:solidFill>
+              </a:rPr>
+              <a:t>조리완료 → 라이더 즉시 반영</a:t>
+            </a:r>
+            <a:endParaRPr lang="en-US" sz="1200" dirty="0"/>
+          </a:p>
+        </p:txBody>
+      </p:sp>
+      <p:sp>
+        <p:nvSpPr>
+          <p:cNvPr id="25" name="Text 23"/>
+          <p:cNvSpPr/>
+          <p:nvPr/>
+        </p:nvSpPr>
+        <p:spPr>
+          <a:xfrm>
+            <a:off x="429768" y="3959352"/>
+            <a:ext cx="3337560" cy="1298448"/>
+          </a:xfrm>
+          <a:prstGeom prst="rect">
+            <a:avLst/>
+          </a:prstGeom>
+          <a:noFill/>
+          <a:ln/>
+        </p:spPr>
+        <p:txBody>
+          <a:bodyPr wrap="square" rtlCol="0" anchor="ctr"/>
+          <a:lstStyle/>
+          <a:p>
+            <a:pPr indent="0" marL="0">
+              <a:buNone/>
+            </a:pPr>
+            <a:r>
+              <a:rPr lang="en-US" sz="1000" dirty="0">
+                <a:solidFill>
+                  <a:srgbClr val="1F1235"/>
+                </a:solidFill>
+              </a:rPr>
+              <a:t>active 탭 5초 폴링 추가</a:t>
+            </a:r>
+            <a:endParaRPr lang="en-US" sz="1000" dirty="0"/>
+          </a:p>
+          <a:p>
+            <a:pPr indent="0" marL="0">
+              <a:buNone/>
+            </a:pPr>
+            <a:r>
+              <a:rPr lang="en-US" sz="1000" dirty="0">
+                <a:solidFill>
+                  <a:srgbClr val="1F1235"/>
+                </a:solidFill>
+              </a:rPr>
+              <a:t>사장님 조리완료 → 최대 5초 내</a:t>
+            </a:r>
+            <a:endParaRPr lang="en-US" sz="1000" dirty="0"/>
+          </a:p>
+          <a:p>
+            <a:pPr indent="0" marL="0">
+              <a:buNone/>
+            </a:pPr>
+            <a:r>
+              <a:rPr lang="en-US" sz="1000" dirty="0">
+                <a:solidFill>
+                  <a:srgbClr val="1F1235"/>
+                </a:solidFill>
+              </a:rPr>
+              <a:t>라이더 화면 픽업 완료 버튼 출현</a:t>
+            </a:r>
+            <a:endParaRPr lang="en-US" sz="1000" dirty="0"/>
+          </a:p>
+          <a:p>
+            <a:pPr indent="0" marL="0">
+              <a:buNone/>
+            </a:pPr>
+            <a:r>
+              <a:rPr lang="en-US" sz="1000" dirty="0">
+                <a:solidFill>
+                  <a:srgbClr val="1F1235"/>
+                </a:solidFill>
+              </a:rPr>
+              <a:t>배달 출발 버튼 라벨 수정</a:t>
+            </a:r>
+            <a:endParaRPr lang="en-US" sz="1000" dirty="0"/>
+          </a:p>
+        </p:txBody>
+      </p:sp>
+      <p:sp>
+        <p:nvSpPr>
+          <p:cNvPr id="26" name="Shape 24"/>
+          <p:cNvSpPr/>
+          <p:nvPr/>
+        </p:nvSpPr>
+        <p:spPr>
+          <a:xfrm>
+            <a:off x="4160520" y="3246120"/>
+            <a:ext cx="3749040" cy="2148840"/>
           </a:xfrm>
           <a:prstGeom prst="roundRect">
             <a:avLst>
-              <a:gd name="adj" fmla="val 19048"/>
+              <a:gd name="adj" fmla="val 6383"/>
             </a:avLst>
           </a:prstGeom>
           <a:solidFill>
-            <a:srgbClr val="0891B2"/>
+            <a:srgbClr val="F0FDF4"/>
           </a:solidFill>
           <a:ln w="12700">
             <a:solidFill>
-              <a:srgbClr val="0891B2"/>
+              <a:srgbClr val="86EFAC"/>
             </a:solidFill>
             <a:prstDash val="solid"/>
           </a:ln>
@@ -9244,278 +9069,26 @@
       </p:sp>
       <p:sp>
         <p:nvSpPr>
-          <p:cNvPr id="39" name="Text 37"/>
-          <p:cNvSpPr/>
-          <p:nvPr/>
-        </p:nvSpPr>
-        <p:spPr>
-          <a:xfrm>
-            <a:off x="4270248" y="3675888"/>
-            <a:ext cx="3529584" cy="384048"/>
-          </a:xfrm>
-          <a:prstGeom prst="rect">
-            <a:avLst/>
-          </a:prstGeom>
-          <a:noFill/>
-          <a:ln/>
-        </p:spPr>
-        <p:txBody>
-          <a:bodyPr wrap="square" rtlCol="0" anchor="ctr"/>
-          <a:lstStyle/>
-          <a:p>
-            <a:pPr algn="ctr" indent="0" marL="0">
-              <a:buNone/>
-            </a:pPr>
-            <a:r>
-              <a:rPr lang="en-US" sz="1200" b="1" dirty="0">
-                <a:solidFill>
-                  <a:srgbClr val="FFFFFF"/>
-                </a:solidFill>
-              </a:rPr>
-              <a:t>🛵 라이더 / PWA / 인프라</a:t>
-            </a:r>
-            <a:endParaRPr lang="en-US" sz="1200" dirty="0"/>
-          </a:p>
-        </p:txBody>
-      </p:sp>
-      <p:sp>
-        <p:nvSpPr>
-          <p:cNvPr id="40" name="Text 38"/>
-          <p:cNvSpPr/>
-          <p:nvPr/>
-        </p:nvSpPr>
-        <p:spPr>
-          <a:xfrm>
-            <a:off x="4325112" y="4160520"/>
-            <a:ext cx="3401568" cy="338328"/>
-          </a:xfrm>
-          <a:prstGeom prst="rect">
-            <a:avLst/>
-          </a:prstGeom>
-          <a:noFill/>
-          <a:ln/>
-        </p:spPr>
-        <p:txBody>
-          <a:bodyPr wrap="square" rtlCol="0" anchor="ctr"/>
-          <a:lstStyle/>
-          <a:p>
-            <a:pPr indent="0" marL="0">
-              <a:buNone/>
-            </a:pPr>
-            <a:r>
-              <a:rPr lang="en-US" sz="1000" dirty="0">
-                <a:solidFill>
-                  <a:srgbClr val="1F1235"/>
-                </a:solidFill>
-              </a:rPr>
-              <a:t>✓  배달 수락 → PICK 자동 지급 + 위치 공유</a:t>
-            </a:r>
-            <a:endParaRPr lang="en-US" sz="1000" dirty="0"/>
-          </a:p>
-        </p:txBody>
-      </p:sp>
-      <p:sp>
-        <p:nvSpPr>
-          <p:cNvPr id="41" name="Text 39"/>
-          <p:cNvSpPr/>
-          <p:nvPr/>
-        </p:nvSpPr>
-        <p:spPr>
-          <a:xfrm>
-            <a:off x="4325112" y="4507992"/>
-            <a:ext cx="3401568" cy="338328"/>
-          </a:xfrm>
-          <a:prstGeom prst="rect">
-            <a:avLst/>
-          </a:prstGeom>
-          <a:noFill/>
-          <a:ln/>
-        </p:spPr>
-        <p:txBody>
-          <a:bodyPr wrap="square" rtlCol="0" anchor="ctr"/>
-          <a:lstStyle/>
-          <a:p>
-            <a:pPr indent="0" marL="0">
-              <a:buNone/>
-            </a:pPr>
-            <a:r>
-              <a:rPr lang="en-US" sz="1000" dirty="0">
-                <a:solidFill>
-                  <a:srgbClr val="1F1235"/>
-                </a:solidFill>
-              </a:rPr>
-              <a:t>✓  라이더 5km 반경 필터링 + 거리순 정렬</a:t>
-            </a:r>
-            <a:endParaRPr lang="en-US" sz="1000" dirty="0"/>
-          </a:p>
-        </p:txBody>
-      </p:sp>
-      <p:sp>
-        <p:nvSpPr>
-          <p:cNvPr id="42" name="Text 40"/>
-          <p:cNvSpPr/>
-          <p:nvPr/>
-        </p:nvSpPr>
-        <p:spPr>
-          <a:xfrm>
-            <a:off x="4325112" y="4855464"/>
-            <a:ext cx="3401568" cy="338328"/>
-          </a:xfrm>
-          <a:prstGeom prst="rect">
-            <a:avLst/>
-          </a:prstGeom>
-          <a:noFill/>
-          <a:ln/>
-        </p:spPr>
-        <p:txBody>
-          <a:bodyPr wrap="square" rtlCol="0" anchor="ctr"/>
-          <a:lstStyle/>
-          <a:p>
-            <a:pPr indent="0" marL="0">
-              <a:buNone/>
-            </a:pPr>
-            <a:r>
-              <a:rPr lang="en-US" sz="1000" dirty="0">
-                <a:solidFill>
-                  <a:srgbClr val="1F1235"/>
-                </a:solidFill>
-              </a:rPr>
-              <a:t>✓  10분 자동오프라인 Cron (매 5분 실행)</a:t>
-            </a:r>
-            <a:endParaRPr lang="en-US" sz="1000" dirty="0"/>
-          </a:p>
-        </p:txBody>
-      </p:sp>
-      <p:sp>
-        <p:nvSpPr>
-          <p:cNvPr id="43" name="Text 41"/>
-          <p:cNvSpPr/>
-          <p:nvPr/>
-        </p:nvSpPr>
-        <p:spPr>
-          <a:xfrm>
-            <a:off x="4325112" y="5202936"/>
-            <a:ext cx="3401568" cy="338328"/>
-          </a:xfrm>
-          <a:prstGeom prst="rect">
-            <a:avLst/>
-          </a:prstGeom>
-          <a:noFill/>
-          <a:ln/>
-        </p:spPr>
-        <p:txBody>
-          <a:bodyPr wrap="square" rtlCol="0" anchor="ctr"/>
-          <a:lstStyle/>
-          <a:p>
-            <a:pPr indent="0" marL="0">
-              <a:buNone/>
-            </a:pPr>
-            <a:r>
-              <a:rPr lang="en-US" sz="1000" dirty="0">
-                <a:solidFill>
-                  <a:srgbClr val="1F1235"/>
-                </a:solidFill>
-              </a:rPr>
-              <a:t>✓  calling_rider 상태 흐름 재설계 + 픽업완료 버튼</a:t>
-            </a:r>
-            <a:endParaRPr lang="en-US" sz="1000" dirty="0"/>
-          </a:p>
-        </p:txBody>
-      </p:sp>
-      <p:sp>
-        <p:nvSpPr>
-          <p:cNvPr id="44" name="Text 42"/>
-          <p:cNvSpPr/>
-          <p:nvPr/>
-        </p:nvSpPr>
-        <p:spPr>
-          <a:xfrm>
-            <a:off x="4325112" y="5550408"/>
-            <a:ext cx="3401568" cy="338328"/>
-          </a:xfrm>
-          <a:prstGeom prst="rect">
-            <a:avLst/>
-          </a:prstGeom>
-          <a:noFill/>
-          <a:ln/>
-        </p:spPr>
-        <p:txBody>
-          <a:bodyPr wrap="square" rtlCol="0" anchor="ctr"/>
-          <a:lstStyle/>
-          <a:p>
-            <a:pPr indent="0" marL="0">
-              <a:buNone/>
-            </a:pPr>
-            <a:r>
-              <a:rPr lang="en-US" sz="1000" dirty="0">
-                <a:solidFill>
-                  <a:srgbClr val="1F1235"/>
-                </a:solidFill>
-              </a:rPr>
-              <a:t>✓  FCM 푸시 알림 + 관리자 일괄 발송</a:t>
-            </a:r>
-            <a:endParaRPr lang="en-US" sz="1000" dirty="0"/>
-          </a:p>
-        </p:txBody>
-      </p:sp>
-      <p:sp>
-        <p:nvSpPr>
-          <p:cNvPr id="45" name="Text 43"/>
-          <p:cNvSpPr/>
-          <p:nvPr/>
-        </p:nvSpPr>
-        <p:spPr>
-          <a:xfrm>
-            <a:off x="4325112" y="5897880"/>
-            <a:ext cx="3401568" cy="338328"/>
-          </a:xfrm>
-          <a:prstGeom prst="rect">
-            <a:avLst/>
-          </a:prstGeom>
-          <a:noFill/>
-          <a:ln/>
-        </p:spPr>
-        <p:txBody>
-          <a:bodyPr wrap="square" rtlCol="0" anchor="ctr"/>
-          <a:lstStyle/>
-          <a:p>
-            <a:pPr indent="0" marL="0">
-              <a:buNone/>
-            </a:pPr>
-            <a:r>
-              <a:rPr lang="en-US" sz="1000" dirty="0">
-                <a:solidFill>
-                  <a:srgbClr val="1F1235"/>
-                </a:solidFill>
-              </a:rPr>
-              <a:t>✓  PWA 오프라인 캐싱 (Serwist) + Sentry 모니터링</a:t>
-            </a:r>
-            <a:endParaRPr lang="en-US" sz="1000" dirty="0"/>
-          </a:p>
-        </p:txBody>
-      </p:sp>
-      <p:sp>
-        <p:nvSpPr>
-          <p:cNvPr id="46" name="Shape 44"/>
-          <p:cNvSpPr/>
-          <p:nvPr/>
-        </p:nvSpPr>
-        <p:spPr>
-          <a:xfrm>
-            <a:off x="8092440" y="3566160"/>
-            <a:ext cx="3749040" cy="2423160"/>
+          <p:cNvPr id="27" name="Shape 25"/>
+          <p:cNvSpPr/>
+          <p:nvPr/>
+        </p:nvSpPr>
+        <p:spPr>
+          <a:xfrm>
+            <a:off x="4325112" y="3429000"/>
+            <a:ext cx="530352" cy="530352"/>
           </a:xfrm>
           <a:prstGeom prst="roundRect">
             <a:avLst>
-              <a:gd name="adj" fmla="val 5660"/>
+              <a:gd name="adj" fmla="val 17241"/>
             </a:avLst>
           </a:prstGeom>
           <a:solidFill>
-            <a:srgbClr val="FFEDD5"/>
+            <a:srgbClr val="FFFFFF"/>
           </a:solidFill>
           <a:ln w="12700">
             <a:solidFill>
-              <a:srgbClr val="EA580C"/>
+              <a:srgbClr val="86EFAC"/>
             </a:solidFill>
             <a:prstDash val="solid"/>
           </a:ln>
@@ -9523,26 +9096,176 @@
       </p:sp>
       <p:sp>
         <p:nvSpPr>
-          <p:cNvPr id="47" name="Shape 45"/>
-          <p:cNvSpPr/>
-          <p:nvPr/>
-        </p:nvSpPr>
-        <p:spPr>
-          <a:xfrm>
-            <a:off x="8202168" y="3675888"/>
-            <a:ext cx="3529584" cy="384048"/>
+          <p:cNvPr id="28" name="Text 26"/>
+          <p:cNvSpPr/>
+          <p:nvPr/>
+        </p:nvSpPr>
+        <p:spPr>
+          <a:xfrm>
+            <a:off x="4325112" y="3410712"/>
+            <a:ext cx="548640" cy="548640"/>
+          </a:xfrm>
+          <a:prstGeom prst="rect">
+            <a:avLst/>
+          </a:prstGeom>
+          <a:noFill/>
+          <a:ln/>
+        </p:spPr>
+        <p:txBody>
+          <a:bodyPr wrap="square" rtlCol="0" anchor="ctr"/>
+          <a:lstStyle/>
+          <a:p>
+            <a:pPr algn="ctr" indent="0" marL="0">
+              <a:buNone/>
+            </a:pPr>
+            <a:r>
+              <a:rPr lang="en-US" sz="1800" dirty="0">
+                <a:solidFill>
+                  <a:srgbClr val="000000"/>
+                </a:solidFill>
+              </a:rPr>
+              <a:t>🔄</a:t>
+            </a:r>
+            <a:endParaRPr lang="en-US" sz="1800" dirty="0"/>
+          </a:p>
+        </p:txBody>
+      </p:sp>
+      <p:sp>
+        <p:nvSpPr>
+          <p:cNvPr id="29" name="Text 27"/>
+          <p:cNvSpPr/>
+          <p:nvPr/>
+        </p:nvSpPr>
+        <p:spPr>
+          <a:xfrm>
+            <a:off x="4965192" y="3447288"/>
+            <a:ext cx="2743200" cy="365760"/>
+          </a:xfrm>
+          <a:prstGeom prst="rect">
+            <a:avLst/>
+          </a:prstGeom>
+          <a:noFill/>
+          <a:ln/>
+        </p:spPr>
+        <p:txBody>
+          <a:bodyPr wrap="square" rtlCol="0" anchor="ctr"/>
+          <a:lstStyle/>
+          <a:p>
+            <a:pPr indent="0" marL="0">
+              <a:buNone/>
+            </a:pPr>
+            <a:r>
+              <a:rPr lang="en-US" sz="1200" b="1" dirty="0">
+                <a:solidFill>
+                  <a:srgbClr val="16A34A"/>
+                </a:solidFill>
+              </a:rPr>
+              <a:t>버튼 라벨 정확화</a:t>
+            </a:r>
+            <a:endParaRPr lang="en-US" sz="1200" dirty="0"/>
+          </a:p>
+        </p:txBody>
+      </p:sp>
+      <p:sp>
+        <p:nvSpPr>
+          <p:cNvPr id="30" name="Text 28"/>
+          <p:cNvSpPr/>
+          <p:nvPr/>
+        </p:nvSpPr>
+        <p:spPr>
+          <a:xfrm>
+            <a:off x="4361688" y="3959352"/>
+            <a:ext cx="3337560" cy="1298448"/>
+          </a:xfrm>
+          <a:prstGeom prst="rect">
+            <a:avLst/>
+          </a:prstGeom>
+          <a:noFill/>
+          <a:ln/>
+        </p:spPr>
+        <p:txBody>
+          <a:bodyPr wrap="square" rtlCol="0" anchor="ctr"/>
+          <a:lstStyle/>
+          <a:p>
+            <a:pPr indent="0" marL="0">
+              <a:buNone/>
+            </a:pPr>
+            <a:r>
+              <a:rPr lang="en-US" sz="1000" dirty="0">
+                <a:solidFill>
+                  <a:srgbClr val="1F1235"/>
+                </a:solidFill>
+              </a:rPr>
+              <a:t>픽업 완료(파랑) ready→picked_up</a:t>
+            </a:r>
+            <a:endParaRPr lang="en-US" sz="1000" dirty="0"/>
+          </a:p>
+          <a:p>
+            <a:pPr indent="0" marL="0">
+              <a:buNone/>
+            </a:pPr>
+            <a:r>
+              <a:rPr lang="en-US" sz="1000" dirty="0">
+                <a:solidFill>
+                  <a:srgbClr val="1F1235"/>
+                </a:solidFill>
+              </a:rPr>
+              <a:t>배달 출발(주황) picked_up→delivering</a:t>
+            </a:r>
+            <a:endParaRPr lang="en-US" sz="1000" dirty="0"/>
+          </a:p>
+          <a:p>
+            <a:pPr indent="0" marL="0">
+              <a:buNone/>
+            </a:pPr>
+            <a:r>
+              <a:rPr lang="en-US" sz="1000" dirty="0">
+                <a:solidFill>
+                  <a:srgbClr val="1F1235"/>
+                </a:solidFill>
+              </a:rPr>
+              <a:t>배달 완료(초록) delivering→delivered</a:t>
+            </a:r>
+            <a:endParaRPr lang="en-US" sz="1000" dirty="0"/>
+          </a:p>
+          <a:p>
+            <a:pPr indent="0" marL="0">
+              <a:buNone/>
+            </a:pPr>
+            <a:r>
+              <a:rPr lang="en-US" sz="1000" dirty="0">
+                <a:solidFill>
+                  <a:srgbClr val="1F1235"/>
+                </a:solidFill>
+              </a:rPr>
+              <a:t>직관적 흐름으로 개선</a:t>
+            </a:r>
+            <a:endParaRPr lang="en-US" sz="1000" dirty="0"/>
+          </a:p>
+        </p:txBody>
+      </p:sp>
+      <p:sp>
+        <p:nvSpPr>
+          <p:cNvPr id="31" name="Shape 29"/>
+          <p:cNvSpPr/>
+          <p:nvPr/>
+        </p:nvSpPr>
+        <p:spPr>
+          <a:xfrm>
+            <a:off x="8092440" y="3246120"/>
+            <a:ext cx="3749040" cy="2148840"/>
           </a:xfrm>
           <a:prstGeom prst="roundRect">
             <a:avLst>
-              <a:gd name="adj" fmla="val 19048"/>
+              <a:gd name="adj" fmla="val 6383"/>
             </a:avLst>
           </a:prstGeom>
           <a:solidFill>
-            <a:srgbClr val="EA580C"/>
+            <a:srgbClr val="F0FDF4"/>
           </a:solidFill>
           <a:ln w="12700">
             <a:solidFill>
-              <a:srgbClr val="EA580C"/>
+              <a:srgbClr val="86EFAC"/>
             </a:solidFill>
             <a:prstDash val="solid"/>
           </a:ln>
@@ -9550,14 +9273,41 @@
       </p:sp>
       <p:sp>
         <p:nvSpPr>
-          <p:cNvPr id="48" name="Text 46"/>
-          <p:cNvSpPr/>
-          <p:nvPr/>
-        </p:nvSpPr>
-        <p:spPr>
-          <a:xfrm>
-            <a:off x="8202168" y="3675888"/>
-            <a:ext cx="3529584" cy="384048"/>
+          <p:cNvPr id="32" name="Shape 30"/>
+          <p:cNvSpPr/>
+          <p:nvPr/>
+        </p:nvSpPr>
+        <p:spPr>
+          <a:xfrm>
+            <a:off x="8257032" y="3429000"/>
+            <a:ext cx="530352" cy="530352"/>
+          </a:xfrm>
+          <a:prstGeom prst="roundRect">
+            <a:avLst>
+              <a:gd name="adj" fmla="val 17241"/>
+            </a:avLst>
+          </a:prstGeom>
+          <a:solidFill>
+            <a:srgbClr val="FFFFFF"/>
+          </a:solidFill>
+          <a:ln w="12700">
+            <a:solidFill>
+              <a:srgbClr val="86EFAC"/>
+            </a:solidFill>
+            <a:prstDash val="solid"/>
+          </a:ln>
+        </p:spPr>
+      </p:sp>
+      <p:sp>
+        <p:nvSpPr>
+          <p:cNvPr id="33" name="Text 31"/>
+          <p:cNvSpPr/>
+          <p:nvPr/>
+        </p:nvSpPr>
+        <p:spPr>
+          <a:xfrm>
+            <a:off x="8257032" y="3410712"/>
+            <a:ext cx="548640" cy="548640"/>
           </a:xfrm>
           <a:prstGeom prst="rect">
             <a:avLst/>
@@ -9573,12 +9323,48 @@
               <a:buNone/>
             </a:pPr>
             <a:r>
+              <a:rPr lang="en-US" sz="1800" dirty="0">
+                <a:solidFill>
+                  <a:srgbClr val="000000"/>
+                </a:solidFill>
+              </a:rPr>
+              <a:t>🌐</a:t>
+            </a:r>
+            <a:endParaRPr lang="en-US" sz="1800" dirty="0"/>
+          </a:p>
+        </p:txBody>
+      </p:sp>
+      <p:sp>
+        <p:nvSpPr>
+          <p:cNvPr id="34" name="Text 32"/>
+          <p:cNvSpPr/>
+          <p:nvPr/>
+        </p:nvSpPr>
+        <p:spPr>
+          <a:xfrm>
+            <a:off x="8897112" y="3447288"/>
+            <a:ext cx="2743200" cy="365760"/>
+          </a:xfrm>
+          <a:prstGeom prst="rect">
+            <a:avLst/>
+          </a:prstGeom>
+          <a:noFill/>
+          <a:ln/>
+        </p:spPr>
+        <p:txBody>
+          <a:bodyPr wrap="square" rtlCol="0" anchor="ctr"/>
+          <a:lstStyle/>
+          <a:p>
+            <a:pPr indent="0" marL="0">
+              <a:buNone/>
+            </a:pPr>
+            <a:r>
               <a:rPr lang="en-US" sz="1200" b="1" dirty="0">
                 <a:solidFill>
-                  <a:srgbClr val="FFFFFF"/>
-                </a:solidFill>
-              </a:rPr>
-              <a:t>🛡️ DB / 보안 / 관리자</a:t>
+                  <a:srgbClr val="16A34A"/>
+                </a:solidFill>
+              </a:rPr>
+              <a:t>Pi Network 연동 마스터 플랜</a:t>
             </a:r>
             <a:endParaRPr lang="en-US" sz="1200" dirty="0"/>
           </a:p>
@@ -9586,14 +9372,14 @@
       </p:sp>
       <p:sp>
         <p:nvSpPr>
-          <p:cNvPr id="49" name="Text 47"/>
-          <p:cNvSpPr/>
-          <p:nvPr/>
-        </p:nvSpPr>
-        <p:spPr>
-          <a:xfrm>
-            <a:off x="8257032" y="4160520"/>
-            <a:ext cx="3401568" cy="338328"/>
+          <p:cNvPr id="35" name="Text 33"/>
+          <p:cNvSpPr/>
+          <p:nvPr/>
+        </p:nvSpPr>
+        <p:spPr>
+          <a:xfrm>
+            <a:off x="8293608" y="3959352"/>
+            <a:ext cx="3337560" cy="1298448"/>
           </a:xfrm>
           <a:prstGeom prst="rect">
             <a:avLst/>
@@ -9614,32 +9400,10 @@
                   <a:srgbClr val="1F1235"/>
                 </a:solidFill>
               </a:rPr>
-              <a:t>✓  DB 인덱스 30개+ (GIN 전문검색 포함)</a:t>
+              <a:t>Open Network 현황 조사 완료</a:t>
             </a:r>
             <a:endParaRPr lang="en-US" sz="1000" dirty="0"/>
           </a:p>
-        </p:txBody>
-      </p:sp>
-      <p:sp>
-        <p:nvSpPr>
-          <p:cNvPr id="50" name="Text 48"/>
-          <p:cNvSpPr/>
-          <p:nvPr/>
-        </p:nvSpPr>
-        <p:spPr>
-          <a:xfrm>
-            <a:off x="8257032" y="4507992"/>
-            <a:ext cx="3401568" cy="338328"/>
-          </a:xfrm>
-          <a:prstGeom prst="rect">
-            <a:avLst/>
-          </a:prstGeom>
-          <a:noFill/>
-          <a:ln/>
-        </p:spPr>
-        <p:txBody>
-          <a:bodyPr wrap="square" rtlCol="0" anchor="ctr"/>
-          <a:lstStyle/>
           <a:p>
             <a:pPr indent="0" marL="0">
               <a:buNone/>
@@ -9650,32 +9414,10 @@
                   <a:srgbClr val="1F1235"/>
                 </a:solidFill>
               </a:rPr>
-              <a:t>✓  운영 RLS 정책 + Storage 버킷 정책</a:t>
+              <a:t>Vercel 유지 + Pi SDK 추가 구조 확정</a:t>
             </a:r>
             <a:endParaRPr lang="en-US" sz="1000" dirty="0"/>
           </a:p>
-        </p:txBody>
-      </p:sp>
-      <p:sp>
-        <p:nvSpPr>
-          <p:cNvPr id="51" name="Text 49"/>
-          <p:cNvSpPr/>
-          <p:nvPr/>
-        </p:nvSpPr>
-        <p:spPr>
-          <a:xfrm>
-            <a:off x="8257032" y="4855464"/>
-            <a:ext cx="3401568" cy="338328"/>
-          </a:xfrm>
-          <a:prstGeom prst="rect">
-            <a:avLst/>
-          </a:prstGeom>
-          <a:noFill/>
-          <a:ln/>
-        </p:spPr>
-        <p:txBody>
-          <a:bodyPr wrap="square" rtlCol="0" anchor="ctr"/>
-          <a:lstStyle/>
           <a:p>
             <a:pPr indent="0" marL="0">
               <a:buNone/>
@@ -9686,32 +9428,10 @@
                   <a:srgbClr val="1F1235"/>
                 </a:solidFill>
               </a:rPr>
-              <a:t>✓  RLS 라이더 미배정 주문 조회 정책 추가</a:t>
+              <a:t>5단계 로드맵 수립</a:t>
             </a:r>
             <a:endParaRPr lang="en-US" sz="1000" dirty="0"/>
           </a:p>
-        </p:txBody>
-      </p:sp>
-      <p:sp>
-        <p:nvSpPr>
-          <p:cNvPr id="52" name="Text 50"/>
-          <p:cNvSpPr/>
-          <p:nvPr/>
-        </p:nvSpPr>
-        <p:spPr>
-          <a:xfrm>
-            <a:off x="8257032" y="5202936"/>
-            <a:ext cx="3401568" cy="338328"/>
-          </a:xfrm>
-          <a:prstGeom prst="rect">
-            <a:avLst/>
-          </a:prstGeom>
-          <a:noFill/>
-          <a:ln/>
-        </p:spPr>
-        <p:txBody>
-          <a:bodyPr wrap="square" rtlCol="0" anchor="ctr"/>
-          <a:lstStyle/>
           <a:p>
             <a:pPr indent="0" marL="0">
               <a:buNone/>
@@ -9722,79 +9442,7 @@
                   <a:srgbClr val="1F1235"/>
                 </a:solidFill>
               </a:rPr>
-              <a:t>✓  관리자 5탭: 통계·회원·가게·쿠폰·FCM 푸시</a:t>
-            </a:r>
-            <a:endParaRPr lang="en-US" sz="1000" dirty="0"/>
-          </a:p>
-        </p:txBody>
-      </p:sp>
-      <p:sp>
-        <p:nvSpPr>
-          <p:cNvPr id="53" name="Text 51"/>
-          <p:cNvSpPr/>
-          <p:nvPr/>
-        </p:nvSpPr>
-        <p:spPr>
-          <a:xfrm>
-            <a:off x="8257032" y="5550408"/>
-            <a:ext cx="3401568" cy="338328"/>
-          </a:xfrm>
-          <a:prstGeom prst="rect">
-            <a:avLst/>
-          </a:prstGeom>
-          <a:noFill/>
-          <a:ln/>
-        </p:spPr>
-        <p:txBody>
-          <a:bodyPr wrap="square" rtlCol="0" anchor="ctr"/>
-          <a:lstStyle/>
-          <a:p>
-            <a:pPr indent="0" marL="0">
-              <a:buNone/>
-            </a:pPr>
-            <a:r>
-              <a:rPr lang="en-US" sz="1000" dirty="0">
-                <a:solidFill>
-                  <a:srgbClr val="1F1235"/>
-                </a:solidFill>
-              </a:rPr>
-              <a:t>✓  404·에러·로딩·스플래시 페이지</a:t>
-            </a:r>
-            <a:endParaRPr lang="en-US" sz="1000" dirty="0"/>
-          </a:p>
-        </p:txBody>
-      </p:sp>
-      <p:sp>
-        <p:nvSpPr>
-          <p:cNvPr id="54" name="Text 52"/>
-          <p:cNvSpPr/>
-          <p:nvPr/>
-        </p:nvSpPr>
-        <p:spPr>
-          <a:xfrm>
-            <a:off x="8257032" y="5897880"/>
-            <a:ext cx="3401568" cy="338328"/>
-          </a:xfrm>
-          <a:prstGeom prst="rect">
-            <a:avLst/>
-          </a:prstGeom>
-          <a:noFill/>
-          <a:ln/>
-        </p:spPr>
-        <p:txBody>
-          <a:bodyPr wrap="square" rtlCol="0" anchor="ctr"/>
-          <a:lstStyle/>
-          <a:p>
-            <a:pPr indent="0" marL="0">
-              <a:buNone/>
-            </a:pPr>
-            <a:r>
-              <a:rPr lang="en-US" sz="1000" dirty="0">
-                <a:solidFill>
-                  <a:srgbClr val="1F1235"/>
-                </a:solidFill>
-              </a:rPr>
-              <a:t>✓  다크모드 + Tailwind dark: 클래스 전면 적용</a:t>
+              <a:t>feature/pi-integration 브랜치 전략</a:t>
             </a:r>
             <a:endParaRPr lang="en-US" sz="1000" dirty="0"/>
           </a:p>
@@ -9857,14 +9505,14 @@
               <a:buNone/>
             </a:pPr>
             <a:r>
-              <a:rPr lang="en-US" sz="2600" b="1" dirty="0">
+              <a:rPr lang="en-US" sz="2400" b="1" dirty="0">
                 <a:solidFill>
                   <a:srgbClr val="4C1D95"/>
                 </a:solidFill>
               </a:rPr>
-              <a:t>🚀  Phase 1~3 완성 · 다음 단계 로드맵</a:t>
-            </a:r>
-            <a:endParaRPr lang="en-US" sz="2600" dirty="0"/>
+              <a:t>✅  완료된 기능 전체 목록 (4/20 최신)</a:t>
+            </a:r>
+            <a:endParaRPr lang="en-US" sz="2400" dirty="0"/>
           </a:p>
         </p:txBody>
       </p:sp>
@@ -9877,7 +9525,7 @@
         <p:spPr>
           <a:xfrm>
             <a:off x="365760" y="804672"/>
-            <a:ext cx="3657600" cy="45720"/>
+            <a:ext cx="3840480" cy="45720"/>
           </a:xfrm>
           <a:prstGeom prst="rect">
             <a:avLst/>
@@ -9901,12 +9549,552 @@
         </p:nvSpPr>
         <p:spPr>
           <a:xfrm>
-            <a:off x="365760" y="914400"/>
-            <a:ext cx="12070080" cy="548640"/>
+            <a:off x="228600" y="960120"/>
+            <a:ext cx="3749040" cy="2423160"/>
           </a:xfrm>
           <a:prstGeom prst="roundRect">
             <a:avLst>
-              <a:gd name="adj" fmla="val 20000"/>
+              <a:gd name="adj" fmla="val 5660"/>
+            </a:avLst>
+          </a:prstGeom>
+          <a:solidFill>
+            <a:srgbClr val="EDE9FE"/>
+          </a:solidFill>
+          <a:ln w="12700">
+            <a:solidFill>
+              <a:srgbClr val="6B21A8"/>
+            </a:solidFill>
+            <a:prstDash val="solid"/>
+          </a:ln>
+        </p:spPr>
+      </p:sp>
+      <p:sp>
+        <p:nvSpPr>
+          <p:cNvPr id="5" name="Shape 3"/>
+          <p:cNvSpPr/>
+          <p:nvPr/>
+        </p:nvSpPr>
+        <p:spPr>
+          <a:xfrm>
+            <a:off x="338328" y="1069848"/>
+            <a:ext cx="3529584" cy="384048"/>
+          </a:xfrm>
+          <a:prstGeom prst="roundRect">
+            <a:avLst>
+              <a:gd name="adj" fmla="val 19048"/>
+            </a:avLst>
+          </a:prstGeom>
+          <a:solidFill>
+            <a:srgbClr val="6B21A8"/>
+          </a:solidFill>
+          <a:ln w="12700">
+            <a:solidFill>
+              <a:srgbClr val="6B21A8"/>
+            </a:solidFill>
+            <a:prstDash val="solid"/>
+          </a:ln>
+        </p:spPr>
+      </p:sp>
+      <p:sp>
+        <p:nvSpPr>
+          <p:cNvPr id="6" name="Text 4"/>
+          <p:cNvSpPr/>
+          <p:nvPr/>
+        </p:nvSpPr>
+        <p:spPr>
+          <a:xfrm>
+            <a:off x="338328" y="1069848"/>
+            <a:ext cx="3529584" cy="384048"/>
+          </a:xfrm>
+          <a:prstGeom prst="rect">
+            <a:avLst/>
+          </a:prstGeom>
+          <a:noFill/>
+          <a:ln/>
+        </p:spPr>
+        <p:txBody>
+          <a:bodyPr wrap="square" rtlCol="0" anchor="ctr"/>
+          <a:lstStyle/>
+          <a:p>
+            <a:pPr algn="ctr" indent="0" marL="0">
+              <a:buNone/>
+            </a:pPr>
+            <a:r>
+              <a:rPr lang="en-US" sz="1200" b="1" dirty="0">
+                <a:solidFill>
+                  <a:srgbClr val="FFFFFF"/>
+                </a:solidFill>
+              </a:rPr>
+              <a:t>🔐 인증 / 사용자 관리</a:t>
+            </a:r>
+            <a:endParaRPr lang="en-US" sz="1200" dirty="0"/>
+          </a:p>
+        </p:txBody>
+      </p:sp>
+      <p:sp>
+        <p:nvSpPr>
+          <p:cNvPr id="7" name="Text 5"/>
+          <p:cNvSpPr/>
+          <p:nvPr/>
+        </p:nvSpPr>
+        <p:spPr>
+          <a:xfrm>
+            <a:off x="393192" y="1554480"/>
+            <a:ext cx="3401568" cy="338328"/>
+          </a:xfrm>
+          <a:prstGeom prst="rect">
+            <a:avLst/>
+          </a:prstGeom>
+          <a:noFill/>
+          <a:ln/>
+        </p:spPr>
+        <p:txBody>
+          <a:bodyPr wrap="square" rtlCol="0" anchor="ctr"/>
+          <a:lstStyle/>
+          <a:p>
+            <a:pPr indent="0" marL="0">
+              <a:buNone/>
+            </a:pPr>
+            <a:r>
+              <a:rPr lang="en-US" sz="1000" dirty="0">
+                <a:solidFill>
+                  <a:srgbClr val="1F1235"/>
+                </a:solidFill>
+              </a:rPr>
+              <a:t>✓  이메일 로그인/회원가입 + 지갑 자동생성</a:t>
+            </a:r>
+            <a:endParaRPr lang="en-US" sz="1000" dirty="0"/>
+          </a:p>
+        </p:txBody>
+      </p:sp>
+      <p:sp>
+        <p:nvSpPr>
+          <p:cNvPr id="8" name="Text 6"/>
+          <p:cNvSpPr/>
+          <p:nvPr/>
+        </p:nvSpPr>
+        <p:spPr>
+          <a:xfrm>
+            <a:off x="393192" y="1901952"/>
+            <a:ext cx="3401568" cy="338328"/>
+          </a:xfrm>
+          <a:prstGeom prst="rect">
+            <a:avLst/>
+          </a:prstGeom>
+          <a:noFill/>
+          <a:ln/>
+        </p:spPr>
+        <p:txBody>
+          <a:bodyPr wrap="square" rtlCol="0" anchor="ctr"/>
+          <a:lstStyle/>
+          <a:p>
+            <a:pPr indent="0" marL="0">
+              <a:buNone/>
+            </a:pPr>
+            <a:r>
+              <a:rPr lang="en-US" sz="1000" dirty="0">
+                <a:solidFill>
+                  <a:srgbClr val="1F1235"/>
+                </a:solidFill>
+              </a:rPr>
+              <a:t>✓  카카오 소셜 로그인 (비즈니스 인증 후 재추가)</a:t>
+            </a:r>
+            <a:endParaRPr lang="en-US" sz="1000" dirty="0"/>
+          </a:p>
+        </p:txBody>
+      </p:sp>
+      <p:sp>
+        <p:nvSpPr>
+          <p:cNvPr id="9" name="Text 7"/>
+          <p:cNvSpPr/>
+          <p:nvPr/>
+        </p:nvSpPr>
+        <p:spPr>
+          <a:xfrm>
+            <a:off x="393192" y="2249424"/>
+            <a:ext cx="3401568" cy="338328"/>
+          </a:xfrm>
+          <a:prstGeom prst="rect">
+            <a:avLst/>
+          </a:prstGeom>
+          <a:noFill/>
+          <a:ln/>
+        </p:spPr>
+        <p:txBody>
+          <a:bodyPr wrap="square" rtlCol="0" anchor="ctr"/>
+          <a:lstStyle/>
+          <a:p>
+            <a:pPr indent="0" marL="0">
+              <a:buNone/>
+            </a:pPr>
+            <a:r>
+              <a:rPr lang="en-US" sz="1000" dirty="0">
+                <a:solidFill>
+                  <a:srgbClr val="1F1235"/>
+                </a:solidFill>
+              </a:rPr>
+              <a:t>✓  RBAC 미들웨어 (user/owner/rider/admin)</a:t>
+            </a:r>
+            <a:endParaRPr lang="en-US" sz="1000" dirty="0"/>
+          </a:p>
+        </p:txBody>
+      </p:sp>
+      <p:sp>
+        <p:nvSpPr>
+          <p:cNvPr id="10" name="Text 8"/>
+          <p:cNvSpPr/>
+          <p:nvPr/>
+        </p:nvSpPr>
+        <p:spPr>
+          <a:xfrm>
+            <a:off x="393192" y="2596896"/>
+            <a:ext cx="3401568" cy="338328"/>
+          </a:xfrm>
+          <a:prstGeom prst="rect">
+            <a:avLst/>
+          </a:prstGeom>
+          <a:noFill/>
+          <a:ln/>
+        </p:spPr>
+        <p:txBody>
+          <a:bodyPr wrap="square" rtlCol="0" anchor="ctr"/>
+          <a:lstStyle/>
+          <a:p>
+            <a:pPr indent="0" marL="0">
+              <a:buNone/>
+            </a:pPr>
+            <a:r>
+              <a:rPr lang="en-US" sz="1000" dirty="0">
+                <a:solidFill>
+                  <a:srgbClr val="1F1235"/>
+                </a:solidFill>
+              </a:rPr>
+              <a:t>✓  비밀번호 찾기·재설정 + 검색 히스토리</a:t>
+            </a:r>
+            <a:endParaRPr lang="en-US" sz="1000" dirty="0"/>
+          </a:p>
+        </p:txBody>
+      </p:sp>
+      <p:sp>
+        <p:nvSpPr>
+          <p:cNvPr id="11" name="Text 9"/>
+          <p:cNvSpPr/>
+          <p:nvPr/>
+        </p:nvSpPr>
+        <p:spPr>
+          <a:xfrm>
+            <a:off x="393192" y="2944368"/>
+            <a:ext cx="3401568" cy="338328"/>
+          </a:xfrm>
+          <a:prstGeom prst="rect">
+            <a:avLst/>
+          </a:prstGeom>
+          <a:noFill/>
+          <a:ln/>
+        </p:spPr>
+        <p:txBody>
+          <a:bodyPr wrap="square" rtlCol="0" anchor="ctr"/>
+          <a:lstStyle/>
+          <a:p>
+            <a:pPr indent="0" marL="0">
+              <a:buNone/>
+            </a:pPr>
+            <a:r>
+              <a:rPr lang="en-US" sz="1000" dirty="0">
+                <a:solidFill>
+                  <a:srgbClr val="1F1235"/>
+                </a:solidFill>
+              </a:rPr>
+              <a:t>✓  프로필 수정 + 다중 배달 주소 + 레퍼럴 재설계</a:t>
+            </a:r>
+            <a:endParaRPr lang="en-US" sz="1000" dirty="0"/>
+          </a:p>
+        </p:txBody>
+      </p:sp>
+      <p:sp>
+        <p:nvSpPr>
+          <p:cNvPr id="12" name="Shape 10"/>
+          <p:cNvSpPr/>
+          <p:nvPr/>
+        </p:nvSpPr>
+        <p:spPr>
+          <a:xfrm>
+            <a:off x="4160520" y="960120"/>
+            <a:ext cx="3749040" cy="2423160"/>
+          </a:xfrm>
+          <a:prstGeom prst="roundRect">
+            <a:avLst>
+              <a:gd name="adj" fmla="val 5660"/>
+            </a:avLst>
+          </a:prstGeom>
+          <a:solidFill>
+            <a:srgbClr val="E0F2FE"/>
+          </a:solidFill>
+          <a:ln w="12700">
+            <a:solidFill>
+              <a:srgbClr val="0369A1"/>
+            </a:solidFill>
+            <a:prstDash val="solid"/>
+          </a:ln>
+        </p:spPr>
+      </p:sp>
+      <p:sp>
+        <p:nvSpPr>
+          <p:cNvPr id="13" name="Shape 11"/>
+          <p:cNvSpPr/>
+          <p:nvPr/>
+        </p:nvSpPr>
+        <p:spPr>
+          <a:xfrm>
+            <a:off x="4270248" y="1069848"/>
+            <a:ext cx="3529584" cy="384048"/>
+          </a:xfrm>
+          <a:prstGeom prst="roundRect">
+            <a:avLst>
+              <a:gd name="adj" fmla="val 19048"/>
+            </a:avLst>
+          </a:prstGeom>
+          <a:solidFill>
+            <a:srgbClr val="0369A1"/>
+          </a:solidFill>
+          <a:ln w="12700">
+            <a:solidFill>
+              <a:srgbClr val="0369A1"/>
+            </a:solidFill>
+            <a:prstDash val="solid"/>
+          </a:ln>
+        </p:spPr>
+      </p:sp>
+      <p:sp>
+        <p:nvSpPr>
+          <p:cNvPr id="14" name="Text 12"/>
+          <p:cNvSpPr/>
+          <p:nvPr/>
+        </p:nvSpPr>
+        <p:spPr>
+          <a:xfrm>
+            <a:off x="4270248" y="1069848"/>
+            <a:ext cx="3529584" cy="384048"/>
+          </a:xfrm>
+          <a:prstGeom prst="rect">
+            <a:avLst/>
+          </a:prstGeom>
+          <a:noFill/>
+          <a:ln/>
+        </p:spPr>
+        <p:txBody>
+          <a:bodyPr wrap="square" rtlCol="0" anchor="ctr"/>
+          <a:lstStyle/>
+          <a:p>
+            <a:pPr algn="ctr" indent="0" marL="0">
+              <a:buNone/>
+            </a:pPr>
+            <a:r>
+              <a:rPr lang="en-US" sz="1200" b="1" dirty="0">
+                <a:solidFill>
+                  <a:srgbClr val="FFFFFF"/>
+                </a:solidFill>
+              </a:rPr>
+              <a:t>🏠 사용자 탭 (4개) + UX</a:t>
+            </a:r>
+            <a:endParaRPr lang="en-US" sz="1200" dirty="0"/>
+          </a:p>
+        </p:txBody>
+      </p:sp>
+      <p:sp>
+        <p:nvSpPr>
+          <p:cNvPr id="15" name="Text 13"/>
+          <p:cNvSpPr/>
+          <p:nvPr/>
+        </p:nvSpPr>
+        <p:spPr>
+          <a:xfrm>
+            <a:off x="4325112" y="1554480"/>
+            <a:ext cx="3401568" cy="338328"/>
+          </a:xfrm>
+          <a:prstGeom prst="rect">
+            <a:avLst/>
+          </a:prstGeom>
+          <a:noFill/>
+          <a:ln/>
+        </p:spPr>
+        <p:txBody>
+          <a:bodyPr wrap="square" rtlCol="0" anchor="ctr"/>
+          <a:lstStyle/>
+          <a:p>
+            <a:pPr indent="0" marL="0">
+              <a:buNone/>
+            </a:pPr>
+            <a:r>
+              <a:rPr lang="en-US" sz="1000" dirty="0">
+                <a:solidFill>
+                  <a:srgbClr val="1F1235"/>
+                </a:solidFill>
+              </a:rPr>
+              <a:t>✓  홈: 카테고리·검색(GIN)·인기가게·광고</a:t>
+            </a:r>
+            <a:endParaRPr lang="en-US" sz="1000" dirty="0"/>
+          </a:p>
+        </p:txBody>
+      </p:sp>
+      <p:sp>
+        <p:nvSpPr>
+          <p:cNvPr id="16" name="Text 14"/>
+          <p:cNvSpPr/>
+          <p:nvPr/>
+        </p:nvSpPr>
+        <p:spPr>
+          <a:xfrm>
+            <a:off x="4325112" y="1901952"/>
+            <a:ext cx="3401568" cy="338328"/>
+          </a:xfrm>
+          <a:prstGeom prst="rect">
+            <a:avLst/>
+          </a:prstGeom>
+          <a:noFill/>
+          <a:ln/>
+        </p:spPr>
+        <p:txBody>
+          <a:bodyPr wrap="square" rtlCol="0" anchor="ctr"/>
+          <a:lstStyle/>
+          <a:p>
+            <a:pPr indent="0" marL="0">
+              <a:buNone/>
+            </a:pPr>
+            <a:r>
+              <a:rPr lang="en-US" sz="1000" dirty="0">
+                <a:solidFill>
+                  <a:srgbClr val="1F1235"/>
+                </a:solidFill>
+              </a:rPr>
+              <a:t>✓  지갑: 퍼플 재디자인 + Pi UI + 출석 Tap-to-Earn</a:t>
+            </a:r>
+            <a:endParaRPr lang="en-US" sz="1000" dirty="0"/>
+          </a:p>
+        </p:txBody>
+      </p:sp>
+      <p:sp>
+        <p:nvSpPr>
+          <p:cNvPr id="17" name="Text 15"/>
+          <p:cNvSpPr/>
+          <p:nvPr/>
+        </p:nvSpPr>
+        <p:spPr>
+          <a:xfrm>
+            <a:off x="4325112" y="2249424"/>
+            <a:ext cx="3401568" cy="338328"/>
+          </a:xfrm>
+          <a:prstGeom prst="rect">
+            <a:avLst/>
+          </a:prstGeom>
+          <a:noFill/>
+          <a:ln/>
+        </p:spPr>
+        <p:txBody>
+          <a:bodyPr wrap="square" rtlCol="0" anchor="ctr"/>
+          <a:lstStyle/>
+          <a:p>
+            <a:pPr indent="0" marL="0">
+              <a:buNone/>
+            </a:pPr>
+            <a:r>
+              <a:rPr lang="en-US" sz="1000" dirty="0">
+                <a:solidFill>
+                  <a:srgbClr val="1F1235"/>
+                </a:solidFill>
+              </a:rPr>
+              <a:t>✓  PICK주문: Realtime 추적 + 상세 + 재주문</a:t>
+            </a:r>
+            <a:endParaRPr lang="en-US" sz="1000" dirty="0"/>
+          </a:p>
+        </p:txBody>
+      </p:sp>
+      <p:sp>
+        <p:nvSpPr>
+          <p:cNvPr id="18" name="Text 16"/>
+          <p:cNvSpPr/>
+          <p:nvPr/>
+        </p:nvSpPr>
+        <p:spPr>
+          <a:xfrm>
+            <a:off x="4325112" y="2596896"/>
+            <a:ext cx="3401568" cy="338328"/>
+          </a:xfrm>
+          <a:prstGeom prst="rect">
+            <a:avLst/>
+          </a:prstGeom>
+          <a:noFill/>
+          <a:ln/>
+        </p:spPr>
+        <p:txBody>
+          <a:bodyPr wrap="square" rtlCol="0" anchor="ctr"/>
+          <a:lstStyle/>
+          <a:p>
+            <a:pPr indent="0" marL="0">
+              <a:buNone/>
+            </a:pPr>
+            <a:r>
+              <a:rPr lang="en-US" sz="1000" dirty="0">
+                <a:solidFill>
+                  <a:srgbClr val="1F1235"/>
+                </a:solidFill>
+              </a:rPr>
+              <a:t>✓  알림 드로어 + 딥링크 + 자동 트리거</a:t>
+            </a:r>
+            <a:endParaRPr lang="en-US" sz="1000" dirty="0"/>
+          </a:p>
+        </p:txBody>
+      </p:sp>
+      <p:sp>
+        <p:nvSpPr>
+          <p:cNvPr id="19" name="Text 17"/>
+          <p:cNvSpPr/>
+          <p:nvPr/>
+        </p:nvSpPr>
+        <p:spPr>
+          <a:xfrm>
+            <a:off x="4325112" y="2944368"/>
+            <a:ext cx="3401568" cy="338328"/>
+          </a:xfrm>
+          <a:prstGeom prst="rect">
+            <a:avLst/>
+          </a:prstGeom>
+          <a:noFill/>
+          <a:ln/>
+        </p:spPr>
+        <p:txBody>
+          <a:bodyPr wrap="square" rtlCol="0" anchor="ctr"/>
+          <a:lstStyle/>
+          <a:p>
+            <a:pPr indent="0" marL="0">
+              <a:buNone/>
+            </a:pPr>
+            <a:r>
+              <a:rPr lang="en-US" sz="1000" dirty="0">
+                <a:solidFill>
+                  <a:srgbClr val="1F1235"/>
+                </a:solidFill>
+              </a:rPr>
+              <a:t>✓  MyPICK 초대 3버튼 (사용자·사장님·라이더)</a:t>
+            </a:r>
+            <a:endParaRPr lang="en-US" sz="1000" dirty="0"/>
+          </a:p>
+        </p:txBody>
+      </p:sp>
+      <p:sp>
+        <p:nvSpPr>
+          <p:cNvPr id="20" name="Shape 18"/>
+          <p:cNvSpPr/>
+          <p:nvPr/>
+        </p:nvSpPr>
+        <p:spPr>
+          <a:xfrm>
+            <a:off x="8092440" y="960120"/>
+            <a:ext cx="3749040" cy="2423160"/>
+          </a:xfrm>
+          <a:prstGeom prst="roundRect">
+            <a:avLst>
+              <a:gd name="adj" fmla="val 5660"/>
             </a:avLst>
           </a:prstGeom>
           <a:solidFill>
@@ -9922,58 +10110,22 @@
       </p:sp>
       <p:sp>
         <p:nvSpPr>
-          <p:cNvPr id="5" name="Text 3"/>
-          <p:cNvSpPr/>
-          <p:nvPr/>
-        </p:nvSpPr>
-        <p:spPr>
-          <a:xfrm>
-            <a:off x="365760" y="914400"/>
-            <a:ext cx="12070080" cy="548640"/>
-          </a:xfrm>
-          <a:prstGeom prst="rect">
-            <a:avLst/>
-          </a:prstGeom>
-          <a:noFill/>
-          <a:ln/>
-        </p:spPr>
-        <p:txBody>
-          <a:bodyPr wrap="square" rtlCol="0" anchor="ctr"/>
-          <a:lstStyle/>
-          <a:p>
-            <a:pPr algn="ctr" indent="0" marL="0">
-              <a:buNone/>
-            </a:pPr>
-            <a:r>
-              <a:rPr lang="en-US" sz="1400" b="1" dirty="0">
-                <a:solidFill>
-                  <a:srgbClr val="16A34A"/>
-                </a:solidFill>
-              </a:rPr>
-              <a:t>🎉  Phase 1~3 완성! 65개+ 기능 구현 · 미착수 기능 0개 · Pi Network 연동만 남음</a:t>
-            </a:r>
-            <a:endParaRPr lang="en-US" sz="1400" dirty="0"/>
-          </a:p>
-        </p:txBody>
-      </p:sp>
-      <p:sp>
-        <p:nvSpPr>
-          <p:cNvPr id="6" name="Shape 4"/>
-          <p:cNvSpPr/>
-          <p:nvPr/>
-        </p:nvSpPr>
-        <p:spPr>
-          <a:xfrm>
-            <a:off x="365760" y="1600200"/>
-            <a:ext cx="1325880" cy="384048"/>
+          <p:cNvPr id="21" name="Shape 19"/>
+          <p:cNvSpPr/>
+          <p:nvPr/>
+        </p:nvSpPr>
+        <p:spPr>
+          <a:xfrm>
+            <a:off x="8202168" y="1069848"/>
+            <a:ext cx="3529584" cy="384048"/>
           </a:xfrm>
           <a:prstGeom prst="roundRect">
             <a:avLst>
-              <a:gd name="adj" fmla="val 23810"/>
+              <a:gd name="adj" fmla="val 19048"/>
             </a:avLst>
           </a:prstGeom>
           <a:solidFill>
-            <a:srgbClr val="DCFCE7"/>
+            <a:srgbClr val="16A34A"/>
           </a:solidFill>
           <a:ln w="12700">
             <a:solidFill>
@@ -9985,14 +10137,14 @@
       </p:sp>
       <p:sp>
         <p:nvSpPr>
-          <p:cNvPr id="7" name="Text 5"/>
-          <p:cNvSpPr/>
-          <p:nvPr/>
-        </p:nvSpPr>
-        <p:spPr>
-          <a:xfrm>
-            <a:off x="365760" y="1600200"/>
-            <a:ext cx="1325880" cy="384048"/>
+          <p:cNvPr id="22" name="Text 20"/>
+          <p:cNvSpPr/>
+          <p:nvPr/>
+        </p:nvSpPr>
+        <p:spPr>
+          <a:xfrm>
+            <a:off x="8202168" y="1069848"/>
+            <a:ext cx="3529584" cy="384048"/>
           </a:xfrm>
           <a:prstGeom prst="rect">
             <a:avLst/>
@@ -10008,493 +10160,211 @@
               <a:buNone/>
             </a:pPr>
             <a:r>
-              <a:rPr lang="en-US" sz="1100" b="1" dirty="0">
-                <a:solidFill>
-                  <a:srgbClr val="16A34A"/>
-                </a:solidFill>
-              </a:rPr>
-              <a:t>✅ Phase 1~3</a:t>
-            </a:r>
-            <a:endParaRPr lang="en-US" sz="1100" dirty="0"/>
-          </a:p>
-        </p:txBody>
-      </p:sp>
-      <p:sp>
-        <p:nvSpPr>
-          <p:cNvPr id="8" name="Shape 6"/>
-          <p:cNvSpPr/>
-          <p:nvPr/>
-        </p:nvSpPr>
-        <p:spPr>
-          <a:xfrm>
-            <a:off x="228600" y="2057400"/>
-            <a:ext cx="3749040" cy="1280160"/>
+              <a:rPr lang="en-US" sz="1200" b="1" dirty="0">
+                <a:solidFill>
+                  <a:srgbClr val="FFFFFF"/>
+                </a:solidFill>
+              </a:rPr>
+              <a:t>🛒 가맹점 / 주문 플로우</a:t>
+            </a:r>
+            <a:endParaRPr lang="en-US" sz="1200" dirty="0"/>
+          </a:p>
+        </p:txBody>
+      </p:sp>
+      <p:sp>
+        <p:nvSpPr>
+          <p:cNvPr id="23" name="Text 21"/>
+          <p:cNvSpPr/>
+          <p:nvPr/>
+        </p:nvSpPr>
+        <p:spPr>
+          <a:xfrm>
+            <a:off x="8257032" y="1554480"/>
+            <a:ext cx="3401568" cy="338328"/>
+          </a:xfrm>
+          <a:prstGeom prst="rect">
+            <a:avLst/>
+          </a:prstGeom>
+          <a:noFill/>
+          <a:ln/>
+        </p:spPr>
+        <p:txBody>
+          <a:bodyPr wrap="square" rtlCol="0" anchor="ctr"/>
+          <a:lstStyle/>
+          <a:p>
+            <a:pPr indent="0" marL="0">
+              <a:buNone/>
+            </a:pPr>
+            <a:r>
+              <a:rPr lang="en-US" sz="1000" dirty="0">
+                <a:solidFill>
+                  <a:srgbClr val="1F1235"/>
+                </a:solidFill>
+              </a:rPr>
+              <a:t>✓  가맹점 목록 (카테고리/전문검색 필터)</a:t>
+            </a:r>
+            <a:endParaRPr lang="en-US" sz="1000" dirty="0"/>
+          </a:p>
+        </p:txBody>
+      </p:sp>
+      <p:sp>
+        <p:nvSpPr>
+          <p:cNvPr id="24" name="Text 22"/>
+          <p:cNvSpPr/>
+          <p:nvPr/>
+        </p:nvSpPr>
+        <p:spPr>
+          <a:xfrm>
+            <a:off x="8257032" y="1901952"/>
+            <a:ext cx="3401568" cy="338328"/>
+          </a:xfrm>
+          <a:prstGeom prst="rect">
+            <a:avLst/>
+          </a:prstGeom>
+          <a:noFill/>
+          <a:ln/>
+        </p:spPr>
+        <p:txBody>
+          <a:bodyPr wrap="square" rtlCol="0" anchor="ctr"/>
+          <a:lstStyle/>
+          <a:p>
+            <a:pPr indent="0" marL="0">
+              <a:buNone/>
+            </a:pPr>
+            <a:r>
+              <a:rPr lang="en-US" sz="1000" dirty="0">
+                <a:solidFill>
+                  <a:srgbClr val="1F1235"/>
+                </a:solidFill>
+              </a:rPr>
+              <a:t>✓  가맹점 상세 + 메뉴 옵션 + 리뷰(이미지)</a:t>
+            </a:r>
+            <a:endParaRPr lang="en-US" sz="1000" dirty="0"/>
+          </a:p>
+        </p:txBody>
+      </p:sp>
+      <p:sp>
+        <p:nvSpPr>
+          <p:cNvPr id="25" name="Text 23"/>
+          <p:cNvSpPr/>
+          <p:nvPr/>
+        </p:nvSpPr>
+        <p:spPr>
+          <a:xfrm>
+            <a:off x="8257032" y="2249424"/>
+            <a:ext cx="3401568" cy="338328"/>
+          </a:xfrm>
+          <a:prstGeom prst="rect">
+            <a:avLst/>
+          </a:prstGeom>
+          <a:noFill/>
+          <a:ln/>
+        </p:spPr>
+        <p:txBody>
+          <a:bodyPr wrap="square" rtlCol="0" anchor="ctr"/>
+          <a:lstStyle/>
+          <a:p>
+            <a:pPr indent="0" marL="0">
+              <a:buNone/>
+            </a:pPr>
+            <a:r>
+              <a:rPr lang="en-US" sz="1000" dirty="0">
+                <a:solidFill>
+                  <a:srgbClr val="1F1235"/>
+                </a:solidFill>
+              </a:rPr>
+              <a:t>✓  쿠폰(3종) + PICK 할인 + 배달 메모</a:t>
+            </a:r>
+            <a:endParaRPr lang="en-US" sz="1000" dirty="0"/>
+          </a:p>
+        </p:txBody>
+      </p:sp>
+      <p:sp>
+        <p:nvSpPr>
+          <p:cNvPr id="26" name="Text 24"/>
+          <p:cNvSpPr/>
+          <p:nvPr/>
+        </p:nvSpPr>
+        <p:spPr>
+          <a:xfrm>
+            <a:off x="8257032" y="2596896"/>
+            <a:ext cx="3401568" cy="338328"/>
+          </a:xfrm>
+          <a:prstGeom prst="rect">
+            <a:avLst/>
+          </a:prstGeom>
+          <a:noFill/>
+          <a:ln/>
+        </p:spPr>
+        <p:txBody>
+          <a:bodyPr wrap="square" rtlCol="0" anchor="ctr"/>
+          <a:lstStyle/>
+          <a:p>
+            <a:pPr indent="0" marL="0">
+              <a:buNone/>
+            </a:pPr>
+            <a:r>
+              <a:rPr lang="en-US" sz="1000" dirty="0">
+                <a:solidFill>
+                  <a:srgbClr val="1F1235"/>
+                </a:solidFill>
+              </a:rPr>
+              <a:t>✓  PICK 결제 + 토스페이먼츠 카드 결제</a:t>
+            </a:r>
+            <a:endParaRPr lang="en-US" sz="1000" dirty="0"/>
+          </a:p>
+        </p:txBody>
+      </p:sp>
+      <p:sp>
+        <p:nvSpPr>
+          <p:cNvPr id="27" name="Text 25"/>
+          <p:cNvSpPr/>
+          <p:nvPr/>
+        </p:nvSpPr>
+        <p:spPr>
+          <a:xfrm>
+            <a:off x="8257032" y="2944368"/>
+            <a:ext cx="3401568" cy="338328"/>
+          </a:xfrm>
+          <a:prstGeom prst="rect">
+            <a:avLst/>
+          </a:prstGeom>
+          <a:noFill/>
+          <a:ln/>
+        </p:spPr>
+        <p:txBody>
+          <a:bodyPr wrap="square" rtlCol="0" anchor="ctr"/>
+          <a:lstStyle/>
+          <a:p>
+            <a:pPr indent="0" marL="0">
+              <a:buNone/>
+            </a:pPr>
+            <a:r>
+              <a:rPr lang="en-US" sz="1000" dirty="0">
+                <a:solidFill>
+                  <a:srgbClr val="1F1235"/>
+                </a:solidFill>
+              </a:rPr>
+              <a:t>✓  주문 생성 → PICK 차감 → 완료 적립</a:t>
+            </a:r>
+            <a:endParaRPr lang="en-US" sz="1000" dirty="0"/>
+          </a:p>
+        </p:txBody>
+      </p:sp>
+      <p:sp>
+        <p:nvSpPr>
+          <p:cNvPr id="28" name="Shape 26"/>
+          <p:cNvSpPr/>
+          <p:nvPr/>
+        </p:nvSpPr>
+        <p:spPr>
+          <a:xfrm>
+            <a:off x="228600" y="3566160"/>
+            <a:ext cx="3749040" cy="2423160"/>
           </a:xfrm>
           <a:prstGeom prst="roundRect">
             <a:avLst>
-              <a:gd name="adj" fmla="val 9286"/>
-            </a:avLst>
-          </a:prstGeom>
-          <a:solidFill>
-            <a:srgbClr val="FFFFFF"/>
-          </a:solidFill>
-          <a:ln w="12700">
-            <a:solidFill>
-              <a:srgbClr val="E9D5FF"/>
-            </a:solidFill>
-            <a:prstDash val="solid"/>
-          </a:ln>
-        </p:spPr>
-      </p:sp>
-      <p:sp>
-        <p:nvSpPr>
-          <p:cNvPr id="9" name="Shape 7"/>
-          <p:cNvSpPr/>
-          <p:nvPr/>
-        </p:nvSpPr>
-        <p:spPr>
-          <a:xfrm>
-            <a:off x="365760" y="2176272"/>
-            <a:ext cx="3474720" cy="329184"/>
-          </a:xfrm>
-          <a:prstGeom prst="roundRect">
-            <a:avLst>
-              <a:gd name="adj" fmla="val 22222"/>
-            </a:avLst>
-          </a:prstGeom>
-          <a:solidFill>
-            <a:srgbClr val="DCFCE7"/>
-          </a:solidFill>
-          <a:ln w="12700">
-            <a:solidFill>
-              <a:srgbClr val="DCFCE7"/>
-            </a:solidFill>
-            <a:prstDash val="solid"/>
-          </a:ln>
-        </p:spPr>
-      </p:sp>
-      <p:sp>
-        <p:nvSpPr>
-          <p:cNvPr id="10" name="Text 8"/>
-          <p:cNvSpPr/>
-          <p:nvPr/>
-        </p:nvSpPr>
-        <p:spPr>
-          <a:xfrm>
-            <a:off x="365760" y="2176272"/>
-            <a:ext cx="3474720" cy="329184"/>
-          </a:xfrm>
-          <a:prstGeom prst="rect">
-            <a:avLst/>
-          </a:prstGeom>
-          <a:noFill/>
-          <a:ln/>
-        </p:spPr>
-        <p:txBody>
-          <a:bodyPr wrap="square" rtlCol="0" anchor="ctr"/>
-          <a:lstStyle/>
-          <a:p>
-            <a:pPr algn="ctr" indent="0" marL="0">
-              <a:buNone/>
-            </a:pPr>
-            <a:r>
-              <a:rPr lang="en-US" sz="1200" b="1" dirty="0">
-                <a:solidFill>
-                  <a:srgbClr val="16A34A"/>
-                </a:solidFill>
-              </a:rPr>
-              <a:t>인증 · 지갑 · 주문 플로우</a:t>
-            </a:r>
-            <a:endParaRPr lang="en-US" sz="1200" dirty="0"/>
-          </a:p>
-        </p:txBody>
-      </p:sp>
-      <p:sp>
-        <p:nvSpPr>
-          <p:cNvPr id="11" name="Text 9"/>
-          <p:cNvSpPr/>
-          <p:nvPr/>
-        </p:nvSpPr>
-        <p:spPr>
-          <a:xfrm>
-            <a:off x="393192" y="2569464"/>
-            <a:ext cx="3419856" cy="694944"/>
-          </a:xfrm>
-          <a:prstGeom prst="rect">
-            <a:avLst/>
-          </a:prstGeom>
-          <a:noFill/>
-          <a:ln/>
-        </p:spPr>
-        <p:txBody>
-          <a:bodyPr wrap="square" rtlCol="0" anchor="ctr"/>
-          <a:lstStyle/>
-          <a:p>
-            <a:pPr indent="0" marL="0">
-              <a:buNone/>
-            </a:pPr>
-            <a:r>
-              <a:rPr lang="en-US" sz="1050" dirty="0">
-                <a:solidFill>
-                  <a:srgbClr val="6B7280"/>
-                </a:solidFill>
-              </a:rPr>
-              <a:t>이메일 로그인 (카카오 비즈니스 후 추가)</a:t>
-            </a:r>
-            <a:endParaRPr lang="en-US" sz="1050" dirty="0"/>
-          </a:p>
-          <a:p>
-            <a:pPr indent="0" marL="0">
-              <a:buNone/>
-            </a:pPr>
-            <a:r>
-              <a:rPr lang="en-US" sz="1050" dirty="0">
-                <a:solidFill>
-                  <a:srgbClr val="6B7280"/>
-                </a:solidFill>
-              </a:rPr>
-              <a:t>PICK 토큰 지갑 + 토스페이먼츠</a:t>
-            </a:r>
-            <a:endParaRPr lang="en-US" sz="1050" dirty="0"/>
-          </a:p>
-          <a:p>
-            <a:pPr indent="0" marL="0">
-              <a:buNone/>
-            </a:pPr>
-            <a:r>
-              <a:rPr lang="en-US" sz="1050" dirty="0">
-                <a:solidFill>
-                  <a:srgbClr val="6B7280"/>
-                </a:solidFill>
-              </a:rPr>
-              <a:t>Realtime 주문 추적 완성</a:t>
-            </a:r>
-            <a:endParaRPr lang="en-US" sz="1050" dirty="0"/>
-          </a:p>
-        </p:txBody>
-      </p:sp>
-      <p:sp>
-        <p:nvSpPr>
-          <p:cNvPr id="12" name="Shape 10"/>
-          <p:cNvSpPr/>
-          <p:nvPr/>
-        </p:nvSpPr>
-        <p:spPr>
-          <a:xfrm>
-            <a:off x="4133088" y="2057400"/>
-            <a:ext cx="3749040" cy="1280160"/>
-          </a:xfrm>
-          <a:prstGeom prst="roundRect">
-            <a:avLst>
-              <a:gd name="adj" fmla="val 9286"/>
-            </a:avLst>
-          </a:prstGeom>
-          <a:solidFill>
-            <a:srgbClr val="FFFFFF"/>
-          </a:solidFill>
-          <a:ln w="12700">
-            <a:solidFill>
-              <a:srgbClr val="E9D5FF"/>
-            </a:solidFill>
-            <a:prstDash val="solid"/>
-          </a:ln>
-        </p:spPr>
-      </p:sp>
-      <p:sp>
-        <p:nvSpPr>
-          <p:cNvPr id="13" name="Shape 11"/>
-          <p:cNvSpPr/>
-          <p:nvPr/>
-        </p:nvSpPr>
-        <p:spPr>
-          <a:xfrm>
-            <a:off x="4270248" y="2176272"/>
-            <a:ext cx="3474720" cy="329184"/>
-          </a:xfrm>
-          <a:prstGeom prst="roundRect">
-            <a:avLst>
-              <a:gd name="adj" fmla="val 22222"/>
-            </a:avLst>
-          </a:prstGeom>
-          <a:solidFill>
-            <a:srgbClr val="DCFCE7"/>
-          </a:solidFill>
-          <a:ln w="12700">
-            <a:solidFill>
-              <a:srgbClr val="DCFCE7"/>
-            </a:solidFill>
-            <a:prstDash val="solid"/>
-          </a:ln>
-        </p:spPr>
-      </p:sp>
-      <p:sp>
-        <p:nvSpPr>
-          <p:cNvPr id="14" name="Text 12"/>
-          <p:cNvSpPr/>
-          <p:nvPr/>
-        </p:nvSpPr>
-        <p:spPr>
-          <a:xfrm>
-            <a:off x="4270248" y="2176272"/>
-            <a:ext cx="3474720" cy="329184"/>
-          </a:xfrm>
-          <a:prstGeom prst="rect">
-            <a:avLst/>
-          </a:prstGeom>
-          <a:noFill/>
-          <a:ln/>
-        </p:spPr>
-        <p:txBody>
-          <a:bodyPr wrap="square" rtlCol="0" anchor="ctr"/>
-          <a:lstStyle/>
-          <a:p>
-            <a:pPr algn="ctr" indent="0" marL="0">
-              <a:buNone/>
-            </a:pPr>
-            <a:r>
-              <a:rPr lang="en-US" sz="1200" b="1" dirty="0">
-                <a:solidFill>
-                  <a:srgbClr val="16A34A"/>
-                </a:solidFill>
-              </a:rPr>
-              <a:t>사장님 · 라이더 · 관리자</a:t>
-            </a:r>
-            <a:endParaRPr lang="en-US" sz="1200" dirty="0"/>
-          </a:p>
-        </p:txBody>
-      </p:sp>
-      <p:sp>
-        <p:nvSpPr>
-          <p:cNvPr id="15" name="Text 13"/>
-          <p:cNvSpPr/>
-          <p:nvPr/>
-        </p:nvSpPr>
-        <p:spPr>
-          <a:xfrm>
-            <a:off x="4297680" y="2569464"/>
-            <a:ext cx="3419856" cy="694944"/>
-          </a:xfrm>
-          <a:prstGeom prst="rect">
-            <a:avLst/>
-          </a:prstGeom>
-          <a:noFill/>
-          <a:ln/>
-        </p:spPr>
-        <p:txBody>
-          <a:bodyPr wrap="square" rtlCol="0" anchor="ctr"/>
-          <a:lstStyle/>
-          <a:p>
-            <a:pPr indent="0" marL="0">
-              <a:buNone/>
-            </a:pPr>
-            <a:r>
-              <a:rPr lang="en-US" sz="1050" dirty="0">
-                <a:solidFill>
-                  <a:srgbClr val="6B7280"/>
-                </a:solidFill>
-              </a:rPr>
-              <a:t>사장님 주문/메뉴/정산/통계</a:t>
-            </a:r>
-            <a:endParaRPr lang="en-US" sz="1050" dirty="0"/>
-          </a:p>
-          <a:p>
-            <a:pPr indent="0" marL="0">
-              <a:buNone/>
-            </a:pPr>
-            <a:r>
-              <a:rPr lang="en-US" sz="1050" dirty="0">
-                <a:solidFill>
-                  <a:srgbClr val="6B7280"/>
-                </a:solidFill>
-              </a:rPr>
-              <a:t>라이더 수락/위치공유/수익</a:t>
-            </a:r>
-            <a:endParaRPr lang="en-US" sz="1050" dirty="0"/>
-          </a:p>
-          <a:p>
-            <a:pPr indent="0" marL="0">
-              <a:buNone/>
-            </a:pPr>
-            <a:r>
-              <a:rPr lang="en-US" sz="1050" dirty="0">
-                <a:solidFill>
-                  <a:srgbClr val="6B7280"/>
-                </a:solidFill>
-              </a:rPr>
-              <a:t>관리자 5탭 대시보드</a:t>
-            </a:r>
-            <a:endParaRPr lang="en-US" sz="1050" dirty="0"/>
-          </a:p>
-        </p:txBody>
-      </p:sp>
-      <p:sp>
-        <p:nvSpPr>
-          <p:cNvPr id="16" name="Shape 14"/>
-          <p:cNvSpPr/>
-          <p:nvPr/>
-        </p:nvSpPr>
-        <p:spPr>
-          <a:xfrm>
-            <a:off x="8037576" y="2057400"/>
-            <a:ext cx="3749040" cy="1280160"/>
-          </a:xfrm>
-          <a:prstGeom prst="roundRect">
-            <a:avLst>
-              <a:gd name="adj" fmla="val 9286"/>
-            </a:avLst>
-          </a:prstGeom>
-          <a:solidFill>
-            <a:srgbClr val="FFFFFF"/>
-          </a:solidFill>
-          <a:ln w="12700">
-            <a:solidFill>
-              <a:srgbClr val="E9D5FF"/>
-            </a:solidFill>
-            <a:prstDash val="solid"/>
-          </a:ln>
-        </p:spPr>
-      </p:sp>
-      <p:sp>
-        <p:nvSpPr>
-          <p:cNvPr id="17" name="Shape 15"/>
-          <p:cNvSpPr/>
-          <p:nvPr/>
-        </p:nvSpPr>
-        <p:spPr>
-          <a:xfrm>
-            <a:off x="8174736" y="2176272"/>
-            <a:ext cx="3474720" cy="329184"/>
-          </a:xfrm>
-          <a:prstGeom prst="roundRect">
-            <a:avLst>
-              <a:gd name="adj" fmla="val 22222"/>
-            </a:avLst>
-          </a:prstGeom>
-          <a:solidFill>
-            <a:srgbClr val="DCFCE7"/>
-          </a:solidFill>
-          <a:ln w="12700">
-            <a:solidFill>
-              <a:srgbClr val="DCFCE7"/>
-            </a:solidFill>
-            <a:prstDash val="solid"/>
-          </a:ln>
-        </p:spPr>
-      </p:sp>
-      <p:sp>
-        <p:nvSpPr>
-          <p:cNvPr id="18" name="Text 16"/>
-          <p:cNvSpPr/>
-          <p:nvPr/>
-        </p:nvSpPr>
-        <p:spPr>
-          <a:xfrm>
-            <a:off x="8174736" y="2176272"/>
-            <a:ext cx="3474720" cy="329184"/>
-          </a:xfrm>
-          <a:prstGeom prst="rect">
-            <a:avLst/>
-          </a:prstGeom>
-          <a:noFill/>
-          <a:ln/>
-        </p:spPr>
-        <p:txBody>
-          <a:bodyPr wrap="square" rtlCol="0" anchor="ctr"/>
-          <a:lstStyle/>
-          <a:p>
-            <a:pPr algn="ctr" indent="0" marL="0">
-              <a:buNone/>
-            </a:pPr>
-            <a:r>
-              <a:rPr lang="en-US" sz="1200" b="1" dirty="0">
-                <a:solidFill>
-                  <a:srgbClr val="16A34A"/>
-                </a:solidFill>
-              </a:rPr>
-              <a:t>PWA · 보안 · DB 최적화</a:t>
-            </a:r>
-            <a:endParaRPr lang="en-US" sz="1200" dirty="0"/>
-          </a:p>
-        </p:txBody>
-      </p:sp>
-      <p:sp>
-        <p:nvSpPr>
-          <p:cNvPr id="19" name="Text 17"/>
-          <p:cNvSpPr/>
-          <p:nvPr/>
-        </p:nvSpPr>
-        <p:spPr>
-          <a:xfrm>
-            <a:off x="8202168" y="2569464"/>
-            <a:ext cx="3419856" cy="694944"/>
-          </a:xfrm>
-          <a:prstGeom prst="rect">
-            <a:avLst/>
-          </a:prstGeom>
-          <a:noFill/>
-          <a:ln/>
-        </p:spPr>
-        <p:txBody>
-          <a:bodyPr wrap="square" rtlCol="0" anchor="ctr"/>
-          <a:lstStyle/>
-          <a:p>
-            <a:pPr indent="0" marL="0">
-              <a:buNone/>
-            </a:pPr>
-            <a:r>
-              <a:rPr lang="en-US" sz="1050" dirty="0">
-                <a:solidFill>
-                  <a:srgbClr val="6B7280"/>
-                </a:solidFill>
-              </a:rPr>
-              <a:t>Serwist 오프라인 캐싱</a:t>
-            </a:r>
-            <a:endParaRPr lang="en-US" sz="1050" dirty="0"/>
-          </a:p>
-          <a:p>
-            <a:pPr indent="0" marL="0">
-              <a:buNone/>
-            </a:pPr>
-            <a:r>
-              <a:rPr lang="en-US" sz="1050" dirty="0">
-                <a:solidFill>
-                  <a:srgbClr val="6B7280"/>
-                </a:solidFill>
-              </a:rPr>
-              <a:t>RLS + 인덱스 30개+ + FCM 푸시</a:t>
-            </a:r>
-            <a:endParaRPr lang="en-US" sz="1050" dirty="0"/>
-          </a:p>
-          <a:p>
-            <a:pPr indent="0" marL="0">
-              <a:buNone/>
-            </a:pPr>
-            <a:r>
-              <a:rPr lang="en-US" sz="1050" dirty="0">
-                <a:solidFill>
-                  <a:srgbClr val="6B7280"/>
-                </a:solidFill>
-              </a:rPr>
-              <a:t>Sentry + Storage 정책 완성</a:t>
-            </a:r>
-            <a:endParaRPr lang="en-US" sz="1050" dirty="0"/>
-          </a:p>
-        </p:txBody>
-      </p:sp>
-      <p:sp>
-        <p:nvSpPr>
-          <p:cNvPr id="20" name="Shape 18"/>
-          <p:cNvSpPr/>
-          <p:nvPr/>
-        </p:nvSpPr>
-        <p:spPr>
-          <a:xfrm>
-            <a:off x="365760" y="3429000"/>
-            <a:ext cx="1325880" cy="384048"/>
-          </a:xfrm>
-          <a:prstGeom prst="roundRect">
-            <a:avLst>
-              <a:gd name="adj" fmla="val 23810"/>
+              <a:gd name="adj" fmla="val 5660"/>
             </a:avLst>
           </a:prstGeom>
           <a:solidFill>
@@ -10510,62 +10380,26 @@
       </p:sp>
       <p:sp>
         <p:nvSpPr>
-          <p:cNvPr id="21" name="Text 19"/>
-          <p:cNvSpPr/>
-          <p:nvPr/>
-        </p:nvSpPr>
-        <p:spPr>
-          <a:xfrm>
-            <a:off x="365760" y="3429000"/>
-            <a:ext cx="1325880" cy="384048"/>
-          </a:xfrm>
-          <a:prstGeom prst="rect">
-            <a:avLst/>
-          </a:prstGeom>
-          <a:noFill/>
-          <a:ln/>
-        </p:spPr>
-        <p:txBody>
-          <a:bodyPr wrap="square" rtlCol="0" anchor="ctr"/>
-          <a:lstStyle/>
-          <a:p>
-            <a:pPr algn="ctr" indent="0" marL="0">
-              <a:buNone/>
-            </a:pPr>
-            <a:r>
-              <a:rPr lang="en-US" sz="1100" b="1" dirty="0">
-                <a:solidFill>
-                  <a:srgbClr val="D97706"/>
-                </a:solidFill>
-              </a:rPr>
-              <a:t>🟡 런칭 준비</a:t>
-            </a:r>
-            <a:endParaRPr lang="en-US" sz="1100" dirty="0"/>
-          </a:p>
-        </p:txBody>
-      </p:sp>
-      <p:sp>
-        <p:nvSpPr>
-          <p:cNvPr id="22" name="Shape 20"/>
-          <p:cNvSpPr/>
-          <p:nvPr/>
-        </p:nvSpPr>
-        <p:spPr>
-          <a:xfrm>
-            <a:off x="228600" y="3886200"/>
-            <a:ext cx="3749040" cy="1280160"/>
+          <p:cNvPr id="29" name="Shape 27"/>
+          <p:cNvSpPr/>
+          <p:nvPr/>
+        </p:nvSpPr>
+        <p:spPr>
+          <a:xfrm>
+            <a:off x="338328" y="3675888"/>
+            <a:ext cx="3529584" cy="384048"/>
           </a:xfrm>
           <a:prstGeom prst="roundRect">
             <a:avLst>
-              <a:gd name="adj" fmla="val 9286"/>
+              <a:gd name="adj" fmla="val 19048"/>
             </a:avLst>
           </a:prstGeom>
           <a:solidFill>
-            <a:srgbClr val="FFFFFF"/>
+            <a:srgbClr val="D97706"/>
           </a:solidFill>
           <a:ln w="12700">
             <a:solidFill>
-              <a:srgbClr val="E9D5FF"/>
+              <a:srgbClr val="D97706"/>
             </a:solidFill>
             <a:prstDash val="solid"/>
           </a:ln>
@@ -10573,26 +10407,278 @@
       </p:sp>
       <p:sp>
         <p:nvSpPr>
-          <p:cNvPr id="23" name="Shape 21"/>
-          <p:cNvSpPr/>
-          <p:nvPr/>
-        </p:nvSpPr>
-        <p:spPr>
-          <a:xfrm>
-            <a:off x="365760" y="4005072"/>
-            <a:ext cx="3474720" cy="329184"/>
+          <p:cNvPr id="30" name="Text 28"/>
+          <p:cNvSpPr/>
+          <p:nvPr/>
+        </p:nvSpPr>
+        <p:spPr>
+          <a:xfrm>
+            <a:off x="338328" y="3675888"/>
+            <a:ext cx="3529584" cy="384048"/>
+          </a:xfrm>
+          <a:prstGeom prst="rect">
+            <a:avLst/>
+          </a:prstGeom>
+          <a:noFill/>
+          <a:ln/>
+        </p:spPr>
+        <p:txBody>
+          <a:bodyPr wrap="square" rtlCol="0" anchor="ctr"/>
+          <a:lstStyle/>
+          <a:p>
+            <a:pPr algn="ctr" indent="0" marL="0">
+              <a:buNone/>
+            </a:pPr>
+            <a:r>
+              <a:rPr lang="en-US" sz="1200" b="1" dirty="0">
+                <a:solidFill>
+                  <a:srgbClr val="FFFFFF"/>
+                </a:solidFill>
+              </a:rPr>
+              <a:t>👨‍🍳 사장님 기능</a:t>
+            </a:r>
+            <a:endParaRPr lang="en-US" sz="1200" dirty="0"/>
+          </a:p>
+        </p:txBody>
+      </p:sp>
+      <p:sp>
+        <p:nvSpPr>
+          <p:cNvPr id="31" name="Text 29"/>
+          <p:cNvSpPr/>
+          <p:nvPr/>
+        </p:nvSpPr>
+        <p:spPr>
+          <a:xfrm>
+            <a:off x="393192" y="4160520"/>
+            <a:ext cx="3401568" cy="338328"/>
+          </a:xfrm>
+          <a:prstGeom prst="rect">
+            <a:avLst/>
+          </a:prstGeom>
+          <a:noFill/>
+          <a:ln/>
+        </p:spPr>
+        <p:txBody>
+          <a:bodyPr wrap="square" rtlCol="0" anchor="ctr"/>
+          <a:lstStyle/>
+          <a:p>
+            <a:pPr indent="0" marL="0">
+              <a:buNone/>
+            </a:pPr>
+            <a:r>
+              <a:rPr lang="en-US" sz="1000" dirty="0">
+                <a:solidFill>
+                  <a:srgbClr val="1F1235"/>
+                </a:solidFill>
+              </a:rPr>
+              <a:t>✓  가게 등록·설정·쿠폰(KRW 입력)·영업시간</a:t>
+            </a:r>
+            <a:endParaRPr lang="en-US" sz="1000" dirty="0"/>
+          </a:p>
+        </p:txBody>
+      </p:sp>
+      <p:sp>
+        <p:nvSpPr>
+          <p:cNvPr id="32" name="Text 30"/>
+          <p:cNvSpPr/>
+          <p:nvPr/>
+        </p:nvSpPr>
+        <p:spPr>
+          <a:xfrm>
+            <a:off x="393192" y="4507992"/>
+            <a:ext cx="3401568" cy="338328"/>
+          </a:xfrm>
+          <a:prstGeom prst="rect">
+            <a:avLst/>
+          </a:prstGeom>
+          <a:noFill/>
+          <a:ln/>
+        </p:spPr>
+        <p:txBody>
+          <a:bodyPr wrap="square" rtlCol="0" anchor="ctr"/>
+          <a:lstStyle/>
+          <a:p>
+            <a:pPr indent="0" marL="0">
+              <a:buNone/>
+            </a:pPr>
+            <a:r>
+              <a:rPr lang="en-US" sz="1000" dirty="0">
+                <a:solidFill>
+                  <a:srgbClr val="1F1235"/>
+                </a:solidFill>
+              </a:rPr>
+              <a:t>✓  사진 리뷰 보상 설정 연동 (photo_review_reward_krw)</a:t>
+            </a:r>
+            <a:endParaRPr lang="en-US" sz="1000" dirty="0"/>
+          </a:p>
+        </p:txBody>
+      </p:sp>
+      <p:sp>
+        <p:nvSpPr>
+          <p:cNvPr id="33" name="Text 31"/>
+          <p:cNvSpPr/>
+          <p:nvPr/>
+        </p:nvSpPr>
+        <p:spPr>
+          <a:xfrm>
+            <a:off x="393192" y="4855464"/>
+            <a:ext cx="3401568" cy="338328"/>
+          </a:xfrm>
+          <a:prstGeom prst="rect">
+            <a:avLst/>
+          </a:prstGeom>
+          <a:noFill/>
+          <a:ln/>
+        </p:spPr>
+        <p:txBody>
+          <a:bodyPr wrap="square" rtlCol="0" anchor="ctr"/>
+          <a:lstStyle/>
+          <a:p>
+            <a:pPr indent="0" marL="0">
+              <a:buNone/>
+            </a:pPr>
+            <a:r>
+              <a:rPr lang="en-US" sz="1000" dirty="0">
+                <a:solidFill>
+                  <a:srgbClr val="1F1235"/>
+                </a:solidFill>
+              </a:rPr>
+              <a:t>✓  주문 관리: 수락 ETA + 거절 확인 팝업</a:t>
+            </a:r>
+            <a:endParaRPr lang="en-US" sz="1000" dirty="0"/>
+          </a:p>
+        </p:txBody>
+      </p:sp>
+      <p:sp>
+        <p:nvSpPr>
+          <p:cNvPr id="34" name="Text 32"/>
+          <p:cNvSpPr/>
+          <p:nvPr/>
+        </p:nvSpPr>
+        <p:spPr>
+          <a:xfrm>
+            <a:off x="393192" y="5202936"/>
+            <a:ext cx="3401568" cy="338328"/>
+          </a:xfrm>
+          <a:prstGeom prst="rect">
+            <a:avLst/>
+          </a:prstGeom>
+          <a:noFill/>
+          <a:ln/>
+        </p:spPr>
+        <p:txBody>
+          <a:bodyPr wrap="square" rtlCol="0" anchor="ctr"/>
+          <a:lstStyle/>
+          <a:p>
+            <a:pPr indent="0" marL="0">
+              <a:buNone/>
+            </a:pPr>
+            <a:r>
+              <a:rPr lang="en-US" sz="1000" dirty="0">
+                <a:solidFill>
+                  <a:srgbClr val="1F1235"/>
+                </a:solidFill>
+              </a:rPr>
+              <a:t>✓  매출 통계 대시보드 + 주간 차트</a:t>
+            </a:r>
+            <a:endParaRPr lang="en-US" sz="1000" dirty="0"/>
+          </a:p>
+        </p:txBody>
+      </p:sp>
+      <p:sp>
+        <p:nvSpPr>
+          <p:cNvPr id="35" name="Text 33"/>
+          <p:cNvSpPr/>
+          <p:nvPr/>
+        </p:nvSpPr>
+        <p:spPr>
+          <a:xfrm>
+            <a:off x="393192" y="5550408"/>
+            <a:ext cx="3401568" cy="338328"/>
+          </a:xfrm>
+          <a:prstGeom prst="rect">
+            <a:avLst/>
+          </a:prstGeom>
+          <a:noFill/>
+          <a:ln/>
+        </p:spPr>
+        <p:txBody>
+          <a:bodyPr wrap="square" rtlCol="0" anchor="ctr"/>
+          <a:lstStyle/>
+          <a:p>
+            <a:pPr indent="0" marL="0">
+              <a:buNone/>
+            </a:pPr>
+            <a:r>
+              <a:rPr lang="en-US" sz="1000" dirty="0">
+                <a:solidFill>
+                  <a:srgbClr val="1F1235"/>
+                </a:solidFill>
+              </a:rPr>
+              <a:t>✓  신규주문 TTS 알림 '픽픽 주문이 들어왔습니다'</a:t>
+            </a:r>
+            <a:endParaRPr lang="en-US" sz="1000" dirty="0"/>
+          </a:p>
+        </p:txBody>
+      </p:sp>
+      <p:sp>
+        <p:nvSpPr>
+          <p:cNvPr id="36" name="Text 34"/>
+          <p:cNvSpPr/>
+          <p:nvPr/>
+        </p:nvSpPr>
+        <p:spPr>
+          <a:xfrm>
+            <a:off x="393192" y="5897880"/>
+            <a:ext cx="3401568" cy="338328"/>
+          </a:xfrm>
+          <a:prstGeom prst="rect">
+            <a:avLst/>
+          </a:prstGeom>
+          <a:noFill/>
+          <a:ln/>
+        </p:spPr>
+        <p:txBody>
+          <a:bodyPr wrap="square" rtlCol="0" anchor="ctr"/>
+          <a:lstStyle/>
+          <a:p>
+            <a:pPr indent="0" marL="0">
+              <a:buNone/>
+            </a:pPr>
+            <a:r>
+              <a:rPr lang="en-US" sz="1000" dirty="0">
+                <a:solidFill>
+                  <a:srgbClr val="1F1235"/>
+                </a:solidFill>
+              </a:rPr>
+              <a:t>✓  신규 가맹점 초대 리워드 20,000 PICK</a:t>
+            </a:r>
+            <a:endParaRPr lang="en-US" sz="1000" dirty="0"/>
+          </a:p>
+        </p:txBody>
+      </p:sp>
+      <p:sp>
+        <p:nvSpPr>
+          <p:cNvPr id="37" name="Shape 35"/>
+          <p:cNvSpPr/>
+          <p:nvPr/>
+        </p:nvSpPr>
+        <p:spPr>
+          <a:xfrm>
+            <a:off x="4160520" y="3566160"/>
+            <a:ext cx="3749040" cy="2423160"/>
           </a:xfrm>
           <a:prstGeom prst="roundRect">
             <a:avLst>
-              <a:gd name="adj" fmla="val 22222"/>
+              <a:gd name="adj" fmla="val 5660"/>
             </a:avLst>
           </a:prstGeom>
           <a:solidFill>
-            <a:srgbClr val="FFFBEB"/>
+            <a:srgbClr val="ECFEFF"/>
           </a:solidFill>
           <a:ln w="12700">
             <a:solidFill>
-              <a:srgbClr val="FFFBEB"/>
+              <a:srgbClr val="0891B2"/>
             </a:solidFill>
             <a:prstDash val="solid"/>
           </a:ln>
@@ -10600,126 +10686,26 @@
       </p:sp>
       <p:sp>
         <p:nvSpPr>
-          <p:cNvPr id="24" name="Text 22"/>
-          <p:cNvSpPr/>
-          <p:nvPr/>
-        </p:nvSpPr>
-        <p:spPr>
-          <a:xfrm>
-            <a:off x="365760" y="4005072"/>
-            <a:ext cx="3474720" cy="329184"/>
-          </a:xfrm>
-          <a:prstGeom prst="rect">
-            <a:avLst/>
-          </a:prstGeom>
-          <a:noFill/>
-          <a:ln/>
-        </p:spPr>
-        <p:txBody>
-          <a:bodyPr wrap="square" rtlCol="0" anchor="ctr"/>
-          <a:lstStyle/>
-          <a:p>
-            <a:pPr algn="ctr" indent="0" marL="0">
-              <a:buNone/>
-            </a:pPr>
-            <a:r>
-              <a:rPr lang="en-US" sz="1200" b="1" dirty="0">
-                <a:solidFill>
-                  <a:srgbClr val="D97706"/>
-                </a:solidFill>
-              </a:rPr>
-              <a:t>Firebase 환경변수 ✅</a:t>
-            </a:r>
-            <a:endParaRPr lang="en-US" sz="1200" dirty="0"/>
-          </a:p>
-        </p:txBody>
-      </p:sp>
-      <p:sp>
-        <p:nvSpPr>
-          <p:cNvPr id="25" name="Text 23"/>
-          <p:cNvSpPr/>
-          <p:nvPr/>
-        </p:nvSpPr>
-        <p:spPr>
-          <a:xfrm>
-            <a:off x="393192" y="4398264"/>
-            <a:ext cx="3419856" cy="694944"/>
-          </a:xfrm>
-          <a:prstGeom prst="rect">
-            <a:avLst/>
-          </a:prstGeom>
-          <a:noFill/>
-          <a:ln/>
-        </p:spPr>
-        <p:txBody>
-          <a:bodyPr wrap="square" rtlCol="0" anchor="ctr"/>
-          <a:lstStyle/>
-          <a:p>
-            <a:pPr indent="0" marL="0">
-              <a:buNone/>
-            </a:pPr>
-            <a:r>
-              <a:rPr lang="en-US" sz="1050" dirty="0">
-                <a:solidFill>
-                  <a:srgbClr val="6B7280"/>
-                </a:solidFill>
-              </a:rPr>
-              <a:t>API Key ~ App ID 완성</a:t>
-            </a:r>
-            <a:endParaRPr lang="en-US" sz="1050" dirty="0"/>
-          </a:p>
-          <a:p>
-            <a:pPr indent="0" marL="0">
-              <a:buNone/>
-            </a:pPr>
-            <a:r>
-              <a:rPr lang="en-US" sz="1050" dirty="0">
-                <a:solidFill>
-                  <a:srgbClr val="6B7280"/>
-                </a:solidFill>
-              </a:rPr>
-              <a:t>VAPID 키 완성</a:t>
-            </a:r>
-            <a:endParaRPr lang="en-US" sz="1050" dirty="0"/>
-          </a:p>
-          <a:p>
-            <a:pPr indent="0" marL="0">
-              <a:buNone/>
-            </a:pPr>
-            <a:r>
-              <a:rPr lang="en-US" sz="1050" dirty="0">
-                <a:solidFill>
-                  <a:srgbClr val="6B7280"/>
-                </a:solidFill>
-              </a:rPr>
-              <a:t>Admin SDK JSON 완성</a:t>
-            </a:r>
-            <a:endParaRPr lang="en-US" sz="1050" dirty="0"/>
-          </a:p>
-        </p:txBody>
-      </p:sp>
-      <p:sp>
-        <p:nvSpPr>
-          <p:cNvPr id="26" name="Shape 24"/>
-          <p:cNvSpPr/>
-          <p:nvPr/>
-        </p:nvSpPr>
-        <p:spPr>
-          <a:xfrm>
-            <a:off x="4133088" y="3886200"/>
-            <a:ext cx="3749040" cy="1280160"/>
+          <p:cNvPr id="38" name="Shape 36"/>
+          <p:cNvSpPr/>
+          <p:nvPr/>
+        </p:nvSpPr>
+        <p:spPr>
+          <a:xfrm>
+            <a:off x="4270248" y="3675888"/>
+            <a:ext cx="3529584" cy="384048"/>
           </a:xfrm>
           <a:prstGeom prst="roundRect">
             <a:avLst>
-              <a:gd name="adj" fmla="val 9286"/>
+              <a:gd name="adj" fmla="val 19048"/>
             </a:avLst>
           </a:prstGeom>
           <a:solidFill>
-            <a:srgbClr val="FFFFFF"/>
+            <a:srgbClr val="0891B2"/>
           </a:solidFill>
           <a:ln w="12700">
             <a:solidFill>
-              <a:srgbClr val="E9D5FF"/>
+              <a:srgbClr val="0891B2"/>
             </a:solidFill>
             <a:prstDash val="solid"/>
           </a:ln>
@@ -10727,299 +10713,306 @@
       </p:sp>
       <p:sp>
         <p:nvSpPr>
-          <p:cNvPr id="27" name="Shape 25"/>
-          <p:cNvSpPr/>
-          <p:nvPr/>
-        </p:nvSpPr>
-        <p:spPr>
-          <a:xfrm>
-            <a:off x="4270248" y="4005072"/>
-            <a:ext cx="3474720" cy="329184"/>
+          <p:cNvPr id="39" name="Text 37"/>
+          <p:cNvSpPr/>
+          <p:nvPr/>
+        </p:nvSpPr>
+        <p:spPr>
+          <a:xfrm>
+            <a:off x="4270248" y="3675888"/>
+            <a:ext cx="3529584" cy="384048"/>
+          </a:xfrm>
+          <a:prstGeom prst="rect">
+            <a:avLst/>
+          </a:prstGeom>
+          <a:noFill/>
+          <a:ln/>
+        </p:spPr>
+        <p:txBody>
+          <a:bodyPr wrap="square" rtlCol="0" anchor="ctr"/>
+          <a:lstStyle/>
+          <a:p>
+            <a:pPr algn="ctr" indent="0" marL="0">
+              <a:buNone/>
+            </a:pPr>
+            <a:r>
+              <a:rPr lang="en-US" sz="1200" b="1" dirty="0">
+                <a:solidFill>
+                  <a:srgbClr val="FFFFFF"/>
+                </a:solidFill>
+              </a:rPr>
+              <a:t>🛵 라이더 / PWA / 인프라</a:t>
+            </a:r>
+            <a:endParaRPr lang="en-US" sz="1200" dirty="0"/>
+          </a:p>
+        </p:txBody>
+      </p:sp>
+      <p:sp>
+        <p:nvSpPr>
+          <p:cNvPr id="40" name="Text 38"/>
+          <p:cNvSpPr/>
+          <p:nvPr/>
+        </p:nvSpPr>
+        <p:spPr>
+          <a:xfrm>
+            <a:off x="4325112" y="4160520"/>
+            <a:ext cx="3401568" cy="338328"/>
+          </a:xfrm>
+          <a:prstGeom prst="rect">
+            <a:avLst/>
+          </a:prstGeom>
+          <a:noFill/>
+          <a:ln/>
+        </p:spPr>
+        <p:txBody>
+          <a:bodyPr wrap="square" rtlCol="0" anchor="ctr"/>
+          <a:lstStyle/>
+          <a:p>
+            <a:pPr indent="0" marL="0">
+              <a:buNone/>
+            </a:pPr>
+            <a:r>
+              <a:rPr lang="en-US" sz="1000" dirty="0">
+                <a:solidFill>
+                  <a:srgbClr val="1F1235"/>
+                </a:solidFill>
+              </a:rPr>
+              <a:t>✓  배달 수락 → PICK 자동 지급 + 위치 공유</a:t>
+            </a:r>
+            <a:endParaRPr lang="en-US" sz="1000" dirty="0"/>
+          </a:p>
+        </p:txBody>
+      </p:sp>
+      <p:sp>
+        <p:nvSpPr>
+          <p:cNvPr id="41" name="Text 39"/>
+          <p:cNvSpPr/>
+          <p:nvPr/>
+        </p:nvSpPr>
+        <p:spPr>
+          <a:xfrm>
+            <a:off x="4325112" y="4507992"/>
+            <a:ext cx="3401568" cy="338328"/>
+          </a:xfrm>
+          <a:prstGeom prst="rect">
+            <a:avLst/>
+          </a:prstGeom>
+          <a:noFill/>
+          <a:ln/>
+        </p:spPr>
+        <p:txBody>
+          <a:bodyPr wrap="square" rtlCol="0" anchor="ctr"/>
+          <a:lstStyle/>
+          <a:p>
+            <a:pPr indent="0" marL="0">
+              <a:buNone/>
+            </a:pPr>
+            <a:r>
+              <a:rPr lang="en-US" sz="1000" dirty="0">
+                <a:solidFill>
+                  <a:srgbClr val="1F1235"/>
+                </a:solidFill>
+              </a:rPr>
+              <a:t>✓  라이더 5km 반경 필터링 + 거리순 정렬</a:t>
+            </a:r>
+            <a:endParaRPr lang="en-US" sz="1000" dirty="0"/>
+          </a:p>
+        </p:txBody>
+      </p:sp>
+      <p:sp>
+        <p:nvSpPr>
+          <p:cNvPr id="42" name="Text 40"/>
+          <p:cNvSpPr/>
+          <p:nvPr/>
+        </p:nvSpPr>
+        <p:spPr>
+          <a:xfrm>
+            <a:off x="4325112" y="4855464"/>
+            <a:ext cx="3401568" cy="338328"/>
+          </a:xfrm>
+          <a:prstGeom prst="rect">
+            <a:avLst/>
+          </a:prstGeom>
+          <a:noFill/>
+          <a:ln/>
+        </p:spPr>
+        <p:txBody>
+          <a:bodyPr wrap="square" rtlCol="0" anchor="ctr"/>
+          <a:lstStyle/>
+          <a:p>
+            <a:pPr indent="0" marL="0">
+              <a:buNone/>
+            </a:pPr>
+            <a:r>
+              <a:rPr lang="en-US" sz="1000" dirty="0">
+                <a:solidFill>
+                  <a:srgbClr val="1F1235"/>
+                </a:solidFill>
+              </a:rPr>
+              <a:t>✓  10분 자동오프라인 Cron (매 5분 실행)</a:t>
+            </a:r>
+            <a:endParaRPr lang="en-US" sz="1000" dirty="0"/>
+          </a:p>
+        </p:txBody>
+      </p:sp>
+      <p:sp>
+        <p:nvSpPr>
+          <p:cNvPr id="43" name="Text 41"/>
+          <p:cNvSpPr/>
+          <p:nvPr/>
+        </p:nvSpPr>
+        <p:spPr>
+          <a:xfrm>
+            <a:off x="4325112" y="5202936"/>
+            <a:ext cx="3401568" cy="338328"/>
+          </a:xfrm>
+          <a:prstGeom prst="rect">
+            <a:avLst/>
+          </a:prstGeom>
+          <a:noFill/>
+          <a:ln/>
+        </p:spPr>
+        <p:txBody>
+          <a:bodyPr wrap="square" rtlCol="0" anchor="ctr"/>
+          <a:lstStyle/>
+          <a:p>
+            <a:pPr indent="0" marL="0">
+              <a:buNone/>
+            </a:pPr>
+            <a:r>
+              <a:rPr lang="en-US" sz="1000" dirty="0">
+                <a:solidFill>
+                  <a:srgbClr val="1F1235"/>
+                </a:solidFill>
+              </a:rPr>
+              <a:t>✓  calling_rider 상태 흐름 재설계 + 픽업완료 버튼</a:t>
+            </a:r>
+            <a:endParaRPr lang="en-US" sz="1000" dirty="0"/>
+          </a:p>
+        </p:txBody>
+      </p:sp>
+      <p:sp>
+        <p:nvSpPr>
+          <p:cNvPr id="44" name="Text 42"/>
+          <p:cNvSpPr/>
+          <p:nvPr/>
+        </p:nvSpPr>
+        <p:spPr>
+          <a:xfrm>
+            <a:off x="4325112" y="5550408"/>
+            <a:ext cx="3401568" cy="338328"/>
+          </a:xfrm>
+          <a:prstGeom prst="rect">
+            <a:avLst/>
+          </a:prstGeom>
+          <a:noFill/>
+          <a:ln/>
+        </p:spPr>
+        <p:txBody>
+          <a:bodyPr wrap="square" rtlCol="0" anchor="ctr"/>
+          <a:lstStyle/>
+          <a:p>
+            <a:pPr indent="0" marL="0">
+              <a:buNone/>
+            </a:pPr>
+            <a:r>
+              <a:rPr lang="en-US" sz="1000" dirty="0">
+                <a:solidFill>
+                  <a:srgbClr val="1F1235"/>
+                </a:solidFill>
+              </a:rPr>
+              <a:t>✓  주문 pending 흐름 · 라이더 heartbeat · 조리완료 폴링</a:t>
+            </a:r>
+            <a:endParaRPr lang="en-US" sz="1000" dirty="0"/>
+          </a:p>
+        </p:txBody>
+      </p:sp>
+      <p:sp>
+        <p:nvSpPr>
+          <p:cNvPr id="45" name="Text 43"/>
+          <p:cNvSpPr/>
+          <p:nvPr/>
+        </p:nvSpPr>
+        <p:spPr>
+          <a:xfrm>
+            <a:off x="4325112" y="5897880"/>
+            <a:ext cx="3401568" cy="338328"/>
+          </a:xfrm>
+          <a:prstGeom prst="rect">
+            <a:avLst/>
+          </a:prstGeom>
+          <a:noFill/>
+          <a:ln/>
+        </p:spPr>
+        <p:txBody>
+          <a:bodyPr wrap="square" rtlCol="0" anchor="ctr"/>
+          <a:lstStyle/>
+          <a:p>
+            <a:pPr indent="0" marL="0">
+              <a:buNone/>
+            </a:pPr>
+            <a:r>
+              <a:rPr lang="en-US" sz="1000" dirty="0">
+                <a:solidFill>
+                  <a:srgbClr val="1F1235"/>
+                </a:solidFill>
+              </a:rPr>
+              <a:t>✓  FCM 푸시 알림 + 관리자 일괄 발송</a:t>
+            </a:r>
+            <a:endParaRPr lang="en-US" sz="1000" dirty="0"/>
+          </a:p>
+        </p:txBody>
+      </p:sp>
+      <p:sp>
+        <p:nvSpPr>
+          <p:cNvPr id="46" name="Text 44"/>
+          <p:cNvSpPr/>
+          <p:nvPr/>
+        </p:nvSpPr>
+        <p:spPr>
+          <a:xfrm>
+            <a:off x="4325112" y="6245352"/>
+            <a:ext cx="3401568" cy="338328"/>
+          </a:xfrm>
+          <a:prstGeom prst="rect">
+            <a:avLst/>
+          </a:prstGeom>
+          <a:noFill/>
+          <a:ln/>
+        </p:spPr>
+        <p:txBody>
+          <a:bodyPr wrap="square" rtlCol="0" anchor="ctr"/>
+          <a:lstStyle/>
+          <a:p>
+            <a:pPr indent="0" marL="0">
+              <a:buNone/>
+            </a:pPr>
+            <a:r>
+              <a:rPr lang="en-US" sz="1000" dirty="0">
+                <a:solidFill>
+                  <a:srgbClr val="1F1235"/>
+                </a:solidFill>
+              </a:rPr>
+              <a:t>✓  PWA 오프라인 캐싱 (Serwist) + Sentry 모니터링</a:t>
+            </a:r>
+            <a:endParaRPr lang="en-US" sz="1000" dirty="0"/>
+          </a:p>
+        </p:txBody>
+      </p:sp>
+      <p:sp>
+        <p:nvSpPr>
+          <p:cNvPr id="47" name="Shape 45"/>
+          <p:cNvSpPr/>
+          <p:nvPr/>
+        </p:nvSpPr>
+        <p:spPr>
+          <a:xfrm>
+            <a:off x="8092440" y="3566160"/>
+            <a:ext cx="3749040" cy="2423160"/>
           </a:xfrm>
           <a:prstGeom prst="roundRect">
             <a:avLst>
-              <a:gd name="adj" fmla="val 22222"/>
-            </a:avLst>
-          </a:prstGeom>
-          <a:solidFill>
-            <a:srgbClr val="FFFBEB"/>
-          </a:solidFill>
-          <a:ln w="12700">
-            <a:solidFill>
-              <a:srgbClr val="FFFBEB"/>
-            </a:solidFill>
-            <a:prstDash val="solid"/>
-          </a:ln>
-        </p:spPr>
-      </p:sp>
-      <p:sp>
-        <p:nvSpPr>
-          <p:cNvPr id="28" name="Text 26"/>
-          <p:cNvSpPr/>
-          <p:nvPr/>
-        </p:nvSpPr>
-        <p:spPr>
-          <a:xfrm>
-            <a:off x="4270248" y="4005072"/>
-            <a:ext cx="3474720" cy="329184"/>
-          </a:xfrm>
-          <a:prstGeom prst="rect">
-            <a:avLst/>
-          </a:prstGeom>
-          <a:noFill/>
-          <a:ln/>
-        </p:spPr>
-        <p:txBody>
-          <a:bodyPr wrap="square" rtlCol="0" anchor="ctr"/>
-          <a:lstStyle/>
-          <a:p>
-            <a:pPr algn="ctr" indent="0" marL="0">
-              <a:buNone/>
-            </a:pPr>
-            <a:r>
-              <a:rPr lang="en-US" sz="1200" b="1" dirty="0">
-                <a:solidFill>
-                  <a:srgbClr val="D97706"/>
-                </a:solidFill>
-              </a:rPr>
-              <a:t>카카오 API 키 확인</a:t>
-            </a:r>
-            <a:endParaRPr lang="en-US" sz="1200" dirty="0"/>
-          </a:p>
-        </p:txBody>
-      </p:sp>
-      <p:sp>
-        <p:nvSpPr>
-          <p:cNvPr id="29" name="Text 27"/>
-          <p:cNvSpPr/>
-          <p:nvPr/>
-        </p:nvSpPr>
-        <p:spPr>
-          <a:xfrm>
-            <a:off x="4297680" y="4398264"/>
-            <a:ext cx="3419856" cy="694944"/>
-          </a:xfrm>
-          <a:prstGeom prst="rect">
-            <a:avLst/>
-          </a:prstGeom>
-          <a:noFill/>
-          <a:ln/>
-        </p:spPr>
-        <p:txBody>
-          <a:bodyPr wrap="square" rtlCol="0" anchor="ctr"/>
-          <a:lstStyle/>
-          <a:p>
-            <a:pPr indent="0" marL="0">
-              <a:buNone/>
-            </a:pPr>
-            <a:r>
-              <a:rPr lang="en-US" sz="1050" dirty="0">
-                <a:solidFill>
-                  <a:srgbClr val="6B7280"/>
-                </a:solidFill>
-              </a:rPr>
-              <a:t>앱 키 → JavaScript 키 재확인</a:t>
-            </a:r>
-            <a:endParaRPr lang="en-US" sz="1050" dirty="0"/>
-          </a:p>
-          <a:p>
-            <a:pPr indent="0" marL="0">
-              <a:buNone/>
-            </a:pPr>
-            <a:r>
-              <a:rPr lang="en-US" sz="1050" dirty="0">
-                <a:solidFill>
-                  <a:srgbClr val="6B7280"/>
-                </a:solidFill>
-              </a:rPr>
-              <a:t>NEXT_PUBLIC_KAKAO_MAP_KEY 검증</a:t>
-            </a:r>
-            <a:endParaRPr lang="en-US" sz="1050" dirty="0"/>
-          </a:p>
-          <a:p>
-            <a:pPr indent="0" marL="0">
-              <a:buNone/>
-            </a:pPr>
-            <a:r>
-              <a:rPr lang="en-US" sz="1050" dirty="0">
-                <a:solidFill>
-                  <a:srgbClr val="6B7280"/>
-                </a:solidFill>
-              </a:rPr>
-              <a:t>Kakao Map 지도 표시 테스트</a:t>
-            </a:r>
-            <a:endParaRPr lang="en-US" sz="1050" dirty="0"/>
-          </a:p>
-        </p:txBody>
-      </p:sp>
-      <p:sp>
-        <p:nvSpPr>
-          <p:cNvPr id="30" name="Shape 28"/>
-          <p:cNvSpPr/>
-          <p:nvPr/>
-        </p:nvSpPr>
-        <p:spPr>
-          <a:xfrm>
-            <a:off x="8037576" y="3886200"/>
-            <a:ext cx="3749040" cy="1280160"/>
-          </a:xfrm>
-          <a:prstGeom prst="roundRect">
-            <a:avLst>
-              <a:gd name="adj" fmla="val 9286"/>
-            </a:avLst>
-          </a:prstGeom>
-          <a:solidFill>
-            <a:srgbClr val="FFFFFF"/>
-          </a:solidFill>
-          <a:ln w="12700">
-            <a:solidFill>
-              <a:srgbClr val="E9D5FF"/>
-            </a:solidFill>
-            <a:prstDash val="solid"/>
-          </a:ln>
-        </p:spPr>
-      </p:sp>
-      <p:sp>
-        <p:nvSpPr>
-          <p:cNvPr id="31" name="Shape 29"/>
-          <p:cNvSpPr/>
-          <p:nvPr/>
-        </p:nvSpPr>
-        <p:spPr>
-          <a:xfrm>
-            <a:off x="8174736" y="4005072"/>
-            <a:ext cx="3474720" cy="329184"/>
-          </a:xfrm>
-          <a:prstGeom prst="roundRect">
-            <a:avLst>
-              <a:gd name="adj" fmla="val 22222"/>
-            </a:avLst>
-          </a:prstGeom>
-          <a:solidFill>
-            <a:srgbClr val="FFFBEB"/>
-          </a:solidFill>
-          <a:ln w="12700">
-            <a:solidFill>
-              <a:srgbClr val="FFFBEB"/>
-            </a:solidFill>
-            <a:prstDash val="solid"/>
-          </a:ln>
-        </p:spPr>
-      </p:sp>
-      <p:sp>
-        <p:nvSpPr>
-          <p:cNvPr id="32" name="Text 30"/>
-          <p:cNvSpPr/>
-          <p:nvPr/>
-        </p:nvSpPr>
-        <p:spPr>
-          <a:xfrm>
-            <a:off x="8174736" y="4005072"/>
-            <a:ext cx="3474720" cy="329184"/>
-          </a:xfrm>
-          <a:prstGeom prst="rect">
-            <a:avLst/>
-          </a:prstGeom>
-          <a:noFill/>
-          <a:ln/>
-        </p:spPr>
-        <p:txBody>
-          <a:bodyPr wrap="square" rtlCol="0" anchor="ctr"/>
-          <a:lstStyle/>
-          <a:p>
-            <a:pPr algn="ctr" indent="0" marL="0">
-              <a:buNone/>
-            </a:pPr>
-            <a:r>
-              <a:rPr lang="en-US" sz="1200" b="1" dirty="0">
-                <a:solidFill>
-                  <a:srgbClr val="D97706"/>
-                </a:solidFill>
-              </a:rPr>
-              <a:t>샘플 데이터 + 배포</a:t>
-            </a:r>
-            <a:endParaRPr lang="en-US" sz="1200" dirty="0"/>
-          </a:p>
-        </p:txBody>
-      </p:sp>
-      <p:sp>
-        <p:nvSpPr>
-          <p:cNvPr id="33" name="Text 31"/>
-          <p:cNvSpPr/>
-          <p:nvPr/>
-        </p:nvSpPr>
-        <p:spPr>
-          <a:xfrm>
-            <a:off x="8202168" y="4398264"/>
-            <a:ext cx="3419856" cy="694944"/>
-          </a:xfrm>
-          <a:prstGeom prst="rect">
-            <a:avLst/>
-          </a:prstGeom>
-          <a:noFill/>
-          <a:ln/>
-        </p:spPr>
-        <p:txBody>
-          <a:bodyPr wrap="square" rtlCol="0" anchor="ctr"/>
-          <a:lstStyle/>
-          <a:p>
-            <a:pPr indent="0" marL="0">
-              <a:buNone/>
-            </a:pPr>
-            <a:r>
-              <a:rPr lang="en-US" sz="1050" dirty="0">
-                <a:solidFill>
-                  <a:srgbClr val="6B7280"/>
-                </a:solidFill>
-              </a:rPr>
-              <a:t>실 가맹점 + 메뉴 데이터 추가</a:t>
-            </a:r>
-            <a:endParaRPr lang="en-US" sz="1050" dirty="0"/>
-          </a:p>
-          <a:p>
-            <a:pPr indent="0" marL="0">
-              <a:buNone/>
-            </a:pPr>
-            <a:r>
-              <a:rPr lang="en-US" sz="1050" dirty="0">
-                <a:solidFill>
-                  <a:srgbClr val="6B7280"/>
-                </a:solidFill>
-              </a:rPr>
-              <a:t>관리자 계정 role='admin' 설정</a:t>
-            </a:r>
-            <a:endParaRPr lang="en-US" sz="1050" dirty="0"/>
-          </a:p>
-          <a:p>
-            <a:pPr indent="0" marL="0">
-              <a:buNone/>
-            </a:pPr>
-            <a:r>
-              <a:rPr lang="en-US" sz="1050" dirty="0">
-                <a:solidFill>
-                  <a:srgbClr val="6B7280"/>
-                </a:solidFill>
-              </a:rPr>
-              <a:t>Vercel 프로덕션 배포 확인</a:t>
-            </a:r>
-            <a:endParaRPr lang="en-US" sz="1050" dirty="0"/>
-          </a:p>
-        </p:txBody>
-      </p:sp>
-      <p:sp>
-        <p:nvSpPr>
-          <p:cNvPr id="34" name="Shape 32"/>
-          <p:cNvSpPr/>
-          <p:nvPr/>
-        </p:nvSpPr>
-        <p:spPr>
-          <a:xfrm>
-            <a:off x="365760" y="5257800"/>
-            <a:ext cx="1325880" cy="384048"/>
-          </a:xfrm>
-          <a:prstGeom prst="roundRect">
-            <a:avLst>
-              <a:gd name="adj" fmla="val 23810"/>
+              <a:gd name="adj" fmla="val 5660"/>
             </a:avLst>
           </a:prstGeom>
           <a:solidFill>
@@ -11035,62 +11028,26 @@
       </p:sp>
       <p:sp>
         <p:nvSpPr>
-          <p:cNvPr id="35" name="Text 33"/>
-          <p:cNvSpPr/>
-          <p:nvPr/>
-        </p:nvSpPr>
-        <p:spPr>
-          <a:xfrm>
-            <a:off x="365760" y="5257800"/>
-            <a:ext cx="1325880" cy="384048"/>
-          </a:xfrm>
-          <a:prstGeom prst="rect">
-            <a:avLst/>
-          </a:prstGeom>
-          <a:noFill/>
-          <a:ln/>
-        </p:spPr>
-        <p:txBody>
-          <a:bodyPr wrap="square" rtlCol="0" anchor="ctr"/>
-          <a:lstStyle/>
-          <a:p>
-            <a:pPr algn="ctr" indent="0" marL="0">
-              <a:buNone/>
-            </a:pPr>
-            <a:r>
-              <a:rPr lang="en-US" sz="1100" b="1" dirty="0">
-                <a:solidFill>
-                  <a:srgbClr val="EA580C"/>
-                </a:solidFill>
-              </a:rPr>
-              <a:t>⏳ Phase 4</a:t>
-            </a:r>
-            <a:endParaRPr lang="en-US" sz="1100" dirty="0"/>
-          </a:p>
-        </p:txBody>
-      </p:sp>
-      <p:sp>
-        <p:nvSpPr>
-          <p:cNvPr id="36" name="Shape 34"/>
-          <p:cNvSpPr/>
-          <p:nvPr/>
-        </p:nvSpPr>
-        <p:spPr>
-          <a:xfrm>
-            <a:off x="228600" y="5715000"/>
-            <a:ext cx="3749040" cy="1280160"/>
+          <p:cNvPr id="48" name="Shape 46"/>
+          <p:cNvSpPr/>
+          <p:nvPr/>
+        </p:nvSpPr>
+        <p:spPr>
+          <a:xfrm>
+            <a:off x="8202168" y="3675888"/>
+            <a:ext cx="3529584" cy="384048"/>
           </a:xfrm>
           <a:prstGeom prst="roundRect">
             <a:avLst>
-              <a:gd name="adj" fmla="val 9286"/>
+              <a:gd name="adj" fmla="val 19048"/>
             </a:avLst>
           </a:prstGeom>
           <a:solidFill>
-            <a:srgbClr val="FFFFFF"/>
+            <a:srgbClr val="EA580C"/>
           </a:solidFill>
           <a:ln w="12700">
             <a:solidFill>
-              <a:srgbClr val="E9D5FF"/>
+              <a:srgbClr val="EA580C"/>
             </a:solidFill>
             <a:prstDash val="solid"/>
           </a:ln>
@@ -11098,41 +11055,14 @@
       </p:sp>
       <p:sp>
         <p:nvSpPr>
-          <p:cNvPr id="37" name="Shape 35"/>
-          <p:cNvSpPr/>
-          <p:nvPr/>
-        </p:nvSpPr>
-        <p:spPr>
-          <a:xfrm>
-            <a:off x="365760" y="5833872"/>
-            <a:ext cx="3474720" cy="329184"/>
-          </a:xfrm>
-          <a:prstGeom prst="roundRect">
-            <a:avLst>
-              <a:gd name="adj" fmla="val 22222"/>
-            </a:avLst>
-          </a:prstGeom>
-          <a:solidFill>
-            <a:srgbClr val="FFEDD5"/>
-          </a:solidFill>
-          <a:ln w="12700">
-            <a:solidFill>
-              <a:srgbClr val="FFEDD5"/>
-            </a:solidFill>
-            <a:prstDash val="solid"/>
-          </a:ln>
-        </p:spPr>
-      </p:sp>
-      <p:sp>
-        <p:nvSpPr>
-          <p:cNvPr id="38" name="Text 36"/>
-          <p:cNvSpPr/>
-          <p:nvPr/>
-        </p:nvSpPr>
-        <p:spPr>
-          <a:xfrm>
-            <a:off x="365760" y="5833872"/>
-            <a:ext cx="3474720" cy="329184"/>
+          <p:cNvPr id="49" name="Text 47"/>
+          <p:cNvSpPr/>
+          <p:nvPr/>
+        </p:nvSpPr>
+        <p:spPr>
+          <a:xfrm>
+            <a:off x="8202168" y="3675888"/>
+            <a:ext cx="3529584" cy="384048"/>
           </a:xfrm>
           <a:prstGeom prst="rect">
             <a:avLst/>
@@ -11150,10 +11080,10 @@
             <a:r>
               <a:rPr lang="en-US" sz="1200" b="1" dirty="0">
                 <a:solidFill>
-                  <a:srgbClr val="EA580C"/>
-                </a:solidFill>
-              </a:rPr>
-              <a:t>Pi Network SDK 인증</a:t>
+                  <a:srgbClr val="FFFFFF"/>
+                </a:solidFill>
+              </a:rPr>
+              <a:t>🛡️ DB / 보안 / 관리자</a:t>
             </a:r>
             <a:endParaRPr lang="en-US" sz="1200" dirty="0"/>
           </a:p>
@@ -11161,373 +11091,217 @@
       </p:sp>
       <p:sp>
         <p:nvSpPr>
-          <p:cNvPr id="39" name="Text 37"/>
-          <p:cNvSpPr/>
-          <p:nvPr/>
-        </p:nvSpPr>
-        <p:spPr>
-          <a:xfrm>
-            <a:off x="393192" y="6227064"/>
-            <a:ext cx="3419856" cy="694944"/>
-          </a:xfrm>
-          <a:prstGeom prst="rect">
-            <a:avLst/>
-          </a:prstGeom>
-          <a:noFill/>
-          <a:ln/>
-        </p:spPr>
-        <p:txBody>
-          <a:bodyPr wrap="square" rtlCol="0" anchor="ctr"/>
-          <a:lstStyle/>
-          <a:p>
-            <a:pPr indent="0" marL="0">
-              <a:buNone/>
-            </a:pPr>
-            <a:r>
-              <a:rPr lang="en-US" sz="1050" dirty="0">
-                <a:solidFill>
-                  <a:srgbClr val="6B7280"/>
-                </a:solidFill>
-              </a:rPr>
-              <a:t>Pi SDK 연동 (Mainnet 개방 후)</a:t>
-            </a:r>
-            <a:endParaRPr lang="en-US" sz="1050" dirty="0"/>
-          </a:p>
-          <a:p>
-            <a:pPr indent="0" marL="0">
-              <a:buNone/>
-            </a:pPr>
-            <a:r>
-              <a:rPr lang="en-US" sz="1050" dirty="0">
-                <a:solidFill>
-                  <a:srgbClr val="6B7280"/>
-                </a:solidFill>
-              </a:rPr>
-              <a:t>pi_uid / pi_username 필드 활성화</a:t>
-            </a:r>
-            <a:endParaRPr lang="en-US" sz="1050" dirty="0"/>
-          </a:p>
-          <a:p>
-            <a:pPr indent="0" marL="0">
-              <a:buNone/>
-            </a:pPr>
-            <a:r>
-              <a:rPr lang="en-US" sz="1050" dirty="0">
-                <a:solidFill>
-                  <a:srgbClr val="6B7280"/>
-                </a:solidFill>
-              </a:rPr>
-              <a:t>Pi 기반 로그인 플로우</a:t>
-            </a:r>
-            <a:endParaRPr lang="en-US" sz="1050" dirty="0"/>
-          </a:p>
-        </p:txBody>
-      </p:sp>
-      <p:sp>
-        <p:nvSpPr>
-          <p:cNvPr id="40" name="Shape 38"/>
-          <p:cNvSpPr/>
-          <p:nvPr/>
-        </p:nvSpPr>
-        <p:spPr>
-          <a:xfrm>
-            <a:off x="4133088" y="5715000"/>
-            <a:ext cx="3749040" cy="1280160"/>
-          </a:xfrm>
-          <a:prstGeom prst="roundRect">
-            <a:avLst>
-              <a:gd name="adj" fmla="val 9286"/>
-            </a:avLst>
-          </a:prstGeom>
-          <a:solidFill>
-            <a:srgbClr val="FFFFFF"/>
-          </a:solidFill>
-          <a:ln w="12700">
-            <a:solidFill>
-              <a:srgbClr val="E9D5FF"/>
-            </a:solidFill>
-            <a:prstDash val="solid"/>
-          </a:ln>
-        </p:spPr>
-      </p:sp>
-      <p:sp>
-        <p:nvSpPr>
-          <p:cNvPr id="41" name="Shape 39"/>
-          <p:cNvSpPr/>
-          <p:nvPr/>
-        </p:nvSpPr>
-        <p:spPr>
-          <a:xfrm>
-            <a:off x="4270248" y="5833872"/>
-            <a:ext cx="3474720" cy="329184"/>
-          </a:xfrm>
-          <a:prstGeom prst="roundRect">
-            <a:avLst>
-              <a:gd name="adj" fmla="val 22222"/>
-            </a:avLst>
-          </a:prstGeom>
-          <a:solidFill>
-            <a:srgbClr val="FFEDD5"/>
-          </a:solidFill>
-          <a:ln w="12700">
-            <a:solidFill>
-              <a:srgbClr val="FFEDD5"/>
-            </a:solidFill>
-            <a:prstDash val="solid"/>
-          </a:ln>
-        </p:spPr>
-      </p:sp>
-      <p:sp>
-        <p:nvSpPr>
-          <p:cNvPr id="42" name="Text 40"/>
-          <p:cNvSpPr/>
-          <p:nvPr/>
-        </p:nvSpPr>
-        <p:spPr>
-          <a:xfrm>
-            <a:off x="4270248" y="5833872"/>
-            <a:ext cx="3474720" cy="329184"/>
-          </a:xfrm>
-          <a:prstGeom prst="rect">
-            <a:avLst/>
-          </a:prstGeom>
-          <a:noFill/>
-          <a:ln/>
-        </p:spPr>
-        <p:txBody>
-          <a:bodyPr wrap="square" rtlCol="0" anchor="ctr"/>
-          <a:lstStyle/>
-          <a:p>
-            <a:pPr algn="ctr" indent="0" marL="0">
-              <a:buNone/>
-            </a:pPr>
-            <a:r>
-              <a:rPr lang="en-US" sz="1200" b="1" dirty="0">
-                <a:solidFill>
-                  <a:srgbClr val="EA580C"/>
-                </a:solidFill>
-              </a:rPr>
-              <a:t>Pi 코인 결제 연동</a:t>
-            </a:r>
-            <a:endParaRPr lang="en-US" sz="1200" dirty="0"/>
-          </a:p>
-        </p:txBody>
-      </p:sp>
-      <p:sp>
-        <p:nvSpPr>
-          <p:cNvPr id="43" name="Text 41"/>
-          <p:cNvSpPr/>
-          <p:nvPr/>
-        </p:nvSpPr>
-        <p:spPr>
-          <a:xfrm>
-            <a:off x="4297680" y="6227064"/>
-            <a:ext cx="3419856" cy="694944"/>
-          </a:xfrm>
-          <a:prstGeom prst="rect">
-            <a:avLst/>
-          </a:prstGeom>
-          <a:noFill/>
-          <a:ln/>
-        </p:spPr>
-        <p:txBody>
-          <a:bodyPr wrap="square" rtlCol="0" anchor="ctr"/>
-          <a:lstStyle/>
-          <a:p>
-            <a:pPr indent="0" marL="0">
-              <a:buNone/>
-            </a:pPr>
-            <a:r>
-              <a:rPr lang="en-US" sz="1050" dirty="0">
-                <a:solidFill>
-                  <a:srgbClr val="6B7280"/>
-                </a:solidFill>
-              </a:rPr>
-              <a:t>Pi 결제 API 연동</a:t>
-            </a:r>
-            <a:endParaRPr lang="en-US" sz="1050" dirty="0"/>
-          </a:p>
-          <a:p>
-            <a:pPr indent="0" marL="0">
-              <a:buNone/>
-            </a:pPr>
-            <a:r>
-              <a:rPr lang="en-US" sz="1050" dirty="0">
-                <a:solidFill>
-                  <a:srgbClr val="6B7280"/>
-                </a:solidFill>
-              </a:rPr>
-              <a:t>PICK ↔ Pi 토큰 전환</a:t>
-            </a:r>
-            <a:endParaRPr lang="en-US" sz="1050" dirty="0"/>
-          </a:p>
-          <a:p>
-            <a:pPr indent="0" marL="0">
-              <a:buNone/>
-            </a:pPr>
-            <a:r>
-              <a:rPr lang="en-US" sz="1050" dirty="0">
-                <a:solidFill>
-                  <a:srgbClr val="6B7280"/>
-                </a:solidFill>
-              </a:rPr>
-              <a:t>Pi 기반 정산 시스템</a:t>
-            </a:r>
-            <a:endParaRPr lang="en-US" sz="1050" dirty="0"/>
-          </a:p>
-        </p:txBody>
-      </p:sp>
-      <p:sp>
-        <p:nvSpPr>
-          <p:cNvPr id="44" name="Shape 42"/>
-          <p:cNvSpPr/>
-          <p:nvPr/>
-        </p:nvSpPr>
-        <p:spPr>
-          <a:xfrm>
-            <a:off x="8037576" y="5715000"/>
-            <a:ext cx="3749040" cy="1280160"/>
-          </a:xfrm>
-          <a:prstGeom prst="roundRect">
-            <a:avLst>
-              <a:gd name="adj" fmla="val 9286"/>
-            </a:avLst>
-          </a:prstGeom>
-          <a:solidFill>
-            <a:srgbClr val="FFFFFF"/>
-          </a:solidFill>
-          <a:ln w="12700">
-            <a:solidFill>
-              <a:srgbClr val="E9D5FF"/>
-            </a:solidFill>
-            <a:prstDash val="solid"/>
-          </a:ln>
-        </p:spPr>
-      </p:sp>
-      <p:sp>
-        <p:nvSpPr>
-          <p:cNvPr id="45" name="Shape 43"/>
-          <p:cNvSpPr/>
-          <p:nvPr/>
-        </p:nvSpPr>
-        <p:spPr>
-          <a:xfrm>
-            <a:off x="8174736" y="5833872"/>
-            <a:ext cx="3474720" cy="329184"/>
-          </a:xfrm>
-          <a:prstGeom prst="roundRect">
-            <a:avLst>
-              <a:gd name="adj" fmla="val 22222"/>
-            </a:avLst>
-          </a:prstGeom>
-          <a:solidFill>
-            <a:srgbClr val="FFEDD5"/>
-          </a:solidFill>
-          <a:ln w="12700">
-            <a:solidFill>
-              <a:srgbClr val="FFEDD5"/>
-            </a:solidFill>
-            <a:prstDash val="solid"/>
-          </a:ln>
-        </p:spPr>
-      </p:sp>
-      <p:sp>
-        <p:nvSpPr>
-          <p:cNvPr id="46" name="Text 44"/>
-          <p:cNvSpPr/>
-          <p:nvPr/>
-        </p:nvSpPr>
-        <p:spPr>
-          <a:xfrm>
-            <a:off x="8174736" y="5833872"/>
-            <a:ext cx="3474720" cy="329184"/>
-          </a:xfrm>
-          <a:prstGeom prst="rect">
-            <a:avLst/>
-          </a:prstGeom>
-          <a:noFill/>
-          <a:ln/>
-        </p:spPr>
-        <p:txBody>
-          <a:bodyPr wrap="square" rtlCol="0" anchor="ctr"/>
-          <a:lstStyle/>
-          <a:p>
-            <a:pPr algn="ctr" indent="0" marL="0">
-              <a:buNone/>
-            </a:pPr>
-            <a:r>
-              <a:rPr lang="en-US" sz="1200" b="1" dirty="0">
-                <a:solidFill>
-                  <a:srgbClr val="EA580C"/>
-                </a:solidFill>
-              </a:rPr>
-              <a:t>Pi 생태계 확장</a:t>
-            </a:r>
-            <a:endParaRPr lang="en-US" sz="1200" dirty="0"/>
-          </a:p>
-        </p:txBody>
-      </p:sp>
-      <p:sp>
-        <p:nvSpPr>
-          <p:cNvPr id="47" name="Text 45"/>
-          <p:cNvSpPr/>
-          <p:nvPr/>
-        </p:nvSpPr>
-        <p:spPr>
-          <a:xfrm>
-            <a:off x="8202168" y="6227064"/>
-            <a:ext cx="3419856" cy="694944"/>
-          </a:xfrm>
-          <a:prstGeom prst="rect">
-            <a:avLst/>
-          </a:prstGeom>
-          <a:noFill/>
-          <a:ln/>
-        </p:spPr>
-        <p:txBody>
-          <a:bodyPr wrap="square" rtlCol="0" anchor="ctr"/>
-          <a:lstStyle/>
-          <a:p>
-            <a:pPr indent="0" marL="0">
-              <a:buNone/>
-            </a:pPr>
-            <a:r>
-              <a:rPr lang="en-US" sz="1050" dirty="0">
-                <a:solidFill>
-                  <a:srgbClr val="6B7280"/>
-                </a:solidFill>
-              </a:rPr>
-              <a:t>Pi 마이닝 연동 혜택</a:t>
-            </a:r>
-            <a:endParaRPr lang="en-US" sz="1050" dirty="0"/>
-          </a:p>
-          <a:p>
-            <a:pPr indent="0" marL="0">
-              <a:buNone/>
-            </a:pPr>
-            <a:r>
-              <a:rPr lang="en-US" sz="1050" dirty="0">
-                <a:solidFill>
-                  <a:srgbClr val="6B7280"/>
-                </a:solidFill>
-              </a:rPr>
-              <a:t>Pi 홀더 전용 할인 쿠폰</a:t>
-            </a:r>
-            <a:endParaRPr lang="en-US" sz="1050" dirty="0"/>
-          </a:p>
-          <a:p>
-            <a:pPr indent="0" marL="0">
-              <a:buNone/>
-            </a:pPr>
-            <a:r>
-              <a:rPr lang="en-US" sz="1050" dirty="0">
-                <a:solidFill>
-                  <a:srgbClr val="6B7280"/>
-                </a:solidFill>
-              </a:rPr>
-              <a:t>Pi Network 커뮤니티 마케팅</a:t>
-            </a:r>
-            <a:endParaRPr lang="en-US" sz="1050" dirty="0"/>
+          <p:cNvPr id="50" name="Text 48"/>
+          <p:cNvSpPr/>
+          <p:nvPr/>
+        </p:nvSpPr>
+        <p:spPr>
+          <a:xfrm>
+            <a:off x="8257032" y="4160520"/>
+            <a:ext cx="3401568" cy="338328"/>
+          </a:xfrm>
+          <a:prstGeom prst="rect">
+            <a:avLst/>
+          </a:prstGeom>
+          <a:noFill/>
+          <a:ln/>
+        </p:spPr>
+        <p:txBody>
+          <a:bodyPr wrap="square" rtlCol="0" anchor="ctr"/>
+          <a:lstStyle/>
+          <a:p>
+            <a:pPr indent="0" marL="0">
+              <a:buNone/>
+            </a:pPr>
+            <a:r>
+              <a:rPr lang="en-US" sz="1000" dirty="0">
+                <a:solidFill>
+                  <a:srgbClr val="1F1235"/>
+                </a:solidFill>
+              </a:rPr>
+              <a:t>✓  DB 인덱스 30개+ (GIN 전문검색 포함)</a:t>
+            </a:r>
+            <a:endParaRPr lang="en-US" sz="1000" dirty="0"/>
+          </a:p>
+        </p:txBody>
+      </p:sp>
+      <p:sp>
+        <p:nvSpPr>
+          <p:cNvPr id="51" name="Text 49"/>
+          <p:cNvSpPr/>
+          <p:nvPr/>
+        </p:nvSpPr>
+        <p:spPr>
+          <a:xfrm>
+            <a:off x="8257032" y="4507992"/>
+            <a:ext cx="3401568" cy="338328"/>
+          </a:xfrm>
+          <a:prstGeom prst="rect">
+            <a:avLst/>
+          </a:prstGeom>
+          <a:noFill/>
+          <a:ln/>
+        </p:spPr>
+        <p:txBody>
+          <a:bodyPr wrap="square" rtlCol="0" anchor="ctr"/>
+          <a:lstStyle/>
+          <a:p>
+            <a:pPr indent="0" marL="0">
+              <a:buNone/>
+            </a:pPr>
+            <a:r>
+              <a:rPr lang="en-US" sz="1000" dirty="0">
+                <a:solidFill>
+                  <a:srgbClr val="1F1235"/>
+                </a:solidFill>
+              </a:rPr>
+              <a:t>✓  운영 RLS 정책 + Storage 버킷 정책</a:t>
+            </a:r>
+            <a:endParaRPr lang="en-US" sz="1000" dirty="0"/>
+          </a:p>
+        </p:txBody>
+      </p:sp>
+      <p:sp>
+        <p:nvSpPr>
+          <p:cNvPr id="52" name="Text 50"/>
+          <p:cNvSpPr/>
+          <p:nvPr/>
+        </p:nvSpPr>
+        <p:spPr>
+          <a:xfrm>
+            <a:off x="8257032" y="4855464"/>
+            <a:ext cx="3401568" cy="338328"/>
+          </a:xfrm>
+          <a:prstGeom prst="rect">
+            <a:avLst/>
+          </a:prstGeom>
+          <a:noFill/>
+          <a:ln/>
+        </p:spPr>
+        <p:txBody>
+          <a:bodyPr wrap="square" rtlCol="0" anchor="ctr"/>
+          <a:lstStyle/>
+          <a:p>
+            <a:pPr indent="0" marL="0">
+              <a:buNone/>
+            </a:pPr>
+            <a:r>
+              <a:rPr lang="en-US" sz="1000" dirty="0">
+                <a:solidFill>
+                  <a:srgbClr val="1F1235"/>
+                </a:solidFill>
+              </a:rPr>
+              <a:t>✓  RLS 라이더 미배정 주문 조회 정책 추가</a:t>
+            </a:r>
+            <a:endParaRPr lang="en-US" sz="1000" dirty="0"/>
+          </a:p>
+        </p:txBody>
+      </p:sp>
+      <p:sp>
+        <p:nvSpPr>
+          <p:cNvPr id="53" name="Text 51"/>
+          <p:cNvSpPr/>
+          <p:nvPr/>
+        </p:nvSpPr>
+        <p:spPr>
+          <a:xfrm>
+            <a:off x="8257032" y="5202936"/>
+            <a:ext cx="3401568" cy="338328"/>
+          </a:xfrm>
+          <a:prstGeom prst="rect">
+            <a:avLst/>
+          </a:prstGeom>
+          <a:noFill/>
+          <a:ln/>
+        </p:spPr>
+        <p:txBody>
+          <a:bodyPr wrap="square" rtlCol="0" anchor="ctr"/>
+          <a:lstStyle/>
+          <a:p>
+            <a:pPr indent="0" marL="0">
+              <a:buNone/>
+            </a:pPr>
+            <a:r>
+              <a:rPr lang="en-US" sz="1000" dirty="0">
+                <a:solidFill>
+                  <a:srgbClr val="1F1235"/>
+                </a:solidFill>
+              </a:rPr>
+              <a:t>✓  관리자 5탭: 통계·회원·가게·쿠폰·FCM 푸시</a:t>
+            </a:r>
+            <a:endParaRPr lang="en-US" sz="1000" dirty="0"/>
+          </a:p>
+        </p:txBody>
+      </p:sp>
+      <p:sp>
+        <p:nvSpPr>
+          <p:cNvPr id="54" name="Text 52"/>
+          <p:cNvSpPr/>
+          <p:nvPr/>
+        </p:nvSpPr>
+        <p:spPr>
+          <a:xfrm>
+            <a:off x="8257032" y="5550408"/>
+            <a:ext cx="3401568" cy="338328"/>
+          </a:xfrm>
+          <a:prstGeom prst="rect">
+            <a:avLst/>
+          </a:prstGeom>
+          <a:noFill/>
+          <a:ln/>
+        </p:spPr>
+        <p:txBody>
+          <a:bodyPr wrap="square" rtlCol="0" anchor="ctr"/>
+          <a:lstStyle/>
+          <a:p>
+            <a:pPr indent="0" marL="0">
+              <a:buNone/>
+            </a:pPr>
+            <a:r>
+              <a:rPr lang="en-US" sz="1000" dirty="0">
+                <a:solidFill>
+                  <a:srgbClr val="1F1235"/>
+                </a:solidFill>
+              </a:rPr>
+              <a:t>✓  404·에러·로딩·스플래시 페이지</a:t>
+            </a:r>
+            <a:endParaRPr lang="en-US" sz="1000" dirty="0"/>
+          </a:p>
+        </p:txBody>
+      </p:sp>
+      <p:sp>
+        <p:nvSpPr>
+          <p:cNvPr id="55" name="Text 53"/>
+          <p:cNvSpPr/>
+          <p:nvPr/>
+        </p:nvSpPr>
+        <p:spPr>
+          <a:xfrm>
+            <a:off x="8257032" y="5897880"/>
+            <a:ext cx="3401568" cy="338328"/>
+          </a:xfrm>
+          <a:prstGeom prst="rect">
+            <a:avLst/>
+          </a:prstGeom>
+          <a:noFill/>
+          <a:ln/>
+        </p:spPr>
+        <p:txBody>
+          <a:bodyPr wrap="square" rtlCol="0" anchor="ctr"/>
+          <a:lstStyle/>
+          <a:p>
+            <a:pPr indent="0" marL="0">
+              <a:buNone/>
+            </a:pPr>
+            <a:r>
+              <a:rPr lang="en-US" sz="1000" dirty="0">
+                <a:solidFill>
+                  <a:srgbClr val="1F1235"/>
+                </a:solidFill>
+              </a:rPr>
+              <a:t>✓  다크모드 + Tailwind dark: 클래스 전면 적용</a:t>
+            </a:r>
+            <a:endParaRPr lang="en-US" sz="1000" dirty="0"/>
           </a:p>
         </p:txBody>
       </p:sp>
@@ -11593,6 +11367,1737 @@
                   <a:srgbClr val="4C1D95"/>
                 </a:solidFill>
               </a:rPr>
+              <a:t>🚀  Phase 1~3 완성 · 다음 단계 로드맵</a:t>
+            </a:r>
+            <a:endParaRPr lang="en-US" sz="2600" dirty="0"/>
+          </a:p>
+        </p:txBody>
+      </p:sp>
+      <p:sp>
+        <p:nvSpPr>
+          <p:cNvPr id="3" name="Shape 1"/>
+          <p:cNvSpPr/>
+          <p:nvPr/>
+        </p:nvSpPr>
+        <p:spPr>
+          <a:xfrm>
+            <a:off x="365760" y="804672"/>
+            <a:ext cx="3657600" cy="45720"/>
+          </a:xfrm>
+          <a:prstGeom prst="rect">
+            <a:avLst/>
+          </a:prstGeom>
+          <a:solidFill>
+            <a:srgbClr val="16A34A"/>
+          </a:solidFill>
+          <a:ln w="12700">
+            <a:solidFill>
+              <a:srgbClr val="16A34A"/>
+            </a:solidFill>
+            <a:prstDash val="solid"/>
+          </a:ln>
+        </p:spPr>
+      </p:sp>
+      <p:sp>
+        <p:nvSpPr>
+          <p:cNvPr id="4" name="Shape 2"/>
+          <p:cNvSpPr/>
+          <p:nvPr/>
+        </p:nvSpPr>
+        <p:spPr>
+          <a:xfrm>
+            <a:off x="365760" y="914400"/>
+            <a:ext cx="12070080" cy="548640"/>
+          </a:xfrm>
+          <a:prstGeom prst="roundRect">
+            <a:avLst>
+              <a:gd name="adj" fmla="val 20000"/>
+            </a:avLst>
+          </a:prstGeom>
+          <a:solidFill>
+            <a:srgbClr val="DCFCE7"/>
+          </a:solidFill>
+          <a:ln w="12700">
+            <a:solidFill>
+              <a:srgbClr val="16A34A"/>
+            </a:solidFill>
+            <a:prstDash val="solid"/>
+          </a:ln>
+        </p:spPr>
+      </p:sp>
+      <p:sp>
+        <p:nvSpPr>
+          <p:cNvPr id="5" name="Text 3"/>
+          <p:cNvSpPr/>
+          <p:nvPr/>
+        </p:nvSpPr>
+        <p:spPr>
+          <a:xfrm>
+            <a:off x="365760" y="914400"/>
+            <a:ext cx="12070080" cy="548640"/>
+          </a:xfrm>
+          <a:prstGeom prst="rect">
+            <a:avLst/>
+          </a:prstGeom>
+          <a:noFill/>
+          <a:ln/>
+        </p:spPr>
+        <p:txBody>
+          <a:bodyPr wrap="square" rtlCol="0" anchor="ctr"/>
+          <a:lstStyle/>
+          <a:p>
+            <a:pPr algn="ctr" indent="0" marL="0">
+              <a:buNone/>
+            </a:pPr>
+            <a:r>
+              <a:rPr lang="en-US" sz="1400" b="1" dirty="0">
+                <a:solidFill>
+                  <a:srgbClr val="16A34A"/>
+                </a:solidFill>
+              </a:rPr>
+              <a:t>🎉  Phase 1~3 완성! 70개+ 기능 구현 · 미착수 기능 0개 · Pi Network 연동 플랜 수립 완료</a:t>
+            </a:r>
+            <a:endParaRPr lang="en-US" sz="1400" dirty="0"/>
+          </a:p>
+        </p:txBody>
+      </p:sp>
+      <p:sp>
+        <p:nvSpPr>
+          <p:cNvPr id="6" name="Shape 4"/>
+          <p:cNvSpPr/>
+          <p:nvPr/>
+        </p:nvSpPr>
+        <p:spPr>
+          <a:xfrm>
+            <a:off x="365760" y="1600200"/>
+            <a:ext cx="1325880" cy="384048"/>
+          </a:xfrm>
+          <a:prstGeom prst="roundRect">
+            <a:avLst>
+              <a:gd name="adj" fmla="val 23810"/>
+            </a:avLst>
+          </a:prstGeom>
+          <a:solidFill>
+            <a:srgbClr val="DCFCE7"/>
+          </a:solidFill>
+          <a:ln w="12700">
+            <a:solidFill>
+              <a:srgbClr val="16A34A"/>
+            </a:solidFill>
+            <a:prstDash val="solid"/>
+          </a:ln>
+        </p:spPr>
+      </p:sp>
+      <p:sp>
+        <p:nvSpPr>
+          <p:cNvPr id="7" name="Text 5"/>
+          <p:cNvSpPr/>
+          <p:nvPr/>
+        </p:nvSpPr>
+        <p:spPr>
+          <a:xfrm>
+            <a:off x="365760" y="1600200"/>
+            <a:ext cx="1325880" cy="384048"/>
+          </a:xfrm>
+          <a:prstGeom prst="rect">
+            <a:avLst/>
+          </a:prstGeom>
+          <a:noFill/>
+          <a:ln/>
+        </p:spPr>
+        <p:txBody>
+          <a:bodyPr wrap="square" rtlCol="0" anchor="ctr"/>
+          <a:lstStyle/>
+          <a:p>
+            <a:pPr algn="ctr" indent="0" marL="0">
+              <a:buNone/>
+            </a:pPr>
+            <a:r>
+              <a:rPr lang="en-US" sz="1100" b="1" dirty="0">
+                <a:solidFill>
+                  <a:srgbClr val="16A34A"/>
+                </a:solidFill>
+              </a:rPr>
+              <a:t>✅ Phase 1~3</a:t>
+            </a:r>
+            <a:endParaRPr lang="en-US" sz="1100" dirty="0"/>
+          </a:p>
+        </p:txBody>
+      </p:sp>
+      <p:sp>
+        <p:nvSpPr>
+          <p:cNvPr id="8" name="Shape 6"/>
+          <p:cNvSpPr/>
+          <p:nvPr/>
+        </p:nvSpPr>
+        <p:spPr>
+          <a:xfrm>
+            <a:off x="228600" y="2057400"/>
+            <a:ext cx="3749040" cy="1280160"/>
+          </a:xfrm>
+          <a:prstGeom prst="roundRect">
+            <a:avLst>
+              <a:gd name="adj" fmla="val 9286"/>
+            </a:avLst>
+          </a:prstGeom>
+          <a:solidFill>
+            <a:srgbClr val="FFFFFF"/>
+          </a:solidFill>
+          <a:ln w="12700">
+            <a:solidFill>
+              <a:srgbClr val="E9D5FF"/>
+            </a:solidFill>
+            <a:prstDash val="solid"/>
+          </a:ln>
+        </p:spPr>
+      </p:sp>
+      <p:sp>
+        <p:nvSpPr>
+          <p:cNvPr id="9" name="Shape 7"/>
+          <p:cNvSpPr/>
+          <p:nvPr/>
+        </p:nvSpPr>
+        <p:spPr>
+          <a:xfrm>
+            <a:off x="365760" y="2176272"/>
+            <a:ext cx="3474720" cy="329184"/>
+          </a:xfrm>
+          <a:prstGeom prst="roundRect">
+            <a:avLst>
+              <a:gd name="adj" fmla="val 22222"/>
+            </a:avLst>
+          </a:prstGeom>
+          <a:solidFill>
+            <a:srgbClr val="DCFCE7"/>
+          </a:solidFill>
+          <a:ln w="12700">
+            <a:solidFill>
+              <a:srgbClr val="DCFCE7"/>
+            </a:solidFill>
+            <a:prstDash val="solid"/>
+          </a:ln>
+        </p:spPr>
+      </p:sp>
+      <p:sp>
+        <p:nvSpPr>
+          <p:cNvPr id="10" name="Text 8"/>
+          <p:cNvSpPr/>
+          <p:nvPr/>
+        </p:nvSpPr>
+        <p:spPr>
+          <a:xfrm>
+            <a:off x="365760" y="2176272"/>
+            <a:ext cx="3474720" cy="329184"/>
+          </a:xfrm>
+          <a:prstGeom prst="rect">
+            <a:avLst/>
+          </a:prstGeom>
+          <a:noFill/>
+          <a:ln/>
+        </p:spPr>
+        <p:txBody>
+          <a:bodyPr wrap="square" rtlCol="0" anchor="ctr"/>
+          <a:lstStyle/>
+          <a:p>
+            <a:pPr algn="ctr" indent="0" marL="0">
+              <a:buNone/>
+            </a:pPr>
+            <a:r>
+              <a:rPr lang="en-US" sz="1200" b="1" dirty="0">
+                <a:solidFill>
+                  <a:srgbClr val="16A34A"/>
+                </a:solidFill>
+              </a:rPr>
+              <a:t>인증 · 지갑 · 주문 플로우</a:t>
+            </a:r>
+            <a:endParaRPr lang="en-US" sz="1200" dirty="0"/>
+          </a:p>
+        </p:txBody>
+      </p:sp>
+      <p:sp>
+        <p:nvSpPr>
+          <p:cNvPr id="11" name="Text 9"/>
+          <p:cNvSpPr/>
+          <p:nvPr/>
+        </p:nvSpPr>
+        <p:spPr>
+          <a:xfrm>
+            <a:off x="393192" y="2569464"/>
+            <a:ext cx="3419856" cy="694944"/>
+          </a:xfrm>
+          <a:prstGeom prst="rect">
+            <a:avLst/>
+          </a:prstGeom>
+          <a:noFill/>
+          <a:ln/>
+        </p:spPr>
+        <p:txBody>
+          <a:bodyPr wrap="square" rtlCol="0" anchor="ctr"/>
+          <a:lstStyle/>
+          <a:p>
+            <a:pPr indent="0" marL="0">
+              <a:buNone/>
+            </a:pPr>
+            <a:r>
+              <a:rPr lang="en-US" sz="1050" dirty="0">
+                <a:solidFill>
+                  <a:srgbClr val="6B7280"/>
+                </a:solidFill>
+              </a:rPr>
+              <a:t>이메일 로그인 (카카오 비즈니스 후 추가)</a:t>
+            </a:r>
+            <a:endParaRPr lang="en-US" sz="1050" dirty="0"/>
+          </a:p>
+          <a:p>
+            <a:pPr indent="0" marL="0">
+              <a:buNone/>
+            </a:pPr>
+            <a:r>
+              <a:rPr lang="en-US" sz="1050" dirty="0">
+                <a:solidFill>
+                  <a:srgbClr val="6B7280"/>
+                </a:solidFill>
+              </a:rPr>
+              <a:t>PICK 토큰 지갑 + 토스페이먼츠</a:t>
+            </a:r>
+            <a:endParaRPr lang="en-US" sz="1050" dirty="0"/>
+          </a:p>
+          <a:p>
+            <a:pPr indent="0" marL="0">
+              <a:buNone/>
+            </a:pPr>
+            <a:r>
+              <a:rPr lang="en-US" sz="1050" dirty="0">
+                <a:solidFill>
+                  <a:srgbClr val="6B7280"/>
+                </a:solidFill>
+              </a:rPr>
+              <a:t>Realtime 주문 추적 완성</a:t>
+            </a:r>
+            <a:endParaRPr lang="en-US" sz="1050" dirty="0"/>
+          </a:p>
+        </p:txBody>
+      </p:sp>
+      <p:sp>
+        <p:nvSpPr>
+          <p:cNvPr id="12" name="Shape 10"/>
+          <p:cNvSpPr/>
+          <p:nvPr/>
+        </p:nvSpPr>
+        <p:spPr>
+          <a:xfrm>
+            <a:off x="4133088" y="2057400"/>
+            <a:ext cx="3749040" cy="1280160"/>
+          </a:xfrm>
+          <a:prstGeom prst="roundRect">
+            <a:avLst>
+              <a:gd name="adj" fmla="val 9286"/>
+            </a:avLst>
+          </a:prstGeom>
+          <a:solidFill>
+            <a:srgbClr val="FFFFFF"/>
+          </a:solidFill>
+          <a:ln w="12700">
+            <a:solidFill>
+              <a:srgbClr val="E9D5FF"/>
+            </a:solidFill>
+            <a:prstDash val="solid"/>
+          </a:ln>
+        </p:spPr>
+      </p:sp>
+      <p:sp>
+        <p:nvSpPr>
+          <p:cNvPr id="13" name="Shape 11"/>
+          <p:cNvSpPr/>
+          <p:nvPr/>
+        </p:nvSpPr>
+        <p:spPr>
+          <a:xfrm>
+            <a:off x="4270248" y="2176272"/>
+            <a:ext cx="3474720" cy="329184"/>
+          </a:xfrm>
+          <a:prstGeom prst="roundRect">
+            <a:avLst>
+              <a:gd name="adj" fmla="val 22222"/>
+            </a:avLst>
+          </a:prstGeom>
+          <a:solidFill>
+            <a:srgbClr val="DCFCE7"/>
+          </a:solidFill>
+          <a:ln w="12700">
+            <a:solidFill>
+              <a:srgbClr val="DCFCE7"/>
+            </a:solidFill>
+            <a:prstDash val="solid"/>
+          </a:ln>
+        </p:spPr>
+      </p:sp>
+      <p:sp>
+        <p:nvSpPr>
+          <p:cNvPr id="14" name="Text 12"/>
+          <p:cNvSpPr/>
+          <p:nvPr/>
+        </p:nvSpPr>
+        <p:spPr>
+          <a:xfrm>
+            <a:off x="4270248" y="2176272"/>
+            <a:ext cx="3474720" cy="329184"/>
+          </a:xfrm>
+          <a:prstGeom prst="rect">
+            <a:avLst/>
+          </a:prstGeom>
+          <a:noFill/>
+          <a:ln/>
+        </p:spPr>
+        <p:txBody>
+          <a:bodyPr wrap="square" rtlCol="0" anchor="ctr"/>
+          <a:lstStyle/>
+          <a:p>
+            <a:pPr algn="ctr" indent="0" marL="0">
+              <a:buNone/>
+            </a:pPr>
+            <a:r>
+              <a:rPr lang="en-US" sz="1200" b="1" dirty="0">
+                <a:solidFill>
+                  <a:srgbClr val="16A34A"/>
+                </a:solidFill>
+              </a:rPr>
+              <a:t>사장님 · 라이더 · 관리자</a:t>
+            </a:r>
+            <a:endParaRPr lang="en-US" sz="1200" dirty="0"/>
+          </a:p>
+        </p:txBody>
+      </p:sp>
+      <p:sp>
+        <p:nvSpPr>
+          <p:cNvPr id="15" name="Text 13"/>
+          <p:cNvSpPr/>
+          <p:nvPr/>
+        </p:nvSpPr>
+        <p:spPr>
+          <a:xfrm>
+            <a:off x="4297680" y="2569464"/>
+            <a:ext cx="3419856" cy="694944"/>
+          </a:xfrm>
+          <a:prstGeom prst="rect">
+            <a:avLst/>
+          </a:prstGeom>
+          <a:noFill/>
+          <a:ln/>
+        </p:spPr>
+        <p:txBody>
+          <a:bodyPr wrap="square" rtlCol="0" anchor="ctr"/>
+          <a:lstStyle/>
+          <a:p>
+            <a:pPr indent="0" marL="0">
+              <a:buNone/>
+            </a:pPr>
+            <a:r>
+              <a:rPr lang="en-US" sz="1050" dirty="0">
+                <a:solidFill>
+                  <a:srgbClr val="6B7280"/>
+                </a:solidFill>
+              </a:rPr>
+              <a:t>사장님 주문/메뉴/정산/통계</a:t>
+            </a:r>
+            <a:endParaRPr lang="en-US" sz="1050" dirty="0"/>
+          </a:p>
+          <a:p>
+            <a:pPr indent="0" marL="0">
+              <a:buNone/>
+            </a:pPr>
+            <a:r>
+              <a:rPr lang="en-US" sz="1050" dirty="0">
+                <a:solidFill>
+                  <a:srgbClr val="6B7280"/>
+                </a:solidFill>
+              </a:rPr>
+              <a:t>라이더 수락/위치공유/수익</a:t>
+            </a:r>
+            <a:endParaRPr lang="en-US" sz="1050" dirty="0"/>
+          </a:p>
+          <a:p>
+            <a:pPr indent="0" marL="0">
+              <a:buNone/>
+            </a:pPr>
+            <a:r>
+              <a:rPr lang="en-US" sz="1050" dirty="0">
+                <a:solidFill>
+                  <a:srgbClr val="6B7280"/>
+                </a:solidFill>
+              </a:rPr>
+              <a:t>관리자 5탭 대시보드</a:t>
+            </a:r>
+            <a:endParaRPr lang="en-US" sz="1050" dirty="0"/>
+          </a:p>
+        </p:txBody>
+      </p:sp>
+      <p:sp>
+        <p:nvSpPr>
+          <p:cNvPr id="16" name="Shape 14"/>
+          <p:cNvSpPr/>
+          <p:nvPr/>
+        </p:nvSpPr>
+        <p:spPr>
+          <a:xfrm>
+            <a:off x="8037576" y="2057400"/>
+            <a:ext cx="3749040" cy="1280160"/>
+          </a:xfrm>
+          <a:prstGeom prst="roundRect">
+            <a:avLst>
+              <a:gd name="adj" fmla="val 9286"/>
+            </a:avLst>
+          </a:prstGeom>
+          <a:solidFill>
+            <a:srgbClr val="FFFFFF"/>
+          </a:solidFill>
+          <a:ln w="12700">
+            <a:solidFill>
+              <a:srgbClr val="E9D5FF"/>
+            </a:solidFill>
+            <a:prstDash val="solid"/>
+          </a:ln>
+        </p:spPr>
+      </p:sp>
+      <p:sp>
+        <p:nvSpPr>
+          <p:cNvPr id="17" name="Shape 15"/>
+          <p:cNvSpPr/>
+          <p:nvPr/>
+        </p:nvSpPr>
+        <p:spPr>
+          <a:xfrm>
+            <a:off x="8174736" y="2176272"/>
+            <a:ext cx="3474720" cy="329184"/>
+          </a:xfrm>
+          <a:prstGeom prst="roundRect">
+            <a:avLst>
+              <a:gd name="adj" fmla="val 22222"/>
+            </a:avLst>
+          </a:prstGeom>
+          <a:solidFill>
+            <a:srgbClr val="DCFCE7"/>
+          </a:solidFill>
+          <a:ln w="12700">
+            <a:solidFill>
+              <a:srgbClr val="DCFCE7"/>
+            </a:solidFill>
+            <a:prstDash val="solid"/>
+          </a:ln>
+        </p:spPr>
+      </p:sp>
+      <p:sp>
+        <p:nvSpPr>
+          <p:cNvPr id="18" name="Text 16"/>
+          <p:cNvSpPr/>
+          <p:nvPr/>
+        </p:nvSpPr>
+        <p:spPr>
+          <a:xfrm>
+            <a:off x="8174736" y="2176272"/>
+            <a:ext cx="3474720" cy="329184"/>
+          </a:xfrm>
+          <a:prstGeom prst="rect">
+            <a:avLst/>
+          </a:prstGeom>
+          <a:noFill/>
+          <a:ln/>
+        </p:spPr>
+        <p:txBody>
+          <a:bodyPr wrap="square" rtlCol="0" anchor="ctr"/>
+          <a:lstStyle/>
+          <a:p>
+            <a:pPr algn="ctr" indent="0" marL="0">
+              <a:buNone/>
+            </a:pPr>
+            <a:r>
+              <a:rPr lang="en-US" sz="1200" b="1" dirty="0">
+                <a:solidFill>
+                  <a:srgbClr val="16A34A"/>
+                </a:solidFill>
+              </a:rPr>
+              <a:t>PWA · 보안 · DB 최적화</a:t>
+            </a:r>
+            <a:endParaRPr lang="en-US" sz="1200" dirty="0"/>
+          </a:p>
+        </p:txBody>
+      </p:sp>
+      <p:sp>
+        <p:nvSpPr>
+          <p:cNvPr id="19" name="Text 17"/>
+          <p:cNvSpPr/>
+          <p:nvPr/>
+        </p:nvSpPr>
+        <p:spPr>
+          <a:xfrm>
+            <a:off x="8202168" y="2569464"/>
+            <a:ext cx="3419856" cy="694944"/>
+          </a:xfrm>
+          <a:prstGeom prst="rect">
+            <a:avLst/>
+          </a:prstGeom>
+          <a:noFill/>
+          <a:ln/>
+        </p:spPr>
+        <p:txBody>
+          <a:bodyPr wrap="square" rtlCol="0" anchor="ctr"/>
+          <a:lstStyle/>
+          <a:p>
+            <a:pPr indent="0" marL="0">
+              <a:buNone/>
+            </a:pPr>
+            <a:r>
+              <a:rPr lang="en-US" sz="1050" dirty="0">
+                <a:solidFill>
+                  <a:srgbClr val="6B7280"/>
+                </a:solidFill>
+              </a:rPr>
+              <a:t>Serwist 오프라인 캐싱</a:t>
+            </a:r>
+            <a:endParaRPr lang="en-US" sz="1050" dirty="0"/>
+          </a:p>
+          <a:p>
+            <a:pPr indent="0" marL="0">
+              <a:buNone/>
+            </a:pPr>
+            <a:r>
+              <a:rPr lang="en-US" sz="1050" dirty="0">
+                <a:solidFill>
+                  <a:srgbClr val="6B7280"/>
+                </a:solidFill>
+              </a:rPr>
+              <a:t>RLS + 인덱스 30개+ + FCM 푸시</a:t>
+            </a:r>
+            <a:endParaRPr lang="en-US" sz="1050" dirty="0"/>
+          </a:p>
+          <a:p>
+            <a:pPr indent="0" marL="0">
+              <a:buNone/>
+            </a:pPr>
+            <a:r>
+              <a:rPr lang="en-US" sz="1050" dirty="0">
+                <a:solidFill>
+                  <a:srgbClr val="6B7280"/>
+                </a:solidFill>
+              </a:rPr>
+              <a:t>Sentry + Storage 정책 완성</a:t>
+            </a:r>
+            <a:endParaRPr lang="en-US" sz="1050" dirty="0"/>
+          </a:p>
+        </p:txBody>
+      </p:sp>
+      <p:sp>
+        <p:nvSpPr>
+          <p:cNvPr id="20" name="Shape 18"/>
+          <p:cNvSpPr/>
+          <p:nvPr/>
+        </p:nvSpPr>
+        <p:spPr>
+          <a:xfrm>
+            <a:off x="365760" y="3429000"/>
+            <a:ext cx="1325880" cy="384048"/>
+          </a:xfrm>
+          <a:prstGeom prst="roundRect">
+            <a:avLst>
+              <a:gd name="adj" fmla="val 23810"/>
+            </a:avLst>
+          </a:prstGeom>
+          <a:solidFill>
+            <a:srgbClr val="FFFBEB"/>
+          </a:solidFill>
+          <a:ln w="12700">
+            <a:solidFill>
+              <a:srgbClr val="D97706"/>
+            </a:solidFill>
+            <a:prstDash val="solid"/>
+          </a:ln>
+        </p:spPr>
+      </p:sp>
+      <p:sp>
+        <p:nvSpPr>
+          <p:cNvPr id="21" name="Text 19"/>
+          <p:cNvSpPr/>
+          <p:nvPr/>
+        </p:nvSpPr>
+        <p:spPr>
+          <a:xfrm>
+            <a:off x="365760" y="3429000"/>
+            <a:ext cx="1325880" cy="384048"/>
+          </a:xfrm>
+          <a:prstGeom prst="rect">
+            <a:avLst/>
+          </a:prstGeom>
+          <a:noFill/>
+          <a:ln/>
+        </p:spPr>
+        <p:txBody>
+          <a:bodyPr wrap="square" rtlCol="0" anchor="ctr"/>
+          <a:lstStyle/>
+          <a:p>
+            <a:pPr algn="ctr" indent="0" marL="0">
+              <a:buNone/>
+            </a:pPr>
+            <a:r>
+              <a:rPr lang="en-US" sz="1100" b="1" dirty="0">
+                <a:solidFill>
+                  <a:srgbClr val="D97706"/>
+                </a:solidFill>
+              </a:rPr>
+              <a:t>🟡 런칭 준비</a:t>
+            </a:r>
+            <a:endParaRPr lang="en-US" sz="1100" dirty="0"/>
+          </a:p>
+        </p:txBody>
+      </p:sp>
+      <p:sp>
+        <p:nvSpPr>
+          <p:cNvPr id="22" name="Shape 20"/>
+          <p:cNvSpPr/>
+          <p:nvPr/>
+        </p:nvSpPr>
+        <p:spPr>
+          <a:xfrm>
+            <a:off x="228600" y="3886200"/>
+            <a:ext cx="3749040" cy="1280160"/>
+          </a:xfrm>
+          <a:prstGeom prst="roundRect">
+            <a:avLst>
+              <a:gd name="adj" fmla="val 9286"/>
+            </a:avLst>
+          </a:prstGeom>
+          <a:solidFill>
+            <a:srgbClr val="FFFFFF"/>
+          </a:solidFill>
+          <a:ln w="12700">
+            <a:solidFill>
+              <a:srgbClr val="E9D5FF"/>
+            </a:solidFill>
+            <a:prstDash val="solid"/>
+          </a:ln>
+        </p:spPr>
+      </p:sp>
+      <p:sp>
+        <p:nvSpPr>
+          <p:cNvPr id="23" name="Shape 21"/>
+          <p:cNvSpPr/>
+          <p:nvPr/>
+        </p:nvSpPr>
+        <p:spPr>
+          <a:xfrm>
+            <a:off x="365760" y="4005072"/>
+            <a:ext cx="3474720" cy="329184"/>
+          </a:xfrm>
+          <a:prstGeom prst="roundRect">
+            <a:avLst>
+              <a:gd name="adj" fmla="val 22222"/>
+            </a:avLst>
+          </a:prstGeom>
+          <a:solidFill>
+            <a:srgbClr val="FFFBEB"/>
+          </a:solidFill>
+          <a:ln w="12700">
+            <a:solidFill>
+              <a:srgbClr val="FFFBEB"/>
+            </a:solidFill>
+            <a:prstDash val="solid"/>
+          </a:ln>
+        </p:spPr>
+      </p:sp>
+      <p:sp>
+        <p:nvSpPr>
+          <p:cNvPr id="24" name="Text 22"/>
+          <p:cNvSpPr/>
+          <p:nvPr/>
+        </p:nvSpPr>
+        <p:spPr>
+          <a:xfrm>
+            <a:off x="365760" y="4005072"/>
+            <a:ext cx="3474720" cy="329184"/>
+          </a:xfrm>
+          <a:prstGeom prst="rect">
+            <a:avLst/>
+          </a:prstGeom>
+          <a:noFill/>
+          <a:ln/>
+        </p:spPr>
+        <p:txBody>
+          <a:bodyPr wrap="square" rtlCol="0" anchor="ctr"/>
+          <a:lstStyle/>
+          <a:p>
+            <a:pPr algn="ctr" indent="0" marL="0">
+              <a:buNone/>
+            </a:pPr>
+            <a:r>
+              <a:rPr lang="en-US" sz="1200" b="1" dirty="0">
+                <a:solidFill>
+                  <a:srgbClr val="D97706"/>
+                </a:solidFill>
+              </a:rPr>
+              <a:t>Firebase 환경변수 ✅</a:t>
+            </a:r>
+            <a:endParaRPr lang="en-US" sz="1200" dirty="0"/>
+          </a:p>
+        </p:txBody>
+      </p:sp>
+      <p:sp>
+        <p:nvSpPr>
+          <p:cNvPr id="25" name="Text 23"/>
+          <p:cNvSpPr/>
+          <p:nvPr/>
+        </p:nvSpPr>
+        <p:spPr>
+          <a:xfrm>
+            <a:off x="393192" y="4398264"/>
+            <a:ext cx="3419856" cy="694944"/>
+          </a:xfrm>
+          <a:prstGeom prst="rect">
+            <a:avLst/>
+          </a:prstGeom>
+          <a:noFill/>
+          <a:ln/>
+        </p:spPr>
+        <p:txBody>
+          <a:bodyPr wrap="square" rtlCol="0" anchor="ctr"/>
+          <a:lstStyle/>
+          <a:p>
+            <a:pPr indent="0" marL="0">
+              <a:buNone/>
+            </a:pPr>
+            <a:r>
+              <a:rPr lang="en-US" sz="1050" dirty="0">
+                <a:solidFill>
+                  <a:srgbClr val="6B7280"/>
+                </a:solidFill>
+              </a:rPr>
+              <a:t>API Key ~ App ID 완성</a:t>
+            </a:r>
+            <a:endParaRPr lang="en-US" sz="1050" dirty="0"/>
+          </a:p>
+          <a:p>
+            <a:pPr indent="0" marL="0">
+              <a:buNone/>
+            </a:pPr>
+            <a:r>
+              <a:rPr lang="en-US" sz="1050" dirty="0">
+                <a:solidFill>
+                  <a:srgbClr val="6B7280"/>
+                </a:solidFill>
+              </a:rPr>
+              <a:t>VAPID 키 완성</a:t>
+            </a:r>
+            <a:endParaRPr lang="en-US" sz="1050" dirty="0"/>
+          </a:p>
+          <a:p>
+            <a:pPr indent="0" marL="0">
+              <a:buNone/>
+            </a:pPr>
+            <a:r>
+              <a:rPr lang="en-US" sz="1050" dirty="0">
+                <a:solidFill>
+                  <a:srgbClr val="6B7280"/>
+                </a:solidFill>
+              </a:rPr>
+              <a:t>Admin SDK JSON 완성</a:t>
+            </a:r>
+            <a:endParaRPr lang="en-US" sz="1050" dirty="0"/>
+          </a:p>
+        </p:txBody>
+      </p:sp>
+      <p:sp>
+        <p:nvSpPr>
+          <p:cNvPr id="26" name="Shape 24"/>
+          <p:cNvSpPr/>
+          <p:nvPr/>
+        </p:nvSpPr>
+        <p:spPr>
+          <a:xfrm>
+            <a:off x="4133088" y="3886200"/>
+            <a:ext cx="3749040" cy="1280160"/>
+          </a:xfrm>
+          <a:prstGeom prst="roundRect">
+            <a:avLst>
+              <a:gd name="adj" fmla="val 9286"/>
+            </a:avLst>
+          </a:prstGeom>
+          <a:solidFill>
+            <a:srgbClr val="FFFFFF"/>
+          </a:solidFill>
+          <a:ln w="12700">
+            <a:solidFill>
+              <a:srgbClr val="E9D5FF"/>
+            </a:solidFill>
+            <a:prstDash val="solid"/>
+          </a:ln>
+        </p:spPr>
+      </p:sp>
+      <p:sp>
+        <p:nvSpPr>
+          <p:cNvPr id="27" name="Shape 25"/>
+          <p:cNvSpPr/>
+          <p:nvPr/>
+        </p:nvSpPr>
+        <p:spPr>
+          <a:xfrm>
+            <a:off x="4270248" y="4005072"/>
+            <a:ext cx="3474720" cy="329184"/>
+          </a:xfrm>
+          <a:prstGeom prst="roundRect">
+            <a:avLst>
+              <a:gd name="adj" fmla="val 22222"/>
+            </a:avLst>
+          </a:prstGeom>
+          <a:solidFill>
+            <a:srgbClr val="FFFBEB"/>
+          </a:solidFill>
+          <a:ln w="12700">
+            <a:solidFill>
+              <a:srgbClr val="FFFBEB"/>
+            </a:solidFill>
+            <a:prstDash val="solid"/>
+          </a:ln>
+        </p:spPr>
+      </p:sp>
+      <p:sp>
+        <p:nvSpPr>
+          <p:cNvPr id="28" name="Text 26"/>
+          <p:cNvSpPr/>
+          <p:nvPr/>
+        </p:nvSpPr>
+        <p:spPr>
+          <a:xfrm>
+            <a:off x="4270248" y="4005072"/>
+            <a:ext cx="3474720" cy="329184"/>
+          </a:xfrm>
+          <a:prstGeom prst="rect">
+            <a:avLst/>
+          </a:prstGeom>
+          <a:noFill/>
+          <a:ln/>
+        </p:spPr>
+        <p:txBody>
+          <a:bodyPr wrap="square" rtlCol="0" anchor="ctr"/>
+          <a:lstStyle/>
+          <a:p>
+            <a:pPr algn="ctr" indent="0" marL="0">
+              <a:buNone/>
+            </a:pPr>
+            <a:r>
+              <a:rPr lang="en-US" sz="1200" b="1" dirty="0">
+                <a:solidFill>
+                  <a:srgbClr val="D97706"/>
+                </a:solidFill>
+              </a:rPr>
+              <a:t>카카오 API 키 확인</a:t>
+            </a:r>
+            <a:endParaRPr lang="en-US" sz="1200" dirty="0"/>
+          </a:p>
+        </p:txBody>
+      </p:sp>
+      <p:sp>
+        <p:nvSpPr>
+          <p:cNvPr id="29" name="Text 27"/>
+          <p:cNvSpPr/>
+          <p:nvPr/>
+        </p:nvSpPr>
+        <p:spPr>
+          <a:xfrm>
+            <a:off x="4297680" y="4398264"/>
+            <a:ext cx="3419856" cy="694944"/>
+          </a:xfrm>
+          <a:prstGeom prst="rect">
+            <a:avLst/>
+          </a:prstGeom>
+          <a:noFill/>
+          <a:ln/>
+        </p:spPr>
+        <p:txBody>
+          <a:bodyPr wrap="square" rtlCol="0" anchor="ctr"/>
+          <a:lstStyle/>
+          <a:p>
+            <a:pPr indent="0" marL="0">
+              <a:buNone/>
+            </a:pPr>
+            <a:r>
+              <a:rPr lang="en-US" sz="1050" dirty="0">
+                <a:solidFill>
+                  <a:srgbClr val="6B7280"/>
+                </a:solidFill>
+              </a:rPr>
+              <a:t>앱 키 → JavaScript 키 재확인</a:t>
+            </a:r>
+            <a:endParaRPr lang="en-US" sz="1050" dirty="0"/>
+          </a:p>
+          <a:p>
+            <a:pPr indent="0" marL="0">
+              <a:buNone/>
+            </a:pPr>
+            <a:r>
+              <a:rPr lang="en-US" sz="1050" dirty="0">
+                <a:solidFill>
+                  <a:srgbClr val="6B7280"/>
+                </a:solidFill>
+              </a:rPr>
+              <a:t>NEXT_PUBLIC_KAKAO_MAP_KEY 검증</a:t>
+            </a:r>
+            <a:endParaRPr lang="en-US" sz="1050" dirty="0"/>
+          </a:p>
+          <a:p>
+            <a:pPr indent="0" marL="0">
+              <a:buNone/>
+            </a:pPr>
+            <a:r>
+              <a:rPr lang="en-US" sz="1050" dirty="0">
+                <a:solidFill>
+                  <a:srgbClr val="6B7280"/>
+                </a:solidFill>
+              </a:rPr>
+              <a:t>Kakao Map 지도 표시 테스트</a:t>
+            </a:r>
+            <a:endParaRPr lang="en-US" sz="1050" dirty="0"/>
+          </a:p>
+        </p:txBody>
+      </p:sp>
+      <p:sp>
+        <p:nvSpPr>
+          <p:cNvPr id="30" name="Shape 28"/>
+          <p:cNvSpPr/>
+          <p:nvPr/>
+        </p:nvSpPr>
+        <p:spPr>
+          <a:xfrm>
+            <a:off x="8037576" y="3886200"/>
+            <a:ext cx="3749040" cy="1280160"/>
+          </a:xfrm>
+          <a:prstGeom prst="roundRect">
+            <a:avLst>
+              <a:gd name="adj" fmla="val 9286"/>
+            </a:avLst>
+          </a:prstGeom>
+          <a:solidFill>
+            <a:srgbClr val="FFFFFF"/>
+          </a:solidFill>
+          <a:ln w="12700">
+            <a:solidFill>
+              <a:srgbClr val="E9D5FF"/>
+            </a:solidFill>
+            <a:prstDash val="solid"/>
+          </a:ln>
+        </p:spPr>
+      </p:sp>
+      <p:sp>
+        <p:nvSpPr>
+          <p:cNvPr id="31" name="Shape 29"/>
+          <p:cNvSpPr/>
+          <p:nvPr/>
+        </p:nvSpPr>
+        <p:spPr>
+          <a:xfrm>
+            <a:off x="8174736" y="4005072"/>
+            <a:ext cx="3474720" cy="329184"/>
+          </a:xfrm>
+          <a:prstGeom prst="roundRect">
+            <a:avLst>
+              <a:gd name="adj" fmla="val 22222"/>
+            </a:avLst>
+          </a:prstGeom>
+          <a:solidFill>
+            <a:srgbClr val="FFFBEB"/>
+          </a:solidFill>
+          <a:ln w="12700">
+            <a:solidFill>
+              <a:srgbClr val="FFFBEB"/>
+            </a:solidFill>
+            <a:prstDash val="solid"/>
+          </a:ln>
+        </p:spPr>
+      </p:sp>
+      <p:sp>
+        <p:nvSpPr>
+          <p:cNvPr id="32" name="Text 30"/>
+          <p:cNvSpPr/>
+          <p:nvPr/>
+        </p:nvSpPr>
+        <p:spPr>
+          <a:xfrm>
+            <a:off x="8174736" y="4005072"/>
+            <a:ext cx="3474720" cy="329184"/>
+          </a:xfrm>
+          <a:prstGeom prst="rect">
+            <a:avLst/>
+          </a:prstGeom>
+          <a:noFill/>
+          <a:ln/>
+        </p:spPr>
+        <p:txBody>
+          <a:bodyPr wrap="square" rtlCol="0" anchor="ctr"/>
+          <a:lstStyle/>
+          <a:p>
+            <a:pPr algn="ctr" indent="0" marL="0">
+              <a:buNone/>
+            </a:pPr>
+            <a:r>
+              <a:rPr lang="en-US" sz="1200" b="1" dirty="0">
+                <a:solidFill>
+                  <a:srgbClr val="D97706"/>
+                </a:solidFill>
+              </a:rPr>
+              <a:t>샘플 데이터 + 배포</a:t>
+            </a:r>
+            <a:endParaRPr lang="en-US" sz="1200" dirty="0"/>
+          </a:p>
+        </p:txBody>
+      </p:sp>
+      <p:sp>
+        <p:nvSpPr>
+          <p:cNvPr id="33" name="Text 31"/>
+          <p:cNvSpPr/>
+          <p:nvPr/>
+        </p:nvSpPr>
+        <p:spPr>
+          <a:xfrm>
+            <a:off x="8202168" y="4398264"/>
+            <a:ext cx="3419856" cy="694944"/>
+          </a:xfrm>
+          <a:prstGeom prst="rect">
+            <a:avLst/>
+          </a:prstGeom>
+          <a:noFill/>
+          <a:ln/>
+        </p:spPr>
+        <p:txBody>
+          <a:bodyPr wrap="square" rtlCol="0" anchor="ctr"/>
+          <a:lstStyle/>
+          <a:p>
+            <a:pPr indent="0" marL="0">
+              <a:buNone/>
+            </a:pPr>
+            <a:r>
+              <a:rPr lang="en-US" sz="1050" dirty="0">
+                <a:solidFill>
+                  <a:srgbClr val="6B7280"/>
+                </a:solidFill>
+              </a:rPr>
+              <a:t>실 가맹점 + 메뉴 데이터 추가</a:t>
+            </a:r>
+            <a:endParaRPr lang="en-US" sz="1050" dirty="0"/>
+          </a:p>
+          <a:p>
+            <a:pPr indent="0" marL="0">
+              <a:buNone/>
+            </a:pPr>
+            <a:r>
+              <a:rPr lang="en-US" sz="1050" dirty="0">
+                <a:solidFill>
+                  <a:srgbClr val="6B7280"/>
+                </a:solidFill>
+              </a:rPr>
+              <a:t>관리자 계정 role='admin' 설정</a:t>
+            </a:r>
+            <a:endParaRPr lang="en-US" sz="1050" dirty="0"/>
+          </a:p>
+          <a:p>
+            <a:pPr indent="0" marL="0">
+              <a:buNone/>
+            </a:pPr>
+            <a:r>
+              <a:rPr lang="en-US" sz="1050" dirty="0">
+                <a:solidFill>
+                  <a:srgbClr val="6B7280"/>
+                </a:solidFill>
+              </a:rPr>
+              <a:t>Vercel 프로덕션 배포 확인</a:t>
+            </a:r>
+            <a:endParaRPr lang="en-US" sz="1050" dirty="0"/>
+          </a:p>
+        </p:txBody>
+      </p:sp>
+      <p:sp>
+        <p:nvSpPr>
+          <p:cNvPr id="34" name="Shape 32"/>
+          <p:cNvSpPr/>
+          <p:nvPr/>
+        </p:nvSpPr>
+        <p:spPr>
+          <a:xfrm>
+            <a:off x="365760" y="5257800"/>
+            <a:ext cx="1325880" cy="384048"/>
+          </a:xfrm>
+          <a:prstGeom prst="roundRect">
+            <a:avLst>
+              <a:gd name="adj" fmla="val 23810"/>
+            </a:avLst>
+          </a:prstGeom>
+          <a:solidFill>
+            <a:srgbClr val="FFEDD5"/>
+          </a:solidFill>
+          <a:ln w="12700">
+            <a:solidFill>
+              <a:srgbClr val="EA580C"/>
+            </a:solidFill>
+            <a:prstDash val="solid"/>
+          </a:ln>
+        </p:spPr>
+      </p:sp>
+      <p:sp>
+        <p:nvSpPr>
+          <p:cNvPr id="35" name="Text 33"/>
+          <p:cNvSpPr/>
+          <p:nvPr/>
+        </p:nvSpPr>
+        <p:spPr>
+          <a:xfrm>
+            <a:off x="365760" y="5257800"/>
+            <a:ext cx="1325880" cy="384048"/>
+          </a:xfrm>
+          <a:prstGeom prst="rect">
+            <a:avLst/>
+          </a:prstGeom>
+          <a:noFill/>
+          <a:ln/>
+        </p:spPr>
+        <p:txBody>
+          <a:bodyPr wrap="square" rtlCol="0" anchor="ctr"/>
+          <a:lstStyle/>
+          <a:p>
+            <a:pPr algn="ctr" indent="0" marL="0">
+              <a:buNone/>
+            </a:pPr>
+            <a:r>
+              <a:rPr lang="en-US" sz="1100" b="1" dirty="0">
+                <a:solidFill>
+                  <a:srgbClr val="EA580C"/>
+                </a:solidFill>
+              </a:rPr>
+              <a:t>⏳ Phase 4</a:t>
+            </a:r>
+            <a:endParaRPr lang="en-US" sz="1100" dirty="0"/>
+          </a:p>
+        </p:txBody>
+      </p:sp>
+      <p:sp>
+        <p:nvSpPr>
+          <p:cNvPr id="36" name="Shape 34"/>
+          <p:cNvSpPr/>
+          <p:nvPr/>
+        </p:nvSpPr>
+        <p:spPr>
+          <a:xfrm>
+            <a:off x="228600" y="5715000"/>
+            <a:ext cx="3749040" cy="1280160"/>
+          </a:xfrm>
+          <a:prstGeom prst="roundRect">
+            <a:avLst>
+              <a:gd name="adj" fmla="val 9286"/>
+            </a:avLst>
+          </a:prstGeom>
+          <a:solidFill>
+            <a:srgbClr val="FFFFFF"/>
+          </a:solidFill>
+          <a:ln w="12700">
+            <a:solidFill>
+              <a:srgbClr val="E9D5FF"/>
+            </a:solidFill>
+            <a:prstDash val="solid"/>
+          </a:ln>
+        </p:spPr>
+      </p:sp>
+      <p:sp>
+        <p:nvSpPr>
+          <p:cNvPr id="37" name="Shape 35"/>
+          <p:cNvSpPr/>
+          <p:nvPr/>
+        </p:nvSpPr>
+        <p:spPr>
+          <a:xfrm>
+            <a:off x="365760" y="5833872"/>
+            <a:ext cx="3474720" cy="329184"/>
+          </a:xfrm>
+          <a:prstGeom prst="roundRect">
+            <a:avLst>
+              <a:gd name="adj" fmla="val 22222"/>
+            </a:avLst>
+          </a:prstGeom>
+          <a:solidFill>
+            <a:srgbClr val="FFEDD5"/>
+          </a:solidFill>
+          <a:ln w="12700">
+            <a:solidFill>
+              <a:srgbClr val="FFEDD5"/>
+            </a:solidFill>
+            <a:prstDash val="solid"/>
+          </a:ln>
+        </p:spPr>
+      </p:sp>
+      <p:sp>
+        <p:nvSpPr>
+          <p:cNvPr id="38" name="Text 36"/>
+          <p:cNvSpPr/>
+          <p:nvPr/>
+        </p:nvSpPr>
+        <p:spPr>
+          <a:xfrm>
+            <a:off x="365760" y="5833872"/>
+            <a:ext cx="3474720" cy="329184"/>
+          </a:xfrm>
+          <a:prstGeom prst="rect">
+            <a:avLst/>
+          </a:prstGeom>
+          <a:noFill/>
+          <a:ln/>
+        </p:spPr>
+        <p:txBody>
+          <a:bodyPr wrap="square" rtlCol="0" anchor="ctr"/>
+          <a:lstStyle/>
+          <a:p>
+            <a:pPr algn="ctr" indent="0" marL="0">
+              <a:buNone/>
+            </a:pPr>
+            <a:r>
+              <a:rPr lang="en-US" sz="1200" b="1" dirty="0">
+                <a:solidFill>
+                  <a:srgbClr val="EA580C"/>
+                </a:solidFill>
+              </a:rPr>
+              <a:t>Pi Network SDK 인증</a:t>
+            </a:r>
+            <a:endParaRPr lang="en-US" sz="1200" dirty="0"/>
+          </a:p>
+        </p:txBody>
+      </p:sp>
+      <p:sp>
+        <p:nvSpPr>
+          <p:cNvPr id="39" name="Text 37"/>
+          <p:cNvSpPr/>
+          <p:nvPr/>
+        </p:nvSpPr>
+        <p:spPr>
+          <a:xfrm>
+            <a:off x="393192" y="6227064"/>
+            <a:ext cx="3419856" cy="694944"/>
+          </a:xfrm>
+          <a:prstGeom prst="rect">
+            <a:avLst/>
+          </a:prstGeom>
+          <a:noFill/>
+          <a:ln/>
+        </p:spPr>
+        <p:txBody>
+          <a:bodyPr wrap="square" rtlCol="0" anchor="ctr"/>
+          <a:lstStyle/>
+          <a:p>
+            <a:pPr indent="0" marL="0">
+              <a:buNone/>
+            </a:pPr>
+            <a:r>
+              <a:rPr lang="en-US" sz="1050" dirty="0">
+                <a:solidFill>
+                  <a:srgbClr val="6B7280"/>
+                </a:solidFill>
+              </a:rPr>
+              <a:t>Pi SDK 연동 (Mainnet 개방 후)</a:t>
+            </a:r>
+            <a:endParaRPr lang="en-US" sz="1050" dirty="0"/>
+          </a:p>
+          <a:p>
+            <a:pPr indent="0" marL="0">
+              <a:buNone/>
+            </a:pPr>
+            <a:r>
+              <a:rPr lang="en-US" sz="1050" dirty="0">
+                <a:solidFill>
+                  <a:srgbClr val="6B7280"/>
+                </a:solidFill>
+              </a:rPr>
+              <a:t>pi_uid / pi_username 필드 활성화</a:t>
+            </a:r>
+            <a:endParaRPr lang="en-US" sz="1050" dirty="0"/>
+          </a:p>
+          <a:p>
+            <a:pPr indent="0" marL="0">
+              <a:buNone/>
+            </a:pPr>
+            <a:r>
+              <a:rPr lang="en-US" sz="1050" dirty="0">
+                <a:solidFill>
+                  <a:srgbClr val="6B7280"/>
+                </a:solidFill>
+              </a:rPr>
+              <a:t>Pi 기반 로그인 플로우</a:t>
+            </a:r>
+            <a:endParaRPr lang="en-US" sz="1050" dirty="0"/>
+          </a:p>
+        </p:txBody>
+      </p:sp>
+      <p:sp>
+        <p:nvSpPr>
+          <p:cNvPr id="40" name="Shape 38"/>
+          <p:cNvSpPr/>
+          <p:nvPr/>
+        </p:nvSpPr>
+        <p:spPr>
+          <a:xfrm>
+            <a:off x="4133088" y="5715000"/>
+            <a:ext cx="3749040" cy="1280160"/>
+          </a:xfrm>
+          <a:prstGeom prst="roundRect">
+            <a:avLst>
+              <a:gd name="adj" fmla="val 9286"/>
+            </a:avLst>
+          </a:prstGeom>
+          <a:solidFill>
+            <a:srgbClr val="FFFFFF"/>
+          </a:solidFill>
+          <a:ln w="12700">
+            <a:solidFill>
+              <a:srgbClr val="E9D5FF"/>
+            </a:solidFill>
+            <a:prstDash val="solid"/>
+          </a:ln>
+        </p:spPr>
+      </p:sp>
+      <p:sp>
+        <p:nvSpPr>
+          <p:cNvPr id="41" name="Shape 39"/>
+          <p:cNvSpPr/>
+          <p:nvPr/>
+        </p:nvSpPr>
+        <p:spPr>
+          <a:xfrm>
+            <a:off x="4270248" y="5833872"/>
+            <a:ext cx="3474720" cy="329184"/>
+          </a:xfrm>
+          <a:prstGeom prst="roundRect">
+            <a:avLst>
+              <a:gd name="adj" fmla="val 22222"/>
+            </a:avLst>
+          </a:prstGeom>
+          <a:solidFill>
+            <a:srgbClr val="FFEDD5"/>
+          </a:solidFill>
+          <a:ln w="12700">
+            <a:solidFill>
+              <a:srgbClr val="FFEDD5"/>
+            </a:solidFill>
+            <a:prstDash val="solid"/>
+          </a:ln>
+        </p:spPr>
+      </p:sp>
+      <p:sp>
+        <p:nvSpPr>
+          <p:cNvPr id="42" name="Text 40"/>
+          <p:cNvSpPr/>
+          <p:nvPr/>
+        </p:nvSpPr>
+        <p:spPr>
+          <a:xfrm>
+            <a:off x="4270248" y="5833872"/>
+            <a:ext cx="3474720" cy="329184"/>
+          </a:xfrm>
+          <a:prstGeom prst="rect">
+            <a:avLst/>
+          </a:prstGeom>
+          <a:noFill/>
+          <a:ln/>
+        </p:spPr>
+        <p:txBody>
+          <a:bodyPr wrap="square" rtlCol="0" anchor="ctr"/>
+          <a:lstStyle/>
+          <a:p>
+            <a:pPr algn="ctr" indent="0" marL="0">
+              <a:buNone/>
+            </a:pPr>
+            <a:r>
+              <a:rPr lang="en-US" sz="1200" b="1" dirty="0">
+                <a:solidFill>
+                  <a:srgbClr val="EA580C"/>
+                </a:solidFill>
+              </a:rPr>
+              <a:t>Pi 코인 결제 연동</a:t>
+            </a:r>
+            <a:endParaRPr lang="en-US" sz="1200" dirty="0"/>
+          </a:p>
+        </p:txBody>
+      </p:sp>
+      <p:sp>
+        <p:nvSpPr>
+          <p:cNvPr id="43" name="Text 41"/>
+          <p:cNvSpPr/>
+          <p:nvPr/>
+        </p:nvSpPr>
+        <p:spPr>
+          <a:xfrm>
+            <a:off x="4297680" y="6227064"/>
+            <a:ext cx="3419856" cy="694944"/>
+          </a:xfrm>
+          <a:prstGeom prst="rect">
+            <a:avLst/>
+          </a:prstGeom>
+          <a:noFill/>
+          <a:ln/>
+        </p:spPr>
+        <p:txBody>
+          <a:bodyPr wrap="square" rtlCol="0" anchor="ctr"/>
+          <a:lstStyle/>
+          <a:p>
+            <a:pPr indent="0" marL="0">
+              <a:buNone/>
+            </a:pPr>
+            <a:r>
+              <a:rPr lang="en-US" sz="1050" dirty="0">
+                <a:solidFill>
+                  <a:srgbClr val="6B7280"/>
+                </a:solidFill>
+              </a:rPr>
+              <a:t>Pi 결제 API 연동</a:t>
+            </a:r>
+            <a:endParaRPr lang="en-US" sz="1050" dirty="0"/>
+          </a:p>
+          <a:p>
+            <a:pPr indent="0" marL="0">
+              <a:buNone/>
+            </a:pPr>
+            <a:r>
+              <a:rPr lang="en-US" sz="1050" dirty="0">
+                <a:solidFill>
+                  <a:srgbClr val="6B7280"/>
+                </a:solidFill>
+              </a:rPr>
+              <a:t>PICK ↔ Pi 토큰 전환</a:t>
+            </a:r>
+            <a:endParaRPr lang="en-US" sz="1050" dirty="0"/>
+          </a:p>
+          <a:p>
+            <a:pPr indent="0" marL="0">
+              <a:buNone/>
+            </a:pPr>
+            <a:r>
+              <a:rPr lang="en-US" sz="1050" dirty="0">
+                <a:solidFill>
+                  <a:srgbClr val="6B7280"/>
+                </a:solidFill>
+              </a:rPr>
+              <a:t>Pi 기반 정산 시스템</a:t>
+            </a:r>
+            <a:endParaRPr lang="en-US" sz="1050" dirty="0"/>
+          </a:p>
+        </p:txBody>
+      </p:sp>
+      <p:sp>
+        <p:nvSpPr>
+          <p:cNvPr id="44" name="Shape 42"/>
+          <p:cNvSpPr/>
+          <p:nvPr/>
+        </p:nvSpPr>
+        <p:spPr>
+          <a:xfrm>
+            <a:off x="8037576" y="5715000"/>
+            <a:ext cx="3749040" cy="1280160"/>
+          </a:xfrm>
+          <a:prstGeom prst="roundRect">
+            <a:avLst>
+              <a:gd name="adj" fmla="val 9286"/>
+            </a:avLst>
+          </a:prstGeom>
+          <a:solidFill>
+            <a:srgbClr val="FFFFFF"/>
+          </a:solidFill>
+          <a:ln w="12700">
+            <a:solidFill>
+              <a:srgbClr val="E9D5FF"/>
+            </a:solidFill>
+            <a:prstDash val="solid"/>
+          </a:ln>
+        </p:spPr>
+      </p:sp>
+      <p:sp>
+        <p:nvSpPr>
+          <p:cNvPr id="45" name="Shape 43"/>
+          <p:cNvSpPr/>
+          <p:nvPr/>
+        </p:nvSpPr>
+        <p:spPr>
+          <a:xfrm>
+            <a:off x="8174736" y="5833872"/>
+            <a:ext cx="3474720" cy="329184"/>
+          </a:xfrm>
+          <a:prstGeom prst="roundRect">
+            <a:avLst>
+              <a:gd name="adj" fmla="val 22222"/>
+            </a:avLst>
+          </a:prstGeom>
+          <a:solidFill>
+            <a:srgbClr val="FFEDD5"/>
+          </a:solidFill>
+          <a:ln w="12700">
+            <a:solidFill>
+              <a:srgbClr val="FFEDD5"/>
+            </a:solidFill>
+            <a:prstDash val="solid"/>
+          </a:ln>
+        </p:spPr>
+      </p:sp>
+      <p:sp>
+        <p:nvSpPr>
+          <p:cNvPr id="46" name="Text 44"/>
+          <p:cNvSpPr/>
+          <p:nvPr/>
+        </p:nvSpPr>
+        <p:spPr>
+          <a:xfrm>
+            <a:off x="8174736" y="5833872"/>
+            <a:ext cx="3474720" cy="329184"/>
+          </a:xfrm>
+          <a:prstGeom prst="rect">
+            <a:avLst/>
+          </a:prstGeom>
+          <a:noFill/>
+          <a:ln/>
+        </p:spPr>
+        <p:txBody>
+          <a:bodyPr wrap="square" rtlCol="0" anchor="ctr"/>
+          <a:lstStyle/>
+          <a:p>
+            <a:pPr algn="ctr" indent="0" marL="0">
+              <a:buNone/>
+            </a:pPr>
+            <a:r>
+              <a:rPr lang="en-US" sz="1200" b="1" dirty="0">
+                <a:solidFill>
+                  <a:srgbClr val="EA580C"/>
+                </a:solidFill>
+              </a:rPr>
+              <a:t>Pi 생태계 확장</a:t>
+            </a:r>
+            <a:endParaRPr lang="en-US" sz="1200" dirty="0"/>
+          </a:p>
+        </p:txBody>
+      </p:sp>
+      <p:sp>
+        <p:nvSpPr>
+          <p:cNvPr id="47" name="Text 45"/>
+          <p:cNvSpPr/>
+          <p:nvPr/>
+        </p:nvSpPr>
+        <p:spPr>
+          <a:xfrm>
+            <a:off x="8202168" y="6227064"/>
+            <a:ext cx="3419856" cy="694944"/>
+          </a:xfrm>
+          <a:prstGeom prst="rect">
+            <a:avLst/>
+          </a:prstGeom>
+          <a:noFill/>
+          <a:ln/>
+        </p:spPr>
+        <p:txBody>
+          <a:bodyPr wrap="square" rtlCol="0" anchor="ctr"/>
+          <a:lstStyle/>
+          <a:p>
+            <a:pPr indent="0" marL="0">
+              <a:buNone/>
+            </a:pPr>
+            <a:r>
+              <a:rPr lang="en-US" sz="1050" dirty="0">
+                <a:solidFill>
+                  <a:srgbClr val="6B7280"/>
+                </a:solidFill>
+              </a:rPr>
+              <a:t>Pi 마이닝 연동 혜택</a:t>
+            </a:r>
+            <a:endParaRPr lang="en-US" sz="1050" dirty="0"/>
+          </a:p>
+          <a:p>
+            <a:pPr indent="0" marL="0">
+              <a:buNone/>
+            </a:pPr>
+            <a:r>
+              <a:rPr lang="en-US" sz="1050" dirty="0">
+                <a:solidFill>
+                  <a:srgbClr val="6B7280"/>
+                </a:solidFill>
+              </a:rPr>
+              <a:t>Pi 홀더 전용 할인 쿠폰</a:t>
+            </a:r>
+            <a:endParaRPr lang="en-US" sz="1050" dirty="0"/>
+          </a:p>
+          <a:p>
+            <a:pPr indent="0" marL="0">
+              <a:buNone/>
+            </a:pPr>
+            <a:r>
+              <a:rPr lang="en-US" sz="1050" dirty="0">
+                <a:solidFill>
+                  <a:srgbClr val="6B7280"/>
+                </a:solidFill>
+              </a:rPr>
+              <a:t>Pi Network 커뮤니티 마케팅</a:t>
+            </a:r>
+            <a:endParaRPr lang="en-US" sz="1050" dirty="0"/>
+          </a:p>
+        </p:txBody>
+      </p:sp>
+    </p:spTree>
+  </p:cSld>
+  <p:clrMapOvr>
+    <a:masterClrMapping/>
+  </p:clrMapOvr>
+</p:sld>
+</file>
+
+<file path=ppt/slides/slide17.xml><?xml version="1.0" encoding="utf-8"?>
+<p:sld xmlns:a="http://schemas.openxmlformats.org/drawingml/2006/main" xmlns:r="http://schemas.openxmlformats.org/officeDocument/2006/relationships" xmlns:p="http://schemas.openxmlformats.org/presentationml/2006/main">
+  <p:cSld name="Slide 17">
+    <p:bg>
+      <p:bgPr>
+        <a:solidFill>
+          <a:srgbClr val="FAF5FF"/>
+        </a:solidFill>
+      </p:bgPr>
+    </p:bg>
+    <p:spTree>
+      <p:nvGrpSpPr>
+        <p:cNvPr id="1" name=""/>
+        <p:cNvGrpSpPr/>
+        <p:nvPr/>
+      </p:nvGrpSpPr>
+      <p:grpSpPr>
+        <a:xfrm>
+          <a:off x="0" y="0"/>
+          <a:ext cx="0" cy="0"/>
+          <a:chOff x="0" y="0"/>
+          <a:chExt cx="0" cy="0"/>
+        </a:xfrm>
+      </p:grpSpPr>
+      <p:sp>
+        <p:nvSpPr>
+          <p:cNvPr id="2" name="Text 0"/>
+          <p:cNvSpPr/>
+          <p:nvPr/>
+        </p:nvSpPr>
+        <p:spPr>
+          <a:xfrm>
+            <a:off x="365760" y="228600"/>
+            <a:ext cx="12070080" cy="594360"/>
+          </a:xfrm>
+          <a:prstGeom prst="rect">
+            <a:avLst/>
+          </a:prstGeom>
+          <a:noFill/>
+          <a:ln/>
+        </p:spPr>
+        <p:txBody>
+          <a:bodyPr wrap="square" rtlCol="0" anchor="ctr"/>
+          <a:lstStyle/>
+          <a:p>
+            <a:pPr indent="0" marL="0">
+              <a:buNone/>
+            </a:pPr>
+            <a:r>
+              <a:rPr lang="en-US" sz="2600" b="1" dirty="0">
+                <a:solidFill>
+                  <a:srgbClr val="4C1D95"/>
+                </a:solidFill>
+              </a:rPr>
               <a:t>🗺️  전체 개발 로드맵</a:t>
             </a:r>
             <a:endParaRPr lang="en-US" sz="2600" dirty="0"/>
@@ -13306,7 +14811,7 @@
                   <a:srgbClr val="4C1D95"/>
                 </a:solidFill>
               </a:rPr>
-              <a:t>📊  PICK PICK 진행 현황 (4/17 최신)</a:t>
+              <a:t>📊  PICK PICK 진행 현황 (4/20 최신)</a:t>
             </a:r>
             <a:endParaRPr lang="en-US" sz="2600" dirty="0"/>
           </a:p>
@@ -16023,22 +17528,81 @@
       </p:sp>
       <p:sp>
         <p:nvSpPr>
-          <p:cNvPr id="92" name="Shape 90"/>
-          <p:cNvSpPr/>
-          <p:nvPr/>
-        </p:nvSpPr>
-        <p:spPr>
-          <a:xfrm>
-            <a:off x="10332720" y="1188720"/>
-            <a:ext cx="2103120" cy="1188720"/>
-          </a:xfrm>
-          <a:prstGeom prst="roundRect">
-            <a:avLst>
-              <a:gd name="adj" fmla="val 11538"/>
-            </a:avLst>
-          </a:prstGeom>
-          <a:solidFill>
-            <a:srgbClr val="DCFCE7"/>
+          <p:cNvPr id="92" name="Text 90"/>
+          <p:cNvSpPr/>
+          <p:nvPr/>
+        </p:nvSpPr>
+        <p:spPr>
+          <a:xfrm>
+            <a:off x="457200" y="7388352"/>
+            <a:ext cx="3840480" cy="237744"/>
+          </a:xfrm>
+          <a:prstGeom prst="rect">
+            <a:avLst/>
+          </a:prstGeom>
+          <a:noFill/>
+          <a:ln/>
+        </p:spPr>
+        <p:txBody>
+          <a:bodyPr wrap="square" rtlCol="0" anchor="ctr"/>
+          <a:lstStyle/>
+          <a:p>
+            <a:pPr indent="0" marL="0">
+              <a:buNone/>
+            </a:pPr>
+            <a:r>
+              <a:rPr lang="en-US" sz="1000" dirty="0">
+                <a:solidFill>
+                  <a:srgbClr val="1F1235"/>
+                </a:solidFill>
+              </a:rPr>
+              <a:t>주문 pending 흐름 · 라이더 heartbeat · Pi Network 플랜</a:t>
+            </a:r>
+            <a:endParaRPr lang="en-US" sz="1000" dirty="0"/>
+          </a:p>
+        </p:txBody>
+      </p:sp>
+      <p:sp>
+        <p:nvSpPr>
+          <p:cNvPr id="93" name="Shape 91"/>
+          <p:cNvSpPr/>
+          <p:nvPr/>
+        </p:nvSpPr>
+        <p:spPr>
+          <a:xfrm>
+            <a:off x="4434840" y="7443216"/>
+            <a:ext cx="5029200" cy="118872"/>
+          </a:xfrm>
+          <a:prstGeom prst="rect">
+            <a:avLst/>
+          </a:prstGeom>
+          <a:solidFill>
+            <a:srgbClr val="E5E7EB"/>
+          </a:solidFill>
+          <a:ln w="12700">
+            <a:solidFill>
+              <a:srgbClr val="E5E7EB"/>
+            </a:solidFill>
+            <a:prstDash val="solid"/>
+          </a:ln>
+        </p:spPr>
+      </p:sp>
+      <p:sp>
+        <p:nvSpPr>
+          <p:cNvPr id="94" name="Shape 92"/>
+          <p:cNvSpPr/>
+          <p:nvPr/>
+        </p:nvSpPr>
+        <p:spPr>
+          <a:xfrm>
+            <a:off x="4434840" y="7443216"/>
+            <a:ext cx="5029200" cy="118872"/>
+          </a:xfrm>
+          <a:prstGeom prst="rect">
+            <a:avLst/>
+          </a:prstGeom>
+          <a:solidFill>
+            <a:srgbClr val="16A34A"/>
           </a:solidFill>
           <a:ln w="12700">
             <a:solidFill>
@@ -16050,7 +17614,70 @@
       </p:sp>
       <p:sp>
         <p:nvSpPr>
-          <p:cNvPr id="93" name="Text 91"/>
+          <p:cNvPr id="95" name="Text 93"/>
+          <p:cNvSpPr/>
+          <p:nvPr/>
+        </p:nvSpPr>
+        <p:spPr>
+          <a:xfrm>
+            <a:off x="9601200" y="7388352"/>
+            <a:ext cx="640080" cy="237744"/>
+          </a:xfrm>
+          <a:prstGeom prst="rect">
+            <a:avLst/>
+          </a:prstGeom>
+          <a:noFill/>
+          <a:ln/>
+        </p:spPr>
+        <p:txBody>
+          <a:bodyPr wrap="square" rtlCol="0" anchor="ctr"/>
+          <a:lstStyle/>
+          <a:p>
+            <a:pPr algn="r" indent="0" marL="0">
+              <a:buNone/>
+            </a:pPr>
+            <a:r>
+              <a:rPr lang="en-US" sz="1000" b="1" dirty="0">
+                <a:solidFill>
+                  <a:srgbClr val="16A34A"/>
+                </a:solidFill>
+              </a:rPr>
+              <a:t>100%</a:t>
+            </a:r>
+            <a:endParaRPr lang="en-US" sz="1000" dirty="0"/>
+          </a:p>
+        </p:txBody>
+      </p:sp>
+      <p:sp>
+        <p:nvSpPr>
+          <p:cNvPr id="96" name="Shape 94"/>
+          <p:cNvSpPr/>
+          <p:nvPr/>
+        </p:nvSpPr>
+        <p:spPr>
+          <a:xfrm>
+            <a:off x="10332720" y="1188720"/>
+            <a:ext cx="2103120" cy="1188720"/>
+          </a:xfrm>
+          <a:prstGeom prst="roundRect">
+            <a:avLst>
+              <a:gd name="adj" fmla="val 11538"/>
+            </a:avLst>
+          </a:prstGeom>
+          <a:solidFill>
+            <a:srgbClr val="DCFCE7"/>
+          </a:solidFill>
+          <a:ln w="12700">
+            <a:solidFill>
+              <a:srgbClr val="16A34A"/>
+            </a:solidFill>
+            <a:prstDash val="solid"/>
+          </a:ln>
+        </p:spPr>
+      </p:sp>
+      <p:sp>
+        <p:nvSpPr>
+          <p:cNvPr id="97" name="Text 95"/>
           <p:cNvSpPr/>
           <p:nvPr/>
         </p:nvSpPr>
@@ -16086,7 +17713,7 @@
       </p:sp>
       <p:sp>
         <p:nvSpPr>
-          <p:cNvPr id="94" name="Text 92"/>
+          <p:cNvPr id="98" name="Text 96"/>
           <p:cNvSpPr/>
           <p:nvPr/>
         </p:nvSpPr>
@@ -16114,7 +17741,7 @@
                   <a:srgbClr val="16A34A"/>
                 </a:solidFill>
               </a:rPr>
-              <a:t>65개+</a:t>
+              <a:t>70개+</a:t>
             </a:r>
             <a:endParaRPr lang="en-US" sz="1800" dirty="0"/>
           </a:p>
@@ -16122,7 +17749,7 @@
       </p:sp>
       <p:sp>
         <p:nvSpPr>
-          <p:cNvPr id="95" name="Text 93"/>
+          <p:cNvPr id="99" name="Text 97"/>
           <p:cNvSpPr/>
           <p:nvPr/>
         </p:nvSpPr>
@@ -16158,7 +17785,7 @@
       </p:sp>
       <p:sp>
         <p:nvSpPr>
-          <p:cNvPr id="96" name="Shape 94"/>
+          <p:cNvPr id="100" name="Shape 98"/>
           <p:cNvSpPr/>
           <p:nvPr/>
         </p:nvSpPr>
@@ -16185,7 +17812,7 @@
       </p:sp>
       <p:sp>
         <p:nvSpPr>
-          <p:cNvPr id="97" name="Text 95"/>
+          <p:cNvPr id="101" name="Text 99"/>
           <p:cNvSpPr/>
           <p:nvPr/>
         </p:nvSpPr>
@@ -16221,7 +17848,7 @@
       </p:sp>
       <p:sp>
         <p:nvSpPr>
-          <p:cNvPr id="98" name="Text 96"/>
+          <p:cNvPr id="102" name="Text 100"/>
           <p:cNvSpPr/>
           <p:nvPr/>
         </p:nvSpPr>
@@ -16257,7 +17884,7 @@
       </p:sp>
       <p:sp>
         <p:nvSpPr>
-          <p:cNvPr id="99" name="Text 97"/>
+          <p:cNvPr id="103" name="Text 101"/>
           <p:cNvSpPr/>
           <p:nvPr/>
         </p:nvSpPr>
@@ -16293,7 +17920,7 @@
       </p:sp>
       <p:sp>
         <p:nvSpPr>
-          <p:cNvPr id="100" name="Shape 98"/>
+          <p:cNvPr id="104" name="Shape 102"/>
           <p:cNvSpPr/>
           <p:nvPr/>
         </p:nvSpPr>
@@ -16320,7 +17947,7 @@
       </p:sp>
       <p:sp>
         <p:nvSpPr>
-          <p:cNvPr id="101" name="Text 99"/>
+          <p:cNvPr id="105" name="Text 103"/>
           <p:cNvSpPr/>
           <p:nvPr/>
         </p:nvSpPr>
@@ -16356,7 +17983,7 @@
       </p:sp>
       <p:sp>
         <p:nvSpPr>
-          <p:cNvPr id="102" name="Text 100"/>
+          <p:cNvPr id="106" name="Text 104"/>
           <p:cNvSpPr/>
           <p:nvPr/>
         </p:nvSpPr>
@@ -16392,7 +18019,7 @@
       </p:sp>
       <p:sp>
         <p:nvSpPr>
-          <p:cNvPr id="103" name="Text 101"/>
+          <p:cNvPr id="107" name="Text 105"/>
           <p:cNvSpPr/>
           <p:nvPr/>
         </p:nvSpPr>
